--- a/.preview/pptx-claro/deck.pptx
+++ b/.preview/pptx-claro/deck.pptx
@@ -2,27 +2,27 @@
 <file path=ppt/presentation.xml><?xml version="1.0" encoding="utf-8"?>
 <p:presentation xmlns:p="http://schemas.openxmlformats.org/presentationml/2006/main">
   <p:sldMasterIdLst>
-    <p:sldMasterId xmlns:r="http://schemas.openxmlformats.org/officeDocument/2006/relationships" id="2147483648" r:id="Rf20c9a183ef24179"/>
+    <p:sldMasterId xmlns:r="http://schemas.openxmlformats.org/officeDocument/2006/relationships" id="2147483648" r:id="R7193bbff9898476e"/>
   </p:sldMasterIdLst>
   <p:notesMasterIdLst>
-    <p:notesMasterId xmlns:r="http://schemas.openxmlformats.org/officeDocument/2006/relationships" r:id="R4e9d6af1f2be4f8e"/>
+    <p:notesMasterId xmlns:r="http://schemas.openxmlformats.org/officeDocument/2006/relationships" r:id="R9afcfb2edaea4a44"/>
   </p:notesMasterIdLst>
   <p:sldIdLst>
-    <p:sldId xmlns:r="http://schemas.openxmlformats.org/officeDocument/2006/relationships" id="256" r:id="Rda02093fd3ce4d86"/>
-    <p:sldId xmlns:r="http://schemas.openxmlformats.org/officeDocument/2006/relationships" id="257" r:id="Rc517bfb592734260"/>
-    <p:sldId xmlns:r="http://schemas.openxmlformats.org/officeDocument/2006/relationships" id="258" r:id="Rd3401158c1024187"/>
-    <p:sldId xmlns:r="http://schemas.openxmlformats.org/officeDocument/2006/relationships" id="259" r:id="R708310c17b314374"/>
-    <p:sldId xmlns:r="http://schemas.openxmlformats.org/officeDocument/2006/relationships" id="260" r:id="Rb37b4a703024482e"/>
-    <p:sldId xmlns:r="http://schemas.openxmlformats.org/officeDocument/2006/relationships" id="261" r:id="R5828b7cc55a74a6b"/>
-    <p:sldId xmlns:r="http://schemas.openxmlformats.org/officeDocument/2006/relationships" id="262" r:id="Rb53e6d0d81234027"/>
-    <p:sldId xmlns:r="http://schemas.openxmlformats.org/officeDocument/2006/relationships" id="263" r:id="R6a0af0e5dc2d4f1d"/>
-    <p:sldId xmlns:r="http://schemas.openxmlformats.org/officeDocument/2006/relationships" id="264" r:id="R565f944d0fbc4d43"/>
-    <p:sldId xmlns:r="http://schemas.openxmlformats.org/officeDocument/2006/relationships" id="265" r:id="R3b891bf5139c4ce0"/>
-    <p:sldId xmlns:r="http://schemas.openxmlformats.org/officeDocument/2006/relationships" id="266" r:id="R724a81d9e01e4e93"/>
-    <p:sldId xmlns:r="http://schemas.openxmlformats.org/officeDocument/2006/relationships" id="267" r:id="R3c5aca5491974813"/>
-    <p:sldId xmlns:r="http://schemas.openxmlformats.org/officeDocument/2006/relationships" id="268" r:id="R66ba943c256c4e4a"/>
-    <p:sldId xmlns:r="http://schemas.openxmlformats.org/officeDocument/2006/relationships" id="269" r:id="R62044973393149fd"/>
-    <p:sldId xmlns:r="http://schemas.openxmlformats.org/officeDocument/2006/relationships" id="270" r:id="Rdfc505847c9a49e0"/>
+    <p:sldId xmlns:r="http://schemas.openxmlformats.org/officeDocument/2006/relationships" id="256" r:id="R803b9aac42cc4c3c"/>
+    <p:sldId xmlns:r="http://schemas.openxmlformats.org/officeDocument/2006/relationships" id="257" r:id="Ra135a8c19efa4e68"/>
+    <p:sldId xmlns:r="http://schemas.openxmlformats.org/officeDocument/2006/relationships" id="258" r:id="R7c1944c19e694126"/>
+    <p:sldId xmlns:r="http://schemas.openxmlformats.org/officeDocument/2006/relationships" id="259" r:id="R916f9b280d23480f"/>
+    <p:sldId xmlns:r="http://schemas.openxmlformats.org/officeDocument/2006/relationships" id="260" r:id="R716ee146b41049dc"/>
+    <p:sldId xmlns:r="http://schemas.openxmlformats.org/officeDocument/2006/relationships" id="261" r:id="Rf6e6eb5d97b2430f"/>
+    <p:sldId xmlns:r="http://schemas.openxmlformats.org/officeDocument/2006/relationships" id="262" r:id="Rf3fed068d11d4522"/>
+    <p:sldId xmlns:r="http://schemas.openxmlformats.org/officeDocument/2006/relationships" id="263" r:id="R274ad4c2b04a493b"/>
+    <p:sldId xmlns:r="http://schemas.openxmlformats.org/officeDocument/2006/relationships" id="264" r:id="R96d00674c17745fd"/>
+    <p:sldId xmlns:r="http://schemas.openxmlformats.org/officeDocument/2006/relationships" id="265" r:id="Rd9cf2a36d1e9454a"/>
+    <p:sldId xmlns:r="http://schemas.openxmlformats.org/officeDocument/2006/relationships" id="266" r:id="R95547962c316446d"/>
+    <p:sldId xmlns:r="http://schemas.openxmlformats.org/officeDocument/2006/relationships" id="267" r:id="R1f6d384b26ef4e34"/>
+    <p:sldId xmlns:r="http://schemas.openxmlformats.org/officeDocument/2006/relationships" id="268" r:id="R7be158288bf246bf"/>
+    <p:sldId xmlns:r="http://schemas.openxmlformats.org/officeDocument/2006/relationships" id="269" r:id="Rebf4712944d84128"/>
+    <p:sldId xmlns:r="http://schemas.openxmlformats.org/officeDocument/2006/relationships" id="270" r:id="R4cc2a930115f4548"/>
   </p:sldIdLst>
   <p:sldSz cx="12192000" cy="6858000"/>
   <p:notesSz cx="6858000" cy="9144000"/>
@@ -1879,7 +1879,7 @@
   </p:cSld>
   <p:clrMap bg1="lt1" tx1="dk1" bg2="lt2" tx2="dk2" accent1="accent1" accent2="accent2" accent3="accent3" accent4="accent4" accent5="accent5" accent6="accent6" hlink="hlink" folHlink="folHlink"/>
   <p:sldLayoutIdLst>
-    <p:sldLayoutId xmlns:r="http://schemas.openxmlformats.org/officeDocument/2006/relationships" id="2147483649" r:id="R3788b82bd9814052"/>
+    <p:sldLayoutId xmlns:r="http://schemas.openxmlformats.org/officeDocument/2006/relationships" id="2147483649" r:id="R3a02715600794a7c"/>
   </p:sldLayoutIdLst>
   <p:txStyles>
     <p:titleStyle>
@@ -2430,7 +2430,7 @@
           <p:cNvPr id="17" name="">
             <a:extLst xmlns:a="http://schemas.openxmlformats.org/drawingml/2006/main">
               <a:ext uri="{FF2B5EF4-FFF2-40B4-BE49-F238E27FC236}">
-                <a16:creationId xmlns:a16="http://schemas.microsoft.com/office/drawing/2014/main" id="{02A11889-7CA1-492A-A180-1F3FCE746775}"/>
+                <a16:creationId xmlns:a16="http://schemas.microsoft.com/office/drawing/2014/main" id="{0CC44998-242C-499C-97F8-69E8FE701DD5}"/>
               </a:ext>
             </a:extLst>
           </p:cNvPr>
@@ -2463,7 +2463,7 @@
           <p:cNvPr id="2" name="">
             <a:extLst xmlns:a="http://schemas.openxmlformats.org/drawingml/2006/main">
               <a:ext uri="{FF2B5EF4-FFF2-40B4-BE49-F238E27FC236}">
-                <a16:creationId xmlns:a16="http://schemas.microsoft.com/office/drawing/2014/main" id="{E0E04F87-C832-4EE1-B1D3-57BE50B6E360}"/>
+                <a16:creationId xmlns:a16="http://schemas.microsoft.com/office/drawing/2014/main" id="{D44414BA-3999-4FA3-92B1-D82DB1AAEA7E}"/>
               </a:ext>
             </a:extLst>
           </p:cNvPr>
@@ -2494,7 +2494,7 @@
           <p:cNvPr id="3" name="">
             <a:extLst xmlns:a="http://schemas.openxmlformats.org/drawingml/2006/main">
               <a:ext uri="{FF2B5EF4-FFF2-40B4-BE49-F238E27FC236}">
-                <a16:creationId xmlns:a16="http://schemas.microsoft.com/office/drawing/2014/main" id="{3E109BF4-5D47-4BBE-ADD5-2BDE9C9D0AC5}"/>
+                <a16:creationId xmlns:a16="http://schemas.microsoft.com/office/drawing/2014/main" id="{45BE5842-13B7-4B76-9E74-18CA266CF7EA}"/>
               </a:ext>
             </a:extLst>
           </p:cNvPr>
@@ -2529,7 +2529,7 @@
           <p:nvPr/>
         </p:nvPicPr>
         <p:blipFill>
-          <a:blip xmlns:r="http://schemas.openxmlformats.org/officeDocument/2006/relationships" xmlns:a="http://schemas.openxmlformats.org/drawingml/2006/main" r:embed="R6c6e67112d3e46f2"/>
+          <a:blip xmlns:r="http://schemas.openxmlformats.org/officeDocument/2006/relationships" xmlns:a="http://schemas.openxmlformats.org/drawingml/2006/main" r:embed="R3a8085f2c1ec48a9"/>
           <a:stretch xmlns:a="http://schemas.openxmlformats.org/drawingml/2006/main"/>
         </p:blipFill>
         <p:spPr>
@@ -2547,7 +2547,7 @@
           <p:cNvPr id="5" name="">
             <a:extLst xmlns:a="http://schemas.openxmlformats.org/drawingml/2006/main">
               <a:ext uri="{FF2B5EF4-FFF2-40B4-BE49-F238E27FC236}">
-                <a16:creationId xmlns:a16="http://schemas.microsoft.com/office/drawing/2014/main" id="{C507FF6D-0974-4540-BC98-29520C07E4CC}"/>
+                <a16:creationId xmlns:a16="http://schemas.microsoft.com/office/drawing/2014/main" id="{C9AD7072-101A-4536-B16B-6553F1DEC6D9}"/>
               </a:ext>
             </a:extLst>
           </p:cNvPr>
@@ -2599,7 +2599,7 @@
           <p:cNvPr id="6" name="">
             <a:extLst xmlns:a="http://schemas.openxmlformats.org/drawingml/2006/main">
               <a:ext uri="{FF2B5EF4-FFF2-40B4-BE49-F238E27FC236}">
-                <a16:creationId xmlns:a16="http://schemas.microsoft.com/office/drawing/2014/main" id="{DCE201A8-00A0-4C0B-9963-50A7E6DC62D3}"/>
+                <a16:creationId xmlns:a16="http://schemas.microsoft.com/office/drawing/2014/main" id="{1DA9FC12-09C8-4786-ADFE-A903FDD3026A}"/>
               </a:ext>
             </a:extLst>
           </p:cNvPr>
@@ -2655,7 +2655,7 @@
           <p:nvPr/>
         </p:nvPicPr>
         <p:blipFill>
-          <a:blip xmlns:r="http://schemas.openxmlformats.org/officeDocument/2006/relationships" xmlns:a="http://schemas.openxmlformats.org/drawingml/2006/main" r:embed="R37ce208ba1c146f2"/>
+          <a:blip xmlns:r="http://schemas.openxmlformats.org/officeDocument/2006/relationships" xmlns:a="http://schemas.openxmlformats.org/drawingml/2006/main" r:embed="Rfcf2a1aedf6d4e2a"/>
           <a:stretch xmlns:a="http://schemas.openxmlformats.org/drawingml/2006/main"/>
         </p:blipFill>
         <p:spPr>
@@ -2673,7 +2673,7 @@
           <p:cNvPr id="8" name="">
             <a:extLst xmlns:a="http://schemas.openxmlformats.org/drawingml/2006/main">
               <a:ext uri="{FF2B5EF4-FFF2-40B4-BE49-F238E27FC236}">
-                <a16:creationId xmlns:a16="http://schemas.microsoft.com/office/drawing/2014/main" id="{0ACD7FD7-9C02-4B5A-ADB3-E4885C75B84B}"/>
+                <a16:creationId xmlns:a16="http://schemas.microsoft.com/office/drawing/2014/main" id="{776D7B3E-151A-43F8-9D89-7146C46F0BA1}"/>
               </a:ext>
             </a:extLst>
           </p:cNvPr>
@@ -2706,7 +2706,7 @@
           <p:cNvPr id="9" name="">
             <a:extLst xmlns:a="http://schemas.openxmlformats.org/drawingml/2006/main">
               <a:ext uri="{FF2B5EF4-FFF2-40B4-BE49-F238E27FC236}">
-                <a16:creationId xmlns:a16="http://schemas.microsoft.com/office/drawing/2014/main" id="{9D803838-2280-4DC7-8579-4242A89498EE}"/>
+                <a16:creationId xmlns:a16="http://schemas.microsoft.com/office/drawing/2014/main" id="{D42A3176-1633-404A-8037-C1871A9C59A5}"/>
               </a:ext>
             </a:extLst>
           </p:cNvPr>
@@ -2758,7 +2758,7 @@
           <p:cNvPr id="10" name="">
             <a:extLst xmlns:a="http://schemas.openxmlformats.org/drawingml/2006/main">
               <a:ext uri="{FF2B5EF4-FFF2-40B4-BE49-F238E27FC236}">
-                <a16:creationId xmlns:a16="http://schemas.microsoft.com/office/drawing/2014/main" id="{9B8159CF-0B99-4D3D-9E30-6BAEB757B3D1}"/>
+                <a16:creationId xmlns:a16="http://schemas.microsoft.com/office/drawing/2014/main" id="{24601E0B-36D0-494A-9026-40D71927124B}"/>
               </a:ext>
             </a:extLst>
           </p:cNvPr>
@@ -2810,7 +2810,7 @@
           <p:cNvPr id="11" name="">
             <a:extLst xmlns:a="http://schemas.openxmlformats.org/drawingml/2006/main">
               <a:ext uri="{FF2B5EF4-FFF2-40B4-BE49-F238E27FC236}">
-                <a16:creationId xmlns:a16="http://schemas.microsoft.com/office/drawing/2014/main" id="{9470474F-7A62-44E6-8FC0-42867280C032}"/>
+                <a16:creationId xmlns:a16="http://schemas.microsoft.com/office/drawing/2014/main" id="{56DD808F-1272-4214-9BAC-7FA7D78CBC49}"/>
               </a:ext>
             </a:extLst>
           </p:cNvPr>
@@ -2862,7 +2862,7 @@
           <p:cNvPr id="12" name="">
             <a:extLst xmlns:a="http://schemas.openxmlformats.org/drawingml/2006/main">
               <a:ext uri="{FF2B5EF4-FFF2-40B4-BE49-F238E27FC236}">
-                <a16:creationId xmlns:a16="http://schemas.microsoft.com/office/drawing/2014/main" id="{DA235B51-DD14-4CE3-ADE8-EC167C88F807}"/>
+                <a16:creationId xmlns:a16="http://schemas.microsoft.com/office/drawing/2014/main" id="{1113179F-345A-4D45-8E4C-45D5996FF84B}"/>
               </a:ext>
             </a:extLst>
           </p:cNvPr>
@@ -2914,7 +2914,7 @@
           <p:cNvPr id="13" name="">
             <a:extLst xmlns:a="http://schemas.openxmlformats.org/drawingml/2006/main">
               <a:ext uri="{FF2B5EF4-FFF2-40B4-BE49-F238E27FC236}">
-                <a16:creationId xmlns:a16="http://schemas.microsoft.com/office/drawing/2014/main" id="{B61B282D-B2A5-485D-8967-542EB7929FF4}"/>
+                <a16:creationId xmlns:a16="http://schemas.microsoft.com/office/drawing/2014/main" id="{EA8BDBC5-97AA-4019-BECC-B2A284C734E3}"/>
               </a:ext>
             </a:extLst>
           </p:cNvPr>
@@ -2966,7 +2966,7 @@
           <p:cNvPr id="14" name="">
             <a:extLst xmlns:a="http://schemas.openxmlformats.org/drawingml/2006/main">
               <a:ext uri="{FF2B5EF4-FFF2-40B4-BE49-F238E27FC236}">
-                <a16:creationId xmlns:a16="http://schemas.microsoft.com/office/drawing/2014/main" id="{5E4A5236-FCB5-407C-9D93-FC5BDB7C7571}"/>
+                <a16:creationId xmlns:a16="http://schemas.microsoft.com/office/drawing/2014/main" id="{4FC4997B-808C-49B0-9778-253DBDE6BE95}"/>
               </a:ext>
             </a:extLst>
           </p:cNvPr>
@@ -3018,7 +3018,7 @@
           <p:cNvPr id="15" name="">
             <a:extLst xmlns:a="http://schemas.openxmlformats.org/drawingml/2006/main">
               <a:ext uri="{FF2B5EF4-FFF2-40B4-BE49-F238E27FC236}">
-                <a16:creationId xmlns:a16="http://schemas.microsoft.com/office/drawing/2014/main" id="{2F2FFF37-775D-4EAA-8A6E-9EF0CF662D6B}"/>
+                <a16:creationId xmlns:a16="http://schemas.microsoft.com/office/drawing/2014/main" id="{EBF26293-C404-49E3-8056-A10BDA63C158}"/>
               </a:ext>
             </a:extLst>
           </p:cNvPr>
@@ -3070,7 +3070,7 @@
           <p:cNvPr id="16" name="">
             <a:extLst xmlns:a="http://schemas.openxmlformats.org/drawingml/2006/main">
               <a:ext uri="{FF2B5EF4-FFF2-40B4-BE49-F238E27FC236}">
-                <a16:creationId xmlns:a16="http://schemas.microsoft.com/office/drawing/2014/main" id="{B7261E37-3A42-4172-ADB1-6AB9E8CDC97F}"/>
+                <a16:creationId xmlns:a16="http://schemas.microsoft.com/office/drawing/2014/main" id="{1CFBA870-FF1C-4DCF-A923-543EBA179642}"/>
               </a:ext>
             </a:extLst>
           </p:cNvPr>
@@ -3120,7 +3120,7 @@
     </p:spTree>
     <p:extLst>
       <p:ext uri="{BB962C8B-B14F-4D97-AF65-F5344CB8AC3E}">
-        <p14:creationId xmlns:p14="http://schemas.microsoft.com/office/powerpoint/2010/main" val="211569264"/>
+        <p14:creationId xmlns:p14="http://schemas.microsoft.com/office/powerpoint/2010/main" val="1609619331"/>
       </p:ext>
     </p:extLst>
   </p:cSld>
@@ -3151,7 +3151,7 @@
           <p:cNvPr id="103" name="">
             <a:extLst xmlns:a="http://schemas.openxmlformats.org/drawingml/2006/main">
               <a:ext uri="{FF2B5EF4-FFF2-40B4-BE49-F238E27FC236}">
-                <a16:creationId xmlns:a16="http://schemas.microsoft.com/office/drawing/2014/main" id="{0E3B0C4F-A1FF-48BC-8FC9-A050AF4D1573}"/>
+                <a16:creationId xmlns:a16="http://schemas.microsoft.com/office/drawing/2014/main" id="{100E22C4-349C-4DCE-8545-BDC5B8A4778E}"/>
               </a:ext>
             </a:extLst>
           </p:cNvPr>
@@ -3184,7 +3184,7 @@
           <p:cNvPr id="2" name="">
             <a:extLst xmlns:a="http://schemas.openxmlformats.org/drawingml/2006/main">
               <a:ext uri="{FF2B5EF4-FFF2-40B4-BE49-F238E27FC236}">
-                <a16:creationId xmlns:a16="http://schemas.microsoft.com/office/drawing/2014/main" id="{9D183DF2-A657-46B9-972A-064EF4BBC328}"/>
+                <a16:creationId xmlns:a16="http://schemas.microsoft.com/office/drawing/2014/main" id="{E8B1D941-B5D2-43F9-BF75-C7582905AA47}"/>
               </a:ext>
             </a:extLst>
           </p:cNvPr>
@@ -3215,7 +3215,7 @@
           <p:cNvPr id="3" name="">
             <a:extLst xmlns:a="http://schemas.openxmlformats.org/drawingml/2006/main">
               <a:ext uri="{FF2B5EF4-FFF2-40B4-BE49-F238E27FC236}">
-                <a16:creationId xmlns:a16="http://schemas.microsoft.com/office/drawing/2014/main" id="{765C4A1C-B13B-41E5-B892-23A81BE69C19}"/>
+                <a16:creationId xmlns:a16="http://schemas.microsoft.com/office/drawing/2014/main" id="{6866E5D9-AED8-4041-BB9B-FFFEA03FC4E5}"/>
               </a:ext>
             </a:extLst>
           </p:cNvPr>
@@ -3267,7 +3267,7 @@
           <p:cNvPr id="4" name="">
             <a:extLst xmlns:a="http://schemas.openxmlformats.org/drawingml/2006/main">
               <a:ext uri="{FF2B5EF4-FFF2-40B4-BE49-F238E27FC236}">
-                <a16:creationId xmlns:a16="http://schemas.microsoft.com/office/drawing/2014/main" id="{419ABA94-9833-4A2E-858E-27727B362A51}"/>
+                <a16:creationId xmlns:a16="http://schemas.microsoft.com/office/drawing/2014/main" id="{08971B40-BCB7-4541-9549-EEF68245CB6F}"/>
               </a:ext>
             </a:extLst>
           </p:cNvPr>
@@ -3319,7 +3319,7 @@
           <p:cNvPr id="5" name="">
             <a:extLst xmlns:a="http://schemas.openxmlformats.org/drawingml/2006/main">
               <a:ext uri="{FF2B5EF4-FFF2-40B4-BE49-F238E27FC236}">
-                <a16:creationId xmlns:a16="http://schemas.microsoft.com/office/drawing/2014/main" id="{A4FD9865-2087-4668-8936-B23EBF780D6F}"/>
+                <a16:creationId xmlns:a16="http://schemas.microsoft.com/office/drawing/2014/main" id="{8DAE41D6-5ECA-4BB7-BF65-B2CDD76DFFAD}"/>
               </a:ext>
             </a:extLst>
           </p:cNvPr>
@@ -3354,7 +3354,7 @@
           <p:nvPr/>
         </p:nvPicPr>
         <p:blipFill>
-          <a:blip xmlns:r="http://schemas.openxmlformats.org/officeDocument/2006/relationships" xmlns:a="http://schemas.openxmlformats.org/drawingml/2006/main" r:embed="Rf260588ed459466f"/>
+          <a:blip xmlns:r="http://schemas.openxmlformats.org/officeDocument/2006/relationships" xmlns:a="http://schemas.openxmlformats.org/drawingml/2006/main" r:embed="R77bace22a8364312"/>
           <a:stretch xmlns:a="http://schemas.openxmlformats.org/drawingml/2006/main"/>
         </p:blipFill>
         <p:spPr>
@@ -3372,7 +3372,7 @@
           <p:cNvPr id="7" name="">
             <a:extLst xmlns:a="http://schemas.openxmlformats.org/drawingml/2006/main">
               <a:ext uri="{FF2B5EF4-FFF2-40B4-BE49-F238E27FC236}">
-                <a16:creationId xmlns:a16="http://schemas.microsoft.com/office/drawing/2014/main" id="{963A9031-9D75-4552-8CA5-F20ECE296470}"/>
+                <a16:creationId xmlns:a16="http://schemas.microsoft.com/office/drawing/2014/main" id="{64C3D952-5293-46C5-AC37-34B870BE6089}"/>
               </a:ext>
             </a:extLst>
           </p:cNvPr>
@@ -3424,7 +3424,7 @@
           <p:cNvPr id="8" name="">
             <a:extLst xmlns:a="http://schemas.openxmlformats.org/drawingml/2006/main">
               <a:ext uri="{FF2B5EF4-FFF2-40B4-BE49-F238E27FC236}">
-                <a16:creationId xmlns:a16="http://schemas.microsoft.com/office/drawing/2014/main" id="{C579FC39-F947-4667-8A22-95645824446D}"/>
+                <a16:creationId xmlns:a16="http://schemas.microsoft.com/office/drawing/2014/main" id="{D52315BA-76E3-489E-8588-3BF504D329FA}"/>
               </a:ext>
             </a:extLst>
           </p:cNvPr>
@@ -3476,7 +3476,7 @@
           <p:cNvPr id="9" name="">
             <a:extLst xmlns:a="http://schemas.openxmlformats.org/drawingml/2006/main">
               <a:ext uri="{FF2B5EF4-FFF2-40B4-BE49-F238E27FC236}">
-                <a16:creationId xmlns:a16="http://schemas.microsoft.com/office/drawing/2014/main" id="{0D65FA5F-54FE-46A5-9D90-481122770E5A}"/>
+                <a16:creationId xmlns:a16="http://schemas.microsoft.com/office/drawing/2014/main" id="{BDBE0B2E-260A-483E-AD22-B37D161A6F90}"/>
               </a:ext>
             </a:extLst>
           </p:cNvPr>
@@ -3528,7 +3528,7 @@
           <p:cNvPr id="10" name="">
             <a:extLst xmlns:a="http://schemas.openxmlformats.org/drawingml/2006/main">
               <a:ext uri="{FF2B5EF4-FFF2-40B4-BE49-F238E27FC236}">
-                <a16:creationId xmlns:a16="http://schemas.microsoft.com/office/drawing/2014/main" id="{5C2BB874-AFBB-40CE-871A-9105ECA2EE61}"/>
+                <a16:creationId xmlns:a16="http://schemas.microsoft.com/office/drawing/2014/main" id="{74366978-0726-44FF-ADE5-1BB5E08345BA}"/>
               </a:ext>
             </a:extLst>
           </p:cNvPr>
@@ -3580,7 +3580,7 @@
           <p:cNvPr id="11" name="">
             <a:extLst xmlns:a="http://schemas.openxmlformats.org/drawingml/2006/main">
               <a:ext uri="{FF2B5EF4-FFF2-40B4-BE49-F238E27FC236}">
-                <a16:creationId xmlns:a16="http://schemas.microsoft.com/office/drawing/2014/main" id="{47D56D9F-8461-4F8C-860F-401728D934C0}"/>
+                <a16:creationId xmlns:a16="http://schemas.microsoft.com/office/drawing/2014/main" id="{B0D5E2E2-C6C3-4450-8993-9D50B8F8C886}"/>
               </a:ext>
             </a:extLst>
           </p:cNvPr>
@@ -3611,7 +3611,7 @@
           <p:cNvPr id="12" name="">
             <a:extLst xmlns:a="http://schemas.openxmlformats.org/drawingml/2006/main">
               <a:ext uri="{FF2B5EF4-FFF2-40B4-BE49-F238E27FC236}">
-                <a16:creationId xmlns:a16="http://schemas.microsoft.com/office/drawing/2014/main" id="{073B2366-A1D6-45CF-A12B-001B1D730464}"/>
+                <a16:creationId xmlns:a16="http://schemas.microsoft.com/office/drawing/2014/main" id="{F6FF006B-F528-4DD4-A463-50A21ED731E5}"/>
               </a:ext>
             </a:extLst>
           </p:cNvPr>
@@ -3642,7 +3642,7 @@
           <p:cNvPr id="13" name="">
             <a:extLst xmlns:a="http://schemas.openxmlformats.org/drawingml/2006/main">
               <a:ext uri="{FF2B5EF4-FFF2-40B4-BE49-F238E27FC236}">
-                <a16:creationId xmlns:a16="http://schemas.microsoft.com/office/drawing/2014/main" id="{B31817A5-6CCB-41CC-955A-148EB42D46C0}"/>
+                <a16:creationId xmlns:a16="http://schemas.microsoft.com/office/drawing/2014/main" id="{6D5CF953-09FC-478D-B934-729574C1A252}"/>
               </a:ext>
             </a:extLst>
           </p:cNvPr>
@@ -3694,7 +3694,7 @@
           <p:cNvPr id="14" name="">
             <a:extLst xmlns:a="http://schemas.openxmlformats.org/drawingml/2006/main">
               <a:ext uri="{FF2B5EF4-FFF2-40B4-BE49-F238E27FC236}">
-                <a16:creationId xmlns:a16="http://schemas.microsoft.com/office/drawing/2014/main" id="{E063E697-6540-43F9-BD86-0D6C673AD498}"/>
+                <a16:creationId xmlns:a16="http://schemas.microsoft.com/office/drawing/2014/main" id="{1F504FA6-564F-4588-9816-4AA492F02618}"/>
               </a:ext>
             </a:extLst>
           </p:cNvPr>
@@ -3746,7 +3746,7 @@
           <p:cNvPr id="15" name="">
             <a:extLst xmlns:a="http://schemas.openxmlformats.org/drawingml/2006/main">
               <a:ext uri="{FF2B5EF4-FFF2-40B4-BE49-F238E27FC236}">
-                <a16:creationId xmlns:a16="http://schemas.microsoft.com/office/drawing/2014/main" id="{27236E65-D10C-4E00-BB49-842A4B060CB2}"/>
+                <a16:creationId xmlns:a16="http://schemas.microsoft.com/office/drawing/2014/main" id="{27D44D3A-3D46-44FC-92B8-9A9EF4BCB8D3}"/>
               </a:ext>
             </a:extLst>
           </p:cNvPr>
@@ -3798,7 +3798,7 @@
           <p:cNvPr id="16" name="">
             <a:extLst xmlns:a="http://schemas.openxmlformats.org/drawingml/2006/main">
               <a:ext uri="{FF2B5EF4-FFF2-40B4-BE49-F238E27FC236}">
-                <a16:creationId xmlns:a16="http://schemas.microsoft.com/office/drawing/2014/main" id="{157EE782-BEB2-4C1C-BB31-0BED0F62215A}"/>
+                <a16:creationId xmlns:a16="http://schemas.microsoft.com/office/drawing/2014/main" id="{9195D462-D040-4977-B2C5-DC9F449BB55C}"/>
               </a:ext>
             </a:extLst>
           </p:cNvPr>
@@ -3850,7 +3850,7 @@
           <p:cNvPr id="17" name="">
             <a:extLst xmlns:a="http://schemas.openxmlformats.org/drawingml/2006/main">
               <a:ext uri="{FF2B5EF4-FFF2-40B4-BE49-F238E27FC236}">
-                <a16:creationId xmlns:a16="http://schemas.microsoft.com/office/drawing/2014/main" id="{4B6B9A1A-7D32-478E-8A04-813B2C107961}"/>
+                <a16:creationId xmlns:a16="http://schemas.microsoft.com/office/drawing/2014/main" id="{9E122BF6-205F-4939-887B-0D2E2C1C3E19}"/>
               </a:ext>
             </a:extLst>
           </p:cNvPr>
@@ -3902,7 +3902,7 @@
           <p:cNvPr id="18" name="">
             <a:extLst xmlns:a="http://schemas.openxmlformats.org/drawingml/2006/main">
               <a:ext uri="{FF2B5EF4-FFF2-40B4-BE49-F238E27FC236}">
-                <a16:creationId xmlns:a16="http://schemas.microsoft.com/office/drawing/2014/main" id="{777C9E2D-A03B-4984-B108-F0674F41C9FF}"/>
+                <a16:creationId xmlns:a16="http://schemas.microsoft.com/office/drawing/2014/main" id="{D8EC239E-C116-4D88-9EF0-A6ADE009E189}"/>
               </a:ext>
             </a:extLst>
           </p:cNvPr>
@@ -3933,7 +3933,7 @@
           <p:cNvPr id="19" name="">
             <a:extLst xmlns:a="http://schemas.openxmlformats.org/drawingml/2006/main">
               <a:ext uri="{FF2B5EF4-FFF2-40B4-BE49-F238E27FC236}">
-                <a16:creationId xmlns:a16="http://schemas.microsoft.com/office/drawing/2014/main" id="{61495B5F-90B3-4BC7-A382-4F145EC942B0}"/>
+                <a16:creationId xmlns:a16="http://schemas.microsoft.com/office/drawing/2014/main" id="{45128919-34E2-4887-8BE6-CDA6EEE6C7D0}"/>
               </a:ext>
             </a:extLst>
           </p:cNvPr>
@@ -3964,7 +3964,7 @@
           <p:cNvPr id="20" name="">
             <a:extLst xmlns:a="http://schemas.openxmlformats.org/drawingml/2006/main">
               <a:ext uri="{FF2B5EF4-FFF2-40B4-BE49-F238E27FC236}">
-                <a16:creationId xmlns:a16="http://schemas.microsoft.com/office/drawing/2014/main" id="{3F543CDE-60F7-4572-ADA0-CDCE12D51768}"/>
+                <a16:creationId xmlns:a16="http://schemas.microsoft.com/office/drawing/2014/main" id="{9E4F0913-4CDC-4B1F-9818-5722DF94C5BE}"/>
               </a:ext>
             </a:extLst>
           </p:cNvPr>
@@ -4016,7 +4016,7 @@
           <p:cNvPr id="21" name="">
             <a:extLst xmlns:a="http://schemas.openxmlformats.org/drawingml/2006/main">
               <a:ext uri="{FF2B5EF4-FFF2-40B4-BE49-F238E27FC236}">
-                <a16:creationId xmlns:a16="http://schemas.microsoft.com/office/drawing/2014/main" id="{2BB595A4-B1FC-46D2-852B-B8C4E7C9D2A9}"/>
+                <a16:creationId xmlns:a16="http://schemas.microsoft.com/office/drawing/2014/main" id="{14A889B9-115F-4A7B-8DCC-45612392F6FB}"/>
               </a:ext>
             </a:extLst>
           </p:cNvPr>
@@ -4068,7 +4068,7 @@
           <p:cNvPr id="22" name="">
             <a:extLst xmlns:a="http://schemas.openxmlformats.org/drawingml/2006/main">
               <a:ext uri="{FF2B5EF4-FFF2-40B4-BE49-F238E27FC236}">
-                <a16:creationId xmlns:a16="http://schemas.microsoft.com/office/drawing/2014/main" id="{DEC136F4-495B-405C-9082-5C52453530E7}"/>
+                <a16:creationId xmlns:a16="http://schemas.microsoft.com/office/drawing/2014/main" id="{9E3CED65-CA1E-459A-ACFC-7300F9298FD9}"/>
               </a:ext>
             </a:extLst>
           </p:cNvPr>
@@ -4120,7 +4120,7 @@
           <p:cNvPr id="23" name="">
             <a:extLst xmlns:a="http://schemas.openxmlformats.org/drawingml/2006/main">
               <a:ext uri="{FF2B5EF4-FFF2-40B4-BE49-F238E27FC236}">
-                <a16:creationId xmlns:a16="http://schemas.microsoft.com/office/drawing/2014/main" id="{B3F8A501-2998-48A8-9782-D32B15B0B25B}"/>
+                <a16:creationId xmlns:a16="http://schemas.microsoft.com/office/drawing/2014/main" id="{685A32B1-922B-4BA8-8FF3-4AD9D29028A5}"/>
               </a:ext>
             </a:extLst>
           </p:cNvPr>
@@ -4172,7 +4172,7 @@
           <p:cNvPr id="24" name="">
             <a:extLst xmlns:a="http://schemas.openxmlformats.org/drawingml/2006/main">
               <a:ext uri="{FF2B5EF4-FFF2-40B4-BE49-F238E27FC236}">
-                <a16:creationId xmlns:a16="http://schemas.microsoft.com/office/drawing/2014/main" id="{61E7D78B-DA0B-4B59-B571-1547834011F6}"/>
+                <a16:creationId xmlns:a16="http://schemas.microsoft.com/office/drawing/2014/main" id="{794A72AB-E83D-452D-AFBA-C9826B51F863}"/>
               </a:ext>
             </a:extLst>
           </p:cNvPr>
@@ -4224,7 +4224,7 @@
           <p:cNvPr id="25" name="">
             <a:extLst xmlns:a="http://schemas.openxmlformats.org/drawingml/2006/main">
               <a:ext uri="{FF2B5EF4-FFF2-40B4-BE49-F238E27FC236}">
-                <a16:creationId xmlns:a16="http://schemas.microsoft.com/office/drawing/2014/main" id="{9BE0CB94-2E75-4A07-9DD4-8167BC8E794A}"/>
+                <a16:creationId xmlns:a16="http://schemas.microsoft.com/office/drawing/2014/main" id="{FB068465-A5D3-45B9-9E1A-85EE549C86A7}"/>
               </a:ext>
             </a:extLst>
           </p:cNvPr>
@@ -4255,7 +4255,7 @@
           <p:cNvPr id="26" name="">
             <a:extLst xmlns:a="http://schemas.openxmlformats.org/drawingml/2006/main">
               <a:ext uri="{FF2B5EF4-FFF2-40B4-BE49-F238E27FC236}">
-                <a16:creationId xmlns:a16="http://schemas.microsoft.com/office/drawing/2014/main" id="{2BBD933C-6838-4F5B-B3D1-F727F4C8FD15}"/>
+                <a16:creationId xmlns:a16="http://schemas.microsoft.com/office/drawing/2014/main" id="{8B1E613B-2D28-4A1F-9C70-BC9974162211}"/>
               </a:ext>
             </a:extLst>
           </p:cNvPr>
@@ -4307,7 +4307,7 @@
           <p:cNvPr id="27" name="">
             <a:extLst xmlns:a="http://schemas.openxmlformats.org/drawingml/2006/main">
               <a:ext uri="{FF2B5EF4-FFF2-40B4-BE49-F238E27FC236}">
-                <a16:creationId xmlns:a16="http://schemas.microsoft.com/office/drawing/2014/main" id="{5786C833-BF0A-4F49-B1BB-04D2E0DC97BB}"/>
+                <a16:creationId xmlns:a16="http://schemas.microsoft.com/office/drawing/2014/main" id="{743B197C-A5FB-4F8B-899A-F990E1EFDB14}"/>
               </a:ext>
             </a:extLst>
           </p:cNvPr>
@@ -4359,7 +4359,7 @@
           <p:cNvPr id="28" name="">
             <a:extLst xmlns:a="http://schemas.openxmlformats.org/drawingml/2006/main">
               <a:ext uri="{FF2B5EF4-FFF2-40B4-BE49-F238E27FC236}">
-                <a16:creationId xmlns:a16="http://schemas.microsoft.com/office/drawing/2014/main" id="{0801EEB6-46FE-4112-8A38-99EB87C8540A}"/>
+                <a16:creationId xmlns:a16="http://schemas.microsoft.com/office/drawing/2014/main" id="{1958E527-1EF8-4752-9225-9B2D5F1A8550}"/>
               </a:ext>
             </a:extLst>
           </p:cNvPr>
@@ -4411,7 +4411,7 @@
           <p:cNvPr id="29" name="">
             <a:extLst xmlns:a="http://schemas.openxmlformats.org/drawingml/2006/main">
               <a:ext uri="{FF2B5EF4-FFF2-40B4-BE49-F238E27FC236}">
-                <a16:creationId xmlns:a16="http://schemas.microsoft.com/office/drawing/2014/main" id="{5913EBB9-E9F4-4FC9-8366-1057B17A9B78}"/>
+                <a16:creationId xmlns:a16="http://schemas.microsoft.com/office/drawing/2014/main" id="{F41EC961-DD2A-47B0-8EDE-991405A571F1}"/>
               </a:ext>
             </a:extLst>
           </p:cNvPr>
@@ -4463,7 +4463,7 @@
           <p:cNvPr id="30" name="">
             <a:extLst xmlns:a="http://schemas.openxmlformats.org/drawingml/2006/main">
               <a:ext uri="{FF2B5EF4-FFF2-40B4-BE49-F238E27FC236}">
-                <a16:creationId xmlns:a16="http://schemas.microsoft.com/office/drawing/2014/main" id="{ABD4F954-1E2F-4A25-AB71-788F6646358B}"/>
+                <a16:creationId xmlns:a16="http://schemas.microsoft.com/office/drawing/2014/main" id="{19285577-E58D-405D-ACA6-B0455D06CAF4}"/>
               </a:ext>
             </a:extLst>
           </p:cNvPr>
@@ -4515,7 +4515,7 @@
           <p:cNvPr id="31" name="">
             <a:extLst xmlns:a="http://schemas.openxmlformats.org/drawingml/2006/main">
               <a:ext uri="{FF2B5EF4-FFF2-40B4-BE49-F238E27FC236}">
-                <a16:creationId xmlns:a16="http://schemas.microsoft.com/office/drawing/2014/main" id="{DADDEF24-6BBB-4391-A6C1-99F0C1A61D4D}"/>
+                <a16:creationId xmlns:a16="http://schemas.microsoft.com/office/drawing/2014/main" id="{FA3D3E56-1381-4B15-8F7D-C2426AACC771}"/>
               </a:ext>
             </a:extLst>
           </p:cNvPr>
@@ -4546,7 +4546,7 @@
           <p:cNvPr id="32" name="">
             <a:extLst xmlns:a="http://schemas.openxmlformats.org/drawingml/2006/main">
               <a:ext uri="{FF2B5EF4-FFF2-40B4-BE49-F238E27FC236}">
-                <a16:creationId xmlns:a16="http://schemas.microsoft.com/office/drawing/2014/main" id="{E49AAA55-1740-4DA8-9988-F9D976D90365}"/>
+                <a16:creationId xmlns:a16="http://schemas.microsoft.com/office/drawing/2014/main" id="{D5D4A5C6-FA68-4C61-8CE8-6C2105679283}"/>
               </a:ext>
             </a:extLst>
           </p:cNvPr>
@@ -4577,7 +4577,7 @@
           <p:cNvPr id="33" name="">
             <a:extLst xmlns:a="http://schemas.openxmlformats.org/drawingml/2006/main">
               <a:ext uri="{FF2B5EF4-FFF2-40B4-BE49-F238E27FC236}">
-                <a16:creationId xmlns:a16="http://schemas.microsoft.com/office/drawing/2014/main" id="{43FDDA88-6FB4-4CEF-AED6-7F7F14911EFA}"/>
+                <a16:creationId xmlns:a16="http://schemas.microsoft.com/office/drawing/2014/main" id="{1054932D-B28F-4333-A5B0-12A5601C0778}"/>
               </a:ext>
             </a:extLst>
           </p:cNvPr>
@@ -4629,7 +4629,7 @@
           <p:cNvPr id="34" name="">
             <a:extLst xmlns:a="http://schemas.openxmlformats.org/drawingml/2006/main">
               <a:ext uri="{FF2B5EF4-FFF2-40B4-BE49-F238E27FC236}">
-                <a16:creationId xmlns:a16="http://schemas.microsoft.com/office/drawing/2014/main" id="{65C7FE22-F992-4436-9D21-8FA9B71F2119}"/>
+                <a16:creationId xmlns:a16="http://schemas.microsoft.com/office/drawing/2014/main" id="{1DCE8035-7ECD-4707-8B9C-DDFD9DF91E6E}"/>
               </a:ext>
             </a:extLst>
           </p:cNvPr>
@@ -4681,7 +4681,7 @@
           <p:cNvPr id="35" name="">
             <a:extLst xmlns:a="http://schemas.openxmlformats.org/drawingml/2006/main">
               <a:ext uri="{FF2B5EF4-FFF2-40B4-BE49-F238E27FC236}">
-                <a16:creationId xmlns:a16="http://schemas.microsoft.com/office/drawing/2014/main" id="{56361911-968C-4748-AA99-52D91AC2D27C}"/>
+                <a16:creationId xmlns:a16="http://schemas.microsoft.com/office/drawing/2014/main" id="{F9A1DF6B-AA2C-4F4A-A424-68C7CCF0878C}"/>
               </a:ext>
             </a:extLst>
           </p:cNvPr>
@@ -4733,7 +4733,7 @@
           <p:cNvPr id="36" name="">
             <a:extLst xmlns:a="http://schemas.openxmlformats.org/drawingml/2006/main">
               <a:ext uri="{FF2B5EF4-FFF2-40B4-BE49-F238E27FC236}">
-                <a16:creationId xmlns:a16="http://schemas.microsoft.com/office/drawing/2014/main" id="{2B191592-53DE-470B-BBFC-669A1C616F0F}"/>
+                <a16:creationId xmlns:a16="http://schemas.microsoft.com/office/drawing/2014/main" id="{CFE56708-C07B-43AE-99B3-60D4358945D5}"/>
               </a:ext>
             </a:extLst>
           </p:cNvPr>
@@ -4785,7 +4785,7 @@
           <p:cNvPr id="37" name="">
             <a:extLst xmlns:a="http://schemas.openxmlformats.org/drawingml/2006/main">
               <a:ext uri="{FF2B5EF4-FFF2-40B4-BE49-F238E27FC236}">
-                <a16:creationId xmlns:a16="http://schemas.microsoft.com/office/drawing/2014/main" id="{3A58586A-2E5C-4E23-9BF4-7CA64ACB7822}"/>
+                <a16:creationId xmlns:a16="http://schemas.microsoft.com/office/drawing/2014/main" id="{CECA10C9-73AF-4975-A00F-83810096417F}"/>
               </a:ext>
             </a:extLst>
           </p:cNvPr>
@@ -4837,7 +4837,7 @@
           <p:cNvPr id="38" name="">
             <a:extLst xmlns:a="http://schemas.openxmlformats.org/drawingml/2006/main">
               <a:ext uri="{FF2B5EF4-FFF2-40B4-BE49-F238E27FC236}">
-                <a16:creationId xmlns:a16="http://schemas.microsoft.com/office/drawing/2014/main" id="{CBCFFE74-FE1A-482A-8E9F-AF2CC0AF50E6}"/>
+                <a16:creationId xmlns:a16="http://schemas.microsoft.com/office/drawing/2014/main" id="{BFAA0073-534D-4107-AFBD-5C3128F4B9AC}"/>
               </a:ext>
             </a:extLst>
           </p:cNvPr>
@@ -4868,7 +4868,7 @@
           <p:cNvPr id="39" name="">
             <a:extLst xmlns:a="http://schemas.openxmlformats.org/drawingml/2006/main">
               <a:ext uri="{FF2B5EF4-FFF2-40B4-BE49-F238E27FC236}">
-                <a16:creationId xmlns:a16="http://schemas.microsoft.com/office/drawing/2014/main" id="{D70B45F8-0FEE-4D06-BA1F-6976E2658CC9}"/>
+                <a16:creationId xmlns:a16="http://schemas.microsoft.com/office/drawing/2014/main" id="{B3725843-223F-4D0B-85B4-65A1DE906FBA}"/>
               </a:ext>
             </a:extLst>
           </p:cNvPr>
@@ -4920,7 +4920,7 @@
           <p:cNvPr id="40" name="">
             <a:extLst xmlns:a="http://schemas.openxmlformats.org/drawingml/2006/main">
               <a:ext uri="{FF2B5EF4-FFF2-40B4-BE49-F238E27FC236}">
-                <a16:creationId xmlns:a16="http://schemas.microsoft.com/office/drawing/2014/main" id="{CCE5BDB5-7CA8-487F-BAD9-6589B9F530E7}"/>
+                <a16:creationId xmlns:a16="http://schemas.microsoft.com/office/drawing/2014/main" id="{77B4E822-4BAB-4443-A91A-B7142485E9BF}"/>
               </a:ext>
             </a:extLst>
           </p:cNvPr>
@@ -4972,7 +4972,7 @@
           <p:cNvPr id="41" name="">
             <a:extLst xmlns:a="http://schemas.openxmlformats.org/drawingml/2006/main">
               <a:ext uri="{FF2B5EF4-FFF2-40B4-BE49-F238E27FC236}">
-                <a16:creationId xmlns:a16="http://schemas.microsoft.com/office/drawing/2014/main" id="{FACF5E89-B836-4FDC-8F6D-9CF0D305D1AA}"/>
+                <a16:creationId xmlns:a16="http://schemas.microsoft.com/office/drawing/2014/main" id="{58306052-3BD0-4198-B933-6FE28324FFE1}"/>
               </a:ext>
             </a:extLst>
           </p:cNvPr>
@@ -5024,7 +5024,7 @@
           <p:cNvPr id="42" name="">
             <a:extLst xmlns:a="http://schemas.openxmlformats.org/drawingml/2006/main">
               <a:ext uri="{FF2B5EF4-FFF2-40B4-BE49-F238E27FC236}">
-                <a16:creationId xmlns:a16="http://schemas.microsoft.com/office/drawing/2014/main" id="{925233FC-3BFF-481D-939E-CD2248D10E25}"/>
+                <a16:creationId xmlns:a16="http://schemas.microsoft.com/office/drawing/2014/main" id="{983EA5BA-DC35-4709-8EED-CF6B93DAE1C4}"/>
               </a:ext>
             </a:extLst>
           </p:cNvPr>
@@ -5076,7 +5076,7 @@
           <p:cNvPr id="43" name="">
             <a:extLst xmlns:a="http://schemas.openxmlformats.org/drawingml/2006/main">
               <a:ext uri="{FF2B5EF4-FFF2-40B4-BE49-F238E27FC236}">
-                <a16:creationId xmlns:a16="http://schemas.microsoft.com/office/drawing/2014/main" id="{743FF8FE-E870-4766-9824-73D2F52A1C7E}"/>
+                <a16:creationId xmlns:a16="http://schemas.microsoft.com/office/drawing/2014/main" id="{BBC2C496-F2F0-450A-B00D-403DE6F44141}"/>
               </a:ext>
             </a:extLst>
           </p:cNvPr>
@@ -5128,7 +5128,7 @@
           <p:cNvPr id="44" name="">
             <a:extLst xmlns:a="http://schemas.openxmlformats.org/drawingml/2006/main">
               <a:ext uri="{FF2B5EF4-FFF2-40B4-BE49-F238E27FC236}">
-                <a16:creationId xmlns:a16="http://schemas.microsoft.com/office/drawing/2014/main" id="{73B3896D-C8FB-40C8-ACE8-E79406347910}"/>
+                <a16:creationId xmlns:a16="http://schemas.microsoft.com/office/drawing/2014/main" id="{7400673A-DA03-4158-BEB0-C2F4202EA7C8}"/>
               </a:ext>
             </a:extLst>
           </p:cNvPr>
@@ -5159,7 +5159,7 @@
           <p:cNvPr id="45" name="">
             <a:extLst xmlns:a="http://schemas.openxmlformats.org/drawingml/2006/main">
               <a:ext uri="{FF2B5EF4-FFF2-40B4-BE49-F238E27FC236}">
-                <a16:creationId xmlns:a16="http://schemas.microsoft.com/office/drawing/2014/main" id="{355CB779-4036-4FA2-B3EE-CD1949457E34}"/>
+                <a16:creationId xmlns:a16="http://schemas.microsoft.com/office/drawing/2014/main" id="{57CAC035-0975-4471-80DD-ED9374E52562}"/>
               </a:ext>
             </a:extLst>
           </p:cNvPr>
@@ -5190,7 +5190,7 @@
           <p:cNvPr id="46" name="">
             <a:extLst xmlns:a="http://schemas.openxmlformats.org/drawingml/2006/main">
               <a:ext uri="{FF2B5EF4-FFF2-40B4-BE49-F238E27FC236}">
-                <a16:creationId xmlns:a16="http://schemas.microsoft.com/office/drawing/2014/main" id="{98DD4874-6380-4AE8-AB4F-FF69B5485384}"/>
+                <a16:creationId xmlns:a16="http://schemas.microsoft.com/office/drawing/2014/main" id="{A0608B36-250D-46D2-83B2-37966B3DAA13}"/>
               </a:ext>
             </a:extLst>
           </p:cNvPr>
@@ -5242,7 +5242,7 @@
           <p:cNvPr id="47" name="">
             <a:extLst xmlns:a="http://schemas.openxmlformats.org/drawingml/2006/main">
               <a:ext uri="{FF2B5EF4-FFF2-40B4-BE49-F238E27FC236}">
-                <a16:creationId xmlns:a16="http://schemas.microsoft.com/office/drawing/2014/main" id="{0A2995DD-A1B8-4C16-850E-EE8AD9181433}"/>
+                <a16:creationId xmlns:a16="http://schemas.microsoft.com/office/drawing/2014/main" id="{DAE59B06-6D72-425C-84F1-B9C800BB41D9}"/>
               </a:ext>
             </a:extLst>
           </p:cNvPr>
@@ -5294,7 +5294,7 @@
           <p:cNvPr id="48" name="">
             <a:extLst xmlns:a="http://schemas.openxmlformats.org/drawingml/2006/main">
               <a:ext uri="{FF2B5EF4-FFF2-40B4-BE49-F238E27FC236}">
-                <a16:creationId xmlns:a16="http://schemas.microsoft.com/office/drawing/2014/main" id="{4EC1F0B4-6AF9-4ECD-A76D-DE66664A6C34}"/>
+                <a16:creationId xmlns:a16="http://schemas.microsoft.com/office/drawing/2014/main" id="{4ABC56A9-F0BF-4B8E-A44D-E8825FB9D05D}"/>
               </a:ext>
             </a:extLst>
           </p:cNvPr>
@@ -5346,7 +5346,7 @@
           <p:cNvPr id="49" name="">
             <a:extLst xmlns:a="http://schemas.openxmlformats.org/drawingml/2006/main">
               <a:ext uri="{FF2B5EF4-FFF2-40B4-BE49-F238E27FC236}">
-                <a16:creationId xmlns:a16="http://schemas.microsoft.com/office/drawing/2014/main" id="{704C8EB2-AD35-46E4-A90D-D2503A44F171}"/>
+                <a16:creationId xmlns:a16="http://schemas.microsoft.com/office/drawing/2014/main" id="{12B04E0B-31F7-476B-B392-0555748CE33C}"/>
               </a:ext>
             </a:extLst>
           </p:cNvPr>
@@ -5398,7 +5398,7 @@
           <p:cNvPr id="50" name="">
             <a:extLst xmlns:a="http://schemas.openxmlformats.org/drawingml/2006/main">
               <a:ext uri="{FF2B5EF4-FFF2-40B4-BE49-F238E27FC236}">
-                <a16:creationId xmlns:a16="http://schemas.microsoft.com/office/drawing/2014/main" id="{CF091D42-A1DA-4098-AE53-CD29B1C9241C}"/>
+                <a16:creationId xmlns:a16="http://schemas.microsoft.com/office/drawing/2014/main" id="{8A73D2B0-EE80-4F1F-9BB5-CF95648CE63A}"/>
               </a:ext>
             </a:extLst>
           </p:cNvPr>
@@ -5450,7 +5450,7 @@
           <p:cNvPr id="51" name="">
             <a:extLst xmlns:a="http://schemas.openxmlformats.org/drawingml/2006/main">
               <a:ext uri="{FF2B5EF4-FFF2-40B4-BE49-F238E27FC236}">
-                <a16:creationId xmlns:a16="http://schemas.microsoft.com/office/drawing/2014/main" id="{FD208175-8728-471B-B183-74451B06D6E5}"/>
+                <a16:creationId xmlns:a16="http://schemas.microsoft.com/office/drawing/2014/main" id="{3E2BD850-E75A-4038-B648-12F74D545A0F}"/>
               </a:ext>
             </a:extLst>
           </p:cNvPr>
@@ -5481,7 +5481,7 @@
           <p:cNvPr id="52" name="">
             <a:extLst xmlns:a="http://schemas.openxmlformats.org/drawingml/2006/main">
               <a:ext uri="{FF2B5EF4-FFF2-40B4-BE49-F238E27FC236}">
-                <a16:creationId xmlns:a16="http://schemas.microsoft.com/office/drawing/2014/main" id="{CD8DC3BA-A668-43EC-AAF7-1AD32D720DF7}"/>
+                <a16:creationId xmlns:a16="http://schemas.microsoft.com/office/drawing/2014/main" id="{353F1078-60A4-4889-955D-23B76FBDA70E}"/>
               </a:ext>
             </a:extLst>
           </p:cNvPr>
@@ -5533,7 +5533,7 @@
           <p:cNvPr id="53" name="">
             <a:extLst xmlns:a="http://schemas.openxmlformats.org/drawingml/2006/main">
               <a:ext uri="{FF2B5EF4-FFF2-40B4-BE49-F238E27FC236}">
-                <a16:creationId xmlns:a16="http://schemas.microsoft.com/office/drawing/2014/main" id="{4CBEB72E-356F-43DF-8717-FB2F296748AB}"/>
+                <a16:creationId xmlns:a16="http://schemas.microsoft.com/office/drawing/2014/main" id="{7C78342E-0D54-4862-AA3B-D77910F26F00}"/>
               </a:ext>
             </a:extLst>
           </p:cNvPr>
@@ -5585,7 +5585,7 @@
           <p:cNvPr id="54" name="">
             <a:extLst xmlns:a="http://schemas.openxmlformats.org/drawingml/2006/main">
               <a:ext uri="{FF2B5EF4-FFF2-40B4-BE49-F238E27FC236}">
-                <a16:creationId xmlns:a16="http://schemas.microsoft.com/office/drawing/2014/main" id="{B9039171-AC69-4D5D-A613-65814AC2AC0D}"/>
+                <a16:creationId xmlns:a16="http://schemas.microsoft.com/office/drawing/2014/main" id="{40DA0955-AD27-4231-B78D-39E525F4D26C}"/>
               </a:ext>
             </a:extLst>
           </p:cNvPr>
@@ -5637,7 +5637,7 @@
           <p:cNvPr id="55" name="">
             <a:extLst xmlns:a="http://schemas.openxmlformats.org/drawingml/2006/main">
               <a:ext uri="{FF2B5EF4-FFF2-40B4-BE49-F238E27FC236}">
-                <a16:creationId xmlns:a16="http://schemas.microsoft.com/office/drawing/2014/main" id="{3BB57B10-4419-4416-AE45-42499C034271}"/>
+                <a16:creationId xmlns:a16="http://schemas.microsoft.com/office/drawing/2014/main" id="{E9653D03-D221-47BF-9865-44E9030B94DC}"/>
               </a:ext>
             </a:extLst>
           </p:cNvPr>
@@ -5689,7 +5689,7 @@
           <p:cNvPr id="56" name="">
             <a:extLst xmlns:a="http://schemas.openxmlformats.org/drawingml/2006/main">
               <a:ext uri="{FF2B5EF4-FFF2-40B4-BE49-F238E27FC236}">
-                <a16:creationId xmlns:a16="http://schemas.microsoft.com/office/drawing/2014/main" id="{85C621B1-B430-4FF0-881C-7886E25A352E}"/>
+                <a16:creationId xmlns:a16="http://schemas.microsoft.com/office/drawing/2014/main" id="{7948E13B-2B10-42E1-AF0A-AAA681792BD7}"/>
               </a:ext>
             </a:extLst>
           </p:cNvPr>
@@ -5741,7 +5741,7 @@
           <p:cNvPr id="57" name="">
             <a:extLst xmlns:a="http://schemas.openxmlformats.org/drawingml/2006/main">
               <a:ext uri="{FF2B5EF4-FFF2-40B4-BE49-F238E27FC236}">
-                <a16:creationId xmlns:a16="http://schemas.microsoft.com/office/drawing/2014/main" id="{2E1DAB33-7A61-4360-9288-F71E6A92C63F}"/>
+                <a16:creationId xmlns:a16="http://schemas.microsoft.com/office/drawing/2014/main" id="{9D2C9698-181C-498F-B5B1-A1C6B0D38D4F}"/>
               </a:ext>
             </a:extLst>
           </p:cNvPr>
@@ -5772,7 +5772,7 @@
           <p:cNvPr id="58" name="">
             <a:extLst xmlns:a="http://schemas.openxmlformats.org/drawingml/2006/main">
               <a:ext uri="{FF2B5EF4-FFF2-40B4-BE49-F238E27FC236}">
-                <a16:creationId xmlns:a16="http://schemas.microsoft.com/office/drawing/2014/main" id="{119F5768-1C21-4A4B-B2C6-4B0861EACE34}"/>
+                <a16:creationId xmlns:a16="http://schemas.microsoft.com/office/drawing/2014/main" id="{74C86689-FB4F-4D40-90B1-3DDF0E263804}"/>
               </a:ext>
             </a:extLst>
           </p:cNvPr>
@@ -5803,7 +5803,7 @@
           <p:cNvPr id="59" name="">
             <a:extLst xmlns:a="http://schemas.openxmlformats.org/drawingml/2006/main">
               <a:ext uri="{FF2B5EF4-FFF2-40B4-BE49-F238E27FC236}">
-                <a16:creationId xmlns:a16="http://schemas.microsoft.com/office/drawing/2014/main" id="{9068B297-B33E-46BD-BCEA-4793209F785B}"/>
+                <a16:creationId xmlns:a16="http://schemas.microsoft.com/office/drawing/2014/main" id="{5FAD140D-2014-4CED-B932-0301245C2DF3}"/>
               </a:ext>
             </a:extLst>
           </p:cNvPr>
@@ -5855,7 +5855,7 @@
           <p:cNvPr id="60" name="">
             <a:extLst xmlns:a="http://schemas.openxmlformats.org/drawingml/2006/main">
               <a:ext uri="{FF2B5EF4-FFF2-40B4-BE49-F238E27FC236}">
-                <a16:creationId xmlns:a16="http://schemas.microsoft.com/office/drawing/2014/main" id="{72778E32-4AC0-4211-BFAB-EB6CFAE785E9}"/>
+                <a16:creationId xmlns:a16="http://schemas.microsoft.com/office/drawing/2014/main" id="{2006CB67-C2E6-44EB-95B9-0D1BAAA512FF}"/>
               </a:ext>
             </a:extLst>
           </p:cNvPr>
@@ -5907,7 +5907,7 @@
           <p:cNvPr id="61" name="">
             <a:extLst xmlns:a="http://schemas.openxmlformats.org/drawingml/2006/main">
               <a:ext uri="{FF2B5EF4-FFF2-40B4-BE49-F238E27FC236}">
-                <a16:creationId xmlns:a16="http://schemas.microsoft.com/office/drawing/2014/main" id="{2E2A61A7-169B-46E7-BEE3-49931DF540C4}"/>
+                <a16:creationId xmlns:a16="http://schemas.microsoft.com/office/drawing/2014/main" id="{01A74C67-739F-457B-A98F-F78ADEE427AC}"/>
               </a:ext>
             </a:extLst>
           </p:cNvPr>
@@ -5959,7 +5959,7 @@
           <p:cNvPr id="62" name="">
             <a:extLst xmlns:a="http://schemas.openxmlformats.org/drawingml/2006/main">
               <a:ext uri="{FF2B5EF4-FFF2-40B4-BE49-F238E27FC236}">
-                <a16:creationId xmlns:a16="http://schemas.microsoft.com/office/drawing/2014/main" id="{661F8C0F-EE46-421C-B1EB-F22E5520FF3D}"/>
+                <a16:creationId xmlns:a16="http://schemas.microsoft.com/office/drawing/2014/main" id="{BE92D1D3-662D-4BD4-B033-66BB74C87266}"/>
               </a:ext>
             </a:extLst>
           </p:cNvPr>
@@ -6011,7 +6011,7 @@
           <p:cNvPr id="63" name="">
             <a:extLst xmlns:a="http://schemas.openxmlformats.org/drawingml/2006/main">
               <a:ext uri="{FF2B5EF4-FFF2-40B4-BE49-F238E27FC236}">
-                <a16:creationId xmlns:a16="http://schemas.microsoft.com/office/drawing/2014/main" id="{450E7963-FD9A-4296-9F26-590AA4300D29}"/>
+                <a16:creationId xmlns:a16="http://schemas.microsoft.com/office/drawing/2014/main" id="{FB4B14D0-66AC-4976-8A30-AF0C5FE829A6}"/>
               </a:ext>
             </a:extLst>
           </p:cNvPr>
@@ -6063,7 +6063,7 @@
           <p:cNvPr id="64" name="">
             <a:extLst xmlns:a="http://schemas.openxmlformats.org/drawingml/2006/main">
               <a:ext uri="{FF2B5EF4-FFF2-40B4-BE49-F238E27FC236}">
-                <a16:creationId xmlns:a16="http://schemas.microsoft.com/office/drawing/2014/main" id="{863C23C3-182F-49F3-8866-3479DCAF6230}"/>
+                <a16:creationId xmlns:a16="http://schemas.microsoft.com/office/drawing/2014/main" id="{F564FDD8-E5A2-41A8-A361-83C25E8D5C64}"/>
               </a:ext>
             </a:extLst>
           </p:cNvPr>
@@ -6094,7 +6094,7 @@
           <p:cNvPr id="65" name="">
             <a:extLst xmlns:a="http://schemas.openxmlformats.org/drawingml/2006/main">
               <a:ext uri="{FF2B5EF4-FFF2-40B4-BE49-F238E27FC236}">
-                <a16:creationId xmlns:a16="http://schemas.microsoft.com/office/drawing/2014/main" id="{23BE99B2-F07E-45B0-A9CD-CF3707FF6DCE}"/>
+                <a16:creationId xmlns:a16="http://schemas.microsoft.com/office/drawing/2014/main" id="{362DF994-2C81-4E47-8784-8360C0CFCCCF}"/>
               </a:ext>
             </a:extLst>
           </p:cNvPr>
@@ -6146,7 +6146,7 @@
           <p:cNvPr id="66" name="">
             <a:extLst xmlns:a="http://schemas.openxmlformats.org/drawingml/2006/main">
               <a:ext uri="{FF2B5EF4-FFF2-40B4-BE49-F238E27FC236}">
-                <a16:creationId xmlns:a16="http://schemas.microsoft.com/office/drawing/2014/main" id="{30C3427B-0652-4665-805E-8FCDFB9CD8FA}"/>
+                <a16:creationId xmlns:a16="http://schemas.microsoft.com/office/drawing/2014/main" id="{B6056CF2-D00A-4261-9896-B4D9D7287D70}"/>
               </a:ext>
             </a:extLst>
           </p:cNvPr>
@@ -6198,7 +6198,7 @@
           <p:cNvPr id="67" name="">
             <a:extLst xmlns:a="http://schemas.openxmlformats.org/drawingml/2006/main">
               <a:ext uri="{FF2B5EF4-FFF2-40B4-BE49-F238E27FC236}">
-                <a16:creationId xmlns:a16="http://schemas.microsoft.com/office/drawing/2014/main" id="{4482319E-FB6C-43C3-BEDA-B5272F83BA10}"/>
+                <a16:creationId xmlns:a16="http://schemas.microsoft.com/office/drawing/2014/main" id="{6517714F-3237-476E-AB69-C007677F34AB}"/>
               </a:ext>
             </a:extLst>
           </p:cNvPr>
@@ -6250,7 +6250,7 @@
           <p:cNvPr id="68" name="">
             <a:extLst xmlns:a="http://schemas.openxmlformats.org/drawingml/2006/main">
               <a:ext uri="{FF2B5EF4-FFF2-40B4-BE49-F238E27FC236}">
-                <a16:creationId xmlns:a16="http://schemas.microsoft.com/office/drawing/2014/main" id="{34E8F79F-70EC-45D9-859D-81724C992F8E}"/>
+                <a16:creationId xmlns:a16="http://schemas.microsoft.com/office/drawing/2014/main" id="{E7EB0C50-CBB2-45FA-8A66-D806350257AA}"/>
               </a:ext>
             </a:extLst>
           </p:cNvPr>
@@ -6302,7 +6302,7 @@
           <p:cNvPr id="69" name="">
             <a:extLst xmlns:a="http://schemas.openxmlformats.org/drawingml/2006/main">
               <a:ext uri="{FF2B5EF4-FFF2-40B4-BE49-F238E27FC236}">
-                <a16:creationId xmlns:a16="http://schemas.microsoft.com/office/drawing/2014/main" id="{1465D256-8DA0-4C17-B184-D8149430A8A7}"/>
+                <a16:creationId xmlns:a16="http://schemas.microsoft.com/office/drawing/2014/main" id="{C2375F29-B864-4250-AC0A-111BF07D2CF2}"/>
               </a:ext>
             </a:extLst>
           </p:cNvPr>
@@ -6354,7 +6354,7 @@
           <p:cNvPr id="70" name="">
             <a:extLst xmlns:a="http://schemas.openxmlformats.org/drawingml/2006/main">
               <a:ext uri="{FF2B5EF4-FFF2-40B4-BE49-F238E27FC236}">
-                <a16:creationId xmlns:a16="http://schemas.microsoft.com/office/drawing/2014/main" id="{DC8F7DE7-890C-4E8E-B794-63193B32BCA0}"/>
+                <a16:creationId xmlns:a16="http://schemas.microsoft.com/office/drawing/2014/main" id="{1E5D3580-6236-4348-A604-E04FEF51185B}"/>
               </a:ext>
             </a:extLst>
           </p:cNvPr>
@@ -6385,7 +6385,7 @@
           <p:cNvPr id="71" name="">
             <a:extLst xmlns:a="http://schemas.openxmlformats.org/drawingml/2006/main">
               <a:ext uri="{FF2B5EF4-FFF2-40B4-BE49-F238E27FC236}">
-                <a16:creationId xmlns:a16="http://schemas.microsoft.com/office/drawing/2014/main" id="{202E1B8C-3023-4C84-8F63-B36B955518B7}"/>
+                <a16:creationId xmlns:a16="http://schemas.microsoft.com/office/drawing/2014/main" id="{BE13A842-2F6C-4EB2-A3D4-4739CCEC6C5D}"/>
               </a:ext>
             </a:extLst>
           </p:cNvPr>
@@ -6416,7 +6416,7 @@
           <p:cNvPr id="72" name="">
             <a:extLst xmlns:a="http://schemas.openxmlformats.org/drawingml/2006/main">
               <a:ext uri="{FF2B5EF4-FFF2-40B4-BE49-F238E27FC236}">
-                <a16:creationId xmlns:a16="http://schemas.microsoft.com/office/drawing/2014/main" id="{08B2DFB9-718D-40E0-8727-34BCDDA1E739}"/>
+                <a16:creationId xmlns:a16="http://schemas.microsoft.com/office/drawing/2014/main" id="{22F37F82-F4EE-45D8-9886-57012E034F94}"/>
               </a:ext>
             </a:extLst>
           </p:cNvPr>
@@ -6468,7 +6468,7 @@
           <p:cNvPr id="73" name="">
             <a:extLst xmlns:a="http://schemas.openxmlformats.org/drawingml/2006/main">
               <a:ext uri="{FF2B5EF4-FFF2-40B4-BE49-F238E27FC236}">
-                <a16:creationId xmlns:a16="http://schemas.microsoft.com/office/drawing/2014/main" id="{FFC35EDD-CB5A-4918-A1D0-B26A10133E7D}"/>
+                <a16:creationId xmlns:a16="http://schemas.microsoft.com/office/drawing/2014/main" id="{71A89CE0-86CD-458B-B5F3-3C9321353DC6}"/>
               </a:ext>
             </a:extLst>
           </p:cNvPr>
@@ -6520,7 +6520,7 @@
           <p:cNvPr id="74" name="">
             <a:extLst xmlns:a="http://schemas.openxmlformats.org/drawingml/2006/main">
               <a:ext uri="{FF2B5EF4-FFF2-40B4-BE49-F238E27FC236}">
-                <a16:creationId xmlns:a16="http://schemas.microsoft.com/office/drawing/2014/main" id="{AAE5CD20-8C45-481B-B95B-815B373958AC}"/>
+                <a16:creationId xmlns:a16="http://schemas.microsoft.com/office/drawing/2014/main" id="{218AE468-D109-44C1-A11D-D8C8DBAD0690}"/>
               </a:ext>
             </a:extLst>
           </p:cNvPr>
@@ -6572,7 +6572,7 @@
           <p:cNvPr id="75" name="">
             <a:extLst xmlns:a="http://schemas.openxmlformats.org/drawingml/2006/main">
               <a:ext uri="{FF2B5EF4-FFF2-40B4-BE49-F238E27FC236}">
-                <a16:creationId xmlns:a16="http://schemas.microsoft.com/office/drawing/2014/main" id="{F49156FB-6076-49C1-8514-B7DD646B6660}"/>
+                <a16:creationId xmlns:a16="http://schemas.microsoft.com/office/drawing/2014/main" id="{E0CB7DAA-1305-4CE5-83F0-89075037A2D0}"/>
               </a:ext>
             </a:extLst>
           </p:cNvPr>
@@ -6624,7 +6624,7 @@
           <p:cNvPr id="76" name="">
             <a:extLst xmlns:a="http://schemas.openxmlformats.org/drawingml/2006/main">
               <a:ext uri="{FF2B5EF4-FFF2-40B4-BE49-F238E27FC236}">
-                <a16:creationId xmlns:a16="http://schemas.microsoft.com/office/drawing/2014/main" id="{EE0E7936-9078-4088-BD5A-8B8DF3ABB240}"/>
+                <a16:creationId xmlns:a16="http://schemas.microsoft.com/office/drawing/2014/main" id="{D84DED49-A9E3-48BD-A9D1-532B34A6C9E8}"/>
               </a:ext>
             </a:extLst>
           </p:cNvPr>
@@ -6676,7 +6676,7 @@
           <p:cNvPr id="77" name="">
             <a:extLst xmlns:a="http://schemas.openxmlformats.org/drawingml/2006/main">
               <a:ext uri="{FF2B5EF4-FFF2-40B4-BE49-F238E27FC236}">
-                <a16:creationId xmlns:a16="http://schemas.microsoft.com/office/drawing/2014/main" id="{720DA5F0-EC82-4F28-ACCD-4DD6F1C6AEF4}"/>
+                <a16:creationId xmlns:a16="http://schemas.microsoft.com/office/drawing/2014/main" id="{DE01B67F-8230-4595-9F63-8B36CCC7939D}"/>
               </a:ext>
             </a:extLst>
           </p:cNvPr>
@@ -6707,7 +6707,7 @@
           <p:cNvPr id="78" name="">
             <a:extLst xmlns:a="http://schemas.openxmlformats.org/drawingml/2006/main">
               <a:ext uri="{FF2B5EF4-FFF2-40B4-BE49-F238E27FC236}">
-                <a16:creationId xmlns:a16="http://schemas.microsoft.com/office/drawing/2014/main" id="{5153027E-112F-40BB-B219-D1F3FA30C433}"/>
+                <a16:creationId xmlns:a16="http://schemas.microsoft.com/office/drawing/2014/main" id="{8983CA64-5930-4E99-ABDC-0B094F399B16}"/>
               </a:ext>
             </a:extLst>
           </p:cNvPr>
@@ -6759,7 +6759,7 @@
           <p:cNvPr id="79" name="">
             <a:extLst xmlns:a="http://schemas.openxmlformats.org/drawingml/2006/main">
               <a:ext uri="{FF2B5EF4-FFF2-40B4-BE49-F238E27FC236}">
-                <a16:creationId xmlns:a16="http://schemas.microsoft.com/office/drawing/2014/main" id="{10397999-76E3-4EE2-B9A1-BC87E6FBFA16}"/>
+                <a16:creationId xmlns:a16="http://schemas.microsoft.com/office/drawing/2014/main" id="{D0C05AC0-086C-4754-BD15-1F81665D2540}"/>
               </a:ext>
             </a:extLst>
           </p:cNvPr>
@@ -6811,7 +6811,7 @@
           <p:cNvPr id="80" name="">
             <a:extLst xmlns:a="http://schemas.openxmlformats.org/drawingml/2006/main">
               <a:ext uri="{FF2B5EF4-FFF2-40B4-BE49-F238E27FC236}">
-                <a16:creationId xmlns:a16="http://schemas.microsoft.com/office/drawing/2014/main" id="{83C57116-FC4D-444E-ADDF-738B200F17AC}"/>
+                <a16:creationId xmlns:a16="http://schemas.microsoft.com/office/drawing/2014/main" id="{F6BB91A8-8570-4222-8B07-9E3C3F09001C}"/>
               </a:ext>
             </a:extLst>
           </p:cNvPr>
@@ -6863,7 +6863,7 @@
           <p:cNvPr id="81" name="">
             <a:extLst xmlns:a="http://schemas.openxmlformats.org/drawingml/2006/main">
               <a:ext uri="{FF2B5EF4-FFF2-40B4-BE49-F238E27FC236}">
-                <a16:creationId xmlns:a16="http://schemas.microsoft.com/office/drawing/2014/main" id="{2BD9E371-AA1B-425A-A543-FC60B94CE62B}"/>
+                <a16:creationId xmlns:a16="http://schemas.microsoft.com/office/drawing/2014/main" id="{455230B6-E35E-4E54-BDD0-A0D4FF9BBFF7}"/>
               </a:ext>
             </a:extLst>
           </p:cNvPr>
@@ -6915,7 +6915,7 @@
           <p:cNvPr id="82" name="">
             <a:extLst xmlns:a="http://schemas.openxmlformats.org/drawingml/2006/main">
               <a:ext uri="{FF2B5EF4-FFF2-40B4-BE49-F238E27FC236}">
-                <a16:creationId xmlns:a16="http://schemas.microsoft.com/office/drawing/2014/main" id="{925FAAFC-56AC-432E-8A7D-06D52E02FEED}"/>
+                <a16:creationId xmlns:a16="http://schemas.microsoft.com/office/drawing/2014/main" id="{2E3D4D19-1CF6-4A8D-9BC2-01C88F15EA6A}"/>
               </a:ext>
             </a:extLst>
           </p:cNvPr>
@@ -6967,7 +6967,7 @@
           <p:cNvPr id="83" name="">
             <a:extLst xmlns:a="http://schemas.openxmlformats.org/drawingml/2006/main">
               <a:ext uri="{FF2B5EF4-FFF2-40B4-BE49-F238E27FC236}">
-                <a16:creationId xmlns:a16="http://schemas.microsoft.com/office/drawing/2014/main" id="{A5C5AF9A-4217-4EAC-9255-B3AA6F138DEA}"/>
+                <a16:creationId xmlns:a16="http://schemas.microsoft.com/office/drawing/2014/main" id="{C9B58877-C0A1-4429-9DF8-D2D6E28A69E4}"/>
               </a:ext>
             </a:extLst>
           </p:cNvPr>
@@ -6998,7 +6998,7 @@
           <p:cNvPr id="84" name="">
             <a:extLst xmlns:a="http://schemas.openxmlformats.org/drawingml/2006/main">
               <a:ext uri="{FF2B5EF4-FFF2-40B4-BE49-F238E27FC236}">
-                <a16:creationId xmlns:a16="http://schemas.microsoft.com/office/drawing/2014/main" id="{34E50078-D5FF-4602-8626-2A7CBDAB0E5F}"/>
+                <a16:creationId xmlns:a16="http://schemas.microsoft.com/office/drawing/2014/main" id="{8BB2062B-BA03-4C0A-B652-15EFC1825D14}"/>
               </a:ext>
             </a:extLst>
           </p:cNvPr>
@@ -7029,7 +7029,7 @@
           <p:cNvPr id="85" name="">
             <a:extLst xmlns:a="http://schemas.openxmlformats.org/drawingml/2006/main">
               <a:ext uri="{FF2B5EF4-FFF2-40B4-BE49-F238E27FC236}">
-                <a16:creationId xmlns:a16="http://schemas.microsoft.com/office/drawing/2014/main" id="{4D75BBE9-A8BF-4C12-A58F-3650740F2F89}"/>
+                <a16:creationId xmlns:a16="http://schemas.microsoft.com/office/drawing/2014/main" id="{A76621DE-2AA8-4E46-A52F-6F71399529C8}"/>
               </a:ext>
             </a:extLst>
           </p:cNvPr>
@@ -7081,7 +7081,7 @@
           <p:cNvPr id="86" name="">
             <a:extLst xmlns:a="http://schemas.openxmlformats.org/drawingml/2006/main">
               <a:ext uri="{FF2B5EF4-FFF2-40B4-BE49-F238E27FC236}">
-                <a16:creationId xmlns:a16="http://schemas.microsoft.com/office/drawing/2014/main" id="{D051EAFC-9007-49DD-8A86-CF14B972D7F7}"/>
+                <a16:creationId xmlns:a16="http://schemas.microsoft.com/office/drawing/2014/main" id="{1D3D480A-A9EE-44A0-BDB4-4A7BEF0E0032}"/>
               </a:ext>
             </a:extLst>
           </p:cNvPr>
@@ -7133,7 +7133,7 @@
           <p:cNvPr id="87" name="">
             <a:extLst xmlns:a="http://schemas.openxmlformats.org/drawingml/2006/main">
               <a:ext uri="{FF2B5EF4-FFF2-40B4-BE49-F238E27FC236}">
-                <a16:creationId xmlns:a16="http://schemas.microsoft.com/office/drawing/2014/main" id="{B812A6B9-07B5-4EB8-8C4B-FC8590BD078E}"/>
+                <a16:creationId xmlns:a16="http://schemas.microsoft.com/office/drawing/2014/main" id="{DA6C3D56-CC94-422D-9098-D13A520B99D4}"/>
               </a:ext>
             </a:extLst>
           </p:cNvPr>
@@ -7185,7 +7185,7 @@
           <p:cNvPr id="88" name="">
             <a:extLst xmlns:a="http://schemas.openxmlformats.org/drawingml/2006/main">
               <a:ext uri="{FF2B5EF4-FFF2-40B4-BE49-F238E27FC236}">
-                <a16:creationId xmlns:a16="http://schemas.microsoft.com/office/drawing/2014/main" id="{D8780B49-F76C-4E97-BE79-72152F23E7B3}"/>
+                <a16:creationId xmlns:a16="http://schemas.microsoft.com/office/drawing/2014/main" id="{FB723287-5475-4784-A8CE-CDA252D2C838}"/>
               </a:ext>
             </a:extLst>
           </p:cNvPr>
@@ -7237,7 +7237,7 @@
           <p:cNvPr id="89" name="">
             <a:extLst xmlns:a="http://schemas.openxmlformats.org/drawingml/2006/main">
               <a:ext uri="{FF2B5EF4-FFF2-40B4-BE49-F238E27FC236}">
-                <a16:creationId xmlns:a16="http://schemas.microsoft.com/office/drawing/2014/main" id="{3E8D7CD2-DABD-4885-AF41-D0C8157E62EC}"/>
+                <a16:creationId xmlns:a16="http://schemas.microsoft.com/office/drawing/2014/main" id="{E55B504E-A8E1-48A0-AD3D-F4695CD3AC8F}"/>
               </a:ext>
             </a:extLst>
           </p:cNvPr>
@@ -7289,7 +7289,7 @@
           <p:cNvPr id="90" name="">
             <a:extLst xmlns:a="http://schemas.openxmlformats.org/drawingml/2006/main">
               <a:ext uri="{FF2B5EF4-FFF2-40B4-BE49-F238E27FC236}">
-                <a16:creationId xmlns:a16="http://schemas.microsoft.com/office/drawing/2014/main" id="{570B4D3F-6417-4844-A53E-C7A729E520C3}"/>
+                <a16:creationId xmlns:a16="http://schemas.microsoft.com/office/drawing/2014/main" id="{216529D4-5EEF-4AE6-897D-C9F7C493CAA5}"/>
               </a:ext>
             </a:extLst>
           </p:cNvPr>
@@ -7320,7 +7320,7 @@
           <p:cNvPr id="91" name="">
             <a:extLst xmlns:a="http://schemas.openxmlformats.org/drawingml/2006/main">
               <a:ext uri="{FF2B5EF4-FFF2-40B4-BE49-F238E27FC236}">
-                <a16:creationId xmlns:a16="http://schemas.microsoft.com/office/drawing/2014/main" id="{D34F4C82-7890-459B-AE35-9EB919777F7E}"/>
+                <a16:creationId xmlns:a16="http://schemas.microsoft.com/office/drawing/2014/main" id="{CA158913-5641-4313-BC4F-2E44D2D5A060}"/>
               </a:ext>
             </a:extLst>
           </p:cNvPr>
@@ -7372,7 +7372,7 @@
           <p:cNvPr id="92" name="">
             <a:extLst xmlns:a="http://schemas.openxmlformats.org/drawingml/2006/main">
               <a:ext uri="{FF2B5EF4-FFF2-40B4-BE49-F238E27FC236}">
-                <a16:creationId xmlns:a16="http://schemas.microsoft.com/office/drawing/2014/main" id="{CEB4E597-819C-40C4-A188-901A09CE263E}"/>
+                <a16:creationId xmlns:a16="http://schemas.microsoft.com/office/drawing/2014/main" id="{2B8FFC51-4511-461E-BE24-4ACCBEFD4DA3}"/>
               </a:ext>
             </a:extLst>
           </p:cNvPr>
@@ -7424,7 +7424,7 @@
           <p:cNvPr id="93" name="">
             <a:extLst xmlns:a="http://schemas.openxmlformats.org/drawingml/2006/main">
               <a:ext uri="{FF2B5EF4-FFF2-40B4-BE49-F238E27FC236}">
-                <a16:creationId xmlns:a16="http://schemas.microsoft.com/office/drawing/2014/main" id="{3AAFFDE8-E2FB-491F-8431-05CA48F42737}"/>
+                <a16:creationId xmlns:a16="http://schemas.microsoft.com/office/drawing/2014/main" id="{964CD03B-784C-4F00-BFAA-57C0ED16C338}"/>
               </a:ext>
             </a:extLst>
           </p:cNvPr>
@@ -7476,7 +7476,7 @@
           <p:cNvPr id="94" name="">
             <a:extLst xmlns:a="http://schemas.openxmlformats.org/drawingml/2006/main">
               <a:ext uri="{FF2B5EF4-FFF2-40B4-BE49-F238E27FC236}">
-                <a16:creationId xmlns:a16="http://schemas.microsoft.com/office/drawing/2014/main" id="{4BD42EFF-2D98-4638-950D-0B8BE8DB07AE}"/>
+                <a16:creationId xmlns:a16="http://schemas.microsoft.com/office/drawing/2014/main" id="{941DCD72-E9AF-466A-90DB-4465E147E3E9}"/>
               </a:ext>
             </a:extLst>
           </p:cNvPr>
@@ -7528,7 +7528,7 @@
           <p:cNvPr id="95" name="">
             <a:extLst xmlns:a="http://schemas.openxmlformats.org/drawingml/2006/main">
               <a:ext uri="{FF2B5EF4-FFF2-40B4-BE49-F238E27FC236}">
-                <a16:creationId xmlns:a16="http://schemas.microsoft.com/office/drawing/2014/main" id="{7995A1D8-D84A-4DC8-9B57-A1F197C48B91}"/>
+                <a16:creationId xmlns:a16="http://schemas.microsoft.com/office/drawing/2014/main" id="{2026ACFF-36A0-4691-8F9C-9EE4B91DC8AF}"/>
               </a:ext>
             </a:extLst>
           </p:cNvPr>
@@ -7580,7 +7580,7 @@
           <p:cNvPr id="96" name="">
             <a:extLst xmlns:a="http://schemas.openxmlformats.org/drawingml/2006/main">
               <a:ext uri="{FF2B5EF4-FFF2-40B4-BE49-F238E27FC236}">
-                <a16:creationId xmlns:a16="http://schemas.microsoft.com/office/drawing/2014/main" id="{BB6E5761-DCD6-4E95-86E7-02E673039871}"/>
+                <a16:creationId xmlns:a16="http://schemas.microsoft.com/office/drawing/2014/main" id="{C17AAEA5-D342-47E2-B221-6E80A277DAC0}"/>
               </a:ext>
             </a:extLst>
           </p:cNvPr>
@@ -7611,7 +7611,7 @@
           <p:cNvPr id="97" name="">
             <a:extLst xmlns:a="http://schemas.openxmlformats.org/drawingml/2006/main">
               <a:ext uri="{FF2B5EF4-FFF2-40B4-BE49-F238E27FC236}">
-                <a16:creationId xmlns:a16="http://schemas.microsoft.com/office/drawing/2014/main" id="{5A0C2DF1-1E2F-4CB3-8B4B-87F47C008C1E}"/>
+                <a16:creationId xmlns:a16="http://schemas.microsoft.com/office/drawing/2014/main" id="{655DE528-BE79-475C-8236-A4D34592EF28}"/>
               </a:ext>
             </a:extLst>
           </p:cNvPr>
@@ -7642,7 +7642,7 @@
           <p:cNvPr id="98" name="">
             <a:extLst xmlns:a="http://schemas.openxmlformats.org/drawingml/2006/main">
               <a:ext uri="{FF2B5EF4-FFF2-40B4-BE49-F238E27FC236}">
-                <a16:creationId xmlns:a16="http://schemas.microsoft.com/office/drawing/2014/main" id="{1BDB875E-AE4B-40F4-A8DE-B8200345CB2B}"/>
+                <a16:creationId xmlns:a16="http://schemas.microsoft.com/office/drawing/2014/main" id="{6ECC6582-D605-4317-ABC7-9BB8C7BE44B6}"/>
               </a:ext>
             </a:extLst>
           </p:cNvPr>
@@ -7694,7 +7694,7 @@
           <p:cNvPr id="99" name="">
             <a:extLst xmlns:a="http://schemas.openxmlformats.org/drawingml/2006/main">
               <a:ext uri="{FF2B5EF4-FFF2-40B4-BE49-F238E27FC236}">
-                <a16:creationId xmlns:a16="http://schemas.microsoft.com/office/drawing/2014/main" id="{2AACA0F2-5BBB-43FB-846C-0341D487A813}"/>
+                <a16:creationId xmlns:a16="http://schemas.microsoft.com/office/drawing/2014/main" id="{1228A04D-B0BB-41FA-9533-BAE964DE1B54}"/>
               </a:ext>
             </a:extLst>
           </p:cNvPr>
@@ -7746,7 +7746,7 @@
           <p:cNvPr id="100" name="">
             <a:extLst xmlns:a="http://schemas.openxmlformats.org/drawingml/2006/main">
               <a:ext uri="{FF2B5EF4-FFF2-40B4-BE49-F238E27FC236}">
-                <a16:creationId xmlns:a16="http://schemas.microsoft.com/office/drawing/2014/main" id="{1461FA3C-996C-4BE5-9985-9D50701B663B}"/>
+                <a16:creationId xmlns:a16="http://schemas.microsoft.com/office/drawing/2014/main" id="{726B0B01-3CD1-4A7F-90FA-91EE660A39C7}"/>
               </a:ext>
             </a:extLst>
           </p:cNvPr>
@@ -7798,7 +7798,7 @@
           <p:cNvPr id="101" name="">
             <a:extLst xmlns:a="http://schemas.openxmlformats.org/drawingml/2006/main">
               <a:ext uri="{FF2B5EF4-FFF2-40B4-BE49-F238E27FC236}">
-                <a16:creationId xmlns:a16="http://schemas.microsoft.com/office/drawing/2014/main" id="{386970B0-08C6-4380-BFB1-4F939843DC09}"/>
+                <a16:creationId xmlns:a16="http://schemas.microsoft.com/office/drawing/2014/main" id="{BE595D8B-6D9B-4F03-A09F-933A226B3D7E}"/>
               </a:ext>
             </a:extLst>
           </p:cNvPr>
@@ -7850,7 +7850,7 @@
           <p:cNvPr id="102" name="">
             <a:extLst xmlns:a="http://schemas.openxmlformats.org/drawingml/2006/main">
               <a:ext uri="{FF2B5EF4-FFF2-40B4-BE49-F238E27FC236}">
-                <a16:creationId xmlns:a16="http://schemas.microsoft.com/office/drawing/2014/main" id="{A29873CF-1F38-44DA-A769-F8FEDD13A17B}"/>
+                <a16:creationId xmlns:a16="http://schemas.microsoft.com/office/drawing/2014/main" id="{CFA54211-6DFB-4949-9942-754BAF213B11}"/>
               </a:ext>
             </a:extLst>
           </p:cNvPr>
@@ -7900,7 +7900,7 @@
     </p:spTree>
     <p:extLst>
       <p:ext uri="{BB962C8B-B14F-4D97-AF65-F5344CB8AC3E}">
-        <p14:creationId xmlns:p14="http://schemas.microsoft.com/office/powerpoint/2010/main" val="567075672"/>
+        <p14:creationId xmlns:p14="http://schemas.microsoft.com/office/powerpoint/2010/main" val="1622623126"/>
       </p:ext>
     </p:extLst>
   </p:cSld>
@@ -7931,7 +7931,7 @@
           <p:cNvPr id="98" name="">
             <a:extLst xmlns:a="http://schemas.openxmlformats.org/drawingml/2006/main">
               <a:ext uri="{FF2B5EF4-FFF2-40B4-BE49-F238E27FC236}">
-                <a16:creationId xmlns:a16="http://schemas.microsoft.com/office/drawing/2014/main" id="{2AE54842-B25E-4AC1-A647-3792DF8D44A4}"/>
+                <a16:creationId xmlns:a16="http://schemas.microsoft.com/office/drawing/2014/main" id="{EC37A232-5A6F-428E-97DC-B202F4C96C33}"/>
               </a:ext>
             </a:extLst>
           </p:cNvPr>
@@ -7964,7 +7964,7 @@
           <p:cNvPr id="2" name="">
             <a:extLst xmlns:a="http://schemas.openxmlformats.org/drawingml/2006/main">
               <a:ext uri="{FF2B5EF4-FFF2-40B4-BE49-F238E27FC236}">
-                <a16:creationId xmlns:a16="http://schemas.microsoft.com/office/drawing/2014/main" id="{9B99374D-FEBF-4815-B770-95D86BC57F13}"/>
+                <a16:creationId xmlns:a16="http://schemas.microsoft.com/office/drawing/2014/main" id="{178EE1AE-5D6F-4D51-ACA4-14FE1919B011}"/>
               </a:ext>
             </a:extLst>
           </p:cNvPr>
@@ -7995,7 +7995,7 @@
           <p:cNvPr id="3" name="">
             <a:extLst xmlns:a="http://schemas.openxmlformats.org/drawingml/2006/main">
               <a:ext uri="{FF2B5EF4-FFF2-40B4-BE49-F238E27FC236}">
-                <a16:creationId xmlns:a16="http://schemas.microsoft.com/office/drawing/2014/main" id="{CD7D4D34-AA63-4003-8369-4BB0FE1E395F}"/>
+                <a16:creationId xmlns:a16="http://schemas.microsoft.com/office/drawing/2014/main" id="{3A8E1A09-672A-4A5D-8571-2104EB693EA4}"/>
               </a:ext>
             </a:extLst>
           </p:cNvPr>
@@ -8047,7 +8047,7 @@
           <p:cNvPr id="4" name="">
             <a:extLst xmlns:a="http://schemas.openxmlformats.org/drawingml/2006/main">
               <a:ext uri="{FF2B5EF4-FFF2-40B4-BE49-F238E27FC236}">
-                <a16:creationId xmlns:a16="http://schemas.microsoft.com/office/drawing/2014/main" id="{B2754DE7-C01D-41AE-BDFB-15353F1A50E7}"/>
+                <a16:creationId xmlns:a16="http://schemas.microsoft.com/office/drawing/2014/main" id="{3B3891C6-A706-4AFC-ACF8-DB5BC09D9C94}"/>
               </a:ext>
             </a:extLst>
           </p:cNvPr>
@@ -8099,7 +8099,7 @@
           <p:cNvPr id="5" name="">
             <a:extLst xmlns:a="http://schemas.openxmlformats.org/drawingml/2006/main">
               <a:ext uri="{FF2B5EF4-FFF2-40B4-BE49-F238E27FC236}">
-                <a16:creationId xmlns:a16="http://schemas.microsoft.com/office/drawing/2014/main" id="{D5A602DF-9081-4E64-8274-6125CECB3315}"/>
+                <a16:creationId xmlns:a16="http://schemas.microsoft.com/office/drawing/2014/main" id="{B405B026-5094-4B07-8AC1-F8B5AAC5E6EA}"/>
               </a:ext>
             </a:extLst>
           </p:cNvPr>
@@ -8134,7 +8134,7 @@
           <p:nvPr/>
         </p:nvPicPr>
         <p:blipFill>
-          <a:blip xmlns:r="http://schemas.openxmlformats.org/officeDocument/2006/relationships" xmlns:a="http://schemas.openxmlformats.org/drawingml/2006/main" r:embed="Rcd5aae8f826f46d8"/>
+          <a:blip xmlns:r="http://schemas.openxmlformats.org/officeDocument/2006/relationships" xmlns:a="http://schemas.openxmlformats.org/drawingml/2006/main" r:embed="Rc2583640e4e84034"/>
           <a:stretch xmlns:a="http://schemas.openxmlformats.org/drawingml/2006/main"/>
         </p:blipFill>
         <p:spPr>
@@ -8152,7 +8152,7 @@
           <p:cNvPr id="7" name="">
             <a:extLst xmlns:a="http://schemas.openxmlformats.org/drawingml/2006/main">
               <a:ext uri="{FF2B5EF4-FFF2-40B4-BE49-F238E27FC236}">
-                <a16:creationId xmlns:a16="http://schemas.microsoft.com/office/drawing/2014/main" id="{308E9CA2-9F7B-43F2-9042-25211822AD5E}"/>
+                <a16:creationId xmlns:a16="http://schemas.microsoft.com/office/drawing/2014/main" id="{D4F06B05-6590-4255-8287-41C5B58F7EE3}"/>
               </a:ext>
             </a:extLst>
           </p:cNvPr>
@@ -8204,7 +8204,7 @@
           <p:cNvPr id="8" name="">
             <a:extLst xmlns:a="http://schemas.openxmlformats.org/drawingml/2006/main">
               <a:ext uri="{FF2B5EF4-FFF2-40B4-BE49-F238E27FC236}">
-                <a16:creationId xmlns:a16="http://schemas.microsoft.com/office/drawing/2014/main" id="{613D916B-35FA-44C6-83CE-F70003F33815}"/>
+                <a16:creationId xmlns:a16="http://schemas.microsoft.com/office/drawing/2014/main" id="{6AEC31BA-F632-47E0-8AA3-8495F5DE8974}"/>
               </a:ext>
             </a:extLst>
           </p:cNvPr>
@@ -8256,7 +8256,7 @@
           <p:cNvPr id="9" name="">
             <a:extLst xmlns:a="http://schemas.openxmlformats.org/drawingml/2006/main">
               <a:ext uri="{FF2B5EF4-FFF2-40B4-BE49-F238E27FC236}">
-                <a16:creationId xmlns:a16="http://schemas.microsoft.com/office/drawing/2014/main" id="{B319CA7F-D8DF-49C7-928C-DA917FD672CF}"/>
+                <a16:creationId xmlns:a16="http://schemas.microsoft.com/office/drawing/2014/main" id="{1B9FAAFC-F49F-42A8-BD60-7E6E494022A3}"/>
               </a:ext>
             </a:extLst>
           </p:cNvPr>
@@ -8308,7 +8308,7 @@
           <p:cNvPr id="10" name="">
             <a:extLst xmlns:a="http://schemas.openxmlformats.org/drawingml/2006/main">
               <a:ext uri="{FF2B5EF4-FFF2-40B4-BE49-F238E27FC236}">
-                <a16:creationId xmlns:a16="http://schemas.microsoft.com/office/drawing/2014/main" id="{5B7417E4-3AC3-419E-BDFA-7F0BF1DB1026}"/>
+                <a16:creationId xmlns:a16="http://schemas.microsoft.com/office/drawing/2014/main" id="{AF9E5258-A201-44E5-B32D-051591E4FB08}"/>
               </a:ext>
             </a:extLst>
           </p:cNvPr>
@@ -8360,7 +8360,7 @@
           <p:cNvPr id="11" name="">
             <a:extLst xmlns:a="http://schemas.openxmlformats.org/drawingml/2006/main">
               <a:ext uri="{FF2B5EF4-FFF2-40B4-BE49-F238E27FC236}">
-                <a16:creationId xmlns:a16="http://schemas.microsoft.com/office/drawing/2014/main" id="{0B0236AF-F99E-4635-ADFD-C092CE472E1C}"/>
+                <a16:creationId xmlns:a16="http://schemas.microsoft.com/office/drawing/2014/main" id="{3EDB4733-AD53-4853-A680-65984641A735}"/>
               </a:ext>
             </a:extLst>
           </p:cNvPr>
@@ -8391,7 +8391,7 @@
           <p:cNvPr id="12" name="">
             <a:extLst xmlns:a="http://schemas.openxmlformats.org/drawingml/2006/main">
               <a:ext uri="{FF2B5EF4-FFF2-40B4-BE49-F238E27FC236}">
-                <a16:creationId xmlns:a16="http://schemas.microsoft.com/office/drawing/2014/main" id="{674185D3-AF56-4FA3-95A8-9A45F63119D5}"/>
+                <a16:creationId xmlns:a16="http://schemas.microsoft.com/office/drawing/2014/main" id="{40A3BC21-2DD9-486C-BD4C-4064B1648600}"/>
               </a:ext>
             </a:extLst>
           </p:cNvPr>
@@ -8422,7 +8422,7 @@
           <p:cNvPr id="13" name="">
             <a:extLst xmlns:a="http://schemas.openxmlformats.org/drawingml/2006/main">
               <a:ext uri="{FF2B5EF4-FFF2-40B4-BE49-F238E27FC236}">
-                <a16:creationId xmlns:a16="http://schemas.microsoft.com/office/drawing/2014/main" id="{BAE255F0-D4D6-4D0D-A164-43474BFD0B15}"/>
+                <a16:creationId xmlns:a16="http://schemas.microsoft.com/office/drawing/2014/main" id="{D0579F12-809B-437B-B481-5350A0699F68}"/>
               </a:ext>
             </a:extLst>
           </p:cNvPr>
@@ -8474,7 +8474,7 @@
           <p:cNvPr id="14" name="">
             <a:extLst xmlns:a="http://schemas.openxmlformats.org/drawingml/2006/main">
               <a:ext uri="{FF2B5EF4-FFF2-40B4-BE49-F238E27FC236}">
-                <a16:creationId xmlns:a16="http://schemas.microsoft.com/office/drawing/2014/main" id="{FC0A9635-19FB-48ED-82BC-3742C94E07E3}"/>
+                <a16:creationId xmlns:a16="http://schemas.microsoft.com/office/drawing/2014/main" id="{3C98B77D-4680-461E-8BF7-54D8F73930C5}"/>
               </a:ext>
             </a:extLst>
           </p:cNvPr>
@@ -8526,7 +8526,7 @@
           <p:cNvPr id="15" name="">
             <a:extLst xmlns:a="http://schemas.openxmlformats.org/drawingml/2006/main">
               <a:ext uri="{FF2B5EF4-FFF2-40B4-BE49-F238E27FC236}">
-                <a16:creationId xmlns:a16="http://schemas.microsoft.com/office/drawing/2014/main" id="{3C6FAAAB-0211-465F-8778-B55FB06B15F5}"/>
+                <a16:creationId xmlns:a16="http://schemas.microsoft.com/office/drawing/2014/main" id="{1530BA7B-CA61-4ED7-A38A-0CB8E6858135}"/>
               </a:ext>
             </a:extLst>
           </p:cNvPr>
@@ -8578,7 +8578,7 @@
           <p:cNvPr id="16" name="">
             <a:extLst xmlns:a="http://schemas.openxmlformats.org/drawingml/2006/main">
               <a:ext uri="{FF2B5EF4-FFF2-40B4-BE49-F238E27FC236}">
-                <a16:creationId xmlns:a16="http://schemas.microsoft.com/office/drawing/2014/main" id="{2202771C-BF93-4589-904D-F04A8694DAFD}"/>
+                <a16:creationId xmlns:a16="http://schemas.microsoft.com/office/drawing/2014/main" id="{63B84FB2-2705-4BA2-B5C2-5F06E1D0917E}"/>
               </a:ext>
             </a:extLst>
           </p:cNvPr>
@@ -8630,7 +8630,7 @@
           <p:cNvPr id="17" name="">
             <a:extLst xmlns:a="http://schemas.openxmlformats.org/drawingml/2006/main">
               <a:ext uri="{FF2B5EF4-FFF2-40B4-BE49-F238E27FC236}">
-                <a16:creationId xmlns:a16="http://schemas.microsoft.com/office/drawing/2014/main" id="{5E624110-3714-4F71-9524-EF8DF8C49D7B}"/>
+                <a16:creationId xmlns:a16="http://schemas.microsoft.com/office/drawing/2014/main" id="{D3FCB124-4D57-4853-830E-624311CDCE4B}"/>
               </a:ext>
             </a:extLst>
           </p:cNvPr>
@@ -8682,7 +8682,7 @@
           <p:cNvPr id="18" name="">
             <a:extLst xmlns:a="http://schemas.openxmlformats.org/drawingml/2006/main">
               <a:ext uri="{FF2B5EF4-FFF2-40B4-BE49-F238E27FC236}">
-                <a16:creationId xmlns:a16="http://schemas.microsoft.com/office/drawing/2014/main" id="{7F363EC4-C5C2-4740-94B8-1BB3FCC4A146}"/>
+                <a16:creationId xmlns:a16="http://schemas.microsoft.com/office/drawing/2014/main" id="{16C4768E-1EE5-4BA1-BDAB-CDE910C0AC44}"/>
               </a:ext>
             </a:extLst>
           </p:cNvPr>
@@ -8713,7 +8713,7 @@
           <p:cNvPr id="19" name="">
             <a:extLst xmlns:a="http://schemas.openxmlformats.org/drawingml/2006/main">
               <a:ext uri="{FF2B5EF4-FFF2-40B4-BE49-F238E27FC236}">
-                <a16:creationId xmlns:a16="http://schemas.microsoft.com/office/drawing/2014/main" id="{54064A45-0762-42BA-A58A-26CED4E94A98}"/>
+                <a16:creationId xmlns:a16="http://schemas.microsoft.com/office/drawing/2014/main" id="{16BCC6E9-0A4C-403A-A333-CCC973269301}"/>
               </a:ext>
             </a:extLst>
           </p:cNvPr>
@@ -8765,7 +8765,7 @@
           <p:cNvPr id="20" name="">
             <a:extLst xmlns:a="http://schemas.openxmlformats.org/drawingml/2006/main">
               <a:ext uri="{FF2B5EF4-FFF2-40B4-BE49-F238E27FC236}">
-                <a16:creationId xmlns:a16="http://schemas.microsoft.com/office/drawing/2014/main" id="{4A54CED0-860E-4241-85CC-BB3B25350FFB}"/>
+                <a16:creationId xmlns:a16="http://schemas.microsoft.com/office/drawing/2014/main" id="{6FBDCD7E-EF99-44D1-B5B1-B9AF64D0FD3D}"/>
               </a:ext>
             </a:extLst>
           </p:cNvPr>
@@ -8817,7 +8817,7 @@
           <p:cNvPr id="21" name="">
             <a:extLst xmlns:a="http://schemas.openxmlformats.org/drawingml/2006/main">
               <a:ext uri="{FF2B5EF4-FFF2-40B4-BE49-F238E27FC236}">
-                <a16:creationId xmlns:a16="http://schemas.microsoft.com/office/drawing/2014/main" id="{48C710AB-52B0-481C-91BC-B3CDC629AF62}"/>
+                <a16:creationId xmlns:a16="http://schemas.microsoft.com/office/drawing/2014/main" id="{C41A400C-DC74-4B0A-97BF-4CF07928E2DB}"/>
               </a:ext>
             </a:extLst>
           </p:cNvPr>
@@ -8869,7 +8869,7 @@
           <p:cNvPr id="22" name="">
             <a:extLst xmlns:a="http://schemas.openxmlformats.org/drawingml/2006/main">
               <a:ext uri="{FF2B5EF4-FFF2-40B4-BE49-F238E27FC236}">
-                <a16:creationId xmlns:a16="http://schemas.microsoft.com/office/drawing/2014/main" id="{B49F26CA-58EC-4630-8FB1-A3BDC55C3516}"/>
+                <a16:creationId xmlns:a16="http://schemas.microsoft.com/office/drawing/2014/main" id="{6E7A2F0F-94D5-4014-9A1D-FD747D8CE498}"/>
               </a:ext>
             </a:extLst>
           </p:cNvPr>
@@ -8921,7 +8921,7 @@
           <p:cNvPr id="23" name="">
             <a:extLst xmlns:a="http://schemas.openxmlformats.org/drawingml/2006/main">
               <a:ext uri="{FF2B5EF4-FFF2-40B4-BE49-F238E27FC236}">
-                <a16:creationId xmlns:a16="http://schemas.microsoft.com/office/drawing/2014/main" id="{BF9A232A-AB38-4A12-BCE2-793B89267A1F}"/>
+                <a16:creationId xmlns:a16="http://schemas.microsoft.com/office/drawing/2014/main" id="{19AC6562-0635-478E-A1A7-598A1161B92B}"/>
               </a:ext>
             </a:extLst>
           </p:cNvPr>
@@ -8973,7 +8973,7 @@
           <p:cNvPr id="24" name="">
             <a:extLst xmlns:a="http://schemas.openxmlformats.org/drawingml/2006/main">
               <a:ext uri="{FF2B5EF4-FFF2-40B4-BE49-F238E27FC236}">
-                <a16:creationId xmlns:a16="http://schemas.microsoft.com/office/drawing/2014/main" id="{2EF9D3E0-5FB8-40BB-85FF-B3A47DA59DC3}"/>
+                <a16:creationId xmlns:a16="http://schemas.microsoft.com/office/drawing/2014/main" id="{B9DF9D24-8924-413E-B3B5-03B237D4C243}"/>
               </a:ext>
             </a:extLst>
           </p:cNvPr>
@@ -9004,7 +9004,7 @@
           <p:cNvPr id="25" name="">
             <a:extLst xmlns:a="http://schemas.openxmlformats.org/drawingml/2006/main">
               <a:ext uri="{FF2B5EF4-FFF2-40B4-BE49-F238E27FC236}">
-                <a16:creationId xmlns:a16="http://schemas.microsoft.com/office/drawing/2014/main" id="{FFBF15AE-B219-413D-ACAD-4EAF0BB76022}"/>
+                <a16:creationId xmlns:a16="http://schemas.microsoft.com/office/drawing/2014/main" id="{8166AA9E-1EBE-432F-A1BD-34C11289CC3D}"/>
               </a:ext>
             </a:extLst>
           </p:cNvPr>
@@ -9035,7 +9035,7 @@
           <p:cNvPr id="26" name="">
             <a:extLst xmlns:a="http://schemas.openxmlformats.org/drawingml/2006/main">
               <a:ext uri="{FF2B5EF4-FFF2-40B4-BE49-F238E27FC236}">
-                <a16:creationId xmlns:a16="http://schemas.microsoft.com/office/drawing/2014/main" id="{B904D14B-2FC5-4AD7-AA98-091A9B1E9C33}"/>
+                <a16:creationId xmlns:a16="http://schemas.microsoft.com/office/drawing/2014/main" id="{CF19824A-E36E-47D6-8417-AE1AA1044D6B}"/>
               </a:ext>
             </a:extLst>
           </p:cNvPr>
@@ -9087,7 +9087,7 @@
           <p:cNvPr id="27" name="">
             <a:extLst xmlns:a="http://schemas.openxmlformats.org/drawingml/2006/main">
               <a:ext uri="{FF2B5EF4-FFF2-40B4-BE49-F238E27FC236}">
-                <a16:creationId xmlns:a16="http://schemas.microsoft.com/office/drawing/2014/main" id="{E104C44D-6CE0-4307-9A2D-D0244F696D05}"/>
+                <a16:creationId xmlns:a16="http://schemas.microsoft.com/office/drawing/2014/main" id="{ADBFAF33-02B4-4ECA-8752-ACE2A5FE086A}"/>
               </a:ext>
             </a:extLst>
           </p:cNvPr>
@@ -9139,7 +9139,7 @@
           <p:cNvPr id="28" name="">
             <a:extLst xmlns:a="http://schemas.openxmlformats.org/drawingml/2006/main">
               <a:ext uri="{FF2B5EF4-FFF2-40B4-BE49-F238E27FC236}">
-                <a16:creationId xmlns:a16="http://schemas.microsoft.com/office/drawing/2014/main" id="{533E4DB5-4BD9-4136-A5C1-5ACC7BEDC5C8}"/>
+                <a16:creationId xmlns:a16="http://schemas.microsoft.com/office/drawing/2014/main" id="{90EBB163-F357-4BA3-9473-1007F545FE23}"/>
               </a:ext>
             </a:extLst>
           </p:cNvPr>
@@ -9191,7 +9191,7 @@
           <p:cNvPr id="29" name="">
             <a:extLst xmlns:a="http://schemas.openxmlformats.org/drawingml/2006/main">
               <a:ext uri="{FF2B5EF4-FFF2-40B4-BE49-F238E27FC236}">
-                <a16:creationId xmlns:a16="http://schemas.microsoft.com/office/drawing/2014/main" id="{94A8F662-9D09-4509-A78E-9CD764BEFFDC}"/>
+                <a16:creationId xmlns:a16="http://schemas.microsoft.com/office/drawing/2014/main" id="{6DC00D90-5F6B-4E06-B1A9-5D2D6BF451EC}"/>
               </a:ext>
             </a:extLst>
           </p:cNvPr>
@@ -9243,7 +9243,7 @@
           <p:cNvPr id="30" name="">
             <a:extLst xmlns:a="http://schemas.openxmlformats.org/drawingml/2006/main">
               <a:ext uri="{FF2B5EF4-FFF2-40B4-BE49-F238E27FC236}">
-                <a16:creationId xmlns:a16="http://schemas.microsoft.com/office/drawing/2014/main" id="{42E41E02-5564-47FB-8B08-BA339FCEBDE2}"/>
+                <a16:creationId xmlns:a16="http://schemas.microsoft.com/office/drawing/2014/main" id="{27850262-A6CB-4F69-BD25-CE26F384B203}"/>
               </a:ext>
             </a:extLst>
           </p:cNvPr>
@@ -9295,7 +9295,7 @@
           <p:cNvPr id="31" name="">
             <a:extLst xmlns:a="http://schemas.openxmlformats.org/drawingml/2006/main">
               <a:ext uri="{FF2B5EF4-FFF2-40B4-BE49-F238E27FC236}">
-                <a16:creationId xmlns:a16="http://schemas.microsoft.com/office/drawing/2014/main" id="{0F40326A-CE65-4A4C-AA1F-AEEB9698A412}"/>
+                <a16:creationId xmlns:a16="http://schemas.microsoft.com/office/drawing/2014/main" id="{603126C8-6299-4A45-BA7E-FD27202E2869}"/>
               </a:ext>
             </a:extLst>
           </p:cNvPr>
@@ -9326,7 +9326,7 @@
           <p:cNvPr id="32" name="">
             <a:extLst xmlns:a="http://schemas.openxmlformats.org/drawingml/2006/main">
               <a:ext uri="{FF2B5EF4-FFF2-40B4-BE49-F238E27FC236}">
-                <a16:creationId xmlns:a16="http://schemas.microsoft.com/office/drawing/2014/main" id="{EDD761EB-EFAA-40EA-A075-D94EF718D801}"/>
+                <a16:creationId xmlns:a16="http://schemas.microsoft.com/office/drawing/2014/main" id="{7E80FF81-D680-43D1-8769-FA6550BB5FE7}"/>
               </a:ext>
             </a:extLst>
           </p:cNvPr>
@@ -9378,7 +9378,7 @@
           <p:cNvPr id="33" name="">
             <a:extLst xmlns:a="http://schemas.openxmlformats.org/drawingml/2006/main">
               <a:ext uri="{FF2B5EF4-FFF2-40B4-BE49-F238E27FC236}">
-                <a16:creationId xmlns:a16="http://schemas.microsoft.com/office/drawing/2014/main" id="{9ECF52F4-A749-4A45-8650-A8F524F6D84F}"/>
+                <a16:creationId xmlns:a16="http://schemas.microsoft.com/office/drawing/2014/main" id="{B3F17344-EF2B-4A4B-9D3E-AB2B30699307}"/>
               </a:ext>
             </a:extLst>
           </p:cNvPr>
@@ -9430,7 +9430,7 @@
           <p:cNvPr id="34" name="">
             <a:extLst xmlns:a="http://schemas.openxmlformats.org/drawingml/2006/main">
               <a:ext uri="{FF2B5EF4-FFF2-40B4-BE49-F238E27FC236}">
-                <a16:creationId xmlns:a16="http://schemas.microsoft.com/office/drawing/2014/main" id="{D4F0A17F-8C2C-4B99-B767-14653CC6E878}"/>
+                <a16:creationId xmlns:a16="http://schemas.microsoft.com/office/drawing/2014/main" id="{21C985F1-9EB9-4CC5-B3B2-3162A17EBEA9}"/>
               </a:ext>
             </a:extLst>
           </p:cNvPr>
@@ -9482,7 +9482,7 @@
           <p:cNvPr id="35" name="">
             <a:extLst xmlns:a="http://schemas.openxmlformats.org/drawingml/2006/main">
               <a:ext uri="{FF2B5EF4-FFF2-40B4-BE49-F238E27FC236}">
-                <a16:creationId xmlns:a16="http://schemas.microsoft.com/office/drawing/2014/main" id="{926DD89D-85B3-4FE3-BD6B-4F35FD4239A1}"/>
+                <a16:creationId xmlns:a16="http://schemas.microsoft.com/office/drawing/2014/main" id="{E6966F3E-51F7-47E0-B58B-FD06B37864DB}"/>
               </a:ext>
             </a:extLst>
           </p:cNvPr>
@@ -9534,7 +9534,7 @@
           <p:cNvPr id="36" name="">
             <a:extLst xmlns:a="http://schemas.openxmlformats.org/drawingml/2006/main">
               <a:ext uri="{FF2B5EF4-FFF2-40B4-BE49-F238E27FC236}">
-                <a16:creationId xmlns:a16="http://schemas.microsoft.com/office/drawing/2014/main" id="{DBD9236C-474C-4098-AEA9-134807994542}"/>
+                <a16:creationId xmlns:a16="http://schemas.microsoft.com/office/drawing/2014/main" id="{8857897C-52F9-4175-BAF3-F0CAF4DA1FE8}"/>
               </a:ext>
             </a:extLst>
           </p:cNvPr>
@@ -9586,7 +9586,7 @@
           <p:cNvPr id="37" name="">
             <a:extLst xmlns:a="http://schemas.openxmlformats.org/drawingml/2006/main">
               <a:ext uri="{FF2B5EF4-FFF2-40B4-BE49-F238E27FC236}">
-                <a16:creationId xmlns:a16="http://schemas.microsoft.com/office/drawing/2014/main" id="{7680FD2C-5E1E-41D9-ACA7-F89537547753}"/>
+                <a16:creationId xmlns:a16="http://schemas.microsoft.com/office/drawing/2014/main" id="{252B966F-E475-4AE2-9AF7-C25CEBEEDD45}"/>
               </a:ext>
             </a:extLst>
           </p:cNvPr>
@@ -9617,7 +9617,7 @@
           <p:cNvPr id="38" name="">
             <a:extLst xmlns:a="http://schemas.openxmlformats.org/drawingml/2006/main">
               <a:ext uri="{FF2B5EF4-FFF2-40B4-BE49-F238E27FC236}">
-                <a16:creationId xmlns:a16="http://schemas.microsoft.com/office/drawing/2014/main" id="{E4EA840B-12DA-43A2-8452-DB1FE331ACAE}"/>
+                <a16:creationId xmlns:a16="http://schemas.microsoft.com/office/drawing/2014/main" id="{EBFD9D0A-0964-4E40-8DA3-25AB763B6B20}"/>
               </a:ext>
             </a:extLst>
           </p:cNvPr>
@@ -9648,7 +9648,7 @@
           <p:cNvPr id="39" name="">
             <a:extLst xmlns:a="http://schemas.openxmlformats.org/drawingml/2006/main">
               <a:ext uri="{FF2B5EF4-FFF2-40B4-BE49-F238E27FC236}">
-                <a16:creationId xmlns:a16="http://schemas.microsoft.com/office/drawing/2014/main" id="{D45AB2F7-9906-46EA-896A-9DED9031E19B}"/>
+                <a16:creationId xmlns:a16="http://schemas.microsoft.com/office/drawing/2014/main" id="{D1F1DFE4-6F15-4770-81E6-093A67C8B85A}"/>
               </a:ext>
             </a:extLst>
           </p:cNvPr>
@@ -9700,7 +9700,7 @@
           <p:cNvPr id="40" name="">
             <a:extLst xmlns:a="http://schemas.openxmlformats.org/drawingml/2006/main">
               <a:ext uri="{FF2B5EF4-FFF2-40B4-BE49-F238E27FC236}">
-                <a16:creationId xmlns:a16="http://schemas.microsoft.com/office/drawing/2014/main" id="{14F1DAB0-882B-4487-BB53-BB2516489AA2}"/>
+                <a16:creationId xmlns:a16="http://schemas.microsoft.com/office/drawing/2014/main" id="{57335FFF-88B7-4563-88CE-22794C0E3C61}"/>
               </a:ext>
             </a:extLst>
           </p:cNvPr>
@@ -9752,7 +9752,7 @@
           <p:cNvPr id="41" name="">
             <a:extLst xmlns:a="http://schemas.openxmlformats.org/drawingml/2006/main">
               <a:ext uri="{FF2B5EF4-FFF2-40B4-BE49-F238E27FC236}">
-                <a16:creationId xmlns:a16="http://schemas.microsoft.com/office/drawing/2014/main" id="{6FBD27E5-8DC7-4CCF-9D6A-9831E8D408AC}"/>
+                <a16:creationId xmlns:a16="http://schemas.microsoft.com/office/drawing/2014/main" id="{14BA4FE3-016F-4045-83D1-971F9711DA6F}"/>
               </a:ext>
             </a:extLst>
           </p:cNvPr>
@@ -9804,7 +9804,7 @@
           <p:cNvPr id="42" name="">
             <a:extLst xmlns:a="http://schemas.openxmlformats.org/drawingml/2006/main">
               <a:ext uri="{FF2B5EF4-FFF2-40B4-BE49-F238E27FC236}">
-                <a16:creationId xmlns:a16="http://schemas.microsoft.com/office/drawing/2014/main" id="{64B81649-F1A7-48CF-A6FA-8756FEF00924}"/>
+                <a16:creationId xmlns:a16="http://schemas.microsoft.com/office/drawing/2014/main" id="{36F4A286-CD05-41C4-AE53-DDF6B5A990D4}"/>
               </a:ext>
             </a:extLst>
           </p:cNvPr>
@@ -9856,7 +9856,7 @@
           <p:cNvPr id="43" name="">
             <a:extLst xmlns:a="http://schemas.openxmlformats.org/drawingml/2006/main">
               <a:ext uri="{FF2B5EF4-FFF2-40B4-BE49-F238E27FC236}">
-                <a16:creationId xmlns:a16="http://schemas.microsoft.com/office/drawing/2014/main" id="{76EC27C2-F517-4541-9E03-58D2A6C53FA1}"/>
+                <a16:creationId xmlns:a16="http://schemas.microsoft.com/office/drawing/2014/main" id="{E7E69EFB-5CD8-4518-B7CF-24292F1532D9}"/>
               </a:ext>
             </a:extLst>
           </p:cNvPr>
@@ -9908,7 +9908,7 @@
           <p:cNvPr id="44" name="">
             <a:extLst xmlns:a="http://schemas.openxmlformats.org/drawingml/2006/main">
               <a:ext uri="{FF2B5EF4-FFF2-40B4-BE49-F238E27FC236}">
-                <a16:creationId xmlns:a16="http://schemas.microsoft.com/office/drawing/2014/main" id="{70353E8C-568D-4192-92E1-E7140ADDD5D3}"/>
+                <a16:creationId xmlns:a16="http://schemas.microsoft.com/office/drawing/2014/main" id="{0ABBCF73-E40B-4B1D-A6E3-EEFD735C399E}"/>
               </a:ext>
             </a:extLst>
           </p:cNvPr>
@@ -9939,7 +9939,7 @@
           <p:cNvPr id="45" name="">
             <a:extLst xmlns:a="http://schemas.openxmlformats.org/drawingml/2006/main">
               <a:ext uri="{FF2B5EF4-FFF2-40B4-BE49-F238E27FC236}">
-                <a16:creationId xmlns:a16="http://schemas.microsoft.com/office/drawing/2014/main" id="{48CD8AC9-0599-4BB3-88AA-36FC8DE345C1}"/>
+                <a16:creationId xmlns:a16="http://schemas.microsoft.com/office/drawing/2014/main" id="{5C790E78-9B09-404B-886F-9DEE86645FFB}"/>
               </a:ext>
             </a:extLst>
           </p:cNvPr>
@@ -9991,7 +9991,7 @@
           <p:cNvPr id="46" name="">
             <a:extLst xmlns:a="http://schemas.openxmlformats.org/drawingml/2006/main">
               <a:ext uri="{FF2B5EF4-FFF2-40B4-BE49-F238E27FC236}">
-                <a16:creationId xmlns:a16="http://schemas.microsoft.com/office/drawing/2014/main" id="{3F2F35F9-7C40-4728-8267-B75D1FD28EF4}"/>
+                <a16:creationId xmlns:a16="http://schemas.microsoft.com/office/drawing/2014/main" id="{A6E073E7-2773-419B-8C3F-75F709F67733}"/>
               </a:ext>
             </a:extLst>
           </p:cNvPr>
@@ -10043,7 +10043,7 @@
           <p:cNvPr id="47" name="">
             <a:extLst xmlns:a="http://schemas.openxmlformats.org/drawingml/2006/main">
               <a:ext uri="{FF2B5EF4-FFF2-40B4-BE49-F238E27FC236}">
-                <a16:creationId xmlns:a16="http://schemas.microsoft.com/office/drawing/2014/main" id="{4A8C678C-7A19-4128-B81D-27C1750A1BB0}"/>
+                <a16:creationId xmlns:a16="http://schemas.microsoft.com/office/drawing/2014/main" id="{7F7C9306-0F1A-4093-8FFB-518B97B178BB}"/>
               </a:ext>
             </a:extLst>
           </p:cNvPr>
@@ -10095,7 +10095,7 @@
           <p:cNvPr id="48" name="">
             <a:extLst xmlns:a="http://schemas.openxmlformats.org/drawingml/2006/main">
               <a:ext uri="{FF2B5EF4-FFF2-40B4-BE49-F238E27FC236}">
-                <a16:creationId xmlns:a16="http://schemas.microsoft.com/office/drawing/2014/main" id="{2A7FF414-142B-4AB2-A83B-D2E1ED117A0B}"/>
+                <a16:creationId xmlns:a16="http://schemas.microsoft.com/office/drawing/2014/main" id="{4D13D6A4-C13E-4DDF-B05A-56D52C9A16B1}"/>
               </a:ext>
             </a:extLst>
           </p:cNvPr>
@@ -10147,7 +10147,7 @@
           <p:cNvPr id="49" name="">
             <a:extLst xmlns:a="http://schemas.openxmlformats.org/drawingml/2006/main">
               <a:ext uri="{FF2B5EF4-FFF2-40B4-BE49-F238E27FC236}">
-                <a16:creationId xmlns:a16="http://schemas.microsoft.com/office/drawing/2014/main" id="{00FCD2A3-CA52-4348-BECD-A915C022E00C}"/>
+                <a16:creationId xmlns:a16="http://schemas.microsoft.com/office/drawing/2014/main" id="{17B5FBE0-672E-4F1C-AB8E-B81C1C5DDAB8}"/>
               </a:ext>
             </a:extLst>
           </p:cNvPr>
@@ -10199,7 +10199,7 @@
           <p:cNvPr id="50" name="">
             <a:extLst xmlns:a="http://schemas.openxmlformats.org/drawingml/2006/main">
               <a:ext uri="{FF2B5EF4-FFF2-40B4-BE49-F238E27FC236}">
-                <a16:creationId xmlns:a16="http://schemas.microsoft.com/office/drawing/2014/main" id="{DE1CDCB1-0F8F-4F58-BF98-887D780178B1}"/>
+                <a16:creationId xmlns:a16="http://schemas.microsoft.com/office/drawing/2014/main" id="{C1BC7ED7-92CA-4388-86EE-9D4A09D9855A}"/>
               </a:ext>
             </a:extLst>
           </p:cNvPr>
@@ -10251,7 +10251,7 @@
           <p:cNvPr id="51" name="">
             <a:extLst xmlns:a="http://schemas.openxmlformats.org/drawingml/2006/main">
               <a:ext uri="{FF2B5EF4-FFF2-40B4-BE49-F238E27FC236}">
-                <a16:creationId xmlns:a16="http://schemas.microsoft.com/office/drawing/2014/main" id="{FBE8951F-6AE8-4FEF-AD25-C442EE5E8D9E}"/>
+                <a16:creationId xmlns:a16="http://schemas.microsoft.com/office/drawing/2014/main" id="{9087F049-AA2B-4A48-9B26-CFC4D1DAF222}"/>
               </a:ext>
             </a:extLst>
           </p:cNvPr>
@@ -10282,7 +10282,7 @@
           <p:cNvPr id="52" name="">
             <a:extLst xmlns:a="http://schemas.openxmlformats.org/drawingml/2006/main">
               <a:ext uri="{FF2B5EF4-FFF2-40B4-BE49-F238E27FC236}">
-                <a16:creationId xmlns:a16="http://schemas.microsoft.com/office/drawing/2014/main" id="{68977B23-6D49-460D-879E-DBA82FE8B7C1}"/>
+                <a16:creationId xmlns:a16="http://schemas.microsoft.com/office/drawing/2014/main" id="{A5F8E9A2-8D7A-4E4B-BC1A-424044348B93}"/>
               </a:ext>
             </a:extLst>
           </p:cNvPr>
@@ -10313,7 +10313,7 @@
           <p:cNvPr id="53" name="">
             <a:extLst xmlns:a="http://schemas.openxmlformats.org/drawingml/2006/main">
               <a:ext uri="{FF2B5EF4-FFF2-40B4-BE49-F238E27FC236}">
-                <a16:creationId xmlns:a16="http://schemas.microsoft.com/office/drawing/2014/main" id="{2B6BB088-A936-4EB9-826D-BCD257E00F15}"/>
+                <a16:creationId xmlns:a16="http://schemas.microsoft.com/office/drawing/2014/main" id="{25F60960-9CD3-4997-ACF7-42FFFA08FF60}"/>
               </a:ext>
             </a:extLst>
           </p:cNvPr>
@@ -10344,7 +10344,7 @@
           <p:cNvPr id="54" name="">
             <a:extLst xmlns:a="http://schemas.openxmlformats.org/drawingml/2006/main">
               <a:ext uri="{FF2B5EF4-FFF2-40B4-BE49-F238E27FC236}">
-                <a16:creationId xmlns:a16="http://schemas.microsoft.com/office/drawing/2014/main" id="{8DD2D164-C899-400E-BA6F-67BBC96C0197}"/>
+                <a16:creationId xmlns:a16="http://schemas.microsoft.com/office/drawing/2014/main" id="{F46520B2-4E61-4C65-AA98-F3B3EE716B0D}"/>
               </a:ext>
             </a:extLst>
           </p:cNvPr>
@@ -10396,7 +10396,7 @@
           <p:cNvPr id="55" name="">
             <a:extLst xmlns:a="http://schemas.openxmlformats.org/drawingml/2006/main">
               <a:ext uri="{FF2B5EF4-FFF2-40B4-BE49-F238E27FC236}">
-                <a16:creationId xmlns:a16="http://schemas.microsoft.com/office/drawing/2014/main" id="{89D845CE-C283-44F7-B54D-F95E2F6FBCAE}"/>
+                <a16:creationId xmlns:a16="http://schemas.microsoft.com/office/drawing/2014/main" id="{5F14983F-3079-4F37-8139-657879053DCF}"/>
               </a:ext>
             </a:extLst>
           </p:cNvPr>
@@ -10448,7 +10448,7 @@
           <p:cNvPr id="56" name="">
             <a:extLst xmlns:a="http://schemas.openxmlformats.org/drawingml/2006/main">
               <a:ext uri="{FF2B5EF4-FFF2-40B4-BE49-F238E27FC236}">
-                <a16:creationId xmlns:a16="http://schemas.microsoft.com/office/drawing/2014/main" id="{8970F601-28A4-417A-A4B3-D49923220342}"/>
+                <a16:creationId xmlns:a16="http://schemas.microsoft.com/office/drawing/2014/main" id="{3EC20B76-4A9E-45B5-B635-B101B14D2D1D}"/>
               </a:ext>
             </a:extLst>
           </p:cNvPr>
@@ -10500,7 +10500,7 @@
           <p:cNvPr id="57" name="">
             <a:extLst xmlns:a="http://schemas.openxmlformats.org/drawingml/2006/main">
               <a:ext uri="{FF2B5EF4-FFF2-40B4-BE49-F238E27FC236}">
-                <a16:creationId xmlns:a16="http://schemas.microsoft.com/office/drawing/2014/main" id="{0A5CF868-3E62-4A24-B97E-AD260E6E9B80}"/>
+                <a16:creationId xmlns:a16="http://schemas.microsoft.com/office/drawing/2014/main" id="{9A7D669E-E411-4200-8405-7D1F8A2467E2}"/>
               </a:ext>
             </a:extLst>
           </p:cNvPr>
@@ -10552,7 +10552,7 @@
           <p:cNvPr id="58" name="">
             <a:extLst xmlns:a="http://schemas.openxmlformats.org/drawingml/2006/main">
               <a:ext uri="{FF2B5EF4-FFF2-40B4-BE49-F238E27FC236}">
-                <a16:creationId xmlns:a16="http://schemas.microsoft.com/office/drawing/2014/main" id="{87EAFECD-3CEB-462F-9922-3C56B8E62D36}"/>
+                <a16:creationId xmlns:a16="http://schemas.microsoft.com/office/drawing/2014/main" id="{289199D0-33A6-45E0-9BD4-0057872107FC}"/>
               </a:ext>
             </a:extLst>
           </p:cNvPr>
@@ -10604,7 +10604,7 @@
           <p:cNvPr id="59" name="">
             <a:extLst xmlns:a="http://schemas.openxmlformats.org/drawingml/2006/main">
               <a:ext uri="{FF2B5EF4-FFF2-40B4-BE49-F238E27FC236}">
-                <a16:creationId xmlns:a16="http://schemas.microsoft.com/office/drawing/2014/main" id="{5D75E376-03F6-4F27-AE95-5D6040F834C8}"/>
+                <a16:creationId xmlns:a16="http://schemas.microsoft.com/office/drawing/2014/main" id="{051CACE4-CD22-44C9-BDE5-8899FD15D7AE}"/>
               </a:ext>
             </a:extLst>
           </p:cNvPr>
@@ -10635,7 +10635,7 @@
           <p:cNvPr id="60" name="">
             <a:extLst xmlns:a="http://schemas.openxmlformats.org/drawingml/2006/main">
               <a:ext uri="{FF2B5EF4-FFF2-40B4-BE49-F238E27FC236}">
-                <a16:creationId xmlns:a16="http://schemas.microsoft.com/office/drawing/2014/main" id="{AF82446C-1A19-4759-B152-CA0F81C3B924}"/>
+                <a16:creationId xmlns:a16="http://schemas.microsoft.com/office/drawing/2014/main" id="{25272F65-A571-40C6-A6FA-51B57C28D172}"/>
               </a:ext>
             </a:extLst>
           </p:cNvPr>
@@ -10687,7 +10687,7 @@
           <p:cNvPr id="61" name="">
             <a:extLst xmlns:a="http://schemas.openxmlformats.org/drawingml/2006/main">
               <a:ext uri="{FF2B5EF4-FFF2-40B4-BE49-F238E27FC236}">
-                <a16:creationId xmlns:a16="http://schemas.microsoft.com/office/drawing/2014/main" id="{FBA510B6-A4C2-486B-AD15-6CE2698C4926}"/>
+                <a16:creationId xmlns:a16="http://schemas.microsoft.com/office/drawing/2014/main" id="{27D022A9-DAB0-4AE4-A1AF-AF29558F2137}"/>
               </a:ext>
             </a:extLst>
           </p:cNvPr>
@@ -10739,7 +10739,7 @@
           <p:cNvPr id="62" name="">
             <a:extLst xmlns:a="http://schemas.openxmlformats.org/drawingml/2006/main">
               <a:ext uri="{FF2B5EF4-FFF2-40B4-BE49-F238E27FC236}">
-                <a16:creationId xmlns:a16="http://schemas.microsoft.com/office/drawing/2014/main" id="{6866167F-8EF1-4730-B1DB-E5148AAEE056}"/>
+                <a16:creationId xmlns:a16="http://schemas.microsoft.com/office/drawing/2014/main" id="{752BA696-3D6D-4A9E-AC19-AE2603088061}"/>
               </a:ext>
             </a:extLst>
           </p:cNvPr>
@@ -10791,7 +10791,7 @@
           <p:cNvPr id="63" name="">
             <a:extLst xmlns:a="http://schemas.openxmlformats.org/drawingml/2006/main">
               <a:ext uri="{FF2B5EF4-FFF2-40B4-BE49-F238E27FC236}">
-                <a16:creationId xmlns:a16="http://schemas.microsoft.com/office/drawing/2014/main" id="{4A73D6A7-759B-4B1C-A69E-8937884AFE99}"/>
+                <a16:creationId xmlns:a16="http://schemas.microsoft.com/office/drawing/2014/main" id="{256C68CC-67E0-44AD-8C3F-7ABD6A4187ED}"/>
               </a:ext>
             </a:extLst>
           </p:cNvPr>
@@ -10843,7 +10843,7 @@
           <p:cNvPr id="64" name="">
             <a:extLst xmlns:a="http://schemas.openxmlformats.org/drawingml/2006/main">
               <a:ext uri="{FF2B5EF4-FFF2-40B4-BE49-F238E27FC236}">
-                <a16:creationId xmlns:a16="http://schemas.microsoft.com/office/drawing/2014/main" id="{E049E549-11FB-48ED-9EE3-DB75E9B12C18}"/>
+                <a16:creationId xmlns:a16="http://schemas.microsoft.com/office/drawing/2014/main" id="{9569BA4A-D2DC-4452-B09A-9C2D10A0D779}"/>
               </a:ext>
             </a:extLst>
           </p:cNvPr>
@@ -10895,7 +10895,7 @@
           <p:cNvPr id="65" name="">
             <a:extLst xmlns:a="http://schemas.openxmlformats.org/drawingml/2006/main">
               <a:ext uri="{FF2B5EF4-FFF2-40B4-BE49-F238E27FC236}">
-                <a16:creationId xmlns:a16="http://schemas.microsoft.com/office/drawing/2014/main" id="{E26A759B-6AA6-4CEC-972A-D8E270348CE2}"/>
+                <a16:creationId xmlns:a16="http://schemas.microsoft.com/office/drawing/2014/main" id="{BC2D1AAD-6BD7-4C9C-8A81-F143EC6C34AE}"/>
               </a:ext>
             </a:extLst>
           </p:cNvPr>
@@ -10926,7 +10926,7 @@
           <p:cNvPr id="66" name="">
             <a:extLst xmlns:a="http://schemas.openxmlformats.org/drawingml/2006/main">
               <a:ext uri="{FF2B5EF4-FFF2-40B4-BE49-F238E27FC236}">
-                <a16:creationId xmlns:a16="http://schemas.microsoft.com/office/drawing/2014/main" id="{0A856267-B30E-4B55-9F36-184280680D9D}"/>
+                <a16:creationId xmlns:a16="http://schemas.microsoft.com/office/drawing/2014/main" id="{0BCE2896-4137-43FB-B732-2803906E866A}"/>
               </a:ext>
             </a:extLst>
           </p:cNvPr>
@@ -10957,7 +10957,7 @@
           <p:cNvPr id="67" name="">
             <a:extLst xmlns:a="http://schemas.openxmlformats.org/drawingml/2006/main">
               <a:ext uri="{FF2B5EF4-FFF2-40B4-BE49-F238E27FC236}">
-                <a16:creationId xmlns:a16="http://schemas.microsoft.com/office/drawing/2014/main" id="{34E5AD34-F4AF-4964-B711-A2F46AE3E51D}"/>
+                <a16:creationId xmlns:a16="http://schemas.microsoft.com/office/drawing/2014/main" id="{990BE888-63D8-4790-9064-71BDD3D0A431}"/>
               </a:ext>
             </a:extLst>
           </p:cNvPr>
@@ -11009,7 +11009,7 @@
           <p:cNvPr id="68" name="">
             <a:extLst xmlns:a="http://schemas.openxmlformats.org/drawingml/2006/main">
               <a:ext uri="{FF2B5EF4-FFF2-40B4-BE49-F238E27FC236}">
-                <a16:creationId xmlns:a16="http://schemas.microsoft.com/office/drawing/2014/main" id="{5297699C-9EAE-4B2F-A186-08211C57AAE4}"/>
+                <a16:creationId xmlns:a16="http://schemas.microsoft.com/office/drawing/2014/main" id="{1C6BEAA9-0ACA-4E9B-9852-DA31DA4A4991}"/>
               </a:ext>
             </a:extLst>
           </p:cNvPr>
@@ -11061,7 +11061,7 @@
           <p:cNvPr id="69" name="">
             <a:extLst xmlns:a="http://schemas.openxmlformats.org/drawingml/2006/main">
               <a:ext uri="{FF2B5EF4-FFF2-40B4-BE49-F238E27FC236}">
-                <a16:creationId xmlns:a16="http://schemas.microsoft.com/office/drawing/2014/main" id="{ADEFE9E4-00C7-4575-B4DD-102EA701D50B}"/>
+                <a16:creationId xmlns:a16="http://schemas.microsoft.com/office/drawing/2014/main" id="{D88E4170-F931-4B52-83D1-3309715BAA98}"/>
               </a:ext>
             </a:extLst>
           </p:cNvPr>
@@ -11113,7 +11113,7 @@
           <p:cNvPr id="70" name="">
             <a:extLst xmlns:a="http://schemas.openxmlformats.org/drawingml/2006/main">
               <a:ext uri="{FF2B5EF4-FFF2-40B4-BE49-F238E27FC236}">
-                <a16:creationId xmlns:a16="http://schemas.microsoft.com/office/drawing/2014/main" id="{CD6AA9FE-219D-44AE-835D-EA44BE4445A6}"/>
+                <a16:creationId xmlns:a16="http://schemas.microsoft.com/office/drawing/2014/main" id="{C3785C51-9C61-4ECF-A0AB-675DBEE4D6BD}"/>
               </a:ext>
             </a:extLst>
           </p:cNvPr>
@@ -11165,7 +11165,7 @@
           <p:cNvPr id="71" name="">
             <a:extLst xmlns:a="http://schemas.openxmlformats.org/drawingml/2006/main">
               <a:ext uri="{FF2B5EF4-FFF2-40B4-BE49-F238E27FC236}">
-                <a16:creationId xmlns:a16="http://schemas.microsoft.com/office/drawing/2014/main" id="{C790325F-24F0-433E-9C45-0872A8D73CD1}"/>
+                <a16:creationId xmlns:a16="http://schemas.microsoft.com/office/drawing/2014/main" id="{BEF6E198-95B5-4CBB-A08A-C1C373A524CD}"/>
               </a:ext>
             </a:extLst>
           </p:cNvPr>
@@ -11217,7 +11217,7 @@
           <p:cNvPr id="72" name="">
             <a:extLst xmlns:a="http://schemas.openxmlformats.org/drawingml/2006/main">
               <a:ext uri="{FF2B5EF4-FFF2-40B4-BE49-F238E27FC236}">
-                <a16:creationId xmlns:a16="http://schemas.microsoft.com/office/drawing/2014/main" id="{E5B0ED5F-A9AE-45CD-AD91-6AAF02E49428}"/>
+                <a16:creationId xmlns:a16="http://schemas.microsoft.com/office/drawing/2014/main" id="{BCB929B6-C273-4EE0-839A-3FB0FC03F84A}"/>
               </a:ext>
             </a:extLst>
           </p:cNvPr>
@@ -11248,7 +11248,7 @@
           <p:cNvPr id="73" name="">
             <a:extLst xmlns:a="http://schemas.openxmlformats.org/drawingml/2006/main">
               <a:ext uri="{FF2B5EF4-FFF2-40B4-BE49-F238E27FC236}">
-                <a16:creationId xmlns:a16="http://schemas.microsoft.com/office/drawing/2014/main" id="{4DD1E6CB-B8FB-4EE1-98B6-1D79480620A2}"/>
+                <a16:creationId xmlns:a16="http://schemas.microsoft.com/office/drawing/2014/main" id="{10565928-9691-4075-B334-0F3B3E7B9CEC}"/>
               </a:ext>
             </a:extLst>
           </p:cNvPr>
@@ -11300,7 +11300,7 @@
           <p:cNvPr id="74" name="">
             <a:extLst xmlns:a="http://schemas.openxmlformats.org/drawingml/2006/main">
               <a:ext uri="{FF2B5EF4-FFF2-40B4-BE49-F238E27FC236}">
-                <a16:creationId xmlns:a16="http://schemas.microsoft.com/office/drawing/2014/main" id="{F048C76B-4958-4777-A41D-33733322F9DC}"/>
+                <a16:creationId xmlns:a16="http://schemas.microsoft.com/office/drawing/2014/main" id="{9E04F283-8A2A-4DE5-A04A-9ED341C23908}"/>
               </a:ext>
             </a:extLst>
           </p:cNvPr>
@@ -11352,7 +11352,7 @@
           <p:cNvPr id="75" name="">
             <a:extLst xmlns:a="http://schemas.openxmlformats.org/drawingml/2006/main">
               <a:ext uri="{FF2B5EF4-FFF2-40B4-BE49-F238E27FC236}">
-                <a16:creationId xmlns:a16="http://schemas.microsoft.com/office/drawing/2014/main" id="{0430EE56-9F87-4C71-9AB0-6132ACCB0BA6}"/>
+                <a16:creationId xmlns:a16="http://schemas.microsoft.com/office/drawing/2014/main" id="{2F656576-7EB4-4301-9515-841E98600370}"/>
               </a:ext>
             </a:extLst>
           </p:cNvPr>
@@ -11404,7 +11404,7 @@
           <p:cNvPr id="76" name="">
             <a:extLst xmlns:a="http://schemas.openxmlformats.org/drawingml/2006/main">
               <a:ext uri="{FF2B5EF4-FFF2-40B4-BE49-F238E27FC236}">
-                <a16:creationId xmlns:a16="http://schemas.microsoft.com/office/drawing/2014/main" id="{18DBD86B-4F61-4A96-9CD9-8E8C330DA1A6}"/>
+                <a16:creationId xmlns:a16="http://schemas.microsoft.com/office/drawing/2014/main" id="{735278D4-742F-4197-904A-7074DB746842}"/>
               </a:ext>
             </a:extLst>
           </p:cNvPr>
@@ -11456,7 +11456,7 @@
           <p:cNvPr id="77" name="">
             <a:extLst xmlns:a="http://schemas.openxmlformats.org/drawingml/2006/main">
               <a:ext uri="{FF2B5EF4-FFF2-40B4-BE49-F238E27FC236}">
-                <a16:creationId xmlns:a16="http://schemas.microsoft.com/office/drawing/2014/main" id="{E453B179-D6BD-4DF4-B907-EA5973088A77}"/>
+                <a16:creationId xmlns:a16="http://schemas.microsoft.com/office/drawing/2014/main" id="{838089EC-C8D2-4F70-9AAF-4CA0C5B8DD61}"/>
               </a:ext>
             </a:extLst>
           </p:cNvPr>
@@ -11508,7 +11508,7 @@
           <p:cNvPr id="78" name="">
             <a:extLst xmlns:a="http://schemas.openxmlformats.org/drawingml/2006/main">
               <a:ext uri="{FF2B5EF4-FFF2-40B4-BE49-F238E27FC236}">
-                <a16:creationId xmlns:a16="http://schemas.microsoft.com/office/drawing/2014/main" id="{5D542AF9-8DED-4111-A5C0-03A79457563D}"/>
+                <a16:creationId xmlns:a16="http://schemas.microsoft.com/office/drawing/2014/main" id="{C0711770-AB1F-4193-BA68-B030A603AA44}"/>
               </a:ext>
             </a:extLst>
           </p:cNvPr>
@@ -11539,7 +11539,7 @@
           <p:cNvPr id="79" name="">
             <a:extLst xmlns:a="http://schemas.openxmlformats.org/drawingml/2006/main">
               <a:ext uri="{FF2B5EF4-FFF2-40B4-BE49-F238E27FC236}">
-                <a16:creationId xmlns:a16="http://schemas.microsoft.com/office/drawing/2014/main" id="{A1D10562-9330-4983-80DA-DB260179A10C}"/>
+                <a16:creationId xmlns:a16="http://schemas.microsoft.com/office/drawing/2014/main" id="{143506EC-876A-4C71-B475-9F54340DE4B7}"/>
               </a:ext>
             </a:extLst>
           </p:cNvPr>
@@ -11570,7 +11570,7 @@
           <p:cNvPr id="80" name="">
             <a:extLst xmlns:a="http://schemas.openxmlformats.org/drawingml/2006/main">
               <a:ext uri="{FF2B5EF4-FFF2-40B4-BE49-F238E27FC236}">
-                <a16:creationId xmlns:a16="http://schemas.microsoft.com/office/drawing/2014/main" id="{71EB4FD0-74E9-43D1-95D2-05C6D64AD883}"/>
+                <a16:creationId xmlns:a16="http://schemas.microsoft.com/office/drawing/2014/main" id="{24ADD86C-55E7-4D5F-8991-A62A84E367E5}"/>
               </a:ext>
             </a:extLst>
           </p:cNvPr>
@@ -11622,7 +11622,7 @@
           <p:cNvPr id="81" name="">
             <a:extLst xmlns:a="http://schemas.openxmlformats.org/drawingml/2006/main">
               <a:ext uri="{FF2B5EF4-FFF2-40B4-BE49-F238E27FC236}">
-                <a16:creationId xmlns:a16="http://schemas.microsoft.com/office/drawing/2014/main" id="{6E0959C9-0BC1-4545-9AB9-31F560A66AE4}"/>
+                <a16:creationId xmlns:a16="http://schemas.microsoft.com/office/drawing/2014/main" id="{9FEA1A56-F231-42A7-8878-DF0F5FC7C36F}"/>
               </a:ext>
             </a:extLst>
           </p:cNvPr>
@@ -11674,7 +11674,7 @@
           <p:cNvPr id="82" name="">
             <a:extLst xmlns:a="http://schemas.openxmlformats.org/drawingml/2006/main">
               <a:ext uri="{FF2B5EF4-FFF2-40B4-BE49-F238E27FC236}">
-                <a16:creationId xmlns:a16="http://schemas.microsoft.com/office/drawing/2014/main" id="{D3F08D71-9472-4809-A65F-DC8BDD4B4CE3}"/>
+                <a16:creationId xmlns:a16="http://schemas.microsoft.com/office/drawing/2014/main" id="{CE60EBE6-FBDA-4177-B589-346C018D0CD6}"/>
               </a:ext>
             </a:extLst>
           </p:cNvPr>
@@ -11726,7 +11726,7 @@
           <p:cNvPr id="83" name="">
             <a:extLst xmlns:a="http://schemas.openxmlformats.org/drawingml/2006/main">
               <a:ext uri="{FF2B5EF4-FFF2-40B4-BE49-F238E27FC236}">
-                <a16:creationId xmlns:a16="http://schemas.microsoft.com/office/drawing/2014/main" id="{BC1A3B5B-9729-46D2-B01F-1F39D7E2F0AA}"/>
+                <a16:creationId xmlns:a16="http://schemas.microsoft.com/office/drawing/2014/main" id="{DF7127BC-33B9-4260-A301-74B1D0E29C23}"/>
               </a:ext>
             </a:extLst>
           </p:cNvPr>
@@ -11778,7 +11778,7 @@
           <p:cNvPr id="84" name="">
             <a:extLst xmlns:a="http://schemas.openxmlformats.org/drawingml/2006/main">
               <a:ext uri="{FF2B5EF4-FFF2-40B4-BE49-F238E27FC236}">
-                <a16:creationId xmlns:a16="http://schemas.microsoft.com/office/drawing/2014/main" id="{734BBDCD-5326-4069-A509-10EDD41145CF}"/>
+                <a16:creationId xmlns:a16="http://schemas.microsoft.com/office/drawing/2014/main" id="{B5AC8A9B-1C86-464C-AB24-609D41C44BA3}"/>
               </a:ext>
             </a:extLst>
           </p:cNvPr>
@@ -11830,7 +11830,7 @@
           <p:cNvPr id="85" name="">
             <a:extLst xmlns:a="http://schemas.openxmlformats.org/drawingml/2006/main">
               <a:ext uri="{FF2B5EF4-FFF2-40B4-BE49-F238E27FC236}">
-                <a16:creationId xmlns:a16="http://schemas.microsoft.com/office/drawing/2014/main" id="{0510F4B0-41BD-402A-9EC4-CA5DFF6C912F}"/>
+                <a16:creationId xmlns:a16="http://schemas.microsoft.com/office/drawing/2014/main" id="{EE38066B-98FA-4D26-AD09-1DE305F4F54B}"/>
               </a:ext>
             </a:extLst>
           </p:cNvPr>
@@ -11861,7 +11861,7 @@
           <p:cNvPr id="86" name="">
             <a:extLst xmlns:a="http://schemas.openxmlformats.org/drawingml/2006/main">
               <a:ext uri="{FF2B5EF4-FFF2-40B4-BE49-F238E27FC236}">
-                <a16:creationId xmlns:a16="http://schemas.microsoft.com/office/drawing/2014/main" id="{124E8BAB-3FBF-4266-A8A3-069F3FE6388E}"/>
+                <a16:creationId xmlns:a16="http://schemas.microsoft.com/office/drawing/2014/main" id="{2AE72343-BFAC-40C8-A7F2-D0A5D5603299}"/>
               </a:ext>
             </a:extLst>
           </p:cNvPr>
@@ -11913,7 +11913,7 @@
           <p:cNvPr id="87" name="">
             <a:extLst xmlns:a="http://schemas.openxmlformats.org/drawingml/2006/main">
               <a:ext uri="{FF2B5EF4-FFF2-40B4-BE49-F238E27FC236}">
-                <a16:creationId xmlns:a16="http://schemas.microsoft.com/office/drawing/2014/main" id="{419ADE39-D08E-4241-B9B6-4E6F7D8C3735}"/>
+                <a16:creationId xmlns:a16="http://schemas.microsoft.com/office/drawing/2014/main" id="{A8F3353B-350C-4192-8488-B822743CBB10}"/>
               </a:ext>
             </a:extLst>
           </p:cNvPr>
@@ -11965,7 +11965,7 @@
           <p:cNvPr id="88" name="">
             <a:extLst xmlns:a="http://schemas.openxmlformats.org/drawingml/2006/main">
               <a:ext uri="{FF2B5EF4-FFF2-40B4-BE49-F238E27FC236}">
-                <a16:creationId xmlns:a16="http://schemas.microsoft.com/office/drawing/2014/main" id="{9AEA08F4-43F6-4877-AFC4-CCD2B7E8D8FE}"/>
+                <a16:creationId xmlns:a16="http://schemas.microsoft.com/office/drawing/2014/main" id="{0C5F3359-544E-4F38-AC72-AD452348331A}"/>
               </a:ext>
             </a:extLst>
           </p:cNvPr>
@@ -12017,7 +12017,7 @@
           <p:cNvPr id="89" name="">
             <a:extLst xmlns:a="http://schemas.openxmlformats.org/drawingml/2006/main">
               <a:ext uri="{FF2B5EF4-FFF2-40B4-BE49-F238E27FC236}">
-                <a16:creationId xmlns:a16="http://schemas.microsoft.com/office/drawing/2014/main" id="{3D6ECAC6-AED0-44ED-AD0C-CCF9B41BB1E7}"/>
+                <a16:creationId xmlns:a16="http://schemas.microsoft.com/office/drawing/2014/main" id="{FFF32888-78BE-41CA-8311-9CC752E89BCB}"/>
               </a:ext>
             </a:extLst>
           </p:cNvPr>
@@ -12069,7 +12069,7 @@
           <p:cNvPr id="90" name="">
             <a:extLst xmlns:a="http://schemas.openxmlformats.org/drawingml/2006/main">
               <a:ext uri="{FF2B5EF4-FFF2-40B4-BE49-F238E27FC236}">
-                <a16:creationId xmlns:a16="http://schemas.microsoft.com/office/drawing/2014/main" id="{DD7CFC86-9DA8-45B8-BC03-E2D7FA00C053}"/>
+                <a16:creationId xmlns:a16="http://schemas.microsoft.com/office/drawing/2014/main" id="{CA003B63-02A0-425E-B302-A9765E38665F}"/>
               </a:ext>
             </a:extLst>
           </p:cNvPr>
@@ -12121,7 +12121,7 @@
           <p:cNvPr id="91" name="">
             <a:extLst xmlns:a="http://schemas.openxmlformats.org/drawingml/2006/main">
               <a:ext uri="{FF2B5EF4-FFF2-40B4-BE49-F238E27FC236}">
-                <a16:creationId xmlns:a16="http://schemas.microsoft.com/office/drawing/2014/main" id="{CE53EA9F-966B-4548-AC16-07DF2C6D19BB}"/>
+                <a16:creationId xmlns:a16="http://schemas.microsoft.com/office/drawing/2014/main" id="{9D5F67E5-7B12-494F-96EB-2D90BC7A42DF}"/>
               </a:ext>
             </a:extLst>
           </p:cNvPr>
@@ -12152,7 +12152,7 @@
           <p:cNvPr id="92" name="">
             <a:extLst xmlns:a="http://schemas.openxmlformats.org/drawingml/2006/main">
               <a:ext uri="{FF2B5EF4-FFF2-40B4-BE49-F238E27FC236}">
-                <a16:creationId xmlns:a16="http://schemas.microsoft.com/office/drawing/2014/main" id="{6471E307-896E-43AF-AFF5-1BDE6CBF99B4}"/>
+                <a16:creationId xmlns:a16="http://schemas.microsoft.com/office/drawing/2014/main" id="{205BB6A9-998D-4C53-9D8C-225A295D81DB}"/>
               </a:ext>
             </a:extLst>
           </p:cNvPr>
@@ -12183,7 +12183,7 @@
           <p:cNvPr id="93" name="">
             <a:extLst xmlns:a="http://schemas.openxmlformats.org/drawingml/2006/main">
               <a:ext uri="{FF2B5EF4-FFF2-40B4-BE49-F238E27FC236}">
-                <a16:creationId xmlns:a16="http://schemas.microsoft.com/office/drawing/2014/main" id="{03BE9383-0607-438C-8618-CCB2301636CE}"/>
+                <a16:creationId xmlns:a16="http://schemas.microsoft.com/office/drawing/2014/main" id="{5C803D48-DBB9-4080-8292-DE3A485453B7}"/>
               </a:ext>
             </a:extLst>
           </p:cNvPr>
@@ -12235,7 +12235,7 @@
           <p:cNvPr id="94" name="">
             <a:extLst xmlns:a="http://schemas.openxmlformats.org/drawingml/2006/main">
               <a:ext uri="{FF2B5EF4-FFF2-40B4-BE49-F238E27FC236}">
-                <a16:creationId xmlns:a16="http://schemas.microsoft.com/office/drawing/2014/main" id="{61C673B1-F6A4-42CC-AE09-FFE1DA1A4EE2}"/>
+                <a16:creationId xmlns:a16="http://schemas.microsoft.com/office/drawing/2014/main" id="{C11F0846-AABD-4C0B-A5B6-3A719DEE09EC}"/>
               </a:ext>
             </a:extLst>
           </p:cNvPr>
@@ -12287,7 +12287,7 @@
           <p:cNvPr id="95" name="">
             <a:extLst xmlns:a="http://schemas.openxmlformats.org/drawingml/2006/main">
               <a:ext uri="{FF2B5EF4-FFF2-40B4-BE49-F238E27FC236}">
-                <a16:creationId xmlns:a16="http://schemas.microsoft.com/office/drawing/2014/main" id="{FA7F0306-6B2F-47F9-B6F8-514600CC4A0F}"/>
+                <a16:creationId xmlns:a16="http://schemas.microsoft.com/office/drawing/2014/main" id="{19855493-E461-469C-9169-CF4095F5432A}"/>
               </a:ext>
             </a:extLst>
           </p:cNvPr>
@@ -12339,7 +12339,7 @@
           <p:cNvPr id="96" name="">
             <a:extLst xmlns:a="http://schemas.openxmlformats.org/drawingml/2006/main">
               <a:ext uri="{FF2B5EF4-FFF2-40B4-BE49-F238E27FC236}">
-                <a16:creationId xmlns:a16="http://schemas.microsoft.com/office/drawing/2014/main" id="{34BDC555-5A6C-4D01-87E0-962EDBB2E794}"/>
+                <a16:creationId xmlns:a16="http://schemas.microsoft.com/office/drawing/2014/main" id="{EFE611D7-05CE-485E-86E8-CBADF124BED3}"/>
               </a:ext>
             </a:extLst>
           </p:cNvPr>
@@ -12391,7 +12391,7 @@
           <p:cNvPr id="97" name="">
             <a:extLst xmlns:a="http://schemas.openxmlformats.org/drawingml/2006/main">
               <a:ext uri="{FF2B5EF4-FFF2-40B4-BE49-F238E27FC236}">
-                <a16:creationId xmlns:a16="http://schemas.microsoft.com/office/drawing/2014/main" id="{3F4885F7-ADCC-4084-933B-FFCF1485DA69}"/>
+                <a16:creationId xmlns:a16="http://schemas.microsoft.com/office/drawing/2014/main" id="{1E3B7BD7-3478-47DB-9893-4C832A6DBDE2}"/>
               </a:ext>
             </a:extLst>
           </p:cNvPr>
@@ -12441,7 +12441,7 @@
     </p:spTree>
     <p:extLst>
       <p:ext uri="{BB962C8B-B14F-4D97-AF65-F5344CB8AC3E}">
-        <p14:creationId xmlns:p14="http://schemas.microsoft.com/office/powerpoint/2010/main" val="1307115662"/>
+        <p14:creationId xmlns:p14="http://schemas.microsoft.com/office/powerpoint/2010/main" val="1101021096"/>
       </p:ext>
     </p:extLst>
   </p:cSld>
@@ -12472,7 +12472,7 @@
           <p:cNvPr id="102" name="">
             <a:extLst xmlns:a="http://schemas.openxmlformats.org/drawingml/2006/main">
               <a:ext uri="{FF2B5EF4-FFF2-40B4-BE49-F238E27FC236}">
-                <a16:creationId xmlns:a16="http://schemas.microsoft.com/office/drawing/2014/main" id="{F02A1645-F972-4622-9916-545E36840A45}"/>
+                <a16:creationId xmlns:a16="http://schemas.microsoft.com/office/drawing/2014/main" id="{098A5848-DACB-4269-9147-E9346FFBE8E6}"/>
               </a:ext>
             </a:extLst>
           </p:cNvPr>
@@ -12505,7 +12505,7 @@
           <p:cNvPr id="2" name="">
             <a:extLst xmlns:a="http://schemas.openxmlformats.org/drawingml/2006/main">
               <a:ext uri="{FF2B5EF4-FFF2-40B4-BE49-F238E27FC236}">
-                <a16:creationId xmlns:a16="http://schemas.microsoft.com/office/drawing/2014/main" id="{F29B5B03-EC2B-4340-83F4-560DE4CF2CCA}"/>
+                <a16:creationId xmlns:a16="http://schemas.microsoft.com/office/drawing/2014/main" id="{B1A58EEA-F5E5-43E7-A14C-560D0E214A5D}"/>
               </a:ext>
             </a:extLst>
           </p:cNvPr>
@@ -12536,7 +12536,7 @@
           <p:cNvPr id="3" name="">
             <a:extLst xmlns:a="http://schemas.openxmlformats.org/drawingml/2006/main">
               <a:ext uri="{FF2B5EF4-FFF2-40B4-BE49-F238E27FC236}">
-                <a16:creationId xmlns:a16="http://schemas.microsoft.com/office/drawing/2014/main" id="{09A7D0F6-B03C-4A7E-A79D-AA3C4168616B}"/>
+                <a16:creationId xmlns:a16="http://schemas.microsoft.com/office/drawing/2014/main" id="{C8EAACBD-E232-4CCA-8FF2-E44DB458BAB9}"/>
               </a:ext>
             </a:extLst>
           </p:cNvPr>
@@ -12588,7 +12588,7 @@
           <p:cNvPr id="4" name="">
             <a:extLst xmlns:a="http://schemas.openxmlformats.org/drawingml/2006/main">
               <a:ext uri="{FF2B5EF4-FFF2-40B4-BE49-F238E27FC236}">
-                <a16:creationId xmlns:a16="http://schemas.microsoft.com/office/drawing/2014/main" id="{A1C9CF64-F677-463F-937F-98DA6B96C002}"/>
+                <a16:creationId xmlns:a16="http://schemas.microsoft.com/office/drawing/2014/main" id="{26DD310F-4703-4DB9-B592-BE1735952DBD}"/>
               </a:ext>
             </a:extLst>
           </p:cNvPr>
@@ -12640,7 +12640,7 @@
           <p:cNvPr id="5" name="">
             <a:extLst xmlns:a="http://schemas.openxmlformats.org/drawingml/2006/main">
               <a:ext uri="{FF2B5EF4-FFF2-40B4-BE49-F238E27FC236}">
-                <a16:creationId xmlns:a16="http://schemas.microsoft.com/office/drawing/2014/main" id="{14567CC0-AB47-4542-9632-AC0093CE997A}"/>
+                <a16:creationId xmlns:a16="http://schemas.microsoft.com/office/drawing/2014/main" id="{558981B0-3CAF-42BE-974F-B8A02E504B96}"/>
               </a:ext>
             </a:extLst>
           </p:cNvPr>
@@ -12675,7 +12675,7 @@
           <p:nvPr/>
         </p:nvPicPr>
         <p:blipFill>
-          <a:blip xmlns:r="http://schemas.openxmlformats.org/officeDocument/2006/relationships" xmlns:a="http://schemas.openxmlformats.org/drawingml/2006/main" r:embed="Rc782a2e4e2194112"/>
+          <a:blip xmlns:r="http://schemas.openxmlformats.org/officeDocument/2006/relationships" xmlns:a="http://schemas.openxmlformats.org/drawingml/2006/main" r:embed="R9b77f6453bd74029"/>
           <a:stretch xmlns:a="http://schemas.openxmlformats.org/drawingml/2006/main"/>
         </p:blipFill>
         <p:spPr>
@@ -12693,7 +12693,7 @@
           <p:cNvPr id="7" name="">
             <a:extLst xmlns:a="http://schemas.openxmlformats.org/drawingml/2006/main">
               <a:ext uri="{FF2B5EF4-FFF2-40B4-BE49-F238E27FC236}">
-                <a16:creationId xmlns:a16="http://schemas.microsoft.com/office/drawing/2014/main" id="{54D75AAB-8DB5-4530-B063-B3763DA4DCCB}"/>
+                <a16:creationId xmlns:a16="http://schemas.microsoft.com/office/drawing/2014/main" id="{4BB13917-06F9-446C-93A9-5773B354FB61}"/>
               </a:ext>
             </a:extLst>
           </p:cNvPr>
@@ -12745,7 +12745,7 @@
           <p:cNvPr id="8" name="">
             <a:extLst xmlns:a="http://schemas.openxmlformats.org/drawingml/2006/main">
               <a:ext uri="{FF2B5EF4-FFF2-40B4-BE49-F238E27FC236}">
-                <a16:creationId xmlns:a16="http://schemas.microsoft.com/office/drawing/2014/main" id="{EBF9FFC6-8E75-41AB-B8ED-D84CE5F801E6}"/>
+                <a16:creationId xmlns:a16="http://schemas.microsoft.com/office/drawing/2014/main" id="{01632D6D-CF3C-45B5-8001-C541256B62C2}"/>
               </a:ext>
             </a:extLst>
           </p:cNvPr>
@@ -12797,7 +12797,7 @@
           <p:cNvPr id="9" name="">
             <a:extLst xmlns:a="http://schemas.openxmlformats.org/drawingml/2006/main">
               <a:ext uri="{FF2B5EF4-FFF2-40B4-BE49-F238E27FC236}">
-                <a16:creationId xmlns:a16="http://schemas.microsoft.com/office/drawing/2014/main" id="{1B501CAD-0898-4569-9A8D-40E89C3BCA3A}"/>
+                <a16:creationId xmlns:a16="http://schemas.microsoft.com/office/drawing/2014/main" id="{5E9E10B4-8CF0-41A2-AE7B-F86284FCD5AD}"/>
               </a:ext>
             </a:extLst>
           </p:cNvPr>
@@ -12849,7 +12849,7 @@
           <p:cNvPr id="10" name="">
             <a:extLst xmlns:a="http://schemas.openxmlformats.org/drawingml/2006/main">
               <a:ext uri="{FF2B5EF4-FFF2-40B4-BE49-F238E27FC236}">
-                <a16:creationId xmlns:a16="http://schemas.microsoft.com/office/drawing/2014/main" id="{CE4F4A92-5591-473B-B21A-64B6AE4F28C0}"/>
+                <a16:creationId xmlns:a16="http://schemas.microsoft.com/office/drawing/2014/main" id="{9AB8A62D-AC08-4EC3-B5BB-38349ABC205A}"/>
               </a:ext>
             </a:extLst>
           </p:cNvPr>
@@ -12901,7 +12901,7 @@
           <p:cNvPr id="11" name="">
             <a:extLst xmlns:a="http://schemas.openxmlformats.org/drawingml/2006/main">
               <a:ext uri="{FF2B5EF4-FFF2-40B4-BE49-F238E27FC236}">
-                <a16:creationId xmlns:a16="http://schemas.microsoft.com/office/drawing/2014/main" id="{B60E39D2-7A33-43FB-ABBD-F321034FE0E0}"/>
+                <a16:creationId xmlns:a16="http://schemas.microsoft.com/office/drawing/2014/main" id="{6831CE22-3C75-4E7B-AE7B-321979CEBB55}"/>
               </a:ext>
             </a:extLst>
           </p:cNvPr>
@@ -12932,7 +12932,7 @@
           <p:cNvPr id="12" name="">
             <a:extLst xmlns:a="http://schemas.openxmlformats.org/drawingml/2006/main">
               <a:ext uri="{FF2B5EF4-FFF2-40B4-BE49-F238E27FC236}">
-                <a16:creationId xmlns:a16="http://schemas.microsoft.com/office/drawing/2014/main" id="{568F3228-8D75-47E4-859A-90AB334FD423}"/>
+                <a16:creationId xmlns:a16="http://schemas.microsoft.com/office/drawing/2014/main" id="{5AB707D9-D433-44BD-A760-0B0305B25CCD}"/>
               </a:ext>
             </a:extLst>
           </p:cNvPr>
@@ -12963,7 +12963,7 @@
           <p:cNvPr id="13" name="">
             <a:extLst xmlns:a="http://schemas.openxmlformats.org/drawingml/2006/main">
               <a:ext uri="{FF2B5EF4-FFF2-40B4-BE49-F238E27FC236}">
-                <a16:creationId xmlns:a16="http://schemas.microsoft.com/office/drawing/2014/main" id="{4AC4093C-5671-4B0D-8C01-86EA8BFD61CE}"/>
+                <a16:creationId xmlns:a16="http://schemas.microsoft.com/office/drawing/2014/main" id="{67A220A2-E3B9-4447-B39A-5D85B1035B56}"/>
               </a:ext>
             </a:extLst>
           </p:cNvPr>
@@ -13015,7 +13015,7 @@
           <p:cNvPr id="14" name="">
             <a:extLst xmlns:a="http://schemas.openxmlformats.org/drawingml/2006/main">
               <a:ext uri="{FF2B5EF4-FFF2-40B4-BE49-F238E27FC236}">
-                <a16:creationId xmlns:a16="http://schemas.microsoft.com/office/drawing/2014/main" id="{0900CCDA-BAA2-4502-A8AE-6827BAF52362}"/>
+                <a16:creationId xmlns:a16="http://schemas.microsoft.com/office/drawing/2014/main" id="{AA323D9B-A4B1-4B7D-A386-84F72604F1F0}"/>
               </a:ext>
             </a:extLst>
           </p:cNvPr>
@@ -13067,7 +13067,7 @@
           <p:cNvPr id="15" name="">
             <a:extLst xmlns:a="http://schemas.openxmlformats.org/drawingml/2006/main">
               <a:ext uri="{FF2B5EF4-FFF2-40B4-BE49-F238E27FC236}">
-                <a16:creationId xmlns:a16="http://schemas.microsoft.com/office/drawing/2014/main" id="{FB0AF139-E6C4-4E72-B041-61AB4CE2B081}"/>
+                <a16:creationId xmlns:a16="http://schemas.microsoft.com/office/drawing/2014/main" id="{D8277868-636C-4FF6-BD09-8B8C77017DA7}"/>
               </a:ext>
             </a:extLst>
           </p:cNvPr>
@@ -13119,7 +13119,7 @@
           <p:cNvPr id="16" name="">
             <a:extLst xmlns:a="http://schemas.openxmlformats.org/drawingml/2006/main">
               <a:ext uri="{FF2B5EF4-FFF2-40B4-BE49-F238E27FC236}">
-                <a16:creationId xmlns:a16="http://schemas.microsoft.com/office/drawing/2014/main" id="{4F086BC3-30DF-403E-8B28-1D014F62C9F9}"/>
+                <a16:creationId xmlns:a16="http://schemas.microsoft.com/office/drawing/2014/main" id="{BF8E50EF-0632-43B2-B816-F6A40D1F29C5}"/>
               </a:ext>
             </a:extLst>
           </p:cNvPr>
@@ -13171,7 +13171,7 @@
           <p:cNvPr id="17" name="">
             <a:extLst xmlns:a="http://schemas.openxmlformats.org/drawingml/2006/main">
               <a:ext uri="{FF2B5EF4-FFF2-40B4-BE49-F238E27FC236}">
-                <a16:creationId xmlns:a16="http://schemas.microsoft.com/office/drawing/2014/main" id="{7833B0A2-97D0-4F86-9A79-1210CDD62A0C}"/>
+                <a16:creationId xmlns:a16="http://schemas.microsoft.com/office/drawing/2014/main" id="{7EFEAA24-110A-4A2D-80F5-A433742A800E}"/>
               </a:ext>
             </a:extLst>
           </p:cNvPr>
@@ -13223,7 +13223,7 @@
           <p:cNvPr id="18" name="">
             <a:extLst xmlns:a="http://schemas.openxmlformats.org/drawingml/2006/main">
               <a:ext uri="{FF2B5EF4-FFF2-40B4-BE49-F238E27FC236}">
-                <a16:creationId xmlns:a16="http://schemas.microsoft.com/office/drawing/2014/main" id="{D9DEC785-58DD-4BD3-9A97-E5F705B21BEE}"/>
+                <a16:creationId xmlns:a16="http://schemas.microsoft.com/office/drawing/2014/main" id="{A7EF15EA-BE53-448D-BEB6-347EE41FD895}"/>
               </a:ext>
             </a:extLst>
           </p:cNvPr>
@@ -13254,7 +13254,7 @@
           <p:cNvPr id="19" name="">
             <a:extLst xmlns:a="http://schemas.openxmlformats.org/drawingml/2006/main">
               <a:ext uri="{FF2B5EF4-FFF2-40B4-BE49-F238E27FC236}">
-                <a16:creationId xmlns:a16="http://schemas.microsoft.com/office/drawing/2014/main" id="{281DF80B-E18C-42BD-88ED-6EF7ED99EE86}"/>
+                <a16:creationId xmlns:a16="http://schemas.microsoft.com/office/drawing/2014/main" id="{AFBE5D51-D11C-4D6D-B4CC-5CAD3B5201B1}"/>
               </a:ext>
             </a:extLst>
           </p:cNvPr>
@@ -13306,7 +13306,7 @@
           <p:cNvPr id="20" name="">
             <a:extLst xmlns:a="http://schemas.openxmlformats.org/drawingml/2006/main">
               <a:ext uri="{FF2B5EF4-FFF2-40B4-BE49-F238E27FC236}">
-                <a16:creationId xmlns:a16="http://schemas.microsoft.com/office/drawing/2014/main" id="{2EAABCB2-C030-45A5-A772-4A2CB21DDE4D}"/>
+                <a16:creationId xmlns:a16="http://schemas.microsoft.com/office/drawing/2014/main" id="{AF81D844-19A5-46B7-AC9B-D88366E8FE0D}"/>
               </a:ext>
             </a:extLst>
           </p:cNvPr>
@@ -13358,7 +13358,7 @@
           <p:cNvPr id="21" name="">
             <a:extLst xmlns:a="http://schemas.openxmlformats.org/drawingml/2006/main">
               <a:ext uri="{FF2B5EF4-FFF2-40B4-BE49-F238E27FC236}">
-                <a16:creationId xmlns:a16="http://schemas.microsoft.com/office/drawing/2014/main" id="{FC1A6A20-91F7-456F-9220-324C2626AF37}"/>
+                <a16:creationId xmlns:a16="http://schemas.microsoft.com/office/drawing/2014/main" id="{A6577BD9-CC53-4BAC-A46D-AC2DFDA7788C}"/>
               </a:ext>
             </a:extLst>
           </p:cNvPr>
@@ -13410,7 +13410,7 @@
           <p:cNvPr id="22" name="">
             <a:extLst xmlns:a="http://schemas.openxmlformats.org/drawingml/2006/main">
               <a:ext uri="{FF2B5EF4-FFF2-40B4-BE49-F238E27FC236}">
-                <a16:creationId xmlns:a16="http://schemas.microsoft.com/office/drawing/2014/main" id="{A51D8B54-867B-4FDE-8ACE-375643DE902D}"/>
+                <a16:creationId xmlns:a16="http://schemas.microsoft.com/office/drawing/2014/main" id="{793A532D-3B66-4C7C-B342-A67F7B1B60A7}"/>
               </a:ext>
             </a:extLst>
           </p:cNvPr>
@@ -13462,7 +13462,7 @@
           <p:cNvPr id="23" name="">
             <a:extLst xmlns:a="http://schemas.openxmlformats.org/drawingml/2006/main">
               <a:ext uri="{FF2B5EF4-FFF2-40B4-BE49-F238E27FC236}">
-                <a16:creationId xmlns:a16="http://schemas.microsoft.com/office/drawing/2014/main" id="{A4F56CD4-7926-4652-A195-DB279BA1A7E5}"/>
+                <a16:creationId xmlns:a16="http://schemas.microsoft.com/office/drawing/2014/main" id="{F94F4F4B-DBB4-452E-A577-FB9867D095BC}"/>
               </a:ext>
             </a:extLst>
           </p:cNvPr>
@@ -13514,7 +13514,7 @@
           <p:cNvPr id="24" name="">
             <a:extLst xmlns:a="http://schemas.openxmlformats.org/drawingml/2006/main">
               <a:ext uri="{FF2B5EF4-FFF2-40B4-BE49-F238E27FC236}">
-                <a16:creationId xmlns:a16="http://schemas.microsoft.com/office/drawing/2014/main" id="{36CF0BBA-A442-46BE-A498-DBA68C9BAE11}"/>
+                <a16:creationId xmlns:a16="http://schemas.microsoft.com/office/drawing/2014/main" id="{E79BD5C6-664F-49CA-AB51-C403F75480F9}"/>
               </a:ext>
             </a:extLst>
           </p:cNvPr>
@@ -13545,7 +13545,7 @@
           <p:cNvPr id="25" name="">
             <a:extLst xmlns:a="http://schemas.openxmlformats.org/drawingml/2006/main">
               <a:ext uri="{FF2B5EF4-FFF2-40B4-BE49-F238E27FC236}">
-                <a16:creationId xmlns:a16="http://schemas.microsoft.com/office/drawing/2014/main" id="{7A8E5A07-A7F4-4934-906E-F11DC3C554A2}"/>
+                <a16:creationId xmlns:a16="http://schemas.microsoft.com/office/drawing/2014/main" id="{BFFB6895-25B3-42D9-8E80-8D74C9E90FD4}"/>
               </a:ext>
             </a:extLst>
           </p:cNvPr>
@@ -13576,7 +13576,7 @@
           <p:cNvPr id="26" name="">
             <a:extLst xmlns:a="http://schemas.openxmlformats.org/drawingml/2006/main">
               <a:ext uri="{FF2B5EF4-FFF2-40B4-BE49-F238E27FC236}">
-                <a16:creationId xmlns:a16="http://schemas.microsoft.com/office/drawing/2014/main" id="{9877D499-30B5-4642-B2C2-B8CA35B2EBD3}"/>
+                <a16:creationId xmlns:a16="http://schemas.microsoft.com/office/drawing/2014/main" id="{A64C9FC9-7D14-4C78-A5A5-CF649B12DC77}"/>
               </a:ext>
             </a:extLst>
           </p:cNvPr>
@@ -13628,7 +13628,7 @@
           <p:cNvPr id="27" name="">
             <a:extLst xmlns:a="http://schemas.openxmlformats.org/drawingml/2006/main">
               <a:ext uri="{FF2B5EF4-FFF2-40B4-BE49-F238E27FC236}">
-                <a16:creationId xmlns:a16="http://schemas.microsoft.com/office/drawing/2014/main" id="{FA2DC5C3-0283-434D-BE0E-FA2A4711ED08}"/>
+                <a16:creationId xmlns:a16="http://schemas.microsoft.com/office/drawing/2014/main" id="{8682088E-F54C-4E39-B436-31C34412A587}"/>
               </a:ext>
             </a:extLst>
           </p:cNvPr>
@@ -13680,7 +13680,7 @@
           <p:cNvPr id="28" name="">
             <a:extLst xmlns:a="http://schemas.openxmlformats.org/drawingml/2006/main">
               <a:ext uri="{FF2B5EF4-FFF2-40B4-BE49-F238E27FC236}">
-                <a16:creationId xmlns:a16="http://schemas.microsoft.com/office/drawing/2014/main" id="{53C8F2B5-BB22-463F-B29D-E519A98CCEC8}"/>
+                <a16:creationId xmlns:a16="http://schemas.microsoft.com/office/drawing/2014/main" id="{C900F48D-B965-45D8-A0B1-86DE01875AE6}"/>
               </a:ext>
             </a:extLst>
           </p:cNvPr>
@@ -13732,7 +13732,7 @@
           <p:cNvPr id="29" name="">
             <a:extLst xmlns:a="http://schemas.openxmlformats.org/drawingml/2006/main">
               <a:ext uri="{FF2B5EF4-FFF2-40B4-BE49-F238E27FC236}">
-                <a16:creationId xmlns:a16="http://schemas.microsoft.com/office/drawing/2014/main" id="{7EF38DE9-DFC2-4C3A-B958-5E876946CA39}"/>
+                <a16:creationId xmlns:a16="http://schemas.microsoft.com/office/drawing/2014/main" id="{CFE4823D-DCC5-468C-96E2-7A56AF6FFEBF}"/>
               </a:ext>
             </a:extLst>
           </p:cNvPr>
@@ -13784,7 +13784,7 @@
           <p:cNvPr id="30" name="">
             <a:extLst xmlns:a="http://schemas.openxmlformats.org/drawingml/2006/main">
               <a:ext uri="{FF2B5EF4-FFF2-40B4-BE49-F238E27FC236}">
-                <a16:creationId xmlns:a16="http://schemas.microsoft.com/office/drawing/2014/main" id="{106AD271-9C02-4FA2-BE51-9D4E36F51A69}"/>
+                <a16:creationId xmlns:a16="http://schemas.microsoft.com/office/drawing/2014/main" id="{6BC0F8D8-32D7-4A39-8D60-DF8953978172}"/>
               </a:ext>
             </a:extLst>
           </p:cNvPr>
@@ -13836,7 +13836,7 @@
           <p:cNvPr id="31" name="">
             <a:extLst xmlns:a="http://schemas.openxmlformats.org/drawingml/2006/main">
               <a:ext uri="{FF2B5EF4-FFF2-40B4-BE49-F238E27FC236}">
-                <a16:creationId xmlns:a16="http://schemas.microsoft.com/office/drawing/2014/main" id="{BBDA0122-D295-4DA7-857A-1AE1C44295C4}"/>
+                <a16:creationId xmlns:a16="http://schemas.microsoft.com/office/drawing/2014/main" id="{9E3BA61B-E4E0-4DC6-8413-AA6033B41C34}"/>
               </a:ext>
             </a:extLst>
           </p:cNvPr>
@@ -13867,7 +13867,7 @@
           <p:cNvPr id="32" name="">
             <a:extLst xmlns:a="http://schemas.openxmlformats.org/drawingml/2006/main">
               <a:ext uri="{FF2B5EF4-FFF2-40B4-BE49-F238E27FC236}">
-                <a16:creationId xmlns:a16="http://schemas.microsoft.com/office/drawing/2014/main" id="{4772474A-47D7-4D72-B657-35579C3CEEA9}"/>
+                <a16:creationId xmlns:a16="http://schemas.microsoft.com/office/drawing/2014/main" id="{1DCF626E-78E8-4DC3-A9F5-13F9D3B10796}"/>
               </a:ext>
             </a:extLst>
           </p:cNvPr>
@@ -13919,7 +13919,7 @@
           <p:cNvPr id="33" name="">
             <a:extLst xmlns:a="http://schemas.openxmlformats.org/drawingml/2006/main">
               <a:ext uri="{FF2B5EF4-FFF2-40B4-BE49-F238E27FC236}">
-                <a16:creationId xmlns:a16="http://schemas.microsoft.com/office/drawing/2014/main" id="{F5D2D3FB-B718-47F8-837F-41A372455524}"/>
+                <a16:creationId xmlns:a16="http://schemas.microsoft.com/office/drawing/2014/main" id="{67739C53-BD3C-48A7-AFD0-0DCC35B1BFDE}"/>
               </a:ext>
             </a:extLst>
           </p:cNvPr>
@@ -13971,7 +13971,7 @@
           <p:cNvPr id="34" name="">
             <a:extLst xmlns:a="http://schemas.openxmlformats.org/drawingml/2006/main">
               <a:ext uri="{FF2B5EF4-FFF2-40B4-BE49-F238E27FC236}">
-                <a16:creationId xmlns:a16="http://schemas.microsoft.com/office/drawing/2014/main" id="{DE1684B4-C3DC-42E0-A2C7-33BF6217D04E}"/>
+                <a16:creationId xmlns:a16="http://schemas.microsoft.com/office/drawing/2014/main" id="{489FFAC8-1A41-40E4-87F9-3092938406B5}"/>
               </a:ext>
             </a:extLst>
           </p:cNvPr>
@@ -14023,7 +14023,7 @@
           <p:cNvPr id="35" name="">
             <a:extLst xmlns:a="http://schemas.openxmlformats.org/drawingml/2006/main">
               <a:ext uri="{FF2B5EF4-FFF2-40B4-BE49-F238E27FC236}">
-                <a16:creationId xmlns:a16="http://schemas.microsoft.com/office/drawing/2014/main" id="{A532221F-3C18-4475-A325-843317AA9750}"/>
+                <a16:creationId xmlns:a16="http://schemas.microsoft.com/office/drawing/2014/main" id="{C270378D-03AE-40A8-B953-67A4DD797562}"/>
               </a:ext>
             </a:extLst>
           </p:cNvPr>
@@ -14075,7 +14075,7 @@
           <p:cNvPr id="36" name="">
             <a:extLst xmlns:a="http://schemas.openxmlformats.org/drawingml/2006/main">
               <a:ext uri="{FF2B5EF4-FFF2-40B4-BE49-F238E27FC236}">
-                <a16:creationId xmlns:a16="http://schemas.microsoft.com/office/drawing/2014/main" id="{8225A036-F821-4E80-9A43-1E93AB701FD3}"/>
+                <a16:creationId xmlns:a16="http://schemas.microsoft.com/office/drawing/2014/main" id="{58E4ABF0-1234-4E63-82B5-194DFE519F43}"/>
               </a:ext>
             </a:extLst>
           </p:cNvPr>
@@ -14127,7 +14127,7 @@
           <p:cNvPr id="37" name="">
             <a:extLst xmlns:a="http://schemas.openxmlformats.org/drawingml/2006/main">
               <a:ext uri="{FF2B5EF4-FFF2-40B4-BE49-F238E27FC236}">
-                <a16:creationId xmlns:a16="http://schemas.microsoft.com/office/drawing/2014/main" id="{3C04F403-1058-42C0-9077-A634547EAAC0}"/>
+                <a16:creationId xmlns:a16="http://schemas.microsoft.com/office/drawing/2014/main" id="{3C99C9F3-68AD-44DD-9297-3F2DC55901E6}"/>
               </a:ext>
             </a:extLst>
           </p:cNvPr>
@@ -14158,7 +14158,7 @@
           <p:cNvPr id="38" name="">
             <a:extLst xmlns:a="http://schemas.openxmlformats.org/drawingml/2006/main">
               <a:ext uri="{FF2B5EF4-FFF2-40B4-BE49-F238E27FC236}">
-                <a16:creationId xmlns:a16="http://schemas.microsoft.com/office/drawing/2014/main" id="{46FFFD9B-EDD5-475E-8C3C-1BFD0F213B6C}"/>
+                <a16:creationId xmlns:a16="http://schemas.microsoft.com/office/drawing/2014/main" id="{90DDD4E6-555F-4948-9A2D-A6C5FF41EAB8}"/>
               </a:ext>
             </a:extLst>
           </p:cNvPr>
@@ -14189,7 +14189,7 @@
           <p:cNvPr id="39" name="">
             <a:extLst xmlns:a="http://schemas.openxmlformats.org/drawingml/2006/main">
               <a:ext uri="{FF2B5EF4-FFF2-40B4-BE49-F238E27FC236}">
-                <a16:creationId xmlns:a16="http://schemas.microsoft.com/office/drawing/2014/main" id="{453735A9-6AC6-45B3-9E78-0BC71ED98569}"/>
+                <a16:creationId xmlns:a16="http://schemas.microsoft.com/office/drawing/2014/main" id="{19000852-4667-4D88-A8BD-9121610F1A1B}"/>
               </a:ext>
             </a:extLst>
           </p:cNvPr>
@@ -14241,7 +14241,7 @@
           <p:cNvPr id="40" name="">
             <a:extLst xmlns:a="http://schemas.openxmlformats.org/drawingml/2006/main">
               <a:ext uri="{FF2B5EF4-FFF2-40B4-BE49-F238E27FC236}">
-                <a16:creationId xmlns:a16="http://schemas.microsoft.com/office/drawing/2014/main" id="{D099846A-E59F-4163-B883-24712D0FA460}"/>
+                <a16:creationId xmlns:a16="http://schemas.microsoft.com/office/drawing/2014/main" id="{3E88AD9E-7DE9-4EA6-A44F-C2F03980CE3B}"/>
               </a:ext>
             </a:extLst>
           </p:cNvPr>
@@ -14293,7 +14293,7 @@
           <p:cNvPr id="41" name="">
             <a:extLst xmlns:a="http://schemas.openxmlformats.org/drawingml/2006/main">
               <a:ext uri="{FF2B5EF4-FFF2-40B4-BE49-F238E27FC236}">
-                <a16:creationId xmlns:a16="http://schemas.microsoft.com/office/drawing/2014/main" id="{E90C3E62-C432-48C5-9C10-635E6BEE5D68}"/>
+                <a16:creationId xmlns:a16="http://schemas.microsoft.com/office/drawing/2014/main" id="{6C019B0F-5322-476F-A9AA-0EFC3F8D176E}"/>
               </a:ext>
             </a:extLst>
           </p:cNvPr>
@@ -14345,7 +14345,7 @@
           <p:cNvPr id="42" name="">
             <a:extLst xmlns:a="http://schemas.openxmlformats.org/drawingml/2006/main">
               <a:ext uri="{FF2B5EF4-FFF2-40B4-BE49-F238E27FC236}">
-                <a16:creationId xmlns:a16="http://schemas.microsoft.com/office/drawing/2014/main" id="{EBAF4E17-B488-4221-A6DA-8959CB79D767}"/>
+                <a16:creationId xmlns:a16="http://schemas.microsoft.com/office/drawing/2014/main" id="{AA19A057-A9E3-4566-8E79-3BA483EBE3D9}"/>
               </a:ext>
             </a:extLst>
           </p:cNvPr>
@@ -14397,7 +14397,7 @@
           <p:cNvPr id="43" name="">
             <a:extLst xmlns:a="http://schemas.openxmlformats.org/drawingml/2006/main">
               <a:ext uri="{FF2B5EF4-FFF2-40B4-BE49-F238E27FC236}">
-                <a16:creationId xmlns:a16="http://schemas.microsoft.com/office/drawing/2014/main" id="{3C84CD5F-74A4-4F6E-B596-6ADE4F7FC505}"/>
+                <a16:creationId xmlns:a16="http://schemas.microsoft.com/office/drawing/2014/main" id="{30DE2621-8C86-4181-B9CE-89F320B687C2}"/>
               </a:ext>
             </a:extLst>
           </p:cNvPr>
@@ -14449,7 +14449,7 @@
           <p:cNvPr id="44" name="">
             <a:extLst xmlns:a="http://schemas.openxmlformats.org/drawingml/2006/main">
               <a:ext uri="{FF2B5EF4-FFF2-40B4-BE49-F238E27FC236}">
-                <a16:creationId xmlns:a16="http://schemas.microsoft.com/office/drawing/2014/main" id="{DF4AE37E-CE53-452C-862E-DFEA001128F4}"/>
+                <a16:creationId xmlns:a16="http://schemas.microsoft.com/office/drawing/2014/main" id="{4D8DF0E6-839F-449E-B339-0BFE50A95E4B}"/>
               </a:ext>
             </a:extLst>
           </p:cNvPr>
@@ -14480,7 +14480,7 @@
           <p:cNvPr id="45" name="">
             <a:extLst xmlns:a="http://schemas.openxmlformats.org/drawingml/2006/main">
               <a:ext uri="{FF2B5EF4-FFF2-40B4-BE49-F238E27FC236}">
-                <a16:creationId xmlns:a16="http://schemas.microsoft.com/office/drawing/2014/main" id="{581226BD-4E42-469C-9C72-F11BEA7FA93E}"/>
+                <a16:creationId xmlns:a16="http://schemas.microsoft.com/office/drawing/2014/main" id="{ADA0D3FC-B543-4A6E-B399-158B42F02852}"/>
               </a:ext>
             </a:extLst>
           </p:cNvPr>
@@ -14532,7 +14532,7 @@
           <p:cNvPr id="46" name="">
             <a:extLst xmlns:a="http://schemas.openxmlformats.org/drawingml/2006/main">
               <a:ext uri="{FF2B5EF4-FFF2-40B4-BE49-F238E27FC236}">
-                <a16:creationId xmlns:a16="http://schemas.microsoft.com/office/drawing/2014/main" id="{A8CC1B78-8A2D-40E2-B4D7-0C04AB38FC3B}"/>
+                <a16:creationId xmlns:a16="http://schemas.microsoft.com/office/drawing/2014/main" id="{5008C8A0-25D6-4809-B4EA-0AE4AB2722A8}"/>
               </a:ext>
             </a:extLst>
           </p:cNvPr>
@@ -14584,7 +14584,7 @@
           <p:cNvPr id="47" name="">
             <a:extLst xmlns:a="http://schemas.openxmlformats.org/drawingml/2006/main">
               <a:ext uri="{FF2B5EF4-FFF2-40B4-BE49-F238E27FC236}">
-                <a16:creationId xmlns:a16="http://schemas.microsoft.com/office/drawing/2014/main" id="{62A32E7E-787A-4A04-ABEB-3C8E46185C04}"/>
+                <a16:creationId xmlns:a16="http://schemas.microsoft.com/office/drawing/2014/main" id="{EA6B7359-F8CB-495C-8520-74B2ED70FF7F}"/>
               </a:ext>
             </a:extLst>
           </p:cNvPr>
@@ -14636,7 +14636,7 @@
           <p:cNvPr id="48" name="">
             <a:extLst xmlns:a="http://schemas.openxmlformats.org/drawingml/2006/main">
               <a:ext uri="{FF2B5EF4-FFF2-40B4-BE49-F238E27FC236}">
-                <a16:creationId xmlns:a16="http://schemas.microsoft.com/office/drawing/2014/main" id="{64550B0D-6550-4C4C-8BD3-E6008A5F34E9}"/>
+                <a16:creationId xmlns:a16="http://schemas.microsoft.com/office/drawing/2014/main" id="{FDAD258D-715D-442C-B5D4-2F3201621039}"/>
               </a:ext>
             </a:extLst>
           </p:cNvPr>
@@ -14688,7 +14688,7 @@
           <p:cNvPr id="49" name="">
             <a:extLst xmlns:a="http://schemas.openxmlformats.org/drawingml/2006/main">
               <a:ext uri="{FF2B5EF4-FFF2-40B4-BE49-F238E27FC236}">
-                <a16:creationId xmlns:a16="http://schemas.microsoft.com/office/drawing/2014/main" id="{F1A1A4FD-A1C7-4D92-A5AE-E6058844DB5B}"/>
+                <a16:creationId xmlns:a16="http://schemas.microsoft.com/office/drawing/2014/main" id="{8348BF44-3794-4918-80EB-0B6509926DF1}"/>
               </a:ext>
             </a:extLst>
           </p:cNvPr>
@@ -14740,7 +14740,7 @@
           <p:cNvPr id="50" name="">
             <a:extLst xmlns:a="http://schemas.openxmlformats.org/drawingml/2006/main">
               <a:ext uri="{FF2B5EF4-FFF2-40B4-BE49-F238E27FC236}">
-                <a16:creationId xmlns:a16="http://schemas.microsoft.com/office/drawing/2014/main" id="{CBEEF9B6-79BB-40B5-928E-5CE9B6E1299E}"/>
+                <a16:creationId xmlns:a16="http://schemas.microsoft.com/office/drawing/2014/main" id="{8E739685-8FEC-4666-814B-862AD3793D91}"/>
               </a:ext>
             </a:extLst>
           </p:cNvPr>
@@ -14771,7 +14771,7 @@
           <p:cNvPr id="51" name="">
             <a:extLst xmlns:a="http://schemas.openxmlformats.org/drawingml/2006/main">
               <a:ext uri="{FF2B5EF4-FFF2-40B4-BE49-F238E27FC236}">
-                <a16:creationId xmlns:a16="http://schemas.microsoft.com/office/drawing/2014/main" id="{0A4365FB-C2DE-45A9-B22B-06CBE9FF8B12}"/>
+                <a16:creationId xmlns:a16="http://schemas.microsoft.com/office/drawing/2014/main" id="{E12FF378-9221-4A6E-954E-996E23AABBFF}"/>
               </a:ext>
             </a:extLst>
           </p:cNvPr>
@@ -14802,7 +14802,7 @@
           <p:cNvPr id="52" name="">
             <a:extLst xmlns:a="http://schemas.openxmlformats.org/drawingml/2006/main">
               <a:ext uri="{FF2B5EF4-FFF2-40B4-BE49-F238E27FC236}">
-                <a16:creationId xmlns:a16="http://schemas.microsoft.com/office/drawing/2014/main" id="{BCF4364C-C81B-465A-B346-F98641F5BE0D}"/>
+                <a16:creationId xmlns:a16="http://schemas.microsoft.com/office/drawing/2014/main" id="{3E017578-753C-4178-B642-2675A41392DB}"/>
               </a:ext>
             </a:extLst>
           </p:cNvPr>
@@ -14854,7 +14854,7 @@
           <p:cNvPr id="53" name="">
             <a:extLst xmlns:a="http://schemas.openxmlformats.org/drawingml/2006/main">
               <a:ext uri="{FF2B5EF4-FFF2-40B4-BE49-F238E27FC236}">
-                <a16:creationId xmlns:a16="http://schemas.microsoft.com/office/drawing/2014/main" id="{5DA60ABB-A948-40C5-AD0B-FACDBDF1A786}"/>
+                <a16:creationId xmlns:a16="http://schemas.microsoft.com/office/drawing/2014/main" id="{5A79DFD0-529E-4BD1-BB9E-95921983D914}"/>
               </a:ext>
             </a:extLst>
           </p:cNvPr>
@@ -14906,7 +14906,7 @@
           <p:cNvPr id="54" name="">
             <a:extLst xmlns:a="http://schemas.openxmlformats.org/drawingml/2006/main">
               <a:ext uri="{FF2B5EF4-FFF2-40B4-BE49-F238E27FC236}">
-                <a16:creationId xmlns:a16="http://schemas.microsoft.com/office/drawing/2014/main" id="{55059095-CCF1-48A1-BF5A-3B6AD19DE3BF}"/>
+                <a16:creationId xmlns:a16="http://schemas.microsoft.com/office/drawing/2014/main" id="{4EE3B3CA-D8E7-4071-B33C-1BCAC5F3BB21}"/>
               </a:ext>
             </a:extLst>
           </p:cNvPr>
@@ -14958,7 +14958,7 @@
           <p:cNvPr id="55" name="">
             <a:extLst xmlns:a="http://schemas.openxmlformats.org/drawingml/2006/main">
               <a:ext uri="{FF2B5EF4-FFF2-40B4-BE49-F238E27FC236}">
-                <a16:creationId xmlns:a16="http://schemas.microsoft.com/office/drawing/2014/main" id="{4F9CA896-53EA-45CE-8140-6F8CB3F06CE4}"/>
+                <a16:creationId xmlns:a16="http://schemas.microsoft.com/office/drawing/2014/main" id="{308204EB-34A8-43B0-868F-7B41FB6534D6}"/>
               </a:ext>
             </a:extLst>
           </p:cNvPr>
@@ -15010,7 +15010,7 @@
           <p:cNvPr id="56" name="">
             <a:extLst xmlns:a="http://schemas.openxmlformats.org/drawingml/2006/main">
               <a:ext uri="{FF2B5EF4-FFF2-40B4-BE49-F238E27FC236}">
-                <a16:creationId xmlns:a16="http://schemas.microsoft.com/office/drawing/2014/main" id="{99BFD0BC-F254-4585-A7BB-7AFB6863A88D}"/>
+                <a16:creationId xmlns:a16="http://schemas.microsoft.com/office/drawing/2014/main" id="{E4793076-52C5-4C38-94E4-F0DAAF2B2F31}"/>
               </a:ext>
             </a:extLst>
           </p:cNvPr>
@@ -15062,7 +15062,7 @@
           <p:cNvPr id="57" name="">
             <a:extLst xmlns:a="http://schemas.openxmlformats.org/drawingml/2006/main">
               <a:ext uri="{FF2B5EF4-FFF2-40B4-BE49-F238E27FC236}">
-                <a16:creationId xmlns:a16="http://schemas.microsoft.com/office/drawing/2014/main" id="{7DB0DC14-E419-46C1-A6A8-152D7CE731F9}"/>
+                <a16:creationId xmlns:a16="http://schemas.microsoft.com/office/drawing/2014/main" id="{668723B6-AFE2-4682-A4CB-B1B990FC6052}"/>
               </a:ext>
             </a:extLst>
           </p:cNvPr>
@@ -15093,7 +15093,7 @@
           <p:cNvPr id="58" name="">
             <a:extLst xmlns:a="http://schemas.openxmlformats.org/drawingml/2006/main">
               <a:ext uri="{FF2B5EF4-FFF2-40B4-BE49-F238E27FC236}">
-                <a16:creationId xmlns:a16="http://schemas.microsoft.com/office/drawing/2014/main" id="{517FE4B2-B0F6-4AE6-919D-D4BBA49CC6B9}"/>
+                <a16:creationId xmlns:a16="http://schemas.microsoft.com/office/drawing/2014/main" id="{149C611F-BDFB-4BF8-ADEB-1B4ABAD71AF6}"/>
               </a:ext>
             </a:extLst>
           </p:cNvPr>
@@ -15145,7 +15145,7 @@
           <p:cNvPr id="59" name="">
             <a:extLst xmlns:a="http://schemas.openxmlformats.org/drawingml/2006/main">
               <a:ext uri="{FF2B5EF4-FFF2-40B4-BE49-F238E27FC236}">
-                <a16:creationId xmlns:a16="http://schemas.microsoft.com/office/drawing/2014/main" id="{713EF2AA-598C-411C-A7BF-B65080283DDF}"/>
+                <a16:creationId xmlns:a16="http://schemas.microsoft.com/office/drawing/2014/main" id="{AF53594A-D12B-471D-87B2-24207C1D8DBC}"/>
               </a:ext>
             </a:extLst>
           </p:cNvPr>
@@ -15197,7 +15197,7 @@
           <p:cNvPr id="60" name="">
             <a:extLst xmlns:a="http://schemas.openxmlformats.org/drawingml/2006/main">
               <a:ext uri="{FF2B5EF4-FFF2-40B4-BE49-F238E27FC236}">
-                <a16:creationId xmlns:a16="http://schemas.microsoft.com/office/drawing/2014/main" id="{39EB76D4-F1FC-4B4C-948C-4198226C0C3E}"/>
+                <a16:creationId xmlns:a16="http://schemas.microsoft.com/office/drawing/2014/main" id="{AE7CE9EB-00F5-457B-82C2-F7DE757E3276}"/>
               </a:ext>
             </a:extLst>
           </p:cNvPr>
@@ -15249,7 +15249,7 @@
           <p:cNvPr id="61" name="">
             <a:extLst xmlns:a="http://schemas.openxmlformats.org/drawingml/2006/main">
               <a:ext uri="{FF2B5EF4-FFF2-40B4-BE49-F238E27FC236}">
-                <a16:creationId xmlns:a16="http://schemas.microsoft.com/office/drawing/2014/main" id="{9E343E21-55A4-49BB-8B4E-EB21469D71A5}"/>
+                <a16:creationId xmlns:a16="http://schemas.microsoft.com/office/drawing/2014/main" id="{C122630E-5EA7-4F8A-9923-A9DE28E8DE19}"/>
               </a:ext>
             </a:extLst>
           </p:cNvPr>
@@ -15301,7 +15301,7 @@
           <p:cNvPr id="62" name="">
             <a:extLst xmlns:a="http://schemas.openxmlformats.org/drawingml/2006/main">
               <a:ext uri="{FF2B5EF4-FFF2-40B4-BE49-F238E27FC236}">
-                <a16:creationId xmlns:a16="http://schemas.microsoft.com/office/drawing/2014/main" id="{9FC8B0F3-0D81-4A14-9564-5FD3E2A23533}"/>
+                <a16:creationId xmlns:a16="http://schemas.microsoft.com/office/drawing/2014/main" id="{211D4B0A-2CF6-4334-8E20-16B6D728A178}"/>
               </a:ext>
             </a:extLst>
           </p:cNvPr>
@@ -15353,7 +15353,7 @@
           <p:cNvPr id="63" name="">
             <a:extLst xmlns:a="http://schemas.openxmlformats.org/drawingml/2006/main">
               <a:ext uri="{FF2B5EF4-FFF2-40B4-BE49-F238E27FC236}">
-                <a16:creationId xmlns:a16="http://schemas.microsoft.com/office/drawing/2014/main" id="{6869C9D2-8C19-404D-AA79-41603EF58115}"/>
+                <a16:creationId xmlns:a16="http://schemas.microsoft.com/office/drawing/2014/main" id="{9FA6322A-E1B5-4A76-8416-CE3068F71566}"/>
               </a:ext>
             </a:extLst>
           </p:cNvPr>
@@ -15384,7 +15384,7 @@
           <p:cNvPr id="64" name="">
             <a:extLst xmlns:a="http://schemas.openxmlformats.org/drawingml/2006/main">
               <a:ext uri="{FF2B5EF4-FFF2-40B4-BE49-F238E27FC236}">
-                <a16:creationId xmlns:a16="http://schemas.microsoft.com/office/drawing/2014/main" id="{C900BA1F-459B-46E6-8D24-2CC8C88B219F}"/>
+                <a16:creationId xmlns:a16="http://schemas.microsoft.com/office/drawing/2014/main" id="{B1D94201-7710-46DE-A670-A2EC1B41EF29}"/>
               </a:ext>
             </a:extLst>
           </p:cNvPr>
@@ -15415,7 +15415,7 @@
           <p:cNvPr id="65" name="">
             <a:extLst xmlns:a="http://schemas.openxmlformats.org/drawingml/2006/main">
               <a:ext uri="{FF2B5EF4-FFF2-40B4-BE49-F238E27FC236}">
-                <a16:creationId xmlns:a16="http://schemas.microsoft.com/office/drawing/2014/main" id="{CB340822-D36B-431A-8C26-F4D93620E786}"/>
+                <a16:creationId xmlns:a16="http://schemas.microsoft.com/office/drawing/2014/main" id="{D7268905-AB4E-422B-BC08-11D0A9E49D95}"/>
               </a:ext>
             </a:extLst>
           </p:cNvPr>
@@ -15467,7 +15467,7 @@
           <p:cNvPr id="66" name="">
             <a:extLst xmlns:a="http://schemas.openxmlformats.org/drawingml/2006/main">
               <a:ext uri="{FF2B5EF4-FFF2-40B4-BE49-F238E27FC236}">
-                <a16:creationId xmlns:a16="http://schemas.microsoft.com/office/drawing/2014/main" id="{A284EBA6-7B8E-4D75-87EE-D582155F7B88}"/>
+                <a16:creationId xmlns:a16="http://schemas.microsoft.com/office/drawing/2014/main" id="{47624224-9A1E-4DA6-A077-D4BE231BB7BE}"/>
               </a:ext>
             </a:extLst>
           </p:cNvPr>
@@ -15519,7 +15519,7 @@
           <p:cNvPr id="67" name="">
             <a:extLst xmlns:a="http://schemas.openxmlformats.org/drawingml/2006/main">
               <a:ext uri="{FF2B5EF4-FFF2-40B4-BE49-F238E27FC236}">
-                <a16:creationId xmlns:a16="http://schemas.microsoft.com/office/drawing/2014/main" id="{20FC34B8-180F-4C83-AC70-E4028A0DDA56}"/>
+                <a16:creationId xmlns:a16="http://schemas.microsoft.com/office/drawing/2014/main" id="{76FAEF17-8D0A-484B-BA57-09467054FEFF}"/>
               </a:ext>
             </a:extLst>
           </p:cNvPr>
@@ -15571,7 +15571,7 @@
           <p:cNvPr id="68" name="">
             <a:extLst xmlns:a="http://schemas.openxmlformats.org/drawingml/2006/main">
               <a:ext uri="{FF2B5EF4-FFF2-40B4-BE49-F238E27FC236}">
-                <a16:creationId xmlns:a16="http://schemas.microsoft.com/office/drawing/2014/main" id="{9EBEB50F-9F8C-4D7D-8796-DE494F0237FE}"/>
+                <a16:creationId xmlns:a16="http://schemas.microsoft.com/office/drawing/2014/main" id="{27763A97-FC59-4CAF-A44D-CF47C7F33F59}"/>
               </a:ext>
             </a:extLst>
           </p:cNvPr>
@@ -15623,7 +15623,7 @@
           <p:cNvPr id="69" name="">
             <a:extLst xmlns:a="http://schemas.openxmlformats.org/drawingml/2006/main">
               <a:ext uri="{FF2B5EF4-FFF2-40B4-BE49-F238E27FC236}">
-                <a16:creationId xmlns:a16="http://schemas.microsoft.com/office/drawing/2014/main" id="{9D1D3BA9-B777-40C9-B12C-149A5DCEF896}"/>
+                <a16:creationId xmlns:a16="http://schemas.microsoft.com/office/drawing/2014/main" id="{8410B72B-905B-405C-87F8-5EF145905243}"/>
               </a:ext>
             </a:extLst>
           </p:cNvPr>
@@ -15675,7 +15675,7 @@
           <p:cNvPr id="70" name="">
             <a:extLst xmlns:a="http://schemas.openxmlformats.org/drawingml/2006/main">
               <a:ext uri="{FF2B5EF4-FFF2-40B4-BE49-F238E27FC236}">
-                <a16:creationId xmlns:a16="http://schemas.microsoft.com/office/drawing/2014/main" id="{E533479E-2302-4D43-B172-65ADE6DC667A}"/>
+                <a16:creationId xmlns:a16="http://schemas.microsoft.com/office/drawing/2014/main" id="{A0F90355-0C71-4722-B5D4-0A767A38FF9E}"/>
               </a:ext>
             </a:extLst>
           </p:cNvPr>
@@ -15706,7 +15706,7 @@
           <p:cNvPr id="71" name="">
             <a:extLst xmlns:a="http://schemas.openxmlformats.org/drawingml/2006/main">
               <a:ext uri="{FF2B5EF4-FFF2-40B4-BE49-F238E27FC236}">
-                <a16:creationId xmlns:a16="http://schemas.microsoft.com/office/drawing/2014/main" id="{B1CEF09B-169C-41C7-9ABC-80789D662636}"/>
+                <a16:creationId xmlns:a16="http://schemas.microsoft.com/office/drawing/2014/main" id="{506D9CDA-594B-4FD6-B75A-398271F424AA}"/>
               </a:ext>
             </a:extLst>
           </p:cNvPr>
@@ -15758,7 +15758,7 @@
           <p:cNvPr id="72" name="">
             <a:extLst xmlns:a="http://schemas.openxmlformats.org/drawingml/2006/main">
               <a:ext uri="{FF2B5EF4-FFF2-40B4-BE49-F238E27FC236}">
-                <a16:creationId xmlns:a16="http://schemas.microsoft.com/office/drawing/2014/main" id="{EE201449-ED7C-462D-90AB-AD474E01832C}"/>
+                <a16:creationId xmlns:a16="http://schemas.microsoft.com/office/drawing/2014/main" id="{37062264-0C45-4446-BCDC-3EBD545C6E92}"/>
               </a:ext>
             </a:extLst>
           </p:cNvPr>
@@ -15810,7 +15810,7 @@
           <p:cNvPr id="73" name="">
             <a:extLst xmlns:a="http://schemas.openxmlformats.org/drawingml/2006/main">
               <a:ext uri="{FF2B5EF4-FFF2-40B4-BE49-F238E27FC236}">
-                <a16:creationId xmlns:a16="http://schemas.microsoft.com/office/drawing/2014/main" id="{58B6414A-75F1-4F0B-9508-4B90396240CD}"/>
+                <a16:creationId xmlns:a16="http://schemas.microsoft.com/office/drawing/2014/main" id="{C6D478A2-56BC-446D-9447-99A78C0045E6}"/>
               </a:ext>
             </a:extLst>
           </p:cNvPr>
@@ -15862,7 +15862,7 @@
           <p:cNvPr id="74" name="">
             <a:extLst xmlns:a="http://schemas.openxmlformats.org/drawingml/2006/main">
               <a:ext uri="{FF2B5EF4-FFF2-40B4-BE49-F238E27FC236}">
-                <a16:creationId xmlns:a16="http://schemas.microsoft.com/office/drawing/2014/main" id="{D914651A-635F-417A-B243-41BB1C49579E}"/>
+                <a16:creationId xmlns:a16="http://schemas.microsoft.com/office/drawing/2014/main" id="{AAE05546-5F38-48D0-8AB2-E74581FFA7F1}"/>
               </a:ext>
             </a:extLst>
           </p:cNvPr>
@@ -15914,7 +15914,7 @@
           <p:cNvPr id="75" name="">
             <a:extLst xmlns:a="http://schemas.openxmlformats.org/drawingml/2006/main">
               <a:ext uri="{FF2B5EF4-FFF2-40B4-BE49-F238E27FC236}">
-                <a16:creationId xmlns:a16="http://schemas.microsoft.com/office/drawing/2014/main" id="{E820255B-8331-4F6E-A2B8-273F57677271}"/>
+                <a16:creationId xmlns:a16="http://schemas.microsoft.com/office/drawing/2014/main" id="{E0DE98DA-7238-482C-AD38-A9BDCE34C7AF}"/>
               </a:ext>
             </a:extLst>
           </p:cNvPr>
@@ -15966,7 +15966,7 @@
           <p:cNvPr id="76" name="">
             <a:extLst xmlns:a="http://schemas.openxmlformats.org/drawingml/2006/main">
               <a:ext uri="{FF2B5EF4-FFF2-40B4-BE49-F238E27FC236}">
-                <a16:creationId xmlns:a16="http://schemas.microsoft.com/office/drawing/2014/main" id="{21D1EB73-053F-466B-A3A5-0812723A2E73}"/>
+                <a16:creationId xmlns:a16="http://schemas.microsoft.com/office/drawing/2014/main" id="{97A7C8AC-C000-497A-8D3A-DCB229B1B794}"/>
               </a:ext>
             </a:extLst>
           </p:cNvPr>
@@ -15997,7 +15997,7 @@
           <p:cNvPr id="77" name="">
             <a:extLst xmlns:a="http://schemas.openxmlformats.org/drawingml/2006/main">
               <a:ext uri="{FF2B5EF4-FFF2-40B4-BE49-F238E27FC236}">
-                <a16:creationId xmlns:a16="http://schemas.microsoft.com/office/drawing/2014/main" id="{9CD4FD53-B7FF-42BE-9327-0A6B2A1866F9}"/>
+                <a16:creationId xmlns:a16="http://schemas.microsoft.com/office/drawing/2014/main" id="{B925F6C1-EC88-4A14-9733-E4F7FFA0268F}"/>
               </a:ext>
             </a:extLst>
           </p:cNvPr>
@@ -16028,7 +16028,7 @@
           <p:cNvPr id="78" name="">
             <a:extLst xmlns:a="http://schemas.openxmlformats.org/drawingml/2006/main">
               <a:ext uri="{FF2B5EF4-FFF2-40B4-BE49-F238E27FC236}">
-                <a16:creationId xmlns:a16="http://schemas.microsoft.com/office/drawing/2014/main" id="{7B34B045-A277-4359-A2CC-675D42CCA09B}"/>
+                <a16:creationId xmlns:a16="http://schemas.microsoft.com/office/drawing/2014/main" id="{FABD7ACE-A630-4416-BFDB-1B94FF3E56F2}"/>
               </a:ext>
             </a:extLst>
           </p:cNvPr>
@@ -16080,7 +16080,7 @@
           <p:cNvPr id="79" name="">
             <a:extLst xmlns:a="http://schemas.openxmlformats.org/drawingml/2006/main">
               <a:ext uri="{FF2B5EF4-FFF2-40B4-BE49-F238E27FC236}">
-                <a16:creationId xmlns:a16="http://schemas.microsoft.com/office/drawing/2014/main" id="{69EA394F-3FFB-42B1-B580-D49673EC3A85}"/>
+                <a16:creationId xmlns:a16="http://schemas.microsoft.com/office/drawing/2014/main" id="{E84584CF-72B0-414C-A7B1-3EBB6876586E}"/>
               </a:ext>
             </a:extLst>
           </p:cNvPr>
@@ -16132,7 +16132,7 @@
           <p:cNvPr id="80" name="">
             <a:extLst xmlns:a="http://schemas.openxmlformats.org/drawingml/2006/main">
               <a:ext uri="{FF2B5EF4-FFF2-40B4-BE49-F238E27FC236}">
-                <a16:creationId xmlns:a16="http://schemas.microsoft.com/office/drawing/2014/main" id="{D737DEF0-7D7A-4116-8F8C-1D63FF2C551C}"/>
+                <a16:creationId xmlns:a16="http://schemas.microsoft.com/office/drawing/2014/main" id="{855F73D6-BEE9-44BC-81BF-3BEDEBF2EBE0}"/>
               </a:ext>
             </a:extLst>
           </p:cNvPr>
@@ -16184,7 +16184,7 @@
           <p:cNvPr id="81" name="">
             <a:extLst xmlns:a="http://schemas.openxmlformats.org/drawingml/2006/main">
               <a:ext uri="{FF2B5EF4-FFF2-40B4-BE49-F238E27FC236}">
-                <a16:creationId xmlns:a16="http://schemas.microsoft.com/office/drawing/2014/main" id="{2CB6BF0B-E85C-483D-BB48-7B19EEA4BCC6}"/>
+                <a16:creationId xmlns:a16="http://schemas.microsoft.com/office/drawing/2014/main" id="{BB3F33F7-118A-4888-8040-9E15CA835F00}"/>
               </a:ext>
             </a:extLst>
           </p:cNvPr>
@@ -16236,7 +16236,7 @@
           <p:cNvPr id="82" name="">
             <a:extLst xmlns:a="http://schemas.openxmlformats.org/drawingml/2006/main">
               <a:ext uri="{FF2B5EF4-FFF2-40B4-BE49-F238E27FC236}">
-                <a16:creationId xmlns:a16="http://schemas.microsoft.com/office/drawing/2014/main" id="{F4AC94D4-AFB4-419E-A7CB-5BDB5593320D}"/>
+                <a16:creationId xmlns:a16="http://schemas.microsoft.com/office/drawing/2014/main" id="{71340385-FE3A-4B97-962C-A7AAF1E83C4C}"/>
               </a:ext>
             </a:extLst>
           </p:cNvPr>
@@ -16288,7 +16288,7 @@
           <p:cNvPr id="83" name="">
             <a:extLst xmlns:a="http://schemas.openxmlformats.org/drawingml/2006/main">
               <a:ext uri="{FF2B5EF4-FFF2-40B4-BE49-F238E27FC236}">
-                <a16:creationId xmlns:a16="http://schemas.microsoft.com/office/drawing/2014/main" id="{3D663CF6-550A-486F-BF6C-1FE3F91A9C71}"/>
+                <a16:creationId xmlns:a16="http://schemas.microsoft.com/office/drawing/2014/main" id="{FE7B4778-BDA3-40AA-8B83-205AEBF0CF27}"/>
               </a:ext>
             </a:extLst>
           </p:cNvPr>
@@ -16319,7 +16319,7 @@
           <p:cNvPr id="84" name="">
             <a:extLst xmlns:a="http://schemas.openxmlformats.org/drawingml/2006/main">
               <a:ext uri="{FF2B5EF4-FFF2-40B4-BE49-F238E27FC236}">
-                <a16:creationId xmlns:a16="http://schemas.microsoft.com/office/drawing/2014/main" id="{B3BD0DFE-AAAF-492A-A5C5-E589AB900F79}"/>
+                <a16:creationId xmlns:a16="http://schemas.microsoft.com/office/drawing/2014/main" id="{78646432-C900-458E-A084-C4E0D0C29A02}"/>
               </a:ext>
             </a:extLst>
           </p:cNvPr>
@@ -16371,7 +16371,7 @@
           <p:cNvPr id="85" name="">
             <a:extLst xmlns:a="http://schemas.openxmlformats.org/drawingml/2006/main">
               <a:ext uri="{FF2B5EF4-FFF2-40B4-BE49-F238E27FC236}">
-                <a16:creationId xmlns:a16="http://schemas.microsoft.com/office/drawing/2014/main" id="{5E7F89E2-F1CC-41C7-8E7F-7B3EA1EA1F9D}"/>
+                <a16:creationId xmlns:a16="http://schemas.microsoft.com/office/drawing/2014/main" id="{4321477D-659B-41E9-B276-A1A883A6105C}"/>
               </a:ext>
             </a:extLst>
           </p:cNvPr>
@@ -16423,7 +16423,7 @@
           <p:cNvPr id="86" name="">
             <a:extLst xmlns:a="http://schemas.openxmlformats.org/drawingml/2006/main">
               <a:ext uri="{FF2B5EF4-FFF2-40B4-BE49-F238E27FC236}">
-                <a16:creationId xmlns:a16="http://schemas.microsoft.com/office/drawing/2014/main" id="{FA5E0113-4A82-4B75-8A03-9477E2D7D45A}"/>
+                <a16:creationId xmlns:a16="http://schemas.microsoft.com/office/drawing/2014/main" id="{39B1E56B-2BBA-4149-B1E5-B532A2B2E218}"/>
               </a:ext>
             </a:extLst>
           </p:cNvPr>
@@ -16475,7 +16475,7 @@
           <p:cNvPr id="87" name="">
             <a:extLst xmlns:a="http://schemas.openxmlformats.org/drawingml/2006/main">
               <a:ext uri="{FF2B5EF4-FFF2-40B4-BE49-F238E27FC236}">
-                <a16:creationId xmlns:a16="http://schemas.microsoft.com/office/drawing/2014/main" id="{46E01F5A-6C72-4D50-B837-514C19BBA0BC}"/>
+                <a16:creationId xmlns:a16="http://schemas.microsoft.com/office/drawing/2014/main" id="{13D20145-3452-43C3-8805-15210B084B4B}"/>
               </a:ext>
             </a:extLst>
           </p:cNvPr>
@@ -16527,7 +16527,7 @@
           <p:cNvPr id="88" name="">
             <a:extLst xmlns:a="http://schemas.openxmlformats.org/drawingml/2006/main">
               <a:ext uri="{FF2B5EF4-FFF2-40B4-BE49-F238E27FC236}">
-                <a16:creationId xmlns:a16="http://schemas.microsoft.com/office/drawing/2014/main" id="{D95E0F27-DB12-4494-889F-6966D3C52DC6}"/>
+                <a16:creationId xmlns:a16="http://schemas.microsoft.com/office/drawing/2014/main" id="{19BE9704-FAC8-4427-BA32-CE1CB13AC99C}"/>
               </a:ext>
             </a:extLst>
           </p:cNvPr>
@@ -16579,7 +16579,7 @@
           <p:cNvPr id="89" name="">
             <a:extLst xmlns:a="http://schemas.openxmlformats.org/drawingml/2006/main">
               <a:ext uri="{FF2B5EF4-FFF2-40B4-BE49-F238E27FC236}">
-                <a16:creationId xmlns:a16="http://schemas.microsoft.com/office/drawing/2014/main" id="{273C3FFE-564E-40CC-A108-6EA2C4168E86}"/>
+                <a16:creationId xmlns:a16="http://schemas.microsoft.com/office/drawing/2014/main" id="{4114707E-B679-44D6-BE5E-FF25F713DCEC}"/>
               </a:ext>
             </a:extLst>
           </p:cNvPr>
@@ -16610,7 +16610,7 @@
           <p:cNvPr id="90" name="">
             <a:extLst xmlns:a="http://schemas.openxmlformats.org/drawingml/2006/main">
               <a:ext uri="{FF2B5EF4-FFF2-40B4-BE49-F238E27FC236}">
-                <a16:creationId xmlns:a16="http://schemas.microsoft.com/office/drawing/2014/main" id="{D4D8BA71-2BAD-468A-9534-2B9E8F41F886}"/>
+                <a16:creationId xmlns:a16="http://schemas.microsoft.com/office/drawing/2014/main" id="{4E23344C-AF4A-4A66-817B-4A83B6FE37FD}"/>
               </a:ext>
             </a:extLst>
           </p:cNvPr>
@@ -16641,7 +16641,7 @@
           <p:cNvPr id="91" name="">
             <a:extLst xmlns:a="http://schemas.openxmlformats.org/drawingml/2006/main">
               <a:ext uri="{FF2B5EF4-FFF2-40B4-BE49-F238E27FC236}">
-                <a16:creationId xmlns:a16="http://schemas.microsoft.com/office/drawing/2014/main" id="{AC81B397-6ACF-482A-B56B-214906DEEB1B}"/>
+                <a16:creationId xmlns:a16="http://schemas.microsoft.com/office/drawing/2014/main" id="{EA2F048C-AACF-4D7D-9624-B2254D1CD90A}"/>
               </a:ext>
             </a:extLst>
           </p:cNvPr>
@@ -16693,7 +16693,7 @@
           <p:cNvPr id="92" name="">
             <a:extLst xmlns:a="http://schemas.openxmlformats.org/drawingml/2006/main">
               <a:ext uri="{FF2B5EF4-FFF2-40B4-BE49-F238E27FC236}">
-                <a16:creationId xmlns:a16="http://schemas.microsoft.com/office/drawing/2014/main" id="{19AA4773-96A5-48B5-8211-46EF949524B5}"/>
+                <a16:creationId xmlns:a16="http://schemas.microsoft.com/office/drawing/2014/main" id="{7F946168-8B9E-4B63-9983-347834BB631F}"/>
               </a:ext>
             </a:extLst>
           </p:cNvPr>
@@ -16745,7 +16745,7 @@
           <p:cNvPr id="93" name="">
             <a:extLst xmlns:a="http://schemas.openxmlformats.org/drawingml/2006/main">
               <a:ext uri="{FF2B5EF4-FFF2-40B4-BE49-F238E27FC236}">
-                <a16:creationId xmlns:a16="http://schemas.microsoft.com/office/drawing/2014/main" id="{9C4D9431-5C6B-4C63-B3B4-9DE41BBF6427}"/>
+                <a16:creationId xmlns:a16="http://schemas.microsoft.com/office/drawing/2014/main" id="{D77553C1-86AC-44CA-9237-7837303B037B}"/>
               </a:ext>
             </a:extLst>
           </p:cNvPr>
@@ -16797,7 +16797,7 @@
           <p:cNvPr id="94" name="">
             <a:extLst xmlns:a="http://schemas.openxmlformats.org/drawingml/2006/main">
               <a:ext uri="{FF2B5EF4-FFF2-40B4-BE49-F238E27FC236}">
-                <a16:creationId xmlns:a16="http://schemas.microsoft.com/office/drawing/2014/main" id="{68D3A581-184A-4D40-8551-6A77AC3EBE87}"/>
+                <a16:creationId xmlns:a16="http://schemas.microsoft.com/office/drawing/2014/main" id="{3E4198DF-FBED-4BF0-9A32-3C78295A39C4}"/>
               </a:ext>
             </a:extLst>
           </p:cNvPr>
@@ -16849,7 +16849,7 @@
           <p:cNvPr id="95" name="">
             <a:extLst xmlns:a="http://schemas.openxmlformats.org/drawingml/2006/main">
               <a:ext uri="{FF2B5EF4-FFF2-40B4-BE49-F238E27FC236}">
-                <a16:creationId xmlns:a16="http://schemas.microsoft.com/office/drawing/2014/main" id="{81D145D7-B952-4347-B672-B98B40D7934D}"/>
+                <a16:creationId xmlns:a16="http://schemas.microsoft.com/office/drawing/2014/main" id="{1E2807A8-5D5F-4269-A8F1-378A32D1EEE9}"/>
               </a:ext>
             </a:extLst>
           </p:cNvPr>
@@ -16901,7 +16901,7 @@
           <p:cNvPr id="96" name="">
             <a:extLst xmlns:a="http://schemas.openxmlformats.org/drawingml/2006/main">
               <a:ext uri="{FF2B5EF4-FFF2-40B4-BE49-F238E27FC236}">
-                <a16:creationId xmlns:a16="http://schemas.microsoft.com/office/drawing/2014/main" id="{A4FD8F39-7E92-4DB0-B7B5-470D2495926E}"/>
+                <a16:creationId xmlns:a16="http://schemas.microsoft.com/office/drawing/2014/main" id="{F5E05D3C-26BA-4FBB-92A1-9CA0D3F8CF2D}"/>
               </a:ext>
             </a:extLst>
           </p:cNvPr>
@@ -16932,7 +16932,7 @@
           <p:cNvPr id="97" name="">
             <a:extLst xmlns:a="http://schemas.openxmlformats.org/drawingml/2006/main">
               <a:ext uri="{FF2B5EF4-FFF2-40B4-BE49-F238E27FC236}">
-                <a16:creationId xmlns:a16="http://schemas.microsoft.com/office/drawing/2014/main" id="{E4DCEC8B-A9FA-48DC-A5BD-73E612D0FBCD}"/>
+                <a16:creationId xmlns:a16="http://schemas.microsoft.com/office/drawing/2014/main" id="{A8459C4B-6E3F-49C2-8663-2FA4F5747270}"/>
               </a:ext>
             </a:extLst>
           </p:cNvPr>
@@ -16984,7 +16984,7 @@
           <p:cNvPr id="98" name="">
             <a:extLst xmlns:a="http://schemas.openxmlformats.org/drawingml/2006/main">
               <a:ext uri="{FF2B5EF4-FFF2-40B4-BE49-F238E27FC236}">
-                <a16:creationId xmlns:a16="http://schemas.microsoft.com/office/drawing/2014/main" id="{BE19C215-85AA-4A7D-95B7-71D177D6F2BB}"/>
+                <a16:creationId xmlns:a16="http://schemas.microsoft.com/office/drawing/2014/main" id="{218D072F-9D23-42B1-9B40-B3F8E89DDED8}"/>
               </a:ext>
             </a:extLst>
           </p:cNvPr>
@@ -17036,7 +17036,7 @@
           <p:cNvPr id="99" name="">
             <a:extLst xmlns:a="http://schemas.openxmlformats.org/drawingml/2006/main">
               <a:ext uri="{FF2B5EF4-FFF2-40B4-BE49-F238E27FC236}">
-                <a16:creationId xmlns:a16="http://schemas.microsoft.com/office/drawing/2014/main" id="{DA428CFA-B691-4778-8542-FE66754D48A8}"/>
+                <a16:creationId xmlns:a16="http://schemas.microsoft.com/office/drawing/2014/main" id="{E2E32190-9A20-404E-AD6D-23097E5B89C1}"/>
               </a:ext>
             </a:extLst>
           </p:cNvPr>
@@ -17088,7 +17088,7 @@
           <p:cNvPr id="100" name="">
             <a:extLst xmlns:a="http://schemas.openxmlformats.org/drawingml/2006/main">
               <a:ext uri="{FF2B5EF4-FFF2-40B4-BE49-F238E27FC236}">
-                <a16:creationId xmlns:a16="http://schemas.microsoft.com/office/drawing/2014/main" id="{7EFD5A17-8BCA-4FB3-AE4C-D8E1A616A1B3}"/>
+                <a16:creationId xmlns:a16="http://schemas.microsoft.com/office/drawing/2014/main" id="{2F083FEE-B22A-4730-858E-EC1E453128E9}"/>
               </a:ext>
             </a:extLst>
           </p:cNvPr>
@@ -17140,7 +17140,7 @@
           <p:cNvPr id="101" name="">
             <a:extLst xmlns:a="http://schemas.openxmlformats.org/drawingml/2006/main">
               <a:ext uri="{FF2B5EF4-FFF2-40B4-BE49-F238E27FC236}">
-                <a16:creationId xmlns:a16="http://schemas.microsoft.com/office/drawing/2014/main" id="{D1191550-3CF2-4959-AD56-7FE03133622D}"/>
+                <a16:creationId xmlns:a16="http://schemas.microsoft.com/office/drawing/2014/main" id="{F5906C5F-15D5-4C84-BC6B-26F34336D5AE}"/>
               </a:ext>
             </a:extLst>
           </p:cNvPr>
@@ -17190,7 +17190,7 @@
     </p:spTree>
     <p:extLst>
       <p:ext uri="{BB962C8B-B14F-4D97-AF65-F5344CB8AC3E}">
-        <p14:creationId xmlns:p14="http://schemas.microsoft.com/office/powerpoint/2010/main" val="553490841"/>
+        <p14:creationId xmlns:p14="http://schemas.microsoft.com/office/powerpoint/2010/main" val="592286468"/>
       </p:ext>
     </p:extLst>
   </p:cSld>
@@ -17221,7 +17221,7 @@
           <p:cNvPr id="96" name="">
             <a:extLst xmlns:a="http://schemas.openxmlformats.org/drawingml/2006/main">
               <a:ext uri="{FF2B5EF4-FFF2-40B4-BE49-F238E27FC236}">
-                <a16:creationId xmlns:a16="http://schemas.microsoft.com/office/drawing/2014/main" id="{985A14B0-8934-4820-A460-522A82CC2E9F}"/>
+                <a16:creationId xmlns:a16="http://schemas.microsoft.com/office/drawing/2014/main" id="{BCBBCF69-986B-4778-B8F1-F7605905B282}"/>
               </a:ext>
             </a:extLst>
           </p:cNvPr>
@@ -17254,7 +17254,7 @@
           <p:cNvPr id="2" name="">
             <a:extLst xmlns:a="http://schemas.openxmlformats.org/drawingml/2006/main">
               <a:ext uri="{FF2B5EF4-FFF2-40B4-BE49-F238E27FC236}">
-                <a16:creationId xmlns:a16="http://schemas.microsoft.com/office/drawing/2014/main" id="{5938A50E-78DB-482E-B0D9-C6645CE6228C}"/>
+                <a16:creationId xmlns:a16="http://schemas.microsoft.com/office/drawing/2014/main" id="{A5344082-6928-415E-8040-F18AACF71E48}"/>
               </a:ext>
             </a:extLst>
           </p:cNvPr>
@@ -17285,7 +17285,7 @@
           <p:cNvPr id="3" name="">
             <a:extLst xmlns:a="http://schemas.openxmlformats.org/drawingml/2006/main">
               <a:ext uri="{FF2B5EF4-FFF2-40B4-BE49-F238E27FC236}">
-                <a16:creationId xmlns:a16="http://schemas.microsoft.com/office/drawing/2014/main" id="{F5D232AE-C3BD-4166-B09D-C39D9E6489F0}"/>
+                <a16:creationId xmlns:a16="http://schemas.microsoft.com/office/drawing/2014/main" id="{D1359AC1-785D-4115-88FD-11175B6A1C58}"/>
               </a:ext>
             </a:extLst>
           </p:cNvPr>
@@ -17337,7 +17337,7 @@
           <p:cNvPr id="4" name="">
             <a:extLst xmlns:a="http://schemas.openxmlformats.org/drawingml/2006/main">
               <a:ext uri="{FF2B5EF4-FFF2-40B4-BE49-F238E27FC236}">
-                <a16:creationId xmlns:a16="http://schemas.microsoft.com/office/drawing/2014/main" id="{83B95FEB-4348-46D5-B2A1-FF0024F5D69D}"/>
+                <a16:creationId xmlns:a16="http://schemas.microsoft.com/office/drawing/2014/main" id="{93A4EA16-EC9F-42F8-8E00-B68AFB0D00D1}"/>
               </a:ext>
             </a:extLst>
           </p:cNvPr>
@@ -17389,7 +17389,7 @@
           <p:cNvPr id="5" name="">
             <a:extLst xmlns:a="http://schemas.openxmlformats.org/drawingml/2006/main">
               <a:ext uri="{FF2B5EF4-FFF2-40B4-BE49-F238E27FC236}">
-                <a16:creationId xmlns:a16="http://schemas.microsoft.com/office/drawing/2014/main" id="{FC808222-7718-49C2-A52E-31D0612701E4}"/>
+                <a16:creationId xmlns:a16="http://schemas.microsoft.com/office/drawing/2014/main" id="{0852DDB8-D5EB-4435-8623-67A78DB1F351}"/>
               </a:ext>
             </a:extLst>
           </p:cNvPr>
@@ -17424,7 +17424,7 @@
           <p:nvPr/>
         </p:nvPicPr>
         <p:blipFill>
-          <a:blip xmlns:r="http://schemas.openxmlformats.org/officeDocument/2006/relationships" xmlns:a="http://schemas.openxmlformats.org/drawingml/2006/main" r:embed="Rb0cd2e2545a04d44"/>
+          <a:blip xmlns:r="http://schemas.openxmlformats.org/officeDocument/2006/relationships" xmlns:a="http://schemas.openxmlformats.org/drawingml/2006/main" r:embed="Rebf03f5e509948b9"/>
           <a:stretch xmlns:a="http://schemas.openxmlformats.org/drawingml/2006/main"/>
         </p:blipFill>
         <p:spPr>
@@ -17442,7 +17442,7 @@
           <p:cNvPr id="7" name="">
             <a:extLst xmlns:a="http://schemas.openxmlformats.org/drawingml/2006/main">
               <a:ext uri="{FF2B5EF4-FFF2-40B4-BE49-F238E27FC236}">
-                <a16:creationId xmlns:a16="http://schemas.microsoft.com/office/drawing/2014/main" id="{D0369A26-9004-4052-A1FB-8932CF253306}"/>
+                <a16:creationId xmlns:a16="http://schemas.microsoft.com/office/drawing/2014/main" id="{B4202A97-8F1D-4E21-9301-DF969C440798}"/>
               </a:ext>
             </a:extLst>
           </p:cNvPr>
@@ -17494,7 +17494,7 @@
           <p:cNvPr id="8" name="">
             <a:extLst xmlns:a="http://schemas.openxmlformats.org/drawingml/2006/main">
               <a:ext uri="{FF2B5EF4-FFF2-40B4-BE49-F238E27FC236}">
-                <a16:creationId xmlns:a16="http://schemas.microsoft.com/office/drawing/2014/main" id="{E887B2B8-174A-4EBA-8CEB-D5CB34EE4DB4}"/>
+                <a16:creationId xmlns:a16="http://schemas.microsoft.com/office/drawing/2014/main" id="{BA1B41FC-70FB-4D05-A3D0-06CB70358BE0}"/>
               </a:ext>
             </a:extLst>
           </p:cNvPr>
@@ -17546,7 +17546,7 @@
           <p:cNvPr id="9" name="">
             <a:extLst xmlns:a="http://schemas.openxmlformats.org/drawingml/2006/main">
               <a:ext uri="{FF2B5EF4-FFF2-40B4-BE49-F238E27FC236}">
-                <a16:creationId xmlns:a16="http://schemas.microsoft.com/office/drawing/2014/main" id="{D1741136-11A7-444D-B1B4-61B887701C6C}"/>
+                <a16:creationId xmlns:a16="http://schemas.microsoft.com/office/drawing/2014/main" id="{F898E554-DDC2-4188-9A5A-2911A55B2AF2}"/>
               </a:ext>
             </a:extLst>
           </p:cNvPr>
@@ -17598,7 +17598,7 @@
           <p:cNvPr id="10" name="">
             <a:extLst xmlns:a="http://schemas.openxmlformats.org/drawingml/2006/main">
               <a:ext uri="{FF2B5EF4-FFF2-40B4-BE49-F238E27FC236}">
-                <a16:creationId xmlns:a16="http://schemas.microsoft.com/office/drawing/2014/main" id="{6F360B32-DE27-4FFB-B818-3A827477ABB9}"/>
+                <a16:creationId xmlns:a16="http://schemas.microsoft.com/office/drawing/2014/main" id="{041CD445-39E3-40B7-8898-C20D507AF2C1}"/>
               </a:ext>
             </a:extLst>
           </p:cNvPr>
@@ -17650,7 +17650,7 @@
           <p:cNvPr id="11" name="">
             <a:extLst xmlns:a="http://schemas.openxmlformats.org/drawingml/2006/main">
               <a:ext uri="{FF2B5EF4-FFF2-40B4-BE49-F238E27FC236}">
-                <a16:creationId xmlns:a16="http://schemas.microsoft.com/office/drawing/2014/main" id="{113FB506-9F8D-420D-9B8A-CA699E630C48}"/>
+                <a16:creationId xmlns:a16="http://schemas.microsoft.com/office/drawing/2014/main" id="{8C860FC4-0188-4123-8560-E1478916727D}"/>
               </a:ext>
             </a:extLst>
           </p:cNvPr>
@@ -17681,7 +17681,7 @@
           <p:cNvPr id="12" name="">
             <a:extLst xmlns:a="http://schemas.openxmlformats.org/drawingml/2006/main">
               <a:ext uri="{FF2B5EF4-FFF2-40B4-BE49-F238E27FC236}">
-                <a16:creationId xmlns:a16="http://schemas.microsoft.com/office/drawing/2014/main" id="{113B4230-8EA1-4CFE-8B7A-F99301D07A4E}"/>
+                <a16:creationId xmlns:a16="http://schemas.microsoft.com/office/drawing/2014/main" id="{11386EF9-C954-4E7B-A883-124936762EA0}"/>
               </a:ext>
             </a:extLst>
           </p:cNvPr>
@@ -17712,7 +17712,7 @@
           <p:cNvPr id="13" name="">
             <a:extLst xmlns:a="http://schemas.openxmlformats.org/drawingml/2006/main">
               <a:ext uri="{FF2B5EF4-FFF2-40B4-BE49-F238E27FC236}">
-                <a16:creationId xmlns:a16="http://schemas.microsoft.com/office/drawing/2014/main" id="{7C95296C-BFE3-4CC5-A236-D9008C091558}"/>
+                <a16:creationId xmlns:a16="http://schemas.microsoft.com/office/drawing/2014/main" id="{C72E1AFA-6A64-477D-B72E-9A4829F06085}"/>
               </a:ext>
             </a:extLst>
           </p:cNvPr>
@@ -17764,7 +17764,7 @@
           <p:cNvPr id="14" name="">
             <a:extLst xmlns:a="http://schemas.openxmlformats.org/drawingml/2006/main">
               <a:ext uri="{FF2B5EF4-FFF2-40B4-BE49-F238E27FC236}">
-                <a16:creationId xmlns:a16="http://schemas.microsoft.com/office/drawing/2014/main" id="{2E4E768C-DB91-49FE-8D5E-B57219FE9605}"/>
+                <a16:creationId xmlns:a16="http://schemas.microsoft.com/office/drawing/2014/main" id="{5B6E47D3-32D9-404D-A763-DE32D924CC4F}"/>
               </a:ext>
             </a:extLst>
           </p:cNvPr>
@@ -17816,7 +17816,7 @@
           <p:cNvPr id="15" name="">
             <a:extLst xmlns:a="http://schemas.openxmlformats.org/drawingml/2006/main">
               <a:ext uri="{FF2B5EF4-FFF2-40B4-BE49-F238E27FC236}">
-                <a16:creationId xmlns:a16="http://schemas.microsoft.com/office/drawing/2014/main" id="{71977505-37C5-46AF-94FC-D4DC42CB4705}"/>
+                <a16:creationId xmlns:a16="http://schemas.microsoft.com/office/drawing/2014/main" id="{7C04CF8B-F28B-42AF-8DDF-2875C6D09439}"/>
               </a:ext>
             </a:extLst>
           </p:cNvPr>
@@ -17868,7 +17868,7 @@
           <p:cNvPr id="16" name="">
             <a:extLst xmlns:a="http://schemas.openxmlformats.org/drawingml/2006/main">
               <a:ext uri="{FF2B5EF4-FFF2-40B4-BE49-F238E27FC236}">
-                <a16:creationId xmlns:a16="http://schemas.microsoft.com/office/drawing/2014/main" id="{544A397E-5A26-437A-A15B-B94FE16BA2D2}"/>
+                <a16:creationId xmlns:a16="http://schemas.microsoft.com/office/drawing/2014/main" id="{440552A8-94B1-4AA2-9637-EB3E1EFDB984}"/>
               </a:ext>
             </a:extLst>
           </p:cNvPr>
@@ -17920,7 +17920,7 @@
           <p:cNvPr id="17" name="">
             <a:extLst xmlns:a="http://schemas.openxmlformats.org/drawingml/2006/main">
               <a:ext uri="{FF2B5EF4-FFF2-40B4-BE49-F238E27FC236}">
-                <a16:creationId xmlns:a16="http://schemas.microsoft.com/office/drawing/2014/main" id="{D90E5D4D-245C-4AF7-83A2-7BE5CF82B7B5}"/>
+                <a16:creationId xmlns:a16="http://schemas.microsoft.com/office/drawing/2014/main" id="{6AE608CE-8E55-4475-BBDF-E8B46AD7EECD}"/>
               </a:ext>
             </a:extLst>
           </p:cNvPr>
@@ -17972,7 +17972,7 @@
           <p:cNvPr id="18" name="">
             <a:extLst xmlns:a="http://schemas.openxmlformats.org/drawingml/2006/main">
               <a:ext uri="{FF2B5EF4-FFF2-40B4-BE49-F238E27FC236}">
-                <a16:creationId xmlns:a16="http://schemas.microsoft.com/office/drawing/2014/main" id="{5FA1782A-53E7-4351-A50D-EF49A6510F32}"/>
+                <a16:creationId xmlns:a16="http://schemas.microsoft.com/office/drawing/2014/main" id="{2B11B01E-E115-48C5-913E-0BE2784109B4}"/>
               </a:ext>
             </a:extLst>
           </p:cNvPr>
@@ -18003,7 +18003,7 @@
           <p:cNvPr id="19" name="">
             <a:extLst xmlns:a="http://schemas.openxmlformats.org/drawingml/2006/main">
               <a:ext uri="{FF2B5EF4-FFF2-40B4-BE49-F238E27FC236}">
-                <a16:creationId xmlns:a16="http://schemas.microsoft.com/office/drawing/2014/main" id="{7DE95580-DF83-4A06-AF8C-938E9D439855}"/>
+                <a16:creationId xmlns:a16="http://schemas.microsoft.com/office/drawing/2014/main" id="{71B08DC4-3D86-4D45-B78A-DD287D81098D}"/>
               </a:ext>
             </a:extLst>
           </p:cNvPr>
@@ -18034,7 +18034,7 @@
           <p:cNvPr id="20" name="">
             <a:extLst xmlns:a="http://schemas.openxmlformats.org/drawingml/2006/main">
               <a:ext uri="{FF2B5EF4-FFF2-40B4-BE49-F238E27FC236}">
-                <a16:creationId xmlns:a16="http://schemas.microsoft.com/office/drawing/2014/main" id="{FAE0F473-E086-4EF2-9EE5-00B82D1CE51C}"/>
+                <a16:creationId xmlns:a16="http://schemas.microsoft.com/office/drawing/2014/main" id="{56165E33-4D37-4407-AFF7-4326F8DB9FA5}"/>
               </a:ext>
             </a:extLst>
           </p:cNvPr>
@@ -18086,7 +18086,7 @@
           <p:cNvPr id="21" name="">
             <a:extLst xmlns:a="http://schemas.openxmlformats.org/drawingml/2006/main">
               <a:ext uri="{FF2B5EF4-FFF2-40B4-BE49-F238E27FC236}">
-                <a16:creationId xmlns:a16="http://schemas.microsoft.com/office/drawing/2014/main" id="{90B96838-D12B-4444-878B-69EED9CAAC15}"/>
+                <a16:creationId xmlns:a16="http://schemas.microsoft.com/office/drawing/2014/main" id="{1A59EED3-B579-4EBC-AC47-630348C4F904}"/>
               </a:ext>
             </a:extLst>
           </p:cNvPr>
@@ -18138,7 +18138,7 @@
           <p:cNvPr id="22" name="">
             <a:extLst xmlns:a="http://schemas.openxmlformats.org/drawingml/2006/main">
               <a:ext uri="{FF2B5EF4-FFF2-40B4-BE49-F238E27FC236}">
-                <a16:creationId xmlns:a16="http://schemas.microsoft.com/office/drawing/2014/main" id="{55DB3466-F1A4-474C-BF73-616349A3AE85}"/>
+                <a16:creationId xmlns:a16="http://schemas.microsoft.com/office/drawing/2014/main" id="{9BF39550-D539-4416-9631-6567304E128B}"/>
               </a:ext>
             </a:extLst>
           </p:cNvPr>
@@ -18190,7 +18190,7 @@
           <p:cNvPr id="23" name="">
             <a:extLst xmlns:a="http://schemas.openxmlformats.org/drawingml/2006/main">
               <a:ext uri="{FF2B5EF4-FFF2-40B4-BE49-F238E27FC236}">
-                <a16:creationId xmlns:a16="http://schemas.microsoft.com/office/drawing/2014/main" id="{DA2732C8-8BA7-447F-80AD-E1D69F842812}"/>
+                <a16:creationId xmlns:a16="http://schemas.microsoft.com/office/drawing/2014/main" id="{9880E0BD-8866-46D2-B896-4CEE6F7AB33E}"/>
               </a:ext>
             </a:extLst>
           </p:cNvPr>
@@ -18242,7 +18242,7 @@
           <p:cNvPr id="24" name="">
             <a:extLst xmlns:a="http://schemas.openxmlformats.org/drawingml/2006/main">
               <a:ext uri="{FF2B5EF4-FFF2-40B4-BE49-F238E27FC236}">
-                <a16:creationId xmlns:a16="http://schemas.microsoft.com/office/drawing/2014/main" id="{582D18FE-1B35-45C5-AECE-A39CDA902409}"/>
+                <a16:creationId xmlns:a16="http://schemas.microsoft.com/office/drawing/2014/main" id="{1A60DCF3-352D-4BEF-ADD7-69782BAB0D87}"/>
               </a:ext>
             </a:extLst>
           </p:cNvPr>
@@ -18294,7 +18294,7 @@
           <p:cNvPr id="25" name="">
             <a:extLst xmlns:a="http://schemas.openxmlformats.org/drawingml/2006/main">
               <a:ext uri="{FF2B5EF4-FFF2-40B4-BE49-F238E27FC236}">
-                <a16:creationId xmlns:a16="http://schemas.microsoft.com/office/drawing/2014/main" id="{7045A291-B9FE-4175-8B0C-994CA5AEC6D9}"/>
+                <a16:creationId xmlns:a16="http://schemas.microsoft.com/office/drawing/2014/main" id="{5F599717-7786-495F-A283-E22C39AFF0E9}"/>
               </a:ext>
             </a:extLst>
           </p:cNvPr>
@@ -18325,7 +18325,7 @@
           <p:cNvPr id="26" name="">
             <a:extLst xmlns:a="http://schemas.openxmlformats.org/drawingml/2006/main">
               <a:ext uri="{FF2B5EF4-FFF2-40B4-BE49-F238E27FC236}">
-                <a16:creationId xmlns:a16="http://schemas.microsoft.com/office/drawing/2014/main" id="{D9DACD11-743A-47B6-9B44-249392AF5929}"/>
+                <a16:creationId xmlns:a16="http://schemas.microsoft.com/office/drawing/2014/main" id="{DD3C49C4-1269-40DB-A318-2044A12D812C}"/>
               </a:ext>
             </a:extLst>
           </p:cNvPr>
@@ -18377,7 +18377,7 @@
           <p:cNvPr id="27" name="">
             <a:extLst xmlns:a="http://schemas.openxmlformats.org/drawingml/2006/main">
               <a:ext uri="{FF2B5EF4-FFF2-40B4-BE49-F238E27FC236}">
-                <a16:creationId xmlns:a16="http://schemas.microsoft.com/office/drawing/2014/main" id="{AE970A6C-62B1-4D45-B6C4-6C17C3C7CC1F}"/>
+                <a16:creationId xmlns:a16="http://schemas.microsoft.com/office/drawing/2014/main" id="{D37093C1-907C-4C37-9A97-675362F979B8}"/>
               </a:ext>
             </a:extLst>
           </p:cNvPr>
@@ -18429,7 +18429,7 @@
           <p:cNvPr id="28" name="">
             <a:extLst xmlns:a="http://schemas.openxmlformats.org/drawingml/2006/main">
               <a:ext uri="{FF2B5EF4-FFF2-40B4-BE49-F238E27FC236}">
-                <a16:creationId xmlns:a16="http://schemas.microsoft.com/office/drawing/2014/main" id="{0D9DBE96-2EED-44AB-A4C3-0B7F53B837B8}"/>
+                <a16:creationId xmlns:a16="http://schemas.microsoft.com/office/drawing/2014/main" id="{F75B2689-4BD2-4D49-B0DA-235E25F8EB94}"/>
               </a:ext>
             </a:extLst>
           </p:cNvPr>
@@ -18481,7 +18481,7 @@
           <p:cNvPr id="29" name="">
             <a:extLst xmlns:a="http://schemas.openxmlformats.org/drawingml/2006/main">
               <a:ext uri="{FF2B5EF4-FFF2-40B4-BE49-F238E27FC236}">
-                <a16:creationId xmlns:a16="http://schemas.microsoft.com/office/drawing/2014/main" id="{12387834-85F5-4146-B6B5-B4EFBABAC748}"/>
+                <a16:creationId xmlns:a16="http://schemas.microsoft.com/office/drawing/2014/main" id="{38F6629A-8958-4C98-AE04-69D74A466A44}"/>
               </a:ext>
             </a:extLst>
           </p:cNvPr>
@@ -18533,7 +18533,7 @@
           <p:cNvPr id="30" name="">
             <a:extLst xmlns:a="http://schemas.openxmlformats.org/drawingml/2006/main">
               <a:ext uri="{FF2B5EF4-FFF2-40B4-BE49-F238E27FC236}">
-                <a16:creationId xmlns:a16="http://schemas.microsoft.com/office/drawing/2014/main" id="{78C6B4E5-B194-4A69-89DC-D397FDE6BC3E}"/>
+                <a16:creationId xmlns:a16="http://schemas.microsoft.com/office/drawing/2014/main" id="{09D74AD5-0525-40E1-A841-D84BFAB436D8}"/>
               </a:ext>
             </a:extLst>
           </p:cNvPr>
@@ -18585,7 +18585,7 @@
           <p:cNvPr id="31" name="">
             <a:extLst xmlns:a="http://schemas.openxmlformats.org/drawingml/2006/main">
               <a:ext uri="{FF2B5EF4-FFF2-40B4-BE49-F238E27FC236}">
-                <a16:creationId xmlns:a16="http://schemas.microsoft.com/office/drawing/2014/main" id="{D6193D84-74A5-41EE-9678-AF3483307D8E}"/>
+                <a16:creationId xmlns:a16="http://schemas.microsoft.com/office/drawing/2014/main" id="{D8A9DEB7-F426-4699-9F1E-49877F747102}"/>
               </a:ext>
             </a:extLst>
           </p:cNvPr>
@@ -18616,7 +18616,7 @@
           <p:cNvPr id="32" name="">
             <a:extLst xmlns:a="http://schemas.openxmlformats.org/drawingml/2006/main">
               <a:ext uri="{FF2B5EF4-FFF2-40B4-BE49-F238E27FC236}">
-                <a16:creationId xmlns:a16="http://schemas.microsoft.com/office/drawing/2014/main" id="{B3776C00-F8BD-46B5-AFA9-D70D28F0A020}"/>
+                <a16:creationId xmlns:a16="http://schemas.microsoft.com/office/drawing/2014/main" id="{9764EAFF-6A01-4BC7-880D-D5CC442663C2}"/>
               </a:ext>
             </a:extLst>
           </p:cNvPr>
@@ -18647,7 +18647,7 @@
           <p:cNvPr id="33" name="">
             <a:extLst xmlns:a="http://schemas.openxmlformats.org/drawingml/2006/main">
               <a:ext uri="{FF2B5EF4-FFF2-40B4-BE49-F238E27FC236}">
-                <a16:creationId xmlns:a16="http://schemas.microsoft.com/office/drawing/2014/main" id="{451E59F0-BCE0-492D-8674-4F580DB02C16}"/>
+                <a16:creationId xmlns:a16="http://schemas.microsoft.com/office/drawing/2014/main" id="{456B7DD9-AE39-4BDD-A6DC-B622DF9045EF}"/>
               </a:ext>
             </a:extLst>
           </p:cNvPr>
@@ -18699,7 +18699,7 @@
           <p:cNvPr id="34" name="">
             <a:extLst xmlns:a="http://schemas.openxmlformats.org/drawingml/2006/main">
               <a:ext uri="{FF2B5EF4-FFF2-40B4-BE49-F238E27FC236}">
-                <a16:creationId xmlns:a16="http://schemas.microsoft.com/office/drawing/2014/main" id="{85ED6349-0EAE-4656-8BB4-2E73834E6816}"/>
+                <a16:creationId xmlns:a16="http://schemas.microsoft.com/office/drawing/2014/main" id="{3B12F96A-BB84-4795-AC87-41817C54E0B4}"/>
               </a:ext>
             </a:extLst>
           </p:cNvPr>
@@ -18751,7 +18751,7 @@
           <p:cNvPr id="35" name="">
             <a:extLst xmlns:a="http://schemas.openxmlformats.org/drawingml/2006/main">
               <a:ext uri="{FF2B5EF4-FFF2-40B4-BE49-F238E27FC236}">
-                <a16:creationId xmlns:a16="http://schemas.microsoft.com/office/drawing/2014/main" id="{F87B9BFB-D7C5-4027-9B90-E2EA2A689B2D}"/>
+                <a16:creationId xmlns:a16="http://schemas.microsoft.com/office/drawing/2014/main" id="{31C47B65-9FCC-4D9C-86DA-79BC2CC1A30C}"/>
               </a:ext>
             </a:extLst>
           </p:cNvPr>
@@ -18803,7 +18803,7 @@
           <p:cNvPr id="36" name="">
             <a:extLst xmlns:a="http://schemas.openxmlformats.org/drawingml/2006/main">
               <a:ext uri="{FF2B5EF4-FFF2-40B4-BE49-F238E27FC236}">
-                <a16:creationId xmlns:a16="http://schemas.microsoft.com/office/drawing/2014/main" id="{AD689EB7-50AD-4F55-A7A9-7F3DE1D76B82}"/>
+                <a16:creationId xmlns:a16="http://schemas.microsoft.com/office/drawing/2014/main" id="{7756938C-017D-420C-8645-9FFA5B821482}"/>
               </a:ext>
             </a:extLst>
           </p:cNvPr>
@@ -18855,7 +18855,7 @@
           <p:cNvPr id="37" name="">
             <a:extLst xmlns:a="http://schemas.openxmlformats.org/drawingml/2006/main">
               <a:ext uri="{FF2B5EF4-FFF2-40B4-BE49-F238E27FC236}">
-                <a16:creationId xmlns:a16="http://schemas.microsoft.com/office/drawing/2014/main" id="{44E48E4D-753F-4E16-89D4-09ACDB6E0917}"/>
+                <a16:creationId xmlns:a16="http://schemas.microsoft.com/office/drawing/2014/main" id="{D6E7D71A-71B3-4F5D-B85D-4323BB65C6D5}"/>
               </a:ext>
             </a:extLst>
           </p:cNvPr>
@@ -18907,7 +18907,7 @@
           <p:cNvPr id="38" name="">
             <a:extLst xmlns:a="http://schemas.openxmlformats.org/drawingml/2006/main">
               <a:ext uri="{FF2B5EF4-FFF2-40B4-BE49-F238E27FC236}">
-                <a16:creationId xmlns:a16="http://schemas.microsoft.com/office/drawing/2014/main" id="{4CB3481F-7107-4C31-8797-40B30F16BCA9}"/>
+                <a16:creationId xmlns:a16="http://schemas.microsoft.com/office/drawing/2014/main" id="{F1376E49-6098-4457-920E-8E063380B387}"/>
               </a:ext>
             </a:extLst>
           </p:cNvPr>
@@ -18938,7 +18938,7 @@
           <p:cNvPr id="39" name="">
             <a:extLst xmlns:a="http://schemas.openxmlformats.org/drawingml/2006/main">
               <a:ext uri="{FF2B5EF4-FFF2-40B4-BE49-F238E27FC236}">
-                <a16:creationId xmlns:a16="http://schemas.microsoft.com/office/drawing/2014/main" id="{E4BA2B71-C367-4A3D-BCC8-E9DB9DDC8CCA}"/>
+                <a16:creationId xmlns:a16="http://schemas.microsoft.com/office/drawing/2014/main" id="{B5BEAF7C-3A22-4170-8191-31B48CC2F173}"/>
               </a:ext>
             </a:extLst>
           </p:cNvPr>
@@ -18990,7 +18990,7 @@
           <p:cNvPr id="40" name="">
             <a:extLst xmlns:a="http://schemas.openxmlformats.org/drawingml/2006/main">
               <a:ext uri="{FF2B5EF4-FFF2-40B4-BE49-F238E27FC236}">
-                <a16:creationId xmlns:a16="http://schemas.microsoft.com/office/drawing/2014/main" id="{8A76A77F-DE5E-4276-B820-B17D8313FF16}"/>
+                <a16:creationId xmlns:a16="http://schemas.microsoft.com/office/drawing/2014/main" id="{6EC34375-885C-4DDF-805C-A71371B21EE3}"/>
               </a:ext>
             </a:extLst>
           </p:cNvPr>
@@ -19042,7 +19042,7 @@
           <p:cNvPr id="41" name="">
             <a:extLst xmlns:a="http://schemas.openxmlformats.org/drawingml/2006/main">
               <a:ext uri="{FF2B5EF4-FFF2-40B4-BE49-F238E27FC236}">
-                <a16:creationId xmlns:a16="http://schemas.microsoft.com/office/drawing/2014/main" id="{B5F48058-7F69-4523-90F8-C96E1585187B}"/>
+                <a16:creationId xmlns:a16="http://schemas.microsoft.com/office/drawing/2014/main" id="{CE41E8F4-5692-44F8-AD21-212D1E5AA1B4}"/>
               </a:ext>
             </a:extLst>
           </p:cNvPr>
@@ -19094,7 +19094,7 @@
           <p:cNvPr id="42" name="">
             <a:extLst xmlns:a="http://schemas.openxmlformats.org/drawingml/2006/main">
               <a:ext uri="{FF2B5EF4-FFF2-40B4-BE49-F238E27FC236}">
-                <a16:creationId xmlns:a16="http://schemas.microsoft.com/office/drawing/2014/main" id="{4F143445-3008-4780-BE41-3076C8DDCC34}"/>
+                <a16:creationId xmlns:a16="http://schemas.microsoft.com/office/drawing/2014/main" id="{14D4BD8F-240E-4FE0-A144-D051A9039031}"/>
               </a:ext>
             </a:extLst>
           </p:cNvPr>
@@ -19146,7 +19146,7 @@
           <p:cNvPr id="43" name="">
             <a:extLst xmlns:a="http://schemas.openxmlformats.org/drawingml/2006/main">
               <a:ext uri="{FF2B5EF4-FFF2-40B4-BE49-F238E27FC236}">
-                <a16:creationId xmlns:a16="http://schemas.microsoft.com/office/drawing/2014/main" id="{E0E2167D-DA02-400A-AABA-B1684B0F1423}"/>
+                <a16:creationId xmlns:a16="http://schemas.microsoft.com/office/drawing/2014/main" id="{ABD5EEEA-DB23-4970-8F7B-F69AF7D77AFF}"/>
               </a:ext>
             </a:extLst>
           </p:cNvPr>
@@ -19198,7 +19198,7 @@
           <p:cNvPr id="44" name="">
             <a:extLst xmlns:a="http://schemas.openxmlformats.org/drawingml/2006/main">
               <a:ext uri="{FF2B5EF4-FFF2-40B4-BE49-F238E27FC236}">
-                <a16:creationId xmlns:a16="http://schemas.microsoft.com/office/drawing/2014/main" id="{EB5C2E87-0658-4120-9294-F9CFAD1B5100}"/>
+                <a16:creationId xmlns:a16="http://schemas.microsoft.com/office/drawing/2014/main" id="{4A493EBF-2065-4E85-90D4-7ED206C05656}"/>
               </a:ext>
             </a:extLst>
           </p:cNvPr>
@@ -19229,7 +19229,7 @@
           <p:cNvPr id="45" name="">
             <a:extLst xmlns:a="http://schemas.openxmlformats.org/drawingml/2006/main">
               <a:ext uri="{FF2B5EF4-FFF2-40B4-BE49-F238E27FC236}">
-                <a16:creationId xmlns:a16="http://schemas.microsoft.com/office/drawing/2014/main" id="{7D2FDFF1-BE68-4791-B5E8-B71DA597364D}"/>
+                <a16:creationId xmlns:a16="http://schemas.microsoft.com/office/drawing/2014/main" id="{537CADC1-A87B-47AA-9736-44DA76E60925}"/>
               </a:ext>
             </a:extLst>
           </p:cNvPr>
@@ -19260,7 +19260,7 @@
           <p:cNvPr id="46" name="">
             <a:extLst xmlns:a="http://schemas.openxmlformats.org/drawingml/2006/main">
               <a:ext uri="{FF2B5EF4-FFF2-40B4-BE49-F238E27FC236}">
-                <a16:creationId xmlns:a16="http://schemas.microsoft.com/office/drawing/2014/main" id="{529D20E7-E336-4BFB-8DF6-501BDCDF68DB}"/>
+                <a16:creationId xmlns:a16="http://schemas.microsoft.com/office/drawing/2014/main" id="{CB8DECCE-9CC7-4466-A383-0FBA248C5B28}"/>
               </a:ext>
             </a:extLst>
           </p:cNvPr>
@@ -19312,7 +19312,7 @@
           <p:cNvPr id="47" name="">
             <a:extLst xmlns:a="http://schemas.openxmlformats.org/drawingml/2006/main">
               <a:ext uri="{FF2B5EF4-FFF2-40B4-BE49-F238E27FC236}">
-                <a16:creationId xmlns:a16="http://schemas.microsoft.com/office/drawing/2014/main" id="{730632DC-0349-4F39-BC14-AA45E629C845}"/>
+                <a16:creationId xmlns:a16="http://schemas.microsoft.com/office/drawing/2014/main" id="{6CD25979-9E9E-4F05-B6F4-9406FF67434C}"/>
               </a:ext>
             </a:extLst>
           </p:cNvPr>
@@ -19364,7 +19364,7 @@
           <p:cNvPr id="48" name="">
             <a:extLst xmlns:a="http://schemas.openxmlformats.org/drawingml/2006/main">
               <a:ext uri="{FF2B5EF4-FFF2-40B4-BE49-F238E27FC236}">
-                <a16:creationId xmlns:a16="http://schemas.microsoft.com/office/drawing/2014/main" id="{2C955770-8CA0-4DF5-8B6C-08E4095689D9}"/>
+                <a16:creationId xmlns:a16="http://schemas.microsoft.com/office/drawing/2014/main" id="{6F6F3AA0-AA6F-494F-8B1B-B5DA4A626FF2}"/>
               </a:ext>
             </a:extLst>
           </p:cNvPr>
@@ -19416,7 +19416,7 @@
           <p:cNvPr id="49" name="">
             <a:extLst xmlns:a="http://schemas.openxmlformats.org/drawingml/2006/main">
               <a:ext uri="{FF2B5EF4-FFF2-40B4-BE49-F238E27FC236}">
-                <a16:creationId xmlns:a16="http://schemas.microsoft.com/office/drawing/2014/main" id="{4EE12F59-86DE-4D54-BD7D-46FFF7FFEE27}"/>
+                <a16:creationId xmlns:a16="http://schemas.microsoft.com/office/drawing/2014/main" id="{172105DF-51CE-4DFE-8BF7-54D0F2E5580D}"/>
               </a:ext>
             </a:extLst>
           </p:cNvPr>
@@ -19468,7 +19468,7 @@
           <p:cNvPr id="50" name="">
             <a:extLst xmlns:a="http://schemas.openxmlformats.org/drawingml/2006/main">
               <a:ext uri="{FF2B5EF4-FFF2-40B4-BE49-F238E27FC236}">
-                <a16:creationId xmlns:a16="http://schemas.microsoft.com/office/drawing/2014/main" id="{7514B904-36F3-4DDA-8C3C-C6A5FABC2BED}"/>
+                <a16:creationId xmlns:a16="http://schemas.microsoft.com/office/drawing/2014/main" id="{8B1BA888-C351-49D2-B663-2AB48E55A843}"/>
               </a:ext>
             </a:extLst>
           </p:cNvPr>
@@ -19520,7 +19520,7 @@
           <p:cNvPr id="51" name="">
             <a:extLst xmlns:a="http://schemas.openxmlformats.org/drawingml/2006/main">
               <a:ext uri="{FF2B5EF4-FFF2-40B4-BE49-F238E27FC236}">
-                <a16:creationId xmlns:a16="http://schemas.microsoft.com/office/drawing/2014/main" id="{483CEA5E-5F3E-4825-8E8B-DBDD15187188}"/>
+                <a16:creationId xmlns:a16="http://schemas.microsoft.com/office/drawing/2014/main" id="{91D1E04A-A270-497C-8762-4A1093C555C7}"/>
               </a:ext>
             </a:extLst>
           </p:cNvPr>
@@ -19551,7 +19551,7 @@
           <p:cNvPr id="52" name="">
             <a:extLst xmlns:a="http://schemas.openxmlformats.org/drawingml/2006/main">
               <a:ext uri="{FF2B5EF4-FFF2-40B4-BE49-F238E27FC236}">
-                <a16:creationId xmlns:a16="http://schemas.microsoft.com/office/drawing/2014/main" id="{A505FDC6-3124-424F-9106-337B7106D625}"/>
+                <a16:creationId xmlns:a16="http://schemas.microsoft.com/office/drawing/2014/main" id="{354622FE-4B80-4A62-B763-409EC5FA18D5}"/>
               </a:ext>
             </a:extLst>
           </p:cNvPr>
@@ -19603,7 +19603,7 @@
           <p:cNvPr id="53" name="">
             <a:extLst xmlns:a="http://schemas.openxmlformats.org/drawingml/2006/main">
               <a:ext uri="{FF2B5EF4-FFF2-40B4-BE49-F238E27FC236}">
-                <a16:creationId xmlns:a16="http://schemas.microsoft.com/office/drawing/2014/main" id="{B727043B-9BEC-4D83-9E19-60495BE3FD56}"/>
+                <a16:creationId xmlns:a16="http://schemas.microsoft.com/office/drawing/2014/main" id="{6CF609D2-B174-4493-BD65-CBD04504E6B1}"/>
               </a:ext>
             </a:extLst>
           </p:cNvPr>
@@ -19655,7 +19655,7 @@
           <p:cNvPr id="54" name="">
             <a:extLst xmlns:a="http://schemas.openxmlformats.org/drawingml/2006/main">
               <a:ext uri="{FF2B5EF4-FFF2-40B4-BE49-F238E27FC236}">
-                <a16:creationId xmlns:a16="http://schemas.microsoft.com/office/drawing/2014/main" id="{36E468CE-0FCF-490E-A551-C1C988447A9D}"/>
+                <a16:creationId xmlns:a16="http://schemas.microsoft.com/office/drawing/2014/main" id="{8D35D13F-EEDA-490F-9956-3339D7FFF634}"/>
               </a:ext>
             </a:extLst>
           </p:cNvPr>
@@ -19707,7 +19707,7 @@
           <p:cNvPr id="55" name="">
             <a:extLst xmlns:a="http://schemas.openxmlformats.org/drawingml/2006/main">
               <a:ext uri="{FF2B5EF4-FFF2-40B4-BE49-F238E27FC236}">
-                <a16:creationId xmlns:a16="http://schemas.microsoft.com/office/drawing/2014/main" id="{B721E8A9-455B-421B-ACB2-076CF385B28D}"/>
+                <a16:creationId xmlns:a16="http://schemas.microsoft.com/office/drawing/2014/main" id="{7B88DD78-D540-48CC-8087-E793A44053EF}"/>
               </a:ext>
             </a:extLst>
           </p:cNvPr>
@@ -19759,7 +19759,7 @@
           <p:cNvPr id="56" name="">
             <a:extLst xmlns:a="http://schemas.openxmlformats.org/drawingml/2006/main">
               <a:ext uri="{FF2B5EF4-FFF2-40B4-BE49-F238E27FC236}">
-                <a16:creationId xmlns:a16="http://schemas.microsoft.com/office/drawing/2014/main" id="{1F10554C-BA59-45BD-998C-43B31F52C00B}"/>
+                <a16:creationId xmlns:a16="http://schemas.microsoft.com/office/drawing/2014/main" id="{72AD7FA0-3D48-4C75-9389-954DB932C385}"/>
               </a:ext>
             </a:extLst>
           </p:cNvPr>
@@ -19811,7 +19811,7 @@
           <p:cNvPr id="57" name="">
             <a:extLst xmlns:a="http://schemas.openxmlformats.org/drawingml/2006/main">
               <a:ext uri="{FF2B5EF4-FFF2-40B4-BE49-F238E27FC236}">
-                <a16:creationId xmlns:a16="http://schemas.microsoft.com/office/drawing/2014/main" id="{D63DABB2-3DA4-402B-9723-CF31F30EE5B4}"/>
+                <a16:creationId xmlns:a16="http://schemas.microsoft.com/office/drawing/2014/main" id="{1E12D65D-5827-477B-8005-A28EB94E0FB6}"/>
               </a:ext>
             </a:extLst>
           </p:cNvPr>
@@ -19842,7 +19842,7 @@
           <p:cNvPr id="58" name="">
             <a:extLst xmlns:a="http://schemas.openxmlformats.org/drawingml/2006/main">
               <a:ext uri="{FF2B5EF4-FFF2-40B4-BE49-F238E27FC236}">
-                <a16:creationId xmlns:a16="http://schemas.microsoft.com/office/drawing/2014/main" id="{DA33B8C2-AF5C-46E6-BE3B-4A3010EC88CF}"/>
+                <a16:creationId xmlns:a16="http://schemas.microsoft.com/office/drawing/2014/main" id="{3B60E22D-9463-4157-8AF3-A9B47EB6A986}"/>
               </a:ext>
             </a:extLst>
           </p:cNvPr>
@@ -19873,7 +19873,7 @@
           <p:cNvPr id="59" name="">
             <a:extLst xmlns:a="http://schemas.openxmlformats.org/drawingml/2006/main">
               <a:ext uri="{FF2B5EF4-FFF2-40B4-BE49-F238E27FC236}">
-                <a16:creationId xmlns:a16="http://schemas.microsoft.com/office/drawing/2014/main" id="{BF4540D6-05BF-40D5-A80B-3EEA4A351CF7}"/>
+                <a16:creationId xmlns:a16="http://schemas.microsoft.com/office/drawing/2014/main" id="{07F3939B-0C69-4DE9-AA3C-C99E36664D22}"/>
               </a:ext>
             </a:extLst>
           </p:cNvPr>
@@ -19925,7 +19925,7 @@
           <p:cNvPr id="60" name="">
             <a:extLst xmlns:a="http://schemas.openxmlformats.org/drawingml/2006/main">
               <a:ext uri="{FF2B5EF4-FFF2-40B4-BE49-F238E27FC236}">
-                <a16:creationId xmlns:a16="http://schemas.microsoft.com/office/drawing/2014/main" id="{FB7A5BA9-3F41-4163-80F1-DE027BAE5749}"/>
+                <a16:creationId xmlns:a16="http://schemas.microsoft.com/office/drawing/2014/main" id="{52F308A7-31B7-4B0D-BD76-5DA3EECDB66B}"/>
               </a:ext>
             </a:extLst>
           </p:cNvPr>
@@ -19977,7 +19977,7 @@
           <p:cNvPr id="61" name="">
             <a:extLst xmlns:a="http://schemas.openxmlformats.org/drawingml/2006/main">
               <a:ext uri="{FF2B5EF4-FFF2-40B4-BE49-F238E27FC236}">
-                <a16:creationId xmlns:a16="http://schemas.microsoft.com/office/drawing/2014/main" id="{FDBA0027-0EA7-4626-8649-20BEB307BDD8}"/>
+                <a16:creationId xmlns:a16="http://schemas.microsoft.com/office/drawing/2014/main" id="{AB30E150-712E-4E3F-AD93-0993C4660714}"/>
               </a:ext>
             </a:extLst>
           </p:cNvPr>
@@ -20029,7 +20029,7 @@
           <p:cNvPr id="62" name="">
             <a:extLst xmlns:a="http://schemas.openxmlformats.org/drawingml/2006/main">
               <a:ext uri="{FF2B5EF4-FFF2-40B4-BE49-F238E27FC236}">
-                <a16:creationId xmlns:a16="http://schemas.microsoft.com/office/drawing/2014/main" id="{01FEB502-06C0-43BF-893E-C2AE74A9118F}"/>
+                <a16:creationId xmlns:a16="http://schemas.microsoft.com/office/drawing/2014/main" id="{C1F7FBB9-181C-4DE1-8A8E-E7E7CD8B1C6C}"/>
               </a:ext>
             </a:extLst>
           </p:cNvPr>
@@ -20081,7 +20081,7 @@
           <p:cNvPr id="63" name="">
             <a:extLst xmlns:a="http://schemas.openxmlformats.org/drawingml/2006/main">
               <a:ext uri="{FF2B5EF4-FFF2-40B4-BE49-F238E27FC236}">
-                <a16:creationId xmlns:a16="http://schemas.microsoft.com/office/drawing/2014/main" id="{23CAE34E-A232-49EE-B29E-3A938B2A96A4}"/>
+                <a16:creationId xmlns:a16="http://schemas.microsoft.com/office/drawing/2014/main" id="{9EA9EE99-05A3-4F85-84A5-FBA452C53F39}"/>
               </a:ext>
             </a:extLst>
           </p:cNvPr>
@@ -20133,7 +20133,7 @@
           <p:cNvPr id="64" name="">
             <a:extLst xmlns:a="http://schemas.openxmlformats.org/drawingml/2006/main">
               <a:ext uri="{FF2B5EF4-FFF2-40B4-BE49-F238E27FC236}">
-                <a16:creationId xmlns:a16="http://schemas.microsoft.com/office/drawing/2014/main" id="{FBF406FA-2E39-4FFB-AE83-02A1F5E0404F}"/>
+                <a16:creationId xmlns:a16="http://schemas.microsoft.com/office/drawing/2014/main" id="{CBEA98A3-FDDF-49D9-8F57-BA69688759D8}"/>
               </a:ext>
             </a:extLst>
           </p:cNvPr>
@@ -20164,7 +20164,7 @@
           <p:cNvPr id="65" name="">
             <a:extLst xmlns:a="http://schemas.openxmlformats.org/drawingml/2006/main">
               <a:ext uri="{FF2B5EF4-FFF2-40B4-BE49-F238E27FC236}">
-                <a16:creationId xmlns:a16="http://schemas.microsoft.com/office/drawing/2014/main" id="{34CCCD8B-183D-4477-B1D9-0DCB26F1AAA1}"/>
+                <a16:creationId xmlns:a16="http://schemas.microsoft.com/office/drawing/2014/main" id="{FD8552D4-AD94-42A5-B383-6DC3CC7A5A41}"/>
               </a:ext>
             </a:extLst>
           </p:cNvPr>
@@ -20216,7 +20216,7 @@
           <p:cNvPr id="66" name="">
             <a:extLst xmlns:a="http://schemas.openxmlformats.org/drawingml/2006/main">
               <a:ext uri="{FF2B5EF4-FFF2-40B4-BE49-F238E27FC236}">
-                <a16:creationId xmlns:a16="http://schemas.microsoft.com/office/drawing/2014/main" id="{C766D31E-CD25-403B-BAB1-439AB3464DF1}"/>
+                <a16:creationId xmlns:a16="http://schemas.microsoft.com/office/drawing/2014/main" id="{EE6CFD8B-1581-4C70-831A-A49850CE65E6}"/>
               </a:ext>
             </a:extLst>
           </p:cNvPr>
@@ -20268,7 +20268,7 @@
           <p:cNvPr id="67" name="">
             <a:extLst xmlns:a="http://schemas.openxmlformats.org/drawingml/2006/main">
               <a:ext uri="{FF2B5EF4-FFF2-40B4-BE49-F238E27FC236}">
-                <a16:creationId xmlns:a16="http://schemas.microsoft.com/office/drawing/2014/main" id="{C0C1C1A2-143F-4432-8827-E1B05BCF9B8A}"/>
+                <a16:creationId xmlns:a16="http://schemas.microsoft.com/office/drawing/2014/main" id="{C12D3BCD-9A43-47B1-A662-36696794239C}"/>
               </a:ext>
             </a:extLst>
           </p:cNvPr>
@@ -20320,7 +20320,7 @@
           <p:cNvPr id="68" name="">
             <a:extLst xmlns:a="http://schemas.openxmlformats.org/drawingml/2006/main">
               <a:ext uri="{FF2B5EF4-FFF2-40B4-BE49-F238E27FC236}">
-                <a16:creationId xmlns:a16="http://schemas.microsoft.com/office/drawing/2014/main" id="{89B7594A-C895-4B7F-9BC5-FB172DDBAF62}"/>
+                <a16:creationId xmlns:a16="http://schemas.microsoft.com/office/drawing/2014/main" id="{4A49D4C1-FA0F-4FF8-92DF-67C704B866A9}"/>
               </a:ext>
             </a:extLst>
           </p:cNvPr>
@@ -20372,7 +20372,7 @@
           <p:cNvPr id="69" name="">
             <a:extLst xmlns:a="http://schemas.openxmlformats.org/drawingml/2006/main">
               <a:ext uri="{FF2B5EF4-FFF2-40B4-BE49-F238E27FC236}">
-                <a16:creationId xmlns:a16="http://schemas.microsoft.com/office/drawing/2014/main" id="{401B93C7-D1CE-4431-9B93-3162D4654135}"/>
+                <a16:creationId xmlns:a16="http://schemas.microsoft.com/office/drawing/2014/main" id="{23E1AB91-32E3-4120-BAC1-6DD7EF0CB19F}"/>
               </a:ext>
             </a:extLst>
           </p:cNvPr>
@@ -20424,7 +20424,7 @@
           <p:cNvPr id="70" name="">
             <a:extLst xmlns:a="http://schemas.openxmlformats.org/drawingml/2006/main">
               <a:ext uri="{FF2B5EF4-FFF2-40B4-BE49-F238E27FC236}">
-                <a16:creationId xmlns:a16="http://schemas.microsoft.com/office/drawing/2014/main" id="{C44E59E8-403D-421E-A428-0AAAB9A80AA7}"/>
+                <a16:creationId xmlns:a16="http://schemas.microsoft.com/office/drawing/2014/main" id="{4DA36C95-C5DC-4A95-B865-72BFDE507CD0}"/>
               </a:ext>
             </a:extLst>
           </p:cNvPr>
@@ -20455,7 +20455,7 @@
           <p:cNvPr id="71" name="">
             <a:extLst xmlns:a="http://schemas.openxmlformats.org/drawingml/2006/main">
               <a:ext uri="{FF2B5EF4-FFF2-40B4-BE49-F238E27FC236}">
-                <a16:creationId xmlns:a16="http://schemas.microsoft.com/office/drawing/2014/main" id="{1F9BD8C9-1446-4FD8-832D-6CB5A598DCEE}"/>
+                <a16:creationId xmlns:a16="http://schemas.microsoft.com/office/drawing/2014/main" id="{1137E812-5053-4DD2-AB2D-364C49B16EFC}"/>
               </a:ext>
             </a:extLst>
           </p:cNvPr>
@@ -20486,7 +20486,7 @@
           <p:cNvPr id="72" name="">
             <a:extLst xmlns:a="http://schemas.openxmlformats.org/drawingml/2006/main">
               <a:ext uri="{FF2B5EF4-FFF2-40B4-BE49-F238E27FC236}">
-                <a16:creationId xmlns:a16="http://schemas.microsoft.com/office/drawing/2014/main" id="{868E4B60-FD0D-4D48-987A-99DAE72F13F6}"/>
+                <a16:creationId xmlns:a16="http://schemas.microsoft.com/office/drawing/2014/main" id="{595E0B71-9511-4265-AD92-F076F88E799F}"/>
               </a:ext>
             </a:extLst>
           </p:cNvPr>
@@ -20538,7 +20538,7 @@
           <p:cNvPr id="73" name="">
             <a:extLst xmlns:a="http://schemas.openxmlformats.org/drawingml/2006/main">
               <a:ext uri="{FF2B5EF4-FFF2-40B4-BE49-F238E27FC236}">
-                <a16:creationId xmlns:a16="http://schemas.microsoft.com/office/drawing/2014/main" id="{C36994DA-C9E0-4B61-91F0-EE8269C60782}"/>
+                <a16:creationId xmlns:a16="http://schemas.microsoft.com/office/drawing/2014/main" id="{B70287E1-55F5-4D03-99F9-6F1D59617D06}"/>
               </a:ext>
             </a:extLst>
           </p:cNvPr>
@@ -20590,7 +20590,7 @@
           <p:cNvPr id="74" name="">
             <a:extLst xmlns:a="http://schemas.openxmlformats.org/drawingml/2006/main">
               <a:ext uri="{FF2B5EF4-FFF2-40B4-BE49-F238E27FC236}">
-                <a16:creationId xmlns:a16="http://schemas.microsoft.com/office/drawing/2014/main" id="{A3F6D493-DE6C-457D-8217-0D5A848896E9}"/>
+                <a16:creationId xmlns:a16="http://schemas.microsoft.com/office/drawing/2014/main" id="{60576177-D84B-4A55-80B1-67A36A257142}"/>
               </a:ext>
             </a:extLst>
           </p:cNvPr>
@@ -20642,7 +20642,7 @@
           <p:cNvPr id="75" name="">
             <a:extLst xmlns:a="http://schemas.openxmlformats.org/drawingml/2006/main">
               <a:ext uri="{FF2B5EF4-FFF2-40B4-BE49-F238E27FC236}">
-                <a16:creationId xmlns:a16="http://schemas.microsoft.com/office/drawing/2014/main" id="{D2B1EB1F-51BA-4A91-9918-9D3B6858DC31}"/>
+                <a16:creationId xmlns:a16="http://schemas.microsoft.com/office/drawing/2014/main" id="{3CA82F00-89C7-4F1F-8F7E-AA1BCB709A1A}"/>
               </a:ext>
             </a:extLst>
           </p:cNvPr>
@@ -20694,7 +20694,7 @@
           <p:cNvPr id="76" name="">
             <a:extLst xmlns:a="http://schemas.openxmlformats.org/drawingml/2006/main">
               <a:ext uri="{FF2B5EF4-FFF2-40B4-BE49-F238E27FC236}">
-                <a16:creationId xmlns:a16="http://schemas.microsoft.com/office/drawing/2014/main" id="{87122294-E790-4142-BC97-2CA00888D64D}"/>
+                <a16:creationId xmlns:a16="http://schemas.microsoft.com/office/drawing/2014/main" id="{7DF5912A-0879-4C9A-A445-0ABBEEDD739A}"/>
               </a:ext>
             </a:extLst>
           </p:cNvPr>
@@ -20746,7 +20746,7 @@
           <p:cNvPr id="77" name="">
             <a:extLst xmlns:a="http://schemas.openxmlformats.org/drawingml/2006/main">
               <a:ext uri="{FF2B5EF4-FFF2-40B4-BE49-F238E27FC236}">
-                <a16:creationId xmlns:a16="http://schemas.microsoft.com/office/drawing/2014/main" id="{7669AE62-923E-40BA-BABA-B030CB52AD33}"/>
+                <a16:creationId xmlns:a16="http://schemas.microsoft.com/office/drawing/2014/main" id="{9B80343F-94C9-49ED-9B90-593205237E38}"/>
               </a:ext>
             </a:extLst>
           </p:cNvPr>
@@ -20777,7 +20777,7 @@
           <p:cNvPr id="78" name="">
             <a:extLst xmlns:a="http://schemas.openxmlformats.org/drawingml/2006/main">
               <a:ext uri="{FF2B5EF4-FFF2-40B4-BE49-F238E27FC236}">
-                <a16:creationId xmlns:a16="http://schemas.microsoft.com/office/drawing/2014/main" id="{589213B7-C32D-4928-BA70-FEDC40B25FBB}"/>
+                <a16:creationId xmlns:a16="http://schemas.microsoft.com/office/drawing/2014/main" id="{16671BEC-D157-4017-A55F-A5163AED9E34}"/>
               </a:ext>
             </a:extLst>
           </p:cNvPr>
@@ -20829,7 +20829,7 @@
           <p:cNvPr id="79" name="">
             <a:extLst xmlns:a="http://schemas.openxmlformats.org/drawingml/2006/main">
               <a:ext uri="{FF2B5EF4-FFF2-40B4-BE49-F238E27FC236}">
-                <a16:creationId xmlns:a16="http://schemas.microsoft.com/office/drawing/2014/main" id="{B271194C-D1AA-4D51-8F10-A7DE459D2CCE}"/>
+                <a16:creationId xmlns:a16="http://schemas.microsoft.com/office/drawing/2014/main" id="{216F9ABD-4F36-4D5F-B093-02C9EF3E1B7D}"/>
               </a:ext>
             </a:extLst>
           </p:cNvPr>
@@ -20881,7 +20881,7 @@
           <p:cNvPr id="80" name="">
             <a:extLst xmlns:a="http://schemas.openxmlformats.org/drawingml/2006/main">
               <a:ext uri="{FF2B5EF4-FFF2-40B4-BE49-F238E27FC236}">
-                <a16:creationId xmlns:a16="http://schemas.microsoft.com/office/drawing/2014/main" id="{753C0248-9AC7-4E2B-ACDA-528A7BAD195B}"/>
+                <a16:creationId xmlns:a16="http://schemas.microsoft.com/office/drawing/2014/main" id="{56356341-8DA3-493C-91BA-426C92CD77BF}"/>
               </a:ext>
             </a:extLst>
           </p:cNvPr>
@@ -20933,7 +20933,7 @@
           <p:cNvPr id="81" name="">
             <a:extLst xmlns:a="http://schemas.openxmlformats.org/drawingml/2006/main">
               <a:ext uri="{FF2B5EF4-FFF2-40B4-BE49-F238E27FC236}">
-                <a16:creationId xmlns:a16="http://schemas.microsoft.com/office/drawing/2014/main" id="{9020641B-14FA-4A42-9278-D002CD70BB39}"/>
+                <a16:creationId xmlns:a16="http://schemas.microsoft.com/office/drawing/2014/main" id="{9DDAAF4C-852A-4193-B08A-5E301B9F8981}"/>
               </a:ext>
             </a:extLst>
           </p:cNvPr>
@@ -20985,7 +20985,7 @@
           <p:cNvPr id="82" name="">
             <a:extLst xmlns:a="http://schemas.openxmlformats.org/drawingml/2006/main">
               <a:ext uri="{FF2B5EF4-FFF2-40B4-BE49-F238E27FC236}">
-                <a16:creationId xmlns:a16="http://schemas.microsoft.com/office/drawing/2014/main" id="{10AB0455-FF88-4524-AB95-9E382A95B90E}"/>
+                <a16:creationId xmlns:a16="http://schemas.microsoft.com/office/drawing/2014/main" id="{2371ED50-EFEC-4DC0-ABA2-51C6308919CD}"/>
               </a:ext>
             </a:extLst>
           </p:cNvPr>
@@ -21037,7 +21037,7 @@
           <p:cNvPr id="83" name="">
             <a:extLst xmlns:a="http://schemas.openxmlformats.org/drawingml/2006/main">
               <a:ext uri="{FF2B5EF4-FFF2-40B4-BE49-F238E27FC236}">
-                <a16:creationId xmlns:a16="http://schemas.microsoft.com/office/drawing/2014/main" id="{7B564855-B5E5-4A90-B2B6-31FD2B7B66B7}"/>
+                <a16:creationId xmlns:a16="http://schemas.microsoft.com/office/drawing/2014/main" id="{93E1FC45-0D18-4C11-A8C9-666C7329F3D8}"/>
               </a:ext>
             </a:extLst>
           </p:cNvPr>
@@ -21068,7 +21068,7 @@
           <p:cNvPr id="84" name="">
             <a:extLst xmlns:a="http://schemas.openxmlformats.org/drawingml/2006/main">
               <a:ext uri="{FF2B5EF4-FFF2-40B4-BE49-F238E27FC236}">
-                <a16:creationId xmlns:a16="http://schemas.microsoft.com/office/drawing/2014/main" id="{06B88131-91A2-409F-99DE-DAC8CB99B63F}"/>
+                <a16:creationId xmlns:a16="http://schemas.microsoft.com/office/drawing/2014/main" id="{D587B75E-8CFB-406D-B596-E17B31DF0C45}"/>
               </a:ext>
             </a:extLst>
           </p:cNvPr>
@@ -21120,7 +21120,7 @@
           <p:cNvPr id="85" name="">
             <a:extLst xmlns:a="http://schemas.openxmlformats.org/drawingml/2006/main">
               <a:ext uri="{FF2B5EF4-FFF2-40B4-BE49-F238E27FC236}">
-                <a16:creationId xmlns:a16="http://schemas.microsoft.com/office/drawing/2014/main" id="{96D3624D-60AF-43D9-8C61-A82EAC0240E6}"/>
+                <a16:creationId xmlns:a16="http://schemas.microsoft.com/office/drawing/2014/main" id="{3AA9F76F-E1F5-4D81-95DA-DBB9B372C5BE}"/>
               </a:ext>
             </a:extLst>
           </p:cNvPr>
@@ -21172,7 +21172,7 @@
           <p:cNvPr id="86" name="">
             <a:extLst xmlns:a="http://schemas.openxmlformats.org/drawingml/2006/main">
               <a:ext uri="{FF2B5EF4-FFF2-40B4-BE49-F238E27FC236}">
-                <a16:creationId xmlns:a16="http://schemas.microsoft.com/office/drawing/2014/main" id="{F3883F19-13CF-4167-B9A6-DE70B88529C5}"/>
+                <a16:creationId xmlns:a16="http://schemas.microsoft.com/office/drawing/2014/main" id="{92CB5B3B-443F-48D6-92DE-8C022D933C15}"/>
               </a:ext>
             </a:extLst>
           </p:cNvPr>
@@ -21224,7 +21224,7 @@
           <p:cNvPr id="87" name="">
             <a:extLst xmlns:a="http://schemas.openxmlformats.org/drawingml/2006/main">
               <a:ext uri="{FF2B5EF4-FFF2-40B4-BE49-F238E27FC236}">
-                <a16:creationId xmlns:a16="http://schemas.microsoft.com/office/drawing/2014/main" id="{ECF2741F-D09F-4C53-8167-0750D6CCDC05}"/>
+                <a16:creationId xmlns:a16="http://schemas.microsoft.com/office/drawing/2014/main" id="{3B30B0BF-DDAF-4636-83AD-D870B580923E}"/>
               </a:ext>
             </a:extLst>
           </p:cNvPr>
@@ -21276,7 +21276,7 @@
           <p:cNvPr id="88" name="">
             <a:extLst xmlns:a="http://schemas.openxmlformats.org/drawingml/2006/main">
               <a:ext uri="{FF2B5EF4-FFF2-40B4-BE49-F238E27FC236}">
-                <a16:creationId xmlns:a16="http://schemas.microsoft.com/office/drawing/2014/main" id="{A31B9063-0878-41AC-974B-BFD8E4B84440}"/>
+                <a16:creationId xmlns:a16="http://schemas.microsoft.com/office/drawing/2014/main" id="{D8FB0D57-F0E8-4F96-A58E-6808C16DCCCE}"/>
               </a:ext>
             </a:extLst>
           </p:cNvPr>
@@ -21328,7 +21328,7 @@
           <p:cNvPr id="89" name="">
             <a:extLst xmlns:a="http://schemas.openxmlformats.org/drawingml/2006/main">
               <a:ext uri="{FF2B5EF4-FFF2-40B4-BE49-F238E27FC236}">
-                <a16:creationId xmlns:a16="http://schemas.microsoft.com/office/drawing/2014/main" id="{5377B587-5A7F-4D3C-884A-65BD5093665F}"/>
+                <a16:creationId xmlns:a16="http://schemas.microsoft.com/office/drawing/2014/main" id="{637B9F14-1E02-4F0F-A57A-1C4EC483A6AF}"/>
               </a:ext>
             </a:extLst>
           </p:cNvPr>
@@ -21359,7 +21359,7 @@
           <p:cNvPr id="90" name="">
             <a:extLst xmlns:a="http://schemas.openxmlformats.org/drawingml/2006/main">
               <a:ext uri="{FF2B5EF4-FFF2-40B4-BE49-F238E27FC236}">
-                <a16:creationId xmlns:a16="http://schemas.microsoft.com/office/drawing/2014/main" id="{B86366E1-2BA0-4CEC-A821-57632C6E8B89}"/>
+                <a16:creationId xmlns:a16="http://schemas.microsoft.com/office/drawing/2014/main" id="{BA0EFA00-7571-474A-BC4B-4B3037EF4D81}"/>
               </a:ext>
             </a:extLst>
           </p:cNvPr>
@@ -21390,7 +21390,7 @@
           <p:cNvPr id="91" name="">
             <a:extLst xmlns:a="http://schemas.openxmlformats.org/drawingml/2006/main">
               <a:ext uri="{FF2B5EF4-FFF2-40B4-BE49-F238E27FC236}">
-                <a16:creationId xmlns:a16="http://schemas.microsoft.com/office/drawing/2014/main" id="{FB92AB90-32DD-42F3-8FFA-4981232453B3}"/>
+                <a16:creationId xmlns:a16="http://schemas.microsoft.com/office/drawing/2014/main" id="{7BC5C761-2F9A-4E19-A530-80A05C5431DC}"/>
               </a:ext>
             </a:extLst>
           </p:cNvPr>
@@ -21442,7 +21442,7 @@
           <p:cNvPr id="92" name="">
             <a:extLst xmlns:a="http://schemas.openxmlformats.org/drawingml/2006/main">
               <a:ext uri="{FF2B5EF4-FFF2-40B4-BE49-F238E27FC236}">
-                <a16:creationId xmlns:a16="http://schemas.microsoft.com/office/drawing/2014/main" id="{BE954C59-AB0D-49A4-8957-87B88710CE24}"/>
+                <a16:creationId xmlns:a16="http://schemas.microsoft.com/office/drawing/2014/main" id="{41856806-6899-416C-B9E7-FF024C086CFF}"/>
               </a:ext>
             </a:extLst>
           </p:cNvPr>
@@ -21494,7 +21494,7 @@
           <p:cNvPr id="93" name="">
             <a:extLst xmlns:a="http://schemas.openxmlformats.org/drawingml/2006/main">
               <a:ext uri="{FF2B5EF4-FFF2-40B4-BE49-F238E27FC236}">
-                <a16:creationId xmlns:a16="http://schemas.microsoft.com/office/drawing/2014/main" id="{EF0488CC-276D-4B2B-A0A8-7B76BE85F9A5}"/>
+                <a16:creationId xmlns:a16="http://schemas.microsoft.com/office/drawing/2014/main" id="{87B14941-9177-4DDA-A77E-45CE5F3DFFEC}"/>
               </a:ext>
             </a:extLst>
           </p:cNvPr>
@@ -21546,7 +21546,7 @@
           <p:cNvPr id="94" name="">
             <a:extLst xmlns:a="http://schemas.openxmlformats.org/drawingml/2006/main">
               <a:ext uri="{FF2B5EF4-FFF2-40B4-BE49-F238E27FC236}">
-                <a16:creationId xmlns:a16="http://schemas.microsoft.com/office/drawing/2014/main" id="{8880C8E3-961B-4821-B37C-C5BD57352EC4}"/>
+                <a16:creationId xmlns:a16="http://schemas.microsoft.com/office/drawing/2014/main" id="{901BBF3C-9EBE-4877-A180-F38F55F1986B}"/>
               </a:ext>
             </a:extLst>
           </p:cNvPr>
@@ -21598,7 +21598,7 @@
           <p:cNvPr id="95" name="">
             <a:extLst xmlns:a="http://schemas.openxmlformats.org/drawingml/2006/main">
               <a:ext uri="{FF2B5EF4-FFF2-40B4-BE49-F238E27FC236}">
-                <a16:creationId xmlns:a16="http://schemas.microsoft.com/office/drawing/2014/main" id="{DD4036F5-3179-44DD-95EC-7B0F5E62494E}"/>
+                <a16:creationId xmlns:a16="http://schemas.microsoft.com/office/drawing/2014/main" id="{829DF15F-2A79-4F27-AEFE-4041134E9E04}"/>
               </a:ext>
             </a:extLst>
           </p:cNvPr>
@@ -21648,7 +21648,7 @@
     </p:spTree>
     <p:extLst>
       <p:ext uri="{BB962C8B-B14F-4D97-AF65-F5344CB8AC3E}">
-        <p14:creationId xmlns:p14="http://schemas.microsoft.com/office/powerpoint/2010/main" val="867903164"/>
+        <p14:creationId xmlns:p14="http://schemas.microsoft.com/office/powerpoint/2010/main" val="232953310"/>
       </p:ext>
     </p:extLst>
   </p:cSld>
@@ -21679,7 +21679,7 @@
           <p:cNvPr id="135" name="">
             <a:extLst xmlns:a="http://schemas.openxmlformats.org/drawingml/2006/main">
               <a:ext uri="{FF2B5EF4-FFF2-40B4-BE49-F238E27FC236}">
-                <a16:creationId xmlns:a16="http://schemas.microsoft.com/office/drawing/2014/main" id="{31CF517F-82D2-4D31-B4FC-B0488CF94B3C}"/>
+                <a16:creationId xmlns:a16="http://schemas.microsoft.com/office/drawing/2014/main" id="{ADE24384-F1A1-4633-8229-7EEA2E615022}"/>
               </a:ext>
             </a:extLst>
           </p:cNvPr>
@@ -21712,7 +21712,7 @@
           <p:cNvPr id="2" name="">
             <a:extLst xmlns:a="http://schemas.openxmlformats.org/drawingml/2006/main">
               <a:ext uri="{FF2B5EF4-FFF2-40B4-BE49-F238E27FC236}">
-                <a16:creationId xmlns:a16="http://schemas.microsoft.com/office/drawing/2014/main" id="{47AB08F7-28D7-43D9-BDCC-EB632A0A4BF9}"/>
+                <a16:creationId xmlns:a16="http://schemas.microsoft.com/office/drawing/2014/main" id="{01CE766A-D1A5-4422-B116-5954ADBF1BFC}"/>
               </a:ext>
             </a:extLst>
           </p:cNvPr>
@@ -21743,7 +21743,7 @@
           <p:cNvPr id="3" name="">
             <a:extLst xmlns:a="http://schemas.openxmlformats.org/drawingml/2006/main">
               <a:ext uri="{FF2B5EF4-FFF2-40B4-BE49-F238E27FC236}">
-                <a16:creationId xmlns:a16="http://schemas.microsoft.com/office/drawing/2014/main" id="{649AD954-A330-4DA3-AFBB-FFD5ABC5643E}"/>
+                <a16:creationId xmlns:a16="http://schemas.microsoft.com/office/drawing/2014/main" id="{56375745-A7D4-4EE6-8B12-4C100B19D7EE}"/>
               </a:ext>
             </a:extLst>
           </p:cNvPr>
@@ -21795,7 +21795,7 @@
           <p:cNvPr id="4" name="">
             <a:extLst xmlns:a="http://schemas.openxmlformats.org/drawingml/2006/main">
               <a:ext uri="{FF2B5EF4-FFF2-40B4-BE49-F238E27FC236}">
-                <a16:creationId xmlns:a16="http://schemas.microsoft.com/office/drawing/2014/main" id="{061AEE4C-6D60-4B5C-9FA8-0A3ED1005DF7}"/>
+                <a16:creationId xmlns:a16="http://schemas.microsoft.com/office/drawing/2014/main" id="{7F3D92F6-3D04-4EC1-AD8B-B6B6AEA247DA}"/>
               </a:ext>
             </a:extLst>
           </p:cNvPr>
@@ -21847,7 +21847,7 @@
           <p:cNvPr id="5" name="">
             <a:extLst xmlns:a="http://schemas.openxmlformats.org/drawingml/2006/main">
               <a:ext uri="{FF2B5EF4-FFF2-40B4-BE49-F238E27FC236}">
-                <a16:creationId xmlns:a16="http://schemas.microsoft.com/office/drawing/2014/main" id="{F91C0FF7-BB21-444E-9B9C-65829ED1B074}"/>
+                <a16:creationId xmlns:a16="http://schemas.microsoft.com/office/drawing/2014/main" id="{F503B076-DA94-4018-99F8-E4114FDB061A}"/>
               </a:ext>
             </a:extLst>
           </p:cNvPr>
@@ -21882,7 +21882,7 @@
           <p:nvPr/>
         </p:nvPicPr>
         <p:blipFill>
-          <a:blip xmlns:r="http://schemas.openxmlformats.org/officeDocument/2006/relationships" xmlns:a="http://schemas.openxmlformats.org/drawingml/2006/main" r:embed="Rb967e9c1fd814c39"/>
+          <a:blip xmlns:r="http://schemas.openxmlformats.org/officeDocument/2006/relationships" xmlns:a="http://schemas.openxmlformats.org/drawingml/2006/main" r:embed="R955cbcb18c744a1f"/>
           <a:stretch xmlns:a="http://schemas.openxmlformats.org/drawingml/2006/main"/>
         </p:blipFill>
         <p:spPr>
@@ -21900,7 +21900,7 @@
           <p:cNvPr id="7" name="">
             <a:extLst xmlns:a="http://schemas.openxmlformats.org/drawingml/2006/main">
               <a:ext uri="{FF2B5EF4-FFF2-40B4-BE49-F238E27FC236}">
-                <a16:creationId xmlns:a16="http://schemas.microsoft.com/office/drawing/2014/main" id="{9BBB6FE1-8B70-45E9-93EE-E6A572044950}"/>
+                <a16:creationId xmlns:a16="http://schemas.microsoft.com/office/drawing/2014/main" id="{F0758032-00A4-4D52-A02E-9AA9AA55A886}"/>
               </a:ext>
             </a:extLst>
           </p:cNvPr>
@@ -21952,7 +21952,7 @@
           <p:cNvPr id="8" name="">
             <a:extLst xmlns:a="http://schemas.openxmlformats.org/drawingml/2006/main">
               <a:ext uri="{FF2B5EF4-FFF2-40B4-BE49-F238E27FC236}">
-                <a16:creationId xmlns:a16="http://schemas.microsoft.com/office/drawing/2014/main" id="{FFBC8B04-F3F1-411B-BADF-8DBA030CA7AE}"/>
+                <a16:creationId xmlns:a16="http://schemas.microsoft.com/office/drawing/2014/main" id="{E7266ACE-75A5-41DF-9739-13460B033C28}"/>
               </a:ext>
             </a:extLst>
           </p:cNvPr>
@@ -22004,7 +22004,7 @@
           <p:cNvPr id="9" name="">
             <a:extLst xmlns:a="http://schemas.openxmlformats.org/drawingml/2006/main">
               <a:ext uri="{FF2B5EF4-FFF2-40B4-BE49-F238E27FC236}">
-                <a16:creationId xmlns:a16="http://schemas.microsoft.com/office/drawing/2014/main" id="{B0CD49C0-9EE0-40D2-A9C0-6A23238EA69E}"/>
+                <a16:creationId xmlns:a16="http://schemas.microsoft.com/office/drawing/2014/main" id="{51797399-C186-4E94-A8FB-AAACCE6F9AF9}"/>
               </a:ext>
             </a:extLst>
           </p:cNvPr>
@@ -22056,7 +22056,7 @@
           <p:cNvPr id="10" name="">
             <a:extLst xmlns:a="http://schemas.openxmlformats.org/drawingml/2006/main">
               <a:ext uri="{FF2B5EF4-FFF2-40B4-BE49-F238E27FC236}">
-                <a16:creationId xmlns:a16="http://schemas.microsoft.com/office/drawing/2014/main" id="{7ED6A9DC-2429-411C-87BB-CB85C9F0ACAE}"/>
+                <a16:creationId xmlns:a16="http://schemas.microsoft.com/office/drawing/2014/main" id="{436EC189-75F5-4D30-9196-3D661906DEEB}"/>
               </a:ext>
             </a:extLst>
           </p:cNvPr>
@@ -22108,7 +22108,7 @@
           <p:cNvPr id="11" name="">
             <a:extLst xmlns:a="http://schemas.openxmlformats.org/drawingml/2006/main">
               <a:ext uri="{FF2B5EF4-FFF2-40B4-BE49-F238E27FC236}">
-                <a16:creationId xmlns:a16="http://schemas.microsoft.com/office/drawing/2014/main" id="{428D1F8F-4A0A-49D4-A765-B1B957E6DB72}"/>
+                <a16:creationId xmlns:a16="http://schemas.microsoft.com/office/drawing/2014/main" id="{035B3841-45D2-49AB-B55D-D47637FDCFAE}"/>
               </a:ext>
             </a:extLst>
           </p:cNvPr>
@@ -22139,7 +22139,7 @@
           <p:cNvPr id="12" name="">
             <a:extLst xmlns:a="http://schemas.openxmlformats.org/drawingml/2006/main">
               <a:ext uri="{FF2B5EF4-FFF2-40B4-BE49-F238E27FC236}">
-                <a16:creationId xmlns:a16="http://schemas.microsoft.com/office/drawing/2014/main" id="{040074F7-B192-43F6-B983-FFAFEA5C6602}"/>
+                <a16:creationId xmlns:a16="http://schemas.microsoft.com/office/drawing/2014/main" id="{A220BC3E-3175-4CAD-8F64-F526B5328F68}"/>
               </a:ext>
             </a:extLst>
           </p:cNvPr>
@@ -22170,7 +22170,7 @@
           <p:cNvPr id="13" name="">
             <a:extLst xmlns:a="http://schemas.openxmlformats.org/drawingml/2006/main">
               <a:ext uri="{FF2B5EF4-FFF2-40B4-BE49-F238E27FC236}">
-                <a16:creationId xmlns:a16="http://schemas.microsoft.com/office/drawing/2014/main" id="{CF70E26E-3F4F-49AA-9DC0-71288B8BFC7B}"/>
+                <a16:creationId xmlns:a16="http://schemas.microsoft.com/office/drawing/2014/main" id="{345B9372-137C-4AFB-A5CE-455A8EF14CDF}"/>
               </a:ext>
             </a:extLst>
           </p:cNvPr>
@@ -22222,7 +22222,7 @@
           <p:cNvPr id="14" name="">
             <a:extLst xmlns:a="http://schemas.openxmlformats.org/drawingml/2006/main">
               <a:ext uri="{FF2B5EF4-FFF2-40B4-BE49-F238E27FC236}">
-                <a16:creationId xmlns:a16="http://schemas.microsoft.com/office/drawing/2014/main" id="{66119741-9A57-4657-9D97-32491EA16E69}"/>
+                <a16:creationId xmlns:a16="http://schemas.microsoft.com/office/drawing/2014/main" id="{B4742F83-5E6E-4D0F-B6E3-476A31D0FD77}"/>
               </a:ext>
             </a:extLst>
           </p:cNvPr>
@@ -22274,7 +22274,7 @@
           <p:cNvPr id="15" name="">
             <a:extLst xmlns:a="http://schemas.openxmlformats.org/drawingml/2006/main">
               <a:ext uri="{FF2B5EF4-FFF2-40B4-BE49-F238E27FC236}">
-                <a16:creationId xmlns:a16="http://schemas.microsoft.com/office/drawing/2014/main" id="{79F31C6D-E140-4192-A99B-54B41CEBD44D}"/>
+                <a16:creationId xmlns:a16="http://schemas.microsoft.com/office/drawing/2014/main" id="{9ED9789E-E2F3-42B4-8472-3A36B730E468}"/>
               </a:ext>
             </a:extLst>
           </p:cNvPr>
@@ -22326,7 +22326,7 @@
           <p:cNvPr id="16" name="">
             <a:extLst xmlns:a="http://schemas.openxmlformats.org/drawingml/2006/main">
               <a:ext uri="{FF2B5EF4-FFF2-40B4-BE49-F238E27FC236}">
-                <a16:creationId xmlns:a16="http://schemas.microsoft.com/office/drawing/2014/main" id="{8A3DED6D-BC14-473D-8F97-35B45142BC71}"/>
+                <a16:creationId xmlns:a16="http://schemas.microsoft.com/office/drawing/2014/main" id="{FD2857A2-003B-4807-9C3E-54D21DFDE3EA}"/>
               </a:ext>
             </a:extLst>
           </p:cNvPr>
@@ -22378,7 +22378,7 @@
           <p:cNvPr id="17" name="">
             <a:extLst xmlns:a="http://schemas.openxmlformats.org/drawingml/2006/main">
               <a:ext uri="{FF2B5EF4-FFF2-40B4-BE49-F238E27FC236}">
-                <a16:creationId xmlns:a16="http://schemas.microsoft.com/office/drawing/2014/main" id="{7585F36A-B54E-455C-9ACF-1773BE4BE1E7}"/>
+                <a16:creationId xmlns:a16="http://schemas.microsoft.com/office/drawing/2014/main" id="{1F571490-ED6D-465E-8F38-4C2F07C10B6A}"/>
               </a:ext>
             </a:extLst>
           </p:cNvPr>
@@ -22430,7 +22430,7 @@
           <p:cNvPr id="18" name="">
             <a:extLst xmlns:a="http://schemas.openxmlformats.org/drawingml/2006/main">
               <a:ext uri="{FF2B5EF4-FFF2-40B4-BE49-F238E27FC236}">
-                <a16:creationId xmlns:a16="http://schemas.microsoft.com/office/drawing/2014/main" id="{D9B71CDC-46E0-4AA5-A37E-54CB00D889B4}"/>
+                <a16:creationId xmlns:a16="http://schemas.microsoft.com/office/drawing/2014/main" id="{8CD94640-E4C5-493C-A128-02C8352BB686}"/>
               </a:ext>
             </a:extLst>
           </p:cNvPr>
@@ -22482,7 +22482,7 @@
           <p:cNvPr id="19" name="">
             <a:extLst xmlns:a="http://schemas.openxmlformats.org/drawingml/2006/main">
               <a:ext uri="{FF2B5EF4-FFF2-40B4-BE49-F238E27FC236}">
-                <a16:creationId xmlns:a16="http://schemas.microsoft.com/office/drawing/2014/main" id="{45BEAA21-A628-4C38-8306-B70D065560ED}"/>
+                <a16:creationId xmlns:a16="http://schemas.microsoft.com/office/drawing/2014/main" id="{BA1ADABB-F59E-4CFF-8594-9EF0CA6DC1BB}"/>
               </a:ext>
             </a:extLst>
           </p:cNvPr>
@@ -22534,7 +22534,7 @@
           <p:cNvPr id="20" name="">
             <a:extLst xmlns:a="http://schemas.openxmlformats.org/drawingml/2006/main">
               <a:ext uri="{FF2B5EF4-FFF2-40B4-BE49-F238E27FC236}">
-                <a16:creationId xmlns:a16="http://schemas.microsoft.com/office/drawing/2014/main" id="{C681024E-1EBF-4166-9B10-4D85E40B76AA}"/>
+                <a16:creationId xmlns:a16="http://schemas.microsoft.com/office/drawing/2014/main" id="{3E408E52-CAAB-4FA9-9380-558CC1F4F610}"/>
               </a:ext>
             </a:extLst>
           </p:cNvPr>
@@ -22586,7 +22586,7 @@
           <p:cNvPr id="21" name="">
             <a:extLst xmlns:a="http://schemas.openxmlformats.org/drawingml/2006/main">
               <a:ext uri="{FF2B5EF4-FFF2-40B4-BE49-F238E27FC236}">
-                <a16:creationId xmlns:a16="http://schemas.microsoft.com/office/drawing/2014/main" id="{A8B43327-ACA7-4701-AC8F-53F6D2A14F22}"/>
+                <a16:creationId xmlns:a16="http://schemas.microsoft.com/office/drawing/2014/main" id="{592025FE-34AA-4D02-8C70-9EBDE0CF0F0A}"/>
               </a:ext>
             </a:extLst>
           </p:cNvPr>
@@ -22617,7 +22617,7 @@
           <p:cNvPr id="22" name="">
             <a:extLst xmlns:a="http://schemas.openxmlformats.org/drawingml/2006/main">
               <a:ext uri="{FF2B5EF4-FFF2-40B4-BE49-F238E27FC236}">
-                <a16:creationId xmlns:a16="http://schemas.microsoft.com/office/drawing/2014/main" id="{AB5EA240-52D5-4826-9EA6-368BBE047B5F}"/>
+                <a16:creationId xmlns:a16="http://schemas.microsoft.com/office/drawing/2014/main" id="{36D7771D-1731-4983-B51C-A06D123FB599}"/>
               </a:ext>
             </a:extLst>
           </p:cNvPr>
@@ -22669,7 +22669,7 @@
           <p:cNvPr id="23" name="">
             <a:extLst xmlns:a="http://schemas.openxmlformats.org/drawingml/2006/main">
               <a:ext uri="{FF2B5EF4-FFF2-40B4-BE49-F238E27FC236}">
-                <a16:creationId xmlns:a16="http://schemas.microsoft.com/office/drawing/2014/main" id="{3BCEB2DC-EA16-476E-B0E2-D65A89EBA9C5}"/>
+                <a16:creationId xmlns:a16="http://schemas.microsoft.com/office/drawing/2014/main" id="{B7B2D843-4C44-4C2A-A678-27CB41B11046}"/>
               </a:ext>
             </a:extLst>
           </p:cNvPr>
@@ -22721,7 +22721,7 @@
           <p:cNvPr id="24" name="">
             <a:extLst xmlns:a="http://schemas.openxmlformats.org/drawingml/2006/main">
               <a:ext uri="{FF2B5EF4-FFF2-40B4-BE49-F238E27FC236}">
-                <a16:creationId xmlns:a16="http://schemas.microsoft.com/office/drawing/2014/main" id="{E084E22E-E85A-4D42-A491-6CC3A946CF4F}"/>
+                <a16:creationId xmlns:a16="http://schemas.microsoft.com/office/drawing/2014/main" id="{3E71DD28-218F-4652-B286-8AF97782B56D}"/>
               </a:ext>
             </a:extLst>
           </p:cNvPr>
@@ -22773,7 +22773,7 @@
           <p:cNvPr id="25" name="">
             <a:extLst xmlns:a="http://schemas.openxmlformats.org/drawingml/2006/main">
               <a:ext uri="{FF2B5EF4-FFF2-40B4-BE49-F238E27FC236}">
-                <a16:creationId xmlns:a16="http://schemas.microsoft.com/office/drawing/2014/main" id="{BA9BEE57-1CDB-4296-8D81-540C450A371C}"/>
+                <a16:creationId xmlns:a16="http://schemas.microsoft.com/office/drawing/2014/main" id="{A1860DF2-2678-494A-AD69-CD47455AB25E}"/>
               </a:ext>
             </a:extLst>
           </p:cNvPr>
@@ -22825,7 +22825,7 @@
           <p:cNvPr id="26" name="">
             <a:extLst xmlns:a="http://schemas.openxmlformats.org/drawingml/2006/main">
               <a:ext uri="{FF2B5EF4-FFF2-40B4-BE49-F238E27FC236}">
-                <a16:creationId xmlns:a16="http://schemas.microsoft.com/office/drawing/2014/main" id="{5E200621-0A33-4865-9A84-873D30E4AC83}"/>
+                <a16:creationId xmlns:a16="http://schemas.microsoft.com/office/drawing/2014/main" id="{69A5EFC1-B448-4E51-953E-8B4FBF988024}"/>
               </a:ext>
             </a:extLst>
           </p:cNvPr>
@@ -22877,7 +22877,7 @@
           <p:cNvPr id="27" name="">
             <a:extLst xmlns:a="http://schemas.openxmlformats.org/drawingml/2006/main">
               <a:ext uri="{FF2B5EF4-FFF2-40B4-BE49-F238E27FC236}">
-                <a16:creationId xmlns:a16="http://schemas.microsoft.com/office/drawing/2014/main" id="{6E21B907-14E0-4D67-95D7-C27BF3A66827}"/>
+                <a16:creationId xmlns:a16="http://schemas.microsoft.com/office/drawing/2014/main" id="{DD4FA9A9-7C40-4A28-88CF-D26D2AAF8518}"/>
               </a:ext>
             </a:extLst>
           </p:cNvPr>
@@ -22929,7 +22929,7 @@
           <p:cNvPr id="28" name="">
             <a:extLst xmlns:a="http://schemas.openxmlformats.org/drawingml/2006/main">
               <a:ext uri="{FF2B5EF4-FFF2-40B4-BE49-F238E27FC236}">
-                <a16:creationId xmlns:a16="http://schemas.microsoft.com/office/drawing/2014/main" id="{8CFA72C3-6D2F-43D2-8B07-C8C173BE5E59}"/>
+                <a16:creationId xmlns:a16="http://schemas.microsoft.com/office/drawing/2014/main" id="{621E3FD1-0C00-486B-9CBD-6006BBDFA7EB}"/>
               </a:ext>
             </a:extLst>
           </p:cNvPr>
@@ -22981,7 +22981,7 @@
           <p:cNvPr id="29" name="">
             <a:extLst xmlns:a="http://schemas.openxmlformats.org/drawingml/2006/main">
               <a:ext uri="{FF2B5EF4-FFF2-40B4-BE49-F238E27FC236}">
-                <a16:creationId xmlns:a16="http://schemas.microsoft.com/office/drawing/2014/main" id="{09ED7542-C0F1-4AFD-AB75-96E83F022666}"/>
+                <a16:creationId xmlns:a16="http://schemas.microsoft.com/office/drawing/2014/main" id="{0F0232CD-2DD8-4D19-907A-F0BEDCE7DAB1}"/>
               </a:ext>
             </a:extLst>
           </p:cNvPr>
@@ -23033,7 +23033,7 @@
           <p:cNvPr id="30" name="">
             <a:extLst xmlns:a="http://schemas.openxmlformats.org/drawingml/2006/main">
               <a:ext uri="{FF2B5EF4-FFF2-40B4-BE49-F238E27FC236}">
-                <a16:creationId xmlns:a16="http://schemas.microsoft.com/office/drawing/2014/main" id="{098104D7-D8FE-4249-A55B-7E64DB093A2B}"/>
+                <a16:creationId xmlns:a16="http://schemas.microsoft.com/office/drawing/2014/main" id="{B53FECB1-B956-4C67-97A7-B960C6BB7BA6}"/>
               </a:ext>
             </a:extLst>
           </p:cNvPr>
@@ -23064,7 +23064,7 @@
           <p:cNvPr id="31" name="">
             <a:extLst xmlns:a="http://schemas.openxmlformats.org/drawingml/2006/main">
               <a:ext uri="{FF2B5EF4-FFF2-40B4-BE49-F238E27FC236}">
-                <a16:creationId xmlns:a16="http://schemas.microsoft.com/office/drawing/2014/main" id="{718838E3-C832-4D71-83E4-9DDD430F546F}"/>
+                <a16:creationId xmlns:a16="http://schemas.microsoft.com/office/drawing/2014/main" id="{6785FF18-9E61-46A7-B7DA-3E50544E7916}"/>
               </a:ext>
             </a:extLst>
           </p:cNvPr>
@@ -23095,7 +23095,7 @@
           <p:cNvPr id="32" name="">
             <a:extLst xmlns:a="http://schemas.openxmlformats.org/drawingml/2006/main">
               <a:ext uri="{FF2B5EF4-FFF2-40B4-BE49-F238E27FC236}">
-                <a16:creationId xmlns:a16="http://schemas.microsoft.com/office/drawing/2014/main" id="{A0FA3149-0BEF-4414-838D-EA3F408F9E6A}"/>
+                <a16:creationId xmlns:a16="http://schemas.microsoft.com/office/drawing/2014/main" id="{B0164145-8195-4D54-9B3D-B8A0F23227DE}"/>
               </a:ext>
             </a:extLst>
           </p:cNvPr>
@@ -23147,7 +23147,7 @@
           <p:cNvPr id="33" name="">
             <a:extLst xmlns:a="http://schemas.openxmlformats.org/drawingml/2006/main">
               <a:ext uri="{FF2B5EF4-FFF2-40B4-BE49-F238E27FC236}">
-                <a16:creationId xmlns:a16="http://schemas.microsoft.com/office/drawing/2014/main" id="{65C43845-78A2-493B-A886-D6E968BD45AD}"/>
+                <a16:creationId xmlns:a16="http://schemas.microsoft.com/office/drawing/2014/main" id="{E34E2984-4542-4615-9174-8E5F142A9BED}"/>
               </a:ext>
             </a:extLst>
           </p:cNvPr>
@@ -23199,7 +23199,7 @@
           <p:cNvPr id="34" name="">
             <a:extLst xmlns:a="http://schemas.openxmlformats.org/drawingml/2006/main">
               <a:ext uri="{FF2B5EF4-FFF2-40B4-BE49-F238E27FC236}">
-                <a16:creationId xmlns:a16="http://schemas.microsoft.com/office/drawing/2014/main" id="{C76FD567-61FA-4829-B096-78C1BADE3DA3}"/>
+                <a16:creationId xmlns:a16="http://schemas.microsoft.com/office/drawing/2014/main" id="{A5B6B911-7F57-4285-BFAB-63522572398C}"/>
               </a:ext>
             </a:extLst>
           </p:cNvPr>
@@ -23251,7 +23251,7 @@
           <p:cNvPr id="35" name="">
             <a:extLst xmlns:a="http://schemas.openxmlformats.org/drawingml/2006/main">
               <a:ext uri="{FF2B5EF4-FFF2-40B4-BE49-F238E27FC236}">
-                <a16:creationId xmlns:a16="http://schemas.microsoft.com/office/drawing/2014/main" id="{8C996D5E-4F01-4CF9-B302-2976C833D2B6}"/>
+                <a16:creationId xmlns:a16="http://schemas.microsoft.com/office/drawing/2014/main" id="{C27982E3-7C42-48BA-BC24-0EC7FFA03F89}"/>
               </a:ext>
             </a:extLst>
           </p:cNvPr>
@@ -23303,7 +23303,7 @@
           <p:cNvPr id="36" name="">
             <a:extLst xmlns:a="http://schemas.openxmlformats.org/drawingml/2006/main">
               <a:ext uri="{FF2B5EF4-FFF2-40B4-BE49-F238E27FC236}">
-                <a16:creationId xmlns:a16="http://schemas.microsoft.com/office/drawing/2014/main" id="{2EDBA7D8-B47B-4C45-A728-2348761C36C3}"/>
+                <a16:creationId xmlns:a16="http://schemas.microsoft.com/office/drawing/2014/main" id="{E6CCB86B-0209-4B6D-BDEA-F105B62184ED}"/>
               </a:ext>
             </a:extLst>
           </p:cNvPr>
@@ -23355,7 +23355,7 @@
           <p:cNvPr id="37" name="">
             <a:extLst xmlns:a="http://schemas.openxmlformats.org/drawingml/2006/main">
               <a:ext uri="{FF2B5EF4-FFF2-40B4-BE49-F238E27FC236}">
-                <a16:creationId xmlns:a16="http://schemas.microsoft.com/office/drawing/2014/main" id="{FC57CF18-FCC6-419B-A32F-12F1D30B9296}"/>
+                <a16:creationId xmlns:a16="http://schemas.microsoft.com/office/drawing/2014/main" id="{8894A9BC-6A8F-4425-8794-8983D47D7832}"/>
               </a:ext>
             </a:extLst>
           </p:cNvPr>
@@ -23407,7 +23407,7 @@
           <p:cNvPr id="38" name="">
             <a:extLst xmlns:a="http://schemas.openxmlformats.org/drawingml/2006/main">
               <a:ext uri="{FF2B5EF4-FFF2-40B4-BE49-F238E27FC236}">
-                <a16:creationId xmlns:a16="http://schemas.microsoft.com/office/drawing/2014/main" id="{C6A2B117-70C9-48CD-91D0-E81D98236B35}"/>
+                <a16:creationId xmlns:a16="http://schemas.microsoft.com/office/drawing/2014/main" id="{56B54988-6901-4F0F-BA08-26FA1447768C}"/>
               </a:ext>
             </a:extLst>
           </p:cNvPr>
@@ -23459,7 +23459,7 @@
           <p:cNvPr id="39" name="">
             <a:extLst xmlns:a="http://schemas.openxmlformats.org/drawingml/2006/main">
               <a:ext uri="{FF2B5EF4-FFF2-40B4-BE49-F238E27FC236}">
-                <a16:creationId xmlns:a16="http://schemas.microsoft.com/office/drawing/2014/main" id="{41BDCA1C-71EC-48F5-926A-F2B81897E78F}"/>
+                <a16:creationId xmlns:a16="http://schemas.microsoft.com/office/drawing/2014/main" id="{22D574AD-3D8E-4887-A821-9EF70E526023}"/>
               </a:ext>
             </a:extLst>
           </p:cNvPr>
@@ -23511,7 +23511,7 @@
           <p:cNvPr id="40" name="">
             <a:extLst xmlns:a="http://schemas.openxmlformats.org/drawingml/2006/main">
               <a:ext uri="{FF2B5EF4-FFF2-40B4-BE49-F238E27FC236}">
-                <a16:creationId xmlns:a16="http://schemas.microsoft.com/office/drawing/2014/main" id="{FB158136-73A4-48CD-9D25-284699A02404}"/>
+                <a16:creationId xmlns:a16="http://schemas.microsoft.com/office/drawing/2014/main" id="{B8E9F465-531E-499E-984E-065EC1C18492}"/>
               </a:ext>
             </a:extLst>
           </p:cNvPr>
@@ -23542,7 +23542,7 @@
           <p:cNvPr id="41" name="">
             <a:extLst xmlns:a="http://schemas.openxmlformats.org/drawingml/2006/main">
               <a:ext uri="{FF2B5EF4-FFF2-40B4-BE49-F238E27FC236}">
-                <a16:creationId xmlns:a16="http://schemas.microsoft.com/office/drawing/2014/main" id="{616B1596-5E5B-4329-AEFF-CC105B8556A1}"/>
+                <a16:creationId xmlns:a16="http://schemas.microsoft.com/office/drawing/2014/main" id="{7BC50D4E-8029-46C3-948D-F4A83029443E}"/>
               </a:ext>
             </a:extLst>
           </p:cNvPr>
@@ -23594,7 +23594,7 @@
           <p:cNvPr id="42" name="">
             <a:extLst xmlns:a="http://schemas.openxmlformats.org/drawingml/2006/main">
               <a:ext uri="{FF2B5EF4-FFF2-40B4-BE49-F238E27FC236}">
-                <a16:creationId xmlns:a16="http://schemas.microsoft.com/office/drawing/2014/main" id="{738F48BB-BB50-4CCF-A8AA-565423747103}"/>
+                <a16:creationId xmlns:a16="http://schemas.microsoft.com/office/drawing/2014/main" id="{ECE5C8EE-CC54-4DEF-A638-7729FE42EA41}"/>
               </a:ext>
             </a:extLst>
           </p:cNvPr>
@@ -23646,7 +23646,7 @@
           <p:cNvPr id="43" name="">
             <a:extLst xmlns:a="http://schemas.openxmlformats.org/drawingml/2006/main">
               <a:ext uri="{FF2B5EF4-FFF2-40B4-BE49-F238E27FC236}">
-                <a16:creationId xmlns:a16="http://schemas.microsoft.com/office/drawing/2014/main" id="{96A23FE6-0C25-4EFE-9836-E7A22D9D97E6}"/>
+                <a16:creationId xmlns:a16="http://schemas.microsoft.com/office/drawing/2014/main" id="{016068B5-1D28-464F-8879-3305704267A8}"/>
               </a:ext>
             </a:extLst>
           </p:cNvPr>
@@ -23698,7 +23698,7 @@
           <p:cNvPr id="44" name="">
             <a:extLst xmlns:a="http://schemas.openxmlformats.org/drawingml/2006/main">
               <a:ext uri="{FF2B5EF4-FFF2-40B4-BE49-F238E27FC236}">
-                <a16:creationId xmlns:a16="http://schemas.microsoft.com/office/drawing/2014/main" id="{28A2F8A7-239C-4ED8-BC38-95010B3D358B}"/>
+                <a16:creationId xmlns:a16="http://schemas.microsoft.com/office/drawing/2014/main" id="{0BE2338E-E51A-4326-BB0D-7A6B5A7F25C7}"/>
               </a:ext>
             </a:extLst>
           </p:cNvPr>
@@ -23750,7 +23750,7 @@
           <p:cNvPr id="45" name="">
             <a:extLst xmlns:a="http://schemas.openxmlformats.org/drawingml/2006/main">
               <a:ext uri="{FF2B5EF4-FFF2-40B4-BE49-F238E27FC236}">
-                <a16:creationId xmlns:a16="http://schemas.microsoft.com/office/drawing/2014/main" id="{4416366E-01B7-41EB-8AE0-AE52B91D7F58}"/>
+                <a16:creationId xmlns:a16="http://schemas.microsoft.com/office/drawing/2014/main" id="{8DA50053-E206-4205-ACEE-672387455901}"/>
               </a:ext>
             </a:extLst>
           </p:cNvPr>
@@ -23802,7 +23802,7 @@
           <p:cNvPr id="46" name="">
             <a:extLst xmlns:a="http://schemas.openxmlformats.org/drawingml/2006/main">
               <a:ext uri="{FF2B5EF4-FFF2-40B4-BE49-F238E27FC236}">
-                <a16:creationId xmlns:a16="http://schemas.microsoft.com/office/drawing/2014/main" id="{FBE892A8-7673-4BED-B0D6-CAF89FE5A6C8}"/>
+                <a16:creationId xmlns:a16="http://schemas.microsoft.com/office/drawing/2014/main" id="{FDAE05BC-2329-4313-BEE8-74645124E5BE}"/>
               </a:ext>
             </a:extLst>
           </p:cNvPr>
@@ -23854,7 +23854,7 @@
           <p:cNvPr id="47" name="">
             <a:extLst xmlns:a="http://schemas.openxmlformats.org/drawingml/2006/main">
               <a:ext uri="{FF2B5EF4-FFF2-40B4-BE49-F238E27FC236}">
-                <a16:creationId xmlns:a16="http://schemas.microsoft.com/office/drawing/2014/main" id="{F2104032-737A-49F0-96DA-DA43CEA642B3}"/>
+                <a16:creationId xmlns:a16="http://schemas.microsoft.com/office/drawing/2014/main" id="{F610F05E-E5C7-4C9F-ABE0-6FDF1CE3B454}"/>
               </a:ext>
             </a:extLst>
           </p:cNvPr>
@@ -23906,7 +23906,7 @@
           <p:cNvPr id="48" name="">
             <a:extLst xmlns:a="http://schemas.openxmlformats.org/drawingml/2006/main">
               <a:ext uri="{FF2B5EF4-FFF2-40B4-BE49-F238E27FC236}">
-                <a16:creationId xmlns:a16="http://schemas.microsoft.com/office/drawing/2014/main" id="{9C348296-A189-4380-B5C5-2BFA2417974B}"/>
+                <a16:creationId xmlns:a16="http://schemas.microsoft.com/office/drawing/2014/main" id="{3FBF5DA6-2ECC-4185-B672-99DD19A25EE6}"/>
               </a:ext>
             </a:extLst>
           </p:cNvPr>
@@ -23958,7 +23958,7 @@
           <p:cNvPr id="49" name="">
             <a:extLst xmlns:a="http://schemas.openxmlformats.org/drawingml/2006/main">
               <a:ext uri="{FF2B5EF4-FFF2-40B4-BE49-F238E27FC236}">
-                <a16:creationId xmlns:a16="http://schemas.microsoft.com/office/drawing/2014/main" id="{30902FDE-CF11-4C0C-971E-DE5F616A266D}"/>
+                <a16:creationId xmlns:a16="http://schemas.microsoft.com/office/drawing/2014/main" id="{77974B49-EC1E-4F3F-A084-F9E362C9F225}"/>
               </a:ext>
             </a:extLst>
           </p:cNvPr>
@@ -23989,7 +23989,7 @@
           <p:cNvPr id="50" name="">
             <a:extLst xmlns:a="http://schemas.openxmlformats.org/drawingml/2006/main">
               <a:ext uri="{FF2B5EF4-FFF2-40B4-BE49-F238E27FC236}">
-                <a16:creationId xmlns:a16="http://schemas.microsoft.com/office/drawing/2014/main" id="{F151AFDD-CF85-43BB-858F-85B7DE270009}"/>
+                <a16:creationId xmlns:a16="http://schemas.microsoft.com/office/drawing/2014/main" id="{E422F18F-7FFE-40FE-B5FC-609C6AF9ED68}"/>
               </a:ext>
             </a:extLst>
           </p:cNvPr>
@@ -24020,7 +24020,7 @@
           <p:cNvPr id="51" name="">
             <a:extLst xmlns:a="http://schemas.openxmlformats.org/drawingml/2006/main">
               <a:ext uri="{FF2B5EF4-FFF2-40B4-BE49-F238E27FC236}">
-                <a16:creationId xmlns:a16="http://schemas.microsoft.com/office/drawing/2014/main" id="{2199D216-EF89-4CEC-8E1C-E15C65B047EC}"/>
+                <a16:creationId xmlns:a16="http://schemas.microsoft.com/office/drawing/2014/main" id="{73221B7D-AAA7-4B33-AF93-867C9ED89379}"/>
               </a:ext>
             </a:extLst>
           </p:cNvPr>
@@ -24072,7 +24072,7 @@
           <p:cNvPr id="52" name="">
             <a:extLst xmlns:a="http://schemas.openxmlformats.org/drawingml/2006/main">
               <a:ext uri="{FF2B5EF4-FFF2-40B4-BE49-F238E27FC236}">
-                <a16:creationId xmlns:a16="http://schemas.microsoft.com/office/drawing/2014/main" id="{99588E33-D1CB-4BA8-A476-706FE6300B2D}"/>
+                <a16:creationId xmlns:a16="http://schemas.microsoft.com/office/drawing/2014/main" id="{D84040BF-FDD5-486F-9978-F5722894839A}"/>
               </a:ext>
             </a:extLst>
           </p:cNvPr>
@@ -24124,7 +24124,7 @@
           <p:cNvPr id="53" name="">
             <a:extLst xmlns:a="http://schemas.openxmlformats.org/drawingml/2006/main">
               <a:ext uri="{FF2B5EF4-FFF2-40B4-BE49-F238E27FC236}">
-                <a16:creationId xmlns:a16="http://schemas.microsoft.com/office/drawing/2014/main" id="{EEFAE60E-5D15-4E1B-8D51-31C4254BF623}"/>
+                <a16:creationId xmlns:a16="http://schemas.microsoft.com/office/drawing/2014/main" id="{C2597420-A7EC-4179-9514-BADEB6CA2EA8}"/>
               </a:ext>
             </a:extLst>
           </p:cNvPr>
@@ -24176,7 +24176,7 @@
           <p:cNvPr id="54" name="">
             <a:extLst xmlns:a="http://schemas.openxmlformats.org/drawingml/2006/main">
               <a:ext uri="{FF2B5EF4-FFF2-40B4-BE49-F238E27FC236}">
-                <a16:creationId xmlns:a16="http://schemas.microsoft.com/office/drawing/2014/main" id="{B1235393-CB8E-4D3D-85C5-641862F36049}"/>
+                <a16:creationId xmlns:a16="http://schemas.microsoft.com/office/drawing/2014/main" id="{21A3B456-4495-4A8D-86BD-D0CAD37213F9}"/>
               </a:ext>
             </a:extLst>
           </p:cNvPr>
@@ -24228,7 +24228,7 @@
           <p:cNvPr id="55" name="">
             <a:extLst xmlns:a="http://schemas.openxmlformats.org/drawingml/2006/main">
               <a:ext uri="{FF2B5EF4-FFF2-40B4-BE49-F238E27FC236}">
-                <a16:creationId xmlns:a16="http://schemas.microsoft.com/office/drawing/2014/main" id="{F1F95D5E-A0BD-4812-85BC-5B00C3B3BCCA}"/>
+                <a16:creationId xmlns:a16="http://schemas.microsoft.com/office/drawing/2014/main" id="{97CED989-6798-460D-9502-D699A1DCCAC8}"/>
               </a:ext>
             </a:extLst>
           </p:cNvPr>
@@ -24280,7 +24280,7 @@
           <p:cNvPr id="56" name="">
             <a:extLst xmlns:a="http://schemas.openxmlformats.org/drawingml/2006/main">
               <a:ext uri="{FF2B5EF4-FFF2-40B4-BE49-F238E27FC236}">
-                <a16:creationId xmlns:a16="http://schemas.microsoft.com/office/drawing/2014/main" id="{B5235E9D-9B99-4153-BBC4-569C9C0BA125}"/>
+                <a16:creationId xmlns:a16="http://schemas.microsoft.com/office/drawing/2014/main" id="{407711C7-821C-4905-BA98-AB133ACB9672}"/>
               </a:ext>
             </a:extLst>
           </p:cNvPr>
@@ -24332,7 +24332,7 @@
           <p:cNvPr id="57" name="">
             <a:extLst xmlns:a="http://schemas.openxmlformats.org/drawingml/2006/main">
               <a:ext uri="{FF2B5EF4-FFF2-40B4-BE49-F238E27FC236}">
-                <a16:creationId xmlns:a16="http://schemas.microsoft.com/office/drawing/2014/main" id="{B0873C24-5799-4C92-A6C9-172F0992E6AF}"/>
+                <a16:creationId xmlns:a16="http://schemas.microsoft.com/office/drawing/2014/main" id="{B138FE6E-0B64-4F91-A2DE-8CBA8DB444A7}"/>
               </a:ext>
             </a:extLst>
           </p:cNvPr>
@@ -24384,7 +24384,7 @@
           <p:cNvPr id="58" name="">
             <a:extLst xmlns:a="http://schemas.openxmlformats.org/drawingml/2006/main">
               <a:ext uri="{FF2B5EF4-FFF2-40B4-BE49-F238E27FC236}">
-                <a16:creationId xmlns:a16="http://schemas.microsoft.com/office/drawing/2014/main" id="{5D3EB504-15C2-4E9C-9849-6D754071E2EE}"/>
+                <a16:creationId xmlns:a16="http://schemas.microsoft.com/office/drawing/2014/main" id="{B7C652AE-3DA6-4927-BD15-889AB658D626}"/>
               </a:ext>
             </a:extLst>
           </p:cNvPr>
@@ -24436,7 +24436,7 @@
           <p:cNvPr id="59" name="">
             <a:extLst xmlns:a="http://schemas.openxmlformats.org/drawingml/2006/main">
               <a:ext uri="{FF2B5EF4-FFF2-40B4-BE49-F238E27FC236}">
-                <a16:creationId xmlns:a16="http://schemas.microsoft.com/office/drawing/2014/main" id="{A8D3329E-1683-4126-95D8-6167CE131D7F}"/>
+                <a16:creationId xmlns:a16="http://schemas.microsoft.com/office/drawing/2014/main" id="{38F1AD0F-308D-4D70-B471-7F50E3CEE620}"/>
               </a:ext>
             </a:extLst>
           </p:cNvPr>
@@ -24467,7 +24467,7 @@
           <p:cNvPr id="60" name="">
             <a:extLst xmlns:a="http://schemas.openxmlformats.org/drawingml/2006/main">
               <a:ext uri="{FF2B5EF4-FFF2-40B4-BE49-F238E27FC236}">
-                <a16:creationId xmlns:a16="http://schemas.microsoft.com/office/drawing/2014/main" id="{FF0BAE6C-11C8-4692-9A29-840C471E9906}"/>
+                <a16:creationId xmlns:a16="http://schemas.microsoft.com/office/drawing/2014/main" id="{5E627CFF-125B-48BC-9EF1-8259650CC747}"/>
               </a:ext>
             </a:extLst>
           </p:cNvPr>
@@ -24519,7 +24519,7 @@
           <p:cNvPr id="61" name="">
             <a:extLst xmlns:a="http://schemas.openxmlformats.org/drawingml/2006/main">
               <a:ext uri="{FF2B5EF4-FFF2-40B4-BE49-F238E27FC236}">
-                <a16:creationId xmlns:a16="http://schemas.microsoft.com/office/drawing/2014/main" id="{E5541F55-B18D-41B7-AB56-3D7934F46D6D}"/>
+                <a16:creationId xmlns:a16="http://schemas.microsoft.com/office/drawing/2014/main" id="{833883CE-4D61-4D3B-87A0-84433756020B}"/>
               </a:ext>
             </a:extLst>
           </p:cNvPr>
@@ -24571,7 +24571,7 @@
           <p:cNvPr id="62" name="">
             <a:extLst xmlns:a="http://schemas.openxmlformats.org/drawingml/2006/main">
               <a:ext uri="{FF2B5EF4-FFF2-40B4-BE49-F238E27FC236}">
-                <a16:creationId xmlns:a16="http://schemas.microsoft.com/office/drawing/2014/main" id="{FDF88009-8A7C-45B9-98F8-EDF369E326B8}"/>
+                <a16:creationId xmlns:a16="http://schemas.microsoft.com/office/drawing/2014/main" id="{0329C47F-D741-40E9-BBCF-D905A614C025}"/>
               </a:ext>
             </a:extLst>
           </p:cNvPr>
@@ -24623,7 +24623,7 @@
           <p:cNvPr id="63" name="">
             <a:extLst xmlns:a="http://schemas.openxmlformats.org/drawingml/2006/main">
               <a:ext uri="{FF2B5EF4-FFF2-40B4-BE49-F238E27FC236}">
-                <a16:creationId xmlns:a16="http://schemas.microsoft.com/office/drawing/2014/main" id="{78D0088D-4690-45DC-A0A0-5F5550E46ED4}"/>
+                <a16:creationId xmlns:a16="http://schemas.microsoft.com/office/drawing/2014/main" id="{DE27D1AA-17A5-4EAB-9478-CF51F9FFD8CE}"/>
               </a:ext>
             </a:extLst>
           </p:cNvPr>
@@ -24675,7 +24675,7 @@
           <p:cNvPr id="64" name="">
             <a:extLst xmlns:a="http://schemas.openxmlformats.org/drawingml/2006/main">
               <a:ext uri="{FF2B5EF4-FFF2-40B4-BE49-F238E27FC236}">
-                <a16:creationId xmlns:a16="http://schemas.microsoft.com/office/drawing/2014/main" id="{E65FEA8D-FF80-414B-8CE1-8DD1C336DD43}"/>
+                <a16:creationId xmlns:a16="http://schemas.microsoft.com/office/drawing/2014/main" id="{F30A022C-CF61-43BB-9C65-63120580B8CC}"/>
               </a:ext>
             </a:extLst>
           </p:cNvPr>
@@ -24727,7 +24727,7 @@
           <p:cNvPr id="65" name="">
             <a:extLst xmlns:a="http://schemas.openxmlformats.org/drawingml/2006/main">
               <a:ext uri="{FF2B5EF4-FFF2-40B4-BE49-F238E27FC236}">
-                <a16:creationId xmlns:a16="http://schemas.microsoft.com/office/drawing/2014/main" id="{6EAB0CAC-1B07-4BA8-8391-C918BBAA832C}"/>
+                <a16:creationId xmlns:a16="http://schemas.microsoft.com/office/drawing/2014/main" id="{C5EC606F-6B79-4A03-AAB0-0DB7B0B15C76}"/>
               </a:ext>
             </a:extLst>
           </p:cNvPr>
@@ -24779,7 +24779,7 @@
           <p:cNvPr id="66" name="">
             <a:extLst xmlns:a="http://schemas.openxmlformats.org/drawingml/2006/main">
               <a:ext uri="{FF2B5EF4-FFF2-40B4-BE49-F238E27FC236}">
-                <a16:creationId xmlns:a16="http://schemas.microsoft.com/office/drawing/2014/main" id="{4CBD41F6-BBC0-4207-8632-B53DFC3834FB}"/>
+                <a16:creationId xmlns:a16="http://schemas.microsoft.com/office/drawing/2014/main" id="{251C661A-4A05-4861-8FD1-B35FE673E885}"/>
               </a:ext>
             </a:extLst>
           </p:cNvPr>
@@ -24831,7 +24831,7 @@
           <p:cNvPr id="67" name="">
             <a:extLst xmlns:a="http://schemas.openxmlformats.org/drawingml/2006/main">
               <a:ext uri="{FF2B5EF4-FFF2-40B4-BE49-F238E27FC236}">
-                <a16:creationId xmlns:a16="http://schemas.microsoft.com/office/drawing/2014/main" id="{FDBA960A-E8F1-402C-91E2-F2DA06CACF47}"/>
+                <a16:creationId xmlns:a16="http://schemas.microsoft.com/office/drawing/2014/main" id="{F253A4E1-D60E-428C-B649-A00896EFC1F6}"/>
               </a:ext>
             </a:extLst>
           </p:cNvPr>
@@ -24883,7 +24883,7 @@
           <p:cNvPr id="68" name="">
             <a:extLst xmlns:a="http://schemas.openxmlformats.org/drawingml/2006/main">
               <a:ext uri="{FF2B5EF4-FFF2-40B4-BE49-F238E27FC236}">
-                <a16:creationId xmlns:a16="http://schemas.microsoft.com/office/drawing/2014/main" id="{FF0FDFD7-A2AA-4A9C-9FF6-D2AA7B8E8F14}"/>
+                <a16:creationId xmlns:a16="http://schemas.microsoft.com/office/drawing/2014/main" id="{739A4036-3C92-4F48-99CD-074B717F2B8D}"/>
               </a:ext>
             </a:extLst>
           </p:cNvPr>
@@ -24914,7 +24914,7 @@
           <p:cNvPr id="69" name="">
             <a:extLst xmlns:a="http://schemas.openxmlformats.org/drawingml/2006/main">
               <a:ext uri="{FF2B5EF4-FFF2-40B4-BE49-F238E27FC236}">
-                <a16:creationId xmlns:a16="http://schemas.microsoft.com/office/drawing/2014/main" id="{B8889B33-C8F3-4905-B34E-958F00060466}"/>
+                <a16:creationId xmlns:a16="http://schemas.microsoft.com/office/drawing/2014/main" id="{C7C5D06B-CBDA-43B6-AD31-E3C4D0CE68E4}"/>
               </a:ext>
             </a:extLst>
           </p:cNvPr>
@@ -24945,7 +24945,7 @@
           <p:cNvPr id="70" name="">
             <a:extLst xmlns:a="http://schemas.openxmlformats.org/drawingml/2006/main">
               <a:ext uri="{FF2B5EF4-FFF2-40B4-BE49-F238E27FC236}">
-                <a16:creationId xmlns:a16="http://schemas.microsoft.com/office/drawing/2014/main" id="{1468B7B8-C0AE-466A-8807-17F3E6ED09CA}"/>
+                <a16:creationId xmlns:a16="http://schemas.microsoft.com/office/drawing/2014/main" id="{88886F6E-C9CC-48FF-8024-584C766C12EE}"/>
               </a:ext>
             </a:extLst>
           </p:cNvPr>
@@ -24997,7 +24997,7 @@
           <p:cNvPr id="71" name="">
             <a:extLst xmlns:a="http://schemas.openxmlformats.org/drawingml/2006/main">
               <a:ext uri="{FF2B5EF4-FFF2-40B4-BE49-F238E27FC236}">
-                <a16:creationId xmlns:a16="http://schemas.microsoft.com/office/drawing/2014/main" id="{8240B774-EA88-460C-9197-C7EF6BA5A2AA}"/>
+                <a16:creationId xmlns:a16="http://schemas.microsoft.com/office/drawing/2014/main" id="{D282AD20-F664-4CA9-8051-CA826EA605DF}"/>
               </a:ext>
             </a:extLst>
           </p:cNvPr>
@@ -25049,7 +25049,7 @@
           <p:cNvPr id="72" name="">
             <a:extLst xmlns:a="http://schemas.openxmlformats.org/drawingml/2006/main">
               <a:ext uri="{FF2B5EF4-FFF2-40B4-BE49-F238E27FC236}">
-                <a16:creationId xmlns:a16="http://schemas.microsoft.com/office/drawing/2014/main" id="{371AF4D4-A937-4FC8-8BB2-D0C232FB6F8C}"/>
+                <a16:creationId xmlns:a16="http://schemas.microsoft.com/office/drawing/2014/main" id="{7464E716-9055-4DCB-9DA6-9DA0C76C66D8}"/>
               </a:ext>
             </a:extLst>
           </p:cNvPr>
@@ -25101,7 +25101,7 @@
           <p:cNvPr id="73" name="">
             <a:extLst xmlns:a="http://schemas.openxmlformats.org/drawingml/2006/main">
               <a:ext uri="{FF2B5EF4-FFF2-40B4-BE49-F238E27FC236}">
-                <a16:creationId xmlns:a16="http://schemas.microsoft.com/office/drawing/2014/main" id="{01BA1B0B-C22B-43B9-9BC2-791AB7BBD8B1}"/>
+                <a16:creationId xmlns:a16="http://schemas.microsoft.com/office/drawing/2014/main" id="{F9CDF03A-92CD-43D2-8F5C-6BE9DA2D648C}"/>
               </a:ext>
             </a:extLst>
           </p:cNvPr>
@@ -25153,7 +25153,7 @@
           <p:cNvPr id="74" name="">
             <a:extLst xmlns:a="http://schemas.openxmlformats.org/drawingml/2006/main">
               <a:ext uri="{FF2B5EF4-FFF2-40B4-BE49-F238E27FC236}">
-                <a16:creationId xmlns:a16="http://schemas.microsoft.com/office/drawing/2014/main" id="{8B96B478-FD97-4D45-8700-84F6216E3FC1}"/>
+                <a16:creationId xmlns:a16="http://schemas.microsoft.com/office/drawing/2014/main" id="{3DD44D85-A09D-46AD-998D-04EBE953B1B6}"/>
               </a:ext>
             </a:extLst>
           </p:cNvPr>
@@ -25205,7 +25205,7 @@
           <p:cNvPr id="75" name="">
             <a:extLst xmlns:a="http://schemas.openxmlformats.org/drawingml/2006/main">
               <a:ext uri="{FF2B5EF4-FFF2-40B4-BE49-F238E27FC236}">
-                <a16:creationId xmlns:a16="http://schemas.microsoft.com/office/drawing/2014/main" id="{D577DD86-55A5-4BCF-BA8D-37000C062B06}"/>
+                <a16:creationId xmlns:a16="http://schemas.microsoft.com/office/drawing/2014/main" id="{B1B4154E-5A2A-4B21-9651-48594DE1DCAD}"/>
               </a:ext>
             </a:extLst>
           </p:cNvPr>
@@ -25257,7 +25257,7 @@
           <p:cNvPr id="76" name="">
             <a:extLst xmlns:a="http://schemas.openxmlformats.org/drawingml/2006/main">
               <a:ext uri="{FF2B5EF4-FFF2-40B4-BE49-F238E27FC236}">
-                <a16:creationId xmlns:a16="http://schemas.microsoft.com/office/drawing/2014/main" id="{62C0DC29-C19D-4623-BEBC-C4C2B751A1FE}"/>
+                <a16:creationId xmlns:a16="http://schemas.microsoft.com/office/drawing/2014/main" id="{36927AA9-FE3F-4B24-B06E-62C57AA4EEE3}"/>
               </a:ext>
             </a:extLst>
           </p:cNvPr>
@@ -25309,7 +25309,7 @@
           <p:cNvPr id="77" name="">
             <a:extLst xmlns:a="http://schemas.openxmlformats.org/drawingml/2006/main">
               <a:ext uri="{FF2B5EF4-FFF2-40B4-BE49-F238E27FC236}">
-                <a16:creationId xmlns:a16="http://schemas.microsoft.com/office/drawing/2014/main" id="{6FC9D559-F611-45D7-BEA7-CE1C97D6A752}"/>
+                <a16:creationId xmlns:a16="http://schemas.microsoft.com/office/drawing/2014/main" id="{8F40622E-6095-405B-9870-1358F6213FD5}"/>
               </a:ext>
             </a:extLst>
           </p:cNvPr>
@@ -25361,7 +25361,7 @@
           <p:cNvPr id="78" name="">
             <a:extLst xmlns:a="http://schemas.openxmlformats.org/drawingml/2006/main">
               <a:ext uri="{FF2B5EF4-FFF2-40B4-BE49-F238E27FC236}">
-                <a16:creationId xmlns:a16="http://schemas.microsoft.com/office/drawing/2014/main" id="{7E0E3E2A-902F-4FEA-B315-165D698A007D}"/>
+                <a16:creationId xmlns:a16="http://schemas.microsoft.com/office/drawing/2014/main" id="{F6479113-C696-4FD6-9A37-D871B5EAFE90}"/>
               </a:ext>
             </a:extLst>
           </p:cNvPr>
@@ -25392,7 +25392,7 @@
           <p:cNvPr id="79" name="">
             <a:extLst xmlns:a="http://schemas.openxmlformats.org/drawingml/2006/main">
               <a:ext uri="{FF2B5EF4-FFF2-40B4-BE49-F238E27FC236}">
-                <a16:creationId xmlns:a16="http://schemas.microsoft.com/office/drawing/2014/main" id="{4B1A0DD7-20C0-46EA-9301-290771F870AD}"/>
+                <a16:creationId xmlns:a16="http://schemas.microsoft.com/office/drawing/2014/main" id="{54D4B80B-9694-4C2F-9A27-3019F12A3E22}"/>
               </a:ext>
             </a:extLst>
           </p:cNvPr>
@@ -25444,7 +25444,7 @@
           <p:cNvPr id="80" name="">
             <a:extLst xmlns:a="http://schemas.openxmlformats.org/drawingml/2006/main">
               <a:ext uri="{FF2B5EF4-FFF2-40B4-BE49-F238E27FC236}">
-                <a16:creationId xmlns:a16="http://schemas.microsoft.com/office/drawing/2014/main" id="{EBF485BE-E390-435A-AADC-EA78E968DBC1}"/>
+                <a16:creationId xmlns:a16="http://schemas.microsoft.com/office/drawing/2014/main" id="{9F62B21B-3CFC-4215-8AB3-7FC155BF59EB}"/>
               </a:ext>
             </a:extLst>
           </p:cNvPr>
@@ -25496,7 +25496,7 @@
           <p:cNvPr id="81" name="">
             <a:extLst xmlns:a="http://schemas.openxmlformats.org/drawingml/2006/main">
               <a:ext uri="{FF2B5EF4-FFF2-40B4-BE49-F238E27FC236}">
-                <a16:creationId xmlns:a16="http://schemas.microsoft.com/office/drawing/2014/main" id="{B8F5BA81-00AF-484B-86E1-BC2752A4ACCB}"/>
+                <a16:creationId xmlns:a16="http://schemas.microsoft.com/office/drawing/2014/main" id="{E70B5AE6-B8D0-4AC7-BE2A-A8AF0EFAF127}"/>
               </a:ext>
             </a:extLst>
           </p:cNvPr>
@@ -25548,7 +25548,7 @@
           <p:cNvPr id="82" name="">
             <a:extLst xmlns:a="http://schemas.openxmlformats.org/drawingml/2006/main">
               <a:ext uri="{FF2B5EF4-FFF2-40B4-BE49-F238E27FC236}">
-                <a16:creationId xmlns:a16="http://schemas.microsoft.com/office/drawing/2014/main" id="{CCD86D27-E4B3-4E2A-A94F-8284037A42DB}"/>
+                <a16:creationId xmlns:a16="http://schemas.microsoft.com/office/drawing/2014/main" id="{F0CA206B-EED1-4934-BAF7-1E5232F602E8}"/>
               </a:ext>
             </a:extLst>
           </p:cNvPr>
@@ -25600,7 +25600,7 @@
           <p:cNvPr id="83" name="">
             <a:extLst xmlns:a="http://schemas.openxmlformats.org/drawingml/2006/main">
               <a:ext uri="{FF2B5EF4-FFF2-40B4-BE49-F238E27FC236}">
-                <a16:creationId xmlns:a16="http://schemas.microsoft.com/office/drawing/2014/main" id="{20822BB3-E933-47C3-8AAE-71BC3EAE1A03}"/>
+                <a16:creationId xmlns:a16="http://schemas.microsoft.com/office/drawing/2014/main" id="{06B4C5DA-8875-4627-968C-3BEF7299F8CC}"/>
               </a:ext>
             </a:extLst>
           </p:cNvPr>
@@ -25652,7 +25652,7 @@
           <p:cNvPr id="84" name="">
             <a:extLst xmlns:a="http://schemas.openxmlformats.org/drawingml/2006/main">
               <a:ext uri="{FF2B5EF4-FFF2-40B4-BE49-F238E27FC236}">
-                <a16:creationId xmlns:a16="http://schemas.microsoft.com/office/drawing/2014/main" id="{BC30339E-6A38-4632-B714-32FCCC0BE7C0}"/>
+                <a16:creationId xmlns:a16="http://schemas.microsoft.com/office/drawing/2014/main" id="{B67B640C-0C49-43C3-940F-B4128D1E7DDE}"/>
               </a:ext>
             </a:extLst>
           </p:cNvPr>
@@ -25704,7 +25704,7 @@
           <p:cNvPr id="85" name="">
             <a:extLst xmlns:a="http://schemas.openxmlformats.org/drawingml/2006/main">
               <a:ext uri="{FF2B5EF4-FFF2-40B4-BE49-F238E27FC236}">
-                <a16:creationId xmlns:a16="http://schemas.microsoft.com/office/drawing/2014/main" id="{4339EF27-5877-4780-B047-8EE7AE8CF9C8}"/>
+                <a16:creationId xmlns:a16="http://schemas.microsoft.com/office/drawing/2014/main" id="{2EB31403-F2CC-45EB-9FC5-AAE720C7CCCB}"/>
               </a:ext>
             </a:extLst>
           </p:cNvPr>
@@ -25756,7 +25756,7 @@
           <p:cNvPr id="86" name="">
             <a:extLst xmlns:a="http://schemas.openxmlformats.org/drawingml/2006/main">
               <a:ext uri="{FF2B5EF4-FFF2-40B4-BE49-F238E27FC236}">
-                <a16:creationId xmlns:a16="http://schemas.microsoft.com/office/drawing/2014/main" id="{33ED6D1D-3334-4BCE-9C4B-0DA60F49A475}"/>
+                <a16:creationId xmlns:a16="http://schemas.microsoft.com/office/drawing/2014/main" id="{EF86573D-7955-4BEB-9FF1-D86C99308E82}"/>
               </a:ext>
             </a:extLst>
           </p:cNvPr>
@@ -25808,7 +25808,7 @@
           <p:cNvPr id="87" name="">
             <a:extLst xmlns:a="http://schemas.openxmlformats.org/drawingml/2006/main">
               <a:ext uri="{FF2B5EF4-FFF2-40B4-BE49-F238E27FC236}">
-                <a16:creationId xmlns:a16="http://schemas.microsoft.com/office/drawing/2014/main" id="{837E083F-4F47-4C91-A788-6A654272F97B}"/>
+                <a16:creationId xmlns:a16="http://schemas.microsoft.com/office/drawing/2014/main" id="{DC34B6E4-DD61-4CA3-886A-D8F848E766AA}"/>
               </a:ext>
             </a:extLst>
           </p:cNvPr>
@@ -25839,7 +25839,7 @@
           <p:cNvPr id="88" name="">
             <a:extLst xmlns:a="http://schemas.openxmlformats.org/drawingml/2006/main">
               <a:ext uri="{FF2B5EF4-FFF2-40B4-BE49-F238E27FC236}">
-                <a16:creationId xmlns:a16="http://schemas.microsoft.com/office/drawing/2014/main" id="{49AD91C3-DE81-4A53-AB21-69D357A104E0}"/>
+                <a16:creationId xmlns:a16="http://schemas.microsoft.com/office/drawing/2014/main" id="{8D82EEC2-40CC-45F6-B791-4EFB4733808A}"/>
               </a:ext>
             </a:extLst>
           </p:cNvPr>
@@ -25870,7 +25870,7 @@
           <p:cNvPr id="89" name="">
             <a:extLst xmlns:a="http://schemas.openxmlformats.org/drawingml/2006/main">
               <a:ext uri="{FF2B5EF4-FFF2-40B4-BE49-F238E27FC236}">
-                <a16:creationId xmlns:a16="http://schemas.microsoft.com/office/drawing/2014/main" id="{97939E10-4158-4373-9AC8-0FECE6EEC645}"/>
+                <a16:creationId xmlns:a16="http://schemas.microsoft.com/office/drawing/2014/main" id="{F5B2795D-1377-4C35-B92B-5055102EF35B}"/>
               </a:ext>
             </a:extLst>
           </p:cNvPr>
@@ -25922,7 +25922,7 @@
           <p:cNvPr id="90" name="">
             <a:extLst xmlns:a="http://schemas.openxmlformats.org/drawingml/2006/main">
               <a:ext uri="{FF2B5EF4-FFF2-40B4-BE49-F238E27FC236}">
-                <a16:creationId xmlns:a16="http://schemas.microsoft.com/office/drawing/2014/main" id="{9FBCA850-05EA-4610-81F5-8088A516AA28}"/>
+                <a16:creationId xmlns:a16="http://schemas.microsoft.com/office/drawing/2014/main" id="{F1D3420A-B84D-4939-BD43-02F007B13F6E}"/>
               </a:ext>
             </a:extLst>
           </p:cNvPr>
@@ -25974,7 +25974,7 @@
           <p:cNvPr id="91" name="">
             <a:extLst xmlns:a="http://schemas.openxmlformats.org/drawingml/2006/main">
               <a:ext uri="{FF2B5EF4-FFF2-40B4-BE49-F238E27FC236}">
-                <a16:creationId xmlns:a16="http://schemas.microsoft.com/office/drawing/2014/main" id="{A11E465D-EBE6-468C-8A52-63551154590F}"/>
+                <a16:creationId xmlns:a16="http://schemas.microsoft.com/office/drawing/2014/main" id="{3BFF54C9-A14D-459F-881A-4C69E355C5B6}"/>
               </a:ext>
             </a:extLst>
           </p:cNvPr>
@@ -26026,7 +26026,7 @@
           <p:cNvPr id="92" name="">
             <a:extLst xmlns:a="http://schemas.openxmlformats.org/drawingml/2006/main">
               <a:ext uri="{FF2B5EF4-FFF2-40B4-BE49-F238E27FC236}">
-                <a16:creationId xmlns:a16="http://schemas.microsoft.com/office/drawing/2014/main" id="{E2624324-D788-450B-9A5F-F2F88279D1B9}"/>
+                <a16:creationId xmlns:a16="http://schemas.microsoft.com/office/drawing/2014/main" id="{F36B2718-E56A-4F15-BBAE-E26F679688BA}"/>
               </a:ext>
             </a:extLst>
           </p:cNvPr>
@@ -26078,7 +26078,7 @@
           <p:cNvPr id="93" name="">
             <a:extLst xmlns:a="http://schemas.openxmlformats.org/drawingml/2006/main">
               <a:ext uri="{FF2B5EF4-FFF2-40B4-BE49-F238E27FC236}">
-                <a16:creationId xmlns:a16="http://schemas.microsoft.com/office/drawing/2014/main" id="{ACDF3675-C54E-4E7D-B543-BF301ACE100E}"/>
+                <a16:creationId xmlns:a16="http://schemas.microsoft.com/office/drawing/2014/main" id="{6D1E62A8-61E4-4B77-85CA-4F10503AD40E}"/>
               </a:ext>
             </a:extLst>
           </p:cNvPr>
@@ -26130,7 +26130,7 @@
           <p:cNvPr id="94" name="">
             <a:extLst xmlns:a="http://schemas.openxmlformats.org/drawingml/2006/main">
               <a:ext uri="{FF2B5EF4-FFF2-40B4-BE49-F238E27FC236}">
-                <a16:creationId xmlns:a16="http://schemas.microsoft.com/office/drawing/2014/main" id="{4DC3A720-6595-4AC6-9E65-BB3204302A46}"/>
+                <a16:creationId xmlns:a16="http://schemas.microsoft.com/office/drawing/2014/main" id="{42C913AD-1C79-4FAE-AD66-CC998FD1A8D5}"/>
               </a:ext>
             </a:extLst>
           </p:cNvPr>
@@ -26182,7 +26182,7 @@
           <p:cNvPr id="95" name="">
             <a:extLst xmlns:a="http://schemas.openxmlformats.org/drawingml/2006/main">
               <a:ext uri="{FF2B5EF4-FFF2-40B4-BE49-F238E27FC236}">
-                <a16:creationId xmlns:a16="http://schemas.microsoft.com/office/drawing/2014/main" id="{9D4803AB-C40B-45B6-B2BD-D5F40698A83B}"/>
+                <a16:creationId xmlns:a16="http://schemas.microsoft.com/office/drawing/2014/main" id="{5BAD6E83-D128-4C9F-958E-1F85609F5F3C}"/>
               </a:ext>
             </a:extLst>
           </p:cNvPr>
@@ -26234,7 +26234,7 @@
           <p:cNvPr id="96" name="">
             <a:extLst xmlns:a="http://schemas.openxmlformats.org/drawingml/2006/main">
               <a:ext uri="{FF2B5EF4-FFF2-40B4-BE49-F238E27FC236}">
-                <a16:creationId xmlns:a16="http://schemas.microsoft.com/office/drawing/2014/main" id="{173AA737-37A8-4463-BDFE-EA4DFB4ED1AB}"/>
+                <a16:creationId xmlns:a16="http://schemas.microsoft.com/office/drawing/2014/main" id="{8F97DAF0-3844-4209-B5EB-0578E79FEF5F}"/>
               </a:ext>
             </a:extLst>
           </p:cNvPr>
@@ -26286,7 +26286,7 @@
           <p:cNvPr id="97" name="">
             <a:extLst xmlns:a="http://schemas.openxmlformats.org/drawingml/2006/main">
               <a:ext uri="{FF2B5EF4-FFF2-40B4-BE49-F238E27FC236}">
-                <a16:creationId xmlns:a16="http://schemas.microsoft.com/office/drawing/2014/main" id="{C033AD28-DF4B-4706-8F9B-6767E3A42C8D}"/>
+                <a16:creationId xmlns:a16="http://schemas.microsoft.com/office/drawing/2014/main" id="{11617365-8237-40D9-9BF0-FDCDA036F22F}"/>
               </a:ext>
             </a:extLst>
           </p:cNvPr>
@@ -26317,7 +26317,7 @@
           <p:cNvPr id="98" name="">
             <a:extLst xmlns:a="http://schemas.openxmlformats.org/drawingml/2006/main">
               <a:ext uri="{FF2B5EF4-FFF2-40B4-BE49-F238E27FC236}">
-                <a16:creationId xmlns:a16="http://schemas.microsoft.com/office/drawing/2014/main" id="{BA7FCBAA-BACF-48F3-850F-4DC20180CECA}"/>
+                <a16:creationId xmlns:a16="http://schemas.microsoft.com/office/drawing/2014/main" id="{15D13791-2ACC-457E-A8B7-7511AEC14D31}"/>
               </a:ext>
             </a:extLst>
           </p:cNvPr>
@@ -26369,7 +26369,7 @@
           <p:cNvPr id="99" name="">
             <a:extLst xmlns:a="http://schemas.openxmlformats.org/drawingml/2006/main">
               <a:ext uri="{FF2B5EF4-FFF2-40B4-BE49-F238E27FC236}">
-                <a16:creationId xmlns:a16="http://schemas.microsoft.com/office/drawing/2014/main" id="{DB8CC4C5-9799-43F2-AA5D-1EC0DECA9CE0}"/>
+                <a16:creationId xmlns:a16="http://schemas.microsoft.com/office/drawing/2014/main" id="{C7DC4B50-24AE-49B3-A466-81A47C4F3776}"/>
               </a:ext>
             </a:extLst>
           </p:cNvPr>
@@ -26421,7 +26421,7 @@
           <p:cNvPr id="100" name="">
             <a:extLst xmlns:a="http://schemas.openxmlformats.org/drawingml/2006/main">
               <a:ext uri="{FF2B5EF4-FFF2-40B4-BE49-F238E27FC236}">
-                <a16:creationId xmlns:a16="http://schemas.microsoft.com/office/drawing/2014/main" id="{DC996F2D-C337-440A-BC02-C2B24959F7A7}"/>
+                <a16:creationId xmlns:a16="http://schemas.microsoft.com/office/drawing/2014/main" id="{0ED2CD65-F52C-4F8B-B6D7-990B3150098F}"/>
               </a:ext>
             </a:extLst>
           </p:cNvPr>
@@ -26473,7 +26473,7 @@
           <p:cNvPr id="101" name="">
             <a:extLst xmlns:a="http://schemas.openxmlformats.org/drawingml/2006/main">
               <a:ext uri="{FF2B5EF4-FFF2-40B4-BE49-F238E27FC236}">
-                <a16:creationId xmlns:a16="http://schemas.microsoft.com/office/drawing/2014/main" id="{A3FB2C46-EBA8-46DC-AFA9-9965BD718DAE}"/>
+                <a16:creationId xmlns:a16="http://schemas.microsoft.com/office/drawing/2014/main" id="{D51B8F57-5C72-427F-A4FD-7EF918D3A315}"/>
               </a:ext>
             </a:extLst>
           </p:cNvPr>
@@ -26525,7 +26525,7 @@
           <p:cNvPr id="102" name="">
             <a:extLst xmlns:a="http://schemas.openxmlformats.org/drawingml/2006/main">
               <a:ext uri="{FF2B5EF4-FFF2-40B4-BE49-F238E27FC236}">
-                <a16:creationId xmlns:a16="http://schemas.microsoft.com/office/drawing/2014/main" id="{BF607A56-57BA-4E5C-A1D4-71585CD072C7}"/>
+                <a16:creationId xmlns:a16="http://schemas.microsoft.com/office/drawing/2014/main" id="{04FE9062-78D1-466C-B5B2-CCAAD374AED5}"/>
               </a:ext>
             </a:extLst>
           </p:cNvPr>
@@ -26577,7 +26577,7 @@
           <p:cNvPr id="103" name="">
             <a:extLst xmlns:a="http://schemas.openxmlformats.org/drawingml/2006/main">
               <a:ext uri="{FF2B5EF4-FFF2-40B4-BE49-F238E27FC236}">
-                <a16:creationId xmlns:a16="http://schemas.microsoft.com/office/drawing/2014/main" id="{E944CE5C-3F4D-4412-94FE-4B11BF8E014F}"/>
+                <a16:creationId xmlns:a16="http://schemas.microsoft.com/office/drawing/2014/main" id="{726448F7-47A1-4E6F-8AF1-FA347964FDB1}"/>
               </a:ext>
             </a:extLst>
           </p:cNvPr>
@@ -26629,7 +26629,7 @@
           <p:cNvPr id="104" name="">
             <a:extLst xmlns:a="http://schemas.openxmlformats.org/drawingml/2006/main">
               <a:ext uri="{FF2B5EF4-FFF2-40B4-BE49-F238E27FC236}">
-                <a16:creationId xmlns:a16="http://schemas.microsoft.com/office/drawing/2014/main" id="{15D90A93-BBD3-4BCC-9157-A2B2D69C6D1E}"/>
+                <a16:creationId xmlns:a16="http://schemas.microsoft.com/office/drawing/2014/main" id="{A0CBCE15-9F25-4A51-8521-9091310EBF0E}"/>
               </a:ext>
             </a:extLst>
           </p:cNvPr>
@@ -26681,7 +26681,7 @@
           <p:cNvPr id="105" name="">
             <a:extLst xmlns:a="http://schemas.openxmlformats.org/drawingml/2006/main">
               <a:ext uri="{FF2B5EF4-FFF2-40B4-BE49-F238E27FC236}">
-                <a16:creationId xmlns:a16="http://schemas.microsoft.com/office/drawing/2014/main" id="{3B34838E-37E2-415A-890A-6E970A6E6BCE}"/>
+                <a16:creationId xmlns:a16="http://schemas.microsoft.com/office/drawing/2014/main" id="{B1777566-2AD2-4C42-ADC7-A9A6596B7BB7}"/>
               </a:ext>
             </a:extLst>
           </p:cNvPr>
@@ -26733,7 +26733,7 @@
           <p:cNvPr id="106" name="">
             <a:extLst xmlns:a="http://schemas.openxmlformats.org/drawingml/2006/main">
               <a:ext uri="{FF2B5EF4-FFF2-40B4-BE49-F238E27FC236}">
-                <a16:creationId xmlns:a16="http://schemas.microsoft.com/office/drawing/2014/main" id="{1720B240-D9C8-461B-B344-59E05A11582A}"/>
+                <a16:creationId xmlns:a16="http://schemas.microsoft.com/office/drawing/2014/main" id="{742D5F4B-8A61-45A5-88F6-9C049656079C}"/>
               </a:ext>
             </a:extLst>
           </p:cNvPr>
@@ -26764,7 +26764,7 @@
           <p:cNvPr id="107" name="">
             <a:extLst xmlns:a="http://schemas.openxmlformats.org/drawingml/2006/main">
               <a:ext uri="{FF2B5EF4-FFF2-40B4-BE49-F238E27FC236}">
-                <a16:creationId xmlns:a16="http://schemas.microsoft.com/office/drawing/2014/main" id="{776810F0-D4DD-46FE-AACC-1729358C0CD1}"/>
+                <a16:creationId xmlns:a16="http://schemas.microsoft.com/office/drawing/2014/main" id="{2C488558-AA12-4DE0-9BA0-FCC64412AA96}"/>
               </a:ext>
             </a:extLst>
           </p:cNvPr>
@@ -26795,7 +26795,7 @@
           <p:cNvPr id="108" name="">
             <a:extLst xmlns:a="http://schemas.openxmlformats.org/drawingml/2006/main">
               <a:ext uri="{FF2B5EF4-FFF2-40B4-BE49-F238E27FC236}">
-                <a16:creationId xmlns:a16="http://schemas.microsoft.com/office/drawing/2014/main" id="{73288134-F71D-484A-86AB-E200011C7EE0}"/>
+                <a16:creationId xmlns:a16="http://schemas.microsoft.com/office/drawing/2014/main" id="{BD1FA285-FA72-43EA-A3AF-B0964FE66EC9}"/>
               </a:ext>
             </a:extLst>
           </p:cNvPr>
@@ -26847,7 +26847,7 @@
           <p:cNvPr id="109" name="">
             <a:extLst xmlns:a="http://schemas.openxmlformats.org/drawingml/2006/main">
               <a:ext uri="{FF2B5EF4-FFF2-40B4-BE49-F238E27FC236}">
-                <a16:creationId xmlns:a16="http://schemas.microsoft.com/office/drawing/2014/main" id="{BDBAB4E4-F058-4421-9EB0-E8ADFBF31CF1}"/>
+                <a16:creationId xmlns:a16="http://schemas.microsoft.com/office/drawing/2014/main" id="{6183BF76-7E3D-48CF-8958-D812AA593038}"/>
               </a:ext>
             </a:extLst>
           </p:cNvPr>
@@ -26899,7 +26899,7 @@
           <p:cNvPr id="110" name="">
             <a:extLst xmlns:a="http://schemas.openxmlformats.org/drawingml/2006/main">
               <a:ext uri="{FF2B5EF4-FFF2-40B4-BE49-F238E27FC236}">
-                <a16:creationId xmlns:a16="http://schemas.microsoft.com/office/drawing/2014/main" id="{E34099E7-7694-4339-A89A-4D6C70A1E999}"/>
+                <a16:creationId xmlns:a16="http://schemas.microsoft.com/office/drawing/2014/main" id="{7AEA55BE-283B-4E72-9D25-622AA807DBF0}"/>
               </a:ext>
             </a:extLst>
           </p:cNvPr>
@@ -26951,7 +26951,7 @@
           <p:cNvPr id="111" name="">
             <a:extLst xmlns:a="http://schemas.openxmlformats.org/drawingml/2006/main">
               <a:ext uri="{FF2B5EF4-FFF2-40B4-BE49-F238E27FC236}">
-                <a16:creationId xmlns:a16="http://schemas.microsoft.com/office/drawing/2014/main" id="{E4AF3D7D-90D6-4C5D-BA98-4A7AF8D103F4}"/>
+                <a16:creationId xmlns:a16="http://schemas.microsoft.com/office/drawing/2014/main" id="{438C7DEB-D7D8-4096-A78C-387B764FAB84}"/>
               </a:ext>
             </a:extLst>
           </p:cNvPr>
@@ -27003,7 +27003,7 @@
           <p:cNvPr id="112" name="">
             <a:extLst xmlns:a="http://schemas.openxmlformats.org/drawingml/2006/main">
               <a:ext uri="{FF2B5EF4-FFF2-40B4-BE49-F238E27FC236}">
-                <a16:creationId xmlns:a16="http://schemas.microsoft.com/office/drawing/2014/main" id="{12474076-2E12-441F-BADA-81CD398D64D3}"/>
+                <a16:creationId xmlns:a16="http://schemas.microsoft.com/office/drawing/2014/main" id="{C8464D81-E7E9-41A6-849D-04CF79968747}"/>
               </a:ext>
             </a:extLst>
           </p:cNvPr>
@@ -27055,7 +27055,7 @@
           <p:cNvPr id="113" name="">
             <a:extLst xmlns:a="http://schemas.openxmlformats.org/drawingml/2006/main">
               <a:ext uri="{FF2B5EF4-FFF2-40B4-BE49-F238E27FC236}">
-                <a16:creationId xmlns:a16="http://schemas.microsoft.com/office/drawing/2014/main" id="{9045333F-24B7-4A33-BD88-1884A028FF41}"/>
+                <a16:creationId xmlns:a16="http://schemas.microsoft.com/office/drawing/2014/main" id="{C4504B09-4426-4E4B-9E87-8C1A0085C253}"/>
               </a:ext>
             </a:extLst>
           </p:cNvPr>
@@ -27107,7 +27107,7 @@
           <p:cNvPr id="114" name="">
             <a:extLst xmlns:a="http://schemas.openxmlformats.org/drawingml/2006/main">
               <a:ext uri="{FF2B5EF4-FFF2-40B4-BE49-F238E27FC236}">
-                <a16:creationId xmlns:a16="http://schemas.microsoft.com/office/drawing/2014/main" id="{9E1B47B6-FB9D-490E-8914-3DE5B5AD0CE6}"/>
+                <a16:creationId xmlns:a16="http://schemas.microsoft.com/office/drawing/2014/main" id="{0E61145C-30CF-4206-9559-89618BCF8502}"/>
               </a:ext>
             </a:extLst>
           </p:cNvPr>
@@ -27159,7 +27159,7 @@
           <p:cNvPr id="115" name="">
             <a:extLst xmlns:a="http://schemas.openxmlformats.org/drawingml/2006/main">
               <a:ext uri="{FF2B5EF4-FFF2-40B4-BE49-F238E27FC236}">
-                <a16:creationId xmlns:a16="http://schemas.microsoft.com/office/drawing/2014/main" id="{B580D46E-F2E5-453E-955F-8648E48DA149}"/>
+                <a16:creationId xmlns:a16="http://schemas.microsoft.com/office/drawing/2014/main" id="{02931459-5063-4587-B820-427DAAF96D9A}"/>
               </a:ext>
             </a:extLst>
           </p:cNvPr>
@@ -27211,7 +27211,7 @@
           <p:cNvPr id="116" name="">
             <a:extLst xmlns:a="http://schemas.openxmlformats.org/drawingml/2006/main">
               <a:ext uri="{FF2B5EF4-FFF2-40B4-BE49-F238E27FC236}">
-                <a16:creationId xmlns:a16="http://schemas.microsoft.com/office/drawing/2014/main" id="{F64F8838-2D2F-492C-A76C-2C304B43B82C}"/>
+                <a16:creationId xmlns:a16="http://schemas.microsoft.com/office/drawing/2014/main" id="{A5964AE3-9C7B-43E4-BB0F-CF8A095D79E1}"/>
               </a:ext>
             </a:extLst>
           </p:cNvPr>
@@ -27242,7 +27242,7 @@
           <p:cNvPr id="117" name="">
             <a:extLst xmlns:a="http://schemas.openxmlformats.org/drawingml/2006/main">
               <a:ext uri="{FF2B5EF4-FFF2-40B4-BE49-F238E27FC236}">
-                <a16:creationId xmlns:a16="http://schemas.microsoft.com/office/drawing/2014/main" id="{8854C1E5-9207-4B19-BC16-7FD2FE4599AA}"/>
+                <a16:creationId xmlns:a16="http://schemas.microsoft.com/office/drawing/2014/main" id="{538923F2-0F56-461B-A0F9-53F9E3E810A3}"/>
               </a:ext>
             </a:extLst>
           </p:cNvPr>
@@ -27294,7 +27294,7 @@
           <p:cNvPr id="118" name="">
             <a:extLst xmlns:a="http://schemas.openxmlformats.org/drawingml/2006/main">
               <a:ext uri="{FF2B5EF4-FFF2-40B4-BE49-F238E27FC236}">
-                <a16:creationId xmlns:a16="http://schemas.microsoft.com/office/drawing/2014/main" id="{BC1FC9B8-F209-43F9-966B-F65E09CAEF39}"/>
+                <a16:creationId xmlns:a16="http://schemas.microsoft.com/office/drawing/2014/main" id="{8B1A5E76-1513-482B-8443-0C16A6CA8CDF}"/>
               </a:ext>
             </a:extLst>
           </p:cNvPr>
@@ -27346,7 +27346,7 @@
           <p:cNvPr id="119" name="">
             <a:extLst xmlns:a="http://schemas.openxmlformats.org/drawingml/2006/main">
               <a:ext uri="{FF2B5EF4-FFF2-40B4-BE49-F238E27FC236}">
-                <a16:creationId xmlns:a16="http://schemas.microsoft.com/office/drawing/2014/main" id="{A95C3E9E-234C-4152-9D62-B9759B4040CC}"/>
+                <a16:creationId xmlns:a16="http://schemas.microsoft.com/office/drawing/2014/main" id="{A2CBB237-2602-4494-A757-F9BB195711B1}"/>
               </a:ext>
             </a:extLst>
           </p:cNvPr>
@@ -27398,7 +27398,7 @@
           <p:cNvPr id="120" name="">
             <a:extLst xmlns:a="http://schemas.openxmlformats.org/drawingml/2006/main">
               <a:ext uri="{FF2B5EF4-FFF2-40B4-BE49-F238E27FC236}">
-                <a16:creationId xmlns:a16="http://schemas.microsoft.com/office/drawing/2014/main" id="{46028DE8-00EF-46C4-BA24-63A543494D9B}"/>
+                <a16:creationId xmlns:a16="http://schemas.microsoft.com/office/drawing/2014/main" id="{C320DCE5-D93B-421B-97F9-E2814C335203}"/>
               </a:ext>
             </a:extLst>
           </p:cNvPr>
@@ -27450,7 +27450,7 @@
           <p:cNvPr id="121" name="">
             <a:extLst xmlns:a="http://schemas.openxmlformats.org/drawingml/2006/main">
               <a:ext uri="{FF2B5EF4-FFF2-40B4-BE49-F238E27FC236}">
-                <a16:creationId xmlns:a16="http://schemas.microsoft.com/office/drawing/2014/main" id="{F22FFF89-CDC9-4A9A-9E8A-21B58ED7D108}"/>
+                <a16:creationId xmlns:a16="http://schemas.microsoft.com/office/drawing/2014/main" id="{FCF7B410-F3EA-40C1-B917-52ED821981D1}"/>
               </a:ext>
             </a:extLst>
           </p:cNvPr>
@@ -27502,7 +27502,7 @@
           <p:cNvPr id="122" name="">
             <a:extLst xmlns:a="http://schemas.openxmlformats.org/drawingml/2006/main">
               <a:ext uri="{FF2B5EF4-FFF2-40B4-BE49-F238E27FC236}">
-                <a16:creationId xmlns:a16="http://schemas.microsoft.com/office/drawing/2014/main" id="{3B254C51-E47E-473A-9AF7-73ED46BA2AAA}"/>
+                <a16:creationId xmlns:a16="http://schemas.microsoft.com/office/drawing/2014/main" id="{FB4939B3-C17F-4B06-9577-ADE92C631F64}"/>
               </a:ext>
             </a:extLst>
           </p:cNvPr>
@@ -27554,7 +27554,7 @@
           <p:cNvPr id="123" name="">
             <a:extLst xmlns:a="http://schemas.openxmlformats.org/drawingml/2006/main">
               <a:ext uri="{FF2B5EF4-FFF2-40B4-BE49-F238E27FC236}">
-                <a16:creationId xmlns:a16="http://schemas.microsoft.com/office/drawing/2014/main" id="{FACB4BF4-7E88-4966-9422-14272F6A95F2}"/>
+                <a16:creationId xmlns:a16="http://schemas.microsoft.com/office/drawing/2014/main" id="{46C07605-3003-45CE-B670-C91633546B50}"/>
               </a:ext>
             </a:extLst>
           </p:cNvPr>
@@ -27606,7 +27606,7 @@
           <p:cNvPr id="124" name="">
             <a:extLst xmlns:a="http://schemas.openxmlformats.org/drawingml/2006/main">
               <a:ext uri="{FF2B5EF4-FFF2-40B4-BE49-F238E27FC236}">
-                <a16:creationId xmlns:a16="http://schemas.microsoft.com/office/drawing/2014/main" id="{B53202E0-8DF2-421E-B5A2-01EB688ADF8B}"/>
+                <a16:creationId xmlns:a16="http://schemas.microsoft.com/office/drawing/2014/main" id="{33C8E9C9-D954-4CF9-9998-BEF92F68D09C}"/>
               </a:ext>
             </a:extLst>
           </p:cNvPr>
@@ -27658,7 +27658,7 @@
           <p:cNvPr id="125" name="">
             <a:extLst xmlns:a="http://schemas.openxmlformats.org/drawingml/2006/main">
               <a:ext uri="{FF2B5EF4-FFF2-40B4-BE49-F238E27FC236}">
-                <a16:creationId xmlns:a16="http://schemas.microsoft.com/office/drawing/2014/main" id="{D413C17E-5A50-43B7-8289-0DBEB5B1665E}"/>
+                <a16:creationId xmlns:a16="http://schemas.microsoft.com/office/drawing/2014/main" id="{2EDB0C44-5181-462B-9D03-A90AE5ABD1AF}"/>
               </a:ext>
             </a:extLst>
           </p:cNvPr>
@@ -27689,7 +27689,7 @@
           <p:cNvPr id="126" name="">
             <a:extLst xmlns:a="http://schemas.openxmlformats.org/drawingml/2006/main">
               <a:ext uri="{FF2B5EF4-FFF2-40B4-BE49-F238E27FC236}">
-                <a16:creationId xmlns:a16="http://schemas.microsoft.com/office/drawing/2014/main" id="{1E63F6ED-79D1-40CA-BDB1-D7A215BD8384}"/>
+                <a16:creationId xmlns:a16="http://schemas.microsoft.com/office/drawing/2014/main" id="{CE79595C-1910-4228-9936-DBDF97F2D83A}"/>
               </a:ext>
             </a:extLst>
           </p:cNvPr>
@@ -27720,7 +27720,7 @@
           <p:cNvPr id="127" name="">
             <a:extLst xmlns:a="http://schemas.openxmlformats.org/drawingml/2006/main">
               <a:ext uri="{FF2B5EF4-FFF2-40B4-BE49-F238E27FC236}">
-                <a16:creationId xmlns:a16="http://schemas.microsoft.com/office/drawing/2014/main" id="{73289EA9-CD23-4F46-8A40-27757E4B3148}"/>
+                <a16:creationId xmlns:a16="http://schemas.microsoft.com/office/drawing/2014/main" id="{E16E21C1-A29A-4EB6-8161-3FEEE55CD0A3}"/>
               </a:ext>
             </a:extLst>
           </p:cNvPr>
@@ -27772,7 +27772,7 @@
           <p:cNvPr id="128" name="">
             <a:extLst xmlns:a="http://schemas.openxmlformats.org/drawingml/2006/main">
               <a:ext uri="{FF2B5EF4-FFF2-40B4-BE49-F238E27FC236}">
-                <a16:creationId xmlns:a16="http://schemas.microsoft.com/office/drawing/2014/main" id="{E1091136-3CB8-4123-A314-1DA0B933E7E4}"/>
+                <a16:creationId xmlns:a16="http://schemas.microsoft.com/office/drawing/2014/main" id="{6E3A4E4D-7DEA-4A6D-A3FD-6EC4FC668D6D}"/>
               </a:ext>
             </a:extLst>
           </p:cNvPr>
@@ -27824,7 +27824,7 @@
           <p:cNvPr id="129" name="">
             <a:extLst xmlns:a="http://schemas.openxmlformats.org/drawingml/2006/main">
               <a:ext uri="{FF2B5EF4-FFF2-40B4-BE49-F238E27FC236}">
-                <a16:creationId xmlns:a16="http://schemas.microsoft.com/office/drawing/2014/main" id="{7CE6B011-4478-42E9-8E8E-133D3735E723}"/>
+                <a16:creationId xmlns:a16="http://schemas.microsoft.com/office/drawing/2014/main" id="{0A4245CF-41DA-433B-B107-D7FD62AAB0B4}"/>
               </a:ext>
             </a:extLst>
           </p:cNvPr>
@@ -27876,7 +27876,7 @@
           <p:cNvPr id="130" name="">
             <a:extLst xmlns:a="http://schemas.openxmlformats.org/drawingml/2006/main">
               <a:ext uri="{FF2B5EF4-FFF2-40B4-BE49-F238E27FC236}">
-                <a16:creationId xmlns:a16="http://schemas.microsoft.com/office/drawing/2014/main" id="{3AAE5C94-4ABB-43E4-9098-AC44BBEEB3E7}"/>
+                <a16:creationId xmlns:a16="http://schemas.microsoft.com/office/drawing/2014/main" id="{E47D8812-1753-437D-9CA5-B207B83BB35A}"/>
               </a:ext>
             </a:extLst>
           </p:cNvPr>
@@ -27928,7 +27928,7 @@
           <p:cNvPr id="131" name="">
             <a:extLst xmlns:a="http://schemas.openxmlformats.org/drawingml/2006/main">
               <a:ext uri="{FF2B5EF4-FFF2-40B4-BE49-F238E27FC236}">
-                <a16:creationId xmlns:a16="http://schemas.microsoft.com/office/drawing/2014/main" id="{BF63D73C-2DF2-4A10-9A1B-BFA2958A8607}"/>
+                <a16:creationId xmlns:a16="http://schemas.microsoft.com/office/drawing/2014/main" id="{75CC5B12-3B6C-4FA9-A749-302104FC7161}"/>
               </a:ext>
             </a:extLst>
           </p:cNvPr>
@@ -27980,7 +27980,7 @@
           <p:cNvPr id="132" name="">
             <a:extLst xmlns:a="http://schemas.openxmlformats.org/drawingml/2006/main">
               <a:ext uri="{FF2B5EF4-FFF2-40B4-BE49-F238E27FC236}">
-                <a16:creationId xmlns:a16="http://schemas.microsoft.com/office/drawing/2014/main" id="{DCC3294B-BABC-41F6-8541-B1C152FBFCC1}"/>
+                <a16:creationId xmlns:a16="http://schemas.microsoft.com/office/drawing/2014/main" id="{95C1EA87-9469-4CB2-837C-23FA55428EB1}"/>
               </a:ext>
             </a:extLst>
           </p:cNvPr>
@@ -28032,7 +28032,7 @@
           <p:cNvPr id="133" name="">
             <a:extLst xmlns:a="http://schemas.openxmlformats.org/drawingml/2006/main">
               <a:ext uri="{FF2B5EF4-FFF2-40B4-BE49-F238E27FC236}">
-                <a16:creationId xmlns:a16="http://schemas.microsoft.com/office/drawing/2014/main" id="{7969DA91-9BCF-4357-9423-816D1DE9E30C}"/>
+                <a16:creationId xmlns:a16="http://schemas.microsoft.com/office/drawing/2014/main" id="{2D69C8B3-C580-4DA5-AABE-39A00C592973}"/>
               </a:ext>
             </a:extLst>
           </p:cNvPr>
@@ -28084,7 +28084,7 @@
           <p:cNvPr id="134" name="">
             <a:extLst xmlns:a="http://schemas.openxmlformats.org/drawingml/2006/main">
               <a:ext uri="{FF2B5EF4-FFF2-40B4-BE49-F238E27FC236}">
-                <a16:creationId xmlns:a16="http://schemas.microsoft.com/office/drawing/2014/main" id="{1CD48A32-0BD0-493B-94A3-16252425440B}"/>
+                <a16:creationId xmlns:a16="http://schemas.microsoft.com/office/drawing/2014/main" id="{B981BF8B-A8A2-4E7B-BE2E-2A406D9ACD32}"/>
               </a:ext>
             </a:extLst>
           </p:cNvPr>
@@ -28134,7 +28134,7 @@
     </p:spTree>
     <p:extLst>
       <p:ext uri="{BB962C8B-B14F-4D97-AF65-F5344CB8AC3E}">
-        <p14:creationId xmlns:p14="http://schemas.microsoft.com/office/powerpoint/2010/main" val="1701254635"/>
+        <p14:creationId xmlns:p14="http://schemas.microsoft.com/office/powerpoint/2010/main" val="696112911"/>
       </p:ext>
     </p:extLst>
   </p:cSld>
@@ -28165,7 +28165,7 @@
           <p:cNvPr id="9" name="">
             <a:extLst xmlns:a="http://schemas.openxmlformats.org/drawingml/2006/main">
               <a:ext uri="{FF2B5EF4-FFF2-40B4-BE49-F238E27FC236}">
-                <a16:creationId xmlns:a16="http://schemas.microsoft.com/office/drawing/2014/main" id="{4872C703-A35D-4F28-A10C-A58D2A7CBD04}"/>
+                <a16:creationId xmlns:a16="http://schemas.microsoft.com/office/drawing/2014/main" id="{B89EA634-C5BC-4064-9761-1B67417B16D7}"/>
               </a:ext>
             </a:extLst>
           </p:cNvPr>
@@ -28198,7 +28198,7 @@
           <p:cNvPr id="2" name="">
             <a:extLst xmlns:a="http://schemas.openxmlformats.org/drawingml/2006/main">
               <a:ext uri="{FF2B5EF4-FFF2-40B4-BE49-F238E27FC236}">
-                <a16:creationId xmlns:a16="http://schemas.microsoft.com/office/drawing/2014/main" id="{3B9A9759-3D07-4135-B41F-093DA9A4E4D3}"/>
+                <a16:creationId xmlns:a16="http://schemas.microsoft.com/office/drawing/2014/main" id="{1A42BDA8-DBD3-425B-BC86-8907F039C4F9}"/>
               </a:ext>
             </a:extLst>
           </p:cNvPr>
@@ -28229,7 +28229,7 @@
           <p:cNvPr id="3" name="">
             <a:extLst xmlns:a="http://schemas.openxmlformats.org/drawingml/2006/main">
               <a:ext uri="{FF2B5EF4-FFF2-40B4-BE49-F238E27FC236}">
-                <a16:creationId xmlns:a16="http://schemas.microsoft.com/office/drawing/2014/main" id="{29B13A5F-3A29-4723-9FC3-F1F895973AF1}"/>
+                <a16:creationId xmlns:a16="http://schemas.microsoft.com/office/drawing/2014/main" id="{9000D667-60A3-43FA-82AD-FE7997CC79C7}"/>
               </a:ext>
             </a:extLst>
           </p:cNvPr>
@@ -28281,7 +28281,7 @@
           <p:cNvPr id="4" name="">
             <a:extLst xmlns:a="http://schemas.openxmlformats.org/drawingml/2006/main">
               <a:ext uri="{FF2B5EF4-FFF2-40B4-BE49-F238E27FC236}">
-                <a16:creationId xmlns:a16="http://schemas.microsoft.com/office/drawing/2014/main" id="{5F033357-C227-4D53-8562-56C6B7727C1B}"/>
+                <a16:creationId xmlns:a16="http://schemas.microsoft.com/office/drawing/2014/main" id="{D90608C9-046D-4D62-8E28-CF027F4AE85E}"/>
               </a:ext>
             </a:extLst>
           </p:cNvPr>
@@ -28316,7 +28316,7 @@
           <p:nvPr/>
         </p:nvPicPr>
         <p:blipFill>
-          <a:blip xmlns:r="http://schemas.openxmlformats.org/officeDocument/2006/relationships" xmlns:a="http://schemas.openxmlformats.org/drawingml/2006/main" r:embed="Rb8fd7d5b21da49b9"/>
+          <a:blip xmlns:r="http://schemas.openxmlformats.org/officeDocument/2006/relationships" xmlns:a="http://schemas.openxmlformats.org/drawingml/2006/main" r:embed="R81f1f6b279b0423a"/>
           <a:stretch xmlns:a="http://schemas.openxmlformats.org/drawingml/2006/main"/>
         </p:blipFill>
         <p:spPr>
@@ -28334,7 +28334,7 @@
           <p:cNvPr id="6" name="">
             <a:extLst xmlns:a="http://schemas.openxmlformats.org/drawingml/2006/main">
               <a:ext uri="{FF2B5EF4-FFF2-40B4-BE49-F238E27FC236}">
-                <a16:creationId xmlns:a16="http://schemas.microsoft.com/office/drawing/2014/main" id="{B3925C61-FCC3-46B7-851C-F8E23C651A99}"/>
+                <a16:creationId xmlns:a16="http://schemas.microsoft.com/office/drawing/2014/main" id="{D536CD5E-B3CF-4538-8BD1-E756281055EE}"/>
               </a:ext>
             </a:extLst>
           </p:cNvPr>
@@ -28386,7 +28386,7 @@
           <p:cNvPr id="7" name="">
             <a:extLst xmlns:a="http://schemas.openxmlformats.org/drawingml/2006/main">
               <a:ext uri="{FF2B5EF4-FFF2-40B4-BE49-F238E27FC236}">
-                <a16:creationId xmlns:a16="http://schemas.microsoft.com/office/drawing/2014/main" id="{C4C227DA-C160-4659-BEA4-5E5A92669AFB}"/>
+                <a16:creationId xmlns:a16="http://schemas.microsoft.com/office/drawing/2014/main" id="{4A1DC7FA-4F0C-462F-B861-D988BB1AB306}"/>
               </a:ext>
             </a:extLst>
           </p:cNvPr>
@@ -28442,7 +28442,7 @@
           <p:nvPr/>
         </p:nvPicPr>
         <p:blipFill>
-          <a:blip xmlns:r="http://schemas.openxmlformats.org/officeDocument/2006/relationships" xmlns:a="http://schemas.openxmlformats.org/drawingml/2006/main" r:embed="R0e7e1fce3b4542b1"/>
+          <a:blip xmlns:r="http://schemas.openxmlformats.org/officeDocument/2006/relationships" xmlns:a="http://schemas.openxmlformats.org/drawingml/2006/main" r:embed="R4186d898e3db4799"/>
           <a:stretch xmlns:a="http://schemas.openxmlformats.org/drawingml/2006/main"/>
         </p:blipFill>
         <p:spPr>
@@ -28458,7 +28458,7 @@
     </p:spTree>
     <p:extLst>
       <p:ext uri="{BB962C8B-B14F-4D97-AF65-F5344CB8AC3E}">
-        <p14:creationId xmlns:p14="http://schemas.microsoft.com/office/powerpoint/2010/main" val="1974745413"/>
+        <p14:creationId xmlns:p14="http://schemas.microsoft.com/office/powerpoint/2010/main" val="1362805226"/>
       </p:ext>
     </p:extLst>
   </p:cSld>
@@ -28489,7 +28489,7 @@
           <p:cNvPr id="42" name="">
             <a:extLst xmlns:a="http://schemas.openxmlformats.org/drawingml/2006/main">
               <a:ext uri="{FF2B5EF4-FFF2-40B4-BE49-F238E27FC236}">
-                <a16:creationId xmlns:a16="http://schemas.microsoft.com/office/drawing/2014/main" id="{5E5FAF7C-C9DF-43EA-93F0-A36F229C71F7}"/>
+                <a16:creationId xmlns:a16="http://schemas.microsoft.com/office/drawing/2014/main" id="{0716CF20-BA1C-4DF8-BBF0-CB8577DC1BD5}"/>
               </a:ext>
             </a:extLst>
           </p:cNvPr>
@@ -28522,7 +28522,7 @@
           <p:cNvPr id="2" name="">
             <a:extLst xmlns:a="http://schemas.openxmlformats.org/drawingml/2006/main">
               <a:ext uri="{FF2B5EF4-FFF2-40B4-BE49-F238E27FC236}">
-                <a16:creationId xmlns:a16="http://schemas.microsoft.com/office/drawing/2014/main" id="{EF89881B-DD91-4683-A1D5-36D2998D95C2}"/>
+                <a16:creationId xmlns:a16="http://schemas.microsoft.com/office/drawing/2014/main" id="{0E5D1C6D-8EB5-468C-83F9-C59AF1760B1D}"/>
               </a:ext>
             </a:extLst>
           </p:cNvPr>
@@ -28553,7 +28553,7 @@
           <p:cNvPr id="3" name="">
             <a:extLst xmlns:a="http://schemas.openxmlformats.org/drawingml/2006/main">
               <a:ext uri="{FF2B5EF4-FFF2-40B4-BE49-F238E27FC236}">
-                <a16:creationId xmlns:a16="http://schemas.microsoft.com/office/drawing/2014/main" id="{72964571-A5D4-44C1-88C6-C778CD948319}"/>
+                <a16:creationId xmlns:a16="http://schemas.microsoft.com/office/drawing/2014/main" id="{3A582176-12CF-4790-B17A-B0B704FD8506}"/>
               </a:ext>
             </a:extLst>
           </p:cNvPr>
@@ -28605,7 +28605,7 @@
           <p:cNvPr id="4" name="">
             <a:extLst xmlns:a="http://schemas.openxmlformats.org/drawingml/2006/main">
               <a:ext uri="{FF2B5EF4-FFF2-40B4-BE49-F238E27FC236}">
-                <a16:creationId xmlns:a16="http://schemas.microsoft.com/office/drawing/2014/main" id="{34412257-9D7A-455C-8560-6EC196358964}"/>
+                <a16:creationId xmlns:a16="http://schemas.microsoft.com/office/drawing/2014/main" id="{4C6BA39D-4CC1-4C30-BD90-A8051DCEED9C}"/>
               </a:ext>
             </a:extLst>
           </p:cNvPr>
@@ -28657,7 +28657,7 @@
           <p:cNvPr id="5" name="">
             <a:extLst xmlns:a="http://schemas.openxmlformats.org/drawingml/2006/main">
               <a:ext uri="{FF2B5EF4-FFF2-40B4-BE49-F238E27FC236}">
-                <a16:creationId xmlns:a16="http://schemas.microsoft.com/office/drawing/2014/main" id="{BE2CAF8D-63A9-4447-8D0E-F0FFCCA4BF3E}"/>
+                <a16:creationId xmlns:a16="http://schemas.microsoft.com/office/drawing/2014/main" id="{CB882181-293C-4E06-99BB-868398410CB7}"/>
               </a:ext>
             </a:extLst>
           </p:cNvPr>
@@ -28692,7 +28692,7 @@
           <p:nvPr/>
         </p:nvPicPr>
         <p:blipFill>
-          <a:blip xmlns:r="http://schemas.openxmlformats.org/officeDocument/2006/relationships" xmlns:a="http://schemas.openxmlformats.org/drawingml/2006/main" r:embed="R41997526c4654873"/>
+          <a:blip xmlns:r="http://schemas.openxmlformats.org/officeDocument/2006/relationships" xmlns:a="http://schemas.openxmlformats.org/drawingml/2006/main" r:embed="Rfc910a4f5e5d4edc"/>
           <a:stretch xmlns:a="http://schemas.openxmlformats.org/drawingml/2006/main"/>
         </p:blipFill>
         <p:spPr>
@@ -28710,7 +28710,7 @@
           <p:cNvPr id="7" name="">
             <a:extLst xmlns:a="http://schemas.openxmlformats.org/drawingml/2006/main">
               <a:ext uri="{FF2B5EF4-FFF2-40B4-BE49-F238E27FC236}">
-                <a16:creationId xmlns:a16="http://schemas.microsoft.com/office/drawing/2014/main" id="{01D45E0D-9BD3-4B5E-872F-BAD2BB96F57A}"/>
+                <a16:creationId xmlns:a16="http://schemas.microsoft.com/office/drawing/2014/main" id="{0A70D661-6AC0-42AA-949A-4B81B94F07A0}"/>
               </a:ext>
             </a:extLst>
           </p:cNvPr>
@@ -28762,7 +28762,7 @@
           <p:cNvPr id="8" name="">
             <a:extLst xmlns:a="http://schemas.openxmlformats.org/drawingml/2006/main">
               <a:ext uri="{FF2B5EF4-FFF2-40B4-BE49-F238E27FC236}">
-                <a16:creationId xmlns:a16="http://schemas.microsoft.com/office/drawing/2014/main" id="{3FBB632B-27C2-4F5B-B1C2-1DAD9E01A94A}"/>
+                <a16:creationId xmlns:a16="http://schemas.microsoft.com/office/drawing/2014/main" id="{5C3DEA21-CE4F-4174-9C08-C66035A09B6B}"/>
               </a:ext>
             </a:extLst>
           </p:cNvPr>
@@ -28814,7 +28814,7 @@
           <p:cNvPr id="9" name="">
             <a:extLst xmlns:a="http://schemas.openxmlformats.org/drawingml/2006/main">
               <a:ext uri="{FF2B5EF4-FFF2-40B4-BE49-F238E27FC236}">
-                <a16:creationId xmlns:a16="http://schemas.microsoft.com/office/drawing/2014/main" id="{123E8E0D-53F8-4B1D-8828-95B0FCE7EC42}"/>
+                <a16:creationId xmlns:a16="http://schemas.microsoft.com/office/drawing/2014/main" id="{8C833FCD-20AF-4FDB-B904-3C5BB313C23C}"/>
               </a:ext>
             </a:extLst>
           </p:cNvPr>
@@ -28866,7 +28866,7 @@
           <p:cNvPr id="10" name="">
             <a:extLst xmlns:a="http://schemas.openxmlformats.org/drawingml/2006/main">
               <a:ext uri="{FF2B5EF4-FFF2-40B4-BE49-F238E27FC236}">
-                <a16:creationId xmlns:a16="http://schemas.microsoft.com/office/drawing/2014/main" id="{4333468E-6851-43EE-9CBA-CFC0C83A2814}"/>
+                <a16:creationId xmlns:a16="http://schemas.microsoft.com/office/drawing/2014/main" id="{41FD6B26-88C0-425B-A6D3-6B8B879C807D}"/>
               </a:ext>
             </a:extLst>
           </p:cNvPr>
@@ -28897,7 +28897,7 @@
           <p:cNvPr id="11" name="">
             <a:extLst xmlns:a="http://schemas.openxmlformats.org/drawingml/2006/main">
               <a:ext uri="{FF2B5EF4-FFF2-40B4-BE49-F238E27FC236}">
-                <a16:creationId xmlns:a16="http://schemas.microsoft.com/office/drawing/2014/main" id="{C54EAA12-CB53-4EBD-9EC7-9CF9D7A3A55B}"/>
+                <a16:creationId xmlns:a16="http://schemas.microsoft.com/office/drawing/2014/main" id="{AE3ADC49-7A42-4C83-A373-B8AEC799A9A7}"/>
               </a:ext>
             </a:extLst>
           </p:cNvPr>
@@ -28949,7 +28949,7 @@
           <p:cNvPr id="12" name="">
             <a:extLst xmlns:a="http://schemas.openxmlformats.org/drawingml/2006/main">
               <a:ext uri="{FF2B5EF4-FFF2-40B4-BE49-F238E27FC236}">
-                <a16:creationId xmlns:a16="http://schemas.microsoft.com/office/drawing/2014/main" id="{77965EAA-818A-407D-8BDB-CFD80898AA01}"/>
+                <a16:creationId xmlns:a16="http://schemas.microsoft.com/office/drawing/2014/main" id="{3171712E-55B7-4136-BD6D-C28A802867D9}"/>
               </a:ext>
             </a:extLst>
           </p:cNvPr>
@@ -29001,7 +29001,7 @@
           <p:cNvPr id="13" name="">
             <a:extLst xmlns:a="http://schemas.openxmlformats.org/drawingml/2006/main">
               <a:ext uri="{FF2B5EF4-FFF2-40B4-BE49-F238E27FC236}">
-                <a16:creationId xmlns:a16="http://schemas.microsoft.com/office/drawing/2014/main" id="{1F93A0C5-C6AA-43C2-A1DC-2BED9B80C75F}"/>
+                <a16:creationId xmlns:a16="http://schemas.microsoft.com/office/drawing/2014/main" id="{7ED2A4A7-BFCB-4111-8B33-24F7FE4E2921}"/>
               </a:ext>
             </a:extLst>
           </p:cNvPr>
@@ -29053,7 +29053,7 @@
           <p:cNvPr id="14" name="">
             <a:extLst xmlns:a="http://schemas.openxmlformats.org/drawingml/2006/main">
               <a:ext uri="{FF2B5EF4-FFF2-40B4-BE49-F238E27FC236}">
-                <a16:creationId xmlns:a16="http://schemas.microsoft.com/office/drawing/2014/main" id="{1C35935A-1275-450F-8406-784930F0DC3B}"/>
+                <a16:creationId xmlns:a16="http://schemas.microsoft.com/office/drawing/2014/main" id="{212F7A77-B90E-40BC-85C1-037F6172642C}"/>
               </a:ext>
             </a:extLst>
           </p:cNvPr>
@@ -29084,7 +29084,7 @@
           <p:cNvPr id="15" name="">
             <a:extLst xmlns:a="http://schemas.openxmlformats.org/drawingml/2006/main">
               <a:ext uri="{FF2B5EF4-FFF2-40B4-BE49-F238E27FC236}">
-                <a16:creationId xmlns:a16="http://schemas.microsoft.com/office/drawing/2014/main" id="{5A28C528-0DE1-4DC5-8B0B-7633E3403DD7}"/>
+                <a16:creationId xmlns:a16="http://schemas.microsoft.com/office/drawing/2014/main" id="{B16D6C5D-A072-4443-A961-DB9912E72BB5}"/>
               </a:ext>
             </a:extLst>
           </p:cNvPr>
@@ -29136,7 +29136,7 @@
           <p:cNvPr id="16" name="">
             <a:extLst xmlns:a="http://schemas.openxmlformats.org/drawingml/2006/main">
               <a:ext uri="{FF2B5EF4-FFF2-40B4-BE49-F238E27FC236}">
-                <a16:creationId xmlns:a16="http://schemas.microsoft.com/office/drawing/2014/main" id="{321F0947-6B03-45EE-AAE8-28ED6C45C234}"/>
+                <a16:creationId xmlns:a16="http://schemas.microsoft.com/office/drawing/2014/main" id="{C3E7CB6F-9DFA-4B29-9BF4-4DC87C78569C}"/>
               </a:ext>
             </a:extLst>
           </p:cNvPr>
@@ -29188,7 +29188,7 @@
           <p:cNvPr id="17" name="">
             <a:extLst xmlns:a="http://schemas.openxmlformats.org/drawingml/2006/main">
               <a:ext uri="{FF2B5EF4-FFF2-40B4-BE49-F238E27FC236}">
-                <a16:creationId xmlns:a16="http://schemas.microsoft.com/office/drawing/2014/main" id="{7C1CA9F6-FD97-45F1-ACE5-1F7196F4202C}"/>
+                <a16:creationId xmlns:a16="http://schemas.microsoft.com/office/drawing/2014/main" id="{56F6520D-EC99-49EC-B078-FF07DCA839F3}"/>
               </a:ext>
             </a:extLst>
           </p:cNvPr>
@@ -29240,7 +29240,7 @@
           <p:cNvPr id="18" name="">
             <a:extLst xmlns:a="http://schemas.openxmlformats.org/drawingml/2006/main">
               <a:ext uri="{FF2B5EF4-FFF2-40B4-BE49-F238E27FC236}">
-                <a16:creationId xmlns:a16="http://schemas.microsoft.com/office/drawing/2014/main" id="{5C42F6C3-1169-4255-905D-B51E09299D0B}"/>
+                <a16:creationId xmlns:a16="http://schemas.microsoft.com/office/drawing/2014/main" id="{BA5CB6F6-71CE-429C-84D9-D78D540E41E5}"/>
               </a:ext>
             </a:extLst>
           </p:cNvPr>
@@ -29271,7 +29271,7 @@
           <p:cNvPr id="19" name="">
             <a:extLst xmlns:a="http://schemas.openxmlformats.org/drawingml/2006/main">
               <a:ext uri="{FF2B5EF4-FFF2-40B4-BE49-F238E27FC236}">
-                <a16:creationId xmlns:a16="http://schemas.microsoft.com/office/drawing/2014/main" id="{9F1E631B-531D-4646-82EE-7E942F664AA9}"/>
+                <a16:creationId xmlns:a16="http://schemas.microsoft.com/office/drawing/2014/main" id="{8D5CBD6E-0FD2-40DA-9C46-504B407D82DD}"/>
               </a:ext>
             </a:extLst>
           </p:cNvPr>
@@ -29323,7 +29323,7 @@
           <p:cNvPr id="20" name="">
             <a:extLst xmlns:a="http://schemas.openxmlformats.org/drawingml/2006/main">
               <a:ext uri="{FF2B5EF4-FFF2-40B4-BE49-F238E27FC236}">
-                <a16:creationId xmlns:a16="http://schemas.microsoft.com/office/drawing/2014/main" id="{59C8E2A7-0A3B-450E-9187-68E8238A1968}"/>
+                <a16:creationId xmlns:a16="http://schemas.microsoft.com/office/drawing/2014/main" id="{697FF66D-EFF0-444F-A8B8-0C51CB3F8ADC}"/>
               </a:ext>
             </a:extLst>
           </p:cNvPr>
@@ -29375,7 +29375,7 @@
           <p:cNvPr id="21" name="">
             <a:extLst xmlns:a="http://schemas.openxmlformats.org/drawingml/2006/main">
               <a:ext uri="{FF2B5EF4-FFF2-40B4-BE49-F238E27FC236}">
-                <a16:creationId xmlns:a16="http://schemas.microsoft.com/office/drawing/2014/main" id="{EE599748-BC00-4528-9CE3-9B832103FAAF}"/>
+                <a16:creationId xmlns:a16="http://schemas.microsoft.com/office/drawing/2014/main" id="{5897269A-60C7-40EC-8781-A4EB6F1F21BA}"/>
               </a:ext>
             </a:extLst>
           </p:cNvPr>
@@ -29427,7 +29427,7 @@
           <p:cNvPr id="22" name="">
             <a:extLst xmlns:a="http://schemas.openxmlformats.org/drawingml/2006/main">
               <a:ext uri="{FF2B5EF4-FFF2-40B4-BE49-F238E27FC236}">
-                <a16:creationId xmlns:a16="http://schemas.microsoft.com/office/drawing/2014/main" id="{2078D6D5-4E25-47A5-B4C4-9F8D731537BF}"/>
+                <a16:creationId xmlns:a16="http://schemas.microsoft.com/office/drawing/2014/main" id="{3C7F8A80-5055-4EC3-B4F4-C5E3EF5E714E}"/>
               </a:ext>
             </a:extLst>
           </p:cNvPr>
@@ -29458,7 +29458,7 @@
           <p:cNvPr id="23" name="">
             <a:extLst xmlns:a="http://schemas.openxmlformats.org/drawingml/2006/main">
               <a:ext uri="{FF2B5EF4-FFF2-40B4-BE49-F238E27FC236}">
-                <a16:creationId xmlns:a16="http://schemas.microsoft.com/office/drawing/2014/main" id="{0F4C7B3D-C54A-488B-B13A-C67E294578DF}"/>
+                <a16:creationId xmlns:a16="http://schemas.microsoft.com/office/drawing/2014/main" id="{3F446A57-60B5-4499-8773-1E7A19135A3B}"/>
               </a:ext>
             </a:extLst>
           </p:cNvPr>
@@ -29510,7 +29510,7 @@
           <p:cNvPr id="24" name="">
             <a:extLst xmlns:a="http://schemas.openxmlformats.org/drawingml/2006/main">
               <a:ext uri="{FF2B5EF4-FFF2-40B4-BE49-F238E27FC236}">
-                <a16:creationId xmlns:a16="http://schemas.microsoft.com/office/drawing/2014/main" id="{1D7AB488-45F7-4216-BF4A-091F3C3DBCBE}"/>
+                <a16:creationId xmlns:a16="http://schemas.microsoft.com/office/drawing/2014/main" id="{E218B6D2-111D-42D4-AB46-088E69C886E9}"/>
               </a:ext>
             </a:extLst>
           </p:cNvPr>
@@ -29562,7 +29562,7 @@
           <p:cNvPr id="25" name="">
             <a:extLst xmlns:a="http://schemas.openxmlformats.org/drawingml/2006/main">
               <a:ext uri="{FF2B5EF4-FFF2-40B4-BE49-F238E27FC236}">
-                <a16:creationId xmlns:a16="http://schemas.microsoft.com/office/drawing/2014/main" id="{44AFBEE1-EF9F-4DF0-A3D8-5E1248BB9318}"/>
+                <a16:creationId xmlns:a16="http://schemas.microsoft.com/office/drawing/2014/main" id="{126CAE0C-96C0-45FE-963B-C1981C16852A}"/>
               </a:ext>
             </a:extLst>
           </p:cNvPr>
@@ -29614,7 +29614,7 @@
           <p:cNvPr id="26" name="">
             <a:extLst xmlns:a="http://schemas.openxmlformats.org/drawingml/2006/main">
               <a:ext uri="{FF2B5EF4-FFF2-40B4-BE49-F238E27FC236}">
-                <a16:creationId xmlns:a16="http://schemas.microsoft.com/office/drawing/2014/main" id="{A4353B58-ECC2-4B06-90FF-D9A76F9D27DF}"/>
+                <a16:creationId xmlns:a16="http://schemas.microsoft.com/office/drawing/2014/main" id="{76BC8D9A-5544-45B7-869E-FC50D48996A2}"/>
               </a:ext>
             </a:extLst>
           </p:cNvPr>
@@ -29645,7 +29645,7 @@
           <p:cNvPr id="27" name="">
             <a:extLst xmlns:a="http://schemas.openxmlformats.org/drawingml/2006/main">
               <a:ext uri="{FF2B5EF4-FFF2-40B4-BE49-F238E27FC236}">
-                <a16:creationId xmlns:a16="http://schemas.microsoft.com/office/drawing/2014/main" id="{A1967624-FE42-43F1-B1D3-8977FF5E84D7}"/>
+                <a16:creationId xmlns:a16="http://schemas.microsoft.com/office/drawing/2014/main" id="{B1FBC899-98D4-428C-BC4B-74E14B2E97BE}"/>
               </a:ext>
             </a:extLst>
           </p:cNvPr>
@@ -29697,7 +29697,7 @@
           <p:cNvPr id="28" name="">
             <a:extLst xmlns:a="http://schemas.openxmlformats.org/drawingml/2006/main">
               <a:ext uri="{FF2B5EF4-FFF2-40B4-BE49-F238E27FC236}">
-                <a16:creationId xmlns:a16="http://schemas.microsoft.com/office/drawing/2014/main" id="{BCA22ACF-F755-47B7-82D8-F324E429F5FD}"/>
+                <a16:creationId xmlns:a16="http://schemas.microsoft.com/office/drawing/2014/main" id="{8EEE0674-D3F6-4BF7-8B42-C0DE96D51475}"/>
               </a:ext>
             </a:extLst>
           </p:cNvPr>
@@ -29749,7 +29749,7 @@
           <p:cNvPr id="29" name="">
             <a:extLst xmlns:a="http://schemas.openxmlformats.org/drawingml/2006/main">
               <a:ext uri="{FF2B5EF4-FFF2-40B4-BE49-F238E27FC236}">
-                <a16:creationId xmlns:a16="http://schemas.microsoft.com/office/drawing/2014/main" id="{40AEDEB0-15E1-4E74-A467-51928DA0FD66}"/>
+                <a16:creationId xmlns:a16="http://schemas.microsoft.com/office/drawing/2014/main" id="{D7EC479F-3DB3-40AD-8885-FFA5F184F834}"/>
               </a:ext>
             </a:extLst>
           </p:cNvPr>
@@ -29801,7 +29801,7 @@
           <p:cNvPr id="30" name="">
             <a:extLst xmlns:a="http://schemas.openxmlformats.org/drawingml/2006/main">
               <a:ext uri="{FF2B5EF4-FFF2-40B4-BE49-F238E27FC236}">
-                <a16:creationId xmlns:a16="http://schemas.microsoft.com/office/drawing/2014/main" id="{8B6F8912-8B7F-452A-A4B3-9C900EA18A6E}"/>
+                <a16:creationId xmlns:a16="http://schemas.microsoft.com/office/drawing/2014/main" id="{DE5A1903-D68C-487A-96C2-77E66F343BA7}"/>
               </a:ext>
             </a:extLst>
           </p:cNvPr>
@@ -29832,7 +29832,7 @@
           <p:cNvPr id="31" name="">
             <a:extLst xmlns:a="http://schemas.openxmlformats.org/drawingml/2006/main">
               <a:ext uri="{FF2B5EF4-FFF2-40B4-BE49-F238E27FC236}">
-                <a16:creationId xmlns:a16="http://schemas.microsoft.com/office/drawing/2014/main" id="{6B56625C-CF7C-4892-80DD-11AB170EB391}"/>
+                <a16:creationId xmlns:a16="http://schemas.microsoft.com/office/drawing/2014/main" id="{80CC60A7-C718-4DE9-B5A7-C8899FE5A5E9}"/>
               </a:ext>
             </a:extLst>
           </p:cNvPr>
@@ -29884,7 +29884,7 @@
           <p:cNvPr id="32" name="">
             <a:extLst xmlns:a="http://schemas.openxmlformats.org/drawingml/2006/main">
               <a:ext uri="{FF2B5EF4-FFF2-40B4-BE49-F238E27FC236}">
-                <a16:creationId xmlns:a16="http://schemas.microsoft.com/office/drawing/2014/main" id="{8E154CE2-A645-4100-9613-FF69EB04A724}"/>
+                <a16:creationId xmlns:a16="http://schemas.microsoft.com/office/drawing/2014/main" id="{52E7CD78-5BAD-4364-8CF8-9BCDA2B07F5A}"/>
               </a:ext>
             </a:extLst>
           </p:cNvPr>
@@ -29936,7 +29936,7 @@
           <p:cNvPr id="33" name="">
             <a:extLst xmlns:a="http://schemas.openxmlformats.org/drawingml/2006/main">
               <a:ext uri="{FF2B5EF4-FFF2-40B4-BE49-F238E27FC236}">
-                <a16:creationId xmlns:a16="http://schemas.microsoft.com/office/drawing/2014/main" id="{DC0C4B4B-2EB8-4A18-A162-1474A18A9531}"/>
+                <a16:creationId xmlns:a16="http://schemas.microsoft.com/office/drawing/2014/main" id="{4E48F821-C25B-425C-AB34-08A9A7008F01}"/>
               </a:ext>
             </a:extLst>
           </p:cNvPr>
@@ -29988,7 +29988,7 @@
           <p:cNvPr id="34" name="">
             <a:extLst xmlns:a="http://schemas.openxmlformats.org/drawingml/2006/main">
               <a:ext uri="{FF2B5EF4-FFF2-40B4-BE49-F238E27FC236}">
-                <a16:creationId xmlns:a16="http://schemas.microsoft.com/office/drawing/2014/main" id="{BA35D8C5-624D-4ED4-9338-D000E6357795}"/>
+                <a16:creationId xmlns:a16="http://schemas.microsoft.com/office/drawing/2014/main" id="{D03607BF-AEEA-4E24-935E-D254D90A7B94}"/>
               </a:ext>
             </a:extLst>
           </p:cNvPr>
@@ -30019,7 +30019,7 @@
           <p:cNvPr id="35" name="">
             <a:extLst xmlns:a="http://schemas.openxmlformats.org/drawingml/2006/main">
               <a:ext uri="{FF2B5EF4-FFF2-40B4-BE49-F238E27FC236}">
-                <a16:creationId xmlns:a16="http://schemas.microsoft.com/office/drawing/2014/main" id="{D344937B-2E6E-413C-B843-F5495A0D3A23}"/>
+                <a16:creationId xmlns:a16="http://schemas.microsoft.com/office/drawing/2014/main" id="{7F5E25D2-D9A5-4899-A46D-4617B90307E5}"/>
               </a:ext>
             </a:extLst>
           </p:cNvPr>
@@ -30071,7 +30071,7 @@
           <p:cNvPr id="36" name="">
             <a:extLst xmlns:a="http://schemas.openxmlformats.org/drawingml/2006/main">
               <a:ext uri="{FF2B5EF4-FFF2-40B4-BE49-F238E27FC236}">
-                <a16:creationId xmlns:a16="http://schemas.microsoft.com/office/drawing/2014/main" id="{FF764323-319F-4D77-8960-098238A86EE4}"/>
+                <a16:creationId xmlns:a16="http://schemas.microsoft.com/office/drawing/2014/main" id="{81E36B3E-6161-4E90-BF21-E5027007E232}"/>
               </a:ext>
             </a:extLst>
           </p:cNvPr>
@@ -30123,7 +30123,7 @@
           <p:cNvPr id="37" name="">
             <a:extLst xmlns:a="http://schemas.openxmlformats.org/drawingml/2006/main">
               <a:ext uri="{FF2B5EF4-FFF2-40B4-BE49-F238E27FC236}">
-                <a16:creationId xmlns:a16="http://schemas.microsoft.com/office/drawing/2014/main" id="{66293DE1-B4A6-486B-9B6E-E10532F66C4B}"/>
+                <a16:creationId xmlns:a16="http://schemas.microsoft.com/office/drawing/2014/main" id="{44DF597E-9B10-40BE-830C-C2C69D3B1FB7}"/>
               </a:ext>
             </a:extLst>
           </p:cNvPr>
@@ -30175,7 +30175,7 @@
           <p:cNvPr id="38" name="">
             <a:extLst xmlns:a="http://schemas.openxmlformats.org/drawingml/2006/main">
               <a:ext uri="{FF2B5EF4-FFF2-40B4-BE49-F238E27FC236}">
-                <a16:creationId xmlns:a16="http://schemas.microsoft.com/office/drawing/2014/main" id="{8B02DE4F-F944-4F5A-A211-8F309ECEE09E}"/>
+                <a16:creationId xmlns:a16="http://schemas.microsoft.com/office/drawing/2014/main" id="{B8ADD025-ACD5-431A-A2ED-87C582FB0AA7}"/>
               </a:ext>
             </a:extLst>
           </p:cNvPr>
@@ -30206,7 +30206,7 @@
           <p:cNvPr id="39" name="">
             <a:extLst xmlns:a="http://schemas.openxmlformats.org/drawingml/2006/main">
               <a:ext uri="{FF2B5EF4-FFF2-40B4-BE49-F238E27FC236}">
-                <a16:creationId xmlns:a16="http://schemas.microsoft.com/office/drawing/2014/main" id="{CD8F8518-8D9F-42A1-87AB-EE107329997E}"/>
+                <a16:creationId xmlns:a16="http://schemas.microsoft.com/office/drawing/2014/main" id="{229FACA5-534E-49EA-8E5F-89BE05985A54}"/>
               </a:ext>
             </a:extLst>
           </p:cNvPr>
@@ -30258,7 +30258,7 @@
           <p:cNvPr id="40" name="">
             <a:extLst xmlns:a="http://schemas.openxmlformats.org/drawingml/2006/main">
               <a:ext uri="{FF2B5EF4-FFF2-40B4-BE49-F238E27FC236}">
-                <a16:creationId xmlns:a16="http://schemas.microsoft.com/office/drawing/2014/main" id="{2ED7D56B-C940-41C4-9B37-7CE966C0503C}"/>
+                <a16:creationId xmlns:a16="http://schemas.microsoft.com/office/drawing/2014/main" id="{32BFA25C-D9F8-448E-BE04-04C0E7959FE6}"/>
               </a:ext>
             </a:extLst>
           </p:cNvPr>
@@ -30310,7 +30310,7 @@
           <p:cNvPr id="41" name="">
             <a:extLst xmlns:a="http://schemas.openxmlformats.org/drawingml/2006/main">
               <a:ext uri="{FF2B5EF4-FFF2-40B4-BE49-F238E27FC236}">
-                <a16:creationId xmlns:a16="http://schemas.microsoft.com/office/drawing/2014/main" id="{00FA577E-1026-4818-BA34-5A985C88973A}"/>
+                <a16:creationId xmlns:a16="http://schemas.microsoft.com/office/drawing/2014/main" id="{8A26281F-70D5-4065-A73B-96398ADB8ACF}"/>
               </a:ext>
             </a:extLst>
           </p:cNvPr>
@@ -30360,7 +30360,7 @@
     </p:spTree>
     <p:extLst>
       <p:ext uri="{BB962C8B-B14F-4D97-AF65-F5344CB8AC3E}">
-        <p14:creationId xmlns:p14="http://schemas.microsoft.com/office/powerpoint/2010/main" val="1630528311"/>
+        <p14:creationId xmlns:p14="http://schemas.microsoft.com/office/powerpoint/2010/main" val="1959228478"/>
       </p:ext>
     </p:extLst>
   </p:cSld>
@@ -30391,7 +30391,7 @@
           <p:cNvPr id="76" name="">
             <a:extLst xmlns:a="http://schemas.openxmlformats.org/drawingml/2006/main">
               <a:ext uri="{FF2B5EF4-FFF2-40B4-BE49-F238E27FC236}">
-                <a16:creationId xmlns:a16="http://schemas.microsoft.com/office/drawing/2014/main" id="{AFFCE521-F7DB-4B7F-8D41-9E8D83103641}"/>
+                <a16:creationId xmlns:a16="http://schemas.microsoft.com/office/drawing/2014/main" id="{D2CDE917-F89C-4E67-968C-4612E5FF7655}"/>
               </a:ext>
             </a:extLst>
           </p:cNvPr>
@@ -30424,7 +30424,7 @@
           <p:cNvPr id="2" name="">
             <a:extLst xmlns:a="http://schemas.openxmlformats.org/drawingml/2006/main">
               <a:ext uri="{FF2B5EF4-FFF2-40B4-BE49-F238E27FC236}">
-                <a16:creationId xmlns:a16="http://schemas.microsoft.com/office/drawing/2014/main" id="{1D140526-296F-4047-B9AC-D0604FC87D97}"/>
+                <a16:creationId xmlns:a16="http://schemas.microsoft.com/office/drawing/2014/main" id="{B041F6D7-98E9-48D4-9060-B0B13D3B67FF}"/>
               </a:ext>
             </a:extLst>
           </p:cNvPr>
@@ -30455,7 +30455,7 @@
           <p:cNvPr id="3" name="">
             <a:extLst xmlns:a="http://schemas.openxmlformats.org/drawingml/2006/main">
               <a:ext uri="{FF2B5EF4-FFF2-40B4-BE49-F238E27FC236}">
-                <a16:creationId xmlns:a16="http://schemas.microsoft.com/office/drawing/2014/main" id="{8DD53DAF-75A0-4A59-9D83-A6774263E82F}"/>
+                <a16:creationId xmlns:a16="http://schemas.microsoft.com/office/drawing/2014/main" id="{16D3EBBF-8D53-4595-BD05-13C223E99069}"/>
               </a:ext>
             </a:extLst>
           </p:cNvPr>
@@ -30507,7 +30507,7 @@
           <p:cNvPr id="4" name="">
             <a:extLst xmlns:a="http://schemas.openxmlformats.org/drawingml/2006/main">
               <a:ext uri="{FF2B5EF4-FFF2-40B4-BE49-F238E27FC236}">
-                <a16:creationId xmlns:a16="http://schemas.microsoft.com/office/drawing/2014/main" id="{67401EB0-FD0C-4081-896D-F6D55D17A9CB}"/>
+                <a16:creationId xmlns:a16="http://schemas.microsoft.com/office/drawing/2014/main" id="{16F73DFF-DD2E-4C13-B8ED-155934314C59}"/>
               </a:ext>
             </a:extLst>
           </p:cNvPr>
@@ -30559,7 +30559,7 @@
           <p:cNvPr id="5" name="">
             <a:extLst xmlns:a="http://schemas.openxmlformats.org/drawingml/2006/main">
               <a:ext uri="{FF2B5EF4-FFF2-40B4-BE49-F238E27FC236}">
-                <a16:creationId xmlns:a16="http://schemas.microsoft.com/office/drawing/2014/main" id="{F8F83173-5DF1-4F21-AFE7-F7DA5A33AF91}"/>
+                <a16:creationId xmlns:a16="http://schemas.microsoft.com/office/drawing/2014/main" id="{2996A6A1-6E69-492C-B9B5-DAB73FF5F2BB}"/>
               </a:ext>
             </a:extLst>
           </p:cNvPr>
@@ -30594,7 +30594,7 @@
           <p:nvPr/>
         </p:nvPicPr>
         <p:blipFill>
-          <a:blip xmlns:r="http://schemas.openxmlformats.org/officeDocument/2006/relationships" xmlns:a="http://schemas.openxmlformats.org/drawingml/2006/main" r:embed="R7a97611ac5824a20"/>
+          <a:blip xmlns:r="http://schemas.openxmlformats.org/officeDocument/2006/relationships" xmlns:a="http://schemas.openxmlformats.org/drawingml/2006/main" r:embed="R8ba0e0315f7b449a"/>
           <a:stretch xmlns:a="http://schemas.openxmlformats.org/drawingml/2006/main"/>
         </p:blipFill>
         <p:spPr>
@@ -30612,7 +30612,7 @@
           <p:cNvPr id="7" name="">
             <a:extLst xmlns:a="http://schemas.openxmlformats.org/drawingml/2006/main">
               <a:ext uri="{FF2B5EF4-FFF2-40B4-BE49-F238E27FC236}">
-                <a16:creationId xmlns:a16="http://schemas.microsoft.com/office/drawing/2014/main" id="{CF8C2993-D55C-4C7B-A2F3-3F6A1801825A}"/>
+                <a16:creationId xmlns:a16="http://schemas.microsoft.com/office/drawing/2014/main" id="{696B1F1E-8BB5-4983-B949-4FCF72BFE156}"/>
               </a:ext>
             </a:extLst>
           </p:cNvPr>
@@ -30664,7 +30664,7 @@
           <p:cNvPr id="8" name="">
             <a:extLst xmlns:a="http://schemas.openxmlformats.org/drawingml/2006/main">
               <a:ext uri="{FF2B5EF4-FFF2-40B4-BE49-F238E27FC236}">
-                <a16:creationId xmlns:a16="http://schemas.microsoft.com/office/drawing/2014/main" id="{38817B03-09BD-47EA-9423-B5D1E45C1968}"/>
+                <a16:creationId xmlns:a16="http://schemas.microsoft.com/office/drawing/2014/main" id="{4BC0B6EA-E0DB-4821-90CD-5B90A6DCBC3E}"/>
               </a:ext>
             </a:extLst>
           </p:cNvPr>
@@ -30716,7 +30716,7 @@
           <p:cNvPr id="9" name="">
             <a:extLst xmlns:a="http://schemas.openxmlformats.org/drawingml/2006/main">
               <a:ext uri="{FF2B5EF4-FFF2-40B4-BE49-F238E27FC236}">
-                <a16:creationId xmlns:a16="http://schemas.microsoft.com/office/drawing/2014/main" id="{6594080E-154E-4EB8-996D-35E6E78C5BB1}"/>
+                <a16:creationId xmlns:a16="http://schemas.microsoft.com/office/drawing/2014/main" id="{C7A1C8D8-B6D3-4255-9614-02C308583DAC}"/>
               </a:ext>
             </a:extLst>
           </p:cNvPr>
@@ -30768,7 +30768,7 @@
           <p:cNvPr id="10" name="">
             <a:extLst xmlns:a="http://schemas.openxmlformats.org/drawingml/2006/main">
               <a:ext uri="{FF2B5EF4-FFF2-40B4-BE49-F238E27FC236}">
-                <a16:creationId xmlns:a16="http://schemas.microsoft.com/office/drawing/2014/main" id="{D2327A3A-03AB-4592-9174-A92828EFEF9B}"/>
+                <a16:creationId xmlns:a16="http://schemas.microsoft.com/office/drawing/2014/main" id="{C291692D-481A-4472-AAE4-AD63378F5409}"/>
               </a:ext>
             </a:extLst>
           </p:cNvPr>
@@ -30820,7 +30820,7 @@
           <p:cNvPr id="11" name="">
             <a:extLst xmlns:a="http://schemas.openxmlformats.org/drawingml/2006/main">
               <a:ext uri="{FF2B5EF4-FFF2-40B4-BE49-F238E27FC236}">
-                <a16:creationId xmlns:a16="http://schemas.microsoft.com/office/drawing/2014/main" id="{D0DE5AC4-040C-4C32-B7F2-61739EADE49E}"/>
+                <a16:creationId xmlns:a16="http://schemas.microsoft.com/office/drawing/2014/main" id="{513EFE43-4AB7-4168-A126-60EDE6D17458}"/>
               </a:ext>
             </a:extLst>
           </p:cNvPr>
@@ -30863,7 +30863,7 @@
           <p:cNvPr id="12" name="">
             <a:extLst xmlns:a="http://schemas.openxmlformats.org/drawingml/2006/main">
               <a:ext uri="{FF2B5EF4-FFF2-40B4-BE49-F238E27FC236}">
-                <a16:creationId xmlns:a16="http://schemas.microsoft.com/office/drawing/2014/main" id="{F8781AB7-DF14-49E7-A030-265F205AE934}"/>
+                <a16:creationId xmlns:a16="http://schemas.microsoft.com/office/drawing/2014/main" id="{29779365-985A-43EC-A3D8-64E7F3052074}"/>
               </a:ext>
             </a:extLst>
           </p:cNvPr>
@@ -30894,7 +30894,7 @@
           <p:cNvPr id="13" name="">
             <a:extLst xmlns:a="http://schemas.openxmlformats.org/drawingml/2006/main">
               <a:ext uri="{FF2B5EF4-FFF2-40B4-BE49-F238E27FC236}">
-                <a16:creationId xmlns:a16="http://schemas.microsoft.com/office/drawing/2014/main" id="{734D2B8E-41BC-417F-8007-433D76431C83}"/>
+                <a16:creationId xmlns:a16="http://schemas.microsoft.com/office/drawing/2014/main" id="{06D3C0A6-61A1-4BD2-8D7B-682EFF95D534}"/>
               </a:ext>
             </a:extLst>
           </p:cNvPr>
@@ -30925,7 +30925,7 @@
           <p:cNvPr id="14" name="">
             <a:extLst xmlns:a="http://schemas.openxmlformats.org/drawingml/2006/main">
               <a:ext uri="{FF2B5EF4-FFF2-40B4-BE49-F238E27FC236}">
-                <a16:creationId xmlns:a16="http://schemas.microsoft.com/office/drawing/2014/main" id="{6E808DA5-AABB-4924-BF88-337D8588084A}"/>
+                <a16:creationId xmlns:a16="http://schemas.microsoft.com/office/drawing/2014/main" id="{B2CC4805-1CE3-44CB-8748-61ADA05C1058}"/>
               </a:ext>
             </a:extLst>
           </p:cNvPr>
@@ -30968,7 +30968,7 @@
           <p:cNvPr id="15" name="">
             <a:extLst xmlns:a="http://schemas.openxmlformats.org/drawingml/2006/main">
               <a:ext uri="{FF2B5EF4-FFF2-40B4-BE49-F238E27FC236}">
-                <a16:creationId xmlns:a16="http://schemas.microsoft.com/office/drawing/2014/main" id="{3787E1E1-4D22-453F-AD06-4763CA6F50A7}"/>
+                <a16:creationId xmlns:a16="http://schemas.microsoft.com/office/drawing/2014/main" id="{6A421906-2A05-4C64-8D1B-4B88937656B1}"/>
               </a:ext>
             </a:extLst>
           </p:cNvPr>
@@ -30999,7 +30999,7 @@
           <p:cNvPr id="16" name="">
             <a:extLst xmlns:a="http://schemas.openxmlformats.org/drawingml/2006/main">
               <a:ext uri="{FF2B5EF4-FFF2-40B4-BE49-F238E27FC236}">
-                <a16:creationId xmlns:a16="http://schemas.microsoft.com/office/drawing/2014/main" id="{12E56E53-6ED4-4B7D-A41D-89FD909A45D7}"/>
+                <a16:creationId xmlns:a16="http://schemas.microsoft.com/office/drawing/2014/main" id="{35C2D3B8-6085-4EDD-A606-4882599D8D1C}"/>
               </a:ext>
             </a:extLst>
           </p:cNvPr>
@@ -31030,7 +31030,7 @@
           <p:cNvPr id="17" name="">
             <a:extLst xmlns:a="http://schemas.openxmlformats.org/drawingml/2006/main">
               <a:ext uri="{FF2B5EF4-FFF2-40B4-BE49-F238E27FC236}">
-                <a16:creationId xmlns:a16="http://schemas.microsoft.com/office/drawing/2014/main" id="{9DF26BCB-E0FD-4533-8092-15F0F9FC645E}"/>
+                <a16:creationId xmlns:a16="http://schemas.microsoft.com/office/drawing/2014/main" id="{8056E2C9-C327-43CA-8D06-01DA06989061}"/>
               </a:ext>
             </a:extLst>
           </p:cNvPr>
@@ -31082,7 +31082,7 @@
           <p:cNvPr id="18" name="">
             <a:extLst xmlns:a="http://schemas.openxmlformats.org/drawingml/2006/main">
               <a:ext uri="{FF2B5EF4-FFF2-40B4-BE49-F238E27FC236}">
-                <a16:creationId xmlns:a16="http://schemas.microsoft.com/office/drawing/2014/main" id="{C9BFA417-E15C-4FDA-9A2E-EABCE1A524AE}"/>
+                <a16:creationId xmlns:a16="http://schemas.microsoft.com/office/drawing/2014/main" id="{83DFB770-E5FB-46F0-A7F7-4BFDEBA72C39}"/>
               </a:ext>
             </a:extLst>
           </p:cNvPr>
@@ -31134,7 +31134,7 @@
           <p:cNvPr id="19" name="">
             <a:extLst xmlns:a="http://schemas.openxmlformats.org/drawingml/2006/main">
               <a:ext uri="{FF2B5EF4-FFF2-40B4-BE49-F238E27FC236}">
-                <a16:creationId xmlns:a16="http://schemas.microsoft.com/office/drawing/2014/main" id="{2E3CE3BF-9FE5-47F7-8D16-F1613215421C}"/>
+                <a16:creationId xmlns:a16="http://schemas.microsoft.com/office/drawing/2014/main" id="{142681A2-8698-4754-9D40-9E9D57856187}"/>
               </a:ext>
             </a:extLst>
           </p:cNvPr>
@@ -31186,7 +31186,7 @@
           <p:cNvPr id="20" name="">
             <a:extLst xmlns:a="http://schemas.openxmlformats.org/drawingml/2006/main">
               <a:ext uri="{FF2B5EF4-FFF2-40B4-BE49-F238E27FC236}">
-                <a16:creationId xmlns:a16="http://schemas.microsoft.com/office/drawing/2014/main" id="{33E94EA5-72E3-441D-8D4C-0795C12D6032}"/>
+                <a16:creationId xmlns:a16="http://schemas.microsoft.com/office/drawing/2014/main" id="{9B9CC560-E8BE-4A46-A43B-E90F21639EA8}"/>
               </a:ext>
             </a:extLst>
           </p:cNvPr>
@@ -31229,7 +31229,7 @@
           <p:cNvPr id="21" name="">
             <a:extLst xmlns:a="http://schemas.openxmlformats.org/drawingml/2006/main">
               <a:ext uri="{FF2B5EF4-FFF2-40B4-BE49-F238E27FC236}">
-                <a16:creationId xmlns:a16="http://schemas.microsoft.com/office/drawing/2014/main" id="{32FB7F05-E00F-47E6-BD8C-78BF34FA72C6}"/>
+                <a16:creationId xmlns:a16="http://schemas.microsoft.com/office/drawing/2014/main" id="{E1234A86-4215-44F0-A50E-6625DF94BD70}"/>
               </a:ext>
             </a:extLst>
           </p:cNvPr>
@@ -31260,7 +31260,7 @@
           <p:cNvPr id="22" name="">
             <a:extLst xmlns:a="http://schemas.openxmlformats.org/drawingml/2006/main">
               <a:ext uri="{FF2B5EF4-FFF2-40B4-BE49-F238E27FC236}">
-                <a16:creationId xmlns:a16="http://schemas.microsoft.com/office/drawing/2014/main" id="{612C268E-37BC-41A2-AB86-4BFA901943DE}"/>
+                <a16:creationId xmlns:a16="http://schemas.microsoft.com/office/drawing/2014/main" id="{77226427-8035-45DC-8C38-33FA0434C13D}"/>
               </a:ext>
             </a:extLst>
           </p:cNvPr>
@@ -31291,7 +31291,7 @@
           <p:cNvPr id="23" name="">
             <a:extLst xmlns:a="http://schemas.openxmlformats.org/drawingml/2006/main">
               <a:ext uri="{FF2B5EF4-FFF2-40B4-BE49-F238E27FC236}">
-                <a16:creationId xmlns:a16="http://schemas.microsoft.com/office/drawing/2014/main" id="{38C1B8D6-CE88-483A-B7C2-176EA6E6CD15}"/>
+                <a16:creationId xmlns:a16="http://schemas.microsoft.com/office/drawing/2014/main" id="{C501241D-BF03-49AB-9FAA-8A2506CDC51E}"/>
               </a:ext>
             </a:extLst>
           </p:cNvPr>
@@ -31343,7 +31343,7 @@
           <p:cNvPr id="24" name="">
             <a:extLst xmlns:a="http://schemas.openxmlformats.org/drawingml/2006/main">
               <a:ext uri="{FF2B5EF4-FFF2-40B4-BE49-F238E27FC236}">
-                <a16:creationId xmlns:a16="http://schemas.microsoft.com/office/drawing/2014/main" id="{8E6C7EB4-82BF-49F4-BC3A-951E1A78E531}"/>
+                <a16:creationId xmlns:a16="http://schemas.microsoft.com/office/drawing/2014/main" id="{357B9A7D-A25F-489A-BB1A-B41EAA539CBD}"/>
               </a:ext>
             </a:extLst>
           </p:cNvPr>
@@ -31395,7 +31395,7 @@
           <p:cNvPr id="25" name="">
             <a:extLst xmlns:a="http://schemas.openxmlformats.org/drawingml/2006/main">
               <a:ext uri="{FF2B5EF4-FFF2-40B4-BE49-F238E27FC236}">
-                <a16:creationId xmlns:a16="http://schemas.microsoft.com/office/drawing/2014/main" id="{E6C25CC9-A380-46DC-95AD-C089A322F83D}"/>
+                <a16:creationId xmlns:a16="http://schemas.microsoft.com/office/drawing/2014/main" id="{FB4D3A9A-E0B3-4D59-90DF-97855526693A}"/>
               </a:ext>
             </a:extLst>
           </p:cNvPr>
@@ -31447,7 +31447,7 @@
           <p:cNvPr id="26" name="">
             <a:extLst xmlns:a="http://schemas.openxmlformats.org/drawingml/2006/main">
               <a:ext uri="{FF2B5EF4-FFF2-40B4-BE49-F238E27FC236}">
-                <a16:creationId xmlns:a16="http://schemas.microsoft.com/office/drawing/2014/main" id="{AD07DBFC-8495-49EA-B6F3-DE11B2A45F26}"/>
+                <a16:creationId xmlns:a16="http://schemas.microsoft.com/office/drawing/2014/main" id="{064EC5D3-1549-438A-B8BA-A915200C1C39}"/>
               </a:ext>
             </a:extLst>
           </p:cNvPr>
@@ -31490,7 +31490,7 @@
           <p:cNvPr id="27" name="">
             <a:extLst xmlns:a="http://schemas.openxmlformats.org/drawingml/2006/main">
               <a:ext uri="{FF2B5EF4-FFF2-40B4-BE49-F238E27FC236}">
-                <a16:creationId xmlns:a16="http://schemas.microsoft.com/office/drawing/2014/main" id="{960F8514-8BD1-41F0-B8BF-78521BE86860}"/>
+                <a16:creationId xmlns:a16="http://schemas.microsoft.com/office/drawing/2014/main" id="{6B09301F-0258-4204-B4E2-C2E97220CE01}"/>
               </a:ext>
             </a:extLst>
           </p:cNvPr>
@@ -31521,7 +31521,7 @@
           <p:cNvPr id="28" name="">
             <a:extLst xmlns:a="http://schemas.openxmlformats.org/drawingml/2006/main">
               <a:ext uri="{FF2B5EF4-FFF2-40B4-BE49-F238E27FC236}">
-                <a16:creationId xmlns:a16="http://schemas.microsoft.com/office/drawing/2014/main" id="{E686239A-BC80-4B21-BEED-B70335C41A07}"/>
+                <a16:creationId xmlns:a16="http://schemas.microsoft.com/office/drawing/2014/main" id="{CFA59443-132D-40A8-BF5C-17CB5F1982B7}"/>
               </a:ext>
             </a:extLst>
           </p:cNvPr>
@@ -31552,7 +31552,7 @@
           <p:cNvPr id="29" name="">
             <a:extLst xmlns:a="http://schemas.openxmlformats.org/drawingml/2006/main">
               <a:ext uri="{FF2B5EF4-FFF2-40B4-BE49-F238E27FC236}">
-                <a16:creationId xmlns:a16="http://schemas.microsoft.com/office/drawing/2014/main" id="{F4B62B4A-7A41-43E4-A109-013A5572D31F}"/>
+                <a16:creationId xmlns:a16="http://schemas.microsoft.com/office/drawing/2014/main" id="{0F12341C-7A8D-41B5-B05C-CC77DA279EB4}"/>
               </a:ext>
             </a:extLst>
           </p:cNvPr>
@@ -31604,7 +31604,7 @@
           <p:cNvPr id="30" name="">
             <a:extLst xmlns:a="http://schemas.openxmlformats.org/drawingml/2006/main">
               <a:ext uri="{FF2B5EF4-FFF2-40B4-BE49-F238E27FC236}">
-                <a16:creationId xmlns:a16="http://schemas.microsoft.com/office/drawing/2014/main" id="{39D60275-97EE-4DB6-A024-F403A3C81059}"/>
+                <a16:creationId xmlns:a16="http://schemas.microsoft.com/office/drawing/2014/main" id="{814DC2C3-1D79-42E6-A6F7-AE08A0D99FDB}"/>
               </a:ext>
             </a:extLst>
           </p:cNvPr>
@@ -31656,7 +31656,7 @@
           <p:cNvPr id="31" name="">
             <a:extLst xmlns:a="http://schemas.openxmlformats.org/drawingml/2006/main">
               <a:ext uri="{FF2B5EF4-FFF2-40B4-BE49-F238E27FC236}">
-                <a16:creationId xmlns:a16="http://schemas.microsoft.com/office/drawing/2014/main" id="{62D6AFAE-AFCF-40AA-8B53-43B8E964833A}"/>
+                <a16:creationId xmlns:a16="http://schemas.microsoft.com/office/drawing/2014/main" id="{35CF15E7-375B-42C4-93B5-8E1C2582419C}"/>
               </a:ext>
             </a:extLst>
           </p:cNvPr>
@@ -31708,7 +31708,7 @@
           <p:cNvPr id="32" name="">
             <a:extLst xmlns:a="http://schemas.openxmlformats.org/drawingml/2006/main">
               <a:ext uri="{FF2B5EF4-FFF2-40B4-BE49-F238E27FC236}">
-                <a16:creationId xmlns:a16="http://schemas.microsoft.com/office/drawing/2014/main" id="{12859DC9-B46B-47F6-BC41-F295091E5696}"/>
+                <a16:creationId xmlns:a16="http://schemas.microsoft.com/office/drawing/2014/main" id="{DE7B2775-BF7D-405F-A64C-ECEA8A73F891}"/>
               </a:ext>
             </a:extLst>
           </p:cNvPr>
@@ -31751,7 +31751,7 @@
           <p:cNvPr id="33" name="">
             <a:extLst xmlns:a="http://schemas.openxmlformats.org/drawingml/2006/main">
               <a:ext uri="{FF2B5EF4-FFF2-40B4-BE49-F238E27FC236}">
-                <a16:creationId xmlns:a16="http://schemas.microsoft.com/office/drawing/2014/main" id="{FA0AEF8A-1EA0-47E3-99E9-D1E64E907C07}"/>
+                <a16:creationId xmlns:a16="http://schemas.microsoft.com/office/drawing/2014/main" id="{5968DA26-628D-4DD5-AF13-7EE2CA3386C7}"/>
               </a:ext>
             </a:extLst>
           </p:cNvPr>
@@ -31782,7 +31782,7 @@
           <p:cNvPr id="34" name="">
             <a:extLst xmlns:a="http://schemas.openxmlformats.org/drawingml/2006/main">
               <a:ext uri="{FF2B5EF4-FFF2-40B4-BE49-F238E27FC236}">
-                <a16:creationId xmlns:a16="http://schemas.microsoft.com/office/drawing/2014/main" id="{68BA0A0D-9A5F-44CF-B070-930DFE3298F2}"/>
+                <a16:creationId xmlns:a16="http://schemas.microsoft.com/office/drawing/2014/main" id="{96BA24B2-82D7-4B55-A87E-CBFAE633F434}"/>
               </a:ext>
             </a:extLst>
           </p:cNvPr>
@@ -31813,7 +31813,7 @@
           <p:cNvPr id="35" name="">
             <a:extLst xmlns:a="http://schemas.openxmlformats.org/drawingml/2006/main">
               <a:ext uri="{FF2B5EF4-FFF2-40B4-BE49-F238E27FC236}">
-                <a16:creationId xmlns:a16="http://schemas.microsoft.com/office/drawing/2014/main" id="{E8A36B60-0C27-4FAF-8630-4F66A2BB4A39}"/>
+                <a16:creationId xmlns:a16="http://schemas.microsoft.com/office/drawing/2014/main" id="{48E6321D-FE08-43DE-ABF3-A131CDDF9292}"/>
               </a:ext>
             </a:extLst>
           </p:cNvPr>
@@ -31865,7 +31865,7 @@
           <p:cNvPr id="36" name="">
             <a:extLst xmlns:a="http://schemas.openxmlformats.org/drawingml/2006/main">
               <a:ext uri="{FF2B5EF4-FFF2-40B4-BE49-F238E27FC236}">
-                <a16:creationId xmlns:a16="http://schemas.microsoft.com/office/drawing/2014/main" id="{78B66394-A506-45A0-9BDD-DE04F2FABEB2}"/>
+                <a16:creationId xmlns:a16="http://schemas.microsoft.com/office/drawing/2014/main" id="{932A5EE8-7911-4044-B967-878650B79146}"/>
               </a:ext>
             </a:extLst>
           </p:cNvPr>
@@ -31917,7 +31917,7 @@
           <p:cNvPr id="37" name="">
             <a:extLst xmlns:a="http://schemas.openxmlformats.org/drawingml/2006/main">
               <a:ext uri="{FF2B5EF4-FFF2-40B4-BE49-F238E27FC236}">
-                <a16:creationId xmlns:a16="http://schemas.microsoft.com/office/drawing/2014/main" id="{78391C69-6CDF-45E4-8D06-BE69ADC3ABC7}"/>
+                <a16:creationId xmlns:a16="http://schemas.microsoft.com/office/drawing/2014/main" id="{6FD6581B-D9F3-47F8-A285-679F34F5B665}"/>
               </a:ext>
             </a:extLst>
           </p:cNvPr>
@@ -31973,10 +31973,10 @@
           <p:nvPr/>
         </p:nvPicPr>
         <p:blipFill>
-          <a:blip xmlns:r="http://schemas.openxmlformats.org/officeDocument/2006/relationships" xmlns:a="http://schemas.openxmlformats.org/drawingml/2006/main" r:embed="R75a615180bf34f8f">
+          <a:blip xmlns:r="http://schemas.openxmlformats.org/officeDocument/2006/relationships" xmlns:a="http://schemas.openxmlformats.org/drawingml/2006/main" r:embed="Reabeff4653ca49c5">
             <a:extLst>
               <a:ext uri="{96DAC541-7B7A-43D3-8B79-37D633B846F1}">
-                <asvg:svgBlip xmlns:asvg="http://schemas.microsoft.com/office/drawing/2016/SVG/main" r:embed="Rca62c6035ec54d2c"/>
+                <asvg:svgBlip xmlns:asvg="http://schemas.microsoft.com/office/drawing/2016/SVG/main" r:embed="R60306413a8ec42e2"/>
               </a:ext>
             </a:extLst>
           </a:blip>
@@ -31997,7 +31997,7 @@
           <p:cNvPr id="39" name="">
             <a:extLst xmlns:a="http://schemas.openxmlformats.org/drawingml/2006/main">
               <a:ext uri="{FF2B5EF4-FFF2-40B4-BE49-F238E27FC236}">
-                <a16:creationId xmlns:a16="http://schemas.microsoft.com/office/drawing/2014/main" id="{00E16F42-CDFB-42F8-A2CF-6D18E8722EEF}"/>
+                <a16:creationId xmlns:a16="http://schemas.microsoft.com/office/drawing/2014/main" id="{0216AFFB-2655-4D0F-A995-E071F514C786}"/>
               </a:ext>
             </a:extLst>
           </p:cNvPr>
@@ -32049,7 +32049,7 @@
           <p:cNvPr id="40" name="">
             <a:extLst xmlns:a="http://schemas.openxmlformats.org/drawingml/2006/main">
               <a:ext uri="{FF2B5EF4-FFF2-40B4-BE49-F238E27FC236}">
-                <a16:creationId xmlns:a16="http://schemas.microsoft.com/office/drawing/2014/main" id="{A9961E2A-E677-491E-A0D0-5AE538BDE150}"/>
+                <a16:creationId xmlns:a16="http://schemas.microsoft.com/office/drawing/2014/main" id="{7A7BEAE9-280D-449B-9297-1A471C8DB337}"/>
               </a:ext>
             </a:extLst>
           </p:cNvPr>
@@ -32101,7 +32101,7 @@
           <p:cNvPr id="41" name="">
             <a:extLst xmlns:a="http://schemas.openxmlformats.org/drawingml/2006/main">
               <a:ext uri="{FF2B5EF4-FFF2-40B4-BE49-F238E27FC236}">
-                <a16:creationId xmlns:a16="http://schemas.microsoft.com/office/drawing/2014/main" id="{F4DAA997-498A-4D5E-A492-07874BE61BD4}"/>
+                <a16:creationId xmlns:a16="http://schemas.microsoft.com/office/drawing/2014/main" id="{08E8CCB3-8B31-4045-8C1A-4DCC4927495F}"/>
               </a:ext>
             </a:extLst>
           </p:cNvPr>
@@ -32144,7 +32144,7 @@
           <p:cNvPr id="42" name="">
             <a:extLst xmlns:a="http://schemas.openxmlformats.org/drawingml/2006/main">
               <a:ext uri="{FF2B5EF4-FFF2-40B4-BE49-F238E27FC236}">
-                <a16:creationId xmlns:a16="http://schemas.microsoft.com/office/drawing/2014/main" id="{BCB133D2-00B7-4F19-872D-67F6E62B4FFE}"/>
+                <a16:creationId xmlns:a16="http://schemas.microsoft.com/office/drawing/2014/main" id="{A6DEBEF5-4B58-41D8-97B5-8202CB436DD4}"/>
               </a:ext>
             </a:extLst>
           </p:cNvPr>
@@ -32175,7 +32175,7 @@
           <p:cNvPr id="43" name="">
             <a:extLst xmlns:a="http://schemas.openxmlformats.org/drawingml/2006/main">
               <a:ext uri="{FF2B5EF4-FFF2-40B4-BE49-F238E27FC236}">
-                <a16:creationId xmlns:a16="http://schemas.microsoft.com/office/drawing/2014/main" id="{9B3F1463-A2DC-4D68-9A4B-90E867CE9B94}"/>
+                <a16:creationId xmlns:a16="http://schemas.microsoft.com/office/drawing/2014/main" id="{1143F890-E92D-461F-90E2-098FED7671BD}"/>
               </a:ext>
             </a:extLst>
           </p:cNvPr>
@@ -32206,7 +32206,7 @@
           <p:cNvPr id="44" name="">
             <a:extLst xmlns:a="http://schemas.openxmlformats.org/drawingml/2006/main">
               <a:ext uri="{FF2B5EF4-FFF2-40B4-BE49-F238E27FC236}">
-                <a16:creationId xmlns:a16="http://schemas.microsoft.com/office/drawing/2014/main" id="{6E5D04F4-77F6-4073-ACF4-9845452412A3}"/>
+                <a16:creationId xmlns:a16="http://schemas.microsoft.com/office/drawing/2014/main" id="{FB87E975-0C23-489F-80E6-58C2EDBCE2C3}"/>
               </a:ext>
             </a:extLst>
           </p:cNvPr>
@@ -32249,7 +32249,7 @@
           <p:cNvPr id="45" name="">
             <a:extLst xmlns:a="http://schemas.openxmlformats.org/drawingml/2006/main">
               <a:ext uri="{FF2B5EF4-FFF2-40B4-BE49-F238E27FC236}">
-                <a16:creationId xmlns:a16="http://schemas.microsoft.com/office/drawing/2014/main" id="{53F2D305-1F21-4E83-894A-26182CAACC2C}"/>
+                <a16:creationId xmlns:a16="http://schemas.microsoft.com/office/drawing/2014/main" id="{A4B32371-3780-45A3-A760-C6664B731A7C}"/>
               </a:ext>
             </a:extLst>
           </p:cNvPr>
@@ -32280,7 +32280,7 @@
           <p:cNvPr id="46" name="">
             <a:extLst xmlns:a="http://schemas.openxmlformats.org/drawingml/2006/main">
               <a:ext uri="{FF2B5EF4-FFF2-40B4-BE49-F238E27FC236}">
-                <a16:creationId xmlns:a16="http://schemas.microsoft.com/office/drawing/2014/main" id="{94FC3010-BCBB-4390-BEDF-C531514207F9}"/>
+                <a16:creationId xmlns:a16="http://schemas.microsoft.com/office/drawing/2014/main" id="{7384D7C6-5F58-4049-BF97-74B6FE8A4B71}"/>
               </a:ext>
             </a:extLst>
           </p:cNvPr>
@@ -32311,7 +32311,7 @@
           <p:cNvPr id="47" name="">
             <a:extLst xmlns:a="http://schemas.openxmlformats.org/drawingml/2006/main">
               <a:ext uri="{FF2B5EF4-FFF2-40B4-BE49-F238E27FC236}">
-                <a16:creationId xmlns:a16="http://schemas.microsoft.com/office/drawing/2014/main" id="{7067A708-1B94-49DF-8188-3CA9D7CF3099}"/>
+                <a16:creationId xmlns:a16="http://schemas.microsoft.com/office/drawing/2014/main" id="{BF15CA79-33E4-4728-890D-E82D2752F95A}"/>
               </a:ext>
             </a:extLst>
           </p:cNvPr>
@@ -32363,7 +32363,7 @@
           <p:cNvPr id="48" name="">
             <a:extLst xmlns:a="http://schemas.openxmlformats.org/drawingml/2006/main">
               <a:ext uri="{FF2B5EF4-FFF2-40B4-BE49-F238E27FC236}">
-                <a16:creationId xmlns:a16="http://schemas.microsoft.com/office/drawing/2014/main" id="{98C5D59E-24D4-44B4-9D80-C2F06CB2BA8F}"/>
+                <a16:creationId xmlns:a16="http://schemas.microsoft.com/office/drawing/2014/main" id="{21A6A983-C1F4-483F-9F28-A248B63BB806}"/>
               </a:ext>
             </a:extLst>
           </p:cNvPr>
@@ -32396,7 +32396,7 @@
           <p:cNvPr id="49" name="">
             <a:extLst xmlns:a="http://schemas.openxmlformats.org/drawingml/2006/main">
               <a:ext uri="{FF2B5EF4-FFF2-40B4-BE49-F238E27FC236}">
-                <a16:creationId xmlns:a16="http://schemas.microsoft.com/office/drawing/2014/main" id="{074973DE-58B2-403E-B68B-A806F3655FB6}"/>
+                <a16:creationId xmlns:a16="http://schemas.microsoft.com/office/drawing/2014/main" id="{2ED23E84-41BE-48EF-B3B7-9D6083F8F9C8}"/>
               </a:ext>
             </a:extLst>
           </p:cNvPr>
@@ -32448,7 +32448,7 @@
           <p:cNvPr id="50" name="">
             <a:extLst xmlns:a="http://schemas.openxmlformats.org/drawingml/2006/main">
               <a:ext uri="{FF2B5EF4-FFF2-40B4-BE49-F238E27FC236}">
-                <a16:creationId xmlns:a16="http://schemas.microsoft.com/office/drawing/2014/main" id="{12C14550-AA74-4BF2-91B0-95ED6EB5F9BC}"/>
+                <a16:creationId xmlns:a16="http://schemas.microsoft.com/office/drawing/2014/main" id="{57AF7533-29EE-4B77-AE9B-84484D5E1B37}"/>
               </a:ext>
             </a:extLst>
           </p:cNvPr>
@@ -32500,7 +32500,7 @@
           <p:cNvPr id="51" name="">
             <a:extLst xmlns:a="http://schemas.openxmlformats.org/drawingml/2006/main">
               <a:ext uri="{FF2B5EF4-FFF2-40B4-BE49-F238E27FC236}">
-                <a16:creationId xmlns:a16="http://schemas.microsoft.com/office/drawing/2014/main" id="{88F98381-0E1E-4423-BB97-8FFBA7161481}"/>
+                <a16:creationId xmlns:a16="http://schemas.microsoft.com/office/drawing/2014/main" id="{9448E906-8F1B-4EEA-BCCE-C4FD6D3571D3}"/>
               </a:ext>
             </a:extLst>
           </p:cNvPr>
@@ -32552,7 +32552,7 @@
           <p:cNvPr id="52" name="">
             <a:extLst xmlns:a="http://schemas.openxmlformats.org/drawingml/2006/main">
               <a:ext uri="{FF2B5EF4-FFF2-40B4-BE49-F238E27FC236}">
-                <a16:creationId xmlns:a16="http://schemas.microsoft.com/office/drawing/2014/main" id="{5AE12121-4A12-46A7-8867-2466EBEA7808}"/>
+                <a16:creationId xmlns:a16="http://schemas.microsoft.com/office/drawing/2014/main" id="{90F5C6E8-F053-490A-8B82-37F71BC1F65F}"/>
               </a:ext>
             </a:extLst>
           </p:cNvPr>
@@ -32595,7 +32595,7 @@
           <p:cNvPr id="53" name="">
             <a:extLst xmlns:a="http://schemas.openxmlformats.org/drawingml/2006/main">
               <a:ext uri="{FF2B5EF4-FFF2-40B4-BE49-F238E27FC236}">
-                <a16:creationId xmlns:a16="http://schemas.microsoft.com/office/drawing/2014/main" id="{B48DB07C-BAAA-42A7-BC03-812241045C64}"/>
+                <a16:creationId xmlns:a16="http://schemas.microsoft.com/office/drawing/2014/main" id="{1722AD24-EC8B-4F4D-9DB1-59CF7769BD68}"/>
               </a:ext>
             </a:extLst>
           </p:cNvPr>
@@ -32626,7 +32626,7 @@
           <p:cNvPr id="54" name="">
             <a:extLst xmlns:a="http://schemas.openxmlformats.org/drawingml/2006/main">
               <a:ext uri="{FF2B5EF4-FFF2-40B4-BE49-F238E27FC236}">
-                <a16:creationId xmlns:a16="http://schemas.microsoft.com/office/drawing/2014/main" id="{AA01D7A6-5206-4324-BEF9-2D360F09298C}"/>
+                <a16:creationId xmlns:a16="http://schemas.microsoft.com/office/drawing/2014/main" id="{4E4E9458-AB87-4D1D-8C30-6F615F2FC4E5}"/>
               </a:ext>
             </a:extLst>
           </p:cNvPr>
@@ -32657,7 +32657,7 @@
           <p:cNvPr id="55" name="">
             <a:extLst xmlns:a="http://schemas.openxmlformats.org/drawingml/2006/main">
               <a:ext uri="{FF2B5EF4-FFF2-40B4-BE49-F238E27FC236}">
-                <a16:creationId xmlns:a16="http://schemas.microsoft.com/office/drawing/2014/main" id="{423C5CE3-1942-4654-B0E9-C2DD48A330D6}"/>
+                <a16:creationId xmlns:a16="http://schemas.microsoft.com/office/drawing/2014/main" id="{39C7F977-082B-4BF2-8692-66BABCD35B5C}"/>
               </a:ext>
             </a:extLst>
           </p:cNvPr>
@@ -32709,7 +32709,7 @@
           <p:cNvPr id="56" name="">
             <a:extLst xmlns:a="http://schemas.openxmlformats.org/drawingml/2006/main">
               <a:ext uri="{FF2B5EF4-FFF2-40B4-BE49-F238E27FC236}">
-                <a16:creationId xmlns:a16="http://schemas.microsoft.com/office/drawing/2014/main" id="{39281FC3-76C7-4822-B841-A6EC801F8F6D}"/>
+                <a16:creationId xmlns:a16="http://schemas.microsoft.com/office/drawing/2014/main" id="{4ABC91D2-71FE-4020-A1F7-CDAAE8943600}"/>
               </a:ext>
             </a:extLst>
           </p:cNvPr>
@@ -32742,7 +32742,7 @@
           <p:cNvPr id="57" name="">
             <a:extLst xmlns:a="http://schemas.openxmlformats.org/drawingml/2006/main">
               <a:ext uri="{FF2B5EF4-FFF2-40B4-BE49-F238E27FC236}">
-                <a16:creationId xmlns:a16="http://schemas.microsoft.com/office/drawing/2014/main" id="{66610421-6157-46FB-93C3-89E1C214C811}"/>
+                <a16:creationId xmlns:a16="http://schemas.microsoft.com/office/drawing/2014/main" id="{06713DF2-77BD-4D5B-B5F9-E8864D298F7E}"/>
               </a:ext>
             </a:extLst>
           </p:cNvPr>
@@ -32794,7 +32794,7 @@
           <p:cNvPr id="58" name="">
             <a:extLst xmlns:a="http://schemas.openxmlformats.org/drawingml/2006/main">
               <a:ext uri="{FF2B5EF4-FFF2-40B4-BE49-F238E27FC236}">
-                <a16:creationId xmlns:a16="http://schemas.microsoft.com/office/drawing/2014/main" id="{DC047BBE-D1AA-4069-8046-9F0AF766D745}"/>
+                <a16:creationId xmlns:a16="http://schemas.microsoft.com/office/drawing/2014/main" id="{F8F2D36F-06B0-49D4-9C7D-FED462F6F3DE}"/>
               </a:ext>
             </a:extLst>
           </p:cNvPr>
@@ -32846,7 +32846,7 @@
           <p:cNvPr id="59" name="">
             <a:extLst xmlns:a="http://schemas.openxmlformats.org/drawingml/2006/main">
               <a:ext uri="{FF2B5EF4-FFF2-40B4-BE49-F238E27FC236}">
-                <a16:creationId xmlns:a16="http://schemas.microsoft.com/office/drawing/2014/main" id="{015C6F62-436A-457C-8E64-F4EDCE93980C}"/>
+                <a16:creationId xmlns:a16="http://schemas.microsoft.com/office/drawing/2014/main" id="{B3750BD2-A9FD-4F07-8708-3CAA904D422E}"/>
               </a:ext>
             </a:extLst>
           </p:cNvPr>
@@ -32898,7 +32898,7 @@
           <p:cNvPr id="60" name="">
             <a:extLst xmlns:a="http://schemas.openxmlformats.org/drawingml/2006/main">
               <a:ext uri="{FF2B5EF4-FFF2-40B4-BE49-F238E27FC236}">
-                <a16:creationId xmlns:a16="http://schemas.microsoft.com/office/drawing/2014/main" id="{18E52C07-439D-4FC6-A9F5-E3D4C12E9F24}"/>
+                <a16:creationId xmlns:a16="http://schemas.microsoft.com/office/drawing/2014/main" id="{3FBDEF10-9731-457C-9BBE-E9B31ED6D6B1}"/>
               </a:ext>
             </a:extLst>
           </p:cNvPr>
@@ -32941,7 +32941,7 @@
           <p:cNvPr id="61" name="">
             <a:extLst xmlns:a="http://schemas.openxmlformats.org/drawingml/2006/main">
               <a:ext uri="{FF2B5EF4-FFF2-40B4-BE49-F238E27FC236}">
-                <a16:creationId xmlns:a16="http://schemas.microsoft.com/office/drawing/2014/main" id="{AECA2520-9171-427D-85B3-3B5B69FBE11B}"/>
+                <a16:creationId xmlns:a16="http://schemas.microsoft.com/office/drawing/2014/main" id="{0221DA54-715D-4765-A6E0-A5C766192C66}"/>
               </a:ext>
             </a:extLst>
           </p:cNvPr>
@@ -32972,7 +32972,7 @@
           <p:cNvPr id="62" name="">
             <a:extLst xmlns:a="http://schemas.openxmlformats.org/drawingml/2006/main">
               <a:ext uri="{FF2B5EF4-FFF2-40B4-BE49-F238E27FC236}">
-                <a16:creationId xmlns:a16="http://schemas.microsoft.com/office/drawing/2014/main" id="{F0DD0D7F-17BF-4D6B-8C53-C3AFA0B61083}"/>
+                <a16:creationId xmlns:a16="http://schemas.microsoft.com/office/drawing/2014/main" id="{9E0F6817-5381-4612-89EB-446A8A698052}"/>
               </a:ext>
             </a:extLst>
           </p:cNvPr>
@@ -33003,7 +33003,7 @@
           <p:cNvPr id="63" name="">
             <a:extLst xmlns:a="http://schemas.openxmlformats.org/drawingml/2006/main">
               <a:ext uri="{FF2B5EF4-FFF2-40B4-BE49-F238E27FC236}">
-                <a16:creationId xmlns:a16="http://schemas.microsoft.com/office/drawing/2014/main" id="{3F962BEF-F3B4-4687-9501-DABC853235CB}"/>
+                <a16:creationId xmlns:a16="http://schemas.microsoft.com/office/drawing/2014/main" id="{5DECB5F3-14D6-4EFA-8207-2E1CEF5B4C30}"/>
               </a:ext>
             </a:extLst>
           </p:cNvPr>
@@ -33055,7 +33055,7 @@
           <p:cNvPr id="64" name="">
             <a:extLst xmlns:a="http://schemas.openxmlformats.org/drawingml/2006/main">
               <a:ext uri="{FF2B5EF4-FFF2-40B4-BE49-F238E27FC236}">
-                <a16:creationId xmlns:a16="http://schemas.microsoft.com/office/drawing/2014/main" id="{D3CEA95D-2DB1-4819-84E0-7A399A4097E8}"/>
+                <a16:creationId xmlns:a16="http://schemas.microsoft.com/office/drawing/2014/main" id="{0811B5AD-57AB-4847-B072-E558FD2A1062}"/>
               </a:ext>
             </a:extLst>
           </p:cNvPr>
@@ -33088,7 +33088,7 @@
           <p:cNvPr id="65" name="">
             <a:extLst xmlns:a="http://schemas.openxmlformats.org/drawingml/2006/main">
               <a:ext uri="{FF2B5EF4-FFF2-40B4-BE49-F238E27FC236}">
-                <a16:creationId xmlns:a16="http://schemas.microsoft.com/office/drawing/2014/main" id="{D8EA55DC-6538-4E84-822E-7F2AD91A2BEB}"/>
+                <a16:creationId xmlns:a16="http://schemas.microsoft.com/office/drawing/2014/main" id="{EE1A68C1-4A84-4DE5-A5AC-A15DD7ED930A}"/>
               </a:ext>
             </a:extLst>
           </p:cNvPr>
@@ -33140,7 +33140,7 @@
           <p:cNvPr id="66" name="">
             <a:extLst xmlns:a="http://schemas.openxmlformats.org/drawingml/2006/main">
               <a:ext uri="{FF2B5EF4-FFF2-40B4-BE49-F238E27FC236}">
-                <a16:creationId xmlns:a16="http://schemas.microsoft.com/office/drawing/2014/main" id="{B10B7659-3484-4760-8550-FB873D9F6005}"/>
+                <a16:creationId xmlns:a16="http://schemas.microsoft.com/office/drawing/2014/main" id="{F4B276FD-EAFC-4D66-8C35-55DA7516A108}"/>
               </a:ext>
             </a:extLst>
           </p:cNvPr>
@@ -33192,7 +33192,7 @@
           <p:cNvPr id="67" name="">
             <a:extLst xmlns:a="http://schemas.openxmlformats.org/drawingml/2006/main">
               <a:ext uri="{FF2B5EF4-FFF2-40B4-BE49-F238E27FC236}">
-                <a16:creationId xmlns:a16="http://schemas.microsoft.com/office/drawing/2014/main" id="{DEA35790-0CA1-4557-B72D-B86FE4C55BBE}"/>
+                <a16:creationId xmlns:a16="http://schemas.microsoft.com/office/drawing/2014/main" id="{41747272-9249-4E75-A013-FD04B24E8000}"/>
               </a:ext>
             </a:extLst>
           </p:cNvPr>
@@ -33244,7 +33244,7 @@
           <p:cNvPr id="68" name="">
             <a:extLst xmlns:a="http://schemas.openxmlformats.org/drawingml/2006/main">
               <a:ext uri="{FF2B5EF4-FFF2-40B4-BE49-F238E27FC236}">
-                <a16:creationId xmlns:a16="http://schemas.microsoft.com/office/drawing/2014/main" id="{3B6AEA1F-1181-4041-9A42-562A74E44098}"/>
+                <a16:creationId xmlns:a16="http://schemas.microsoft.com/office/drawing/2014/main" id="{AE04913B-3177-45AF-BE32-FC1EDF1DA861}"/>
               </a:ext>
             </a:extLst>
           </p:cNvPr>
@@ -33287,7 +33287,7 @@
           <p:cNvPr id="69" name="">
             <a:extLst xmlns:a="http://schemas.openxmlformats.org/drawingml/2006/main">
               <a:ext uri="{FF2B5EF4-FFF2-40B4-BE49-F238E27FC236}">
-                <a16:creationId xmlns:a16="http://schemas.microsoft.com/office/drawing/2014/main" id="{6EF629B3-40B7-4C31-A28B-098F7FEB31AB}"/>
+                <a16:creationId xmlns:a16="http://schemas.microsoft.com/office/drawing/2014/main" id="{EC4B1F35-6DE7-48F5-AD94-70C6D9F37D9D}"/>
               </a:ext>
             </a:extLst>
           </p:cNvPr>
@@ -33318,7 +33318,7 @@
           <p:cNvPr id="70" name="">
             <a:extLst xmlns:a="http://schemas.openxmlformats.org/drawingml/2006/main">
               <a:ext uri="{FF2B5EF4-FFF2-40B4-BE49-F238E27FC236}">
-                <a16:creationId xmlns:a16="http://schemas.microsoft.com/office/drawing/2014/main" id="{3B025236-8BE6-4760-9B30-AFA994EF153B}"/>
+                <a16:creationId xmlns:a16="http://schemas.microsoft.com/office/drawing/2014/main" id="{00402740-FF7B-4247-825C-1452B071DB44}"/>
               </a:ext>
             </a:extLst>
           </p:cNvPr>
@@ -33349,7 +33349,7 @@
           <p:cNvPr id="71" name="">
             <a:extLst xmlns:a="http://schemas.openxmlformats.org/drawingml/2006/main">
               <a:ext uri="{FF2B5EF4-FFF2-40B4-BE49-F238E27FC236}">
-                <a16:creationId xmlns:a16="http://schemas.microsoft.com/office/drawing/2014/main" id="{C4FFCDCD-CA5D-4ED9-B9D5-3E92B8120A70}"/>
+                <a16:creationId xmlns:a16="http://schemas.microsoft.com/office/drawing/2014/main" id="{8BAF4618-D2F5-42ED-9277-EC59E26EFAE0}"/>
               </a:ext>
             </a:extLst>
           </p:cNvPr>
@@ -33401,7 +33401,7 @@
           <p:cNvPr id="72" name="">
             <a:extLst xmlns:a="http://schemas.openxmlformats.org/drawingml/2006/main">
               <a:ext uri="{FF2B5EF4-FFF2-40B4-BE49-F238E27FC236}">
-                <a16:creationId xmlns:a16="http://schemas.microsoft.com/office/drawing/2014/main" id="{4770851B-9EE0-47FD-A908-932FA2D7A723}"/>
+                <a16:creationId xmlns:a16="http://schemas.microsoft.com/office/drawing/2014/main" id="{6498B899-F531-41C9-916C-70A04862CA01}"/>
               </a:ext>
             </a:extLst>
           </p:cNvPr>
@@ -33434,7 +33434,7 @@
           <p:cNvPr id="73" name="">
             <a:extLst xmlns:a="http://schemas.openxmlformats.org/drawingml/2006/main">
               <a:ext uri="{FF2B5EF4-FFF2-40B4-BE49-F238E27FC236}">
-                <a16:creationId xmlns:a16="http://schemas.microsoft.com/office/drawing/2014/main" id="{F8A91241-5EC6-4FB2-89D9-D69D4364FF13}"/>
+                <a16:creationId xmlns:a16="http://schemas.microsoft.com/office/drawing/2014/main" id="{7DA02A18-C9B9-40C3-89F3-7AB2A51D3EC4}"/>
               </a:ext>
             </a:extLst>
           </p:cNvPr>
@@ -33486,7 +33486,7 @@
           <p:cNvPr id="74" name="">
             <a:extLst xmlns:a="http://schemas.openxmlformats.org/drawingml/2006/main">
               <a:ext uri="{FF2B5EF4-FFF2-40B4-BE49-F238E27FC236}">
-                <a16:creationId xmlns:a16="http://schemas.microsoft.com/office/drawing/2014/main" id="{BD99761D-9171-4AB5-9870-4B1601B6B420}"/>
+                <a16:creationId xmlns:a16="http://schemas.microsoft.com/office/drawing/2014/main" id="{1E304A96-317A-4B0B-B894-DEE6D8CE31A8}"/>
               </a:ext>
             </a:extLst>
           </p:cNvPr>
@@ -33538,7 +33538,7 @@
           <p:cNvPr id="75" name="">
             <a:extLst xmlns:a="http://schemas.openxmlformats.org/drawingml/2006/main">
               <a:ext uri="{FF2B5EF4-FFF2-40B4-BE49-F238E27FC236}">
-                <a16:creationId xmlns:a16="http://schemas.microsoft.com/office/drawing/2014/main" id="{E650223B-DC35-44A7-B3AE-469D5EBF9AF3}"/>
+                <a16:creationId xmlns:a16="http://schemas.microsoft.com/office/drawing/2014/main" id="{D60378BB-C9F9-46CC-BDAD-6F94D9E3F000}"/>
               </a:ext>
             </a:extLst>
           </p:cNvPr>
@@ -33588,7 +33588,7 @@
     </p:spTree>
     <p:extLst>
       <p:ext uri="{BB962C8B-B14F-4D97-AF65-F5344CB8AC3E}">
-        <p14:creationId xmlns:p14="http://schemas.microsoft.com/office/powerpoint/2010/main" val="101267671"/>
+        <p14:creationId xmlns:p14="http://schemas.microsoft.com/office/powerpoint/2010/main" val="83178079"/>
       </p:ext>
     </p:extLst>
   </p:cSld>
@@ -33619,7 +33619,7 @@
           <p:cNvPr id="30" name="">
             <a:extLst xmlns:a="http://schemas.openxmlformats.org/drawingml/2006/main">
               <a:ext uri="{FF2B5EF4-FFF2-40B4-BE49-F238E27FC236}">
-                <a16:creationId xmlns:a16="http://schemas.microsoft.com/office/drawing/2014/main" id="{007153C8-62FC-4630-A171-4B95F46FE1AA}"/>
+                <a16:creationId xmlns:a16="http://schemas.microsoft.com/office/drawing/2014/main" id="{331D5881-FEBD-48C0-875D-B15B5AFBE015}"/>
               </a:ext>
             </a:extLst>
           </p:cNvPr>
@@ -33652,7 +33652,7 @@
           <p:cNvPr id="2" name="">
             <a:extLst xmlns:a="http://schemas.openxmlformats.org/drawingml/2006/main">
               <a:ext uri="{FF2B5EF4-FFF2-40B4-BE49-F238E27FC236}">
-                <a16:creationId xmlns:a16="http://schemas.microsoft.com/office/drawing/2014/main" id="{AEA65134-C2A8-42F5-AFB9-44DDC6B713D3}"/>
+                <a16:creationId xmlns:a16="http://schemas.microsoft.com/office/drawing/2014/main" id="{0EA2D109-2584-4AA1-A5DF-6190CEB30859}"/>
               </a:ext>
             </a:extLst>
           </p:cNvPr>
@@ -33683,7 +33683,7 @@
           <p:cNvPr id="3" name="">
             <a:extLst xmlns:a="http://schemas.openxmlformats.org/drawingml/2006/main">
               <a:ext uri="{FF2B5EF4-FFF2-40B4-BE49-F238E27FC236}">
-                <a16:creationId xmlns:a16="http://schemas.microsoft.com/office/drawing/2014/main" id="{592AF7C6-1B87-43B6-8736-B44FF183ED46}"/>
+                <a16:creationId xmlns:a16="http://schemas.microsoft.com/office/drawing/2014/main" id="{F28D5757-E63A-4732-A171-5A23B6E83749}"/>
               </a:ext>
             </a:extLst>
           </p:cNvPr>
@@ -33735,7 +33735,7 @@
           <p:cNvPr id="4" name="">
             <a:extLst xmlns:a="http://schemas.openxmlformats.org/drawingml/2006/main">
               <a:ext uri="{FF2B5EF4-FFF2-40B4-BE49-F238E27FC236}">
-                <a16:creationId xmlns:a16="http://schemas.microsoft.com/office/drawing/2014/main" id="{4AC7B935-89A7-4E4B-A3B0-C86606E74683}"/>
+                <a16:creationId xmlns:a16="http://schemas.microsoft.com/office/drawing/2014/main" id="{B61CA98E-8200-4791-A90F-9499D451F816}"/>
               </a:ext>
             </a:extLst>
           </p:cNvPr>
@@ -33787,7 +33787,7 @@
           <p:cNvPr id="5" name="">
             <a:extLst xmlns:a="http://schemas.openxmlformats.org/drawingml/2006/main">
               <a:ext uri="{FF2B5EF4-FFF2-40B4-BE49-F238E27FC236}">
-                <a16:creationId xmlns:a16="http://schemas.microsoft.com/office/drawing/2014/main" id="{A3BABBCD-C956-4935-96A8-144813EE6E15}"/>
+                <a16:creationId xmlns:a16="http://schemas.microsoft.com/office/drawing/2014/main" id="{05D1521B-1DF2-4766-AE7A-54F472B58BAA}"/>
               </a:ext>
             </a:extLst>
           </p:cNvPr>
@@ -33822,7 +33822,7 @@
           <p:nvPr/>
         </p:nvPicPr>
         <p:blipFill>
-          <a:blip xmlns:r="http://schemas.openxmlformats.org/officeDocument/2006/relationships" xmlns:a="http://schemas.openxmlformats.org/drawingml/2006/main" r:embed="R0defd8b149964c84"/>
+          <a:blip xmlns:r="http://schemas.openxmlformats.org/officeDocument/2006/relationships" xmlns:a="http://schemas.openxmlformats.org/drawingml/2006/main" r:embed="Rad06c7fc952f40af"/>
           <a:stretch xmlns:a="http://schemas.openxmlformats.org/drawingml/2006/main"/>
         </p:blipFill>
         <p:spPr>
@@ -33840,7 +33840,7 @@
           <p:cNvPr id="7" name="">
             <a:extLst xmlns:a="http://schemas.openxmlformats.org/drawingml/2006/main">
               <a:ext uri="{FF2B5EF4-FFF2-40B4-BE49-F238E27FC236}">
-                <a16:creationId xmlns:a16="http://schemas.microsoft.com/office/drawing/2014/main" id="{56E5D7DE-1039-4CB5-8B0F-4102CB726691}"/>
+                <a16:creationId xmlns:a16="http://schemas.microsoft.com/office/drawing/2014/main" id="{384A9DAC-F0A1-4330-8D00-1C326063A2D3}"/>
               </a:ext>
             </a:extLst>
           </p:cNvPr>
@@ -33892,7 +33892,7 @@
           <p:cNvPr id="8" name="">
             <a:extLst xmlns:a="http://schemas.openxmlformats.org/drawingml/2006/main">
               <a:ext uri="{FF2B5EF4-FFF2-40B4-BE49-F238E27FC236}">
-                <a16:creationId xmlns:a16="http://schemas.microsoft.com/office/drawing/2014/main" id="{C9D27809-687B-4CBB-8701-5C956689B50B}"/>
+                <a16:creationId xmlns:a16="http://schemas.microsoft.com/office/drawing/2014/main" id="{B35E178F-538A-421A-808C-412BD65DC350}"/>
               </a:ext>
             </a:extLst>
           </p:cNvPr>
@@ -33944,7 +33944,7 @@
           <p:cNvPr id="9" name="">
             <a:extLst xmlns:a="http://schemas.openxmlformats.org/drawingml/2006/main">
               <a:ext uri="{FF2B5EF4-FFF2-40B4-BE49-F238E27FC236}">
-                <a16:creationId xmlns:a16="http://schemas.microsoft.com/office/drawing/2014/main" id="{BC974BE4-9DCB-43F3-B2F8-5E9EC4A3E754}"/>
+                <a16:creationId xmlns:a16="http://schemas.microsoft.com/office/drawing/2014/main" id="{043E64F2-29B4-4E5B-9DE8-701C8F2198AF}"/>
               </a:ext>
             </a:extLst>
           </p:cNvPr>
@@ -33996,7 +33996,7 @@
           <p:cNvPr id="10" name="">
             <a:extLst xmlns:a="http://schemas.openxmlformats.org/drawingml/2006/main">
               <a:ext uri="{FF2B5EF4-FFF2-40B4-BE49-F238E27FC236}">
-                <a16:creationId xmlns:a16="http://schemas.microsoft.com/office/drawing/2014/main" id="{942F8626-6ABB-4053-809C-188DCF9C4175}"/>
+                <a16:creationId xmlns:a16="http://schemas.microsoft.com/office/drawing/2014/main" id="{64EA1261-413C-4A02-80CE-8A5B4C53F558}"/>
               </a:ext>
             </a:extLst>
           </p:cNvPr>
@@ -34048,7 +34048,7 @@
           <p:cNvPr id="11" name="">
             <a:extLst xmlns:a="http://schemas.openxmlformats.org/drawingml/2006/main">
               <a:ext uri="{FF2B5EF4-FFF2-40B4-BE49-F238E27FC236}">
-                <a16:creationId xmlns:a16="http://schemas.microsoft.com/office/drawing/2014/main" id="{60E4C6CA-537E-4623-9744-787F863E15C1}"/>
+                <a16:creationId xmlns:a16="http://schemas.microsoft.com/office/drawing/2014/main" id="{73821CA5-21ED-45CE-9059-B98B88A63364}"/>
               </a:ext>
             </a:extLst>
           </p:cNvPr>
@@ -34095,10 +34095,10 @@
           <p:nvPr/>
         </p:nvPicPr>
         <p:blipFill>
-          <a:blip xmlns:r="http://schemas.openxmlformats.org/officeDocument/2006/relationships" xmlns:a="http://schemas.openxmlformats.org/drawingml/2006/main" r:embed="Rab491aa2e6a042a4">
+          <a:blip xmlns:r="http://schemas.openxmlformats.org/officeDocument/2006/relationships" xmlns:a="http://schemas.openxmlformats.org/drawingml/2006/main" r:embed="R869136fa23bf45da">
             <a:extLst>
               <a:ext uri="{96DAC541-7B7A-43D3-8B79-37D633B846F1}">
-                <asvg:svgBlip xmlns:asvg="http://schemas.microsoft.com/office/drawing/2016/SVG/main" r:embed="Rdcc260b92b1d409b"/>
+                <asvg:svgBlip xmlns:asvg="http://schemas.microsoft.com/office/drawing/2016/SVG/main" r:embed="R5e3a13da4e6e4391"/>
               </a:ext>
             </a:extLst>
           </a:blip>
@@ -34119,7 +34119,7 @@
           <p:cNvPr id="13" name="">
             <a:extLst xmlns:a="http://schemas.openxmlformats.org/drawingml/2006/main">
               <a:ext uri="{FF2B5EF4-FFF2-40B4-BE49-F238E27FC236}">
-                <a16:creationId xmlns:a16="http://schemas.microsoft.com/office/drawing/2014/main" id="{F267A61C-7D47-4DCE-B24D-12073E24F896}"/>
+                <a16:creationId xmlns:a16="http://schemas.microsoft.com/office/drawing/2014/main" id="{A3204531-EDE3-4405-9F12-09F391C973D3}"/>
               </a:ext>
             </a:extLst>
           </p:cNvPr>
@@ -34152,7 +34152,7 @@
           <p:cNvPr id="14" name="">
             <a:extLst xmlns:a="http://schemas.openxmlformats.org/drawingml/2006/main">
               <a:ext uri="{FF2B5EF4-FFF2-40B4-BE49-F238E27FC236}">
-                <a16:creationId xmlns:a16="http://schemas.microsoft.com/office/drawing/2014/main" id="{ECF69279-9220-4D51-948B-24E61761EF95}"/>
+                <a16:creationId xmlns:a16="http://schemas.microsoft.com/office/drawing/2014/main" id="{F1FCEC6C-0CB9-4E2B-8A29-C340FEA0A157}"/>
               </a:ext>
             </a:extLst>
           </p:cNvPr>
@@ -34204,7 +34204,7 @@
           <p:cNvPr id="15" name="">
             <a:extLst xmlns:a="http://schemas.openxmlformats.org/drawingml/2006/main">
               <a:ext uri="{FF2B5EF4-FFF2-40B4-BE49-F238E27FC236}">
-                <a16:creationId xmlns:a16="http://schemas.microsoft.com/office/drawing/2014/main" id="{883CE5FD-7D51-49EF-B5F4-1042A8D33393}"/>
+                <a16:creationId xmlns:a16="http://schemas.microsoft.com/office/drawing/2014/main" id="{6915781E-6C44-4722-A538-4CAF410465EC}"/>
               </a:ext>
             </a:extLst>
           </p:cNvPr>
@@ -34237,7 +34237,7 @@
           <p:cNvPr id="16" name="">
             <a:extLst xmlns:a="http://schemas.openxmlformats.org/drawingml/2006/main">
               <a:ext uri="{FF2B5EF4-FFF2-40B4-BE49-F238E27FC236}">
-                <a16:creationId xmlns:a16="http://schemas.microsoft.com/office/drawing/2014/main" id="{19A0E0AB-526D-4CD6-A8FE-7BBDE833C43F}"/>
+                <a16:creationId xmlns:a16="http://schemas.microsoft.com/office/drawing/2014/main" id="{54C82940-3027-4444-8206-AA47F0043874}"/>
               </a:ext>
             </a:extLst>
           </p:cNvPr>
@@ -34289,7 +34289,7 @@
           <p:cNvPr id="17" name="">
             <a:extLst xmlns:a="http://schemas.openxmlformats.org/drawingml/2006/main">
               <a:ext uri="{FF2B5EF4-FFF2-40B4-BE49-F238E27FC236}">
-                <a16:creationId xmlns:a16="http://schemas.microsoft.com/office/drawing/2014/main" id="{3BD0AA9E-33DD-4153-8469-982373806E51}"/>
+                <a16:creationId xmlns:a16="http://schemas.microsoft.com/office/drawing/2014/main" id="{60CFA7B3-92F2-493D-94AB-A76BDD5CD840}"/>
               </a:ext>
             </a:extLst>
           </p:cNvPr>
@@ -34322,7 +34322,7 @@
           <p:cNvPr id="18" name="">
             <a:extLst xmlns:a="http://schemas.openxmlformats.org/drawingml/2006/main">
               <a:ext uri="{FF2B5EF4-FFF2-40B4-BE49-F238E27FC236}">
-                <a16:creationId xmlns:a16="http://schemas.microsoft.com/office/drawing/2014/main" id="{7E6D4023-773A-43B4-B44F-FD779BC842EF}"/>
+                <a16:creationId xmlns:a16="http://schemas.microsoft.com/office/drawing/2014/main" id="{2BFB4B10-04BC-4C4F-B629-9DE7AEECA178}"/>
               </a:ext>
             </a:extLst>
           </p:cNvPr>
@@ -34374,7 +34374,7 @@
           <p:cNvPr id="19" name="">
             <a:extLst xmlns:a="http://schemas.openxmlformats.org/drawingml/2006/main">
               <a:ext uri="{FF2B5EF4-FFF2-40B4-BE49-F238E27FC236}">
-                <a16:creationId xmlns:a16="http://schemas.microsoft.com/office/drawing/2014/main" id="{7828E3A3-E839-4ED4-96A8-8EC011B41CDE}"/>
+                <a16:creationId xmlns:a16="http://schemas.microsoft.com/office/drawing/2014/main" id="{DD261976-4033-43C9-B7C6-337A9EA76641}"/>
               </a:ext>
             </a:extLst>
           </p:cNvPr>
@@ -34407,7 +34407,7 @@
           <p:cNvPr id="20" name="">
             <a:extLst xmlns:a="http://schemas.openxmlformats.org/drawingml/2006/main">
               <a:ext uri="{FF2B5EF4-FFF2-40B4-BE49-F238E27FC236}">
-                <a16:creationId xmlns:a16="http://schemas.microsoft.com/office/drawing/2014/main" id="{D21BAA85-5338-4DEC-9CDB-C8D7723B25ED}"/>
+                <a16:creationId xmlns:a16="http://schemas.microsoft.com/office/drawing/2014/main" id="{FFECE5F2-9CEB-4A71-A31D-14F94E834F49}"/>
               </a:ext>
             </a:extLst>
           </p:cNvPr>
@@ -34459,7 +34459,7 @@
           <p:cNvPr id="21" name="">
             <a:extLst xmlns:a="http://schemas.openxmlformats.org/drawingml/2006/main">
               <a:ext uri="{FF2B5EF4-FFF2-40B4-BE49-F238E27FC236}">
-                <a16:creationId xmlns:a16="http://schemas.microsoft.com/office/drawing/2014/main" id="{36822452-5093-4815-8D13-9538DAED4752}"/>
+                <a16:creationId xmlns:a16="http://schemas.microsoft.com/office/drawing/2014/main" id="{368E1720-58A5-4397-8B25-777CA16AF7ED}"/>
               </a:ext>
             </a:extLst>
           </p:cNvPr>
@@ -34490,7 +34490,7 @@
           <p:cNvPr id="22" name="">
             <a:extLst xmlns:a="http://schemas.openxmlformats.org/drawingml/2006/main">
               <a:ext uri="{FF2B5EF4-FFF2-40B4-BE49-F238E27FC236}">
-                <a16:creationId xmlns:a16="http://schemas.microsoft.com/office/drawing/2014/main" id="{62013E2E-87DB-46E8-BC72-87FD20017BD7}"/>
+                <a16:creationId xmlns:a16="http://schemas.microsoft.com/office/drawing/2014/main" id="{AA2A106A-888D-4A6C-AA77-8C537016484C}"/>
               </a:ext>
             </a:extLst>
           </p:cNvPr>
@@ -34542,7 +34542,7 @@
           <p:cNvPr id="23" name="">
             <a:extLst xmlns:a="http://schemas.openxmlformats.org/drawingml/2006/main">
               <a:ext uri="{FF2B5EF4-FFF2-40B4-BE49-F238E27FC236}">
-                <a16:creationId xmlns:a16="http://schemas.microsoft.com/office/drawing/2014/main" id="{BEC2B19E-49ED-4A7C-9E2E-3C209B1CE508}"/>
+                <a16:creationId xmlns:a16="http://schemas.microsoft.com/office/drawing/2014/main" id="{09AC2EAA-D12E-4907-B29A-65A812DDF1CD}"/>
               </a:ext>
             </a:extLst>
           </p:cNvPr>
@@ -34594,7 +34594,7 @@
           <p:cNvPr id="24" name="">
             <a:extLst xmlns:a="http://schemas.openxmlformats.org/drawingml/2006/main">
               <a:ext uri="{FF2B5EF4-FFF2-40B4-BE49-F238E27FC236}">
-                <a16:creationId xmlns:a16="http://schemas.microsoft.com/office/drawing/2014/main" id="{08351AD5-D9BB-4F7A-98CC-36DC80FF6CA0}"/>
+                <a16:creationId xmlns:a16="http://schemas.microsoft.com/office/drawing/2014/main" id="{B1C31715-7B5D-47A6-AF33-9146453E49AA}"/>
               </a:ext>
             </a:extLst>
           </p:cNvPr>
@@ -34646,7 +34646,7 @@
           <p:cNvPr id="25" name="">
             <a:extLst xmlns:a="http://schemas.openxmlformats.org/drawingml/2006/main">
               <a:ext uri="{FF2B5EF4-FFF2-40B4-BE49-F238E27FC236}">
-                <a16:creationId xmlns:a16="http://schemas.microsoft.com/office/drawing/2014/main" id="{E77DEC33-425D-4C77-AF0B-F2243C62D519}"/>
+                <a16:creationId xmlns:a16="http://schemas.microsoft.com/office/drawing/2014/main" id="{3B615679-1A0A-463B-85A5-8A8455B17646}"/>
               </a:ext>
             </a:extLst>
           </p:cNvPr>
@@ -34698,7 +34698,7 @@
           <p:cNvPr id="26" name="">
             <a:extLst xmlns:a="http://schemas.openxmlformats.org/drawingml/2006/main">
               <a:ext uri="{FF2B5EF4-FFF2-40B4-BE49-F238E27FC236}">
-                <a16:creationId xmlns:a16="http://schemas.microsoft.com/office/drawing/2014/main" id="{184F713C-F60B-417F-8270-B17D48990FE2}"/>
+                <a16:creationId xmlns:a16="http://schemas.microsoft.com/office/drawing/2014/main" id="{93C1ECA6-0699-4DC9-B318-ABA7AB115DEE}"/>
               </a:ext>
             </a:extLst>
           </p:cNvPr>
@@ -34750,7 +34750,7 @@
           <p:cNvPr id="27" name="">
             <a:extLst xmlns:a="http://schemas.openxmlformats.org/drawingml/2006/main">
               <a:ext uri="{FF2B5EF4-FFF2-40B4-BE49-F238E27FC236}">
-                <a16:creationId xmlns:a16="http://schemas.microsoft.com/office/drawing/2014/main" id="{F31C6398-400C-4DEA-B8FF-88F8A62BA383}"/>
+                <a16:creationId xmlns:a16="http://schemas.microsoft.com/office/drawing/2014/main" id="{D2DFA341-E533-409B-AFCE-C4F6EC83FD5A}"/>
               </a:ext>
             </a:extLst>
           </p:cNvPr>
@@ -34802,7 +34802,7 @@
           <p:cNvPr id="28" name="">
             <a:extLst xmlns:a="http://schemas.openxmlformats.org/drawingml/2006/main">
               <a:ext uri="{FF2B5EF4-FFF2-40B4-BE49-F238E27FC236}">
-                <a16:creationId xmlns:a16="http://schemas.microsoft.com/office/drawing/2014/main" id="{30803BAB-0E82-4380-B688-8E9741CF289A}"/>
+                <a16:creationId xmlns:a16="http://schemas.microsoft.com/office/drawing/2014/main" id="{C03946DF-1357-49E5-94FE-4F01E8ACCCAD}"/>
               </a:ext>
             </a:extLst>
           </p:cNvPr>
@@ -34854,7 +34854,7 @@
           <p:cNvPr id="29" name="">
             <a:extLst xmlns:a="http://schemas.openxmlformats.org/drawingml/2006/main">
               <a:ext uri="{FF2B5EF4-FFF2-40B4-BE49-F238E27FC236}">
-                <a16:creationId xmlns:a16="http://schemas.microsoft.com/office/drawing/2014/main" id="{37649D07-1F86-47D7-8171-D2DE8D74FD44}"/>
+                <a16:creationId xmlns:a16="http://schemas.microsoft.com/office/drawing/2014/main" id="{76F63ED5-1E2C-47FF-B69F-D30BCEFB74E0}"/>
               </a:ext>
             </a:extLst>
           </p:cNvPr>
@@ -34904,7 +34904,7 @@
     </p:spTree>
     <p:extLst>
       <p:ext uri="{BB962C8B-B14F-4D97-AF65-F5344CB8AC3E}">
-        <p14:creationId xmlns:p14="http://schemas.microsoft.com/office/powerpoint/2010/main" val="90419140"/>
+        <p14:creationId xmlns:p14="http://schemas.microsoft.com/office/powerpoint/2010/main" val="1802765877"/>
       </p:ext>
     </p:extLst>
   </p:cSld>
@@ -34935,7 +34935,7 @@
           <p:cNvPr id="33" name="">
             <a:extLst xmlns:a="http://schemas.openxmlformats.org/drawingml/2006/main">
               <a:ext uri="{FF2B5EF4-FFF2-40B4-BE49-F238E27FC236}">
-                <a16:creationId xmlns:a16="http://schemas.microsoft.com/office/drawing/2014/main" id="{742A1B8D-51E8-43CF-9B58-18359FDCB15F}"/>
+                <a16:creationId xmlns:a16="http://schemas.microsoft.com/office/drawing/2014/main" id="{FF797035-777B-4F94-9448-6D8491A15F55}"/>
               </a:ext>
             </a:extLst>
           </p:cNvPr>
@@ -34968,7 +34968,7 @@
           <p:cNvPr id="2" name="">
             <a:extLst xmlns:a="http://schemas.openxmlformats.org/drawingml/2006/main">
               <a:ext uri="{FF2B5EF4-FFF2-40B4-BE49-F238E27FC236}">
-                <a16:creationId xmlns:a16="http://schemas.microsoft.com/office/drawing/2014/main" id="{89955E11-1750-4407-8738-38FB667FB176}"/>
+                <a16:creationId xmlns:a16="http://schemas.microsoft.com/office/drawing/2014/main" id="{60926C85-C753-47AD-B095-E8621E98B671}"/>
               </a:ext>
             </a:extLst>
           </p:cNvPr>
@@ -34999,7 +34999,7 @@
           <p:cNvPr id="3" name="">
             <a:extLst xmlns:a="http://schemas.openxmlformats.org/drawingml/2006/main">
               <a:ext uri="{FF2B5EF4-FFF2-40B4-BE49-F238E27FC236}">
-                <a16:creationId xmlns:a16="http://schemas.microsoft.com/office/drawing/2014/main" id="{DD5DEFF1-E2D5-4A55-9668-B3525D0D3EA9}"/>
+                <a16:creationId xmlns:a16="http://schemas.microsoft.com/office/drawing/2014/main" id="{33F83A45-3F72-48DC-8771-4641EEFF6355}"/>
               </a:ext>
             </a:extLst>
           </p:cNvPr>
@@ -35051,7 +35051,7 @@
           <p:cNvPr id="4" name="">
             <a:extLst xmlns:a="http://schemas.openxmlformats.org/drawingml/2006/main">
               <a:ext uri="{FF2B5EF4-FFF2-40B4-BE49-F238E27FC236}">
-                <a16:creationId xmlns:a16="http://schemas.microsoft.com/office/drawing/2014/main" id="{3A3DC2AB-3E4D-4DAA-800C-E92C27AE739F}"/>
+                <a16:creationId xmlns:a16="http://schemas.microsoft.com/office/drawing/2014/main" id="{A6186AB7-4841-4677-A4C6-37B6EAD4D032}"/>
               </a:ext>
             </a:extLst>
           </p:cNvPr>
@@ -35103,7 +35103,7 @@
           <p:cNvPr id="5" name="">
             <a:extLst xmlns:a="http://schemas.openxmlformats.org/drawingml/2006/main">
               <a:ext uri="{FF2B5EF4-FFF2-40B4-BE49-F238E27FC236}">
-                <a16:creationId xmlns:a16="http://schemas.microsoft.com/office/drawing/2014/main" id="{EC610674-4D7B-4A57-B61C-43C0CE870775}"/>
+                <a16:creationId xmlns:a16="http://schemas.microsoft.com/office/drawing/2014/main" id="{66200849-88DF-4692-9883-0B91EBA1EE3C}"/>
               </a:ext>
             </a:extLst>
           </p:cNvPr>
@@ -35138,7 +35138,7 @@
           <p:nvPr/>
         </p:nvPicPr>
         <p:blipFill>
-          <a:blip xmlns:r="http://schemas.openxmlformats.org/officeDocument/2006/relationships" xmlns:a="http://schemas.openxmlformats.org/drawingml/2006/main" r:embed="Re95a1cd224ff47c7"/>
+          <a:blip xmlns:r="http://schemas.openxmlformats.org/officeDocument/2006/relationships" xmlns:a="http://schemas.openxmlformats.org/drawingml/2006/main" r:embed="R03ed0e8e3a074088"/>
           <a:stretch xmlns:a="http://schemas.openxmlformats.org/drawingml/2006/main"/>
         </p:blipFill>
         <p:spPr>
@@ -35156,7 +35156,7 @@
           <p:cNvPr id="7" name="">
             <a:extLst xmlns:a="http://schemas.openxmlformats.org/drawingml/2006/main">
               <a:ext uri="{FF2B5EF4-FFF2-40B4-BE49-F238E27FC236}">
-                <a16:creationId xmlns:a16="http://schemas.microsoft.com/office/drawing/2014/main" id="{6B28BF31-C044-44F5-B2CD-A6F3D2487004}"/>
+                <a16:creationId xmlns:a16="http://schemas.microsoft.com/office/drawing/2014/main" id="{9387DA4A-44DE-433A-A51D-141993078842}"/>
               </a:ext>
             </a:extLst>
           </p:cNvPr>
@@ -35208,7 +35208,7 @@
           <p:cNvPr id="8" name="">
             <a:extLst xmlns:a="http://schemas.openxmlformats.org/drawingml/2006/main">
               <a:ext uri="{FF2B5EF4-FFF2-40B4-BE49-F238E27FC236}">
-                <a16:creationId xmlns:a16="http://schemas.microsoft.com/office/drawing/2014/main" id="{67933EAA-98B6-4195-A8FB-2E4347B00C59}"/>
+                <a16:creationId xmlns:a16="http://schemas.microsoft.com/office/drawing/2014/main" id="{5F2972E9-62DD-497F-AF85-BFCBAFFC59AA}"/>
               </a:ext>
             </a:extLst>
           </p:cNvPr>
@@ -35260,7 +35260,7 @@
           <p:cNvPr id="9" name="">
             <a:extLst xmlns:a="http://schemas.openxmlformats.org/drawingml/2006/main">
               <a:ext uri="{FF2B5EF4-FFF2-40B4-BE49-F238E27FC236}">
-                <a16:creationId xmlns:a16="http://schemas.microsoft.com/office/drawing/2014/main" id="{0D20D3FB-35BF-43A1-A5E4-3358BD5A4C44}"/>
+                <a16:creationId xmlns:a16="http://schemas.microsoft.com/office/drawing/2014/main" id="{56968B25-A5E6-4FD8-A992-794C8D10BD14}"/>
               </a:ext>
             </a:extLst>
           </p:cNvPr>
@@ -35312,7 +35312,7 @@
           <p:cNvPr id="10" name="">
             <a:extLst xmlns:a="http://schemas.openxmlformats.org/drawingml/2006/main">
               <a:ext uri="{FF2B5EF4-FFF2-40B4-BE49-F238E27FC236}">
-                <a16:creationId xmlns:a16="http://schemas.microsoft.com/office/drawing/2014/main" id="{1737EE97-122F-4D9F-AF31-D040A288CA24}"/>
+                <a16:creationId xmlns:a16="http://schemas.microsoft.com/office/drawing/2014/main" id="{A9A3689D-BC12-479F-86D2-19EC0463EE01}"/>
               </a:ext>
             </a:extLst>
           </p:cNvPr>
@@ -35364,7 +35364,7 @@
           <p:cNvPr id="11" name="">
             <a:extLst xmlns:a="http://schemas.openxmlformats.org/drawingml/2006/main">
               <a:ext uri="{FF2B5EF4-FFF2-40B4-BE49-F238E27FC236}">
-                <a16:creationId xmlns:a16="http://schemas.microsoft.com/office/drawing/2014/main" id="{8664B16C-2614-4F61-B697-0F088F4E64F4}"/>
+                <a16:creationId xmlns:a16="http://schemas.microsoft.com/office/drawing/2014/main" id="{59FDBB5D-99E7-4BFB-94A0-DCC2025D1F06}"/>
               </a:ext>
             </a:extLst>
           </p:cNvPr>
@@ -35411,10 +35411,10 @@
           <p:nvPr/>
         </p:nvPicPr>
         <p:blipFill>
-          <a:blip xmlns:r="http://schemas.openxmlformats.org/officeDocument/2006/relationships" xmlns:a="http://schemas.openxmlformats.org/drawingml/2006/main" r:embed="R18137045c6fd43f6">
+          <a:blip xmlns:r="http://schemas.openxmlformats.org/officeDocument/2006/relationships" xmlns:a="http://schemas.openxmlformats.org/drawingml/2006/main" r:embed="Rcd4f825e3a854ba4">
             <a:extLst>
               <a:ext uri="{96DAC541-7B7A-43D3-8B79-37D633B846F1}">
-                <asvg:svgBlip xmlns:asvg="http://schemas.microsoft.com/office/drawing/2016/SVG/main" r:embed="R1f6bb7733a2743a2"/>
+                <asvg:svgBlip xmlns:asvg="http://schemas.microsoft.com/office/drawing/2016/SVG/main" r:embed="R43f410e6555a4c1b"/>
               </a:ext>
             </a:extLst>
           </a:blip>
@@ -35435,7 +35435,7 @@
           <p:cNvPr id="13" name="">
             <a:extLst xmlns:a="http://schemas.openxmlformats.org/drawingml/2006/main">
               <a:ext uri="{FF2B5EF4-FFF2-40B4-BE49-F238E27FC236}">
-                <a16:creationId xmlns:a16="http://schemas.microsoft.com/office/drawing/2014/main" id="{9CAA68A6-B2E4-4EB7-BBD3-7724C6FBEFB2}"/>
+                <a16:creationId xmlns:a16="http://schemas.microsoft.com/office/drawing/2014/main" id="{10F78DA4-550E-454A-8141-2A1631B7B593}"/>
               </a:ext>
             </a:extLst>
           </p:cNvPr>
@@ -35468,7 +35468,7 @@
           <p:cNvPr id="14" name="">
             <a:extLst xmlns:a="http://schemas.openxmlformats.org/drawingml/2006/main">
               <a:ext uri="{FF2B5EF4-FFF2-40B4-BE49-F238E27FC236}">
-                <a16:creationId xmlns:a16="http://schemas.microsoft.com/office/drawing/2014/main" id="{44E8B708-8BAC-4C67-909D-8AC86E286610}"/>
+                <a16:creationId xmlns:a16="http://schemas.microsoft.com/office/drawing/2014/main" id="{E962131D-B592-4099-9E5E-DD7373159953}"/>
               </a:ext>
             </a:extLst>
           </p:cNvPr>
@@ -35520,7 +35520,7 @@
           <p:cNvPr id="15" name="">
             <a:extLst xmlns:a="http://schemas.openxmlformats.org/drawingml/2006/main">
               <a:ext uri="{FF2B5EF4-FFF2-40B4-BE49-F238E27FC236}">
-                <a16:creationId xmlns:a16="http://schemas.microsoft.com/office/drawing/2014/main" id="{F5954F66-9377-44B9-A2F8-A9157B117C9C}"/>
+                <a16:creationId xmlns:a16="http://schemas.microsoft.com/office/drawing/2014/main" id="{B4D78AEF-A056-48B6-BBDE-259C15C5EBF4}"/>
               </a:ext>
             </a:extLst>
           </p:cNvPr>
@@ -35551,7 +35551,7 @@
           <p:cNvPr id="16" name="">
             <a:extLst xmlns:a="http://schemas.openxmlformats.org/drawingml/2006/main">
               <a:ext uri="{FF2B5EF4-FFF2-40B4-BE49-F238E27FC236}">
-                <a16:creationId xmlns:a16="http://schemas.microsoft.com/office/drawing/2014/main" id="{5D45DA8D-47D9-472D-9C88-97674599ADCC}"/>
+                <a16:creationId xmlns:a16="http://schemas.microsoft.com/office/drawing/2014/main" id="{3969B363-0D73-49A6-9B8A-F38B1CDC092C}"/>
               </a:ext>
             </a:extLst>
           </p:cNvPr>
@@ -35582,7 +35582,7 @@
           <p:cNvPr id="17" name="">
             <a:extLst xmlns:a="http://schemas.openxmlformats.org/drawingml/2006/main">
               <a:ext uri="{FF2B5EF4-FFF2-40B4-BE49-F238E27FC236}">
-                <a16:creationId xmlns:a16="http://schemas.microsoft.com/office/drawing/2014/main" id="{2B2F4AE1-2C04-4578-9FB4-B31538CBE34D}"/>
+                <a16:creationId xmlns:a16="http://schemas.microsoft.com/office/drawing/2014/main" id="{C77BA0DD-81F1-4294-8DB2-7E5754575936}"/>
               </a:ext>
             </a:extLst>
           </p:cNvPr>
@@ -35634,7 +35634,7 @@
           <p:cNvPr id="18" name="">
             <a:extLst xmlns:a="http://schemas.openxmlformats.org/drawingml/2006/main">
               <a:ext uri="{FF2B5EF4-FFF2-40B4-BE49-F238E27FC236}">
-                <a16:creationId xmlns:a16="http://schemas.microsoft.com/office/drawing/2014/main" id="{88F2B765-97B7-48E9-8217-80D86A2BF15B}"/>
+                <a16:creationId xmlns:a16="http://schemas.microsoft.com/office/drawing/2014/main" id="{A3B14592-5E57-4637-89FC-0B3466DBD6CE}"/>
               </a:ext>
             </a:extLst>
           </p:cNvPr>
@@ -35667,7 +35667,7 @@
           <p:cNvPr id="19" name="">
             <a:extLst xmlns:a="http://schemas.openxmlformats.org/drawingml/2006/main">
               <a:ext uri="{FF2B5EF4-FFF2-40B4-BE49-F238E27FC236}">
-                <a16:creationId xmlns:a16="http://schemas.microsoft.com/office/drawing/2014/main" id="{8F63170C-CB2B-4900-84DA-7E6E1510B658}"/>
+                <a16:creationId xmlns:a16="http://schemas.microsoft.com/office/drawing/2014/main" id="{8B755E51-0437-4C1F-ABB2-5F3419E97043}"/>
               </a:ext>
             </a:extLst>
           </p:cNvPr>
@@ -35719,7 +35719,7 @@
           <p:cNvPr id="20" name="">
             <a:extLst xmlns:a="http://schemas.openxmlformats.org/drawingml/2006/main">
               <a:ext uri="{FF2B5EF4-FFF2-40B4-BE49-F238E27FC236}">
-                <a16:creationId xmlns:a16="http://schemas.microsoft.com/office/drawing/2014/main" id="{AE6E7B1B-B4E7-454C-B869-B00B8168B46E}"/>
+                <a16:creationId xmlns:a16="http://schemas.microsoft.com/office/drawing/2014/main" id="{D69444A7-67C1-455C-88DE-DD7BD1063D41}"/>
               </a:ext>
             </a:extLst>
           </p:cNvPr>
@@ -35750,7 +35750,7 @@
           <p:cNvPr id="21" name="">
             <a:extLst xmlns:a="http://schemas.openxmlformats.org/drawingml/2006/main">
               <a:ext uri="{FF2B5EF4-FFF2-40B4-BE49-F238E27FC236}">
-                <a16:creationId xmlns:a16="http://schemas.microsoft.com/office/drawing/2014/main" id="{D51394A4-D198-4C2C-9898-8D0E871BBFD0}"/>
+                <a16:creationId xmlns:a16="http://schemas.microsoft.com/office/drawing/2014/main" id="{FC8B30AB-3AD5-4793-A927-E8A26341678C}"/>
               </a:ext>
             </a:extLst>
           </p:cNvPr>
@@ -35781,7 +35781,7 @@
           <p:cNvPr id="22" name="">
             <a:extLst xmlns:a="http://schemas.openxmlformats.org/drawingml/2006/main">
               <a:ext uri="{FF2B5EF4-FFF2-40B4-BE49-F238E27FC236}">
-                <a16:creationId xmlns:a16="http://schemas.microsoft.com/office/drawing/2014/main" id="{B16BD448-E473-4988-96EE-09BDB909EF88}"/>
+                <a16:creationId xmlns:a16="http://schemas.microsoft.com/office/drawing/2014/main" id="{C4797AB3-19CA-49D9-AC5A-66FF6E7D3B23}"/>
               </a:ext>
             </a:extLst>
           </p:cNvPr>
@@ -35833,7 +35833,7 @@
           <p:cNvPr id="23" name="">
             <a:extLst xmlns:a="http://schemas.openxmlformats.org/drawingml/2006/main">
               <a:ext uri="{FF2B5EF4-FFF2-40B4-BE49-F238E27FC236}">
-                <a16:creationId xmlns:a16="http://schemas.microsoft.com/office/drawing/2014/main" id="{FB2A98F8-534C-4A2B-9D93-9596C0D55D21}"/>
+                <a16:creationId xmlns:a16="http://schemas.microsoft.com/office/drawing/2014/main" id="{5A9378E4-57BD-451B-888B-9D907339D6D5}"/>
               </a:ext>
             </a:extLst>
           </p:cNvPr>
@@ -35885,7 +35885,7 @@
           <p:cNvPr id="24" name="">
             <a:extLst xmlns:a="http://schemas.openxmlformats.org/drawingml/2006/main">
               <a:ext uri="{FF2B5EF4-FFF2-40B4-BE49-F238E27FC236}">
-                <a16:creationId xmlns:a16="http://schemas.microsoft.com/office/drawing/2014/main" id="{22747769-6D5A-463A-8BC7-4E1A2BEBFFA1}"/>
+                <a16:creationId xmlns:a16="http://schemas.microsoft.com/office/drawing/2014/main" id="{6FB93B66-EE06-4F58-B9E5-A4EE4E891BF4}"/>
               </a:ext>
             </a:extLst>
           </p:cNvPr>
@@ -35916,7 +35916,7 @@
           <p:cNvPr id="25" name="">
             <a:extLst xmlns:a="http://schemas.openxmlformats.org/drawingml/2006/main">
               <a:ext uri="{FF2B5EF4-FFF2-40B4-BE49-F238E27FC236}">
-                <a16:creationId xmlns:a16="http://schemas.microsoft.com/office/drawing/2014/main" id="{2912F618-A9CC-4B19-BA29-B35042D85B8F}"/>
+                <a16:creationId xmlns:a16="http://schemas.microsoft.com/office/drawing/2014/main" id="{C5F14C8B-F4BC-4359-A386-2B6386751D12}"/>
               </a:ext>
             </a:extLst>
           </p:cNvPr>
@@ -35968,7 +35968,7 @@
           <p:cNvPr id="26" name="">
             <a:extLst xmlns:a="http://schemas.openxmlformats.org/drawingml/2006/main">
               <a:ext uri="{FF2B5EF4-FFF2-40B4-BE49-F238E27FC236}">
-                <a16:creationId xmlns:a16="http://schemas.microsoft.com/office/drawing/2014/main" id="{9B518796-F86C-4F7D-BD69-A139F8D09F5D}"/>
+                <a16:creationId xmlns:a16="http://schemas.microsoft.com/office/drawing/2014/main" id="{DE378721-725D-4E06-805A-760458FE6E68}"/>
               </a:ext>
             </a:extLst>
           </p:cNvPr>
@@ -36020,7 +36020,7 @@
           <p:cNvPr id="27" name="">
             <a:extLst xmlns:a="http://schemas.openxmlformats.org/drawingml/2006/main">
               <a:ext uri="{FF2B5EF4-FFF2-40B4-BE49-F238E27FC236}">
-                <a16:creationId xmlns:a16="http://schemas.microsoft.com/office/drawing/2014/main" id="{7940BA57-1FF2-4CB2-9285-8D33F318CAC6}"/>
+                <a16:creationId xmlns:a16="http://schemas.microsoft.com/office/drawing/2014/main" id="{AFDACDAD-4ECB-41B7-81F2-79AB1497CE58}"/>
               </a:ext>
             </a:extLst>
           </p:cNvPr>
@@ -36072,7 +36072,7 @@
           <p:cNvPr id="28" name="">
             <a:extLst xmlns:a="http://schemas.openxmlformats.org/drawingml/2006/main">
               <a:ext uri="{FF2B5EF4-FFF2-40B4-BE49-F238E27FC236}">
-                <a16:creationId xmlns:a16="http://schemas.microsoft.com/office/drawing/2014/main" id="{CEC63D27-9BC3-49B4-BF7A-FA2CF994882F}"/>
+                <a16:creationId xmlns:a16="http://schemas.microsoft.com/office/drawing/2014/main" id="{8B340948-47A8-4A50-AC3C-75846AD517E1}"/>
               </a:ext>
             </a:extLst>
           </p:cNvPr>
@@ -36124,7 +36124,7 @@
           <p:cNvPr id="29" name="">
             <a:extLst xmlns:a="http://schemas.openxmlformats.org/drawingml/2006/main">
               <a:ext uri="{FF2B5EF4-FFF2-40B4-BE49-F238E27FC236}">
-                <a16:creationId xmlns:a16="http://schemas.microsoft.com/office/drawing/2014/main" id="{6BA4EB9C-BF9A-4324-87E9-F37A1CC3526C}"/>
+                <a16:creationId xmlns:a16="http://schemas.microsoft.com/office/drawing/2014/main" id="{63C26AC7-A567-43EA-B16E-E9B8BC096B58}"/>
               </a:ext>
             </a:extLst>
           </p:cNvPr>
@@ -36176,7 +36176,7 @@
           <p:cNvPr id="30" name="">
             <a:extLst xmlns:a="http://schemas.openxmlformats.org/drawingml/2006/main">
               <a:ext uri="{FF2B5EF4-FFF2-40B4-BE49-F238E27FC236}">
-                <a16:creationId xmlns:a16="http://schemas.microsoft.com/office/drawing/2014/main" id="{E0A2E787-FA77-47A1-9D0E-631303EE83FC}"/>
+                <a16:creationId xmlns:a16="http://schemas.microsoft.com/office/drawing/2014/main" id="{274D768B-12CD-4285-A5F4-963BF6DB4BB2}"/>
               </a:ext>
             </a:extLst>
           </p:cNvPr>
@@ -36228,7 +36228,7 @@
           <p:cNvPr id="31" name="">
             <a:extLst xmlns:a="http://schemas.openxmlformats.org/drawingml/2006/main">
               <a:ext uri="{FF2B5EF4-FFF2-40B4-BE49-F238E27FC236}">
-                <a16:creationId xmlns:a16="http://schemas.microsoft.com/office/drawing/2014/main" id="{49A9CCB1-4D77-4BA3-BB92-A0F95658ADA1}"/>
+                <a16:creationId xmlns:a16="http://schemas.microsoft.com/office/drawing/2014/main" id="{79F71548-5680-435B-8A48-95F26312FE33}"/>
               </a:ext>
             </a:extLst>
           </p:cNvPr>
@@ -36280,7 +36280,7 @@
           <p:cNvPr id="32" name="">
             <a:extLst xmlns:a="http://schemas.openxmlformats.org/drawingml/2006/main">
               <a:ext uri="{FF2B5EF4-FFF2-40B4-BE49-F238E27FC236}">
-                <a16:creationId xmlns:a16="http://schemas.microsoft.com/office/drawing/2014/main" id="{C1AB71EE-9E71-477D-8A42-554ED63F9C9D}"/>
+                <a16:creationId xmlns:a16="http://schemas.microsoft.com/office/drawing/2014/main" id="{26C1360F-6E7A-48D6-9752-7F6D340866FC}"/>
               </a:ext>
             </a:extLst>
           </p:cNvPr>
@@ -36330,7 +36330,7 @@
     </p:spTree>
     <p:extLst>
       <p:ext uri="{BB962C8B-B14F-4D97-AF65-F5344CB8AC3E}">
-        <p14:creationId xmlns:p14="http://schemas.microsoft.com/office/powerpoint/2010/main" val="582396483"/>
+        <p14:creationId xmlns:p14="http://schemas.microsoft.com/office/powerpoint/2010/main" val="697856907"/>
       </p:ext>
     </p:extLst>
   </p:cSld>
@@ -36361,7 +36361,7 @@
           <p:cNvPr id="27" name="">
             <a:extLst xmlns:a="http://schemas.openxmlformats.org/drawingml/2006/main">
               <a:ext uri="{FF2B5EF4-FFF2-40B4-BE49-F238E27FC236}">
-                <a16:creationId xmlns:a16="http://schemas.microsoft.com/office/drawing/2014/main" id="{9A6A0279-8681-4C2D-AC5F-FB158246E170}"/>
+                <a16:creationId xmlns:a16="http://schemas.microsoft.com/office/drawing/2014/main" id="{A87508D3-26D8-481C-998D-7895029A9652}"/>
               </a:ext>
             </a:extLst>
           </p:cNvPr>
@@ -36394,7 +36394,7 @@
           <p:cNvPr id="2" name="">
             <a:extLst xmlns:a="http://schemas.openxmlformats.org/drawingml/2006/main">
               <a:ext uri="{FF2B5EF4-FFF2-40B4-BE49-F238E27FC236}">
-                <a16:creationId xmlns:a16="http://schemas.microsoft.com/office/drawing/2014/main" id="{1C20F255-D247-40B8-B238-101ED894F2B1}"/>
+                <a16:creationId xmlns:a16="http://schemas.microsoft.com/office/drawing/2014/main" id="{000D48F5-FF70-4B96-9945-34615E64B3B4}"/>
               </a:ext>
             </a:extLst>
           </p:cNvPr>
@@ -36425,7 +36425,7 @@
           <p:cNvPr id="3" name="">
             <a:extLst xmlns:a="http://schemas.openxmlformats.org/drawingml/2006/main">
               <a:ext uri="{FF2B5EF4-FFF2-40B4-BE49-F238E27FC236}">
-                <a16:creationId xmlns:a16="http://schemas.microsoft.com/office/drawing/2014/main" id="{35FBBC21-6A3D-4E15-9CB2-B14EF0A79CE6}"/>
+                <a16:creationId xmlns:a16="http://schemas.microsoft.com/office/drawing/2014/main" id="{BFD2F364-4C3B-496A-8692-F86E2756FCDA}"/>
               </a:ext>
             </a:extLst>
           </p:cNvPr>
@@ -36477,7 +36477,7 @@
           <p:cNvPr id="4" name="">
             <a:extLst xmlns:a="http://schemas.openxmlformats.org/drawingml/2006/main">
               <a:ext uri="{FF2B5EF4-FFF2-40B4-BE49-F238E27FC236}">
-                <a16:creationId xmlns:a16="http://schemas.microsoft.com/office/drawing/2014/main" id="{861F2F40-58E9-4908-9E6D-622B33C542C5}"/>
+                <a16:creationId xmlns:a16="http://schemas.microsoft.com/office/drawing/2014/main" id="{6C4CA627-1076-4E6F-875F-127750BC7FBC}"/>
               </a:ext>
             </a:extLst>
           </p:cNvPr>
@@ -36529,7 +36529,7 @@
           <p:cNvPr id="5" name="">
             <a:extLst xmlns:a="http://schemas.openxmlformats.org/drawingml/2006/main">
               <a:ext uri="{FF2B5EF4-FFF2-40B4-BE49-F238E27FC236}">
-                <a16:creationId xmlns:a16="http://schemas.microsoft.com/office/drawing/2014/main" id="{AB0FFE3A-7F26-485C-B78D-E40D17EF415F}"/>
+                <a16:creationId xmlns:a16="http://schemas.microsoft.com/office/drawing/2014/main" id="{0FF1321D-22CB-4A6E-8F32-B406C44C4CC2}"/>
               </a:ext>
             </a:extLst>
           </p:cNvPr>
@@ -36564,7 +36564,7 @@
           <p:nvPr/>
         </p:nvPicPr>
         <p:blipFill>
-          <a:blip xmlns:r="http://schemas.openxmlformats.org/officeDocument/2006/relationships" xmlns:a="http://schemas.openxmlformats.org/drawingml/2006/main" r:embed="R93dbdf7a018141aa"/>
+          <a:blip xmlns:r="http://schemas.openxmlformats.org/officeDocument/2006/relationships" xmlns:a="http://schemas.openxmlformats.org/drawingml/2006/main" r:embed="Rde7b488cbe434d21"/>
           <a:stretch xmlns:a="http://schemas.openxmlformats.org/drawingml/2006/main"/>
         </p:blipFill>
         <p:spPr>
@@ -36582,7 +36582,7 @@
           <p:cNvPr id="7" name="">
             <a:extLst xmlns:a="http://schemas.openxmlformats.org/drawingml/2006/main">
               <a:ext uri="{FF2B5EF4-FFF2-40B4-BE49-F238E27FC236}">
-                <a16:creationId xmlns:a16="http://schemas.microsoft.com/office/drawing/2014/main" id="{50157230-F73D-401B-A829-0EC5F62A34CA}"/>
+                <a16:creationId xmlns:a16="http://schemas.microsoft.com/office/drawing/2014/main" id="{E7A222E3-7F41-4F3E-9836-AF9FBF0BCACB}"/>
               </a:ext>
             </a:extLst>
           </p:cNvPr>
@@ -36634,7 +36634,7 @@
           <p:cNvPr id="8" name="">
             <a:extLst xmlns:a="http://schemas.openxmlformats.org/drawingml/2006/main">
               <a:ext uri="{FF2B5EF4-FFF2-40B4-BE49-F238E27FC236}">
-                <a16:creationId xmlns:a16="http://schemas.microsoft.com/office/drawing/2014/main" id="{DDB73044-B04E-41AD-B447-891741A345F7}"/>
+                <a16:creationId xmlns:a16="http://schemas.microsoft.com/office/drawing/2014/main" id="{E995850E-509C-42DA-99AD-43744911F6F6}"/>
               </a:ext>
             </a:extLst>
           </p:cNvPr>
@@ -36686,7 +36686,7 @@
           <p:cNvPr id="9" name="">
             <a:extLst xmlns:a="http://schemas.openxmlformats.org/drawingml/2006/main">
               <a:ext uri="{FF2B5EF4-FFF2-40B4-BE49-F238E27FC236}">
-                <a16:creationId xmlns:a16="http://schemas.microsoft.com/office/drawing/2014/main" id="{5A747544-FC87-40F9-8A7F-2B2D28C19BE3}"/>
+                <a16:creationId xmlns:a16="http://schemas.microsoft.com/office/drawing/2014/main" id="{B27E7DB3-35F9-4F30-8A7E-1B103B79C957}"/>
               </a:ext>
             </a:extLst>
           </p:cNvPr>
@@ -36738,7 +36738,7 @@
           <p:cNvPr id="10" name="">
             <a:extLst xmlns:a="http://schemas.openxmlformats.org/drawingml/2006/main">
               <a:ext uri="{FF2B5EF4-FFF2-40B4-BE49-F238E27FC236}">
-                <a16:creationId xmlns:a16="http://schemas.microsoft.com/office/drawing/2014/main" id="{3656907E-D14F-4755-AEA7-0DE335BE7087}"/>
+                <a16:creationId xmlns:a16="http://schemas.microsoft.com/office/drawing/2014/main" id="{9E4C087E-6D23-472A-8208-02479C629AA5}"/>
               </a:ext>
             </a:extLst>
           </p:cNvPr>
@@ -36790,7 +36790,7 @@
           <p:cNvPr id="11" name="">
             <a:extLst xmlns:a="http://schemas.openxmlformats.org/drawingml/2006/main">
               <a:ext uri="{FF2B5EF4-FFF2-40B4-BE49-F238E27FC236}">
-                <a16:creationId xmlns:a16="http://schemas.microsoft.com/office/drawing/2014/main" id="{B765C6A1-DC3F-43CA-91F7-41BF25262505}"/>
+                <a16:creationId xmlns:a16="http://schemas.microsoft.com/office/drawing/2014/main" id="{5A433363-B215-461C-9F20-52476F69106C}"/>
               </a:ext>
             </a:extLst>
           </p:cNvPr>
@@ -36837,10 +36837,10 @@
           <p:nvPr/>
         </p:nvPicPr>
         <p:blipFill>
-          <a:blip xmlns:r="http://schemas.openxmlformats.org/officeDocument/2006/relationships" xmlns:a="http://schemas.openxmlformats.org/drawingml/2006/main" r:embed="R5ecf81f199834e6a">
+          <a:blip xmlns:r="http://schemas.openxmlformats.org/officeDocument/2006/relationships" xmlns:a="http://schemas.openxmlformats.org/drawingml/2006/main" r:embed="R65979c923d854309">
             <a:extLst>
               <a:ext uri="{96DAC541-7B7A-43D3-8B79-37D633B846F1}">
-                <asvg:svgBlip xmlns:asvg="http://schemas.microsoft.com/office/drawing/2016/SVG/main" r:embed="R2da63a96c08d46a8"/>
+                <asvg:svgBlip xmlns:asvg="http://schemas.microsoft.com/office/drawing/2016/SVG/main" r:embed="R54441c572d45426d"/>
               </a:ext>
             </a:extLst>
           </a:blip>
@@ -36861,7 +36861,7 @@
           <p:cNvPr id="13" name="">
             <a:extLst xmlns:a="http://schemas.openxmlformats.org/drawingml/2006/main">
               <a:ext uri="{FF2B5EF4-FFF2-40B4-BE49-F238E27FC236}">
-                <a16:creationId xmlns:a16="http://schemas.microsoft.com/office/drawing/2014/main" id="{363570B0-8293-4608-8721-07F6D97AADB0}"/>
+                <a16:creationId xmlns:a16="http://schemas.microsoft.com/office/drawing/2014/main" id="{06B72D2D-6555-43E0-B510-C50670D7F1A7}"/>
               </a:ext>
             </a:extLst>
           </p:cNvPr>
@@ -36894,7 +36894,7 @@
           <p:cNvPr id="14" name="">
             <a:extLst xmlns:a="http://schemas.openxmlformats.org/drawingml/2006/main">
               <a:ext uri="{FF2B5EF4-FFF2-40B4-BE49-F238E27FC236}">
-                <a16:creationId xmlns:a16="http://schemas.microsoft.com/office/drawing/2014/main" id="{070A0112-2803-40AB-875C-B92F7C6A3206}"/>
+                <a16:creationId xmlns:a16="http://schemas.microsoft.com/office/drawing/2014/main" id="{C195CD61-F39F-46C7-96A6-E64EBDC48DC7}"/>
               </a:ext>
             </a:extLst>
           </p:cNvPr>
@@ -36946,7 +36946,7 @@
           <p:cNvPr id="15" name="">
             <a:extLst xmlns:a="http://schemas.openxmlformats.org/drawingml/2006/main">
               <a:ext uri="{FF2B5EF4-FFF2-40B4-BE49-F238E27FC236}">
-                <a16:creationId xmlns:a16="http://schemas.microsoft.com/office/drawing/2014/main" id="{4C24C4E0-ED7D-4A60-AE89-73484E6CAA71}"/>
+                <a16:creationId xmlns:a16="http://schemas.microsoft.com/office/drawing/2014/main" id="{9D36BCF5-066B-4F2B-8324-48C99908C719}"/>
               </a:ext>
             </a:extLst>
           </p:cNvPr>
@@ -36979,7 +36979,7 @@
           <p:cNvPr id="16" name="">
             <a:extLst xmlns:a="http://schemas.openxmlformats.org/drawingml/2006/main">
               <a:ext uri="{FF2B5EF4-FFF2-40B4-BE49-F238E27FC236}">
-                <a16:creationId xmlns:a16="http://schemas.microsoft.com/office/drawing/2014/main" id="{D93261F9-E2EC-4D0F-8F93-BC0AA6888A8B}"/>
+                <a16:creationId xmlns:a16="http://schemas.microsoft.com/office/drawing/2014/main" id="{F20D9C4A-94EF-4E36-B88D-155FBCDF5D92}"/>
               </a:ext>
             </a:extLst>
           </p:cNvPr>
@@ -37031,7 +37031,7 @@
           <p:cNvPr id="17" name="">
             <a:extLst xmlns:a="http://schemas.openxmlformats.org/drawingml/2006/main">
               <a:ext uri="{FF2B5EF4-FFF2-40B4-BE49-F238E27FC236}">
-                <a16:creationId xmlns:a16="http://schemas.microsoft.com/office/drawing/2014/main" id="{56AACFCE-B06C-427F-BEA2-2496C936F8C6}"/>
+                <a16:creationId xmlns:a16="http://schemas.microsoft.com/office/drawing/2014/main" id="{03A9C4E7-5E7E-4EED-B7C1-915776DD6751}"/>
               </a:ext>
             </a:extLst>
           </p:cNvPr>
@@ -37062,7 +37062,7 @@
           <p:cNvPr id="18" name="">
             <a:extLst xmlns:a="http://schemas.openxmlformats.org/drawingml/2006/main">
               <a:ext uri="{FF2B5EF4-FFF2-40B4-BE49-F238E27FC236}">
-                <a16:creationId xmlns:a16="http://schemas.microsoft.com/office/drawing/2014/main" id="{6EF731DC-0E2B-42A6-ACDB-C156F426444C}"/>
+                <a16:creationId xmlns:a16="http://schemas.microsoft.com/office/drawing/2014/main" id="{54164B5D-D8E1-439E-953C-81BB2BD5F3CF}"/>
               </a:ext>
             </a:extLst>
           </p:cNvPr>
@@ -37093,7 +37093,7 @@
           <p:cNvPr id="19" name="">
             <a:extLst xmlns:a="http://schemas.openxmlformats.org/drawingml/2006/main">
               <a:ext uri="{FF2B5EF4-FFF2-40B4-BE49-F238E27FC236}">
-                <a16:creationId xmlns:a16="http://schemas.microsoft.com/office/drawing/2014/main" id="{74C93079-50E5-4A35-9193-215176E60983}"/>
+                <a16:creationId xmlns:a16="http://schemas.microsoft.com/office/drawing/2014/main" id="{425E111E-7370-463F-965B-96DFCB6765EA}"/>
               </a:ext>
             </a:extLst>
           </p:cNvPr>
@@ -37145,7 +37145,7 @@
           <p:cNvPr id="20" name="">
             <a:extLst xmlns:a="http://schemas.openxmlformats.org/drawingml/2006/main">
               <a:ext uri="{FF2B5EF4-FFF2-40B4-BE49-F238E27FC236}">
-                <a16:creationId xmlns:a16="http://schemas.microsoft.com/office/drawing/2014/main" id="{DADF77EF-AA52-4303-BC58-6B4444A943FE}"/>
+                <a16:creationId xmlns:a16="http://schemas.microsoft.com/office/drawing/2014/main" id="{9E403C51-F2FA-449A-9E97-D0B1CDBEBB3C}"/>
               </a:ext>
             </a:extLst>
           </p:cNvPr>
@@ -37176,7 +37176,7 @@
           <p:cNvPr id="21" name="">
             <a:extLst xmlns:a="http://schemas.openxmlformats.org/drawingml/2006/main">
               <a:ext uri="{FF2B5EF4-FFF2-40B4-BE49-F238E27FC236}">
-                <a16:creationId xmlns:a16="http://schemas.microsoft.com/office/drawing/2014/main" id="{C33192D1-ACF3-4A69-96B3-C7364EEC66CA}"/>
+                <a16:creationId xmlns:a16="http://schemas.microsoft.com/office/drawing/2014/main" id="{290F4E18-EFE4-4596-8901-322DE89C1178}"/>
               </a:ext>
             </a:extLst>
           </p:cNvPr>
@@ -37228,7 +37228,7 @@
           <p:cNvPr id="22" name="">
             <a:extLst xmlns:a="http://schemas.openxmlformats.org/drawingml/2006/main">
               <a:ext uri="{FF2B5EF4-FFF2-40B4-BE49-F238E27FC236}">
-                <a16:creationId xmlns:a16="http://schemas.microsoft.com/office/drawing/2014/main" id="{0C5A7C99-2A8B-4156-AC3C-88E74C467136}"/>
+                <a16:creationId xmlns:a16="http://schemas.microsoft.com/office/drawing/2014/main" id="{DC8C8D8C-0DBC-4974-B77E-E29FC3106837}"/>
               </a:ext>
             </a:extLst>
           </p:cNvPr>
@@ -37280,7 +37280,7 @@
           <p:cNvPr id="23" name="">
             <a:extLst xmlns:a="http://schemas.openxmlformats.org/drawingml/2006/main">
               <a:ext uri="{FF2B5EF4-FFF2-40B4-BE49-F238E27FC236}">
-                <a16:creationId xmlns:a16="http://schemas.microsoft.com/office/drawing/2014/main" id="{7BB5049B-FDE3-4CD5-9EC0-C3BD20E1BFB1}"/>
+                <a16:creationId xmlns:a16="http://schemas.microsoft.com/office/drawing/2014/main" id="{32E8F570-8864-47D9-B07A-61A4CF7783C1}"/>
               </a:ext>
             </a:extLst>
           </p:cNvPr>
@@ -37332,7 +37332,7 @@
           <p:cNvPr id="24" name="">
             <a:extLst xmlns:a="http://schemas.openxmlformats.org/drawingml/2006/main">
               <a:ext uri="{FF2B5EF4-FFF2-40B4-BE49-F238E27FC236}">
-                <a16:creationId xmlns:a16="http://schemas.microsoft.com/office/drawing/2014/main" id="{4E53AD72-4BF1-45E5-B148-DA45541F1486}"/>
+                <a16:creationId xmlns:a16="http://schemas.microsoft.com/office/drawing/2014/main" id="{9A9F3D48-7C25-44D5-A4B0-AB8BDC2E339E}"/>
               </a:ext>
             </a:extLst>
           </p:cNvPr>
@@ -37384,7 +37384,7 @@
           <p:cNvPr id="25" name="">
             <a:extLst xmlns:a="http://schemas.openxmlformats.org/drawingml/2006/main">
               <a:ext uri="{FF2B5EF4-FFF2-40B4-BE49-F238E27FC236}">
-                <a16:creationId xmlns:a16="http://schemas.microsoft.com/office/drawing/2014/main" id="{B37B06AE-EDA9-4293-9F01-55C0A8EB4CA5}"/>
+                <a16:creationId xmlns:a16="http://schemas.microsoft.com/office/drawing/2014/main" id="{B5D5EC21-BA61-44CE-9904-C155BC6482D5}"/>
               </a:ext>
             </a:extLst>
           </p:cNvPr>
@@ -37436,7 +37436,7 @@
           <p:cNvPr id="26" name="">
             <a:extLst xmlns:a="http://schemas.openxmlformats.org/drawingml/2006/main">
               <a:ext uri="{FF2B5EF4-FFF2-40B4-BE49-F238E27FC236}">
-                <a16:creationId xmlns:a16="http://schemas.microsoft.com/office/drawing/2014/main" id="{1C988ACF-F314-4CC7-A0A4-33577FD6145B}"/>
+                <a16:creationId xmlns:a16="http://schemas.microsoft.com/office/drawing/2014/main" id="{8070C7E2-4F27-4590-9260-51E300A5138E}"/>
               </a:ext>
             </a:extLst>
           </p:cNvPr>
@@ -37486,7 +37486,7 @@
     </p:spTree>
     <p:extLst>
       <p:ext uri="{BB962C8B-B14F-4D97-AF65-F5344CB8AC3E}">
-        <p14:creationId xmlns:p14="http://schemas.microsoft.com/office/powerpoint/2010/main" val="1025040693"/>
+        <p14:creationId xmlns:p14="http://schemas.microsoft.com/office/powerpoint/2010/main" val="2142323577"/>
       </p:ext>
     </p:extLst>
   </p:cSld>
@@ -37517,7 +37517,7 @@
           <p:cNvPr id="27" name="">
             <a:extLst xmlns:a="http://schemas.openxmlformats.org/drawingml/2006/main">
               <a:ext uri="{FF2B5EF4-FFF2-40B4-BE49-F238E27FC236}">
-                <a16:creationId xmlns:a16="http://schemas.microsoft.com/office/drawing/2014/main" id="{F6DD44BD-B12E-4178-B223-A388535B1C71}"/>
+                <a16:creationId xmlns:a16="http://schemas.microsoft.com/office/drawing/2014/main" id="{FE457182-B7CA-4436-92D2-C196092DF514}"/>
               </a:ext>
             </a:extLst>
           </p:cNvPr>
@@ -37550,7 +37550,7 @@
           <p:cNvPr id="2" name="">
             <a:extLst xmlns:a="http://schemas.openxmlformats.org/drawingml/2006/main">
               <a:ext uri="{FF2B5EF4-FFF2-40B4-BE49-F238E27FC236}">
-                <a16:creationId xmlns:a16="http://schemas.microsoft.com/office/drawing/2014/main" id="{92739371-C8B1-4193-91D8-4A820EDB7B30}"/>
+                <a16:creationId xmlns:a16="http://schemas.microsoft.com/office/drawing/2014/main" id="{05A92DF7-DADE-4207-B62C-9A285F9B5E83}"/>
               </a:ext>
             </a:extLst>
           </p:cNvPr>
@@ -37581,7 +37581,7 @@
           <p:cNvPr id="3" name="">
             <a:extLst xmlns:a="http://schemas.openxmlformats.org/drawingml/2006/main">
               <a:ext uri="{FF2B5EF4-FFF2-40B4-BE49-F238E27FC236}">
-                <a16:creationId xmlns:a16="http://schemas.microsoft.com/office/drawing/2014/main" id="{8A85257D-36E5-42E1-B18E-F3304B2D02C6}"/>
+                <a16:creationId xmlns:a16="http://schemas.microsoft.com/office/drawing/2014/main" id="{0FB1393C-426F-4B0E-B968-A86ADD7DB9A2}"/>
               </a:ext>
             </a:extLst>
           </p:cNvPr>
@@ -37633,7 +37633,7 @@
           <p:cNvPr id="4" name="">
             <a:extLst xmlns:a="http://schemas.openxmlformats.org/drawingml/2006/main">
               <a:ext uri="{FF2B5EF4-FFF2-40B4-BE49-F238E27FC236}">
-                <a16:creationId xmlns:a16="http://schemas.microsoft.com/office/drawing/2014/main" id="{E22B54F9-7229-4006-A5CA-0CA50B16A2C9}"/>
+                <a16:creationId xmlns:a16="http://schemas.microsoft.com/office/drawing/2014/main" id="{A25FC02F-8569-4D69-94FD-E4C72259999B}"/>
               </a:ext>
             </a:extLst>
           </p:cNvPr>
@@ -37685,7 +37685,7 @@
           <p:cNvPr id="5" name="">
             <a:extLst xmlns:a="http://schemas.openxmlformats.org/drawingml/2006/main">
               <a:ext uri="{FF2B5EF4-FFF2-40B4-BE49-F238E27FC236}">
-                <a16:creationId xmlns:a16="http://schemas.microsoft.com/office/drawing/2014/main" id="{42F98D5B-4455-473B-9F61-B41DF8563176}"/>
+                <a16:creationId xmlns:a16="http://schemas.microsoft.com/office/drawing/2014/main" id="{85DC0C29-EC7E-44AB-95B0-D9F6D915F034}"/>
               </a:ext>
             </a:extLst>
           </p:cNvPr>
@@ -37720,7 +37720,7 @@
           <p:nvPr/>
         </p:nvPicPr>
         <p:blipFill>
-          <a:blip xmlns:r="http://schemas.openxmlformats.org/officeDocument/2006/relationships" xmlns:a="http://schemas.openxmlformats.org/drawingml/2006/main" r:embed="Rc0daa43f59ae4e08"/>
+          <a:blip xmlns:r="http://schemas.openxmlformats.org/officeDocument/2006/relationships" xmlns:a="http://schemas.openxmlformats.org/drawingml/2006/main" r:embed="R33d7cd77b2a24b64"/>
           <a:stretch xmlns:a="http://schemas.openxmlformats.org/drawingml/2006/main"/>
         </p:blipFill>
         <p:spPr>
@@ -37738,7 +37738,7 @@
           <p:cNvPr id="7" name="">
             <a:extLst xmlns:a="http://schemas.openxmlformats.org/drawingml/2006/main">
               <a:ext uri="{FF2B5EF4-FFF2-40B4-BE49-F238E27FC236}">
-                <a16:creationId xmlns:a16="http://schemas.microsoft.com/office/drawing/2014/main" id="{671F80B0-F383-427F-A114-C9631B7091B9}"/>
+                <a16:creationId xmlns:a16="http://schemas.microsoft.com/office/drawing/2014/main" id="{66B0ABB3-28D8-4297-97DF-E338A762E262}"/>
               </a:ext>
             </a:extLst>
           </p:cNvPr>
@@ -37790,7 +37790,7 @@
           <p:cNvPr id="8" name="">
             <a:extLst xmlns:a="http://schemas.openxmlformats.org/drawingml/2006/main">
               <a:ext uri="{FF2B5EF4-FFF2-40B4-BE49-F238E27FC236}">
-                <a16:creationId xmlns:a16="http://schemas.microsoft.com/office/drawing/2014/main" id="{BD643266-5448-4ADA-8858-C2084D602D8A}"/>
+                <a16:creationId xmlns:a16="http://schemas.microsoft.com/office/drawing/2014/main" id="{6BE95BC2-555E-4240-9A22-6ACC742AD440}"/>
               </a:ext>
             </a:extLst>
           </p:cNvPr>
@@ -37842,7 +37842,7 @@
           <p:cNvPr id="9" name="">
             <a:extLst xmlns:a="http://schemas.openxmlformats.org/drawingml/2006/main">
               <a:ext uri="{FF2B5EF4-FFF2-40B4-BE49-F238E27FC236}">
-                <a16:creationId xmlns:a16="http://schemas.microsoft.com/office/drawing/2014/main" id="{702E53B6-529F-43AC-BA30-1BD880625488}"/>
+                <a16:creationId xmlns:a16="http://schemas.microsoft.com/office/drawing/2014/main" id="{2BBF6304-C9E3-44DE-B355-27C4F3B52109}"/>
               </a:ext>
             </a:extLst>
           </p:cNvPr>
@@ -37894,7 +37894,7 @@
           <p:cNvPr id="10" name="">
             <a:extLst xmlns:a="http://schemas.openxmlformats.org/drawingml/2006/main">
               <a:ext uri="{FF2B5EF4-FFF2-40B4-BE49-F238E27FC236}">
-                <a16:creationId xmlns:a16="http://schemas.microsoft.com/office/drawing/2014/main" id="{57700678-5535-46FF-9D45-72DEC76E7F12}"/>
+                <a16:creationId xmlns:a16="http://schemas.microsoft.com/office/drawing/2014/main" id="{3B29106E-EE6D-45FB-AE12-F95292E1D73F}"/>
               </a:ext>
             </a:extLst>
           </p:cNvPr>
@@ -37946,7 +37946,7 @@
           <p:cNvPr id="11" name="">
             <a:extLst xmlns:a="http://schemas.openxmlformats.org/drawingml/2006/main">
               <a:ext uri="{FF2B5EF4-FFF2-40B4-BE49-F238E27FC236}">
-                <a16:creationId xmlns:a16="http://schemas.microsoft.com/office/drawing/2014/main" id="{7638E617-82F1-4929-BBDA-683E5F40808C}"/>
+                <a16:creationId xmlns:a16="http://schemas.microsoft.com/office/drawing/2014/main" id="{2D83D202-9363-4203-8AC8-1B933DEE79C4}"/>
               </a:ext>
             </a:extLst>
           </p:cNvPr>
@@ -37993,10 +37993,10 @@
           <p:nvPr/>
         </p:nvPicPr>
         <p:blipFill>
-          <a:blip xmlns:r="http://schemas.openxmlformats.org/officeDocument/2006/relationships" xmlns:a="http://schemas.openxmlformats.org/drawingml/2006/main" r:embed="R2d71f3db52404043">
+          <a:blip xmlns:r="http://schemas.openxmlformats.org/officeDocument/2006/relationships" xmlns:a="http://schemas.openxmlformats.org/drawingml/2006/main" r:embed="R3621a30c54554f85">
             <a:extLst>
               <a:ext uri="{96DAC541-7B7A-43D3-8B79-37D633B846F1}">
-                <asvg:svgBlip xmlns:asvg="http://schemas.microsoft.com/office/drawing/2016/SVG/main" r:embed="Rc7b104422aec4fe0"/>
+                <asvg:svgBlip xmlns:asvg="http://schemas.microsoft.com/office/drawing/2016/SVG/main" r:embed="R68cd9d6067e14089"/>
               </a:ext>
             </a:extLst>
           </a:blip>
@@ -38017,7 +38017,7 @@
           <p:cNvPr id="13" name="">
             <a:extLst xmlns:a="http://schemas.openxmlformats.org/drawingml/2006/main">
               <a:ext uri="{FF2B5EF4-FFF2-40B4-BE49-F238E27FC236}">
-                <a16:creationId xmlns:a16="http://schemas.microsoft.com/office/drawing/2014/main" id="{38574AD7-8E5E-4E3D-A1E6-C09E5DA71121}"/>
+                <a16:creationId xmlns:a16="http://schemas.microsoft.com/office/drawing/2014/main" id="{99B86CDF-702F-4937-8952-4EFA3BEBD366}"/>
               </a:ext>
             </a:extLst>
           </p:cNvPr>
@@ -38050,7 +38050,7 @@
           <p:cNvPr id="14" name="">
             <a:extLst xmlns:a="http://schemas.openxmlformats.org/drawingml/2006/main">
               <a:ext uri="{FF2B5EF4-FFF2-40B4-BE49-F238E27FC236}">
-                <a16:creationId xmlns:a16="http://schemas.microsoft.com/office/drawing/2014/main" id="{811FE18C-2B25-4F03-91AC-B90711F8CC9F}"/>
+                <a16:creationId xmlns:a16="http://schemas.microsoft.com/office/drawing/2014/main" id="{45D4A7E5-1A3D-4DE3-B32B-A6A25CBE66B1}"/>
               </a:ext>
             </a:extLst>
           </p:cNvPr>
@@ -38102,7 +38102,7 @@
           <p:cNvPr id="15" name="">
             <a:extLst xmlns:a="http://schemas.openxmlformats.org/drawingml/2006/main">
               <a:ext uri="{FF2B5EF4-FFF2-40B4-BE49-F238E27FC236}">
-                <a16:creationId xmlns:a16="http://schemas.microsoft.com/office/drawing/2014/main" id="{DB5FFC6D-8751-4863-A6AF-8F549A9AF6DA}"/>
+                <a16:creationId xmlns:a16="http://schemas.microsoft.com/office/drawing/2014/main" id="{7279E9FD-7157-4946-A431-1C89AA6D713B}"/>
               </a:ext>
             </a:extLst>
           </p:cNvPr>
@@ -38135,7 +38135,7 @@
           <p:cNvPr id="16" name="">
             <a:extLst xmlns:a="http://schemas.openxmlformats.org/drawingml/2006/main">
               <a:ext uri="{FF2B5EF4-FFF2-40B4-BE49-F238E27FC236}">
-                <a16:creationId xmlns:a16="http://schemas.microsoft.com/office/drawing/2014/main" id="{3A7669A2-1584-4158-86D1-9BB8E75A94B0}"/>
+                <a16:creationId xmlns:a16="http://schemas.microsoft.com/office/drawing/2014/main" id="{B228C190-7B92-4056-90B5-ACAAEC5AF9A0}"/>
               </a:ext>
             </a:extLst>
           </p:cNvPr>
@@ -38187,7 +38187,7 @@
           <p:cNvPr id="17" name="">
             <a:extLst xmlns:a="http://schemas.openxmlformats.org/drawingml/2006/main">
               <a:ext uri="{FF2B5EF4-FFF2-40B4-BE49-F238E27FC236}">
-                <a16:creationId xmlns:a16="http://schemas.microsoft.com/office/drawing/2014/main" id="{2BDD3AB3-46E2-4EDD-8D55-79B34D6948B1}"/>
+                <a16:creationId xmlns:a16="http://schemas.microsoft.com/office/drawing/2014/main" id="{3FFC3C63-2A52-4EB3-8840-C93D5767B7F6}"/>
               </a:ext>
             </a:extLst>
           </p:cNvPr>
@@ -38220,7 +38220,7 @@
           <p:cNvPr id="18" name="">
             <a:extLst xmlns:a="http://schemas.openxmlformats.org/drawingml/2006/main">
               <a:ext uri="{FF2B5EF4-FFF2-40B4-BE49-F238E27FC236}">
-                <a16:creationId xmlns:a16="http://schemas.microsoft.com/office/drawing/2014/main" id="{DAEB356B-3CA9-488D-974C-DF778CCA3881}"/>
+                <a16:creationId xmlns:a16="http://schemas.microsoft.com/office/drawing/2014/main" id="{334FFAD6-DC3E-4DF8-A3B1-78E0288CDE07}"/>
               </a:ext>
             </a:extLst>
           </p:cNvPr>
@@ -38272,7 +38272,7 @@
           <p:cNvPr id="19" name="">
             <a:extLst xmlns:a="http://schemas.openxmlformats.org/drawingml/2006/main">
               <a:ext uri="{FF2B5EF4-FFF2-40B4-BE49-F238E27FC236}">
-                <a16:creationId xmlns:a16="http://schemas.microsoft.com/office/drawing/2014/main" id="{1D6597D3-975E-42D9-8927-F67166D31725}"/>
+                <a16:creationId xmlns:a16="http://schemas.microsoft.com/office/drawing/2014/main" id="{699DAD6A-D76C-428C-B854-6A667A2774C9}"/>
               </a:ext>
             </a:extLst>
           </p:cNvPr>
@@ -38324,7 +38324,7 @@
           <p:cNvPr id="20" name="">
             <a:extLst xmlns:a="http://schemas.openxmlformats.org/drawingml/2006/main">
               <a:ext uri="{FF2B5EF4-FFF2-40B4-BE49-F238E27FC236}">
-                <a16:creationId xmlns:a16="http://schemas.microsoft.com/office/drawing/2014/main" id="{BD5D414F-FF53-4665-BC33-D51083BCB98D}"/>
+                <a16:creationId xmlns:a16="http://schemas.microsoft.com/office/drawing/2014/main" id="{CE0255A8-BEA9-407C-AD37-B862B2048CC1}"/>
               </a:ext>
             </a:extLst>
           </p:cNvPr>
@@ -38355,7 +38355,7 @@
           <p:cNvPr id="21" name="">
             <a:extLst xmlns:a="http://schemas.openxmlformats.org/drawingml/2006/main">
               <a:ext uri="{FF2B5EF4-FFF2-40B4-BE49-F238E27FC236}">
-                <a16:creationId xmlns:a16="http://schemas.microsoft.com/office/drawing/2014/main" id="{32E96F90-7121-43C2-AA0D-CCEBE3BD03E7}"/>
+                <a16:creationId xmlns:a16="http://schemas.microsoft.com/office/drawing/2014/main" id="{FABE4D33-4D62-4926-9EEE-400312D8F9CA}"/>
               </a:ext>
             </a:extLst>
           </p:cNvPr>
@@ -38407,7 +38407,7 @@
           <p:cNvPr id="22" name="">
             <a:extLst xmlns:a="http://schemas.openxmlformats.org/drawingml/2006/main">
               <a:ext uri="{FF2B5EF4-FFF2-40B4-BE49-F238E27FC236}">
-                <a16:creationId xmlns:a16="http://schemas.microsoft.com/office/drawing/2014/main" id="{2B3AD61D-3921-45E7-8166-E06C8A8DE8AA}"/>
+                <a16:creationId xmlns:a16="http://schemas.microsoft.com/office/drawing/2014/main" id="{9FDDB90F-CA1A-4608-8A15-0D6CC6833C05}"/>
               </a:ext>
             </a:extLst>
           </p:cNvPr>
@@ -38459,7 +38459,7 @@
           <p:cNvPr id="23" name="">
             <a:extLst xmlns:a="http://schemas.openxmlformats.org/drawingml/2006/main">
               <a:ext uri="{FF2B5EF4-FFF2-40B4-BE49-F238E27FC236}">
-                <a16:creationId xmlns:a16="http://schemas.microsoft.com/office/drawing/2014/main" id="{4ECEDB2C-DFA7-4CEC-A2D4-3A8264B2DDC3}"/>
+                <a16:creationId xmlns:a16="http://schemas.microsoft.com/office/drawing/2014/main" id="{436E326C-CE9E-408F-82F7-1B4BB93BBDE8}"/>
               </a:ext>
             </a:extLst>
           </p:cNvPr>
@@ -38511,7 +38511,7 @@
           <p:cNvPr id="24" name="">
             <a:extLst xmlns:a="http://schemas.openxmlformats.org/drawingml/2006/main">
               <a:ext uri="{FF2B5EF4-FFF2-40B4-BE49-F238E27FC236}">
-                <a16:creationId xmlns:a16="http://schemas.microsoft.com/office/drawing/2014/main" id="{42E476A0-84F6-42A3-B992-EC3870C72C26}"/>
+                <a16:creationId xmlns:a16="http://schemas.microsoft.com/office/drawing/2014/main" id="{EBC8566C-C993-474C-A0F4-706F4FCEC3D9}"/>
               </a:ext>
             </a:extLst>
           </p:cNvPr>
@@ -38563,7 +38563,7 @@
           <p:cNvPr id="25" name="">
             <a:extLst xmlns:a="http://schemas.openxmlformats.org/drawingml/2006/main">
               <a:ext uri="{FF2B5EF4-FFF2-40B4-BE49-F238E27FC236}">
-                <a16:creationId xmlns:a16="http://schemas.microsoft.com/office/drawing/2014/main" id="{577F43EC-4A4A-46BA-A5A6-46A419D9E75D}"/>
+                <a16:creationId xmlns:a16="http://schemas.microsoft.com/office/drawing/2014/main" id="{BAA7A44F-56AF-4470-8902-7210BE8FE5AF}"/>
               </a:ext>
             </a:extLst>
           </p:cNvPr>
@@ -38615,7 +38615,7 @@
           <p:cNvPr id="26" name="">
             <a:extLst xmlns:a="http://schemas.openxmlformats.org/drawingml/2006/main">
               <a:ext uri="{FF2B5EF4-FFF2-40B4-BE49-F238E27FC236}">
-                <a16:creationId xmlns:a16="http://schemas.microsoft.com/office/drawing/2014/main" id="{F6DBDF65-4E4E-4D81-91D5-9410C718CF5E}"/>
+                <a16:creationId xmlns:a16="http://schemas.microsoft.com/office/drawing/2014/main" id="{DEE3BF62-4929-498E-8C6A-C30F2058F137}"/>
               </a:ext>
             </a:extLst>
           </p:cNvPr>
@@ -38665,7 +38665,7 @@
     </p:spTree>
     <p:extLst>
       <p:ext uri="{BB962C8B-B14F-4D97-AF65-F5344CB8AC3E}">
-        <p14:creationId xmlns:p14="http://schemas.microsoft.com/office/powerpoint/2010/main" val="1229379757"/>
+        <p14:creationId xmlns:p14="http://schemas.microsoft.com/office/powerpoint/2010/main" val="1674439531"/>
       </p:ext>
     </p:extLst>
   </p:cSld>
@@ -38696,7 +38696,7 @@
           <p:cNvPr id="35" name="">
             <a:extLst xmlns:a="http://schemas.openxmlformats.org/drawingml/2006/main">
               <a:ext uri="{FF2B5EF4-FFF2-40B4-BE49-F238E27FC236}">
-                <a16:creationId xmlns:a16="http://schemas.microsoft.com/office/drawing/2014/main" id="{80299858-E889-45E3-97EC-C107D8BCA036}"/>
+                <a16:creationId xmlns:a16="http://schemas.microsoft.com/office/drawing/2014/main" id="{F219D044-5F48-4C75-A1CE-096CFE202568}"/>
               </a:ext>
             </a:extLst>
           </p:cNvPr>
@@ -38729,7 +38729,7 @@
           <p:cNvPr id="2" name="">
             <a:extLst xmlns:a="http://schemas.openxmlformats.org/drawingml/2006/main">
               <a:ext uri="{FF2B5EF4-FFF2-40B4-BE49-F238E27FC236}">
-                <a16:creationId xmlns:a16="http://schemas.microsoft.com/office/drawing/2014/main" id="{2F53B066-CE79-480D-9DCA-DC30C9833DEE}"/>
+                <a16:creationId xmlns:a16="http://schemas.microsoft.com/office/drawing/2014/main" id="{913418D6-4580-4377-BBCF-456126696DBA}"/>
               </a:ext>
             </a:extLst>
           </p:cNvPr>
@@ -38760,7 +38760,7 @@
           <p:cNvPr id="3" name="">
             <a:extLst xmlns:a="http://schemas.openxmlformats.org/drawingml/2006/main">
               <a:ext uri="{FF2B5EF4-FFF2-40B4-BE49-F238E27FC236}">
-                <a16:creationId xmlns:a16="http://schemas.microsoft.com/office/drawing/2014/main" id="{C399F45A-8E20-4148-8954-2BF24CB75E6D}"/>
+                <a16:creationId xmlns:a16="http://schemas.microsoft.com/office/drawing/2014/main" id="{ABED5DC5-5B04-4BB1-A351-0C4A06B5A4DC}"/>
               </a:ext>
             </a:extLst>
           </p:cNvPr>
@@ -38812,7 +38812,7 @@
           <p:cNvPr id="4" name="">
             <a:extLst xmlns:a="http://schemas.openxmlformats.org/drawingml/2006/main">
               <a:ext uri="{FF2B5EF4-FFF2-40B4-BE49-F238E27FC236}">
-                <a16:creationId xmlns:a16="http://schemas.microsoft.com/office/drawing/2014/main" id="{E5A2258A-2944-4F8C-BC5A-19DC3AF152A2}"/>
+                <a16:creationId xmlns:a16="http://schemas.microsoft.com/office/drawing/2014/main" id="{91FBA498-3AB2-4630-9359-6FEC928AD54D}"/>
               </a:ext>
             </a:extLst>
           </p:cNvPr>
@@ -38864,7 +38864,7 @@
           <p:cNvPr id="5" name="">
             <a:extLst xmlns:a="http://schemas.openxmlformats.org/drawingml/2006/main">
               <a:ext uri="{FF2B5EF4-FFF2-40B4-BE49-F238E27FC236}">
-                <a16:creationId xmlns:a16="http://schemas.microsoft.com/office/drawing/2014/main" id="{B7640C7F-2E2F-48DB-8E13-99B20E6331C0}"/>
+                <a16:creationId xmlns:a16="http://schemas.microsoft.com/office/drawing/2014/main" id="{C37CFF4D-7642-4166-90B3-D08FEAF8B48F}"/>
               </a:ext>
             </a:extLst>
           </p:cNvPr>
@@ -38899,7 +38899,7 @@
           <p:nvPr/>
         </p:nvPicPr>
         <p:blipFill>
-          <a:blip xmlns:r="http://schemas.openxmlformats.org/officeDocument/2006/relationships" xmlns:a="http://schemas.openxmlformats.org/drawingml/2006/main" r:embed="R80993cadf5dc49be"/>
+          <a:blip xmlns:r="http://schemas.openxmlformats.org/officeDocument/2006/relationships" xmlns:a="http://schemas.openxmlformats.org/drawingml/2006/main" r:embed="Rbc2084cd96df48b5"/>
           <a:stretch xmlns:a="http://schemas.openxmlformats.org/drawingml/2006/main"/>
         </p:blipFill>
         <p:spPr>
@@ -38917,7 +38917,7 @@
           <p:cNvPr id="7" name="">
             <a:extLst xmlns:a="http://schemas.openxmlformats.org/drawingml/2006/main">
               <a:ext uri="{FF2B5EF4-FFF2-40B4-BE49-F238E27FC236}">
-                <a16:creationId xmlns:a16="http://schemas.microsoft.com/office/drawing/2014/main" id="{73CDEC35-8A3A-4B14-8195-AF85B06BEBF8}"/>
+                <a16:creationId xmlns:a16="http://schemas.microsoft.com/office/drawing/2014/main" id="{989D0825-1725-414B-B97A-0B44E41AD754}"/>
               </a:ext>
             </a:extLst>
           </p:cNvPr>
@@ -38969,7 +38969,7 @@
           <p:cNvPr id="8" name="">
             <a:extLst xmlns:a="http://schemas.openxmlformats.org/drawingml/2006/main">
               <a:ext uri="{FF2B5EF4-FFF2-40B4-BE49-F238E27FC236}">
-                <a16:creationId xmlns:a16="http://schemas.microsoft.com/office/drawing/2014/main" id="{AD781F06-E022-4723-9AC1-607BEADA2F35}"/>
+                <a16:creationId xmlns:a16="http://schemas.microsoft.com/office/drawing/2014/main" id="{A8D3A197-4535-44A4-830D-4B0C06346B2E}"/>
               </a:ext>
             </a:extLst>
           </p:cNvPr>
@@ -39021,7 +39021,7 @@
           <p:cNvPr id="9" name="">
             <a:extLst xmlns:a="http://schemas.openxmlformats.org/drawingml/2006/main">
               <a:ext uri="{FF2B5EF4-FFF2-40B4-BE49-F238E27FC236}">
-                <a16:creationId xmlns:a16="http://schemas.microsoft.com/office/drawing/2014/main" id="{EA2119A9-407C-4E4E-A41E-8CA93898359E}"/>
+                <a16:creationId xmlns:a16="http://schemas.microsoft.com/office/drawing/2014/main" id="{BA284D9A-8F74-45A6-9774-895987CEDD8A}"/>
               </a:ext>
             </a:extLst>
           </p:cNvPr>
@@ -39073,7 +39073,7 @@
           <p:cNvPr id="10" name="">
             <a:extLst xmlns:a="http://schemas.openxmlformats.org/drawingml/2006/main">
               <a:ext uri="{FF2B5EF4-FFF2-40B4-BE49-F238E27FC236}">
-                <a16:creationId xmlns:a16="http://schemas.microsoft.com/office/drawing/2014/main" id="{CB57E9A7-A9B1-4C26-A411-1EFAA733CEDA}"/>
+                <a16:creationId xmlns:a16="http://schemas.microsoft.com/office/drawing/2014/main" id="{6A251910-BBFB-47DA-A530-82245D3CB4E5}"/>
               </a:ext>
             </a:extLst>
           </p:cNvPr>
@@ -39125,7 +39125,7 @@
           <p:cNvPr id="11" name="">
             <a:extLst xmlns:a="http://schemas.openxmlformats.org/drawingml/2006/main">
               <a:ext uri="{FF2B5EF4-FFF2-40B4-BE49-F238E27FC236}">
-                <a16:creationId xmlns:a16="http://schemas.microsoft.com/office/drawing/2014/main" id="{8EAA331E-3ED5-495C-868A-39A35451E4E5}"/>
+                <a16:creationId xmlns:a16="http://schemas.microsoft.com/office/drawing/2014/main" id="{FD4F2B59-50B1-4C8C-9BE3-2171CA03E59E}"/>
               </a:ext>
             </a:extLst>
           </p:cNvPr>
@@ -39172,10 +39172,10 @@
           <p:nvPr/>
         </p:nvPicPr>
         <p:blipFill>
-          <a:blip xmlns:r="http://schemas.openxmlformats.org/officeDocument/2006/relationships" xmlns:a="http://schemas.openxmlformats.org/drawingml/2006/main" r:embed="R4ffb4ec6d33d4a45">
+          <a:blip xmlns:r="http://schemas.openxmlformats.org/officeDocument/2006/relationships" xmlns:a="http://schemas.openxmlformats.org/drawingml/2006/main" r:embed="R7d88c87dfb504f44">
             <a:extLst>
               <a:ext uri="{96DAC541-7B7A-43D3-8B79-37D633B846F1}">
-                <asvg:svgBlip xmlns:asvg="http://schemas.microsoft.com/office/drawing/2016/SVG/main" r:embed="Rc6cb0801e2b74080"/>
+                <asvg:svgBlip xmlns:asvg="http://schemas.microsoft.com/office/drawing/2016/SVG/main" r:embed="R41f183d028e445cd"/>
               </a:ext>
             </a:extLst>
           </a:blip>
@@ -39196,7 +39196,7 @@
           <p:cNvPr id="13" name="">
             <a:extLst xmlns:a="http://schemas.openxmlformats.org/drawingml/2006/main">
               <a:ext uri="{FF2B5EF4-FFF2-40B4-BE49-F238E27FC236}">
-                <a16:creationId xmlns:a16="http://schemas.microsoft.com/office/drawing/2014/main" id="{A60BFAE0-7EE0-4E42-B7E3-57F0B6446BD1}"/>
+                <a16:creationId xmlns:a16="http://schemas.microsoft.com/office/drawing/2014/main" id="{52226B4B-54AB-4658-BD4E-1E068EC01246}"/>
               </a:ext>
             </a:extLst>
           </p:cNvPr>
@@ -39229,7 +39229,7 @@
           <p:cNvPr id="14" name="">
             <a:extLst xmlns:a="http://schemas.openxmlformats.org/drawingml/2006/main">
               <a:ext uri="{FF2B5EF4-FFF2-40B4-BE49-F238E27FC236}">
-                <a16:creationId xmlns:a16="http://schemas.microsoft.com/office/drawing/2014/main" id="{863F9314-8CCD-4F0A-9926-2A05AF748C0C}"/>
+                <a16:creationId xmlns:a16="http://schemas.microsoft.com/office/drawing/2014/main" id="{A08E29E6-5948-443C-9677-C14C091DEF66}"/>
               </a:ext>
             </a:extLst>
           </p:cNvPr>
@@ -39281,7 +39281,7 @@
           <p:cNvPr id="15" name="">
             <a:extLst xmlns:a="http://schemas.openxmlformats.org/drawingml/2006/main">
               <a:ext uri="{FF2B5EF4-FFF2-40B4-BE49-F238E27FC236}">
-                <a16:creationId xmlns:a16="http://schemas.microsoft.com/office/drawing/2014/main" id="{93B9821C-ECFB-4A71-8BEF-D683EE4B8B8F}"/>
+                <a16:creationId xmlns:a16="http://schemas.microsoft.com/office/drawing/2014/main" id="{32AC8864-3738-4A95-B626-51584A183374}"/>
               </a:ext>
             </a:extLst>
           </p:cNvPr>
@@ -39314,7 +39314,7 @@
           <p:cNvPr id="16" name="">
             <a:extLst xmlns:a="http://schemas.openxmlformats.org/drawingml/2006/main">
               <a:ext uri="{FF2B5EF4-FFF2-40B4-BE49-F238E27FC236}">
-                <a16:creationId xmlns:a16="http://schemas.microsoft.com/office/drawing/2014/main" id="{7C4B3ECB-94FB-43D7-BC33-1A0C85A37D44}"/>
+                <a16:creationId xmlns:a16="http://schemas.microsoft.com/office/drawing/2014/main" id="{386C3530-EA3E-4B1D-90EC-F8CD46769D2E}"/>
               </a:ext>
             </a:extLst>
           </p:cNvPr>
@@ -39366,7 +39366,7 @@
           <p:cNvPr id="17" name="">
             <a:extLst xmlns:a="http://schemas.openxmlformats.org/drawingml/2006/main">
               <a:ext uri="{FF2B5EF4-FFF2-40B4-BE49-F238E27FC236}">
-                <a16:creationId xmlns:a16="http://schemas.microsoft.com/office/drawing/2014/main" id="{4DD98589-BFF0-47D1-B76E-2979050DA8CC}"/>
+                <a16:creationId xmlns:a16="http://schemas.microsoft.com/office/drawing/2014/main" id="{58369AF6-F84F-41D2-A588-599F0506844B}"/>
               </a:ext>
             </a:extLst>
           </p:cNvPr>
@@ -39399,7 +39399,7 @@
           <p:cNvPr id="18" name="">
             <a:extLst xmlns:a="http://schemas.openxmlformats.org/drawingml/2006/main">
               <a:ext uri="{FF2B5EF4-FFF2-40B4-BE49-F238E27FC236}">
-                <a16:creationId xmlns:a16="http://schemas.microsoft.com/office/drawing/2014/main" id="{B597B2AC-22E9-4C2B-A220-A99B936F0799}"/>
+                <a16:creationId xmlns:a16="http://schemas.microsoft.com/office/drawing/2014/main" id="{BC6B3A08-21F7-4AB6-8292-1AB6C5E14249}"/>
               </a:ext>
             </a:extLst>
           </p:cNvPr>
@@ -39451,7 +39451,7 @@
           <p:cNvPr id="19" name="">
             <a:extLst xmlns:a="http://schemas.openxmlformats.org/drawingml/2006/main">
               <a:ext uri="{FF2B5EF4-FFF2-40B4-BE49-F238E27FC236}">
-                <a16:creationId xmlns:a16="http://schemas.microsoft.com/office/drawing/2014/main" id="{4996D5B7-54E7-4524-B86B-3BA6E3441EF9}"/>
+                <a16:creationId xmlns:a16="http://schemas.microsoft.com/office/drawing/2014/main" id="{0B58978A-474F-435A-9F34-93A7AC0901A6}"/>
               </a:ext>
             </a:extLst>
           </p:cNvPr>
@@ -39484,7 +39484,7 @@
           <p:cNvPr id="20" name="">
             <a:extLst xmlns:a="http://schemas.openxmlformats.org/drawingml/2006/main">
               <a:ext uri="{FF2B5EF4-FFF2-40B4-BE49-F238E27FC236}">
-                <a16:creationId xmlns:a16="http://schemas.microsoft.com/office/drawing/2014/main" id="{02BAFC0A-CF8A-4217-9FD3-9FCB2D38CA8D}"/>
+                <a16:creationId xmlns:a16="http://schemas.microsoft.com/office/drawing/2014/main" id="{D314880B-9CB9-412A-B2FF-76AFC75998EA}"/>
               </a:ext>
             </a:extLst>
           </p:cNvPr>
@@ -39536,7 +39536,7 @@
           <p:cNvPr id="21" name="">
             <a:extLst xmlns:a="http://schemas.openxmlformats.org/drawingml/2006/main">
               <a:ext uri="{FF2B5EF4-FFF2-40B4-BE49-F238E27FC236}">
-                <a16:creationId xmlns:a16="http://schemas.microsoft.com/office/drawing/2014/main" id="{3FFF3387-E8E4-4E3A-906D-113515DA3138}"/>
+                <a16:creationId xmlns:a16="http://schemas.microsoft.com/office/drawing/2014/main" id="{31038E3D-375D-4064-8119-A81FC6BA23C1}"/>
               </a:ext>
             </a:extLst>
           </p:cNvPr>
@@ -39569,7 +39569,7 @@
           <p:cNvPr id="22" name="">
             <a:extLst xmlns:a="http://schemas.openxmlformats.org/drawingml/2006/main">
               <a:ext uri="{FF2B5EF4-FFF2-40B4-BE49-F238E27FC236}">
-                <a16:creationId xmlns:a16="http://schemas.microsoft.com/office/drawing/2014/main" id="{BF3D2A58-C08C-41A6-9A54-24E86F582DF4}"/>
+                <a16:creationId xmlns:a16="http://schemas.microsoft.com/office/drawing/2014/main" id="{C81DD348-0E51-4FC2-BD72-E5B06436BC23}"/>
               </a:ext>
             </a:extLst>
           </p:cNvPr>
@@ -39621,7 +39621,7 @@
           <p:cNvPr id="23" name="">
             <a:extLst xmlns:a="http://schemas.openxmlformats.org/drawingml/2006/main">
               <a:ext uri="{FF2B5EF4-FFF2-40B4-BE49-F238E27FC236}">
-                <a16:creationId xmlns:a16="http://schemas.microsoft.com/office/drawing/2014/main" id="{0BB3BEA4-2E14-4B51-A4E8-C1545D1AE5EB}"/>
+                <a16:creationId xmlns:a16="http://schemas.microsoft.com/office/drawing/2014/main" id="{9BCEB495-DDAB-4E92-A1A8-C1B30B7B3876}"/>
               </a:ext>
             </a:extLst>
           </p:cNvPr>
@@ -39654,7 +39654,7 @@
           <p:cNvPr id="24" name="">
             <a:extLst xmlns:a="http://schemas.openxmlformats.org/drawingml/2006/main">
               <a:ext uri="{FF2B5EF4-FFF2-40B4-BE49-F238E27FC236}">
-                <a16:creationId xmlns:a16="http://schemas.microsoft.com/office/drawing/2014/main" id="{10E036DB-7CC5-4AEA-BDB6-5FDC033C859C}"/>
+                <a16:creationId xmlns:a16="http://schemas.microsoft.com/office/drawing/2014/main" id="{F95DAE35-1A11-445B-9639-6D5165BA28FF}"/>
               </a:ext>
             </a:extLst>
           </p:cNvPr>
@@ -39706,7 +39706,7 @@
           <p:cNvPr id="25" name="">
             <a:extLst xmlns:a="http://schemas.openxmlformats.org/drawingml/2006/main">
               <a:ext uri="{FF2B5EF4-FFF2-40B4-BE49-F238E27FC236}">
-                <a16:creationId xmlns:a16="http://schemas.microsoft.com/office/drawing/2014/main" id="{1C14974E-CFDC-43DE-9EF2-BB03AE932EBA}"/>
+                <a16:creationId xmlns:a16="http://schemas.microsoft.com/office/drawing/2014/main" id="{2E0A2E67-283A-4A1D-8044-B4EB83E0820F}"/>
               </a:ext>
             </a:extLst>
           </p:cNvPr>
@@ -39739,7 +39739,7 @@
           <p:cNvPr id="26" name="">
             <a:extLst xmlns:a="http://schemas.openxmlformats.org/drawingml/2006/main">
               <a:ext uri="{FF2B5EF4-FFF2-40B4-BE49-F238E27FC236}">
-                <a16:creationId xmlns:a16="http://schemas.microsoft.com/office/drawing/2014/main" id="{61984834-09FF-4B50-8ABB-B90410B043F9}"/>
+                <a16:creationId xmlns:a16="http://schemas.microsoft.com/office/drawing/2014/main" id="{B22BB3FD-C567-456B-98D0-3CDBD613605A}"/>
               </a:ext>
             </a:extLst>
           </p:cNvPr>
@@ -39791,7 +39791,7 @@
           <p:cNvPr id="27" name="">
             <a:extLst xmlns:a="http://schemas.openxmlformats.org/drawingml/2006/main">
               <a:ext uri="{FF2B5EF4-FFF2-40B4-BE49-F238E27FC236}">
-                <a16:creationId xmlns:a16="http://schemas.microsoft.com/office/drawing/2014/main" id="{1C310CA8-6531-434B-8F0A-B8AB95F43143}"/>
+                <a16:creationId xmlns:a16="http://schemas.microsoft.com/office/drawing/2014/main" id="{8F89928C-0D23-49F1-BCE7-230A015A8275}"/>
               </a:ext>
             </a:extLst>
           </p:cNvPr>
@@ -39824,7 +39824,7 @@
           <p:cNvPr id="28" name="">
             <a:extLst xmlns:a="http://schemas.openxmlformats.org/drawingml/2006/main">
               <a:ext uri="{FF2B5EF4-FFF2-40B4-BE49-F238E27FC236}">
-                <a16:creationId xmlns:a16="http://schemas.microsoft.com/office/drawing/2014/main" id="{EAEC0EAB-7556-425F-8568-51223A7C917C}"/>
+                <a16:creationId xmlns:a16="http://schemas.microsoft.com/office/drawing/2014/main" id="{90BB2A55-778C-4E31-B260-5F848E457198}"/>
               </a:ext>
             </a:extLst>
           </p:cNvPr>
@@ -39876,7 +39876,7 @@
           <p:cNvPr id="29" name="">
             <a:extLst xmlns:a="http://schemas.openxmlformats.org/drawingml/2006/main">
               <a:ext uri="{FF2B5EF4-FFF2-40B4-BE49-F238E27FC236}">
-                <a16:creationId xmlns:a16="http://schemas.microsoft.com/office/drawing/2014/main" id="{7DB876E8-EB37-4F55-8B0A-23187656D40C}"/>
+                <a16:creationId xmlns:a16="http://schemas.microsoft.com/office/drawing/2014/main" id="{B78B96B0-171F-442C-B9FB-B2EC61862239}"/>
               </a:ext>
             </a:extLst>
           </p:cNvPr>
@@ -39909,7 +39909,7 @@
           <p:cNvPr id="30" name="">
             <a:extLst xmlns:a="http://schemas.openxmlformats.org/drawingml/2006/main">
               <a:ext uri="{FF2B5EF4-FFF2-40B4-BE49-F238E27FC236}">
-                <a16:creationId xmlns:a16="http://schemas.microsoft.com/office/drawing/2014/main" id="{1D53CAC7-AA67-4A72-9553-CEC046BCC848}"/>
+                <a16:creationId xmlns:a16="http://schemas.microsoft.com/office/drawing/2014/main" id="{31A13251-8C64-4571-8F56-A01FF2530C15}"/>
               </a:ext>
             </a:extLst>
           </p:cNvPr>
@@ -39961,7 +39961,7 @@
           <p:cNvPr id="31" name="">
             <a:extLst xmlns:a="http://schemas.openxmlformats.org/drawingml/2006/main">
               <a:ext uri="{FF2B5EF4-FFF2-40B4-BE49-F238E27FC236}">
-                <a16:creationId xmlns:a16="http://schemas.microsoft.com/office/drawing/2014/main" id="{9FAC1F5B-B5A9-469C-895D-4F75271DE178}"/>
+                <a16:creationId xmlns:a16="http://schemas.microsoft.com/office/drawing/2014/main" id="{8BE506C7-003E-435D-B9D1-20E6DA3355F2}"/>
               </a:ext>
             </a:extLst>
           </p:cNvPr>
@@ -39994,7 +39994,7 @@
           <p:cNvPr id="32" name="">
             <a:extLst xmlns:a="http://schemas.openxmlformats.org/drawingml/2006/main">
               <a:ext uri="{FF2B5EF4-FFF2-40B4-BE49-F238E27FC236}">
-                <a16:creationId xmlns:a16="http://schemas.microsoft.com/office/drawing/2014/main" id="{DEA67930-FDF8-4EB5-AB11-D461FF70F496}"/>
+                <a16:creationId xmlns:a16="http://schemas.microsoft.com/office/drawing/2014/main" id="{BD4C75A9-98F7-4289-856A-F5BB69AF2AAE}"/>
               </a:ext>
             </a:extLst>
           </p:cNvPr>
@@ -40046,7 +40046,7 @@
           <p:cNvPr id="33" name="">
             <a:extLst xmlns:a="http://schemas.openxmlformats.org/drawingml/2006/main">
               <a:ext uri="{FF2B5EF4-FFF2-40B4-BE49-F238E27FC236}">
-                <a16:creationId xmlns:a16="http://schemas.microsoft.com/office/drawing/2014/main" id="{3DA77D9D-E812-47F4-A373-794351111567}"/>
+                <a16:creationId xmlns:a16="http://schemas.microsoft.com/office/drawing/2014/main" id="{AD3DD79C-8ED4-44E8-AE3F-1A2C7A3D8F64}"/>
               </a:ext>
             </a:extLst>
           </p:cNvPr>
@@ -40079,7 +40079,7 @@
           <p:cNvPr id="34" name="">
             <a:extLst xmlns:a="http://schemas.openxmlformats.org/drawingml/2006/main">
               <a:ext uri="{FF2B5EF4-FFF2-40B4-BE49-F238E27FC236}">
-                <a16:creationId xmlns:a16="http://schemas.microsoft.com/office/drawing/2014/main" id="{C5D9EACE-726B-4C38-9105-9B7EC010C64D}"/>
+                <a16:creationId xmlns:a16="http://schemas.microsoft.com/office/drawing/2014/main" id="{B66400A7-4AD3-4346-B61B-FE14D4CFD6CE}"/>
               </a:ext>
             </a:extLst>
           </p:cNvPr>
@@ -40129,7 +40129,7 @@
     </p:spTree>
     <p:extLst>
       <p:ext uri="{BB962C8B-B14F-4D97-AF65-F5344CB8AC3E}">
-        <p14:creationId xmlns:p14="http://schemas.microsoft.com/office/powerpoint/2010/main" val="651475620"/>
+        <p14:creationId xmlns:p14="http://schemas.microsoft.com/office/powerpoint/2010/main" val="1583903107"/>
       </p:ext>
     </p:extLst>
   </p:cSld>
@@ -40160,7 +40160,7 @@
           <p:cNvPr id="102" name="">
             <a:extLst xmlns:a="http://schemas.openxmlformats.org/drawingml/2006/main">
               <a:ext uri="{FF2B5EF4-FFF2-40B4-BE49-F238E27FC236}">
-                <a16:creationId xmlns:a16="http://schemas.microsoft.com/office/drawing/2014/main" id="{7395FB7B-3E6E-43A9-A03B-F7980283AF6D}"/>
+                <a16:creationId xmlns:a16="http://schemas.microsoft.com/office/drawing/2014/main" id="{3A73CA88-658B-417E-AD41-E0D1CCF7BC5F}"/>
               </a:ext>
             </a:extLst>
           </p:cNvPr>
@@ -40193,7 +40193,7 @@
           <p:cNvPr id="2" name="">
             <a:extLst xmlns:a="http://schemas.openxmlformats.org/drawingml/2006/main">
               <a:ext uri="{FF2B5EF4-FFF2-40B4-BE49-F238E27FC236}">
-                <a16:creationId xmlns:a16="http://schemas.microsoft.com/office/drawing/2014/main" id="{B30FDDA0-8E8A-43AD-B9D7-88194E8FE738}"/>
+                <a16:creationId xmlns:a16="http://schemas.microsoft.com/office/drawing/2014/main" id="{51CC2E9D-9027-4F71-87BE-B4A0F2871F54}"/>
               </a:ext>
             </a:extLst>
           </p:cNvPr>
@@ -40224,7 +40224,7 @@
           <p:cNvPr id="3" name="">
             <a:extLst xmlns:a="http://schemas.openxmlformats.org/drawingml/2006/main">
               <a:ext uri="{FF2B5EF4-FFF2-40B4-BE49-F238E27FC236}">
-                <a16:creationId xmlns:a16="http://schemas.microsoft.com/office/drawing/2014/main" id="{73E35D32-BE7C-46AC-AA4E-39C7D8029001}"/>
+                <a16:creationId xmlns:a16="http://schemas.microsoft.com/office/drawing/2014/main" id="{184BFADE-39B8-4ED5-ADD2-2802EA29624D}"/>
               </a:ext>
             </a:extLst>
           </p:cNvPr>
@@ -40276,7 +40276,7 @@
           <p:cNvPr id="4" name="">
             <a:extLst xmlns:a="http://schemas.openxmlformats.org/drawingml/2006/main">
               <a:ext uri="{FF2B5EF4-FFF2-40B4-BE49-F238E27FC236}">
-                <a16:creationId xmlns:a16="http://schemas.microsoft.com/office/drawing/2014/main" id="{F3DE6CA1-67AE-4995-888B-E39AF8D4A3CB}"/>
+                <a16:creationId xmlns:a16="http://schemas.microsoft.com/office/drawing/2014/main" id="{31489109-9190-4177-862A-F19DD1693732}"/>
               </a:ext>
             </a:extLst>
           </p:cNvPr>
@@ -40328,7 +40328,7 @@
           <p:cNvPr id="5" name="">
             <a:extLst xmlns:a="http://schemas.openxmlformats.org/drawingml/2006/main">
               <a:ext uri="{FF2B5EF4-FFF2-40B4-BE49-F238E27FC236}">
-                <a16:creationId xmlns:a16="http://schemas.microsoft.com/office/drawing/2014/main" id="{3D7DCAEF-A70B-4643-92FF-968A20D326EA}"/>
+                <a16:creationId xmlns:a16="http://schemas.microsoft.com/office/drawing/2014/main" id="{A6389772-2903-4625-A7C4-EBFB88F1A158}"/>
               </a:ext>
             </a:extLst>
           </p:cNvPr>
@@ -40363,7 +40363,7 @@
           <p:nvPr/>
         </p:nvPicPr>
         <p:blipFill>
-          <a:blip xmlns:r="http://schemas.openxmlformats.org/officeDocument/2006/relationships" xmlns:a="http://schemas.openxmlformats.org/drawingml/2006/main" r:embed="R768a3751562a4f19"/>
+          <a:blip xmlns:r="http://schemas.openxmlformats.org/officeDocument/2006/relationships" xmlns:a="http://schemas.openxmlformats.org/drawingml/2006/main" r:embed="Rf5c2d78a29b0422d"/>
           <a:stretch xmlns:a="http://schemas.openxmlformats.org/drawingml/2006/main"/>
         </p:blipFill>
         <p:spPr>
@@ -40381,7 +40381,7 @@
           <p:cNvPr id="7" name="">
             <a:extLst xmlns:a="http://schemas.openxmlformats.org/drawingml/2006/main">
               <a:ext uri="{FF2B5EF4-FFF2-40B4-BE49-F238E27FC236}">
-                <a16:creationId xmlns:a16="http://schemas.microsoft.com/office/drawing/2014/main" id="{EFB0847E-B07D-46CE-9AE6-8F9CA65DBA20}"/>
+                <a16:creationId xmlns:a16="http://schemas.microsoft.com/office/drawing/2014/main" id="{D1468EBC-C84E-4D85-9763-F01009481028}"/>
               </a:ext>
             </a:extLst>
           </p:cNvPr>
@@ -40433,7 +40433,7 @@
           <p:cNvPr id="8" name="">
             <a:extLst xmlns:a="http://schemas.openxmlformats.org/drawingml/2006/main">
               <a:ext uri="{FF2B5EF4-FFF2-40B4-BE49-F238E27FC236}">
-                <a16:creationId xmlns:a16="http://schemas.microsoft.com/office/drawing/2014/main" id="{A359936C-2E87-41D9-9A8A-CD5978C22011}"/>
+                <a16:creationId xmlns:a16="http://schemas.microsoft.com/office/drawing/2014/main" id="{CDF036F7-4622-43CB-86F4-D5DA9F188E50}"/>
               </a:ext>
             </a:extLst>
           </p:cNvPr>
@@ -40485,7 +40485,7 @@
           <p:cNvPr id="9" name="">
             <a:extLst xmlns:a="http://schemas.openxmlformats.org/drawingml/2006/main">
               <a:ext uri="{FF2B5EF4-FFF2-40B4-BE49-F238E27FC236}">
-                <a16:creationId xmlns:a16="http://schemas.microsoft.com/office/drawing/2014/main" id="{181F6AA3-F328-4AD4-93C8-895ED004396B}"/>
+                <a16:creationId xmlns:a16="http://schemas.microsoft.com/office/drawing/2014/main" id="{730FA953-774D-4A69-8C05-52BCC15E7929}"/>
               </a:ext>
             </a:extLst>
           </p:cNvPr>
@@ -40537,7 +40537,7 @@
           <p:cNvPr id="10" name="">
             <a:extLst xmlns:a="http://schemas.openxmlformats.org/drawingml/2006/main">
               <a:ext uri="{FF2B5EF4-FFF2-40B4-BE49-F238E27FC236}">
-                <a16:creationId xmlns:a16="http://schemas.microsoft.com/office/drawing/2014/main" id="{2BFC2473-32EE-4AB7-B6F8-A875E7F79F25}"/>
+                <a16:creationId xmlns:a16="http://schemas.microsoft.com/office/drawing/2014/main" id="{451A2AE6-6992-4191-9B9D-4A2D9483D91D}"/>
               </a:ext>
             </a:extLst>
           </p:cNvPr>
@@ -40589,7 +40589,7 @@
           <p:cNvPr id="11" name="">
             <a:extLst xmlns:a="http://schemas.openxmlformats.org/drawingml/2006/main">
               <a:ext uri="{FF2B5EF4-FFF2-40B4-BE49-F238E27FC236}">
-                <a16:creationId xmlns:a16="http://schemas.microsoft.com/office/drawing/2014/main" id="{5410ECC9-EF36-4B7B-96DA-3EC3B19483C7}"/>
+                <a16:creationId xmlns:a16="http://schemas.microsoft.com/office/drawing/2014/main" id="{85D8501F-45D8-45FC-84FE-F049FE031903}"/>
               </a:ext>
             </a:extLst>
           </p:cNvPr>
@@ -40620,7 +40620,7 @@
           <p:cNvPr id="12" name="">
             <a:extLst xmlns:a="http://schemas.openxmlformats.org/drawingml/2006/main">
               <a:ext uri="{FF2B5EF4-FFF2-40B4-BE49-F238E27FC236}">
-                <a16:creationId xmlns:a16="http://schemas.microsoft.com/office/drawing/2014/main" id="{5827B922-570C-4611-9CD1-3514ECCFB8B7}"/>
+                <a16:creationId xmlns:a16="http://schemas.microsoft.com/office/drawing/2014/main" id="{ED682A93-79AC-4977-97A4-9631D2782C66}"/>
               </a:ext>
             </a:extLst>
           </p:cNvPr>
@@ -40651,7 +40651,7 @@
           <p:cNvPr id="13" name="">
             <a:extLst xmlns:a="http://schemas.openxmlformats.org/drawingml/2006/main">
               <a:ext uri="{FF2B5EF4-FFF2-40B4-BE49-F238E27FC236}">
-                <a16:creationId xmlns:a16="http://schemas.microsoft.com/office/drawing/2014/main" id="{5DC941EA-48CD-47B8-9855-4213CB0E0E85}"/>
+                <a16:creationId xmlns:a16="http://schemas.microsoft.com/office/drawing/2014/main" id="{0AFA6D0A-28A3-46DC-AF2F-3F54982BA08E}"/>
               </a:ext>
             </a:extLst>
           </p:cNvPr>
@@ -40703,7 +40703,7 @@
           <p:cNvPr id="14" name="">
             <a:extLst xmlns:a="http://schemas.openxmlformats.org/drawingml/2006/main">
               <a:ext uri="{FF2B5EF4-FFF2-40B4-BE49-F238E27FC236}">
-                <a16:creationId xmlns:a16="http://schemas.microsoft.com/office/drawing/2014/main" id="{8AC58F59-5F72-4738-BE7B-03D687113662}"/>
+                <a16:creationId xmlns:a16="http://schemas.microsoft.com/office/drawing/2014/main" id="{99A1E5B4-DB76-4B20-A48C-4E23F5B19351}"/>
               </a:ext>
             </a:extLst>
           </p:cNvPr>
@@ -40755,7 +40755,7 @@
           <p:cNvPr id="15" name="">
             <a:extLst xmlns:a="http://schemas.openxmlformats.org/drawingml/2006/main">
               <a:ext uri="{FF2B5EF4-FFF2-40B4-BE49-F238E27FC236}">
-                <a16:creationId xmlns:a16="http://schemas.microsoft.com/office/drawing/2014/main" id="{0B3441D4-2E6E-49D4-A5D1-5A01B62430B0}"/>
+                <a16:creationId xmlns:a16="http://schemas.microsoft.com/office/drawing/2014/main" id="{EC763B11-8BFA-4FC3-95D3-24E9BF21758E}"/>
               </a:ext>
             </a:extLst>
           </p:cNvPr>
@@ -40807,7 +40807,7 @@
           <p:cNvPr id="16" name="">
             <a:extLst xmlns:a="http://schemas.openxmlformats.org/drawingml/2006/main">
               <a:ext uri="{FF2B5EF4-FFF2-40B4-BE49-F238E27FC236}">
-                <a16:creationId xmlns:a16="http://schemas.microsoft.com/office/drawing/2014/main" id="{9E875EF0-982D-4CF8-89A9-9A7CD7B7E70B}"/>
+                <a16:creationId xmlns:a16="http://schemas.microsoft.com/office/drawing/2014/main" id="{760A7C5A-DE84-4C55-AFF0-6A0A43FF6603}"/>
               </a:ext>
             </a:extLst>
           </p:cNvPr>
@@ -40859,7 +40859,7 @@
           <p:cNvPr id="17" name="">
             <a:extLst xmlns:a="http://schemas.openxmlformats.org/drawingml/2006/main">
               <a:ext uri="{FF2B5EF4-FFF2-40B4-BE49-F238E27FC236}">
-                <a16:creationId xmlns:a16="http://schemas.microsoft.com/office/drawing/2014/main" id="{5175A19A-0A1D-46AA-BAED-12071ED82827}"/>
+                <a16:creationId xmlns:a16="http://schemas.microsoft.com/office/drawing/2014/main" id="{F7363FA8-C582-4283-8E21-5216A4CE2C4E}"/>
               </a:ext>
             </a:extLst>
           </p:cNvPr>
@@ -40911,7 +40911,7 @@
           <p:cNvPr id="18" name="">
             <a:extLst xmlns:a="http://schemas.openxmlformats.org/drawingml/2006/main">
               <a:ext uri="{FF2B5EF4-FFF2-40B4-BE49-F238E27FC236}">
-                <a16:creationId xmlns:a16="http://schemas.microsoft.com/office/drawing/2014/main" id="{887FF812-2001-4921-8F0F-CAC96A65FB7B}"/>
+                <a16:creationId xmlns:a16="http://schemas.microsoft.com/office/drawing/2014/main" id="{C3CB609A-38AC-48C8-8CF2-7DCF44C426EA}"/>
               </a:ext>
             </a:extLst>
           </p:cNvPr>
@@ -40942,7 +40942,7 @@
           <p:cNvPr id="19" name="">
             <a:extLst xmlns:a="http://schemas.openxmlformats.org/drawingml/2006/main">
               <a:ext uri="{FF2B5EF4-FFF2-40B4-BE49-F238E27FC236}">
-                <a16:creationId xmlns:a16="http://schemas.microsoft.com/office/drawing/2014/main" id="{BBC56F11-FC4F-4994-A283-26336FF10528}"/>
+                <a16:creationId xmlns:a16="http://schemas.microsoft.com/office/drawing/2014/main" id="{3211692B-717E-42F8-B887-33892448C147}"/>
               </a:ext>
             </a:extLst>
           </p:cNvPr>
@@ -40994,7 +40994,7 @@
           <p:cNvPr id="20" name="">
             <a:extLst xmlns:a="http://schemas.openxmlformats.org/drawingml/2006/main">
               <a:ext uri="{FF2B5EF4-FFF2-40B4-BE49-F238E27FC236}">
-                <a16:creationId xmlns:a16="http://schemas.microsoft.com/office/drawing/2014/main" id="{D3C6B474-FCB4-48DF-8E42-67BEAC6FB9CF}"/>
+                <a16:creationId xmlns:a16="http://schemas.microsoft.com/office/drawing/2014/main" id="{4672FF8A-6BA7-4D20-B858-DBBAD6AF3E31}"/>
               </a:ext>
             </a:extLst>
           </p:cNvPr>
@@ -41046,7 +41046,7 @@
           <p:cNvPr id="21" name="">
             <a:extLst xmlns:a="http://schemas.openxmlformats.org/drawingml/2006/main">
               <a:ext uri="{FF2B5EF4-FFF2-40B4-BE49-F238E27FC236}">
-                <a16:creationId xmlns:a16="http://schemas.microsoft.com/office/drawing/2014/main" id="{299B88EC-39B1-493B-A874-052CF70194F2}"/>
+                <a16:creationId xmlns:a16="http://schemas.microsoft.com/office/drawing/2014/main" id="{73E2D850-8102-4B3B-A85D-51F74A18128B}"/>
               </a:ext>
             </a:extLst>
           </p:cNvPr>
@@ -41098,7 +41098,7 @@
           <p:cNvPr id="22" name="">
             <a:extLst xmlns:a="http://schemas.openxmlformats.org/drawingml/2006/main">
               <a:ext uri="{FF2B5EF4-FFF2-40B4-BE49-F238E27FC236}">
-                <a16:creationId xmlns:a16="http://schemas.microsoft.com/office/drawing/2014/main" id="{1C7305DB-CA19-47EA-A691-C2F634A569AE}"/>
+                <a16:creationId xmlns:a16="http://schemas.microsoft.com/office/drawing/2014/main" id="{10C9BB5D-EB46-42F3-B92E-C81B85CAAE2C}"/>
               </a:ext>
             </a:extLst>
           </p:cNvPr>
@@ -41150,7 +41150,7 @@
           <p:cNvPr id="23" name="">
             <a:extLst xmlns:a="http://schemas.openxmlformats.org/drawingml/2006/main">
               <a:ext uri="{FF2B5EF4-FFF2-40B4-BE49-F238E27FC236}">
-                <a16:creationId xmlns:a16="http://schemas.microsoft.com/office/drawing/2014/main" id="{BE5E6D98-DB4A-4ADE-8ECE-C46CBA363777}"/>
+                <a16:creationId xmlns:a16="http://schemas.microsoft.com/office/drawing/2014/main" id="{4D16714A-72F2-4DB5-AC2D-F376B1C04107}"/>
               </a:ext>
             </a:extLst>
           </p:cNvPr>
@@ -41202,7 +41202,7 @@
           <p:cNvPr id="24" name="">
             <a:extLst xmlns:a="http://schemas.openxmlformats.org/drawingml/2006/main">
               <a:ext uri="{FF2B5EF4-FFF2-40B4-BE49-F238E27FC236}">
-                <a16:creationId xmlns:a16="http://schemas.microsoft.com/office/drawing/2014/main" id="{B5CA2C43-5B7F-404C-BD2B-6394CABD8229}"/>
+                <a16:creationId xmlns:a16="http://schemas.microsoft.com/office/drawing/2014/main" id="{61A14CE1-F008-40CC-8E5F-14D61F81E13D}"/>
               </a:ext>
             </a:extLst>
           </p:cNvPr>
@@ -41233,7 +41233,7 @@
           <p:cNvPr id="25" name="">
             <a:extLst xmlns:a="http://schemas.openxmlformats.org/drawingml/2006/main">
               <a:ext uri="{FF2B5EF4-FFF2-40B4-BE49-F238E27FC236}">
-                <a16:creationId xmlns:a16="http://schemas.microsoft.com/office/drawing/2014/main" id="{A8FB6E51-D1F2-4054-8AA9-DE423B5AEACB}"/>
+                <a16:creationId xmlns:a16="http://schemas.microsoft.com/office/drawing/2014/main" id="{07F3ECDD-73C1-4EBA-AEB7-C41110E6945E}"/>
               </a:ext>
             </a:extLst>
           </p:cNvPr>
@@ -41264,7 +41264,7 @@
           <p:cNvPr id="26" name="">
             <a:extLst xmlns:a="http://schemas.openxmlformats.org/drawingml/2006/main">
               <a:ext uri="{FF2B5EF4-FFF2-40B4-BE49-F238E27FC236}">
-                <a16:creationId xmlns:a16="http://schemas.microsoft.com/office/drawing/2014/main" id="{78EFBD3C-BBD8-49C2-88C2-CCB6ACCE33EE}"/>
+                <a16:creationId xmlns:a16="http://schemas.microsoft.com/office/drawing/2014/main" id="{6CE76E1A-670C-48E2-B9CF-ABD6AE5AE32E}"/>
               </a:ext>
             </a:extLst>
           </p:cNvPr>
@@ -41316,7 +41316,7 @@
           <p:cNvPr id="27" name="">
             <a:extLst xmlns:a="http://schemas.openxmlformats.org/drawingml/2006/main">
               <a:ext uri="{FF2B5EF4-FFF2-40B4-BE49-F238E27FC236}">
-                <a16:creationId xmlns:a16="http://schemas.microsoft.com/office/drawing/2014/main" id="{C2EFC585-6C1F-4A3B-BBBF-22B74DCC86C5}"/>
+                <a16:creationId xmlns:a16="http://schemas.microsoft.com/office/drawing/2014/main" id="{40C40D96-2733-4064-B942-01D96FD99F57}"/>
               </a:ext>
             </a:extLst>
           </p:cNvPr>
@@ -41368,7 +41368,7 @@
           <p:cNvPr id="28" name="">
             <a:extLst xmlns:a="http://schemas.openxmlformats.org/drawingml/2006/main">
               <a:ext uri="{FF2B5EF4-FFF2-40B4-BE49-F238E27FC236}">
-                <a16:creationId xmlns:a16="http://schemas.microsoft.com/office/drawing/2014/main" id="{D67FE5BD-53BD-4044-B9D2-70A3E8BD36A3}"/>
+                <a16:creationId xmlns:a16="http://schemas.microsoft.com/office/drawing/2014/main" id="{AF13008A-4910-45F7-AB78-FF4C108C63B7}"/>
               </a:ext>
             </a:extLst>
           </p:cNvPr>
@@ -41420,7 +41420,7 @@
           <p:cNvPr id="29" name="">
             <a:extLst xmlns:a="http://schemas.openxmlformats.org/drawingml/2006/main">
               <a:ext uri="{FF2B5EF4-FFF2-40B4-BE49-F238E27FC236}">
-                <a16:creationId xmlns:a16="http://schemas.microsoft.com/office/drawing/2014/main" id="{AFF1F5EB-6DB6-45B0-9E58-C9DE279FC5E3}"/>
+                <a16:creationId xmlns:a16="http://schemas.microsoft.com/office/drawing/2014/main" id="{0BEB3001-37A0-4B1B-A443-BD984A5C6D01}"/>
               </a:ext>
             </a:extLst>
           </p:cNvPr>
@@ -41472,7 +41472,7 @@
           <p:cNvPr id="30" name="">
             <a:extLst xmlns:a="http://schemas.openxmlformats.org/drawingml/2006/main">
               <a:ext uri="{FF2B5EF4-FFF2-40B4-BE49-F238E27FC236}">
-                <a16:creationId xmlns:a16="http://schemas.microsoft.com/office/drawing/2014/main" id="{649EAA87-C1F3-42CB-92CC-FDD021662BA6}"/>
+                <a16:creationId xmlns:a16="http://schemas.microsoft.com/office/drawing/2014/main" id="{E85C379B-3C8B-4A5F-B71D-8426B26BA11C}"/>
               </a:ext>
             </a:extLst>
           </p:cNvPr>
@@ -41524,7 +41524,7 @@
           <p:cNvPr id="31" name="">
             <a:extLst xmlns:a="http://schemas.openxmlformats.org/drawingml/2006/main">
               <a:ext uri="{FF2B5EF4-FFF2-40B4-BE49-F238E27FC236}">
-                <a16:creationId xmlns:a16="http://schemas.microsoft.com/office/drawing/2014/main" id="{98FCF82F-B1B9-4CBD-B130-F7BD3334AD66}"/>
+                <a16:creationId xmlns:a16="http://schemas.microsoft.com/office/drawing/2014/main" id="{5CDE3E48-6650-4FC4-9692-EB0FED0BB179}"/>
               </a:ext>
             </a:extLst>
           </p:cNvPr>
@@ -41555,7 +41555,7 @@
           <p:cNvPr id="32" name="">
             <a:extLst xmlns:a="http://schemas.openxmlformats.org/drawingml/2006/main">
               <a:ext uri="{FF2B5EF4-FFF2-40B4-BE49-F238E27FC236}">
-                <a16:creationId xmlns:a16="http://schemas.microsoft.com/office/drawing/2014/main" id="{548FE3D0-3C84-4C22-90FC-669621236F9D}"/>
+                <a16:creationId xmlns:a16="http://schemas.microsoft.com/office/drawing/2014/main" id="{65F3F2F8-FE73-49B6-8820-55A3C04BE03D}"/>
               </a:ext>
             </a:extLst>
           </p:cNvPr>
@@ -41607,7 +41607,7 @@
           <p:cNvPr id="33" name="">
             <a:extLst xmlns:a="http://schemas.openxmlformats.org/drawingml/2006/main">
               <a:ext uri="{FF2B5EF4-FFF2-40B4-BE49-F238E27FC236}">
-                <a16:creationId xmlns:a16="http://schemas.microsoft.com/office/drawing/2014/main" id="{F09772CE-0576-4102-8D3F-9B84CB975925}"/>
+                <a16:creationId xmlns:a16="http://schemas.microsoft.com/office/drawing/2014/main" id="{1B568085-62E9-42A7-BEA1-990D78F97F6A}"/>
               </a:ext>
             </a:extLst>
           </p:cNvPr>
@@ -41659,7 +41659,7 @@
           <p:cNvPr id="34" name="">
             <a:extLst xmlns:a="http://schemas.openxmlformats.org/drawingml/2006/main">
               <a:ext uri="{FF2B5EF4-FFF2-40B4-BE49-F238E27FC236}">
-                <a16:creationId xmlns:a16="http://schemas.microsoft.com/office/drawing/2014/main" id="{BD5D7B70-A0AE-4C06-93D6-4B9231DA576E}"/>
+                <a16:creationId xmlns:a16="http://schemas.microsoft.com/office/drawing/2014/main" id="{7F057B86-82A1-4A30-A326-E1DA67DA14E7}"/>
               </a:ext>
             </a:extLst>
           </p:cNvPr>
@@ -41711,7 +41711,7 @@
           <p:cNvPr id="35" name="">
             <a:extLst xmlns:a="http://schemas.openxmlformats.org/drawingml/2006/main">
               <a:ext uri="{FF2B5EF4-FFF2-40B4-BE49-F238E27FC236}">
-                <a16:creationId xmlns:a16="http://schemas.microsoft.com/office/drawing/2014/main" id="{83BA3671-5307-421C-AA26-4B65F3C6CBFC}"/>
+                <a16:creationId xmlns:a16="http://schemas.microsoft.com/office/drawing/2014/main" id="{628A3948-9EE6-4629-B407-8DB41CD5FAC0}"/>
               </a:ext>
             </a:extLst>
           </p:cNvPr>
@@ -41763,7 +41763,7 @@
           <p:cNvPr id="36" name="">
             <a:extLst xmlns:a="http://schemas.openxmlformats.org/drawingml/2006/main">
               <a:ext uri="{FF2B5EF4-FFF2-40B4-BE49-F238E27FC236}">
-                <a16:creationId xmlns:a16="http://schemas.microsoft.com/office/drawing/2014/main" id="{2FD56ECB-6099-4129-ACDC-2048947DBDE3}"/>
+                <a16:creationId xmlns:a16="http://schemas.microsoft.com/office/drawing/2014/main" id="{95790B17-4CC8-4F6F-8203-C7BE4494264D}"/>
               </a:ext>
             </a:extLst>
           </p:cNvPr>
@@ -41815,7 +41815,7 @@
           <p:cNvPr id="37" name="">
             <a:extLst xmlns:a="http://schemas.openxmlformats.org/drawingml/2006/main">
               <a:ext uri="{FF2B5EF4-FFF2-40B4-BE49-F238E27FC236}">
-                <a16:creationId xmlns:a16="http://schemas.microsoft.com/office/drawing/2014/main" id="{B827246B-10A9-44DB-BFAF-FF3BFB567EE1}"/>
+                <a16:creationId xmlns:a16="http://schemas.microsoft.com/office/drawing/2014/main" id="{6CF49A0F-E39A-4AE6-BB4C-6B72CBD9E416}"/>
               </a:ext>
             </a:extLst>
           </p:cNvPr>
@@ -41846,7 +41846,7 @@
           <p:cNvPr id="38" name="">
             <a:extLst xmlns:a="http://schemas.openxmlformats.org/drawingml/2006/main">
               <a:ext uri="{FF2B5EF4-FFF2-40B4-BE49-F238E27FC236}">
-                <a16:creationId xmlns:a16="http://schemas.microsoft.com/office/drawing/2014/main" id="{78AD9573-CBFC-4D41-B0B9-AADAC2142C20}"/>
+                <a16:creationId xmlns:a16="http://schemas.microsoft.com/office/drawing/2014/main" id="{41E02E9C-162A-49D9-92CA-4169300D0039}"/>
               </a:ext>
             </a:extLst>
           </p:cNvPr>
@@ -41877,7 +41877,7 @@
           <p:cNvPr id="39" name="">
             <a:extLst xmlns:a="http://schemas.openxmlformats.org/drawingml/2006/main">
               <a:ext uri="{FF2B5EF4-FFF2-40B4-BE49-F238E27FC236}">
-                <a16:creationId xmlns:a16="http://schemas.microsoft.com/office/drawing/2014/main" id="{C1C7F7F7-F65D-461A-A0CA-14F4759AEDCD}"/>
+                <a16:creationId xmlns:a16="http://schemas.microsoft.com/office/drawing/2014/main" id="{732B60E9-E5CE-4621-A0E7-D8D340910E19}"/>
               </a:ext>
             </a:extLst>
           </p:cNvPr>
@@ -41929,7 +41929,7 @@
           <p:cNvPr id="40" name="">
             <a:extLst xmlns:a="http://schemas.openxmlformats.org/drawingml/2006/main">
               <a:ext uri="{FF2B5EF4-FFF2-40B4-BE49-F238E27FC236}">
-                <a16:creationId xmlns:a16="http://schemas.microsoft.com/office/drawing/2014/main" id="{BAEA8E80-511E-41AF-8F02-2F2793A2F91E}"/>
+                <a16:creationId xmlns:a16="http://schemas.microsoft.com/office/drawing/2014/main" id="{DF5493C3-B870-41E3-B982-AA3F1E3E0D6A}"/>
               </a:ext>
             </a:extLst>
           </p:cNvPr>
@@ -41981,7 +41981,7 @@
           <p:cNvPr id="41" name="">
             <a:extLst xmlns:a="http://schemas.openxmlformats.org/drawingml/2006/main">
               <a:ext uri="{FF2B5EF4-FFF2-40B4-BE49-F238E27FC236}">
-                <a16:creationId xmlns:a16="http://schemas.microsoft.com/office/drawing/2014/main" id="{8C6D4BA6-8DCC-40FB-817B-23D76CBEE48E}"/>
+                <a16:creationId xmlns:a16="http://schemas.microsoft.com/office/drawing/2014/main" id="{A78A3242-C8A3-43CD-90A7-977C2ACF89FE}"/>
               </a:ext>
             </a:extLst>
           </p:cNvPr>
@@ -42033,7 +42033,7 @@
           <p:cNvPr id="42" name="">
             <a:extLst xmlns:a="http://schemas.openxmlformats.org/drawingml/2006/main">
               <a:ext uri="{FF2B5EF4-FFF2-40B4-BE49-F238E27FC236}">
-                <a16:creationId xmlns:a16="http://schemas.microsoft.com/office/drawing/2014/main" id="{58157CD5-8057-4B8A-854D-05808AC3EDD3}"/>
+                <a16:creationId xmlns:a16="http://schemas.microsoft.com/office/drawing/2014/main" id="{C80DFF34-2C83-44C2-AB53-EEA4F28AD4B3}"/>
               </a:ext>
             </a:extLst>
           </p:cNvPr>
@@ -42085,7 +42085,7 @@
           <p:cNvPr id="43" name="">
             <a:extLst xmlns:a="http://schemas.openxmlformats.org/drawingml/2006/main">
               <a:ext uri="{FF2B5EF4-FFF2-40B4-BE49-F238E27FC236}">
-                <a16:creationId xmlns:a16="http://schemas.microsoft.com/office/drawing/2014/main" id="{6DC88CFA-3BB7-4831-95D2-D5640CA4DEF0}"/>
+                <a16:creationId xmlns:a16="http://schemas.microsoft.com/office/drawing/2014/main" id="{1D431AC4-DB9E-4489-869C-3D62D8B6DDA3}"/>
               </a:ext>
             </a:extLst>
           </p:cNvPr>
@@ -42137,7 +42137,7 @@
           <p:cNvPr id="44" name="">
             <a:extLst xmlns:a="http://schemas.openxmlformats.org/drawingml/2006/main">
               <a:ext uri="{FF2B5EF4-FFF2-40B4-BE49-F238E27FC236}">
-                <a16:creationId xmlns:a16="http://schemas.microsoft.com/office/drawing/2014/main" id="{73AAA6B7-AD87-45AC-B22F-74B471361F56}"/>
+                <a16:creationId xmlns:a16="http://schemas.microsoft.com/office/drawing/2014/main" id="{9C4C69A5-6829-4409-9349-71D7275D118C}"/>
               </a:ext>
             </a:extLst>
           </p:cNvPr>
@@ -42168,7 +42168,7 @@
           <p:cNvPr id="45" name="">
             <a:extLst xmlns:a="http://schemas.openxmlformats.org/drawingml/2006/main">
               <a:ext uri="{FF2B5EF4-FFF2-40B4-BE49-F238E27FC236}">
-                <a16:creationId xmlns:a16="http://schemas.microsoft.com/office/drawing/2014/main" id="{5E84EC21-F9AA-4F60-81F8-C335FD3EC2BD}"/>
+                <a16:creationId xmlns:a16="http://schemas.microsoft.com/office/drawing/2014/main" id="{7E3537AA-7EF0-4E3F-A5C6-560CC791A15B}"/>
               </a:ext>
             </a:extLst>
           </p:cNvPr>
@@ -42220,7 +42220,7 @@
           <p:cNvPr id="46" name="">
             <a:extLst xmlns:a="http://schemas.openxmlformats.org/drawingml/2006/main">
               <a:ext uri="{FF2B5EF4-FFF2-40B4-BE49-F238E27FC236}">
-                <a16:creationId xmlns:a16="http://schemas.microsoft.com/office/drawing/2014/main" id="{C88D97D4-92FA-4F08-94AC-3E6D90BCA117}"/>
+                <a16:creationId xmlns:a16="http://schemas.microsoft.com/office/drawing/2014/main" id="{0D02728E-91D9-4B39-9FA4-AFF9692553E6}"/>
               </a:ext>
             </a:extLst>
           </p:cNvPr>
@@ -42272,7 +42272,7 @@
           <p:cNvPr id="47" name="">
             <a:extLst xmlns:a="http://schemas.openxmlformats.org/drawingml/2006/main">
               <a:ext uri="{FF2B5EF4-FFF2-40B4-BE49-F238E27FC236}">
-                <a16:creationId xmlns:a16="http://schemas.microsoft.com/office/drawing/2014/main" id="{F48F4B8B-5E95-41B5-8959-D3E61713A6CB}"/>
+                <a16:creationId xmlns:a16="http://schemas.microsoft.com/office/drawing/2014/main" id="{F4763C7C-DF05-4055-89A4-25A9A98CF474}"/>
               </a:ext>
             </a:extLst>
           </p:cNvPr>
@@ -42324,7 +42324,7 @@
           <p:cNvPr id="48" name="">
             <a:extLst xmlns:a="http://schemas.openxmlformats.org/drawingml/2006/main">
               <a:ext uri="{FF2B5EF4-FFF2-40B4-BE49-F238E27FC236}">
-                <a16:creationId xmlns:a16="http://schemas.microsoft.com/office/drawing/2014/main" id="{9DEBDC6F-5FA4-4070-88E8-0929AF5D58C1}"/>
+                <a16:creationId xmlns:a16="http://schemas.microsoft.com/office/drawing/2014/main" id="{BD2F8F97-2EAB-4FDD-81AA-00D92EC31E26}"/>
               </a:ext>
             </a:extLst>
           </p:cNvPr>
@@ -42376,7 +42376,7 @@
           <p:cNvPr id="49" name="">
             <a:extLst xmlns:a="http://schemas.openxmlformats.org/drawingml/2006/main">
               <a:ext uri="{FF2B5EF4-FFF2-40B4-BE49-F238E27FC236}">
-                <a16:creationId xmlns:a16="http://schemas.microsoft.com/office/drawing/2014/main" id="{3C2CD510-AC53-4A89-A80E-264B9E296417}"/>
+                <a16:creationId xmlns:a16="http://schemas.microsoft.com/office/drawing/2014/main" id="{758DEEC5-DDB1-495D-9AA3-3414727F4E81}"/>
               </a:ext>
             </a:extLst>
           </p:cNvPr>
@@ -42428,7 +42428,7 @@
           <p:cNvPr id="50" name="">
             <a:extLst xmlns:a="http://schemas.openxmlformats.org/drawingml/2006/main">
               <a:ext uri="{FF2B5EF4-FFF2-40B4-BE49-F238E27FC236}">
-                <a16:creationId xmlns:a16="http://schemas.microsoft.com/office/drawing/2014/main" id="{6A08ED61-E1FA-4C42-90EC-0EB104B6C9CA}"/>
+                <a16:creationId xmlns:a16="http://schemas.microsoft.com/office/drawing/2014/main" id="{42BFA3E8-3911-493E-92E5-119418C9948E}"/>
               </a:ext>
             </a:extLst>
           </p:cNvPr>
@@ -42459,7 +42459,7 @@
           <p:cNvPr id="51" name="">
             <a:extLst xmlns:a="http://schemas.openxmlformats.org/drawingml/2006/main">
               <a:ext uri="{FF2B5EF4-FFF2-40B4-BE49-F238E27FC236}">
-                <a16:creationId xmlns:a16="http://schemas.microsoft.com/office/drawing/2014/main" id="{C061D2EA-8C53-4B48-AC6E-8C998E9801E5}"/>
+                <a16:creationId xmlns:a16="http://schemas.microsoft.com/office/drawing/2014/main" id="{D151B28D-53BE-4FC5-9EAF-50EF774173E7}"/>
               </a:ext>
             </a:extLst>
           </p:cNvPr>
@@ -42490,7 +42490,7 @@
           <p:cNvPr id="52" name="">
             <a:extLst xmlns:a="http://schemas.openxmlformats.org/drawingml/2006/main">
               <a:ext uri="{FF2B5EF4-FFF2-40B4-BE49-F238E27FC236}">
-                <a16:creationId xmlns:a16="http://schemas.microsoft.com/office/drawing/2014/main" id="{E1B17905-70B5-4D45-AFA3-7F9D77B56157}"/>
+                <a16:creationId xmlns:a16="http://schemas.microsoft.com/office/drawing/2014/main" id="{6558557C-F221-46D0-9E9D-0DB0063AA721}"/>
               </a:ext>
             </a:extLst>
           </p:cNvPr>
@@ -42542,7 +42542,7 @@
           <p:cNvPr id="53" name="">
             <a:extLst xmlns:a="http://schemas.openxmlformats.org/drawingml/2006/main">
               <a:ext uri="{FF2B5EF4-FFF2-40B4-BE49-F238E27FC236}">
-                <a16:creationId xmlns:a16="http://schemas.microsoft.com/office/drawing/2014/main" id="{E65C28C9-D1BA-4D8D-9E70-2B249FDF57B9}"/>
+                <a16:creationId xmlns:a16="http://schemas.microsoft.com/office/drawing/2014/main" id="{81D32C9F-4565-4647-AD99-B4F11FD4C7BB}"/>
               </a:ext>
             </a:extLst>
           </p:cNvPr>
@@ -42594,7 +42594,7 @@
           <p:cNvPr id="54" name="">
             <a:extLst xmlns:a="http://schemas.openxmlformats.org/drawingml/2006/main">
               <a:ext uri="{FF2B5EF4-FFF2-40B4-BE49-F238E27FC236}">
-                <a16:creationId xmlns:a16="http://schemas.microsoft.com/office/drawing/2014/main" id="{43AFEC9B-552C-4D46-BFDB-A026FD91AD05}"/>
+                <a16:creationId xmlns:a16="http://schemas.microsoft.com/office/drawing/2014/main" id="{FA1BBF7E-0AFD-409D-BDB0-67582CD9702B}"/>
               </a:ext>
             </a:extLst>
           </p:cNvPr>
@@ -42646,7 +42646,7 @@
           <p:cNvPr id="55" name="">
             <a:extLst xmlns:a="http://schemas.openxmlformats.org/drawingml/2006/main">
               <a:ext uri="{FF2B5EF4-FFF2-40B4-BE49-F238E27FC236}">
-                <a16:creationId xmlns:a16="http://schemas.microsoft.com/office/drawing/2014/main" id="{67DA5DE3-381E-4A18-A905-A3024438902C}"/>
+                <a16:creationId xmlns:a16="http://schemas.microsoft.com/office/drawing/2014/main" id="{1EAB9C8C-3700-4733-A421-23CA0B58F3A7}"/>
               </a:ext>
             </a:extLst>
           </p:cNvPr>
@@ -42698,7 +42698,7 @@
           <p:cNvPr id="56" name="">
             <a:extLst xmlns:a="http://schemas.openxmlformats.org/drawingml/2006/main">
               <a:ext uri="{FF2B5EF4-FFF2-40B4-BE49-F238E27FC236}">
-                <a16:creationId xmlns:a16="http://schemas.microsoft.com/office/drawing/2014/main" id="{A8784B62-3797-45A7-9B86-8ADFCC7FAC3C}"/>
+                <a16:creationId xmlns:a16="http://schemas.microsoft.com/office/drawing/2014/main" id="{3118AAFA-3779-4D16-AE7B-0AF08576D2F1}"/>
               </a:ext>
             </a:extLst>
           </p:cNvPr>
@@ -42750,7 +42750,7 @@
           <p:cNvPr id="57" name="">
             <a:extLst xmlns:a="http://schemas.openxmlformats.org/drawingml/2006/main">
               <a:ext uri="{FF2B5EF4-FFF2-40B4-BE49-F238E27FC236}">
-                <a16:creationId xmlns:a16="http://schemas.microsoft.com/office/drawing/2014/main" id="{0895B010-3B03-4621-84DD-D79B875AE0AE}"/>
+                <a16:creationId xmlns:a16="http://schemas.microsoft.com/office/drawing/2014/main" id="{9460FDE4-E1D2-4D95-ABDC-EAB5544C3E88}"/>
               </a:ext>
             </a:extLst>
           </p:cNvPr>
@@ -42781,7 +42781,7 @@
           <p:cNvPr id="58" name="">
             <a:extLst xmlns:a="http://schemas.openxmlformats.org/drawingml/2006/main">
               <a:ext uri="{FF2B5EF4-FFF2-40B4-BE49-F238E27FC236}">
-                <a16:creationId xmlns:a16="http://schemas.microsoft.com/office/drawing/2014/main" id="{483BD239-EF80-4310-8260-3F2A0FF099EB}"/>
+                <a16:creationId xmlns:a16="http://schemas.microsoft.com/office/drawing/2014/main" id="{409CCFB7-635C-453C-A4E5-F9A159839ED2}"/>
               </a:ext>
             </a:extLst>
           </p:cNvPr>
@@ -42833,7 +42833,7 @@
           <p:cNvPr id="59" name="">
             <a:extLst xmlns:a="http://schemas.openxmlformats.org/drawingml/2006/main">
               <a:ext uri="{FF2B5EF4-FFF2-40B4-BE49-F238E27FC236}">
-                <a16:creationId xmlns:a16="http://schemas.microsoft.com/office/drawing/2014/main" id="{EDA56681-E4D1-4865-B97D-AD790A7D32CA}"/>
+                <a16:creationId xmlns:a16="http://schemas.microsoft.com/office/drawing/2014/main" id="{A9CD2EA8-97DE-43CE-B4C9-1C8CD026E3FE}"/>
               </a:ext>
             </a:extLst>
           </p:cNvPr>
@@ -42885,7 +42885,7 @@
           <p:cNvPr id="60" name="">
             <a:extLst xmlns:a="http://schemas.openxmlformats.org/drawingml/2006/main">
               <a:ext uri="{FF2B5EF4-FFF2-40B4-BE49-F238E27FC236}">
-                <a16:creationId xmlns:a16="http://schemas.microsoft.com/office/drawing/2014/main" id="{D8EBCDCE-E6E9-42B2-83C8-F013D6BCF7E3}"/>
+                <a16:creationId xmlns:a16="http://schemas.microsoft.com/office/drawing/2014/main" id="{8BAA9525-80C1-4AE6-ADB9-E49A478AC80C}"/>
               </a:ext>
             </a:extLst>
           </p:cNvPr>
@@ -42937,7 +42937,7 @@
           <p:cNvPr id="61" name="">
             <a:extLst xmlns:a="http://schemas.openxmlformats.org/drawingml/2006/main">
               <a:ext uri="{FF2B5EF4-FFF2-40B4-BE49-F238E27FC236}">
-                <a16:creationId xmlns:a16="http://schemas.microsoft.com/office/drawing/2014/main" id="{B28A4CE4-6DD7-4AF2-BF98-9226A3DCED27}"/>
+                <a16:creationId xmlns:a16="http://schemas.microsoft.com/office/drawing/2014/main" id="{F09351DE-9B1F-40B8-AD8B-6F56579C700C}"/>
               </a:ext>
             </a:extLst>
           </p:cNvPr>
@@ -42989,7 +42989,7 @@
           <p:cNvPr id="62" name="">
             <a:extLst xmlns:a="http://schemas.openxmlformats.org/drawingml/2006/main">
               <a:ext uri="{FF2B5EF4-FFF2-40B4-BE49-F238E27FC236}">
-                <a16:creationId xmlns:a16="http://schemas.microsoft.com/office/drawing/2014/main" id="{9D02E617-61BB-49B8-B340-ED7A2A46250B}"/>
+                <a16:creationId xmlns:a16="http://schemas.microsoft.com/office/drawing/2014/main" id="{7B8FDBB4-0A07-42B7-B787-456863D45B2C}"/>
               </a:ext>
             </a:extLst>
           </p:cNvPr>
@@ -43041,7 +43041,7 @@
           <p:cNvPr id="63" name="">
             <a:extLst xmlns:a="http://schemas.openxmlformats.org/drawingml/2006/main">
               <a:ext uri="{FF2B5EF4-FFF2-40B4-BE49-F238E27FC236}">
-                <a16:creationId xmlns:a16="http://schemas.microsoft.com/office/drawing/2014/main" id="{335E27D1-49B8-42C3-933A-F2BCE0A33174}"/>
+                <a16:creationId xmlns:a16="http://schemas.microsoft.com/office/drawing/2014/main" id="{F02C1274-7942-4188-8515-E7EEEC6C9209}"/>
               </a:ext>
             </a:extLst>
           </p:cNvPr>
@@ -43072,7 +43072,7 @@
           <p:cNvPr id="64" name="">
             <a:extLst xmlns:a="http://schemas.openxmlformats.org/drawingml/2006/main">
               <a:ext uri="{FF2B5EF4-FFF2-40B4-BE49-F238E27FC236}">
-                <a16:creationId xmlns:a16="http://schemas.microsoft.com/office/drawing/2014/main" id="{E57C54D9-2E93-4C0E-9FBA-465ABE45F03A}"/>
+                <a16:creationId xmlns:a16="http://schemas.microsoft.com/office/drawing/2014/main" id="{3C03932B-423D-46F0-9484-043BE9841965}"/>
               </a:ext>
             </a:extLst>
           </p:cNvPr>
@@ -43103,7 +43103,7 @@
           <p:cNvPr id="65" name="">
             <a:extLst xmlns:a="http://schemas.openxmlformats.org/drawingml/2006/main">
               <a:ext uri="{FF2B5EF4-FFF2-40B4-BE49-F238E27FC236}">
-                <a16:creationId xmlns:a16="http://schemas.microsoft.com/office/drawing/2014/main" id="{48BBF1DA-326D-458A-80F1-A1101EB1A9E5}"/>
+                <a16:creationId xmlns:a16="http://schemas.microsoft.com/office/drawing/2014/main" id="{CA579E8F-BE4B-437B-B3CA-34F40FFD2F39}"/>
               </a:ext>
             </a:extLst>
           </p:cNvPr>
@@ -43155,7 +43155,7 @@
           <p:cNvPr id="66" name="">
             <a:extLst xmlns:a="http://schemas.openxmlformats.org/drawingml/2006/main">
               <a:ext uri="{FF2B5EF4-FFF2-40B4-BE49-F238E27FC236}">
-                <a16:creationId xmlns:a16="http://schemas.microsoft.com/office/drawing/2014/main" id="{A6C97320-9ECC-42EF-8C7E-0DBBA7C7E095}"/>
+                <a16:creationId xmlns:a16="http://schemas.microsoft.com/office/drawing/2014/main" id="{A3E649B5-AADC-4003-A9D9-F451CF53D380}"/>
               </a:ext>
             </a:extLst>
           </p:cNvPr>
@@ -43207,7 +43207,7 @@
           <p:cNvPr id="67" name="">
             <a:extLst xmlns:a="http://schemas.openxmlformats.org/drawingml/2006/main">
               <a:ext uri="{FF2B5EF4-FFF2-40B4-BE49-F238E27FC236}">
-                <a16:creationId xmlns:a16="http://schemas.microsoft.com/office/drawing/2014/main" id="{D4781B26-EAC6-42A1-8009-5697838CF2B5}"/>
+                <a16:creationId xmlns:a16="http://schemas.microsoft.com/office/drawing/2014/main" id="{18DC5271-AAAA-4062-9AF9-AF23EFD7D712}"/>
               </a:ext>
             </a:extLst>
           </p:cNvPr>
@@ -43259,7 +43259,7 @@
           <p:cNvPr id="68" name="">
             <a:extLst xmlns:a="http://schemas.openxmlformats.org/drawingml/2006/main">
               <a:ext uri="{FF2B5EF4-FFF2-40B4-BE49-F238E27FC236}">
-                <a16:creationId xmlns:a16="http://schemas.microsoft.com/office/drawing/2014/main" id="{906884A6-9DE8-4B6E-88B9-54BFACEEF773}"/>
+                <a16:creationId xmlns:a16="http://schemas.microsoft.com/office/drawing/2014/main" id="{8C5105A4-723E-402F-B43D-0C66A6E8D3E7}"/>
               </a:ext>
             </a:extLst>
           </p:cNvPr>
@@ -43311,7 +43311,7 @@
           <p:cNvPr id="69" name="">
             <a:extLst xmlns:a="http://schemas.openxmlformats.org/drawingml/2006/main">
               <a:ext uri="{FF2B5EF4-FFF2-40B4-BE49-F238E27FC236}">
-                <a16:creationId xmlns:a16="http://schemas.microsoft.com/office/drawing/2014/main" id="{F2F2D058-0647-4AF5-A9AA-2736C5E31346}"/>
+                <a16:creationId xmlns:a16="http://schemas.microsoft.com/office/drawing/2014/main" id="{8E5EB54B-8F75-4CA1-8C4D-22E19706050D}"/>
               </a:ext>
             </a:extLst>
           </p:cNvPr>
@@ -43363,7 +43363,7 @@
           <p:cNvPr id="70" name="">
             <a:extLst xmlns:a="http://schemas.openxmlformats.org/drawingml/2006/main">
               <a:ext uri="{FF2B5EF4-FFF2-40B4-BE49-F238E27FC236}">
-                <a16:creationId xmlns:a16="http://schemas.microsoft.com/office/drawing/2014/main" id="{C85AB671-6C91-4F96-AD34-E63191B13ACA}"/>
+                <a16:creationId xmlns:a16="http://schemas.microsoft.com/office/drawing/2014/main" id="{8D5BF533-705A-4D0A-A70F-E2D160EEB14A}"/>
               </a:ext>
             </a:extLst>
           </p:cNvPr>
@@ -43394,7 +43394,7 @@
           <p:cNvPr id="71" name="">
             <a:extLst xmlns:a="http://schemas.openxmlformats.org/drawingml/2006/main">
               <a:ext uri="{FF2B5EF4-FFF2-40B4-BE49-F238E27FC236}">
-                <a16:creationId xmlns:a16="http://schemas.microsoft.com/office/drawing/2014/main" id="{00EA597B-EE28-4078-B4B8-2E30418857E8}"/>
+                <a16:creationId xmlns:a16="http://schemas.microsoft.com/office/drawing/2014/main" id="{4F15E828-8049-4735-A1DD-A40F32067F6B}"/>
               </a:ext>
             </a:extLst>
           </p:cNvPr>
@@ -43446,7 +43446,7 @@
           <p:cNvPr id="72" name="">
             <a:extLst xmlns:a="http://schemas.openxmlformats.org/drawingml/2006/main">
               <a:ext uri="{FF2B5EF4-FFF2-40B4-BE49-F238E27FC236}">
-                <a16:creationId xmlns:a16="http://schemas.microsoft.com/office/drawing/2014/main" id="{53A72B87-6531-4989-B55E-79D18B9FCA2D}"/>
+                <a16:creationId xmlns:a16="http://schemas.microsoft.com/office/drawing/2014/main" id="{C89DDF5A-89E7-4048-A690-456F182E47D8}"/>
               </a:ext>
             </a:extLst>
           </p:cNvPr>
@@ -43498,7 +43498,7 @@
           <p:cNvPr id="73" name="">
             <a:extLst xmlns:a="http://schemas.openxmlformats.org/drawingml/2006/main">
               <a:ext uri="{FF2B5EF4-FFF2-40B4-BE49-F238E27FC236}">
-                <a16:creationId xmlns:a16="http://schemas.microsoft.com/office/drawing/2014/main" id="{9D34F5CC-25D1-40CA-B511-EE197D339976}"/>
+                <a16:creationId xmlns:a16="http://schemas.microsoft.com/office/drawing/2014/main" id="{954E2A74-60B6-42D0-848C-F8054198FD5F}"/>
               </a:ext>
             </a:extLst>
           </p:cNvPr>
@@ -43550,7 +43550,7 @@
           <p:cNvPr id="74" name="">
             <a:extLst xmlns:a="http://schemas.openxmlformats.org/drawingml/2006/main">
               <a:ext uri="{FF2B5EF4-FFF2-40B4-BE49-F238E27FC236}">
-                <a16:creationId xmlns:a16="http://schemas.microsoft.com/office/drawing/2014/main" id="{01F5D6D0-0865-4933-B37C-3DE70A67B48E}"/>
+                <a16:creationId xmlns:a16="http://schemas.microsoft.com/office/drawing/2014/main" id="{2F513584-A523-462D-80BA-C04E43B2D100}"/>
               </a:ext>
             </a:extLst>
           </p:cNvPr>
@@ -43602,7 +43602,7 @@
           <p:cNvPr id="75" name="">
             <a:extLst xmlns:a="http://schemas.openxmlformats.org/drawingml/2006/main">
               <a:ext uri="{FF2B5EF4-FFF2-40B4-BE49-F238E27FC236}">
-                <a16:creationId xmlns:a16="http://schemas.microsoft.com/office/drawing/2014/main" id="{C302136B-1CA3-4529-9650-39A9D55F3A39}"/>
+                <a16:creationId xmlns:a16="http://schemas.microsoft.com/office/drawing/2014/main" id="{7B014306-B9DE-4CD1-BF82-C3559B426A8E}"/>
               </a:ext>
             </a:extLst>
           </p:cNvPr>
@@ -43654,7 +43654,7 @@
           <p:cNvPr id="76" name="">
             <a:extLst xmlns:a="http://schemas.openxmlformats.org/drawingml/2006/main">
               <a:ext uri="{FF2B5EF4-FFF2-40B4-BE49-F238E27FC236}">
-                <a16:creationId xmlns:a16="http://schemas.microsoft.com/office/drawing/2014/main" id="{785DD5D6-FDB4-4C70-918D-B17BC968DC48}"/>
+                <a16:creationId xmlns:a16="http://schemas.microsoft.com/office/drawing/2014/main" id="{8E9A29B4-FFF5-4B0C-9C8C-9BE4194EC7BD}"/>
               </a:ext>
             </a:extLst>
           </p:cNvPr>
@@ -43685,7 +43685,7 @@
           <p:cNvPr id="77" name="">
             <a:extLst xmlns:a="http://schemas.openxmlformats.org/drawingml/2006/main">
               <a:ext uri="{FF2B5EF4-FFF2-40B4-BE49-F238E27FC236}">
-                <a16:creationId xmlns:a16="http://schemas.microsoft.com/office/drawing/2014/main" id="{17894989-1AA3-42F7-84E2-E1815C679F60}"/>
+                <a16:creationId xmlns:a16="http://schemas.microsoft.com/office/drawing/2014/main" id="{AEC5B58B-F5F1-423D-A8B8-E248E0C75708}"/>
               </a:ext>
             </a:extLst>
           </p:cNvPr>
@@ -43716,7 +43716,7 @@
           <p:cNvPr id="78" name="">
             <a:extLst xmlns:a="http://schemas.openxmlformats.org/drawingml/2006/main">
               <a:ext uri="{FF2B5EF4-FFF2-40B4-BE49-F238E27FC236}">
-                <a16:creationId xmlns:a16="http://schemas.microsoft.com/office/drawing/2014/main" id="{0F3425E8-87A5-4F24-B0B2-C0E18AB866E7}"/>
+                <a16:creationId xmlns:a16="http://schemas.microsoft.com/office/drawing/2014/main" id="{21C21BD4-B0FC-4BDC-A53D-B0CEF517899E}"/>
               </a:ext>
             </a:extLst>
           </p:cNvPr>
@@ -43768,7 +43768,7 @@
           <p:cNvPr id="79" name="">
             <a:extLst xmlns:a="http://schemas.openxmlformats.org/drawingml/2006/main">
               <a:ext uri="{FF2B5EF4-FFF2-40B4-BE49-F238E27FC236}">
-                <a16:creationId xmlns:a16="http://schemas.microsoft.com/office/drawing/2014/main" id="{3051B873-5448-460F-A70A-47D392CD9C68}"/>
+                <a16:creationId xmlns:a16="http://schemas.microsoft.com/office/drawing/2014/main" id="{5F2252BF-7571-4A13-8E3E-353F7D63CF79}"/>
               </a:ext>
             </a:extLst>
           </p:cNvPr>
@@ -43820,7 +43820,7 @@
           <p:cNvPr id="80" name="">
             <a:extLst xmlns:a="http://schemas.openxmlformats.org/drawingml/2006/main">
               <a:ext uri="{FF2B5EF4-FFF2-40B4-BE49-F238E27FC236}">
-                <a16:creationId xmlns:a16="http://schemas.microsoft.com/office/drawing/2014/main" id="{33CBBDFA-402B-43DC-A890-CBC6C623C096}"/>
+                <a16:creationId xmlns:a16="http://schemas.microsoft.com/office/drawing/2014/main" id="{F2203453-F6D8-4E92-A767-8ADE1E980751}"/>
               </a:ext>
             </a:extLst>
           </p:cNvPr>
@@ -43872,7 +43872,7 @@
           <p:cNvPr id="81" name="">
             <a:extLst xmlns:a="http://schemas.openxmlformats.org/drawingml/2006/main">
               <a:ext uri="{FF2B5EF4-FFF2-40B4-BE49-F238E27FC236}">
-                <a16:creationId xmlns:a16="http://schemas.microsoft.com/office/drawing/2014/main" id="{01931377-5B9B-431F-AC32-5B418F20E3CB}"/>
+                <a16:creationId xmlns:a16="http://schemas.microsoft.com/office/drawing/2014/main" id="{DD69A34C-E87E-475C-B9F3-FB3A91C8CA00}"/>
               </a:ext>
             </a:extLst>
           </p:cNvPr>
@@ -43924,7 +43924,7 @@
           <p:cNvPr id="82" name="">
             <a:extLst xmlns:a="http://schemas.openxmlformats.org/drawingml/2006/main">
               <a:ext uri="{FF2B5EF4-FFF2-40B4-BE49-F238E27FC236}">
-                <a16:creationId xmlns:a16="http://schemas.microsoft.com/office/drawing/2014/main" id="{E3455C62-A679-497B-A19A-74C024447DE8}"/>
+                <a16:creationId xmlns:a16="http://schemas.microsoft.com/office/drawing/2014/main" id="{B09E76EC-6976-4CE6-8B3B-0CDDD03FF2C4}"/>
               </a:ext>
             </a:extLst>
           </p:cNvPr>
@@ -43976,7 +43976,7 @@
           <p:cNvPr id="83" name="">
             <a:extLst xmlns:a="http://schemas.openxmlformats.org/drawingml/2006/main">
               <a:ext uri="{FF2B5EF4-FFF2-40B4-BE49-F238E27FC236}">
-                <a16:creationId xmlns:a16="http://schemas.microsoft.com/office/drawing/2014/main" id="{0E1701AF-D0B5-422B-82CE-461AD386659A}"/>
+                <a16:creationId xmlns:a16="http://schemas.microsoft.com/office/drawing/2014/main" id="{C83B76D4-9311-4994-B480-160F73A5F222}"/>
               </a:ext>
             </a:extLst>
           </p:cNvPr>
@@ -44007,7 +44007,7 @@
           <p:cNvPr id="84" name="">
             <a:extLst xmlns:a="http://schemas.openxmlformats.org/drawingml/2006/main">
               <a:ext uri="{FF2B5EF4-FFF2-40B4-BE49-F238E27FC236}">
-                <a16:creationId xmlns:a16="http://schemas.microsoft.com/office/drawing/2014/main" id="{1B7F3DF8-211B-4ED9-8A83-47DF41AFC7BF}"/>
+                <a16:creationId xmlns:a16="http://schemas.microsoft.com/office/drawing/2014/main" id="{2D68BF09-F1D9-4F2A-B2F8-C97BA2EFA342}"/>
               </a:ext>
             </a:extLst>
           </p:cNvPr>
@@ -44059,7 +44059,7 @@
           <p:cNvPr id="85" name="">
             <a:extLst xmlns:a="http://schemas.openxmlformats.org/drawingml/2006/main">
               <a:ext uri="{FF2B5EF4-FFF2-40B4-BE49-F238E27FC236}">
-                <a16:creationId xmlns:a16="http://schemas.microsoft.com/office/drawing/2014/main" id="{581387BF-F9EC-47C6-AABA-E2AC78D44787}"/>
+                <a16:creationId xmlns:a16="http://schemas.microsoft.com/office/drawing/2014/main" id="{316B2385-04F6-4934-B01C-B9B5308C1D1B}"/>
               </a:ext>
             </a:extLst>
           </p:cNvPr>
@@ -44111,7 +44111,7 @@
           <p:cNvPr id="86" name="">
             <a:extLst xmlns:a="http://schemas.openxmlformats.org/drawingml/2006/main">
               <a:ext uri="{FF2B5EF4-FFF2-40B4-BE49-F238E27FC236}">
-                <a16:creationId xmlns:a16="http://schemas.microsoft.com/office/drawing/2014/main" id="{18912750-6038-4AD3-8F65-6FDE9F4394D5}"/>
+                <a16:creationId xmlns:a16="http://schemas.microsoft.com/office/drawing/2014/main" id="{DF7E852F-E3E7-4391-8C40-960B1ED43CDE}"/>
               </a:ext>
             </a:extLst>
           </p:cNvPr>
@@ -44163,7 +44163,7 @@
           <p:cNvPr id="87" name="">
             <a:extLst xmlns:a="http://schemas.openxmlformats.org/drawingml/2006/main">
               <a:ext uri="{FF2B5EF4-FFF2-40B4-BE49-F238E27FC236}">
-                <a16:creationId xmlns:a16="http://schemas.microsoft.com/office/drawing/2014/main" id="{DBC48C78-6D4B-4254-9EF4-815564D84D7E}"/>
+                <a16:creationId xmlns:a16="http://schemas.microsoft.com/office/drawing/2014/main" id="{BAC73A75-3505-48C4-97A3-D6CF3129B341}"/>
               </a:ext>
             </a:extLst>
           </p:cNvPr>
@@ -44215,7 +44215,7 @@
           <p:cNvPr id="88" name="">
             <a:extLst xmlns:a="http://schemas.openxmlformats.org/drawingml/2006/main">
               <a:ext uri="{FF2B5EF4-FFF2-40B4-BE49-F238E27FC236}">
-                <a16:creationId xmlns:a16="http://schemas.microsoft.com/office/drawing/2014/main" id="{A5F770EA-3125-4063-ACFB-78DDF77F607F}"/>
+                <a16:creationId xmlns:a16="http://schemas.microsoft.com/office/drawing/2014/main" id="{9D318112-1029-41F7-BEFE-51486D2ACCEF}"/>
               </a:ext>
             </a:extLst>
           </p:cNvPr>
@@ -44267,7 +44267,7 @@
           <p:cNvPr id="89" name="">
             <a:extLst xmlns:a="http://schemas.openxmlformats.org/drawingml/2006/main">
               <a:ext uri="{FF2B5EF4-FFF2-40B4-BE49-F238E27FC236}">
-                <a16:creationId xmlns:a16="http://schemas.microsoft.com/office/drawing/2014/main" id="{BBEAE0CB-92A1-44D9-9E63-01EB4E684A4A}"/>
+                <a16:creationId xmlns:a16="http://schemas.microsoft.com/office/drawing/2014/main" id="{5C4DE9E2-C647-4641-B35C-03CA9A9A2201}"/>
               </a:ext>
             </a:extLst>
           </p:cNvPr>
@@ -44298,7 +44298,7 @@
           <p:cNvPr id="90" name="">
             <a:extLst xmlns:a="http://schemas.openxmlformats.org/drawingml/2006/main">
               <a:ext uri="{FF2B5EF4-FFF2-40B4-BE49-F238E27FC236}">
-                <a16:creationId xmlns:a16="http://schemas.microsoft.com/office/drawing/2014/main" id="{1A659A5C-D2A6-46A7-8EF7-FC4D52618B81}"/>
+                <a16:creationId xmlns:a16="http://schemas.microsoft.com/office/drawing/2014/main" id="{50D3775D-E603-46CC-8DA0-9BFE788D8741}"/>
               </a:ext>
             </a:extLst>
           </p:cNvPr>
@@ -44329,7 +44329,7 @@
           <p:cNvPr id="91" name="">
             <a:extLst xmlns:a="http://schemas.openxmlformats.org/drawingml/2006/main">
               <a:ext uri="{FF2B5EF4-FFF2-40B4-BE49-F238E27FC236}">
-                <a16:creationId xmlns:a16="http://schemas.microsoft.com/office/drawing/2014/main" id="{3475D780-5837-49CC-B4E1-798C0A58A449}"/>
+                <a16:creationId xmlns:a16="http://schemas.microsoft.com/office/drawing/2014/main" id="{B5EDFAE7-8EBC-4EFF-B649-9FA7AD285940}"/>
               </a:ext>
             </a:extLst>
           </p:cNvPr>
@@ -44381,7 +44381,7 @@
           <p:cNvPr id="92" name="">
             <a:extLst xmlns:a="http://schemas.openxmlformats.org/drawingml/2006/main">
               <a:ext uri="{FF2B5EF4-FFF2-40B4-BE49-F238E27FC236}">
-                <a16:creationId xmlns:a16="http://schemas.microsoft.com/office/drawing/2014/main" id="{67837601-1770-45E1-ADAA-0B713CC42A4B}"/>
+                <a16:creationId xmlns:a16="http://schemas.microsoft.com/office/drawing/2014/main" id="{A08EC0A5-DC47-4C50-9FF6-1168DE1AEDCB}"/>
               </a:ext>
             </a:extLst>
           </p:cNvPr>
@@ -44433,7 +44433,7 @@
           <p:cNvPr id="93" name="">
             <a:extLst xmlns:a="http://schemas.openxmlformats.org/drawingml/2006/main">
               <a:ext uri="{FF2B5EF4-FFF2-40B4-BE49-F238E27FC236}">
-                <a16:creationId xmlns:a16="http://schemas.microsoft.com/office/drawing/2014/main" id="{C948D4FF-449D-4CB7-9C69-F8A1DD905730}"/>
+                <a16:creationId xmlns:a16="http://schemas.microsoft.com/office/drawing/2014/main" id="{FFDC3C02-A725-4D71-ABD7-8C2CD8ADD358}"/>
               </a:ext>
             </a:extLst>
           </p:cNvPr>
@@ -44485,7 +44485,7 @@
           <p:cNvPr id="94" name="">
             <a:extLst xmlns:a="http://schemas.openxmlformats.org/drawingml/2006/main">
               <a:ext uri="{FF2B5EF4-FFF2-40B4-BE49-F238E27FC236}">
-                <a16:creationId xmlns:a16="http://schemas.microsoft.com/office/drawing/2014/main" id="{267B0329-8B1E-46CB-A515-3B9AD4D971D8}"/>
+                <a16:creationId xmlns:a16="http://schemas.microsoft.com/office/drawing/2014/main" id="{8B365866-A090-406F-A53A-6EECFDBE4EEA}"/>
               </a:ext>
             </a:extLst>
           </p:cNvPr>
@@ -44537,7 +44537,7 @@
           <p:cNvPr id="95" name="">
             <a:extLst xmlns:a="http://schemas.openxmlformats.org/drawingml/2006/main">
               <a:ext uri="{FF2B5EF4-FFF2-40B4-BE49-F238E27FC236}">
-                <a16:creationId xmlns:a16="http://schemas.microsoft.com/office/drawing/2014/main" id="{A0D20CAA-5AC5-4EEF-B4B1-CEAD24330354}"/>
+                <a16:creationId xmlns:a16="http://schemas.microsoft.com/office/drawing/2014/main" id="{F235FEA0-A1E4-417B-9696-B722A4F1A452}"/>
               </a:ext>
             </a:extLst>
           </p:cNvPr>
@@ -44589,7 +44589,7 @@
           <p:cNvPr id="96" name="">
             <a:extLst xmlns:a="http://schemas.openxmlformats.org/drawingml/2006/main">
               <a:ext uri="{FF2B5EF4-FFF2-40B4-BE49-F238E27FC236}">
-                <a16:creationId xmlns:a16="http://schemas.microsoft.com/office/drawing/2014/main" id="{1741684B-7863-40E1-84D6-FA5A49E62F3D}"/>
+                <a16:creationId xmlns:a16="http://schemas.microsoft.com/office/drawing/2014/main" id="{06DF8F42-3E5C-43DE-8B53-6D581AC6D59A}"/>
               </a:ext>
             </a:extLst>
           </p:cNvPr>
@@ -44620,7 +44620,7 @@
           <p:cNvPr id="97" name="">
             <a:extLst xmlns:a="http://schemas.openxmlformats.org/drawingml/2006/main">
               <a:ext uri="{FF2B5EF4-FFF2-40B4-BE49-F238E27FC236}">
-                <a16:creationId xmlns:a16="http://schemas.microsoft.com/office/drawing/2014/main" id="{E3D32C88-2E52-417A-A21E-FCB1B207B4A1}"/>
+                <a16:creationId xmlns:a16="http://schemas.microsoft.com/office/drawing/2014/main" id="{1BD3DC8A-528D-4283-BC27-B76FADD7A74C}"/>
               </a:ext>
             </a:extLst>
           </p:cNvPr>
@@ -44672,7 +44672,7 @@
           <p:cNvPr id="98" name="">
             <a:extLst xmlns:a="http://schemas.openxmlformats.org/drawingml/2006/main">
               <a:ext uri="{FF2B5EF4-FFF2-40B4-BE49-F238E27FC236}">
-                <a16:creationId xmlns:a16="http://schemas.microsoft.com/office/drawing/2014/main" id="{82098119-1CEC-428F-94FC-FC7F82C1D3FA}"/>
+                <a16:creationId xmlns:a16="http://schemas.microsoft.com/office/drawing/2014/main" id="{5B9AF7F9-1EAB-416B-86A4-1E865487237D}"/>
               </a:ext>
             </a:extLst>
           </p:cNvPr>
@@ -44724,7 +44724,7 @@
           <p:cNvPr id="99" name="">
             <a:extLst xmlns:a="http://schemas.openxmlformats.org/drawingml/2006/main">
               <a:ext uri="{FF2B5EF4-FFF2-40B4-BE49-F238E27FC236}">
-                <a16:creationId xmlns:a16="http://schemas.microsoft.com/office/drawing/2014/main" id="{5C834143-24F8-445D-B6F7-5A0ECB757BAE}"/>
+                <a16:creationId xmlns:a16="http://schemas.microsoft.com/office/drawing/2014/main" id="{0121353D-BD1D-4D89-99DD-AEBC061FF82F}"/>
               </a:ext>
             </a:extLst>
           </p:cNvPr>
@@ -44776,7 +44776,7 @@
           <p:cNvPr id="100" name="">
             <a:extLst xmlns:a="http://schemas.openxmlformats.org/drawingml/2006/main">
               <a:ext uri="{FF2B5EF4-FFF2-40B4-BE49-F238E27FC236}">
-                <a16:creationId xmlns:a16="http://schemas.microsoft.com/office/drawing/2014/main" id="{415392A9-EB56-4F24-B789-E872659C420C}"/>
+                <a16:creationId xmlns:a16="http://schemas.microsoft.com/office/drawing/2014/main" id="{B5C55496-58CC-474D-B4E6-13436D2B1481}"/>
               </a:ext>
             </a:extLst>
           </p:cNvPr>
@@ -44828,7 +44828,7 @@
           <p:cNvPr id="101" name="">
             <a:extLst xmlns:a="http://schemas.openxmlformats.org/drawingml/2006/main">
               <a:ext uri="{FF2B5EF4-FFF2-40B4-BE49-F238E27FC236}">
-                <a16:creationId xmlns:a16="http://schemas.microsoft.com/office/drawing/2014/main" id="{963B3D6D-9B0F-4F81-AFCA-5B66B120BD9F}"/>
+                <a16:creationId xmlns:a16="http://schemas.microsoft.com/office/drawing/2014/main" id="{E05FDC9A-7C44-41F0-BAC0-145F33470B8F}"/>
               </a:ext>
             </a:extLst>
           </p:cNvPr>
@@ -44878,7 +44878,7 @@
     </p:spTree>
     <p:extLst>
       <p:ext uri="{BB962C8B-B14F-4D97-AF65-F5344CB8AC3E}">
-        <p14:creationId xmlns:p14="http://schemas.microsoft.com/office/powerpoint/2010/main" val="726816137"/>
+        <p14:creationId xmlns:p14="http://schemas.microsoft.com/office/powerpoint/2010/main" val="1969129361"/>
       </p:ext>
     </p:extLst>
   </p:cSld>

--- a/.preview/pptx-claro/deck.pptx
+++ b/.preview/pptx-claro/deck.pptx
@@ -2,27 +2,27 @@
 <file path=ppt/presentation.xml><?xml version="1.0" encoding="utf-8"?>
 <p:presentation xmlns:p="http://schemas.openxmlformats.org/presentationml/2006/main">
   <p:sldMasterIdLst>
-    <p:sldMasterId xmlns:r="http://schemas.openxmlformats.org/officeDocument/2006/relationships" id="2147483648" r:id="R7193bbff9898476e"/>
+    <p:sldMasterId xmlns:r="http://schemas.openxmlformats.org/officeDocument/2006/relationships" id="2147483648" r:id="R30adfa2044814002"/>
   </p:sldMasterIdLst>
   <p:notesMasterIdLst>
-    <p:notesMasterId xmlns:r="http://schemas.openxmlformats.org/officeDocument/2006/relationships" r:id="R9afcfb2edaea4a44"/>
+    <p:notesMasterId xmlns:r="http://schemas.openxmlformats.org/officeDocument/2006/relationships" r:id="Rf416f2d3b91d4e88"/>
   </p:notesMasterIdLst>
   <p:sldIdLst>
-    <p:sldId xmlns:r="http://schemas.openxmlformats.org/officeDocument/2006/relationships" id="256" r:id="R803b9aac42cc4c3c"/>
-    <p:sldId xmlns:r="http://schemas.openxmlformats.org/officeDocument/2006/relationships" id="257" r:id="Ra135a8c19efa4e68"/>
-    <p:sldId xmlns:r="http://schemas.openxmlformats.org/officeDocument/2006/relationships" id="258" r:id="R7c1944c19e694126"/>
-    <p:sldId xmlns:r="http://schemas.openxmlformats.org/officeDocument/2006/relationships" id="259" r:id="R916f9b280d23480f"/>
-    <p:sldId xmlns:r="http://schemas.openxmlformats.org/officeDocument/2006/relationships" id="260" r:id="R716ee146b41049dc"/>
-    <p:sldId xmlns:r="http://schemas.openxmlformats.org/officeDocument/2006/relationships" id="261" r:id="Rf6e6eb5d97b2430f"/>
-    <p:sldId xmlns:r="http://schemas.openxmlformats.org/officeDocument/2006/relationships" id="262" r:id="Rf3fed068d11d4522"/>
-    <p:sldId xmlns:r="http://schemas.openxmlformats.org/officeDocument/2006/relationships" id="263" r:id="R274ad4c2b04a493b"/>
-    <p:sldId xmlns:r="http://schemas.openxmlformats.org/officeDocument/2006/relationships" id="264" r:id="R96d00674c17745fd"/>
-    <p:sldId xmlns:r="http://schemas.openxmlformats.org/officeDocument/2006/relationships" id="265" r:id="Rd9cf2a36d1e9454a"/>
-    <p:sldId xmlns:r="http://schemas.openxmlformats.org/officeDocument/2006/relationships" id="266" r:id="R95547962c316446d"/>
-    <p:sldId xmlns:r="http://schemas.openxmlformats.org/officeDocument/2006/relationships" id="267" r:id="R1f6d384b26ef4e34"/>
-    <p:sldId xmlns:r="http://schemas.openxmlformats.org/officeDocument/2006/relationships" id="268" r:id="R7be158288bf246bf"/>
-    <p:sldId xmlns:r="http://schemas.openxmlformats.org/officeDocument/2006/relationships" id="269" r:id="Rebf4712944d84128"/>
-    <p:sldId xmlns:r="http://schemas.openxmlformats.org/officeDocument/2006/relationships" id="270" r:id="R4cc2a930115f4548"/>
+    <p:sldId xmlns:r="http://schemas.openxmlformats.org/officeDocument/2006/relationships" id="256" r:id="R43ff010bdc9142a3"/>
+    <p:sldId xmlns:r="http://schemas.openxmlformats.org/officeDocument/2006/relationships" id="257" r:id="Ref04cedb57da4cfd"/>
+    <p:sldId xmlns:r="http://schemas.openxmlformats.org/officeDocument/2006/relationships" id="258" r:id="Ra5d73a581d8e4c66"/>
+    <p:sldId xmlns:r="http://schemas.openxmlformats.org/officeDocument/2006/relationships" id="259" r:id="R9c686a5b977c4f2a"/>
+    <p:sldId xmlns:r="http://schemas.openxmlformats.org/officeDocument/2006/relationships" id="260" r:id="R0156fc9cec284934"/>
+    <p:sldId xmlns:r="http://schemas.openxmlformats.org/officeDocument/2006/relationships" id="261" r:id="R0194b07940734504"/>
+    <p:sldId xmlns:r="http://schemas.openxmlformats.org/officeDocument/2006/relationships" id="262" r:id="Rda7a5b8fb6444d1d"/>
+    <p:sldId xmlns:r="http://schemas.openxmlformats.org/officeDocument/2006/relationships" id="263" r:id="Rdf5b9d339635494b"/>
+    <p:sldId xmlns:r="http://schemas.openxmlformats.org/officeDocument/2006/relationships" id="264" r:id="Rc4cf05c432a5402c"/>
+    <p:sldId xmlns:r="http://schemas.openxmlformats.org/officeDocument/2006/relationships" id="265" r:id="R356af9e91c1d4f99"/>
+    <p:sldId xmlns:r="http://schemas.openxmlformats.org/officeDocument/2006/relationships" id="266" r:id="R7d3c54a5ef214ed1"/>
+    <p:sldId xmlns:r="http://schemas.openxmlformats.org/officeDocument/2006/relationships" id="267" r:id="Rcb00095bdb004f34"/>
+    <p:sldId xmlns:r="http://schemas.openxmlformats.org/officeDocument/2006/relationships" id="268" r:id="R193481862c464746"/>
+    <p:sldId xmlns:r="http://schemas.openxmlformats.org/officeDocument/2006/relationships" id="269" r:id="Ra75cb425ae4643b8"/>
+    <p:sldId xmlns:r="http://schemas.openxmlformats.org/officeDocument/2006/relationships" id="270" r:id="Rea5e0ab30371490b"/>
   </p:sldIdLst>
   <p:sldSz cx="12192000" cy="6858000"/>
   <p:notesSz cx="6858000" cy="9144000"/>
@@ -1879,7 +1879,7 @@
   </p:cSld>
   <p:clrMap bg1="lt1" tx1="dk1" bg2="lt2" tx2="dk2" accent1="accent1" accent2="accent2" accent3="accent3" accent4="accent4" accent5="accent5" accent6="accent6" hlink="hlink" folHlink="folHlink"/>
   <p:sldLayoutIdLst>
-    <p:sldLayoutId xmlns:r="http://schemas.openxmlformats.org/officeDocument/2006/relationships" id="2147483649" r:id="R3a02715600794a7c"/>
+    <p:sldLayoutId xmlns:r="http://schemas.openxmlformats.org/officeDocument/2006/relationships" id="2147483649" r:id="Re2318916609449e5"/>
   </p:sldLayoutIdLst>
   <p:txStyles>
     <p:titleStyle>
@@ -2430,7 +2430,7 @@
           <p:cNvPr id="17" name="">
             <a:extLst xmlns:a="http://schemas.openxmlformats.org/drawingml/2006/main">
               <a:ext uri="{FF2B5EF4-FFF2-40B4-BE49-F238E27FC236}">
-                <a16:creationId xmlns:a16="http://schemas.microsoft.com/office/drawing/2014/main" id="{0CC44998-242C-499C-97F8-69E8FE701DD5}"/>
+                <a16:creationId xmlns:a16="http://schemas.microsoft.com/office/drawing/2014/main" id="{F5E6865B-6804-4AA4-B819-7AE0C8FBD76C}"/>
               </a:ext>
             </a:extLst>
           </p:cNvPr>
@@ -2463,7 +2463,7 @@
           <p:cNvPr id="2" name="">
             <a:extLst xmlns:a="http://schemas.openxmlformats.org/drawingml/2006/main">
               <a:ext uri="{FF2B5EF4-FFF2-40B4-BE49-F238E27FC236}">
-                <a16:creationId xmlns:a16="http://schemas.microsoft.com/office/drawing/2014/main" id="{D44414BA-3999-4FA3-92B1-D82DB1AAEA7E}"/>
+                <a16:creationId xmlns:a16="http://schemas.microsoft.com/office/drawing/2014/main" id="{6D3BA950-A122-47C0-973D-1209A085B930}"/>
               </a:ext>
             </a:extLst>
           </p:cNvPr>
@@ -2494,7 +2494,7 @@
           <p:cNvPr id="3" name="">
             <a:extLst xmlns:a="http://schemas.openxmlformats.org/drawingml/2006/main">
               <a:ext uri="{FF2B5EF4-FFF2-40B4-BE49-F238E27FC236}">
-                <a16:creationId xmlns:a16="http://schemas.microsoft.com/office/drawing/2014/main" id="{45BE5842-13B7-4B76-9E74-18CA266CF7EA}"/>
+                <a16:creationId xmlns:a16="http://schemas.microsoft.com/office/drawing/2014/main" id="{82C3231E-3820-4F4C-98FC-09406706D8A4}"/>
               </a:ext>
             </a:extLst>
           </p:cNvPr>
@@ -2529,7 +2529,7 @@
           <p:nvPr/>
         </p:nvPicPr>
         <p:blipFill>
-          <a:blip xmlns:r="http://schemas.openxmlformats.org/officeDocument/2006/relationships" xmlns:a="http://schemas.openxmlformats.org/drawingml/2006/main" r:embed="R3a8085f2c1ec48a9"/>
+          <a:blip xmlns:r="http://schemas.openxmlformats.org/officeDocument/2006/relationships" xmlns:a="http://schemas.openxmlformats.org/drawingml/2006/main" r:embed="Rd403bee9c3d6466a"/>
           <a:stretch xmlns:a="http://schemas.openxmlformats.org/drawingml/2006/main"/>
         </p:blipFill>
         <p:spPr>
@@ -2547,7 +2547,7 @@
           <p:cNvPr id="5" name="">
             <a:extLst xmlns:a="http://schemas.openxmlformats.org/drawingml/2006/main">
               <a:ext uri="{FF2B5EF4-FFF2-40B4-BE49-F238E27FC236}">
-                <a16:creationId xmlns:a16="http://schemas.microsoft.com/office/drawing/2014/main" id="{C9AD7072-101A-4536-B16B-6553F1DEC6D9}"/>
+                <a16:creationId xmlns:a16="http://schemas.microsoft.com/office/drawing/2014/main" id="{0F3F7F68-CE7B-491F-98E7-96084C9AE0D7}"/>
               </a:ext>
             </a:extLst>
           </p:cNvPr>
@@ -2599,7 +2599,7 @@
           <p:cNvPr id="6" name="">
             <a:extLst xmlns:a="http://schemas.openxmlformats.org/drawingml/2006/main">
               <a:ext uri="{FF2B5EF4-FFF2-40B4-BE49-F238E27FC236}">
-                <a16:creationId xmlns:a16="http://schemas.microsoft.com/office/drawing/2014/main" id="{1DA9FC12-09C8-4786-ADFE-A903FDD3026A}"/>
+                <a16:creationId xmlns:a16="http://schemas.microsoft.com/office/drawing/2014/main" id="{5772D411-0023-4ABF-94A4-378C4C2A4BB0}"/>
               </a:ext>
             </a:extLst>
           </p:cNvPr>
@@ -2655,7 +2655,7 @@
           <p:nvPr/>
         </p:nvPicPr>
         <p:blipFill>
-          <a:blip xmlns:r="http://schemas.openxmlformats.org/officeDocument/2006/relationships" xmlns:a="http://schemas.openxmlformats.org/drawingml/2006/main" r:embed="Rfcf2a1aedf6d4e2a"/>
+          <a:blip xmlns:r="http://schemas.openxmlformats.org/officeDocument/2006/relationships" xmlns:a="http://schemas.openxmlformats.org/drawingml/2006/main" r:embed="R935958c3b60747e7"/>
           <a:stretch xmlns:a="http://schemas.openxmlformats.org/drawingml/2006/main"/>
         </p:blipFill>
         <p:spPr>
@@ -2673,7 +2673,7 @@
           <p:cNvPr id="8" name="">
             <a:extLst xmlns:a="http://schemas.openxmlformats.org/drawingml/2006/main">
               <a:ext uri="{FF2B5EF4-FFF2-40B4-BE49-F238E27FC236}">
-                <a16:creationId xmlns:a16="http://schemas.microsoft.com/office/drawing/2014/main" id="{776D7B3E-151A-43F8-9D89-7146C46F0BA1}"/>
+                <a16:creationId xmlns:a16="http://schemas.microsoft.com/office/drawing/2014/main" id="{237F5F2A-7AF6-451D-A5C4-8026CE256247}"/>
               </a:ext>
             </a:extLst>
           </p:cNvPr>
@@ -2706,7 +2706,7 @@
           <p:cNvPr id="9" name="">
             <a:extLst xmlns:a="http://schemas.openxmlformats.org/drawingml/2006/main">
               <a:ext uri="{FF2B5EF4-FFF2-40B4-BE49-F238E27FC236}">
-                <a16:creationId xmlns:a16="http://schemas.microsoft.com/office/drawing/2014/main" id="{D42A3176-1633-404A-8037-C1871A9C59A5}"/>
+                <a16:creationId xmlns:a16="http://schemas.microsoft.com/office/drawing/2014/main" id="{47B1CF04-00FE-4999-AFD0-7F06817BDED6}"/>
               </a:ext>
             </a:extLst>
           </p:cNvPr>
@@ -2758,7 +2758,7 @@
           <p:cNvPr id="10" name="">
             <a:extLst xmlns:a="http://schemas.openxmlformats.org/drawingml/2006/main">
               <a:ext uri="{FF2B5EF4-FFF2-40B4-BE49-F238E27FC236}">
-                <a16:creationId xmlns:a16="http://schemas.microsoft.com/office/drawing/2014/main" id="{24601E0B-36D0-494A-9026-40D71927124B}"/>
+                <a16:creationId xmlns:a16="http://schemas.microsoft.com/office/drawing/2014/main" id="{7C9BEB61-8649-440D-9A14-BFF96FD5541D}"/>
               </a:ext>
             </a:extLst>
           </p:cNvPr>
@@ -2810,7 +2810,7 @@
           <p:cNvPr id="11" name="">
             <a:extLst xmlns:a="http://schemas.openxmlformats.org/drawingml/2006/main">
               <a:ext uri="{FF2B5EF4-FFF2-40B4-BE49-F238E27FC236}">
-                <a16:creationId xmlns:a16="http://schemas.microsoft.com/office/drawing/2014/main" id="{56DD808F-1272-4214-9BAC-7FA7D78CBC49}"/>
+                <a16:creationId xmlns:a16="http://schemas.microsoft.com/office/drawing/2014/main" id="{7BC4DEDA-A32E-479A-8088-E2D1DAE97977}"/>
               </a:ext>
             </a:extLst>
           </p:cNvPr>
@@ -2862,7 +2862,7 @@
           <p:cNvPr id="12" name="">
             <a:extLst xmlns:a="http://schemas.openxmlformats.org/drawingml/2006/main">
               <a:ext uri="{FF2B5EF4-FFF2-40B4-BE49-F238E27FC236}">
-                <a16:creationId xmlns:a16="http://schemas.microsoft.com/office/drawing/2014/main" id="{1113179F-345A-4D45-8E4C-45D5996FF84B}"/>
+                <a16:creationId xmlns:a16="http://schemas.microsoft.com/office/drawing/2014/main" id="{152182E5-894A-49F8-AE2A-E0AF5B3D0EA2}"/>
               </a:ext>
             </a:extLst>
           </p:cNvPr>
@@ -2914,7 +2914,7 @@
           <p:cNvPr id="13" name="">
             <a:extLst xmlns:a="http://schemas.openxmlformats.org/drawingml/2006/main">
               <a:ext uri="{FF2B5EF4-FFF2-40B4-BE49-F238E27FC236}">
-                <a16:creationId xmlns:a16="http://schemas.microsoft.com/office/drawing/2014/main" id="{EA8BDBC5-97AA-4019-BECC-B2A284C734E3}"/>
+                <a16:creationId xmlns:a16="http://schemas.microsoft.com/office/drawing/2014/main" id="{C988F7D3-DDAF-42D4-B8FF-BA775FA51B1E}"/>
               </a:ext>
             </a:extLst>
           </p:cNvPr>
@@ -2966,7 +2966,7 @@
           <p:cNvPr id="14" name="">
             <a:extLst xmlns:a="http://schemas.openxmlformats.org/drawingml/2006/main">
               <a:ext uri="{FF2B5EF4-FFF2-40B4-BE49-F238E27FC236}">
-                <a16:creationId xmlns:a16="http://schemas.microsoft.com/office/drawing/2014/main" id="{4FC4997B-808C-49B0-9778-253DBDE6BE95}"/>
+                <a16:creationId xmlns:a16="http://schemas.microsoft.com/office/drawing/2014/main" id="{D5E1D636-E43C-4A6D-8CD4-CBC1942A27CD}"/>
               </a:ext>
             </a:extLst>
           </p:cNvPr>
@@ -3018,7 +3018,7 @@
           <p:cNvPr id="15" name="">
             <a:extLst xmlns:a="http://schemas.openxmlformats.org/drawingml/2006/main">
               <a:ext uri="{FF2B5EF4-FFF2-40B4-BE49-F238E27FC236}">
-                <a16:creationId xmlns:a16="http://schemas.microsoft.com/office/drawing/2014/main" id="{EBF26293-C404-49E3-8056-A10BDA63C158}"/>
+                <a16:creationId xmlns:a16="http://schemas.microsoft.com/office/drawing/2014/main" id="{5AF344E7-7CFB-427B-9D58-95645C05C866}"/>
               </a:ext>
             </a:extLst>
           </p:cNvPr>
@@ -3070,7 +3070,7 @@
           <p:cNvPr id="16" name="">
             <a:extLst xmlns:a="http://schemas.openxmlformats.org/drawingml/2006/main">
               <a:ext uri="{FF2B5EF4-FFF2-40B4-BE49-F238E27FC236}">
-                <a16:creationId xmlns:a16="http://schemas.microsoft.com/office/drawing/2014/main" id="{1CFBA870-FF1C-4DCF-A923-543EBA179642}"/>
+                <a16:creationId xmlns:a16="http://schemas.microsoft.com/office/drawing/2014/main" id="{3B0BD622-3859-4551-95E9-B5CD86FD85D1}"/>
               </a:ext>
             </a:extLst>
           </p:cNvPr>
@@ -3120,7 +3120,7 @@
     </p:spTree>
     <p:extLst>
       <p:ext uri="{BB962C8B-B14F-4D97-AF65-F5344CB8AC3E}">
-        <p14:creationId xmlns:p14="http://schemas.microsoft.com/office/powerpoint/2010/main" val="1609619331"/>
+        <p14:creationId xmlns:p14="http://schemas.microsoft.com/office/powerpoint/2010/main" val="2013824524"/>
       </p:ext>
     </p:extLst>
   </p:cSld>
@@ -3151,7 +3151,7 @@
           <p:cNvPr id="103" name="">
             <a:extLst xmlns:a="http://schemas.openxmlformats.org/drawingml/2006/main">
               <a:ext uri="{FF2B5EF4-FFF2-40B4-BE49-F238E27FC236}">
-                <a16:creationId xmlns:a16="http://schemas.microsoft.com/office/drawing/2014/main" id="{100E22C4-349C-4DCE-8545-BDC5B8A4778E}"/>
+                <a16:creationId xmlns:a16="http://schemas.microsoft.com/office/drawing/2014/main" id="{47B13516-06AA-47CB-9FE9-8D8CEA9E00A4}"/>
               </a:ext>
             </a:extLst>
           </p:cNvPr>
@@ -3184,7 +3184,7 @@
           <p:cNvPr id="2" name="">
             <a:extLst xmlns:a="http://schemas.openxmlformats.org/drawingml/2006/main">
               <a:ext uri="{FF2B5EF4-FFF2-40B4-BE49-F238E27FC236}">
-                <a16:creationId xmlns:a16="http://schemas.microsoft.com/office/drawing/2014/main" id="{E8B1D941-B5D2-43F9-BF75-C7582905AA47}"/>
+                <a16:creationId xmlns:a16="http://schemas.microsoft.com/office/drawing/2014/main" id="{6DC235BB-0FF8-424C-9E0B-8C3712EE1122}"/>
               </a:ext>
             </a:extLst>
           </p:cNvPr>
@@ -3215,7 +3215,7 @@
           <p:cNvPr id="3" name="">
             <a:extLst xmlns:a="http://schemas.openxmlformats.org/drawingml/2006/main">
               <a:ext uri="{FF2B5EF4-FFF2-40B4-BE49-F238E27FC236}">
-                <a16:creationId xmlns:a16="http://schemas.microsoft.com/office/drawing/2014/main" id="{6866E5D9-AED8-4041-BB9B-FFFEA03FC4E5}"/>
+                <a16:creationId xmlns:a16="http://schemas.microsoft.com/office/drawing/2014/main" id="{B1931A13-AA09-4ED1-9311-15506A2362DA}"/>
               </a:ext>
             </a:extLst>
           </p:cNvPr>
@@ -3267,7 +3267,7 @@
           <p:cNvPr id="4" name="">
             <a:extLst xmlns:a="http://schemas.openxmlformats.org/drawingml/2006/main">
               <a:ext uri="{FF2B5EF4-FFF2-40B4-BE49-F238E27FC236}">
-                <a16:creationId xmlns:a16="http://schemas.microsoft.com/office/drawing/2014/main" id="{08971B40-BCB7-4541-9549-EEF68245CB6F}"/>
+                <a16:creationId xmlns:a16="http://schemas.microsoft.com/office/drawing/2014/main" id="{48FEB06C-54C7-47C1-B677-7E300F6336E8}"/>
               </a:ext>
             </a:extLst>
           </p:cNvPr>
@@ -3319,7 +3319,7 @@
           <p:cNvPr id="5" name="">
             <a:extLst xmlns:a="http://schemas.openxmlformats.org/drawingml/2006/main">
               <a:ext uri="{FF2B5EF4-FFF2-40B4-BE49-F238E27FC236}">
-                <a16:creationId xmlns:a16="http://schemas.microsoft.com/office/drawing/2014/main" id="{8DAE41D6-5ECA-4BB7-BF65-B2CDD76DFFAD}"/>
+                <a16:creationId xmlns:a16="http://schemas.microsoft.com/office/drawing/2014/main" id="{3113DCE1-3B84-4EAA-BA72-B216344C9053}"/>
               </a:ext>
             </a:extLst>
           </p:cNvPr>
@@ -3354,7 +3354,7 @@
           <p:nvPr/>
         </p:nvPicPr>
         <p:blipFill>
-          <a:blip xmlns:r="http://schemas.openxmlformats.org/officeDocument/2006/relationships" xmlns:a="http://schemas.openxmlformats.org/drawingml/2006/main" r:embed="R77bace22a8364312"/>
+          <a:blip xmlns:r="http://schemas.openxmlformats.org/officeDocument/2006/relationships" xmlns:a="http://schemas.openxmlformats.org/drawingml/2006/main" r:embed="R6cc73033014c448b"/>
           <a:stretch xmlns:a="http://schemas.openxmlformats.org/drawingml/2006/main"/>
         </p:blipFill>
         <p:spPr>
@@ -3372,7 +3372,7 @@
           <p:cNvPr id="7" name="">
             <a:extLst xmlns:a="http://schemas.openxmlformats.org/drawingml/2006/main">
               <a:ext uri="{FF2B5EF4-FFF2-40B4-BE49-F238E27FC236}">
-                <a16:creationId xmlns:a16="http://schemas.microsoft.com/office/drawing/2014/main" id="{64C3D952-5293-46C5-AC37-34B870BE6089}"/>
+                <a16:creationId xmlns:a16="http://schemas.microsoft.com/office/drawing/2014/main" id="{21380B34-6223-47AF-86FB-4AAD8A2C0796}"/>
               </a:ext>
             </a:extLst>
           </p:cNvPr>
@@ -3424,7 +3424,7 @@
           <p:cNvPr id="8" name="">
             <a:extLst xmlns:a="http://schemas.openxmlformats.org/drawingml/2006/main">
               <a:ext uri="{FF2B5EF4-FFF2-40B4-BE49-F238E27FC236}">
-                <a16:creationId xmlns:a16="http://schemas.microsoft.com/office/drawing/2014/main" id="{D52315BA-76E3-489E-8588-3BF504D329FA}"/>
+                <a16:creationId xmlns:a16="http://schemas.microsoft.com/office/drawing/2014/main" id="{DCA41073-27EC-4B78-9CE9-B13E86C0615C}"/>
               </a:ext>
             </a:extLst>
           </p:cNvPr>
@@ -3476,7 +3476,7 @@
           <p:cNvPr id="9" name="">
             <a:extLst xmlns:a="http://schemas.openxmlformats.org/drawingml/2006/main">
               <a:ext uri="{FF2B5EF4-FFF2-40B4-BE49-F238E27FC236}">
-                <a16:creationId xmlns:a16="http://schemas.microsoft.com/office/drawing/2014/main" id="{BDBE0B2E-260A-483E-AD22-B37D161A6F90}"/>
+                <a16:creationId xmlns:a16="http://schemas.microsoft.com/office/drawing/2014/main" id="{99C6C6C8-A44E-4CD2-B6D0-C6E11129897E}"/>
               </a:ext>
             </a:extLst>
           </p:cNvPr>
@@ -3528,7 +3528,7 @@
           <p:cNvPr id="10" name="">
             <a:extLst xmlns:a="http://schemas.openxmlformats.org/drawingml/2006/main">
               <a:ext uri="{FF2B5EF4-FFF2-40B4-BE49-F238E27FC236}">
-                <a16:creationId xmlns:a16="http://schemas.microsoft.com/office/drawing/2014/main" id="{74366978-0726-44FF-ADE5-1BB5E08345BA}"/>
+                <a16:creationId xmlns:a16="http://schemas.microsoft.com/office/drawing/2014/main" id="{38A95E7A-EAE2-4396-B242-1BA37CD40E9A}"/>
               </a:ext>
             </a:extLst>
           </p:cNvPr>
@@ -3580,7 +3580,7 @@
           <p:cNvPr id="11" name="">
             <a:extLst xmlns:a="http://schemas.openxmlformats.org/drawingml/2006/main">
               <a:ext uri="{FF2B5EF4-FFF2-40B4-BE49-F238E27FC236}">
-                <a16:creationId xmlns:a16="http://schemas.microsoft.com/office/drawing/2014/main" id="{B0D5E2E2-C6C3-4450-8993-9D50B8F8C886}"/>
+                <a16:creationId xmlns:a16="http://schemas.microsoft.com/office/drawing/2014/main" id="{625AFA0F-18F4-4A24-9C56-027375E64678}"/>
               </a:ext>
             </a:extLst>
           </p:cNvPr>
@@ -3611,7 +3611,7 @@
           <p:cNvPr id="12" name="">
             <a:extLst xmlns:a="http://schemas.openxmlformats.org/drawingml/2006/main">
               <a:ext uri="{FF2B5EF4-FFF2-40B4-BE49-F238E27FC236}">
-                <a16:creationId xmlns:a16="http://schemas.microsoft.com/office/drawing/2014/main" id="{F6FF006B-F528-4DD4-A463-50A21ED731E5}"/>
+                <a16:creationId xmlns:a16="http://schemas.microsoft.com/office/drawing/2014/main" id="{14778A87-67BD-436E-9D83-DFB147FF027A}"/>
               </a:ext>
             </a:extLst>
           </p:cNvPr>
@@ -3642,7 +3642,7 @@
           <p:cNvPr id="13" name="">
             <a:extLst xmlns:a="http://schemas.openxmlformats.org/drawingml/2006/main">
               <a:ext uri="{FF2B5EF4-FFF2-40B4-BE49-F238E27FC236}">
-                <a16:creationId xmlns:a16="http://schemas.microsoft.com/office/drawing/2014/main" id="{6D5CF953-09FC-478D-B934-729574C1A252}"/>
+                <a16:creationId xmlns:a16="http://schemas.microsoft.com/office/drawing/2014/main" id="{D96954EF-44F5-4279-A08F-030423D1AD83}"/>
               </a:ext>
             </a:extLst>
           </p:cNvPr>
@@ -3694,7 +3694,7 @@
           <p:cNvPr id="14" name="">
             <a:extLst xmlns:a="http://schemas.openxmlformats.org/drawingml/2006/main">
               <a:ext uri="{FF2B5EF4-FFF2-40B4-BE49-F238E27FC236}">
-                <a16:creationId xmlns:a16="http://schemas.microsoft.com/office/drawing/2014/main" id="{1F504FA6-564F-4588-9816-4AA492F02618}"/>
+                <a16:creationId xmlns:a16="http://schemas.microsoft.com/office/drawing/2014/main" id="{257BFB47-887D-497A-9AF6-E7173202BDED}"/>
               </a:ext>
             </a:extLst>
           </p:cNvPr>
@@ -3746,7 +3746,7 @@
           <p:cNvPr id="15" name="">
             <a:extLst xmlns:a="http://schemas.openxmlformats.org/drawingml/2006/main">
               <a:ext uri="{FF2B5EF4-FFF2-40B4-BE49-F238E27FC236}">
-                <a16:creationId xmlns:a16="http://schemas.microsoft.com/office/drawing/2014/main" id="{27D44D3A-3D46-44FC-92B8-9A9EF4BCB8D3}"/>
+                <a16:creationId xmlns:a16="http://schemas.microsoft.com/office/drawing/2014/main" id="{0ECF09AE-387F-41E8-87A0-52DA2DE1E5B3}"/>
               </a:ext>
             </a:extLst>
           </p:cNvPr>
@@ -3798,7 +3798,7 @@
           <p:cNvPr id="16" name="">
             <a:extLst xmlns:a="http://schemas.openxmlformats.org/drawingml/2006/main">
               <a:ext uri="{FF2B5EF4-FFF2-40B4-BE49-F238E27FC236}">
-                <a16:creationId xmlns:a16="http://schemas.microsoft.com/office/drawing/2014/main" id="{9195D462-D040-4977-B2C5-DC9F449BB55C}"/>
+                <a16:creationId xmlns:a16="http://schemas.microsoft.com/office/drawing/2014/main" id="{1EA721A5-750C-4117-8930-60091DF55559}"/>
               </a:ext>
             </a:extLst>
           </p:cNvPr>
@@ -3850,7 +3850,7 @@
           <p:cNvPr id="17" name="">
             <a:extLst xmlns:a="http://schemas.openxmlformats.org/drawingml/2006/main">
               <a:ext uri="{FF2B5EF4-FFF2-40B4-BE49-F238E27FC236}">
-                <a16:creationId xmlns:a16="http://schemas.microsoft.com/office/drawing/2014/main" id="{9E122BF6-205F-4939-887B-0D2E2C1C3E19}"/>
+                <a16:creationId xmlns:a16="http://schemas.microsoft.com/office/drawing/2014/main" id="{52C404D4-BF0E-4182-B24F-7B59BACD4BCD}"/>
               </a:ext>
             </a:extLst>
           </p:cNvPr>
@@ -3902,7 +3902,7 @@
           <p:cNvPr id="18" name="">
             <a:extLst xmlns:a="http://schemas.openxmlformats.org/drawingml/2006/main">
               <a:ext uri="{FF2B5EF4-FFF2-40B4-BE49-F238E27FC236}">
-                <a16:creationId xmlns:a16="http://schemas.microsoft.com/office/drawing/2014/main" id="{D8EC239E-C116-4D88-9EF0-A6ADE009E189}"/>
+                <a16:creationId xmlns:a16="http://schemas.microsoft.com/office/drawing/2014/main" id="{3830B282-72B5-43A7-A24E-C755177947C7}"/>
               </a:ext>
             </a:extLst>
           </p:cNvPr>
@@ -3933,7 +3933,7 @@
           <p:cNvPr id="19" name="">
             <a:extLst xmlns:a="http://schemas.openxmlformats.org/drawingml/2006/main">
               <a:ext uri="{FF2B5EF4-FFF2-40B4-BE49-F238E27FC236}">
-                <a16:creationId xmlns:a16="http://schemas.microsoft.com/office/drawing/2014/main" id="{45128919-34E2-4887-8BE6-CDA6EEE6C7D0}"/>
+                <a16:creationId xmlns:a16="http://schemas.microsoft.com/office/drawing/2014/main" id="{10860EFF-0F2F-4DA1-8BC0-9810AB1B2AE4}"/>
               </a:ext>
             </a:extLst>
           </p:cNvPr>
@@ -3964,7 +3964,7 @@
           <p:cNvPr id="20" name="">
             <a:extLst xmlns:a="http://schemas.openxmlformats.org/drawingml/2006/main">
               <a:ext uri="{FF2B5EF4-FFF2-40B4-BE49-F238E27FC236}">
-                <a16:creationId xmlns:a16="http://schemas.microsoft.com/office/drawing/2014/main" id="{9E4F0913-4CDC-4B1F-9818-5722DF94C5BE}"/>
+                <a16:creationId xmlns:a16="http://schemas.microsoft.com/office/drawing/2014/main" id="{983BE366-2745-49E7-BD4D-481E89FB8D7A}"/>
               </a:ext>
             </a:extLst>
           </p:cNvPr>
@@ -4016,7 +4016,7 @@
           <p:cNvPr id="21" name="">
             <a:extLst xmlns:a="http://schemas.openxmlformats.org/drawingml/2006/main">
               <a:ext uri="{FF2B5EF4-FFF2-40B4-BE49-F238E27FC236}">
-                <a16:creationId xmlns:a16="http://schemas.microsoft.com/office/drawing/2014/main" id="{14A889B9-115F-4A7B-8DCC-45612392F6FB}"/>
+                <a16:creationId xmlns:a16="http://schemas.microsoft.com/office/drawing/2014/main" id="{DC2CB886-5115-4A01-8E23-0FD551C0B8A9}"/>
               </a:ext>
             </a:extLst>
           </p:cNvPr>
@@ -4068,7 +4068,7 @@
           <p:cNvPr id="22" name="">
             <a:extLst xmlns:a="http://schemas.openxmlformats.org/drawingml/2006/main">
               <a:ext uri="{FF2B5EF4-FFF2-40B4-BE49-F238E27FC236}">
-                <a16:creationId xmlns:a16="http://schemas.microsoft.com/office/drawing/2014/main" id="{9E3CED65-CA1E-459A-ACFC-7300F9298FD9}"/>
+                <a16:creationId xmlns:a16="http://schemas.microsoft.com/office/drawing/2014/main" id="{AA760714-1898-426C-90E0-086CEC59579D}"/>
               </a:ext>
             </a:extLst>
           </p:cNvPr>
@@ -4120,7 +4120,7 @@
           <p:cNvPr id="23" name="">
             <a:extLst xmlns:a="http://schemas.openxmlformats.org/drawingml/2006/main">
               <a:ext uri="{FF2B5EF4-FFF2-40B4-BE49-F238E27FC236}">
-                <a16:creationId xmlns:a16="http://schemas.microsoft.com/office/drawing/2014/main" id="{685A32B1-922B-4BA8-8FF3-4AD9D29028A5}"/>
+                <a16:creationId xmlns:a16="http://schemas.microsoft.com/office/drawing/2014/main" id="{26DEAB78-4267-46C4-BA2D-11FCCD4DD746}"/>
               </a:ext>
             </a:extLst>
           </p:cNvPr>
@@ -4172,7 +4172,7 @@
           <p:cNvPr id="24" name="">
             <a:extLst xmlns:a="http://schemas.openxmlformats.org/drawingml/2006/main">
               <a:ext uri="{FF2B5EF4-FFF2-40B4-BE49-F238E27FC236}">
-                <a16:creationId xmlns:a16="http://schemas.microsoft.com/office/drawing/2014/main" id="{794A72AB-E83D-452D-AFBA-C9826B51F863}"/>
+                <a16:creationId xmlns:a16="http://schemas.microsoft.com/office/drawing/2014/main" id="{7E3B69DE-2C7C-4324-8530-6D5CEDB9A8C6}"/>
               </a:ext>
             </a:extLst>
           </p:cNvPr>
@@ -4224,7 +4224,7 @@
           <p:cNvPr id="25" name="">
             <a:extLst xmlns:a="http://schemas.openxmlformats.org/drawingml/2006/main">
               <a:ext uri="{FF2B5EF4-FFF2-40B4-BE49-F238E27FC236}">
-                <a16:creationId xmlns:a16="http://schemas.microsoft.com/office/drawing/2014/main" id="{FB068465-A5D3-45B9-9E1A-85EE549C86A7}"/>
+                <a16:creationId xmlns:a16="http://schemas.microsoft.com/office/drawing/2014/main" id="{A8DECDF5-3D81-4997-8911-C214EDA89889}"/>
               </a:ext>
             </a:extLst>
           </p:cNvPr>
@@ -4255,7 +4255,7 @@
           <p:cNvPr id="26" name="">
             <a:extLst xmlns:a="http://schemas.openxmlformats.org/drawingml/2006/main">
               <a:ext uri="{FF2B5EF4-FFF2-40B4-BE49-F238E27FC236}">
-                <a16:creationId xmlns:a16="http://schemas.microsoft.com/office/drawing/2014/main" id="{8B1E613B-2D28-4A1F-9C70-BC9974162211}"/>
+                <a16:creationId xmlns:a16="http://schemas.microsoft.com/office/drawing/2014/main" id="{D509180F-9014-45FD-A557-9A2BDBC08832}"/>
               </a:ext>
             </a:extLst>
           </p:cNvPr>
@@ -4307,7 +4307,7 @@
           <p:cNvPr id="27" name="">
             <a:extLst xmlns:a="http://schemas.openxmlformats.org/drawingml/2006/main">
               <a:ext uri="{FF2B5EF4-FFF2-40B4-BE49-F238E27FC236}">
-                <a16:creationId xmlns:a16="http://schemas.microsoft.com/office/drawing/2014/main" id="{743B197C-A5FB-4F8B-899A-F990E1EFDB14}"/>
+                <a16:creationId xmlns:a16="http://schemas.microsoft.com/office/drawing/2014/main" id="{F7E7F7B2-F63B-4DEA-A091-6D99B5353D9D}"/>
               </a:ext>
             </a:extLst>
           </p:cNvPr>
@@ -4359,7 +4359,7 @@
           <p:cNvPr id="28" name="">
             <a:extLst xmlns:a="http://schemas.openxmlformats.org/drawingml/2006/main">
               <a:ext uri="{FF2B5EF4-FFF2-40B4-BE49-F238E27FC236}">
-                <a16:creationId xmlns:a16="http://schemas.microsoft.com/office/drawing/2014/main" id="{1958E527-1EF8-4752-9225-9B2D5F1A8550}"/>
+                <a16:creationId xmlns:a16="http://schemas.microsoft.com/office/drawing/2014/main" id="{FCABC509-478C-4D40-BAEA-A6802CCD4D6E}"/>
               </a:ext>
             </a:extLst>
           </p:cNvPr>
@@ -4411,7 +4411,7 @@
           <p:cNvPr id="29" name="">
             <a:extLst xmlns:a="http://schemas.openxmlformats.org/drawingml/2006/main">
               <a:ext uri="{FF2B5EF4-FFF2-40B4-BE49-F238E27FC236}">
-                <a16:creationId xmlns:a16="http://schemas.microsoft.com/office/drawing/2014/main" id="{F41EC961-DD2A-47B0-8EDE-991405A571F1}"/>
+                <a16:creationId xmlns:a16="http://schemas.microsoft.com/office/drawing/2014/main" id="{DB8CA1A9-82FF-4347-B856-3846582DADEE}"/>
               </a:ext>
             </a:extLst>
           </p:cNvPr>
@@ -4463,7 +4463,7 @@
           <p:cNvPr id="30" name="">
             <a:extLst xmlns:a="http://schemas.openxmlformats.org/drawingml/2006/main">
               <a:ext uri="{FF2B5EF4-FFF2-40B4-BE49-F238E27FC236}">
-                <a16:creationId xmlns:a16="http://schemas.microsoft.com/office/drawing/2014/main" id="{19285577-E58D-405D-ACA6-B0455D06CAF4}"/>
+                <a16:creationId xmlns:a16="http://schemas.microsoft.com/office/drawing/2014/main" id="{68F760CC-8C35-46CC-81C3-EDECC001D1D6}"/>
               </a:ext>
             </a:extLst>
           </p:cNvPr>
@@ -4515,7 +4515,7 @@
           <p:cNvPr id="31" name="">
             <a:extLst xmlns:a="http://schemas.openxmlformats.org/drawingml/2006/main">
               <a:ext uri="{FF2B5EF4-FFF2-40B4-BE49-F238E27FC236}">
-                <a16:creationId xmlns:a16="http://schemas.microsoft.com/office/drawing/2014/main" id="{FA3D3E56-1381-4B15-8F7D-C2426AACC771}"/>
+                <a16:creationId xmlns:a16="http://schemas.microsoft.com/office/drawing/2014/main" id="{FC4C7517-6296-4E70-8084-2EDBE7B62BE9}"/>
               </a:ext>
             </a:extLst>
           </p:cNvPr>
@@ -4546,7 +4546,7 @@
           <p:cNvPr id="32" name="">
             <a:extLst xmlns:a="http://schemas.openxmlformats.org/drawingml/2006/main">
               <a:ext uri="{FF2B5EF4-FFF2-40B4-BE49-F238E27FC236}">
-                <a16:creationId xmlns:a16="http://schemas.microsoft.com/office/drawing/2014/main" id="{D5D4A5C6-FA68-4C61-8CE8-6C2105679283}"/>
+                <a16:creationId xmlns:a16="http://schemas.microsoft.com/office/drawing/2014/main" id="{8CAE8884-65F4-4F97-BFE0-E75E59065552}"/>
               </a:ext>
             </a:extLst>
           </p:cNvPr>
@@ -4577,7 +4577,7 @@
           <p:cNvPr id="33" name="">
             <a:extLst xmlns:a="http://schemas.openxmlformats.org/drawingml/2006/main">
               <a:ext uri="{FF2B5EF4-FFF2-40B4-BE49-F238E27FC236}">
-                <a16:creationId xmlns:a16="http://schemas.microsoft.com/office/drawing/2014/main" id="{1054932D-B28F-4333-A5B0-12A5601C0778}"/>
+                <a16:creationId xmlns:a16="http://schemas.microsoft.com/office/drawing/2014/main" id="{F7654906-DC73-410F-B354-08ED887768D9}"/>
               </a:ext>
             </a:extLst>
           </p:cNvPr>
@@ -4629,7 +4629,7 @@
           <p:cNvPr id="34" name="">
             <a:extLst xmlns:a="http://schemas.openxmlformats.org/drawingml/2006/main">
               <a:ext uri="{FF2B5EF4-FFF2-40B4-BE49-F238E27FC236}">
-                <a16:creationId xmlns:a16="http://schemas.microsoft.com/office/drawing/2014/main" id="{1DCE8035-7ECD-4707-8B9C-DDFD9DF91E6E}"/>
+                <a16:creationId xmlns:a16="http://schemas.microsoft.com/office/drawing/2014/main" id="{7B7C594B-5806-41F0-A6F7-6D7D80CDBDCF}"/>
               </a:ext>
             </a:extLst>
           </p:cNvPr>
@@ -4681,7 +4681,7 @@
           <p:cNvPr id="35" name="">
             <a:extLst xmlns:a="http://schemas.openxmlformats.org/drawingml/2006/main">
               <a:ext uri="{FF2B5EF4-FFF2-40B4-BE49-F238E27FC236}">
-                <a16:creationId xmlns:a16="http://schemas.microsoft.com/office/drawing/2014/main" id="{F9A1DF6B-AA2C-4F4A-A424-68C7CCF0878C}"/>
+                <a16:creationId xmlns:a16="http://schemas.microsoft.com/office/drawing/2014/main" id="{34A1BC0E-1EC6-4BBA-9BA9-9E0FA0491DAD}"/>
               </a:ext>
             </a:extLst>
           </p:cNvPr>
@@ -4733,7 +4733,7 @@
           <p:cNvPr id="36" name="">
             <a:extLst xmlns:a="http://schemas.openxmlformats.org/drawingml/2006/main">
               <a:ext uri="{FF2B5EF4-FFF2-40B4-BE49-F238E27FC236}">
-                <a16:creationId xmlns:a16="http://schemas.microsoft.com/office/drawing/2014/main" id="{CFE56708-C07B-43AE-99B3-60D4358945D5}"/>
+                <a16:creationId xmlns:a16="http://schemas.microsoft.com/office/drawing/2014/main" id="{1C63C208-CB1E-4E9F-84F3-8C2B88E064E6}"/>
               </a:ext>
             </a:extLst>
           </p:cNvPr>
@@ -4785,7 +4785,7 @@
           <p:cNvPr id="37" name="">
             <a:extLst xmlns:a="http://schemas.openxmlformats.org/drawingml/2006/main">
               <a:ext uri="{FF2B5EF4-FFF2-40B4-BE49-F238E27FC236}">
-                <a16:creationId xmlns:a16="http://schemas.microsoft.com/office/drawing/2014/main" id="{CECA10C9-73AF-4975-A00F-83810096417F}"/>
+                <a16:creationId xmlns:a16="http://schemas.microsoft.com/office/drawing/2014/main" id="{AC8A6D58-83CB-4A46-BDF7-ED89448962EC}"/>
               </a:ext>
             </a:extLst>
           </p:cNvPr>
@@ -4837,7 +4837,7 @@
           <p:cNvPr id="38" name="">
             <a:extLst xmlns:a="http://schemas.openxmlformats.org/drawingml/2006/main">
               <a:ext uri="{FF2B5EF4-FFF2-40B4-BE49-F238E27FC236}">
-                <a16:creationId xmlns:a16="http://schemas.microsoft.com/office/drawing/2014/main" id="{BFAA0073-534D-4107-AFBD-5C3128F4B9AC}"/>
+                <a16:creationId xmlns:a16="http://schemas.microsoft.com/office/drawing/2014/main" id="{0B19B6DF-6314-40AB-9B3C-E072E65FFE64}"/>
               </a:ext>
             </a:extLst>
           </p:cNvPr>
@@ -4868,7 +4868,7 @@
           <p:cNvPr id="39" name="">
             <a:extLst xmlns:a="http://schemas.openxmlformats.org/drawingml/2006/main">
               <a:ext uri="{FF2B5EF4-FFF2-40B4-BE49-F238E27FC236}">
-                <a16:creationId xmlns:a16="http://schemas.microsoft.com/office/drawing/2014/main" id="{B3725843-223F-4D0B-85B4-65A1DE906FBA}"/>
+                <a16:creationId xmlns:a16="http://schemas.microsoft.com/office/drawing/2014/main" id="{6666F3BA-B95C-48E8-9FFC-CE60009F0232}"/>
               </a:ext>
             </a:extLst>
           </p:cNvPr>
@@ -4920,7 +4920,7 @@
           <p:cNvPr id="40" name="">
             <a:extLst xmlns:a="http://schemas.openxmlformats.org/drawingml/2006/main">
               <a:ext uri="{FF2B5EF4-FFF2-40B4-BE49-F238E27FC236}">
-                <a16:creationId xmlns:a16="http://schemas.microsoft.com/office/drawing/2014/main" id="{77B4E822-4BAB-4443-A91A-B7142485E9BF}"/>
+                <a16:creationId xmlns:a16="http://schemas.microsoft.com/office/drawing/2014/main" id="{6069882C-DC6C-44C0-A938-CF2CD813BD82}"/>
               </a:ext>
             </a:extLst>
           </p:cNvPr>
@@ -4972,7 +4972,7 @@
           <p:cNvPr id="41" name="">
             <a:extLst xmlns:a="http://schemas.openxmlformats.org/drawingml/2006/main">
               <a:ext uri="{FF2B5EF4-FFF2-40B4-BE49-F238E27FC236}">
-                <a16:creationId xmlns:a16="http://schemas.microsoft.com/office/drawing/2014/main" id="{58306052-3BD0-4198-B933-6FE28324FFE1}"/>
+                <a16:creationId xmlns:a16="http://schemas.microsoft.com/office/drawing/2014/main" id="{0A92A7B2-7AC8-46F4-B9AA-FED616E2D778}"/>
               </a:ext>
             </a:extLst>
           </p:cNvPr>
@@ -5024,7 +5024,7 @@
           <p:cNvPr id="42" name="">
             <a:extLst xmlns:a="http://schemas.openxmlformats.org/drawingml/2006/main">
               <a:ext uri="{FF2B5EF4-FFF2-40B4-BE49-F238E27FC236}">
-                <a16:creationId xmlns:a16="http://schemas.microsoft.com/office/drawing/2014/main" id="{983EA5BA-DC35-4709-8EED-CF6B93DAE1C4}"/>
+                <a16:creationId xmlns:a16="http://schemas.microsoft.com/office/drawing/2014/main" id="{B51EFDFC-43F6-40AF-9931-B0C6C4D3195D}"/>
               </a:ext>
             </a:extLst>
           </p:cNvPr>
@@ -5076,7 +5076,7 @@
           <p:cNvPr id="43" name="">
             <a:extLst xmlns:a="http://schemas.openxmlformats.org/drawingml/2006/main">
               <a:ext uri="{FF2B5EF4-FFF2-40B4-BE49-F238E27FC236}">
-                <a16:creationId xmlns:a16="http://schemas.microsoft.com/office/drawing/2014/main" id="{BBC2C496-F2F0-450A-B00D-403DE6F44141}"/>
+                <a16:creationId xmlns:a16="http://schemas.microsoft.com/office/drawing/2014/main" id="{4FFE3DCB-2FDF-489E-8C8A-5F4898A2A569}"/>
               </a:ext>
             </a:extLst>
           </p:cNvPr>
@@ -5128,7 +5128,7 @@
           <p:cNvPr id="44" name="">
             <a:extLst xmlns:a="http://schemas.openxmlformats.org/drawingml/2006/main">
               <a:ext uri="{FF2B5EF4-FFF2-40B4-BE49-F238E27FC236}">
-                <a16:creationId xmlns:a16="http://schemas.microsoft.com/office/drawing/2014/main" id="{7400673A-DA03-4158-BEB0-C2F4202EA7C8}"/>
+                <a16:creationId xmlns:a16="http://schemas.microsoft.com/office/drawing/2014/main" id="{B4E569D6-6626-411B-A06A-604922DC843A}"/>
               </a:ext>
             </a:extLst>
           </p:cNvPr>
@@ -5159,7 +5159,7 @@
           <p:cNvPr id="45" name="">
             <a:extLst xmlns:a="http://schemas.openxmlformats.org/drawingml/2006/main">
               <a:ext uri="{FF2B5EF4-FFF2-40B4-BE49-F238E27FC236}">
-                <a16:creationId xmlns:a16="http://schemas.microsoft.com/office/drawing/2014/main" id="{57CAC035-0975-4471-80DD-ED9374E52562}"/>
+                <a16:creationId xmlns:a16="http://schemas.microsoft.com/office/drawing/2014/main" id="{1D15BE6F-D0D5-4853-9F4F-22F4E3CC5391}"/>
               </a:ext>
             </a:extLst>
           </p:cNvPr>
@@ -5190,7 +5190,7 @@
           <p:cNvPr id="46" name="">
             <a:extLst xmlns:a="http://schemas.openxmlformats.org/drawingml/2006/main">
               <a:ext uri="{FF2B5EF4-FFF2-40B4-BE49-F238E27FC236}">
-                <a16:creationId xmlns:a16="http://schemas.microsoft.com/office/drawing/2014/main" id="{A0608B36-250D-46D2-83B2-37966B3DAA13}"/>
+                <a16:creationId xmlns:a16="http://schemas.microsoft.com/office/drawing/2014/main" id="{96B9683B-CFD6-462E-B46D-F54E73268914}"/>
               </a:ext>
             </a:extLst>
           </p:cNvPr>
@@ -5242,7 +5242,7 @@
           <p:cNvPr id="47" name="">
             <a:extLst xmlns:a="http://schemas.openxmlformats.org/drawingml/2006/main">
               <a:ext uri="{FF2B5EF4-FFF2-40B4-BE49-F238E27FC236}">
-                <a16:creationId xmlns:a16="http://schemas.microsoft.com/office/drawing/2014/main" id="{DAE59B06-6D72-425C-84F1-B9C800BB41D9}"/>
+                <a16:creationId xmlns:a16="http://schemas.microsoft.com/office/drawing/2014/main" id="{E9430341-F6F3-478B-AD3D-7F15CFB2B0C7}"/>
               </a:ext>
             </a:extLst>
           </p:cNvPr>
@@ -5294,7 +5294,7 @@
           <p:cNvPr id="48" name="">
             <a:extLst xmlns:a="http://schemas.openxmlformats.org/drawingml/2006/main">
               <a:ext uri="{FF2B5EF4-FFF2-40B4-BE49-F238E27FC236}">
-                <a16:creationId xmlns:a16="http://schemas.microsoft.com/office/drawing/2014/main" id="{4ABC56A9-F0BF-4B8E-A44D-E8825FB9D05D}"/>
+                <a16:creationId xmlns:a16="http://schemas.microsoft.com/office/drawing/2014/main" id="{910C31AA-54BD-49BC-BD05-29BEC9EF3B13}"/>
               </a:ext>
             </a:extLst>
           </p:cNvPr>
@@ -5346,7 +5346,7 @@
           <p:cNvPr id="49" name="">
             <a:extLst xmlns:a="http://schemas.openxmlformats.org/drawingml/2006/main">
               <a:ext uri="{FF2B5EF4-FFF2-40B4-BE49-F238E27FC236}">
-                <a16:creationId xmlns:a16="http://schemas.microsoft.com/office/drawing/2014/main" id="{12B04E0B-31F7-476B-B392-0555748CE33C}"/>
+                <a16:creationId xmlns:a16="http://schemas.microsoft.com/office/drawing/2014/main" id="{766F050B-7A96-49CC-95C1-7F709C926C41}"/>
               </a:ext>
             </a:extLst>
           </p:cNvPr>
@@ -5398,7 +5398,7 @@
           <p:cNvPr id="50" name="">
             <a:extLst xmlns:a="http://schemas.openxmlformats.org/drawingml/2006/main">
               <a:ext uri="{FF2B5EF4-FFF2-40B4-BE49-F238E27FC236}">
-                <a16:creationId xmlns:a16="http://schemas.microsoft.com/office/drawing/2014/main" id="{8A73D2B0-EE80-4F1F-9BB5-CF95648CE63A}"/>
+                <a16:creationId xmlns:a16="http://schemas.microsoft.com/office/drawing/2014/main" id="{85DBD125-D296-470C-8F84-50A85A5FF326}"/>
               </a:ext>
             </a:extLst>
           </p:cNvPr>
@@ -5450,7 +5450,7 @@
           <p:cNvPr id="51" name="">
             <a:extLst xmlns:a="http://schemas.openxmlformats.org/drawingml/2006/main">
               <a:ext uri="{FF2B5EF4-FFF2-40B4-BE49-F238E27FC236}">
-                <a16:creationId xmlns:a16="http://schemas.microsoft.com/office/drawing/2014/main" id="{3E2BD850-E75A-4038-B648-12F74D545A0F}"/>
+                <a16:creationId xmlns:a16="http://schemas.microsoft.com/office/drawing/2014/main" id="{B722CB88-0D73-4B03-81E1-C3B503BAAEFB}"/>
               </a:ext>
             </a:extLst>
           </p:cNvPr>
@@ -5481,7 +5481,7 @@
           <p:cNvPr id="52" name="">
             <a:extLst xmlns:a="http://schemas.openxmlformats.org/drawingml/2006/main">
               <a:ext uri="{FF2B5EF4-FFF2-40B4-BE49-F238E27FC236}">
-                <a16:creationId xmlns:a16="http://schemas.microsoft.com/office/drawing/2014/main" id="{353F1078-60A4-4889-955D-23B76FBDA70E}"/>
+                <a16:creationId xmlns:a16="http://schemas.microsoft.com/office/drawing/2014/main" id="{A36798BC-F37D-4A4D-AD1C-64F47723F6B4}"/>
               </a:ext>
             </a:extLst>
           </p:cNvPr>
@@ -5533,7 +5533,7 @@
           <p:cNvPr id="53" name="">
             <a:extLst xmlns:a="http://schemas.openxmlformats.org/drawingml/2006/main">
               <a:ext uri="{FF2B5EF4-FFF2-40B4-BE49-F238E27FC236}">
-                <a16:creationId xmlns:a16="http://schemas.microsoft.com/office/drawing/2014/main" id="{7C78342E-0D54-4862-AA3B-D77910F26F00}"/>
+                <a16:creationId xmlns:a16="http://schemas.microsoft.com/office/drawing/2014/main" id="{20E31A89-6189-46FD-8E2F-8E367D54BF43}"/>
               </a:ext>
             </a:extLst>
           </p:cNvPr>
@@ -5585,7 +5585,7 @@
           <p:cNvPr id="54" name="">
             <a:extLst xmlns:a="http://schemas.openxmlformats.org/drawingml/2006/main">
               <a:ext uri="{FF2B5EF4-FFF2-40B4-BE49-F238E27FC236}">
-                <a16:creationId xmlns:a16="http://schemas.microsoft.com/office/drawing/2014/main" id="{40DA0955-AD27-4231-B78D-39E525F4D26C}"/>
+                <a16:creationId xmlns:a16="http://schemas.microsoft.com/office/drawing/2014/main" id="{DC93E8ED-2994-47BE-9AF3-4A52BDEF6C53}"/>
               </a:ext>
             </a:extLst>
           </p:cNvPr>
@@ -5637,7 +5637,7 @@
           <p:cNvPr id="55" name="">
             <a:extLst xmlns:a="http://schemas.openxmlformats.org/drawingml/2006/main">
               <a:ext uri="{FF2B5EF4-FFF2-40B4-BE49-F238E27FC236}">
-                <a16:creationId xmlns:a16="http://schemas.microsoft.com/office/drawing/2014/main" id="{E9653D03-D221-47BF-9865-44E9030B94DC}"/>
+                <a16:creationId xmlns:a16="http://schemas.microsoft.com/office/drawing/2014/main" id="{88208C28-DE88-40B9-BC66-EE9E892D41C5}"/>
               </a:ext>
             </a:extLst>
           </p:cNvPr>
@@ -5689,7 +5689,7 @@
           <p:cNvPr id="56" name="">
             <a:extLst xmlns:a="http://schemas.openxmlformats.org/drawingml/2006/main">
               <a:ext uri="{FF2B5EF4-FFF2-40B4-BE49-F238E27FC236}">
-                <a16:creationId xmlns:a16="http://schemas.microsoft.com/office/drawing/2014/main" id="{7948E13B-2B10-42E1-AF0A-AAA681792BD7}"/>
+                <a16:creationId xmlns:a16="http://schemas.microsoft.com/office/drawing/2014/main" id="{05794288-FF69-498C-B308-918E9759B0CB}"/>
               </a:ext>
             </a:extLst>
           </p:cNvPr>
@@ -5741,7 +5741,7 @@
           <p:cNvPr id="57" name="">
             <a:extLst xmlns:a="http://schemas.openxmlformats.org/drawingml/2006/main">
               <a:ext uri="{FF2B5EF4-FFF2-40B4-BE49-F238E27FC236}">
-                <a16:creationId xmlns:a16="http://schemas.microsoft.com/office/drawing/2014/main" id="{9D2C9698-181C-498F-B5B1-A1C6B0D38D4F}"/>
+                <a16:creationId xmlns:a16="http://schemas.microsoft.com/office/drawing/2014/main" id="{A6A487E3-EAED-4DEB-BFA9-50414AAB424E}"/>
               </a:ext>
             </a:extLst>
           </p:cNvPr>
@@ -5772,7 +5772,7 @@
           <p:cNvPr id="58" name="">
             <a:extLst xmlns:a="http://schemas.openxmlformats.org/drawingml/2006/main">
               <a:ext uri="{FF2B5EF4-FFF2-40B4-BE49-F238E27FC236}">
-                <a16:creationId xmlns:a16="http://schemas.microsoft.com/office/drawing/2014/main" id="{74C86689-FB4F-4D40-90B1-3DDF0E263804}"/>
+                <a16:creationId xmlns:a16="http://schemas.microsoft.com/office/drawing/2014/main" id="{3DBAAA57-176B-4A3F-A35B-B2895F74D49C}"/>
               </a:ext>
             </a:extLst>
           </p:cNvPr>
@@ -5803,7 +5803,7 @@
           <p:cNvPr id="59" name="">
             <a:extLst xmlns:a="http://schemas.openxmlformats.org/drawingml/2006/main">
               <a:ext uri="{FF2B5EF4-FFF2-40B4-BE49-F238E27FC236}">
-                <a16:creationId xmlns:a16="http://schemas.microsoft.com/office/drawing/2014/main" id="{5FAD140D-2014-4CED-B932-0301245C2DF3}"/>
+                <a16:creationId xmlns:a16="http://schemas.microsoft.com/office/drawing/2014/main" id="{4861DF03-C0D1-4A11-AF10-9D8A094B0B15}"/>
               </a:ext>
             </a:extLst>
           </p:cNvPr>
@@ -5855,7 +5855,7 @@
           <p:cNvPr id="60" name="">
             <a:extLst xmlns:a="http://schemas.openxmlformats.org/drawingml/2006/main">
               <a:ext uri="{FF2B5EF4-FFF2-40B4-BE49-F238E27FC236}">
-                <a16:creationId xmlns:a16="http://schemas.microsoft.com/office/drawing/2014/main" id="{2006CB67-C2E6-44EB-95B9-0D1BAAA512FF}"/>
+                <a16:creationId xmlns:a16="http://schemas.microsoft.com/office/drawing/2014/main" id="{A142A89C-ED37-4859-BA75-B1A199F7653F}"/>
               </a:ext>
             </a:extLst>
           </p:cNvPr>
@@ -5907,7 +5907,7 @@
           <p:cNvPr id="61" name="">
             <a:extLst xmlns:a="http://schemas.openxmlformats.org/drawingml/2006/main">
               <a:ext uri="{FF2B5EF4-FFF2-40B4-BE49-F238E27FC236}">
-                <a16:creationId xmlns:a16="http://schemas.microsoft.com/office/drawing/2014/main" id="{01A74C67-739F-457B-A98F-F78ADEE427AC}"/>
+                <a16:creationId xmlns:a16="http://schemas.microsoft.com/office/drawing/2014/main" id="{668C63CD-ABA2-456B-9950-DC0E383EE9C5}"/>
               </a:ext>
             </a:extLst>
           </p:cNvPr>
@@ -5959,7 +5959,7 @@
           <p:cNvPr id="62" name="">
             <a:extLst xmlns:a="http://schemas.openxmlformats.org/drawingml/2006/main">
               <a:ext uri="{FF2B5EF4-FFF2-40B4-BE49-F238E27FC236}">
-                <a16:creationId xmlns:a16="http://schemas.microsoft.com/office/drawing/2014/main" id="{BE92D1D3-662D-4BD4-B033-66BB74C87266}"/>
+                <a16:creationId xmlns:a16="http://schemas.microsoft.com/office/drawing/2014/main" id="{DCECEA80-E92B-4BCA-99BD-F0736F3268D6}"/>
               </a:ext>
             </a:extLst>
           </p:cNvPr>
@@ -6011,7 +6011,7 @@
           <p:cNvPr id="63" name="">
             <a:extLst xmlns:a="http://schemas.openxmlformats.org/drawingml/2006/main">
               <a:ext uri="{FF2B5EF4-FFF2-40B4-BE49-F238E27FC236}">
-                <a16:creationId xmlns:a16="http://schemas.microsoft.com/office/drawing/2014/main" id="{FB4B14D0-66AC-4976-8A30-AF0C5FE829A6}"/>
+                <a16:creationId xmlns:a16="http://schemas.microsoft.com/office/drawing/2014/main" id="{6F82C50F-D778-4C14-B7A1-E49617ADC555}"/>
               </a:ext>
             </a:extLst>
           </p:cNvPr>
@@ -6063,7 +6063,7 @@
           <p:cNvPr id="64" name="">
             <a:extLst xmlns:a="http://schemas.openxmlformats.org/drawingml/2006/main">
               <a:ext uri="{FF2B5EF4-FFF2-40B4-BE49-F238E27FC236}">
-                <a16:creationId xmlns:a16="http://schemas.microsoft.com/office/drawing/2014/main" id="{F564FDD8-E5A2-41A8-A361-83C25E8D5C64}"/>
+                <a16:creationId xmlns:a16="http://schemas.microsoft.com/office/drawing/2014/main" id="{4A95B408-F091-4269-902C-90761FE78960}"/>
               </a:ext>
             </a:extLst>
           </p:cNvPr>
@@ -6094,7 +6094,7 @@
           <p:cNvPr id="65" name="">
             <a:extLst xmlns:a="http://schemas.openxmlformats.org/drawingml/2006/main">
               <a:ext uri="{FF2B5EF4-FFF2-40B4-BE49-F238E27FC236}">
-                <a16:creationId xmlns:a16="http://schemas.microsoft.com/office/drawing/2014/main" id="{362DF994-2C81-4E47-8784-8360C0CFCCCF}"/>
+                <a16:creationId xmlns:a16="http://schemas.microsoft.com/office/drawing/2014/main" id="{74E86AA4-423D-41EB-9B76-BA94BAEC32BA}"/>
               </a:ext>
             </a:extLst>
           </p:cNvPr>
@@ -6146,7 +6146,7 @@
           <p:cNvPr id="66" name="">
             <a:extLst xmlns:a="http://schemas.openxmlformats.org/drawingml/2006/main">
               <a:ext uri="{FF2B5EF4-FFF2-40B4-BE49-F238E27FC236}">
-                <a16:creationId xmlns:a16="http://schemas.microsoft.com/office/drawing/2014/main" id="{B6056CF2-D00A-4261-9896-B4D9D7287D70}"/>
+                <a16:creationId xmlns:a16="http://schemas.microsoft.com/office/drawing/2014/main" id="{3409708B-2783-4443-9641-E5EDB3D984BE}"/>
               </a:ext>
             </a:extLst>
           </p:cNvPr>
@@ -6198,7 +6198,7 @@
           <p:cNvPr id="67" name="">
             <a:extLst xmlns:a="http://schemas.openxmlformats.org/drawingml/2006/main">
               <a:ext uri="{FF2B5EF4-FFF2-40B4-BE49-F238E27FC236}">
-                <a16:creationId xmlns:a16="http://schemas.microsoft.com/office/drawing/2014/main" id="{6517714F-3237-476E-AB69-C007677F34AB}"/>
+                <a16:creationId xmlns:a16="http://schemas.microsoft.com/office/drawing/2014/main" id="{6FE17283-89CD-4C63-9A70-2B75801B098E}"/>
               </a:ext>
             </a:extLst>
           </p:cNvPr>
@@ -6250,7 +6250,7 @@
           <p:cNvPr id="68" name="">
             <a:extLst xmlns:a="http://schemas.openxmlformats.org/drawingml/2006/main">
               <a:ext uri="{FF2B5EF4-FFF2-40B4-BE49-F238E27FC236}">
-                <a16:creationId xmlns:a16="http://schemas.microsoft.com/office/drawing/2014/main" id="{E7EB0C50-CBB2-45FA-8A66-D806350257AA}"/>
+                <a16:creationId xmlns:a16="http://schemas.microsoft.com/office/drawing/2014/main" id="{7D2EC8A4-D6C3-401E-A19A-2D00E1EA3FFF}"/>
               </a:ext>
             </a:extLst>
           </p:cNvPr>
@@ -6302,7 +6302,7 @@
           <p:cNvPr id="69" name="">
             <a:extLst xmlns:a="http://schemas.openxmlformats.org/drawingml/2006/main">
               <a:ext uri="{FF2B5EF4-FFF2-40B4-BE49-F238E27FC236}">
-                <a16:creationId xmlns:a16="http://schemas.microsoft.com/office/drawing/2014/main" id="{C2375F29-B864-4250-AC0A-111BF07D2CF2}"/>
+                <a16:creationId xmlns:a16="http://schemas.microsoft.com/office/drawing/2014/main" id="{FA723F97-B6B9-4500-977E-C56DC45A1B2E}"/>
               </a:ext>
             </a:extLst>
           </p:cNvPr>
@@ -6354,7 +6354,7 @@
           <p:cNvPr id="70" name="">
             <a:extLst xmlns:a="http://schemas.openxmlformats.org/drawingml/2006/main">
               <a:ext uri="{FF2B5EF4-FFF2-40B4-BE49-F238E27FC236}">
-                <a16:creationId xmlns:a16="http://schemas.microsoft.com/office/drawing/2014/main" id="{1E5D3580-6236-4348-A604-E04FEF51185B}"/>
+                <a16:creationId xmlns:a16="http://schemas.microsoft.com/office/drawing/2014/main" id="{48338EBD-7B8A-44DB-B022-C1D49938E113}"/>
               </a:ext>
             </a:extLst>
           </p:cNvPr>
@@ -6385,7 +6385,7 @@
           <p:cNvPr id="71" name="">
             <a:extLst xmlns:a="http://schemas.openxmlformats.org/drawingml/2006/main">
               <a:ext uri="{FF2B5EF4-FFF2-40B4-BE49-F238E27FC236}">
-                <a16:creationId xmlns:a16="http://schemas.microsoft.com/office/drawing/2014/main" id="{BE13A842-2F6C-4EB2-A3D4-4739CCEC6C5D}"/>
+                <a16:creationId xmlns:a16="http://schemas.microsoft.com/office/drawing/2014/main" id="{BB94F382-7349-4ADC-84FB-5DF3AFF0D392}"/>
               </a:ext>
             </a:extLst>
           </p:cNvPr>
@@ -6416,7 +6416,7 @@
           <p:cNvPr id="72" name="">
             <a:extLst xmlns:a="http://schemas.openxmlformats.org/drawingml/2006/main">
               <a:ext uri="{FF2B5EF4-FFF2-40B4-BE49-F238E27FC236}">
-                <a16:creationId xmlns:a16="http://schemas.microsoft.com/office/drawing/2014/main" id="{22F37F82-F4EE-45D8-9886-57012E034F94}"/>
+                <a16:creationId xmlns:a16="http://schemas.microsoft.com/office/drawing/2014/main" id="{62344A86-5EB5-4F17-B08C-8C6215A40E9B}"/>
               </a:ext>
             </a:extLst>
           </p:cNvPr>
@@ -6468,7 +6468,7 @@
           <p:cNvPr id="73" name="">
             <a:extLst xmlns:a="http://schemas.openxmlformats.org/drawingml/2006/main">
               <a:ext uri="{FF2B5EF4-FFF2-40B4-BE49-F238E27FC236}">
-                <a16:creationId xmlns:a16="http://schemas.microsoft.com/office/drawing/2014/main" id="{71A89CE0-86CD-458B-B5F3-3C9321353DC6}"/>
+                <a16:creationId xmlns:a16="http://schemas.microsoft.com/office/drawing/2014/main" id="{F32D8ECF-4510-41DF-B77B-EAFA01C3DA55}"/>
               </a:ext>
             </a:extLst>
           </p:cNvPr>
@@ -6520,7 +6520,7 @@
           <p:cNvPr id="74" name="">
             <a:extLst xmlns:a="http://schemas.openxmlformats.org/drawingml/2006/main">
               <a:ext uri="{FF2B5EF4-FFF2-40B4-BE49-F238E27FC236}">
-                <a16:creationId xmlns:a16="http://schemas.microsoft.com/office/drawing/2014/main" id="{218AE468-D109-44C1-A11D-D8C8DBAD0690}"/>
+                <a16:creationId xmlns:a16="http://schemas.microsoft.com/office/drawing/2014/main" id="{1A6CB2F5-01E5-47BE-A466-7BD4E5FE7C2F}"/>
               </a:ext>
             </a:extLst>
           </p:cNvPr>
@@ -6572,7 +6572,7 @@
           <p:cNvPr id="75" name="">
             <a:extLst xmlns:a="http://schemas.openxmlformats.org/drawingml/2006/main">
               <a:ext uri="{FF2B5EF4-FFF2-40B4-BE49-F238E27FC236}">
-                <a16:creationId xmlns:a16="http://schemas.microsoft.com/office/drawing/2014/main" id="{E0CB7DAA-1305-4CE5-83F0-89075037A2D0}"/>
+                <a16:creationId xmlns:a16="http://schemas.microsoft.com/office/drawing/2014/main" id="{8AA0A860-B22B-4A21-B97C-EF21DAE7A54C}"/>
               </a:ext>
             </a:extLst>
           </p:cNvPr>
@@ -6624,7 +6624,7 @@
           <p:cNvPr id="76" name="">
             <a:extLst xmlns:a="http://schemas.openxmlformats.org/drawingml/2006/main">
               <a:ext uri="{FF2B5EF4-FFF2-40B4-BE49-F238E27FC236}">
-                <a16:creationId xmlns:a16="http://schemas.microsoft.com/office/drawing/2014/main" id="{D84DED49-A9E3-48BD-A9D1-532B34A6C9E8}"/>
+                <a16:creationId xmlns:a16="http://schemas.microsoft.com/office/drawing/2014/main" id="{5850A524-3D46-4DF6-A2FF-D9468C658114}"/>
               </a:ext>
             </a:extLst>
           </p:cNvPr>
@@ -6676,7 +6676,7 @@
           <p:cNvPr id="77" name="">
             <a:extLst xmlns:a="http://schemas.openxmlformats.org/drawingml/2006/main">
               <a:ext uri="{FF2B5EF4-FFF2-40B4-BE49-F238E27FC236}">
-                <a16:creationId xmlns:a16="http://schemas.microsoft.com/office/drawing/2014/main" id="{DE01B67F-8230-4595-9F63-8B36CCC7939D}"/>
+                <a16:creationId xmlns:a16="http://schemas.microsoft.com/office/drawing/2014/main" id="{1E2862FE-C4CE-4201-BE42-7EF8B6352FF9}"/>
               </a:ext>
             </a:extLst>
           </p:cNvPr>
@@ -6707,7 +6707,7 @@
           <p:cNvPr id="78" name="">
             <a:extLst xmlns:a="http://schemas.openxmlformats.org/drawingml/2006/main">
               <a:ext uri="{FF2B5EF4-FFF2-40B4-BE49-F238E27FC236}">
-                <a16:creationId xmlns:a16="http://schemas.microsoft.com/office/drawing/2014/main" id="{8983CA64-5930-4E99-ABDC-0B094F399B16}"/>
+                <a16:creationId xmlns:a16="http://schemas.microsoft.com/office/drawing/2014/main" id="{4166E827-9426-4B80-A13D-37C337B56267}"/>
               </a:ext>
             </a:extLst>
           </p:cNvPr>
@@ -6759,7 +6759,7 @@
           <p:cNvPr id="79" name="">
             <a:extLst xmlns:a="http://schemas.openxmlformats.org/drawingml/2006/main">
               <a:ext uri="{FF2B5EF4-FFF2-40B4-BE49-F238E27FC236}">
-                <a16:creationId xmlns:a16="http://schemas.microsoft.com/office/drawing/2014/main" id="{D0C05AC0-086C-4754-BD15-1F81665D2540}"/>
+                <a16:creationId xmlns:a16="http://schemas.microsoft.com/office/drawing/2014/main" id="{4AF7BEFF-1BCB-4C37-B8CE-73A66107B2FB}"/>
               </a:ext>
             </a:extLst>
           </p:cNvPr>
@@ -6811,7 +6811,7 @@
           <p:cNvPr id="80" name="">
             <a:extLst xmlns:a="http://schemas.openxmlformats.org/drawingml/2006/main">
               <a:ext uri="{FF2B5EF4-FFF2-40B4-BE49-F238E27FC236}">
-                <a16:creationId xmlns:a16="http://schemas.microsoft.com/office/drawing/2014/main" id="{F6BB91A8-8570-4222-8B07-9E3C3F09001C}"/>
+                <a16:creationId xmlns:a16="http://schemas.microsoft.com/office/drawing/2014/main" id="{EE2118D1-8B6A-4FB2-91C7-8C0ED5D8382F}"/>
               </a:ext>
             </a:extLst>
           </p:cNvPr>
@@ -6863,7 +6863,7 @@
           <p:cNvPr id="81" name="">
             <a:extLst xmlns:a="http://schemas.openxmlformats.org/drawingml/2006/main">
               <a:ext uri="{FF2B5EF4-FFF2-40B4-BE49-F238E27FC236}">
-                <a16:creationId xmlns:a16="http://schemas.microsoft.com/office/drawing/2014/main" id="{455230B6-E35E-4E54-BDD0-A0D4FF9BBFF7}"/>
+                <a16:creationId xmlns:a16="http://schemas.microsoft.com/office/drawing/2014/main" id="{80F98B4F-0138-4E14-BFF1-9C758F933FE3}"/>
               </a:ext>
             </a:extLst>
           </p:cNvPr>
@@ -6915,7 +6915,7 @@
           <p:cNvPr id="82" name="">
             <a:extLst xmlns:a="http://schemas.openxmlformats.org/drawingml/2006/main">
               <a:ext uri="{FF2B5EF4-FFF2-40B4-BE49-F238E27FC236}">
-                <a16:creationId xmlns:a16="http://schemas.microsoft.com/office/drawing/2014/main" id="{2E3D4D19-1CF6-4A8D-9BC2-01C88F15EA6A}"/>
+                <a16:creationId xmlns:a16="http://schemas.microsoft.com/office/drawing/2014/main" id="{2F1CADF6-6901-4ED1-B020-5E4BD4611384}"/>
               </a:ext>
             </a:extLst>
           </p:cNvPr>
@@ -6967,7 +6967,7 @@
           <p:cNvPr id="83" name="">
             <a:extLst xmlns:a="http://schemas.openxmlformats.org/drawingml/2006/main">
               <a:ext uri="{FF2B5EF4-FFF2-40B4-BE49-F238E27FC236}">
-                <a16:creationId xmlns:a16="http://schemas.microsoft.com/office/drawing/2014/main" id="{C9B58877-C0A1-4429-9DF8-D2D6E28A69E4}"/>
+                <a16:creationId xmlns:a16="http://schemas.microsoft.com/office/drawing/2014/main" id="{86AB812F-BF4F-4DB6-BF76-7654D19AD40E}"/>
               </a:ext>
             </a:extLst>
           </p:cNvPr>
@@ -6998,7 +6998,7 @@
           <p:cNvPr id="84" name="">
             <a:extLst xmlns:a="http://schemas.openxmlformats.org/drawingml/2006/main">
               <a:ext uri="{FF2B5EF4-FFF2-40B4-BE49-F238E27FC236}">
-                <a16:creationId xmlns:a16="http://schemas.microsoft.com/office/drawing/2014/main" id="{8BB2062B-BA03-4C0A-B652-15EFC1825D14}"/>
+                <a16:creationId xmlns:a16="http://schemas.microsoft.com/office/drawing/2014/main" id="{E478E690-FB3C-4A92-B241-AAE95B6F334E}"/>
               </a:ext>
             </a:extLst>
           </p:cNvPr>
@@ -7029,7 +7029,7 @@
           <p:cNvPr id="85" name="">
             <a:extLst xmlns:a="http://schemas.openxmlformats.org/drawingml/2006/main">
               <a:ext uri="{FF2B5EF4-FFF2-40B4-BE49-F238E27FC236}">
-                <a16:creationId xmlns:a16="http://schemas.microsoft.com/office/drawing/2014/main" id="{A76621DE-2AA8-4E46-A52F-6F71399529C8}"/>
+                <a16:creationId xmlns:a16="http://schemas.microsoft.com/office/drawing/2014/main" id="{AAA99CB1-C13A-4B19-AA22-154A0BC653A2}"/>
               </a:ext>
             </a:extLst>
           </p:cNvPr>
@@ -7081,7 +7081,7 @@
           <p:cNvPr id="86" name="">
             <a:extLst xmlns:a="http://schemas.openxmlformats.org/drawingml/2006/main">
               <a:ext uri="{FF2B5EF4-FFF2-40B4-BE49-F238E27FC236}">
-                <a16:creationId xmlns:a16="http://schemas.microsoft.com/office/drawing/2014/main" id="{1D3D480A-A9EE-44A0-BDB4-4A7BEF0E0032}"/>
+                <a16:creationId xmlns:a16="http://schemas.microsoft.com/office/drawing/2014/main" id="{26234320-A1B6-4FB4-B616-747E877179C8}"/>
               </a:ext>
             </a:extLst>
           </p:cNvPr>
@@ -7133,7 +7133,7 @@
           <p:cNvPr id="87" name="">
             <a:extLst xmlns:a="http://schemas.openxmlformats.org/drawingml/2006/main">
               <a:ext uri="{FF2B5EF4-FFF2-40B4-BE49-F238E27FC236}">
-                <a16:creationId xmlns:a16="http://schemas.microsoft.com/office/drawing/2014/main" id="{DA6C3D56-CC94-422D-9098-D13A520B99D4}"/>
+                <a16:creationId xmlns:a16="http://schemas.microsoft.com/office/drawing/2014/main" id="{433D3E1B-6C2B-4DF2-A4A1-88B5603D00A6}"/>
               </a:ext>
             </a:extLst>
           </p:cNvPr>
@@ -7185,7 +7185,7 @@
           <p:cNvPr id="88" name="">
             <a:extLst xmlns:a="http://schemas.openxmlformats.org/drawingml/2006/main">
               <a:ext uri="{FF2B5EF4-FFF2-40B4-BE49-F238E27FC236}">
-                <a16:creationId xmlns:a16="http://schemas.microsoft.com/office/drawing/2014/main" id="{FB723287-5475-4784-A8CE-CDA252D2C838}"/>
+                <a16:creationId xmlns:a16="http://schemas.microsoft.com/office/drawing/2014/main" id="{5ACAC4B7-BEE6-47D8-8068-5E8137E81902}"/>
               </a:ext>
             </a:extLst>
           </p:cNvPr>
@@ -7237,7 +7237,7 @@
           <p:cNvPr id="89" name="">
             <a:extLst xmlns:a="http://schemas.openxmlformats.org/drawingml/2006/main">
               <a:ext uri="{FF2B5EF4-FFF2-40B4-BE49-F238E27FC236}">
-                <a16:creationId xmlns:a16="http://schemas.microsoft.com/office/drawing/2014/main" id="{E55B504E-A8E1-48A0-AD3D-F4695CD3AC8F}"/>
+                <a16:creationId xmlns:a16="http://schemas.microsoft.com/office/drawing/2014/main" id="{38A76615-1653-4311-B317-CA27F2598AE9}"/>
               </a:ext>
             </a:extLst>
           </p:cNvPr>
@@ -7289,7 +7289,7 @@
           <p:cNvPr id="90" name="">
             <a:extLst xmlns:a="http://schemas.openxmlformats.org/drawingml/2006/main">
               <a:ext uri="{FF2B5EF4-FFF2-40B4-BE49-F238E27FC236}">
-                <a16:creationId xmlns:a16="http://schemas.microsoft.com/office/drawing/2014/main" id="{216529D4-5EEF-4AE6-897D-C9F7C493CAA5}"/>
+                <a16:creationId xmlns:a16="http://schemas.microsoft.com/office/drawing/2014/main" id="{55D0FD6E-9AE9-4DFD-B33F-71C82DE057D0}"/>
               </a:ext>
             </a:extLst>
           </p:cNvPr>
@@ -7320,7 +7320,7 @@
           <p:cNvPr id="91" name="">
             <a:extLst xmlns:a="http://schemas.openxmlformats.org/drawingml/2006/main">
               <a:ext uri="{FF2B5EF4-FFF2-40B4-BE49-F238E27FC236}">
-                <a16:creationId xmlns:a16="http://schemas.microsoft.com/office/drawing/2014/main" id="{CA158913-5641-4313-BC4F-2E44D2D5A060}"/>
+                <a16:creationId xmlns:a16="http://schemas.microsoft.com/office/drawing/2014/main" id="{556F551B-CE91-48B9-8450-A9B5A87016B1}"/>
               </a:ext>
             </a:extLst>
           </p:cNvPr>
@@ -7372,7 +7372,7 @@
           <p:cNvPr id="92" name="">
             <a:extLst xmlns:a="http://schemas.openxmlformats.org/drawingml/2006/main">
               <a:ext uri="{FF2B5EF4-FFF2-40B4-BE49-F238E27FC236}">
-                <a16:creationId xmlns:a16="http://schemas.microsoft.com/office/drawing/2014/main" id="{2B8FFC51-4511-461E-BE24-4ACCBEFD4DA3}"/>
+                <a16:creationId xmlns:a16="http://schemas.microsoft.com/office/drawing/2014/main" id="{8F8120B7-AE82-43D6-997A-E094040BD86C}"/>
               </a:ext>
             </a:extLst>
           </p:cNvPr>
@@ -7424,7 +7424,7 @@
           <p:cNvPr id="93" name="">
             <a:extLst xmlns:a="http://schemas.openxmlformats.org/drawingml/2006/main">
               <a:ext uri="{FF2B5EF4-FFF2-40B4-BE49-F238E27FC236}">
-                <a16:creationId xmlns:a16="http://schemas.microsoft.com/office/drawing/2014/main" id="{964CD03B-784C-4F00-BFAA-57C0ED16C338}"/>
+                <a16:creationId xmlns:a16="http://schemas.microsoft.com/office/drawing/2014/main" id="{C90A87D3-6E47-4595-908C-30459296DE26}"/>
               </a:ext>
             </a:extLst>
           </p:cNvPr>
@@ -7476,7 +7476,7 @@
           <p:cNvPr id="94" name="">
             <a:extLst xmlns:a="http://schemas.openxmlformats.org/drawingml/2006/main">
               <a:ext uri="{FF2B5EF4-FFF2-40B4-BE49-F238E27FC236}">
-                <a16:creationId xmlns:a16="http://schemas.microsoft.com/office/drawing/2014/main" id="{941DCD72-E9AF-466A-90DB-4465E147E3E9}"/>
+                <a16:creationId xmlns:a16="http://schemas.microsoft.com/office/drawing/2014/main" id="{1B6EADAA-2ADF-475C-AC5A-06A5E007A8FE}"/>
               </a:ext>
             </a:extLst>
           </p:cNvPr>
@@ -7528,7 +7528,7 @@
           <p:cNvPr id="95" name="">
             <a:extLst xmlns:a="http://schemas.openxmlformats.org/drawingml/2006/main">
               <a:ext uri="{FF2B5EF4-FFF2-40B4-BE49-F238E27FC236}">
-                <a16:creationId xmlns:a16="http://schemas.microsoft.com/office/drawing/2014/main" id="{2026ACFF-36A0-4691-8F9C-9EE4B91DC8AF}"/>
+                <a16:creationId xmlns:a16="http://schemas.microsoft.com/office/drawing/2014/main" id="{5CBD32D1-14F3-4316-9FC0-A8046547CDF8}"/>
               </a:ext>
             </a:extLst>
           </p:cNvPr>
@@ -7580,7 +7580,7 @@
           <p:cNvPr id="96" name="">
             <a:extLst xmlns:a="http://schemas.openxmlformats.org/drawingml/2006/main">
               <a:ext uri="{FF2B5EF4-FFF2-40B4-BE49-F238E27FC236}">
-                <a16:creationId xmlns:a16="http://schemas.microsoft.com/office/drawing/2014/main" id="{C17AAEA5-D342-47E2-B221-6E80A277DAC0}"/>
+                <a16:creationId xmlns:a16="http://schemas.microsoft.com/office/drawing/2014/main" id="{FAE593B7-DEA2-4471-A8C7-B6E6D6D53456}"/>
               </a:ext>
             </a:extLst>
           </p:cNvPr>
@@ -7611,7 +7611,7 @@
           <p:cNvPr id="97" name="">
             <a:extLst xmlns:a="http://schemas.openxmlformats.org/drawingml/2006/main">
               <a:ext uri="{FF2B5EF4-FFF2-40B4-BE49-F238E27FC236}">
-                <a16:creationId xmlns:a16="http://schemas.microsoft.com/office/drawing/2014/main" id="{655DE528-BE79-475C-8236-A4D34592EF28}"/>
+                <a16:creationId xmlns:a16="http://schemas.microsoft.com/office/drawing/2014/main" id="{1E763877-9A3A-4644-9758-F522C682B0B5}"/>
               </a:ext>
             </a:extLst>
           </p:cNvPr>
@@ -7642,7 +7642,7 @@
           <p:cNvPr id="98" name="">
             <a:extLst xmlns:a="http://schemas.openxmlformats.org/drawingml/2006/main">
               <a:ext uri="{FF2B5EF4-FFF2-40B4-BE49-F238E27FC236}">
-                <a16:creationId xmlns:a16="http://schemas.microsoft.com/office/drawing/2014/main" id="{6ECC6582-D605-4317-ABC7-9BB8C7BE44B6}"/>
+                <a16:creationId xmlns:a16="http://schemas.microsoft.com/office/drawing/2014/main" id="{0090488C-D124-4DEE-9E3F-CF3324F67AB7}"/>
               </a:ext>
             </a:extLst>
           </p:cNvPr>
@@ -7694,7 +7694,7 @@
           <p:cNvPr id="99" name="">
             <a:extLst xmlns:a="http://schemas.openxmlformats.org/drawingml/2006/main">
               <a:ext uri="{FF2B5EF4-FFF2-40B4-BE49-F238E27FC236}">
-                <a16:creationId xmlns:a16="http://schemas.microsoft.com/office/drawing/2014/main" id="{1228A04D-B0BB-41FA-9533-BAE964DE1B54}"/>
+                <a16:creationId xmlns:a16="http://schemas.microsoft.com/office/drawing/2014/main" id="{B3C94832-7356-4D28-B975-6160E871B4AE}"/>
               </a:ext>
             </a:extLst>
           </p:cNvPr>
@@ -7746,7 +7746,7 @@
           <p:cNvPr id="100" name="">
             <a:extLst xmlns:a="http://schemas.openxmlformats.org/drawingml/2006/main">
               <a:ext uri="{FF2B5EF4-FFF2-40B4-BE49-F238E27FC236}">
-                <a16:creationId xmlns:a16="http://schemas.microsoft.com/office/drawing/2014/main" id="{726B0B01-3CD1-4A7F-90FA-91EE660A39C7}"/>
+                <a16:creationId xmlns:a16="http://schemas.microsoft.com/office/drawing/2014/main" id="{7B67554C-A33A-430E-BFE3-1768A4A2D800}"/>
               </a:ext>
             </a:extLst>
           </p:cNvPr>
@@ -7798,7 +7798,7 @@
           <p:cNvPr id="101" name="">
             <a:extLst xmlns:a="http://schemas.openxmlformats.org/drawingml/2006/main">
               <a:ext uri="{FF2B5EF4-FFF2-40B4-BE49-F238E27FC236}">
-                <a16:creationId xmlns:a16="http://schemas.microsoft.com/office/drawing/2014/main" id="{BE595D8B-6D9B-4F03-A09F-933A226B3D7E}"/>
+                <a16:creationId xmlns:a16="http://schemas.microsoft.com/office/drawing/2014/main" id="{875AC87F-94A9-4A53-91F7-61A515B4B8D8}"/>
               </a:ext>
             </a:extLst>
           </p:cNvPr>
@@ -7850,7 +7850,7 @@
           <p:cNvPr id="102" name="">
             <a:extLst xmlns:a="http://schemas.openxmlformats.org/drawingml/2006/main">
               <a:ext uri="{FF2B5EF4-FFF2-40B4-BE49-F238E27FC236}">
-                <a16:creationId xmlns:a16="http://schemas.microsoft.com/office/drawing/2014/main" id="{CFA54211-6DFB-4949-9942-754BAF213B11}"/>
+                <a16:creationId xmlns:a16="http://schemas.microsoft.com/office/drawing/2014/main" id="{66DE4BA0-EEA0-4EE2-A50D-E9361157F5BB}"/>
               </a:ext>
             </a:extLst>
           </p:cNvPr>
@@ -7900,7 +7900,7 @@
     </p:spTree>
     <p:extLst>
       <p:ext uri="{BB962C8B-B14F-4D97-AF65-F5344CB8AC3E}">
-        <p14:creationId xmlns:p14="http://schemas.microsoft.com/office/powerpoint/2010/main" val="1622623126"/>
+        <p14:creationId xmlns:p14="http://schemas.microsoft.com/office/powerpoint/2010/main" val="2068823173"/>
       </p:ext>
     </p:extLst>
   </p:cSld>
@@ -7931,7 +7931,7 @@
           <p:cNvPr id="98" name="">
             <a:extLst xmlns:a="http://schemas.openxmlformats.org/drawingml/2006/main">
               <a:ext uri="{FF2B5EF4-FFF2-40B4-BE49-F238E27FC236}">
-                <a16:creationId xmlns:a16="http://schemas.microsoft.com/office/drawing/2014/main" id="{EC37A232-5A6F-428E-97DC-B202F4C96C33}"/>
+                <a16:creationId xmlns:a16="http://schemas.microsoft.com/office/drawing/2014/main" id="{DF7EAC01-EAA7-4738-BDC7-BAB295770BEE}"/>
               </a:ext>
             </a:extLst>
           </p:cNvPr>
@@ -7964,7 +7964,7 @@
           <p:cNvPr id="2" name="">
             <a:extLst xmlns:a="http://schemas.openxmlformats.org/drawingml/2006/main">
               <a:ext uri="{FF2B5EF4-FFF2-40B4-BE49-F238E27FC236}">
-                <a16:creationId xmlns:a16="http://schemas.microsoft.com/office/drawing/2014/main" id="{178EE1AE-5D6F-4D51-ACA4-14FE1919B011}"/>
+                <a16:creationId xmlns:a16="http://schemas.microsoft.com/office/drawing/2014/main" id="{BD6235C8-3BEE-41BD-BACB-AED9544B4821}"/>
               </a:ext>
             </a:extLst>
           </p:cNvPr>
@@ -7995,7 +7995,7 @@
           <p:cNvPr id="3" name="">
             <a:extLst xmlns:a="http://schemas.openxmlformats.org/drawingml/2006/main">
               <a:ext uri="{FF2B5EF4-FFF2-40B4-BE49-F238E27FC236}">
-                <a16:creationId xmlns:a16="http://schemas.microsoft.com/office/drawing/2014/main" id="{3A8E1A09-672A-4A5D-8571-2104EB693EA4}"/>
+                <a16:creationId xmlns:a16="http://schemas.microsoft.com/office/drawing/2014/main" id="{BCAB8FEA-B29D-4845-91C1-D38C23A4EE74}"/>
               </a:ext>
             </a:extLst>
           </p:cNvPr>
@@ -8047,7 +8047,7 @@
           <p:cNvPr id="4" name="">
             <a:extLst xmlns:a="http://schemas.openxmlformats.org/drawingml/2006/main">
               <a:ext uri="{FF2B5EF4-FFF2-40B4-BE49-F238E27FC236}">
-                <a16:creationId xmlns:a16="http://schemas.microsoft.com/office/drawing/2014/main" id="{3B3891C6-A706-4AFC-ACF8-DB5BC09D9C94}"/>
+                <a16:creationId xmlns:a16="http://schemas.microsoft.com/office/drawing/2014/main" id="{76C50A8A-3F9F-4854-B670-96CDAE26F03C}"/>
               </a:ext>
             </a:extLst>
           </p:cNvPr>
@@ -8099,7 +8099,7 @@
           <p:cNvPr id="5" name="">
             <a:extLst xmlns:a="http://schemas.openxmlformats.org/drawingml/2006/main">
               <a:ext uri="{FF2B5EF4-FFF2-40B4-BE49-F238E27FC236}">
-                <a16:creationId xmlns:a16="http://schemas.microsoft.com/office/drawing/2014/main" id="{B405B026-5094-4B07-8AC1-F8B5AAC5E6EA}"/>
+                <a16:creationId xmlns:a16="http://schemas.microsoft.com/office/drawing/2014/main" id="{046A1FA6-3C75-4D6C-A811-A5B1BAA313A5}"/>
               </a:ext>
             </a:extLst>
           </p:cNvPr>
@@ -8134,7 +8134,7 @@
           <p:nvPr/>
         </p:nvPicPr>
         <p:blipFill>
-          <a:blip xmlns:r="http://schemas.openxmlformats.org/officeDocument/2006/relationships" xmlns:a="http://schemas.openxmlformats.org/drawingml/2006/main" r:embed="Rc2583640e4e84034"/>
+          <a:blip xmlns:r="http://schemas.openxmlformats.org/officeDocument/2006/relationships" xmlns:a="http://schemas.openxmlformats.org/drawingml/2006/main" r:embed="R65fe3d3f174b4012"/>
           <a:stretch xmlns:a="http://schemas.openxmlformats.org/drawingml/2006/main"/>
         </p:blipFill>
         <p:spPr>
@@ -8152,7 +8152,7 @@
           <p:cNvPr id="7" name="">
             <a:extLst xmlns:a="http://schemas.openxmlformats.org/drawingml/2006/main">
               <a:ext uri="{FF2B5EF4-FFF2-40B4-BE49-F238E27FC236}">
-                <a16:creationId xmlns:a16="http://schemas.microsoft.com/office/drawing/2014/main" id="{D4F06B05-6590-4255-8287-41C5B58F7EE3}"/>
+                <a16:creationId xmlns:a16="http://schemas.microsoft.com/office/drawing/2014/main" id="{832FB840-428B-450E-B92C-E9512ED45D75}"/>
               </a:ext>
             </a:extLst>
           </p:cNvPr>
@@ -8204,7 +8204,7 @@
           <p:cNvPr id="8" name="">
             <a:extLst xmlns:a="http://schemas.openxmlformats.org/drawingml/2006/main">
               <a:ext uri="{FF2B5EF4-FFF2-40B4-BE49-F238E27FC236}">
-                <a16:creationId xmlns:a16="http://schemas.microsoft.com/office/drawing/2014/main" id="{6AEC31BA-F632-47E0-8AA3-8495F5DE8974}"/>
+                <a16:creationId xmlns:a16="http://schemas.microsoft.com/office/drawing/2014/main" id="{AF49240E-46FC-4EAC-BC81-8E8B70798617}"/>
               </a:ext>
             </a:extLst>
           </p:cNvPr>
@@ -8256,7 +8256,7 @@
           <p:cNvPr id="9" name="">
             <a:extLst xmlns:a="http://schemas.openxmlformats.org/drawingml/2006/main">
               <a:ext uri="{FF2B5EF4-FFF2-40B4-BE49-F238E27FC236}">
-                <a16:creationId xmlns:a16="http://schemas.microsoft.com/office/drawing/2014/main" id="{1B9FAAFC-F49F-42A8-BD60-7E6E494022A3}"/>
+                <a16:creationId xmlns:a16="http://schemas.microsoft.com/office/drawing/2014/main" id="{4D56005C-315B-4EF5-B4F9-FC7075D2F529}"/>
               </a:ext>
             </a:extLst>
           </p:cNvPr>
@@ -8308,7 +8308,7 @@
           <p:cNvPr id="10" name="">
             <a:extLst xmlns:a="http://schemas.openxmlformats.org/drawingml/2006/main">
               <a:ext uri="{FF2B5EF4-FFF2-40B4-BE49-F238E27FC236}">
-                <a16:creationId xmlns:a16="http://schemas.microsoft.com/office/drawing/2014/main" id="{AF9E5258-A201-44E5-B32D-051591E4FB08}"/>
+                <a16:creationId xmlns:a16="http://schemas.microsoft.com/office/drawing/2014/main" id="{2F1C1296-9AA4-40FA-A153-AEDEF44172BC}"/>
               </a:ext>
             </a:extLst>
           </p:cNvPr>
@@ -8360,7 +8360,7 @@
           <p:cNvPr id="11" name="">
             <a:extLst xmlns:a="http://schemas.openxmlformats.org/drawingml/2006/main">
               <a:ext uri="{FF2B5EF4-FFF2-40B4-BE49-F238E27FC236}">
-                <a16:creationId xmlns:a16="http://schemas.microsoft.com/office/drawing/2014/main" id="{3EDB4733-AD53-4853-A680-65984641A735}"/>
+                <a16:creationId xmlns:a16="http://schemas.microsoft.com/office/drawing/2014/main" id="{0154D472-D244-4832-9AFE-888558611166}"/>
               </a:ext>
             </a:extLst>
           </p:cNvPr>
@@ -8391,7 +8391,7 @@
           <p:cNvPr id="12" name="">
             <a:extLst xmlns:a="http://schemas.openxmlformats.org/drawingml/2006/main">
               <a:ext uri="{FF2B5EF4-FFF2-40B4-BE49-F238E27FC236}">
-                <a16:creationId xmlns:a16="http://schemas.microsoft.com/office/drawing/2014/main" id="{40A3BC21-2DD9-486C-BD4C-4064B1648600}"/>
+                <a16:creationId xmlns:a16="http://schemas.microsoft.com/office/drawing/2014/main" id="{0011F7C4-04E4-4F64-A7C5-8C8B88F37D3C}"/>
               </a:ext>
             </a:extLst>
           </p:cNvPr>
@@ -8422,7 +8422,7 @@
           <p:cNvPr id="13" name="">
             <a:extLst xmlns:a="http://schemas.openxmlformats.org/drawingml/2006/main">
               <a:ext uri="{FF2B5EF4-FFF2-40B4-BE49-F238E27FC236}">
-                <a16:creationId xmlns:a16="http://schemas.microsoft.com/office/drawing/2014/main" id="{D0579F12-809B-437B-B481-5350A0699F68}"/>
+                <a16:creationId xmlns:a16="http://schemas.microsoft.com/office/drawing/2014/main" id="{B4D9D361-8C75-486F-8EFE-B69ED5A21127}"/>
               </a:ext>
             </a:extLst>
           </p:cNvPr>
@@ -8474,7 +8474,7 @@
           <p:cNvPr id="14" name="">
             <a:extLst xmlns:a="http://schemas.openxmlformats.org/drawingml/2006/main">
               <a:ext uri="{FF2B5EF4-FFF2-40B4-BE49-F238E27FC236}">
-                <a16:creationId xmlns:a16="http://schemas.microsoft.com/office/drawing/2014/main" id="{3C98B77D-4680-461E-8BF7-54D8F73930C5}"/>
+                <a16:creationId xmlns:a16="http://schemas.microsoft.com/office/drawing/2014/main" id="{B919A018-7D35-4F5D-9F59-EE0AEF33B36C}"/>
               </a:ext>
             </a:extLst>
           </p:cNvPr>
@@ -8526,7 +8526,7 @@
           <p:cNvPr id="15" name="">
             <a:extLst xmlns:a="http://schemas.openxmlformats.org/drawingml/2006/main">
               <a:ext uri="{FF2B5EF4-FFF2-40B4-BE49-F238E27FC236}">
-                <a16:creationId xmlns:a16="http://schemas.microsoft.com/office/drawing/2014/main" id="{1530BA7B-CA61-4ED7-A38A-0CB8E6858135}"/>
+                <a16:creationId xmlns:a16="http://schemas.microsoft.com/office/drawing/2014/main" id="{7B7FA4C2-3FD4-462C-925A-4F3D3F551D5B}"/>
               </a:ext>
             </a:extLst>
           </p:cNvPr>
@@ -8578,7 +8578,7 @@
           <p:cNvPr id="16" name="">
             <a:extLst xmlns:a="http://schemas.openxmlformats.org/drawingml/2006/main">
               <a:ext uri="{FF2B5EF4-FFF2-40B4-BE49-F238E27FC236}">
-                <a16:creationId xmlns:a16="http://schemas.microsoft.com/office/drawing/2014/main" id="{63B84FB2-2705-4BA2-B5C2-5F06E1D0917E}"/>
+                <a16:creationId xmlns:a16="http://schemas.microsoft.com/office/drawing/2014/main" id="{46AC24F5-5B5F-4F42-81F8-358A133D8C75}"/>
               </a:ext>
             </a:extLst>
           </p:cNvPr>
@@ -8630,7 +8630,7 @@
           <p:cNvPr id="17" name="">
             <a:extLst xmlns:a="http://schemas.openxmlformats.org/drawingml/2006/main">
               <a:ext uri="{FF2B5EF4-FFF2-40B4-BE49-F238E27FC236}">
-                <a16:creationId xmlns:a16="http://schemas.microsoft.com/office/drawing/2014/main" id="{D3FCB124-4D57-4853-830E-624311CDCE4B}"/>
+                <a16:creationId xmlns:a16="http://schemas.microsoft.com/office/drawing/2014/main" id="{AFA6C6F5-5D9A-466A-B187-B027B5D35B91}"/>
               </a:ext>
             </a:extLst>
           </p:cNvPr>
@@ -8682,7 +8682,7 @@
           <p:cNvPr id="18" name="">
             <a:extLst xmlns:a="http://schemas.openxmlformats.org/drawingml/2006/main">
               <a:ext uri="{FF2B5EF4-FFF2-40B4-BE49-F238E27FC236}">
-                <a16:creationId xmlns:a16="http://schemas.microsoft.com/office/drawing/2014/main" id="{16C4768E-1EE5-4BA1-BDAB-CDE910C0AC44}"/>
+                <a16:creationId xmlns:a16="http://schemas.microsoft.com/office/drawing/2014/main" id="{0DD3FDCA-9379-4731-91E3-70179C13EED4}"/>
               </a:ext>
             </a:extLst>
           </p:cNvPr>
@@ -8713,7 +8713,7 @@
           <p:cNvPr id="19" name="">
             <a:extLst xmlns:a="http://schemas.openxmlformats.org/drawingml/2006/main">
               <a:ext uri="{FF2B5EF4-FFF2-40B4-BE49-F238E27FC236}">
-                <a16:creationId xmlns:a16="http://schemas.microsoft.com/office/drawing/2014/main" id="{16BCC6E9-0A4C-403A-A333-CCC973269301}"/>
+                <a16:creationId xmlns:a16="http://schemas.microsoft.com/office/drawing/2014/main" id="{44F2A595-998A-42A1-82B2-58BF2E97FB73}"/>
               </a:ext>
             </a:extLst>
           </p:cNvPr>
@@ -8765,7 +8765,7 @@
           <p:cNvPr id="20" name="">
             <a:extLst xmlns:a="http://schemas.openxmlformats.org/drawingml/2006/main">
               <a:ext uri="{FF2B5EF4-FFF2-40B4-BE49-F238E27FC236}">
-                <a16:creationId xmlns:a16="http://schemas.microsoft.com/office/drawing/2014/main" id="{6FBDCD7E-EF99-44D1-B5B1-B9AF64D0FD3D}"/>
+                <a16:creationId xmlns:a16="http://schemas.microsoft.com/office/drawing/2014/main" id="{266433B0-9FE4-415B-935A-55CF60CCD798}"/>
               </a:ext>
             </a:extLst>
           </p:cNvPr>
@@ -8817,7 +8817,7 @@
           <p:cNvPr id="21" name="">
             <a:extLst xmlns:a="http://schemas.openxmlformats.org/drawingml/2006/main">
               <a:ext uri="{FF2B5EF4-FFF2-40B4-BE49-F238E27FC236}">
-                <a16:creationId xmlns:a16="http://schemas.microsoft.com/office/drawing/2014/main" id="{C41A400C-DC74-4B0A-97BF-4CF07928E2DB}"/>
+                <a16:creationId xmlns:a16="http://schemas.microsoft.com/office/drawing/2014/main" id="{7ECA9204-5313-4821-827C-C1158F1FEC16}"/>
               </a:ext>
             </a:extLst>
           </p:cNvPr>
@@ -8869,7 +8869,7 @@
           <p:cNvPr id="22" name="">
             <a:extLst xmlns:a="http://schemas.openxmlformats.org/drawingml/2006/main">
               <a:ext uri="{FF2B5EF4-FFF2-40B4-BE49-F238E27FC236}">
-                <a16:creationId xmlns:a16="http://schemas.microsoft.com/office/drawing/2014/main" id="{6E7A2F0F-94D5-4014-9A1D-FD747D8CE498}"/>
+                <a16:creationId xmlns:a16="http://schemas.microsoft.com/office/drawing/2014/main" id="{EE1AEA2D-A025-40DC-AD3C-A5896B6EDC90}"/>
               </a:ext>
             </a:extLst>
           </p:cNvPr>
@@ -8921,7 +8921,7 @@
           <p:cNvPr id="23" name="">
             <a:extLst xmlns:a="http://schemas.openxmlformats.org/drawingml/2006/main">
               <a:ext uri="{FF2B5EF4-FFF2-40B4-BE49-F238E27FC236}">
-                <a16:creationId xmlns:a16="http://schemas.microsoft.com/office/drawing/2014/main" id="{19AC6562-0635-478E-A1A7-598A1161B92B}"/>
+                <a16:creationId xmlns:a16="http://schemas.microsoft.com/office/drawing/2014/main" id="{2B458C39-B55C-4CEE-AFA2-336E87BFF0B4}"/>
               </a:ext>
             </a:extLst>
           </p:cNvPr>
@@ -8973,7 +8973,7 @@
           <p:cNvPr id="24" name="">
             <a:extLst xmlns:a="http://schemas.openxmlformats.org/drawingml/2006/main">
               <a:ext uri="{FF2B5EF4-FFF2-40B4-BE49-F238E27FC236}">
-                <a16:creationId xmlns:a16="http://schemas.microsoft.com/office/drawing/2014/main" id="{B9DF9D24-8924-413E-B3B5-03B237D4C243}"/>
+                <a16:creationId xmlns:a16="http://schemas.microsoft.com/office/drawing/2014/main" id="{FD0C24B4-0351-4B45-BB49-3988817551C7}"/>
               </a:ext>
             </a:extLst>
           </p:cNvPr>
@@ -9004,7 +9004,7 @@
           <p:cNvPr id="25" name="">
             <a:extLst xmlns:a="http://schemas.openxmlformats.org/drawingml/2006/main">
               <a:ext uri="{FF2B5EF4-FFF2-40B4-BE49-F238E27FC236}">
-                <a16:creationId xmlns:a16="http://schemas.microsoft.com/office/drawing/2014/main" id="{8166AA9E-1EBE-432F-A1BD-34C11289CC3D}"/>
+                <a16:creationId xmlns:a16="http://schemas.microsoft.com/office/drawing/2014/main" id="{B8B052BD-1749-4C9A-AA08-1E3AF052DB10}"/>
               </a:ext>
             </a:extLst>
           </p:cNvPr>
@@ -9035,7 +9035,7 @@
           <p:cNvPr id="26" name="">
             <a:extLst xmlns:a="http://schemas.openxmlformats.org/drawingml/2006/main">
               <a:ext uri="{FF2B5EF4-FFF2-40B4-BE49-F238E27FC236}">
-                <a16:creationId xmlns:a16="http://schemas.microsoft.com/office/drawing/2014/main" id="{CF19824A-E36E-47D6-8417-AE1AA1044D6B}"/>
+                <a16:creationId xmlns:a16="http://schemas.microsoft.com/office/drawing/2014/main" id="{587AB33D-8B17-4AEF-85F6-C5E2416163E7}"/>
               </a:ext>
             </a:extLst>
           </p:cNvPr>
@@ -9087,7 +9087,7 @@
           <p:cNvPr id="27" name="">
             <a:extLst xmlns:a="http://schemas.openxmlformats.org/drawingml/2006/main">
               <a:ext uri="{FF2B5EF4-FFF2-40B4-BE49-F238E27FC236}">
-                <a16:creationId xmlns:a16="http://schemas.microsoft.com/office/drawing/2014/main" id="{ADBFAF33-02B4-4ECA-8752-ACE2A5FE086A}"/>
+                <a16:creationId xmlns:a16="http://schemas.microsoft.com/office/drawing/2014/main" id="{F103884A-9777-4D6F-AAAD-DEEE2488305F}"/>
               </a:ext>
             </a:extLst>
           </p:cNvPr>
@@ -9139,7 +9139,7 @@
           <p:cNvPr id="28" name="">
             <a:extLst xmlns:a="http://schemas.openxmlformats.org/drawingml/2006/main">
               <a:ext uri="{FF2B5EF4-FFF2-40B4-BE49-F238E27FC236}">
-                <a16:creationId xmlns:a16="http://schemas.microsoft.com/office/drawing/2014/main" id="{90EBB163-F357-4BA3-9473-1007F545FE23}"/>
+                <a16:creationId xmlns:a16="http://schemas.microsoft.com/office/drawing/2014/main" id="{8483B875-289F-49DE-AD79-B505665CBBC5}"/>
               </a:ext>
             </a:extLst>
           </p:cNvPr>
@@ -9191,7 +9191,7 @@
           <p:cNvPr id="29" name="">
             <a:extLst xmlns:a="http://schemas.openxmlformats.org/drawingml/2006/main">
               <a:ext uri="{FF2B5EF4-FFF2-40B4-BE49-F238E27FC236}">
-                <a16:creationId xmlns:a16="http://schemas.microsoft.com/office/drawing/2014/main" id="{6DC00D90-5F6B-4E06-B1A9-5D2D6BF451EC}"/>
+                <a16:creationId xmlns:a16="http://schemas.microsoft.com/office/drawing/2014/main" id="{3BB1F928-D517-41FA-AFA7-28CF47EF8C7D}"/>
               </a:ext>
             </a:extLst>
           </p:cNvPr>
@@ -9243,7 +9243,7 @@
           <p:cNvPr id="30" name="">
             <a:extLst xmlns:a="http://schemas.openxmlformats.org/drawingml/2006/main">
               <a:ext uri="{FF2B5EF4-FFF2-40B4-BE49-F238E27FC236}">
-                <a16:creationId xmlns:a16="http://schemas.microsoft.com/office/drawing/2014/main" id="{27850262-A6CB-4F69-BD25-CE26F384B203}"/>
+                <a16:creationId xmlns:a16="http://schemas.microsoft.com/office/drawing/2014/main" id="{06730D62-82A6-4DC9-A6DB-6998AE0F9589}"/>
               </a:ext>
             </a:extLst>
           </p:cNvPr>
@@ -9295,7 +9295,7 @@
           <p:cNvPr id="31" name="">
             <a:extLst xmlns:a="http://schemas.openxmlformats.org/drawingml/2006/main">
               <a:ext uri="{FF2B5EF4-FFF2-40B4-BE49-F238E27FC236}">
-                <a16:creationId xmlns:a16="http://schemas.microsoft.com/office/drawing/2014/main" id="{603126C8-6299-4A45-BA7E-FD27202E2869}"/>
+                <a16:creationId xmlns:a16="http://schemas.microsoft.com/office/drawing/2014/main" id="{BAFBCFF9-C16B-426C-A82F-294914D467F1}"/>
               </a:ext>
             </a:extLst>
           </p:cNvPr>
@@ -9326,7 +9326,7 @@
           <p:cNvPr id="32" name="">
             <a:extLst xmlns:a="http://schemas.openxmlformats.org/drawingml/2006/main">
               <a:ext uri="{FF2B5EF4-FFF2-40B4-BE49-F238E27FC236}">
-                <a16:creationId xmlns:a16="http://schemas.microsoft.com/office/drawing/2014/main" id="{7E80FF81-D680-43D1-8769-FA6550BB5FE7}"/>
+                <a16:creationId xmlns:a16="http://schemas.microsoft.com/office/drawing/2014/main" id="{5436C65C-9F38-4DA9-8769-47A323F3CCB8}"/>
               </a:ext>
             </a:extLst>
           </p:cNvPr>
@@ -9378,7 +9378,7 @@
           <p:cNvPr id="33" name="">
             <a:extLst xmlns:a="http://schemas.openxmlformats.org/drawingml/2006/main">
               <a:ext uri="{FF2B5EF4-FFF2-40B4-BE49-F238E27FC236}">
-                <a16:creationId xmlns:a16="http://schemas.microsoft.com/office/drawing/2014/main" id="{B3F17344-EF2B-4A4B-9D3E-AB2B30699307}"/>
+                <a16:creationId xmlns:a16="http://schemas.microsoft.com/office/drawing/2014/main" id="{698138B3-93C7-4448-80E4-46E42F938EE3}"/>
               </a:ext>
             </a:extLst>
           </p:cNvPr>
@@ -9430,7 +9430,7 @@
           <p:cNvPr id="34" name="">
             <a:extLst xmlns:a="http://schemas.openxmlformats.org/drawingml/2006/main">
               <a:ext uri="{FF2B5EF4-FFF2-40B4-BE49-F238E27FC236}">
-                <a16:creationId xmlns:a16="http://schemas.microsoft.com/office/drawing/2014/main" id="{21C985F1-9EB9-4CC5-B3B2-3162A17EBEA9}"/>
+                <a16:creationId xmlns:a16="http://schemas.microsoft.com/office/drawing/2014/main" id="{F3AA0531-4973-4705-B4E0-62D7E9825C0E}"/>
               </a:ext>
             </a:extLst>
           </p:cNvPr>
@@ -9482,7 +9482,7 @@
           <p:cNvPr id="35" name="">
             <a:extLst xmlns:a="http://schemas.openxmlformats.org/drawingml/2006/main">
               <a:ext uri="{FF2B5EF4-FFF2-40B4-BE49-F238E27FC236}">
-                <a16:creationId xmlns:a16="http://schemas.microsoft.com/office/drawing/2014/main" id="{E6966F3E-51F7-47E0-B58B-FD06B37864DB}"/>
+                <a16:creationId xmlns:a16="http://schemas.microsoft.com/office/drawing/2014/main" id="{E31C34F4-2B1E-4D71-9685-84A556F98969}"/>
               </a:ext>
             </a:extLst>
           </p:cNvPr>
@@ -9534,7 +9534,7 @@
           <p:cNvPr id="36" name="">
             <a:extLst xmlns:a="http://schemas.openxmlformats.org/drawingml/2006/main">
               <a:ext uri="{FF2B5EF4-FFF2-40B4-BE49-F238E27FC236}">
-                <a16:creationId xmlns:a16="http://schemas.microsoft.com/office/drawing/2014/main" id="{8857897C-52F9-4175-BAF3-F0CAF4DA1FE8}"/>
+                <a16:creationId xmlns:a16="http://schemas.microsoft.com/office/drawing/2014/main" id="{F0958515-1104-48A8-9371-011EC088EFD7}"/>
               </a:ext>
             </a:extLst>
           </p:cNvPr>
@@ -9586,7 +9586,7 @@
           <p:cNvPr id="37" name="">
             <a:extLst xmlns:a="http://schemas.openxmlformats.org/drawingml/2006/main">
               <a:ext uri="{FF2B5EF4-FFF2-40B4-BE49-F238E27FC236}">
-                <a16:creationId xmlns:a16="http://schemas.microsoft.com/office/drawing/2014/main" id="{252B966F-E475-4AE2-9AF7-C25CEBEEDD45}"/>
+                <a16:creationId xmlns:a16="http://schemas.microsoft.com/office/drawing/2014/main" id="{9C41394E-E97E-4EBD-B77A-C3D683F665E7}"/>
               </a:ext>
             </a:extLst>
           </p:cNvPr>
@@ -9617,7 +9617,7 @@
           <p:cNvPr id="38" name="">
             <a:extLst xmlns:a="http://schemas.openxmlformats.org/drawingml/2006/main">
               <a:ext uri="{FF2B5EF4-FFF2-40B4-BE49-F238E27FC236}">
-                <a16:creationId xmlns:a16="http://schemas.microsoft.com/office/drawing/2014/main" id="{EBFD9D0A-0964-4E40-8DA3-25AB763B6B20}"/>
+                <a16:creationId xmlns:a16="http://schemas.microsoft.com/office/drawing/2014/main" id="{532D3220-A1F6-41EE-BBEE-A89DC55B3F74}"/>
               </a:ext>
             </a:extLst>
           </p:cNvPr>
@@ -9648,7 +9648,7 @@
           <p:cNvPr id="39" name="">
             <a:extLst xmlns:a="http://schemas.openxmlformats.org/drawingml/2006/main">
               <a:ext uri="{FF2B5EF4-FFF2-40B4-BE49-F238E27FC236}">
-                <a16:creationId xmlns:a16="http://schemas.microsoft.com/office/drawing/2014/main" id="{D1F1DFE4-6F15-4770-81E6-093A67C8B85A}"/>
+                <a16:creationId xmlns:a16="http://schemas.microsoft.com/office/drawing/2014/main" id="{C50A8564-2B29-4A52-BCDD-DFE620D5F90D}"/>
               </a:ext>
             </a:extLst>
           </p:cNvPr>
@@ -9700,7 +9700,7 @@
           <p:cNvPr id="40" name="">
             <a:extLst xmlns:a="http://schemas.openxmlformats.org/drawingml/2006/main">
               <a:ext uri="{FF2B5EF4-FFF2-40B4-BE49-F238E27FC236}">
-                <a16:creationId xmlns:a16="http://schemas.microsoft.com/office/drawing/2014/main" id="{57335FFF-88B7-4563-88CE-22794C0E3C61}"/>
+                <a16:creationId xmlns:a16="http://schemas.microsoft.com/office/drawing/2014/main" id="{B1FAFCEA-73A8-42DF-8FDC-3CB7A6224D14}"/>
               </a:ext>
             </a:extLst>
           </p:cNvPr>
@@ -9752,7 +9752,7 @@
           <p:cNvPr id="41" name="">
             <a:extLst xmlns:a="http://schemas.openxmlformats.org/drawingml/2006/main">
               <a:ext uri="{FF2B5EF4-FFF2-40B4-BE49-F238E27FC236}">
-                <a16:creationId xmlns:a16="http://schemas.microsoft.com/office/drawing/2014/main" id="{14BA4FE3-016F-4045-83D1-971F9711DA6F}"/>
+                <a16:creationId xmlns:a16="http://schemas.microsoft.com/office/drawing/2014/main" id="{228C1BB1-521A-4EBB-992B-62C53BC6EE12}"/>
               </a:ext>
             </a:extLst>
           </p:cNvPr>
@@ -9804,7 +9804,7 @@
           <p:cNvPr id="42" name="">
             <a:extLst xmlns:a="http://schemas.openxmlformats.org/drawingml/2006/main">
               <a:ext uri="{FF2B5EF4-FFF2-40B4-BE49-F238E27FC236}">
-                <a16:creationId xmlns:a16="http://schemas.microsoft.com/office/drawing/2014/main" id="{36F4A286-CD05-41C4-AE53-DDF6B5A990D4}"/>
+                <a16:creationId xmlns:a16="http://schemas.microsoft.com/office/drawing/2014/main" id="{B44FD284-179D-426B-97F4-28C1FA929100}"/>
               </a:ext>
             </a:extLst>
           </p:cNvPr>
@@ -9856,7 +9856,7 @@
           <p:cNvPr id="43" name="">
             <a:extLst xmlns:a="http://schemas.openxmlformats.org/drawingml/2006/main">
               <a:ext uri="{FF2B5EF4-FFF2-40B4-BE49-F238E27FC236}">
-                <a16:creationId xmlns:a16="http://schemas.microsoft.com/office/drawing/2014/main" id="{E7E69EFB-5CD8-4518-B7CF-24292F1532D9}"/>
+                <a16:creationId xmlns:a16="http://schemas.microsoft.com/office/drawing/2014/main" id="{CECFCB38-62CD-4BEC-B155-C07E5C086228}"/>
               </a:ext>
             </a:extLst>
           </p:cNvPr>
@@ -9908,7 +9908,7 @@
           <p:cNvPr id="44" name="">
             <a:extLst xmlns:a="http://schemas.openxmlformats.org/drawingml/2006/main">
               <a:ext uri="{FF2B5EF4-FFF2-40B4-BE49-F238E27FC236}">
-                <a16:creationId xmlns:a16="http://schemas.microsoft.com/office/drawing/2014/main" id="{0ABBCF73-E40B-4B1D-A6E3-EEFD735C399E}"/>
+                <a16:creationId xmlns:a16="http://schemas.microsoft.com/office/drawing/2014/main" id="{6AC1AC99-7624-49A2-B921-93B48AC44D10}"/>
               </a:ext>
             </a:extLst>
           </p:cNvPr>
@@ -9939,7 +9939,7 @@
           <p:cNvPr id="45" name="">
             <a:extLst xmlns:a="http://schemas.openxmlformats.org/drawingml/2006/main">
               <a:ext uri="{FF2B5EF4-FFF2-40B4-BE49-F238E27FC236}">
-                <a16:creationId xmlns:a16="http://schemas.microsoft.com/office/drawing/2014/main" id="{5C790E78-9B09-404B-886F-9DEE86645FFB}"/>
+                <a16:creationId xmlns:a16="http://schemas.microsoft.com/office/drawing/2014/main" id="{0DE3DD4B-BE0E-4065-AD70-665B1AC04AD9}"/>
               </a:ext>
             </a:extLst>
           </p:cNvPr>
@@ -9991,7 +9991,7 @@
           <p:cNvPr id="46" name="">
             <a:extLst xmlns:a="http://schemas.openxmlformats.org/drawingml/2006/main">
               <a:ext uri="{FF2B5EF4-FFF2-40B4-BE49-F238E27FC236}">
-                <a16:creationId xmlns:a16="http://schemas.microsoft.com/office/drawing/2014/main" id="{A6E073E7-2773-419B-8C3F-75F709F67733}"/>
+                <a16:creationId xmlns:a16="http://schemas.microsoft.com/office/drawing/2014/main" id="{C4661AF4-92BC-40B4-9138-FDACCF4515E3}"/>
               </a:ext>
             </a:extLst>
           </p:cNvPr>
@@ -10043,7 +10043,7 @@
           <p:cNvPr id="47" name="">
             <a:extLst xmlns:a="http://schemas.openxmlformats.org/drawingml/2006/main">
               <a:ext uri="{FF2B5EF4-FFF2-40B4-BE49-F238E27FC236}">
-                <a16:creationId xmlns:a16="http://schemas.microsoft.com/office/drawing/2014/main" id="{7F7C9306-0F1A-4093-8FFB-518B97B178BB}"/>
+                <a16:creationId xmlns:a16="http://schemas.microsoft.com/office/drawing/2014/main" id="{14B6344C-5D20-4294-9784-F3AE78338DA9}"/>
               </a:ext>
             </a:extLst>
           </p:cNvPr>
@@ -10095,7 +10095,7 @@
           <p:cNvPr id="48" name="">
             <a:extLst xmlns:a="http://schemas.openxmlformats.org/drawingml/2006/main">
               <a:ext uri="{FF2B5EF4-FFF2-40B4-BE49-F238E27FC236}">
-                <a16:creationId xmlns:a16="http://schemas.microsoft.com/office/drawing/2014/main" id="{4D13D6A4-C13E-4DDF-B05A-56D52C9A16B1}"/>
+                <a16:creationId xmlns:a16="http://schemas.microsoft.com/office/drawing/2014/main" id="{F371CE03-3F96-4056-A969-E8B39576B1AB}"/>
               </a:ext>
             </a:extLst>
           </p:cNvPr>
@@ -10147,7 +10147,7 @@
           <p:cNvPr id="49" name="">
             <a:extLst xmlns:a="http://schemas.openxmlformats.org/drawingml/2006/main">
               <a:ext uri="{FF2B5EF4-FFF2-40B4-BE49-F238E27FC236}">
-                <a16:creationId xmlns:a16="http://schemas.microsoft.com/office/drawing/2014/main" id="{17B5FBE0-672E-4F1C-AB8E-B81C1C5DDAB8}"/>
+                <a16:creationId xmlns:a16="http://schemas.microsoft.com/office/drawing/2014/main" id="{FE360495-22A8-41EF-9C9F-3CB731A1214E}"/>
               </a:ext>
             </a:extLst>
           </p:cNvPr>
@@ -10199,7 +10199,7 @@
           <p:cNvPr id="50" name="">
             <a:extLst xmlns:a="http://schemas.openxmlformats.org/drawingml/2006/main">
               <a:ext uri="{FF2B5EF4-FFF2-40B4-BE49-F238E27FC236}">
-                <a16:creationId xmlns:a16="http://schemas.microsoft.com/office/drawing/2014/main" id="{C1BC7ED7-92CA-4388-86EE-9D4A09D9855A}"/>
+                <a16:creationId xmlns:a16="http://schemas.microsoft.com/office/drawing/2014/main" id="{0C9FB599-B426-48A9-9BED-E18D3ED0EF70}"/>
               </a:ext>
             </a:extLst>
           </p:cNvPr>
@@ -10251,7 +10251,7 @@
           <p:cNvPr id="51" name="">
             <a:extLst xmlns:a="http://schemas.openxmlformats.org/drawingml/2006/main">
               <a:ext uri="{FF2B5EF4-FFF2-40B4-BE49-F238E27FC236}">
-                <a16:creationId xmlns:a16="http://schemas.microsoft.com/office/drawing/2014/main" id="{9087F049-AA2B-4A48-9B26-CFC4D1DAF222}"/>
+                <a16:creationId xmlns:a16="http://schemas.microsoft.com/office/drawing/2014/main" id="{B3F4364C-DD74-45F5-B79D-EB9DF2BD2C1D}"/>
               </a:ext>
             </a:extLst>
           </p:cNvPr>
@@ -10282,7 +10282,7 @@
           <p:cNvPr id="52" name="">
             <a:extLst xmlns:a="http://schemas.openxmlformats.org/drawingml/2006/main">
               <a:ext uri="{FF2B5EF4-FFF2-40B4-BE49-F238E27FC236}">
-                <a16:creationId xmlns:a16="http://schemas.microsoft.com/office/drawing/2014/main" id="{A5F8E9A2-8D7A-4E4B-BC1A-424044348B93}"/>
+                <a16:creationId xmlns:a16="http://schemas.microsoft.com/office/drawing/2014/main" id="{65CED6EA-16CD-4258-9762-9844EA93663F}"/>
               </a:ext>
             </a:extLst>
           </p:cNvPr>
@@ -10313,7 +10313,7 @@
           <p:cNvPr id="53" name="">
             <a:extLst xmlns:a="http://schemas.openxmlformats.org/drawingml/2006/main">
               <a:ext uri="{FF2B5EF4-FFF2-40B4-BE49-F238E27FC236}">
-                <a16:creationId xmlns:a16="http://schemas.microsoft.com/office/drawing/2014/main" id="{25F60960-9CD3-4997-ACF7-42FFFA08FF60}"/>
+                <a16:creationId xmlns:a16="http://schemas.microsoft.com/office/drawing/2014/main" id="{D697CCC6-5196-484B-A4E3-6436D6C9EF3B}"/>
               </a:ext>
             </a:extLst>
           </p:cNvPr>
@@ -10344,7 +10344,7 @@
           <p:cNvPr id="54" name="">
             <a:extLst xmlns:a="http://schemas.openxmlformats.org/drawingml/2006/main">
               <a:ext uri="{FF2B5EF4-FFF2-40B4-BE49-F238E27FC236}">
-                <a16:creationId xmlns:a16="http://schemas.microsoft.com/office/drawing/2014/main" id="{F46520B2-4E61-4C65-AA98-F3B3EE716B0D}"/>
+                <a16:creationId xmlns:a16="http://schemas.microsoft.com/office/drawing/2014/main" id="{3FF5D744-9FA3-4B3F-AD37-32A74BB4B0A8}"/>
               </a:ext>
             </a:extLst>
           </p:cNvPr>
@@ -10396,7 +10396,7 @@
           <p:cNvPr id="55" name="">
             <a:extLst xmlns:a="http://schemas.openxmlformats.org/drawingml/2006/main">
               <a:ext uri="{FF2B5EF4-FFF2-40B4-BE49-F238E27FC236}">
-                <a16:creationId xmlns:a16="http://schemas.microsoft.com/office/drawing/2014/main" id="{5F14983F-3079-4F37-8139-657879053DCF}"/>
+                <a16:creationId xmlns:a16="http://schemas.microsoft.com/office/drawing/2014/main" id="{6AC47701-480A-4A7D-989C-0A0425855F66}"/>
               </a:ext>
             </a:extLst>
           </p:cNvPr>
@@ -10448,7 +10448,7 @@
           <p:cNvPr id="56" name="">
             <a:extLst xmlns:a="http://schemas.openxmlformats.org/drawingml/2006/main">
               <a:ext uri="{FF2B5EF4-FFF2-40B4-BE49-F238E27FC236}">
-                <a16:creationId xmlns:a16="http://schemas.microsoft.com/office/drawing/2014/main" id="{3EC20B76-4A9E-45B5-B635-B101B14D2D1D}"/>
+                <a16:creationId xmlns:a16="http://schemas.microsoft.com/office/drawing/2014/main" id="{20D7C52D-F5CC-499D-80F1-BA4BCB8711ED}"/>
               </a:ext>
             </a:extLst>
           </p:cNvPr>
@@ -10500,7 +10500,7 @@
           <p:cNvPr id="57" name="">
             <a:extLst xmlns:a="http://schemas.openxmlformats.org/drawingml/2006/main">
               <a:ext uri="{FF2B5EF4-FFF2-40B4-BE49-F238E27FC236}">
-                <a16:creationId xmlns:a16="http://schemas.microsoft.com/office/drawing/2014/main" id="{9A7D669E-E411-4200-8405-7D1F8A2467E2}"/>
+                <a16:creationId xmlns:a16="http://schemas.microsoft.com/office/drawing/2014/main" id="{2384B546-FE5C-4768-B018-ECB148111FF9}"/>
               </a:ext>
             </a:extLst>
           </p:cNvPr>
@@ -10552,7 +10552,7 @@
           <p:cNvPr id="58" name="">
             <a:extLst xmlns:a="http://schemas.openxmlformats.org/drawingml/2006/main">
               <a:ext uri="{FF2B5EF4-FFF2-40B4-BE49-F238E27FC236}">
-                <a16:creationId xmlns:a16="http://schemas.microsoft.com/office/drawing/2014/main" id="{289199D0-33A6-45E0-9BD4-0057872107FC}"/>
+                <a16:creationId xmlns:a16="http://schemas.microsoft.com/office/drawing/2014/main" id="{1683DFFD-3D32-411B-A06D-9E00DC7D19DC}"/>
               </a:ext>
             </a:extLst>
           </p:cNvPr>
@@ -10604,7 +10604,7 @@
           <p:cNvPr id="59" name="">
             <a:extLst xmlns:a="http://schemas.openxmlformats.org/drawingml/2006/main">
               <a:ext uri="{FF2B5EF4-FFF2-40B4-BE49-F238E27FC236}">
-                <a16:creationId xmlns:a16="http://schemas.microsoft.com/office/drawing/2014/main" id="{051CACE4-CD22-44C9-BDE5-8899FD15D7AE}"/>
+                <a16:creationId xmlns:a16="http://schemas.microsoft.com/office/drawing/2014/main" id="{7EBBC0D8-9F0C-424A-80DE-77E9AA53FE6D}"/>
               </a:ext>
             </a:extLst>
           </p:cNvPr>
@@ -10635,7 +10635,7 @@
           <p:cNvPr id="60" name="">
             <a:extLst xmlns:a="http://schemas.openxmlformats.org/drawingml/2006/main">
               <a:ext uri="{FF2B5EF4-FFF2-40B4-BE49-F238E27FC236}">
-                <a16:creationId xmlns:a16="http://schemas.microsoft.com/office/drawing/2014/main" id="{25272F65-A571-40C6-A6FA-51B57C28D172}"/>
+                <a16:creationId xmlns:a16="http://schemas.microsoft.com/office/drawing/2014/main" id="{B6503695-82E0-4D61-A7D3-CFA4379B3214}"/>
               </a:ext>
             </a:extLst>
           </p:cNvPr>
@@ -10687,7 +10687,7 @@
           <p:cNvPr id="61" name="">
             <a:extLst xmlns:a="http://schemas.openxmlformats.org/drawingml/2006/main">
               <a:ext uri="{FF2B5EF4-FFF2-40B4-BE49-F238E27FC236}">
-                <a16:creationId xmlns:a16="http://schemas.microsoft.com/office/drawing/2014/main" id="{27D022A9-DAB0-4AE4-A1AF-AF29558F2137}"/>
+                <a16:creationId xmlns:a16="http://schemas.microsoft.com/office/drawing/2014/main" id="{0C145DDB-AD50-4108-92F3-D2256C8D5FE2}"/>
               </a:ext>
             </a:extLst>
           </p:cNvPr>
@@ -10739,7 +10739,7 @@
           <p:cNvPr id="62" name="">
             <a:extLst xmlns:a="http://schemas.openxmlformats.org/drawingml/2006/main">
               <a:ext uri="{FF2B5EF4-FFF2-40B4-BE49-F238E27FC236}">
-                <a16:creationId xmlns:a16="http://schemas.microsoft.com/office/drawing/2014/main" id="{752BA696-3D6D-4A9E-AC19-AE2603088061}"/>
+                <a16:creationId xmlns:a16="http://schemas.microsoft.com/office/drawing/2014/main" id="{E5B04314-16A1-42F0-9C48-3AD30779303D}"/>
               </a:ext>
             </a:extLst>
           </p:cNvPr>
@@ -10791,7 +10791,7 @@
           <p:cNvPr id="63" name="">
             <a:extLst xmlns:a="http://schemas.openxmlformats.org/drawingml/2006/main">
               <a:ext uri="{FF2B5EF4-FFF2-40B4-BE49-F238E27FC236}">
-                <a16:creationId xmlns:a16="http://schemas.microsoft.com/office/drawing/2014/main" id="{256C68CC-67E0-44AD-8C3F-7ABD6A4187ED}"/>
+                <a16:creationId xmlns:a16="http://schemas.microsoft.com/office/drawing/2014/main" id="{05C1B434-188B-47B5-AED6-1D51D0FAE7EA}"/>
               </a:ext>
             </a:extLst>
           </p:cNvPr>
@@ -10843,7 +10843,7 @@
           <p:cNvPr id="64" name="">
             <a:extLst xmlns:a="http://schemas.openxmlformats.org/drawingml/2006/main">
               <a:ext uri="{FF2B5EF4-FFF2-40B4-BE49-F238E27FC236}">
-                <a16:creationId xmlns:a16="http://schemas.microsoft.com/office/drawing/2014/main" id="{9569BA4A-D2DC-4452-B09A-9C2D10A0D779}"/>
+                <a16:creationId xmlns:a16="http://schemas.microsoft.com/office/drawing/2014/main" id="{745BA12F-4949-48C0-93E8-50706E3443A4}"/>
               </a:ext>
             </a:extLst>
           </p:cNvPr>
@@ -10895,7 +10895,7 @@
           <p:cNvPr id="65" name="">
             <a:extLst xmlns:a="http://schemas.openxmlformats.org/drawingml/2006/main">
               <a:ext uri="{FF2B5EF4-FFF2-40B4-BE49-F238E27FC236}">
-                <a16:creationId xmlns:a16="http://schemas.microsoft.com/office/drawing/2014/main" id="{BC2D1AAD-6BD7-4C9C-8A81-F143EC6C34AE}"/>
+                <a16:creationId xmlns:a16="http://schemas.microsoft.com/office/drawing/2014/main" id="{CEEED382-0E37-4346-B23B-07F59F390349}"/>
               </a:ext>
             </a:extLst>
           </p:cNvPr>
@@ -10926,7 +10926,7 @@
           <p:cNvPr id="66" name="">
             <a:extLst xmlns:a="http://schemas.openxmlformats.org/drawingml/2006/main">
               <a:ext uri="{FF2B5EF4-FFF2-40B4-BE49-F238E27FC236}">
-                <a16:creationId xmlns:a16="http://schemas.microsoft.com/office/drawing/2014/main" id="{0BCE2896-4137-43FB-B732-2803906E866A}"/>
+                <a16:creationId xmlns:a16="http://schemas.microsoft.com/office/drawing/2014/main" id="{F0F96FA4-29B1-48E1-8437-75831FF387D9}"/>
               </a:ext>
             </a:extLst>
           </p:cNvPr>
@@ -10957,7 +10957,7 @@
           <p:cNvPr id="67" name="">
             <a:extLst xmlns:a="http://schemas.openxmlformats.org/drawingml/2006/main">
               <a:ext uri="{FF2B5EF4-FFF2-40B4-BE49-F238E27FC236}">
-                <a16:creationId xmlns:a16="http://schemas.microsoft.com/office/drawing/2014/main" id="{990BE888-63D8-4790-9064-71BDD3D0A431}"/>
+                <a16:creationId xmlns:a16="http://schemas.microsoft.com/office/drawing/2014/main" id="{7987AB5C-B8DB-4177-A71C-870524564366}"/>
               </a:ext>
             </a:extLst>
           </p:cNvPr>
@@ -11009,7 +11009,7 @@
           <p:cNvPr id="68" name="">
             <a:extLst xmlns:a="http://schemas.openxmlformats.org/drawingml/2006/main">
               <a:ext uri="{FF2B5EF4-FFF2-40B4-BE49-F238E27FC236}">
-                <a16:creationId xmlns:a16="http://schemas.microsoft.com/office/drawing/2014/main" id="{1C6BEAA9-0ACA-4E9B-9852-DA31DA4A4991}"/>
+                <a16:creationId xmlns:a16="http://schemas.microsoft.com/office/drawing/2014/main" id="{B8FDEBE0-3396-496F-A842-FCC456F76EFA}"/>
               </a:ext>
             </a:extLst>
           </p:cNvPr>
@@ -11061,7 +11061,7 @@
           <p:cNvPr id="69" name="">
             <a:extLst xmlns:a="http://schemas.openxmlformats.org/drawingml/2006/main">
               <a:ext uri="{FF2B5EF4-FFF2-40B4-BE49-F238E27FC236}">
-                <a16:creationId xmlns:a16="http://schemas.microsoft.com/office/drawing/2014/main" id="{D88E4170-F931-4B52-83D1-3309715BAA98}"/>
+                <a16:creationId xmlns:a16="http://schemas.microsoft.com/office/drawing/2014/main" id="{A7113565-9619-4CD1-A83A-708873D03867}"/>
               </a:ext>
             </a:extLst>
           </p:cNvPr>
@@ -11113,7 +11113,7 @@
           <p:cNvPr id="70" name="">
             <a:extLst xmlns:a="http://schemas.openxmlformats.org/drawingml/2006/main">
               <a:ext uri="{FF2B5EF4-FFF2-40B4-BE49-F238E27FC236}">
-                <a16:creationId xmlns:a16="http://schemas.microsoft.com/office/drawing/2014/main" id="{C3785C51-9C61-4ECF-A0AB-675DBEE4D6BD}"/>
+                <a16:creationId xmlns:a16="http://schemas.microsoft.com/office/drawing/2014/main" id="{BB8B3FE1-BDC4-41E3-8C95-EE307ED4E89E}"/>
               </a:ext>
             </a:extLst>
           </p:cNvPr>
@@ -11165,7 +11165,7 @@
           <p:cNvPr id="71" name="">
             <a:extLst xmlns:a="http://schemas.openxmlformats.org/drawingml/2006/main">
               <a:ext uri="{FF2B5EF4-FFF2-40B4-BE49-F238E27FC236}">
-                <a16:creationId xmlns:a16="http://schemas.microsoft.com/office/drawing/2014/main" id="{BEF6E198-95B5-4CBB-A08A-C1C373A524CD}"/>
+                <a16:creationId xmlns:a16="http://schemas.microsoft.com/office/drawing/2014/main" id="{34D5AF20-C0C0-4721-AAAA-C83BEDFE4E8A}"/>
               </a:ext>
             </a:extLst>
           </p:cNvPr>
@@ -11217,7 +11217,7 @@
           <p:cNvPr id="72" name="">
             <a:extLst xmlns:a="http://schemas.openxmlformats.org/drawingml/2006/main">
               <a:ext uri="{FF2B5EF4-FFF2-40B4-BE49-F238E27FC236}">
-                <a16:creationId xmlns:a16="http://schemas.microsoft.com/office/drawing/2014/main" id="{BCB929B6-C273-4EE0-839A-3FB0FC03F84A}"/>
+                <a16:creationId xmlns:a16="http://schemas.microsoft.com/office/drawing/2014/main" id="{1D1E0EED-81CE-4276-BDAC-7E30B2C6D56E}"/>
               </a:ext>
             </a:extLst>
           </p:cNvPr>
@@ -11248,7 +11248,7 @@
           <p:cNvPr id="73" name="">
             <a:extLst xmlns:a="http://schemas.openxmlformats.org/drawingml/2006/main">
               <a:ext uri="{FF2B5EF4-FFF2-40B4-BE49-F238E27FC236}">
-                <a16:creationId xmlns:a16="http://schemas.microsoft.com/office/drawing/2014/main" id="{10565928-9691-4075-B334-0F3B3E7B9CEC}"/>
+                <a16:creationId xmlns:a16="http://schemas.microsoft.com/office/drawing/2014/main" id="{4756EC99-7474-45B2-914B-EF89EBC3B4DC}"/>
               </a:ext>
             </a:extLst>
           </p:cNvPr>
@@ -11300,7 +11300,7 @@
           <p:cNvPr id="74" name="">
             <a:extLst xmlns:a="http://schemas.openxmlformats.org/drawingml/2006/main">
               <a:ext uri="{FF2B5EF4-FFF2-40B4-BE49-F238E27FC236}">
-                <a16:creationId xmlns:a16="http://schemas.microsoft.com/office/drawing/2014/main" id="{9E04F283-8A2A-4DE5-A04A-9ED341C23908}"/>
+                <a16:creationId xmlns:a16="http://schemas.microsoft.com/office/drawing/2014/main" id="{DD557823-6679-469B-81BB-009FFEED0EC7}"/>
               </a:ext>
             </a:extLst>
           </p:cNvPr>
@@ -11352,7 +11352,7 @@
           <p:cNvPr id="75" name="">
             <a:extLst xmlns:a="http://schemas.openxmlformats.org/drawingml/2006/main">
               <a:ext uri="{FF2B5EF4-FFF2-40B4-BE49-F238E27FC236}">
-                <a16:creationId xmlns:a16="http://schemas.microsoft.com/office/drawing/2014/main" id="{2F656576-7EB4-4301-9515-841E98600370}"/>
+                <a16:creationId xmlns:a16="http://schemas.microsoft.com/office/drawing/2014/main" id="{DB66C900-2C1B-4791-B2CF-4FA8E51ED2D2}"/>
               </a:ext>
             </a:extLst>
           </p:cNvPr>
@@ -11404,7 +11404,7 @@
           <p:cNvPr id="76" name="">
             <a:extLst xmlns:a="http://schemas.openxmlformats.org/drawingml/2006/main">
               <a:ext uri="{FF2B5EF4-FFF2-40B4-BE49-F238E27FC236}">
-                <a16:creationId xmlns:a16="http://schemas.microsoft.com/office/drawing/2014/main" id="{735278D4-742F-4197-904A-7074DB746842}"/>
+                <a16:creationId xmlns:a16="http://schemas.microsoft.com/office/drawing/2014/main" id="{2D897218-4799-4FB3-89F6-71412544610E}"/>
               </a:ext>
             </a:extLst>
           </p:cNvPr>
@@ -11456,7 +11456,7 @@
           <p:cNvPr id="77" name="">
             <a:extLst xmlns:a="http://schemas.openxmlformats.org/drawingml/2006/main">
               <a:ext uri="{FF2B5EF4-FFF2-40B4-BE49-F238E27FC236}">
-                <a16:creationId xmlns:a16="http://schemas.microsoft.com/office/drawing/2014/main" id="{838089EC-C8D2-4F70-9AAF-4CA0C5B8DD61}"/>
+                <a16:creationId xmlns:a16="http://schemas.microsoft.com/office/drawing/2014/main" id="{D39DA160-B693-4C13-8F94-E1EBBA6AFEE4}"/>
               </a:ext>
             </a:extLst>
           </p:cNvPr>
@@ -11508,7 +11508,7 @@
           <p:cNvPr id="78" name="">
             <a:extLst xmlns:a="http://schemas.openxmlformats.org/drawingml/2006/main">
               <a:ext uri="{FF2B5EF4-FFF2-40B4-BE49-F238E27FC236}">
-                <a16:creationId xmlns:a16="http://schemas.microsoft.com/office/drawing/2014/main" id="{C0711770-AB1F-4193-BA68-B030A603AA44}"/>
+                <a16:creationId xmlns:a16="http://schemas.microsoft.com/office/drawing/2014/main" id="{2E7170B2-A91B-4BAD-B271-092A7F42CB4E}"/>
               </a:ext>
             </a:extLst>
           </p:cNvPr>
@@ -11539,7 +11539,7 @@
           <p:cNvPr id="79" name="">
             <a:extLst xmlns:a="http://schemas.openxmlformats.org/drawingml/2006/main">
               <a:ext uri="{FF2B5EF4-FFF2-40B4-BE49-F238E27FC236}">
-                <a16:creationId xmlns:a16="http://schemas.microsoft.com/office/drawing/2014/main" id="{143506EC-876A-4C71-B475-9F54340DE4B7}"/>
+                <a16:creationId xmlns:a16="http://schemas.microsoft.com/office/drawing/2014/main" id="{1A063E5B-0620-430A-BFCB-20B3CF81E051}"/>
               </a:ext>
             </a:extLst>
           </p:cNvPr>
@@ -11570,7 +11570,7 @@
           <p:cNvPr id="80" name="">
             <a:extLst xmlns:a="http://schemas.openxmlformats.org/drawingml/2006/main">
               <a:ext uri="{FF2B5EF4-FFF2-40B4-BE49-F238E27FC236}">
-                <a16:creationId xmlns:a16="http://schemas.microsoft.com/office/drawing/2014/main" id="{24ADD86C-55E7-4D5F-8991-A62A84E367E5}"/>
+                <a16:creationId xmlns:a16="http://schemas.microsoft.com/office/drawing/2014/main" id="{13C9A41B-A339-466C-AA0E-1ABD9DF51A82}"/>
               </a:ext>
             </a:extLst>
           </p:cNvPr>
@@ -11622,7 +11622,7 @@
           <p:cNvPr id="81" name="">
             <a:extLst xmlns:a="http://schemas.openxmlformats.org/drawingml/2006/main">
               <a:ext uri="{FF2B5EF4-FFF2-40B4-BE49-F238E27FC236}">
-                <a16:creationId xmlns:a16="http://schemas.microsoft.com/office/drawing/2014/main" id="{9FEA1A56-F231-42A7-8878-DF0F5FC7C36F}"/>
+                <a16:creationId xmlns:a16="http://schemas.microsoft.com/office/drawing/2014/main" id="{38258ED8-D451-47FC-9ED0-14F3C3F46F79}"/>
               </a:ext>
             </a:extLst>
           </p:cNvPr>
@@ -11674,7 +11674,7 @@
           <p:cNvPr id="82" name="">
             <a:extLst xmlns:a="http://schemas.openxmlformats.org/drawingml/2006/main">
               <a:ext uri="{FF2B5EF4-FFF2-40B4-BE49-F238E27FC236}">
-                <a16:creationId xmlns:a16="http://schemas.microsoft.com/office/drawing/2014/main" id="{CE60EBE6-FBDA-4177-B589-346C018D0CD6}"/>
+                <a16:creationId xmlns:a16="http://schemas.microsoft.com/office/drawing/2014/main" id="{ED622B4A-A97F-4E18-B2B4-F315D4BA42E6}"/>
               </a:ext>
             </a:extLst>
           </p:cNvPr>
@@ -11726,7 +11726,7 @@
           <p:cNvPr id="83" name="">
             <a:extLst xmlns:a="http://schemas.openxmlformats.org/drawingml/2006/main">
               <a:ext uri="{FF2B5EF4-FFF2-40B4-BE49-F238E27FC236}">
-                <a16:creationId xmlns:a16="http://schemas.microsoft.com/office/drawing/2014/main" id="{DF7127BC-33B9-4260-A301-74B1D0E29C23}"/>
+                <a16:creationId xmlns:a16="http://schemas.microsoft.com/office/drawing/2014/main" id="{82499FA8-57A4-4083-996B-B7D3DA1DE30F}"/>
               </a:ext>
             </a:extLst>
           </p:cNvPr>
@@ -11778,7 +11778,7 @@
           <p:cNvPr id="84" name="">
             <a:extLst xmlns:a="http://schemas.openxmlformats.org/drawingml/2006/main">
               <a:ext uri="{FF2B5EF4-FFF2-40B4-BE49-F238E27FC236}">
-                <a16:creationId xmlns:a16="http://schemas.microsoft.com/office/drawing/2014/main" id="{B5AC8A9B-1C86-464C-AB24-609D41C44BA3}"/>
+                <a16:creationId xmlns:a16="http://schemas.microsoft.com/office/drawing/2014/main" id="{25B44B64-CF03-4453-809F-E364D78BA7CC}"/>
               </a:ext>
             </a:extLst>
           </p:cNvPr>
@@ -11830,7 +11830,7 @@
           <p:cNvPr id="85" name="">
             <a:extLst xmlns:a="http://schemas.openxmlformats.org/drawingml/2006/main">
               <a:ext uri="{FF2B5EF4-FFF2-40B4-BE49-F238E27FC236}">
-                <a16:creationId xmlns:a16="http://schemas.microsoft.com/office/drawing/2014/main" id="{EE38066B-98FA-4D26-AD09-1DE305F4F54B}"/>
+                <a16:creationId xmlns:a16="http://schemas.microsoft.com/office/drawing/2014/main" id="{575C0114-C457-4C3D-A5B7-B3256609F531}"/>
               </a:ext>
             </a:extLst>
           </p:cNvPr>
@@ -11861,7 +11861,7 @@
           <p:cNvPr id="86" name="">
             <a:extLst xmlns:a="http://schemas.openxmlformats.org/drawingml/2006/main">
               <a:ext uri="{FF2B5EF4-FFF2-40B4-BE49-F238E27FC236}">
-                <a16:creationId xmlns:a16="http://schemas.microsoft.com/office/drawing/2014/main" id="{2AE72343-BFAC-40C8-A7F2-D0A5D5603299}"/>
+                <a16:creationId xmlns:a16="http://schemas.microsoft.com/office/drawing/2014/main" id="{1BFB1792-D845-4044-ACA1-F57F069D07B2}"/>
               </a:ext>
             </a:extLst>
           </p:cNvPr>
@@ -11913,7 +11913,7 @@
           <p:cNvPr id="87" name="">
             <a:extLst xmlns:a="http://schemas.openxmlformats.org/drawingml/2006/main">
               <a:ext uri="{FF2B5EF4-FFF2-40B4-BE49-F238E27FC236}">
-                <a16:creationId xmlns:a16="http://schemas.microsoft.com/office/drawing/2014/main" id="{A8F3353B-350C-4192-8488-B822743CBB10}"/>
+                <a16:creationId xmlns:a16="http://schemas.microsoft.com/office/drawing/2014/main" id="{408EDDF7-E672-491D-B0AD-5247D33FE3EF}"/>
               </a:ext>
             </a:extLst>
           </p:cNvPr>
@@ -11965,7 +11965,7 @@
           <p:cNvPr id="88" name="">
             <a:extLst xmlns:a="http://schemas.openxmlformats.org/drawingml/2006/main">
               <a:ext uri="{FF2B5EF4-FFF2-40B4-BE49-F238E27FC236}">
-                <a16:creationId xmlns:a16="http://schemas.microsoft.com/office/drawing/2014/main" id="{0C5F3359-544E-4F38-AC72-AD452348331A}"/>
+                <a16:creationId xmlns:a16="http://schemas.microsoft.com/office/drawing/2014/main" id="{1EF08F9E-F063-413D-93F6-5C9096DBDCD7}"/>
               </a:ext>
             </a:extLst>
           </p:cNvPr>
@@ -12017,7 +12017,7 @@
           <p:cNvPr id="89" name="">
             <a:extLst xmlns:a="http://schemas.openxmlformats.org/drawingml/2006/main">
               <a:ext uri="{FF2B5EF4-FFF2-40B4-BE49-F238E27FC236}">
-                <a16:creationId xmlns:a16="http://schemas.microsoft.com/office/drawing/2014/main" id="{FFF32888-78BE-41CA-8311-9CC752E89BCB}"/>
+                <a16:creationId xmlns:a16="http://schemas.microsoft.com/office/drawing/2014/main" id="{F392ABA1-09D9-461D-BB95-880648959AAB}"/>
               </a:ext>
             </a:extLst>
           </p:cNvPr>
@@ -12069,7 +12069,7 @@
           <p:cNvPr id="90" name="">
             <a:extLst xmlns:a="http://schemas.openxmlformats.org/drawingml/2006/main">
               <a:ext uri="{FF2B5EF4-FFF2-40B4-BE49-F238E27FC236}">
-                <a16:creationId xmlns:a16="http://schemas.microsoft.com/office/drawing/2014/main" id="{CA003B63-02A0-425E-B302-A9765E38665F}"/>
+                <a16:creationId xmlns:a16="http://schemas.microsoft.com/office/drawing/2014/main" id="{48268B3F-875D-403C-B944-876916388074}"/>
               </a:ext>
             </a:extLst>
           </p:cNvPr>
@@ -12121,7 +12121,7 @@
           <p:cNvPr id="91" name="">
             <a:extLst xmlns:a="http://schemas.openxmlformats.org/drawingml/2006/main">
               <a:ext uri="{FF2B5EF4-FFF2-40B4-BE49-F238E27FC236}">
-                <a16:creationId xmlns:a16="http://schemas.microsoft.com/office/drawing/2014/main" id="{9D5F67E5-7B12-494F-96EB-2D90BC7A42DF}"/>
+                <a16:creationId xmlns:a16="http://schemas.microsoft.com/office/drawing/2014/main" id="{B236F333-8262-4BCD-A046-E18FCC92F897}"/>
               </a:ext>
             </a:extLst>
           </p:cNvPr>
@@ -12152,7 +12152,7 @@
           <p:cNvPr id="92" name="">
             <a:extLst xmlns:a="http://schemas.openxmlformats.org/drawingml/2006/main">
               <a:ext uri="{FF2B5EF4-FFF2-40B4-BE49-F238E27FC236}">
-                <a16:creationId xmlns:a16="http://schemas.microsoft.com/office/drawing/2014/main" id="{205BB6A9-998D-4C53-9D8C-225A295D81DB}"/>
+                <a16:creationId xmlns:a16="http://schemas.microsoft.com/office/drawing/2014/main" id="{6CDD7EA8-94EA-478C-A242-A88AAD2B1424}"/>
               </a:ext>
             </a:extLst>
           </p:cNvPr>
@@ -12183,7 +12183,7 @@
           <p:cNvPr id="93" name="">
             <a:extLst xmlns:a="http://schemas.openxmlformats.org/drawingml/2006/main">
               <a:ext uri="{FF2B5EF4-FFF2-40B4-BE49-F238E27FC236}">
-                <a16:creationId xmlns:a16="http://schemas.microsoft.com/office/drawing/2014/main" id="{5C803D48-DBB9-4080-8292-DE3A485453B7}"/>
+                <a16:creationId xmlns:a16="http://schemas.microsoft.com/office/drawing/2014/main" id="{E15D8567-E402-4D90-BB29-BFA4A33F5B50}"/>
               </a:ext>
             </a:extLst>
           </p:cNvPr>
@@ -12235,7 +12235,7 @@
           <p:cNvPr id="94" name="">
             <a:extLst xmlns:a="http://schemas.openxmlformats.org/drawingml/2006/main">
               <a:ext uri="{FF2B5EF4-FFF2-40B4-BE49-F238E27FC236}">
-                <a16:creationId xmlns:a16="http://schemas.microsoft.com/office/drawing/2014/main" id="{C11F0846-AABD-4C0B-A5B6-3A719DEE09EC}"/>
+                <a16:creationId xmlns:a16="http://schemas.microsoft.com/office/drawing/2014/main" id="{6628A570-2D7C-478B-B6A3-1B0C833739C6}"/>
               </a:ext>
             </a:extLst>
           </p:cNvPr>
@@ -12287,7 +12287,7 @@
           <p:cNvPr id="95" name="">
             <a:extLst xmlns:a="http://schemas.openxmlformats.org/drawingml/2006/main">
               <a:ext uri="{FF2B5EF4-FFF2-40B4-BE49-F238E27FC236}">
-                <a16:creationId xmlns:a16="http://schemas.microsoft.com/office/drawing/2014/main" id="{19855493-E461-469C-9169-CF4095F5432A}"/>
+                <a16:creationId xmlns:a16="http://schemas.microsoft.com/office/drawing/2014/main" id="{2F35A85F-149C-408B-8E50-2DFE19040AC7}"/>
               </a:ext>
             </a:extLst>
           </p:cNvPr>
@@ -12339,7 +12339,7 @@
           <p:cNvPr id="96" name="">
             <a:extLst xmlns:a="http://schemas.openxmlformats.org/drawingml/2006/main">
               <a:ext uri="{FF2B5EF4-FFF2-40B4-BE49-F238E27FC236}">
-                <a16:creationId xmlns:a16="http://schemas.microsoft.com/office/drawing/2014/main" id="{EFE611D7-05CE-485E-86E8-CBADF124BED3}"/>
+                <a16:creationId xmlns:a16="http://schemas.microsoft.com/office/drawing/2014/main" id="{E4B2DE4E-7B32-40E3-B733-48FCE51F4973}"/>
               </a:ext>
             </a:extLst>
           </p:cNvPr>
@@ -12391,7 +12391,7 @@
           <p:cNvPr id="97" name="">
             <a:extLst xmlns:a="http://schemas.openxmlformats.org/drawingml/2006/main">
               <a:ext uri="{FF2B5EF4-FFF2-40B4-BE49-F238E27FC236}">
-                <a16:creationId xmlns:a16="http://schemas.microsoft.com/office/drawing/2014/main" id="{1E3B7BD7-3478-47DB-9893-4C832A6DBDE2}"/>
+                <a16:creationId xmlns:a16="http://schemas.microsoft.com/office/drawing/2014/main" id="{9EED614C-5A8A-4671-8540-2083ED059078}"/>
               </a:ext>
             </a:extLst>
           </p:cNvPr>
@@ -12441,7 +12441,7 @@
     </p:spTree>
     <p:extLst>
       <p:ext uri="{BB962C8B-B14F-4D97-AF65-F5344CB8AC3E}">
-        <p14:creationId xmlns:p14="http://schemas.microsoft.com/office/powerpoint/2010/main" val="1101021096"/>
+        <p14:creationId xmlns:p14="http://schemas.microsoft.com/office/powerpoint/2010/main" val="1433392803"/>
       </p:ext>
     </p:extLst>
   </p:cSld>
@@ -12472,7 +12472,7 @@
           <p:cNvPr id="102" name="">
             <a:extLst xmlns:a="http://schemas.openxmlformats.org/drawingml/2006/main">
               <a:ext uri="{FF2B5EF4-FFF2-40B4-BE49-F238E27FC236}">
-                <a16:creationId xmlns:a16="http://schemas.microsoft.com/office/drawing/2014/main" id="{098A5848-DACB-4269-9147-E9346FFBE8E6}"/>
+                <a16:creationId xmlns:a16="http://schemas.microsoft.com/office/drawing/2014/main" id="{1864E64B-D8EE-4526-8366-A1E7F4344F94}"/>
               </a:ext>
             </a:extLst>
           </p:cNvPr>
@@ -12505,7 +12505,7 @@
           <p:cNvPr id="2" name="">
             <a:extLst xmlns:a="http://schemas.openxmlformats.org/drawingml/2006/main">
               <a:ext uri="{FF2B5EF4-FFF2-40B4-BE49-F238E27FC236}">
-                <a16:creationId xmlns:a16="http://schemas.microsoft.com/office/drawing/2014/main" id="{B1A58EEA-F5E5-43E7-A14C-560D0E214A5D}"/>
+                <a16:creationId xmlns:a16="http://schemas.microsoft.com/office/drawing/2014/main" id="{B7BD77D6-2F09-4BE5-B9F2-122CFF1E4120}"/>
               </a:ext>
             </a:extLst>
           </p:cNvPr>
@@ -12536,7 +12536,7 @@
           <p:cNvPr id="3" name="">
             <a:extLst xmlns:a="http://schemas.openxmlformats.org/drawingml/2006/main">
               <a:ext uri="{FF2B5EF4-FFF2-40B4-BE49-F238E27FC236}">
-                <a16:creationId xmlns:a16="http://schemas.microsoft.com/office/drawing/2014/main" id="{C8EAACBD-E232-4CCA-8FF2-E44DB458BAB9}"/>
+                <a16:creationId xmlns:a16="http://schemas.microsoft.com/office/drawing/2014/main" id="{B5F96CCD-1EC2-4B4B-A8A1-FB8AC561AEAD}"/>
               </a:ext>
             </a:extLst>
           </p:cNvPr>
@@ -12588,7 +12588,7 @@
           <p:cNvPr id="4" name="">
             <a:extLst xmlns:a="http://schemas.openxmlformats.org/drawingml/2006/main">
               <a:ext uri="{FF2B5EF4-FFF2-40B4-BE49-F238E27FC236}">
-                <a16:creationId xmlns:a16="http://schemas.microsoft.com/office/drawing/2014/main" id="{26DD310F-4703-4DB9-B592-BE1735952DBD}"/>
+                <a16:creationId xmlns:a16="http://schemas.microsoft.com/office/drawing/2014/main" id="{8EF55AA2-F88C-4EAE-8CE7-D9F2C29D2D46}"/>
               </a:ext>
             </a:extLst>
           </p:cNvPr>
@@ -12640,7 +12640,7 @@
           <p:cNvPr id="5" name="">
             <a:extLst xmlns:a="http://schemas.openxmlformats.org/drawingml/2006/main">
               <a:ext uri="{FF2B5EF4-FFF2-40B4-BE49-F238E27FC236}">
-                <a16:creationId xmlns:a16="http://schemas.microsoft.com/office/drawing/2014/main" id="{558981B0-3CAF-42BE-974F-B8A02E504B96}"/>
+                <a16:creationId xmlns:a16="http://schemas.microsoft.com/office/drawing/2014/main" id="{8EDCA971-553A-406C-ABE1-E173624ED6DF}"/>
               </a:ext>
             </a:extLst>
           </p:cNvPr>
@@ -12675,7 +12675,7 @@
           <p:nvPr/>
         </p:nvPicPr>
         <p:blipFill>
-          <a:blip xmlns:r="http://schemas.openxmlformats.org/officeDocument/2006/relationships" xmlns:a="http://schemas.openxmlformats.org/drawingml/2006/main" r:embed="R9b77f6453bd74029"/>
+          <a:blip xmlns:r="http://schemas.openxmlformats.org/officeDocument/2006/relationships" xmlns:a="http://schemas.openxmlformats.org/drawingml/2006/main" r:embed="R82f133836349442a"/>
           <a:stretch xmlns:a="http://schemas.openxmlformats.org/drawingml/2006/main"/>
         </p:blipFill>
         <p:spPr>
@@ -12693,7 +12693,7 @@
           <p:cNvPr id="7" name="">
             <a:extLst xmlns:a="http://schemas.openxmlformats.org/drawingml/2006/main">
               <a:ext uri="{FF2B5EF4-FFF2-40B4-BE49-F238E27FC236}">
-                <a16:creationId xmlns:a16="http://schemas.microsoft.com/office/drawing/2014/main" id="{4BB13917-06F9-446C-93A9-5773B354FB61}"/>
+                <a16:creationId xmlns:a16="http://schemas.microsoft.com/office/drawing/2014/main" id="{13524E57-9DAA-43F2-9B9A-4D251777AE45}"/>
               </a:ext>
             </a:extLst>
           </p:cNvPr>
@@ -12745,7 +12745,7 @@
           <p:cNvPr id="8" name="">
             <a:extLst xmlns:a="http://schemas.openxmlformats.org/drawingml/2006/main">
               <a:ext uri="{FF2B5EF4-FFF2-40B4-BE49-F238E27FC236}">
-                <a16:creationId xmlns:a16="http://schemas.microsoft.com/office/drawing/2014/main" id="{01632D6D-CF3C-45B5-8001-C541256B62C2}"/>
+                <a16:creationId xmlns:a16="http://schemas.microsoft.com/office/drawing/2014/main" id="{0A47FF05-580F-4510-8D30-50EDF2C52FA9}"/>
               </a:ext>
             </a:extLst>
           </p:cNvPr>
@@ -12797,7 +12797,7 @@
           <p:cNvPr id="9" name="">
             <a:extLst xmlns:a="http://schemas.openxmlformats.org/drawingml/2006/main">
               <a:ext uri="{FF2B5EF4-FFF2-40B4-BE49-F238E27FC236}">
-                <a16:creationId xmlns:a16="http://schemas.microsoft.com/office/drawing/2014/main" id="{5E9E10B4-8CF0-41A2-AE7B-F86284FCD5AD}"/>
+                <a16:creationId xmlns:a16="http://schemas.microsoft.com/office/drawing/2014/main" id="{1F728CD7-8206-409C-93B2-769F7DF674F6}"/>
               </a:ext>
             </a:extLst>
           </p:cNvPr>
@@ -12849,7 +12849,7 @@
           <p:cNvPr id="10" name="">
             <a:extLst xmlns:a="http://schemas.openxmlformats.org/drawingml/2006/main">
               <a:ext uri="{FF2B5EF4-FFF2-40B4-BE49-F238E27FC236}">
-                <a16:creationId xmlns:a16="http://schemas.microsoft.com/office/drawing/2014/main" id="{9AB8A62D-AC08-4EC3-B5BB-38349ABC205A}"/>
+                <a16:creationId xmlns:a16="http://schemas.microsoft.com/office/drawing/2014/main" id="{8832CFB9-A252-45C8-BF2D-ECFFD1D81E0D}"/>
               </a:ext>
             </a:extLst>
           </p:cNvPr>
@@ -12901,7 +12901,7 @@
           <p:cNvPr id="11" name="">
             <a:extLst xmlns:a="http://schemas.openxmlformats.org/drawingml/2006/main">
               <a:ext uri="{FF2B5EF4-FFF2-40B4-BE49-F238E27FC236}">
-                <a16:creationId xmlns:a16="http://schemas.microsoft.com/office/drawing/2014/main" id="{6831CE22-3C75-4E7B-AE7B-321979CEBB55}"/>
+                <a16:creationId xmlns:a16="http://schemas.microsoft.com/office/drawing/2014/main" id="{0E703318-CCFC-4899-A097-699A84E7E0B5}"/>
               </a:ext>
             </a:extLst>
           </p:cNvPr>
@@ -12932,7 +12932,7 @@
           <p:cNvPr id="12" name="">
             <a:extLst xmlns:a="http://schemas.openxmlformats.org/drawingml/2006/main">
               <a:ext uri="{FF2B5EF4-FFF2-40B4-BE49-F238E27FC236}">
-                <a16:creationId xmlns:a16="http://schemas.microsoft.com/office/drawing/2014/main" id="{5AB707D9-D433-44BD-A760-0B0305B25CCD}"/>
+                <a16:creationId xmlns:a16="http://schemas.microsoft.com/office/drawing/2014/main" id="{B940DBF2-25B7-4D13-A4EA-130D6356AB0B}"/>
               </a:ext>
             </a:extLst>
           </p:cNvPr>
@@ -12963,7 +12963,7 @@
           <p:cNvPr id="13" name="">
             <a:extLst xmlns:a="http://schemas.openxmlformats.org/drawingml/2006/main">
               <a:ext uri="{FF2B5EF4-FFF2-40B4-BE49-F238E27FC236}">
-                <a16:creationId xmlns:a16="http://schemas.microsoft.com/office/drawing/2014/main" id="{67A220A2-E3B9-4447-B39A-5D85B1035B56}"/>
+                <a16:creationId xmlns:a16="http://schemas.microsoft.com/office/drawing/2014/main" id="{F09A6B98-C1E2-491F-9CA0-31BD4263C069}"/>
               </a:ext>
             </a:extLst>
           </p:cNvPr>
@@ -13015,7 +13015,7 @@
           <p:cNvPr id="14" name="">
             <a:extLst xmlns:a="http://schemas.openxmlformats.org/drawingml/2006/main">
               <a:ext uri="{FF2B5EF4-FFF2-40B4-BE49-F238E27FC236}">
-                <a16:creationId xmlns:a16="http://schemas.microsoft.com/office/drawing/2014/main" id="{AA323D9B-A4B1-4B7D-A386-84F72604F1F0}"/>
+                <a16:creationId xmlns:a16="http://schemas.microsoft.com/office/drawing/2014/main" id="{BE027893-CA7F-424E-9FFD-5CE6C686645C}"/>
               </a:ext>
             </a:extLst>
           </p:cNvPr>
@@ -13067,7 +13067,7 @@
           <p:cNvPr id="15" name="">
             <a:extLst xmlns:a="http://schemas.openxmlformats.org/drawingml/2006/main">
               <a:ext uri="{FF2B5EF4-FFF2-40B4-BE49-F238E27FC236}">
-                <a16:creationId xmlns:a16="http://schemas.microsoft.com/office/drawing/2014/main" id="{D8277868-636C-4FF6-BD09-8B8C77017DA7}"/>
+                <a16:creationId xmlns:a16="http://schemas.microsoft.com/office/drawing/2014/main" id="{34DECEDD-6D07-4C33-B4C8-87EB653FA9FA}"/>
               </a:ext>
             </a:extLst>
           </p:cNvPr>
@@ -13119,7 +13119,7 @@
           <p:cNvPr id="16" name="">
             <a:extLst xmlns:a="http://schemas.openxmlformats.org/drawingml/2006/main">
               <a:ext uri="{FF2B5EF4-FFF2-40B4-BE49-F238E27FC236}">
-                <a16:creationId xmlns:a16="http://schemas.microsoft.com/office/drawing/2014/main" id="{BF8E50EF-0632-43B2-B816-F6A40D1F29C5}"/>
+                <a16:creationId xmlns:a16="http://schemas.microsoft.com/office/drawing/2014/main" id="{9C6E26D9-C2F3-4978-A177-95A7E6DAAA2A}"/>
               </a:ext>
             </a:extLst>
           </p:cNvPr>
@@ -13171,7 +13171,7 @@
           <p:cNvPr id="17" name="">
             <a:extLst xmlns:a="http://schemas.openxmlformats.org/drawingml/2006/main">
               <a:ext uri="{FF2B5EF4-FFF2-40B4-BE49-F238E27FC236}">
-                <a16:creationId xmlns:a16="http://schemas.microsoft.com/office/drawing/2014/main" id="{7EFEAA24-110A-4A2D-80F5-A433742A800E}"/>
+                <a16:creationId xmlns:a16="http://schemas.microsoft.com/office/drawing/2014/main" id="{6EFB265B-C473-4D72-AC22-C3BA6497913C}"/>
               </a:ext>
             </a:extLst>
           </p:cNvPr>
@@ -13223,7 +13223,7 @@
           <p:cNvPr id="18" name="">
             <a:extLst xmlns:a="http://schemas.openxmlformats.org/drawingml/2006/main">
               <a:ext uri="{FF2B5EF4-FFF2-40B4-BE49-F238E27FC236}">
-                <a16:creationId xmlns:a16="http://schemas.microsoft.com/office/drawing/2014/main" id="{A7EF15EA-BE53-448D-BEB6-347EE41FD895}"/>
+                <a16:creationId xmlns:a16="http://schemas.microsoft.com/office/drawing/2014/main" id="{A49EC096-07E8-4C81-BBDA-6A3DCC8F2F4D}"/>
               </a:ext>
             </a:extLst>
           </p:cNvPr>
@@ -13254,7 +13254,7 @@
           <p:cNvPr id="19" name="">
             <a:extLst xmlns:a="http://schemas.openxmlformats.org/drawingml/2006/main">
               <a:ext uri="{FF2B5EF4-FFF2-40B4-BE49-F238E27FC236}">
-                <a16:creationId xmlns:a16="http://schemas.microsoft.com/office/drawing/2014/main" id="{AFBE5D51-D11C-4D6D-B4CC-5CAD3B5201B1}"/>
+                <a16:creationId xmlns:a16="http://schemas.microsoft.com/office/drawing/2014/main" id="{AF95D06A-1889-4830-A703-D19D260A525E}"/>
               </a:ext>
             </a:extLst>
           </p:cNvPr>
@@ -13306,7 +13306,7 @@
           <p:cNvPr id="20" name="">
             <a:extLst xmlns:a="http://schemas.openxmlformats.org/drawingml/2006/main">
               <a:ext uri="{FF2B5EF4-FFF2-40B4-BE49-F238E27FC236}">
-                <a16:creationId xmlns:a16="http://schemas.microsoft.com/office/drawing/2014/main" id="{AF81D844-19A5-46B7-AC9B-D88366E8FE0D}"/>
+                <a16:creationId xmlns:a16="http://schemas.microsoft.com/office/drawing/2014/main" id="{35D3F8C4-1052-4162-91EB-2D8D7E1259DB}"/>
               </a:ext>
             </a:extLst>
           </p:cNvPr>
@@ -13358,7 +13358,7 @@
           <p:cNvPr id="21" name="">
             <a:extLst xmlns:a="http://schemas.openxmlformats.org/drawingml/2006/main">
               <a:ext uri="{FF2B5EF4-FFF2-40B4-BE49-F238E27FC236}">
-                <a16:creationId xmlns:a16="http://schemas.microsoft.com/office/drawing/2014/main" id="{A6577BD9-CC53-4BAC-A46D-AC2DFDA7788C}"/>
+                <a16:creationId xmlns:a16="http://schemas.microsoft.com/office/drawing/2014/main" id="{E0C981CF-7266-4C17-A3EB-1890875E2752}"/>
               </a:ext>
             </a:extLst>
           </p:cNvPr>
@@ -13410,7 +13410,7 @@
           <p:cNvPr id="22" name="">
             <a:extLst xmlns:a="http://schemas.openxmlformats.org/drawingml/2006/main">
               <a:ext uri="{FF2B5EF4-FFF2-40B4-BE49-F238E27FC236}">
-                <a16:creationId xmlns:a16="http://schemas.microsoft.com/office/drawing/2014/main" id="{793A532D-3B66-4C7C-B342-A67F7B1B60A7}"/>
+                <a16:creationId xmlns:a16="http://schemas.microsoft.com/office/drawing/2014/main" id="{BEFD76EB-86E4-4C4D-8CB8-C1BE8A633D9A}"/>
               </a:ext>
             </a:extLst>
           </p:cNvPr>
@@ -13462,7 +13462,7 @@
           <p:cNvPr id="23" name="">
             <a:extLst xmlns:a="http://schemas.openxmlformats.org/drawingml/2006/main">
               <a:ext uri="{FF2B5EF4-FFF2-40B4-BE49-F238E27FC236}">
-                <a16:creationId xmlns:a16="http://schemas.microsoft.com/office/drawing/2014/main" id="{F94F4F4B-DBB4-452E-A577-FB9867D095BC}"/>
+                <a16:creationId xmlns:a16="http://schemas.microsoft.com/office/drawing/2014/main" id="{01308973-BF7E-46EE-AA6C-29738BD43C5E}"/>
               </a:ext>
             </a:extLst>
           </p:cNvPr>
@@ -13514,7 +13514,7 @@
           <p:cNvPr id="24" name="">
             <a:extLst xmlns:a="http://schemas.openxmlformats.org/drawingml/2006/main">
               <a:ext uri="{FF2B5EF4-FFF2-40B4-BE49-F238E27FC236}">
-                <a16:creationId xmlns:a16="http://schemas.microsoft.com/office/drawing/2014/main" id="{E79BD5C6-664F-49CA-AB51-C403F75480F9}"/>
+                <a16:creationId xmlns:a16="http://schemas.microsoft.com/office/drawing/2014/main" id="{AEBC818A-8ED8-4335-85E1-279DE6F482DB}"/>
               </a:ext>
             </a:extLst>
           </p:cNvPr>
@@ -13545,7 +13545,7 @@
           <p:cNvPr id="25" name="">
             <a:extLst xmlns:a="http://schemas.openxmlformats.org/drawingml/2006/main">
               <a:ext uri="{FF2B5EF4-FFF2-40B4-BE49-F238E27FC236}">
-                <a16:creationId xmlns:a16="http://schemas.microsoft.com/office/drawing/2014/main" id="{BFFB6895-25B3-42D9-8E80-8D74C9E90FD4}"/>
+                <a16:creationId xmlns:a16="http://schemas.microsoft.com/office/drawing/2014/main" id="{7CDE7681-C038-4B51-BA38-F3E911A5F4E4}"/>
               </a:ext>
             </a:extLst>
           </p:cNvPr>
@@ -13576,7 +13576,7 @@
           <p:cNvPr id="26" name="">
             <a:extLst xmlns:a="http://schemas.openxmlformats.org/drawingml/2006/main">
               <a:ext uri="{FF2B5EF4-FFF2-40B4-BE49-F238E27FC236}">
-                <a16:creationId xmlns:a16="http://schemas.microsoft.com/office/drawing/2014/main" id="{A64C9FC9-7D14-4C78-A5A5-CF649B12DC77}"/>
+                <a16:creationId xmlns:a16="http://schemas.microsoft.com/office/drawing/2014/main" id="{ACD5F76E-A599-4E5E-8ED1-690F1C51B609}"/>
               </a:ext>
             </a:extLst>
           </p:cNvPr>
@@ -13628,7 +13628,7 @@
           <p:cNvPr id="27" name="">
             <a:extLst xmlns:a="http://schemas.openxmlformats.org/drawingml/2006/main">
               <a:ext uri="{FF2B5EF4-FFF2-40B4-BE49-F238E27FC236}">
-                <a16:creationId xmlns:a16="http://schemas.microsoft.com/office/drawing/2014/main" id="{8682088E-F54C-4E39-B436-31C34412A587}"/>
+                <a16:creationId xmlns:a16="http://schemas.microsoft.com/office/drawing/2014/main" id="{ABA3F7CF-180D-40EC-AFAC-E4143D7326B0}"/>
               </a:ext>
             </a:extLst>
           </p:cNvPr>
@@ -13680,7 +13680,7 @@
           <p:cNvPr id="28" name="">
             <a:extLst xmlns:a="http://schemas.openxmlformats.org/drawingml/2006/main">
               <a:ext uri="{FF2B5EF4-FFF2-40B4-BE49-F238E27FC236}">
-                <a16:creationId xmlns:a16="http://schemas.microsoft.com/office/drawing/2014/main" id="{C900F48D-B965-45D8-A0B1-86DE01875AE6}"/>
+                <a16:creationId xmlns:a16="http://schemas.microsoft.com/office/drawing/2014/main" id="{7BDECC49-4088-407B-AA22-42DA5E898DD0}"/>
               </a:ext>
             </a:extLst>
           </p:cNvPr>
@@ -13732,7 +13732,7 @@
           <p:cNvPr id="29" name="">
             <a:extLst xmlns:a="http://schemas.openxmlformats.org/drawingml/2006/main">
               <a:ext uri="{FF2B5EF4-FFF2-40B4-BE49-F238E27FC236}">
-                <a16:creationId xmlns:a16="http://schemas.microsoft.com/office/drawing/2014/main" id="{CFE4823D-DCC5-468C-96E2-7A56AF6FFEBF}"/>
+                <a16:creationId xmlns:a16="http://schemas.microsoft.com/office/drawing/2014/main" id="{F39F151B-C0EF-497D-B29A-09CCB279831C}"/>
               </a:ext>
             </a:extLst>
           </p:cNvPr>
@@ -13784,7 +13784,7 @@
           <p:cNvPr id="30" name="">
             <a:extLst xmlns:a="http://schemas.openxmlformats.org/drawingml/2006/main">
               <a:ext uri="{FF2B5EF4-FFF2-40B4-BE49-F238E27FC236}">
-                <a16:creationId xmlns:a16="http://schemas.microsoft.com/office/drawing/2014/main" id="{6BC0F8D8-32D7-4A39-8D60-DF8953978172}"/>
+                <a16:creationId xmlns:a16="http://schemas.microsoft.com/office/drawing/2014/main" id="{4655ADC3-2162-40E2-8530-D7FE46D96177}"/>
               </a:ext>
             </a:extLst>
           </p:cNvPr>
@@ -13836,7 +13836,7 @@
           <p:cNvPr id="31" name="">
             <a:extLst xmlns:a="http://schemas.openxmlformats.org/drawingml/2006/main">
               <a:ext uri="{FF2B5EF4-FFF2-40B4-BE49-F238E27FC236}">
-                <a16:creationId xmlns:a16="http://schemas.microsoft.com/office/drawing/2014/main" id="{9E3BA61B-E4E0-4DC6-8413-AA6033B41C34}"/>
+                <a16:creationId xmlns:a16="http://schemas.microsoft.com/office/drawing/2014/main" id="{2338E8C4-637B-4485-8231-954836B82F42}"/>
               </a:ext>
             </a:extLst>
           </p:cNvPr>
@@ -13867,7 +13867,7 @@
           <p:cNvPr id="32" name="">
             <a:extLst xmlns:a="http://schemas.openxmlformats.org/drawingml/2006/main">
               <a:ext uri="{FF2B5EF4-FFF2-40B4-BE49-F238E27FC236}">
-                <a16:creationId xmlns:a16="http://schemas.microsoft.com/office/drawing/2014/main" id="{1DCF626E-78E8-4DC3-A9F5-13F9D3B10796}"/>
+                <a16:creationId xmlns:a16="http://schemas.microsoft.com/office/drawing/2014/main" id="{EAA321E0-AFC7-4003-9F94-4F8487C0CE5E}"/>
               </a:ext>
             </a:extLst>
           </p:cNvPr>
@@ -13919,7 +13919,7 @@
           <p:cNvPr id="33" name="">
             <a:extLst xmlns:a="http://schemas.openxmlformats.org/drawingml/2006/main">
               <a:ext uri="{FF2B5EF4-FFF2-40B4-BE49-F238E27FC236}">
-                <a16:creationId xmlns:a16="http://schemas.microsoft.com/office/drawing/2014/main" id="{67739C53-BD3C-48A7-AFD0-0DCC35B1BFDE}"/>
+                <a16:creationId xmlns:a16="http://schemas.microsoft.com/office/drawing/2014/main" id="{2310FAC2-67F5-461E-816C-C939BE6B7DE6}"/>
               </a:ext>
             </a:extLst>
           </p:cNvPr>
@@ -13971,7 +13971,7 @@
           <p:cNvPr id="34" name="">
             <a:extLst xmlns:a="http://schemas.openxmlformats.org/drawingml/2006/main">
               <a:ext uri="{FF2B5EF4-FFF2-40B4-BE49-F238E27FC236}">
-                <a16:creationId xmlns:a16="http://schemas.microsoft.com/office/drawing/2014/main" id="{489FFAC8-1A41-40E4-87F9-3092938406B5}"/>
+                <a16:creationId xmlns:a16="http://schemas.microsoft.com/office/drawing/2014/main" id="{6D26C3B6-FC7D-4494-BFD3-5B1D4F054A0E}"/>
               </a:ext>
             </a:extLst>
           </p:cNvPr>
@@ -14023,7 +14023,7 @@
           <p:cNvPr id="35" name="">
             <a:extLst xmlns:a="http://schemas.openxmlformats.org/drawingml/2006/main">
               <a:ext uri="{FF2B5EF4-FFF2-40B4-BE49-F238E27FC236}">
-                <a16:creationId xmlns:a16="http://schemas.microsoft.com/office/drawing/2014/main" id="{C270378D-03AE-40A8-B953-67A4DD797562}"/>
+                <a16:creationId xmlns:a16="http://schemas.microsoft.com/office/drawing/2014/main" id="{8E7C8945-FB2D-4F74-9E27-CA6D2A9543C9}"/>
               </a:ext>
             </a:extLst>
           </p:cNvPr>
@@ -14075,7 +14075,7 @@
           <p:cNvPr id="36" name="">
             <a:extLst xmlns:a="http://schemas.openxmlformats.org/drawingml/2006/main">
               <a:ext uri="{FF2B5EF4-FFF2-40B4-BE49-F238E27FC236}">
-                <a16:creationId xmlns:a16="http://schemas.microsoft.com/office/drawing/2014/main" id="{58E4ABF0-1234-4E63-82B5-194DFE519F43}"/>
+                <a16:creationId xmlns:a16="http://schemas.microsoft.com/office/drawing/2014/main" id="{BEAEA7DE-D533-41EC-9DC3-E7ADD2DA87D6}"/>
               </a:ext>
             </a:extLst>
           </p:cNvPr>
@@ -14127,7 +14127,7 @@
           <p:cNvPr id="37" name="">
             <a:extLst xmlns:a="http://schemas.openxmlformats.org/drawingml/2006/main">
               <a:ext uri="{FF2B5EF4-FFF2-40B4-BE49-F238E27FC236}">
-                <a16:creationId xmlns:a16="http://schemas.microsoft.com/office/drawing/2014/main" id="{3C99C9F3-68AD-44DD-9297-3F2DC55901E6}"/>
+                <a16:creationId xmlns:a16="http://schemas.microsoft.com/office/drawing/2014/main" id="{BB8B0C0E-C0F1-471A-8B95-BE6AB1DE1C17}"/>
               </a:ext>
             </a:extLst>
           </p:cNvPr>
@@ -14158,7 +14158,7 @@
           <p:cNvPr id="38" name="">
             <a:extLst xmlns:a="http://schemas.openxmlformats.org/drawingml/2006/main">
               <a:ext uri="{FF2B5EF4-FFF2-40B4-BE49-F238E27FC236}">
-                <a16:creationId xmlns:a16="http://schemas.microsoft.com/office/drawing/2014/main" id="{90DDD4E6-555F-4948-9A2D-A6C5FF41EAB8}"/>
+                <a16:creationId xmlns:a16="http://schemas.microsoft.com/office/drawing/2014/main" id="{022F0D6E-2D83-4F5D-B44C-1F5CEC494229}"/>
               </a:ext>
             </a:extLst>
           </p:cNvPr>
@@ -14189,7 +14189,7 @@
           <p:cNvPr id="39" name="">
             <a:extLst xmlns:a="http://schemas.openxmlformats.org/drawingml/2006/main">
               <a:ext uri="{FF2B5EF4-FFF2-40B4-BE49-F238E27FC236}">
-                <a16:creationId xmlns:a16="http://schemas.microsoft.com/office/drawing/2014/main" id="{19000852-4667-4D88-A8BD-9121610F1A1B}"/>
+                <a16:creationId xmlns:a16="http://schemas.microsoft.com/office/drawing/2014/main" id="{FD599E9F-2FBF-42A0-BE58-051E78A6AE98}"/>
               </a:ext>
             </a:extLst>
           </p:cNvPr>
@@ -14241,7 +14241,7 @@
           <p:cNvPr id="40" name="">
             <a:extLst xmlns:a="http://schemas.openxmlformats.org/drawingml/2006/main">
               <a:ext uri="{FF2B5EF4-FFF2-40B4-BE49-F238E27FC236}">
-                <a16:creationId xmlns:a16="http://schemas.microsoft.com/office/drawing/2014/main" id="{3E88AD9E-7DE9-4EA6-A44F-C2F03980CE3B}"/>
+                <a16:creationId xmlns:a16="http://schemas.microsoft.com/office/drawing/2014/main" id="{6A9FBA6F-9766-4E8F-B3E0-B4BB01A61B7F}"/>
               </a:ext>
             </a:extLst>
           </p:cNvPr>
@@ -14293,7 +14293,7 @@
           <p:cNvPr id="41" name="">
             <a:extLst xmlns:a="http://schemas.openxmlformats.org/drawingml/2006/main">
               <a:ext uri="{FF2B5EF4-FFF2-40B4-BE49-F238E27FC236}">
-                <a16:creationId xmlns:a16="http://schemas.microsoft.com/office/drawing/2014/main" id="{6C019B0F-5322-476F-A9AA-0EFC3F8D176E}"/>
+                <a16:creationId xmlns:a16="http://schemas.microsoft.com/office/drawing/2014/main" id="{1E06D66D-1E86-4FE4-93A6-58D236A583CB}"/>
               </a:ext>
             </a:extLst>
           </p:cNvPr>
@@ -14345,7 +14345,7 @@
           <p:cNvPr id="42" name="">
             <a:extLst xmlns:a="http://schemas.openxmlformats.org/drawingml/2006/main">
               <a:ext uri="{FF2B5EF4-FFF2-40B4-BE49-F238E27FC236}">
-                <a16:creationId xmlns:a16="http://schemas.microsoft.com/office/drawing/2014/main" id="{AA19A057-A9E3-4566-8E79-3BA483EBE3D9}"/>
+                <a16:creationId xmlns:a16="http://schemas.microsoft.com/office/drawing/2014/main" id="{FBA76188-FF24-4E89-B808-D9B901F86D27}"/>
               </a:ext>
             </a:extLst>
           </p:cNvPr>
@@ -14397,7 +14397,7 @@
           <p:cNvPr id="43" name="">
             <a:extLst xmlns:a="http://schemas.openxmlformats.org/drawingml/2006/main">
               <a:ext uri="{FF2B5EF4-FFF2-40B4-BE49-F238E27FC236}">
-                <a16:creationId xmlns:a16="http://schemas.microsoft.com/office/drawing/2014/main" id="{30DE2621-8C86-4181-B9CE-89F320B687C2}"/>
+                <a16:creationId xmlns:a16="http://schemas.microsoft.com/office/drawing/2014/main" id="{28AA0570-F6BD-488B-818B-915EA779386A}"/>
               </a:ext>
             </a:extLst>
           </p:cNvPr>
@@ -14449,7 +14449,7 @@
           <p:cNvPr id="44" name="">
             <a:extLst xmlns:a="http://schemas.openxmlformats.org/drawingml/2006/main">
               <a:ext uri="{FF2B5EF4-FFF2-40B4-BE49-F238E27FC236}">
-                <a16:creationId xmlns:a16="http://schemas.microsoft.com/office/drawing/2014/main" id="{4D8DF0E6-839F-449E-B339-0BFE50A95E4B}"/>
+                <a16:creationId xmlns:a16="http://schemas.microsoft.com/office/drawing/2014/main" id="{24C9ADB4-F89F-4ED1-AFD7-D188EF855A05}"/>
               </a:ext>
             </a:extLst>
           </p:cNvPr>
@@ -14480,7 +14480,7 @@
           <p:cNvPr id="45" name="">
             <a:extLst xmlns:a="http://schemas.openxmlformats.org/drawingml/2006/main">
               <a:ext uri="{FF2B5EF4-FFF2-40B4-BE49-F238E27FC236}">
-                <a16:creationId xmlns:a16="http://schemas.microsoft.com/office/drawing/2014/main" id="{ADA0D3FC-B543-4A6E-B399-158B42F02852}"/>
+                <a16:creationId xmlns:a16="http://schemas.microsoft.com/office/drawing/2014/main" id="{3FABE4F2-99A6-44D4-A640-BCAD94B935CA}"/>
               </a:ext>
             </a:extLst>
           </p:cNvPr>
@@ -14532,7 +14532,7 @@
           <p:cNvPr id="46" name="">
             <a:extLst xmlns:a="http://schemas.openxmlformats.org/drawingml/2006/main">
               <a:ext uri="{FF2B5EF4-FFF2-40B4-BE49-F238E27FC236}">
-                <a16:creationId xmlns:a16="http://schemas.microsoft.com/office/drawing/2014/main" id="{5008C8A0-25D6-4809-B4EA-0AE4AB2722A8}"/>
+                <a16:creationId xmlns:a16="http://schemas.microsoft.com/office/drawing/2014/main" id="{CF217779-4407-4113-8F8C-63140421192A}"/>
               </a:ext>
             </a:extLst>
           </p:cNvPr>
@@ -14584,7 +14584,7 @@
           <p:cNvPr id="47" name="">
             <a:extLst xmlns:a="http://schemas.openxmlformats.org/drawingml/2006/main">
               <a:ext uri="{FF2B5EF4-FFF2-40B4-BE49-F238E27FC236}">
-                <a16:creationId xmlns:a16="http://schemas.microsoft.com/office/drawing/2014/main" id="{EA6B7359-F8CB-495C-8520-74B2ED70FF7F}"/>
+                <a16:creationId xmlns:a16="http://schemas.microsoft.com/office/drawing/2014/main" id="{5B57BBB4-9520-4729-A6E0-2CD89110B267}"/>
               </a:ext>
             </a:extLst>
           </p:cNvPr>
@@ -14636,7 +14636,7 @@
           <p:cNvPr id="48" name="">
             <a:extLst xmlns:a="http://schemas.openxmlformats.org/drawingml/2006/main">
               <a:ext uri="{FF2B5EF4-FFF2-40B4-BE49-F238E27FC236}">
-                <a16:creationId xmlns:a16="http://schemas.microsoft.com/office/drawing/2014/main" id="{FDAD258D-715D-442C-B5D4-2F3201621039}"/>
+                <a16:creationId xmlns:a16="http://schemas.microsoft.com/office/drawing/2014/main" id="{061B0D66-C38E-43F0-A6AB-92BBA7BCDC95}"/>
               </a:ext>
             </a:extLst>
           </p:cNvPr>
@@ -14688,7 +14688,7 @@
           <p:cNvPr id="49" name="">
             <a:extLst xmlns:a="http://schemas.openxmlformats.org/drawingml/2006/main">
               <a:ext uri="{FF2B5EF4-FFF2-40B4-BE49-F238E27FC236}">
-                <a16:creationId xmlns:a16="http://schemas.microsoft.com/office/drawing/2014/main" id="{8348BF44-3794-4918-80EB-0B6509926DF1}"/>
+                <a16:creationId xmlns:a16="http://schemas.microsoft.com/office/drawing/2014/main" id="{6EC1966B-1AFF-4FE8-B9F4-46C491B175FC}"/>
               </a:ext>
             </a:extLst>
           </p:cNvPr>
@@ -14740,7 +14740,7 @@
           <p:cNvPr id="50" name="">
             <a:extLst xmlns:a="http://schemas.openxmlformats.org/drawingml/2006/main">
               <a:ext uri="{FF2B5EF4-FFF2-40B4-BE49-F238E27FC236}">
-                <a16:creationId xmlns:a16="http://schemas.microsoft.com/office/drawing/2014/main" id="{8E739685-8FEC-4666-814B-862AD3793D91}"/>
+                <a16:creationId xmlns:a16="http://schemas.microsoft.com/office/drawing/2014/main" id="{6A692E82-A899-4232-B119-7EDB9DAEFB83}"/>
               </a:ext>
             </a:extLst>
           </p:cNvPr>
@@ -14771,7 +14771,7 @@
           <p:cNvPr id="51" name="">
             <a:extLst xmlns:a="http://schemas.openxmlformats.org/drawingml/2006/main">
               <a:ext uri="{FF2B5EF4-FFF2-40B4-BE49-F238E27FC236}">
-                <a16:creationId xmlns:a16="http://schemas.microsoft.com/office/drawing/2014/main" id="{E12FF378-9221-4A6E-954E-996E23AABBFF}"/>
+                <a16:creationId xmlns:a16="http://schemas.microsoft.com/office/drawing/2014/main" id="{343B98E5-A936-47A2-94CD-928304C23D1D}"/>
               </a:ext>
             </a:extLst>
           </p:cNvPr>
@@ -14802,7 +14802,7 @@
           <p:cNvPr id="52" name="">
             <a:extLst xmlns:a="http://schemas.openxmlformats.org/drawingml/2006/main">
               <a:ext uri="{FF2B5EF4-FFF2-40B4-BE49-F238E27FC236}">
-                <a16:creationId xmlns:a16="http://schemas.microsoft.com/office/drawing/2014/main" id="{3E017578-753C-4178-B642-2675A41392DB}"/>
+                <a16:creationId xmlns:a16="http://schemas.microsoft.com/office/drawing/2014/main" id="{726198EB-AC5A-4FA4-A82B-A9C1FE694518}"/>
               </a:ext>
             </a:extLst>
           </p:cNvPr>
@@ -14854,7 +14854,7 @@
           <p:cNvPr id="53" name="">
             <a:extLst xmlns:a="http://schemas.openxmlformats.org/drawingml/2006/main">
               <a:ext uri="{FF2B5EF4-FFF2-40B4-BE49-F238E27FC236}">
-                <a16:creationId xmlns:a16="http://schemas.microsoft.com/office/drawing/2014/main" id="{5A79DFD0-529E-4BD1-BB9E-95921983D914}"/>
+                <a16:creationId xmlns:a16="http://schemas.microsoft.com/office/drawing/2014/main" id="{28959ED7-317A-42F6-BA8E-C872C4C9B39F}"/>
               </a:ext>
             </a:extLst>
           </p:cNvPr>
@@ -14906,7 +14906,7 @@
           <p:cNvPr id="54" name="">
             <a:extLst xmlns:a="http://schemas.openxmlformats.org/drawingml/2006/main">
               <a:ext uri="{FF2B5EF4-FFF2-40B4-BE49-F238E27FC236}">
-                <a16:creationId xmlns:a16="http://schemas.microsoft.com/office/drawing/2014/main" id="{4EE3B3CA-D8E7-4071-B33C-1BCAC5F3BB21}"/>
+                <a16:creationId xmlns:a16="http://schemas.microsoft.com/office/drawing/2014/main" id="{F638DC11-43AB-4303-B3B1-B9910C477B16}"/>
               </a:ext>
             </a:extLst>
           </p:cNvPr>
@@ -14958,7 +14958,7 @@
           <p:cNvPr id="55" name="">
             <a:extLst xmlns:a="http://schemas.openxmlformats.org/drawingml/2006/main">
               <a:ext uri="{FF2B5EF4-FFF2-40B4-BE49-F238E27FC236}">
-                <a16:creationId xmlns:a16="http://schemas.microsoft.com/office/drawing/2014/main" id="{308204EB-34A8-43B0-868F-7B41FB6534D6}"/>
+                <a16:creationId xmlns:a16="http://schemas.microsoft.com/office/drawing/2014/main" id="{0D9F8A99-7343-4C99-9030-900BB07A309F}"/>
               </a:ext>
             </a:extLst>
           </p:cNvPr>
@@ -15010,7 +15010,7 @@
           <p:cNvPr id="56" name="">
             <a:extLst xmlns:a="http://schemas.openxmlformats.org/drawingml/2006/main">
               <a:ext uri="{FF2B5EF4-FFF2-40B4-BE49-F238E27FC236}">
-                <a16:creationId xmlns:a16="http://schemas.microsoft.com/office/drawing/2014/main" id="{E4793076-52C5-4C38-94E4-F0DAAF2B2F31}"/>
+                <a16:creationId xmlns:a16="http://schemas.microsoft.com/office/drawing/2014/main" id="{45D7709E-DCCD-4329-A0ED-C098C81CA5FC}"/>
               </a:ext>
             </a:extLst>
           </p:cNvPr>
@@ -15062,7 +15062,7 @@
           <p:cNvPr id="57" name="">
             <a:extLst xmlns:a="http://schemas.openxmlformats.org/drawingml/2006/main">
               <a:ext uri="{FF2B5EF4-FFF2-40B4-BE49-F238E27FC236}">
-                <a16:creationId xmlns:a16="http://schemas.microsoft.com/office/drawing/2014/main" id="{668723B6-AFE2-4682-A4CB-B1B990FC6052}"/>
+                <a16:creationId xmlns:a16="http://schemas.microsoft.com/office/drawing/2014/main" id="{5D84771A-4D43-4EFE-9390-F86D5065C233}"/>
               </a:ext>
             </a:extLst>
           </p:cNvPr>
@@ -15093,7 +15093,7 @@
           <p:cNvPr id="58" name="">
             <a:extLst xmlns:a="http://schemas.openxmlformats.org/drawingml/2006/main">
               <a:ext uri="{FF2B5EF4-FFF2-40B4-BE49-F238E27FC236}">
-                <a16:creationId xmlns:a16="http://schemas.microsoft.com/office/drawing/2014/main" id="{149C611F-BDFB-4BF8-ADEB-1B4ABAD71AF6}"/>
+                <a16:creationId xmlns:a16="http://schemas.microsoft.com/office/drawing/2014/main" id="{D9A8BD6C-36ED-40C2-A0FB-4401E3C2F3C3}"/>
               </a:ext>
             </a:extLst>
           </p:cNvPr>
@@ -15145,7 +15145,7 @@
           <p:cNvPr id="59" name="">
             <a:extLst xmlns:a="http://schemas.openxmlformats.org/drawingml/2006/main">
               <a:ext uri="{FF2B5EF4-FFF2-40B4-BE49-F238E27FC236}">
-                <a16:creationId xmlns:a16="http://schemas.microsoft.com/office/drawing/2014/main" id="{AF53594A-D12B-471D-87B2-24207C1D8DBC}"/>
+                <a16:creationId xmlns:a16="http://schemas.microsoft.com/office/drawing/2014/main" id="{1D6D447F-5FF2-479E-9A24-E200428766A1}"/>
               </a:ext>
             </a:extLst>
           </p:cNvPr>
@@ -15197,7 +15197,7 @@
           <p:cNvPr id="60" name="">
             <a:extLst xmlns:a="http://schemas.openxmlformats.org/drawingml/2006/main">
               <a:ext uri="{FF2B5EF4-FFF2-40B4-BE49-F238E27FC236}">
-                <a16:creationId xmlns:a16="http://schemas.microsoft.com/office/drawing/2014/main" id="{AE7CE9EB-00F5-457B-82C2-F7DE757E3276}"/>
+                <a16:creationId xmlns:a16="http://schemas.microsoft.com/office/drawing/2014/main" id="{4621BED2-00D4-4BAE-B9CA-134FD36C3A74}"/>
               </a:ext>
             </a:extLst>
           </p:cNvPr>
@@ -15249,7 +15249,7 @@
           <p:cNvPr id="61" name="">
             <a:extLst xmlns:a="http://schemas.openxmlformats.org/drawingml/2006/main">
               <a:ext uri="{FF2B5EF4-FFF2-40B4-BE49-F238E27FC236}">
-                <a16:creationId xmlns:a16="http://schemas.microsoft.com/office/drawing/2014/main" id="{C122630E-5EA7-4F8A-9923-A9DE28E8DE19}"/>
+                <a16:creationId xmlns:a16="http://schemas.microsoft.com/office/drawing/2014/main" id="{3BAAF0F2-8D31-4D10-A137-C0CD46E5F1B3}"/>
               </a:ext>
             </a:extLst>
           </p:cNvPr>
@@ -15301,7 +15301,7 @@
           <p:cNvPr id="62" name="">
             <a:extLst xmlns:a="http://schemas.openxmlformats.org/drawingml/2006/main">
               <a:ext uri="{FF2B5EF4-FFF2-40B4-BE49-F238E27FC236}">
-                <a16:creationId xmlns:a16="http://schemas.microsoft.com/office/drawing/2014/main" id="{211D4B0A-2CF6-4334-8E20-16B6D728A178}"/>
+                <a16:creationId xmlns:a16="http://schemas.microsoft.com/office/drawing/2014/main" id="{1B9736AD-35A3-42D0-9BBC-AC59009ED95E}"/>
               </a:ext>
             </a:extLst>
           </p:cNvPr>
@@ -15353,7 +15353,7 @@
           <p:cNvPr id="63" name="">
             <a:extLst xmlns:a="http://schemas.openxmlformats.org/drawingml/2006/main">
               <a:ext uri="{FF2B5EF4-FFF2-40B4-BE49-F238E27FC236}">
-                <a16:creationId xmlns:a16="http://schemas.microsoft.com/office/drawing/2014/main" id="{9FA6322A-E1B5-4A76-8416-CE3068F71566}"/>
+                <a16:creationId xmlns:a16="http://schemas.microsoft.com/office/drawing/2014/main" id="{AFFAF97A-803B-4E18-967A-EE3C8FEB5E67}"/>
               </a:ext>
             </a:extLst>
           </p:cNvPr>
@@ -15384,7 +15384,7 @@
           <p:cNvPr id="64" name="">
             <a:extLst xmlns:a="http://schemas.openxmlformats.org/drawingml/2006/main">
               <a:ext uri="{FF2B5EF4-FFF2-40B4-BE49-F238E27FC236}">
-                <a16:creationId xmlns:a16="http://schemas.microsoft.com/office/drawing/2014/main" id="{B1D94201-7710-46DE-A670-A2EC1B41EF29}"/>
+                <a16:creationId xmlns:a16="http://schemas.microsoft.com/office/drawing/2014/main" id="{AF148AC0-3A3F-446E-8F51-0D796D4F5ACE}"/>
               </a:ext>
             </a:extLst>
           </p:cNvPr>
@@ -15415,7 +15415,7 @@
           <p:cNvPr id="65" name="">
             <a:extLst xmlns:a="http://schemas.openxmlformats.org/drawingml/2006/main">
               <a:ext uri="{FF2B5EF4-FFF2-40B4-BE49-F238E27FC236}">
-                <a16:creationId xmlns:a16="http://schemas.microsoft.com/office/drawing/2014/main" id="{D7268905-AB4E-422B-BC08-11D0A9E49D95}"/>
+                <a16:creationId xmlns:a16="http://schemas.microsoft.com/office/drawing/2014/main" id="{5739D7C5-7CF1-4F09-B217-CEA478B21D33}"/>
               </a:ext>
             </a:extLst>
           </p:cNvPr>
@@ -15467,7 +15467,7 @@
           <p:cNvPr id="66" name="">
             <a:extLst xmlns:a="http://schemas.openxmlformats.org/drawingml/2006/main">
               <a:ext uri="{FF2B5EF4-FFF2-40B4-BE49-F238E27FC236}">
-                <a16:creationId xmlns:a16="http://schemas.microsoft.com/office/drawing/2014/main" id="{47624224-9A1E-4DA6-A077-D4BE231BB7BE}"/>
+                <a16:creationId xmlns:a16="http://schemas.microsoft.com/office/drawing/2014/main" id="{A9B48742-8684-4A0A-B371-BBC7E7F23238}"/>
               </a:ext>
             </a:extLst>
           </p:cNvPr>
@@ -15519,7 +15519,7 @@
           <p:cNvPr id="67" name="">
             <a:extLst xmlns:a="http://schemas.openxmlformats.org/drawingml/2006/main">
               <a:ext uri="{FF2B5EF4-FFF2-40B4-BE49-F238E27FC236}">
-                <a16:creationId xmlns:a16="http://schemas.microsoft.com/office/drawing/2014/main" id="{76FAEF17-8D0A-484B-BA57-09467054FEFF}"/>
+                <a16:creationId xmlns:a16="http://schemas.microsoft.com/office/drawing/2014/main" id="{0FC502D1-451E-4CC2-8C22-BF5A96100242}"/>
               </a:ext>
             </a:extLst>
           </p:cNvPr>
@@ -15571,7 +15571,7 @@
           <p:cNvPr id="68" name="">
             <a:extLst xmlns:a="http://schemas.openxmlformats.org/drawingml/2006/main">
               <a:ext uri="{FF2B5EF4-FFF2-40B4-BE49-F238E27FC236}">
-                <a16:creationId xmlns:a16="http://schemas.microsoft.com/office/drawing/2014/main" id="{27763A97-FC59-4CAF-A44D-CF47C7F33F59}"/>
+                <a16:creationId xmlns:a16="http://schemas.microsoft.com/office/drawing/2014/main" id="{F1D57E36-8EB0-4278-8D1A-6247153843FD}"/>
               </a:ext>
             </a:extLst>
           </p:cNvPr>
@@ -15623,7 +15623,7 @@
           <p:cNvPr id="69" name="">
             <a:extLst xmlns:a="http://schemas.openxmlformats.org/drawingml/2006/main">
               <a:ext uri="{FF2B5EF4-FFF2-40B4-BE49-F238E27FC236}">
-                <a16:creationId xmlns:a16="http://schemas.microsoft.com/office/drawing/2014/main" id="{8410B72B-905B-405C-87F8-5EF145905243}"/>
+                <a16:creationId xmlns:a16="http://schemas.microsoft.com/office/drawing/2014/main" id="{BE6FB124-F59F-4299-B29A-421911E91267}"/>
               </a:ext>
             </a:extLst>
           </p:cNvPr>
@@ -15675,7 +15675,7 @@
           <p:cNvPr id="70" name="">
             <a:extLst xmlns:a="http://schemas.openxmlformats.org/drawingml/2006/main">
               <a:ext uri="{FF2B5EF4-FFF2-40B4-BE49-F238E27FC236}">
-                <a16:creationId xmlns:a16="http://schemas.microsoft.com/office/drawing/2014/main" id="{A0F90355-0C71-4722-B5D4-0A767A38FF9E}"/>
+                <a16:creationId xmlns:a16="http://schemas.microsoft.com/office/drawing/2014/main" id="{4A3FEC1B-CFE1-42C5-8800-9AFEC21EDFA9}"/>
               </a:ext>
             </a:extLst>
           </p:cNvPr>
@@ -15706,7 +15706,7 @@
           <p:cNvPr id="71" name="">
             <a:extLst xmlns:a="http://schemas.openxmlformats.org/drawingml/2006/main">
               <a:ext uri="{FF2B5EF4-FFF2-40B4-BE49-F238E27FC236}">
-                <a16:creationId xmlns:a16="http://schemas.microsoft.com/office/drawing/2014/main" id="{506D9CDA-594B-4FD6-B75A-398271F424AA}"/>
+                <a16:creationId xmlns:a16="http://schemas.microsoft.com/office/drawing/2014/main" id="{D683C255-23EF-4209-900E-FA034A963842}"/>
               </a:ext>
             </a:extLst>
           </p:cNvPr>
@@ -15758,7 +15758,7 @@
           <p:cNvPr id="72" name="">
             <a:extLst xmlns:a="http://schemas.openxmlformats.org/drawingml/2006/main">
               <a:ext uri="{FF2B5EF4-FFF2-40B4-BE49-F238E27FC236}">
-                <a16:creationId xmlns:a16="http://schemas.microsoft.com/office/drawing/2014/main" id="{37062264-0C45-4446-BCDC-3EBD545C6E92}"/>
+                <a16:creationId xmlns:a16="http://schemas.microsoft.com/office/drawing/2014/main" id="{7C31300C-0F9B-44EC-9503-C3AB970B47BE}"/>
               </a:ext>
             </a:extLst>
           </p:cNvPr>
@@ -15810,7 +15810,7 @@
           <p:cNvPr id="73" name="">
             <a:extLst xmlns:a="http://schemas.openxmlformats.org/drawingml/2006/main">
               <a:ext uri="{FF2B5EF4-FFF2-40B4-BE49-F238E27FC236}">
-                <a16:creationId xmlns:a16="http://schemas.microsoft.com/office/drawing/2014/main" id="{C6D478A2-56BC-446D-9447-99A78C0045E6}"/>
+                <a16:creationId xmlns:a16="http://schemas.microsoft.com/office/drawing/2014/main" id="{5E414CC4-B35C-4537-B0B1-36B9C4D3C091}"/>
               </a:ext>
             </a:extLst>
           </p:cNvPr>
@@ -15862,7 +15862,7 @@
           <p:cNvPr id="74" name="">
             <a:extLst xmlns:a="http://schemas.openxmlformats.org/drawingml/2006/main">
               <a:ext uri="{FF2B5EF4-FFF2-40B4-BE49-F238E27FC236}">
-                <a16:creationId xmlns:a16="http://schemas.microsoft.com/office/drawing/2014/main" id="{AAE05546-5F38-48D0-8AB2-E74581FFA7F1}"/>
+                <a16:creationId xmlns:a16="http://schemas.microsoft.com/office/drawing/2014/main" id="{58440668-23B6-4139-9478-F1B0BCBD033E}"/>
               </a:ext>
             </a:extLst>
           </p:cNvPr>
@@ -15914,7 +15914,7 @@
           <p:cNvPr id="75" name="">
             <a:extLst xmlns:a="http://schemas.openxmlformats.org/drawingml/2006/main">
               <a:ext uri="{FF2B5EF4-FFF2-40B4-BE49-F238E27FC236}">
-                <a16:creationId xmlns:a16="http://schemas.microsoft.com/office/drawing/2014/main" id="{E0DE98DA-7238-482C-AD38-A9BDCE34C7AF}"/>
+                <a16:creationId xmlns:a16="http://schemas.microsoft.com/office/drawing/2014/main" id="{A4799638-842A-431E-BBE7-B732E2F63EAB}"/>
               </a:ext>
             </a:extLst>
           </p:cNvPr>
@@ -15966,7 +15966,7 @@
           <p:cNvPr id="76" name="">
             <a:extLst xmlns:a="http://schemas.openxmlformats.org/drawingml/2006/main">
               <a:ext uri="{FF2B5EF4-FFF2-40B4-BE49-F238E27FC236}">
-                <a16:creationId xmlns:a16="http://schemas.microsoft.com/office/drawing/2014/main" id="{97A7C8AC-C000-497A-8D3A-DCB229B1B794}"/>
+                <a16:creationId xmlns:a16="http://schemas.microsoft.com/office/drawing/2014/main" id="{07B46D20-BA33-4F02-B5B5-3DCF9281CE07}"/>
               </a:ext>
             </a:extLst>
           </p:cNvPr>
@@ -15997,7 +15997,7 @@
           <p:cNvPr id="77" name="">
             <a:extLst xmlns:a="http://schemas.openxmlformats.org/drawingml/2006/main">
               <a:ext uri="{FF2B5EF4-FFF2-40B4-BE49-F238E27FC236}">
-                <a16:creationId xmlns:a16="http://schemas.microsoft.com/office/drawing/2014/main" id="{B925F6C1-EC88-4A14-9733-E4F7FFA0268F}"/>
+                <a16:creationId xmlns:a16="http://schemas.microsoft.com/office/drawing/2014/main" id="{07E40E2B-560B-4C3F-A86C-C6B91F048770}"/>
               </a:ext>
             </a:extLst>
           </p:cNvPr>
@@ -16028,7 +16028,7 @@
           <p:cNvPr id="78" name="">
             <a:extLst xmlns:a="http://schemas.openxmlformats.org/drawingml/2006/main">
               <a:ext uri="{FF2B5EF4-FFF2-40B4-BE49-F238E27FC236}">
-                <a16:creationId xmlns:a16="http://schemas.microsoft.com/office/drawing/2014/main" id="{FABD7ACE-A630-4416-BFDB-1B94FF3E56F2}"/>
+                <a16:creationId xmlns:a16="http://schemas.microsoft.com/office/drawing/2014/main" id="{8CF5ECD4-BA1E-45C8-A5E6-E29B7C0B00CB}"/>
               </a:ext>
             </a:extLst>
           </p:cNvPr>
@@ -16080,7 +16080,7 @@
           <p:cNvPr id="79" name="">
             <a:extLst xmlns:a="http://schemas.openxmlformats.org/drawingml/2006/main">
               <a:ext uri="{FF2B5EF4-FFF2-40B4-BE49-F238E27FC236}">
-                <a16:creationId xmlns:a16="http://schemas.microsoft.com/office/drawing/2014/main" id="{E84584CF-72B0-414C-A7B1-3EBB6876586E}"/>
+                <a16:creationId xmlns:a16="http://schemas.microsoft.com/office/drawing/2014/main" id="{5CD6A8CC-AC2A-41DF-988E-D0D0CE4148D6}"/>
               </a:ext>
             </a:extLst>
           </p:cNvPr>
@@ -16132,7 +16132,7 @@
           <p:cNvPr id="80" name="">
             <a:extLst xmlns:a="http://schemas.openxmlformats.org/drawingml/2006/main">
               <a:ext uri="{FF2B5EF4-FFF2-40B4-BE49-F238E27FC236}">
-                <a16:creationId xmlns:a16="http://schemas.microsoft.com/office/drawing/2014/main" id="{855F73D6-BEE9-44BC-81BF-3BEDEBF2EBE0}"/>
+                <a16:creationId xmlns:a16="http://schemas.microsoft.com/office/drawing/2014/main" id="{B0FA1D2B-A4E5-434D-B14F-5E52BD05351E}"/>
               </a:ext>
             </a:extLst>
           </p:cNvPr>
@@ -16184,7 +16184,7 @@
           <p:cNvPr id="81" name="">
             <a:extLst xmlns:a="http://schemas.openxmlformats.org/drawingml/2006/main">
               <a:ext uri="{FF2B5EF4-FFF2-40B4-BE49-F238E27FC236}">
-                <a16:creationId xmlns:a16="http://schemas.microsoft.com/office/drawing/2014/main" id="{BB3F33F7-118A-4888-8040-9E15CA835F00}"/>
+                <a16:creationId xmlns:a16="http://schemas.microsoft.com/office/drawing/2014/main" id="{9AF33B8C-FA99-41B3-A909-92582D568328}"/>
               </a:ext>
             </a:extLst>
           </p:cNvPr>
@@ -16236,7 +16236,7 @@
           <p:cNvPr id="82" name="">
             <a:extLst xmlns:a="http://schemas.openxmlformats.org/drawingml/2006/main">
               <a:ext uri="{FF2B5EF4-FFF2-40B4-BE49-F238E27FC236}">
-                <a16:creationId xmlns:a16="http://schemas.microsoft.com/office/drawing/2014/main" id="{71340385-FE3A-4B97-962C-A7AAF1E83C4C}"/>
+                <a16:creationId xmlns:a16="http://schemas.microsoft.com/office/drawing/2014/main" id="{06EDDAEB-2C4D-4FDC-A18D-ED6969C1E7EB}"/>
               </a:ext>
             </a:extLst>
           </p:cNvPr>
@@ -16288,7 +16288,7 @@
           <p:cNvPr id="83" name="">
             <a:extLst xmlns:a="http://schemas.openxmlformats.org/drawingml/2006/main">
               <a:ext uri="{FF2B5EF4-FFF2-40B4-BE49-F238E27FC236}">
-                <a16:creationId xmlns:a16="http://schemas.microsoft.com/office/drawing/2014/main" id="{FE7B4778-BDA3-40AA-8B83-205AEBF0CF27}"/>
+                <a16:creationId xmlns:a16="http://schemas.microsoft.com/office/drawing/2014/main" id="{A014CB5D-E665-4FAE-AA85-3132658B3878}"/>
               </a:ext>
             </a:extLst>
           </p:cNvPr>
@@ -16319,7 +16319,7 @@
           <p:cNvPr id="84" name="">
             <a:extLst xmlns:a="http://schemas.openxmlformats.org/drawingml/2006/main">
               <a:ext uri="{FF2B5EF4-FFF2-40B4-BE49-F238E27FC236}">
-                <a16:creationId xmlns:a16="http://schemas.microsoft.com/office/drawing/2014/main" id="{78646432-C900-458E-A084-C4E0D0C29A02}"/>
+                <a16:creationId xmlns:a16="http://schemas.microsoft.com/office/drawing/2014/main" id="{78F0121C-8FF9-4FDC-9CA7-799513CA4A68}"/>
               </a:ext>
             </a:extLst>
           </p:cNvPr>
@@ -16371,7 +16371,7 @@
           <p:cNvPr id="85" name="">
             <a:extLst xmlns:a="http://schemas.openxmlformats.org/drawingml/2006/main">
               <a:ext uri="{FF2B5EF4-FFF2-40B4-BE49-F238E27FC236}">
-                <a16:creationId xmlns:a16="http://schemas.microsoft.com/office/drawing/2014/main" id="{4321477D-659B-41E9-B276-A1A883A6105C}"/>
+                <a16:creationId xmlns:a16="http://schemas.microsoft.com/office/drawing/2014/main" id="{1A77DD0C-534C-4884-BB42-E45D56D02AD1}"/>
               </a:ext>
             </a:extLst>
           </p:cNvPr>
@@ -16423,7 +16423,7 @@
           <p:cNvPr id="86" name="">
             <a:extLst xmlns:a="http://schemas.openxmlformats.org/drawingml/2006/main">
               <a:ext uri="{FF2B5EF4-FFF2-40B4-BE49-F238E27FC236}">
-                <a16:creationId xmlns:a16="http://schemas.microsoft.com/office/drawing/2014/main" id="{39B1E56B-2BBA-4149-B1E5-B532A2B2E218}"/>
+                <a16:creationId xmlns:a16="http://schemas.microsoft.com/office/drawing/2014/main" id="{495F86B5-1CBC-4722-8E5F-4A5E4974B402}"/>
               </a:ext>
             </a:extLst>
           </p:cNvPr>
@@ -16475,7 +16475,7 @@
           <p:cNvPr id="87" name="">
             <a:extLst xmlns:a="http://schemas.openxmlformats.org/drawingml/2006/main">
               <a:ext uri="{FF2B5EF4-FFF2-40B4-BE49-F238E27FC236}">
-                <a16:creationId xmlns:a16="http://schemas.microsoft.com/office/drawing/2014/main" id="{13D20145-3452-43C3-8805-15210B084B4B}"/>
+                <a16:creationId xmlns:a16="http://schemas.microsoft.com/office/drawing/2014/main" id="{81A7FF0B-4C60-40EF-875C-A644B002C7BF}"/>
               </a:ext>
             </a:extLst>
           </p:cNvPr>
@@ -16527,7 +16527,7 @@
           <p:cNvPr id="88" name="">
             <a:extLst xmlns:a="http://schemas.openxmlformats.org/drawingml/2006/main">
               <a:ext uri="{FF2B5EF4-FFF2-40B4-BE49-F238E27FC236}">
-                <a16:creationId xmlns:a16="http://schemas.microsoft.com/office/drawing/2014/main" id="{19BE9704-FAC8-4427-BA32-CE1CB13AC99C}"/>
+                <a16:creationId xmlns:a16="http://schemas.microsoft.com/office/drawing/2014/main" id="{BAC622B5-2275-4F74-9DE8-C2CF66716048}"/>
               </a:ext>
             </a:extLst>
           </p:cNvPr>
@@ -16579,7 +16579,7 @@
           <p:cNvPr id="89" name="">
             <a:extLst xmlns:a="http://schemas.openxmlformats.org/drawingml/2006/main">
               <a:ext uri="{FF2B5EF4-FFF2-40B4-BE49-F238E27FC236}">
-                <a16:creationId xmlns:a16="http://schemas.microsoft.com/office/drawing/2014/main" id="{4114707E-B679-44D6-BE5E-FF25F713DCEC}"/>
+                <a16:creationId xmlns:a16="http://schemas.microsoft.com/office/drawing/2014/main" id="{47B5BBB1-17EB-4AFB-B261-31AF2BECDA08}"/>
               </a:ext>
             </a:extLst>
           </p:cNvPr>
@@ -16610,7 +16610,7 @@
           <p:cNvPr id="90" name="">
             <a:extLst xmlns:a="http://schemas.openxmlformats.org/drawingml/2006/main">
               <a:ext uri="{FF2B5EF4-FFF2-40B4-BE49-F238E27FC236}">
-                <a16:creationId xmlns:a16="http://schemas.microsoft.com/office/drawing/2014/main" id="{4E23344C-AF4A-4A66-817B-4A83B6FE37FD}"/>
+                <a16:creationId xmlns:a16="http://schemas.microsoft.com/office/drawing/2014/main" id="{E41CE5FD-7478-4490-A366-ED683DD146FD}"/>
               </a:ext>
             </a:extLst>
           </p:cNvPr>
@@ -16641,7 +16641,7 @@
           <p:cNvPr id="91" name="">
             <a:extLst xmlns:a="http://schemas.openxmlformats.org/drawingml/2006/main">
               <a:ext uri="{FF2B5EF4-FFF2-40B4-BE49-F238E27FC236}">
-                <a16:creationId xmlns:a16="http://schemas.microsoft.com/office/drawing/2014/main" id="{EA2F048C-AACF-4D7D-9624-B2254D1CD90A}"/>
+                <a16:creationId xmlns:a16="http://schemas.microsoft.com/office/drawing/2014/main" id="{B3756F1C-57DC-42D5-9037-B8AA8906EE1E}"/>
               </a:ext>
             </a:extLst>
           </p:cNvPr>
@@ -16693,7 +16693,7 @@
           <p:cNvPr id="92" name="">
             <a:extLst xmlns:a="http://schemas.openxmlformats.org/drawingml/2006/main">
               <a:ext uri="{FF2B5EF4-FFF2-40B4-BE49-F238E27FC236}">
-                <a16:creationId xmlns:a16="http://schemas.microsoft.com/office/drawing/2014/main" id="{7F946168-8B9E-4B63-9983-347834BB631F}"/>
+                <a16:creationId xmlns:a16="http://schemas.microsoft.com/office/drawing/2014/main" id="{2400CC00-CAE4-420E-8D27-200A0D21F5D9}"/>
               </a:ext>
             </a:extLst>
           </p:cNvPr>
@@ -16745,7 +16745,7 @@
           <p:cNvPr id="93" name="">
             <a:extLst xmlns:a="http://schemas.openxmlformats.org/drawingml/2006/main">
               <a:ext uri="{FF2B5EF4-FFF2-40B4-BE49-F238E27FC236}">
-                <a16:creationId xmlns:a16="http://schemas.microsoft.com/office/drawing/2014/main" id="{D77553C1-86AC-44CA-9237-7837303B037B}"/>
+                <a16:creationId xmlns:a16="http://schemas.microsoft.com/office/drawing/2014/main" id="{D80E413A-D2EC-4132-8A9A-0F9C9B0B5A10}"/>
               </a:ext>
             </a:extLst>
           </p:cNvPr>
@@ -16797,7 +16797,7 @@
           <p:cNvPr id="94" name="">
             <a:extLst xmlns:a="http://schemas.openxmlformats.org/drawingml/2006/main">
               <a:ext uri="{FF2B5EF4-FFF2-40B4-BE49-F238E27FC236}">
-                <a16:creationId xmlns:a16="http://schemas.microsoft.com/office/drawing/2014/main" id="{3E4198DF-FBED-4BF0-9A32-3C78295A39C4}"/>
+                <a16:creationId xmlns:a16="http://schemas.microsoft.com/office/drawing/2014/main" id="{3FD8BECB-5501-47C8-AAC7-D8EA8DD03F4A}"/>
               </a:ext>
             </a:extLst>
           </p:cNvPr>
@@ -16849,7 +16849,7 @@
           <p:cNvPr id="95" name="">
             <a:extLst xmlns:a="http://schemas.openxmlformats.org/drawingml/2006/main">
               <a:ext uri="{FF2B5EF4-FFF2-40B4-BE49-F238E27FC236}">
-                <a16:creationId xmlns:a16="http://schemas.microsoft.com/office/drawing/2014/main" id="{1E2807A8-5D5F-4269-A8F1-378A32D1EEE9}"/>
+                <a16:creationId xmlns:a16="http://schemas.microsoft.com/office/drawing/2014/main" id="{349FB8B3-415B-43D0-9289-CE1D901125BF}"/>
               </a:ext>
             </a:extLst>
           </p:cNvPr>
@@ -16901,7 +16901,7 @@
           <p:cNvPr id="96" name="">
             <a:extLst xmlns:a="http://schemas.openxmlformats.org/drawingml/2006/main">
               <a:ext uri="{FF2B5EF4-FFF2-40B4-BE49-F238E27FC236}">
-                <a16:creationId xmlns:a16="http://schemas.microsoft.com/office/drawing/2014/main" id="{F5E05D3C-26BA-4FBB-92A1-9CA0D3F8CF2D}"/>
+                <a16:creationId xmlns:a16="http://schemas.microsoft.com/office/drawing/2014/main" id="{1AAF5CF0-C34E-4E7B-9005-C01A9B7E9AAE}"/>
               </a:ext>
             </a:extLst>
           </p:cNvPr>
@@ -16932,7 +16932,7 @@
           <p:cNvPr id="97" name="">
             <a:extLst xmlns:a="http://schemas.openxmlformats.org/drawingml/2006/main">
               <a:ext uri="{FF2B5EF4-FFF2-40B4-BE49-F238E27FC236}">
-                <a16:creationId xmlns:a16="http://schemas.microsoft.com/office/drawing/2014/main" id="{A8459C4B-6E3F-49C2-8663-2FA4F5747270}"/>
+                <a16:creationId xmlns:a16="http://schemas.microsoft.com/office/drawing/2014/main" id="{33D8E0F2-DEDF-4802-806A-80287540DE46}"/>
               </a:ext>
             </a:extLst>
           </p:cNvPr>
@@ -16984,7 +16984,7 @@
           <p:cNvPr id="98" name="">
             <a:extLst xmlns:a="http://schemas.openxmlformats.org/drawingml/2006/main">
               <a:ext uri="{FF2B5EF4-FFF2-40B4-BE49-F238E27FC236}">
-                <a16:creationId xmlns:a16="http://schemas.microsoft.com/office/drawing/2014/main" id="{218D072F-9D23-42B1-9B40-B3F8E89DDED8}"/>
+                <a16:creationId xmlns:a16="http://schemas.microsoft.com/office/drawing/2014/main" id="{BDF7EC22-0D9A-4D53-927E-E6A35CA62484}"/>
               </a:ext>
             </a:extLst>
           </p:cNvPr>
@@ -17036,7 +17036,7 @@
           <p:cNvPr id="99" name="">
             <a:extLst xmlns:a="http://schemas.openxmlformats.org/drawingml/2006/main">
               <a:ext uri="{FF2B5EF4-FFF2-40B4-BE49-F238E27FC236}">
-                <a16:creationId xmlns:a16="http://schemas.microsoft.com/office/drawing/2014/main" id="{E2E32190-9A20-404E-AD6D-23097E5B89C1}"/>
+                <a16:creationId xmlns:a16="http://schemas.microsoft.com/office/drawing/2014/main" id="{77F04C3D-3701-4DB1-B8D1-17E51653A085}"/>
               </a:ext>
             </a:extLst>
           </p:cNvPr>
@@ -17088,7 +17088,7 @@
           <p:cNvPr id="100" name="">
             <a:extLst xmlns:a="http://schemas.openxmlformats.org/drawingml/2006/main">
               <a:ext uri="{FF2B5EF4-FFF2-40B4-BE49-F238E27FC236}">
-                <a16:creationId xmlns:a16="http://schemas.microsoft.com/office/drawing/2014/main" id="{2F083FEE-B22A-4730-858E-EC1E453128E9}"/>
+                <a16:creationId xmlns:a16="http://schemas.microsoft.com/office/drawing/2014/main" id="{11E54941-4957-4DDD-8CE0-61104B9B2C54}"/>
               </a:ext>
             </a:extLst>
           </p:cNvPr>
@@ -17140,7 +17140,7 @@
           <p:cNvPr id="101" name="">
             <a:extLst xmlns:a="http://schemas.openxmlformats.org/drawingml/2006/main">
               <a:ext uri="{FF2B5EF4-FFF2-40B4-BE49-F238E27FC236}">
-                <a16:creationId xmlns:a16="http://schemas.microsoft.com/office/drawing/2014/main" id="{F5906C5F-15D5-4C84-BC6B-26F34336D5AE}"/>
+                <a16:creationId xmlns:a16="http://schemas.microsoft.com/office/drawing/2014/main" id="{6F8DDCC7-472A-4969-BAF9-451F97A48E2E}"/>
               </a:ext>
             </a:extLst>
           </p:cNvPr>
@@ -17190,7 +17190,7 @@
     </p:spTree>
     <p:extLst>
       <p:ext uri="{BB962C8B-B14F-4D97-AF65-F5344CB8AC3E}">
-        <p14:creationId xmlns:p14="http://schemas.microsoft.com/office/powerpoint/2010/main" val="592286468"/>
+        <p14:creationId xmlns:p14="http://schemas.microsoft.com/office/powerpoint/2010/main" val="1457280241"/>
       </p:ext>
     </p:extLst>
   </p:cSld>
@@ -17221,7 +17221,7 @@
           <p:cNvPr id="96" name="">
             <a:extLst xmlns:a="http://schemas.openxmlformats.org/drawingml/2006/main">
               <a:ext uri="{FF2B5EF4-FFF2-40B4-BE49-F238E27FC236}">
-                <a16:creationId xmlns:a16="http://schemas.microsoft.com/office/drawing/2014/main" id="{BCBBCF69-986B-4778-B8F1-F7605905B282}"/>
+                <a16:creationId xmlns:a16="http://schemas.microsoft.com/office/drawing/2014/main" id="{C48C5026-A0A8-469F-B14A-46AE4FB828CF}"/>
               </a:ext>
             </a:extLst>
           </p:cNvPr>
@@ -17254,7 +17254,7 @@
           <p:cNvPr id="2" name="">
             <a:extLst xmlns:a="http://schemas.openxmlformats.org/drawingml/2006/main">
               <a:ext uri="{FF2B5EF4-FFF2-40B4-BE49-F238E27FC236}">
-                <a16:creationId xmlns:a16="http://schemas.microsoft.com/office/drawing/2014/main" id="{A5344082-6928-415E-8040-F18AACF71E48}"/>
+                <a16:creationId xmlns:a16="http://schemas.microsoft.com/office/drawing/2014/main" id="{5A998F24-B812-4EF8-9099-6E1A5677715D}"/>
               </a:ext>
             </a:extLst>
           </p:cNvPr>
@@ -17285,7 +17285,7 @@
           <p:cNvPr id="3" name="">
             <a:extLst xmlns:a="http://schemas.openxmlformats.org/drawingml/2006/main">
               <a:ext uri="{FF2B5EF4-FFF2-40B4-BE49-F238E27FC236}">
-                <a16:creationId xmlns:a16="http://schemas.microsoft.com/office/drawing/2014/main" id="{D1359AC1-785D-4115-88FD-11175B6A1C58}"/>
+                <a16:creationId xmlns:a16="http://schemas.microsoft.com/office/drawing/2014/main" id="{173AA31C-F81A-4716-9D72-6895A0045CE9}"/>
               </a:ext>
             </a:extLst>
           </p:cNvPr>
@@ -17337,7 +17337,7 @@
           <p:cNvPr id="4" name="">
             <a:extLst xmlns:a="http://schemas.openxmlformats.org/drawingml/2006/main">
               <a:ext uri="{FF2B5EF4-FFF2-40B4-BE49-F238E27FC236}">
-                <a16:creationId xmlns:a16="http://schemas.microsoft.com/office/drawing/2014/main" id="{93A4EA16-EC9F-42F8-8E00-B68AFB0D00D1}"/>
+                <a16:creationId xmlns:a16="http://schemas.microsoft.com/office/drawing/2014/main" id="{C35F1C06-B5E7-4081-B347-F2DBEB8876A8}"/>
               </a:ext>
             </a:extLst>
           </p:cNvPr>
@@ -17389,7 +17389,7 @@
           <p:cNvPr id="5" name="">
             <a:extLst xmlns:a="http://schemas.openxmlformats.org/drawingml/2006/main">
               <a:ext uri="{FF2B5EF4-FFF2-40B4-BE49-F238E27FC236}">
-                <a16:creationId xmlns:a16="http://schemas.microsoft.com/office/drawing/2014/main" id="{0852DDB8-D5EB-4435-8623-67A78DB1F351}"/>
+                <a16:creationId xmlns:a16="http://schemas.microsoft.com/office/drawing/2014/main" id="{21B36D97-AD03-48F6-9BC3-B50E4FB8A6C4}"/>
               </a:ext>
             </a:extLst>
           </p:cNvPr>
@@ -17424,7 +17424,7 @@
           <p:nvPr/>
         </p:nvPicPr>
         <p:blipFill>
-          <a:blip xmlns:r="http://schemas.openxmlformats.org/officeDocument/2006/relationships" xmlns:a="http://schemas.openxmlformats.org/drawingml/2006/main" r:embed="Rebf03f5e509948b9"/>
+          <a:blip xmlns:r="http://schemas.openxmlformats.org/officeDocument/2006/relationships" xmlns:a="http://schemas.openxmlformats.org/drawingml/2006/main" r:embed="Rbaa1cf2e320e41f8"/>
           <a:stretch xmlns:a="http://schemas.openxmlformats.org/drawingml/2006/main"/>
         </p:blipFill>
         <p:spPr>
@@ -17442,7 +17442,7 @@
           <p:cNvPr id="7" name="">
             <a:extLst xmlns:a="http://schemas.openxmlformats.org/drawingml/2006/main">
               <a:ext uri="{FF2B5EF4-FFF2-40B4-BE49-F238E27FC236}">
-                <a16:creationId xmlns:a16="http://schemas.microsoft.com/office/drawing/2014/main" id="{B4202A97-8F1D-4E21-9301-DF969C440798}"/>
+                <a16:creationId xmlns:a16="http://schemas.microsoft.com/office/drawing/2014/main" id="{E706F50F-D628-4540-8B61-04408828D420}"/>
               </a:ext>
             </a:extLst>
           </p:cNvPr>
@@ -17494,7 +17494,7 @@
           <p:cNvPr id="8" name="">
             <a:extLst xmlns:a="http://schemas.openxmlformats.org/drawingml/2006/main">
               <a:ext uri="{FF2B5EF4-FFF2-40B4-BE49-F238E27FC236}">
-                <a16:creationId xmlns:a16="http://schemas.microsoft.com/office/drawing/2014/main" id="{BA1B41FC-70FB-4D05-A3D0-06CB70358BE0}"/>
+                <a16:creationId xmlns:a16="http://schemas.microsoft.com/office/drawing/2014/main" id="{5C376F52-BFD5-4057-90EF-E6CF2C759F9C}"/>
               </a:ext>
             </a:extLst>
           </p:cNvPr>
@@ -17546,7 +17546,7 @@
           <p:cNvPr id="9" name="">
             <a:extLst xmlns:a="http://schemas.openxmlformats.org/drawingml/2006/main">
               <a:ext uri="{FF2B5EF4-FFF2-40B4-BE49-F238E27FC236}">
-                <a16:creationId xmlns:a16="http://schemas.microsoft.com/office/drawing/2014/main" id="{F898E554-DDC2-4188-9A5A-2911A55B2AF2}"/>
+                <a16:creationId xmlns:a16="http://schemas.microsoft.com/office/drawing/2014/main" id="{B479CC46-93BD-4ECB-830A-9D2422DC920A}"/>
               </a:ext>
             </a:extLst>
           </p:cNvPr>
@@ -17598,7 +17598,7 @@
           <p:cNvPr id="10" name="">
             <a:extLst xmlns:a="http://schemas.openxmlformats.org/drawingml/2006/main">
               <a:ext uri="{FF2B5EF4-FFF2-40B4-BE49-F238E27FC236}">
-                <a16:creationId xmlns:a16="http://schemas.microsoft.com/office/drawing/2014/main" id="{041CD445-39E3-40B7-8898-C20D507AF2C1}"/>
+                <a16:creationId xmlns:a16="http://schemas.microsoft.com/office/drawing/2014/main" id="{1D7D0347-D5BB-49B6-B357-F718D62F31B4}"/>
               </a:ext>
             </a:extLst>
           </p:cNvPr>
@@ -17650,7 +17650,7 @@
           <p:cNvPr id="11" name="">
             <a:extLst xmlns:a="http://schemas.openxmlformats.org/drawingml/2006/main">
               <a:ext uri="{FF2B5EF4-FFF2-40B4-BE49-F238E27FC236}">
-                <a16:creationId xmlns:a16="http://schemas.microsoft.com/office/drawing/2014/main" id="{8C860FC4-0188-4123-8560-E1478916727D}"/>
+                <a16:creationId xmlns:a16="http://schemas.microsoft.com/office/drawing/2014/main" id="{AD56465E-1FF4-444D-A05C-5F0B452873EF}"/>
               </a:ext>
             </a:extLst>
           </p:cNvPr>
@@ -17681,7 +17681,7 @@
           <p:cNvPr id="12" name="">
             <a:extLst xmlns:a="http://schemas.openxmlformats.org/drawingml/2006/main">
               <a:ext uri="{FF2B5EF4-FFF2-40B4-BE49-F238E27FC236}">
-                <a16:creationId xmlns:a16="http://schemas.microsoft.com/office/drawing/2014/main" id="{11386EF9-C954-4E7B-A883-124936762EA0}"/>
+                <a16:creationId xmlns:a16="http://schemas.microsoft.com/office/drawing/2014/main" id="{22E228F1-35CC-47D7-A855-0CE313BE39B1}"/>
               </a:ext>
             </a:extLst>
           </p:cNvPr>
@@ -17712,7 +17712,7 @@
           <p:cNvPr id="13" name="">
             <a:extLst xmlns:a="http://schemas.openxmlformats.org/drawingml/2006/main">
               <a:ext uri="{FF2B5EF4-FFF2-40B4-BE49-F238E27FC236}">
-                <a16:creationId xmlns:a16="http://schemas.microsoft.com/office/drawing/2014/main" id="{C72E1AFA-6A64-477D-B72E-9A4829F06085}"/>
+                <a16:creationId xmlns:a16="http://schemas.microsoft.com/office/drawing/2014/main" id="{B99EA577-EEFC-408F-B00C-A45B5E482EE1}"/>
               </a:ext>
             </a:extLst>
           </p:cNvPr>
@@ -17764,7 +17764,7 @@
           <p:cNvPr id="14" name="">
             <a:extLst xmlns:a="http://schemas.openxmlformats.org/drawingml/2006/main">
               <a:ext uri="{FF2B5EF4-FFF2-40B4-BE49-F238E27FC236}">
-                <a16:creationId xmlns:a16="http://schemas.microsoft.com/office/drawing/2014/main" id="{5B6E47D3-32D9-404D-A763-DE32D924CC4F}"/>
+                <a16:creationId xmlns:a16="http://schemas.microsoft.com/office/drawing/2014/main" id="{B6FB8674-1416-4647-8690-98CED320FFF0}"/>
               </a:ext>
             </a:extLst>
           </p:cNvPr>
@@ -17816,7 +17816,7 @@
           <p:cNvPr id="15" name="">
             <a:extLst xmlns:a="http://schemas.openxmlformats.org/drawingml/2006/main">
               <a:ext uri="{FF2B5EF4-FFF2-40B4-BE49-F238E27FC236}">
-                <a16:creationId xmlns:a16="http://schemas.microsoft.com/office/drawing/2014/main" id="{7C04CF8B-F28B-42AF-8DDF-2875C6D09439}"/>
+                <a16:creationId xmlns:a16="http://schemas.microsoft.com/office/drawing/2014/main" id="{9221D6B5-6A63-4B6E-8D53-6C7490782FD7}"/>
               </a:ext>
             </a:extLst>
           </p:cNvPr>
@@ -17868,7 +17868,7 @@
           <p:cNvPr id="16" name="">
             <a:extLst xmlns:a="http://schemas.openxmlformats.org/drawingml/2006/main">
               <a:ext uri="{FF2B5EF4-FFF2-40B4-BE49-F238E27FC236}">
-                <a16:creationId xmlns:a16="http://schemas.microsoft.com/office/drawing/2014/main" id="{440552A8-94B1-4AA2-9637-EB3E1EFDB984}"/>
+                <a16:creationId xmlns:a16="http://schemas.microsoft.com/office/drawing/2014/main" id="{B124B0F3-CF0F-411F-AFE0-8FB3C4B5F183}"/>
               </a:ext>
             </a:extLst>
           </p:cNvPr>
@@ -17920,7 +17920,7 @@
           <p:cNvPr id="17" name="">
             <a:extLst xmlns:a="http://schemas.openxmlformats.org/drawingml/2006/main">
               <a:ext uri="{FF2B5EF4-FFF2-40B4-BE49-F238E27FC236}">
-                <a16:creationId xmlns:a16="http://schemas.microsoft.com/office/drawing/2014/main" id="{6AE608CE-8E55-4475-BBDF-E8B46AD7EECD}"/>
+                <a16:creationId xmlns:a16="http://schemas.microsoft.com/office/drawing/2014/main" id="{90396B32-8C82-474E-B6A7-2969BBCBDEB3}"/>
               </a:ext>
             </a:extLst>
           </p:cNvPr>
@@ -17972,7 +17972,7 @@
           <p:cNvPr id="18" name="">
             <a:extLst xmlns:a="http://schemas.openxmlformats.org/drawingml/2006/main">
               <a:ext uri="{FF2B5EF4-FFF2-40B4-BE49-F238E27FC236}">
-                <a16:creationId xmlns:a16="http://schemas.microsoft.com/office/drawing/2014/main" id="{2B11B01E-E115-48C5-913E-0BE2784109B4}"/>
+                <a16:creationId xmlns:a16="http://schemas.microsoft.com/office/drawing/2014/main" id="{CD84B162-9719-4625-ABF5-810532439A50}"/>
               </a:ext>
             </a:extLst>
           </p:cNvPr>
@@ -18003,7 +18003,7 @@
           <p:cNvPr id="19" name="">
             <a:extLst xmlns:a="http://schemas.openxmlformats.org/drawingml/2006/main">
               <a:ext uri="{FF2B5EF4-FFF2-40B4-BE49-F238E27FC236}">
-                <a16:creationId xmlns:a16="http://schemas.microsoft.com/office/drawing/2014/main" id="{71B08DC4-3D86-4D45-B78A-DD287D81098D}"/>
+                <a16:creationId xmlns:a16="http://schemas.microsoft.com/office/drawing/2014/main" id="{B827BE7E-052A-4292-BC91-77B62353018F}"/>
               </a:ext>
             </a:extLst>
           </p:cNvPr>
@@ -18034,7 +18034,7 @@
           <p:cNvPr id="20" name="">
             <a:extLst xmlns:a="http://schemas.openxmlformats.org/drawingml/2006/main">
               <a:ext uri="{FF2B5EF4-FFF2-40B4-BE49-F238E27FC236}">
-                <a16:creationId xmlns:a16="http://schemas.microsoft.com/office/drawing/2014/main" id="{56165E33-4D37-4407-AFF7-4326F8DB9FA5}"/>
+                <a16:creationId xmlns:a16="http://schemas.microsoft.com/office/drawing/2014/main" id="{B15F3BD3-1ACC-41B7-929A-E446F1F0FADB}"/>
               </a:ext>
             </a:extLst>
           </p:cNvPr>
@@ -18086,7 +18086,7 @@
           <p:cNvPr id="21" name="">
             <a:extLst xmlns:a="http://schemas.openxmlformats.org/drawingml/2006/main">
               <a:ext uri="{FF2B5EF4-FFF2-40B4-BE49-F238E27FC236}">
-                <a16:creationId xmlns:a16="http://schemas.microsoft.com/office/drawing/2014/main" id="{1A59EED3-B579-4EBC-AC47-630348C4F904}"/>
+                <a16:creationId xmlns:a16="http://schemas.microsoft.com/office/drawing/2014/main" id="{903C49CD-C5B1-4AE8-B32F-8BD5E9A33EC1}"/>
               </a:ext>
             </a:extLst>
           </p:cNvPr>
@@ -18138,7 +18138,7 @@
           <p:cNvPr id="22" name="">
             <a:extLst xmlns:a="http://schemas.openxmlformats.org/drawingml/2006/main">
               <a:ext uri="{FF2B5EF4-FFF2-40B4-BE49-F238E27FC236}">
-                <a16:creationId xmlns:a16="http://schemas.microsoft.com/office/drawing/2014/main" id="{9BF39550-D539-4416-9631-6567304E128B}"/>
+                <a16:creationId xmlns:a16="http://schemas.microsoft.com/office/drawing/2014/main" id="{89FAF4E8-0425-4A1E-B13E-D4EF262A915C}"/>
               </a:ext>
             </a:extLst>
           </p:cNvPr>
@@ -18190,7 +18190,7 @@
           <p:cNvPr id="23" name="">
             <a:extLst xmlns:a="http://schemas.openxmlformats.org/drawingml/2006/main">
               <a:ext uri="{FF2B5EF4-FFF2-40B4-BE49-F238E27FC236}">
-                <a16:creationId xmlns:a16="http://schemas.microsoft.com/office/drawing/2014/main" id="{9880E0BD-8866-46D2-B896-4CEE6F7AB33E}"/>
+                <a16:creationId xmlns:a16="http://schemas.microsoft.com/office/drawing/2014/main" id="{872ADD51-2B24-4AA5-AEC3-2881ECC04C44}"/>
               </a:ext>
             </a:extLst>
           </p:cNvPr>
@@ -18242,7 +18242,7 @@
           <p:cNvPr id="24" name="">
             <a:extLst xmlns:a="http://schemas.openxmlformats.org/drawingml/2006/main">
               <a:ext uri="{FF2B5EF4-FFF2-40B4-BE49-F238E27FC236}">
-                <a16:creationId xmlns:a16="http://schemas.microsoft.com/office/drawing/2014/main" id="{1A60DCF3-352D-4BEF-ADD7-69782BAB0D87}"/>
+                <a16:creationId xmlns:a16="http://schemas.microsoft.com/office/drawing/2014/main" id="{6847719D-21FD-4E32-85AB-56441DCD93A8}"/>
               </a:ext>
             </a:extLst>
           </p:cNvPr>
@@ -18294,7 +18294,7 @@
           <p:cNvPr id="25" name="">
             <a:extLst xmlns:a="http://schemas.openxmlformats.org/drawingml/2006/main">
               <a:ext uri="{FF2B5EF4-FFF2-40B4-BE49-F238E27FC236}">
-                <a16:creationId xmlns:a16="http://schemas.microsoft.com/office/drawing/2014/main" id="{5F599717-7786-495F-A283-E22C39AFF0E9}"/>
+                <a16:creationId xmlns:a16="http://schemas.microsoft.com/office/drawing/2014/main" id="{BEBA83CB-034D-44A6-B83C-B435AC6A8631}"/>
               </a:ext>
             </a:extLst>
           </p:cNvPr>
@@ -18325,7 +18325,7 @@
           <p:cNvPr id="26" name="">
             <a:extLst xmlns:a="http://schemas.openxmlformats.org/drawingml/2006/main">
               <a:ext uri="{FF2B5EF4-FFF2-40B4-BE49-F238E27FC236}">
-                <a16:creationId xmlns:a16="http://schemas.microsoft.com/office/drawing/2014/main" id="{DD3C49C4-1269-40DB-A318-2044A12D812C}"/>
+                <a16:creationId xmlns:a16="http://schemas.microsoft.com/office/drawing/2014/main" id="{C88FC711-3477-4A76-8DBB-9173E76B7AB9}"/>
               </a:ext>
             </a:extLst>
           </p:cNvPr>
@@ -18377,7 +18377,7 @@
           <p:cNvPr id="27" name="">
             <a:extLst xmlns:a="http://schemas.openxmlformats.org/drawingml/2006/main">
               <a:ext uri="{FF2B5EF4-FFF2-40B4-BE49-F238E27FC236}">
-                <a16:creationId xmlns:a16="http://schemas.microsoft.com/office/drawing/2014/main" id="{D37093C1-907C-4C37-9A97-675362F979B8}"/>
+                <a16:creationId xmlns:a16="http://schemas.microsoft.com/office/drawing/2014/main" id="{2A69CFD4-3A26-4E38-B2C9-595490375E1A}"/>
               </a:ext>
             </a:extLst>
           </p:cNvPr>
@@ -18429,7 +18429,7 @@
           <p:cNvPr id="28" name="">
             <a:extLst xmlns:a="http://schemas.openxmlformats.org/drawingml/2006/main">
               <a:ext uri="{FF2B5EF4-FFF2-40B4-BE49-F238E27FC236}">
-                <a16:creationId xmlns:a16="http://schemas.microsoft.com/office/drawing/2014/main" id="{F75B2689-4BD2-4D49-B0DA-235E25F8EB94}"/>
+                <a16:creationId xmlns:a16="http://schemas.microsoft.com/office/drawing/2014/main" id="{F936206D-B5F6-4EFB-A0EF-C07417D96FC9}"/>
               </a:ext>
             </a:extLst>
           </p:cNvPr>
@@ -18481,7 +18481,7 @@
           <p:cNvPr id="29" name="">
             <a:extLst xmlns:a="http://schemas.openxmlformats.org/drawingml/2006/main">
               <a:ext uri="{FF2B5EF4-FFF2-40B4-BE49-F238E27FC236}">
-                <a16:creationId xmlns:a16="http://schemas.microsoft.com/office/drawing/2014/main" id="{38F6629A-8958-4C98-AE04-69D74A466A44}"/>
+                <a16:creationId xmlns:a16="http://schemas.microsoft.com/office/drawing/2014/main" id="{5EB3EEFB-A186-4A40-BA89-A5C8B89D96DF}"/>
               </a:ext>
             </a:extLst>
           </p:cNvPr>
@@ -18533,7 +18533,7 @@
           <p:cNvPr id="30" name="">
             <a:extLst xmlns:a="http://schemas.openxmlformats.org/drawingml/2006/main">
               <a:ext uri="{FF2B5EF4-FFF2-40B4-BE49-F238E27FC236}">
-                <a16:creationId xmlns:a16="http://schemas.microsoft.com/office/drawing/2014/main" id="{09D74AD5-0525-40E1-A841-D84BFAB436D8}"/>
+                <a16:creationId xmlns:a16="http://schemas.microsoft.com/office/drawing/2014/main" id="{3AA0C5ED-772E-4A98-9D4C-63187A3307C1}"/>
               </a:ext>
             </a:extLst>
           </p:cNvPr>
@@ -18585,7 +18585,7 @@
           <p:cNvPr id="31" name="">
             <a:extLst xmlns:a="http://schemas.openxmlformats.org/drawingml/2006/main">
               <a:ext uri="{FF2B5EF4-FFF2-40B4-BE49-F238E27FC236}">
-                <a16:creationId xmlns:a16="http://schemas.microsoft.com/office/drawing/2014/main" id="{D8A9DEB7-F426-4699-9F1E-49877F747102}"/>
+                <a16:creationId xmlns:a16="http://schemas.microsoft.com/office/drawing/2014/main" id="{C92694E7-D1F5-427E-B398-FE916DF41BEC}"/>
               </a:ext>
             </a:extLst>
           </p:cNvPr>
@@ -18616,7 +18616,7 @@
           <p:cNvPr id="32" name="">
             <a:extLst xmlns:a="http://schemas.openxmlformats.org/drawingml/2006/main">
               <a:ext uri="{FF2B5EF4-FFF2-40B4-BE49-F238E27FC236}">
-                <a16:creationId xmlns:a16="http://schemas.microsoft.com/office/drawing/2014/main" id="{9764EAFF-6A01-4BC7-880D-D5CC442663C2}"/>
+                <a16:creationId xmlns:a16="http://schemas.microsoft.com/office/drawing/2014/main" id="{FFE78BE1-3CEC-490C-B083-F50474C08BB5}"/>
               </a:ext>
             </a:extLst>
           </p:cNvPr>
@@ -18647,7 +18647,7 @@
           <p:cNvPr id="33" name="">
             <a:extLst xmlns:a="http://schemas.openxmlformats.org/drawingml/2006/main">
               <a:ext uri="{FF2B5EF4-FFF2-40B4-BE49-F238E27FC236}">
-                <a16:creationId xmlns:a16="http://schemas.microsoft.com/office/drawing/2014/main" id="{456B7DD9-AE39-4BDD-A6DC-B622DF9045EF}"/>
+                <a16:creationId xmlns:a16="http://schemas.microsoft.com/office/drawing/2014/main" id="{E9FF4C83-AB89-4527-939C-1C67A782618E}"/>
               </a:ext>
             </a:extLst>
           </p:cNvPr>
@@ -18699,7 +18699,7 @@
           <p:cNvPr id="34" name="">
             <a:extLst xmlns:a="http://schemas.openxmlformats.org/drawingml/2006/main">
               <a:ext uri="{FF2B5EF4-FFF2-40B4-BE49-F238E27FC236}">
-                <a16:creationId xmlns:a16="http://schemas.microsoft.com/office/drawing/2014/main" id="{3B12F96A-BB84-4795-AC87-41817C54E0B4}"/>
+                <a16:creationId xmlns:a16="http://schemas.microsoft.com/office/drawing/2014/main" id="{3C5A5C33-1DFA-47AF-B268-4B9012362FBE}"/>
               </a:ext>
             </a:extLst>
           </p:cNvPr>
@@ -18751,7 +18751,7 @@
           <p:cNvPr id="35" name="">
             <a:extLst xmlns:a="http://schemas.openxmlformats.org/drawingml/2006/main">
               <a:ext uri="{FF2B5EF4-FFF2-40B4-BE49-F238E27FC236}">
-                <a16:creationId xmlns:a16="http://schemas.microsoft.com/office/drawing/2014/main" id="{31C47B65-9FCC-4D9C-86DA-79BC2CC1A30C}"/>
+                <a16:creationId xmlns:a16="http://schemas.microsoft.com/office/drawing/2014/main" id="{4139178D-B520-4D8D-849D-5F73BDE2FC63}"/>
               </a:ext>
             </a:extLst>
           </p:cNvPr>
@@ -18803,7 +18803,7 @@
           <p:cNvPr id="36" name="">
             <a:extLst xmlns:a="http://schemas.openxmlformats.org/drawingml/2006/main">
               <a:ext uri="{FF2B5EF4-FFF2-40B4-BE49-F238E27FC236}">
-                <a16:creationId xmlns:a16="http://schemas.microsoft.com/office/drawing/2014/main" id="{7756938C-017D-420C-8645-9FFA5B821482}"/>
+                <a16:creationId xmlns:a16="http://schemas.microsoft.com/office/drawing/2014/main" id="{395FF7D8-7AC6-47D4-A89A-22870ECD898C}"/>
               </a:ext>
             </a:extLst>
           </p:cNvPr>
@@ -18855,7 +18855,7 @@
           <p:cNvPr id="37" name="">
             <a:extLst xmlns:a="http://schemas.openxmlformats.org/drawingml/2006/main">
               <a:ext uri="{FF2B5EF4-FFF2-40B4-BE49-F238E27FC236}">
-                <a16:creationId xmlns:a16="http://schemas.microsoft.com/office/drawing/2014/main" id="{D6E7D71A-71B3-4F5D-B85D-4323BB65C6D5}"/>
+                <a16:creationId xmlns:a16="http://schemas.microsoft.com/office/drawing/2014/main" id="{38B30148-1C21-4D02-A184-6A24384760EB}"/>
               </a:ext>
             </a:extLst>
           </p:cNvPr>
@@ -18907,7 +18907,7 @@
           <p:cNvPr id="38" name="">
             <a:extLst xmlns:a="http://schemas.openxmlformats.org/drawingml/2006/main">
               <a:ext uri="{FF2B5EF4-FFF2-40B4-BE49-F238E27FC236}">
-                <a16:creationId xmlns:a16="http://schemas.microsoft.com/office/drawing/2014/main" id="{F1376E49-6098-4457-920E-8E063380B387}"/>
+                <a16:creationId xmlns:a16="http://schemas.microsoft.com/office/drawing/2014/main" id="{C48D4E93-E24F-47F2-A336-7C1752B172B3}"/>
               </a:ext>
             </a:extLst>
           </p:cNvPr>
@@ -18938,7 +18938,7 @@
           <p:cNvPr id="39" name="">
             <a:extLst xmlns:a="http://schemas.openxmlformats.org/drawingml/2006/main">
               <a:ext uri="{FF2B5EF4-FFF2-40B4-BE49-F238E27FC236}">
-                <a16:creationId xmlns:a16="http://schemas.microsoft.com/office/drawing/2014/main" id="{B5BEAF7C-3A22-4170-8191-31B48CC2F173}"/>
+                <a16:creationId xmlns:a16="http://schemas.microsoft.com/office/drawing/2014/main" id="{50ED3831-0B9D-4203-84E6-F96E093007F2}"/>
               </a:ext>
             </a:extLst>
           </p:cNvPr>
@@ -18990,7 +18990,7 @@
           <p:cNvPr id="40" name="">
             <a:extLst xmlns:a="http://schemas.openxmlformats.org/drawingml/2006/main">
               <a:ext uri="{FF2B5EF4-FFF2-40B4-BE49-F238E27FC236}">
-                <a16:creationId xmlns:a16="http://schemas.microsoft.com/office/drawing/2014/main" id="{6EC34375-885C-4DDF-805C-A71371B21EE3}"/>
+                <a16:creationId xmlns:a16="http://schemas.microsoft.com/office/drawing/2014/main" id="{0DE062D2-795F-4791-AB75-97E8990C8952}"/>
               </a:ext>
             </a:extLst>
           </p:cNvPr>
@@ -19042,7 +19042,7 @@
           <p:cNvPr id="41" name="">
             <a:extLst xmlns:a="http://schemas.openxmlformats.org/drawingml/2006/main">
               <a:ext uri="{FF2B5EF4-FFF2-40B4-BE49-F238E27FC236}">
-                <a16:creationId xmlns:a16="http://schemas.microsoft.com/office/drawing/2014/main" id="{CE41E8F4-5692-44F8-AD21-212D1E5AA1B4}"/>
+                <a16:creationId xmlns:a16="http://schemas.microsoft.com/office/drawing/2014/main" id="{C24E6326-720B-42D7-B57C-58EEC90B571E}"/>
               </a:ext>
             </a:extLst>
           </p:cNvPr>
@@ -19094,7 +19094,7 @@
           <p:cNvPr id="42" name="">
             <a:extLst xmlns:a="http://schemas.openxmlformats.org/drawingml/2006/main">
               <a:ext uri="{FF2B5EF4-FFF2-40B4-BE49-F238E27FC236}">
-                <a16:creationId xmlns:a16="http://schemas.microsoft.com/office/drawing/2014/main" id="{14D4BD8F-240E-4FE0-A144-D051A9039031}"/>
+                <a16:creationId xmlns:a16="http://schemas.microsoft.com/office/drawing/2014/main" id="{DBF865F0-8816-4E87-B4EC-41A8A2ED7557}"/>
               </a:ext>
             </a:extLst>
           </p:cNvPr>
@@ -19146,7 +19146,7 @@
           <p:cNvPr id="43" name="">
             <a:extLst xmlns:a="http://schemas.openxmlformats.org/drawingml/2006/main">
               <a:ext uri="{FF2B5EF4-FFF2-40B4-BE49-F238E27FC236}">
-                <a16:creationId xmlns:a16="http://schemas.microsoft.com/office/drawing/2014/main" id="{ABD5EEEA-DB23-4970-8F7B-F69AF7D77AFF}"/>
+                <a16:creationId xmlns:a16="http://schemas.microsoft.com/office/drawing/2014/main" id="{9A038B0B-6011-4F6D-AEEB-443A8F3923EB}"/>
               </a:ext>
             </a:extLst>
           </p:cNvPr>
@@ -19198,7 +19198,7 @@
           <p:cNvPr id="44" name="">
             <a:extLst xmlns:a="http://schemas.openxmlformats.org/drawingml/2006/main">
               <a:ext uri="{FF2B5EF4-FFF2-40B4-BE49-F238E27FC236}">
-                <a16:creationId xmlns:a16="http://schemas.microsoft.com/office/drawing/2014/main" id="{4A493EBF-2065-4E85-90D4-7ED206C05656}"/>
+                <a16:creationId xmlns:a16="http://schemas.microsoft.com/office/drawing/2014/main" id="{ED11B863-C8B3-4DB5-8A88-7176D8A4B6C5}"/>
               </a:ext>
             </a:extLst>
           </p:cNvPr>
@@ -19229,7 +19229,7 @@
           <p:cNvPr id="45" name="">
             <a:extLst xmlns:a="http://schemas.openxmlformats.org/drawingml/2006/main">
               <a:ext uri="{FF2B5EF4-FFF2-40B4-BE49-F238E27FC236}">
-                <a16:creationId xmlns:a16="http://schemas.microsoft.com/office/drawing/2014/main" id="{537CADC1-A87B-47AA-9736-44DA76E60925}"/>
+                <a16:creationId xmlns:a16="http://schemas.microsoft.com/office/drawing/2014/main" id="{21E24075-4695-4D1E-9932-481DDC5F31C1}"/>
               </a:ext>
             </a:extLst>
           </p:cNvPr>
@@ -19260,7 +19260,7 @@
           <p:cNvPr id="46" name="">
             <a:extLst xmlns:a="http://schemas.openxmlformats.org/drawingml/2006/main">
               <a:ext uri="{FF2B5EF4-FFF2-40B4-BE49-F238E27FC236}">
-                <a16:creationId xmlns:a16="http://schemas.microsoft.com/office/drawing/2014/main" id="{CB8DECCE-9CC7-4466-A383-0FBA248C5B28}"/>
+                <a16:creationId xmlns:a16="http://schemas.microsoft.com/office/drawing/2014/main" id="{DF92A913-0326-4F9E-8A44-3EFEAF8CB3C8}"/>
               </a:ext>
             </a:extLst>
           </p:cNvPr>
@@ -19312,7 +19312,7 @@
           <p:cNvPr id="47" name="">
             <a:extLst xmlns:a="http://schemas.openxmlformats.org/drawingml/2006/main">
               <a:ext uri="{FF2B5EF4-FFF2-40B4-BE49-F238E27FC236}">
-                <a16:creationId xmlns:a16="http://schemas.microsoft.com/office/drawing/2014/main" id="{6CD25979-9E9E-4F05-B6F4-9406FF67434C}"/>
+                <a16:creationId xmlns:a16="http://schemas.microsoft.com/office/drawing/2014/main" id="{64CA01CE-1CF1-4DA5-A868-2C462D6FDCAB}"/>
               </a:ext>
             </a:extLst>
           </p:cNvPr>
@@ -19364,7 +19364,7 @@
           <p:cNvPr id="48" name="">
             <a:extLst xmlns:a="http://schemas.openxmlformats.org/drawingml/2006/main">
               <a:ext uri="{FF2B5EF4-FFF2-40B4-BE49-F238E27FC236}">
-                <a16:creationId xmlns:a16="http://schemas.microsoft.com/office/drawing/2014/main" id="{6F6F3AA0-AA6F-494F-8B1B-B5DA4A626FF2}"/>
+                <a16:creationId xmlns:a16="http://schemas.microsoft.com/office/drawing/2014/main" id="{667C6E25-47C0-47AA-A4A6-4CC1EE2B2487}"/>
               </a:ext>
             </a:extLst>
           </p:cNvPr>
@@ -19416,7 +19416,7 @@
           <p:cNvPr id="49" name="">
             <a:extLst xmlns:a="http://schemas.openxmlformats.org/drawingml/2006/main">
               <a:ext uri="{FF2B5EF4-FFF2-40B4-BE49-F238E27FC236}">
-                <a16:creationId xmlns:a16="http://schemas.microsoft.com/office/drawing/2014/main" id="{172105DF-51CE-4DFE-8BF7-54D0F2E5580D}"/>
+                <a16:creationId xmlns:a16="http://schemas.microsoft.com/office/drawing/2014/main" id="{4157F19D-C82A-474F-9009-8515B5969B52}"/>
               </a:ext>
             </a:extLst>
           </p:cNvPr>
@@ -19468,7 +19468,7 @@
           <p:cNvPr id="50" name="">
             <a:extLst xmlns:a="http://schemas.openxmlformats.org/drawingml/2006/main">
               <a:ext uri="{FF2B5EF4-FFF2-40B4-BE49-F238E27FC236}">
-                <a16:creationId xmlns:a16="http://schemas.microsoft.com/office/drawing/2014/main" id="{8B1BA888-C351-49D2-B663-2AB48E55A843}"/>
+                <a16:creationId xmlns:a16="http://schemas.microsoft.com/office/drawing/2014/main" id="{2ABED925-09D9-4865-B128-3285168F24CC}"/>
               </a:ext>
             </a:extLst>
           </p:cNvPr>
@@ -19520,7 +19520,7 @@
           <p:cNvPr id="51" name="">
             <a:extLst xmlns:a="http://schemas.openxmlformats.org/drawingml/2006/main">
               <a:ext uri="{FF2B5EF4-FFF2-40B4-BE49-F238E27FC236}">
-                <a16:creationId xmlns:a16="http://schemas.microsoft.com/office/drawing/2014/main" id="{91D1E04A-A270-497C-8762-4A1093C555C7}"/>
+                <a16:creationId xmlns:a16="http://schemas.microsoft.com/office/drawing/2014/main" id="{A2E4E445-1D55-4307-9146-B5BCB4C31015}"/>
               </a:ext>
             </a:extLst>
           </p:cNvPr>
@@ -19551,7 +19551,7 @@
           <p:cNvPr id="52" name="">
             <a:extLst xmlns:a="http://schemas.openxmlformats.org/drawingml/2006/main">
               <a:ext uri="{FF2B5EF4-FFF2-40B4-BE49-F238E27FC236}">
-                <a16:creationId xmlns:a16="http://schemas.microsoft.com/office/drawing/2014/main" id="{354622FE-4B80-4A62-B763-409EC5FA18D5}"/>
+                <a16:creationId xmlns:a16="http://schemas.microsoft.com/office/drawing/2014/main" id="{009F1639-0DE6-4BF0-AF8A-9383E72E5FBC}"/>
               </a:ext>
             </a:extLst>
           </p:cNvPr>
@@ -19603,7 +19603,7 @@
           <p:cNvPr id="53" name="">
             <a:extLst xmlns:a="http://schemas.openxmlformats.org/drawingml/2006/main">
               <a:ext uri="{FF2B5EF4-FFF2-40B4-BE49-F238E27FC236}">
-                <a16:creationId xmlns:a16="http://schemas.microsoft.com/office/drawing/2014/main" id="{6CF609D2-B174-4493-BD65-CBD04504E6B1}"/>
+                <a16:creationId xmlns:a16="http://schemas.microsoft.com/office/drawing/2014/main" id="{141D3B01-CF89-44A8-B318-3D6AED221AB2}"/>
               </a:ext>
             </a:extLst>
           </p:cNvPr>
@@ -19655,7 +19655,7 @@
           <p:cNvPr id="54" name="">
             <a:extLst xmlns:a="http://schemas.openxmlformats.org/drawingml/2006/main">
               <a:ext uri="{FF2B5EF4-FFF2-40B4-BE49-F238E27FC236}">
-                <a16:creationId xmlns:a16="http://schemas.microsoft.com/office/drawing/2014/main" id="{8D35D13F-EEDA-490F-9956-3339D7FFF634}"/>
+                <a16:creationId xmlns:a16="http://schemas.microsoft.com/office/drawing/2014/main" id="{2416458D-0C46-4B3F-8CDD-EF9E5B4ABF8D}"/>
               </a:ext>
             </a:extLst>
           </p:cNvPr>
@@ -19707,7 +19707,7 @@
           <p:cNvPr id="55" name="">
             <a:extLst xmlns:a="http://schemas.openxmlformats.org/drawingml/2006/main">
               <a:ext uri="{FF2B5EF4-FFF2-40B4-BE49-F238E27FC236}">
-                <a16:creationId xmlns:a16="http://schemas.microsoft.com/office/drawing/2014/main" id="{7B88DD78-D540-48CC-8087-E793A44053EF}"/>
+                <a16:creationId xmlns:a16="http://schemas.microsoft.com/office/drawing/2014/main" id="{99F85BFD-B3B7-433A-92D4-CD440ED93E25}"/>
               </a:ext>
             </a:extLst>
           </p:cNvPr>
@@ -19759,7 +19759,7 @@
           <p:cNvPr id="56" name="">
             <a:extLst xmlns:a="http://schemas.openxmlformats.org/drawingml/2006/main">
               <a:ext uri="{FF2B5EF4-FFF2-40B4-BE49-F238E27FC236}">
-                <a16:creationId xmlns:a16="http://schemas.microsoft.com/office/drawing/2014/main" id="{72AD7FA0-3D48-4C75-9389-954DB932C385}"/>
+                <a16:creationId xmlns:a16="http://schemas.microsoft.com/office/drawing/2014/main" id="{BB5F4FD4-5E4E-4374-88B9-8E419A6573F3}"/>
               </a:ext>
             </a:extLst>
           </p:cNvPr>
@@ -19811,7 +19811,7 @@
           <p:cNvPr id="57" name="">
             <a:extLst xmlns:a="http://schemas.openxmlformats.org/drawingml/2006/main">
               <a:ext uri="{FF2B5EF4-FFF2-40B4-BE49-F238E27FC236}">
-                <a16:creationId xmlns:a16="http://schemas.microsoft.com/office/drawing/2014/main" id="{1E12D65D-5827-477B-8005-A28EB94E0FB6}"/>
+                <a16:creationId xmlns:a16="http://schemas.microsoft.com/office/drawing/2014/main" id="{44F8EB52-37BF-48E4-B2B3-D0019EC40F6B}"/>
               </a:ext>
             </a:extLst>
           </p:cNvPr>
@@ -19842,7 +19842,7 @@
           <p:cNvPr id="58" name="">
             <a:extLst xmlns:a="http://schemas.openxmlformats.org/drawingml/2006/main">
               <a:ext uri="{FF2B5EF4-FFF2-40B4-BE49-F238E27FC236}">
-                <a16:creationId xmlns:a16="http://schemas.microsoft.com/office/drawing/2014/main" id="{3B60E22D-9463-4157-8AF3-A9B47EB6A986}"/>
+                <a16:creationId xmlns:a16="http://schemas.microsoft.com/office/drawing/2014/main" id="{BFF28B3D-784F-45AA-9EE8-8A0A2F2D6367}"/>
               </a:ext>
             </a:extLst>
           </p:cNvPr>
@@ -19873,7 +19873,7 @@
           <p:cNvPr id="59" name="">
             <a:extLst xmlns:a="http://schemas.openxmlformats.org/drawingml/2006/main">
               <a:ext uri="{FF2B5EF4-FFF2-40B4-BE49-F238E27FC236}">
-                <a16:creationId xmlns:a16="http://schemas.microsoft.com/office/drawing/2014/main" id="{07F3939B-0C69-4DE9-AA3C-C99E36664D22}"/>
+                <a16:creationId xmlns:a16="http://schemas.microsoft.com/office/drawing/2014/main" id="{71A8F55F-CD45-40D6-B221-3E1E9CC12F14}"/>
               </a:ext>
             </a:extLst>
           </p:cNvPr>
@@ -19925,7 +19925,7 @@
           <p:cNvPr id="60" name="">
             <a:extLst xmlns:a="http://schemas.openxmlformats.org/drawingml/2006/main">
               <a:ext uri="{FF2B5EF4-FFF2-40B4-BE49-F238E27FC236}">
-                <a16:creationId xmlns:a16="http://schemas.microsoft.com/office/drawing/2014/main" id="{52F308A7-31B7-4B0D-BD76-5DA3EECDB66B}"/>
+                <a16:creationId xmlns:a16="http://schemas.microsoft.com/office/drawing/2014/main" id="{C713729C-70BC-451A-882C-62B20643AC94}"/>
               </a:ext>
             </a:extLst>
           </p:cNvPr>
@@ -19977,7 +19977,7 @@
           <p:cNvPr id="61" name="">
             <a:extLst xmlns:a="http://schemas.openxmlformats.org/drawingml/2006/main">
               <a:ext uri="{FF2B5EF4-FFF2-40B4-BE49-F238E27FC236}">
-                <a16:creationId xmlns:a16="http://schemas.microsoft.com/office/drawing/2014/main" id="{AB30E150-712E-4E3F-AD93-0993C4660714}"/>
+                <a16:creationId xmlns:a16="http://schemas.microsoft.com/office/drawing/2014/main" id="{0CD35B16-C8D8-4515-A1AB-B8BA7412E192}"/>
               </a:ext>
             </a:extLst>
           </p:cNvPr>
@@ -20029,7 +20029,7 @@
           <p:cNvPr id="62" name="">
             <a:extLst xmlns:a="http://schemas.openxmlformats.org/drawingml/2006/main">
               <a:ext uri="{FF2B5EF4-FFF2-40B4-BE49-F238E27FC236}">
-                <a16:creationId xmlns:a16="http://schemas.microsoft.com/office/drawing/2014/main" id="{C1F7FBB9-181C-4DE1-8A8E-E7E7CD8B1C6C}"/>
+                <a16:creationId xmlns:a16="http://schemas.microsoft.com/office/drawing/2014/main" id="{01C21526-3389-4A41-8336-E00B68BC5231}"/>
               </a:ext>
             </a:extLst>
           </p:cNvPr>
@@ -20081,7 +20081,7 @@
           <p:cNvPr id="63" name="">
             <a:extLst xmlns:a="http://schemas.openxmlformats.org/drawingml/2006/main">
               <a:ext uri="{FF2B5EF4-FFF2-40B4-BE49-F238E27FC236}">
-                <a16:creationId xmlns:a16="http://schemas.microsoft.com/office/drawing/2014/main" id="{9EA9EE99-05A3-4F85-84A5-FBA452C53F39}"/>
+                <a16:creationId xmlns:a16="http://schemas.microsoft.com/office/drawing/2014/main" id="{D0D3A3E4-EBE2-4064-8901-07F4C779F593}"/>
               </a:ext>
             </a:extLst>
           </p:cNvPr>
@@ -20133,7 +20133,7 @@
           <p:cNvPr id="64" name="">
             <a:extLst xmlns:a="http://schemas.openxmlformats.org/drawingml/2006/main">
               <a:ext uri="{FF2B5EF4-FFF2-40B4-BE49-F238E27FC236}">
-                <a16:creationId xmlns:a16="http://schemas.microsoft.com/office/drawing/2014/main" id="{CBEA98A3-FDDF-49D9-8F57-BA69688759D8}"/>
+                <a16:creationId xmlns:a16="http://schemas.microsoft.com/office/drawing/2014/main" id="{B71F9E61-05D0-41CE-A8D6-D40A691EF3A7}"/>
               </a:ext>
             </a:extLst>
           </p:cNvPr>
@@ -20164,7 +20164,7 @@
           <p:cNvPr id="65" name="">
             <a:extLst xmlns:a="http://schemas.openxmlformats.org/drawingml/2006/main">
               <a:ext uri="{FF2B5EF4-FFF2-40B4-BE49-F238E27FC236}">
-                <a16:creationId xmlns:a16="http://schemas.microsoft.com/office/drawing/2014/main" id="{FD8552D4-AD94-42A5-B383-6DC3CC7A5A41}"/>
+                <a16:creationId xmlns:a16="http://schemas.microsoft.com/office/drawing/2014/main" id="{362B0B69-7272-4274-9740-BDAAF7AF0849}"/>
               </a:ext>
             </a:extLst>
           </p:cNvPr>
@@ -20216,7 +20216,7 @@
           <p:cNvPr id="66" name="">
             <a:extLst xmlns:a="http://schemas.openxmlformats.org/drawingml/2006/main">
               <a:ext uri="{FF2B5EF4-FFF2-40B4-BE49-F238E27FC236}">
-                <a16:creationId xmlns:a16="http://schemas.microsoft.com/office/drawing/2014/main" id="{EE6CFD8B-1581-4C70-831A-A49850CE65E6}"/>
+                <a16:creationId xmlns:a16="http://schemas.microsoft.com/office/drawing/2014/main" id="{FEC1C9F1-ADAF-4E78-91D7-E0C01CA48FB1}"/>
               </a:ext>
             </a:extLst>
           </p:cNvPr>
@@ -20268,7 +20268,7 @@
           <p:cNvPr id="67" name="">
             <a:extLst xmlns:a="http://schemas.openxmlformats.org/drawingml/2006/main">
               <a:ext uri="{FF2B5EF4-FFF2-40B4-BE49-F238E27FC236}">
-                <a16:creationId xmlns:a16="http://schemas.microsoft.com/office/drawing/2014/main" id="{C12D3BCD-9A43-47B1-A662-36696794239C}"/>
+                <a16:creationId xmlns:a16="http://schemas.microsoft.com/office/drawing/2014/main" id="{3D25BFAB-444F-4B49-A5A7-518168CC4FE4}"/>
               </a:ext>
             </a:extLst>
           </p:cNvPr>
@@ -20320,7 +20320,7 @@
           <p:cNvPr id="68" name="">
             <a:extLst xmlns:a="http://schemas.openxmlformats.org/drawingml/2006/main">
               <a:ext uri="{FF2B5EF4-FFF2-40B4-BE49-F238E27FC236}">
-                <a16:creationId xmlns:a16="http://schemas.microsoft.com/office/drawing/2014/main" id="{4A49D4C1-FA0F-4FF8-92DF-67C704B866A9}"/>
+                <a16:creationId xmlns:a16="http://schemas.microsoft.com/office/drawing/2014/main" id="{8D0F95B2-673C-4AA2-BE5F-6D07F0E55A8D}"/>
               </a:ext>
             </a:extLst>
           </p:cNvPr>
@@ -20372,7 +20372,7 @@
           <p:cNvPr id="69" name="">
             <a:extLst xmlns:a="http://schemas.openxmlformats.org/drawingml/2006/main">
               <a:ext uri="{FF2B5EF4-FFF2-40B4-BE49-F238E27FC236}">
-                <a16:creationId xmlns:a16="http://schemas.microsoft.com/office/drawing/2014/main" id="{23E1AB91-32E3-4120-BAC1-6DD7EF0CB19F}"/>
+                <a16:creationId xmlns:a16="http://schemas.microsoft.com/office/drawing/2014/main" id="{FB7904AE-0125-4F10-9871-75646689ACB4}"/>
               </a:ext>
             </a:extLst>
           </p:cNvPr>
@@ -20424,7 +20424,7 @@
           <p:cNvPr id="70" name="">
             <a:extLst xmlns:a="http://schemas.openxmlformats.org/drawingml/2006/main">
               <a:ext uri="{FF2B5EF4-FFF2-40B4-BE49-F238E27FC236}">
-                <a16:creationId xmlns:a16="http://schemas.microsoft.com/office/drawing/2014/main" id="{4DA36C95-C5DC-4A95-B865-72BFDE507CD0}"/>
+                <a16:creationId xmlns:a16="http://schemas.microsoft.com/office/drawing/2014/main" id="{227A3DA2-E19B-47A0-8A4C-61C356947736}"/>
               </a:ext>
             </a:extLst>
           </p:cNvPr>
@@ -20455,7 +20455,7 @@
           <p:cNvPr id="71" name="">
             <a:extLst xmlns:a="http://schemas.openxmlformats.org/drawingml/2006/main">
               <a:ext uri="{FF2B5EF4-FFF2-40B4-BE49-F238E27FC236}">
-                <a16:creationId xmlns:a16="http://schemas.microsoft.com/office/drawing/2014/main" id="{1137E812-5053-4DD2-AB2D-364C49B16EFC}"/>
+                <a16:creationId xmlns:a16="http://schemas.microsoft.com/office/drawing/2014/main" id="{E599AE67-2151-4263-85A4-ECC24A6A01C6}"/>
               </a:ext>
             </a:extLst>
           </p:cNvPr>
@@ -20486,7 +20486,7 @@
           <p:cNvPr id="72" name="">
             <a:extLst xmlns:a="http://schemas.openxmlformats.org/drawingml/2006/main">
               <a:ext uri="{FF2B5EF4-FFF2-40B4-BE49-F238E27FC236}">
-                <a16:creationId xmlns:a16="http://schemas.microsoft.com/office/drawing/2014/main" id="{595E0B71-9511-4265-AD92-F076F88E799F}"/>
+                <a16:creationId xmlns:a16="http://schemas.microsoft.com/office/drawing/2014/main" id="{31FC449E-A48C-442F-AF73-1475A391A30B}"/>
               </a:ext>
             </a:extLst>
           </p:cNvPr>
@@ -20538,7 +20538,7 @@
           <p:cNvPr id="73" name="">
             <a:extLst xmlns:a="http://schemas.openxmlformats.org/drawingml/2006/main">
               <a:ext uri="{FF2B5EF4-FFF2-40B4-BE49-F238E27FC236}">
-                <a16:creationId xmlns:a16="http://schemas.microsoft.com/office/drawing/2014/main" id="{B70287E1-55F5-4D03-99F9-6F1D59617D06}"/>
+                <a16:creationId xmlns:a16="http://schemas.microsoft.com/office/drawing/2014/main" id="{D13AEDD9-9F09-4FC0-8135-3DCE09AE697D}"/>
               </a:ext>
             </a:extLst>
           </p:cNvPr>
@@ -20590,7 +20590,7 @@
           <p:cNvPr id="74" name="">
             <a:extLst xmlns:a="http://schemas.openxmlformats.org/drawingml/2006/main">
               <a:ext uri="{FF2B5EF4-FFF2-40B4-BE49-F238E27FC236}">
-                <a16:creationId xmlns:a16="http://schemas.microsoft.com/office/drawing/2014/main" id="{60576177-D84B-4A55-80B1-67A36A257142}"/>
+                <a16:creationId xmlns:a16="http://schemas.microsoft.com/office/drawing/2014/main" id="{5F989B26-422A-4E61-99FB-14769D694780}"/>
               </a:ext>
             </a:extLst>
           </p:cNvPr>
@@ -20642,7 +20642,7 @@
           <p:cNvPr id="75" name="">
             <a:extLst xmlns:a="http://schemas.openxmlformats.org/drawingml/2006/main">
               <a:ext uri="{FF2B5EF4-FFF2-40B4-BE49-F238E27FC236}">
-                <a16:creationId xmlns:a16="http://schemas.microsoft.com/office/drawing/2014/main" id="{3CA82F00-89C7-4F1F-8F7E-AA1BCB709A1A}"/>
+                <a16:creationId xmlns:a16="http://schemas.microsoft.com/office/drawing/2014/main" id="{AB4F971F-D291-4D29-9FDA-F57FB5282B60}"/>
               </a:ext>
             </a:extLst>
           </p:cNvPr>
@@ -20694,7 +20694,7 @@
           <p:cNvPr id="76" name="">
             <a:extLst xmlns:a="http://schemas.openxmlformats.org/drawingml/2006/main">
               <a:ext uri="{FF2B5EF4-FFF2-40B4-BE49-F238E27FC236}">
-                <a16:creationId xmlns:a16="http://schemas.microsoft.com/office/drawing/2014/main" id="{7DF5912A-0879-4C9A-A445-0ABBEEDD739A}"/>
+                <a16:creationId xmlns:a16="http://schemas.microsoft.com/office/drawing/2014/main" id="{8CDFC11C-C50A-4708-A9DE-4B99AC28B11B}"/>
               </a:ext>
             </a:extLst>
           </p:cNvPr>
@@ -20746,7 +20746,7 @@
           <p:cNvPr id="77" name="">
             <a:extLst xmlns:a="http://schemas.openxmlformats.org/drawingml/2006/main">
               <a:ext uri="{FF2B5EF4-FFF2-40B4-BE49-F238E27FC236}">
-                <a16:creationId xmlns:a16="http://schemas.microsoft.com/office/drawing/2014/main" id="{9B80343F-94C9-49ED-9B90-593205237E38}"/>
+                <a16:creationId xmlns:a16="http://schemas.microsoft.com/office/drawing/2014/main" id="{18278440-7B44-4308-9839-4F4431165968}"/>
               </a:ext>
             </a:extLst>
           </p:cNvPr>
@@ -20777,7 +20777,7 @@
           <p:cNvPr id="78" name="">
             <a:extLst xmlns:a="http://schemas.openxmlformats.org/drawingml/2006/main">
               <a:ext uri="{FF2B5EF4-FFF2-40B4-BE49-F238E27FC236}">
-                <a16:creationId xmlns:a16="http://schemas.microsoft.com/office/drawing/2014/main" id="{16671BEC-D157-4017-A55F-A5163AED9E34}"/>
+                <a16:creationId xmlns:a16="http://schemas.microsoft.com/office/drawing/2014/main" id="{C9B33924-2691-4479-9629-601070A809DE}"/>
               </a:ext>
             </a:extLst>
           </p:cNvPr>
@@ -20829,7 +20829,7 @@
           <p:cNvPr id="79" name="">
             <a:extLst xmlns:a="http://schemas.openxmlformats.org/drawingml/2006/main">
               <a:ext uri="{FF2B5EF4-FFF2-40B4-BE49-F238E27FC236}">
-                <a16:creationId xmlns:a16="http://schemas.microsoft.com/office/drawing/2014/main" id="{216F9ABD-4F36-4D5F-B093-02C9EF3E1B7D}"/>
+                <a16:creationId xmlns:a16="http://schemas.microsoft.com/office/drawing/2014/main" id="{4C165EC0-B745-468F-B4D6-0D626820AF21}"/>
               </a:ext>
             </a:extLst>
           </p:cNvPr>
@@ -20881,7 +20881,7 @@
           <p:cNvPr id="80" name="">
             <a:extLst xmlns:a="http://schemas.openxmlformats.org/drawingml/2006/main">
               <a:ext uri="{FF2B5EF4-FFF2-40B4-BE49-F238E27FC236}">
-                <a16:creationId xmlns:a16="http://schemas.microsoft.com/office/drawing/2014/main" id="{56356341-8DA3-493C-91BA-426C92CD77BF}"/>
+                <a16:creationId xmlns:a16="http://schemas.microsoft.com/office/drawing/2014/main" id="{612FA138-FCD1-445A-ADDD-F0EBF756565E}"/>
               </a:ext>
             </a:extLst>
           </p:cNvPr>
@@ -20933,7 +20933,7 @@
           <p:cNvPr id="81" name="">
             <a:extLst xmlns:a="http://schemas.openxmlformats.org/drawingml/2006/main">
               <a:ext uri="{FF2B5EF4-FFF2-40B4-BE49-F238E27FC236}">
-                <a16:creationId xmlns:a16="http://schemas.microsoft.com/office/drawing/2014/main" id="{9DDAAF4C-852A-4193-B08A-5E301B9F8981}"/>
+                <a16:creationId xmlns:a16="http://schemas.microsoft.com/office/drawing/2014/main" id="{525E0485-D0AA-48A6-9121-C48F181BB35A}"/>
               </a:ext>
             </a:extLst>
           </p:cNvPr>
@@ -20985,7 +20985,7 @@
           <p:cNvPr id="82" name="">
             <a:extLst xmlns:a="http://schemas.openxmlformats.org/drawingml/2006/main">
               <a:ext uri="{FF2B5EF4-FFF2-40B4-BE49-F238E27FC236}">
-                <a16:creationId xmlns:a16="http://schemas.microsoft.com/office/drawing/2014/main" id="{2371ED50-EFEC-4DC0-ABA2-51C6308919CD}"/>
+                <a16:creationId xmlns:a16="http://schemas.microsoft.com/office/drawing/2014/main" id="{6B7CAFB0-01B8-4D6B-A8E2-834121F27E6C}"/>
               </a:ext>
             </a:extLst>
           </p:cNvPr>
@@ -21037,7 +21037,7 @@
           <p:cNvPr id="83" name="">
             <a:extLst xmlns:a="http://schemas.openxmlformats.org/drawingml/2006/main">
               <a:ext uri="{FF2B5EF4-FFF2-40B4-BE49-F238E27FC236}">
-                <a16:creationId xmlns:a16="http://schemas.microsoft.com/office/drawing/2014/main" id="{93E1FC45-0D18-4C11-A8C9-666C7329F3D8}"/>
+                <a16:creationId xmlns:a16="http://schemas.microsoft.com/office/drawing/2014/main" id="{BD5A7451-C472-4E87-8AC1-B3349873DC46}"/>
               </a:ext>
             </a:extLst>
           </p:cNvPr>
@@ -21068,7 +21068,7 @@
           <p:cNvPr id="84" name="">
             <a:extLst xmlns:a="http://schemas.openxmlformats.org/drawingml/2006/main">
               <a:ext uri="{FF2B5EF4-FFF2-40B4-BE49-F238E27FC236}">
-                <a16:creationId xmlns:a16="http://schemas.microsoft.com/office/drawing/2014/main" id="{D587B75E-8CFB-406D-B596-E17B31DF0C45}"/>
+                <a16:creationId xmlns:a16="http://schemas.microsoft.com/office/drawing/2014/main" id="{C45C0425-9B48-4754-AEFB-371AA4E27093}"/>
               </a:ext>
             </a:extLst>
           </p:cNvPr>
@@ -21120,7 +21120,7 @@
           <p:cNvPr id="85" name="">
             <a:extLst xmlns:a="http://schemas.openxmlformats.org/drawingml/2006/main">
               <a:ext uri="{FF2B5EF4-FFF2-40B4-BE49-F238E27FC236}">
-                <a16:creationId xmlns:a16="http://schemas.microsoft.com/office/drawing/2014/main" id="{3AA9F76F-E1F5-4D81-95DA-DBB9B372C5BE}"/>
+                <a16:creationId xmlns:a16="http://schemas.microsoft.com/office/drawing/2014/main" id="{0D665A4C-1F8E-465D-997D-D8238F340F79}"/>
               </a:ext>
             </a:extLst>
           </p:cNvPr>
@@ -21172,7 +21172,7 @@
           <p:cNvPr id="86" name="">
             <a:extLst xmlns:a="http://schemas.openxmlformats.org/drawingml/2006/main">
               <a:ext uri="{FF2B5EF4-FFF2-40B4-BE49-F238E27FC236}">
-                <a16:creationId xmlns:a16="http://schemas.microsoft.com/office/drawing/2014/main" id="{92CB5B3B-443F-48D6-92DE-8C022D933C15}"/>
+                <a16:creationId xmlns:a16="http://schemas.microsoft.com/office/drawing/2014/main" id="{D99B8763-F8E5-4F56-A5BC-0C30F547D9D4}"/>
               </a:ext>
             </a:extLst>
           </p:cNvPr>
@@ -21224,7 +21224,7 @@
           <p:cNvPr id="87" name="">
             <a:extLst xmlns:a="http://schemas.openxmlformats.org/drawingml/2006/main">
               <a:ext uri="{FF2B5EF4-FFF2-40B4-BE49-F238E27FC236}">
-                <a16:creationId xmlns:a16="http://schemas.microsoft.com/office/drawing/2014/main" id="{3B30B0BF-DDAF-4636-83AD-D870B580923E}"/>
+                <a16:creationId xmlns:a16="http://schemas.microsoft.com/office/drawing/2014/main" id="{C62EC2C3-11E9-41B0-9E67-DD3AD2808349}"/>
               </a:ext>
             </a:extLst>
           </p:cNvPr>
@@ -21276,7 +21276,7 @@
           <p:cNvPr id="88" name="">
             <a:extLst xmlns:a="http://schemas.openxmlformats.org/drawingml/2006/main">
               <a:ext uri="{FF2B5EF4-FFF2-40B4-BE49-F238E27FC236}">
-                <a16:creationId xmlns:a16="http://schemas.microsoft.com/office/drawing/2014/main" id="{D8FB0D57-F0E8-4F96-A58E-6808C16DCCCE}"/>
+                <a16:creationId xmlns:a16="http://schemas.microsoft.com/office/drawing/2014/main" id="{504CFE3F-7198-46C4-95B8-3C919BA3D82F}"/>
               </a:ext>
             </a:extLst>
           </p:cNvPr>
@@ -21328,7 +21328,7 @@
           <p:cNvPr id="89" name="">
             <a:extLst xmlns:a="http://schemas.openxmlformats.org/drawingml/2006/main">
               <a:ext uri="{FF2B5EF4-FFF2-40B4-BE49-F238E27FC236}">
-                <a16:creationId xmlns:a16="http://schemas.microsoft.com/office/drawing/2014/main" id="{637B9F14-1E02-4F0F-A57A-1C4EC483A6AF}"/>
+                <a16:creationId xmlns:a16="http://schemas.microsoft.com/office/drawing/2014/main" id="{6903EC7E-699C-4CB8-8161-C6D854E128B0}"/>
               </a:ext>
             </a:extLst>
           </p:cNvPr>
@@ -21359,7 +21359,7 @@
           <p:cNvPr id="90" name="">
             <a:extLst xmlns:a="http://schemas.openxmlformats.org/drawingml/2006/main">
               <a:ext uri="{FF2B5EF4-FFF2-40B4-BE49-F238E27FC236}">
-                <a16:creationId xmlns:a16="http://schemas.microsoft.com/office/drawing/2014/main" id="{BA0EFA00-7571-474A-BC4B-4B3037EF4D81}"/>
+                <a16:creationId xmlns:a16="http://schemas.microsoft.com/office/drawing/2014/main" id="{B1987D67-A271-422B-B9A4-E39B59F2884A}"/>
               </a:ext>
             </a:extLst>
           </p:cNvPr>
@@ -21390,7 +21390,7 @@
           <p:cNvPr id="91" name="">
             <a:extLst xmlns:a="http://schemas.openxmlformats.org/drawingml/2006/main">
               <a:ext uri="{FF2B5EF4-FFF2-40B4-BE49-F238E27FC236}">
-                <a16:creationId xmlns:a16="http://schemas.microsoft.com/office/drawing/2014/main" id="{7BC5C761-2F9A-4E19-A530-80A05C5431DC}"/>
+                <a16:creationId xmlns:a16="http://schemas.microsoft.com/office/drawing/2014/main" id="{586602E7-C9D5-4E52-9D99-A42167F97601}"/>
               </a:ext>
             </a:extLst>
           </p:cNvPr>
@@ -21442,7 +21442,7 @@
           <p:cNvPr id="92" name="">
             <a:extLst xmlns:a="http://schemas.openxmlformats.org/drawingml/2006/main">
               <a:ext uri="{FF2B5EF4-FFF2-40B4-BE49-F238E27FC236}">
-                <a16:creationId xmlns:a16="http://schemas.microsoft.com/office/drawing/2014/main" id="{41856806-6899-416C-B9E7-FF024C086CFF}"/>
+                <a16:creationId xmlns:a16="http://schemas.microsoft.com/office/drawing/2014/main" id="{4FBE06C7-35A9-44A6-AA4B-2794E5A7D8B2}"/>
               </a:ext>
             </a:extLst>
           </p:cNvPr>
@@ -21494,7 +21494,7 @@
           <p:cNvPr id="93" name="">
             <a:extLst xmlns:a="http://schemas.openxmlformats.org/drawingml/2006/main">
               <a:ext uri="{FF2B5EF4-FFF2-40B4-BE49-F238E27FC236}">
-                <a16:creationId xmlns:a16="http://schemas.microsoft.com/office/drawing/2014/main" id="{87B14941-9177-4DDA-A77E-45CE5F3DFFEC}"/>
+                <a16:creationId xmlns:a16="http://schemas.microsoft.com/office/drawing/2014/main" id="{D064A7A2-878A-430F-B76C-E5E13195E0A0}"/>
               </a:ext>
             </a:extLst>
           </p:cNvPr>
@@ -21546,7 +21546,7 @@
           <p:cNvPr id="94" name="">
             <a:extLst xmlns:a="http://schemas.openxmlformats.org/drawingml/2006/main">
               <a:ext uri="{FF2B5EF4-FFF2-40B4-BE49-F238E27FC236}">
-                <a16:creationId xmlns:a16="http://schemas.microsoft.com/office/drawing/2014/main" id="{901BBF3C-9EBE-4877-A180-F38F55F1986B}"/>
+                <a16:creationId xmlns:a16="http://schemas.microsoft.com/office/drawing/2014/main" id="{2990A02B-8638-4D2A-8010-DAE1A70AAEDA}"/>
               </a:ext>
             </a:extLst>
           </p:cNvPr>
@@ -21598,7 +21598,7 @@
           <p:cNvPr id="95" name="">
             <a:extLst xmlns:a="http://schemas.openxmlformats.org/drawingml/2006/main">
               <a:ext uri="{FF2B5EF4-FFF2-40B4-BE49-F238E27FC236}">
-                <a16:creationId xmlns:a16="http://schemas.microsoft.com/office/drawing/2014/main" id="{829DF15F-2A79-4F27-AEFE-4041134E9E04}"/>
+                <a16:creationId xmlns:a16="http://schemas.microsoft.com/office/drawing/2014/main" id="{C359301B-5238-4AAA-9920-05A324CB7620}"/>
               </a:ext>
             </a:extLst>
           </p:cNvPr>
@@ -21648,7 +21648,7 @@
     </p:spTree>
     <p:extLst>
       <p:ext uri="{BB962C8B-B14F-4D97-AF65-F5344CB8AC3E}">
-        <p14:creationId xmlns:p14="http://schemas.microsoft.com/office/powerpoint/2010/main" val="232953310"/>
+        <p14:creationId xmlns:p14="http://schemas.microsoft.com/office/powerpoint/2010/main" val="695072085"/>
       </p:ext>
     </p:extLst>
   </p:cSld>
@@ -21679,7 +21679,7 @@
           <p:cNvPr id="135" name="">
             <a:extLst xmlns:a="http://schemas.openxmlformats.org/drawingml/2006/main">
               <a:ext uri="{FF2B5EF4-FFF2-40B4-BE49-F238E27FC236}">
-                <a16:creationId xmlns:a16="http://schemas.microsoft.com/office/drawing/2014/main" id="{ADE24384-F1A1-4633-8229-7EEA2E615022}"/>
+                <a16:creationId xmlns:a16="http://schemas.microsoft.com/office/drawing/2014/main" id="{8CA3768D-9863-48B8-9D4C-D921DA4F21F6}"/>
               </a:ext>
             </a:extLst>
           </p:cNvPr>
@@ -21712,7 +21712,7 @@
           <p:cNvPr id="2" name="">
             <a:extLst xmlns:a="http://schemas.openxmlformats.org/drawingml/2006/main">
               <a:ext uri="{FF2B5EF4-FFF2-40B4-BE49-F238E27FC236}">
-                <a16:creationId xmlns:a16="http://schemas.microsoft.com/office/drawing/2014/main" id="{01CE766A-D1A5-4422-B116-5954ADBF1BFC}"/>
+                <a16:creationId xmlns:a16="http://schemas.microsoft.com/office/drawing/2014/main" id="{6BCA0559-6E69-4FDB-9FC1-CAE67D5E594F}"/>
               </a:ext>
             </a:extLst>
           </p:cNvPr>
@@ -21743,7 +21743,7 @@
           <p:cNvPr id="3" name="">
             <a:extLst xmlns:a="http://schemas.openxmlformats.org/drawingml/2006/main">
               <a:ext uri="{FF2B5EF4-FFF2-40B4-BE49-F238E27FC236}">
-                <a16:creationId xmlns:a16="http://schemas.microsoft.com/office/drawing/2014/main" id="{56375745-A7D4-4EE6-8B12-4C100B19D7EE}"/>
+                <a16:creationId xmlns:a16="http://schemas.microsoft.com/office/drawing/2014/main" id="{739B1E22-1C3E-40C4-AD7E-7DE49EE0F2BA}"/>
               </a:ext>
             </a:extLst>
           </p:cNvPr>
@@ -21795,7 +21795,7 @@
           <p:cNvPr id="4" name="">
             <a:extLst xmlns:a="http://schemas.openxmlformats.org/drawingml/2006/main">
               <a:ext uri="{FF2B5EF4-FFF2-40B4-BE49-F238E27FC236}">
-                <a16:creationId xmlns:a16="http://schemas.microsoft.com/office/drawing/2014/main" id="{7F3D92F6-3D04-4EC1-AD8B-B6B6AEA247DA}"/>
+                <a16:creationId xmlns:a16="http://schemas.microsoft.com/office/drawing/2014/main" id="{8FD64F79-DC44-4AF6-A7E1-D393FD6D8CE7}"/>
               </a:ext>
             </a:extLst>
           </p:cNvPr>
@@ -21847,7 +21847,7 @@
           <p:cNvPr id="5" name="">
             <a:extLst xmlns:a="http://schemas.openxmlformats.org/drawingml/2006/main">
               <a:ext uri="{FF2B5EF4-FFF2-40B4-BE49-F238E27FC236}">
-                <a16:creationId xmlns:a16="http://schemas.microsoft.com/office/drawing/2014/main" id="{F503B076-DA94-4018-99F8-E4114FDB061A}"/>
+                <a16:creationId xmlns:a16="http://schemas.microsoft.com/office/drawing/2014/main" id="{D0C126AD-79D9-4434-9D60-66B905005DF1}"/>
               </a:ext>
             </a:extLst>
           </p:cNvPr>
@@ -21882,7 +21882,7 @@
           <p:nvPr/>
         </p:nvPicPr>
         <p:blipFill>
-          <a:blip xmlns:r="http://schemas.openxmlformats.org/officeDocument/2006/relationships" xmlns:a="http://schemas.openxmlformats.org/drawingml/2006/main" r:embed="R955cbcb18c744a1f"/>
+          <a:blip xmlns:r="http://schemas.openxmlformats.org/officeDocument/2006/relationships" xmlns:a="http://schemas.openxmlformats.org/drawingml/2006/main" r:embed="R86258b475cad4763"/>
           <a:stretch xmlns:a="http://schemas.openxmlformats.org/drawingml/2006/main"/>
         </p:blipFill>
         <p:spPr>
@@ -21900,7 +21900,7 @@
           <p:cNvPr id="7" name="">
             <a:extLst xmlns:a="http://schemas.openxmlformats.org/drawingml/2006/main">
               <a:ext uri="{FF2B5EF4-FFF2-40B4-BE49-F238E27FC236}">
-                <a16:creationId xmlns:a16="http://schemas.microsoft.com/office/drawing/2014/main" id="{F0758032-00A4-4D52-A02E-9AA9AA55A886}"/>
+                <a16:creationId xmlns:a16="http://schemas.microsoft.com/office/drawing/2014/main" id="{9B755F96-3392-42ED-A796-E2409BDC2619}"/>
               </a:ext>
             </a:extLst>
           </p:cNvPr>
@@ -21952,7 +21952,7 @@
           <p:cNvPr id="8" name="">
             <a:extLst xmlns:a="http://schemas.openxmlformats.org/drawingml/2006/main">
               <a:ext uri="{FF2B5EF4-FFF2-40B4-BE49-F238E27FC236}">
-                <a16:creationId xmlns:a16="http://schemas.microsoft.com/office/drawing/2014/main" id="{E7266ACE-75A5-41DF-9739-13460B033C28}"/>
+                <a16:creationId xmlns:a16="http://schemas.microsoft.com/office/drawing/2014/main" id="{27C4455E-ED7E-4BDE-BC7F-B2946059D427}"/>
               </a:ext>
             </a:extLst>
           </p:cNvPr>
@@ -22004,7 +22004,7 @@
           <p:cNvPr id="9" name="">
             <a:extLst xmlns:a="http://schemas.openxmlformats.org/drawingml/2006/main">
               <a:ext uri="{FF2B5EF4-FFF2-40B4-BE49-F238E27FC236}">
-                <a16:creationId xmlns:a16="http://schemas.microsoft.com/office/drawing/2014/main" id="{51797399-C186-4E94-A8FB-AAACCE6F9AF9}"/>
+                <a16:creationId xmlns:a16="http://schemas.microsoft.com/office/drawing/2014/main" id="{41AC6525-038F-4D13-A6A9-733506C1B67C}"/>
               </a:ext>
             </a:extLst>
           </p:cNvPr>
@@ -22056,7 +22056,7 @@
           <p:cNvPr id="10" name="">
             <a:extLst xmlns:a="http://schemas.openxmlformats.org/drawingml/2006/main">
               <a:ext uri="{FF2B5EF4-FFF2-40B4-BE49-F238E27FC236}">
-                <a16:creationId xmlns:a16="http://schemas.microsoft.com/office/drawing/2014/main" id="{436EC189-75F5-4D30-9196-3D661906DEEB}"/>
+                <a16:creationId xmlns:a16="http://schemas.microsoft.com/office/drawing/2014/main" id="{AF6867EF-571B-4F4D-9C15-1F6FB4B6AFC6}"/>
               </a:ext>
             </a:extLst>
           </p:cNvPr>
@@ -22108,7 +22108,7 @@
           <p:cNvPr id="11" name="">
             <a:extLst xmlns:a="http://schemas.openxmlformats.org/drawingml/2006/main">
               <a:ext uri="{FF2B5EF4-FFF2-40B4-BE49-F238E27FC236}">
-                <a16:creationId xmlns:a16="http://schemas.microsoft.com/office/drawing/2014/main" id="{035B3841-45D2-49AB-B55D-D47637FDCFAE}"/>
+                <a16:creationId xmlns:a16="http://schemas.microsoft.com/office/drawing/2014/main" id="{800E4F9D-7255-4BCF-849D-082F23862A58}"/>
               </a:ext>
             </a:extLst>
           </p:cNvPr>
@@ -22139,7 +22139,7 @@
           <p:cNvPr id="12" name="">
             <a:extLst xmlns:a="http://schemas.openxmlformats.org/drawingml/2006/main">
               <a:ext uri="{FF2B5EF4-FFF2-40B4-BE49-F238E27FC236}">
-                <a16:creationId xmlns:a16="http://schemas.microsoft.com/office/drawing/2014/main" id="{A220BC3E-3175-4CAD-8F64-F526B5328F68}"/>
+                <a16:creationId xmlns:a16="http://schemas.microsoft.com/office/drawing/2014/main" id="{AF8C6DA3-D375-4F16-A521-C1D77159CF61}"/>
               </a:ext>
             </a:extLst>
           </p:cNvPr>
@@ -22170,7 +22170,7 @@
           <p:cNvPr id="13" name="">
             <a:extLst xmlns:a="http://schemas.openxmlformats.org/drawingml/2006/main">
               <a:ext uri="{FF2B5EF4-FFF2-40B4-BE49-F238E27FC236}">
-                <a16:creationId xmlns:a16="http://schemas.microsoft.com/office/drawing/2014/main" id="{345B9372-137C-4AFB-A5CE-455A8EF14CDF}"/>
+                <a16:creationId xmlns:a16="http://schemas.microsoft.com/office/drawing/2014/main" id="{10709263-9BA4-479D-8901-4A453DC0AB37}"/>
               </a:ext>
             </a:extLst>
           </p:cNvPr>
@@ -22222,7 +22222,7 @@
           <p:cNvPr id="14" name="">
             <a:extLst xmlns:a="http://schemas.openxmlformats.org/drawingml/2006/main">
               <a:ext uri="{FF2B5EF4-FFF2-40B4-BE49-F238E27FC236}">
-                <a16:creationId xmlns:a16="http://schemas.microsoft.com/office/drawing/2014/main" id="{B4742F83-5E6E-4D0F-B6E3-476A31D0FD77}"/>
+                <a16:creationId xmlns:a16="http://schemas.microsoft.com/office/drawing/2014/main" id="{0394A953-CA67-4B09-B4AE-36C7407DFE0E}"/>
               </a:ext>
             </a:extLst>
           </p:cNvPr>
@@ -22274,7 +22274,7 @@
           <p:cNvPr id="15" name="">
             <a:extLst xmlns:a="http://schemas.openxmlformats.org/drawingml/2006/main">
               <a:ext uri="{FF2B5EF4-FFF2-40B4-BE49-F238E27FC236}">
-                <a16:creationId xmlns:a16="http://schemas.microsoft.com/office/drawing/2014/main" id="{9ED9789E-E2F3-42B4-8472-3A36B730E468}"/>
+                <a16:creationId xmlns:a16="http://schemas.microsoft.com/office/drawing/2014/main" id="{24B94123-1CC0-4F36-9117-CE83E46A38C8}"/>
               </a:ext>
             </a:extLst>
           </p:cNvPr>
@@ -22326,7 +22326,7 @@
           <p:cNvPr id="16" name="">
             <a:extLst xmlns:a="http://schemas.openxmlformats.org/drawingml/2006/main">
               <a:ext uri="{FF2B5EF4-FFF2-40B4-BE49-F238E27FC236}">
-                <a16:creationId xmlns:a16="http://schemas.microsoft.com/office/drawing/2014/main" id="{FD2857A2-003B-4807-9C3E-54D21DFDE3EA}"/>
+                <a16:creationId xmlns:a16="http://schemas.microsoft.com/office/drawing/2014/main" id="{A49C7023-5CD0-4323-ACD6-E17141E50E49}"/>
               </a:ext>
             </a:extLst>
           </p:cNvPr>
@@ -22378,7 +22378,7 @@
           <p:cNvPr id="17" name="">
             <a:extLst xmlns:a="http://schemas.openxmlformats.org/drawingml/2006/main">
               <a:ext uri="{FF2B5EF4-FFF2-40B4-BE49-F238E27FC236}">
-                <a16:creationId xmlns:a16="http://schemas.microsoft.com/office/drawing/2014/main" id="{1F571490-ED6D-465E-8F38-4C2F07C10B6A}"/>
+                <a16:creationId xmlns:a16="http://schemas.microsoft.com/office/drawing/2014/main" id="{5DD9FB64-9B8C-47CB-8FBC-CA3370C53E96}"/>
               </a:ext>
             </a:extLst>
           </p:cNvPr>
@@ -22430,7 +22430,7 @@
           <p:cNvPr id="18" name="">
             <a:extLst xmlns:a="http://schemas.openxmlformats.org/drawingml/2006/main">
               <a:ext uri="{FF2B5EF4-FFF2-40B4-BE49-F238E27FC236}">
-                <a16:creationId xmlns:a16="http://schemas.microsoft.com/office/drawing/2014/main" id="{8CD94640-E4C5-493C-A128-02C8352BB686}"/>
+                <a16:creationId xmlns:a16="http://schemas.microsoft.com/office/drawing/2014/main" id="{5AE6A091-BC45-4694-8F97-D2BDCDBC1DD2}"/>
               </a:ext>
             </a:extLst>
           </p:cNvPr>
@@ -22482,7 +22482,7 @@
           <p:cNvPr id="19" name="">
             <a:extLst xmlns:a="http://schemas.openxmlformats.org/drawingml/2006/main">
               <a:ext uri="{FF2B5EF4-FFF2-40B4-BE49-F238E27FC236}">
-                <a16:creationId xmlns:a16="http://schemas.microsoft.com/office/drawing/2014/main" id="{BA1ADABB-F59E-4CFF-8594-9EF0CA6DC1BB}"/>
+                <a16:creationId xmlns:a16="http://schemas.microsoft.com/office/drawing/2014/main" id="{6BA39402-109B-4063-B9A4-5539FEF2A674}"/>
               </a:ext>
             </a:extLst>
           </p:cNvPr>
@@ -22534,7 +22534,7 @@
           <p:cNvPr id="20" name="">
             <a:extLst xmlns:a="http://schemas.openxmlformats.org/drawingml/2006/main">
               <a:ext uri="{FF2B5EF4-FFF2-40B4-BE49-F238E27FC236}">
-                <a16:creationId xmlns:a16="http://schemas.microsoft.com/office/drawing/2014/main" id="{3E408E52-CAAB-4FA9-9380-558CC1F4F610}"/>
+                <a16:creationId xmlns:a16="http://schemas.microsoft.com/office/drawing/2014/main" id="{AA93F278-F844-44F6-9401-C7EBBA481E1F}"/>
               </a:ext>
             </a:extLst>
           </p:cNvPr>
@@ -22586,7 +22586,7 @@
           <p:cNvPr id="21" name="">
             <a:extLst xmlns:a="http://schemas.openxmlformats.org/drawingml/2006/main">
               <a:ext uri="{FF2B5EF4-FFF2-40B4-BE49-F238E27FC236}">
-                <a16:creationId xmlns:a16="http://schemas.microsoft.com/office/drawing/2014/main" id="{592025FE-34AA-4D02-8C70-9EBDE0CF0F0A}"/>
+                <a16:creationId xmlns:a16="http://schemas.microsoft.com/office/drawing/2014/main" id="{BAFFC16A-1C7C-4450-B19C-0E8AF2A7C4CA}"/>
               </a:ext>
             </a:extLst>
           </p:cNvPr>
@@ -22617,7 +22617,7 @@
           <p:cNvPr id="22" name="">
             <a:extLst xmlns:a="http://schemas.openxmlformats.org/drawingml/2006/main">
               <a:ext uri="{FF2B5EF4-FFF2-40B4-BE49-F238E27FC236}">
-                <a16:creationId xmlns:a16="http://schemas.microsoft.com/office/drawing/2014/main" id="{36D7771D-1731-4983-B51C-A06D123FB599}"/>
+                <a16:creationId xmlns:a16="http://schemas.microsoft.com/office/drawing/2014/main" id="{05A4E32F-9DF3-4657-AF7F-9510073C268E}"/>
               </a:ext>
             </a:extLst>
           </p:cNvPr>
@@ -22669,7 +22669,7 @@
           <p:cNvPr id="23" name="">
             <a:extLst xmlns:a="http://schemas.openxmlformats.org/drawingml/2006/main">
               <a:ext uri="{FF2B5EF4-FFF2-40B4-BE49-F238E27FC236}">
-                <a16:creationId xmlns:a16="http://schemas.microsoft.com/office/drawing/2014/main" id="{B7B2D843-4C44-4C2A-A678-27CB41B11046}"/>
+                <a16:creationId xmlns:a16="http://schemas.microsoft.com/office/drawing/2014/main" id="{42A256D0-B832-4BF0-B2A8-57F13DB14FF2}"/>
               </a:ext>
             </a:extLst>
           </p:cNvPr>
@@ -22721,7 +22721,7 @@
           <p:cNvPr id="24" name="">
             <a:extLst xmlns:a="http://schemas.openxmlformats.org/drawingml/2006/main">
               <a:ext uri="{FF2B5EF4-FFF2-40B4-BE49-F238E27FC236}">
-                <a16:creationId xmlns:a16="http://schemas.microsoft.com/office/drawing/2014/main" id="{3E71DD28-218F-4652-B286-8AF97782B56D}"/>
+                <a16:creationId xmlns:a16="http://schemas.microsoft.com/office/drawing/2014/main" id="{B0C23275-AE91-42BE-8D61-F8C19218B6DB}"/>
               </a:ext>
             </a:extLst>
           </p:cNvPr>
@@ -22773,7 +22773,7 @@
           <p:cNvPr id="25" name="">
             <a:extLst xmlns:a="http://schemas.openxmlformats.org/drawingml/2006/main">
               <a:ext uri="{FF2B5EF4-FFF2-40B4-BE49-F238E27FC236}">
-                <a16:creationId xmlns:a16="http://schemas.microsoft.com/office/drawing/2014/main" id="{A1860DF2-2678-494A-AD69-CD47455AB25E}"/>
+                <a16:creationId xmlns:a16="http://schemas.microsoft.com/office/drawing/2014/main" id="{73E498F2-B5C6-4D69-874A-AE440BC7634B}"/>
               </a:ext>
             </a:extLst>
           </p:cNvPr>
@@ -22825,7 +22825,7 @@
           <p:cNvPr id="26" name="">
             <a:extLst xmlns:a="http://schemas.openxmlformats.org/drawingml/2006/main">
               <a:ext uri="{FF2B5EF4-FFF2-40B4-BE49-F238E27FC236}">
-                <a16:creationId xmlns:a16="http://schemas.microsoft.com/office/drawing/2014/main" id="{69A5EFC1-B448-4E51-953E-8B4FBF988024}"/>
+                <a16:creationId xmlns:a16="http://schemas.microsoft.com/office/drawing/2014/main" id="{35150DC8-B349-47E3-B2CB-73C2D2353D35}"/>
               </a:ext>
             </a:extLst>
           </p:cNvPr>
@@ -22877,7 +22877,7 @@
           <p:cNvPr id="27" name="">
             <a:extLst xmlns:a="http://schemas.openxmlformats.org/drawingml/2006/main">
               <a:ext uri="{FF2B5EF4-FFF2-40B4-BE49-F238E27FC236}">
-                <a16:creationId xmlns:a16="http://schemas.microsoft.com/office/drawing/2014/main" id="{DD4FA9A9-7C40-4A28-88CF-D26D2AAF8518}"/>
+                <a16:creationId xmlns:a16="http://schemas.microsoft.com/office/drawing/2014/main" id="{3E4CD4FB-7DAF-4160-9220-CC9818CAE0D2}"/>
               </a:ext>
             </a:extLst>
           </p:cNvPr>
@@ -22929,7 +22929,7 @@
           <p:cNvPr id="28" name="">
             <a:extLst xmlns:a="http://schemas.openxmlformats.org/drawingml/2006/main">
               <a:ext uri="{FF2B5EF4-FFF2-40B4-BE49-F238E27FC236}">
-                <a16:creationId xmlns:a16="http://schemas.microsoft.com/office/drawing/2014/main" id="{621E3FD1-0C00-486B-9CBD-6006BBDFA7EB}"/>
+                <a16:creationId xmlns:a16="http://schemas.microsoft.com/office/drawing/2014/main" id="{A584604A-DF37-4A5D-91EA-C703144F05DE}"/>
               </a:ext>
             </a:extLst>
           </p:cNvPr>
@@ -22981,7 +22981,7 @@
           <p:cNvPr id="29" name="">
             <a:extLst xmlns:a="http://schemas.openxmlformats.org/drawingml/2006/main">
               <a:ext uri="{FF2B5EF4-FFF2-40B4-BE49-F238E27FC236}">
-                <a16:creationId xmlns:a16="http://schemas.microsoft.com/office/drawing/2014/main" id="{0F0232CD-2DD8-4D19-907A-F0BEDCE7DAB1}"/>
+                <a16:creationId xmlns:a16="http://schemas.microsoft.com/office/drawing/2014/main" id="{0D38AB36-C63C-47C6-A10D-FC04E51D47E5}"/>
               </a:ext>
             </a:extLst>
           </p:cNvPr>
@@ -23033,7 +23033,7 @@
           <p:cNvPr id="30" name="">
             <a:extLst xmlns:a="http://schemas.openxmlformats.org/drawingml/2006/main">
               <a:ext uri="{FF2B5EF4-FFF2-40B4-BE49-F238E27FC236}">
-                <a16:creationId xmlns:a16="http://schemas.microsoft.com/office/drawing/2014/main" id="{B53FECB1-B956-4C67-97A7-B960C6BB7BA6}"/>
+                <a16:creationId xmlns:a16="http://schemas.microsoft.com/office/drawing/2014/main" id="{949DB551-2B2A-4FCE-8757-44A65C51967D}"/>
               </a:ext>
             </a:extLst>
           </p:cNvPr>
@@ -23064,7 +23064,7 @@
           <p:cNvPr id="31" name="">
             <a:extLst xmlns:a="http://schemas.openxmlformats.org/drawingml/2006/main">
               <a:ext uri="{FF2B5EF4-FFF2-40B4-BE49-F238E27FC236}">
-                <a16:creationId xmlns:a16="http://schemas.microsoft.com/office/drawing/2014/main" id="{6785FF18-9E61-46A7-B7DA-3E50544E7916}"/>
+                <a16:creationId xmlns:a16="http://schemas.microsoft.com/office/drawing/2014/main" id="{28E2A762-EA7E-4E48-8656-C1ACE52F9817}"/>
               </a:ext>
             </a:extLst>
           </p:cNvPr>
@@ -23095,7 +23095,7 @@
           <p:cNvPr id="32" name="">
             <a:extLst xmlns:a="http://schemas.openxmlformats.org/drawingml/2006/main">
               <a:ext uri="{FF2B5EF4-FFF2-40B4-BE49-F238E27FC236}">
-                <a16:creationId xmlns:a16="http://schemas.microsoft.com/office/drawing/2014/main" id="{B0164145-8195-4D54-9B3D-B8A0F23227DE}"/>
+                <a16:creationId xmlns:a16="http://schemas.microsoft.com/office/drawing/2014/main" id="{F9E9B7EF-F525-4CA7-B88D-EB60FF88C344}"/>
               </a:ext>
             </a:extLst>
           </p:cNvPr>
@@ -23147,7 +23147,7 @@
           <p:cNvPr id="33" name="">
             <a:extLst xmlns:a="http://schemas.openxmlformats.org/drawingml/2006/main">
               <a:ext uri="{FF2B5EF4-FFF2-40B4-BE49-F238E27FC236}">
-                <a16:creationId xmlns:a16="http://schemas.microsoft.com/office/drawing/2014/main" id="{E34E2984-4542-4615-9174-8E5F142A9BED}"/>
+                <a16:creationId xmlns:a16="http://schemas.microsoft.com/office/drawing/2014/main" id="{C34F3D3F-2304-4798-86C8-176C508ED173}"/>
               </a:ext>
             </a:extLst>
           </p:cNvPr>
@@ -23199,7 +23199,7 @@
           <p:cNvPr id="34" name="">
             <a:extLst xmlns:a="http://schemas.openxmlformats.org/drawingml/2006/main">
               <a:ext uri="{FF2B5EF4-FFF2-40B4-BE49-F238E27FC236}">
-                <a16:creationId xmlns:a16="http://schemas.microsoft.com/office/drawing/2014/main" id="{A5B6B911-7F57-4285-BFAB-63522572398C}"/>
+                <a16:creationId xmlns:a16="http://schemas.microsoft.com/office/drawing/2014/main" id="{FB38CD0E-4267-40A5-8A02-A82A0CB92C71}"/>
               </a:ext>
             </a:extLst>
           </p:cNvPr>
@@ -23251,7 +23251,7 @@
           <p:cNvPr id="35" name="">
             <a:extLst xmlns:a="http://schemas.openxmlformats.org/drawingml/2006/main">
               <a:ext uri="{FF2B5EF4-FFF2-40B4-BE49-F238E27FC236}">
-                <a16:creationId xmlns:a16="http://schemas.microsoft.com/office/drawing/2014/main" id="{C27982E3-7C42-48BA-BC24-0EC7FFA03F89}"/>
+                <a16:creationId xmlns:a16="http://schemas.microsoft.com/office/drawing/2014/main" id="{AD0076F9-331B-48CE-A721-B38150FAFFB7}"/>
               </a:ext>
             </a:extLst>
           </p:cNvPr>
@@ -23303,7 +23303,7 @@
           <p:cNvPr id="36" name="">
             <a:extLst xmlns:a="http://schemas.openxmlformats.org/drawingml/2006/main">
               <a:ext uri="{FF2B5EF4-FFF2-40B4-BE49-F238E27FC236}">
-                <a16:creationId xmlns:a16="http://schemas.microsoft.com/office/drawing/2014/main" id="{E6CCB86B-0209-4B6D-BDEA-F105B62184ED}"/>
+                <a16:creationId xmlns:a16="http://schemas.microsoft.com/office/drawing/2014/main" id="{E42427C9-5052-4125-806B-7C60DB99D9A2}"/>
               </a:ext>
             </a:extLst>
           </p:cNvPr>
@@ -23355,7 +23355,7 @@
           <p:cNvPr id="37" name="">
             <a:extLst xmlns:a="http://schemas.openxmlformats.org/drawingml/2006/main">
               <a:ext uri="{FF2B5EF4-FFF2-40B4-BE49-F238E27FC236}">
-                <a16:creationId xmlns:a16="http://schemas.microsoft.com/office/drawing/2014/main" id="{8894A9BC-6A8F-4425-8794-8983D47D7832}"/>
+                <a16:creationId xmlns:a16="http://schemas.microsoft.com/office/drawing/2014/main" id="{46710B86-CE20-432E-AE2C-E7EAB246E1B9}"/>
               </a:ext>
             </a:extLst>
           </p:cNvPr>
@@ -23407,7 +23407,7 @@
           <p:cNvPr id="38" name="">
             <a:extLst xmlns:a="http://schemas.openxmlformats.org/drawingml/2006/main">
               <a:ext uri="{FF2B5EF4-FFF2-40B4-BE49-F238E27FC236}">
-                <a16:creationId xmlns:a16="http://schemas.microsoft.com/office/drawing/2014/main" id="{56B54988-6901-4F0F-BA08-26FA1447768C}"/>
+                <a16:creationId xmlns:a16="http://schemas.microsoft.com/office/drawing/2014/main" id="{B1EC4A29-624E-4308-BF58-A30EFD82FAB9}"/>
               </a:ext>
             </a:extLst>
           </p:cNvPr>
@@ -23459,7 +23459,7 @@
           <p:cNvPr id="39" name="">
             <a:extLst xmlns:a="http://schemas.openxmlformats.org/drawingml/2006/main">
               <a:ext uri="{FF2B5EF4-FFF2-40B4-BE49-F238E27FC236}">
-                <a16:creationId xmlns:a16="http://schemas.microsoft.com/office/drawing/2014/main" id="{22D574AD-3D8E-4887-A821-9EF70E526023}"/>
+                <a16:creationId xmlns:a16="http://schemas.microsoft.com/office/drawing/2014/main" id="{60A755E9-5D36-43FC-92B0-1A47C1E08305}"/>
               </a:ext>
             </a:extLst>
           </p:cNvPr>
@@ -23511,7 +23511,7 @@
           <p:cNvPr id="40" name="">
             <a:extLst xmlns:a="http://schemas.openxmlformats.org/drawingml/2006/main">
               <a:ext uri="{FF2B5EF4-FFF2-40B4-BE49-F238E27FC236}">
-                <a16:creationId xmlns:a16="http://schemas.microsoft.com/office/drawing/2014/main" id="{B8E9F465-531E-499E-984E-065EC1C18492}"/>
+                <a16:creationId xmlns:a16="http://schemas.microsoft.com/office/drawing/2014/main" id="{0E4AE076-5496-4EE0-A922-243B6B607FDC}"/>
               </a:ext>
             </a:extLst>
           </p:cNvPr>
@@ -23542,7 +23542,7 @@
           <p:cNvPr id="41" name="">
             <a:extLst xmlns:a="http://schemas.openxmlformats.org/drawingml/2006/main">
               <a:ext uri="{FF2B5EF4-FFF2-40B4-BE49-F238E27FC236}">
-                <a16:creationId xmlns:a16="http://schemas.microsoft.com/office/drawing/2014/main" id="{7BC50D4E-8029-46C3-948D-F4A83029443E}"/>
+                <a16:creationId xmlns:a16="http://schemas.microsoft.com/office/drawing/2014/main" id="{5CD706B1-8CA8-4B84-B779-08E993E03C06}"/>
               </a:ext>
             </a:extLst>
           </p:cNvPr>
@@ -23594,7 +23594,7 @@
           <p:cNvPr id="42" name="">
             <a:extLst xmlns:a="http://schemas.openxmlformats.org/drawingml/2006/main">
               <a:ext uri="{FF2B5EF4-FFF2-40B4-BE49-F238E27FC236}">
-                <a16:creationId xmlns:a16="http://schemas.microsoft.com/office/drawing/2014/main" id="{ECE5C8EE-CC54-4DEF-A638-7729FE42EA41}"/>
+                <a16:creationId xmlns:a16="http://schemas.microsoft.com/office/drawing/2014/main" id="{3395BECC-FC99-4314-A16A-B90FD0ED351F}"/>
               </a:ext>
             </a:extLst>
           </p:cNvPr>
@@ -23646,7 +23646,7 @@
           <p:cNvPr id="43" name="">
             <a:extLst xmlns:a="http://schemas.openxmlformats.org/drawingml/2006/main">
               <a:ext uri="{FF2B5EF4-FFF2-40B4-BE49-F238E27FC236}">
-                <a16:creationId xmlns:a16="http://schemas.microsoft.com/office/drawing/2014/main" id="{016068B5-1D28-464F-8879-3305704267A8}"/>
+                <a16:creationId xmlns:a16="http://schemas.microsoft.com/office/drawing/2014/main" id="{F213ECB6-6E6D-43BB-8833-7A5E5DB510D9}"/>
               </a:ext>
             </a:extLst>
           </p:cNvPr>
@@ -23698,7 +23698,7 @@
           <p:cNvPr id="44" name="">
             <a:extLst xmlns:a="http://schemas.openxmlformats.org/drawingml/2006/main">
               <a:ext uri="{FF2B5EF4-FFF2-40B4-BE49-F238E27FC236}">
-                <a16:creationId xmlns:a16="http://schemas.microsoft.com/office/drawing/2014/main" id="{0BE2338E-E51A-4326-BB0D-7A6B5A7F25C7}"/>
+                <a16:creationId xmlns:a16="http://schemas.microsoft.com/office/drawing/2014/main" id="{3E1D264E-78A1-434B-A5A0-94F958B40F48}"/>
               </a:ext>
             </a:extLst>
           </p:cNvPr>
@@ -23750,7 +23750,7 @@
           <p:cNvPr id="45" name="">
             <a:extLst xmlns:a="http://schemas.openxmlformats.org/drawingml/2006/main">
               <a:ext uri="{FF2B5EF4-FFF2-40B4-BE49-F238E27FC236}">
-                <a16:creationId xmlns:a16="http://schemas.microsoft.com/office/drawing/2014/main" id="{8DA50053-E206-4205-ACEE-672387455901}"/>
+                <a16:creationId xmlns:a16="http://schemas.microsoft.com/office/drawing/2014/main" id="{239A4655-9967-4718-8C9A-A85DC90E9A47}"/>
               </a:ext>
             </a:extLst>
           </p:cNvPr>
@@ -23802,7 +23802,7 @@
           <p:cNvPr id="46" name="">
             <a:extLst xmlns:a="http://schemas.openxmlformats.org/drawingml/2006/main">
               <a:ext uri="{FF2B5EF4-FFF2-40B4-BE49-F238E27FC236}">
-                <a16:creationId xmlns:a16="http://schemas.microsoft.com/office/drawing/2014/main" id="{FDAE05BC-2329-4313-BEE8-74645124E5BE}"/>
+                <a16:creationId xmlns:a16="http://schemas.microsoft.com/office/drawing/2014/main" id="{7B3AF497-31A9-4E01-B3DD-D4CE4102C434}"/>
               </a:ext>
             </a:extLst>
           </p:cNvPr>
@@ -23854,7 +23854,7 @@
           <p:cNvPr id="47" name="">
             <a:extLst xmlns:a="http://schemas.openxmlformats.org/drawingml/2006/main">
               <a:ext uri="{FF2B5EF4-FFF2-40B4-BE49-F238E27FC236}">
-                <a16:creationId xmlns:a16="http://schemas.microsoft.com/office/drawing/2014/main" id="{F610F05E-E5C7-4C9F-ABE0-6FDF1CE3B454}"/>
+                <a16:creationId xmlns:a16="http://schemas.microsoft.com/office/drawing/2014/main" id="{FAC7773C-A21D-4633-B1EC-6101BC67B7D3}"/>
               </a:ext>
             </a:extLst>
           </p:cNvPr>
@@ -23906,7 +23906,7 @@
           <p:cNvPr id="48" name="">
             <a:extLst xmlns:a="http://schemas.openxmlformats.org/drawingml/2006/main">
               <a:ext uri="{FF2B5EF4-FFF2-40B4-BE49-F238E27FC236}">
-                <a16:creationId xmlns:a16="http://schemas.microsoft.com/office/drawing/2014/main" id="{3FBF5DA6-2ECC-4185-B672-99DD19A25EE6}"/>
+                <a16:creationId xmlns:a16="http://schemas.microsoft.com/office/drawing/2014/main" id="{D96A939E-05CF-45D9-8137-59789E436F63}"/>
               </a:ext>
             </a:extLst>
           </p:cNvPr>
@@ -23958,7 +23958,7 @@
           <p:cNvPr id="49" name="">
             <a:extLst xmlns:a="http://schemas.openxmlformats.org/drawingml/2006/main">
               <a:ext uri="{FF2B5EF4-FFF2-40B4-BE49-F238E27FC236}">
-                <a16:creationId xmlns:a16="http://schemas.microsoft.com/office/drawing/2014/main" id="{77974B49-EC1E-4F3F-A084-F9E362C9F225}"/>
+                <a16:creationId xmlns:a16="http://schemas.microsoft.com/office/drawing/2014/main" id="{C97C7FCA-B467-42F9-AACF-353A4779C467}"/>
               </a:ext>
             </a:extLst>
           </p:cNvPr>
@@ -23989,7 +23989,7 @@
           <p:cNvPr id="50" name="">
             <a:extLst xmlns:a="http://schemas.openxmlformats.org/drawingml/2006/main">
               <a:ext uri="{FF2B5EF4-FFF2-40B4-BE49-F238E27FC236}">
-                <a16:creationId xmlns:a16="http://schemas.microsoft.com/office/drawing/2014/main" id="{E422F18F-7FFE-40FE-B5FC-609C6AF9ED68}"/>
+                <a16:creationId xmlns:a16="http://schemas.microsoft.com/office/drawing/2014/main" id="{E00BD065-7B89-4637-9B0B-6C3FD94E6FB7}"/>
               </a:ext>
             </a:extLst>
           </p:cNvPr>
@@ -24020,7 +24020,7 @@
           <p:cNvPr id="51" name="">
             <a:extLst xmlns:a="http://schemas.openxmlformats.org/drawingml/2006/main">
               <a:ext uri="{FF2B5EF4-FFF2-40B4-BE49-F238E27FC236}">
-                <a16:creationId xmlns:a16="http://schemas.microsoft.com/office/drawing/2014/main" id="{73221B7D-AAA7-4B33-AF93-867C9ED89379}"/>
+                <a16:creationId xmlns:a16="http://schemas.microsoft.com/office/drawing/2014/main" id="{997D39D8-CE9A-4DF0-9B14-683D0647D6E5}"/>
               </a:ext>
             </a:extLst>
           </p:cNvPr>
@@ -24072,7 +24072,7 @@
           <p:cNvPr id="52" name="">
             <a:extLst xmlns:a="http://schemas.openxmlformats.org/drawingml/2006/main">
               <a:ext uri="{FF2B5EF4-FFF2-40B4-BE49-F238E27FC236}">
-                <a16:creationId xmlns:a16="http://schemas.microsoft.com/office/drawing/2014/main" id="{D84040BF-FDD5-486F-9978-F5722894839A}"/>
+                <a16:creationId xmlns:a16="http://schemas.microsoft.com/office/drawing/2014/main" id="{09712F26-E1CB-444D-B66B-E10409F6FDA1}"/>
               </a:ext>
             </a:extLst>
           </p:cNvPr>
@@ -24124,7 +24124,7 @@
           <p:cNvPr id="53" name="">
             <a:extLst xmlns:a="http://schemas.openxmlformats.org/drawingml/2006/main">
               <a:ext uri="{FF2B5EF4-FFF2-40B4-BE49-F238E27FC236}">
-                <a16:creationId xmlns:a16="http://schemas.microsoft.com/office/drawing/2014/main" id="{C2597420-A7EC-4179-9514-BADEB6CA2EA8}"/>
+                <a16:creationId xmlns:a16="http://schemas.microsoft.com/office/drawing/2014/main" id="{F6D675E4-14EC-45C7-8E1E-09C1CDBEB579}"/>
               </a:ext>
             </a:extLst>
           </p:cNvPr>
@@ -24176,7 +24176,7 @@
           <p:cNvPr id="54" name="">
             <a:extLst xmlns:a="http://schemas.openxmlformats.org/drawingml/2006/main">
               <a:ext uri="{FF2B5EF4-FFF2-40B4-BE49-F238E27FC236}">
-                <a16:creationId xmlns:a16="http://schemas.microsoft.com/office/drawing/2014/main" id="{21A3B456-4495-4A8D-86BD-D0CAD37213F9}"/>
+                <a16:creationId xmlns:a16="http://schemas.microsoft.com/office/drawing/2014/main" id="{1D010365-3C33-44D5-A415-F6BC76027D89}"/>
               </a:ext>
             </a:extLst>
           </p:cNvPr>
@@ -24228,7 +24228,7 @@
           <p:cNvPr id="55" name="">
             <a:extLst xmlns:a="http://schemas.openxmlformats.org/drawingml/2006/main">
               <a:ext uri="{FF2B5EF4-FFF2-40B4-BE49-F238E27FC236}">
-                <a16:creationId xmlns:a16="http://schemas.microsoft.com/office/drawing/2014/main" id="{97CED989-6798-460D-9502-D699A1DCCAC8}"/>
+                <a16:creationId xmlns:a16="http://schemas.microsoft.com/office/drawing/2014/main" id="{EA103A7D-79E4-4896-A01C-49BF7C354AC6}"/>
               </a:ext>
             </a:extLst>
           </p:cNvPr>
@@ -24280,7 +24280,7 @@
           <p:cNvPr id="56" name="">
             <a:extLst xmlns:a="http://schemas.openxmlformats.org/drawingml/2006/main">
               <a:ext uri="{FF2B5EF4-FFF2-40B4-BE49-F238E27FC236}">
-                <a16:creationId xmlns:a16="http://schemas.microsoft.com/office/drawing/2014/main" id="{407711C7-821C-4905-BA98-AB133ACB9672}"/>
+                <a16:creationId xmlns:a16="http://schemas.microsoft.com/office/drawing/2014/main" id="{A8544696-CBE9-4F89-9B7F-DC691E0DC076}"/>
               </a:ext>
             </a:extLst>
           </p:cNvPr>
@@ -24332,7 +24332,7 @@
           <p:cNvPr id="57" name="">
             <a:extLst xmlns:a="http://schemas.openxmlformats.org/drawingml/2006/main">
               <a:ext uri="{FF2B5EF4-FFF2-40B4-BE49-F238E27FC236}">
-                <a16:creationId xmlns:a16="http://schemas.microsoft.com/office/drawing/2014/main" id="{B138FE6E-0B64-4F91-A2DE-8CBA8DB444A7}"/>
+                <a16:creationId xmlns:a16="http://schemas.microsoft.com/office/drawing/2014/main" id="{F07350A4-4C0F-41C7-B9DD-1439738B9D7A}"/>
               </a:ext>
             </a:extLst>
           </p:cNvPr>
@@ -24384,7 +24384,7 @@
           <p:cNvPr id="58" name="">
             <a:extLst xmlns:a="http://schemas.openxmlformats.org/drawingml/2006/main">
               <a:ext uri="{FF2B5EF4-FFF2-40B4-BE49-F238E27FC236}">
-                <a16:creationId xmlns:a16="http://schemas.microsoft.com/office/drawing/2014/main" id="{B7C652AE-3DA6-4927-BD15-889AB658D626}"/>
+                <a16:creationId xmlns:a16="http://schemas.microsoft.com/office/drawing/2014/main" id="{F6A00EBA-11E9-4721-9232-FC68F77AA3F5}"/>
               </a:ext>
             </a:extLst>
           </p:cNvPr>
@@ -24436,7 +24436,7 @@
           <p:cNvPr id="59" name="">
             <a:extLst xmlns:a="http://schemas.openxmlformats.org/drawingml/2006/main">
               <a:ext uri="{FF2B5EF4-FFF2-40B4-BE49-F238E27FC236}">
-                <a16:creationId xmlns:a16="http://schemas.microsoft.com/office/drawing/2014/main" id="{38F1AD0F-308D-4D70-B471-7F50E3CEE620}"/>
+                <a16:creationId xmlns:a16="http://schemas.microsoft.com/office/drawing/2014/main" id="{DA5BAA82-ABC5-4F2D-A627-6994BF8279B7}"/>
               </a:ext>
             </a:extLst>
           </p:cNvPr>
@@ -24467,7 +24467,7 @@
           <p:cNvPr id="60" name="">
             <a:extLst xmlns:a="http://schemas.openxmlformats.org/drawingml/2006/main">
               <a:ext uri="{FF2B5EF4-FFF2-40B4-BE49-F238E27FC236}">
-                <a16:creationId xmlns:a16="http://schemas.microsoft.com/office/drawing/2014/main" id="{5E627CFF-125B-48BC-9EF1-8259650CC747}"/>
+                <a16:creationId xmlns:a16="http://schemas.microsoft.com/office/drawing/2014/main" id="{5D4EF5F2-AA4A-4AB4-8288-2C44F070A033}"/>
               </a:ext>
             </a:extLst>
           </p:cNvPr>
@@ -24519,7 +24519,7 @@
           <p:cNvPr id="61" name="">
             <a:extLst xmlns:a="http://schemas.openxmlformats.org/drawingml/2006/main">
               <a:ext uri="{FF2B5EF4-FFF2-40B4-BE49-F238E27FC236}">
-                <a16:creationId xmlns:a16="http://schemas.microsoft.com/office/drawing/2014/main" id="{833883CE-4D61-4D3B-87A0-84433756020B}"/>
+                <a16:creationId xmlns:a16="http://schemas.microsoft.com/office/drawing/2014/main" id="{80886498-EAF7-41A8-B3E0-46BC305C91D4}"/>
               </a:ext>
             </a:extLst>
           </p:cNvPr>
@@ -24571,7 +24571,7 @@
           <p:cNvPr id="62" name="">
             <a:extLst xmlns:a="http://schemas.openxmlformats.org/drawingml/2006/main">
               <a:ext uri="{FF2B5EF4-FFF2-40B4-BE49-F238E27FC236}">
-                <a16:creationId xmlns:a16="http://schemas.microsoft.com/office/drawing/2014/main" id="{0329C47F-D741-40E9-BBCF-D905A614C025}"/>
+                <a16:creationId xmlns:a16="http://schemas.microsoft.com/office/drawing/2014/main" id="{849FBDB8-9C88-4E5F-9C7E-B17D7FEF63C8}"/>
               </a:ext>
             </a:extLst>
           </p:cNvPr>
@@ -24623,7 +24623,7 @@
           <p:cNvPr id="63" name="">
             <a:extLst xmlns:a="http://schemas.openxmlformats.org/drawingml/2006/main">
               <a:ext uri="{FF2B5EF4-FFF2-40B4-BE49-F238E27FC236}">
-                <a16:creationId xmlns:a16="http://schemas.microsoft.com/office/drawing/2014/main" id="{DE27D1AA-17A5-4EAB-9478-CF51F9FFD8CE}"/>
+                <a16:creationId xmlns:a16="http://schemas.microsoft.com/office/drawing/2014/main" id="{C10EB6E4-6DEE-4F36-92AF-9BC03D9A38F1}"/>
               </a:ext>
             </a:extLst>
           </p:cNvPr>
@@ -24675,7 +24675,7 @@
           <p:cNvPr id="64" name="">
             <a:extLst xmlns:a="http://schemas.openxmlformats.org/drawingml/2006/main">
               <a:ext uri="{FF2B5EF4-FFF2-40B4-BE49-F238E27FC236}">
-                <a16:creationId xmlns:a16="http://schemas.microsoft.com/office/drawing/2014/main" id="{F30A022C-CF61-43BB-9C65-63120580B8CC}"/>
+                <a16:creationId xmlns:a16="http://schemas.microsoft.com/office/drawing/2014/main" id="{85CF0670-1735-4825-A9B8-780D3DA4C77E}"/>
               </a:ext>
             </a:extLst>
           </p:cNvPr>
@@ -24727,7 +24727,7 @@
           <p:cNvPr id="65" name="">
             <a:extLst xmlns:a="http://schemas.openxmlformats.org/drawingml/2006/main">
               <a:ext uri="{FF2B5EF4-FFF2-40B4-BE49-F238E27FC236}">
-                <a16:creationId xmlns:a16="http://schemas.microsoft.com/office/drawing/2014/main" id="{C5EC606F-6B79-4A03-AAB0-0DB7B0B15C76}"/>
+                <a16:creationId xmlns:a16="http://schemas.microsoft.com/office/drawing/2014/main" id="{681C9AD2-3A4D-4BBA-A588-BA5A9F661022}"/>
               </a:ext>
             </a:extLst>
           </p:cNvPr>
@@ -24779,7 +24779,7 @@
           <p:cNvPr id="66" name="">
             <a:extLst xmlns:a="http://schemas.openxmlformats.org/drawingml/2006/main">
               <a:ext uri="{FF2B5EF4-FFF2-40B4-BE49-F238E27FC236}">
-                <a16:creationId xmlns:a16="http://schemas.microsoft.com/office/drawing/2014/main" id="{251C661A-4A05-4861-8FD1-B35FE673E885}"/>
+                <a16:creationId xmlns:a16="http://schemas.microsoft.com/office/drawing/2014/main" id="{871E09B4-5EB1-4665-BAE2-632E6D330F6F}"/>
               </a:ext>
             </a:extLst>
           </p:cNvPr>
@@ -24831,7 +24831,7 @@
           <p:cNvPr id="67" name="">
             <a:extLst xmlns:a="http://schemas.openxmlformats.org/drawingml/2006/main">
               <a:ext uri="{FF2B5EF4-FFF2-40B4-BE49-F238E27FC236}">
-                <a16:creationId xmlns:a16="http://schemas.microsoft.com/office/drawing/2014/main" id="{F253A4E1-D60E-428C-B649-A00896EFC1F6}"/>
+                <a16:creationId xmlns:a16="http://schemas.microsoft.com/office/drawing/2014/main" id="{BDAF7352-F19F-42E2-9CC0-4E4684712DE7}"/>
               </a:ext>
             </a:extLst>
           </p:cNvPr>
@@ -24883,7 +24883,7 @@
           <p:cNvPr id="68" name="">
             <a:extLst xmlns:a="http://schemas.openxmlformats.org/drawingml/2006/main">
               <a:ext uri="{FF2B5EF4-FFF2-40B4-BE49-F238E27FC236}">
-                <a16:creationId xmlns:a16="http://schemas.microsoft.com/office/drawing/2014/main" id="{739A4036-3C92-4F48-99CD-074B717F2B8D}"/>
+                <a16:creationId xmlns:a16="http://schemas.microsoft.com/office/drawing/2014/main" id="{03C94C7B-DACB-48C9-B6B6-7D0BBF266406}"/>
               </a:ext>
             </a:extLst>
           </p:cNvPr>
@@ -24914,7 +24914,7 @@
           <p:cNvPr id="69" name="">
             <a:extLst xmlns:a="http://schemas.openxmlformats.org/drawingml/2006/main">
               <a:ext uri="{FF2B5EF4-FFF2-40B4-BE49-F238E27FC236}">
-                <a16:creationId xmlns:a16="http://schemas.microsoft.com/office/drawing/2014/main" id="{C7C5D06B-CBDA-43B6-AD31-E3C4D0CE68E4}"/>
+                <a16:creationId xmlns:a16="http://schemas.microsoft.com/office/drawing/2014/main" id="{603925D8-B2AD-49A0-8976-55F64A8137F7}"/>
               </a:ext>
             </a:extLst>
           </p:cNvPr>
@@ -24945,7 +24945,7 @@
           <p:cNvPr id="70" name="">
             <a:extLst xmlns:a="http://schemas.openxmlformats.org/drawingml/2006/main">
               <a:ext uri="{FF2B5EF4-FFF2-40B4-BE49-F238E27FC236}">
-                <a16:creationId xmlns:a16="http://schemas.microsoft.com/office/drawing/2014/main" id="{88886F6E-C9CC-48FF-8024-584C766C12EE}"/>
+                <a16:creationId xmlns:a16="http://schemas.microsoft.com/office/drawing/2014/main" id="{21E97777-9309-4D4C-AF59-A2F1AC3B2560}"/>
               </a:ext>
             </a:extLst>
           </p:cNvPr>
@@ -24997,7 +24997,7 @@
           <p:cNvPr id="71" name="">
             <a:extLst xmlns:a="http://schemas.openxmlformats.org/drawingml/2006/main">
               <a:ext uri="{FF2B5EF4-FFF2-40B4-BE49-F238E27FC236}">
-                <a16:creationId xmlns:a16="http://schemas.microsoft.com/office/drawing/2014/main" id="{D282AD20-F664-4CA9-8051-CA826EA605DF}"/>
+                <a16:creationId xmlns:a16="http://schemas.microsoft.com/office/drawing/2014/main" id="{D2E429AC-A7B2-4E42-A544-9113290C503E}"/>
               </a:ext>
             </a:extLst>
           </p:cNvPr>
@@ -25049,7 +25049,7 @@
           <p:cNvPr id="72" name="">
             <a:extLst xmlns:a="http://schemas.openxmlformats.org/drawingml/2006/main">
               <a:ext uri="{FF2B5EF4-FFF2-40B4-BE49-F238E27FC236}">
-                <a16:creationId xmlns:a16="http://schemas.microsoft.com/office/drawing/2014/main" id="{7464E716-9055-4DCB-9DA6-9DA0C76C66D8}"/>
+                <a16:creationId xmlns:a16="http://schemas.microsoft.com/office/drawing/2014/main" id="{D8545C55-86C6-4AD5-B026-80A5DF5EA5C7}"/>
               </a:ext>
             </a:extLst>
           </p:cNvPr>
@@ -25101,7 +25101,7 @@
           <p:cNvPr id="73" name="">
             <a:extLst xmlns:a="http://schemas.openxmlformats.org/drawingml/2006/main">
               <a:ext uri="{FF2B5EF4-FFF2-40B4-BE49-F238E27FC236}">
-                <a16:creationId xmlns:a16="http://schemas.microsoft.com/office/drawing/2014/main" id="{F9CDF03A-92CD-43D2-8F5C-6BE9DA2D648C}"/>
+                <a16:creationId xmlns:a16="http://schemas.microsoft.com/office/drawing/2014/main" id="{7DB14D4E-CEC0-4C3F-9926-56E201AB1BF7}"/>
               </a:ext>
             </a:extLst>
           </p:cNvPr>
@@ -25153,7 +25153,7 @@
           <p:cNvPr id="74" name="">
             <a:extLst xmlns:a="http://schemas.openxmlformats.org/drawingml/2006/main">
               <a:ext uri="{FF2B5EF4-FFF2-40B4-BE49-F238E27FC236}">
-                <a16:creationId xmlns:a16="http://schemas.microsoft.com/office/drawing/2014/main" id="{3DD44D85-A09D-46AD-998D-04EBE953B1B6}"/>
+                <a16:creationId xmlns:a16="http://schemas.microsoft.com/office/drawing/2014/main" id="{26F2ABE7-CC8A-431D-BFFB-3A4FA2CBF28B}"/>
               </a:ext>
             </a:extLst>
           </p:cNvPr>
@@ -25205,7 +25205,7 @@
           <p:cNvPr id="75" name="">
             <a:extLst xmlns:a="http://schemas.openxmlformats.org/drawingml/2006/main">
               <a:ext uri="{FF2B5EF4-FFF2-40B4-BE49-F238E27FC236}">
-                <a16:creationId xmlns:a16="http://schemas.microsoft.com/office/drawing/2014/main" id="{B1B4154E-5A2A-4B21-9651-48594DE1DCAD}"/>
+                <a16:creationId xmlns:a16="http://schemas.microsoft.com/office/drawing/2014/main" id="{FEA6576D-E57C-4726-9F64-D09DD8540BD9}"/>
               </a:ext>
             </a:extLst>
           </p:cNvPr>
@@ -25257,7 +25257,7 @@
           <p:cNvPr id="76" name="">
             <a:extLst xmlns:a="http://schemas.openxmlformats.org/drawingml/2006/main">
               <a:ext uri="{FF2B5EF4-FFF2-40B4-BE49-F238E27FC236}">
-                <a16:creationId xmlns:a16="http://schemas.microsoft.com/office/drawing/2014/main" id="{36927AA9-FE3F-4B24-B06E-62C57AA4EEE3}"/>
+                <a16:creationId xmlns:a16="http://schemas.microsoft.com/office/drawing/2014/main" id="{11837C28-C2D9-4B2D-9FE8-6A7AFDE69CF7}"/>
               </a:ext>
             </a:extLst>
           </p:cNvPr>
@@ -25309,7 +25309,7 @@
           <p:cNvPr id="77" name="">
             <a:extLst xmlns:a="http://schemas.openxmlformats.org/drawingml/2006/main">
               <a:ext uri="{FF2B5EF4-FFF2-40B4-BE49-F238E27FC236}">
-                <a16:creationId xmlns:a16="http://schemas.microsoft.com/office/drawing/2014/main" id="{8F40622E-6095-405B-9870-1358F6213FD5}"/>
+                <a16:creationId xmlns:a16="http://schemas.microsoft.com/office/drawing/2014/main" id="{1EF9CA48-89DE-43C4-A11D-9EA9E6CB10F9}"/>
               </a:ext>
             </a:extLst>
           </p:cNvPr>
@@ -25361,7 +25361,7 @@
           <p:cNvPr id="78" name="">
             <a:extLst xmlns:a="http://schemas.openxmlformats.org/drawingml/2006/main">
               <a:ext uri="{FF2B5EF4-FFF2-40B4-BE49-F238E27FC236}">
-                <a16:creationId xmlns:a16="http://schemas.microsoft.com/office/drawing/2014/main" id="{F6479113-C696-4FD6-9A37-D871B5EAFE90}"/>
+                <a16:creationId xmlns:a16="http://schemas.microsoft.com/office/drawing/2014/main" id="{BC9D1FAF-81C2-46E5-81EF-3ADAF4861284}"/>
               </a:ext>
             </a:extLst>
           </p:cNvPr>
@@ -25392,7 +25392,7 @@
           <p:cNvPr id="79" name="">
             <a:extLst xmlns:a="http://schemas.openxmlformats.org/drawingml/2006/main">
               <a:ext uri="{FF2B5EF4-FFF2-40B4-BE49-F238E27FC236}">
-                <a16:creationId xmlns:a16="http://schemas.microsoft.com/office/drawing/2014/main" id="{54D4B80B-9694-4C2F-9A27-3019F12A3E22}"/>
+                <a16:creationId xmlns:a16="http://schemas.microsoft.com/office/drawing/2014/main" id="{DB44966E-AF62-4354-A0FF-30769C3BDF4B}"/>
               </a:ext>
             </a:extLst>
           </p:cNvPr>
@@ -25444,7 +25444,7 @@
           <p:cNvPr id="80" name="">
             <a:extLst xmlns:a="http://schemas.openxmlformats.org/drawingml/2006/main">
               <a:ext uri="{FF2B5EF4-FFF2-40B4-BE49-F238E27FC236}">
-                <a16:creationId xmlns:a16="http://schemas.microsoft.com/office/drawing/2014/main" id="{9F62B21B-3CFC-4215-8AB3-7FC155BF59EB}"/>
+                <a16:creationId xmlns:a16="http://schemas.microsoft.com/office/drawing/2014/main" id="{B921A34B-B501-4262-A39E-8E237D4101FB}"/>
               </a:ext>
             </a:extLst>
           </p:cNvPr>
@@ -25496,7 +25496,7 @@
           <p:cNvPr id="81" name="">
             <a:extLst xmlns:a="http://schemas.openxmlformats.org/drawingml/2006/main">
               <a:ext uri="{FF2B5EF4-FFF2-40B4-BE49-F238E27FC236}">
-                <a16:creationId xmlns:a16="http://schemas.microsoft.com/office/drawing/2014/main" id="{E70B5AE6-B8D0-4AC7-BE2A-A8AF0EFAF127}"/>
+                <a16:creationId xmlns:a16="http://schemas.microsoft.com/office/drawing/2014/main" id="{D8518B64-5815-41BB-BDBF-23A21DE3726B}"/>
               </a:ext>
             </a:extLst>
           </p:cNvPr>
@@ -25548,7 +25548,7 @@
           <p:cNvPr id="82" name="">
             <a:extLst xmlns:a="http://schemas.openxmlformats.org/drawingml/2006/main">
               <a:ext uri="{FF2B5EF4-FFF2-40B4-BE49-F238E27FC236}">
-                <a16:creationId xmlns:a16="http://schemas.microsoft.com/office/drawing/2014/main" id="{F0CA206B-EED1-4934-BAF7-1E5232F602E8}"/>
+                <a16:creationId xmlns:a16="http://schemas.microsoft.com/office/drawing/2014/main" id="{6FC063A4-02C0-419D-A16F-E20D79FDC5A9}"/>
               </a:ext>
             </a:extLst>
           </p:cNvPr>
@@ -25600,7 +25600,7 @@
           <p:cNvPr id="83" name="">
             <a:extLst xmlns:a="http://schemas.openxmlformats.org/drawingml/2006/main">
               <a:ext uri="{FF2B5EF4-FFF2-40B4-BE49-F238E27FC236}">
-                <a16:creationId xmlns:a16="http://schemas.microsoft.com/office/drawing/2014/main" id="{06B4C5DA-8875-4627-968C-3BEF7299F8CC}"/>
+                <a16:creationId xmlns:a16="http://schemas.microsoft.com/office/drawing/2014/main" id="{FA4A852B-22E5-411A-AA38-02C3B7E3E170}"/>
               </a:ext>
             </a:extLst>
           </p:cNvPr>
@@ -25652,7 +25652,7 @@
           <p:cNvPr id="84" name="">
             <a:extLst xmlns:a="http://schemas.openxmlformats.org/drawingml/2006/main">
               <a:ext uri="{FF2B5EF4-FFF2-40B4-BE49-F238E27FC236}">
-                <a16:creationId xmlns:a16="http://schemas.microsoft.com/office/drawing/2014/main" id="{B67B640C-0C49-43C3-940F-B4128D1E7DDE}"/>
+                <a16:creationId xmlns:a16="http://schemas.microsoft.com/office/drawing/2014/main" id="{496E9DB3-4B6A-403E-93A9-81D450D548F9}"/>
               </a:ext>
             </a:extLst>
           </p:cNvPr>
@@ -25704,7 +25704,7 @@
           <p:cNvPr id="85" name="">
             <a:extLst xmlns:a="http://schemas.openxmlformats.org/drawingml/2006/main">
               <a:ext uri="{FF2B5EF4-FFF2-40B4-BE49-F238E27FC236}">
-                <a16:creationId xmlns:a16="http://schemas.microsoft.com/office/drawing/2014/main" id="{2EB31403-F2CC-45EB-9FC5-AAE720C7CCCB}"/>
+                <a16:creationId xmlns:a16="http://schemas.microsoft.com/office/drawing/2014/main" id="{2318AAED-C905-428C-89FE-675D7DD4309F}"/>
               </a:ext>
             </a:extLst>
           </p:cNvPr>
@@ -25756,7 +25756,7 @@
           <p:cNvPr id="86" name="">
             <a:extLst xmlns:a="http://schemas.openxmlformats.org/drawingml/2006/main">
               <a:ext uri="{FF2B5EF4-FFF2-40B4-BE49-F238E27FC236}">
-                <a16:creationId xmlns:a16="http://schemas.microsoft.com/office/drawing/2014/main" id="{EF86573D-7955-4BEB-9FF1-D86C99308E82}"/>
+                <a16:creationId xmlns:a16="http://schemas.microsoft.com/office/drawing/2014/main" id="{896E2E63-5FC4-4EBD-B376-3B49ABC9C352}"/>
               </a:ext>
             </a:extLst>
           </p:cNvPr>
@@ -25808,7 +25808,7 @@
           <p:cNvPr id="87" name="">
             <a:extLst xmlns:a="http://schemas.openxmlformats.org/drawingml/2006/main">
               <a:ext uri="{FF2B5EF4-FFF2-40B4-BE49-F238E27FC236}">
-                <a16:creationId xmlns:a16="http://schemas.microsoft.com/office/drawing/2014/main" id="{DC34B6E4-DD61-4CA3-886A-D8F848E766AA}"/>
+                <a16:creationId xmlns:a16="http://schemas.microsoft.com/office/drawing/2014/main" id="{0642039C-2C6D-4A75-B42F-8D7C9F49EF74}"/>
               </a:ext>
             </a:extLst>
           </p:cNvPr>
@@ -25839,7 +25839,7 @@
           <p:cNvPr id="88" name="">
             <a:extLst xmlns:a="http://schemas.openxmlformats.org/drawingml/2006/main">
               <a:ext uri="{FF2B5EF4-FFF2-40B4-BE49-F238E27FC236}">
-                <a16:creationId xmlns:a16="http://schemas.microsoft.com/office/drawing/2014/main" id="{8D82EEC2-40CC-45F6-B791-4EFB4733808A}"/>
+                <a16:creationId xmlns:a16="http://schemas.microsoft.com/office/drawing/2014/main" id="{69D704AA-1045-4C93-A5ED-4ECADE10DE9E}"/>
               </a:ext>
             </a:extLst>
           </p:cNvPr>
@@ -25870,7 +25870,7 @@
           <p:cNvPr id="89" name="">
             <a:extLst xmlns:a="http://schemas.openxmlformats.org/drawingml/2006/main">
               <a:ext uri="{FF2B5EF4-FFF2-40B4-BE49-F238E27FC236}">
-                <a16:creationId xmlns:a16="http://schemas.microsoft.com/office/drawing/2014/main" id="{F5B2795D-1377-4C35-B92B-5055102EF35B}"/>
+                <a16:creationId xmlns:a16="http://schemas.microsoft.com/office/drawing/2014/main" id="{16A219BF-CB4D-4D32-A0B6-76B56B655153}"/>
               </a:ext>
             </a:extLst>
           </p:cNvPr>
@@ -25922,7 +25922,7 @@
           <p:cNvPr id="90" name="">
             <a:extLst xmlns:a="http://schemas.openxmlformats.org/drawingml/2006/main">
               <a:ext uri="{FF2B5EF4-FFF2-40B4-BE49-F238E27FC236}">
-                <a16:creationId xmlns:a16="http://schemas.microsoft.com/office/drawing/2014/main" id="{F1D3420A-B84D-4939-BD43-02F007B13F6E}"/>
+                <a16:creationId xmlns:a16="http://schemas.microsoft.com/office/drawing/2014/main" id="{5EF4C4E4-F956-4ABE-86F1-92267DE47AA7}"/>
               </a:ext>
             </a:extLst>
           </p:cNvPr>
@@ -25974,7 +25974,7 @@
           <p:cNvPr id="91" name="">
             <a:extLst xmlns:a="http://schemas.openxmlformats.org/drawingml/2006/main">
               <a:ext uri="{FF2B5EF4-FFF2-40B4-BE49-F238E27FC236}">
-                <a16:creationId xmlns:a16="http://schemas.microsoft.com/office/drawing/2014/main" id="{3BFF54C9-A14D-459F-881A-4C69E355C5B6}"/>
+                <a16:creationId xmlns:a16="http://schemas.microsoft.com/office/drawing/2014/main" id="{935FE395-F74E-45E7-AD5D-0A1C8E58A105}"/>
               </a:ext>
             </a:extLst>
           </p:cNvPr>
@@ -26026,7 +26026,7 @@
           <p:cNvPr id="92" name="">
             <a:extLst xmlns:a="http://schemas.openxmlformats.org/drawingml/2006/main">
               <a:ext uri="{FF2B5EF4-FFF2-40B4-BE49-F238E27FC236}">
-                <a16:creationId xmlns:a16="http://schemas.microsoft.com/office/drawing/2014/main" id="{F36B2718-E56A-4F15-BBAE-E26F679688BA}"/>
+                <a16:creationId xmlns:a16="http://schemas.microsoft.com/office/drawing/2014/main" id="{59566F69-7BB9-42F2-8630-F7F6D385A177}"/>
               </a:ext>
             </a:extLst>
           </p:cNvPr>
@@ -26078,7 +26078,7 @@
           <p:cNvPr id="93" name="">
             <a:extLst xmlns:a="http://schemas.openxmlformats.org/drawingml/2006/main">
               <a:ext uri="{FF2B5EF4-FFF2-40B4-BE49-F238E27FC236}">
-                <a16:creationId xmlns:a16="http://schemas.microsoft.com/office/drawing/2014/main" id="{6D1E62A8-61E4-4B77-85CA-4F10503AD40E}"/>
+                <a16:creationId xmlns:a16="http://schemas.microsoft.com/office/drawing/2014/main" id="{C7EAA9B0-4A33-4D90-8BFB-2D3C698DB978}"/>
               </a:ext>
             </a:extLst>
           </p:cNvPr>
@@ -26130,7 +26130,7 @@
           <p:cNvPr id="94" name="">
             <a:extLst xmlns:a="http://schemas.openxmlformats.org/drawingml/2006/main">
               <a:ext uri="{FF2B5EF4-FFF2-40B4-BE49-F238E27FC236}">
-                <a16:creationId xmlns:a16="http://schemas.microsoft.com/office/drawing/2014/main" id="{42C913AD-1C79-4FAE-AD66-CC998FD1A8D5}"/>
+                <a16:creationId xmlns:a16="http://schemas.microsoft.com/office/drawing/2014/main" id="{4A699D8A-50E2-4015-870E-99BBAFAF9CD1}"/>
               </a:ext>
             </a:extLst>
           </p:cNvPr>
@@ -26182,7 +26182,7 @@
           <p:cNvPr id="95" name="">
             <a:extLst xmlns:a="http://schemas.openxmlformats.org/drawingml/2006/main">
               <a:ext uri="{FF2B5EF4-FFF2-40B4-BE49-F238E27FC236}">
-                <a16:creationId xmlns:a16="http://schemas.microsoft.com/office/drawing/2014/main" id="{5BAD6E83-D128-4C9F-958E-1F85609F5F3C}"/>
+                <a16:creationId xmlns:a16="http://schemas.microsoft.com/office/drawing/2014/main" id="{03FC85FA-32A7-4FDE-8F04-4D496E927A9C}"/>
               </a:ext>
             </a:extLst>
           </p:cNvPr>
@@ -26234,7 +26234,7 @@
           <p:cNvPr id="96" name="">
             <a:extLst xmlns:a="http://schemas.openxmlformats.org/drawingml/2006/main">
               <a:ext uri="{FF2B5EF4-FFF2-40B4-BE49-F238E27FC236}">
-                <a16:creationId xmlns:a16="http://schemas.microsoft.com/office/drawing/2014/main" id="{8F97DAF0-3844-4209-B5EB-0578E79FEF5F}"/>
+                <a16:creationId xmlns:a16="http://schemas.microsoft.com/office/drawing/2014/main" id="{EA5F6EE2-165E-49FA-B8F1-B1DFD0148D58}"/>
               </a:ext>
             </a:extLst>
           </p:cNvPr>
@@ -26286,7 +26286,7 @@
           <p:cNvPr id="97" name="">
             <a:extLst xmlns:a="http://schemas.openxmlformats.org/drawingml/2006/main">
               <a:ext uri="{FF2B5EF4-FFF2-40B4-BE49-F238E27FC236}">
-                <a16:creationId xmlns:a16="http://schemas.microsoft.com/office/drawing/2014/main" id="{11617365-8237-40D9-9BF0-FDCDA036F22F}"/>
+                <a16:creationId xmlns:a16="http://schemas.microsoft.com/office/drawing/2014/main" id="{1F7A1536-6577-4D7B-860A-4CCEB807EA1B}"/>
               </a:ext>
             </a:extLst>
           </p:cNvPr>
@@ -26317,7 +26317,7 @@
           <p:cNvPr id="98" name="">
             <a:extLst xmlns:a="http://schemas.openxmlformats.org/drawingml/2006/main">
               <a:ext uri="{FF2B5EF4-FFF2-40B4-BE49-F238E27FC236}">
-                <a16:creationId xmlns:a16="http://schemas.microsoft.com/office/drawing/2014/main" id="{15D13791-2ACC-457E-A8B7-7511AEC14D31}"/>
+                <a16:creationId xmlns:a16="http://schemas.microsoft.com/office/drawing/2014/main" id="{3B165476-DC89-496D-B2D6-D676341E6EF6}"/>
               </a:ext>
             </a:extLst>
           </p:cNvPr>
@@ -26369,7 +26369,7 @@
           <p:cNvPr id="99" name="">
             <a:extLst xmlns:a="http://schemas.openxmlformats.org/drawingml/2006/main">
               <a:ext uri="{FF2B5EF4-FFF2-40B4-BE49-F238E27FC236}">
-                <a16:creationId xmlns:a16="http://schemas.microsoft.com/office/drawing/2014/main" id="{C7DC4B50-24AE-49B3-A466-81A47C4F3776}"/>
+                <a16:creationId xmlns:a16="http://schemas.microsoft.com/office/drawing/2014/main" id="{875FDAC3-2B1A-483C-B56B-61F3BE368D9D}"/>
               </a:ext>
             </a:extLst>
           </p:cNvPr>
@@ -26421,7 +26421,7 @@
           <p:cNvPr id="100" name="">
             <a:extLst xmlns:a="http://schemas.openxmlformats.org/drawingml/2006/main">
               <a:ext uri="{FF2B5EF4-FFF2-40B4-BE49-F238E27FC236}">
-                <a16:creationId xmlns:a16="http://schemas.microsoft.com/office/drawing/2014/main" id="{0ED2CD65-F52C-4F8B-B6D7-990B3150098F}"/>
+                <a16:creationId xmlns:a16="http://schemas.microsoft.com/office/drawing/2014/main" id="{401AA130-E3AE-4A9E-B7BB-31C34D199E9E}"/>
               </a:ext>
             </a:extLst>
           </p:cNvPr>
@@ -26473,7 +26473,7 @@
           <p:cNvPr id="101" name="">
             <a:extLst xmlns:a="http://schemas.openxmlformats.org/drawingml/2006/main">
               <a:ext uri="{FF2B5EF4-FFF2-40B4-BE49-F238E27FC236}">
-                <a16:creationId xmlns:a16="http://schemas.microsoft.com/office/drawing/2014/main" id="{D51B8F57-5C72-427F-A4FD-7EF918D3A315}"/>
+                <a16:creationId xmlns:a16="http://schemas.microsoft.com/office/drawing/2014/main" id="{5CFA25D3-46EB-423D-8109-3DE90CAD631C}"/>
               </a:ext>
             </a:extLst>
           </p:cNvPr>
@@ -26525,7 +26525,7 @@
           <p:cNvPr id="102" name="">
             <a:extLst xmlns:a="http://schemas.openxmlformats.org/drawingml/2006/main">
               <a:ext uri="{FF2B5EF4-FFF2-40B4-BE49-F238E27FC236}">
-                <a16:creationId xmlns:a16="http://schemas.microsoft.com/office/drawing/2014/main" id="{04FE9062-78D1-466C-B5B2-CCAAD374AED5}"/>
+                <a16:creationId xmlns:a16="http://schemas.microsoft.com/office/drawing/2014/main" id="{EE56C8CE-E4AD-40EC-A19C-C83887FB8D91}"/>
               </a:ext>
             </a:extLst>
           </p:cNvPr>
@@ -26577,7 +26577,7 @@
           <p:cNvPr id="103" name="">
             <a:extLst xmlns:a="http://schemas.openxmlformats.org/drawingml/2006/main">
               <a:ext uri="{FF2B5EF4-FFF2-40B4-BE49-F238E27FC236}">
-                <a16:creationId xmlns:a16="http://schemas.microsoft.com/office/drawing/2014/main" id="{726448F7-47A1-4E6F-8AF1-FA347964FDB1}"/>
+                <a16:creationId xmlns:a16="http://schemas.microsoft.com/office/drawing/2014/main" id="{A2489603-1D86-4CF7-8ABE-FC2C17CB03C4}"/>
               </a:ext>
             </a:extLst>
           </p:cNvPr>
@@ -26629,7 +26629,7 @@
           <p:cNvPr id="104" name="">
             <a:extLst xmlns:a="http://schemas.openxmlformats.org/drawingml/2006/main">
               <a:ext uri="{FF2B5EF4-FFF2-40B4-BE49-F238E27FC236}">
-                <a16:creationId xmlns:a16="http://schemas.microsoft.com/office/drawing/2014/main" id="{A0CBCE15-9F25-4A51-8521-9091310EBF0E}"/>
+                <a16:creationId xmlns:a16="http://schemas.microsoft.com/office/drawing/2014/main" id="{649430EC-BD95-4DA4-83B5-20110446B5C7}"/>
               </a:ext>
             </a:extLst>
           </p:cNvPr>
@@ -26681,7 +26681,7 @@
           <p:cNvPr id="105" name="">
             <a:extLst xmlns:a="http://schemas.openxmlformats.org/drawingml/2006/main">
               <a:ext uri="{FF2B5EF4-FFF2-40B4-BE49-F238E27FC236}">
-                <a16:creationId xmlns:a16="http://schemas.microsoft.com/office/drawing/2014/main" id="{B1777566-2AD2-4C42-ADC7-A9A6596B7BB7}"/>
+                <a16:creationId xmlns:a16="http://schemas.microsoft.com/office/drawing/2014/main" id="{29AE08EC-5CD1-4232-BD89-B6887176F66C}"/>
               </a:ext>
             </a:extLst>
           </p:cNvPr>
@@ -26733,7 +26733,7 @@
           <p:cNvPr id="106" name="">
             <a:extLst xmlns:a="http://schemas.openxmlformats.org/drawingml/2006/main">
               <a:ext uri="{FF2B5EF4-FFF2-40B4-BE49-F238E27FC236}">
-                <a16:creationId xmlns:a16="http://schemas.microsoft.com/office/drawing/2014/main" id="{742D5F4B-8A61-45A5-88F6-9C049656079C}"/>
+                <a16:creationId xmlns:a16="http://schemas.microsoft.com/office/drawing/2014/main" id="{028834E4-5659-4A13-B800-6E153FD067F4}"/>
               </a:ext>
             </a:extLst>
           </p:cNvPr>
@@ -26764,7 +26764,7 @@
           <p:cNvPr id="107" name="">
             <a:extLst xmlns:a="http://schemas.openxmlformats.org/drawingml/2006/main">
               <a:ext uri="{FF2B5EF4-FFF2-40B4-BE49-F238E27FC236}">
-                <a16:creationId xmlns:a16="http://schemas.microsoft.com/office/drawing/2014/main" id="{2C488558-AA12-4DE0-9BA0-FCC64412AA96}"/>
+                <a16:creationId xmlns:a16="http://schemas.microsoft.com/office/drawing/2014/main" id="{C06FD004-E2E5-4C49-8D85-856CE98E5848}"/>
               </a:ext>
             </a:extLst>
           </p:cNvPr>
@@ -26795,7 +26795,7 @@
           <p:cNvPr id="108" name="">
             <a:extLst xmlns:a="http://schemas.openxmlformats.org/drawingml/2006/main">
               <a:ext uri="{FF2B5EF4-FFF2-40B4-BE49-F238E27FC236}">
-                <a16:creationId xmlns:a16="http://schemas.microsoft.com/office/drawing/2014/main" id="{BD1FA285-FA72-43EA-A3AF-B0964FE66EC9}"/>
+                <a16:creationId xmlns:a16="http://schemas.microsoft.com/office/drawing/2014/main" id="{F8039933-EA65-4853-B634-B5BD29409E12}"/>
               </a:ext>
             </a:extLst>
           </p:cNvPr>
@@ -26847,7 +26847,7 @@
           <p:cNvPr id="109" name="">
             <a:extLst xmlns:a="http://schemas.openxmlformats.org/drawingml/2006/main">
               <a:ext uri="{FF2B5EF4-FFF2-40B4-BE49-F238E27FC236}">
-                <a16:creationId xmlns:a16="http://schemas.microsoft.com/office/drawing/2014/main" id="{6183BF76-7E3D-48CF-8958-D812AA593038}"/>
+                <a16:creationId xmlns:a16="http://schemas.microsoft.com/office/drawing/2014/main" id="{407C17DE-D295-4822-AD0F-6D43CF3922FA}"/>
               </a:ext>
             </a:extLst>
           </p:cNvPr>
@@ -26899,7 +26899,7 @@
           <p:cNvPr id="110" name="">
             <a:extLst xmlns:a="http://schemas.openxmlformats.org/drawingml/2006/main">
               <a:ext uri="{FF2B5EF4-FFF2-40B4-BE49-F238E27FC236}">
-                <a16:creationId xmlns:a16="http://schemas.microsoft.com/office/drawing/2014/main" id="{7AEA55BE-283B-4E72-9D25-622AA807DBF0}"/>
+                <a16:creationId xmlns:a16="http://schemas.microsoft.com/office/drawing/2014/main" id="{06A6130F-3B42-4BCD-B5D1-7729E379CEB6}"/>
               </a:ext>
             </a:extLst>
           </p:cNvPr>
@@ -26951,7 +26951,7 @@
           <p:cNvPr id="111" name="">
             <a:extLst xmlns:a="http://schemas.openxmlformats.org/drawingml/2006/main">
               <a:ext uri="{FF2B5EF4-FFF2-40B4-BE49-F238E27FC236}">
-                <a16:creationId xmlns:a16="http://schemas.microsoft.com/office/drawing/2014/main" id="{438C7DEB-D7D8-4096-A78C-387B764FAB84}"/>
+                <a16:creationId xmlns:a16="http://schemas.microsoft.com/office/drawing/2014/main" id="{EF62DBE2-3F40-4FA3-A754-15CD880A8BFD}"/>
               </a:ext>
             </a:extLst>
           </p:cNvPr>
@@ -27003,7 +27003,7 @@
           <p:cNvPr id="112" name="">
             <a:extLst xmlns:a="http://schemas.openxmlformats.org/drawingml/2006/main">
               <a:ext uri="{FF2B5EF4-FFF2-40B4-BE49-F238E27FC236}">
-                <a16:creationId xmlns:a16="http://schemas.microsoft.com/office/drawing/2014/main" id="{C8464D81-E7E9-41A6-849D-04CF79968747}"/>
+                <a16:creationId xmlns:a16="http://schemas.microsoft.com/office/drawing/2014/main" id="{3EA15319-31B8-42BD-A0A8-951F6BAC7768}"/>
               </a:ext>
             </a:extLst>
           </p:cNvPr>
@@ -27055,7 +27055,7 @@
           <p:cNvPr id="113" name="">
             <a:extLst xmlns:a="http://schemas.openxmlformats.org/drawingml/2006/main">
               <a:ext uri="{FF2B5EF4-FFF2-40B4-BE49-F238E27FC236}">
-                <a16:creationId xmlns:a16="http://schemas.microsoft.com/office/drawing/2014/main" id="{C4504B09-4426-4E4B-9E87-8C1A0085C253}"/>
+                <a16:creationId xmlns:a16="http://schemas.microsoft.com/office/drawing/2014/main" id="{A4E3C799-69B1-42BC-B19F-AB0B3B173632}"/>
               </a:ext>
             </a:extLst>
           </p:cNvPr>
@@ -27107,7 +27107,7 @@
           <p:cNvPr id="114" name="">
             <a:extLst xmlns:a="http://schemas.openxmlformats.org/drawingml/2006/main">
               <a:ext uri="{FF2B5EF4-FFF2-40B4-BE49-F238E27FC236}">
-                <a16:creationId xmlns:a16="http://schemas.microsoft.com/office/drawing/2014/main" id="{0E61145C-30CF-4206-9559-89618BCF8502}"/>
+                <a16:creationId xmlns:a16="http://schemas.microsoft.com/office/drawing/2014/main" id="{39CDB168-7BA0-4615-811B-E05741F00587}"/>
               </a:ext>
             </a:extLst>
           </p:cNvPr>
@@ -27159,7 +27159,7 @@
           <p:cNvPr id="115" name="">
             <a:extLst xmlns:a="http://schemas.openxmlformats.org/drawingml/2006/main">
               <a:ext uri="{FF2B5EF4-FFF2-40B4-BE49-F238E27FC236}">
-                <a16:creationId xmlns:a16="http://schemas.microsoft.com/office/drawing/2014/main" id="{02931459-5063-4587-B820-427DAAF96D9A}"/>
+                <a16:creationId xmlns:a16="http://schemas.microsoft.com/office/drawing/2014/main" id="{CC99B0E7-9994-4A6E-8B09-C7A1A0EE3CB1}"/>
               </a:ext>
             </a:extLst>
           </p:cNvPr>
@@ -27211,7 +27211,7 @@
           <p:cNvPr id="116" name="">
             <a:extLst xmlns:a="http://schemas.openxmlformats.org/drawingml/2006/main">
               <a:ext uri="{FF2B5EF4-FFF2-40B4-BE49-F238E27FC236}">
-                <a16:creationId xmlns:a16="http://schemas.microsoft.com/office/drawing/2014/main" id="{A5964AE3-9C7B-43E4-BB0F-CF8A095D79E1}"/>
+                <a16:creationId xmlns:a16="http://schemas.microsoft.com/office/drawing/2014/main" id="{95246A2B-783B-4B8C-BB66-18368F148F08}"/>
               </a:ext>
             </a:extLst>
           </p:cNvPr>
@@ -27242,7 +27242,7 @@
           <p:cNvPr id="117" name="">
             <a:extLst xmlns:a="http://schemas.openxmlformats.org/drawingml/2006/main">
               <a:ext uri="{FF2B5EF4-FFF2-40B4-BE49-F238E27FC236}">
-                <a16:creationId xmlns:a16="http://schemas.microsoft.com/office/drawing/2014/main" id="{538923F2-0F56-461B-A0F9-53F9E3E810A3}"/>
+                <a16:creationId xmlns:a16="http://schemas.microsoft.com/office/drawing/2014/main" id="{6CBDE212-06AD-4CA5-B791-7C7DE38C44BD}"/>
               </a:ext>
             </a:extLst>
           </p:cNvPr>
@@ -27294,7 +27294,7 @@
           <p:cNvPr id="118" name="">
             <a:extLst xmlns:a="http://schemas.openxmlformats.org/drawingml/2006/main">
               <a:ext uri="{FF2B5EF4-FFF2-40B4-BE49-F238E27FC236}">
-                <a16:creationId xmlns:a16="http://schemas.microsoft.com/office/drawing/2014/main" id="{8B1A5E76-1513-482B-8443-0C16A6CA8CDF}"/>
+                <a16:creationId xmlns:a16="http://schemas.microsoft.com/office/drawing/2014/main" id="{50301C30-6F3F-46C7-A182-B3102DEDD977}"/>
               </a:ext>
             </a:extLst>
           </p:cNvPr>
@@ -27346,7 +27346,7 @@
           <p:cNvPr id="119" name="">
             <a:extLst xmlns:a="http://schemas.openxmlformats.org/drawingml/2006/main">
               <a:ext uri="{FF2B5EF4-FFF2-40B4-BE49-F238E27FC236}">
-                <a16:creationId xmlns:a16="http://schemas.microsoft.com/office/drawing/2014/main" id="{A2CBB237-2602-4494-A757-F9BB195711B1}"/>
+                <a16:creationId xmlns:a16="http://schemas.microsoft.com/office/drawing/2014/main" id="{3088F20E-9E86-4D8B-8343-19977BAFDFF3}"/>
               </a:ext>
             </a:extLst>
           </p:cNvPr>
@@ -27398,7 +27398,7 @@
           <p:cNvPr id="120" name="">
             <a:extLst xmlns:a="http://schemas.openxmlformats.org/drawingml/2006/main">
               <a:ext uri="{FF2B5EF4-FFF2-40B4-BE49-F238E27FC236}">
-                <a16:creationId xmlns:a16="http://schemas.microsoft.com/office/drawing/2014/main" id="{C320DCE5-D93B-421B-97F9-E2814C335203}"/>
+                <a16:creationId xmlns:a16="http://schemas.microsoft.com/office/drawing/2014/main" id="{407DB1C5-70C1-455C-BD90-FE014C4B2F78}"/>
               </a:ext>
             </a:extLst>
           </p:cNvPr>
@@ -27450,7 +27450,7 @@
           <p:cNvPr id="121" name="">
             <a:extLst xmlns:a="http://schemas.openxmlformats.org/drawingml/2006/main">
               <a:ext uri="{FF2B5EF4-FFF2-40B4-BE49-F238E27FC236}">
-                <a16:creationId xmlns:a16="http://schemas.microsoft.com/office/drawing/2014/main" id="{FCF7B410-F3EA-40C1-B917-52ED821981D1}"/>
+                <a16:creationId xmlns:a16="http://schemas.microsoft.com/office/drawing/2014/main" id="{97DC7260-67C3-418F-95DB-BD3F0A9DA64C}"/>
               </a:ext>
             </a:extLst>
           </p:cNvPr>
@@ -27502,7 +27502,7 @@
           <p:cNvPr id="122" name="">
             <a:extLst xmlns:a="http://schemas.openxmlformats.org/drawingml/2006/main">
               <a:ext uri="{FF2B5EF4-FFF2-40B4-BE49-F238E27FC236}">
-                <a16:creationId xmlns:a16="http://schemas.microsoft.com/office/drawing/2014/main" id="{FB4939B3-C17F-4B06-9577-ADE92C631F64}"/>
+                <a16:creationId xmlns:a16="http://schemas.microsoft.com/office/drawing/2014/main" id="{AF1254AF-68CD-4ECA-B339-89386DAA5FB8}"/>
               </a:ext>
             </a:extLst>
           </p:cNvPr>
@@ -27554,7 +27554,7 @@
           <p:cNvPr id="123" name="">
             <a:extLst xmlns:a="http://schemas.openxmlformats.org/drawingml/2006/main">
               <a:ext uri="{FF2B5EF4-FFF2-40B4-BE49-F238E27FC236}">
-                <a16:creationId xmlns:a16="http://schemas.microsoft.com/office/drawing/2014/main" id="{46C07605-3003-45CE-B670-C91633546B50}"/>
+                <a16:creationId xmlns:a16="http://schemas.microsoft.com/office/drawing/2014/main" id="{1246757C-087A-45BB-98BA-A84A06C0AD8A}"/>
               </a:ext>
             </a:extLst>
           </p:cNvPr>
@@ -27606,7 +27606,7 @@
           <p:cNvPr id="124" name="">
             <a:extLst xmlns:a="http://schemas.openxmlformats.org/drawingml/2006/main">
               <a:ext uri="{FF2B5EF4-FFF2-40B4-BE49-F238E27FC236}">
-                <a16:creationId xmlns:a16="http://schemas.microsoft.com/office/drawing/2014/main" id="{33C8E9C9-D954-4CF9-9998-BEF92F68D09C}"/>
+                <a16:creationId xmlns:a16="http://schemas.microsoft.com/office/drawing/2014/main" id="{65D5BA3B-1ABD-4CF5-A1F5-233D89DA915C}"/>
               </a:ext>
             </a:extLst>
           </p:cNvPr>
@@ -27658,7 +27658,7 @@
           <p:cNvPr id="125" name="">
             <a:extLst xmlns:a="http://schemas.openxmlformats.org/drawingml/2006/main">
               <a:ext uri="{FF2B5EF4-FFF2-40B4-BE49-F238E27FC236}">
-                <a16:creationId xmlns:a16="http://schemas.microsoft.com/office/drawing/2014/main" id="{2EDB0C44-5181-462B-9D03-A90AE5ABD1AF}"/>
+                <a16:creationId xmlns:a16="http://schemas.microsoft.com/office/drawing/2014/main" id="{B1B9C0AC-EB8F-43A0-A73B-3012767768D7}"/>
               </a:ext>
             </a:extLst>
           </p:cNvPr>
@@ -27689,7 +27689,7 @@
           <p:cNvPr id="126" name="">
             <a:extLst xmlns:a="http://schemas.openxmlformats.org/drawingml/2006/main">
               <a:ext uri="{FF2B5EF4-FFF2-40B4-BE49-F238E27FC236}">
-                <a16:creationId xmlns:a16="http://schemas.microsoft.com/office/drawing/2014/main" id="{CE79595C-1910-4228-9936-DBDF97F2D83A}"/>
+                <a16:creationId xmlns:a16="http://schemas.microsoft.com/office/drawing/2014/main" id="{DC2B2C17-9818-4B78-9BDF-53A357E35BD9}"/>
               </a:ext>
             </a:extLst>
           </p:cNvPr>
@@ -27720,7 +27720,7 @@
           <p:cNvPr id="127" name="">
             <a:extLst xmlns:a="http://schemas.openxmlformats.org/drawingml/2006/main">
               <a:ext uri="{FF2B5EF4-FFF2-40B4-BE49-F238E27FC236}">
-                <a16:creationId xmlns:a16="http://schemas.microsoft.com/office/drawing/2014/main" id="{E16E21C1-A29A-4EB6-8161-3FEEE55CD0A3}"/>
+                <a16:creationId xmlns:a16="http://schemas.microsoft.com/office/drawing/2014/main" id="{87E8405C-FA10-4FC4-A626-9C0DE3363CD4}"/>
               </a:ext>
             </a:extLst>
           </p:cNvPr>
@@ -27772,7 +27772,7 @@
           <p:cNvPr id="128" name="">
             <a:extLst xmlns:a="http://schemas.openxmlformats.org/drawingml/2006/main">
               <a:ext uri="{FF2B5EF4-FFF2-40B4-BE49-F238E27FC236}">
-                <a16:creationId xmlns:a16="http://schemas.microsoft.com/office/drawing/2014/main" id="{6E3A4E4D-7DEA-4A6D-A3FD-6EC4FC668D6D}"/>
+                <a16:creationId xmlns:a16="http://schemas.microsoft.com/office/drawing/2014/main" id="{652A5500-3715-4CB0-A882-FCCC9F146BF1}"/>
               </a:ext>
             </a:extLst>
           </p:cNvPr>
@@ -27824,7 +27824,7 @@
           <p:cNvPr id="129" name="">
             <a:extLst xmlns:a="http://schemas.openxmlformats.org/drawingml/2006/main">
               <a:ext uri="{FF2B5EF4-FFF2-40B4-BE49-F238E27FC236}">
-                <a16:creationId xmlns:a16="http://schemas.microsoft.com/office/drawing/2014/main" id="{0A4245CF-41DA-433B-B107-D7FD62AAB0B4}"/>
+                <a16:creationId xmlns:a16="http://schemas.microsoft.com/office/drawing/2014/main" id="{31CC185A-D573-4ACC-889B-AE9AFA90436A}"/>
               </a:ext>
             </a:extLst>
           </p:cNvPr>
@@ -27876,7 +27876,7 @@
           <p:cNvPr id="130" name="">
             <a:extLst xmlns:a="http://schemas.openxmlformats.org/drawingml/2006/main">
               <a:ext uri="{FF2B5EF4-FFF2-40B4-BE49-F238E27FC236}">
-                <a16:creationId xmlns:a16="http://schemas.microsoft.com/office/drawing/2014/main" id="{E47D8812-1753-437D-9CA5-B207B83BB35A}"/>
+                <a16:creationId xmlns:a16="http://schemas.microsoft.com/office/drawing/2014/main" id="{4CB44216-ADF6-44B5-A449-47638571F62A}"/>
               </a:ext>
             </a:extLst>
           </p:cNvPr>
@@ -27928,7 +27928,7 @@
           <p:cNvPr id="131" name="">
             <a:extLst xmlns:a="http://schemas.openxmlformats.org/drawingml/2006/main">
               <a:ext uri="{FF2B5EF4-FFF2-40B4-BE49-F238E27FC236}">
-                <a16:creationId xmlns:a16="http://schemas.microsoft.com/office/drawing/2014/main" id="{75CC5B12-3B6C-4FA9-A749-302104FC7161}"/>
+                <a16:creationId xmlns:a16="http://schemas.microsoft.com/office/drawing/2014/main" id="{0E7EB1DA-A7ED-4BD2-B8E0-613D48E3F5E0}"/>
               </a:ext>
             </a:extLst>
           </p:cNvPr>
@@ -27980,7 +27980,7 @@
           <p:cNvPr id="132" name="">
             <a:extLst xmlns:a="http://schemas.openxmlformats.org/drawingml/2006/main">
               <a:ext uri="{FF2B5EF4-FFF2-40B4-BE49-F238E27FC236}">
-                <a16:creationId xmlns:a16="http://schemas.microsoft.com/office/drawing/2014/main" id="{95C1EA87-9469-4CB2-837C-23FA55428EB1}"/>
+                <a16:creationId xmlns:a16="http://schemas.microsoft.com/office/drawing/2014/main" id="{56E59F95-3E0E-4AB4-B3A5-7CF8E4D6E143}"/>
               </a:ext>
             </a:extLst>
           </p:cNvPr>
@@ -28032,7 +28032,7 @@
           <p:cNvPr id="133" name="">
             <a:extLst xmlns:a="http://schemas.openxmlformats.org/drawingml/2006/main">
               <a:ext uri="{FF2B5EF4-FFF2-40B4-BE49-F238E27FC236}">
-                <a16:creationId xmlns:a16="http://schemas.microsoft.com/office/drawing/2014/main" id="{2D69C8B3-C580-4DA5-AABE-39A00C592973}"/>
+                <a16:creationId xmlns:a16="http://schemas.microsoft.com/office/drawing/2014/main" id="{CCB2144A-79FE-443F-97B3-EFD506BDD073}"/>
               </a:ext>
             </a:extLst>
           </p:cNvPr>
@@ -28084,7 +28084,7 @@
           <p:cNvPr id="134" name="">
             <a:extLst xmlns:a="http://schemas.openxmlformats.org/drawingml/2006/main">
               <a:ext uri="{FF2B5EF4-FFF2-40B4-BE49-F238E27FC236}">
-                <a16:creationId xmlns:a16="http://schemas.microsoft.com/office/drawing/2014/main" id="{B981BF8B-A8A2-4E7B-BE2E-2A406D9ACD32}"/>
+                <a16:creationId xmlns:a16="http://schemas.microsoft.com/office/drawing/2014/main" id="{764162A8-CB4A-4704-9C64-96B5FBDA7D91}"/>
               </a:ext>
             </a:extLst>
           </p:cNvPr>
@@ -28134,7 +28134,7 @@
     </p:spTree>
     <p:extLst>
       <p:ext uri="{BB962C8B-B14F-4D97-AF65-F5344CB8AC3E}">
-        <p14:creationId xmlns:p14="http://schemas.microsoft.com/office/powerpoint/2010/main" val="696112911"/>
+        <p14:creationId xmlns:p14="http://schemas.microsoft.com/office/powerpoint/2010/main" val="1186505329"/>
       </p:ext>
     </p:extLst>
   </p:cSld>
@@ -28165,7 +28165,7 @@
           <p:cNvPr id="9" name="">
             <a:extLst xmlns:a="http://schemas.openxmlformats.org/drawingml/2006/main">
               <a:ext uri="{FF2B5EF4-FFF2-40B4-BE49-F238E27FC236}">
-                <a16:creationId xmlns:a16="http://schemas.microsoft.com/office/drawing/2014/main" id="{B89EA634-C5BC-4064-9761-1B67417B16D7}"/>
+                <a16:creationId xmlns:a16="http://schemas.microsoft.com/office/drawing/2014/main" id="{A15DA0E7-A71D-4528-B12F-41E6849A936D}"/>
               </a:ext>
             </a:extLst>
           </p:cNvPr>
@@ -28198,7 +28198,7 @@
           <p:cNvPr id="2" name="">
             <a:extLst xmlns:a="http://schemas.openxmlformats.org/drawingml/2006/main">
               <a:ext uri="{FF2B5EF4-FFF2-40B4-BE49-F238E27FC236}">
-                <a16:creationId xmlns:a16="http://schemas.microsoft.com/office/drawing/2014/main" id="{1A42BDA8-DBD3-425B-BC86-8907F039C4F9}"/>
+                <a16:creationId xmlns:a16="http://schemas.microsoft.com/office/drawing/2014/main" id="{D72099BE-817C-4DD6-B8CF-2695949363D0}"/>
               </a:ext>
             </a:extLst>
           </p:cNvPr>
@@ -28229,7 +28229,7 @@
           <p:cNvPr id="3" name="">
             <a:extLst xmlns:a="http://schemas.openxmlformats.org/drawingml/2006/main">
               <a:ext uri="{FF2B5EF4-FFF2-40B4-BE49-F238E27FC236}">
-                <a16:creationId xmlns:a16="http://schemas.microsoft.com/office/drawing/2014/main" id="{9000D667-60A3-43FA-82AD-FE7997CC79C7}"/>
+                <a16:creationId xmlns:a16="http://schemas.microsoft.com/office/drawing/2014/main" id="{80ABD950-E63F-4EB9-B794-7C4F731C75AB}"/>
               </a:ext>
             </a:extLst>
           </p:cNvPr>
@@ -28281,7 +28281,7 @@
           <p:cNvPr id="4" name="">
             <a:extLst xmlns:a="http://schemas.openxmlformats.org/drawingml/2006/main">
               <a:ext uri="{FF2B5EF4-FFF2-40B4-BE49-F238E27FC236}">
-                <a16:creationId xmlns:a16="http://schemas.microsoft.com/office/drawing/2014/main" id="{D90608C9-046D-4D62-8E28-CF027F4AE85E}"/>
+                <a16:creationId xmlns:a16="http://schemas.microsoft.com/office/drawing/2014/main" id="{0B969829-B949-4DF9-B31A-505756FF988E}"/>
               </a:ext>
             </a:extLst>
           </p:cNvPr>
@@ -28316,7 +28316,7 @@
           <p:nvPr/>
         </p:nvPicPr>
         <p:blipFill>
-          <a:blip xmlns:r="http://schemas.openxmlformats.org/officeDocument/2006/relationships" xmlns:a="http://schemas.openxmlformats.org/drawingml/2006/main" r:embed="R81f1f6b279b0423a"/>
+          <a:blip xmlns:r="http://schemas.openxmlformats.org/officeDocument/2006/relationships" xmlns:a="http://schemas.openxmlformats.org/drawingml/2006/main" r:embed="Rab004f0991584cb8"/>
           <a:stretch xmlns:a="http://schemas.openxmlformats.org/drawingml/2006/main"/>
         </p:blipFill>
         <p:spPr>
@@ -28334,7 +28334,7 @@
           <p:cNvPr id="6" name="">
             <a:extLst xmlns:a="http://schemas.openxmlformats.org/drawingml/2006/main">
               <a:ext uri="{FF2B5EF4-FFF2-40B4-BE49-F238E27FC236}">
-                <a16:creationId xmlns:a16="http://schemas.microsoft.com/office/drawing/2014/main" id="{D536CD5E-B3CF-4538-8BD1-E756281055EE}"/>
+                <a16:creationId xmlns:a16="http://schemas.microsoft.com/office/drawing/2014/main" id="{F9220ADF-CAE6-4171-BAB9-2D3BA65AA974}"/>
               </a:ext>
             </a:extLst>
           </p:cNvPr>
@@ -28386,7 +28386,7 @@
           <p:cNvPr id="7" name="">
             <a:extLst xmlns:a="http://schemas.openxmlformats.org/drawingml/2006/main">
               <a:ext uri="{FF2B5EF4-FFF2-40B4-BE49-F238E27FC236}">
-                <a16:creationId xmlns:a16="http://schemas.microsoft.com/office/drawing/2014/main" id="{4A1DC7FA-4F0C-462F-B861-D988BB1AB306}"/>
+                <a16:creationId xmlns:a16="http://schemas.microsoft.com/office/drawing/2014/main" id="{711FA377-4661-41BF-A9CA-2BA1CEC3EA3F}"/>
               </a:ext>
             </a:extLst>
           </p:cNvPr>
@@ -28442,7 +28442,7 @@
           <p:nvPr/>
         </p:nvPicPr>
         <p:blipFill>
-          <a:blip xmlns:r="http://schemas.openxmlformats.org/officeDocument/2006/relationships" xmlns:a="http://schemas.openxmlformats.org/drawingml/2006/main" r:embed="R4186d898e3db4799"/>
+          <a:blip xmlns:r="http://schemas.openxmlformats.org/officeDocument/2006/relationships" xmlns:a="http://schemas.openxmlformats.org/drawingml/2006/main" r:embed="R6698922500fb46c5"/>
           <a:stretch xmlns:a="http://schemas.openxmlformats.org/drawingml/2006/main"/>
         </p:blipFill>
         <p:spPr>
@@ -28458,7 +28458,7 @@
     </p:spTree>
     <p:extLst>
       <p:ext uri="{BB962C8B-B14F-4D97-AF65-F5344CB8AC3E}">
-        <p14:creationId xmlns:p14="http://schemas.microsoft.com/office/powerpoint/2010/main" val="1362805226"/>
+        <p14:creationId xmlns:p14="http://schemas.microsoft.com/office/powerpoint/2010/main" val="1425566069"/>
       </p:ext>
     </p:extLst>
   </p:cSld>
@@ -28489,7 +28489,7 @@
           <p:cNvPr id="42" name="">
             <a:extLst xmlns:a="http://schemas.openxmlformats.org/drawingml/2006/main">
               <a:ext uri="{FF2B5EF4-FFF2-40B4-BE49-F238E27FC236}">
-                <a16:creationId xmlns:a16="http://schemas.microsoft.com/office/drawing/2014/main" id="{0716CF20-BA1C-4DF8-BBF0-CB8577DC1BD5}"/>
+                <a16:creationId xmlns:a16="http://schemas.microsoft.com/office/drawing/2014/main" id="{C9F93504-7A3F-42B8-AC1E-8C3DCD0E3E28}"/>
               </a:ext>
             </a:extLst>
           </p:cNvPr>
@@ -28522,7 +28522,7 @@
           <p:cNvPr id="2" name="">
             <a:extLst xmlns:a="http://schemas.openxmlformats.org/drawingml/2006/main">
               <a:ext uri="{FF2B5EF4-FFF2-40B4-BE49-F238E27FC236}">
-                <a16:creationId xmlns:a16="http://schemas.microsoft.com/office/drawing/2014/main" id="{0E5D1C6D-8EB5-468C-83F9-C59AF1760B1D}"/>
+                <a16:creationId xmlns:a16="http://schemas.microsoft.com/office/drawing/2014/main" id="{C460E100-D6EB-462B-AA9B-69BF565126BC}"/>
               </a:ext>
             </a:extLst>
           </p:cNvPr>
@@ -28553,7 +28553,7 @@
           <p:cNvPr id="3" name="">
             <a:extLst xmlns:a="http://schemas.openxmlformats.org/drawingml/2006/main">
               <a:ext uri="{FF2B5EF4-FFF2-40B4-BE49-F238E27FC236}">
-                <a16:creationId xmlns:a16="http://schemas.microsoft.com/office/drawing/2014/main" id="{3A582176-12CF-4790-B17A-B0B704FD8506}"/>
+                <a16:creationId xmlns:a16="http://schemas.microsoft.com/office/drawing/2014/main" id="{130E3789-2FBB-44DE-BC36-5BB6B2F42ACE}"/>
               </a:ext>
             </a:extLst>
           </p:cNvPr>
@@ -28605,7 +28605,7 @@
           <p:cNvPr id="4" name="">
             <a:extLst xmlns:a="http://schemas.openxmlformats.org/drawingml/2006/main">
               <a:ext uri="{FF2B5EF4-FFF2-40B4-BE49-F238E27FC236}">
-                <a16:creationId xmlns:a16="http://schemas.microsoft.com/office/drawing/2014/main" id="{4C6BA39D-4CC1-4C30-BD90-A8051DCEED9C}"/>
+                <a16:creationId xmlns:a16="http://schemas.microsoft.com/office/drawing/2014/main" id="{4096A220-5737-493C-95D7-B68057CD7C52}"/>
               </a:ext>
             </a:extLst>
           </p:cNvPr>
@@ -28657,7 +28657,7 @@
           <p:cNvPr id="5" name="">
             <a:extLst xmlns:a="http://schemas.openxmlformats.org/drawingml/2006/main">
               <a:ext uri="{FF2B5EF4-FFF2-40B4-BE49-F238E27FC236}">
-                <a16:creationId xmlns:a16="http://schemas.microsoft.com/office/drawing/2014/main" id="{CB882181-293C-4E06-99BB-868398410CB7}"/>
+                <a16:creationId xmlns:a16="http://schemas.microsoft.com/office/drawing/2014/main" id="{D0BBA996-225D-4EE6-AC5B-E2C72B74908D}"/>
               </a:ext>
             </a:extLst>
           </p:cNvPr>
@@ -28692,7 +28692,7 @@
           <p:nvPr/>
         </p:nvPicPr>
         <p:blipFill>
-          <a:blip xmlns:r="http://schemas.openxmlformats.org/officeDocument/2006/relationships" xmlns:a="http://schemas.openxmlformats.org/drawingml/2006/main" r:embed="Rfc910a4f5e5d4edc"/>
+          <a:blip xmlns:r="http://schemas.openxmlformats.org/officeDocument/2006/relationships" xmlns:a="http://schemas.openxmlformats.org/drawingml/2006/main" r:embed="Ra9257d97aa9245fe"/>
           <a:stretch xmlns:a="http://schemas.openxmlformats.org/drawingml/2006/main"/>
         </p:blipFill>
         <p:spPr>
@@ -28710,7 +28710,7 @@
           <p:cNvPr id="7" name="">
             <a:extLst xmlns:a="http://schemas.openxmlformats.org/drawingml/2006/main">
               <a:ext uri="{FF2B5EF4-FFF2-40B4-BE49-F238E27FC236}">
-                <a16:creationId xmlns:a16="http://schemas.microsoft.com/office/drawing/2014/main" id="{0A70D661-6AC0-42AA-949A-4B81B94F07A0}"/>
+                <a16:creationId xmlns:a16="http://schemas.microsoft.com/office/drawing/2014/main" id="{A8BE4F2C-26E4-4D04-A217-9FB4178DF004}"/>
               </a:ext>
             </a:extLst>
           </p:cNvPr>
@@ -28762,7 +28762,7 @@
           <p:cNvPr id="8" name="">
             <a:extLst xmlns:a="http://schemas.openxmlformats.org/drawingml/2006/main">
               <a:ext uri="{FF2B5EF4-FFF2-40B4-BE49-F238E27FC236}">
-                <a16:creationId xmlns:a16="http://schemas.microsoft.com/office/drawing/2014/main" id="{5C3DEA21-CE4F-4174-9C08-C66035A09B6B}"/>
+                <a16:creationId xmlns:a16="http://schemas.microsoft.com/office/drawing/2014/main" id="{496A3A07-B946-4ECF-A8B5-3744CA6B2C76}"/>
               </a:ext>
             </a:extLst>
           </p:cNvPr>
@@ -28814,7 +28814,7 @@
           <p:cNvPr id="9" name="">
             <a:extLst xmlns:a="http://schemas.openxmlformats.org/drawingml/2006/main">
               <a:ext uri="{FF2B5EF4-FFF2-40B4-BE49-F238E27FC236}">
-                <a16:creationId xmlns:a16="http://schemas.microsoft.com/office/drawing/2014/main" id="{8C833FCD-20AF-4FDB-B904-3C5BB313C23C}"/>
+                <a16:creationId xmlns:a16="http://schemas.microsoft.com/office/drawing/2014/main" id="{849A4663-6FB8-470C-B5BB-14748446C8A8}"/>
               </a:ext>
             </a:extLst>
           </p:cNvPr>
@@ -28866,7 +28866,7 @@
           <p:cNvPr id="10" name="">
             <a:extLst xmlns:a="http://schemas.openxmlformats.org/drawingml/2006/main">
               <a:ext uri="{FF2B5EF4-FFF2-40B4-BE49-F238E27FC236}">
-                <a16:creationId xmlns:a16="http://schemas.microsoft.com/office/drawing/2014/main" id="{41FD6B26-88C0-425B-A6D3-6B8B879C807D}"/>
+                <a16:creationId xmlns:a16="http://schemas.microsoft.com/office/drawing/2014/main" id="{2E883C6A-F6AC-497D-9006-4FFEA79BCD63}"/>
               </a:ext>
             </a:extLst>
           </p:cNvPr>
@@ -28897,7 +28897,7 @@
           <p:cNvPr id="11" name="">
             <a:extLst xmlns:a="http://schemas.openxmlformats.org/drawingml/2006/main">
               <a:ext uri="{FF2B5EF4-FFF2-40B4-BE49-F238E27FC236}">
-                <a16:creationId xmlns:a16="http://schemas.microsoft.com/office/drawing/2014/main" id="{AE3ADC49-7A42-4C83-A373-B8AEC799A9A7}"/>
+                <a16:creationId xmlns:a16="http://schemas.microsoft.com/office/drawing/2014/main" id="{40C78DE3-695C-47F1-AD40-E062AC999D8D}"/>
               </a:ext>
             </a:extLst>
           </p:cNvPr>
@@ -28949,7 +28949,7 @@
           <p:cNvPr id="12" name="">
             <a:extLst xmlns:a="http://schemas.openxmlformats.org/drawingml/2006/main">
               <a:ext uri="{FF2B5EF4-FFF2-40B4-BE49-F238E27FC236}">
-                <a16:creationId xmlns:a16="http://schemas.microsoft.com/office/drawing/2014/main" id="{3171712E-55B7-4136-BD6D-C28A802867D9}"/>
+                <a16:creationId xmlns:a16="http://schemas.microsoft.com/office/drawing/2014/main" id="{C746FDE6-87CB-42B1-8F83-94472932D26D}"/>
               </a:ext>
             </a:extLst>
           </p:cNvPr>
@@ -29001,7 +29001,7 @@
           <p:cNvPr id="13" name="">
             <a:extLst xmlns:a="http://schemas.openxmlformats.org/drawingml/2006/main">
               <a:ext uri="{FF2B5EF4-FFF2-40B4-BE49-F238E27FC236}">
-                <a16:creationId xmlns:a16="http://schemas.microsoft.com/office/drawing/2014/main" id="{7ED2A4A7-BFCB-4111-8B33-24F7FE4E2921}"/>
+                <a16:creationId xmlns:a16="http://schemas.microsoft.com/office/drawing/2014/main" id="{8951F39C-FD48-47FD-BE80-006407A3FD1D}"/>
               </a:ext>
             </a:extLst>
           </p:cNvPr>
@@ -29053,7 +29053,7 @@
           <p:cNvPr id="14" name="">
             <a:extLst xmlns:a="http://schemas.openxmlformats.org/drawingml/2006/main">
               <a:ext uri="{FF2B5EF4-FFF2-40B4-BE49-F238E27FC236}">
-                <a16:creationId xmlns:a16="http://schemas.microsoft.com/office/drawing/2014/main" id="{212F7A77-B90E-40BC-85C1-037F6172642C}"/>
+                <a16:creationId xmlns:a16="http://schemas.microsoft.com/office/drawing/2014/main" id="{DE0B1FD6-7CD2-494F-91E3-75A6CED1F7D6}"/>
               </a:ext>
             </a:extLst>
           </p:cNvPr>
@@ -29084,7 +29084,7 @@
           <p:cNvPr id="15" name="">
             <a:extLst xmlns:a="http://schemas.openxmlformats.org/drawingml/2006/main">
               <a:ext uri="{FF2B5EF4-FFF2-40B4-BE49-F238E27FC236}">
-                <a16:creationId xmlns:a16="http://schemas.microsoft.com/office/drawing/2014/main" id="{B16D6C5D-A072-4443-A961-DB9912E72BB5}"/>
+                <a16:creationId xmlns:a16="http://schemas.microsoft.com/office/drawing/2014/main" id="{87BF8DFD-571B-4DB2-BE8A-DD4DF20AEB7F}"/>
               </a:ext>
             </a:extLst>
           </p:cNvPr>
@@ -29136,7 +29136,7 @@
           <p:cNvPr id="16" name="">
             <a:extLst xmlns:a="http://schemas.openxmlformats.org/drawingml/2006/main">
               <a:ext uri="{FF2B5EF4-FFF2-40B4-BE49-F238E27FC236}">
-                <a16:creationId xmlns:a16="http://schemas.microsoft.com/office/drawing/2014/main" id="{C3E7CB6F-9DFA-4B29-9BF4-4DC87C78569C}"/>
+                <a16:creationId xmlns:a16="http://schemas.microsoft.com/office/drawing/2014/main" id="{A72E77DA-BBFD-4BBE-99E4-961A435CC95A}"/>
               </a:ext>
             </a:extLst>
           </p:cNvPr>
@@ -29188,7 +29188,7 @@
           <p:cNvPr id="17" name="">
             <a:extLst xmlns:a="http://schemas.openxmlformats.org/drawingml/2006/main">
               <a:ext uri="{FF2B5EF4-FFF2-40B4-BE49-F238E27FC236}">
-                <a16:creationId xmlns:a16="http://schemas.microsoft.com/office/drawing/2014/main" id="{56F6520D-EC99-49EC-B078-FF07DCA839F3}"/>
+                <a16:creationId xmlns:a16="http://schemas.microsoft.com/office/drawing/2014/main" id="{7AA1B866-5693-43D7-B435-18F1E09ED780}"/>
               </a:ext>
             </a:extLst>
           </p:cNvPr>
@@ -29240,7 +29240,7 @@
           <p:cNvPr id="18" name="">
             <a:extLst xmlns:a="http://schemas.openxmlformats.org/drawingml/2006/main">
               <a:ext uri="{FF2B5EF4-FFF2-40B4-BE49-F238E27FC236}">
-                <a16:creationId xmlns:a16="http://schemas.microsoft.com/office/drawing/2014/main" id="{BA5CB6F6-71CE-429C-84D9-D78D540E41E5}"/>
+                <a16:creationId xmlns:a16="http://schemas.microsoft.com/office/drawing/2014/main" id="{8D0283C2-7F90-4569-94B8-FC08AB6917B9}"/>
               </a:ext>
             </a:extLst>
           </p:cNvPr>
@@ -29271,7 +29271,7 @@
           <p:cNvPr id="19" name="">
             <a:extLst xmlns:a="http://schemas.openxmlformats.org/drawingml/2006/main">
               <a:ext uri="{FF2B5EF4-FFF2-40B4-BE49-F238E27FC236}">
-                <a16:creationId xmlns:a16="http://schemas.microsoft.com/office/drawing/2014/main" id="{8D5CBD6E-0FD2-40DA-9C46-504B407D82DD}"/>
+                <a16:creationId xmlns:a16="http://schemas.microsoft.com/office/drawing/2014/main" id="{8282EF23-DBEC-4ABC-AB48-12911D36DB86}"/>
               </a:ext>
             </a:extLst>
           </p:cNvPr>
@@ -29323,7 +29323,7 @@
           <p:cNvPr id="20" name="">
             <a:extLst xmlns:a="http://schemas.openxmlformats.org/drawingml/2006/main">
               <a:ext uri="{FF2B5EF4-FFF2-40B4-BE49-F238E27FC236}">
-                <a16:creationId xmlns:a16="http://schemas.microsoft.com/office/drawing/2014/main" id="{697FF66D-EFF0-444F-A8B8-0C51CB3F8ADC}"/>
+                <a16:creationId xmlns:a16="http://schemas.microsoft.com/office/drawing/2014/main" id="{22F0A27C-DEFA-462B-9884-DA8A41056A54}"/>
               </a:ext>
             </a:extLst>
           </p:cNvPr>
@@ -29375,7 +29375,7 @@
           <p:cNvPr id="21" name="">
             <a:extLst xmlns:a="http://schemas.openxmlformats.org/drawingml/2006/main">
               <a:ext uri="{FF2B5EF4-FFF2-40B4-BE49-F238E27FC236}">
-                <a16:creationId xmlns:a16="http://schemas.microsoft.com/office/drawing/2014/main" id="{5897269A-60C7-40EC-8781-A4EB6F1F21BA}"/>
+                <a16:creationId xmlns:a16="http://schemas.microsoft.com/office/drawing/2014/main" id="{14A78BD5-C0E0-4646-A665-DB053579E40C}"/>
               </a:ext>
             </a:extLst>
           </p:cNvPr>
@@ -29427,7 +29427,7 @@
           <p:cNvPr id="22" name="">
             <a:extLst xmlns:a="http://schemas.openxmlformats.org/drawingml/2006/main">
               <a:ext uri="{FF2B5EF4-FFF2-40B4-BE49-F238E27FC236}">
-                <a16:creationId xmlns:a16="http://schemas.microsoft.com/office/drawing/2014/main" id="{3C7F8A80-5055-4EC3-B4F4-C5E3EF5E714E}"/>
+                <a16:creationId xmlns:a16="http://schemas.microsoft.com/office/drawing/2014/main" id="{B5C496A5-73D2-49E0-A70B-5B7F0C1C7A93}"/>
               </a:ext>
             </a:extLst>
           </p:cNvPr>
@@ -29458,7 +29458,7 @@
           <p:cNvPr id="23" name="">
             <a:extLst xmlns:a="http://schemas.openxmlformats.org/drawingml/2006/main">
               <a:ext uri="{FF2B5EF4-FFF2-40B4-BE49-F238E27FC236}">
-                <a16:creationId xmlns:a16="http://schemas.microsoft.com/office/drawing/2014/main" id="{3F446A57-60B5-4499-8773-1E7A19135A3B}"/>
+                <a16:creationId xmlns:a16="http://schemas.microsoft.com/office/drawing/2014/main" id="{567FAF0C-0D43-4195-AA58-2F62FAC6D446}"/>
               </a:ext>
             </a:extLst>
           </p:cNvPr>
@@ -29510,7 +29510,7 @@
           <p:cNvPr id="24" name="">
             <a:extLst xmlns:a="http://schemas.openxmlformats.org/drawingml/2006/main">
               <a:ext uri="{FF2B5EF4-FFF2-40B4-BE49-F238E27FC236}">
-                <a16:creationId xmlns:a16="http://schemas.microsoft.com/office/drawing/2014/main" id="{E218B6D2-111D-42D4-AB46-088E69C886E9}"/>
+                <a16:creationId xmlns:a16="http://schemas.microsoft.com/office/drawing/2014/main" id="{6F01AB11-4E1D-4A55-91C4-1A1468E98CFE}"/>
               </a:ext>
             </a:extLst>
           </p:cNvPr>
@@ -29562,7 +29562,7 @@
           <p:cNvPr id="25" name="">
             <a:extLst xmlns:a="http://schemas.openxmlformats.org/drawingml/2006/main">
               <a:ext uri="{FF2B5EF4-FFF2-40B4-BE49-F238E27FC236}">
-                <a16:creationId xmlns:a16="http://schemas.microsoft.com/office/drawing/2014/main" id="{126CAE0C-96C0-45FE-963B-C1981C16852A}"/>
+                <a16:creationId xmlns:a16="http://schemas.microsoft.com/office/drawing/2014/main" id="{49225855-5566-4E8E-904C-5F5387F2BEC2}"/>
               </a:ext>
             </a:extLst>
           </p:cNvPr>
@@ -29614,7 +29614,7 @@
           <p:cNvPr id="26" name="">
             <a:extLst xmlns:a="http://schemas.openxmlformats.org/drawingml/2006/main">
               <a:ext uri="{FF2B5EF4-FFF2-40B4-BE49-F238E27FC236}">
-                <a16:creationId xmlns:a16="http://schemas.microsoft.com/office/drawing/2014/main" id="{76BC8D9A-5544-45B7-869E-FC50D48996A2}"/>
+                <a16:creationId xmlns:a16="http://schemas.microsoft.com/office/drawing/2014/main" id="{2EA9A3FA-CFA8-451D-953F-C1B6D86152C6}"/>
               </a:ext>
             </a:extLst>
           </p:cNvPr>
@@ -29645,7 +29645,7 @@
           <p:cNvPr id="27" name="">
             <a:extLst xmlns:a="http://schemas.openxmlformats.org/drawingml/2006/main">
               <a:ext uri="{FF2B5EF4-FFF2-40B4-BE49-F238E27FC236}">
-                <a16:creationId xmlns:a16="http://schemas.microsoft.com/office/drawing/2014/main" id="{B1FBC899-98D4-428C-BC4B-74E14B2E97BE}"/>
+                <a16:creationId xmlns:a16="http://schemas.microsoft.com/office/drawing/2014/main" id="{FDE278C5-5DB9-42E5-A9C8-C3B54A5502C4}"/>
               </a:ext>
             </a:extLst>
           </p:cNvPr>
@@ -29697,7 +29697,7 @@
           <p:cNvPr id="28" name="">
             <a:extLst xmlns:a="http://schemas.openxmlformats.org/drawingml/2006/main">
               <a:ext uri="{FF2B5EF4-FFF2-40B4-BE49-F238E27FC236}">
-                <a16:creationId xmlns:a16="http://schemas.microsoft.com/office/drawing/2014/main" id="{8EEE0674-D3F6-4BF7-8B42-C0DE96D51475}"/>
+                <a16:creationId xmlns:a16="http://schemas.microsoft.com/office/drawing/2014/main" id="{11D738B4-F4DA-454B-AE6F-E07A62062E7D}"/>
               </a:ext>
             </a:extLst>
           </p:cNvPr>
@@ -29749,7 +29749,7 @@
           <p:cNvPr id="29" name="">
             <a:extLst xmlns:a="http://schemas.openxmlformats.org/drawingml/2006/main">
               <a:ext uri="{FF2B5EF4-FFF2-40B4-BE49-F238E27FC236}">
-                <a16:creationId xmlns:a16="http://schemas.microsoft.com/office/drawing/2014/main" id="{D7EC479F-3DB3-40AD-8885-FFA5F184F834}"/>
+                <a16:creationId xmlns:a16="http://schemas.microsoft.com/office/drawing/2014/main" id="{C19289DD-90E3-42F0-9AFC-D7AA31BBE6EA}"/>
               </a:ext>
             </a:extLst>
           </p:cNvPr>
@@ -29801,7 +29801,7 @@
           <p:cNvPr id="30" name="">
             <a:extLst xmlns:a="http://schemas.openxmlformats.org/drawingml/2006/main">
               <a:ext uri="{FF2B5EF4-FFF2-40B4-BE49-F238E27FC236}">
-                <a16:creationId xmlns:a16="http://schemas.microsoft.com/office/drawing/2014/main" id="{DE5A1903-D68C-487A-96C2-77E66F343BA7}"/>
+                <a16:creationId xmlns:a16="http://schemas.microsoft.com/office/drawing/2014/main" id="{C5B4D590-C6E7-486B-B1E9-6B0FC0F9942F}"/>
               </a:ext>
             </a:extLst>
           </p:cNvPr>
@@ -29832,7 +29832,7 @@
           <p:cNvPr id="31" name="">
             <a:extLst xmlns:a="http://schemas.openxmlformats.org/drawingml/2006/main">
               <a:ext uri="{FF2B5EF4-FFF2-40B4-BE49-F238E27FC236}">
-                <a16:creationId xmlns:a16="http://schemas.microsoft.com/office/drawing/2014/main" id="{80CC60A7-C718-4DE9-B5A7-C8899FE5A5E9}"/>
+                <a16:creationId xmlns:a16="http://schemas.microsoft.com/office/drawing/2014/main" id="{7887643F-62CB-4227-A914-050234B3B9D2}"/>
               </a:ext>
             </a:extLst>
           </p:cNvPr>
@@ -29884,7 +29884,7 @@
           <p:cNvPr id="32" name="">
             <a:extLst xmlns:a="http://schemas.openxmlformats.org/drawingml/2006/main">
               <a:ext uri="{FF2B5EF4-FFF2-40B4-BE49-F238E27FC236}">
-                <a16:creationId xmlns:a16="http://schemas.microsoft.com/office/drawing/2014/main" id="{52E7CD78-5BAD-4364-8CF8-9BCDA2B07F5A}"/>
+                <a16:creationId xmlns:a16="http://schemas.microsoft.com/office/drawing/2014/main" id="{0F09F28A-C5A9-466A-8747-5549E55D0FA0}"/>
               </a:ext>
             </a:extLst>
           </p:cNvPr>
@@ -29936,7 +29936,7 @@
           <p:cNvPr id="33" name="">
             <a:extLst xmlns:a="http://schemas.openxmlformats.org/drawingml/2006/main">
               <a:ext uri="{FF2B5EF4-FFF2-40B4-BE49-F238E27FC236}">
-                <a16:creationId xmlns:a16="http://schemas.microsoft.com/office/drawing/2014/main" id="{4E48F821-C25B-425C-AB34-08A9A7008F01}"/>
+                <a16:creationId xmlns:a16="http://schemas.microsoft.com/office/drawing/2014/main" id="{E42255CB-A2B0-40AB-B848-9A116F46451C}"/>
               </a:ext>
             </a:extLst>
           </p:cNvPr>
@@ -29988,7 +29988,7 @@
           <p:cNvPr id="34" name="">
             <a:extLst xmlns:a="http://schemas.openxmlformats.org/drawingml/2006/main">
               <a:ext uri="{FF2B5EF4-FFF2-40B4-BE49-F238E27FC236}">
-                <a16:creationId xmlns:a16="http://schemas.microsoft.com/office/drawing/2014/main" id="{D03607BF-AEEA-4E24-935E-D254D90A7B94}"/>
+                <a16:creationId xmlns:a16="http://schemas.microsoft.com/office/drawing/2014/main" id="{3C284FA6-EDEB-40B0-B5AC-CB12DACAF771}"/>
               </a:ext>
             </a:extLst>
           </p:cNvPr>
@@ -30019,7 +30019,7 @@
           <p:cNvPr id="35" name="">
             <a:extLst xmlns:a="http://schemas.openxmlformats.org/drawingml/2006/main">
               <a:ext uri="{FF2B5EF4-FFF2-40B4-BE49-F238E27FC236}">
-                <a16:creationId xmlns:a16="http://schemas.microsoft.com/office/drawing/2014/main" id="{7F5E25D2-D9A5-4899-A46D-4617B90307E5}"/>
+                <a16:creationId xmlns:a16="http://schemas.microsoft.com/office/drawing/2014/main" id="{88903B9E-413A-4CF7-9A76-5EA48399FEBA}"/>
               </a:ext>
             </a:extLst>
           </p:cNvPr>
@@ -30071,7 +30071,7 @@
           <p:cNvPr id="36" name="">
             <a:extLst xmlns:a="http://schemas.openxmlformats.org/drawingml/2006/main">
               <a:ext uri="{FF2B5EF4-FFF2-40B4-BE49-F238E27FC236}">
-                <a16:creationId xmlns:a16="http://schemas.microsoft.com/office/drawing/2014/main" id="{81E36B3E-6161-4E90-BF21-E5027007E232}"/>
+                <a16:creationId xmlns:a16="http://schemas.microsoft.com/office/drawing/2014/main" id="{6DAA3D22-616F-445B-BCA5-FDBF462DE9E1}"/>
               </a:ext>
             </a:extLst>
           </p:cNvPr>
@@ -30123,7 +30123,7 @@
           <p:cNvPr id="37" name="">
             <a:extLst xmlns:a="http://schemas.openxmlformats.org/drawingml/2006/main">
               <a:ext uri="{FF2B5EF4-FFF2-40B4-BE49-F238E27FC236}">
-                <a16:creationId xmlns:a16="http://schemas.microsoft.com/office/drawing/2014/main" id="{44DF597E-9B10-40BE-830C-C2C69D3B1FB7}"/>
+                <a16:creationId xmlns:a16="http://schemas.microsoft.com/office/drawing/2014/main" id="{8924B4AC-D1CF-4791-813E-F1EEDF181B2A}"/>
               </a:ext>
             </a:extLst>
           </p:cNvPr>
@@ -30175,7 +30175,7 @@
           <p:cNvPr id="38" name="">
             <a:extLst xmlns:a="http://schemas.openxmlformats.org/drawingml/2006/main">
               <a:ext uri="{FF2B5EF4-FFF2-40B4-BE49-F238E27FC236}">
-                <a16:creationId xmlns:a16="http://schemas.microsoft.com/office/drawing/2014/main" id="{B8ADD025-ACD5-431A-A2ED-87C582FB0AA7}"/>
+                <a16:creationId xmlns:a16="http://schemas.microsoft.com/office/drawing/2014/main" id="{52B084DF-50BC-4CC8-9797-E79818DB1416}"/>
               </a:ext>
             </a:extLst>
           </p:cNvPr>
@@ -30206,7 +30206,7 @@
           <p:cNvPr id="39" name="">
             <a:extLst xmlns:a="http://schemas.openxmlformats.org/drawingml/2006/main">
               <a:ext uri="{FF2B5EF4-FFF2-40B4-BE49-F238E27FC236}">
-                <a16:creationId xmlns:a16="http://schemas.microsoft.com/office/drawing/2014/main" id="{229FACA5-534E-49EA-8E5F-89BE05985A54}"/>
+                <a16:creationId xmlns:a16="http://schemas.microsoft.com/office/drawing/2014/main" id="{3E2FCAC2-015D-46FB-BD16-9C6EA23CB328}"/>
               </a:ext>
             </a:extLst>
           </p:cNvPr>
@@ -30258,7 +30258,7 @@
           <p:cNvPr id="40" name="">
             <a:extLst xmlns:a="http://schemas.openxmlformats.org/drawingml/2006/main">
               <a:ext uri="{FF2B5EF4-FFF2-40B4-BE49-F238E27FC236}">
-                <a16:creationId xmlns:a16="http://schemas.microsoft.com/office/drawing/2014/main" id="{32BFA25C-D9F8-448E-BE04-04C0E7959FE6}"/>
+                <a16:creationId xmlns:a16="http://schemas.microsoft.com/office/drawing/2014/main" id="{1932CF4C-0AEC-4307-82CA-B36E63DCC73A}"/>
               </a:ext>
             </a:extLst>
           </p:cNvPr>
@@ -30310,7 +30310,7 @@
           <p:cNvPr id="41" name="">
             <a:extLst xmlns:a="http://schemas.openxmlformats.org/drawingml/2006/main">
               <a:ext uri="{FF2B5EF4-FFF2-40B4-BE49-F238E27FC236}">
-                <a16:creationId xmlns:a16="http://schemas.microsoft.com/office/drawing/2014/main" id="{8A26281F-70D5-4065-A73B-96398ADB8ACF}"/>
+                <a16:creationId xmlns:a16="http://schemas.microsoft.com/office/drawing/2014/main" id="{19FF246F-78B7-46DA-BA5A-DB6071E5F730}"/>
               </a:ext>
             </a:extLst>
           </p:cNvPr>
@@ -30360,7 +30360,7 @@
     </p:spTree>
     <p:extLst>
       <p:ext uri="{BB962C8B-B14F-4D97-AF65-F5344CB8AC3E}">
-        <p14:creationId xmlns:p14="http://schemas.microsoft.com/office/powerpoint/2010/main" val="1959228478"/>
+        <p14:creationId xmlns:p14="http://schemas.microsoft.com/office/powerpoint/2010/main" val="1358175613"/>
       </p:ext>
     </p:extLst>
   </p:cSld>
@@ -30391,7 +30391,7 @@
           <p:cNvPr id="76" name="">
             <a:extLst xmlns:a="http://schemas.openxmlformats.org/drawingml/2006/main">
               <a:ext uri="{FF2B5EF4-FFF2-40B4-BE49-F238E27FC236}">
-                <a16:creationId xmlns:a16="http://schemas.microsoft.com/office/drawing/2014/main" id="{D2CDE917-F89C-4E67-968C-4612E5FF7655}"/>
+                <a16:creationId xmlns:a16="http://schemas.microsoft.com/office/drawing/2014/main" id="{E12362F5-9985-4D0C-A949-B8BA56A0A189}"/>
               </a:ext>
             </a:extLst>
           </p:cNvPr>
@@ -30424,7 +30424,7 @@
           <p:cNvPr id="2" name="">
             <a:extLst xmlns:a="http://schemas.openxmlformats.org/drawingml/2006/main">
               <a:ext uri="{FF2B5EF4-FFF2-40B4-BE49-F238E27FC236}">
-                <a16:creationId xmlns:a16="http://schemas.microsoft.com/office/drawing/2014/main" id="{B041F6D7-98E9-48D4-9060-B0B13D3B67FF}"/>
+                <a16:creationId xmlns:a16="http://schemas.microsoft.com/office/drawing/2014/main" id="{098A900C-69C5-46DF-AE10-2AC4A2D82822}"/>
               </a:ext>
             </a:extLst>
           </p:cNvPr>
@@ -30455,7 +30455,7 @@
           <p:cNvPr id="3" name="">
             <a:extLst xmlns:a="http://schemas.openxmlformats.org/drawingml/2006/main">
               <a:ext uri="{FF2B5EF4-FFF2-40B4-BE49-F238E27FC236}">
-                <a16:creationId xmlns:a16="http://schemas.microsoft.com/office/drawing/2014/main" id="{16D3EBBF-8D53-4595-BD05-13C223E99069}"/>
+                <a16:creationId xmlns:a16="http://schemas.microsoft.com/office/drawing/2014/main" id="{3B1030D1-8A34-4D8D-9502-BB93F8CF90E0}"/>
               </a:ext>
             </a:extLst>
           </p:cNvPr>
@@ -30507,7 +30507,7 @@
           <p:cNvPr id="4" name="">
             <a:extLst xmlns:a="http://schemas.openxmlformats.org/drawingml/2006/main">
               <a:ext uri="{FF2B5EF4-FFF2-40B4-BE49-F238E27FC236}">
-                <a16:creationId xmlns:a16="http://schemas.microsoft.com/office/drawing/2014/main" id="{16F73DFF-DD2E-4C13-B8ED-155934314C59}"/>
+                <a16:creationId xmlns:a16="http://schemas.microsoft.com/office/drawing/2014/main" id="{7F9E9841-96B8-49E0-9CED-BE2F8A3164C6}"/>
               </a:ext>
             </a:extLst>
           </p:cNvPr>
@@ -30559,7 +30559,7 @@
           <p:cNvPr id="5" name="">
             <a:extLst xmlns:a="http://schemas.openxmlformats.org/drawingml/2006/main">
               <a:ext uri="{FF2B5EF4-FFF2-40B4-BE49-F238E27FC236}">
-                <a16:creationId xmlns:a16="http://schemas.microsoft.com/office/drawing/2014/main" id="{2996A6A1-6E69-492C-B9B5-DAB73FF5F2BB}"/>
+                <a16:creationId xmlns:a16="http://schemas.microsoft.com/office/drawing/2014/main" id="{9CADA330-6A69-4CC6-81E2-B31B72460F1D}"/>
               </a:ext>
             </a:extLst>
           </p:cNvPr>
@@ -30594,7 +30594,7 @@
           <p:nvPr/>
         </p:nvPicPr>
         <p:blipFill>
-          <a:blip xmlns:r="http://schemas.openxmlformats.org/officeDocument/2006/relationships" xmlns:a="http://schemas.openxmlformats.org/drawingml/2006/main" r:embed="R8ba0e0315f7b449a"/>
+          <a:blip xmlns:r="http://schemas.openxmlformats.org/officeDocument/2006/relationships" xmlns:a="http://schemas.openxmlformats.org/drawingml/2006/main" r:embed="Rd614fa2d930d4270"/>
           <a:stretch xmlns:a="http://schemas.openxmlformats.org/drawingml/2006/main"/>
         </p:blipFill>
         <p:spPr>
@@ -30612,7 +30612,7 @@
           <p:cNvPr id="7" name="">
             <a:extLst xmlns:a="http://schemas.openxmlformats.org/drawingml/2006/main">
               <a:ext uri="{FF2B5EF4-FFF2-40B4-BE49-F238E27FC236}">
-                <a16:creationId xmlns:a16="http://schemas.microsoft.com/office/drawing/2014/main" id="{696B1F1E-8BB5-4983-B949-4FCF72BFE156}"/>
+                <a16:creationId xmlns:a16="http://schemas.microsoft.com/office/drawing/2014/main" id="{4AF70AA3-983D-44AD-BA00-156CC41CCD47}"/>
               </a:ext>
             </a:extLst>
           </p:cNvPr>
@@ -30664,7 +30664,7 @@
           <p:cNvPr id="8" name="">
             <a:extLst xmlns:a="http://schemas.openxmlformats.org/drawingml/2006/main">
               <a:ext uri="{FF2B5EF4-FFF2-40B4-BE49-F238E27FC236}">
-                <a16:creationId xmlns:a16="http://schemas.microsoft.com/office/drawing/2014/main" id="{4BC0B6EA-E0DB-4821-90CD-5B90A6DCBC3E}"/>
+                <a16:creationId xmlns:a16="http://schemas.microsoft.com/office/drawing/2014/main" id="{E6E5ECC1-D82F-4BC9-89A6-353D0BBDA3AE}"/>
               </a:ext>
             </a:extLst>
           </p:cNvPr>
@@ -30716,7 +30716,7 @@
           <p:cNvPr id="9" name="">
             <a:extLst xmlns:a="http://schemas.openxmlformats.org/drawingml/2006/main">
               <a:ext uri="{FF2B5EF4-FFF2-40B4-BE49-F238E27FC236}">
-                <a16:creationId xmlns:a16="http://schemas.microsoft.com/office/drawing/2014/main" id="{C7A1C8D8-B6D3-4255-9614-02C308583DAC}"/>
+                <a16:creationId xmlns:a16="http://schemas.microsoft.com/office/drawing/2014/main" id="{C7AB2BDC-A333-4BC2-86FC-FDADAF37A35A}"/>
               </a:ext>
             </a:extLst>
           </p:cNvPr>
@@ -30768,7 +30768,7 @@
           <p:cNvPr id="10" name="">
             <a:extLst xmlns:a="http://schemas.openxmlformats.org/drawingml/2006/main">
               <a:ext uri="{FF2B5EF4-FFF2-40B4-BE49-F238E27FC236}">
-                <a16:creationId xmlns:a16="http://schemas.microsoft.com/office/drawing/2014/main" id="{C291692D-481A-4472-AAE4-AD63378F5409}"/>
+                <a16:creationId xmlns:a16="http://schemas.microsoft.com/office/drawing/2014/main" id="{029F3815-5C1D-4270-B25F-4576F32A2C53}"/>
               </a:ext>
             </a:extLst>
           </p:cNvPr>
@@ -30820,7 +30820,7 @@
           <p:cNvPr id="11" name="">
             <a:extLst xmlns:a="http://schemas.openxmlformats.org/drawingml/2006/main">
               <a:ext uri="{FF2B5EF4-FFF2-40B4-BE49-F238E27FC236}">
-                <a16:creationId xmlns:a16="http://schemas.microsoft.com/office/drawing/2014/main" id="{513EFE43-4AB7-4168-A126-60EDE6D17458}"/>
+                <a16:creationId xmlns:a16="http://schemas.microsoft.com/office/drawing/2014/main" id="{C732A545-771E-470B-AEF9-DBF0ACD0212C}"/>
               </a:ext>
             </a:extLst>
           </p:cNvPr>
@@ -30863,7 +30863,7 @@
           <p:cNvPr id="12" name="">
             <a:extLst xmlns:a="http://schemas.openxmlformats.org/drawingml/2006/main">
               <a:ext uri="{FF2B5EF4-FFF2-40B4-BE49-F238E27FC236}">
-                <a16:creationId xmlns:a16="http://schemas.microsoft.com/office/drawing/2014/main" id="{29779365-985A-43EC-A3D8-64E7F3052074}"/>
+                <a16:creationId xmlns:a16="http://schemas.microsoft.com/office/drawing/2014/main" id="{71120BAE-1528-4211-9FEC-D768A45D7E93}"/>
               </a:ext>
             </a:extLst>
           </p:cNvPr>
@@ -30894,7 +30894,7 @@
           <p:cNvPr id="13" name="">
             <a:extLst xmlns:a="http://schemas.openxmlformats.org/drawingml/2006/main">
               <a:ext uri="{FF2B5EF4-FFF2-40B4-BE49-F238E27FC236}">
-                <a16:creationId xmlns:a16="http://schemas.microsoft.com/office/drawing/2014/main" id="{06D3C0A6-61A1-4BD2-8D7B-682EFF95D534}"/>
+                <a16:creationId xmlns:a16="http://schemas.microsoft.com/office/drawing/2014/main" id="{87F4A38C-5E4A-4FE0-8862-DFCF1119433D}"/>
               </a:ext>
             </a:extLst>
           </p:cNvPr>
@@ -30925,7 +30925,7 @@
           <p:cNvPr id="14" name="">
             <a:extLst xmlns:a="http://schemas.openxmlformats.org/drawingml/2006/main">
               <a:ext uri="{FF2B5EF4-FFF2-40B4-BE49-F238E27FC236}">
-                <a16:creationId xmlns:a16="http://schemas.microsoft.com/office/drawing/2014/main" id="{B2CC4805-1CE3-44CB-8748-61ADA05C1058}"/>
+                <a16:creationId xmlns:a16="http://schemas.microsoft.com/office/drawing/2014/main" id="{91EA15DC-0ABA-42C4-8AAF-2981499D9F86}"/>
               </a:ext>
             </a:extLst>
           </p:cNvPr>
@@ -30968,7 +30968,7 @@
           <p:cNvPr id="15" name="">
             <a:extLst xmlns:a="http://schemas.openxmlformats.org/drawingml/2006/main">
               <a:ext uri="{FF2B5EF4-FFF2-40B4-BE49-F238E27FC236}">
-                <a16:creationId xmlns:a16="http://schemas.microsoft.com/office/drawing/2014/main" id="{6A421906-2A05-4C64-8D1B-4B88937656B1}"/>
+                <a16:creationId xmlns:a16="http://schemas.microsoft.com/office/drawing/2014/main" id="{89B52185-1E08-4027-A96B-A3C1432FEEAB}"/>
               </a:ext>
             </a:extLst>
           </p:cNvPr>
@@ -30999,7 +30999,7 @@
           <p:cNvPr id="16" name="">
             <a:extLst xmlns:a="http://schemas.openxmlformats.org/drawingml/2006/main">
               <a:ext uri="{FF2B5EF4-FFF2-40B4-BE49-F238E27FC236}">
-                <a16:creationId xmlns:a16="http://schemas.microsoft.com/office/drawing/2014/main" id="{35C2D3B8-6085-4EDD-A606-4882599D8D1C}"/>
+                <a16:creationId xmlns:a16="http://schemas.microsoft.com/office/drawing/2014/main" id="{95D5DAC3-DB68-4927-B9D2-D71849C14760}"/>
               </a:ext>
             </a:extLst>
           </p:cNvPr>
@@ -31030,7 +31030,7 @@
           <p:cNvPr id="17" name="">
             <a:extLst xmlns:a="http://schemas.openxmlformats.org/drawingml/2006/main">
               <a:ext uri="{FF2B5EF4-FFF2-40B4-BE49-F238E27FC236}">
-                <a16:creationId xmlns:a16="http://schemas.microsoft.com/office/drawing/2014/main" id="{8056E2C9-C327-43CA-8D06-01DA06989061}"/>
+                <a16:creationId xmlns:a16="http://schemas.microsoft.com/office/drawing/2014/main" id="{AB3BD82F-B06F-4208-B222-A9A9BE0CDEA8}"/>
               </a:ext>
             </a:extLst>
           </p:cNvPr>
@@ -31082,7 +31082,7 @@
           <p:cNvPr id="18" name="">
             <a:extLst xmlns:a="http://schemas.openxmlformats.org/drawingml/2006/main">
               <a:ext uri="{FF2B5EF4-FFF2-40B4-BE49-F238E27FC236}">
-                <a16:creationId xmlns:a16="http://schemas.microsoft.com/office/drawing/2014/main" id="{83DFB770-E5FB-46F0-A7F7-4BFDEBA72C39}"/>
+                <a16:creationId xmlns:a16="http://schemas.microsoft.com/office/drawing/2014/main" id="{554542C6-5B62-44FB-BEFD-2F6C86804934}"/>
               </a:ext>
             </a:extLst>
           </p:cNvPr>
@@ -31134,7 +31134,7 @@
           <p:cNvPr id="19" name="">
             <a:extLst xmlns:a="http://schemas.openxmlformats.org/drawingml/2006/main">
               <a:ext uri="{FF2B5EF4-FFF2-40B4-BE49-F238E27FC236}">
-                <a16:creationId xmlns:a16="http://schemas.microsoft.com/office/drawing/2014/main" id="{142681A2-8698-4754-9D40-9E9D57856187}"/>
+                <a16:creationId xmlns:a16="http://schemas.microsoft.com/office/drawing/2014/main" id="{44882472-AC96-4500-80AC-012842747FB8}"/>
               </a:ext>
             </a:extLst>
           </p:cNvPr>
@@ -31186,7 +31186,7 @@
           <p:cNvPr id="20" name="">
             <a:extLst xmlns:a="http://schemas.openxmlformats.org/drawingml/2006/main">
               <a:ext uri="{FF2B5EF4-FFF2-40B4-BE49-F238E27FC236}">
-                <a16:creationId xmlns:a16="http://schemas.microsoft.com/office/drawing/2014/main" id="{9B9CC560-E8BE-4A46-A43B-E90F21639EA8}"/>
+                <a16:creationId xmlns:a16="http://schemas.microsoft.com/office/drawing/2014/main" id="{1DE2B628-EF91-4B31-B599-F356182595C5}"/>
               </a:ext>
             </a:extLst>
           </p:cNvPr>
@@ -31229,7 +31229,7 @@
           <p:cNvPr id="21" name="">
             <a:extLst xmlns:a="http://schemas.openxmlformats.org/drawingml/2006/main">
               <a:ext uri="{FF2B5EF4-FFF2-40B4-BE49-F238E27FC236}">
-                <a16:creationId xmlns:a16="http://schemas.microsoft.com/office/drawing/2014/main" id="{E1234A86-4215-44F0-A50E-6625DF94BD70}"/>
+                <a16:creationId xmlns:a16="http://schemas.microsoft.com/office/drawing/2014/main" id="{B786183D-AC1F-45E1-8F66-053E95E4D456}"/>
               </a:ext>
             </a:extLst>
           </p:cNvPr>
@@ -31260,7 +31260,7 @@
           <p:cNvPr id="22" name="">
             <a:extLst xmlns:a="http://schemas.openxmlformats.org/drawingml/2006/main">
               <a:ext uri="{FF2B5EF4-FFF2-40B4-BE49-F238E27FC236}">
-                <a16:creationId xmlns:a16="http://schemas.microsoft.com/office/drawing/2014/main" id="{77226427-8035-45DC-8C38-33FA0434C13D}"/>
+                <a16:creationId xmlns:a16="http://schemas.microsoft.com/office/drawing/2014/main" id="{3CBB8983-AD73-49C9-859A-B7C6B253C1E7}"/>
               </a:ext>
             </a:extLst>
           </p:cNvPr>
@@ -31291,7 +31291,7 @@
           <p:cNvPr id="23" name="">
             <a:extLst xmlns:a="http://schemas.openxmlformats.org/drawingml/2006/main">
               <a:ext uri="{FF2B5EF4-FFF2-40B4-BE49-F238E27FC236}">
-                <a16:creationId xmlns:a16="http://schemas.microsoft.com/office/drawing/2014/main" id="{C501241D-BF03-49AB-9FAA-8A2506CDC51E}"/>
+                <a16:creationId xmlns:a16="http://schemas.microsoft.com/office/drawing/2014/main" id="{C397F81C-B5CC-4D8E-B044-40AD41B57147}"/>
               </a:ext>
             </a:extLst>
           </p:cNvPr>
@@ -31343,7 +31343,7 @@
           <p:cNvPr id="24" name="">
             <a:extLst xmlns:a="http://schemas.openxmlformats.org/drawingml/2006/main">
               <a:ext uri="{FF2B5EF4-FFF2-40B4-BE49-F238E27FC236}">
-                <a16:creationId xmlns:a16="http://schemas.microsoft.com/office/drawing/2014/main" id="{357B9A7D-A25F-489A-BB1A-B41EAA539CBD}"/>
+                <a16:creationId xmlns:a16="http://schemas.microsoft.com/office/drawing/2014/main" id="{7FFC312A-941F-4F2C-ABD0-95A22898885A}"/>
               </a:ext>
             </a:extLst>
           </p:cNvPr>
@@ -31395,7 +31395,7 @@
           <p:cNvPr id="25" name="">
             <a:extLst xmlns:a="http://schemas.openxmlformats.org/drawingml/2006/main">
               <a:ext uri="{FF2B5EF4-FFF2-40B4-BE49-F238E27FC236}">
-                <a16:creationId xmlns:a16="http://schemas.microsoft.com/office/drawing/2014/main" id="{FB4D3A9A-E0B3-4D59-90DF-97855526693A}"/>
+                <a16:creationId xmlns:a16="http://schemas.microsoft.com/office/drawing/2014/main" id="{511F6E43-8416-4036-88A9-3FA18376D00F}"/>
               </a:ext>
             </a:extLst>
           </p:cNvPr>
@@ -31447,7 +31447,7 @@
           <p:cNvPr id="26" name="">
             <a:extLst xmlns:a="http://schemas.openxmlformats.org/drawingml/2006/main">
               <a:ext uri="{FF2B5EF4-FFF2-40B4-BE49-F238E27FC236}">
-                <a16:creationId xmlns:a16="http://schemas.microsoft.com/office/drawing/2014/main" id="{064EC5D3-1549-438A-B8BA-A915200C1C39}"/>
+                <a16:creationId xmlns:a16="http://schemas.microsoft.com/office/drawing/2014/main" id="{133D9B0B-6892-4385-A9C9-10F741DC4D0B}"/>
               </a:ext>
             </a:extLst>
           </p:cNvPr>
@@ -31490,7 +31490,7 @@
           <p:cNvPr id="27" name="">
             <a:extLst xmlns:a="http://schemas.openxmlformats.org/drawingml/2006/main">
               <a:ext uri="{FF2B5EF4-FFF2-40B4-BE49-F238E27FC236}">
-                <a16:creationId xmlns:a16="http://schemas.microsoft.com/office/drawing/2014/main" id="{6B09301F-0258-4204-B4E2-C2E97220CE01}"/>
+                <a16:creationId xmlns:a16="http://schemas.microsoft.com/office/drawing/2014/main" id="{092D3330-1B3A-4FD7-BA66-8C4DD37A4F6E}"/>
               </a:ext>
             </a:extLst>
           </p:cNvPr>
@@ -31521,7 +31521,7 @@
           <p:cNvPr id="28" name="">
             <a:extLst xmlns:a="http://schemas.openxmlformats.org/drawingml/2006/main">
               <a:ext uri="{FF2B5EF4-FFF2-40B4-BE49-F238E27FC236}">
-                <a16:creationId xmlns:a16="http://schemas.microsoft.com/office/drawing/2014/main" id="{CFA59443-132D-40A8-BF5C-17CB5F1982B7}"/>
+                <a16:creationId xmlns:a16="http://schemas.microsoft.com/office/drawing/2014/main" id="{05F1CEF1-9D2B-4679-B078-062680AB2A3D}"/>
               </a:ext>
             </a:extLst>
           </p:cNvPr>
@@ -31552,7 +31552,7 @@
           <p:cNvPr id="29" name="">
             <a:extLst xmlns:a="http://schemas.openxmlformats.org/drawingml/2006/main">
               <a:ext uri="{FF2B5EF4-FFF2-40B4-BE49-F238E27FC236}">
-                <a16:creationId xmlns:a16="http://schemas.microsoft.com/office/drawing/2014/main" id="{0F12341C-7A8D-41B5-B05C-CC77DA279EB4}"/>
+                <a16:creationId xmlns:a16="http://schemas.microsoft.com/office/drawing/2014/main" id="{FED25BD9-1F6F-43C2-BBEC-89623FF9CD2C}"/>
               </a:ext>
             </a:extLst>
           </p:cNvPr>
@@ -31604,7 +31604,7 @@
           <p:cNvPr id="30" name="">
             <a:extLst xmlns:a="http://schemas.openxmlformats.org/drawingml/2006/main">
               <a:ext uri="{FF2B5EF4-FFF2-40B4-BE49-F238E27FC236}">
-                <a16:creationId xmlns:a16="http://schemas.microsoft.com/office/drawing/2014/main" id="{814DC2C3-1D79-42E6-A6F7-AE08A0D99FDB}"/>
+                <a16:creationId xmlns:a16="http://schemas.microsoft.com/office/drawing/2014/main" id="{4167F46F-B1BC-43A8-9D15-EDAB07EC6D7C}"/>
               </a:ext>
             </a:extLst>
           </p:cNvPr>
@@ -31656,7 +31656,7 @@
           <p:cNvPr id="31" name="">
             <a:extLst xmlns:a="http://schemas.openxmlformats.org/drawingml/2006/main">
               <a:ext uri="{FF2B5EF4-FFF2-40B4-BE49-F238E27FC236}">
-                <a16:creationId xmlns:a16="http://schemas.microsoft.com/office/drawing/2014/main" id="{35CF15E7-375B-42C4-93B5-8E1C2582419C}"/>
+                <a16:creationId xmlns:a16="http://schemas.microsoft.com/office/drawing/2014/main" id="{3E16A250-1CF6-4775-99D2-9DAAF72F0FF2}"/>
               </a:ext>
             </a:extLst>
           </p:cNvPr>
@@ -31708,7 +31708,7 @@
           <p:cNvPr id="32" name="">
             <a:extLst xmlns:a="http://schemas.openxmlformats.org/drawingml/2006/main">
               <a:ext uri="{FF2B5EF4-FFF2-40B4-BE49-F238E27FC236}">
-                <a16:creationId xmlns:a16="http://schemas.microsoft.com/office/drawing/2014/main" id="{DE7B2775-BF7D-405F-A64C-ECEA8A73F891}"/>
+                <a16:creationId xmlns:a16="http://schemas.microsoft.com/office/drawing/2014/main" id="{8BB054CC-67B1-4A36-AC47-85D55276B46F}"/>
               </a:ext>
             </a:extLst>
           </p:cNvPr>
@@ -31751,7 +31751,7 @@
           <p:cNvPr id="33" name="">
             <a:extLst xmlns:a="http://schemas.openxmlformats.org/drawingml/2006/main">
               <a:ext uri="{FF2B5EF4-FFF2-40B4-BE49-F238E27FC236}">
-                <a16:creationId xmlns:a16="http://schemas.microsoft.com/office/drawing/2014/main" id="{5968DA26-628D-4DD5-AF13-7EE2CA3386C7}"/>
+                <a16:creationId xmlns:a16="http://schemas.microsoft.com/office/drawing/2014/main" id="{9DC1D6F5-70A9-4FA6-B8DE-347FC0DC32FA}"/>
               </a:ext>
             </a:extLst>
           </p:cNvPr>
@@ -31782,7 +31782,7 @@
           <p:cNvPr id="34" name="">
             <a:extLst xmlns:a="http://schemas.openxmlformats.org/drawingml/2006/main">
               <a:ext uri="{FF2B5EF4-FFF2-40B4-BE49-F238E27FC236}">
-                <a16:creationId xmlns:a16="http://schemas.microsoft.com/office/drawing/2014/main" id="{96BA24B2-82D7-4B55-A87E-CBFAE633F434}"/>
+                <a16:creationId xmlns:a16="http://schemas.microsoft.com/office/drawing/2014/main" id="{C8AA33E3-10ED-4CF4-AC0A-516DD10E5115}"/>
               </a:ext>
             </a:extLst>
           </p:cNvPr>
@@ -31813,7 +31813,7 @@
           <p:cNvPr id="35" name="">
             <a:extLst xmlns:a="http://schemas.openxmlformats.org/drawingml/2006/main">
               <a:ext uri="{FF2B5EF4-FFF2-40B4-BE49-F238E27FC236}">
-                <a16:creationId xmlns:a16="http://schemas.microsoft.com/office/drawing/2014/main" id="{48E6321D-FE08-43DE-ABF3-A131CDDF9292}"/>
+                <a16:creationId xmlns:a16="http://schemas.microsoft.com/office/drawing/2014/main" id="{596256FD-8FD5-4D00-997A-C3D14CD5C93B}"/>
               </a:ext>
             </a:extLst>
           </p:cNvPr>
@@ -31865,7 +31865,7 @@
           <p:cNvPr id="36" name="">
             <a:extLst xmlns:a="http://schemas.openxmlformats.org/drawingml/2006/main">
               <a:ext uri="{FF2B5EF4-FFF2-40B4-BE49-F238E27FC236}">
-                <a16:creationId xmlns:a16="http://schemas.microsoft.com/office/drawing/2014/main" id="{932A5EE8-7911-4044-B967-878650B79146}"/>
+                <a16:creationId xmlns:a16="http://schemas.microsoft.com/office/drawing/2014/main" id="{6303C786-3B58-4749-A3EC-B4F0FEFDF76B}"/>
               </a:ext>
             </a:extLst>
           </p:cNvPr>
@@ -31917,7 +31917,7 @@
           <p:cNvPr id="37" name="">
             <a:extLst xmlns:a="http://schemas.openxmlformats.org/drawingml/2006/main">
               <a:ext uri="{FF2B5EF4-FFF2-40B4-BE49-F238E27FC236}">
-                <a16:creationId xmlns:a16="http://schemas.microsoft.com/office/drawing/2014/main" id="{6FD6581B-D9F3-47F8-A285-679F34F5B665}"/>
+                <a16:creationId xmlns:a16="http://schemas.microsoft.com/office/drawing/2014/main" id="{FB226D5F-15C4-4A55-9567-BDC683DF2313}"/>
               </a:ext>
             </a:extLst>
           </p:cNvPr>
@@ -31973,10 +31973,10 @@
           <p:nvPr/>
         </p:nvPicPr>
         <p:blipFill>
-          <a:blip xmlns:r="http://schemas.openxmlformats.org/officeDocument/2006/relationships" xmlns:a="http://schemas.openxmlformats.org/drawingml/2006/main" r:embed="Reabeff4653ca49c5">
+          <a:blip xmlns:r="http://schemas.openxmlformats.org/officeDocument/2006/relationships" xmlns:a="http://schemas.openxmlformats.org/drawingml/2006/main" r:embed="Rbe2a5142a5f742fa">
             <a:extLst>
               <a:ext uri="{96DAC541-7B7A-43D3-8B79-37D633B846F1}">
-                <asvg:svgBlip xmlns:asvg="http://schemas.microsoft.com/office/drawing/2016/SVG/main" r:embed="R60306413a8ec42e2"/>
+                <asvg:svgBlip xmlns:asvg="http://schemas.microsoft.com/office/drawing/2016/SVG/main" r:embed="R484a73bfc3cc451c"/>
               </a:ext>
             </a:extLst>
           </a:blip>
@@ -31997,7 +31997,7 @@
           <p:cNvPr id="39" name="">
             <a:extLst xmlns:a="http://schemas.openxmlformats.org/drawingml/2006/main">
               <a:ext uri="{FF2B5EF4-FFF2-40B4-BE49-F238E27FC236}">
-                <a16:creationId xmlns:a16="http://schemas.microsoft.com/office/drawing/2014/main" id="{0216AFFB-2655-4D0F-A995-E071F514C786}"/>
+                <a16:creationId xmlns:a16="http://schemas.microsoft.com/office/drawing/2014/main" id="{558E947B-7B36-4218-9FBB-49976E3A4F72}"/>
               </a:ext>
             </a:extLst>
           </p:cNvPr>
@@ -32049,7 +32049,7 @@
           <p:cNvPr id="40" name="">
             <a:extLst xmlns:a="http://schemas.openxmlformats.org/drawingml/2006/main">
               <a:ext uri="{FF2B5EF4-FFF2-40B4-BE49-F238E27FC236}">
-                <a16:creationId xmlns:a16="http://schemas.microsoft.com/office/drawing/2014/main" id="{7A7BEAE9-280D-449B-9297-1A471C8DB337}"/>
+                <a16:creationId xmlns:a16="http://schemas.microsoft.com/office/drawing/2014/main" id="{5DAC0119-1A1A-41E7-9579-20E31AB70AF5}"/>
               </a:ext>
             </a:extLst>
           </p:cNvPr>
@@ -32101,7 +32101,7 @@
           <p:cNvPr id="41" name="">
             <a:extLst xmlns:a="http://schemas.openxmlformats.org/drawingml/2006/main">
               <a:ext uri="{FF2B5EF4-FFF2-40B4-BE49-F238E27FC236}">
-                <a16:creationId xmlns:a16="http://schemas.microsoft.com/office/drawing/2014/main" id="{08E8CCB3-8B31-4045-8C1A-4DCC4927495F}"/>
+                <a16:creationId xmlns:a16="http://schemas.microsoft.com/office/drawing/2014/main" id="{8C9FBB07-3007-4789-AF8C-EFEE93E743B6}"/>
               </a:ext>
             </a:extLst>
           </p:cNvPr>
@@ -32144,7 +32144,7 @@
           <p:cNvPr id="42" name="">
             <a:extLst xmlns:a="http://schemas.openxmlformats.org/drawingml/2006/main">
               <a:ext uri="{FF2B5EF4-FFF2-40B4-BE49-F238E27FC236}">
-                <a16:creationId xmlns:a16="http://schemas.microsoft.com/office/drawing/2014/main" id="{A6DEBEF5-4B58-41D8-97B5-8202CB436DD4}"/>
+                <a16:creationId xmlns:a16="http://schemas.microsoft.com/office/drawing/2014/main" id="{64376B4A-3C63-4763-BBC9-66734977722C}"/>
               </a:ext>
             </a:extLst>
           </p:cNvPr>
@@ -32175,7 +32175,7 @@
           <p:cNvPr id="43" name="">
             <a:extLst xmlns:a="http://schemas.openxmlformats.org/drawingml/2006/main">
               <a:ext uri="{FF2B5EF4-FFF2-40B4-BE49-F238E27FC236}">
-                <a16:creationId xmlns:a16="http://schemas.microsoft.com/office/drawing/2014/main" id="{1143F890-E92D-461F-90E2-098FED7671BD}"/>
+                <a16:creationId xmlns:a16="http://schemas.microsoft.com/office/drawing/2014/main" id="{1915842E-2905-49C6-B16C-98EEFFD53BD7}"/>
               </a:ext>
             </a:extLst>
           </p:cNvPr>
@@ -32206,7 +32206,7 @@
           <p:cNvPr id="44" name="">
             <a:extLst xmlns:a="http://schemas.openxmlformats.org/drawingml/2006/main">
               <a:ext uri="{FF2B5EF4-FFF2-40B4-BE49-F238E27FC236}">
-                <a16:creationId xmlns:a16="http://schemas.microsoft.com/office/drawing/2014/main" id="{FB87E975-0C23-489F-80E6-58C2EDBCE2C3}"/>
+                <a16:creationId xmlns:a16="http://schemas.microsoft.com/office/drawing/2014/main" id="{66D08D9D-D75B-4875-BB61-035E34DED888}"/>
               </a:ext>
             </a:extLst>
           </p:cNvPr>
@@ -32249,7 +32249,7 @@
           <p:cNvPr id="45" name="">
             <a:extLst xmlns:a="http://schemas.openxmlformats.org/drawingml/2006/main">
               <a:ext uri="{FF2B5EF4-FFF2-40B4-BE49-F238E27FC236}">
-                <a16:creationId xmlns:a16="http://schemas.microsoft.com/office/drawing/2014/main" id="{A4B32371-3780-45A3-A760-C6664B731A7C}"/>
+                <a16:creationId xmlns:a16="http://schemas.microsoft.com/office/drawing/2014/main" id="{DD594397-718F-4C1E-A548-BDAAF83CC227}"/>
               </a:ext>
             </a:extLst>
           </p:cNvPr>
@@ -32280,7 +32280,7 @@
           <p:cNvPr id="46" name="">
             <a:extLst xmlns:a="http://schemas.openxmlformats.org/drawingml/2006/main">
               <a:ext uri="{FF2B5EF4-FFF2-40B4-BE49-F238E27FC236}">
-                <a16:creationId xmlns:a16="http://schemas.microsoft.com/office/drawing/2014/main" id="{7384D7C6-5F58-4049-BF97-74B6FE8A4B71}"/>
+                <a16:creationId xmlns:a16="http://schemas.microsoft.com/office/drawing/2014/main" id="{2014AEFB-E832-409D-ACB3-5F3825EB665C}"/>
               </a:ext>
             </a:extLst>
           </p:cNvPr>
@@ -32311,7 +32311,7 @@
           <p:cNvPr id="47" name="">
             <a:extLst xmlns:a="http://schemas.openxmlformats.org/drawingml/2006/main">
               <a:ext uri="{FF2B5EF4-FFF2-40B4-BE49-F238E27FC236}">
-                <a16:creationId xmlns:a16="http://schemas.microsoft.com/office/drawing/2014/main" id="{BF15CA79-33E4-4728-890D-E82D2752F95A}"/>
+                <a16:creationId xmlns:a16="http://schemas.microsoft.com/office/drawing/2014/main" id="{F73F68D1-14B2-4CAF-A9C5-66FD7E8F71F6}"/>
               </a:ext>
             </a:extLst>
           </p:cNvPr>
@@ -32363,7 +32363,7 @@
           <p:cNvPr id="48" name="">
             <a:extLst xmlns:a="http://schemas.openxmlformats.org/drawingml/2006/main">
               <a:ext uri="{FF2B5EF4-FFF2-40B4-BE49-F238E27FC236}">
-                <a16:creationId xmlns:a16="http://schemas.microsoft.com/office/drawing/2014/main" id="{21A6A983-C1F4-483F-9F28-A248B63BB806}"/>
+                <a16:creationId xmlns:a16="http://schemas.microsoft.com/office/drawing/2014/main" id="{8A6F8B2C-1A82-4BA8-8A6F-A934D9044D48}"/>
               </a:ext>
             </a:extLst>
           </p:cNvPr>
@@ -32396,7 +32396,7 @@
           <p:cNvPr id="49" name="">
             <a:extLst xmlns:a="http://schemas.openxmlformats.org/drawingml/2006/main">
               <a:ext uri="{FF2B5EF4-FFF2-40B4-BE49-F238E27FC236}">
-                <a16:creationId xmlns:a16="http://schemas.microsoft.com/office/drawing/2014/main" id="{2ED23E84-41BE-48EF-B3B7-9D6083F8F9C8}"/>
+                <a16:creationId xmlns:a16="http://schemas.microsoft.com/office/drawing/2014/main" id="{E1E57395-847F-444E-82E5-FF168A8BB40B}"/>
               </a:ext>
             </a:extLst>
           </p:cNvPr>
@@ -32448,7 +32448,7 @@
           <p:cNvPr id="50" name="">
             <a:extLst xmlns:a="http://schemas.openxmlformats.org/drawingml/2006/main">
               <a:ext uri="{FF2B5EF4-FFF2-40B4-BE49-F238E27FC236}">
-                <a16:creationId xmlns:a16="http://schemas.microsoft.com/office/drawing/2014/main" id="{57AF7533-29EE-4B77-AE9B-84484D5E1B37}"/>
+                <a16:creationId xmlns:a16="http://schemas.microsoft.com/office/drawing/2014/main" id="{E52A20E1-84ED-43DC-9E67-83FD5F8CFA68}"/>
               </a:ext>
             </a:extLst>
           </p:cNvPr>
@@ -32500,7 +32500,7 @@
           <p:cNvPr id="51" name="">
             <a:extLst xmlns:a="http://schemas.openxmlformats.org/drawingml/2006/main">
               <a:ext uri="{FF2B5EF4-FFF2-40B4-BE49-F238E27FC236}">
-                <a16:creationId xmlns:a16="http://schemas.microsoft.com/office/drawing/2014/main" id="{9448E906-8F1B-4EEA-BCCE-C4FD6D3571D3}"/>
+                <a16:creationId xmlns:a16="http://schemas.microsoft.com/office/drawing/2014/main" id="{3CB39502-B26C-489A-A54C-068228404F0E}"/>
               </a:ext>
             </a:extLst>
           </p:cNvPr>
@@ -32552,7 +32552,7 @@
           <p:cNvPr id="52" name="">
             <a:extLst xmlns:a="http://schemas.openxmlformats.org/drawingml/2006/main">
               <a:ext uri="{FF2B5EF4-FFF2-40B4-BE49-F238E27FC236}">
-                <a16:creationId xmlns:a16="http://schemas.microsoft.com/office/drawing/2014/main" id="{90F5C6E8-F053-490A-8B82-37F71BC1F65F}"/>
+                <a16:creationId xmlns:a16="http://schemas.microsoft.com/office/drawing/2014/main" id="{68FB3D62-0C5D-46BB-A16B-4E7BD73F5A48}"/>
               </a:ext>
             </a:extLst>
           </p:cNvPr>
@@ -32595,7 +32595,7 @@
           <p:cNvPr id="53" name="">
             <a:extLst xmlns:a="http://schemas.openxmlformats.org/drawingml/2006/main">
               <a:ext uri="{FF2B5EF4-FFF2-40B4-BE49-F238E27FC236}">
-                <a16:creationId xmlns:a16="http://schemas.microsoft.com/office/drawing/2014/main" id="{1722AD24-EC8B-4F4D-9DB1-59CF7769BD68}"/>
+                <a16:creationId xmlns:a16="http://schemas.microsoft.com/office/drawing/2014/main" id="{E2BAC5E1-0B40-4FA3-9788-F1DAB81254DA}"/>
               </a:ext>
             </a:extLst>
           </p:cNvPr>
@@ -32626,7 +32626,7 @@
           <p:cNvPr id="54" name="">
             <a:extLst xmlns:a="http://schemas.openxmlformats.org/drawingml/2006/main">
               <a:ext uri="{FF2B5EF4-FFF2-40B4-BE49-F238E27FC236}">
-                <a16:creationId xmlns:a16="http://schemas.microsoft.com/office/drawing/2014/main" id="{4E4E9458-AB87-4D1D-8C30-6F615F2FC4E5}"/>
+                <a16:creationId xmlns:a16="http://schemas.microsoft.com/office/drawing/2014/main" id="{00BBEC0E-3530-4FAC-BDCF-B2CD66D57D40}"/>
               </a:ext>
             </a:extLst>
           </p:cNvPr>
@@ -32657,7 +32657,7 @@
           <p:cNvPr id="55" name="">
             <a:extLst xmlns:a="http://schemas.openxmlformats.org/drawingml/2006/main">
               <a:ext uri="{FF2B5EF4-FFF2-40B4-BE49-F238E27FC236}">
-                <a16:creationId xmlns:a16="http://schemas.microsoft.com/office/drawing/2014/main" id="{39C7F977-082B-4BF2-8692-66BABCD35B5C}"/>
+                <a16:creationId xmlns:a16="http://schemas.microsoft.com/office/drawing/2014/main" id="{1C521416-B3BE-4E5B-A136-E5909EE065A5}"/>
               </a:ext>
             </a:extLst>
           </p:cNvPr>
@@ -32709,7 +32709,7 @@
           <p:cNvPr id="56" name="">
             <a:extLst xmlns:a="http://schemas.openxmlformats.org/drawingml/2006/main">
               <a:ext uri="{FF2B5EF4-FFF2-40B4-BE49-F238E27FC236}">
-                <a16:creationId xmlns:a16="http://schemas.microsoft.com/office/drawing/2014/main" id="{4ABC91D2-71FE-4020-A1F7-CDAAE8943600}"/>
+                <a16:creationId xmlns:a16="http://schemas.microsoft.com/office/drawing/2014/main" id="{027CD0D8-D90D-4280-8E5A-F3A07A1ED5CE}"/>
               </a:ext>
             </a:extLst>
           </p:cNvPr>
@@ -32742,7 +32742,7 @@
           <p:cNvPr id="57" name="">
             <a:extLst xmlns:a="http://schemas.openxmlformats.org/drawingml/2006/main">
               <a:ext uri="{FF2B5EF4-FFF2-40B4-BE49-F238E27FC236}">
-                <a16:creationId xmlns:a16="http://schemas.microsoft.com/office/drawing/2014/main" id="{06713DF2-77BD-4D5B-B5F9-E8864D298F7E}"/>
+                <a16:creationId xmlns:a16="http://schemas.microsoft.com/office/drawing/2014/main" id="{AAF232CA-648D-4604-B21A-AE9714F6611B}"/>
               </a:ext>
             </a:extLst>
           </p:cNvPr>
@@ -32794,7 +32794,7 @@
           <p:cNvPr id="58" name="">
             <a:extLst xmlns:a="http://schemas.openxmlformats.org/drawingml/2006/main">
               <a:ext uri="{FF2B5EF4-FFF2-40B4-BE49-F238E27FC236}">
-                <a16:creationId xmlns:a16="http://schemas.microsoft.com/office/drawing/2014/main" id="{F8F2D36F-06B0-49D4-9C7D-FED462F6F3DE}"/>
+                <a16:creationId xmlns:a16="http://schemas.microsoft.com/office/drawing/2014/main" id="{FC5AF36F-820C-4B19-A1B8-339BA7B31A98}"/>
               </a:ext>
             </a:extLst>
           </p:cNvPr>
@@ -32846,7 +32846,7 @@
           <p:cNvPr id="59" name="">
             <a:extLst xmlns:a="http://schemas.openxmlformats.org/drawingml/2006/main">
               <a:ext uri="{FF2B5EF4-FFF2-40B4-BE49-F238E27FC236}">
-                <a16:creationId xmlns:a16="http://schemas.microsoft.com/office/drawing/2014/main" id="{B3750BD2-A9FD-4F07-8708-3CAA904D422E}"/>
+                <a16:creationId xmlns:a16="http://schemas.microsoft.com/office/drawing/2014/main" id="{44EE69FA-54A9-485F-ABC5-13684DDA0656}"/>
               </a:ext>
             </a:extLst>
           </p:cNvPr>
@@ -32898,7 +32898,7 @@
           <p:cNvPr id="60" name="">
             <a:extLst xmlns:a="http://schemas.openxmlformats.org/drawingml/2006/main">
               <a:ext uri="{FF2B5EF4-FFF2-40B4-BE49-F238E27FC236}">
-                <a16:creationId xmlns:a16="http://schemas.microsoft.com/office/drawing/2014/main" id="{3FBDEF10-9731-457C-9BBE-E9B31ED6D6B1}"/>
+                <a16:creationId xmlns:a16="http://schemas.microsoft.com/office/drawing/2014/main" id="{00DA65FD-4A34-4627-A5C8-03070986773E}"/>
               </a:ext>
             </a:extLst>
           </p:cNvPr>
@@ -32941,7 +32941,7 @@
           <p:cNvPr id="61" name="">
             <a:extLst xmlns:a="http://schemas.openxmlformats.org/drawingml/2006/main">
               <a:ext uri="{FF2B5EF4-FFF2-40B4-BE49-F238E27FC236}">
-                <a16:creationId xmlns:a16="http://schemas.microsoft.com/office/drawing/2014/main" id="{0221DA54-715D-4765-A6E0-A5C766192C66}"/>
+                <a16:creationId xmlns:a16="http://schemas.microsoft.com/office/drawing/2014/main" id="{1921BF50-9204-4933-83F3-8F318B9D447F}"/>
               </a:ext>
             </a:extLst>
           </p:cNvPr>
@@ -32972,7 +32972,7 @@
           <p:cNvPr id="62" name="">
             <a:extLst xmlns:a="http://schemas.openxmlformats.org/drawingml/2006/main">
               <a:ext uri="{FF2B5EF4-FFF2-40B4-BE49-F238E27FC236}">
-                <a16:creationId xmlns:a16="http://schemas.microsoft.com/office/drawing/2014/main" id="{9E0F6817-5381-4612-89EB-446A8A698052}"/>
+                <a16:creationId xmlns:a16="http://schemas.microsoft.com/office/drawing/2014/main" id="{EEB0530F-5997-4598-B1B1-ED6BBF197B07}"/>
               </a:ext>
             </a:extLst>
           </p:cNvPr>
@@ -33003,7 +33003,7 @@
           <p:cNvPr id="63" name="">
             <a:extLst xmlns:a="http://schemas.openxmlformats.org/drawingml/2006/main">
               <a:ext uri="{FF2B5EF4-FFF2-40B4-BE49-F238E27FC236}">
-                <a16:creationId xmlns:a16="http://schemas.microsoft.com/office/drawing/2014/main" id="{5DECB5F3-14D6-4EFA-8207-2E1CEF5B4C30}"/>
+                <a16:creationId xmlns:a16="http://schemas.microsoft.com/office/drawing/2014/main" id="{5547CC3F-2306-4A2D-A3A9-6DC6E4C8EEDF}"/>
               </a:ext>
             </a:extLst>
           </p:cNvPr>
@@ -33055,7 +33055,7 @@
           <p:cNvPr id="64" name="">
             <a:extLst xmlns:a="http://schemas.openxmlformats.org/drawingml/2006/main">
               <a:ext uri="{FF2B5EF4-FFF2-40B4-BE49-F238E27FC236}">
-                <a16:creationId xmlns:a16="http://schemas.microsoft.com/office/drawing/2014/main" id="{0811B5AD-57AB-4847-B072-E558FD2A1062}"/>
+                <a16:creationId xmlns:a16="http://schemas.microsoft.com/office/drawing/2014/main" id="{BFBF614E-80FE-416F-82A6-601D2224B0A4}"/>
               </a:ext>
             </a:extLst>
           </p:cNvPr>
@@ -33088,7 +33088,7 @@
           <p:cNvPr id="65" name="">
             <a:extLst xmlns:a="http://schemas.openxmlformats.org/drawingml/2006/main">
               <a:ext uri="{FF2B5EF4-FFF2-40B4-BE49-F238E27FC236}">
-                <a16:creationId xmlns:a16="http://schemas.microsoft.com/office/drawing/2014/main" id="{EE1A68C1-4A84-4DE5-A5AC-A15DD7ED930A}"/>
+                <a16:creationId xmlns:a16="http://schemas.microsoft.com/office/drawing/2014/main" id="{F159B66F-13ED-4819-997D-049F7F77F7AF}"/>
               </a:ext>
             </a:extLst>
           </p:cNvPr>
@@ -33140,7 +33140,7 @@
           <p:cNvPr id="66" name="">
             <a:extLst xmlns:a="http://schemas.openxmlformats.org/drawingml/2006/main">
               <a:ext uri="{FF2B5EF4-FFF2-40B4-BE49-F238E27FC236}">
-                <a16:creationId xmlns:a16="http://schemas.microsoft.com/office/drawing/2014/main" id="{F4B276FD-EAFC-4D66-8C35-55DA7516A108}"/>
+                <a16:creationId xmlns:a16="http://schemas.microsoft.com/office/drawing/2014/main" id="{44B60CB4-A3D1-48BD-A881-D5FBE2CEE224}"/>
               </a:ext>
             </a:extLst>
           </p:cNvPr>
@@ -33192,7 +33192,7 @@
           <p:cNvPr id="67" name="">
             <a:extLst xmlns:a="http://schemas.openxmlformats.org/drawingml/2006/main">
               <a:ext uri="{FF2B5EF4-FFF2-40B4-BE49-F238E27FC236}">
-                <a16:creationId xmlns:a16="http://schemas.microsoft.com/office/drawing/2014/main" id="{41747272-9249-4E75-A013-FD04B24E8000}"/>
+                <a16:creationId xmlns:a16="http://schemas.microsoft.com/office/drawing/2014/main" id="{D36AD70B-9C13-4D3E-A9F8-8D2455BC2E70}"/>
               </a:ext>
             </a:extLst>
           </p:cNvPr>
@@ -33244,7 +33244,7 @@
           <p:cNvPr id="68" name="">
             <a:extLst xmlns:a="http://schemas.openxmlformats.org/drawingml/2006/main">
               <a:ext uri="{FF2B5EF4-FFF2-40B4-BE49-F238E27FC236}">
-                <a16:creationId xmlns:a16="http://schemas.microsoft.com/office/drawing/2014/main" id="{AE04913B-3177-45AF-BE32-FC1EDF1DA861}"/>
+                <a16:creationId xmlns:a16="http://schemas.microsoft.com/office/drawing/2014/main" id="{0AB80DBC-2CC3-482B-9AF6-93527D762AC6}"/>
               </a:ext>
             </a:extLst>
           </p:cNvPr>
@@ -33287,7 +33287,7 @@
           <p:cNvPr id="69" name="">
             <a:extLst xmlns:a="http://schemas.openxmlformats.org/drawingml/2006/main">
               <a:ext uri="{FF2B5EF4-FFF2-40B4-BE49-F238E27FC236}">
-                <a16:creationId xmlns:a16="http://schemas.microsoft.com/office/drawing/2014/main" id="{EC4B1F35-6DE7-48F5-AD94-70C6D9F37D9D}"/>
+                <a16:creationId xmlns:a16="http://schemas.microsoft.com/office/drawing/2014/main" id="{6D60C441-28C7-4AD4-9715-AB00F252DB70}"/>
               </a:ext>
             </a:extLst>
           </p:cNvPr>
@@ -33318,7 +33318,7 @@
           <p:cNvPr id="70" name="">
             <a:extLst xmlns:a="http://schemas.openxmlformats.org/drawingml/2006/main">
               <a:ext uri="{FF2B5EF4-FFF2-40B4-BE49-F238E27FC236}">
-                <a16:creationId xmlns:a16="http://schemas.microsoft.com/office/drawing/2014/main" id="{00402740-FF7B-4247-825C-1452B071DB44}"/>
+                <a16:creationId xmlns:a16="http://schemas.microsoft.com/office/drawing/2014/main" id="{C0D78570-DC50-4315-BEDD-4CEF7145B60C}"/>
               </a:ext>
             </a:extLst>
           </p:cNvPr>
@@ -33349,7 +33349,7 @@
           <p:cNvPr id="71" name="">
             <a:extLst xmlns:a="http://schemas.openxmlformats.org/drawingml/2006/main">
               <a:ext uri="{FF2B5EF4-FFF2-40B4-BE49-F238E27FC236}">
-                <a16:creationId xmlns:a16="http://schemas.microsoft.com/office/drawing/2014/main" id="{8BAF4618-D2F5-42ED-9277-EC59E26EFAE0}"/>
+                <a16:creationId xmlns:a16="http://schemas.microsoft.com/office/drawing/2014/main" id="{DD727B39-9E70-44F1-932F-B5534DFCE957}"/>
               </a:ext>
             </a:extLst>
           </p:cNvPr>
@@ -33401,7 +33401,7 @@
           <p:cNvPr id="72" name="">
             <a:extLst xmlns:a="http://schemas.openxmlformats.org/drawingml/2006/main">
               <a:ext uri="{FF2B5EF4-FFF2-40B4-BE49-F238E27FC236}">
-                <a16:creationId xmlns:a16="http://schemas.microsoft.com/office/drawing/2014/main" id="{6498B899-F531-41C9-916C-70A04862CA01}"/>
+                <a16:creationId xmlns:a16="http://schemas.microsoft.com/office/drawing/2014/main" id="{3743D369-CC5C-4F61-BAC2-5F1016BDABB0}"/>
               </a:ext>
             </a:extLst>
           </p:cNvPr>
@@ -33434,7 +33434,7 @@
           <p:cNvPr id="73" name="">
             <a:extLst xmlns:a="http://schemas.openxmlformats.org/drawingml/2006/main">
               <a:ext uri="{FF2B5EF4-FFF2-40B4-BE49-F238E27FC236}">
-                <a16:creationId xmlns:a16="http://schemas.microsoft.com/office/drawing/2014/main" id="{7DA02A18-C9B9-40C3-89F3-7AB2A51D3EC4}"/>
+                <a16:creationId xmlns:a16="http://schemas.microsoft.com/office/drawing/2014/main" id="{7DE1D4F3-9E95-498D-B1A8-E3E6BCBDDD0C}"/>
               </a:ext>
             </a:extLst>
           </p:cNvPr>
@@ -33486,7 +33486,7 @@
           <p:cNvPr id="74" name="">
             <a:extLst xmlns:a="http://schemas.openxmlformats.org/drawingml/2006/main">
               <a:ext uri="{FF2B5EF4-FFF2-40B4-BE49-F238E27FC236}">
-                <a16:creationId xmlns:a16="http://schemas.microsoft.com/office/drawing/2014/main" id="{1E304A96-317A-4B0B-B894-DEE6D8CE31A8}"/>
+                <a16:creationId xmlns:a16="http://schemas.microsoft.com/office/drawing/2014/main" id="{43F82107-6430-4B58-8C78-549B8D62997E}"/>
               </a:ext>
             </a:extLst>
           </p:cNvPr>
@@ -33538,7 +33538,7 @@
           <p:cNvPr id="75" name="">
             <a:extLst xmlns:a="http://schemas.openxmlformats.org/drawingml/2006/main">
               <a:ext uri="{FF2B5EF4-FFF2-40B4-BE49-F238E27FC236}">
-                <a16:creationId xmlns:a16="http://schemas.microsoft.com/office/drawing/2014/main" id="{D60378BB-C9F9-46CC-BDAD-6F94D9E3F000}"/>
+                <a16:creationId xmlns:a16="http://schemas.microsoft.com/office/drawing/2014/main" id="{67457991-A0B0-40F3-AA9B-0C31A0774AAD}"/>
               </a:ext>
             </a:extLst>
           </p:cNvPr>
@@ -33588,7 +33588,7 @@
     </p:spTree>
     <p:extLst>
       <p:ext uri="{BB962C8B-B14F-4D97-AF65-F5344CB8AC3E}">
-        <p14:creationId xmlns:p14="http://schemas.microsoft.com/office/powerpoint/2010/main" val="83178079"/>
+        <p14:creationId xmlns:p14="http://schemas.microsoft.com/office/powerpoint/2010/main" val="98666074"/>
       </p:ext>
     </p:extLst>
   </p:cSld>
@@ -33619,7 +33619,7 @@
           <p:cNvPr id="30" name="">
             <a:extLst xmlns:a="http://schemas.openxmlformats.org/drawingml/2006/main">
               <a:ext uri="{FF2B5EF4-FFF2-40B4-BE49-F238E27FC236}">
-                <a16:creationId xmlns:a16="http://schemas.microsoft.com/office/drawing/2014/main" id="{331D5881-FEBD-48C0-875D-B15B5AFBE015}"/>
+                <a16:creationId xmlns:a16="http://schemas.microsoft.com/office/drawing/2014/main" id="{5ED21784-A0FD-41E9-8A0E-E44E91A48D5A}"/>
               </a:ext>
             </a:extLst>
           </p:cNvPr>
@@ -33652,7 +33652,7 @@
           <p:cNvPr id="2" name="">
             <a:extLst xmlns:a="http://schemas.openxmlformats.org/drawingml/2006/main">
               <a:ext uri="{FF2B5EF4-FFF2-40B4-BE49-F238E27FC236}">
-                <a16:creationId xmlns:a16="http://schemas.microsoft.com/office/drawing/2014/main" id="{0EA2D109-2584-4AA1-A5DF-6190CEB30859}"/>
+                <a16:creationId xmlns:a16="http://schemas.microsoft.com/office/drawing/2014/main" id="{86427585-E28B-4ADF-A7B2-E53D24A13F34}"/>
               </a:ext>
             </a:extLst>
           </p:cNvPr>
@@ -33683,7 +33683,7 @@
           <p:cNvPr id="3" name="">
             <a:extLst xmlns:a="http://schemas.openxmlformats.org/drawingml/2006/main">
               <a:ext uri="{FF2B5EF4-FFF2-40B4-BE49-F238E27FC236}">
-                <a16:creationId xmlns:a16="http://schemas.microsoft.com/office/drawing/2014/main" id="{F28D5757-E63A-4732-A171-5A23B6E83749}"/>
+                <a16:creationId xmlns:a16="http://schemas.microsoft.com/office/drawing/2014/main" id="{5BE6F60A-4539-41F3-812E-5869084902F0}"/>
               </a:ext>
             </a:extLst>
           </p:cNvPr>
@@ -33735,7 +33735,7 @@
           <p:cNvPr id="4" name="">
             <a:extLst xmlns:a="http://schemas.openxmlformats.org/drawingml/2006/main">
               <a:ext uri="{FF2B5EF4-FFF2-40B4-BE49-F238E27FC236}">
-                <a16:creationId xmlns:a16="http://schemas.microsoft.com/office/drawing/2014/main" id="{B61CA98E-8200-4791-A90F-9499D451F816}"/>
+                <a16:creationId xmlns:a16="http://schemas.microsoft.com/office/drawing/2014/main" id="{A003D576-7541-4A60-B846-01DF48374502}"/>
               </a:ext>
             </a:extLst>
           </p:cNvPr>
@@ -33787,7 +33787,7 @@
           <p:cNvPr id="5" name="">
             <a:extLst xmlns:a="http://schemas.openxmlformats.org/drawingml/2006/main">
               <a:ext uri="{FF2B5EF4-FFF2-40B4-BE49-F238E27FC236}">
-                <a16:creationId xmlns:a16="http://schemas.microsoft.com/office/drawing/2014/main" id="{05D1521B-1DF2-4766-AE7A-54F472B58BAA}"/>
+                <a16:creationId xmlns:a16="http://schemas.microsoft.com/office/drawing/2014/main" id="{12D4C075-6ABD-4D4A-9B85-8895DFAB500D}"/>
               </a:ext>
             </a:extLst>
           </p:cNvPr>
@@ -33822,7 +33822,7 @@
           <p:nvPr/>
         </p:nvPicPr>
         <p:blipFill>
-          <a:blip xmlns:r="http://schemas.openxmlformats.org/officeDocument/2006/relationships" xmlns:a="http://schemas.openxmlformats.org/drawingml/2006/main" r:embed="Rad06c7fc952f40af"/>
+          <a:blip xmlns:r="http://schemas.openxmlformats.org/officeDocument/2006/relationships" xmlns:a="http://schemas.openxmlformats.org/drawingml/2006/main" r:embed="Rab7ee889c8f84d09"/>
           <a:stretch xmlns:a="http://schemas.openxmlformats.org/drawingml/2006/main"/>
         </p:blipFill>
         <p:spPr>
@@ -33840,7 +33840,7 @@
           <p:cNvPr id="7" name="">
             <a:extLst xmlns:a="http://schemas.openxmlformats.org/drawingml/2006/main">
               <a:ext uri="{FF2B5EF4-FFF2-40B4-BE49-F238E27FC236}">
-                <a16:creationId xmlns:a16="http://schemas.microsoft.com/office/drawing/2014/main" id="{384A9DAC-F0A1-4330-8D00-1C326063A2D3}"/>
+                <a16:creationId xmlns:a16="http://schemas.microsoft.com/office/drawing/2014/main" id="{6A71D635-8133-40F0-A9F1-69361263C410}"/>
               </a:ext>
             </a:extLst>
           </p:cNvPr>
@@ -33892,7 +33892,7 @@
           <p:cNvPr id="8" name="">
             <a:extLst xmlns:a="http://schemas.openxmlformats.org/drawingml/2006/main">
               <a:ext uri="{FF2B5EF4-FFF2-40B4-BE49-F238E27FC236}">
-                <a16:creationId xmlns:a16="http://schemas.microsoft.com/office/drawing/2014/main" id="{B35E178F-538A-421A-808C-412BD65DC350}"/>
+                <a16:creationId xmlns:a16="http://schemas.microsoft.com/office/drawing/2014/main" id="{9D8A2309-B6C0-4E69-B0EF-B121B332544F}"/>
               </a:ext>
             </a:extLst>
           </p:cNvPr>
@@ -33944,7 +33944,7 @@
           <p:cNvPr id="9" name="">
             <a:extLst xmlns:a="http://schemas.openxmlformats.org/drawingml/2006/main">
               <a:ext uri="{FF2B5EF4-FFF2-40B4-BE49-F238E27FC236}">
-                <a16:creationId xmlns:a16="http://schemas.microsoft.com/office/drawing/2014/main" id="{043E64F2-29B4-4E5B-9DE8-701C8F2198AF}"/>
+                <a16:creationId xmlns:a16="http://schemas.microsoft.com/office/drawing/2014/main" id="{A4474D4B-1CE9-4A7C-BFF0-B15FDDC96C99}"/>
               </a:ext>
             </a:extLst>
           </p:cNvPr>
@@ -33996,7 +33996,7 @@
           <p:cNvPr id="10" name="">
             <a:extLst xmlns:a="http://schemas.openxmlformats.org/drawingml/2006/main">
               <a:ext uri="{FF2B5EF4-FFF2-40B4-BE49-F238E27FC236}">
-                <a16:creationId xmlns:a16="http://schemas.microsoft.com/office/drawing/2014/main" id="{64EA1261-413C-4A02-80CE-8A5B4C53F558}"/>
+                <a16:creationId xmlns:a16="http://schemas.microsoft.com/office/drawing/2014/main" id="{D94B6DF8-A848-47A8-A3DC-2D8CDD642627}"/>
               </a:ext>
             </a:extLst>
           </p:cNvPr>
@@ -34048,7 +34048,7 @@
           <p:cNvPr id="11" name="">
             <a:extLst xmlns:a="http://schemas.openxmlformats.org/drawingml/2006/main">
               <a:ext uri="{FF2B5EF4-FFF2-40B4-BE49-F238E27FC236}">
-                <a16:creationId xmlns:a16="http://schemas.microsoft.com/office/drawing/2014/main" id="{73821CA5-21ED-45CE-9059-B98B88A63364}"/>
+                <a16:creationId xmlns:a16="http://schemas.microsoft.com/office/drawing/2014/main" id="{A8B2C730-9BC4-4711-B230-01DB87B38BA3}"/>
               </a:ext>
             </a:extLst>
           </p:cNvPr>
@@ -34095,10 +34095,10 @@
           <p:nvPr/>
         </p:nvPicPr>
         <p:blipFill>
-          <a:blip xmlns:r="http://schemas.openxmlformats.org/officeDocument/2006/relationships" xmlns:a="http://schemas.openxmlformats.org/drawingml/2006/main" r:embed="R869136fa23bf45da">
+          <a:blip xmlns:r="http://schemas.openxmlformats.org/officeDocument/2006/relationships" xmlns:a="http://schemas.openxmlformats.org/drawingml/2006/main" r:embed="R1272b0614c584eec">
             <a:extLst>
               <a:ext uri="{96DAC541-7B7A-43D3-8B79-37D633B846F1}">
-                <asvg:svgBlip xmlns:asvg="http://schemas.microsoft.com/office/drawing/2016/SVG/main" r:embed="R5e3a13da4e6e4391"/>
+                <asvg:svgBlip xmlns:asvg="http://schemas.microsoft.com/office/drawing/2016/SVG/main" r:embed="R2075cd22c8494584"/>
               </a:ext>
             </a:extLst>
           </a:blip>
@@ -34119,7 +34119,7 @@
           <p:cNvPr id="13" name="">
             <a:extLst xmlns:a="http://schemas.openxmlformats.org/drawingml/2006/main">
               <a:ext uri="{FF2B5EF4-FFF2-40B4-BE49-F238E27FC236}">
-                <a16:creationId xmlns:a16="http://schemas.microsoft.com/office/drawing/2014/main" id="{A3204531-EDE3-4405-9F12-09F391C973D3}"/>
+                <a16:creationId xmlns:a16="http://schemas.microsoft.com/office/drawing/2014/main" id="{B35EDC60-F48F-4A4B-A657-BE9152609AAD}"/>
               </a:ext>
             </a:extLst>
           </p:cNvPr>
@@ -34152,7 +34152,7 @@
           <p:cNvPr id="14" name="">
             <a:extLst xmlns:a="http://schemas.openxmlformats.org/drawingml/2006/main">
               <a:ext uri="{FF2B5EF4-FFF2-40B4-BE49-F238E27FC236}">
-                <a16:creationId xmlns:a16="http://schemas.microsoft.com/office/drawing/2014/main" id="{F1FCEC6C-0CB9-4E2B-8A29-C340FEA0A157}"/>
+                <a16:creationId xmlns:a16="http://schemas.microsoft.com/office/drawing/2014/main" id="{E4BF278C-BC54-4213-85CF-C022979E3818}"/>
               </a:ext>
             </a:extLst>
           </p:cNvPr>
@@ -34204,7 +34204,7 @@
           <p:cNvPr id="15" name="">
             <a:extLst xmlns:a="http://schemas.openxmlformats.org/drawingml/2006/main">
               <a:ext uri="{FF2B5EF4-FFF2-40B4-BE49-F238E27FC236}">
-                <a16:creationId xmlns:a16="http://schemas.microsoft.com/office/drawing/2014/main" id="{6915781E-6C44-4722-A538-4CAF410465EC}"/>
+                <a16:creationId xmlns:a16="http://schemas.microsoft.com/office/drawing/2014/main" id="{C8C87581-5854-4952-A651-8B06E5EF5186}"/>
               </a:ext>
             </a:extLst>
           </p:cNvPr>
@@ -34237,7 +34237,7 @@
           <p:cNvPr id="16" name="">
             <a:extLst xmlns:a="http://schemas.openxmlformats.org/drawingml/2006/main">
               <a:ext uri="{FF2B5EF4-FFF2-40B4-BE49-F238E27FC236}">
-                <a16:creationId xmlns:a16="http://schemas.microsoft.com/office/drawing/2014/main" id="{54C82940-3027-4444-8206-AA47F0043874}"/>
+                <a16:creationId xmlns:a16="http://schemas.microsoft.com/office/drawing/2014/main" id="{6D4B708A-72C2-416A-86F1-1F29055434F0}"/>
               </a:ext>
             </a:extLst>
           </p:cNvPr>
@@ -34289,7 +34289,7 @@
           <p:cNvPr id="17" name="">
             <a:extLst xmlns:a="http://schemas.openxmlformats.org/drawingml/2006/main">
               <a:ext uri="{FF2B5EF4-FFF2-40B4-BE49-F238E27FC236}">
-                <a16:creationId xmlns:a16="http://schemas.microsoft.com/office/drawing/2014/main" id="{60CFA7B3-92F2-493D-94AB-A76BDD5CD840}"/>
+                <a16:creationId xmlns:a16="http://schemas.microsoft.com/office/drawing/2014/main" id="{0FB6CE45-1EFE-403B-A595-01370BC8D007}"/>
               </a:ext>
             </a:extLst>
           </p:cNvPr>
@@ -34322,7 +34322,7 @@
           <p:cNvPr id="18" name="">
             <a:extLst xmlns:a="http://schemas.openxmlformats.org/drawingml/2006/main">
               <a:ext uri="{FF2B5EF4-FFF2-40B4-BE49-F238E27FC236}">
-                <a16:creationId xmlns:a16="http://schemas.microsoft.com/office/drawing/2014/main" id="{2BFB4B10-04BC-4C4F-B629-9DE7AEECA178}"/>
+                <a16:creationId xmlns:a16="http://schemas.microsoft.com/office/drawing/2014/main" id="{45A1BB72-41C3-47A6-8594-04B269A106C5}"/>
               </a:ext>
             </a:extLst>
           </p:cNvPr>
@@ -34374,7 +34374,7 @@
           <p:cNvPr id="19" name="">
             <a:extLst xmlns:a="http://schemas.openxmlformats.org/drawingml/2006/main">
               <a:ext uri="{FF2B5EF4-FFF2-40B4-BE49-F238E27FC236}">
-                <a16:creationId xmlns:a16="http://schemas.microsoft.com/office/drawing/2014/main" id="{DD261976-4033-43C9-B7C6-337A9EA76641}"/>
+                <a16:creationId xmlns:a16="http://schemas.microsoft.com/office/drawing/2014/main" id="{E6B48644-41FD-4772-9459-EC1342C008D4}"/>
               </a:ext>
             </a:extLst>
           </p:cNvPr>
@@ -34407,7 +34407,7 @@
           <p:cNvPr id="20" name="">
             <a:extLst xmlns:a="http://schemas.openxmlformats.org/drawingml/2006/main">
               <a:ext uri="{FF2B5EF4-FFF2-40B4-BE49-F238E27FC236}">
-                <a16:creationId xmlns:a16="http://schemas.microsoft.com/office/drawing/2014/main" id="{FFECE5F2-9CEB-4A71-A31D-14F94E834F49}"/>
+                <a16:creationId xmlns:a16="http://schemas.microsoft.com/office/drawing/2014/main" id="{81F92BDB-E91A-46F5-B383-55EF33A1DAE7}"/>
               </a:ext>
             </a:extLst>
           </p:cNvPr>
@@ -34459,7 +34459,7 @@
           <p:cNvPr id="21" name="">
             <a:extLst xmlns:a="http://schemas.openxmlformats.org/drawingml/2006/main">
               <a:ext uri="{FF2B5EF4-FFF2-40B4-BE49-F238E27FC236}">
-                <a16:creationId xmlns:a16="http://schemas.microsoft.com/office/drawing/2014/main" id="{368E1720-58A5-4397-8B25-777CA16AF7ED}"/>
+                <a16:creationId xmlns:a16="http://schemas.microsoft.com/office/drawing/2014/main" id="{EB9DBDC9-6AF0-4E42-B269-F64EE6F6F23C}"/>
               </a:ext>
             </a:extLst>
           </p:cNvPr>
@@ -34490,7 +34490,7 @@
           <p:cNvPr id="22" name="">
             <a:extLst xmlns:a="http://schemas.openxmlformats.org/drawingml/2006/main">
               <a:ext uri="{FF2B5EF4-FFF2-40B4-BE49-F238E27FC236}">
-                <a16:creationId xmlns:a16="http://schemas.microsoft.com/office/drawing/2014/main" id="{AA2A106A-888D-4A6C-AA77-8C537016484C}"/>
+                <a16:creationId xmlns:a16="http://schemas.microsoft.com/office/drawing/2014/main" id="{46BE8B5D-5843-4C3B-A1D7-27ED8E56EF64}"/>
               </a:ext>
             </a:extLst>
           </p:cNvPr>
@@ -34542,7 +34542,7 @@
           <p:cNvPr id="23" name="">
             <a:extLst xmlns:a="http://schemas.openxmlformats.org/drawingml/2006/main">
               <a:ext uri="{FF2B5EF4-FFF2-40B4-BE49-F238E27FC236}">
-                <a16:creationId xmlns:a16="http://schemas.microsoft.com/office/drawing/2014/main" id="{09AC2EAA-D12E-4907-B29A-65A812DDF1CD}"/>
+                <a16:creationId xmlns:a16="http://schemas.microsoft.com/office/drawing/2014/main" id="{2AC6F297-8273-45CE-BDA0-FBBB8E616DB0}"/>
               </a:ext>
             </a:extLst>
           </p:cNvPr>
@@ -34594,7 +34594,7 @@
           <p:cNvPr id="24" name="">
             <a:extLst xmlns:a="http://schemas.openxmlformats.org/drawingml/2006/main">
               <a:ext uri="{FF2B5EF4-FFF2-40B4-BE49-F238E27FC236}">
-                <a16:creationId xmlns:a16="http://schemas.microsoft.com/office/drawing/2014/main" id="{B1C31715-7B5D-47A6-AF33-9146453E49AA}"/>
+                <a16:creationId xmlns:a16="http://schemas.microsoft.com/office/drawing/2014/main" id="{F8C5B3BB-E865-4D59-A0D6-931708ECBD2B}"/>
               </a:ext>
             </a:extLst>
           </p:cNvPr>
@@ -34646,7 +34646,7 @@
           <p:cNvPr id="25" name="">
             <a:extLst xmlns:a="http://schemas.openxmlformats.org/drawingml/2006/main">
               <a:ext uri="{FF2B5EF4-FFF2-40B4-BE49-F238E27FC236}">
-                <a16:creationId xmlns:a16="http://schemas.microsoft.com/office/drawing/2014/main" id="{3B615679-1A0A-463B-85A5-8A8455B17646}"/>
+                <a16:creationId xmlns:a16="http://schemas.microsoft.com/office/drawing/2014/main" id="{1F14DD21-55CF-47E4-8DEE-BC8425FCA6DC}"/>
               </a:ext>
             </a:extLst>
           </p:cNvPr>
@@ -34698,7 +34698,7 @@
           <p:cNvPr id="26" name="">
             <a:extLst xmlns:a="http://schemas.openxmlformats.org/drawingml/2006/main">
               <a:ext uri="{FF2B5EF4-FFF2-40B4-BE49-F238E27FC236}">
-                <a16:creationId xmlns:a16="http://schemas.microsoft.com/office/drawing/2014/main" id="{93C1ECA6-0699-4DC9-B318-ABA7AB115DEE}"/>
+                <a16:creationId xmlns:a16="http://schemas.microsoft.com/office/drawing/2014/main" id="{4181F2A9-BC4A-4C9A-9DE3-6BAEEA6482D6}"/>
               </a:ext>
             </a:extLst>
           </p:cNvPr>
@@ -34750,7 +34750,7 @@
           <p:cNvPr id="27" name="">
             <a:extLst xmlns:a="http://schemas.openxmlformats.org/drawingml/2006/main">
               <a:ext uri="{FF2B5EF4-FFF2-40B4-BE49-F238E27FC236}">
-                <a16:creationId xmlns:a16="http://schemas.microsoft.com/office/drawing/2014/main" id="{D2DFA341-E533-409B-AFCE-C4F6EC83FD5A}"/>
+                <a16:creationId xmlns:a16="http://schemas.microsoft.com/office/drawing/2014/main" id="{CA2410A5-FAAA-42E9-A77C-FAC17A757C06}"/>
               </a:ext>
             </a:extLst>
           </p:cNvPr>
@@ -34802,7 +34802,7 @@
           <p:cNvPr id="28" name="">
             <a:extLst xmlns:a="http://schemas.openxmlformats.org/drawingml/2006/main">
               <a:ext uri="{FF2B5EF4-FFF2-40B4-BE49-F238E27FC236}">
-                <a16:creationId xmlns:a16="http://schemas.microsoft.com/office/drawing/2014/main" id="{C03946DF-1357-49E5-94FE-4F01E8ACCCAD}"/>
+                <a16:creationId xmlns:a16="http://schemas.microsoft.com/office/drawing/2014/main" id="{DC6E96BD-65DC-407D-8704-6B3CFFB72915}"/>
               </a:ext>
             </a:extLst>
           </p:cNvPr>
@@ -34854,7 +34854,7 @@
           <p:cNvPr id="29" name="">
             <a:extLst xmlns:a="http://schemas.openxmlformats.org/drawingml/2006/main">
               <a:ext uri="{FF2B5EF4-FFF2-40B4-BE49-F238E27FC236}">
-                <a16:creationId xmlns:a16="http://schemas.microsoft.com/office/drawing/2014/main" id="{76F63ED5-1E2C-47FF-B69F-D30BCEFB74E0}"/>
+                <a16:creationId xmlns:a16="http://schemas.microsoft.com/office/drawing/2014/main" id="{892019F5-4454-4FED-96CB-156CA2971684}"/>
               </a:ext>
             </a:extLst>
           </p:cNvPr>
@@ -34904,7 +34904,7 @@
     </p:spTree>
     <p:extLst>
       <p:ext uri="{BB962C8B-B14F-4D97-AF65-F5344CB8AC3E}">
-        <p14:creationId xmlns:p14="http://schemas.microsoft.com/office/powerpoint/2010/main" val="1802765877"/>
+        <p14:creationId xmlns:p14="http://schemas.microsoft.com/office/powerpoint/2010/main" val="1167622176"/>
       </p:ext>
     </p:extLst>
   </p:cSld>
@@ -34935,7 +34935,7 @@
           <p:cNvPr id="33" name="">
             <a:extLst xmlns:a="http://schemas.openxmlformats.org/drawingml/2006/main">
               <a:ext uri="{FF2B5EF4-FFF2-40B4-BE49-F238E27FC236}">
-                <a16:creationId xmlns:a16="http://schemas.microsoft.com/office/drawing/2014/main" id="{FF797035-777B-4F94-9448-6D8491A15F55}"/>
+                <a16:creationId xmlns:a16="http://schemas.microsoft.com/office/drawing/2014/main" id="{2D2EC4F7-576B-4C4A-9932-C78F9A412B13}"/>
               </a:ext>
             </a:extLst>
           </p:cNvPr>
@@ -34968,7 +34968,7 @@
           <p:cNvPr id="2" name="">
             <a:extLst xmlns:a="http://schemas.openxmlformats.org/drawingml/2006/main">
               <a:ext uri="{FF2B5EF4-FFF2-40B4-BE49-F238E27FC236}">
-                <a16:creationId xmlns:a16="http://schemas.microsoft.com/office/drawing/2014/main" id="{60926C85-C753-47AD-B095-E8621E98B671}"/>
+                <a16:creationId xmlns:a16="http://schemas.microsoft.com/office/drawing/2014/main" id="{C0AB89BC-239B-4ADF-9D0E-54F0962CEA8D}"/>
               </a:ext>
             </a:extLst>
           </p:cNvPr>
@@ -34999,7 +34999,7 @@
           <p:cNvPr id="3" name="">
             <a:extLst xmlns:a="http://schemas.openxmlformats.org/drawingml/2006/main">
               <a:ext uri="{FF2B5EF4-FFF2-40B4-BE49-F238E27FC236}">
-                <a16:creationId xmlns:a16="http://schemas.microsoft.com/office/drawing/2014/main" id="{33F83A45-3F72-48DC-8771-4641EEFF6355}"/>
+                <a16:creationId xmlns:a16="http://schemas.microsoft.com/office/drawing/2014/main" id="{29A5CCE2-2B88-4C06-B34C-9E542FD49A2D}"/>
               </a:ext>
             </a:extLst>
           </p:cNvPr>
@@ -35051,7 +35051,7 @@
           <p:cNvPr id="4" name="">
             <a:extLst xmlns:a="http://schemas.openxmlformats.org/drawingml/2006/main">
               <a:ext uri="{FF2B5EF4-FFF2-40B4-BE49-F238E27FC236}">
-                <a16:creationId xmlns:a16="http://schemas.microsoft.com/office/drawing/2014/main" id="{A6186AB7-4841-4677-A4C6-37B6EAD4D032}"/>
+                <a16:creationId xmlns:a16="http://schemas.microsoft.com/office/drawing/2014/main" id="{F6D1D4EE-BBBB-494D-A331-C4D5CEB3EE0A}"/>
               </a:ext>
             </a:extLst>
           </p:cNvPr>
@@ -35103,7 +35103,7 @@
           <p:cNvPr id="5" name="">
             <a:extLst xmlns:a="http://schemas.openxmlformats.org/drawingml/2006/main">
               <a:ext uri="{FF2B5EF4-FFF2-40B4-BE49-F238E27FC236}">
-                <a16:creationId xmlns:a16="http://schemas.microsoft.com/office/drawing/2014/main" id="{66200849-88DF-4692-9883-0B91EBA1EE3C}"/>
+                <a16:creationId xmlns:a16="http://schemas.microsoft.com/office/drawing/2014/main" id="{A6244FC0-1050-4303-9615-F5271A756F82}"/>
               </a:ext>
             </a:extLst>
           </p:cNvPr>
@@ -35138,7 +35138,7 @@
           <p:nvPr/>
         </p:nvPicPr>
         <p:blipFill>
-          <a:blip xmlns:r="http://schemas.openxmlformats.org/officeDocument/2006/relationships" xmlns:a="http://schemas.openxmlformats.org/drawingml/2006/main" r:embed="R03ed0e8e3a074088"/>
+          <a:blip xmlns:r="http://schemas.openxmlformats.org/officeDocument/2006/relationships" xmlns:a="http://schemas.openxmlformats.org/drawingml/2006/main" r:embed="R455d021bb66d4ec9"/>
           <a:stretch xmlns:a="http://schemas.openxmlformats.org/drawingml/2006/main"/>
         </p:blipFill>
         <p:spPr>
@@ -35156,7 +35156,7 @@
           <p:cNvPr id="7" name="">
             <a:extLst xmlns:a="http://schemas.openxmlformats.org/drawingml/2006/main">
               <a:ext uri="{FF2B5EF4-FFF2-40B4-BE49-F238E27FC236}">
-                <a16:creationId xmlns:a16="http://schemas.microsoft.com/office/drawing/2014/main" id="{9387DA4A-44DE-433A-A51D-141993078842}"/>
+                <a16:creationId xmlns:a16="http://schemas.microsoft.com/office/drawing/2014/main" id="{9D50105E-3985-4641-999E-142BE4785D15}"/>
               </a:ext>
             </a:extLst>
           </p:cNvPr>
@@ -35208,7 +35208,7 @@
           <p:cNvPr id="8" name="">
             <a:extLst xmlns:a="http://schemas.openxmlformats.org/drawingml/2006/main">
               <a:ext uri="{FF2B5EF4-FFF2-40B4-BE49-F238E27FC236}">
-                <a16:creationId xmlns:a16="http://schemas.microsoft.com/office/drawing/2014/main" id="{5F2972E9-62DD-497F-AF85-BFCBAFFC59AA}"/>
+                <a16:creationId xmlns:a16="http://schemas.microsoft.com/office/drawing/2014/main" id="{948BC385-E694-41A7-A1E4-55D0365CDFBB}"/>
               </a:ext>
             </a:extLst>
           </p:cNvPr>
@@ -35260,7 +35260,7 @@
           <p:cNvPr id="9" name="">
             <a:extLst xmlns:a="http://schemas.openxmlformats.org/drawingml/2006/main">
               <a:ext uri="{FF2B5EF4-FFF2-40B4-BE49-F238E27FC236}">
-                <a16:creationId xmlns:a16="http://schemas.microsoft.com/office/drawing/2014/main" id="{56968B25-A5E6-4FD8-A992-794C8D10BD14}"/>
+                <a16:creationId xmlns:a16="http://schemas.microsoft.com/office/drawing/2014/main" id="{1C1D35FE-9482-4965-94E8-57B4A5525CC6}"/>
               </a:ext>
             </a:extLst>
           </p:cNvPr>
@@ -35312,7 +35312,7 @@
           <p:cNvPr id="10" name="">
             <a:extLst xmlns:a="http://schemas.openxmlformats.org/drawingml/2006/main">
               <a:ext uri="{FF2B5EF4-FFF2-40B4-BE49-F238E27FC236}">
-                <a16:creationId xmlns:a16="http://schemas.microsoft.com/office/drawing/2014/main" id="{A9A3689D-BC12-479F-86D2-19EC0463EE01}"/>
+                <a16:creationId xmlns:a16="http://schemas.microsoft.com/office/drawing/2014/main" id="{733D2554-AD20-4A56-B5D5-E4195C01886D}"/>
               </a:ext>
             </a:extLst>
           </p:cNvPr>
@@ -35364,7 +35364,7 @@
           <p:cNvPr id="11" name="">
             <a:extLst xmlns:a="http://schemas.openxmlformats.org/drawingml/2006/main">
               <a:ext uri="{FF2B5EF4-FFF2-40B4-BE49-F238E27FC236}">
-                <a16:creationId xmlns:a16="http://schemas.microsoft.com/office/drawing/2014/main" id="{59FDBB5D-99E7-4BFB-94A0-DCC2025D1F06}"/>
+                <a16:creationId xmlns:a16="http://schemas.microsoft.com/office/drawing/2014/main" id="{8F9F5252-13F8-4122-B8F5-ABACA9EADE40}"/>
               </a:ext>
             </a:extLst>
           </p:cNvPr>
@@ -35411,10 +35411,10 @@
           <p:nvPr/>
         </p:nvPicPr>
         <p:blipFill>
-          <a:blip xmlns:r="http://schemas.openxmlformats.org/officeDocument/2006/relationships" xmlns:a="http://schemas.openxmlformats.org/drawingml/2006/main" r:embed="Rcd4f825e3a854ba4">
+          <a:blip xmlns:r="http://schemas.openxmlformats.org/officeDocument/2006/relationships" xmlns:a="http://schemas.openxmlformats.org/drawingml/2006/main" r:embed="Rb62116d05ec44b5e">
             <a:extLst>
               <a:ext uri="{96DAC541-7B7A-43D3-8B79-37D633B846F1}">
-                <asvg:svgBlip xmlns:asvg="http://schemas.microsoft.com/office/drawing/2016/SVG/main" r:embed="R43f410e6555a4c1b"/>
+                <asvg:svgBlip xmlns:asvg="http://schemas.microsoft.com/office/drawing/2016/SVG/main" r:embed="R76d72d2adbf84fab"/>
               </a:ext>
             </a:extLst>
           </a:blip>
@@ -35435,7 +35435,7 @@
           <p:cNvPr id="13" name="">
             <a:extLst xmlns:a="http://schemas.openxmlformats.org/drawingml/2006/main">
               <a:ext uri="{FF2B5EF4-FFF2-40B4-BE49-F238E27FC236}">
-                <a16:creationId xmlns:a16="http://schemas.microsoft.com/office/drawing/2014/main" id="{10F78DA4-550E-454A-8141-2A1631B7B593}"/>
+                <a16:creationId xmlns:a16="http://schemas.microsoft.com/office/drawing/2014/main" id="{EE9284E9-507F-4306-B4C0-D1F9E001E27B}"/>
               </a:ext>
             </a:extLst>
           </p:cNvPr>
@@ -35468,7 +35468,7 @@
           <p:cNvPr id="14" name="">
             <a:extLst xmlns:a="http://schemas.openxmlformats.org/drawingml/2006/main">
               <a:ext uri="{FF2B5EF4-FFF2-40B4-BE49-F238E27FC236}">
-                <a16:creationId xmlns:a16="http://schemas.microsoft.com/office/drawing/2014/main" id="{E962131D-B592-4099-9E5E-DD7373159953}"/>
+                <a16:creationId xmlns:a16="http://schemas.microsoft.com/office/drawing/2014/main" id="{46F5913D-E444-4716-9429-5481B10A08F4}"/>
               </a:ext>
             </a:extLst>
           </p:cNvPr>
@@ -35520,7 +35520,7 @@
           <p:cNvPr id="15" name="">
             <a:extLst xmlns:a="http://schemas.openxmlformats.org/drawingml/2006/main">
               <a:ext uri="{FF2B5EF4-FFF2-40B4-BE49-F238E27FC236}">
-                <a16:creationId xmlns:a16="http://schemas.microsoft.com/office/drawing/2014/main" id="{B4D78AEF-A056-48B6-BBDE-259C15C5EBF4}"/>
+                <a16:creationId xmlns:a16="http://schemas.microsoft.com/office/drawing/2014/main" id="{FE53E5D3-1FDB-4A09-A979-5064EAB60B2B}"/>
               </a:ext>
             </a:extLst>
           </p:cNvPr>
@@ -35551,7 +35551,7 @@
           <p:cNvPr id="16" name="">
             <a:extLst xmlns:a="http://schemas.openxmlformats.org/drawingml/2006/main">
               <a:ext uri="{FF2B5EF4-FFF2-40B4-BE49-F238E27FC236}">
-                <a16:creationId xmlns:a16="http://schemas.microsoft.com/office/drawing/2014/main" id="{3969B363-0D73-49A6-9B8A-F38B1CDC092C}"/>
+                <a16:creationId xmlns:a16="http://schemas.microsoft.com/office/drawing/2014/main" id="{5FE38928-296B-433D-87BD-9F7FCB7B9FCA}"/>
               </a:ext>
             </a:extLst>
           </p:cNvPr>
@@ -35582,7 +35582,7 @@
           <p:cNvPr id="17" name="">
             <a:extLst xmlns:a="http://schemas.openxmlformats.org/drawingml/2006/main">
               <a:ext uri="{FF2B5EF4-FFF2-40B4-BE49-F238E27FC236}">
-                <a16:creationId xmlns:a16="http://schemas.microsoft.com/office/drawing/2014/main" id="{C77BA0DD-81F1-4294-8DB2-7E5754575936}"/>
+                <a16:creationId xmlns:a16="http://schemas.microsoft.com/office/drawing/2014/main" id="{1E6D3B24-3C58-48DD-9C66-FFBBF8399C89}"/>
               </a:ext>
             </a:extLst>
           </p:cNvPr>
@@ -35634,7 +35634,7 @@
           <p:cNvPr id="18" name="">
             <a:extLst xmlns:a="http://schemas.openxmlformats.org/drawingml/2006/main">
               <a:ext uri="{FF2B5EF4-FFF2-40B4-BE49-F238E27FC236}">
-                <a16:creationId xmlns:a16="http://schemas.microsoft.com/office/drawing/2014/main" id="{A3B14592-5E57-4637-89FC-0B3466DBD6CE}"/>
+                <a16:creationId xmlns:a16="http://schemas.microsoft.com/office/drawing/2014/main" id="{548B1BFA-DCEC-4929-B732-627E2419A2D0}"/>
               </a:ext>
             </a:extLst>
           </p:cNvPr>
@@ -35667,7 +35667,7 @@
           <p:cNvPr id="19" name="">
             <a:extLst xmlns:a="http://schemas.openxmlformats.org/drawingml/2006/main">
               <a:ext uri="{FF2B5EF4-FFF2-40B4-BE49-F238E27FC236}">
-                <a16:creationId xmlns:a16="http://schemas.microsoft.com/office/drawing/2014/main" id="{8B755E51-0437-4C1F-ABB2-5F3419E97043}"/>
+                <a16:creationId xmlns:a16="http://schemas.microsoft.com/office/drawing/2014/main" id="{C48E5531-6DD2-404D-A57D-9796CDBC0F5F}"/>
               </a:ext>
             </a:extLst>
           </p:cNvPr>
@@ -35719,7 +35719,7 @@
           <p:cNvPr id="20" name="">
             <a:extLst xmlns:a="http://schemas.openxmlformats.org/drawingml/2006/main">
               <a:ext uri="{FF2B5EF4-FFF2-40B4-BE49-F238E27FC236}">
-                <a16:creationId xmlns:a16="http://schemas.microsoft.com/office/drawing/2014/main" id="{D69444A7-67C1-455C-88DE-DD7BD1063D41}"/>
+                <a16:creationId xmlns:a16="http://schemas.microsoft.com/office/drawing/2014/main" id="{237D0DD5-AAC8-4BEE-A6D5-7DBB624145CA}"/>
               </a:ext>
             </a:extLst>
           </p:cNvPr>
@@ -35750,7 +35750,7 @@
           <p:cNvPr id="21" name="">
             <a:extLst xmlns:a="http://schemas.openxmlformats.org/drawingml/2006/main">
               <a:ext uri="{FF2B5EF4-FFF2-40B4-BE49-F238E27FC236}">
-                <a16:creationId xmlns:a16="http://schemas.microsoft.com/office/drawing/2014/main" id="{FC8B30AB-3AD5-4793-A927-E8A26341678C}"/>
+                <a16:creationId xmlns:a16="http://schemas.microsoft.com/office/drawing/2014/main" id="{6FC5DB2A-8EA2-476B-9406-FFF20587EEA2}"/>
               </a:ext>
             </a:extLst>
           </p:cNvPr>
@@ -35781,7 +35781,7 @@
           <p:cNvPr id="22" name="">
             <a:extLst xmlns:a="http://schemas.openxmlformats.org/drawingml/2006/main">
               <a:ext uri="{FF2B5EF4-FFF2-40B4-BE49-F238E27FC236}">
-                <a16:creationId xmlns:a16="http://schemas.microsoft.com/office/drawing/2014/main" id="{C4797AB3-19CA-49D9-AC5A-66FF6E7D3B23}"/>
+                <a16:creationId xmlns:a16="http://schemas.microsoft.com/office/drawing/2014/main" id="{45D8DEB0-95EC-44F0-8159-D96C1CC2F532}"/>
               </a:ext>
             </a:extLst>
           </p:cNvPr>
@@ -35833,7 +35833,7 @@
           <p:cNvPr id="23" name="">
             <a:extLst xmlns:a="http://schemas.openxmlformats.org/drawingml/2006/main">
               <a:ext uri="{FF2B5EF4-FFF2-40B4-BE49-F238E27FC236}">
-                <a16:creationId xmlns:a16="http://schemas.microsoft.com/office/drawing/2014/main" id="{5A9378E4-57BD-451B-888B-9D907339D6D5}"/>
+                <a16:creationId xmlns:a16="http://schemas.microsoft.com/office/drawing/2014/main" id="{9B9A0CB7-2E0B-4E5B-BC30-E30C6B2A80F0}"/>
               </a:ext>
             </a:extLst>
           </p:cNvPr>
@@ -35885,7 +35885,7 @@
           <p:cNvPr id="24" name="">
             <a:extLst xmlns:a="http://schemas.openxmlformats.org/drawingml/2006/main">
               <a:ext uri="{FF2B5EF4-FFF2-40B4-BE49-F238E27FC236}">
-                <a16:creationId xmlns:a16="http://schemas.microsoft.com/office/drawing/2014/main" id="{6FB93B66-EE06-4F58-B9E5-A4EE4E891BF4}"/>
+                <a16:creationId xmlns:a16="http://schemas.microsoft.com/office/drawing/2014/main" id="{F9E7D3D6-A200-4E15-AAE2-C9CCBEB75372}"/>
               </a:ext>
             </a:extLst>
           </p:cNvPr>
@@ -35916,7 +35916,7 @@
           <p:cNvPr id="25" name="">
             <a:extLst xmlns:a="http://schemas.openxmlformats.org/drawingml/2006/main">
               <a:ext uri="{FF2B5EF4-FFF2-40B4-BE49-F238E27FC236}">
-                <a16:creationId xmlns:a16="http://schemas.microsoft.com/office/drawing/2014/main" id="{C5F14C8B-F4BC-4359-A386-2B6386751D12}"/>
+                <a16:creationId xmlns:a16="http://schemas.microsoft.com/office/drawing/2014/main" id="{36764D84-1195-4552-937B-BAC774302846}"/>
               </a:ext>
             </a:extLst>
           </p:cNvPr>
@@ -35968,7 +35968,7 @@
           <p:cNvPr id="26" name="">
             <a:extLst xmlns:a="http://schemas.openxmlformats.org/drawingml/2006/main">
               <a:ext uri="{FF2B5EF4-FFF2-40B4-BE49-F238E27FC236}">
-                <a16:creationId xmlns:a16="http://schemas.microsoft.com/office/drawing/2014/main" id="{DE378721-725D-4E06-805A-760458FE6E68}"/>
+                <a16:creationId xmlns:a16="http://schemas.microsoft.com/office/drawing/2014/main" id="{BDA26D40-0845-4E9B-B56A-5B2147503088}"/>
               </a:ext>
             </a:extLst>
           </p:cNvPr>
@@ -36020,7 +36020,7 @@
           <p:cNvPr id="27" name="">
             <a:extLst xmlns:a="http://schemas.openxmlformats.org/drawingml/2006/main">
               <a:ext uri="{FF2B5EF4-FFF2-40B4-BE49-F238E27FC236}">
-                <a16:creationId xmlns:a16="http://schemas.microsoft.com/office/drawing/2014/main" id="{AFDACDAD-4ECB-41B7-81F2-79AB1497CE58}"/>
+                <a16:creationId xmlns:a16="http://schemas.microsoft.com/office/drawing/2014/main" id="{31806480-1E5A-46C4-A3AF-D8FD49FEB01D}"/>
               </a:ext>
             </a:extLst>
           </p:cNvPr>
@@ -36072,7 +36072,7 @@
           <p:cNvPr id="28" name="">
             <a:extLst xmlns:a="http://schemas.openxmlformats.org/drawingml/2006/main">
               <a:ext uri="{FF2B5EF4-FFF2-40B4-BE49-F238E27FC236}">
-                <a16:creationId xmlns:a16="http://schemas.microsoft.com/office/drawing/2014/main" id="{8B340948-47A8-4A50-AC3C-75846AD517E1}"/>
+                <a16:creationId xmlns:a16="http://schemas.microsoft.com/office/drawing/2014/main" id="{7522A6FA-E17F-4AFE-9734-358829AE596E}"/>
               </a:ext>
             </a:extLst>
           </p:cNvPr>
@@ -36124,7 +36124,7 @@
           <p:cNvPr id="29" name="">
             <a:extLst xmlns:a="http://schemas.openxmlformats.org/drawingml/2006/main">
               <a:ext uri="{FF2B5EF4-FFF2-40B4-BE49-F238E27FC236}">
-                <a16:creationId xmlns:a16="http://schemas.microsoft.com/office/drawing/2014/main" id="{63C26AC7-A567-43EA-B16E-E9B8BC096B58}"/>
+                <a16:creationId xmlns:a16="http://schemas.microsoft.com/office/drawing/2014/main" id="{84EF7EB8-4684-4885-8C3A-9DD595BC330A}"/>
               </a:ext>
             </a:extLst>
           </p:cNvPr>
@@ -36176,7 +36176,7 @@
           <p:cNvPr id="30" name="">
             <a:extLst xmlns:a="http://schemas.openxmlformats.org/drawingml/2006/main">
               <a:ext uri="{FF2B5EF4-FFF2-40B4-BE49-F238E27FC236}">
-                <a16:creationId xmlns:a16="http://schemas.microsoft.com/office/drawing/2014/main" id="{274D768B-12CD-4285-A5F4-963BF6DB4BB2}"/>
+                <a16:creationId xmlns:a16="http://schemas.microsoft.com/office/drawing/2014/main" id="{3ECB7690-A08F-46A1-A31A-AEB25653C96B}"/>
               </a:ext>
             </a:extLst>
           </p:cNvPr>
@@ -36228,7 +36228,7 @@
           <p:cNvPr id="31" name="">
             <a:extLst xmlns:a="http://schemas.openxmlformats.org/drawingml/2006/main">
               <a:ext uri="{FF2B5EF4-FFF2-40B4-BE49-F238E27FC236}">
-                <a16:creationId xmlns:a16="http://schemas.microsoft.com/office/drawing/2014/main" id="{79F71548-5680-435B-8A48-95F26312FE33}"/>
+                <a16:creationId xmlns:a16="http://schemas.microsoft.com/office/drawing/2014/main" id="{646B8195-E9A0-4B4A-9518-09A7AAC05758}"/>
               </a:ext>
             </a:extLst>
           </p:cNvPr>
@@ -36280,7 +36280,7 @@
           <p:cNvPr id="32" name="">
             <a:extLst xmlns:a="http://schemas.openxmlformats.org/drawingml/2006/main">
               <a:ext uri="{FF2B5EF4-FFF2-40B4-BE49-F238E27FC236}">
-                <a16:creationId xmlns:a16="http://schemas.microsoft.com/office/drawing/2014/main" id="{26C1360F-6E7A-48D6-9752-7F6D340866FC}"/>
+                <a16:creationId xmlns:a16="http://schemas.microsoft.com/office/drawing/2014/main" id="{85D843C4-65C2-425A-9A64-F96357CAE322}"/>
               </a:ext>
             </a:extLst>
           </p:cNvPr>
@@ -36330,7 +36330,7 @@
     </p:spTree>
     <p:extLst>
       <p:ext uri="{BB962C8B-B14F-4D97-AF65-F5344CB8AC3E}">
-        <p14:creationId xmlns:p14="http://schemas.microsoft.com/office/powerpoint/2010/main" val="697856907"/>
+        <p14:creationId xmlns:p14="http://schemas.microsoft.com/office/powerpoint/2010/main" val="1428241194"/>
       </p:ext>
     </p:extLst>
   </p:cSld>
@@ -36361,7 +36361,7 @@
           <p:cNvPr id="27" name="">
             <a:extLst xmlns:a="http://schemas.openxmlformats.org/drawingml/2006/main">
               <a:ext uri="{FF2B5EF4-FFF2-40B4-BE49-F238E27FC236}">
-                <a16:creationId xmlns:a16="http://schemas.microsoft.com/office/drawing/2014/main" id="{A87508D3-26D8-481C-998D-7895029A9652}"/>
+                <a16:creationId xmlns:a16="http://schemas.microsoft.com/office/drawing/2014/main" id="{1C9A052B-DE19-4637-9362-22C0AB4D3DCD}"/>
               </a:ext>
             </a:extLst>
           </p:cNvPr>
@@ -36394,7 +36394,7 @@
           <p:cNvPr id="2" name="">
             <a:extLst xmlns:a="http://schemas.openxmlformats.org/drawingml/2006/main">
               <a:ext uri="{FF2B5EF4-FFF2-40B4-BE49-F238E27FC236}">
-                <a16:creationId xmlns:a16="http://schemas.microsoft.com/office/drawing/2014/main" id="{000D48F5-FF70-4B96-9945-34615E64B3B4}"/>
+                <a16:creationId xmlns:a16="http://schemas.microsoft.com/office/drawing/2014/main" id="{6F192A6E-AF4C-40C3-8905-1D424A6BB78E}"/>
               </a:ext>
             </a:extLst>
           </p:cNvPr>
@@ -36425,7 +36425,7 @@
           <p:cNvPr id="3" name="">
             <a:extLst xmlns:a="http://schemas.openxmlformats.org/drawingml/2006/main">
               <a:ext uri="{FF2B5EF4-FFF2-40B4-BE49-F238E27FC236}">
-                <a16:creationId xmlns:a16="http://schemas.microsoft.com/office/drawing/2014/main" id="{BFD2F364-4C3B-496A-8692-F86E2756FCDA}"/>
+                <a16:creationId xmlns:a16="http://schemas.microsoft.com/office/drawing/2014/main" id="{3E5AE155-2282-4F48-8B64-2D3A671AE22B}"/>
               </a:ext>
             </a:extLst>
           </p:cNvPr>
@@ -36477,7 +36477,7 @@
           <p:cNvPr id="4" name="">
             <a:extLst xmlns:a="http://schemas.openxmlformats.org/drawingml/2006/main">
               <a:ext uri="{FF2B5EF4-FFF2-40B4-BE49-F238E27FC236}">
-                <a16:creationId xmlns:a16="http://schemas.microsoft.com/office/drawing/2014/main" id="{6C4CA627-1076-4E6F-875F-127750BC7FBC}"/>
+                <a16:creationId xmlns:a16="http://schemas.microsoft.com/office/drawing/2014/main" id="{F2E5C643-DDD9-48EE-9E4F-9BF67A9468A0}"/>
               </a:ext>
             </a:extLst>
           </p:cNvPr>
@@ -36529,7 +36529,7 @@
           <p:cNvPr id="5" name="">
             <a:extLst xmlns:a="http://schemas.openxmlformats.org/drawingml/2006/main">
               <a:ext uri="{FF2B5EF4-FFF2-40B4-BE49-F238E27FC236}">
-                <a16:creationId xmlns:a16="http://schemas.microsoft.com/office/drawing/2014/main" id="{0FF1321D-22CB-4A6E-8F32-B406C44C4CC2}"/>
+                <a16:creationId xmlns:a16="http://schemas.microsoft.com/office/drawing/2014/main" id="{C8817AC2-FD94-4039-9A0D-D41C40D730CA}"/>
               </a:ext>
             </a:extLst>
           </p:cNvPr>
@@ -36564,7 +36564,7 @@
           <p:nvPr/>
         </p:nvPicPr>
         <p:blipFill>
-          <a:blip xmlns:r="http://schemas.openxmlformats.org/officeDocument/2006/relationships" xmlns:a="http://schemas.openxmlformats.org/drawingml/2006/main" r:embed="Rde7b488cbe434d21"/>
+          <a:blip xmlns:r="http://schemas.openxmlformats.org/officeDocument/2006/relationships" xmlns:a="http://schemas.openxmlformats.org/drawingml/2006/main" r:embed="R6d318b0ef2864e46"/>
           <a:stretch xmlns:a="http://schemas.openxmlformats.org/drawingml/2006/main"/>
         </p:blipFill>
         <p:spPr>
@@ -36582,7 +36582,7 @@
           <p:cNvPr id="7" name="">
             <a:extLst xmlns:a="http://schemas.openxmlformats.org/drawingml/2006/main">
               <a:ext uri="{FF2B5EF4-FFF2-40B4-BE49-F238E27FC236}">
-                <a16:creationId xmlns:a16="http://schemas.microsoft.com/office/drawing/2014/main" id="{E7A222E3-7F41-4F3E-9836-AF9FBF0BCACB}"/>
+                <a16:creationId xmlns:a16="http://schemas.microsoft.com/office/drawing/2014/main" id="{0F8C9C18-AE74-4CA4-8A24-E85294DC4EE8}"/>
               </a:ext>
             </a:extLst>
           </p:cNvPr>
@@ -36634,7 +36634,7 @@
           <p:cNvPr id="8" name="">
             <a:extLst xmlns:a="http://schemas.openxmlformats.org/drawingml/2006/main">
               <a:ext uri="{FF2B5EF4-FFF2-40B4-BE49-F238E27FC236}">
-                <a16:creationId xmlns:a16="http://schemas.microsoft.com/office/drawing/2014/main" id="{E995850E-509C-42DA-99AD-43744911F6F6}"/>
+                <a16:creationId xmlns:a16="http://schemas.microsoft.com/office/drawing/2014/main" id="{D1F0EB7E-D97C-4D3E-AFDA-F56F321F81AC}"/>
               </a:ext>
             </a:extLst>
           </p:cNvPr>
@@ -36686,7 +36686,7 @@
           <p:cNvPr id="9" name="">
             <a:extLst xmlns:a="http://schemas.openxmlformats.org/drawingml/2006/main">
               <a:ext uri="{FF2B5EF4-FFF2-40B4-BE49-F238E27FC236}">
-                <a16:creationId xmlns:a16="http://schemas.microsoft.com/office/drawing/2014/main" id="{B27E7DB3-35F9-4F30-8A7E-1B103B79C957}"/>
+                <a16:creationId xmlns:a16="http://schemas.microsoft.com/office/drawing/2014/main" id="{095610B4-0BCF-4051-ABC0-CC02F7A96EF6}"/>
               </a:ext>
             </a:extLst>
           </p:cNvPr>
@@ -36738,7 +36738,7 @@
           <p:cNvPr id="10" name="">
             <a:extLst xmlns:a="http://schemas.openxmlformats.org/drawingml/2006/main">
               <a:ext uri="{FF2B5EF4-FFF2-40B4-BE49-F238E27FC236}">
-                <a16:creationId xmlns:a16="http://schemas.microsoft.com/office/drawing/2014/main" id="{9E4C087E-6D23-472A-8208-02479C629AA5}"/>
+                <a16:creationId xmlns:a16="http://schemas.microsoft.com/office/drawing/2014/main" id="{74C92C89-253A-44EC-9631-DD68C68F8DF7}"/>
               </a:ext>
             </a:extLst>
           </p:cNvPr>
@@ -36790,7 +36790,7 @@
           <p:cNvPr id="11" name="">
             <a:extLst xmlns:a="http://schemas.openxmlformats.org/drawingml/2006/main">
               <a:ext uri="{FF2B5EF4-FFF2-40B4-BE49-F238E27FC236}">
-                <a16:creationId xmlns:a16="http://schemas.microsoft.com/office/drawing/2014/main" id="{5A433363-B215-461C-9F20-52476F69106C}"/>
+                <a16:creationId xmlns:a16="http://schemas.microsoft.com/office/drawing/2014/main" id="{5E3FD599-3732-4BC9-94A5-5A7190EE4E76}"/>
               </a:ext>
             </a:extLst>
           </p:cNvPr>
@@ -36837,10 +36837,10 @@
           <p:nvPr/>
         </p:nvPicPr>
         <p:blipFill>
-          <a:blip xmlns:r="http://schemas.openxmlformats.org/officeDocument/2006/relationships" xmlns:a="http://schemas.openxmlformats.org/drawingml/2006/main" r:embed="R65979c923d854309">
+          <a:blip xmlns:r="http://schemas.openxmlformats.org/officeDocument/2006/relationships" xmlns:a="http://schemas.openxmlformats.org/drawingml/2006/main" r:embed="Ra22f9876723844b6">
             <a:extLst>
               <a:ext uri="{96DAC541-7B7A-43D3-8B79-37D633B846F1}">
-                <asvg:svgBlip xmlns:asvg="http://schemas.microsoft.com/office/drawing/2016/SVG/main" r:embed="R54441c572d45426d"/>
+                <asvg:svgBlip xmlns:asvg="http://schemas.microsoft.com/office/drawing/2016/SVG/main" r:embed="R0e46c01531da4efa"/>
               </a:ext>
             </a:extLst>
           </a:blip>
@@ -36861,7 +36861,7 @@
           <p:cNvPr id="13" name="">
             <a:extLst xmlns:a="http://schemas.openxmlformats.org/drawingml/2006/main">
               <a:ext uri="{FF2B5EF4-FFF2-40B4-BE49-F238E27FC236}">
-                <a16:creationId xmlns:a16="http://schemas.microsoft.com/office/drawing/2014/main" id="{06B72D2D-6555-43E0-B510-C50670D7F1A7}"/>
+                <a16:creationId xmlns:a16="http://schemas.microsoft.com/office/drawing/2014/main" id="{F0D1DF92-846F-42DD-B592-17315DAEDFCF}"/>
               </a:ext>
             </a:extLst>
           </p:cNvPr>
@@ -36894,7 +36894,7 @@
           <p:cNvPr id="14" name="">
             <a:extLst xmlns:a="http://schemas.openxmlformats.org/drawingml/2006/main">
               <a:ext uri="{FF2B5EF4-FFF2-40B4-BE49-F238E27FC236}">
-                <a16:creationId xmlns:a16="http://schemas.microsoft.com/office/drawing/2014/main" id="{C195CD61-F39F-46C7-96A6-E64EBDC48DC7}"/>
+                <a16:creationId xmlns:a16="http://schemas.microsoft.com/office/drawing/2014/main" id="{CCD15366-F2CB-49D4-AC0F-F8AF93903305}"/>
               </a:ext>
             </a:extLst>
           </p:cNvPr>
@@ -36946,7 +36946,7 @@
           <p:cNvPr id="15" name="">
             <a:extLst xmlns:a="http://schemas.openxmlformats.org/drawingml/2006/main">
               <a:ext uri="{FF2B5EF4-FFF2-40B4-BE49-F238E27FC236}">
-                <a16:creationId xmlns:a16="http://schemas.microsoft.com/office/drawing/2014/main" id="{9D36BCF5-066B-4F2B-8324-48C99908C719}"/>
+                <a16:creationId xmlns:a16="http://schemas.microsoft.com/office/drawing/2014/main" id="{92F809D7-C565-4A98-B73B-3D908127C8AF}"/>
               </a:ext>
             </a:extLst>
           </p:cNvPr>
@@ -36979,7 +36979,7 @@
           <p:cNvPr id="16" name="">
             <a:extLst xmlns:a="http://schemas.openxmlformats.org/drawingml/2006/main">
               <a:ext uri="{FF2B5EF4-FFF2-40B4-BE49-F238E27FC236}">
-                <a16:creationId xmlns:a16="http://schemas.microsoft.com/office/drawing/2014/main" id="{F20D9C4A-94EF-4E36-B88D-155FBCDF5D92}"/>
+                <a16:creationId xmlns:a16="http://schemas.microsoft.com/office/drawing/2014/main" id="{3E7C780B-6040-4579-AFD4-3ACB94006F13}"/>
               </a:ext>
             </a:extLst>
           </p:cNvPr>
@@ -37031,7 +37031,7 @@
           <p:cNvPr id="17" name="">
             <a:extLst xmlns:a="http://schemas.openxmlformats.org/drawingml/2006/main">
               <a:ext uri="{FF2B5EF4-FFF2-40B4-BE49-F238E27FC236}">
-                <a16:creationId xmlns:a16="http://schemas.microsoft.com/office/drawing/2014/main" id="{03A9C4E7-5E7E-4EED-B7C1-915776DD6751}"/>
+                <a16:creationId xmlns:a16="http://schemas.microsoft.com/office/drawing/2014/main" id="{FDCDC477-2530-44C4-94E6-9126644D351D}"/>
               </a:ext>
             </a:extLst>
           </p:cNvPr>
@@ -37062,7 +37062,7 @@
           <p:cNvPr id="18" name="">
             <a:extLst xmlns:a="http://schemas.openxmlformats.org/drawingml/2006/main">
               <a:ext uri="{FF2B5EF4-FFF2-40B4-BE49-F238E27FC236}">
-                <a16:creationId xmlns:a16="http://schemas.microsoft.com/office/drawing/2014/main" id="{54164B5D-D8E1-439E-953C-81BB2BD5F3CF}"/>
+                <a16:creationId xmlns:a16="http://schemas.microsoft.com/office/drawing/2014/main" id="{CE043CD6-0F53-4C91-8FD2-81E2C190D26D}"/>
               </a:ext>
             </a:extLst>
           </p:cNvPr>
@@ -37093,7 +37093,7 @@
           <p:cNvPr id="19" name="">
             <a:extLst xmlns:a="http://schemas.openxmlformats.org/drawingml/2006/main">
               <a:ext uri="{FF2B5EF4-FFF2-40B4-BE49-F238E27FC236}">
-                <a16:creationId xmlns:a16="http://schemas.microsoft.com/office/drawing/2014/main" id="{425E111E-7370-463F-965B-96DFCB6765EA}"/>
+                <a16:creationId xmlns:a16="http://schemas.microsoft.com/office/drawing/2014/main" id="{39BCE6A7-97D7-4F18-AD51-9E2DEA817DC3}"/>
               </a:ext>
             </a:extLst>
           </p:cNvPr>
@@ -37145,7 +37145,7 @@
           <p:cNvPr id="20" name="">
             <a:extLst xmlns:a="http://schemas.openxmlformats.org/drawingml/2006/main">
               <a:ext uri="{FF2B5EF4-FFF2-40B4-BE49-F238E27FC236}">
-                <a16:creationId xmlns:a16="http://schemas.microsoft.com/office/drawing/2014/main" id="{9E403C51-F2FA-449A-9E97-D0B1CDBEBB3C}"/>
+                <a16:creationId xmlns:a16="http://schemas.microsoft.com/office/drawing/2014/main" id="{D49EB82A-3DB1-446C-BC04-56311A217593}"/>
               </a:ext>
             </a:extLst>
           </p:cNvPr>
@@ -37176,7 +37176,7 @@
           <p:cNvPr id="21" name="">
             <a:extLst xmlns:a="http://schemas.openxmlformats.org/drawingml/2006/main">
               <a:ext uri="{FF2B5EF4-FFF2-40B4-BE49-F238E27FC236}">
-                <a16:creationId xmlns:a16="http://schemas.microsoft.com/office/drawing/2014/main" id="{290F4E18-EFE4-4596-8901-322DE89C1178}"/>
+                <a16:creationId xmlns:a16="http://schemas.microsoft.com/office/drawing/2014/main" id="{F6F0F806-9D55-4C6C-8710-7A450598A4B5}"/>
               </a:ext>
             </a:extLst>
           </p:cNvPr>
@@ -37228,7 +37228,7 @@
           <p:cNvPr id="22" name="">
             <a:extLst xmlns:a="http://schemas.openxmlformats.org/drawingml/2006/main">
               <a:ext uri="{FF2B5EF4-FFF2-40B4-BE49-F238E27FC236}">
-                <a16:creationId xmlns:a16="http://schemas.microsoft.com/office/drawing/2014/main" id="{DC8C8D8C-0DBC-4974-B77E-E29FC3106837}"/>
+                <a16:creationId xmlns:a16="http://schemas.microsoft.com/office/drawing/2014/main" id="{4D789516-BBAA-49F3-BDDE-A8B70ED5713E}"/>
               </a:ext>
             </a:extLst>
           </p:cNvPr>
@@ -37280,7 +37280,7 @@
           <p:cNvPr id="23" name="">
             <a:extLst xmlns:a="http://schemas.openxmlformats.org/drawingml/2006/main">
               <a:ext uri="{FF2B5EF4-FFF2-40B4-BE49-F238E27FC236}">
-                <a16:creationId xmlns:a16="http://schemas.microsoft.com/office/drawing/2014/main" id="{32E8F570-8864-47D9-B07A-61A4CF7783C1}"/>
+                <a16:creationId xmlns:a16="http://schemas.microsoft.com/office/drawing/2014/main" id="{7878878A-1D61-42A3-A03B-70AEAB615D47}"/>
               </a:ext>
             </a:extLst>
           </p:cNvPr>
@@ -37332,7 +37332,7 @@
           <p:cNvPr id="24" name="">
             <a:extLst xmlns:a="http://schemas.openxmlformats.org/drawingml/2006/main">
               <a:ext uri="{FF2B5EF4-FFF2-40B4-BE49-F238E27FC236}">
-                <a16:creationId xmlns:a16="http://schemas.microsoft.com/office/drawing/2014/main" id="{9A9F3D48-7C25-44D5-A4B0-AB8BDC2E339E}"/>
+                <a16:creationId xmlns:a16="http://schemas.microsoft.com/office/drawing/2014/main" id="{5D41DF26-6798-4BBF-ABAA-836F6D823047}"/>
               </a:ext>
             </a:extLst>
           </p:cNvPr>
@@ -37384,7 +37384,7 @@
           <p:cNvPr id="25" name="">
             <a:extLst xmlns:a="http://schemas.openxmlformats.org/drawingml/2006/main">
               <a:ext uri="{FF2B5EF4-FFF2-40B4-BE49-F238E27FC236}">
-                <a16:creationId xmlns:a16="http://schemas.microsoft.com/office/drawing/2014/main" id="{B5D5EC21-BA61-44CE-9904-C155BC6482D5}"/>
+                <a16:creationId xmlns:a16="http://schemas.microsoft.com/office/drawing/2014/main" id="{BA2359C8-A124-4620-A154-70EB819BFDCB}"/>
               </a:ext>
             </a:extLst>
           </p:cNvPr>
@@ -37436,7 +37436,7 @@
           <p:cNvPr id="26" name="">
             <a:extLst xmlns:a="http://schemas.openxmlformats.org/drawingml/2006/main">
               <a:ext uri="{FF2B5EF4-FFF2-40B4-BE49-F238E27FC236}">
-                <a16:creationId xmlns:a16="http://schemas.microsoft.com/office/drawing/2014/main" id="{8070C7E2-4F27-4590-9260-51E300A5138E}"/>
+                <a16:creationId xmlns:a16="http://schemas.microsoft.com/office/drawing/2014/main" id="{992AACDF-71BF-40DE-90D2-5F57C9883B92}"/>
               </a:ext>
             </a:extLst>
           </p:cNvPr>
@@ -37486,7 +37486,7 @@
     </p:spTree>
     <p:extLst>
       <p:ext uri="{BB962C8B-B14F-4D97-AF65-F5344CB8AC3E}">
-        <p14:creationId xmlns:p14="http://schemas.microsoft.com/office/powerpoint/2010/main" val="2142323577"/>
+        <p14:creationId xmlns:p14="http://schemas.microsoft.com/office/powerpoint/2010/main" val="1023567962"/>
       </p:ext>
     </p:extLst>
   </p:cSld>
@@ -37517,7 +37517,7 @@
           <p:cNvPr id="27" name="">
             <a:extLst xmlns:a="http://schemas.openxmlformats.org/drawingml/2006/main">
               <a:ext uri="{FF2B5EF4-FFF2-40B4-BE49-F238E27FC236}">
-                <a16:creationId xmlns:a16="http://schemas.microsoft.com/office/drawing/2014/main" id="{FE457182-B7CA-4436-92D2-C196092DF514}"/>
+                <a16:creationId xmlns:a16="http://schemas.microsoft.com/office/drawing/2014/main" id="{014CB98B-87D0-43C9-8B68-327AFBAAC5B9}"/>
               </a:ext>
             </a:extLst>
           </p:cNvPr>
@@ -37550,7 +37550,7 @@
           <p:cNvPr id="2" name="">
             <a:extLst xmlns:a="http://schemas.openxmlformats.org/drawingml/2006/main">
               <a:ext uri="{FF2B5EF4-FFF2-40B4-BE49-F238E27FC236}">
-                <a16:creationId xmlns:a16="http://schemas.microsoft.com/office/drawing/2014/main" id="{05A92DF7-DADE-4207-B62C-9A285F9B5E83}"/>
+                <a16:creationId xmlns:a16="http://schemas.microsoft.com/office/drawing/2014/main" id="{D5D1DEE3-DFA5-4D5D-A471-2A169A1C1BCA}"/>
               </a:ext>
             </a:extLst>
           </p:cNvPr>
@@ -37581,7 +37581,7 @@
           <p:cNvPr id="3" name="">
             <a:extLst xmlns:a="http://schemas.openxmlformats.org/drawingml/2006/main">
               <a:ext uri="{FF2B5EF4-FFF2-40B4-BE49-F238E27FC236}">
-                <a16:creationId xmlns:a16="http://schemas.microsoft.com/office/drawing/2014/main" id="{0FB1393C-426F-4B0E-B968-A86ADD7DB9A2}"/>
+                <a16:creationId xmlns:a16="http://schemas.microsoft.com/office/drawing/2014/main" id="{19957A53-F72D-42DF-8DEE-AB389BA7D5B1}"/>
               </a:ext>
             </a:extLst>
           </p:cNvPr>
@@ -37633,7 +37633,7 @@
           <p:cNvPr id="4" name="">
             <a:extLst xmlns:a="http://schemas.openxmlformats.org/drawingml/2006/main">
               <a:ext uri="{FF2B5EF4-FFF2-40B4-BE49-F238E27FC236}">
-                <a16:creationId xmlns:a16="http://schemas.microsoft.com/office/drawing/2014/main" id="{A25FC02F-8569-4D69-94FD-E4C72259999B}"/>
+                <a16:creationId xmlns:a16="http://schemas.microsoft.com/office/drawing/2014/main" id="{41634BA8-6A53-481D-86A7-FD74DEE4009B}"/>
               </a:ext>
             </a:extLst>
           </p:cNvPr>
@@ -37685,7 +37685,7 @@
           <p:cNvPr id="5" name="">
             <a:extLst xmlns:a="http://schemas.openxmlformats.org/drawingml/2006/main">
               <a:ext uri="{FF2B5EF4-FFF2-40B4-BE49-F238E27FC236}">
-                <a16:creationId xmlns:a16="http://schemas.microsoft.com/office/drawing/2014/main" id="{85DC0C29-EC7E-44AB-95B0-D9F6D915F034}"/>
+                <a16:creationId xmlns:a16="http://schemas.microsoft.com/office/drawing/2014/main" id="{384198A4-30B7-4FFD-81E7-36D8F21314C3}"/>
               </a:ext>
             </a:extLst>
           </p:cNvPr>
@@ -37720,7 +37720,7 @@
           <p:nvPr/>
         </p:nvPicPr>
         <p:blipFill>
-          <a:blip xmlns:r="http://schemas.openxmlformats.org/officeDocument/2006/relationships" xmlns:a="http://schemas.openxmlformats.org/drawingml/2006/main" r:embed="R33d7cd77b2a24b64"/>
+          <a:blip xmlns:r="http://schemas.openxmlformats.org/officeDocument/2006/relationships" xmlns:a="http://schemas.openxmlformats.org/drawingml/2006/main" r:embed="Re45045615c7e4b49"/>
           <a:stretch xmlns:a="http://schemas.openxmlformats.org/drawingml/2006/main"/>
         </p:blipFill>
         <p:spPr>
@@ -37738,7 +37738,7 @@
           <p:cNvPr id="7" name="">
             <a:extLst xmlns:a="http://schemas.openxmlformats.org/drawingml/2006/main">
               <a:ext uri="{FF2B5EF4-FFF2-40B4-BE49-F238E27FC236}">
-                <a16:creationId xmlns:a16="http://schemas.microsoft.com/office/drawing/2014/main" id="{66B0ABB3-28D8-4297-97DF-E338A762E262}"/>
+                <a16:creationId xmlns:a16="http://schemas.microsoft.com/office/drawing/2014/main" id="{8F549CCB-CFE7-4753-A987-04727F33FFF8}"/>
               </a:ext>
             </a:extLst>
           </p:cNvPr>
@@ -37790,7 +37790,7 @@
           <p:cNvPr id="8" name="">
             <a:extLst xmlns:a="http://schemas.openxmlformats.org/drawingml/2006/main">
               <a:ext uri="{FF2B5EF4-FFF2-40B4-BE49-F238E27FC236}">
-                <a16:creationId xmlns:a16="http://schemas.microsoft.com/office/drawing/2014/main" id="{6BE95BC2-555E-4240-9A22-6ACC742AD440}"/>
+                <a16:creationId xmlns:a16="http://schemas.microsoft.com/office/drawing/2014/main" id="{6D8CD15F-D2C0-4B60-9657-D61054807C54}"/>
               </a:ext>
             </a:extLst>
           </p:cNvPr>
@@ -37842,7 +37842,7 @@
           <p:cNvPr id="9" name="">
             <a:extLst xmlns:a="http://schemas.openxmlformats.org/drawingml/2006/main">
               <a:ext uri="{FF2B5EF4-FFF2-40B4-BE49-F238E27FC236}">
-                <a16:creationId xmlns:a16="http://schemas.microsoft.com/office/drawing/2014/main" id="{2BBF6304-C9E3-44DE-B355-27C4F3B52109}"/>
+                <a16:creationId xmlns:a16="http://schemas.microsoft.com/office/drawing/2014/main" id="{25220DA1-83C2-4FD0-AF51-6D207578FCB6}"/>
               </a:ext>
             </a:extLst>
           </p:cNvPr>
@@ -37894,7 +37894,7 @@
           <p:cNvPr id="10" name="">
             <a:extLst xmlns:a="http://schemas.openxmlformats.org/drawingml/2006/main">
               <a:ext uri="{FF2B5EF4-FFF2-40B4-BE49-F238E27FC236}">
-                <a16:creationId xmlns:a16="http://schemas.microsoft.com/office/drawing/2014/main" id="{3B29106E-EE6D-45FB-AE12-F95292E1D73F}"/>
+                <a16:creationId xmlns:a16="http://schemas.microsoft.com/office/drawing/2014/main" id="{0A6FF2BB-1233-4CF0-AA1D-72E5E58C3783}"/>
               </a:ext>
             </a:extLst>
           </p:cNvPr>
@@ -37946,7 +37946,7 @@
           <p:cNvPr id="11" name="">
             <a:extLst xmlns:a="http://schemas.openxmlformats.org/drawingml/2006/main">
               <a:ext uri="{FF2B5EF4-FFF2-40B4-BE49-F238E27FC236}">
-                <a16:creationId xmlns:a16="http://schemas.microsoft.com/office/drawing/2014/main" id="{2D83D202-9363-4203-8AC8-1B933DEE79C4}"/>
+                <a16:creationId xmlns:a16="http://schemas.microsoft.com/office/drawing/2014/main" id="{DC92F79A-60F3-4B80-8B53-025F30812DA0}"/>
               </a:ext>
             </a:extLst>
           </p:cNvPr>
@@ -37993,10 +37993,10 @@
           <p:nvPr/>
         </p:nvPicPr>
         <p:blipFill>
-          <a:blip xmlns:r="http://schemas.openxmlformats.org/officeDocument/2006/relationships" xmlns:a="http://schemas.openxmlformats.org/drawingml/2006/main" r:embed="R3621a30c54554f85">
+          <a:blip xmlns:r="http://schemas.openxmlformats.org/officeDocument/2006/relationships" xmlns:a="http://schemas.openxmlformats.org/drawingml/2006/main" r:embed="R86627243dd834055">
             <a:extLst>
               <a:ext uri="{96DAC541-7B7A-43D3-8B79-37D633B846F1}">
-                <asvg:svgBlip xmlns:asvg="http://schemas.microsoft.com/office/drawing/2016/SVG/main" r:embed="R68cd9d6067e14089"/>
+                <asvg:svgBlip xmlns:asvg="http://schemas.microsoft.com/office/drawing/2016/SVG/main" r:embed="Rd64c0454fc6a423d"/>
               </a:ext>
             </a:extLst>
           </a:blip>
@@ -38017,7 +38017,7 @@
           <p:cNvPr id="13" name="">
             <a:extLst xmlns:a="http://schemas.openxmlformats.org/drawingml/2006/main">
               <a:ext uri="{FF2B5EF4-FFF2-40B4-BE49-F238E27FC236}">
-                <a16:creationId xmlns:a16="http://schemas.microsoft.com/office/drawing/2014/main" id="{99B86CDF-702F-4937-8952-4EFA3BEBD366}"/>
+                <a16:creationId xmlns:a16="http://schemas.microsoft.com/office/drawing/2014/main" id="{5BEA4EAF-C378-4225-BA8E-88B02AFE5853}"/>
               </a:ext>
             </a:extLst>
           </p:cNvPr>
@@ -38050,7 +38050,7 @@
           <p:cNvPr id="14" name="">
             <a:extLst xmlns:a="http://schemas.openxmlformats.org/drawingml/2006/main">
               <a:ext uri="{FF2B5EF4-FFF2-40B4-BE49-F238E27FC236}">
-                <a16:creationId xmlns:a16="http://schemas.microsoft.com/office/drawing/2014/main" id="{45D4A7E5-1A3D-4DE3-B32B-A6A25CBE66B1}"/>
+                <a16:creationId xmlns:a16="http://schemas.microsoft.com/office/drawing/2014/main" id="{4A0E54C9-FD2A-497D-A103-E4552EFB3D42}"/>
               </a:ext>
             </a:extLst>
           </p:cNvPr>
@@ -38102,7 +38102,7 @@
           <p:cNvPr id="15" name="">
             <a:extLst xmlns:a="http://schemas.openxmlformats.org/drawingml/2006/main">
               <a:ext uri="{FF2B5EF4-FFF2-40B4-BE49-F238E27FC236}">
-                <a16:creationId xmlns:a16="http://schemas.microsoft.com/office/drawing/2014/main" id="{7279E9FD-7157-4946-A431-1C89AA6D713B}"/>
+                <a16:creationId xmlns:a16="http://schemas.microsoft.com/office/drawing/2014/main" id="{BB43A93C-8DA3-4908-B6B3-2F6E49AFEAAD}"/>
               </a:ext>
             </a:extLst>
           </p:cNvPr>
@@ -38135,7 +38135,7 @@
           <p:cNvPr id="16" name="">
             <a:extLst xmlns:a="http://schemas.openxmlformats.org/drawingml/2006/main">
               <a:ext uri="{FF2B5EF4-FFF2-40B4-BE49-F238E27FC236}">
-                <a16:creationId xmlns:a16="http://schemas.microsoft.com/office/drawing/2014/main" id="{B228C190-7B92-4056-90B5-ACAAEC5AF9A0}"/>
+                <a16:creationId xmlns:a16="http://schemas.microsoft.com/office/drawing/2014/main" id="{3C50B9B1-D492-4187-B4A8-E64C8494FCC5}"/>
               </a:ext>
             </a:extLst>
           </p:cNvPr>
@@ -38187,7 +38187,7 @@
           <p:cNvPr id="17" name="">
             <a:extLst xmlns:a="http://schemas.openxmlformats.org/drawingml/2006/main">
               <a:ext uri="{FF2B5EF4-FFF2-40B4-BE49-F238E27FC236}">
-                <a16:creationId xmlns:a16="http://schemas.microsoft.com/office/drawing/2014/main" id="{3FFC3C63-2A52-4EB3-8840-C93D5767B7F6}"/>
+                <a16:creationId xmlns:a16="http://schemas.microsoft.com/office/drawing/2014/main" id="{B45E2728-3319-4E95-918A-E764170D7F63}"/>
               </a:ext>
             </a:extLst>
           </p:cNvPr>
@@ -38220,7 +38220,7 @@
           <p:cNvPr id="18" name="">
             <a:extLst xmlns:a="http://schemas.openxmlformats.org/drawingml/2006/main">
               <a:ext uri="{FF2B5EF4-FFF2-40B4-BE49-F238E27FC236}">
-                <a16:creationId xmlns:a16="http://schemas.microsoft.com/office/drawing/2014/main" id="{334FFAD6-DC3E-4DF8-A3B1-78E0288CDE07}"/>
+                <a16:creationId xmlns:a16="http://schemas.microsoft.com/office/drawing/2014/main" id="{4035CBBF-C985-4CDA-A103-C8199B7C17F4}"/>
               </a:ext>
             </a:extLst>
           </p:cNvPr>
@@ -38272,7 +38272,7 @@
           <p:cNvPr id="19" name="">
             <a:extLst xmlns:a="http://schemas.openxmlformats.org/drawingml/2006/main">
               <a:ext uri="{FF2B5EF4-FFF2-40B4-BE49-F238E27FC236}">
-                <a16:creationId xmlns:a16="http://schemas.microsoft.com/office/drawing/2014/main" id="{699DAD6A-D76C-428C-B854-6A667A2774C9}"/>
+                <a16:creationId xmlns:a16="http://schemas.microsoft.com/office/drawing/2014/main" id="{60DA3E58-CC8D-4869-9A58-A8BEBFE04A54}"/>
               </a:ext>
             </a:extLst>
           </p:cNvPr>
@@ -38324,7 +38324,7 @@
           <p:cNvPr id="20" name="">
             <a:extLst xmlns:a="http://schemas.openxmlformats.org/drawingml/2006/main">
               <a:ext uri="{FF2B5EF4-FFF2-40B4-BE49-F238E27FC236}">
-                <a16:creationId xmlns:a16="http://schemas.microsoft.com/office/drawing/2014/main" id="{CE0255A8-BEA9-407C-AD37-B862B2048CC1}"/>
+                <a16:creationId xmlns:a16="http://schemas.microsoft.com/office/drawing/2014/main" id="{15ED99C0-0518-4415-835E-5FB8B56F8134}"/>
               </a:ext>
             </a:extLst>
           </p:cNvPr>
@@ -38355,7 +38355,7 @@
           <p:cNvPr id="21" name="">
             <a:extLst xmlns:a="http://schemas.openxmlformats.org/drawingml/2006/main">
               <a:ext uri="{FF2B5EF4-FFF2-40B4-BE49-F238E27FC236}">
-                <a16:creationId xmlns:a16="http://schemas.microsoft.com/office/drawing/2014/main" id="{FABE4D33-4D62-4926-9EEE-400312D8F9CA}"/>
+                <a16:creationId xmlns:a16="http://schemas.microsoft.com/office/drawing/2014/main" id="{EC5B029C-D8AC-4631-8580-FFBDBC243565}"/>
               </a:ext>
             </a:extLst>
           </p:cNvPr>
@@ -38407,7 +38407,7 @@
           <p:cNvPr id="22" name="">
             <a:extLst xmlns:a="http://schemas.openxmlformats.org/drawingml/2006/main">
               <a:ext uri="{FF2B5EF4-FFF2-40B4-BE49-F238E27FC236}">
-                <a16:creationId xmlns:a16="http://schemas.microsoft.com/office/drawing/2014/main" id="{9FDDB90F-CA1A-4608-8A15-0D6CC6833C05}"/>
+                <a16:creationId xmlns:a16="http://schemas.microsoft.com/office/drawing/2014/main" id="{2E8396E3-5D08-40D9-8A8E-DFA1C5A622CA}"/>
               </a:ext>
             </a:extLst>
           </p:cNvPr>
@@ -38459,7 +38459,7 @@
           <p:cNvPr id="23" name="">
             <a:extLst xmlns:a="http://schemas.openxmlformats.org/drawingml/2006/main">
               <a:ext uri="{FF2B5EF4-FFF2-40B4-BE49-F238E27FC236}">
-                <a16:creationId xmlns:a16="http://schemas.microsoft.com/office/drawing/2014/main" id="{436E326C-CE9E-408F-82F7-1B4BB93BBDE8}"/>
+                <a16:creationId xmlns:a16="http://schemas.microsoft.com/office/drawing/2014/main" id="{D938A7D1-F182-424F-9FFF-26272A2D648D}"/>
               </a:ext>
             </a:extLst>
           </p:cNvPr>
@@ -38511,7 +38511,7 @@
           <p:cNvPr id="24" name="">
             <a:extLst xmlns:a="http://schemas.openxmlformats.org/drawingml/2006/main">
               <a:ext uri="{FF2B5EF4-FFF2-40B4-BE49-F238E27FC236}">
-                <a16:creationId xmlns:a16="http://schemas.microsoft.com/office/drawing/2014/main" id="{EBC8566C-C993-474C-A0F4-706F4FCEC3D9}"/>
+                <a16:creationId xmlns:a16="http://schemas.microsoft.com/office/drawing/2014/main" id="{D1A72368-C7AB-4B26-8037-2E62E8AA7EB7}"/>
               </a:ext>
             </a:extLst>
           </p:cNvPr>
@@ -38563,7 +38563,7 @@
           <p:cNvPr id="25" name="">
             <a:extLst xmlns:a="http://schemas.openxmlformats.org/drawingml/2006/main">
               <a:ext uri="{FF2B5EF4-FFF2-40B4-BE49-F238E27FC236}">
-                <a16:creationId xmlns:a16="http://schemas.microsoft.com/office/drawing/2014/main" id="{BAA7A44F-56AF-4470-8902-7210BE8FE5AF}"/>
+                <a16:creationId xmlns:a16="http://schemas.microsoft.com/office/drawing/2014/main" id="{50BC45A1-76E0-45FC-B83F-817B73C76B29}"/>
               </a:ext>
             </a:extLst>
           </p:cNvPr>
@@ -38615,7 +38615,7 @@
           <p:cNvPr id="26" name="">
             <a:extLst xmlns:a="http://schemas.openxmlformats.org/drawingml/2006/main">
               <a:ext uri="{FF2B5EF4-FFF2-40B4-BE49-F238E27FC236}">
-                <a16:creationId xmlns:a16="http://schemas.microsoft.com/office/drawing/2014/main" id="{DEE3BF62-4929-498E-8C6A-C30F2058F137}"/>
+                <a16:creationId xmlns:a16="http://schemas.microsoft.com/office/drawing/2014/main" id="{4F46A0FF-1466-4010-8AF9-EE47408D643A}"/>
               </a:ext>
             </a:extLst>
           </p:cNvPr>
@@ -38665,7 +38665,7 @@
     </p:spTree>
     <p:extLst>
       <p:ext uri="{BB962C8B-B14F-4D97-AF65-F5344CB8AC3E}">
-        <p14:creationId xmlns:p14="http://schemas.microsoft.com/office/powerpoint/2010/main" val="1674439531"/>
+        <p14:creationId xmlns:p14="http://schemas.microsoft.com/office/powerpoint/2010/main" val="235853772"/>
       </p:ext>
     </p:extLst>
   </p:cSld>
@@ -38696,7 +38696,7 @@
           <p:cNvPr id="35" name="">
             <a:extLst xmlns:a="http://schemas.openxmlformats.org/drawingml/2006/main">
               <a:ext uri="{FF2B5EF4-FFF2-40B4-BE49-F238E27FC236}">
-                <a16:creationId xmlns:a16="http://schemas.microsoft.com/office/drawing/2014/main" id="{F219D044-5F48-4C75-A1CE-096CFE202568}"/>
+                <a16:creationId xmlns:a16="http://schemas.microsoft.com/office/drawing/2014/main" id="{E52E674F-AECF-4341-97A9-371801AE799C}"/>
               </a:ext>
             </a:extLst>
           </p:cNvPr>
@@ -38729,7 +38729,7 @@
           <p:cNvPr id="2" name="">
             <a:extLst xmlns:a="http://schemas.openxmlformats.org/drawingml/2006/main">
               <a:ext uri="{FF2B5EF4-FFF2-40B4-BE49-F238E27FC236}">
-                <a16:creationId xmlns:a16="http://schemas.microsoft.com/office/drawing/2014/main" id="{913418D6-4580-4377-BBCF-456126696DBA}"/>
+                <a16:creationId xmlns:a16="http://schemas.microsoft.com/office/drawing/2014/main" id="{2002CDF8-5003-4477-BCE8-F5410BC2246D}"/>
               </a:ext>
             </a:extLst>
           </p:cNvPr>
@@ -38760,7 +38760,7 @@
           <p:cNvPr id="3" name="">
             <a:extLst xmlns:a="http://schemas.openxmlformats.org/drawingml/2006/main">
               <a:ext uri="{FF2B5EF4-FFF2-40B4-BE49-F238E27FC236}">
-                <a16:creationId xmlns:a16="http://schemas.microsoft.com/office/drawing/2014/main" id="{ABED5DC5-5B04-4BB1-A351-0C4A06B5A4DC}"/>
+                <a16:creationId xmlns:a16="http://schemas.microsoft.com/office/drawing/2014/main" id="{E3224E49-040B-4841-838B-072FE6CFEDE0}"/>
               </a:ext>
             </a:extLst>
           </p:cNvPr>
@@ -38812,7 +38812,7 @@
           <p:cNvPr id="4" name="">
             <a:extLst xmlns:a="http://schemas.openxmlformats.org/drawingml/2006/main">
               <a:ext uri="{FF2B5EF4-FFF2-40B4-BE49-F238E27FC236}">
-                <a16:creationId xmlns:a16="http://schemas.microsoft.com/office/drawing/2014/main" id="{91FBA498-3AB2-4630-9359-6FEC928AD54D}"/>
+                <a16:creationId xmlns:a16="http://schemas.microsoft.com/office/drawing/2014/main" id="{2B9D0BAE-0F1B-43DC-9615-E6DCFEBC9AE8}"/>
               </a:ext>
             </a:extLst>
           </p:cNvPr>
@@ -38864,7 +38864,7 @@
           <p:cNvPr id="5" name="">
             <a:extLst xmlns:a="http://schemas.openxmlformats.org/drawingml/2006/main">
               <a:ext uri="{FF2B5EF4-FFF2-40B4-BE49-F238E27FC236}">
-                <a16:creationId xmlns:a16="http://schemas.microsoft.com/office/drawing/2014/main" id="{C37CFF4D-7642-4166-90B3-D08FEAF8B48F}"/>
+                <a16:creationId xmlns:a16="http://schemas.microsoft.com/office/drawing/2014/main" id="{35151B3D-1338-415F-A532-F47ADEA1F067}"/>
               </a:ext>
             </a:extLst>
           </p:cNvPr>
@@ -38899,7 +38899,7 @@
           <p:nvPr/>
         </p:nvPicPr>
         <p:blipFill>
-          <a:blip xmlns:r="http://schemas.openxmlformats.org/officeDocument/2006/relationships" xmlns:a="http://schemas.openxmlformats.org/drawingml/2006/main" r:embed="Rbc2084cd96df48b5"/>
+          <a:blip xmlns:r="http://schemas.openxmlformats.org/officeDocument/2006/relationships" xmlns:a="http://schemas.openxmlformats.org/drawingml/2006/main" r:embed="R5a7208c4e1804333"/>
           <a:stretch xmlns:a="http://schemas.openxmlformats.org/drawingml/2006/main"/>
         </p:blipFill>
         <p:spPr>
@@ -38917,7 +38917,7 @@
           <p:cNvPr id="7" name="">
             <a:extLst xmlns:a="http://schemas.openxmlformats.org/drawingml/2006/main">
               <a:ext uri="{FF2B5EF4-FFF2-40B4-BE49-F238E27FC236}">
-                <a16:creationId xmlns:a16="http://schemas.microsoft.com/office/drawing/2014/main" id="{989D0825-1725-414B-B97A-0B44E41AD754}"/>
+                <a16:creationId xmlns:a16="http://schemas.microsoft.com/office/drawing/2014/main" id="{A33E3A9D-67C0-4AFF-B117-1C3FD602F80A}"/>
               </a:ext>
             </a:extLst>
           </p:cNvPr>
@@ -38969,7 +38969,7 @@
           <p:cNvPr id="8" name="">
             <a:extLst xmlns:a="http://schemas.openxmlformats.org/drawingml/2006/main">
               <a:ext uri="{FF2B5EF4-FFF2-40B4-BE49-F238E27FC236}">
-                <a16:creationId xmlns:a16="http://schemas.microsoft.com/office/drawing/2014/main" id="{A8D3A197-4535-44A4-830D-4B0C06346B2E}"/>
+                <a16:creationId xmlns:a16="http://schemas.microsoft.com/office/drawing/2014/main" id="{F50FDACB-7C80-45E0-A383-1BC38F1654F5}"/>
               </a:ext>
             </a:extLst>
           </p:cNvPr>
@@ -39021,7 +39021,7 @@
           <p:cNvPr id="9" name="">
             <a:extLst xmlns:a="http://schemas.openxmlformats.org/drawingml/2006/main">
               <a:ext uri="{FF2B5EF4-FFF2-40B4-BE49-F238E27FC236}">
-                <a16:creationId xmlns:a16="http://schemas.microsoft.com/office/drawing/2014/main" id="{BA284D9A-8F74-45A6-9774-895987CEDD8A}"/>
+                <a16:creationId xmlns:a16="http://schemas.microsoft.com/office/drawing/2014/main" id="{D9E287B2-41E6-46F5-B918-010B851C87A2}"/>
               </a:ext>
             </a:extLst>
           </p:cNvPr>
@@ -39073,7 +39073,7 @@
           <p:cNvPr id="10" name="">
             <a:extLst xmlns:a="http://schemas.openxmlformats.org/drawingml/2006/main">
               <a:ext uri="{FF2B5EF4-FFF2-40B4-BE49-F238E27FC236}">
-                <a16:creationId xmlns:a16="http://schemas.microsoft.com/office/drawing/2014/main" id="{6A251910-BBFB-47DA-A530-82245D3CB4E5}"/>
+                <a16:creationId xmlns:a16="http://schemas.microsoft.com/office/drawing/2014/main" id="{418AC9FA-481A-4D89-AF42-DA464F16744F}"/>
               </a:ext>
             </a:extLst>
           </p:cNvPr>
@@ -39125,7 +39125,7 @@
           <p:cNvPr id="11" name="">
             <a:extLst xmlns:a="http://schemas.openxmlformats.org/drawingml/2006/main">
               <a:ext uri="{FF2B5EF4-FFF2-40B4-BE49-F238E27FC236}">
-                <a16:creationId xmlns:a16="http://schemas.microsoft.com/office/drawing/2014/main" id="{FD4F2B59-50B1-4C8C-9BE3-2171CA03E59E}"/>
+                <a16:creationId xmlns:a16="http://schemas.microsoft.com/office/drawing/2014/main" id="{471358A0-2CA9-4369-87D7-0BF4712EB9EC}"/>
               </a:ext>
             </a:extLst>
           </p:cNvPr>
@@ -39172,10 +39172,10 @@
           <p:nvPr/>
         </p:nvPicPr>
         <p:blipFill>
-          <a:blip xmlns:r="http://schemas.openxmlformats.org/officeDocument/2006/relationships" xmlns:a="http://schemas.openxmlformats.org/drawingml/2006/main" r:embed="R7d88c87dfb504f44">
+          <a:blip xmlns:r="http://schemas.openxmlformats.org/officeDocument/2006/relationships" xmlns:a="http://schemas.openxmlformats.org/drawingml/2006/main" r:embed="Ra27683dd3af34ef8">
             <a:extLst>
               <a:ext uri="{96DAC541-7B7A-43D3-8B79-37D633B846F1}">
-                <asvg:svgBlip xmlns:asvg="http://schemas.microsoft.com/office/drawing/2016/SVG/main" r:embed="R41f183d028e445cd"/>
+                <asvg:svgBlip xmlns:asvg="http://schemas.microsoft.com/office/drawing/2016/SVG/main" r:embed="Rab1d5bcbb32d4fee"/>
               </a:ext>
             </a:extLst>
           </a:blip>
@@ -39196,7 +39196,7 @@
           <p:cNvPr id="13" name="">
             <a:extLst xmlns:a="http://schemas.openxmlformats.org/drawingml/2006/main">
               <a:ext uri="{FF2B5EF4-FFF2-40B4-BE49-F238E27FC236}">
-                <a16:creationId xmlns:a16="http://schemas.microsoft.com/office/drawing/2014/main" id="{52226B4B-54AB-4658-BD4E-1E068EC01246}"/>
+                <a16:creationId xmlns:a16="http://schemas.microsoft.com/office/drawing/2014/main" id="{093211BC-7525-42D0-8FA0-79234FC3D8D3}"/>
               </a:ext>
             </a:extLst>
           </p:cNvPr>
@@ -39229,7 +39229,7 @@
           <p:cNvPr id="14" name="">
             <a:extLst xmlns:a="http://schemas.openxmlformats.org/drawingml/2006/main">
               <a:ext uri="{FF2B5EF4-FFF2-40B4-BE49-F238E27FC236}">
-                <a16:creationId xmlns:a16="http://schemas.microsoft.com/office/drawing/2014/main" id="{A08E29E6-5948-443C-9677-C14C091DEF66}"/>
+                <a16:creationId xmlns:a16="http://schemas.microsoft.com/office/drawing/2014/main" id="{7D45A0F0-D901-448C-A04D-A6D1491925A4}"/>
               </a:ext>
             </a:extLst>
           </p:cNvPr>
@@ -39281,7 +39281,7 @@
           <p:cNvPr id="15" name="">
             <a:extLst xmlns:a="http://schemas.openxmlformats.org/drawingml/2006/main">
               <a:ext uri="{FF2B5EF4-FFF2-40B4-BE49-F238E27FC236}">
-                <a16:creationId xmlns:a16="http://schemas.microsoft.com/office/drawing/2014/main" id="{32AC8864-3738-4A95-B626-51584A183374}"/>
+                <a16:creationId xmlns:a16="http://schemas.microsoft.com/office/drawing/2014/main" id="{01195736-ABD3-46B4-B136-BD152C5EFE40}"/>
               </a:ext>
             </a:extLst>
           </p:cNvPr>
@@ -39314,7 +39314,7 @@
           <p:cNvPr id="16" name="">
             <a:extLst xmlns:a="http://schemas.openxmlformats.org/drawingml/2006/main">
               <a:ext uri="{FF2B5EF4-FFF2-40B4-BE49-F238E27FC236}">
-                <a16:creationId xmlns:a16="http://schemas.microsoft.com/office/drawing/2014/main" id="{386C3530-EA3E-4B1D-90EC-F8CD46769D2E}"/>
+                <a16:creationId xmlns:a16="http://schemas.microsoft.com/office/drawing/2014/main" id="{7C3F1F2A-5EDA-4C46-AED6-64AEEB64C7A8}"/>
               </a:ext>
             </a:extLst>
           </p:cNvPr>
@@ -39366,7 +39366,7 @@
           <p:cNvPr id="17" name="">
             <a:extLst xmlns:a="http://schemas.openxmlformats.org/drawingml/2006/main">
               <a:ext uri="{FF2B5EF4-FFF2-40B4-BE49-F238E27FC236}">
-                <a16:creationId xmlns:a16="http://schemas.microsoft.com/office/drawing/2014/main" id="{58369AF6-F84F-41D2-A588-599F0506844B}"/>
+                <a16:creationId xmlns:a16="http://schemas.microsoft.com/office/drawing/2014/main" id="{1E506D67-A855-4376-8D7A-220752529760}"/>
               </a:ext>
             </a:extLst>
           </p:cNvPr>
@@ -39399,7 +39399,7 @@
           <p:cNvPr id="18" name="">
             <a:extLst xmlns:a="http://schemas.openxmlformats.org/drawingml/2006/main">
               <a:ext uri="{FF2B5EF4-FFF2-40B4-BE49-F238E27FC236}">
-                <a16:creationId xmlns:a16="http://schemas.microsoft.com/office/drawing/2014/main" id="{BC6B3A08-21F7-4AB6-8292-1AB6C5E14249}"/>
+                <a16:creationId xmlns:a16="http://schemas.microsoft.com/office/drawing/2014/main" id="{E968BADD-2DD3-453E-9F97-61AC75CA4BBD}"/>
               </a:ext>
             </a:extLst>
           </p:cNvPr>
@@ -39451,7 +39451,7 @@
           <p:cNvPr id="19" name="">
             <a:extLst xmlns:a="http://schemas.openxmlformats.org/drawingml/2006/main">
               <a:ext uri="{FF2B5EF4-FFF2-40B4-BE49-F238E27FC236}">
-                <a16:creationId xmlns:a16="http://schemas.microsoft.com/office/drawing/2014/main" id="{0B58978A-474F-435A-9F34-93A7AC0901A6}"/>
+                <a16:creationId xmlns:a16="http://schemas.microsoft.com/office/drawing/2014/main" id="{53FA660D-EB21-4185-838C-C8CC4F4CB485}"/>
               </a:ext>
             </a:extLst>
           </p:cNvPr>
@@ -39484,7 +39484,7 @@
           <p:cNvPr id="20" name="">
             <a:extLst xmlns:a="http://schemas.openxmlformats.org/drawingml/2006/main">
               <a:ext uri="{FF2B5EF4-FFF2-40B4-BE49-F238E27FC236}">
-                <a16:creationId xmlns:a16="http://schemas.microsoft.com/office/drawing/2014/main" id="{D314880B-9CB9-412A-B2FF-76AFC75998EA}"/>
+                <a16:creationId xmlns:a16="http://schemas.microsoft.com/office/drawing/2014/main" id="{F28C0B5A-4E60-497E-AC03-7996B889645C}"/>
               </a:ext>
             </a:extLst>
           </p:cNvPr>
@@ -39536,7 +39536,7 @@
           <p:cNvPr id="21" name="">
             <a:extLst xmlns:a="http://schemas.openxmlformats.org/drawingml/2006/main">
               <a:ext uri="{FF2B5EF4-FFF2-40B4-BE49-F238E27FC236}">
-                <a16:creationId xmlns:a16="http://schemas.microsoft.com/office/drawing/2014/main" id="{31038E3D-375D-4064-8119-A81FC6BA23C1}"/>
+                <a16:creationId xmlns:a16="http://schemas.microsoft.com/office/drawing/2014/main" id="{ADAEEC3D-32CE-472D-B9C3-BC9C2FF5248E}"/>
               </a:ext>
             </a:extLst>
           </p:cNvPr>
@@ -39569,7 +39569,7 @@
           <p:cNvPr id="22" name="">
             <a:extLst xmlns:a="http://schemas.openxmlformats.org/drawingml/2006/main">
               <a:ext uri="{FF2B5EF4-FFF2-40B4-BE49-F238E27FC236}">
-                <a16:creationId xmlns:a16="http://schemas.microsoft.com/office/drawing/2014/main" id="{C81DD348-0E51-4FC2-BD72-E5B06436BC23}"/>
+                <a16:creationId xmlns:a16="http://schemas.microsoft.com/office/drawing/2014/main" id="{FD86F080-9AE0-429D-AD67-B7FC867799F1}"/>
               </a:ext>
             </a:extLst>
           </p:cNvPr>
@@ -39621,7 +39621,7 @@
           <p:cNvPr id="23" name="">
             <a:extLst xmlns:a="http://schemas.openxmlformats.org/drawingml/2006/main">
               <a:ext uri="{FF2B5EF4-FFF2-40B4-BE49-F238E27FC236}">
-                <a16:creationId xmlns:a16="http://schemas.microsoft.com/office/drawing/2014/main" id="{9BCEB495-DDAB-4E92-A1A8-C1B30B7B3876}"/>
+                <a16:creationId xmlns:a16="http://schemas.microsoft.com/office/drawing/2014/main" id="{223FF203-2190-422D-BC85-2901D4258C6C}"/>
               </a:ext>
             </a:extLst>
           </p:cNvPr>
@@ -39654,7 +39654,7 @@
           <p:cNvPr id="24" name="">
             <a:extLst xmlns:a="http://schemas.openxmlformats.org/drawingml/2006/main">
               <a:ext uri="{FF2B5EF4-FFF2-40B4-BE49-F238E27FC236}">
-                <a16:creationId xmlns:a16="http://schemas.microsoft.com/office/drawing/2014/main" id="{F95DAE35-1A11-445B-9639-6D5165BA28FF}"/>
+                <a16:creationId xmlns:a16="http://schemas.microsoft.com/office/drawing/2014/main" id="{29053672-E232-41F1-8995-5A7B85A25E80}"/>
               </a:ext>
             </a:extLst>
           </p:cNvPr>
@@ -39706,7 +39706,7 @@
           <p:cNvPr id="25" name="">
             <a:extLst xmlns:a="http://schemas.openxmlformats.org/drawingml/2006/main">
               <a:ext uri="{FF2B5EF4-FFF2-40B4-BE49-F238E27FC236}">
-                <a16:creationId xmlns:a16="http://schemas.microsoft.com/office/drawing/2014/main" id="{2E0A2E67-283A-4A1D-8044-B4EB83E0820F}"/>
+                <a16:creationId xmlns:a16="http://schemas.microsoft.com/office/drawing/2014/main" id="{AC9E7A99-700C-4642-8C30-6F067BEB3401}"/>
               </a:ext>
             </a:extLst>
           </p:cNvPr>
@@ -39739,7 +39739,7 @@
           <p:cNvPr id="26" name="">
             <a:extLst xmlns:a="http://schemas.openxmlformats.org/drawingml/2006/main">
               <a:ext uri="{FF2B5EF4-FFF2-40B4-BE49-F238E27FC236}">
-                <a16:creationId xmlns:a16="http://schemas.microsoft.com/office/drawing/2014/main" id="{B22BB3FD-C567-456B-98D0-3CDBD613605A}"/>
+                <a16:creationId xmlns:a16="http://schemas.microsoft.com/office/drawing/2014/main" id="{B073B857-68FB-4357-8491-9DE48D62BFC3}"/>
               </a:ext>
             </a:extLst>
           </p:cNvPr>
@@ -39791,7 +39791,7 @@
           <p:cNvPr id="27" name="">
             <a:extLst xmlns:a="http://schemas.openxmlformats.org/drawingml/2006/main">
               <a:ext uri="{FF2B5EF4-FFF2-40B4-BE49-F238E27FC236}">
-                <a16:creationId xmlns:a16="http://schemas.microsoft.com/office/drawing/2014/main" id="{8F89928C-0D23-49F1-BCE7-230A015A8275}"/>
+                <a16:creationId xmlns:a16="http://schemas.microsoft.com/office/drawing/2014/main" id="{38649094-D304-4362-9FFD-DE501CF7608D}"/>
               </a:ext>
             </a:extLst>
           </p:cNvPr>
@@ -39824,7 +39824,7 @@
           <p:cNvPr id="28" name="">
             <a:extLst xmlns:a="http://schemas.openxmlformats.org/drawingml/2006/main">
               <a:ext uri="{FF2B5EF4-FFF2-40B4-BE49-F238E27FC236}">
-                <a16:creationId xmlns:a16="http://schemas.microsoft.com/office/drawing/2014/main" id="{90BB2A55-778C-4E31-B260-5F848E457198}"/>
+                <a16:creationId xmlns:a16="http://schemas.microsoft.com/office/drawing/2014/main" id="{D39BECB0-538B-4D39-AD1B-420F8407614D}"/>
               </a:ext>
             </a:extLst>
           </p:cNvPr>
@@ -39876,7 +39876,7 @@
           <p:cNvPr id="29" name="">
             <a:extLst xmlns:a="http://schemas.openxmlformats.org/drawingml/2006/main">
               <a:ext uri="{FF2B5EF4-FFF2-40B4-BE49-F238E27FC236}">
-                <a16:creationId xmlns:a16="http://schemas.microsoft.com/office/drawing/2014/main" id="{B78B96B0-171F-442C-B9FB-B2EC61862239}"/>
+                <a16:creationId xmlns:a16="http://schemas.microsoft.com/office/drawing/2014/main" id="{92052391-93C7-45C4-9D9D-2CD99AC1906E}"/>
               </a:ext>
             </a:extLst>
           </p:cNvPr>
@@ -39909,7 +39909,7 @@
           <p:cNvPr id="30" name="">
             <a:extLst xmlns:a="http://schemas.openxmlformats.org/drawingml/2006/main">
               <a:ext uri="{FF2B5EF4-FFF2-40B4-BE49-F238E27FC236}">
-                <a16:creationId xmlns:a16="http://schemas.microsoft.com/office/drawing/2014/main" id="{31A13251-8C64-4571-8F56-A01FF2530C15}"/>
+                <a16:creationId xmlns:a16="http://schemas.microsoft.com/office/drawing/2014/main" id="{E52C63EF-A21F-4D56-9421-D96494886035}"/>
               </a:ext>
             </a:extLst>
           </p:cNvPr>
@@ -39961,7 +39961,7 @@
           <p:cNvPr id="31" name="">
             <a:extLst xmlns:a="http://schemas.openxmlformats.org/drawingml/2006/main">
               <a:ext uri="{FF2B5EF4-FFF2-40B4-BE49-F238E27FC236}">
-                <a16:creationId xmlns:a16="http://schemas.microsoft.com/office/drawing/2014/main" id="{8BE506C7-003E-435D-B9D1-20E6DA3355F2}"/>
+                <a16:creationId xmlns:a16="http://schemas.microsoft.com/office/drawing/2014/main" id="{FCBA1782-98AB-4196-8C1D-D90D05BAC0DF}"/>
               </a:ext>
             </a:extLst>
           </p:cNvPr>
@@ -39994,7 +39994,7 @@
           <p:cNvPr id="32" name="">
             <a:extLst xmlns:a="http://schemas.openxmlformats.org/drawingml/2006/main">
               <a:ext uri="{FF2B5EF4-FFF2-40B4-BE49-F238E27FC236}">
-                <a16:creationId xmlns:a16="http://schemas.microsoft.com/office/drawing/2014/main" id="{BD4C75A9-98F7-4289-856A-F5BB69AF2AAE}"/>
+                <a16:creationId xmlns:a16="http://schemas.microsoft.com/office/drawing/2014/main" id="{6453817E-DCD7-41AC-830F-D53264F3F96A}"/>
               </a:ext>
             </a:extLst>
           </p:cNvPr>
@@ -40046,7 +40046,7 @@
           <p:cNvPr id="33" name="">
             <a:extLst xmlns:a="http://schemas.openxmlformats.org/drawingml/2006/main">
               <a:ext uri="{FF2B5EF4-FFF2-40B4-BE49-F238E27FC236}">
-                <a16:creationId xmlns:a16="http://schemas.microsoft.com/office/drawing/2014/main" id="{AD3DD79C-8ED4-44E8-AE3F-1A2C7A3D8F64}"/>
+                <a16:creationId xmlns:a16="http://schemas.microsoft.com/office/drawing/2014/main" id="{47C288D4-61C1-48A9-957B-FDBFA367BB10}"/>
               </a:ext>
             </a:extLst>
           </p:cNvPr>
@@ -40079,7 +40079,7 @@
           <p:cNvPr id="34" name="">
             <a:extLst xmlns:a="http://schemas.openxmlformats.org/drawingml/2006/main">
               <a:ext uri="{FF2B5EF4-FFF2-40B4-BE49-F238E27FC236}">
-                <a16:creationId xmlns:a16="http://schemas.microsoft.com/office/drawing/2014/main" id="{B66400A7-4AD3-4346-B61B-FE14D4CFD6CE}"/>
+                <a16:creationId xmlns:a16="http://schemas.microsoft.com/office/drawing/2014/main" id="{70054149-AAA5-4EE8-B009-41539F748579}"/>
               </a:ext>
             </a:extLst>
           </p:cNvPr>
@@ -40129,7 +40129,7 @@
     </p:spTree>
     <p:extLst>
       <p:ext uri="{BB962C8B-B14F-4D97-AF65-F5344CB8AC3E}">
-        <p14:creationId xmlns:p14="http://schemas.microsoft.com/office/powerpoint/2010/main" val="1583903107"/>
+        <p14:creationId xmlns:p14="http://schemas.microsoft.com/office/powerpoint/2010/main" val="1143714797"/>
       </p:ext>
     </p:extLst>
   </p:cSld>
@@ -40160,7 +40160,7 @@
           <p:cNvPr id="102" name="">
             <a:extLst xmlns:a="http://schemas.openxmlformats.org/drawingml/2006/main">
               <a:ext uri="{FF2B5EF4-FFF2-40B4-BE49-F238E27FC236}">
-                <a16:creationId xmlns:a16="http://schemas.microsoft.com/office/drawing/2014/main" id="{3A73CA88-658B-417E-AD41-E0D1CCF7BC5F}"/>
+                <a16:creationId xmlns:a16="http://schemas.microsoft.com/office/drawing/2014/main" id="{2827059D-DA16-4A55-A0C7-3884544B31CB}"/>
               </a:ext>
             </a:extLst>
           </p:cNvPr>
@@ -40193,7 +40193,7 @@
           <p:cNvPr id="2" name="">
             <a:extLst xmlns:a="http://schemas.openxmlformats.org/drawingml/2006/main">
               <a:ext uri="{FF2B5EF4-FFF2-40B4-BE49-F238E27FC236}">
-                <a16:creationId xmlns:a16="http://schemas.microsoft.com/office/drawing/2014/main" id="{51CC2E9D-9027-4F71-87BE-B4A0F2871F54}"/>
+                <a16:creationId xmlns:a16="http://schemas.microsoft.com/office/drawing/2014/main" id="{C30E670C-757F-4AE9-9F3B-F164F61AA53D}"/>
               </a:ext>
             </a:extLst>
           </p:cNvPr>
@@ -40224,7 +40224,7 @@
           <p:cNvPr id="3" name="">
             <a:extLst xmlns:a="http://schemas.openxmlformats.org/drawingml/2006/main">
               <a:ext uri="{FF2B5EF4-FFF2-40B4-BE49-F238E27FC236}">
-                <a16:creationId xmlns:a16="http://schemas.microsoft.com/office/drawing/2014/main" id="{184BFADE-39B8-4ED5-ADD2-2802EA29624D}"/>
+                <a16:creationId xmlns:a16="http://schemas.microsoft.com/office/drawing/2014/main" id="{3F54FA52-0BA3-4042-9B9B-F44C47228181}"/>
               </a:ext>
             </a:extLst>
           </p:cNvPr>
@@ -40276,7 +40276,7 @@
           <p:cNvPr id="4" name="">
             <a:extLst xmlns:a="http://schemas.openxmlformats.org/drawingml/2006/main">
               <a:ext uri="{FF2B5EF4-FFF2-40B4-BE49-F238E27FC236}">
-                <a16:creationId xmlns:a16="http://schemas.microsoft.com/office/drawing/2014/main" id="{31489109-9190-4177-862A-F19DD1693732}"/>
+                <a16:creationId xmlns:a16="http://schemas.microsoft.com/office/drawing/2014/main" id="{503DF59E-6946-4455-9BAC-0CBD2E357A78}"/>
               </a:ext>
             </a:extLst>
           </p:cNvPr>
@@ -40328,7 +40328,7 @@
           <p:cNvPr id="5" name="">
             <a:extLst xmlns:a="http://schemas.openxmlformats.org/drawingml/2006/main">
               <a:ext uri="{FF2B5EF4-FFF2-40B4-BE49-F238E27FC236}">
-                <a16:creationId xmlns:a16="http://schemas.microsoft.com/office/drawing/2014/main" id="{A6389772-2903-4625-A7C4-EBFB88F1A158}"/>
+                <a16:creationId xmlns:a16="http://schemas.microsoft.com/office/drawing/2014/main" id="{FC978C74-A5D6-4C05-B14F-B3F447312A6D}"/>
               </a:ext>
             </a:extLst>
           </p:cNvPr>
@@ -40363,7 +40363,7 @@
           <p:nvPr/>
         </p:nvPicPr>
         <p:blipFill>
-          <a:blip xmlns:r="http://schemas.openxmlformats.org/officeDocument/2006/relationships" xmlns:a="http://schemas.openxmlformats.org/drawingml/2006/main" r:embed="Rf5c2d78a29b0422d"/>
+          <a:blip xmlns:r="http://schemas.openxmlformats.org/officeDocument/2006/relationships" xmlns:a="http://schemas.openxmlformats.org/drawingml/2006/main" r:embed="Rb6cca1e198cb49f2"/>
           <a:stretch xmlns:a="http://schemas.openxmlformats.org/drawingml/2006/main"/>
         </p:blipFill>
         <p:spPr>
@@ -40381,7 +40381,7 @@
           <p:cNvPr id="7" name="">
             <a:extLst xmlns:a="http://schemas.openxmlformats.org/drawingml/2006/main">
               <a:ext uri="{FF2B5EF4-FFF2-40B4-BE49-F238E27FC236}">
-                <a16:creationId xmlns:a16="http://schemas.microsoft.com/office/drawing/2014/main" id="{D1468EBC-C84E-4D85-9763-F01009481028}"/>
+                <a16:creationId xmlns:a16="http://schemas.microsoft.com/office/drawing/2014/main" id="{C7600164-E738-4A51-98D4-DDFB48F87640}"/>
               </a:ext>
             </a:extLst>
           </p:cNvPr>
@@ -40433,7 +40433,7 @@
           <p:cNvPr id="8" name="">
             <a:extLst xmlns:a="http://schemas.openxmlformats.org/drawingml/2006/main">
               <a:ext uri="{FF2B5EF4-FFF2-40B4-BE49-F238E27FC236}">
-                <a16:creationId xmlns:a16="http://schemas.microsoft.com/office/drawing/2014/main" id="{CDF036F7-4622-43CB-86F4-D5DA9F188E50}"/>
+                <a16:creationId xmlns:a16="http://schemas.microsoft.com/office/drawing/2014/main" id="{D3CDE7BB-A262-4B41-AA00-75B85DACB856}"/>
               </a:ext>
             </a:extLst>
           </p:cNvPr>
@@ -40485,7 +40485,7 @@
           <p:cNvPr id="9" name="">
             <a:extLst xmlns:a="http://schemas.openxmlformats.org/drawingml/2006/main">
               <a:ext uri="{FF2B5EF4-FFF2-40B4-BE49-F238E27FC236}">
-                <a16:creationId xmlns:a16="http://schemas.microsoft.com/office/drawing/2014/main" id="{730FA953-774D-4A69-8C05-52BCC15E7929}"/>
+                <a16:creationId xmlns:a16="http://schemas.microsoft.com/office/drawing/2014/main" id="{9DB0159C-0A3E-4889-B2E8-676EF2BB5FE3}"/>
               </a:ext>
             </a:extLst>
           </p:cNvPr>
@@ -40537,7 +40537,7 @@
           <p:cNvPr id="10" name="">
             <a:extLst xmlns:a="http://schemas.openxmlformats.org/drawingml/2006/main">
               <a:ext uri="{FF2B5EF4-FFF2-40B4-BE49-F238E27FC236}">
-                <a16:creationId xmlns:a16="http://schemas.microsoft.com/office/drawing/2014/main" id="{451A2AE6-6992-4191-9B9D-4A2D9483D91D}"/>
+                <a16:creationId xmlns:a16="http://schemas.microsoft.com/office/drawing/2014/main" id="{E2AB6BBE-47FC-41AB-AC91-83B903E1F8BE}"/>
               </a:ext>
             </a:extLst>
           </p:cNvPr>
@@ -40589,7 +40589,7 @@
           <p:cNvPr id="11" name="">
             <a:extLst xmlns:a="http://schemas.openxmlformats.org/drawingml/2006/main">
               <a:ext uri="{FF2B5EF4-FFF2-40B4-BE49-F238E27FC236}">
-                <a16:creationId xmlns:a16="http://schemas.microsoft.com/office/drawing/2014/main" id="{85D8501F-45D8-45FC-84FE-F049FE031903}"/>
+                <a16:creationId xmlns:a16="http://schemas.microsoft.com/office/drawing/2014/main" id="{DA182499-04A6-4EE7-BFD8-E8E7DAB5DCEF}"/>
               </a:ext>
             </a:extLst>
           </p:cNvPr>
@@ -40620,7 +40620,7 @@
           <p:cNvPr id="12" name="">
             <a:extLst xmlns:a="http://schemas.openxmlformats.org/drawingml/2006/main">
               <a:ext uri="{FF2B5EF4-FFF2-40B4-BE49-F238E27FC236}">
-                <a16:creationId xmlns:a16="http://schemas.microsoft.com/office/drawing/2014/main" id="{ED682A93-79AC-4977-97A4-9631D2782C66}"/>
+                <a16:creationId xmlns:a16="http://schemas.microsoft.com/office/drawing/2014/main" id="{B7452D91-D7D3-4C38-9E2C-325D5F974D7D}"/>
               </a:ext>
             </a:extLst>
           </p:cNvPr>
@@ -40651,7 +40651,7 @@
           <p:cNvPr id="13" name="">
             <a:extLst xmlns:a="http://schemas.openxmlformats.org/drawingml/2006/main">
               <a:ext uri="{FF2B5EF4-FFF2-40B4-BE49-F238E27FC236}">
-                <a16:creationId xmlns:a16="http://schemas.microsoft.com/office/drawing/2014/main" id="{0AFA6D0A-28A3-46DC-AF2F-3F54982BA08E}"/>
+                <a16:creationId xmlns:a16="http://schemas.microsoft.com/office/drawing/2014/main" id="{6A6A541A-F8C5-4987-B314-7736AE9790F7}"/>
               </a:ext>
             </a:extLst>
           </p:cNvPr>
@@ -40703,7 +40703,7 @@
           <p:cNvPr id="14" name="">
             <a:extLst xmlns:a="http://schemas.openxmlformats.org/drawingml/2006/main">
               <a:ext uri="{FF2B5EF4-FFF2-40B4-BE49-F238E27FC236}">
-                <a16:creationId xmlns:a16="http://schemas.microsoft.com/office/drawing/2014/main" id="{99A1E5B4-DB76-4B20-A48C-4E23F5B19351}"/>
+                <a16:creationId xmlns:a16="http://schemas.microsoft.com/office/drawing/2014/main" id="{5A3ED03E-CF24-4FDE-8FEB-17FDDAB2703F}"/>
               </a:ext>
             </a:extLst>
           </p:cNvPr>
@@ -40755,7 +40755,7 @@
           <p:cNvPr id="15" name="">
             <a:extLst xmlns:a="http://schemas.openxmlformats.org/drawingml/2006/main">
               <a:ext uri="{FF2B5EF4-FFF2-40B4-BE49-F238E27FC236}">
-                <a16:creationId xmlns:a16="http://schemas.microsoft.com/office/drawing/2014/main" id="{EC763B11-8BFA-4FC3-95D3-24E9BF21758E}"/>
+                <a16:creationId xmlns:a16="http://schemas.microsoft.com/office/drawing/2014/main" id="{379C03BD-E4E8-45D4-88EA-23636965C4FF}"/>
               </a:ext>
             </a:extLst>
           </p:cNvPr>
@@ -40807,7 +40807,7 @@
           <p:cNvPr id="16" name="">
             <a:extLst xmlns:a="http://schemas.openxmlformats.org/drawingml/2006/main">
               <a:ext uri="{FF2B5EF4-FFF2-40B4-BE49-F238E27FC236}">
-                <a16:creationId xmlns:a16="http://schemas.microsoft.com/office/drawing/2014/main" id="{760A7C5A-DE84-4C55-AFF0-6A0A43FF6603}"/>
+                <a16:creationId xmlns:a16="http://schemas.microsoft.com/office/drawing/2014/main" id="{6589B2BA-D73E-4280-8815-66B8CAE85F10}"/>
               </a:ext>
             </a:extLst>
           </p:cNvPr>
@@ -40859,7 +40859,7 @@
           <p:cNvPr id="17" name="">
             <a:extLst xmlns:a="http://schemas.openxmlformats.org/drawingml/2006/main">
               <a:ext uri="{FF2B5EF4-FFF2-40B4-BE49-F238E27FC236}">
-                <a16:creationId xmlns:a16="http://schemas.microsoft.com/office/drawing/2014/main" id="{F7363FA8-C582-4283-8E21-5216A4CE2C4E}"/>
+                <a16:creationId xmlns:a16="http://schemas.microsoft.com/office/drawing/2014/main" id="{951759B5-9E90-48BB-B3D8-8CD3ECDDBE89}"/>
               </a:ext>
             </a:extLst>
           </p:cNvPr>
@@ -40911,7 +40911,7 @@
           <p:cNvPr id="18" name="">
             <a:extLst xmlns:a="http://schemas.openxmlformats.org/drawingml/2006/main">
               <a:ext uri="{FF2B5EF4-FFF2-40B4-BE49-F238E27FC236}">
-                <a16:creationId xmlns:a16="http://schemas.microsoft.com/office/drawing/2014/main" id="{C3CB609A-38AC-48C8-8CF2-7DCF44C426EA}"/>
+                <a16:creationId xmlns:a16="http://schemas.microsoft.com/office/drawing/2014/main" id="{930BC32F-95D9-42CE-AC98-105B5E85168B}"/>
               </a:ext>
             </a:extLst>
           </p:cNvPr>
@@ -40942,7 +40942,7 @@
           <p:cNvPr id="19" name="">
             <a:extLst xmlns:a="http://schemas.openxmlformats.org/drawingml/2006/main">
               <a:ext uri="{FF2B5EF4-FFF2-40B4-BE49-F238E27FC236}">
-                <a16:creationId xmlns:a16="http://schemas.microsoft.com/office/drawing/2014/main" id="{3211692B-717E-42F8-B887-33892448C147}"/>
+                <a16:creationId xmlns:a16="http://schemas.microsoft.com/office/drawing/2014/main" id="{B8A97AFD-A9FF-432B-9AE2-3CF62450415D}"/>
               </a:ext>
             </a:extLst>
           </p:cNvPr>
@@ -40994,7 +40994,7 @@
           <p:cNvPr id="20" name="">
             <a:extLst xmlns:a="http://schemas.openxmlformats.org/drawingml/2006/main">
               <a:ext uri="{FF2B5EF4-FFF2-40B4-BE49-F238E27FC236}">
-                <a16:creationId xmlns:a16="http://schemas.microsoft.com/office/drawing/2014/main" id="{4672FF8A-6BA7-4D20-B858-DBBAD6AF3E31}"/>
+                <a16:creationId xmlns:a16="http://schemas.microsoft.com/office/drawing/2014/main" id="{11F12A55-60D4-4D46-B678-05D09A35A9C4}"/>
               </a:ext>
             </a:extLst>
           </p:cNvPr>
@@ -41046,7 +41046,7 @@
           <p:cNvPr id="21" name="">
             <a:extLst xmlns:a="http://schemas.openxmlformats.org/drawingml/2006/main">
               <a:ext uri="{FF2B5EF4-FFF2-40B4-BE49-F238E27FC236}">
-                <a16:creationId xmlns:a16="http://schemas.microsoft.com/office/drawing/2014/main" id="{73E2D850-8102-4B3B-A85D-51F74A18128B}"/>
+                <a16:creationId xmlns:a16="http://schemas.microsoft.com/office/drawing/2014/main" id="{D6791801-8464-4D0B-8A01-3DF8B7B7271F}"/>
               </a:ext>
             </a:extLst>
           </p:cNvPr>
@@ -41098,7 +41098,7 @@
           <p:cNvPr id="22" name="">
             <a:extLst xmlns:a="http://schemas.openxmlformats.org/drawingml/2006/main">
               <a:ext uri="{FF2B5EF4-FFF2-40B4-BE49-F238E27FC236}">
-                <a16:creationId xmlns:a16="http://schemas.microsoft.com/office/drawing/2014/main" id="{10C9BB5D-EB46-42F3-B92E-C81B85CAAE2C}"/>
+                <a16:creationId xmlns:a16="http://schemas.microsoft.com/office/drawing/2014/main" id="{220C1415-7614-4647-A876-832F74DAB9EA}"/>
               </a:ext>
             </a:extLst>
           </p:cNvPr>
@@ -41150,7 +41150,7 @@
           <p:cNvPr id="23" name="">
             <a:extLst xmlns:a="http://schemas.openxmlformats.org/drawingml/2006/main">
               <a:ext uri="{FF2B5EF4-FFF2-40B4-BE49-F238E27FC236}">
-                <a16:creationId xmlns:a16="http://schemas.microsoft.com/office/drawing/2014/main" id="{4D16714A-72F2-4DB5-AC2D-F376B1C04107}"/>
+                <a16:creationId xmlns:a16="http://schemas.microsoft.com/office/drawing/2014/main" id="{FFF1134E-A1BD-4300-A99B-A7D5A9171A54}"/>
               </a:ext>
             </a:extLst>
           </p:cNvPr>
@@ -41202,7 +41202,7 @@
           <p:cNvPr id="24" name="">
             <a:extLst xmlns:a="http://schemas.openxmlformats.org/drawingml/2006/main">
               <a:ext uri="{FF2B5EF4-FFF2-40B4-BE49-F238E27FC236}">
-                <a16:creationId xmlns:a16="http://schemas.microsoft.com/office/drawing/2014/main" id="{61A14CE1-F008-40CC-8E5F-14D61F81E13D}"/>
+                <a16:creationId xmlns:a16="http://schemas.microsoft.com/office/drawing/2014/main" id="{4E96C176-36D7-4C19-AFDA-6AE065485153}"/>
               </a:ext>
             </a:extLst>
           </p:cNvPr>
@@ -41233,7 +41233,7 @@
           <p:cNvPr id="25" name="">
             <a:extLst xmlns:a="http://schemas.openxmlformats.org/drawingml/2006/main">
               <a:ext uri="{FF2B5EF4-FFF2-40B4-BE49-F238E27FC236}">
-                <a16:creationId xmlns:a16="http://schemas.microsoft.com/office/drawing/2014/main" id="{07F3ECDD-73C1-4EBA-AEB7-C41110E6945E}"/>
+                <a16:creationId xmlns:a16="http://schemas.microsoft.com/office/drawing/2014/main" id="{68DC9835-D9C4-4D63-B6E3-741478C08377}"/>
               </a:ext>
             </a:extLst>
           </p:cNvPr>
@@ -41264,7 +41264,7 @@
           <p:cNvPr id="26" name="">
             <a:extLst xmlns:a="http://schemas.openxmlformats.org/drawingml/2006/main">
               <a:ext uri="{FF2B5EF4-FFF2-40B4-BE49-F238E27FC236}">
-                <a16:creationId xmlns:a16="http://schemas.microsoft.com/office/drawing/2014/main" id="{6CE76E1A-670C-48E2-B9CF-ABD6AE5AE32E}"/>
+                <a16:creationId xmlns:a16="http://schemas.microsoft.com/office/drawing/2014/main" id="{2FC92D76-8C5D-4C02-B214-38F314D839A7}"/>
               </a:ext>
             </a:extLst>
           </p:cNvPr>
@@ -41316,7 +41316,7 @@
           <p:cNvPr id="27" name="">
             <a:extLst xmlns:a="http://schemas.openxmlformats.org/drawingml/2006/main">
               <a:ext uri="{FF2B5EF4-FFF2-40B4-BE49-F238E27FC236}">
-                <a16:creationId xmlns:a16="http://schemas.microsoft.com/office/drawing/2014/main" id="{40C40D96-2733-4064-B942-01D96FD99F57}"/>
+                <a16:creationId xmlns:a16="http://schemas.microsoft.com/office/drawing/2014/main" id="{8F37B8F9-BC43-448F-A50F-EA92F77A2A83}"/>
               </a:ext>
             </a:extLst>
           </p:cNvPr>
@@ -41368,7 +41368,7 @@
           <p:cNvPr id="28" name="">
             <a:extLst xmlns:a="http://schemas.openxmlformats.org/drawingml/2006/main">
               <a:ext uri="{FF2B5EF4-FFF2-40B4-BE49-F238E27FC236}">
-                <a16:creationId xmlns:a16="http://schemas.microsoft.com/office/drawing/2014/main" id="{AF13008A-4910-45F7-AB78-FF4C108C63B7}"/>
+                <a16:creationId xmlns:a16="http://schemas.microsoft.com/office/drawing/2014/main" id="{9E04727B-DE8C-41F8-96E0-6A428F1CB9EB}"/>
               </a:ext>
             </a:extLst>
           </p:cNvPr>
@@ -41420,7 +41420,7 @@
           <p:cNvPr id="29" name="">
             <a:extLst xmlns:a="http://schemas.openxmlformats.org/drawingml/2006/main">
               <a:ext uri="{FF2B5EF4-FFF2-40B4-BE49-F238E27FC236}">
-                <a16:creationId xmlns:a16="http://schemas.microsoft.com/office/drawing/2014/main" id="{0BEB3001-37A0-4B1B-A443-BD984A5C6D01}"/>
+                <a16:creationId xmlns:a16="http://schemas.microsoft.com/office/drawing/2014/main" id="{9BE531F1-8DBF-48D5-AD2F-DAFB8A2BD63E}"/>
               </a:ext>
             </a:extLst>
           </p:cNvPr>
@@ -41472,7 +41472,7 @@
           <p:cNvPr id="30" name="">
             <a:extLst xmlns:a="http://schemas.openxmlformats.org/drawingml/2006/main">
               <a:ext uri="{FF2B5EF4-FFF2-40B4-BE49-F238E27FC236}">
-                <a16:creationId xmlns:a16="http://schemas.microsoft.com/office/drawing/2014/main" id="{E85C379B-3C8B-4A5F-B71D-8426B26BA11C}"/>
+                <a16:creationId xmlns:a16="http://schemas.microsoft.com/office/drawing/2014/main" id="{9FB587EF-224E-4136-9AC7-3629D148382A}"/>
               </a:ext>
             </a:extLst>
           </p:cNvPr>
@@ -41524,7 +41524,7 @@
           <p:cNvPr id="31" name="">
             <a:extLst xmlns:a="http://schemas.openxmlformats.org/drawingml/2006/main">
               <a:ext uri="{FF2B5EF4-FFF2-40B4-BE49-F238E27FC236}">
-                <a16:creationId xmlns:a16="http://schemas.microsoft.com/office/drawing/2014/main" id="{5CDE3E48-6650-4FC4-9692-EB0FED0BB179}"/>
+                <a16:creationId xmlns:a16="http://schemas.microsoft.com/office/drawing/2014/main" id="{54F838F8-4942-43E5-B88E-ECAB002CD3A0}"/>
               </a:ext>
             </a:extLst>
           </p:cNvPr>
@@ -41555,7 +41555,7 @@
           <p:cNvPr id="32" name="">
             <a:extLst xmlns:a="http://schemas.openxmlformats.org/drawingml/2006/main">
               <a:ext uri="{FF2B5EF4-FFF2-40B4-BE49-F238E27FC236}">
-                <a16:creationId xmlns:a16="http://schemas.microsoft.com/office/drawing/2014/main" id="{65F3F2F8-FE73-49B6-8820-55A3C04BE03D}"/>
+                <a16:creationId xmlns:a16="http://schemas.microsoft.com/office/drawing/2014/main" id="{79B4473B-E4EB-494F-92AF-3BA641274D7B}"/>
               </a:ext>
             </a:extLst>
           </p:cNvPr>
@@ -41607,7 +41607,7 @@
           <p:cNvPr id="33" name="">
             <a:extLst xmlns:a="http://schemas.openxmlformats.org/drawingml/2006/main">
               <a:ext uri="{FF2B5EF4-FFF2-40B4-BE49-F238E27FC236}">
-                <a16:creationId xmlns:a16="http://schemas.microsoft.com/office/drawing/2014/main" id="{1B568085-62E9-42A7-BEA1-990D78F97F6A}"/>
+                <a16:creationId xmlns:a16="http://schemas.microsoft.com/office/drawing/2014/main" id="{3B6E8D61-0360-4109-889D-E66B41F877A1}"/>
               </a:ext>
             </a:extLst>
           </p:cNvPr>
@@ -41659,7 +41659,7 @@
           <p:cNvPr id="34" name="">
             <a:extLst xmlns:a="http://schemas.openxmlformats.org/drawingml/2006/main">
               <a:ext uri="{FF2B5EF4-FFF2-40B4-BE49-F238E27FC236}">
-                <a16:creationId xmlns:a16="http://schemas.microsoft.com/office/drawing/2014/main" id="{7F057B86-82A1-4A30-A326-E1DA67DA14E7}"/>
+                <a16:creationId xmlns:a16="http://schemas.microsoft.com/office/drawing/2014/main" id="{CE75849E-DAD5-4F70-8E06-3D6918C3DBDA}"/>
               </a:ext>
             </a:extLst>
           </p:cNvPr>
@@ -41711,7 +41711,7 @@
           <p:cNvPr id="35" name="">
             <a:extLst xmlns:a="http://schemas.openxmlformats.org/drawingml/2006/main">
               <a:ext uri="{FF2B5EF4-FFF2-40B4-BE49-F238E27FC236}">
-                <a16:creationId xmlns:a16="http://schemas.microsoft.com/office/drawing/2014/main" id="{628A3948-9EE6-4629-B407-8DB41CD5FAC0}"/>
+                <a16:creationId xmlns:a16="http://schemas.microsoft.com/office/drawing/2014/main" id="{717D0B13-D47A-4767-8E9C-C8005ABF0E2C}"/>
               </a:ext>
             </a:extLst>
           </p:cNvPr>
@@ -41763,7 +41763,7 @@
           <p:cNvPr id="36" name="">
             <a:extLst xmlns:a="http://schemas.openxmlformats.org/drawingml/2006/main">
               <a:ext uri="{FF2B5EF4-FFF2-40B4-BE49-F238E27FC236}">
-                <a16:creationId xmlns:a16="http://schemas.microsoft.com/office/drawing/2014/main" id="{95790B17-4CC8-4F6F-8203-C7BE4494264D}"/>
+                <a16:creationId xmlns:a16="http://schemas.microsoft.com/office/drawing/2014/main" id="{E880A69D-E4F6-4E8B-910B-76BDACE1EE85}"/>
               </a:ext>
             </a:extLst>
           </p:cNvPr>
@@ -41815,7 +41815,7 @@
           <p:cNvPr id="37" name="">
             <a:extLst xmlns:a="http://schemas.openxmlformats.org/drawingml/2006/main">
               <a:ext uri="{FF2B5EF4-FFF2-40B4-BE49-F238E27FC236}">
-                <a16:creationId xmlns:a16="http://schemas.microsoft.com/office/drawing/2014/main" id="{6CF49A0F-E39A-4AE6-BB4C-6B72CBD9E416}"/>
+                <a16:creationId xmlns:a16="http://schemas.microsoft.com/office/drawing/2014/main" id="{0886381B-6126-4F98-BA76-698986D4E9FF}"/>
               </a:ext>
             </a:extLst>
           </p:cNvPr>
@@ -41846,7 +41846,7 @@
           <p:cNvPr id="38" name="">
             <a:extLst xmlns:a="http://schemas.openxmlformats.org/drawingml/2006/main">
               <a:ext uri="{FF2B5EF4-FFF2-40B4-BE49-F238E27FC236}">
-                <a16:creationId xmlns:a16="http://schemas.microsoft.com/office/drawing/2014/main" id="{41E02E9C-162A-49D9-92CA-4169300D0039}"/>
+                <a16:creationId xmlns:a16="http://schemas.microsoft.com/office/drawing/2014/main" id="{D2C2385F-439E-4129-87BE-CDCF2A1EDF2C}"/>
               </a:ext>
             </a:extLst>
           </p:cNvPr>
@@ -41877,7 +41877,7 @@
           <p:cNvPr id="39" name="">
             <a:extLst xmlns:a="http://schemas.openxmlformats.org/drawingml/2006/main">
               <a:ext uri="{FF2B5EF4-FFF2-40B4-BE49-F238E27FC236}">
-                <a16:creationId xmlns:a16="http://schemas.microsoft.com/office/drawing/2014/main" id="{732B60E9-E5CE-4621-A0E7-D8D340910E19}"/>
+                <a16:creationId xmlns:a16="http://schemas.microsoft.com/office/drawing/2014/main" id="{FD71994E-CBA1-4CF3-9512-DF6FAE76474F}"/>
               </a:ext>
             </a:extLst>
           </p:cNvPr>
@@ -41929,7 +41929,7 @@
           <p:cNvPr id="40" name="">
             <a:extLst xmlns:a="http://schemas.openxmlformats.org/drawingml/2006/main">
               <a:ext uri="{FF2B5EF4-FFF2-40B4-BE49-F238E27FC236}">
-                <a16:creationId xmlns:a16="http://schemas.microsoft.com/office/drawing/2014/main" id="{DF5493C3-B870-41E3-B982-AA3F1E3E0D6A}"/>
+                <a16:creationId xmlns:a16="http://schemas.microsoft.com/office/drawing/2014/main" id="{1AB99038-41AC-448A-9F9A-B3A6EC6735DE}"/>
               </a:ext>
             </a:extLst>
           </p:cNvPr>
@@ -41981,7 +41981,7 @@
           <p:cNvPr id="41" name="">
             <a:extLst xmlns:a="http://schemas.openxmlformats.org/drawingml/2006/main">
               <a:ext uri="{FF2B5EF4-FFF2-40B4-BE49-F238E27FC236}">
-                <a16:creationId xmlns:a16="http://schemas.microsoft.com/office/drawing/2014/main" id="{A78A3242-C8A3-43CD-90A7-977C2ACF89FE}"/>
+                <a16:creationId xmlns:a16="http://schemas.microsoft.com/office/drawing/2014/main" id="{3F5EDD9C-86A5-47E7-89FF-9121B77C2871}"/>
               </a:ext>
             </a:extLst>
           </p:cNvPr>
@@ -42033,7 +42033,7 @@
           <p:cNvPr id="42" name="">
             <a:extLst xmlns:a="http://schemas.openxmlformats.org/drawingml/2006/main">
               <a:ext uri="{FF2B5EF4-FFF2-40B4-BE49-F238E27FC236}">
-                <a16:creationId xmlns:a16="http://schemas.microsoft.com/office/drawing/2014/main" id="{C80DFF34-2C83-44C2-AB53-EEA4F28AD4B3}"/>
+                <a16:creationId xmlns:a16="http://schemas.microsoft.com/office/drawing/2014/main" id="{997F7DF5-E643-4E4E-BD32-BCA28DFB3289}"/>
               </a:ext>
             </a:extLst>
           </p:cNvPr>
@@ -42085,7 +42085,7 @@
           <p:cNvPr id="43" name="">
             <a:extLst xmlns:a="http://schemas.openxmlformats.org/drawingml/2006/main">
               <a:ext uri="{FF2B5EF4-FFF2-40B4-BE49-F238E27FC236}">
-                <a16:creationId xmlns:a16="http://schemas.microsoft.com/office/drawing/2014/main" id="{1D431AC4-DB9E-4489-869C-3D62D8B6DDA3}"/>
+                <a16:creationId xmlns:a16="http://schemas.microsoft.com/office/drawing/2014/main" id="{EAE414EE-ECCC-421C-BA0B-970BD9D6F484}"/>
               </a:ext>
             </a:extLst>
           </p:cNvPr>
@@ -42137,7 +42137,7 @@
           <p:cNvPr id="44" name="">
             <a:extLst xmlns:a="http://schemas.openxmlformats.org/drawingml/2006/main">
               <a:ext uri="{FF2B5EF4-FFF2-40B4-BE49-F238E27FC236}">
-                <a16:creationId xmlns:a16="http://schemas.microsoft.com/office/drawing/2014/main" id="{9C4C69A5-6829-4409-9349-71D7275D118C}"/>
+                <a16:creationId xmlns:a16="http://schemas.microsoft.com/office/drawing/2014/main" id="{B977EB54-9DA9-423B-8024-B8016D78CE04}"/>
               </a:ext>
             </a:extLst>
           </p:cNvPr>
@@ -42168,7 +42168,7 @@
           <p:cNvPr id="45" name="">
             <a:extLst xmlns:a="http://schemas.openxmlformats.org/drawingml/2006/main">
               <a:ext uri="{FF2B5EF4-FFF2-40B4-BE49-F238E27FC236}">
-                <a16:creationId xmlns:a16="http://schemas.microsoft.com/office/drawing/2014/main" id="{7E3537AA-7EF0-4E3F-A5C6-560CC791A15B}"/>
+                <a16:creationId xmlns:a16="http://schemas.microsoft.com/office/drawing/2014/main" id="{666AABF3-896E-4E16-A48D-7CEC8B8325B8}"/>
               </a:ext>
             </a:extLst>
           </p:cNvPr>
@@ -42220,7 +42220,7 @@
           <p:cNvPr id="46" name="">
             <a:extLst xmlns:a="http://schemas.openxmlformats.org/drawingml/2006/main">
               <a:ext uri="{FF2B5EF4-FFF2-40B4-BE49-F238E27FC236}">
-                <a16:creationId xmlns:a16="http://schemas.microsoft.com/office/drawing/2014/main" id="{0D02728E-91D9-4B39-9FA4-AFF9692553E6}"/>
+                <a16:creationId xmlns:a16="http://schemas.microsoft.com/office/drawing/2014/main" id="{FF3291C1-D45A-4DE7-B206-2EC63B04C0B0}"/>
               </a:ext>
             </a:extLst>
           </p:cNvPr>
@@ -42272,7 +42272,7 @@
           <p:cNvPr id="47" name="">
             <a:extLst xmlns:a="http://schemas.openxmlformats.org/drawingml/2006/main">
               <a:ext uri="{FF2B5EF4-FFF2-40B4-BE49-F238E27FC236}">
-                <a16:creationId xmlns:a16="http://schemas.microsoft.com/office/drawing/2014/main" id="{F4763C7C-DF05-4055-89A4-25A9A98CF474}"/>
+                <a16:creationId xmlns:a16="http://schemas.microsoft.com/office/drawing/2014/main" id="{28C38300-E352-4B54-89BE-5D2B31B3F6DA}"/>
               </a:ext>
             </a:extLst>
           </p:cNvPr>
@@ -42324,7 +42324,7 @@
           <p:cNvPr id="48" name="">
             <a:extLst xmlns:a="http://schemas.openxmlformats.org/drawingml/2006/main">
               <a:ext uri="{FF2B5EF4-FFF2-40B4-BE49-F238E27FC236}">
-                <a16:creationId xmlns:a16="http://schemas.microsoft.com/office/drawing/2014/main" id="{BD2F8F97-2EAB-4FDD-81AA-00D92EC31E26}"/>
+                <a16:creationId xmlns:a16="http://schemas.microsoft.com/office/drawing/2014/main" id="{138704F4-1527-46A2-8E2F-7909AEDC3F73}"/>
               </a:ext>
             </a:extLst>
           </p:cNvPr>
@@ -42376,7 +42376,7 @@
           <p:cNvPr id="49" name="">
             <a:extLst xmlns:a="http://schemas.openxmlformats.org/drawingml/2006/main">
               <a:ext uri="{FF2B5EF4-FFF2-40B4-BE49-F238E27FC236}">
-                <a16:creationId xmlns:a16="http://schemas.microsoft.com/office/drawing/2014/main" id="{758DEEC5-DDB1-495D-9AA3-3414727F4E81}"/>
+                <a16:creationId xmlns:a16="http://schemas.microsoft.com/office/drawing/2014/main" id="{5EB3FBC6-80FB-46A9-84A3-6974997D790D}"/>
               </a:ext>
             </a:extLst>
           </p:cNvPr>
@@ -42428,7 +42428,7 @@
           <p:cNvPr id="50" name="">
             <a:extLst xmlns:a="http://schemas.openxmlformats.org/drawingml/2006/main">
               <a:ext uri="{FF2B5EF4-FFF2-40B4-BE49-F238E27FC236}">
-                <a16:creationId xmlns:a16="http://schemas.microsoft.com/office/drawing/2014/main" id="{42BFA3E8-3911-493E-92E5-119418C9948E}"/>
+                <a16:creationId xmlns:a16="http://schemas.microsoft.com/office/drawing/2014/main" id="{186FD98E-5E49-4BB3-841D-2A70D1895E3A}"/>
               </a:ext>
             </a:extLst>
           </p:cNvPr>
@@ -42459,7 +42459,7 @@
           <p:cNvPr id="51" name="">
             <a:extLst xmlns:a="http://schemas.openxmlformats.org/drawingml/2006/main">
               <a:ext uri="{FF2B5EF4-FFF2-40B4-BE49-F238E27FC236}">
-                <a16:creationId xmlns:a16="http://schemas.microsoft.com/office/drawing/2014/main" id="{D151B28D-53BE-4FC5-9EAF-50EF774173E7}"/>
+                <a16:creationId xmlns:a16="http://schemas.microsoft.com/office/drawing/2014/main" id="{69F5835F-043D-4A7D-AE50-79AAD18243CA}"/>
               </a:ext>
             </a:extLst>
           </p:cNvPr>
@@ -42490,7 +42490,7 @@
           <p:cNvPr id="52" name="">
             <a:extLst xmlns:a="http://schemas.openxmlformats.org/drawingml/2006/main">
               <a:ext uri="{FF2B5EF4-FFF2-40B4-BE49-F238E27FC236}">
-                <a16:creationId xmlns:a16="http://schemas.microsoft.com/office/drawing/2014/main" id="{6558557C-F221-46D0-9E9D-0DB0063AA721}"/>
+                <a16:creationId xmlns:a16="http://schemas.microsoft.com/office/drawing/2014/main" id="{B362EB4E-3C99-4AF2-A2F9-8E57D56C0155}"/>
               </a:ext>
             </a:extLst>
           </p:cNvPr>
@@ -42542,7 +42542,7 @@
           <p:cNvPr id="53" name="">
             <a:extLst xmlns:a="http://schemas.openxmlformats.org/drawingml/2006/main">
               <a:ext uri="{FF2B5EF4-FFF2-40B4-BE49-F238E27FC236}">
-                <a16:creationId xmlns:a16="http://schemas.microsoft.com/office/drawing/2014/main" id="{81D32C9F-4565-4647-AD99-B4F11FD4C7BB}"/>
+                <a16:creationId xmlns:a16="http://schemas.microsoft.com/office/drawing/2014/main" id="{6F9522E8-6D6C-4247-A5C0-F7E4896AF2E6}"/>
               </a:ext>
             </a:extLst>
           </p:cNvPr>
@@ -42594,7 +42594,7 @@
           <p:cNvPr id="54" name="">
             <a:extLst xmlns:a="http://schemas.openxmlformats.org/drawingml/2006/main">
               <a:ext uri="{FF2B5EF4-FFF2-40B4-BE49-F238E27FC236}">
-                <a16:creationId xmlns:a16="http://schemas.microsoft.com/office/drawing/2014/main" id="{FA1BBF7E-0AFD-409D-BDB0-67582CD9702B}"/>
+                <a16:creationId xmlns:a16="http://schemas.microsoft.com/office/drawing/2014/main" id="{0DB195CF-1399-44A3-9064-BD7132599164}"/>
               </a:ext>
             </a:extLst>
           </p:cNvPr>
@@ -42646,7 +42646,7 @@
           <p:cNvPr id="55" name="">
             <a:extLst xmlns:a="http://schemas.openxmlformats.org/drawingml/2006/main">
               <a:ext uri="{FF2B5EF4-FFF2-40B4-BE49-F238E27FC236}">
-                <a16:creationId xmlns:a16="http://schemas.microsoft.com/office/drawing/2014/main" id="{1EAB9C8C-3700-4733-A421-23CA0B58F3A7}"/>
+                <a16:creationId xmlns:a16="http://schemas.microsoft.com/office/drawing/2014/main" id="{360A63DD-1FEE-48DF-A926-369C0E691681}"/>
               </a:ext>
             </a:extLst>
           </p:cNvPr>
@@ -42698,7 +42698,7 @@
           <p:cNvPr id="56" name="">
             <a:extLst xmlns:a="http://schemas.openxmlformats.org/drawingml/2006/main">
               <a:ext uri="{FF2B5EF4-FFF2-40B4-BE49-F238E27FC236}">
-                <a16:creationId xmlns:a16="http://schemas.microsoft.com/office/drawing/2014/main" id="{3118AAFA-3779-4D16-AE7B-0AF08576D2F1}"/>
+                <a16:creationId xmlns:a16="http://schemas.microsoft.com/office/drawing/2014/main" id="{3467241E-B03A-4BDE-9B8C-6E9FB3DA6FBF}"/>
               </a:ext>
             </a:extLst>
           </p:cNvPr>
@@ -42750,7 +42750,7 @@
           <p:cNvPr id="57" name="">
             <a:extLst xmlns:a="http://schemas.openxmlformats.org/drawingml/2006/main">
               <a:ext uri="{FF2B5EF4-FFF2-40B4-BE49-F238E27FC236}">
-                <a16:creationId xmlns:a16="http://schemas.microsoft.com/office/drawing/2014/main" id="{9460FDE4-E1D2-4D95-ABDC-EAB5544C3E88}"/>
+                <a16:creationId xmlns:a16="http://schemas.microsoft.com/office/drawing/2014/main" id="{6846D067-940D-4ACA-987A-AE3841A36679}"/>
               </a:ext>
             </a:extLst>
           </p:cNvPr>
@@ -42781,7 +42781,7 @@
           <p:cNvPr id="58" name="">
             <a:extLst xmlns:a="http://schemas.openxmlformats.org/drawingml/2006/main">
               <a:ext uri="{FF2B5EF4-FFF2-40B4-BE49-F238E27FC236}">
-                <a16:creationId xmlns:a16="http://schemas.microsoft.com/office/drawing/2014/main" id="{409CCFB7-635C-453C-A4E5-F9A159839ED2}"/>
+                <a16:creationId xmlns:a16="http://schemas.microsoft.com/office/drawing/2014/main" id="{24E4505D-1882-4325-8927-7EF6270448DA}"/>
               </a:ext>
             </a:extLst>
           </p:cNvPr>
@@ -42833,7 +42833,7 @@
           <p:cNvPr id="59" name="">
             <a:extLst xmlns:a="http://schemas.openxmlformats.org/drawingml/2006/main">
               <a:ext uri="{FF2B5EF4-FFF2-40B4-BE49-F238E27FC236}">
-                <a16:creationId xmlns:a16="http://schemas.microsoft.com/office/drawing/2014/main" id="{A9CD2EA8-97DE-43CE-B4C9-1C8CD026E3FE}"/>
+                <a16:creationId xmlns:a16="http://schemas.microsoft.com/office/drawing/2014/main" id="{1B2B1EA6-4734-4F83-9F83-986D8E823334}"/>
               </a:ext>
             </a:extLst>
           </p:cNvPr>
@@ -42885,7 +42885,7 @@
           <p:cNvPr id="60" name="">
             <a:extLst xmlns:a="http://schemas.openxmlformats.org/drawingml/2006/main">
               <a:ext uri="{FF2B5EF4-FFF2-40B4-BE49-F238E27FC236}">
-                <a16:creationId xmlns:a16="http://schemas.microsoft.com/office/drawing/2014/main" id="{8BAA9525-80C1-4AE6-ADB9-E49A478AC80C}"/>
+                <a16:creationId xmlns:a16="http://schemas.microsoft.com/office/drawing/2014/main" id="{8396B52E-90F2-4B4D-B9C4-C0350BD4BC60}"/>
               </a:ext>
             </a:extLst>
           </p:cNvPr>
@@ -42937,7 +42937,7 @@
           <p:cNvPr id="61" name="">
             <a:extLst xmlns:a="http://schemas.openxmlformats.org/drawingml/2006/main">
               <a:ext uri="{FF2B5EF4-FFF2-40B4-BE49-F238E27FC236}">
-                <a16:creationId xmlns:a16="http://schemas.microsoft.com/office/drawing/2014/main" id="{F09351DE-9B1F-40B8-AD8B-6F56579C700C}"/>
+                <a16:creationId xmlns:a16="http://schemas.microsoft.com/office/drawing/2014/main" id="{CB0A552D-12B9-41FC-BD30-C935F344C19E}"/>
               </a:ext>
             </a:extLst>
           </p:cNvPr>
@@ -42989,7 +42989,7 @@
           <p:cNvPr id="62" name="">
             <a:extLst xmlns:a="http://schemas.openxmlformats.org/drawingml/2006/main">
               <a:ext uri="{FF2B5EF4-FFF2-40B4-BE49-F238E27FC236}">
-                <a16:creationId xmlns:a16="http://schemas.microsoft.com/office/drawing/2014/main" id="{7B8FDBB4-0A07-42B7-B787-456863D45B2C}"/>
+                <a16:creationId xmlns:a16="http://schemas.microsoft.com/office/drawing/2014/main" id="{4F122102-841B-4309-A754-AA4EE43EAB6E}"/>
               </a:ext>
             </a:extLst>
           </p:cNvPr>
@@ -43041,7 +43041,7 @@
           <p:cNvPr id="63" name="">
             <a:extLst xmlns:a="http://schemas.openxmlformats.org/drawingml/2006/main">
               <a:ext uri="{FF2B5EF4-FFF2-40B4-BE49-F238E27FC236}">
-                <a16:creationId xmlns:a16="http://schemas.microsoft.com/office/drawing/2014/main" id="{F02C1274-7942-4188-8515-E7EEEC6C9209}"/>
+                <a16:creationId xmlns:a16="http://schemas.microsoft.com/office/drawing/2014/main" id="{9E5C3573-C1CF-4A32-95B9-883661140571}"/>
               </a:ext>
             </a:extLst>
           </p:cNvPr>
@@ -43072,7 +43072,7 @@
           <p:cNvPr id="64" name="">
             <a:extLst xmlns:a="http://schemas.openxmlformats.org/drawingml/2006/main">
               <a:ext uri="{FF2B5EF4-FFF2-40B4-BE49-F238E27FC236}">
-                <a16:creationId xmlns:a16="http://schemas.microsoft.com/office/drawing/2014/main" id="{3C03932B-423D-46F0-9484-043BE9841965}"/>
+                <a16:creationId xmlns:a16="http://schemas.microsoft.com/office/drawing/2014/main" id="{3065FFB6-EBA7-4A22-B6B3-A9C015DB97B7}"/>
               </a:ext>
             </a:extLst>
           </p:cNvPr>
@@ -43103,7 +43103,7 @@
           <p:cNvPr id="65" name="">
             <a:extLst xmlns:a="http://schemas.openxmlformats.org/drawingml/2006/main">
               <a:ext uri="{FF2B5EF4-FFF2-40B4-BE49-F238E27FC236}">
-                <a16:creationId xmlns:a16="http://schemas.microsoft.com/office/drawing/2014/main" id="{CA579E8F-BE4B-437B-B3CA-34F40FFD2F39}"/>
+                <a16:creationId xmlns:a16="http://schemas.microsoft.com/office/drawing/2014/main" id="{B458A0D2-8156-4ED0-B378-57B0F95D4A6E}"/>
               </a:ext>
             </a:extLst>
           </p:cNvPr>
@@ -43155,7 +43155,7 @@
           <p:cNvPr id="66" name="">
             <a:extLst xmlns:a="http://schemas.openxmlformats.org/drawingml/2006/main">
               <a:ext uri="{FF2B5EF4-FFF2-40B4-BE49-F238E27FC236}">
-                <a16:creationId xmlns:a16="http://schemas.microsoft.com/office/drawing/2014/main" id="{A3E649B5-AADC-4003-A9D9-F451CF53D380}"/>
+                <a16:creationId xmlns:a16="http://schemas.microsoft.com/office/drawing/2014/main" id="{545A346D-D9B5-443C-AB04-89BD256CEF9D}"/>
               </a:ext>
             </a:extLst>
           </p:cNvPr>
@@ -43207,7 +43207,7 @@
           <p:cNvPr id="67" name="">
             <a:extLst xmlns:a="http://schemas.openxmlformats.org/drawingml/2006/main">
               <a:ext uri="{FF2B5EF4-FFF2-40B4-BE49-F238E27FC236}">
-                <a16:creationId xmlns:a16="http://schemas.microsoft.com/office/drawing/2014/main" id="{18DC5271-AAAA-4062-9AF9-AF23EFD7D712}"/>
+                <a16:creationId xmlns:a16="http://schemas.microsoft.com/office/drawing/2014/main" id="{1ADD7C22-BA68-4FBA-B7FD-C19B8B3DEB21}"/>
               </a:ext>
             </a:extLst>
           </p:cNvPr>
@@ -43259,7 +43259,7 @@
           <p:cNvPr id="68" name="">
             <a:extLst xmlns:a="http://schemas.openxmlformats.org/drawingml/2006/main">
               <a:ext uri="{FF2B5EF4-FFF2-40B4-BE49-F238E27FC236}">
-                <a16:creationId xmlns:a16="http://schemas.microsoft.com/office/drawing/2014/main" id="{8C5105A4-723E-402F-B43D-0C66A6E8D3E7}"/>
+                <a16:creationId xmlns:a16="http://schemas.microsoft.com/office/drawing/2014/main" id="{5A5AFF75-0BC6-4FE7-8111-F4AC414811EF}"/>
               </a:ext>
             </a:extLst>
           </p:cNvPr>
@@ -43311,7 +43311,7 @@
           <p:cNvPr id="69" name="">
             <a:extLst xmlns:a="http://schemas.openxmlformats.org/drawingml/2006/main">
               <a:ext uri="{FF2B5EF4-FFF2-40B4-BE49-F238E27FC236}">
-                <a16:creationId xmlns:a16="http://schemas.microsoft.com/office/drawing/2014/main" id="{8E5EB54B-8F75-4CA1-8C4D-22E19706050D}"/>
+                <a16:creationId xmlns:a16="http://schemas.microsoft.com/office/drawing/2014/main" id="{5C7791C6-6091-41E4-8C3E-CC9C5B542076}"/>
               </a:ext>
             </a:extLst>
           </p:cNvPr>
@@ -43363,7 +43363,7 @@
           <p:cNvPr id="70" name="">
             <a:extLst xmlns:a="http://schemas.openxmlformats.org/drawingml/2006/main">
               <a:ext uri="{FF2B5EF4-FFF2-40B4-BE49-F238E27FC236}">
-                <a16:creationId xmlns:a16="http://schemas.microsoft.com/office/drawing/2014/main" id="{8D5BF533-705A-4D0A-A70F-E2D160EEB14A}"/>
+                <a16:creationId xmlns:a16="http://schemas.microsoft.com/office/drawing/2014/main" id="{E7F4FFAB-7B5E-4EFA-94F7-0E9B9AB758E2}"/>
               </a:ext>
             </a:extLst>
           </p:cNvPr>
@@ -43394,7 +43394,7 @@
           <p:cNvPr id="71" name="">
             <a:extLst xmlns:a="http://schemas.openxmlformats.org/drawingml/2006/main">
               <a:ext uri="{FF2B5EF4-FFF2-40B4-BE49-F238E27FC236}">
-                <a16:creationId xmlns:a16="http://schemas.microsoft.com/office/drawing/2014/main" id="{4F15E828-8049-4735-A1DD-A40F32067F6B}"/>
+                <a16:creationId xmlns:a16="http://schemas.microsoft.com/office/drawing/2014/main" id="{51CD4837-5019-43B1-868D-800DBF29E659}"/>
               </a:ext>
             </a:extLst>
           </p:cNvPr>
@@ -43446,7 +43446,7 @@
           <p:cNvPr id="72" name="">
             <a:extLst xmlns:a="http://schemas.openxmlformats.org/drawingml/2006/main">
               <a:ext uri="{FF2B5EF4-FFF2-40B4-BE49-F238E27FC236}">
-                <a16:creationId xmlns:a16="http://schemas.microsoft.com/office/drawing/2014/main" id="{C89DDF5A-89E7-4048-A690-456F182E47D8}"/>
+                <a16:creationId xmlns:a16="http://schemas.microsoft.com/office/drawing/2014/main" id="{47809396-13C9-4719-B669-E27F5D08585D}"/>
               </a:ext>
             </a:extLst>
           </p:cNvPr>
@@ -43498,7 +43498,7 @@
           <p:cNvPr id="73" name="">
             <a:extLst xmlns:a="http://schemas.openxmlformats.org/drawingml/2006/main">
               <a:ext uri="{FF2B5EF4-FFF2-40B4-BE49-F238E27FC236}">
-                <a16:creationId xmlns:a16="http://schemas.microsoft.com/office/drawing/2014/main" id="{954E2A74-60B6-42D0-848C-F8054198FD5F}"/>
+                <a16:creationId xmlns:a16="http://schemas.microsoft.com/office/drawing/2014/main" id="{AD1C25D5-8EBD-4CAC-833D-BCFB8C367E24}"/>
               </a:ext>
             </a:extLst>
           </p:cNvPr>
@@ -43550,7 +43550,7 @@
           <p:cNvPr id="74" name="">
             <a:extLst xmlns:a="http://schemas.openxmlformats.org/drawingml/2006/main">
               <a:ext uri="{FF2B5EF4-FFF2-40B4-BE49-F238E27FC236}">
-                <a16:creationId xmlns:a16="http://schemas.microsoft.com/office/drawing/2014/main" id="{2F513584-A523-462D-80BA-C04E43B2D100}"/>
+                <a16:creationId xmlns:a16="http://schemas.microsoft.com/office/drawing/2014/main" id="{92C58F5F-B8B9-45FC-8F76-4AA6EF7B3444}"/>
               </a:ext>
             </a:extLst>
           </p:cNvPr>
@@ -43602,7 +43602,7 @@
           <p:cNvPr id="75" name="">
             <a:extLst xmlns:a="http://schemas.openxmlformats.org/drawingml/2006/main">
               <a:ext uri="{FF2B5EF4-FFF2-40B4-BE49-F238E27FC236}">
-                <a16:creationId xmlns:a16="http://schemas.microsoft.com/office/drawing/2014/main" id="{7B014306-B9DE-4CD1-BF82-C3559B426A8E}"/>
+                <a16:creationId xmlns:a16="http://schemas.microsoft.com/office/drawing/2014/main" id="{636BE7F0-D173-4418-A869-3E1CA531B2E2}"/>
               </a:ext>
             </a:extLst>
           </p:cNvPr>
@@ -43654,7 +43654,7 @@
           <p:cNvPr id="76" name="">
             <a:extLst xmlns:a="http://schemas.openxmlformats.org/drawingml/2006/main">
               <a:ext uri="{FF2B5EF4-FFF2-40B4-BE49-F238E27FC236}">
-                <a16:creationId xmlns:a16="http://schemas.microsoft.com/office/drawing/2014/main" id="{8E9A29B4-FFF5-4B0C-9C8C-9BE4194EC7BD}"/>
+                <a16:creationId xmlns:a16="http://schemas.microsoft.com/office/drawing/2014/main" id="{0A231B97-490A-4FEB-B778-9C7E81D1685E}"/>
               </a:ext>
             </a:extLst>
           </p:cNvPr>
@@ -43685,7 +43685,7 @@
           <p:cNvPr id="77" name="">
             <a:extLst xmlns:a="http://schemas.openxmlformats.org/drawingml/2006/main">
               <a:ext uri="{FF2B5EF4-FFF2-40B4-BE49-F238E27FC236}">
-                <a16:creationId xmlns:a16="http://schemas.microsoft.com/office/drawing/2014/main" id="{AEC5B58B-F5F1-423D-A8B8-E248E0C75708}"/>
+                <a16:creationId xmlns:a16="http://schemas.microsoft.com/office/drawing/2014/main" id="{DE6452EC-3855-4C3E-BEB3-6019FA7FA084}"/>
               </a:ext>
             </a:extLst>
           </p:cNvPr>
@@ -43716,7 +43716,7 @@
           <p:cNvPr id="78" name="">
             <a:extLst xmlns:a="http://schemas.openxmlformats.org/drawingml/2006/main">
               <a:ext uri="{FF2B5EF4-FFF2-40B4-BE49-F238E27FC236}">
-                <a16:creationId xmlns:a16="http://schemas.microsoft.com/office/drawing/2014/main" id="{21C21BD4-B0FC-4BDC-A53D-B0CEF517899E}"/>
+                <a16:creationId xmlns:a16="http://schemas.microsoft.com/office/drawing/2014/main" id="{54BCDF72-DBE4-41EF-BCE8-57363C2A273D}"/>
               </a:ext>
             </a:extLst>
           </p:cNvPr>
@@ -43768,7 +43768,7 @@
           <p:cNvPr id="79" name="">
             <a:extLst xmlns:a="http://schemas.openxmlformats.org/drawingml/2006/main">
               <a:ext uri="{FF2B5EF4-FFF2-40B4-BE49-F238E27FC236}">
-                <a16:creationId xmlns:a16="http://schemas.microsoft.com/office/drawing/2014/main" id="{5F2252BF-7571-4A13-8E3E-353F7D63CF79}"/>
+                <a16:creationId xmlns:a16="http://schemas.microsoft.com/office/drawing/2014/main" id="{7FD45C9E-6EAA-4809-A82D-94CD52E76FAC}"/>
               </a:ext>
             </a:extLst>
           </p:cNvPr>
@@ -43820,7 +43820,7 @@
           <p:cNvPr id="80" name="">
             <a:extLst xmlns:a="http://schemas.openxmlformats.org/drawingml/2006/main">
               <a:ext uri="{FF2B5EF4-FFF2-40B4-BE49-F238E27FC236}">
-                <a16:creationId xmlns:a16="http://schemas.microsoft.com/office/drawing/2014/main" id="{F2203453-F6D8-4E92-A767-8ADE1E980751}"/>
+                <a16:creationId xmlns:a16="http://schemas.microsoft.com/office/drawing/2014/main" id="{27493333-887B-47E3-AE2D-99C80E2137A3}"/>
               </a:ext>
             </a:extLst>
           </p:cNvPr>
@@ -43872,7 +43872,7 @@
           <p:cNvPr id="81" name="">
             <a:extLst xmlns:a="http://schemas.openxmlformats.org/drawingml/2006/main">
               <a:ext uri="{FF2B5EF4-FFF2-40B4-BE49-F238E27FC236}">
-                <a16:creationId xmlns:a16="http://schemas.microsoft.com/office/drawing/2014/main" id="{DD69A34C-E87E-475C-B9F3-FB3A91C8CA00}"/>
+                <a16:creationId xmlns:a16="http://schemas.microsoft.com/office/drawing/2014/main" id="{A3EB534B-9939-4C7B-95A0-B658D3AC3BAF}"/>
               </a:ext>
             </a:extLst>
           </p:cNvPr>
@@ -43924,7 +43924,7 @@
           <p:cNvPr id="82" name="">
             <a:extLst xmlns:a="http://schemas.openxmlformats.org/drawingml/2006/main">
               <a:ext uri="{FF2B5EF4-FFF2-40B4-BE49-F238E27FC236}">
-                <a16:creationId xmlns:a16="http://schemas.microsoft.com/office/drawing/2014/main" id="{B09E76EC-6976-4CE6-8B3B-0CDDD03FF2C4}"/>
+                <a16:creationId xmlns:a16="http://schemas.microsoft.com/office/drawing/2014/main" id="{8557A32B-924D-40CC-B21D-72BB231AF546}"/>
               </a:ext>
             </a:extLst>
           </p:cNvPr>
@@ -43976,7 +43976,7 @@
           <p:cNvPr id="83" name="">
             <a:extLst xmlns:a="http://schemas.openxmlformats.org/drawingml/2006/main">
               <a:ext uri="{FF2B5EF4-FFF2-40B4-BE49-F238E27FC236}">
-                <a16:creationId xmlns:a16="http://schemas.microsoft.com/office/drawing/2014/main" id="{C83B76D4-9311-4994-B480-160F73A5F222}"/>
+                <a16:creationId xmlns:a16="http://schemas.microsoft.com/office/drawing/2014/main" id="{E7DB0B6D-1C7C-4779-9C39-9BABB80F5170}"/>
               </a:ext>
             </a:extLst>
           </p:cNvPr>
@@ -44007,7 +44007,7 @@
           <p:cNvPr id="84" name="">
             <a:extLst xmlns:a="http://schemas.openxmlformats.org/drawingml/2006/main">
               <a:ext uri="{FF2B5EF4-FFF2-40B4-BE49-F238E27FC236}">
-                <a16:creationId xmlns:a16="http://schemas.microsoft.com/office/drawing/2014/main" id="{2D68BF09-F1D9-4F2A-B2F8-C97BA2EFA342}"/>
+                <a16:creationId xmlns:a16="http://schemas.microsoft.com/office/drawing/2014/main" id="{DD05ED6C-4726-44EA-B1FF-0D9E6A6115AA}"/>
               </a:ext>
             </a:extLst>
           </p:cNvPr>
@@ -44059,7 +44059,7 @@
           <p:cNvPr id="85" name="">
             <a:extLst xmlns:a="http://schemas.openxmlformats.org/drawingml/2006/main">
               <a:ext uri="{FF2B5EF4-FFF2-40B4-BE49-F238E27FC236}">
-                <a16:creationId xmlns:a16="http://schemas.microsoft.com/office/drawing/2014/main" id="{316B2385-04F6-4934-B01C-B9B5308C1D1B}"/>
+                <a16:creationId xmlns:a16="http://schemas.microsoft.com/office/drawing/2014/main" id="{99515641-B49E-4CFD-ADF8-ABF33FC8A35A}"/>
               </a:ext>
             </a:extLst>
           </p:cNvPr>
@@ -44111,7 +44111,7 @@
           <p:cNvPr id="86" name="">
             <a:extLst xmlns:a="http://schemas.openxmlformats.org/drawingml/2006/main">
               <a:ext uri="{FF2B5EF4-FFF2-40B4-BE49-F238E27FC236}">
-                <a16:creationId xmlns:a16="http://schemas.microsoft.com/office/drawing/2014/main" id="{DF7E852F-E3E7-4391-8C40-960B1ED43CDE}"/>
+                <a16:creationId xmlns:a16="http://schemas.microsoft.com/office/drawing/2014/main" id="{687523C3-2198-465B-B8DB-570507CA852A}"/>
               </a:ext>
             </a:extLst>
           </p:cNvPr>
@@ -44163,7 +44163,7 @@
           <p:cNvPr id="87" name="">
             <a:extLst xmlns:a="http://schemas.openxmlformats.org/drawingml/2006/main">
               <a:ext uri="{FF2B5EF4-FFF2-40B4-BE49-F238E27FC236}">
-                <a16:creationId xmlns:a16="http://schemas.microsoft.com/office/drawing/2014/main" id="{BAC73A75-3505-48C4-97A3-D6CF3129B341}"/>
+                <a16:creationId xmlns:a16="http://schemas.microsoft.com/office/drawing/2014/main" id="{D7D2FB61-1211-42D7-B4AA-293A6544E8BF}"/>
               </a:ext>
             </a:extLst>
           </p:cNvPr>
@@ -44215,7 +44215,7 @@
           <p:cNvPr id="88" name="">
             <a:extLst xmlns:a="http://schemas.openxmlformats.org/drawingml/2006/main">
               <a:ext uri="{FF2B5EF4-FFF2-40B4-BE49-F238E27FC236}">
-                <a16:creationId xmlns:a16="http://schemas.microsoft.com/office/drawing/2014/main" id="{9D318112-1029-41F7-BEFE-51486D2ACCEF}"/>
+                <a16:creationId xmlns:a16="http://schemas.microsoft.com/office/drawing/2014/main" id="{09DA57D9-E2CC-44C7-82E2-92E78CB8C447}"/>
               </a:ext>
             </a:extLst>
           </p:cNvPr>
@@ -44267,7 +44267,7 @@
           <p:cNvPr id="89" name="">
             <a:extLst xmlns:a="http://schemas.openxmlformats.org/drawingml/2006/main">
               <a:ext uri="{FF2B5EF4-FFF2-40B4-BE49-F238E27FC236}">
-                <a16:creationId xmlns:a16="http://schemas.microsoft.com/office/drawing/2014/main" id="{5C4DE9E2-C647-4641-B35C-03CA9A9A2201}"/>
+                <a16:creationId xmlns:a16="http://schemas.microsoft.com/office/drawing/2014/main" id="{652E0531-24F4-44B2-BD49-7BC1F634DEB5}"/>
               </a:ext>
             </a:extLst>
           </p:cNvPr>
@@ -44298,7 +44298,7 @@
           <p:cNvPr id="90" name="">
             <a:extLst xmlns:a="http://schemas.openxmlformats.org/drawingml/2006/main">
               <a:ext uri="{FF2B5EF4-FFF2-40B4-BE49-F238E27FC236}">
-                <a16:creationId xmlns:a16="http://schemas.microsoft.com/office/drawing/2014/main" id="{50D3775D-E603-46CC-8DA0-9BFE788D8741}"/>
+                <a16:creationId xmlns:a16="http://schemas.microsoft.com/office/drawing/2014/main" id="{F8AE2200-B36C-4650-AE93-D0E0CD875E24}"/>
               </a:ext>
             </a:extLst>
           </p:cNvPr>
@@ -44329,7 +44329,7 @@
           <p:cNvPr id="91" name="">
             <a:extLst xmlns:a="http://schemas.openxmlformats.org/drawingml/2006/main">
               <a:ext uri="{FF2B5EF4-FFF2-40B4-BE49-F238E27FC236}">
-                <a16:creationId xmlns:a16="http://schemas.microsoft.com/office/drawing/2014/main" id="{B5EDFAE7-8EBC-4EFF-B649-9FA7AD285940}"/>
+                <a16:creationId xmlns:a16="http://schemas.microsoft.com/office/drawing/2014/main" id="{F68321EC-DE5E-4915-8F02-0D98136CD807}"/>
               </a:ext>
             </a:extLst>
           </p:cNvPr>
@@ -44381,7 +44381,7 @@
           <p:cNvPr id="92" name="">
             <a:extLst xmlns:a="http://schemas.openxmlformats.org/drawingml/2006/main">
               <a:ext uri="{FF2B5EF4-FFF2-40B4-BE49-F238E27FC236}">
-                <a16:creationId xmlns:a16="http://schemas.microsoft.com/office/drawing/2014/main" id="{A08EC0A5-DC47-4C50-9FF6-1168DE1AEDCB}"/>
+                <a16:creationId xmlns:a16="http://schemas.microsoft.com/office/drawing/2014/main" id="{2620B66F-037A-425C-908C-86E1A7569284}"/>
               </a:ext>
             </a:extLst>
           </p:cNvPr>
@@ -44433,7 +44433,7 @@
           <p:cNvPr id="93" name="">
             <a:extLst xmlns:a="http://schemas.openxmlformats.org/drawingml/2006/main">
               <a:ext uri="{FF2B5EF4-FFF2-40B4-BE49-F238E27FC236}">
-                <a16:creationId xmlns:a16="http://schemas.microsoft.com/office/drawing/2014/main" id="{FFDC3C02-A725-4D71-ABD7-8C2CD8ADD358}"/>
+                <a16:creationId xmlns:a16="http://schemas.microsoft.com/office/drawing/2014/main" id="{3D8B5EC2-DA34-4E73-B80D-91F6F53B9344}"/>
               </a:ext>
             </a:extLst>
           </p:cNvPr>
@@ -44485,7 +44485,7 @@
           <p:cNvPr id="94" name="">
             <a:extLst xmlns:a="http://schemas.openxmlformats.org/drawingml/2006/main">
               <a:ext uri="{FF2B5EF4-FFF2-40B4-BE49-F238E27FC236}">
-                <a16:creationId xmlns:a16="http://schemas.microsoft.com/office/drawing/2014/main" id="{8B365866-A090-406F-A53A-6EECFDBE4EEA}"/>
+                <a16:creationId xmlns:a16="http://schemas.microsoft.com/office/drawing/2014/main" id="{6C4F0722-5BE7-433F-8138-F210FB56E38C}"/>
               </a:ext>
             </a:extLst>
           </p:cNvPr>
@@ -44537,7 +44537,7 @@
           <p:cNvPr id="95" name="">
             <a:extLst xmlns:a="http://schemas.openxmlformats.org/drawingml/2006/main">
               <a:ext uri="{FF2B5EF4-FFF2-40B4-BE49-F238E27FC236}">
-                <a16:creationId xmlns:a16="http://schemas.microsoft.com/office/drawing/2014/main" id="{F235FEA0-A1E4-417B-9696-B722A4F1A452}"/>
+                <a16:creationId xmlns:a16="http://schemas.microsoft.com/office/drawing/2014/main" id="{412837DC-F562-4FB3-8962-C986D981AB96}"/>
               </a:ext>
             </a:extLst>
           </p:cNvPr>
@@ -44589,7 +44589,7 @@
           <p:cNvPr id="96" name="">
             <a:extLst xmlns:a="http://schemas.openxmlformats.org/drawingml/2006/main">
               <a:ext uri="{FF2B5EF4-FFF2-40B4-BE49-F238E27FC236}">
-                <a16:creationId xmlns:a16="http://schemas.microsoft.com/office/drawing/2014/main" id="{06DF8F42-3E5C-43DE-8B53-6D581AC6D59A}"/>
+                <a16:creationId xmlns:a16="http://schemas.microsoft.com/office/drawing/2014/main" id="{D6D069BA-C62B-4E3B-B830-B1EC49ED7F82}"/>
               </a:ext>
             </a:extLst>
           </p:cNvPr>
@@ -44620,7 +44620,7 @@
           <p:cNvPr id="97" name="">
             <a:extLst xmlns:a="http://schemas.openxmlformats.org/drawingml/2006/main">
               <a:ext uri="{FF2B5EF4-FFF2-40B4-BE49-F238E27FC236}">
-                <a16:creationId xmlns:a16="http://schemas.microsoft.com/office/drawing/2014/main" id="{1BD3DC8A-528D-4283-BC27-B76FADD7A74C}"/>
+                <a16:creationId xmlns:a16="http://schemas.microsoft.com/office/drawing/2014/main" id="{17084DBB-5DF4-4B07-80B4-87C8E2F8E2EB}"/>
               </a:ext>
             </a:extLst>
           </p:cNvPr>
@@ -44672,7 +44672,7 @@
           <p:cNvPr id="98" name="">
             <a:extLst xmlns:a="http://schemas.openxmlformats.org/drawingml/2006/main">
               <a:ext uri="{FF2B5EF4-FFF2-40B4-BE49-F238E27FC236}">
-                <a16:creationId xmlns:a16="http://schemas.microsoft.com/office/drawing/2014/main" id="{5B9AF7F9-1EAB-416B-86A4-1E865487237D}"/>
+                <a16:creationId xmlns:a16="http://schemas.microsoft.com/office/drawing/2014/main" id="{A0D007D8-8BA6-4771-A9B2-D16ECA2063EC}"/>
               </a:ext>
             </a:extLst>
           </p:cNvPr>
@@ -44724,7 +44724,7 @@
           <p:cNvPr id="99" name="">
             <a:extLst xmlns:a="http://schemas.openxmlformats.org/drawingml/2006/main">
               <a:ext uri="{FF2B5EF4-FFF2-40B4-BE49-F238E27FC236}">
-                <a16:creationId xmlns:a16="http://schemas.microsoft.com/office/drawing/2014/main" id="{0121353D-BD1D-4D89-99DD-AEBC061FF82F}"/>
+                <a16:creationId xmlns:a16="http://schemas.microsoft.com/office/drawing/2014/main" id="{FFC23541-1963-4578-A25F-D65F7C74396B}"/>
               </a:ext>
             </a:extLst>
           </p:cNvPr>
@@ -44776,7 +44776,7 @@
           <p:cNvPr id="100" name="">
             <a:extLst xmlns:a="http://schemas.openxmlformats.org/drawingml/2006/main">
               <a:ext uri="{FF2B5EF4-FFF2-40B4-BE49-F238E27FC236}">
-                <a16:creationId xmlns:a16="http://schemas.microsoft.com/office/drawing/2014/main" id="{B5C55496-58CC-474D-B4E6-13436D2B1481}"/>
+                <a16:creationId xmlns:a16="http://schemas.microsoft.com/office/drawing/2014/main" id="{FB3DE76E-3FE8-4592-B338-1FC6C123097F}"/>
               </a:ext>
             </a:extLst>
           </p:cNvPr>
@@ -44828,7 +44828,7 @@
           <p:cNvPr id="101" name="">
             <a:extLst xmlns:a="http://schemas.openxmlformats.org/drawingml/2006/main">
               <a:ext uri="{FF2B5EF4-FFF2-40B4-BE49-F238E27FC236}">
-                <a16:creationId xmlns:a16="http://schemas.microsoft.com/office/drawing/2014/main" id="{E05FDC9A-7C44-41F0-BAC0-145F33470B8F}"/>
+                <a16:creationId xmlns:a16="http://schemas.microsoft.com/office/drawing/2014/main" id="{EFD8D453-47A2-4ED4-B3EF-F8E11ADBE355}"/>
               </a:ext>
             </a:extLst>
           </p:cNvPr>
@@ -44878,7 +44878,7 @@
     </p:spTree>
     <p:extLst>
       <p:ext uri="{BB962C8B-B14F-4D97-AF65-F5344CB8AC3E}">
-        <p14:creationId xmlns:p14="http://schemas.microsoft.com/office/powerpoint/2010/main" val="1969129361"/>
+        <p14:creationId xmlns:p14="http://schemas.microsoft.com/office/powerpoint/2010/main" val="2081831531"/>
       </p:ext>
     </p:extLst>
   </p:cSld>

--- a/.preview/pptx-claro/deck.pptx
+++ b/.preview/pptx-claro/deck.pptx
@@ -2,27 +2,27 @@
 <file path=ppt/presentation.xml><?xml version="1.0" encoding="utf-8"?>
 <p:presentation xmlns:p="http://schemas.openxmlformats.org/presentationml/2006/main">
   <p:sldMasterIdLst>
-    <p:sldMasterId xmlns:r="http://schemas.openxmlformats.org/officeDocument/2006/relationships" id="2147483648" r:id="R30adfa2044814002"/>
+    <p:sldMasterId xmlns:r="http://schemas.openxmlformats.org/officeDocument/2006/relationships" id="2147483648" r:id="R9536f9ae53c84041"/>
   </p:sldMasterIdLst>
   <p:notesMasterIdLst>
-    <p:notesMasterId xmlns:r="http://schemas.openxmlformats.org/officeDocument/2006/relationships" r:id="Rf416f2d3b91d4e88"/>
+    <p:notesMasterId xmlns:r="http://schemas.openxmlformats.org/officeDocument/2006/relationships" r:id="R232ed7ae272f4fe3"/>
   </p:notesMasterIdLst>
   <p:sldIdLst>
-    <p:sldId xmlns:r="http://schemas.openxmlformats.org/officeDocument/2006/relationships" id="256" r:id="R43ff010bdc9142a3"/>
-    <p:sldId xmlns:r="http://schemas.openxmlformats.org/officeDocument/2006/relationships" id="257" r:id="Ref04cedb57da4cfd"/>
-    <p:sldId xmlns:r="http://schemas.openxmlformats.org/officeDocument/2006/relationships" id="258" r:id="Ra5d73a581d8e4c66"/>
-    <p:sldId xmlns:r="http://schemas.openxmlformats.org/officeDocument/2006/relationships" id="259" r:id="R9c686a5b977c4f2a"/>
-    <p:sldId xmlns:r="http://schemas.openxmlformats.org/officeDocument/2006/relationships" id="260" r:id="R0156fc9cec284934"/>
-    <p:sldId xmlns:r="http://schemas.openxmlformats.org/officeDocument/2006/relationships" id="261" r:id="R0194b07940734504"/>
-    <p:sldId xmlns:r="http://schemas.openxmlformats.org/officeDocument/2006/relationships" id="262" r:id="Rda7a5b8fb6444d1d"/>
-    <p:sldId xmlns:r="http://schemas.openxmlformats.org/officeDocument/2006/relationships" id="263" r:id="Rdf5b9d339635494b"/>
-    <p:sldId xmlns:r="http://schemas.openxmlformats.org/officeDocument/2006/relationships" id="264" r:id="Rc4cf05c432a5402c"/>
-    <p:sldId xmlns:r="http://schemas.openxmlformats.org/officeDocument/2006/relationships" id="265" r:id="R356af9e91c1d4f99"/>
-    <p:sldId xmlns:r="http://schemas.openxmlformats.org/officeDocument/2006/relationships" id="266" r:id="R7d3c54a5ef214ed1"/>
-    <p:sldId xmlns:r="http://schemas.openxmlformats.org/officeDocument/2006/relationships" id="267" r:id="Rcb00095bdb004f34"/>
-    <p:sldId xmlns:r="http://schemas.openxmlformats.org/officeDocument/2006/relationships" id="268" r:id="R193481862c464746"/>
-    <p:sldId xmlns:r="http://schemas.openxmlformats.org/officeDocument/2006/relationships" id="269" r:id="Ra75cb425ae4643b8"/>
-    <p:sldId xmlns:r="http://schemas.openxmlformats.org/officeDocument/2006/relationships" id="270" r:id="Rea5e0ab30371490b"/>
+    <p:sldId xmlns:r="http://schemas.openxmlformats.org/officeDocument/2006/relationships" id="256" r:id="Radff340ed096439c"/>
+    <p:sldId xmlns:r="http://schemas.openxmlformats.org/officeDocument/2006/relationships" id="257" r:id="Ra933f1ced3504172"/>
+    <p:sldId xmlns:r="http://schemas.openxmlformats.org/officeDocument/2006/relationships" id="258" r:id="Rde33b989612b4882"/>
+    <p:sldId xmlns:r="http://schemas.openxmlformats.org/officeDocument/2006/relationships" id="259" r:id="R9e1addbefaf842d6"/>
+    <p:sldId xmlns:r="http://schemas.openxmlformats.org/officeDocument/2006/relationships" id="260" r:id="Rdbd5acb6470a4160"/>
+    <p:sldId xmlns:r="http://schemas.openxmlformats.org/officeDocument/2006/relationships" id="261" r:id="Rab04cd0a2ecf448b"/>
+    <p:sldId xmlns:r="http://schemas.openxmlformats.org/officeDocument/2006/relationships" id="262" r:id="R6b54487193704622"/>
+    <p:sldId xmlns:r="http://schemas.openxmlformats.org/officeDocument/2006/relationships" id="263" r:id="R9da7642674ab436a"/>
+    <p:sldId xmlns:r="http://schemas.openxmlformats.org/officeDocument/2006/relationships" id="264" r:id="Re195d4432d4c41de"/>
+    <p:sldId xmlns:r="http://schemas.openxmlformats.org/officeDocument/2006/relationships" id="265" r:id="Rd3e72e62961946f9"/>
+    <p:sldId xmlns:r="http://schemas.openxmlformats.org/officeDocument/2006/relationships" id="266" r:id="Recd0a76feced449f"/>
+    <p:sldId xmlns:r="http://schemas.openxmlformats.org/officeDocument/2006/relationships" id="267" r:id="R7df002b0528e47f5"/>
+    <p:sldId xmlns:r="http://schemas.openxmlformats.org/officeDocument/2006/relationships" id="268" r:id="Rf9380c053644444e"/>
+    <p:sldId xmlns:r="http://schemas.openxmlformats.org/officeDocument/2006/relationships" id="269" r:id="Rf7180b15d95c4ff1"/>
+    <p:sldId xmlns:r="http://schemas.openxmlformats.org/officeDocument/2006/relationships" id="270" r:id="Rc945fed3204e44ca"/>
   </p:sldIdLst>
   <p:sldSz cx="12192000" cy="6858000"/>
   <p:notesSz cx="6858000" cy="9144000"/>
@@ -1879,7 +1879,7 @@
   </p:cSld>
   <p:clrMap bg1="lt1" tx1="dk1" bg2="lt2" tx2="dk2" accent1="accent1" accent2="accent2" accent3="accent3" accent4="accent4" accent5="accent5" accent6="accent6" hlink="hlink" folHlink="folHlink"/>
   <p:sldLayoutIdLst>
-    <p:sldLayoutId xmlns:r="http://schemas.openxmlformats.org/officeDocument/2006/relationships" id="2147483649" r:id="Re2318916609449e5"/>
+    <p:sldLayoutId xmlns:r="http://schemas.openxmlformats.org/officeDocument/2006/relationships" id="2147483649" r:id="R94b43ed76f814f36"/>
   </p:sldLayoutIdLst>
   <p:txStyles>
     <p:titleStyle>
@@ -2430,7 +2430,7 @@
           <p:cNvPr id="17" name="">
             <a:extLst xmlns:a="http://schemas.openxmlformats.org/drawingml/2006/main">
               <a:ext uri="{FF2B5EF4-FFF2-40B4-BE49-F238E27FC236}">
-                <a16:creationId xmlns:a16="http://schemas.microsoft.com/office/drawing/2014/main" id="{F5E6865B-6804-4AA4-B819-7AE0C8FBD76C}"/>
+                <a16:creationId xmlns:a16="http://schemas.microsoft.com/office/drawing/2014/main" id="{E6911541-C1A6-4D41-8D94-F901FECC991C}"/>
               </a:ext>
             </a:extLst>
           </p:cNvPr>
@@ -2463,7 +2463,7 @@
           <p:cNvPr id="2" name="">
             <a:extLst xmlns:a="http://schemas.openxmlformats.org/drawingml/2006/main">
               <a:ext uri="{FF2B5EF4-FFF2-40B4-BE49-F238E27FC236}">
-                <a16:creationId xmlns:a16="http://schemas.microsoft.com/office/drawing/2014/main" id="{6D3BA950-A122-47C0-973D-1209A085B930}"/>
+                <a16:creationId xmlns:a16="http://schemas.microsoft.com/office/drawing/2014/main" id="{39613A62-70E1-43EE-9DB1-484CF0EC1E3A}"/>
               </a:ext>
             </a:extLst>
           </p:cNvPr>
@@ -2494,7 +2494,7 @@
           <p:cNvPr id="3" name="">
             <a:extLst xmlns:a="http://schemas.openxmlformats.org/drawingml/2006/main">
               <a:ext uri="{FF2B5EF4-FFF2-40B4-BE49-F238E27FC236}">
-                <a16:creationId xmlns:a16="http://schemas.microsoft.com/office/drawing/2014/main" id="{82C3231E-3820-4F4C-98FC-09406706D8A4}"/>
+                <a16:creationId xmlns:a16="http://schemas.microsoft.com/office/drawing/2014/main" id="{595D60B1-957A-4C7E-8CD1-FE08EBC3BE59}"/>
               </a:ext>
             </a:extLst>
           </p:cNvPr>
@@ -2529,7 +2529,7 @@
           <p:nvPr/>
         </p:nvPicPr>
         <p:blipFill>
-          <a:blip xmlns:r="http://schemas.openxmlformats.org/officeDocument/2006/relationships" xmlns:a="http://schemas.openxmlformats.org/drawingml/2006/main" r:embed="Rd403bee9c3d6466a"/>
+          <a:blip xmlns:r="http://schemas.openxmlformats.org/officeDocument/2006/relationships" xmlns:a="http://schemas.openxmlformats.org/drawingml/2006/main" r:embed="Rbae54a9ee57343ad"/>
           <a:stretch xmlns:a="http://schemas.openxmlformats.org/drawingml/2006/main"/>
         </p:blipFill>
         <p:spPr>
@@ -2547,7 +2547,7 @@
           <p:cNvPr id="5" name="">
             <a:extLst xmlns:a="http://schemas.openxmlformats.org/drawingml/2006/main">
               <a:ext uri="{FF2B5EF4-FFF2-40B4-BE49-F238E27FC236}">
-                <a16:creationId xmlns:a16="http://schemas.microsoft.com/office/drawing/2014/main" id="{0F3F7F68-CE7B-491F-98E7-96084C9AE0D7}"/>
+                <a16:creationId xmlns:a16="http://schemas.microsoft.com/office/drawing/2014/main" id="{F8304E18-FDDD-40E9-9858-C2FA931048DD}"/>
               </a:ext>
             </a:extLst>
           </p:cNvPr>
@@ -2599,7 +2599,7 @@
           <p:cNvPr id="6" name="">
             <a:extLst xmlns:a="http://schemas.openxmlformats.org/drawingml/2006/main">
               <a:ext uri="{FF2B5EF4-FFF2-40B4-BE49-F238E27FC236}">
-                <a16:creationId xmlns:a16="http://schemas.microsoft.com/office/drawing/2014/main" id="{5772D411-0023-4ABF-94A4-378C4C2A4BB0}"/>
+                <a16:creationId xmlns:a16="http://schemas.microsoft.com/office/drawing/2014/main" id="{A47842DA-A8DF-49DD-A16F-C42563C45AA8}"/>
               </a:ext>
             </a:extLst>
           </p:cNvPr>
@@ -2655,7 +2655,7 @@
           <p:nvPr/>
         </p:nvPicPr>
         <p:blipFill>
-          <a:blip xmlns:r="http://schemas.openxmlformats.org/officeDocument/2006/relationships" xmlns:a="http://schemas.openxmlformats.org/drawingml/2006/main" r:embed="R935958c3b60747e7"/>
+          <a:blip xmlns:r="http://schemas.openxmlformats.org/officeDocument/2006/relationships" xmlns:a="http://schemas.openxmlformats.org/drawingml/2006/main" r:embed="Re575cf3ce7694ccf"/>
           <a:stretch xmlns:a="http://schemas.openxmlformats.org/drawingml/2006/main"/>
         </p:blipFill>
         <p:spPr>
@@ -2673,7 +2673,7 @@
           <p:cNvPr id="8" name="">
             <a:extLst xmlns:a="http://schemas.openxmlformats.org/drawingml/2006/main">
               <a:ext uri="{FF2B5EF4-FFF2-40B4-BE49-F238E27FC236}">
-                <a16:creationId xmlns:a16="http://schemas.microsoft.com/office/drawing/2014/main" id="{237F5F2A-7AF6-451D-A5C4-8026CE256247}"/>
+                <a16:creationId xmlns:a16="http://schemas.microsoft.com/office/drawing/2014/main" id="{E5B43A66-1A3F-4EF5-8D38-9128788FBEE6}"/>
               </a:ext>
             </a:extLst>
           </p:cNvPr>
@@ -2706,7 +2706,7 @@
           <p:cNvPr id="9" name="">
             <a:extLst xmlns:a="http://schemas.openxmlformats.org/drawingml/2006/main">
               <a:ext uri="{FF2B5EF4-FFF2-40B4-BE49-F238E27FC236}">
-                <a16:creationId xmlns:a16="http://schemas.microsoft.com/office/drawing/2014/main" id="{47B1CF04-00FE-4999-AFD0-7F06817BDED6}"/>
+                <a16:creationId xmlns:a16="http://schemas.microsoft.com/office/drawing/2014/main" id="{D15D01FC-1E08-4322-934D-464A191B7817}"/>
               </a:ext>
             </a:extLst>
           </p:cNvPr>
@@ -2758,7 +2758,7 @@
           <p:cNvPr id="10" name="">
             <a:extLst xmlns:a="http://schemas.openxmlformats.org/drawingml/2006/main">
               <a:ext uri="{FF2B5EF4-FFF2-40B4-BE49-F238E27FC236}">
-                <a16:creationId xmlns:a16="http://schemas.microsoft.com/office/drawing/2014/main" id="{7C9BEB61-8649-440D-9A14-BFF96FD5541D}"/>
+                <a16:creationId xmlns:a16="http://schemas.microsoft.com/office/drawing/2014/main" id="{8F2C8C11-B1F8-44B5-BD25-3DB519A8569A}"/>
               </a:ext>
             </a:extLst>
           </p:cNvPr>
@@ -2810,7 +2810,7 @@
           <p:cNvPr id="11" name="">
             <a:extLst xmlns:a="http://schemas.openxmlformats.org/drawingml/2006/main">
               <a:ext uri="{FF2B5EF4-FFF2-40B4-BE49-F238E27FC236}">
-                <a16:creationId xmlns:a16="http://schemas.microsoft.com/office/drawing/2014/main" id="{7BC4DEDA-A32E-479A-8088-E2D1DAE97977}"/>
+                <a16:creationId xmlns:a16="http://schemas.microsoft.com/office/drawing/2014/main" id="{C5D99690-F8EB-4EC1-941D-25CF3C090553}"/>
               </a:ext>
             </a:extLst>
           </p:cNvPr>
@@ -2862,7 +2862,7 @@
           <p:cNvPr id="12" name="">
             <a:extLst xmlns:a="http://schemas.openxmlformats.org/drawingml/2006/main">
               <a:ext uri="{FF2B5EF4-FFF2-40B4-BE49-F238E27FC236}">
-                <a16:creationId xmlns:a16="http://schemas.microsoft.com/office/drawing/2014/main" id="{152182E5-894A-49F8-AE2A-E0AF5B3D0EA2}"/>
+                <a16:creationId xmlns:a16="http://schemas.microsoft.com/office/drawing/2014/main" id="{7E66AD68-3D80-45F8-AF64-36BF44E3F567}"/>
               </a:ext>
             </a:extLst>
           </p:cNvPr>
@@ -2914,7 +2914,7 @@
           <p:cNvPr id="13" name="">
             <a:extLst xmlns:a="http://schemas.openxmlformats.org/drawingml/2006/main">
               <a:ext uri="{FF2B5EF4-FFF2-40B4-BE49-F238E27FC236}">
-                <a16:creationId xmlns:a16="http://schemas.microsoft.com/office/drawing/2014/main" id="{C988F7D3-DDAF-42D4-B8FF-BA775FA51B1E}"/>
+                <a16:creationId xmlns:a16="http://schemas.microsoft.com/office/drawing/2014/main" id="{104B90C5-F62B-4CA0-AD0E-BC251C9B8A09}"/>
               </a:ext>
             </a:extLst>
           </p:cNvPr>
@@ -2966,7 +2966,7 @@
           <p:cNvPr id="14" name="">
             <a:extLst xmlns:a="http://schemas.openxmlformats.org/drawingml/2006/main">
               <a:ext uri="{FF2B5EF4-FFF2-40B4-BE49-F238E27FC236}">
-                <a16:creationId xmlns:a16="http://schemas.microsoft.com/office/drawing/2014/main" id="{D5E1D636-E43C-4A6D-8CD4-CBC1942A27CD}"/>
+                <a16:creationId xmlns:a16="http://schemas.microsoft.com/office/drawing/2014/main" id="{685A3FD7-E396-428B-B96B-26FEF235376F}"/>
               </a:ext>
             </a:extLst>
           </p:cNvPr>
@@ -3018,7 +3018,7 @@
           <p:cNvPr id="15" name="">
             <a:extLst xmlns:a="http://schemas.openxmlformats.org/drawingml/2006/main">
               <a:ext uri="{FF2B5EF4-FFF2-40B4-BE49-F238E27FC236}">
-                <a16:creationId xmlns:a16="http://schemas.microsoft.com/office/drawing/2014/main" id="{5AF344E7-7CFB-427B-9D58-95645C05C866}"/>
+                <a16:creationId xmlns:a16="http://schemas.microsoft.com/office/drawing/2014/main" id="{2425DB47-7625-45B3-A745-EED0D23B1447}"/>
               </a:ext>
             </a:extLst>
           </p:cNvPr>
@@ -3070,7 +3070,7 @@
           <p:cNvPr id="16" name="">
             <a:extLst xmlns:a="http://schemas.openxmlformats.org/drawingml/2006/main">
               <a:ext uri="{FF2B5EF4-FFF2-40B4-BE49-F238E27FC236}">
-                <a16:creationId xmlns:a16="http://schemas.microsoft.com/office/drawing/2014/main" id="{3B0BD622-3859-4551-95E9-B5CD86FD85D1}"/>
+                <a16:creationId xmlns:a16="http://schemas.microsoft.com/office/drawing/2014/main" id="{B6CD92C2-B5FF-49C1-8A2E-C0E64BDEF476}"/>
               </a:ext>
             </a:extLst>
           </p:cNvPr>
@@ -3120,7 +3120,7 @@
     </p:spTree>
     <p:extLst>
       <p:ext uri="{BB962C8B-B14F-4D97-AF65-F5344CB8AC3E}">
-        <p14:creationId xmlns:p14="http://schemas.microsoft.com/office/powerpoint/2010/main" val="2013824524"/>
+        <p14:creationId xmlns:p14="http://schemas.microsoft.com/office/powerpoint/2010/main" val="312092977"/>
       </p:ext>
     </p:extLst>
   </p:cSld>
@@ -3151,7 +3151,7 @@
           <p:cNvPr id="103" name="">
             <a:extLst xmlns:a="http://schemas.openxmlformats.org/drawingml/2006/main">
               <a:ext uri="{FF2B5EF4-FFF2-40B4-BE49-F238E27FC236}">
-                <a16:creationId xmlns:a16="http://schemas.microsoft.com/office/drawing/2014/main" id="{47B13516-06AA-47CB-9FE9-8D8CEA9E00A4}"/>
+                <a16:creationId xmlns:a16="http://schemas.microsoft.com/office/drawing/2014/main" id="{CB02F858-950C-440E-A1F7-3D1EB1BCB199}"/>
               </a:ext>
             </a:extLst>
           </p:cNvPr>
@@ -3184,7 +3184,7 @@
           <p:cNvPr id="2" name="">
             <a:extLst xmlns:a="http://schemas.openxmlformats.org/drawingml/2006/main">
               <a:ext uri="{FF2B5EF4-FFF2-40B4-BE49-F238E27FC236}">
-                <a16:creationId xmlns:a16="http://schemas.microsoft.com/office/drawing/2014/main" id="{6DC235BB-0FF8-424C-9E0B-8C3712EE1122}"/>
+                <a16:creationId xmlns:a16="http://schemas.microsoft.com/office/drawing/2014/main" id="{1493B34D-D37E-44CE-89F7-879E7CE7A7EE}"/>
               </a:ext>
             </a:extLst>
           </p:cNvPr>
@@ -3215,7 +3215,7 @@
           <p:cNvPr id="3" name="">
             <a:extLst xmlns:a="http://schemas.openxmlformats.org/drawingml/2006/main">
               <a:ext uri="{FF2B5EF4-FFF2-40B4-BE49-F238E27FC236}">
-                <a16:creationId xmlns:a16="http://schemas.microsoft.com/office/drawing/2014/main" id="{B1931A13-AA09-4ED1-9311-15506A2362DA}"/>
+                <a16:creationId xmlns:a16="http://schemas.microsoft.com/office/drawing/2014/main" id="{AEE2FB8B-50C3-48B9-8901-FA025CB95C68}"/>
               </a:ext>
             </a:extLst>
           </p:cNvPr>
@@ -3267,7 +3267,7 @@
           <p:cNvPr id="4" name="">
             <a:extLst xmlns:a="http://schemas.openxmlformats.org/drawingml/2006/main">
               <a:ext uri="{FF2B5EF4-FFF2-40B4-BE49-F238E27FC236}">
-                <a16:creationId xmlns:a16="http://schemas.microsoft.com/office/drawing/2014/main" id="{48FEB06C-54C7-47C1-B677-7E300F6336E8}"/>
+                <a16:creationId xmlns:a16="http://schemas.microsoft.com/office/drawing/2014/main" id="{5593B5A3-E00D-45D4-A26B-6924655D60C4}"/>
               </a:ext>
             </a:extLst>
           </p:cNvPr>
@@ -3319,7 +3319,7 @@
           <p:cNvPr id="5" name="">
             <a:extLst xmlns:a="http://schemas.openxmlformats.org/drawingml/2006/main">
               <a:ext uri="{FF2B5EF4-FFF2-40B4-BE49-F238E27FC236}">
-                <a16:creationId xmlns:a16="http://schemas.microsoft.com/office/drawing/2014/main" id="{3113DCE1-3B84-4EAA-BA72-B216344C9053}"/>
+                <a16:creationId xmlns:a16="http://schemas.microsoft.com/office/drawing/2014/main" id="{7714004A-E270-4AFB-924C-1900797B715F}"/>
               </a:ext>
             </a:extLst>
           </p:cNvPr>
@@ -3354,7 +3354,7 @@
           <p:nvPr/>
         </p:nvPicPr>
         <p:blipFill>
-          <a:blip xmlns:r="http://schemas.openxmlformats.org/officeDocument/2006/relationships" xmlns:a="http://schemas.openxmlformats.org/drawingml/2006/main" r:embed="R6cc73033014c448b"/>
+          <a:blip xmlns:r="http://schemas.openxmlformats.org/officeDocument/2006/relationships" xmlns:a="http://schemas.openxmlformats.org/drawingml/2006/main" r:embed="R285e497c159d4568"/>
           <a:stretch xmlns:a="http://schemas.openxmlformats.org/drawingml/2006/main"/>
         </p:blipFill>
         <p:spPr>
@@ -3372,7 +3372,7 @@
           <p:cNvPr id="7" name="">
             <a:extLst xmlns:a="http://schemas.openxmlformats.org/drawingml/2006/main">
               <a:ext uri="{FF2B5EF4-FFF2-40B4-BE49-F238E27FC236}">
-                <a16:creationId xmlns:a16="http://schemas.microsoft.com/office/drawing/2014/main" id="{21380B34-6223-47AF-86FB-4AAD8A2C0796}"/>
+                <a16:creationId xmlns:a16="http://schemas.microsoft.com/office/drawing/2014/main" id="{23CE7848-3901-499E-B530-7EFA268CC756}"/>
               </a:ext>
             </a:extLst>
           </p:cNvPr>
@@ -3424,7 +3424,7 @@
           <p:cNvPr id="8" name="">
             <a:extLst xmlns:a="http://schemas.openxmlformats.org/drawingml/2006/main">
               <a:ext uri="{FF2B5EF4-FFF2-40B4-BE49-F238E27FC236}">
-                <a16:creationId xmlns:a16="http://schemas.microsoft.com/office/drawing/2014/main" id="{DCA41073-27EC-4B78-9CE9-B13E86C0615C}"/>
+                <a16:creationId xmlns:a16="http://schemas.microsoft.com/office/drawing/2014/main" id="{11404C9C-E5E3-4723-9E28-BE6E0C6D9996}"/>
               </a:ext>
             </a:extLst>
           </p:cNvPr>
@@ -3476,7 +3476,7 @@
           <p:cNvPr id="9" name="">
             <a:extLst xmlns:a="http://schemas.openxmlformats.org/drawingml/2006/main">
               <a:ext uri="{FF2B5EF4-FFF2-40B4-BE49-F238E27FC236}">
-                <a16:creationId xmlns:a16="http://schemas.microsoft.com/office/drawing/2014/main" id="{99C6C6C8-A44E-4CD2-B6D0-C6E11129897E}"/>
+                <a16:creationId xmlns:a16="http://schemas.microsoft.com/office/drawing/2014/main" id="{80182CC0-183F-4D0A-9B6F-76BD16784845}"/>
               </a:ext>
             </a:extLst>
           </p:cNvPr>
@@ -3528,7 +3528,7 @@
           <p:cNvPr id="10" name="">
             <a:extLst xmlns:a="http://schemas.openxmlformats.org/drawingml/2006/main">
               <a:ext uri="{FF2B5EF4-FFF2-40B4-BE49-F238E27FC236}">
-                <a16:creationId xmlns:a16="http://schemas.microsoft.com/office/drawing/2014/main" id="{38A95E7A-EAE2-4396-B242-1BA37CD40E9A}"/>
+                <a16:creationId xmlns:a16="http://schemas.microsoft.com/office/drawing/2014/main" id="{4B16C5F0-E6CA-42F6-801C-6EE8824CB9A5}"/>
               </a:ext>
             </a:extLst>
           </p:cNvPr>
@@ -3580,7 +3580,7 @@
           <p:cNvPr id="11" name="">
             <a:extLst xmlns:a="http://schemas.openxmlformats.org/drawingml/2006/main">
               <a:ext uri="{FF2B5EF4-FFF2-40B4-BE49-F238E27FC236}">
-                <a16:creationId xmlns:a16="http://schemas.microsoft.com/office/drawing/2014/main" id="{625AFA0F-18F4-4A24-9C56-027375E64678}"/>
+                <a16:creationId xmlns:a16="http://schemas.microsoft.com/office/drawing/2014/main" id="{47B3C176-A5E0-47D4-B08C-CB43EABA44FB}"/>
               </a:ext>
             </a:extLst>
           </p:cNvPr>
@@ -3611,7 +3611,7 @@
           <p:cNvPr id="12" name="">
             <a:extLst xmlns:a="http://schemas.openxmlformats.org/drawingml/2006/main">
               <a:ext uri="{FF2B5EF4-FFF2-40B4-BE49-F238E27FC236}">
-                <a16:creationId xmlns:a16="http://schemas.microsoft.com/office/drawing/2014/main" id="{14778A87-67BD-436E-9D83-DFB147FF027A}"/>
+                <a16:creationId xmlns:a16="http://schemas.microsoft.com/office/drawing/2014/main" id="{67F80FC6-4336-4E57-BAC7-A8B828D8ABFC}"/>
               </a:ext>
             </a:extLst>
           </p:cNvPr>
@@ -3642,7 +3642,7 @@
           <p:cNvPr id="13" name="">
             <a:extLst xmlns:a="http://schemas.openxmlformats.org/drawingml/2006/main">
               <a:ext uri="{FF2B5EF4-FFF2-40B4-BE49-F238E27FC236}">
-                <a16:creationId xmlns:a16="http://schemas.microsoft.com/office/drawing/2014/main" id="{D96954EF-44F5-4279-A08F-030423D1AD83}"/>
+                <a16:creationId xmlns:a16="http://schemas.microsoft.com/office/drawing/2014/main" id="{6A80F15D-C835-4853-8BBE-9AF83E665B9D}"/>
               </a:ext>
             </a:extLst>
           </p:cNvPr>
@@ -3694,7 +3694,7 @@
           <p:cNvPr id="14" name="">
             <a:extLst xmlns:a="http://schemas.openxmlformats.org/drawingml/2006/main">
               <a:ext uri="{FF2B5EF4-FFF2-40B4-BE49-F238E27FC236}">
-                <a16:creationId xmlns:a16="http://schemas.microsoft.com/office/drawing/2014/main" id="{257BFB47-887D-497A-9AF6-E7173202BDED}"/>
+                <a16:creationId xmlns:a16="http://schemas.microsoft.com/office/drawing/2014/main" id="{6197E77E-F255-4AD7-B256-1B85A5DC77AF}"/>
               </a:ext>
             </a:extLst>
           </p:cNvPr>
@@ -3746,7 +3746,7 @@
           <p:cNvPr id="15" name="">
             <a:extLst xmlns:a="http://schemas.openxmlformats.org/drawingml/2006/main">
               <a:ext uri="{FF2B5EF4-FFF2-40B4-BE49-F238E27FC236}">
-                <a16:creationId xmlns:a16="http://schemas.microsoft.com/office/drawing/2014/main" id="{0ECF09AE-387F-41E8-87A0-52DA2DE1E5B3}"/>
+                <a16:creationId xmlns:a16="http://schemas.microsoft.com/office/drawing/2014/main" id="{E226BD43-ABF3-468E-BCC5-C16060AD4175}"/>
               </a:ext>
             </a:extLst>
           </p:cNvPr>
@@ -3798,7 +3798,7 @@
           <p:cNvPr id="16" name="">
             <a:extLst xmlns:a="http://schemas.openxmlformats.org/drawingml/2006/main">
               <a:ext uri="{FF2B5EF4-FFF2-40B4-BE49-F238E27FC236}">
-                <a16:creationId xmlns:a16="http://schemas.microsoft.com/office/drawing/2014/main" id="{1EA721A5-750C-4117-8930-60091DF55559}"/>
+                <a16:creationId xmlns:a16="http://schemas.microsoft.com/office/drawing/2014/main" id="{8A92BA9D-9B85-4991-8D90-8E8068C08F7C}"/>
               </a:ext>
             </a:extLst>
           </p:cNvPr>
@@ -3850,7 +3850,7 @@
           <p:cNvPr id="17" name="">
             <a:extLst xmlns:a="http://schemas.openxmlformats.org/drawingml/2006/main">
               <a:ext uri="{FF2B5EF4-FFF2-40B4-BE49-F238E27FC236}">
-                <a16:creationId xmlns:a16="http://schemas.microsoft.com/office/drawing/2014/main" id="{52C404D4-BF0E-4182-B24F-7B59BACD4BCD}"/>
+                <a16:creationId xmlns:a16="http://schemas.microsoft.com/office/drawing/2014/main" id="{C321C764-7231-459C-90B8-AECDC66CE749}"/>
               </a:ext>
             </a:extLst>
           </p:cNvPr>
@@ -3902,7 +3902,7 @@
           <p:cNvPr id="18" name="">
             <a:extLst xmlns:a="http://schemas.openxmlformats.org/drawingml/2006/main">
               <a:ext uri="{FF2B5EF4-FFF2-40B4-BE49-F238E27FC236}">
-                <a16:creationId xmlns:a16="http://schemas.microsoft.com/office/drawing/2014/main" id="{3830B282-72B5-43A7-A24E-C755177947C7}"/>
+                <a16:creationId xmlns:a16="http://schemas.microsoft.com/office/drawing/2014/main" id="{A33051EB-3739-494C-AE3D-929BA74BFAFD}"/>
               </a:ext>
             </a:extLst>
           </p:cNvPr>
@@ -3933,7 +3933,7 @@
           <p:cNvPr id="19" name="">
             <a:extLst xmlns:a="http://schemas.openxmlformats.org/drawingml/2006/main">
               <a:ext uri="{FF2B5EF4-FFF2-40B4-BE49-F238E27FC236}">
-                <a16:creationId xmlns:a16="http://schemas.microsoft.com/office/drawing/2014/main" id="{10860EFF-0F2F-4DA1-8BC0-9810AB1B2AE4}"/>
+                <a16:creationId xmlns:a16="http://schemas.microsoft.com/office/drawing/2014/main" id="{B4DE4006-40AE-4116-BD5C-A8BD97B0447C}"/>
               </a:ext>
             </a:extLst>
           </p:cNvPr>
@@ -3964,7 +3964,7 @@
           <p:cNvPr id="20" name="">
             <a:extLst xmlns:a="http://schemas.openxmlformats.org/drawingml/2006/main">
               <a:ext uri="{FF2B5EF4-FFF2-40B4-BE49-F238E27FC236}">
-                <a16:creationId xmlns:a16="http://schemas.microsoft.com/office/drawing/2014/main" id="{983BE366-2745-49E7-BD4D-481E89FB8D7A}"/>
+                <a16:creationId xmlns:a16="http://schemas.microsoft.com/office/drawing/2014/main" id="{47B98A1B-DFB4-41A5-9190-F77DFAD60DB4}"/>
               </a:ext>
             </a:extLst>
           </p:cNvPr>
@@ -4016,7 +4016,7 @@
           <p:cNvPr id="21" name="">
             <a:extLst xmlns:a="http://schemas.openxmlformats.org/drawingml/2006/main">
               <a:ext uri="{FF2B5EF4-FFF2-40B4-BE49-F238E27FC236}">
-                <a16:creationId xmlns:a16="http://schemas.microsoft.com/office/drawing/2014/main" id="{DC2CB886-5115-4A01-8E23-0FD551C0B8A9}"/>
+                <a16:creationId xmlns:a16="http://schemas.microsoft.com/office/drawing/2014/main" id="{6D63A31B-1BA4-461C-8D4A-F8A400B5398E}"/>
               </a:ext>
             </a:extLst>
           </p:cNvPr>
@@ -4068,7 +4068,7 @@
           <p:cNvPr id="22" name="">
             <a:extLst xmlns:a="http://schemas.openxmlformats.org/drawingml/2006/main">
               <a:ext uri="{FF2B5EF4-FFF2-40B4-BE49-F238E27FC236}">
-                <a16:creationId xmlns:a16="http://schemas.microsoft.com/office/drawing/2014/main" id="{AA760714-1898-426C-90E0-086CEC59579D}"/>
+                <a16:creationId xmlns:a16="http://schemas.microsoft.com/office/drawing/2014/main" id="{468585F6-31EE-4E81-AA9B-C9AEA5ADF43E}"/>
               </a:ext>
             </a:extLst>
           </p:cNvPr>
@@ -4120,7 +4120,7 @@
           <p:cNvPr id="23" name="">
             <a:extLst xmlns:a="http://schemas.openxmlformats.org/drawingml/2006/main">
               <a:ext uri="{FF2B5EF4-FFF2-40B4-BE49-F238E27FC236}">
-                <a16:creationId xmlns:a16="http://schemas.microsoft.com/office/drawing/2014/main" id="{26DEAB78-4267-46C4-BA2D-11FCCD4DD746}"/>
+                <a16:creationId xmlns:a16="http://schemas.microsoft.com/office/drawing/2014/main" id="{2DD04532-9703-4EF6-B466-6030F1D9B339}"/>
               </a:ext>
             </a:extLst>
           </p:cNvPr>
@@ -4172,7 +4172,7 @@
           <p:cNvPr id="24" name="">
             <a:extLst xmlns:a="http://schemas.openxmlformats.org/drawingml/2006/main">
               <a:ext uri="{FF2B5EF4-FFF2-40B4-BE49-F238E27FC236}">
-                <a16:creationId xmlns:a16="http://schemas.microsoft.com/office/drawing/2014/main" id="{7E3B69DE-2C7C-4324-8530-6D5CEDB9A8C6}"/>
+                <a16:creationId xmlns:a16="http://schemas.microsoft.com/office/drawing/2014/main" id="{5164CEC2-18C8-4FFD-A121-755D12A57152}"/>
               </a:ext>
             </a:extLst>
           </p:cNvPr>
@@ -4224,7 +4224,7 @@
           <p:cNvPr id="25" name="">
             <a:extLst xmlns:a="http://schemas.openxmlformats.org/drawingml/2006/main">
               <a:ext uri="{FF2B5EF4-FFF2-40B4-BE49-F238E27FC236}">
-                <a16:creationId xmlns:a16="http://schemas.microsoft.com/office/drawing/2014/main" id="{A8DECDF5-3D81-4997-8911-C214EDA89889}"/>
+                <a16:creationId xmlns:a16="http://schemas.microsoft.com/office/drawing/2014/main" id="{2A77B3B3-26E7-4B9C-891E-D85CB1583833}"/>
               </a:ext>
             </a:extLst>
           </p:cNvPr>
@@ -4255,7 +4255,7 @@
           <p:cNvPr id="26" name="">
             <a:extLst xmlns:a="http://schemas.openxmlformats.org/drawingml/2006/main">
               <a:ext uri="{FF2B5EF4-FFF2-40B4-BE49-F238E27FC236}">
-                <a16:creationId xmlns:a16="http://schemas.microsoft.com/office/drawing/2014/main" id="{D509180F-9014-45FD-A557-9A2BDBC08832}"/>
+                <a16:creationId xmlns:a16="http://schemas.microsoft.com/office/drawing/2014/main" id="{F4E2B169-A2C8-4D16-B009-8E40D2CAF2A6}"/>
               </a:ext>
             </a:extLst>
           </p:cNvPr>
@@ -4307,7 +4307,7 @@
           <p:cNvPr id="27" name="">
             <a:extLst xmlns:a="http://schemas.openxmlformats.org/drawingml/2006/main">
               <a:ext uri="{FF2B5EF4-FFF2-40B4-BE49-F238E27FC236}">
-                <a16:creationId xmlns:a16="http://schemas.microsoft.com/office/drawing/2014/main" id="{F7E7F7B2-F63B-4DEA-A091-6D99B5353D9D}"/>
+                <a16:creationId xmlns:a16="http://schemas.microsoft.com/office/drawing/2014/main" id="{E8571C7E-7293-4051-A7BF-201B998704C1}"/>
               </a:ext>
             </a:extLst>
           </p:cNvPr>
@@ -4359,7 +4359,7 @@
           <p:cNvPr id="28" name="">
             <a:extLst xmlns:a="http://schemas.openxmlformats.org/drawingml/2006/main">
               <a:ext uri="{FF2B5EF4-FFF2-40B4-BE49-F238E27FC236}">
-                <a16:creationId xmlns:a16="http://schemas.microsoft.com/office/drawing/2014/main" id="{FCABC509-478C-4D40-BAEA-A6802CCD4D6E}"/>
+                <a16:creationId xmlns:a16="http://schemas.microsoft.com/office/drawing/2014/main" id="{11281AB4-0B2E-4D6E-BACB-776092986BA7}"/>
               </a:ext>
             </a:extLst>
           </p:cNvPr>
@@ -4411,7 +4411,7 @@
           <p:cNvPr id="29" name="">
             <a:extLst xmlns:a="http://schemas.openxmlformats.org/drawingml/2006/main">
               <a:ext uri="{FF2B5EF4-FFF2-40B4-BE49-F238E27FC236}">
-                <a16:creationId xmlns:a16="http://schemas.microsoft.com/office/drawing/2014/main" id="{DB8CA1A9-82FF-4347-B856-3846582DADEE}"/>
+                <a16:creationId xmlns:a16="http://schemas.microsoft.com/office/drawing/2014/main" id="{B23717CE-E2B8-44DC-BE7D-959A9F3DF523}"/>
               </a:ext>
             </a:extLst>
           </p:cNvPr>
@@ -4463,7 +4463,7 @@
           <p:cNvPr id="30" name="">
             <a:extLst xmlns:a="http://schemas.openxmlformats.org/drawingml/2006/main">
               <a:ext uri="{FF2B5EF4-FFF2-40B4-BE49-F238E27FC236}">
-                <a16:creationId xmlns:a16="http://schemas.microsoft.com/office/drawing/2014/main" id="{68F760CC-8C35-46CC-81C3-EDECC001D1D6}"/>
+                <a16:creationId xmlns:a16="http://schemas.microsoft.com/office/drawing/2014/main" id="{B4ECCD6F-238F-4857-90D2-47CE461AF381}"/>
               </a:ext>
             </a:extLst>
           </p:cNvPr>
@@ -4515,7 +4515,7 @@
           <p:cNvPr id="31" name="">
             <a:extLst xmlns:a="http://schemas.openxmlformats.org/drawingml/2006/main">
               <a:ext uri="{FF2B5EF4-FFF2-40B4-BE49-F238E27FC236}">
-                <a16:creationId xmlns:a16="http://schemas.microsoft.com/office/drawing/2014/main" id="{FC4C7517-6296-4E70-8084-2EDBE7B62BE9}"/>
+                <a16:creationId xmlns:a16="http://schemas.microsoft.com/office/drawing/2014/main" id="{762F3327-8E3B-4943-9513-B32C75F5FFDA}"/>
               </a:ext>
             </a:extLst>
           </p:cNvPr>
@@ -4546,7 +4546,7 @@
           <p:cNvPr id="32" name="">
             <a:extLst xmlns:a="http://schemas.openxmlformats.org/drawingml/2006/main">
               <a:ext uri="{FF2B5EF4-FFF2-40B4-BE49-F238E27FC236}">
-                <a16:creationId xmlns:a16="http://schemas.microsoft.com/office/drawing/2014/main" id="{8CAE8884-65F4-4F97-BFE0-E75E59065552}"/>
+                <a16:creationId xmlns:a16="http://schemas.microsoft.com/office/drawing/2014/main" id="{7A354990-2FDB-41DA-BFFD-2A7FD0BD8589}"/>
               </a:ext>
             </a:extLst>
           </p:cNvPr>
@@ -4577,7 +4577,7 @@
           <p:cNvPr id="33" name="">
             <a:extLst xmlns:a="http://schemas.openxmlformats.org/drawingml/2006/main">
               <a:ext uri="{FF2B5EF4-FFF2-40B4-BE49-F238E27FC236}">
-                <a16:creationId xmlns:a16="http://schemas.microsoft.com/office/drawing/2014/main" id="{F7654906-DC73-410F-B354-08ED887768D9}"/>
+                <a16:creationId xmlns:a16="http://schemas.microsoft.com/office/drawing/2014/main" id="{4F693D39-007A-46A3-88CD-C0E962DBFBCE}"/>
               </a:ext>
             </a:extLst>
           </p:cNvPr>
@@ -4629,7 +4629,7 @@
           <p:cNvPr id="34" name="">
             <a:extLst xmlns:a="http://schemas.openxmlformats.org/drawingml/2006/main">
               <a:ext uri="{FF2B5EF4-FFF2-40B4-BE49-F238E27FC236}">
-                <a16:creationId xmlns:a16="http://schemas.microsoft.com/office/drawing/2014/main" id="{7B7C594B-5806-41F0-A6F7-6D7D80CDBDCF}"/>
+                <a16:creationId xmlns:a16="http://schemas.microsoft.com/office/drawing/2014/main" id="{D0BF9B0D-B554-49DB-85C6-189672AE0116}"/>
               </a:ext>
             </a:extLst>
           </p:cNvPr>
@@ -4681,7 +4681,7 @@
           <p:cNvPr id="35" name="">
             <a:extLst xmlns:a="http://schemas.openxmlformats.org/drawingml/2006/main">
               <a:ext uri="{FF2B5EF4-FFF2-40B4-BE49-F238E27FC236}">
-                <a16:creationId xmlns:a16="http://schemas.microsoft.com/office/drawing/2014/main" id="{34A1BC0E-1EC6-4BBA-9BA9-9E0FA0491DAD}"/>
+                <a16:creationId xmlns:a16="http://schemas.microsoft.com/office/drawing/2014/main" id="{3A75F725-0FD8-456E-823F-5FAF87545D29}"/>
               </a:ext>
             </a:extLst>
           </p:cNvPr>
@@ -4733,7 +4733,7 @@
           <p:cNvPr id="36" name="">
             <a:extLst xmlns:a="http://schemas.openxmlformats.org/drawingml/2006/main">
               <a:ext uri="{FF2B5EF4-FFF2-40B4-BE49-F238E27FC236}">
-                <a16:creationId xmlns:a16="http://schemas.microsoft.com/office/drawing/2014/main" id="{1C63C208-CB1E-4E9F-84F3-8C2B88E064E6}"/>
+                <a16:creationId xmlns:a16="http://schemas.microsoft.com/office/drawing/2014/main" id="{FB7BDDC7-F6EA-4EEA-8F3E-0AF6E87670FF}"/>
               </a:ext>
             </a:extLst>
           </p:cNvPr>
@@ -4785,7 +4785,7 @@
           <p:cNvPr id="37" name="">
             <a:extLst xmlns:a="http://schemas.openxmlformats.org/drawingml/2006/main">
               <a:ext uri="{FF2B5EF4-FFF2-40B4-BE49-F238E27FC236}">
-                <a16:creationId xmlns:a16="http://schemas.microsoft.com/office/drawing/2014/main" id="{AC8A6D58-83CB-4A46-BDF7-ED89448962EC}"/>
+                <a16:creationId xmlns:a16="http://schemas.microsoft.com/office/drawing/2014/main" id="{78D228E4-F451-422E-97B4-9F2FB9B6654F}"/>
               </a:ext>
             </a:extLst>
           </p:cNvPr>
@@ -4837,7 +4837,7 @@
           <p:cNvPr id="38" name="">
             <a:extLst xmlns:a="http://schemas.openxmlformats.org/drawingml/2006/main">
               <a:ext uri="{FF2B5EF4-FFF2-40B4-BE49-F238E27FC236}">
-                <a16:creationId xmlns:a16="http://schemas.microsoft.com/office/drawing/2014/main" id="{0B19B6DF-6314-40AB-9B3C-E072E65FFE64}"/>
+                <a16:creationId xmlns:a16="http://schemas.microsoft.com/office/drawing/2014/main" id="{45706BCE-61E2-4A97-9D9C-F6E329911740}"/>
               </a:ext>
             </a:extLst>
           </p:cNvPr>
@@ -4868,7 +4868,7 @@
           <p:cNvPr id="39" name="">
             <a:extLst xmlns:a="http://schemas.openxmlformats.org/drawingml/2006/main">
               <a:ext uri="{FF2B5EF4-FFF2-40B4-BE49-F238E27FC236}">
-                <a16:creationId xmlns:a16="http://schemas.microsoft.com/office/drawing/2014/main" id="{6666F3BA-B95C-48E8-9FFC-CE60009F0232}"/>
+                <a16:creationId xmlns:a16="http://schemas.microsoft.com/office/drawing/2014/main" id="{61399035-C10C-4CF9-9C54-8BA1CBDF80E3}"/>
               </a:ext>
             </a:extLst>
           </p:cNvPr>
@@ -4920,7 +4920,7 @@
           <p:cNvPr id="40" name="">
             <a:extLst xmlns:a="http://schemas.openxmlformats.org/drawingml/2006/main">
               <a:ext uri="{FF2B5EF4-FFF2-40B4-BE49-F238E27FC236}">
-                <a16:creationId xmlns:a16="http://schemas.microsoft.com/office/drawing/2014/main" id="{6069882C-DC6C-44C0-A938-CF2CD813BD82}"/>
+                <a16:creationId xmlns:a16="http://schemas.microsoft.com/office/drawing/2014/main" id="{13E8C7AE-8ECE-4BA7-B9E4-C3906F7513E2}"/>
               </a:ext>
             </a:extLst>
           </p:cNvPr>
@@ -4972,7 +4972,7 @@
           <p:cNvPr id="41" name="">
             <a:extLst xmlns:a="http://schemas.openxmlformats.org/drawingml/2006/main">
               <a:ext uri="{FF2B5EF4-FFF2-40B4-BE49-F238E27FC236}">
-                <a16:creationId xmlns:a16="http://schemas.microsoft.com/office/drawing/2014/main" id="{0A92A7B2-7AC8-46F4-B9AA-FED616E2D778}"/>
+                <a16:creationId xmlns:a16="http://schemas.microsoft.com/office/drawing/2014/main" id="{D05A627C-89EF-4CCA-B9DD-9D0F0C6556CB}"/>
               </a:ext>
             </a:extLst>
           </p:cNvPr>
@@ -5024,7 +5024,7 @@
           <p:cNvPr id="42" name="">
             <a:extLst xmlns:a="http://schemas.openxmlformats.org/drawingml/2006/main">
               <a:ext uri="{FF2B5EF4-FFF2-40B4-BE49-F238E27FC236}">
-                <a16:creationId xmlns:a16="http://schemas.microsoft.com/office/drawing/2014/main" id="{B51EFDFC-43F6-40AF-9931-B0C6C4D3195D}"/>
+                <a16:creationId xmlns:a16="http://schemas.microsoft.com/office/drawing/2014/main" id="{F23D73DC-8F33-4D97-911D-0A8DBEBEA4D2}"/>
               </a:ext>
             </a:extLst>
           </p:cNvPr>
@@ -5076,7 +5076,7 @@
           <p:cNvPr id="43" name="">
             <a:extLst xmlns:a="http://schemas.openxmlformats.org/drawingml/2006/main">
               <a:ext uri="{FF2B5EF4-FFF2-40B4-BE49-F238E27FC236}">
-                <a16:creationId xmlns:a16="http://schemas.microsoft.com/office/drawing/2014/main" id="{4FFE3DCB-2FDF-489E-8C8A-5F4898A2A569}"/>
+                <a16:creationId xmlns:a16="http://schemas.microsoft.com/office/drawing/2014/main" id="{CFAB3154-7EBE-4F8B-8720-83F79F203293}"/>
               </a:ext>
             </a:extLst>
           </p:cNvPr>
@@ -5128,7 +5128,7 @@
           <p:cNvPr id="44" name="">
             <a:extLst xmlns:a="http://schemas.openxmlformats.org/drawingml/2006/main">
               <a:ext uri="{FF2B5EF4-FFF2-40B4-BE49-F238E27FC236}">
-                <a16:creationId xmlns:a16="http://schemas.microsoft.com/office/drawing/2014/main" id="{B4E569D6-6626-411B-A06A-604922DC843A}"/>
+                <a16:creationId xmlns:a16="http://schemas.microsoft.com/office/drawing/2014/main" id="{47DF9DEE-D4E1-443E-9EAE-D984A13EF57F}"/>
               </a:ext>
             </a:extLst>
           </p:cNvPr>
@@ -5159,7 +5159,7 @@
           <p:cNvPr id="45" name="">
             <a:extLst xmlns:a="http://schemas.openxmlformats.org/drawingml/2006/main">
               <a:ext uri="{FF2B5EF4-FFF2-40B4-BE49-F238E27FC236}">
-                <a16:creationId xmlns:a16="http://schemas.microsoft.com/office/drawing/2014/main" id="{1D15BE6F-D0D5-4853-9F4F-22F4E3CC5391}"/>
+                <a16:creationId xmlns:a16="http://schemas.microsoft.com/office/drawing/2014/main" id="{95E2DEBA-1C33-4E50-AF54-1014DF35FE97}"/>
               </a:ext>
             </a:extLst>
           </p:cNvPr>
@@ -5190,7 +5190,7 @@
           <p:cNvPr id="46" name="">
             <a:extLst xmlns:a="http://schemas.openxmlformats.org/drawingml/2006/main">
               <a:ext uri="{FF2B5EF4-FFF2-40B4-BE49-F238E27FC236}">
-                <a16:creationId xmlns:a16="http://schemas.microsoft.com/office/drawing/2014/main" id="{96B9683B-CFD6-462E-B46D-F54E73268914}"/>
+                <a16:creationId xmlns:a16="http://schemas.microsoft.com/office/drawing/2014/main" id="{558BF399-1CA0-4A9A-A432-7EBD927C7B65}"/>
               </a:ext>
             </a:extLst>
           </p:cNvPr>
@@ -5242,7 +5242,7 @@
           <p:cNvPr id="47" name="">
             <a:extLst xmlns:a="http://schemas.openxmlformats.org/drawingml/2006/main">
               <a:ext uri="{FF2B5EF4-FFF2-40B4-BE49-F238E27FC236}">
-                <a16:creationId xmlns:a16="http://schemas.microsoft.com/office/drawing/2014/main" id="{E9430341-F6F3-478B-AD3D-7F15CFB2B0C7}"/>
+                <a16:creationId xmlns:a16="http://schemas.microsoft.com/office/drawing/2014/main" id="{BCC2EE67-CB33-4442-9078-00E4CB755A68}"/>
               </a:ext>
             </a:extLst>
           </p:cNvPr>
@@ -5294,7 +5294,7 @@
           <p:cNvPr id="48" name="">
             <a:extLst xmlns:a="http://schemas.openxmlformats.org/drawingml/2006/main">
               <a:ext uri="{FF2B5EF4-FFF2-40B4-BE49-F238E27FC236}">
-                <a16:creationId xmlns:a16="http://schemas.microsoft.com/office/drawing/2014/main" id="{910C31AA-54BD-49BC-BD05-29BEC9EF3B13}"/>
+                <a16:creationId xmlns:a16="http://schemas.microsoft.com/office/drawing/2014/main" id="{AABDD975-BEF7-499C-9E76-9CE11947AD1B}"/>
               </a:ext>
             </a:extLst>
           </p:cNvPr>
@@ -5346,7 +5346,7 @@
           <p:cNvPr id="49" name="">
             <a:extLst xmlns:a="http://schemas.openxmlformats.org/drawingml/2006/main">
               <a:ext uri="{FF2B5EF4-FFF2-40B4-BE49-F238E27FC236}">
-                <a16:creationId xmlns:a16="http://schemas.microsoft.com/office/drawing/2014/main" id="{766F050B-7A96-49CC-95C1-7F709C926C41}"/>
+                <a16:creationId xmlns:a16="http://schemas.microsoft.com/office/drawing/2014/main" id="{232BB605-52D5-46D3-960D-4938749496AB}"/>
               </a:ext>
             </a:extLst>
           </p:cNvPr>
@@ -5398,7 +5398,7 @@
           <p:cNvPr id="50" name="">
             <a:extLst xmlns:a="http://schemas.openxmlformats.org/drawingml/2006/main">
               <a:ext uri="{FF2B5EF4-FFF2-40B4-BE49-F238E27FC236}">
-                <a16:creationId xmlns:a16="http://schemas.microsoft.com/office/drawing/2014/main" id="{85DBD125-D296-470C-8F84-50A85A5FF326}"/>
+                <a16:creationId xmlns:a16="http://schemas.microsoft.com/office/drawing/2014/main" id="{43929F51-F788-47D4-83AB-728C9F7683FE}"/>
               </a:ext>
             </a:extLst>
           </p:cNvPr>
@@ -5450,7 +5450,7 @@
           <p:cNvPr id="51" name="">
             <a:extLst xmlns:a="http://schemas.openxmlformats.org/drawingml/2006/main">
               <a:ext uri="{FF2B5EF4-FFF2-40B4-BE49-F238E27FC236}">
-                <a16:creationId xmlns:a16="http://schemas.microsoft.com/office/drawing/2014/main" id="{B722CB88-0D73-4B03-81E1-C3B503BAAEFB}"/>
+                <a16:creationId xmlns:a16="http://schemas.microsoft.com/office/drawing/2014/main" id="{52CC7B1E-7DBA-4D70-A276-29D1F3403E17}"/>
               </a:ext>
             </a:extLst>
           </p:cNvPr>
@@ -5481,7 +5481,7 @@
           <p:cNvPr id="52" name="">
             <a:extLst xmlns:a="http://schemas.openxmlformats.org/drawingml/2006/main">
               <a:ext uri="{FF2B5EF4-FFF2-40B4-BE49-F238E27FC236}">
-                <a16:creationId xmlns:a16="http://schemas.microsoft.com/office/drawing/2014/main" id="{A36798BC-F37D-4A4D-AD1C-64F47723F6B4}"/>
+                <a16:creationId xmlns:a16="http://schemas.microsoft.com/office/drawing/2014/main" id="{81F8144C-641D-40DE-8F08-B51CEF4DEC69}"/>
               </a:ext>
             </a:extLst>
           </p:cNvPr>
@@ -5533,7 +5533,7 @@
           <p:cNvPr id="53" name="">
             <a:extLst xmlns:a="http://schemas.openxmlformats.org/drawingml/2006/main">
               <a:ext uri="{FF2B5EF4-FFF2-40B4-BE49-F238E27FC236}">
-                <a16:creationId xmlns:a16="http://schemas.microsoft.com/office/drawing/2014/main" id="{20E31A89-6189-46FD-8E2F-8E367D54BF43}"/>
+                <a16:creationId xmlns:a16="http://schemas.microsoft.com/office/drawing/2014/main" id="{2D360735-3178-4313-A60D-B8FA0CCE5603}"/>
               </a:ext>
             </a:extLst>
           </p:cNvPr>
@@ -5585,7 +5585,7 @@
           <p:cNvPr id="54" name="">
             <a:extLst xmlns:a="http://schemas.openxmlformats.org/drawingml/2006/main">
               <a:ext uri="{FF2B5EF4-FFF2-40B4-BE49-F238E27FC236}">
-                <a16:creationId xmlns:a16="http://schemas.microsoft.com/office/drawing/2014/main" id="{DC93E8ED-2994-47BE-9AF3-4A52BDEF6C53}"/>
+                <a16:creationId xmlns:a16="http://schemas.microsoft.com/office/drawing/2014/main" id="{68EABC88-0174-4B3B-B815-411E7BCD1FC7}"/>
               </a:ext>
             </a:extLst>
           </p:cNvPr>
@@ -5637,7 +5637,7 @@
           <p:cNvPr id="55" name="">
             <a:extLst xmlns:a="http://schemas.openxmlformats.org/drawingml/2006/main">
               <a:ext uri="{FF2B5EF4-FFF2-40B4-BE49-F238E27FC236}">
-                <a16:creationId xmlns:a16="http://schemas.microsoft.com/office/drawing/2014/main" id="{88208C28-DE88-40B9-BC66-EE9E892D41C5}"/>
+                <a16:creationId xmlns:a16="http://schemas.microsoft.com/office/drawing/2014/main" id="{4A4624F5-1277-407D-B8B6-ECB4283F5AB6}"/>
               </a:ext>
             </a:extLst>
           </p:cNvPr>
@@ -5689,7 +5689,7 @@
           <p:cNvPr id="56" name="">
             <a:extLst xmlns:a="http://schemas.openxmlformats.org/drawingml/2006/main">
               <a:ext uri="{FF2B5EF4-FFF2-40B4-BE49-F238E27FC236}">
-                <a16:creationId xmlns:a16="http://schemas.microsoft.com/office/drawing/2014/main" id="{05794288-FF69-498C-B308-918E9759B0CB}"/>
+                <a16:creationId xmlns:a16="http://schemas.microsoft.com/office/drawing/2014/main" id="{514E6CBA-59E3-4FE1-A21E-C467638ABD73}"/>
               </a:ext>
             </a:extLst>
           </p:cNvPr>
@@ -5741,7 +5741,7 @@
           <p:cNvPr id="57" name="">
             <a:extLst xmlns:a="http://schemas.openxmlformats.org/drawingml/2006/main">
               <a:ext uri="{FF2B5EF4-FFF2-40B4-BE49-F238E27FC236}">
-                <a16:creationId xmlns:a16="http://schemas.microsoft.com/office/drawing/2014/main" id="{A6A487E3-EAED-4DEB-BFA9-50414AAB424E}"/>
+                <a16:creationId xmlns:a16="http://schemas.microsoft.com/office/drawing/2014/main" id="{8B2F5D23-F025-4E56-A4F5-2A9C3036F5B0}"/>
               </a:ext>
             </a:extLst>
           </p:cNvPr>
@@ -5772,7 +5772,7 @@
           <p:cNvPr id="58" name="">
             <a:extLst xmlns:a="http://schemas.openxmlformats.org/drawingml/2006/main">
               <a:ext uri="{FF2B5EF4-FFF2-40B4-BE49-F238E27FC236}">
-                <a16:creationId xmlns:a16="http://schemas.microsoft.com/office/drawing/2014/main" id="{3DBAAA57-176B-4A3F-A35B-B2895F74D49C}"/>
+                <a16:creationId xmlns:a16="http://schemas.microsoft.com/office/drawing/2014/main" id="{9D50134B-C684-43A5-B743-43B65904259E}"/>
               </a:ext>
             </a:extLst>
           </p:cNvPr>
@@ -5803,7 +5803,7 @@
           <p:cNvPr id="59" name="">
             <a:extLst xmlns:a="http://schemas.openxmlformats.org/drawingml/2006/main">
               <a:ext uri="{FF2B5EF4-FFF2-40B4-BE49-F238E27FC236}">
-                <a16:creationId xmlns:a16="http://schemas.microsoft.com/office/drawing/2014/main" id="{4861DF03-C0D1-4A11-AF10-9D8A094B0B15}"/>
+                <a16:creationId xmlns:a16="http://schemas.microsoft.com/office/drawing/2014/main" id="{9667BEA5-C407-492F-98C1-AEE3897DB6FC}"/>
               </a:ext>
             </a:extLst>
           </p:cNvPr>
@@ -5855,7 +5855,7 @@
           <p:cNvPr id="60" name="">
             <a:extLst xmlns:a="http://schemas.openxmlformats.org/drawingml/2006/main">
               <a:ext uri="{FF2B5EF4-FFF2-40B4-BE49-F238E27FC236}">
-                <a16:creationId xmlns:a16="http://schemas.microsoft.com/office/drawing/2014/main" id="{A142A89C-ED37-4859-BA75-B1A199F7653F}"/>
+                <a16:creationId xmlns:a16="http://schemas.microsoft.com/office/drawing/2014/main" id="{54EE10B2-3B38-40DA-BBCF-8CCD387511F8}"/>
               </a:ext>
             </a:extLst>
           </p:cNvPr>
@@ -5907,7 +5907,7 @@
           <p:cNvPr id="61" name="">
             <a:extLst xmlns:a="http://schemas.openxmlformats.org/drawingml/2006/main">
               <a:ext uri="{FF2B5EF4-FFF2-40B4-BE49-F238E27FC236}">
-                <a16:creationId xmlns:a16="http://schemas.microsoft.com/office/drawing/2014/main" id="{668C63CD-ABA2-456B-9950-DC0E383EE9C5}"/>
+                <a16:creationId xmlns:a16="http://schemas.microsoft.com/office/drawing/2014/main" id="{577DF618-715D-4FA1-A77F-26DD539E16E0}"/>
               </a:ext>
             </a:extLst>
           </p:cNvPr>
@@ -5959,7 +5959,7 @@
           <p:cNvPr id="62" name="">
             <a:extLst xmlns:a="http://schemas.openxmlformats.org/drawingml/2006/main">
               <a:ext uri="{FF2B5EF4-FFF2-40B4-BE49-F238E27FC236}">
-                <a16:creationId xmlns:a16="http://schemas.microsoft.com/office/drawing/2014/main" id="{DCECEA80-E92B-4BCA-99BD-F0736F3268D6}"/>
+                <a16:creationId xmlns:a16="http://schemas.microsoft.com/office/drawing/2014/main" id="{E5C7B24B-1377-4698-AA86-0FF479E3715C}"/>
               </a:ext>
             </a:extLst>
           </p:cNvPr>
@@ -6011,7 +6011,7 @@
           <p:cNvPr id="63" name="">
             <a:extLst xmlns:a="http://schemas.openxmlformats.org/drawingml/2006/main">
               <a:ext uri="{FF2B5EF4-FFF2-40B4-BE49-F238E27FC236}">
-                <a16:creationId xmlns:a16="http://schemas.microsoft.com/office/drawing/2014/main" id="{6F82C50F-D778-4C14-B7A1-E49617ADC555}"/>
+                <a16:creationId xmlns:a16="http://schemas.microsoft.com/office/drawing/2014/main" id="{1335D770-322C-48B8-8394-55F9E4A72609}"/>
               </a:ext>
             </a:extLst>
           </p:cNvPr>
@@ -6063,7 +6063,7 @@
           <p:cNvPr id="64" name="">
             <a:extLst xmlns:a="http://schemas.openxmlformats.org/drawingml/2006/main">
               <a:ext uri="{FF2B5EF4-FFF2-40B4-BE49-F238E27FC236}">
-                <a16:creationId xmlns:a16="http://schemas.microsoft.com/office/drawing/2014/main" id="{4A95B408-F091-4269-902C-90761FE78960}"/>
+                <a16:creationId xmlns:a16="http://schemas.microsoft.com/office/drawing/2014/main" id="{D8291FCF-E390-4611-9EE7-5748708CC215}"/>
               </a:ext>
             </a:extLst>
           </p:cNvPr>
@@ -6094,7 +6094,7 @@
           <p:cNvPr id="65" name="">
             <a:extLst xmlns:a="http://schemas.openxmlformats.org/drawingml/2006/main">
               <a:ext uri="{FF2B5EF4-FFF2-40B4-BE49-F238E27FC236}">
-                <a16:creationId xmlns:a16="http://schemas.microsoft.com/office/drawing/2014/main" id="{74E86AA4-423D-41EB-9B76-BA94BAEC32BA}"/>
+                <a16:creationId xmlns:a16="http://schemas.microsoft.com/office/drawing/2014/main" id="{5CE123D0-C1A5-495D-BA2D-CF50B3B814DF}"/>
               </a:ext>
             </a:extLst>
           </p:cNvPr>
@@ -6146,7 +6146,7 @@
           <p:cNvPr id="66" name="">
             <a:extLst xmlns:a="http://schemas.openxmlformats.org/drawingml/2006/main">
               <a:ext uri="{FF2B5EF4-FFF2-40B4-BE49-F238E27FC236}">
-                <a16:creationId xmlns:a16="http://schemas.microsoft.com/office/drawing/2014/main" id="{3409708B-2783-4443-9641-E5EDB3D984BE}"/>
+                <a16:creationId xmlns:a16="http://schemas.microsoft.com/office/drawing/2014/main" id="{4811727E-6248-42E0-B2ED-7409571854F1}"/>
               </a:ext>
             </a:extLst>
           </p:cNvPr>
@@ -6198,7 +6198,7 @@
           <p:cNvPr id="67" name="">
             <a:extLst xmlns:a="http://schemas.openxmlformats.org/drawingml/2006/main">
               <a:ext uri="{FF2B5EF4-FFF2-40B4-BE49-F238E27FC236}">
-                <a16:creationId xmlns:a16="http://schemas.microsoft.com/office/drawing/2014/main" id="{6FE17283-89CD-4C63-9A70-2B75801B098E}"/>
+                <a16:creationId xmlns:a16="http://schemas.microsoft.com/office/drawing/2014/main" id="{91D1A59D-B1EA-4008-B1EA-E86A2D1CFE85}"/>
               </a:ext>
             </a:extLst>
           </p:cNvPr>
@@ -6250,7 +6250,7 @@
           <p:cNvPr id="68" name="">
             <a:extLst xmlns:a="http://schemas.openxmlformats.org/drawingml/2006/main">
               <a:ext uri="{FF2B5EF4-FFF2-40B4-BE49-F238E27FC236}">
-                <a16:creationId xmlns:a16="http://schemas.microsoft.com/office/drawing/2014/main" id="{7D2EC8A4-D6C3-401E-A19A-2D00E1EA3FFF}"/>
+                <a16:creationId xmlns:a16="http://schemas.microsoft.com/office/drawing/2014/main" id="{E5747664-978A-49E3-8976-AC931A4874A0}"/>
               </a:ext>
             </a:extLst>
           </p:cNvPr>
@@ -6302,7 +6302,7 @@
           <p:cNvPr id="69" name="">
             <a:extLst xmlns:a="http://schemas.openxmlformats.org/drawingml/2006/main">
               <a:ext uri="{FF2B5EF4-FFF2-40B4-BE49-F238E27FC236}">
-                <a16:creationId xmlns:a16="http://schemas.microsoft.com/office/drawing/2014/main" id="{FA723F97-B6B9-4500-977E-C56DC45A1B2E}"/>
+                <a16:creationId xmlns:a16="http://schemas.microsoft.com/office/drawing/2014/main" id="{DBE27F6C-A5C1-4A73-BAAA-9E0F92E98DA9}"/>
               </a:ext>
             </a:extLst>
           </p:cNvPr>
@@ -6354,7 +6354,7 @@
           <p:cNvPr id="70" name="">
             <a:extLst xmlns:a="http://schemas.openxmlformats.org/drawingml/2006/main">
               <a:ext uri="{FF2B5EF4-FFF2-40B4-BE49-F238E27FC236}">
-                <a16:creationId xmlns:a16="http://schemas.microsoft.com/office/drawing/2014/main" id="{48338EBD-7B8A-44DB-B022-C1D49938E113}"/>
+                <a16:creationId xmlns:a16="http://schemas.microsoft.com/office/drawing/2014/main" id="{73B1229F-FC39-4C28-A03E-3989B91C7C2C}"/>
               </a:ext>
             </a:extLst>
           </p:cNvPr>
@@ -6385,7 +6385,7 @@
           <p:cNvPr id="71" name="">
             <a:extLst xmlns:a="http://schemas.openxmlformats.org/drawingml/2006/main">
               <a:ext uri="{FF2B5EF4-FFF2-40B4-BE49-F238E27FC236}">
-                <a16:creationId xmlns:a16="http://schemas.microsoft.com/office/drawing/2014/main" id="{BB94F382-7349-4ADC-84FB-5DF3AFF0D392}"/>
+                <a16:creationId xmlns:a16="http://schemas.microsoft.com/office/drawing/2014/main" id="{B29622F1-FFF6-4BBE-A88B-5C0A03F918A3}"/>
               </a:ext>
             </a:extLst>
           </p:cNvPr>
@@ -6416,7 +6416,7 @@
           <p:cNvPr id="72" name="">
             <a:extLst xmlns:a="http://schemas.openxmlformats.org/drawingml/2006/main">
               <a:ext uri="{FF2B5EF4-FFF2-40B4-BE49-F238E27FC236}">
-                <a16:creationId xmlns:a16="http://schemas.microsoft.com/office/drawing/2014/main" id="{62344A86-5EB5-4F17-B08C-8C6215A40E9B}"/>
+                <a16:creationId xmlns:a16="http://schemas.microsoft.com/office/drawing/2014/main" id="{1E996E4B-1C95-4E9E-A52D-A1E437209241}"/>
               </a:ext>
             </a:extLst>
           </p:cNvPr>
@@ -6468,7 +6468,7 @@
           <p:cNvPr id="73" name="">
             <a:extLst xmlns:a="http://schemas.openxmlformats.org/drawingml/2006/main">
               <a:ext uri="{FF2B5EF4-FFF2-40B4-BE49-F238E27FC236}">
-                <a16:creationId xmlns:a16="http://schemas.microsoft.com/office/drawing/2014/main" id="{F32D8ECF-4510-41DF-B77B-EAFA01C3DA55}"/>
+                <a16:creationId xmlns:a16="http://schemas.microsoft.com/office/drawing/2014/main" id="{4D1A2D5E-7A49-4690-A00E-6A11F8DCCCCA}"/>
               </a:ext>
             </a:extLst>
           </p:cNvPr>
@@ -6520,7 +6520,7 @@
           <p:cNvPr id="74" name="">
             <a:extLst xmlns:a="http://schemas.openxmlformats.org/drawingml/2006/main">
               <a:ext uri="{FF2B5EF4-FFF2-40B4-BE49-F238E27FC236}">
-                <a16:creationId xmlns:a16="http://schemas.microsoft.com/office/drawing/2014/main" id="{1A6CB2F5-01E5-47BE-A466-7BD4E5FE7C2F}"/>
+                <a16:creationId xmlns:a16="http://schemas.microsoft.com/office/drawing/2014/main" id="{FA0D5615-6AEC-4F18-B698-96ED6F3F1A48}"/>
               </a:ext>
             </a:extLst>
           </p:cNvPr>
@@ -6572,7 +6572,7 @@
           <p:cNvPr id="75" name="">
             <a:extLst xmlns:a="http://schemas.openxmlformats.org/drawingml/2006/main">
               <a:ext uri="{FF2B5EF4-FFF2-40B4-BE49-F238E27FC236}">
-                <a16:creationId xmlns:a16="http://schemas.microsoft.com/office/drawing/2014/main" id="{8AA0A860-B22B-4A21-B97C-EF21DAE7A54C}"/>
+                <a16:creationId xmlns:a16="http://schemas.microsoft.com/office/drawing/2014/main" id="{6CAB54A4-701C-4E7F-A45A-BC376CABA9E6}"/>
               </a:ext>
             </a:extLst>
           </p:cNvPr>
@@ -6624,7 +6624,7 @@
           <p:cNvPr id="76" name="">
             <a:extLst xmlns:a="http://schemas.openxmlformats.org/drawingml/2006/main">
               <a:ext uri="{FF2B5EF4-FFF2-40B4-BE49-F238E27FC236}">
-                <a16:creationId xmlns:a16="http://schemas.microsoft.com/office/drawing/2014/main" id="{5850A524-3D46-4DF6-A2FF-D9468C658114}"/>
+                <a16:creationId xmlns:a16="http://schemas.microsoft.com/office/drawing/2014/main" id="{CBBC4E2A-2D29-4E34-8971-0868B1951D29}"/>
               </a:ext>
             </a:extLst>
           </p:cNvPr>
@@ -6676,7 +6676,7 @@
           <p:cNvPr id="77" name="">
             <a:extLst xmlns:a="http://schemas.openxmlformats.org/drawingml/2006/main">
               <a:ext uri="{FF2B5EF4-FFF2-40B4-BE49-F238E27FC236}">
-                <a16:creationId xmlns:a16="http://schemas.microsoft.com/office/drawing/2014/main" id="{1E2862FE-C4CE-4201-BE42-7EF8B6352FF9}"/>
+                <a16:creationId xmlns:a16="http://schemas.microsoft.com/office/drawing/2014/main" id="{7071C354-5E3E-4C04-AE7C-37F00042C44D}"/>
               </a:ext>
             </a:extLst>
           </p:cNvPr>
@@ -6707,7 +6707,7 @@
           <p:cNvPr id="78" name="">
             <a:extLst xmlns:a="http://schemas.openxmlformats.org/drawingml/2006/main">
               <a:ext uri="{FF2B5EF4-FFF2-40B4-BE49-F238E27FC236}">
-                <a16:creationId xmlns:a16="http://schemas.microsoft.com/office/drawing/2014/main" id="{4166E827-9426-4B80-A13D-37C337B56267}"/>
+                <a16:creationId xmlns:a16="http://schemas.microsoft.com/office/drawing/2014/main" id="{29A40FF4-B1A9-40BD-93EC-1152F27D0710}"/>
               </a:ext>
             </a:extLst>
           </p:cNvPr>
@@ -6759,7 +6759,7 @@
           <p:cNvPr id="79" name="">
             <a:extLst xmlns:a="http://schemas.openxmlformats.org/drawingml/2006/main">
               <a:ext uri="{FF2B5EF4-FFF2-40B4-BE49-F238E27FC236}">
-                <a16:creationId xmlns:a16="http://schemas.microsoft.com/office/drawing/2014/main" id="{4AF7BEFF-1BCB-4C37-B8CE-73A66107B2FB}"/>
+                <a16:creationId xmlns:a16="http://schemas.microsoft.com/office/drawing/2014/main" id="{FE7CDDF5-A60A-43F2-BD47-639E9AE76465}"/>
               </a:ext>
             </a:extLst>
           </p:cNvPr>
@@ -6811,7 +6811,7 @@
           <p:cNvPr id="80" name="">
             <a:extLst xmlns:a="http://schemas.openxmlformats.org/drawingml/2006/main">
               <a:ext uri="{FF2B5EF4-FFF2-40B4-BE49-F238E27FC236}">
-                <a16:creationId xmlns:a16="http://schemas.microsoft.com/office/drawing/2014/main" id="{EE2118D1-8B6A-4FB2-91C7-8C0ED5D8382F}"/>
+                <a16:creationId xmlns:a16="http://schemas.microsoft.com/office/drawing/2014/main" id="{40F95860-119E-48C8-A75C-197780E9F484}"/>
               </a:ext>
             </a:extLst>
           </p:cNvPr>
@@ -6863,7 +6863,7 @@
           <p:cNvPr id="81" name="">
             <a:extLst xmlns:a="http://schemas.openxmlformats.org/drawingml/2006/main">
               <a:ext uri="{FF2B5EF4-FFF2-40B4-BE49-F238E27FC236}">
-                <a16:creationId xmlns:a16="http://schemas.microsoft.com/office/drawing/2014/main" id="{80F98B4F-0138-4E14-BFF1-9C758F933FE3}"/>
+                <a16:creationId xmlns:a16="http://schemas.microsoft.com/office/drawing/2014/main" id="{6F558284-9731-47D5-A0DA-7BDE4F01560D}"/>
               </a:ext>
             </a:extLst>
           </p:cNvPr>
@@ -6915,7 +6915,7 @@
           <p:cNvPr id="82" name="">
             <a:extLst xmlns:a="http://schemas.openxmlformats.org/drawingml/2006/main">
               <a:ext uri="{FF2B5EF4-FFF2-40B4-BE49-F238E27FC236}">
-                <a16:creationId xmlns:a16="http://schemas.microsoft.com/office/drawing/2014/main" id="{2F1CADF6-6901-4ED1-B020-5E4BD4611384}"/>
+                <a16:creationId xmlns:a16="http://schemas.microsoft.com/office/drawing/2014/main" id="{626E5F74-5B47-4171-B7D0-2EDC0A267BBC}"/>
               </a:ext>
             </a:extLst>
           </p:cNvPr>
@@ -6967,7 +6967,7 @@
           <p:cNvPr id="83" name="">
             <a:extLst xmlns:a="http://schemas.openxmlformats.org/drawingml/2006/main">
               <a:ext uri="{FF2B5EF4-FFF2-40B4-BE49-F238E27FC236}">
-                <a16:creationId xmlns:a16="http://schemas.microsoft.com/office/drawing/2014/main" id="{86AB812F-BF4F-4DB6-BF76-7654D19AD40E}"/>
+                <a16:creationId xmlns:a16="http://schemas.microsoft.com/office/drawing/2014/main" id="{79A6B2F4-4BF7-471E-BB5C-72D5FD277739}"/>
               </a:ext>
             </a:extLst>
           </p:cNvPr>
@@ -6998,7 +6998,7 @@
           <p:cNvPr id="84" name="">
             <a:extLst xmlns:a="http://schemas.openxmlformats.org/drawingml/2006/main">
               <a:ext uri="{FF2B5EF4-FFF2-40B4-BE49-F238E27FC236}">
-                <a16:creationId xmlns:a16="http://schemas.microsoft.com/office/drawing/2014/main" id="{E478E690-FB3C-4A92-B241-AAE95B6F334E}"/>
+                <a16:creationId xmlns:a16="http://schemas.microsoft.com/office/drawing/2014/main" id="{0C75653F-3668-4D00-AA97-A0E452F85733}"/>
               </a:ext>
             </a:extLst>
           </p:cNvPr>
@@ -7029,7 +7029,7 @@
           <p:cNvPr id="85" name="">
             <a:extLst xmlns:a="http://schemas.openxmlformats.org/drawingml/2006/main">
               <a:ext uri="{FF2B5EF4-FFF2-40B4-BE49-F238E27FC236}">
-                <a16:creationId xmlns:a16="http://schemas.microsoft.com/office/drawing/2014/main" id="{AAA99CB1-C13A-4B19-AA22-154A0BC653A2}"/>
+                <a16:creationId xmlns:a16="http://schemas.microsoft.com/office/drawing/2014/main" id="{C2FE079E-4083-4D1A-98BC-3978C2181C94}"/>
               </a:ext>
             </a:extLst>
           </p:cNvPr>
@@ -7081,7 +7081,7 @@
           <p:cNvPr id="86" name="">
             <a:extLst xmlns:a="http://schemas.openxmlformats.org/drawingml/2006/main">
               <a:ext uri="{FF2B5EF4-FFF2-40B4-BE49-F238E27FC236}">
-                <a16:creationId xmlns:a16="http://schemas.microsoft.com/office/drawing/2014/main" id="{26234320-A1B6-4FB4-B616-747E877179C8}"/>
+                <a16:creationId xmlns:a16="http://schemas.microsoft.com/office/drawing/2014/main" id="{373388CA-5DAF-4101-B139-2D3E2933F323}"/>
               </a:ext>
             </a:extLst>
           </p:cNvPr>
@@ -7133,7 +7133,7 @@
           <p:cNvPr id="87" name="">
             <a:extLst xmlns:a="http://schemas.openxmlformats.org/drawingml/2006/main">
               <a:ext uri="{FF2B5EF4-FFF2-40B4-BE49-F238E27FC236}">
-                <a16:creationId xmlns:a16="http://schemas.microsoft.com/office/drawing/2014/main" id="{433D3E1B-6C2B-4DF2-A4A1-88B5603D00A6}"/>
+                <a16:creationId xmlns:a16="http://schemas.microsoft.com/office/drawing/2014/main" id="{3C5D4500-3AD0-466C-A8F1-90E5528593A6}"/>
               </a:ext>
             </a:extLst>
           </p:cNvPr>
@@ -7185,7 +7185,7 @@
           <p:cNvPr id="88" name="">
             <a:extLst xmlns:a="http://schemas.openxmlformats.org/drawingml/2006/main">
               <a:ext uri="{FF2B5EF4-FFF2-40B4-BE49-F238E27FC236}">
-                <a16:creationId xmlns:a16="http://schemas.microsoft.com/office/drawing/2014/main" id="{5ACAC4B7-BEE6-47D8-8068-5E8137E81902}"/>
+                <a16:creationId xmlns:a16="http://schemas.microsoft.com/office/drawing/2014/main" id="{210589C5-33BA-459B-B5C2-568E0E6455FF}"/>
               </a:ext>
             </a:extLst>
           </p:cNvPr>
@@ -7237,7 +7237,7 @@
           <p:cNvPr id="89" name="">
             <a:extLst xmlns:a="http://schemas.openxmlformats.org/drawingml/2006/main">
               <a:ext uri="{FF2B5EF4-FFF2-40B4-BE49-F238E27FC236}">
-                <a16:creationId xmlns:a16="http://schemas.microsoft.com/office/drawing/2014/main" id="{38A76615-1653-4311-B317-CA27F2598AE9}"/>
+                <a16:creationId xmlns:a16="http://schemas.microsoft.com/office/drawing/2014/main" id="{E63173D1-F800-476E-B6C2-150638AF5D08}"/>
               </a:ext>
             </a:extLst>
           </p:cNvPr>
@@ -7289,7 +7289,7 @@
           <p:cNvPr id="90" name="">
             <a:extLst xmlns:a="http://schemas.openxmlformats.org/drawingml/2006/main">
               <a:ext uri="{FF2B5EF4-FFF2-40B4-BE49-F238E27FC236}">
-                <a16:creationId xmlns:a16="http://schemas.microsoft.com/office/drawing/2014/main" id="{55D0FD6E-9AE9-4DFD-B33F-71C82DE057D0}"/>
+                <a16:creationId xmlns:a16="http://schemas.microsoft.com/office/drawing/2014/main" id="{9190DD39-AD70-48C6-9BFD-7EA5A71E0F70}"/>
               </a:ext>
             </a:extLst>
           </p:cNvPr>
@@ -7320,7 +7320,7 @@
           <p:cNvPr id="91" name="">
             <a:extLst xmlns:a="http://schemas.openxmlformats.org/drawingml/2006/main">
               <a:ext uri="{FF2B5EF4-FFF2-40B4-BE49-F238E27FC236}">
-                <a16:creationId xmlns:a16="http://schemas.microsoft.com/office/drawing/2014/main" id="{556F551B-CE91-48B9-8450-A9B5A87016B1}"/>
+                <a16:creationId xmlns:a16="http://schemas.microsoft.com/office/drawing/2014/main" id="{82384562-BA92-4CDD-9F1C-4F92E6F050D1}"/>
               </a:ext>
             </a:extLst>
           </p:cNvPr>
@@ -7372,7 +7372,7 @@
           <p:cNvPr id="92" name="">
             <a:extLst xmlns:a="http://schemas.openxmlformats.org/drawingml/2006/main">
               <a:ext uri="{FF2B5EF4-FFF2-40B4-BE49-F238E27FC236}">
-                <a16:creationId xmlns:a16="http://schemas.microsoft.com/office/drawing/2014/main" id="{8F8120B7-AE82-43D6-997A-E094040BD86C}"/>
+                <a16:creationId xmlns:a16="http://schemas.microsoft.com/office/drawing/2014/main" id="{3F29125A-8BAC-4C4B-9349-837AF3610350}"/>
               </a:ext>
             </a:extLst>
           </p:cNvPr>
@@ -7424,7 +7424,7 @@
           <p:cNvPr id="93" name="">
             <a:extLst xmlns:a="http://schemas.openxmlformats.org/drawingml/2006/main">
               <a:ext uri="{FF2B5EF4-FFF2-40B4-BE49-F238E27FC236}">
-                <a16:creationId xmlns:a16="http://schemas.microsoft.com/office/drawing/2014/main" id="{C90A87D3-6E47-4595-908C-30459296DE26}"/>
+                <a16:creationId xmlns:a16="http://schemas.microsoft.com/office/drawing/2014/main" id="{D95E4C80-8FAC-45A9-86CF-CE77B541B721}"/>
               </a:ext>
             </a:extLst>
           </p:cNvPr>
@@ -7476,7 +7476,7 @@
           <p:cNvPr id="94" name="">
             <a:extLst xmlns:a="http://schemas.openxmlformats.org/drawingml/2006/main">
               <a:ext uri="{FF2B5EF4-FFF2-40B4-BE49-F238E27FC236}">
-                <a16:creationId xmlns:a16="http://schemas.microsoft.com/office/drawing/2014/main" id="{1B6EADAA-2ADF-475C-AC5A-06A5E007A8FE}"/>
+                <a16:creationId xmlns:a16="http://schemas.microsoft.com/office/drawing/2014/main" id="{274C5A0D-8FA0-46C7-B8C2-AE75B057E6DB}"/>
               </a:ext>
             </a:extLst>
           </p:cNvPr>
@@ -7528,7 +7528,7 @@
           <p:cNvPr id="95" name="">
             <a:extLst xmlns:a="http://schemas.openxmlformats.org/drawingml/2006/main">
               <a:ext uri="{FF2B5EF4-FFF2-40B4-BE49-F238E27FC236}">
-                <a16:creationId xmlns:a16="http://schemas.microsoft.com/office/drawing/2014/main" id="{5CBD32D1-14F3-4316-9FC0-A8046547CDF8}"/>
+                <a16:creationId xmlns:a16="http://schemas.microsoft.com/office/drawing/2014/main" id="{77C53DFB-359C-4A00-B83C-211965EBA4BD}"/>
               </a:ext>
             </a:extLst>
           </p:cNvPr>
@@ -7580,7 +7580,7 @@
           <p:cNvPr id="96" name="">
             <a:extLst xmlns:a="http://schemas.openxmlformats.org/drawingml/2006/main">
               <a:ext uri="{FF2B5EF4-FFF2-40B4-BE49-F238E27FC236}">
-                <a16:creationId xmlns:a16="http://schemas.microsoft.com/office/drawing/2014/main" id="{FAE593B7-DEA2-4471-A8C7-B6E6D6D53456}"/>
+                <a16:creationId xmlns:a16="http://schemas.microsoft.com/office/drawing/2014/main" id="{5D421D74-DF56-4CE8-A92C-F0B86DE8C36A}"/>
               </a:ext>
             </a:extLst>
           </p:cNvPr>
@@ -7611,7 +7611,7 @@
           <p:cNvPr id="97" name="">
             <a:extLst xmlns:a="http://schemas.openxmlformats.org/drawingml/2006/main">
               <a:ext uri="{FF2B5EF4-FFF2-40B4-BE49-F238E27FC236}">
-                <a16:creationId xmlns:a16="http://schemas.microsoft.com/office/drawing/2014/main" id="{1E763877-9A3A-4644-9758-F522C682B0B5}"/>
+                <a16:creationId xmlns:a16="http://schemas.microsoft.com/office/drawing/2014/main" id="{E94FA0B0-ACC1-4A07-BBA1-0C0C7BE673BA}"/>
               </a:ext>
             </a:extLst>
           </p:cNvPr>
@@ -7642,7 +7642,7 @@
           <p:cNvPr id="98" name="">
             <a:extLst xmlns:a="http://schemas.openxmlformats.org/drawingml/2006/main">
               <a:ext uri="{FF2B5EF4-FFF2-40B4-BE49-F238E27FC236}">
-                <a16:creationId xmlns:a16="http://schemas.microsoft.com/office/drawing/2014/main" id="{0090488C-D124-4DEE-9E3F-CF3324F67AB7}"/>
+                <a16:creationId xmlns:a16="http://schemas.microsoft.com/office/drawing/2014/main" id="{1BCCA401-1B53-4D20-A82A-AA8E7FC3FD2A}"/>
               </a:ext>
             </a:extLst>
           </p:cNvPr>
@@ -7694,7 +7694,7 @@
           <p:cNvPr id="99" name="">
             <a:extLst xmlns:a="http://schemas.openxmlformats.org/drawingml/2006/main">
               <a:ext uri="{FF2B5EF4-FFF2-40B4-BE49-F238E27FC236}">
-                <a16:creationId xmlns:a16="http://schemas.microsoft.com/office/drawing/2014/main" id="{B3C94832-7356-4D28-B975-6160E871B4AE}"/>
+                <a16:creationId xmlns:a16="http://schemas.microsoft.com/office/drawing/2014/main" id="{75670C91-7637-4401-8F1B-9693D15A8B3E}"/>
               </a:ext>
             </a:extLst>
           </p:cNvPr>
@@ -7746,7 +7746,7 @@
           <p:cNvPr id="100" name="">
             <a:extLst xmlns:a="http://schemas.openxmlformats.org/drawingml/2006/main">
               <a:ext uri="{FF2B5EF4-FFF2-40B4-BE49-F238E27FC236}">
-                <a16:creationId xmlns:a16="http://schemas.microsoft.com/office/drawing/2014/main" id="{7B67554C-A33A-430E-BFE3-1768A4A2D800}"/>
+                <a16:creationId xmlns:a16="http://schemas.microsoft.com/office/drawing/2014/main" id="{61136C78-C23C-4455-9B1B-C474803D4663}"/>
               </a:ext>
             </a:extLst>
           </p:cNvPr>
@@ -7798,7 +7798,7 @@
           <p:cNvPr id="101" name="">
             <a:extLst xmlns:a="http://schemas.openxmlformats.org/drawingml/2006/main">
               <a:ext uri="{FF2B5EF4-FFF2-40B4-BE49-F238E27FC236}">
-                <a16:creationId xmlns:a16="http://schemas.microsoft.com/office/drawing/2014/main" id="{875AC87F-94A9-4A53-91F7-61A515B4B8D8}"/>
+                <a16:creationId xmlns:a16="http://schemas.microsoft.com/office/drawing/2014/main" id="{6B8B8B8F-966B-42A6-A021-74520EB214AC}"/>
               </a:ext>
             </a:extLst>
           </p:cNvPr>
@@ -7850,7 +7850,7 @@
           <p:cNvPr id="102" name="">
             <a:extLst xmlns:a="http://schemas.openxmlformats.org/drawingml/2006/main">
               <a:ext uri="{FF2B5EF4-FFF2-40B4-BE49-F238E27FC236}">
-                <a16:creationId xmlns:a16="http://schemas.microsoft.com/office/drawing/2014/main" id="{66DE4BA0-EEA0-4EE2-A50D-E9361157F5BB}"/>
+                <a16:creationId xmlns:a16="http://schemas.microsoft.com/office/drawing/2014/main" id="{68846E20-B46F-4303-B3DA-7FBF51838A24}"/>
               </a:ext>
             </a:extLst>
           </p:cNvPr>
@@ -7900,7 +7900,7 @@
     </p:spTree>
     <p:extLst>
       <p:ext uri="{BB962C8B-B14F-4D97-AF65-F5344CB8AC3E}">
-        <p14:creationId xmlns:p14="http://schemas.microsoft.com/office/powerpoint/2010/main" val="2068823173"/>
+        <p14:creationId xmlns:p14="http://schemas.microsoft.com/office/powerpoint/2010/main" val="1500981532"/>
       </p:ext>
     </p:extLst>
   </p:cSld>
@@ -7931,7 +7931,7 @@
           <p:cNvPr id="98" name="">
             <a:extLst xmlns:a="http://schemas.openxmlformats.org/drawingml/2006/main">
               <a:ext uri="{FF2B5EF4-FFF2-40B4-BE49-F238E27FC236}">
-                <a16:creationId xmlns:a16="http://schemas.microsoft.com/office/drawing/2014/main" id="{DF7EAC01-EAA7-4738-BDC7-BAB295770BEE}"/>
+                <a16:creationId xmlns:a16="http://schemas.microsoft.com/office/drawing/2014/main" id="{B29D06EB-7EC3-4E2A-A71B-64F1E53147D6}"/>
               </a:ext>
             </a:extLst>
           </p:cNvPr>
@@ -7964,7 +7964,7 @@
           <p:cNvPr id="2" name="">
             <a:extLst xmlns:a="http://schemas.openxmlformats.org/drawingml/2006/main">
               <a:ext uri="{FF2B5EF4-FFF2-40B4-BE49-F238E27FC236}">
-                <a16:creationId xmlns:a16="http://schemas.microsoft.com/office/drawing/2014/main" id="{BD6235C8-3BEE-41BD-BACB-AED9544B4821}"/>
+                <a16:creationId xmlns:a16="http://schemas.microsoft.com/office/drawing/2014/main" id="{981021F8-168A-44DD-95E1-11CEEB2C1B95}"/>
               </a:ext>
             </a:extLst>
           </p:cNvPr>
@@ -7995,7 +7995,7 @@
           <p:cNvPr id="3" name="">
             <a:extLst xmlns:a="http://schemas.openxmlformats.org/drawingml/2006/main">
               <a:ext uri="{FF2B5EF4-FFF2-40B4-BE49-F238E27FC236}">
-                <a16:creationId xmlns:a16="http://schemas.microsoft.com/office/drawing/2014/main" id="{BCAB8FEA-B29D-4845-91C1-D38C23A4EE74}"/>
+                <a16:creationId xmlns:a16="http://schemas.microsoft.com/office/drawing/2014/main" id="{6999A9F9-D2DE-4DA6-B141-40C43C66E340}"/>
               </a:ext>
             </a:extLst>
           </p:cNvPr>
@@ -8047,7 +8047,7 @@
           <p:cNvPr id="4" name="">
             <a:extLst xmlns:a="http://schemas.openxmlformats.org/drawingml/2006/main">
               <a:ext uri="{FF2B5EF4-FFF2-40B4-BE49-F238E27FC236}">
-                <a16:creationId xmlns:a16="http://schemas.microsoft.com/office/drawing/2014/main" id="{76C50A8A-3F9F-4854-B670-96CDAE26F03C}"/>
+                <a16:creationId xmlns:a16="http://schemas.microsoft.com/office/drawing/2014/main" id="{22BCF0F1-8B00-4DF7-BBC1-7C3D2797E501}"/>
               </a:ext>
             </a:extLst>
           </p:cNvPr>
@@ -8099,7 +8099,7 @@
           <p:cNvPr id="5" name="">
             <a:extLst xmlns:a="http://schemas.openxmlformats.org/drawingml/2006/main">
               <a:ext uri="{FF2B5EF4-FFF2-40B4-BE49-F238E27FC236}">
-                <a16:creationId xmlns:a16="http://schemas.microsoft.com/office/drawing/2014/main" id="{046A1FA6-3C75-4D6C-A811-A5B1BAA313A5}"/>
+                <a16:creationId xmlns:a16="http://schemas.microsoft.com/office/drawing/2014/main" id="{EA1C5253-B077-47B3-B7BD-C223FA42D5D4}"/>
               </a:ext>
             </a:extLst>
           </p:cNvPr>
@@ -8134,7 +8134,7 @@
           <p:nvPr/>
         </p:nvPicPr>
         <p:blipFill>
-          <a:blip xmlns:r="http://schemas.openxmlformats.org/officeDocument/2006/relationships" xmlns:a="http://schemas.openxmlformats.org/drawingml/2006/main" r:embed="R65fe3d3f174b4012"/>
+          <a:blip xmlns:r="http://schemas.openxmlformats.org/officeDocument/2006/relationships" xmlns:a="http://schemas.openxmlformats.org/drawingml/2006/main" r:embed="R4787249e8d50445b"/>
           <a:stretch xmlns:a="http://schemas.openxmlformats.org/drawingml/2006/main"/>
         </p:blipFill>
         <p:spPr>
@@ -8152,7 +8152,7 @@
           <p:cNvPr id="7" name="">
             <a:extLst xmlns:a="http://schemas.openxmlformats.org/drawingml/2006/main">
               <a:ext uri="{FF2B5EF4-FFF2-40B4-BE49-F238E27FC236}">
-                <a16:creationId xmlns:a16="http://schemas.microsoft.com/office/drawing/2014/main" id="{832FB840-428B-450E-B92C-E9512ED45D75}"/>
+                <a16:creationId xmlns:a16="http://schemas.microsoft.com/office/drawing/2014/main" id="{F5C51CF8-2E98-4F27-A540-745F0AADD115}"/>
               </a:ext>
             </a:extLst>
           </p:cNvPr>
@@ -8204,7 +8204,7 @@
           <p:cNvPr id="8" name="">
             <a:extLst xmlns:a="http://schemas.openxmlformats.org/drawingml/2006/main">
               <a:ext uri="{FF2B5EF4-FFF2-40B4-BE49-F238E27FC236}">
-                <a16:creationId xmlns:a16="http://schemas.microsoft.com/office/drawing/2014/main" id="{AF49240E-46FC-4EAC-BC81-8E8B70798617}"/>
+                <a16:creationId xmlns:a16="http://schemas.microsoft.com/office/drawing/2014/main" id="{F406BA75-B183-4703-A798-4CDCEE0E4815}"/>
               </a:ext>
             </a:extLst>
           </p:cNvPr>
@@ -8256,7 +8256,7 @@
           <p:cNvPr id="9" name="">
             <a:extLst xmlns:a="http://schemas.openxmlformats.org/drawingml/2006/main">
               <a:ext uri="{FF2B5EF4-FFF2-40B4-BE49-F238E27FC236}">
-                <a16:creationId xmlns:a16="http://schemas.microsoft.com/office/drawing/2014/main" id="{4D56005C-315B-4EF5-B4F9-FC7075D2F529}"/>
+                <a16:creationId xmlns:a16="http://schemas.microsoft.com/office/drawing/2014/main" id="{780A53F2-61C9-4A85-B8C0-436FFD4F53B1}"/>
               </a:ext>
             </a:extLst>
           </p:cNvPr>
@@ -8308,7 +8308,7 @@
           <p:cNvPr id="10" name="">
             <a:extLst xmlns:a="http://schemas.openxmlformats.org/drawingml/2006/main">
               <a:ext uri="{FF2B5EF4-FFF2-40B4-BE49-F238E27FC236}">
-                <a16:creationId xmlns:a16="http://schemas.microsoft.com/office/drawing/2014/main" id="{2F1C1296-9AA4-40FA-A153-AEDEF44172BC}"/>
+                <a16:creationId xmlns:a16="http://schemas.microsoft.com/office/drawing/2014/main" id="{765D05A0-6F18-48F4-82FA-E391B1728DA2}"/>
               </a:ext>
             </a:extLst>
           </p:cNvPr>
@@ -8360,7 +8360,7 @@
           <p:cNvPr id="11" name="">
             <a:extLst xmlns:a="http://schemas.openxmlformats.org/drawingml/2006/main">
               <a:ext uri="{FF2B5EF4-FFF2-40B4-BE49-F238E27FC236}">
-                <a16:creationId xmlns:a16="http://schemas.microsoft.com/office/drawing/2014/main" id="{0154D472-D244-4832-9AFE-888558611166}"/>
+                <a16:creationId xmlns:a16="http://schemas.microsoft.com/office/drawing/2014/main" id="{94131769-699B-450E-902F-C2784CAE8D48}"/>
               </a:ext>
             </a:extLst>
           </p:cNvPr>
@@ -8391,7 +8391,7 @@
           <p:cNvPr id="12" name="">
             <a:extLst xmlns:a="http://schemas.openxmlformats.org/drawingml/2006/main">
               <a:ext uri="{FF2B5EF4-FFF2-40B4-BE49-F238E27FC236}">
-                <a16:creationId xmlns:a16="http://schemas.microsoft.com/office/drawing/2014/main" id="{0011F7C4-04E4-4F64-A7C5-8C8B88F37D3C}"/>
+                <a16:creationId xmlns:a16="http://schemas.microsoft.com/office/drawing/2014/main" id="{C389797D-46EA-43EC-A16B-E58F638E28CE}"/>
               </a:ext>
             </a:extLst>
           </p:cNvPr>
@@ -8422,7 +8422,7 @@
           <p:cNvPr id="13" name="">
             <a:extLst xmlns:a="http://schemas.openxmlformats.org/drawingml/2006/main">
               <a:ext uri="{FF2B5EF4-FFF2-40B4-BE49-F238E27FC236}">
-                <a16:creationId xmlns:a16="http://schemas.microsoft.com/office/drawing/2014/main" id="{B4D9D361-8C75-486F-8EFE-B69ED5A21127}"/>
+                <a16:creationId xmlns:a16="http://schemas.microsoft.com/office/drawing/2014/main" id="{18247C24-D7A3-4AE9-9BD7-099D056B64F3}"/>
               </a:ext>
             </a:extLst>
           </p:cNvPr>
@@ -8474,7 +8474,7 @@
           <p:cNvPr id="14" name="">
             <a:extLst xmlns:a="http://schemas.openxmlformats.org/drawingml/2006/main">
               <a:ext uri="{FF2B5EF4-FFF2-40B4-BE49-F238E27FC236}">
-                <a16:creationId xmlns:a16="http://schemas.microsoft.com/office/drawing/2014/main" id="{B919A018-7D35-4F5D-9F59-EE0AEF33B36C}"/>
+                <a16:creationId xmlns:a16="http://schemas.microsoft.com/office/drawing/2014/main" id="{DF11A230-A6BC-4051-8F0C-27B41A118D15}"/>
               </a:ext>
             </a:extLst>
           </p:cNvPr>
@@ -8526,7 +8526,7 @@
           <p:cNvPr id="15" name="">
             <a:extLst xmlns:a="http://schemas.openxmlformats.org/drawingml/2006/main">
               <a:ext uri="{FF2B5EF4-FFF2-40B4-BE49-F238E27FC236}">
-                <a16:creationId xmlns:a16="http://schemas.microsoft.com/office/drawing/2014/main" id="{7B7FA4C2-3FD4-462C-925A-4F3D3F551D5B}"/>
+                <a16:creationId xmlns:a16="http://schemas.microsoft.com/office/drawing/2014/main" id="{8E769BB7-48AD-44BD-A3E6-A531866E2775}"/>
               </a:ext>
             </a:extLst>
           </p:cNvPr>
@@ -8578,7 +8578,7 @@
           <p:cNvPr id="16" name="">
             <a:extLst xmlns:a="http://schemas.openxmlformats.org/drawingml/2006/main">
               <a:ext uri="{FF2B5EF4-FFF2-40B4-BE49-F238E27FC236}">
-                <a16:creationId xmlns:a16="http://schemas.microsoft.com/office/drawing/2014/main" id="{46AC24F5-5B5F-4F42-81F8-358A133D8C75}"/>
+                <a16:creationId xmlns:a16="http://schemas.microsoft.com/office/drawing/2014/main" id="{4818FEB8-F187-4B14-851B-741D30B2E84A}"/>
               </a:ext>
             </a:extLst>
           </p:cNvPr>
@@ -8630,7 +8630,7 @@
           <p:cNvPr id="17" name="">
             <a:extLst xmlns:a="http://schemas.openxmlformats.org/drawingml/2006/main">
               <a:ext uri="{FF2B5EF4-FFF2-40B4-BE49-F238E27FC236}">
-                <a16:creationId xmlns:a16="http://schemas.microsoft.com/office/drawing/2014/main" id="{AFA6C6F5-5D9A-466A-B187-B027B5D35B91}"/>
+                <a16:creationId xmlns:a16="http://schemas.microsoft.com/office/drawing/2014/main" id="{2AB5E495-3367-46CC-AA00-7836C3A986A6}"/>
               </a:ext>
             </a:extLst>
           </p:cNvPr>
@@ -8682,7 +8682,7 @@
           <p:cNvPr id="18" name="">
             <a:extLst xmlns:a="http://schemas.openxmlformats.org/drawingml/2006/main">
               <a:ext uri="{FF2B5EF4-FFF2-40B4-BE49-F238E27FC236}">
-                <a16:creationId xmlns:a16="http://schemas.microsoft.com/office/drawing/2014/main" id="{0DD3FDCA-9379-4731-91E3-70179C13EED4}"/>
+                <a16:creationId xmlns:a16="http://schemas.microsoft.com/office/drawing/2014/main" id="{498857CE-E085-40B0-8AA6-46E4F6A48B58}"/>
               </a:ext>
             </a:extLst>
           </p:cNvPr>
@@ -8713,7 +8713,7 @@
           <p:cNvPr id="19" name="">
             <a:extLst xmlns:a="http://schemas.openxmlformats.org/drawingml/2006/main">
               <a:ext uri="{FF2B5EF4-FFF2-40B4-BE49-F238E27FC236}">
-                <a16:creationId xmlns:a16="http://schemas.microsoft.com/office/drawing/2014/main" id="{44F2A595-998A-42A1-82B2-58BF2E97FB73}"/>
+                <a16:creationId xmlns:a16="http://schemas.microsoft.com/office/drawing/2014/main" id="{C8C404D4-C29F-4734-BFCB-A9B30E5DE6A9}"/>
               </a:ext>
             </a:extLst>
           </p:cNvPr>
@@ -8765,7 +8765,7 @@
           <p:cNvPr id="20" name="">
             <a:extLst xmlns:a="http://schemas.openxmlformats.org/drawingml/2006/main">
               <a:ext uri="{FF2B5EF4-FFF2-40B4-BE49-F238E27FC236}">
-                <a16:creationId xmlns:a16="http://schemas.microsoft.com/office/drawing/2014/main" id="{266433B0-9FE4-415B-935A-55CF60CCD798}"/>
+                <a16:creationId xmlns:a16="http://schemas.microsoft.com/office/drawing/2014/main" id="{696E215A-43A4-49A0-8401-5FADD441A841}"/>
               </a:ext>
             </a:extLst>
           </p:cNvPr>
@@ -8817,7 +8817,7 @@
           <p:cNvPr id="21" name="">
             <a:extLst xmlns:a="http://schemas.openxmlformats.org/drawingml/2006/main">
               <a:ext uri="{FF2B5EF4-FFF2-40B4-BE49-F238E27FC236}">
-                <a16:creationId xmlns:a16="http://schemas.microsoft.com/office/drawing/2014/main" id="{7ECA9204-5313-4821-827C-C1158F1FEC16}"/>
+                <a16:creationId xmlns:a16="http://schemas.microsoft.com/office/drawing/2014/main" id="{C58EF76E-9851-40F6-9EDB-7D31A34C53D9}"/>
               </a:ext>
             </a:extLst>
           </p:cNvPr>
@@ -8869,7 +8869,7 @@
           <p:cNvPr id="22" name="">
             <a:extLst xmlns:a="http://schemas.openxmlformats.org/drawingml/2006/main">
               <a:ext uri="{FF2B5EF4-FFF2-40B4-BE49-F238E27FC236}">
-                <a16:creationId xmlns:a16="http://schemas.microsoft.com/office/drawing/2014/main" id="{EE1AEA2D-A025-40DC-AD3C-A5896B6EDC90}"/>
+                <a16:creationId xmlns:a16="http://schemas.microsoft.com/office/drawing/2014/main" id="{00002407-E6CF-40A1-A129-C08E984D19F3}"/>
               </a:ext>
             </a:extLst>
           </p:cNvPr>
@@ -8921,7 +8921,7 @@
           <p:cNvPr id="23" name="">
             <a:extLst xmlns:a="http://schemas.openxmlformats.org/drawingml/2006/main">
               <a:ext uri="{FF2B5EF4-FFF2-40B4-BE49-F238E27FC236}">
-                <a16:creationId xmlns:a16="http://schemas.microsoft.com/office/drawing/2014/main" id="{2B458C39-B55C-4CEE-AFA2-336E87BFF0B4}"/>
+                <a16:creationId xmlns:a16="http://schemas.microsoft.com/office/drawing/2014/main" id="{0C0512DA-0741-41A3-BC06-BB6E4F482572}"/>
               </a:ext>
             </a:extLst>
           </p:cNvPr>
@@ -8973,7 +8973,7 @@
           <p:cNvPr id="24" name="">
             <a:extLst xmlns:a="http://schemas.openxmlformats.org/drawingml/2006/main">
               <a:ext uri="{FF2B5EF4-FFF2-40B4-BE49-F238E27FC236}">
-                <a16:creationId xmlns:a16="http://schemas.microsoft.com/office/drawing/2014/main" id="{FD0C24B4-0351-4B45-BB49-3988817551C7}"/>
+                <a16:creationId xmlns:a16="http://schemas.microsoft.com/office/drawing/2014/main" id="{D7496CD0-79A4-41F8-AC64-7A9C4ACA4283}"/>
               </a:ext>
             </a:extLst>
           </p:cNvPr>
@@ -9004,7 +9004,7 @@
           <p:cNvPr id="25" name="">
             <a:extLst xmlns:a="http://schemas.openxmlformats.org/drawingml/2006/main">
               <a:ext uri="{FF2B5EF4-FFF2-40B4-BE49-F238E27FC236}">
-                <a16:creationId xmlns:a16="http://schemas.microsoft.com/office/drawing/2014/main" id="{B8B052BD-1749-4C9A-AA08-1E3AF052DB10}"/>
+                <a16:creationId xmlns:a16="http://schemas.microsoft.com/office/drawing/2014/main" id="{39AB61EF-3A52-4693-83BC-08C645704B51}"/>
               </a:ext>
             </a:extLst>
           </p:cNvPr>
@@ -9035,7 +9035,7 @@
           <p:cNvPr id="26" name="">
             <a:extLst xmlns:a="http://schemas.openxmlformats.org/drawingml/2006/main">
               <a:ext uri="{FF2B5EF4-FFF2-40B4-BE49-F238E27FC236}">
-                <a16:creationId xmlns:a16="http://schemas.microsoft.com/office/drawing/2014/main" id="{587AB33D-8B17-4AEF-85F6-C5E2416163E7}"/>
+                <a16:creationId xmlns:a16="http://schemas.microsoft.com/office/drawing/2014/main" id="{1F6A4491-8772-4598-A309-1BE56E87507C}"/>
               </a:ext>
             </a:extLst>
           </p:cNvPr>
@@ -9087,7 +9087,7 @@
           <p:cNvPr id="27" name="">
             <a:extLst xmlns:a="http://schemas.openxmlformats.org/drawingml/2006/main">
               <a:ext uri="{FF2B5EF4-FFF2-40B4-BE49-F238E27FC236}">
-                <a16:creationId xmlns:a16="http://schemas.microsoft.com/office/drawing/2014/main" id="{F103884A-9777-4D6F-AAAD-DEEE2488305F}"/>
+                <a16:creationId xmlns:a16="http://schemas.microsoft.com/office/drawing/2014/main" id="{FBCD81C8-CD57-4E32-A547-BA4485BBE1BE}"/>
               </a:ext>
             </a:extLst>
           </p:cNvPr>
@@ -9139,7 +9139,7 @@
           <p:cNvPr id="28" name="">
             <a:extLst xmlns:a="http://schemas.openxmlformats.org/drawingml/2006/main">
               <a:ext uri="{FF2B5EF4-FFF2-40B4-BE49-F238E27FC236}">
-                <a16:creationId xmlns:a16="http://schemas.microsoft.com/office/drawing/2014/main" id="{8483B875-289F-49DE-AD79-B505665CBBC5}"/>
+                <a16:creationId xmlns:a16="http://schemas.microsoft.com/office/drawing/2014/main" id="{7BD140F4-5194-4CFA-A72F-993CB79B7B76}"/>
               </a:ext>
             </a:extLst>
           </p:cNvPr>
@@ -9191,7 +9191,7 @@
           <p:cNvPr id="29" name="">
             <a:extLst xmlns:a="http://schemas.openxmlformats.org/drawingml/2006/main">
               <a:ext uri="{FF2B5EF4-FFF2-40B4-BE49-F238E27FC236}">
-                <a16:creationId xmlns:a16="http://schemas.microsoft.com/office/drawing/2014/main" id="{3BB1F928-D517-41FA-AFA7-28CF47EF8C7D}"/>
+                <a16:creationId xmlns:a16="http://schemas.microsoft.com/office/drawing/2014/main" id="{E74301A4-7E68-4E68-BCA5-DA87B497B20D}"/>
               </a:ext>
             </a:extLst>
           </p:cNvPr>
@@ -9243,7 +9243,7 @@
           <p:cNvPr id="30" name="">
             <a:extLst xmlns:a="http://schemas.openxmlformats.org/drawingml/2006/main">
               <a:ext uri="{FF2B5EF4-FFF2-40B4-BE49-F238E27FC236}">
-                <a16:creationId xmlns:a16="http://schemas.microsoft.com/office/drawing/2014/main" id="{06730D62-82A6-4DC9-A6DB-6998AE0F9589}"/>
+                <a16:creationId xmlns:a16="http://schemas.microsoft.com/office/drawing/2014/main" id="{1BD70153-8EA7-4509-B136-2B7B78D7431B}"/>
               </a:ext>
             </a:extLst>
           </p:cNvPr>
@@ -9295,7 +9295,7 @@
           <p:cNvPr id="31" name="">
             <a:extLst xmlns:a="http://schemas.openxmlformats.org/drawingml/2006/main">
               <a:ext uri="{FF2B5EF4-FFF2-40B4-BE49-F238E27FC236}">
-                <a16:creationId xmlns:a16="http://schemas.microsoft.com/office/drawing/2014/main" id="{BAFBCFF9-C16B-426C-A82F-294914D467F1}"/>
+                <a16:creationId xmlns:a16="http://schemas.microsoft.com/office/drawing/2014/main" id="{14652EB5-5472-46CF-9781-0337976D3A7D}"/>
               </a:ext>
             </a:extLst>
           </p:cNvPr>
@@ -9326,7 +9326,7 @@
           <p:cNvPr id="32" name="">
             <a:extLst xmlns:a="http://schemas.openxmlformats.org/drawingml/2006/main">
               <a:ext uri="{FF2B5EF4-FFF2-40B4-BE49-F238E27FC236}">
-                <a16:creationId xmlns:a16="http://schemas.microsoft.com/office/drawing/2014/main" id="{5436C65C-9F38-4DA9-8769-47A323F3CCB8}"/>
+                <a16:creationId xmlns:a16="http://schemas.microsoft.com/office/drawing/2014/main" id="{5C32F354-EF4F-4C66-944A-0B189A73F5F6}"/>
               </a:ext>
             </a:extLst>
           </p:cNvPr>
@@ -9378,7 +9378,7 @@
           <p:cNvPr id="33" name="">
             <a:extLst xmlns:a="http://schemas.openxmlformats.org/drawingml/2006/main">
               <a:ext uri="{FF2B5EF4-FFF2-40B4-BE49-F238E27FC236}">
-                <a16:creationId xmlns:a16="http://schemas.microsoft.com/office/drawing/2014/main" id="{698138B3-93C7-4448-80E4-46E42F938EE3}"/>
+                <a16:creationId xmlns:a16="http://schemas.microsoft.com/office/drawing/2014/main" id="{30637129-2218-426E-B6C1-257332111998}"/>
               </a:ext>
             </a:extLst>
           </p:cNvPr>
@@ -9430,7 +9430,7 @@
           <p:cNvPr id="34" name="">
             <a:extLst xmlns:a="http://schemas.openxmlformats.org/drawingml/2006/main">
               <a:ext uri="{FF2B5EF4-FFF2-40B4-BE49-F238E27FC236}">
-                <a16:creationId xmlns:a16="http://schemas.microsoft.com/office/drawing/2014/main" id="{F3AA0531-4973-4705-B4E0-62D7E9825C0E}"/>
+                <a16:creationId xmlns:a16="http://schemas.microsoft.com/office/drawing/2014/main" id="{6668F260-72D8-46BF-B075-5947047BF546}"/>
               </a:ext>
             </a:extLst>
           </p:cNvPr>
@@ -9482,7 +9482,7 @@
           <p:cNvPr id="35" name="">
             <a:extLst xmlns:a="http://schemas.openxmlformats.org/drawingml/2006/main">
               <a:ext uri="{FF2B5EF4-FFF2-40B4-BE49-F238E27FC236}">
-                <a16:creationId xmlns:a16="http://schemas.microsoft.com/office/drawing/2014/main" id="{E31C34F4-2B1E-4D71-9685-84A556F98969}"/>
+                <a16:creationId xmlns:a16="http://schemas.microsoft.com/office/drawing/2014/main" id="{FB520EBF-83F5-4EF0-8942-9C19E0287E30}"/>
               </a:ext>
             </a:extLst>
           </p:cNvPr>
@@ -9534,7 +9534,7 @@
           <p:cNvPr id="36" name="">
             <a:extLst xmlns:a="http://schemas.openxmlformats.org/drawingml/2006/main">
               <a:ext uri="{FF2B5EF4-FFF2-40B4-BE49-F238E27FC236}">
-                <a16:creationId xmlns:a16="http://schemas.microsoft.com/office/drawing/2014/main" id="{F0958515-1104-48A8-9371-011EC088EFD7}"/>
+                <a16:creationId xmlns:a16="http://schemas.microsoft.com/office/drawing/2014/main" id="{FE07F801-738C-42FB-A8C8-95CA8BE7198E}"/>
               </a:ext>
             </a:extLst>
           </p:cNvPr>
@@ -9586,7 +9586,7 @@
           <p:cNvPr id="37" name="">
             <a:extLst xmlns:a="http://schemas.openxmlformats.org/drawingml/2006/main">
               <a:ext uri="{FF2B5EF4-FFF2-40B4-BE49-F238E27FC236}">
-                <a16:creationId xmlns:a16="http://schemas.microsoft.com/office/drawing/2014/main" id="{9C41394E-E97E-4EBD-B77A-C3D683F665E7}"/>
+                <a16:creationId xmlns:a16="http://schemas.microsoft.com/office/drawing/2014/main" id="{82B74CD9-B62E-4088-BD1B-758A440EEE94}"/>
               </a:ext>
             </a:extLst>
           </p:cNvPr>
@@ -9617,7 +9617,7 @@
           <p:cNvPr id="38" name="">
             <a:extLst xmlns:a="http://schemas.openxmlformats.org/drawingml/2006/main">
               <a:ext uri="{FF2B5EF4-FFF2-40B4-BE49-F238E27FC236}">
-                <a16:creationId xmlns:a16="http://schemas.microsoft.com/office/drawing/2014/main" id="{532D3220-A1F6-41EE-BBEE-A89DC55B3F74}"/>
+                <a16:creationId xmlns:a16="http://schemas.microsoft.com/office/drawing/2014/main" id="{6D95056C-DB3D-4156-8209-27D8EDAD346F}"/>
               </a:ext>
             </a:extLst>
           </p:cNvPr>
@@ -9648,7 +9648,7 @@
           <p:cNvPr id="39" name="">
             <a:extLst xmlns:a="http://schemas.openxmlformats.org/drawingml/2006/main">
               <a:ext uri="{FF2B5EF4-FFF2-40B4-BE49-F238E27FC236}">
-                <a16:creationId xmlns:a16="http://schemas.microsoft.com/office/drawing/2014/main" id="{C50A8564-2B29-4A52-BCDD-DFE620D5F90D}"/>
+                <a16:creationId xmlns:a16="http://schemas.microsoft.com/office/drawing/2014/main" id="{C42A5AE1-0179-46C8-8A25-2F5CC3BE96A7}"/>
               </a:ext>
             </a:extLst>
           </p:cNvPr>
@@ -9700,7 +9700,7 @@
           <p:cNvPr id="40" name="">
             <a:extLst xmlns:a="http://schemas.openxmlformats.org/drawingml/2006/main">
               <a:ext uri="{FF2B5EF4-FFF2-40B4-BE49-F238E27FC236}">
-                <a16:creationId xmlns:a16="http://schemas.microsoft.com/office/drawing/2014/main" id="{B1FAFCEA-73A8-42DF-8FDC-3CB7A6224D14}"/>
+                <a16:creationId xmlns:a16="http://schemas.microsoft.com/office/drawing/2014/main" id="{E4ECD6DB-7309-49A3-BEA9-A39A4DF39FBF}"/>
               </a:ext>
             </a:extLst>
           </p:cNvPr>
@@ -9752,7 +9752,7 @@
           <p:cNvPr id="41" name="">
             <a:extLst xmlns:a="http://schemas.openxmlformats.org/drawingml/2006/main">
               <a:ext uri="{FF2B5EF4-FFF2-40B4-BE49-F238E27FC236}">
-                <a16:creationId xmlns:a16="http://schemas.microsoft.com/office/drawing/2014/main" id="{228C1BB1-521A-4EBB-992B-62C53BC6EE12}"/>
+                <a16:creationId xmlns:a16="http://schemas.microsoft.com/office/drawing/2014/main" id="{7C10C961-D687-4885-99BB-CB5B78B470E9}"/>
               </a:ext>
             </a:extLst>
           </p:cNvPr>
@@ -9804,7 +9804,7 @@
           <p:cNvPr id="42" name="">
             <a:extLst xmlns:a="http://schemas.openxmlformats.org/drawingml/2006/main">
               <a:ext uri="{FF2B5EF4-FFF2-40B4-BE49-F238E27FC236}">
-                <a16:creationId xmlns:a16="http://schemas.microsoft.com/office/drawing/2014/main" id="{B44FD284-179D-426B-97F4-28C1FA929100}"/>
+                <a16:creationId xmlns:a16="http://schemas.microsoft.com/office/drawing/2014/main" id="{4CFDEF9D-DE36-4D75-94FD-47C6335F8D64}"/>
               </a:ext>
             </a:extLst>
           </p:cNvPr>
@@ -9856,7 +9856,7 @@
           <p:cNvPr id="43" name="">
             <a:extLst xmlns:a="http://schemas.openxmlformats.org/drawingml/2006/main">
               <a:ext uri="{FF2B5EF4-FFF2-40B4-BE49-F238E27FC236}">
-                <a16:creationId xmlns:a16="http://schemas.microsoft.com/office/drawing/2014/main" id="{CECFCB38-62CD-4BEC-B155-C07E5C086228}"/>
+                <a16:creationId xmlns:a16="http://schemas.microsoft.com/office/drawing/2014/main" id="{12AA6D49-238C-4BC8-9023-4DCEA2A41EC7}"/>
               </a:ext>
             </a:extLst>
           </p:cNvPr>
@@ -9908,7 +9908,7 @@
           <p:cNvPr id="44" name="">
             <a:extLst xmlns:a="http://schemas.openxmlformats.org/drawingml/2006/main">
               <a:ext uri="{FF2B5EF4-FFF2-40B4-BE49-F238E27FC236}">
-                <a16:creationId xmlns:a16="http://schemas.microsoft.com/office/drawing/2014/main" id="{6AC1AC99-7624-49A2-B921-93B48AC44D10}"/>
+                <a16:creationId xmlns:a16="http://schemas.microsoft.com/office/drawing/2014/main" id="{1AE17BA3-B314-469D-8A9B-B22FC8965AF1}"/>
               </a:ext>
             </a:extLst>
           </p:cNvPr>
@@ -9939,7 +9939,7 @@
           <p:cNvPr id="45" name="">
             <a:extLst xmlns:a="http://schemas.openxmlformats.org/drawingml/2006/main">
               <a:ext uri="{FF2B5EF4-FFF2-40B4-BE49-F238E27FC236}">
-                <a16:creationId xmlns:a16="http://schemas.microsoft.com/office/drawing/2014/main" id="{0DE3DD4B-BE0E-4065-AD70-665B1AC04AD9}"/>
+                <a16:creationId xmlns:a16="http://schemas.microsoft.com/office/drawing/2014/main" id="{36DDD2CE-3677-43D2-BD02-5DF92E5950F4}"/>
               </a:ext>
             </a:extLst>
           </p:cNvPr>
@@ -9991,7 +9991,7 @@
           <p:cNvPr id="46" name="">
             <a:extLst xmlns:a="http://schemas.openxmlformats.org/drawingml/2006/main">
               <a:ext uri="{FF2B5EF4-FFF2-40B4-BE49-F238E27FC236}">
-                <a16:creationId xmlns:a16="http://schemas.microsoft.com/office/drawing/2014/main" id="{C4661AF4-92BC-40B4-9138-FDACCF4515E3}"/>
+                <a16:creationId xmlns:a16="http://schemas.microsoft.com/office/drawing/2014/main" id="{DCEE355A-D187-4378-9D49-82B156370D0E}"/>
               </a:ext>
             </a:extLst>
           </p:cNvPr>
@@ -10043,7 +10043,7 @@
           <p:cNvPr id="47" name="">
             <a:extLst xmlns:a="http://schemas.openxmlformats.org/drawingml/2006/main">
               <a:ext uri="{FF2B5EF4-FFF2-40B4-BE49-F238E27FC236}">
-                <a16:creationId xmlns:a16="http://schemas.microsoft.com/office/drawing/2014/main" id="{14B6344C-5D20-4294-9784-F3AE78338DA9}"/>
+                <a16:creationId xmlns:a16="http://schemas.microsoft.com/office/drawing/2014/main" id="{9F6F0454-2381-4A91-BBFC-BF2173433BDA}"/>
               </a:ext>
             </a:extLst>
           </p:cNvPr>
@@ -10095,7 +10095,7 @@
           <p:cNvPr id="48" name="">
             <a:extLst xmlns:a="http://schemas.openxmlformats.org/drawingml/2006/main">
               <a:ext uri="{FF2B5EF4-FFF2-40B4-BE49-F238E27FC236}">
-                <a16:creationId xmlns:a16="http://schemas.microsoft.com/office/drawing/2014/main" id="{F371CE03-3F96-4056-A969-E8B39576B1AB}"/>
+                <a16:creationId xmlns:a16="http://schemas.microsoft.com/office/drawing/2014/main" id="{9FDA4055-7D6A-4F5C-9418-E2F13F280100}"/>
               </a:ext>
             </a:extLst>
           </p:cNvPr>
@@ -10147,7 +10147,7 @@
           <p:cNvPr id="49" name="">
             <a:extLst xmlns:a="http://schemas.openxmlformats.org/drawingml/2006/main">
               <a:ext uri="{FF2B5EF4-FFF2-40B4-BE49-F238E27FC236}">
-                <a16:creationId xmlns:a16="http://schemas.microsoft.com/office/drawing/2014/main" id="{FE360495-22A8-41EF-9C9F-3CB731A1214E}"/>
+                <a16:creationId xmlns:a16="http://schemas.microsoft.com/office/drawing/2014/main" id="{00312B80-C9FA-46C3-91DB-F25C4F20594B}"/>
               </a:ext>
             </a:extLst>
           </p:cNvPr>
@@ -10199,7 +10199,7 @@
           <p:cNvPr id="50" name="">
             <a:extLst xmlns:a="http://schemas.openxmlformats.org/drawingml/2006/main">
               <a:ext uri="{FF2B5EF4-FFF2-40B4-BE49-F238E27FC236}">
-                <a16:creationId xmlns:a16="http://schemas.microsoft.com/office/drawing/2014/main" id="{0C9FB599-B426-48A9-9BED-E18D3ED0EF70}"/>
+                <a16:creationId xmlns:a16="http://schemas.microsoft.com/office/drawing/2014/main" id="{2191F8F6-BAEF-4842-B36D-EE35C7FD4CA7}"/>
               </a:ext>
             </a:extLst>
           </p:cNvPr>
@@ -10251,7 +10251,7 @@
           <p:cNvPr id="51" name="">
             <a:extLst xmlns:a="http://schemas.openxmlformats.org/drawingml/2006/main">
               <a:ext uri="{FF2B5EF4-FFF2-40B4-BE49-F238E27FC236}">
-                <a16:creationId xmlns:a16="http://schemas.microsoft.com/office/drawing/2014/main" id="{B3F4364C-DD74-45F5-B79D-EB9DF2BD2C1D}"/>
+                <a16:creationId xmlns:a16="http://schemas.microsoft.com/office/drawing/2014/main" id="{9919503F-11DB-4074-B2EA-1726ADF5F930}"/>
               </a:ext>
             </a:extLst>
           </p:cNvPr>
@@ -10282,7 +10282,7 @@
           <p:cNvPr id="52" name="">
             <a:extLst xmlns:a="http://schemas.openxmlformats.org/drawingml/2006/main">
               <a:ext uri="{FF2B5EF4-FFF2-40B4-BE49-F238E27FC236}">
-                <a16:creationId xmlns:a16="http://schemas.microsoft.com/office/drawing/2014/main" id="{65CED6EA-16CD-4258-9762-9844EA93663F}"/>
+                <a16:creationId xmlns:a16="http://schemas.microsoft.com/office/drawing/2014/main" id="{F18248FD-8527-4705-8157-7D7D118405D6}"/>
               </a:ext>
             </a:extLst>
           </p:cNvPr>
@@ -10313,7 +10313,7 @@
           <p:cNvPr id="53" name="">
             <a:extLst xmlns:a="http://schemas.openxmlformats.org/drawingml/2006/main">
               <a:ext uri="{FF2B5EF4-FFF2-40B4-BE49-F238E27FC236}">
-                <a16:creationId xmlns:a16="http://schemas.microsoft.com/office/drawing/2014/main" id="{D697CCC6-5196-484B-A4E3-6436D6C9EF3B}"/>
+                <a16:creationId xmlns:a16="http://schemas.microsoft.com/office/drawing/2014/main" id="{2DE667CC-6858-403D-86EF-A8861ECF2979}"/>
               </a:ext>
             </a:extLst>
           </p:cNvPr>
@@ -10344,7 +10344,7 @@
           <p:cNvPr id="54" name="">
             <a:extLst xmlns:a="http://schemas.openxmlformats.org/drawingml/2006/main">
               <a:ext uri="{FF2B5EF4-FFF2-40B4-BE49-F238E27FC236}">
-                <a16:creationId xmlns:a16="http://schemas.microsoft.com/office/drawing/2014/main" id="{3FF5D744-9FA3-4B3F-AD37-32A74BB4B0A8}"/>
+                <a16:creationId xmlns:a16="http://schemas.microsoft.com/office/drawing/2014/main" id="{6277321C-B71C-463B-8DBB-F8F983CD6109}"/>
               </a:ext>
             </a:extLst>
           </p:cNvPr>
@@ -10396,7 +10396,7 @@
           <p:cNvPr id="55" name="">
             <a:extLst xmlns:a="http://schemas.openxmlformats.org/drawingml/2006/main">
               <a:ext uri="{FF2B5EF4-FFF2-40B4-BE49-F238E27FC236}">
-                <a16:creationId xmlns:a16="http://schemas.microsoft.com/office/drawing/2014/main" id="{6AC47701-480A-4A7D-989C-0A0425855F66}"/>
+                <a16:creationId xmlns:a16="http://schemas.microsoft.com/office/drawing/2014/main" id="{970D1E1B-26E6-443C-A8A4-25C4C8666F10}"/>
               </a:ext>
             </a:extLst>
           </p:cNvPr>
@@ -10448,7 +10448,7 @@
           <p:cNvPr id="56" name="">
             <a:extLst xmlns:a="http://schemas.openxmlformats.org/drawingml/2006/main">
               <a:ext uri="{FF2B5EF4-FFF2-40B4-BE49-F238E27FC236}">
-                <a16:creationId xmlns:a16="http://schemas.microsoft.com/office/drawing/2014/main" id="{20D7C52D-F5CC-499D-80F1-BA4BCB8711ED}"/>
+                <a16:creationId xmlns:a16="http://schemas.microsoft.com/office/drawing/2014/main" id="{6F07EA1E-6141-4D8D-A521-FE9F3D942F05}"/>
               </a:ext>
             </a:extLst>
           </p:cNvPr>
@@ -10500,7 +10500,7 @@
           <p:cNvPr id="57" name="">
             <a:extLst xmlns:a="http://schemas.openxmlformats.org/drawingml/2006/main">
               <a:ext uri="{FF2B5EF4-FFF2-40B4-BE49-F238E27FC236}">
-                <a16:creationId xmlns:a16="http://schemas.microsoft.com/office/drawing/2014/main" id="{2384B546-FE5C-4768-B018-ECB148111FF9}"/>
+                <a16:creationId xmlns:a16="http://schemas.microsoft.com/office/drawing/2014/main" id="{38789602-7ADD-4472-9461-2B05FB5C96F2}"/>
               </a:ext>
             </a:extLst>
           </p:cNvPr>
@@ -10552,7 +10552,7 @@
           <p:cNvPr id="58" name="">
             <a:extLst xmlns:a="http://schemas.openxmlformats.org/drawingml/2006/main">
               <a:ext uri="{FF2B5EF4-FFF2-40B4-BE49-F238E27FC236}">
-                <a16:creationId xmlns:a16="http://schemas.microsoft.com/office/drawing/2014/main" id="{1683DFFD-3D32-411B-A06D-9E00DC7D19DC}"/>
+                <a16:creationId xmlns:a16="http://schemas.microsoft.com/office/drawing/2014/main" id="{2AC015BD-8A63-47AB-A6F2-CF28F66D3E0E}"/>
               </a:ext>
             </a:extLst>
           </p:cNvPr>
@@ -10604,7 +10604,7 @@
           <p:cNvPr id="59" name="">
             <a:extLst xmlns:a="http://schemas.openxmlformats.org/drawingml/2006/main">
               <a:ext uri="{FF2B5EF4-FFF2-40B4-BE49-F238E27FC236}">
-                <a16:creationId xmlns:a16="http://schemas.microsoft.com/office/drawing/2014/main" id="{7EBBC0D8-9F0C-424A-80DE-77E9AA53FE6D}"/>
+                <a16:creationId xmlns:a16="http://schemas.microsoft.com/office/drawing/2014/main" id="{F85C9779-D74F-40E3-940C-A5D66C8B7611}"/>
               </a:ext>
             </a:extLst>
           </p:cNvPr>
@@ -10635,7 +10635,7 @@
           <p:cNvPr id="60" name="">
             <a:extLst xmlns:a="http://schemas.openxmlformats.org/drawingml/2006/main">
               <a:ext uri="{FF2B5EF4-FFF2-40B4-BE49-F238E27FC236}">
-                <a16:creationId xmlns:a16="http://schemas.microsoft.com/office/drawing/2014/main" id="{B6503695-82E0-4D61-A7D3-CFA4379B3214}"/>
+                <a16:creationId xmlns:a16="http://schemas.microsoft.com/office/drawing/2014/main" id="{1DDC6BBA-4046-4349-BE08-7A1622ECEFF2}"/>
               </a:ext>
             </a:extLst>
           </p:cNvPr>
@@ -10687,7 +10687,7 @@
           <p:cNvPr id="61" name="">
             <a:extLst xmlns:a="http://schemas.openxmlformats.org/drawingml/2006/main">
               <a:ext uri="{FF2B5EF4-FFF2-40B4-BE49-F238E27FC236}">
-                <a16:creationId xmlns:a16="http://schemas.microsoft.com/office/drawing/2014/main" id="{0C145DDB-AD50-4108-92F3-D2256C8D5FE2}"/>
+                <a16:creationId xmlns:a16="http://schemas.microsoft.com/office/drawing/2014/main" id="{941E9C43-F54A-4E38-AF6F-B60686594061}"/>
               </a:ext>
             </a:extLst>
           </p:cNvPr>
@@ -10739,7 +10739,7 @@
           <p:cNvPr id="62" name="">
             <a:extLst xmlns:a="http://schemas.openxmlformats.org/drawingml/2006/main">
               <a:ext uri="{FF2B5EF4-FFF2-40B4-BE49-F238E27FC236}">
-                <a16:creationId xmlns:a16="http://schemas.microsoft.com/office/drawing/2014/main" id="{E5B04314-16A1-42F0-9C48-3AD30779303D}"/>
+                <a16:creationId xmlns:a16="http://schemas.microsoft.com/office/drawing/2014/main" id="{966942F1-2100-4065-827E-DFA7A17FD29C}"/>
               </a:ext>
             </a:extLst>
           </p:cNvPr>
@@ -10791,7 +10791,7 @@
           <p:cNvPr id="63" name="">
             <a:extLst xmlns:a="http://schemas.openxmlformats.org/drawingml/2006/main">
               <a:ext uri="{FF2B5EF4-FFF2-40B4-BE49-F238E27FC236}">
-                <a16:creationId xmlns:a16="http://schemas.microsoft.com/office/drawing/2014/main" id="{05C1B434-188B-47B5-AED6-1D51D0FAE7EA}"/>
+                <a16:creationId xmlns:a16="http://schemas.microsoft.com/office/drawing/2014/main" id="{30CE2A19-632C-4CAB-9AD5-17F4A4772CFF}"/>
               </a:ext>
             </a:extLst>
           </p:cNvPr>
@@ -10843,7 +10843,7 @@
           <p:cNvPr id="64" name="">
             <a:extLst xmlns:a="http://schemas.openxmlformats.org/drawingml/2006/main">
               <a:ext uri="{FF2B5EF4-FFF2-40B4-BE49-F238E27FC236}">
-                <a16:creationId xmlns:a16="http://schemas.microsoft.com/office/drawing/2014/main" id="{745BA12F-4949-48C0-93E8-50706E3443A4}"/>
+                <a16:creationId xmlns:a16="http://schemas.microsoft.com/office/drawing/2014/main" id="{2368EE7A-3851-4200-AE49-5FF923F1170C}"/>
               </a:ext>
             </a:extLst>
           </p:cNvPr>
@@ -10895,7 +10895,7 @@
           <p:cNvPr id="65" name="">
             <a:extLst xmlns:a="http://schemas.openxmlformats.org/drawingml/2006/main">
               <a:ext uri="{FF2B5EF4-FFF2-40B4-BE49-F238E27FC236}">
-                <a16:creationId xmlns:a16="http://schemas.microsoft.com/office/drawing/2014/main" id="{CEEED382-0E37-4346-B23B-07F59F390349}"/>
+                <a16:creationId xmlns:a16="http://schemas.microsoft.com/office/drawing/2014/main" id="{38F8BBE7-80F1-47D4-A4BE-8311263B64A1}"/>
               </a:ext>
             </a:extLst>
           </p:cNvPr>
@@ -10926,7 +10926,7 @@
           <p:cNvPr id="66" name="">
             <a:extLst xmlns:a="http://schemas.openxmlformats.org/drawingml/2006/main">
               <a:ext uri="{FF2B5EF4-FFF2-40B4-BE49-F238E27FC236}">
-                <a16:creationId xmlns:a16="http://schemas.microsoft.com/office/drawing/2014/main" id="{F0F96FA4-29B1-48E1-8437-75831FF387D9}"/>
+                <a16:creationId xmlns:a16="http://schemas.microsoft.com/office/drawing/2014/main" id="{F5D46F4F-9C3A-4E0C-885D-13252479712D}"/>
               </a:ext>
             </a:extLst>
           </p:cNvPr>
@@ -10957,7 +10957,7 @@
           <p:cNvPr id="67" name="">
             <a:extLst xmlns:a="http://schemas.openxmlformats.org/drawingml/2006/main">
               <a:ext uri="{FF2B5EF4-FFF2-40B4-BE49-F238E27FC236}">
-                <a16:creationId xmlns:a16="http://schemas.microsoft.com/office/drawing/2014/main" id="{7987AB5C-B8DB-4177-A71C-870524564366}"/>
+                <a16:creationId xmlns:a16="http://schemas.microsoft.com/office/drawing/2014/main" id="{65BBE246-217D-496D-88F6-27DABE0AAAB9}"/>
               </a:ext>
             </a:extLst>
           </p:cNvPr>
@@ -11009,7 +11009,7 @@
           <p:cNvPr id="68" name="">
             <a:extLst xmlns:a="http://schemas.openxmlformats.org/drawingml/2006/main">
               <a:ext uri="{FF2B5EF4-FFF2-40B4-BE49-F238E27FC236}">
-                <a16:creationId xmlns:a16="http://schemas.microsoft.com/office/drawing/2014/main" id="{B8FDEBE0-3396-496F-A842-FCC456F76EFA}"/>
+                <a16:creationId xmlns:a16="http://schemas.microsoft.com/office/drawing/2014/main" id="{CACF545A-752E-4081-9CD6-53DBCACEE2CE}"/>
               </a:ext>
             </a:extLst>
           </p:cNvPr>
@@ -11061,7 +11061,7 @@
           <p:cNvPr id="69" name="">
             <a:extLst xmlns:a="http://schemas.openxmlformats.org/drawingml/2006/main">
               <a:ext uri="{FF2B5EF4-FFF2-40B4-BE49-F238E27FC236}">
-                <a16:creationId xmlns:a16="http://schemas.microsoft.com/office/drawing/2014/main" id="{A7113565-9619-4CD1-A83A-708873D03867}"/>
+                <a16:creationId xmlns:a16="http://schemas.microsoft.com/office/drawing/2014/main" id="{61571847-EA8A-4F8C-AA3B-89A34BF8107E}"/>
               </a:ext>
             </a:extLst>
           </p:cNvPr>
@@ -11113,7 +11113,7 @@
           <p:cNvPr id="70" name="">
             <a:extLst xmlns:a="http://schemas.openxmlformats.org/drawingml/2006/main">
               <a:ext uri="{FF2B5EF4-FFF2-40B4-BE49-F238E27FC236}">
-                <a16:creationId xmlns:a16="http://schemas.microsoft.com/office/drawing/2014/main" id="{BB8B3FE1-BDC4-41E3-8C95-EE307ED4E89E}"/>
+                <a16:creationId xmlns:a16="http://schemas.microsoft.com/office/drawing/2014/main" id="{1E70281C-45AF-4E6A-AD7A-24205FBD26BF}"/>
               </a:ext>
             </a:extLst>
           </p:cNvPr>
@@ -11165,7 +11165,7 @@
           <p:cNvPr id="71" name="">
             <a:extLst xmlns:a="http://schemas.openxmlformats.org/drawingml/2006/main">
               <a:ext uri="{FF2B5EF4-FFF2-40B4-BE49-F238E27FC236}">
-                <a16:creationId xmlns:a16="http://schemas.microsoft.com/office/drawing/2014/main" id="{34D5AF20-C0C0-4721-AAAA-C83BEDFE4E8A}"/>
+                <a16:creationId xmlns:a16="http://schemas.microsoft.com/office/drawing/2014/main" id="{76DD76E0-6697-4C43-BF95-34AA2B842B6C}"/>
               </a:ext>
             </a:extLst>
           </p:cNvPr>
@@ -11217,7 +11217,7 @@
           <p:cNvPr id="72" name="">
             <a:extLst xmlns:a="http://schemas.openxmlformats.org/drawingml/2006/main">
               <a:ext uri="{FF2B5EF4-FFF2-40B4-BE49-F238E27FC236}">
-                <a16:creationId xmlns:a16="http://schemas.microsoft.com/office/drawing/2014/main" id="{1D1E0EED-81CE-4276-BDAC-7E30B2C6D56E}"/>
+                <a16:creationId xmlns:a16="http://schemas.microsoft.com/office/drawing/2014/main" id="{FA328E32-64C5-4AF1-843D-726EAC6F1A9B}"/>
               </a:ext>
             </a:extLst>
           </p:cNvPr>
@@ -11248,7 +11248,7 @@
           <p:cNvPr id="73" name="">
             <a:extLst xmlns:a="http://schemas.openxmlformats.org/drawingml/2006/main">
               <a:ext uri="{FF2B5EF4-FFF2-40B4-BE49-F238E27FC236}">
-                <a16:creationId xmlns:a16="http://schemas.microsoft.com/office/drawing/2014/main" id="{4756EC99-7474-45B2-914B-EF89EBC3B4DC}"/>
+                <a16:creationId xmlns:a16="http://schemas.microsoft.com/office/drawing/2014/main" id="{87CBAA6C-35F6-4C3A-8E97-6F5EF33AE515}"/>
               </a:ext>
             </a:extLst>
           </p:cNvPr>
@@ -11300,7 +11300,7 @@
           <p:cNvPr id="74" name="">
             <a:extLst xmlns:a="http://schemas.openxmlformats.org/drawingml/2006/main">
               <a:ext uri="{FF2B5EF4-FFF2-40B4-BE49-F238E27FC236}">
-                <a16:creationId xmlns:a16="http://schemas.microsoft.com/office/drawing/2014/main" id="{DD557823-6679-469B-81BB-009FFEED0EC7}"/>
+                <a16:creationId xmlns:a16="http://schemas.microsoft.com/office/drawing/2014/main" id="{969B703C-0C3B-4EEB-ADDA-044EEF7FD0B4}"/>
               </a:ext>
             </a:extLst>
           </p:cNvPr>
@@ -11352,7 +11352,7 @@
           <p:cNvPr id="75" name="">
             <a:extLst xmlns:a="http://schemas.openxmlformats.org/drawingml/2006/main">
               <a:ext uri="{FF2B5EF4-FFF2-40B4-BE49-F238E27FC236}">
-                <a16:creationId xmlns:a16="http://schemas.microsoft.com/office/drawing/2014/main" id="{DB66C900-2C1B-4791-B2CF-4FA8E51ED2D2}"/>
+                <a16:creationId xmlns:a16="http://schemas.microsoft.com/office/drawing/2014/main" id="{F2724AE2-6E19-49D9-860F-42C5440F90AA}"/>
               </a:ext>
             </a:extLst>
           </p:cNvPr>
@@ -11404,7 +11404,7 @@
           <p:cNvPr id="76" name="">
             <a:extLst xmlns:a="http://schemas.openxmlformats.org/drawingml/2006/main">
               <a:ext uri="{FF2B5EF4-FFF2-40B4-BE49-F238E27FC236}">
-                <a16:creationId xmlns:a16="http://schemas.microsoft.com/office/drawing/2014/main" id="{2D897218-4799-4FB3-89F6-71412544610E}"/>
+                <a16:creationId xmlns:a16="http://schemas.microsoft.com/office/drawing/2014/main" id="{38EBD7D6-BA22-4A69-B3C6-71DE7D112D5B}"/>
               </a:ext>
             </a:extLst>
           </p:cNvPr>
@@ -11456,7 +11456,7 @@
           <p:cNvPr id="77" name="">
             <a:extLst xmlns:a="http://schemas.openxmlformats.org/drawingml/2006/main">
               <a:ext uri="{FF2B5EF4-FFF2-40B4-BE49-F238E27FC236}">
-                <a16:creationId xmlns:a16="http://schemas.microsoft.com/office/drawing/2014/main" id="{D39DA160-B693-4C13-8F94-E1EBBA6AFEE4}"/>
+                <a16:creationId xmlns:a16="http://schemas.microsoft.com/office/drawing/2014/main" id="{D76EDCFE-897E-4A00-890A-543F327DD55C}"/>
               </a:ext>
             </a:extLst>
           </p:cNvPr>
@@ -11508,7 +11508,7 @@
           <p:cNvPr id="78" name="">
             <a:extLst xmlns:a="http://schemas.openxmlformats.org/drawingml/2006/main">
               <a:ext uri="{FF2B5EF4-FFF2-40B4-BE49-F238E27FC236}">
-                <a16:creationId xmlns:a16="http://schemas.microsoft.com/office/drawing/2014/main" id="{2E7170B2-A91B-4BAD-B271-092A7F42CB4E}"/>
+                <a16:creationId xmlns:a16="http://schemas.microsoft.com/office/drawing/2014/main" id="{F7EA4790-EF7F-47A2-9578-D8B1977C1400}"/>
               </a:ext>
             </a:extLst>
           </p:cNvPr>
@@ -11539,7 +11539,7 @@
           <p:cNvPr id="79" name="">
             <a:extLst xmlns:a="http://schemas.openxmlformats.org/drawingml/2006/main">
               <a:ext uri="{FF2B5EF4-FFF2-40B4-BE49-F238E27FC236}">
-                <a16:creationId xmlns:a16="http://schemas.microsoft.com/office/drawing/2014/main" id="{1A063E5B-0620-430A-BFCB-20B3CF81E051}"/>
+                <a16:creationId xmlns:a16="http://schemas.microsoft.com/office/drawing/2014/main" id="{A1745C33-E6B7-476F-9BCB-57CFDD26FE92}"/>
               </a:ext>
             </a:extLst>
           </p:cNvPr>
@@ -11570,7 +11570,7 @@
           <p:cNvPr id="80" name="">
             <a:extLst xmlns:a="http://schemas.openxmlformats.org/drawingml/2006/main">
               <a:ext uri="{FF2B5EF4-FFF2-40B4-BE49-F238E27FC236}">
-                <a16:creationId xmlns:a16="http://schemas.microsoft.com/office/drawing/2014/main" id="{13C9A41B-A339-466C-AA0E-1ABD9DF51A82}"/>
+                <a16:creationId xmlns:a16="http://schemas.microsoft.com/office/drawing/2014/main" id="{59CE4E7B-4F3A-40AA-8186-FED9B6D312E1}"/>
               </a:ext>
             </a:extLst>
           </p:cNvPr>
@@ -11622,7 +11622,7 @@
           <p:cNvPr id="81" name="">
             <a:extLst xmlns:a="http://schemas.openxmlformats.org/drawingml/2006/main">
               <a:ext uri="{FF2B5EF4-FFF2-40B4-BE49-F238E27FC236}">
-                <a16:creationId xmlns:a16="http://schemas.microsoft.com/office/drawing/2014/main" id="{38258ED8-D451-47FC-9ED0-14F3C3F46F79}"/>
+                <a16:creationId xmlns:a16="http://schemas.microsoft.com/office/drawing/2014/main" id="{1D2C25EC-F783-4740-B7F5-DBF4C77A6C5C}"/>
               </a:ext>
             </a:extLst>
           </p:cNvPr>
@@ -11674,7 +11674,7 @@
           <p:cNvPr id="82" name="">
             <a:extLst xmlns:a="http://schemas.openxmlformats.org/drawingml/2006/main">
               <a:ext uri="{FF2B5EF4-FFF2-40B4-BE49-F238E27FC236}">
-                <a16:creationId xmlns:a16="http://schemas.microsoft.com/office/drawing/2014/main" id="{ED622B4A-A97F-4E18-B2B4-F315D4BA42E6}"/>
+                <a16:creationId xmlns:a16="http://schemas.microsoft.com/office/drawing/2014/main" id="{7F553B4F-B35B-4772-B164-F06BF39F4667}"/>
               </a:ext>
             </a:extLst>
           </p:cNvPr>
@@ -11726,7 +11726,7 @@
           <p:cNvPr id="83" name="">
             <a:extLst xmlns:a="http://schemas.openxmlformats.org/drawingml/2006/main">
               <a:ext uri="{FF2B5EF4-FFF2-40B4-BE49-F238E27FC236}">
-                <a16:creationId xmlns:a16="http://schemas.microsoft.com/office/drawing/2014/main" id="{82499FA8-57A4-4083-996B-B7D3DA1DE30F}"/>
+                <a16:creationId xmlns:a16="http://schemas.microsoft.com/office/drawing/2014/main" id="{36B2D336-88AD-485C-B684-ABE65F871CDD}"/>
               </a:ext>
             </a:extLst>
           </p:cNvPr>
@@ -11778,7 +11778,7 @@
           <p:cNvPr id="84" name="">
             <a:extLst xmlns:a="http://schemas.openxmlformats.org/drawingml/2006/main">
               <a:ext uri="{FF2B5EF4-FFF2-40B4-BE49-F238E27FC236}">
-                <a16:creationId xmlns:a16="http://schemas.microsoft.com/office/drawing/2014/main" id="{25B44B64-CF03-4453-809F-E364D78BA7CC}"/>
+                <a16:creationId xmlns:a16="http://schemas.microsoft.com/office/drawing/2014/main" id="{06CF1CE4-74DE-4E88-B668-7C152BF34486}"/>
               </a:ext>
             </a:extLst>
           </p:cNvPr>
@@ -11830,7 +11830,7 @@
           <p:cNvPr id="85" name="">
             <a:extLst xmlns:a="http://schemas.openxmlformats.org/drawingml/2006/main">
               <a:ext uri="{FF2B5EF4-FFF2-40B4-BE49-F238E27FC236}">
-                <a16:creationId xmlns:a16="http://schemas.microsoft.com/office/drawing/2014/main" id="{575C0114-C457-4C3D-A5B7-B3256609F531}"/>
+                <a16:creationId xmlns:a16="http://schemas.microsoft.com/office/drawing/2014/main" id="{CB1D9B8E-695E-41B1-83CD-97530C3F15B3}"/>
               </a:ext>
             </a:extLst>
           </p:cNvPr>
@@ -11861,7 +11861,7 @@
           <p:cNvPr id="86" name="">
             <a:extLst xmlns:a="http://schemas.openxmlformats.org/drawingml/2006/main">
               <a:ext uri="{FF2B5EF4-FFF2-40B4-BE49-F238E27FC236}">
-                <a16:creationId xmlns:a16="http://schemas.microsoft.com/office/drawing/2014/main" id="{1BFB1792-D845-4044-ACA1-F57F069D07B2}"/>
+                <a16:creationId xmlns:a16="http://schemas.microsoft.com/office/drawing/2014/main" id="{5B601599-3A81-4CC5-A72E-316526F08994}"/>
               </a:ext>
             </a:extLst>
           </p:cNvPr>
@@ -11913,7 +11913,7 @@
           <p:cNvPr id="87" name="">
             <a:extLst xmlns:a="http://schemas.openxmlformats.org/drawingml/2006/main">
               <a:ext uri="{FF2B5EF4-FFF2-40B4-BE49-F238E27FC236}">
-                <a16:creationId xmlns:a16="http://schemas.microsoft.com/office/drawing/2014/main" id="{408EDDF7-E672-491D-B0AD-5247D33FE3EF}"/>
+                <a16:creationId xmlns:a16="http://schemas.microsoft.com/office/drawing/2014/main" id="{4AF15D69-354D-4243-9F1D-382C3E116DF9}"/>
               </a:ext>
             </a:extLst>
           </p:cNvPr>
@@ -11965,7 +11965,7 @@
           <p:cNvPr id="88" name="">
             <a:extLst xmlns:a="http://schemas.openxmlformats.org/drawingml/2006/main">
               <a:ext uri="{FF2B5EF4-FFF2-40B4-BE49-F238E27FC236}">
-                <a16:creationId xmlns:a16="http://schemas.microsoft.com/office/drawing/2014/main" id="{1EF08F9E-F063-413D-93F6-5C9096DBDCD7}"/>
+                <a16:creationId xmlns:a16="http://schemas.microsoft.com/office/drawing/2014/main" id="{C5B2AB28-5360-4375-9BE3-419EB0CE1465}"/>
               </a:ext>
             </a:extLst>
           </p:cNvPr>
@@ -12017,7 +12017,7 @@
           <p:cNvPr id="89" name="">
             <a:extLst xmlns:a="http://schemas.openxmlformats.org/drawingml/2006/main">
               <a:ext uri="{FF2B5EF4-FFF2-40B4-BE49-F238E27FC236}">
-                <a16:creationId xmlns:a16="http://schemas.microsoft.com/office/drawing/2014/main" id="{F392ABA1-09D9-461D-BB95-880648959AAB}"/>
+                <a16:creationId xmlns:a16="http://schemas.microsoft.com/office/drawing/2014/main" id="{38F5AF9E-3AFC-49DF-89C4-3FE5ABD6E420}"/>
               </a:ext>
             </a:extLst>
           </p:cNvPr>
@@ -12069,7 +12069,7 @@
           <p:cNvPr id="90" name="">
             <a:extLst xmlns:a="http://schemas.openxmlformats.org/drawingml/2006/main">
               <a:ext uri="{FF2B5EF4-FFF2-40B4-BE49-F238E27FC236}">
-                <a16:creationId xmlns:a16="http://schemas.microsoft.com/office/drawing/2014/main" id="{48268B3F-875D-403C-B944-876916388074}"/>
+                <a16:creationId xmlns:a16="http://schemas.microsoft.com/office/drawing/2014/main" id="{71B10FDF-27A2-4DB4-B9D8-03E4DC4F84F6}"/>
               </a:ext>
             </a:extLst>
           </p:cNvPr>
@@ -12121,7 +12121,7 @@
           <p:cNvPr id="91" name="">
             <a:extLst xmlns:a="http://schemas.openxmlformats.org/drawingml/2006/main">
               <a:ext uri="{FF2B5EF4-FFF2-40B4-BE49-F238E27FC236}">
-                <a16:creationId xmlns:a16="http://schemas.microsoft.com/office/drawing/2014/main" id="{B236F333-8262-4BCD-A046-E18FCC92F897}"/>
+                <a16:creationId xmlns:a16="http://schemas.microsoft.com/office/drawing/2014/main" id="{B03D2CB6-BB3B-4B73-BBEA-E60ACB3598E9}"/>
               </a:ext>
             </a:extLst>
           </p:cNvPr>
@@ -12152,7 +12152,7 @@
           <p:cNvPr id="92" name="">
             <a:extLst xmlns:a="http://schemas.openxmlformats.org/drawingml/2006/main">
               <a:ext uri="{FF2B5EF4-FFF2-40B4-BE49-F238E27FC236}">
-                <a16:creationId xmlns:a16="http://schemas.microsoft.com/office/drawing/2014/main" id="{6CDD7EA8-94EA-478C-A242-A88AAD2B1424}"/>
+                <a16:creationId xmlns:a16="http://schemas.microsoft.com/office/drawing/2014/main" id="{308AA48C-1B90-412D-B8EB-0B68BD20CA24}"/>
               </a:ext>
             </a:extLst>
           </p:cNvPr>
@@ -12183,7 +12183,7 @@
           <p:cNvPr id="93" name="">
             <a:extLst xmlns:a="http://schemas.openxmlformats.org/drawingml/2006/main">
               <a:ext uri="{FF2B5EF4-FFF2-40B4-BE49-F238E27FC236}">
-                <a16:creationId xmlns:a16="http://schemas.microsoft.com/office/drawing/2014/main" id="{E15D8567-E402-4D90-BB29-BFA4A33F5B50}"/>
+                <a16:creationId xmlns:a16="http://schemas.microsoft.com/office/drawing/2014/main" id="{4E581DCC-D543-406D-8261-3218E4AEB73B}"/>
               </a:ext>
             </a:extLst>
           </p:cNvPr>
@@ -12235,7 +12235,7 @@
           <p:cNvPr id="94" name="">
             <a:extLst xmlns:a="http://schemas.openxmlformats.org/drawingml/2006/main">
               <a:ext uri="{FF2B5EF4-FFF2-40B4-BE49-F238E27FC236}">
-                <a16:creationId xmlns:a16="http://schemas.microsoft.com/office/drawing/2014/main" id="{6628A570-2D7C-478B-B6A3-1B0C833739C6}"/>
+                <a16:creationId xmlns:a16="http://schemas.microsoft.com/office/drawing/2014/main" id="{DEE0DCA5-8727-4FA7-B81D-D61D4EB444FD}"/>
               </a:ext>
             </a:extLst>
           </p:cNvPr>
@@ -12287,7 +12287,7 @@
           <p:cNvPr id="95" name="">
             <a:extLst xmlns:a="http://schemas.openxmlformats.org/drawingml/2006/main">
               <a:ext uri="{FF2B5EF4-FFF2-40B4-BE49-F238E27FC236}">
-                <a16:creationId xmlns:a16="http://schemas.microsoft.com/office/drawing/2014/main" id="{2F35A85F-149C-408B-8E50-2DFE19040AC7}"/>
+                <a16:creationId xmlns:a16="http://schemas.microsoft.com/office/drawing/2014/main" id="{19B026A7-AD58-45D7-8B66-A88C4B503846}"/>
               </a:ext>
             </a:extLst>
           </p:cNvPr>
@@ -12339,7 +12339,7 @@
           <p:cNvPr id="96" name="">
             <a:extLst xmlns:a="http://schemas.openxmlformats.org/drawingml/2006/main">
               <a:ext uri="{FF2B5EF4-FFF2-40B4-BE49-F238E27FC236}">
-                <a16:creationId xmlns:a16="http://schemas.microsoft.com/office/drawing/2014/main" id="{E4B2DE4E-7B32-40E3-B733-48FCE51F4973}"/>
+                <a16:creationId xmlns:a16="http://schemas.microsoft.com/office/drawing/2014/main" id="{8CF7DB54-3970-4E48-BE13-821A98946FFB}"/>
               </a:ext>
             </a:extLst>
           </p:cNvPr>
@@ -12391,7 +12391,7 @@
           <p:cNvPr id="97" name="">
             <a:extLst xmlns:a="http://schemas.openxmlformats.org/drawingml/2006/main">
               <a:ext uri="{FF2B5EF4-FFF2-40B4-BE49-F238E27FC236}">
-                <a16:creationId xmlns:a16="http://schemas.microsoft.com/office/drawing/2014/main" id="{9EED614C-5A8A-4671-8540-2083ED059078}"/>
+                <a16:creationId xmlns:a16="http://schemas.microsoft.com/office/drawing/2014/main" id="{508C2983-2A60-4659-9048-98106EDA2A56}"/>
               </a:ext>
             </a:extLst>
           </p:cNvPr>
@@ -12441,7 +12441,7 @@
     </p:spTree>
     <p:extLst>
       <p:ext uri="{BB962C8B-B14F-4D97-AF65-F5344CB8AC3E}">
-        <p14:creationId xmlns:p14="http://schemas.microsoft.com/office/powerpoint/2010/main" val="1433392803"/>
+        <p14:creationId xmlns:p14="http://schemas.microsoft.com/office/powerpoint/2010/main" val="1112147250"/>
       </p:ext>
     </p:extLst>
   </p:cSld>
@@ -12472,7 +12472,7 @@
           <p:cNvPr id="102" name="">
             <a:extLst xmlns:a="http://schemas.openxmlformats.org/drawingml/2006/main">
               <a:ext uri="{FF2B5EF4-FFF2-40B4-BE49-F238E27FC236}">
-                <a16:creationId xmlns:a16="http://schemas.microsoft.com/office/drawing/2014/main" id="{1864E64B-D8EE-4526-8366-A1E7F4344F94}"/>
+                <a16:creationId xmlns:a16="http://schemas.microsoft.com/office/drawing/2014/main" id="{27A558C4-164B-4BC0-B7D3-8E50D94D610D}"/>
               </a:ext>
             </a:extLst>
           </p:cNvPr>
@@ -12505,7 +12505,7 @@
           <p:cNvPr id="2" name="">
             <a:extLst xmlns:a="http://schemas.openxmlformats.org/drawingml/2006/main">
               <a:ext uri="{FF2B5EF4-FFF2-40B4-BE49-F238E27FC236}">
-                <a16:creationId xmlns:a16="http://schemas.microsoft.com/office/drawing/2014/main" id="{B7BD77D6-2F09-4BE5-B9F2-122CFF1E4120}"/>
+                <a16:creationId xmlns:a16="http://schemas.microsoft.com/office/drawing/2014/main" id="{35735D12-B3F2-4CEC-8F75-8404AE2C97BE}"/>
               </a:ext>
             </a:extLst>
           </p:cNvPr>
@@ -12536,7 +12536,7 @@
           <p:cNvPr id="3" name="">
             <a:extLst xmlns:a="http://schemas.openxmlformats.org/drawingml/2006/main">
               <a:ext uri="{FF2B5EF4-FFF2-40B4-BE49-F238E27FC236}">
-                <a16:creationId xmlns:a16="http://schemas.microsoft.com/office/drawing/2014/main" id="{B5F96CCD-1EC2-4B4B-A8A1-FB8AC561AEAD}"/>
+                <a16:creationId xmlns:a16="http://schemas.microsoft.com/office/drawing/2014/main" id="{A4951C16-3895-4A98-B154-071E7DC34F22}"/>
               </a:ext>
             </a:extLst>
           </p:cNvPr>
@@ -12588,7 +12588,7 @@
           <p:cNvPr id="4" name="">
             <a:extLst xmlns:a="http://schemas.openxmlformats.org/drawingml/2006/main">
               <a:ext uri="{FF2B5EF4-FFF2-40B4-BE49-F238E27FC236}">
-                <a16:creationId xmlns:a16="http://schemas.microsoft.com/office/drawing/2014/main" id="{8EF55AA2-F88C-4EAE-8CE7-D9F2C29D2D46}"/>
+                <a16:creationId xmlns:a16="http://schemas.microsoft.com/office/drawing/2014/main" id="{A8AB23CD-38EF-4FB7-B800-35AC59E3279F}"/>
               </a:ext>
             </a:extLst>
           </p:cNvPr>
@@ -12640,7 +12640,7 @@
           <p:cNvPr id="5" name="">
             <a:extLst xmlns:a="http://schemas.openxmlformats.org/drawingml/2006/main">
               <a:ext uri="{FF2B5EF4-FFF2-40B4-BE49-F238E27FC236}">
-                <a16:creationId xmlns:a16="http://schemas.microsoft.com/office/drawing/2014/main" id="{8EDCA971-553A-406C-ABE1-E173624ED6DF}"/>
+                <a16:creationId xmlns:a16="http://schemas.microsoft.com/office/drawing/2014/main" id="{621FC919-71AA-4FBA-A4A1-CC33990B4DE7}"/>
               </a:ext>
             </a:extLst>
           </p:cNvPr>
@@ -12675,7 +12675,7 @@
           <p:nvPr/>
         </p:nvPicPr>
         <p:blipFill>
-          <a:blip xmlns:r="http://schemas.openxmlformats.org/officeDocument/2006/relationships" xmlns:a="http://schemas.openxmlformats.org/drawingml/2006/main" r:embed="R82f133836349442a"/>
+          <a:blip xmlns:r="http://schemas.openxmlformats.org/officeDocument/2006/relationships" xmlns:a="http://schemas.openxmlformats.org/drawingml/2006/main" r:embed="Rb7c1214fc82c410c"/>
           <a:stretch xmlns:a="http://schemas.openxmlformats.org/drawingml/2006/main"/>
         </p:blipFill>
         <p:spPr>
@@ -12693,7 +12693,7 @@
           <p:cNvPr id="7" name="">
             <a:extLst xmlns:a="http://schemas.openxmlformats.org/drawingml/2006/main">
               <a:ext uri="{FF2B5EF4-FFF2-40B4-BE49-F238E27FC236}">
-                <a16:creationId xmlns:a16="http://schemas.microsoft.com/office/drawing/2014/main" id="{13524E57-9DAA-43F2-9B9A-4D251777AE45}"/>
+                <a16:creationId xmlns:a16="http://schemas.microsoft.com/office/drawing/2014/main" id="{D227055F-7D20-496F-B43A-642BA0A930CC}"/>
               </a:ext>
             </a:extLst>
           </p:cNvPr>
@@ -12745,7 +12745,7 @@
           <p:cNvPr id="8" name="">
             <a:extLst xmlns:a="http://schemas.openxmlformats.org/drawingml/2006/main">
               <a:ext uri="{FF2B5EF4-FFF2-40B4-BE49-F238E27FC236}">
-                <a16:creationId xmlns:a16="http://schemas.microsoft.com/office/drawing/2014/main" id="{0A47FF05-580F-4510-8D30-50EDF2C52FA9}"/>
+                <a16:creationId xmlns:a16="http://schemas.microsoft.com/office/drawing/2014/main" id="{80171CFA-CCE1-49FA-984F-C926083FF39A}"/>
               </a:ext>
             </a:extLst>
           </p:cNvPr>
@@ -12797,7 +12797,7 @@
           <p:cNvPr id="9" name="">
             <a:extLst xmlns:a="http://schemas.openxmlformats.org/drawingml/2006/main">
               <a:ext uri="{FF2B5EF4-FFF2-40B4-BE49-F238E27FC236}">
-                <a16:creationId xmlns:a16="http://schemas.microsoft.com/office/drawing/2014/main" id="{1F728CD7-8206-409C-93B2-769F7DF674F6}"/>
+                <a16:creationId xmlns:a16="http://schemas.microsoft.com/office/drawing/2014/main" id="{6AE3BC72-28BA-427C-BE18-587832E758E0}"/>
               </a:ext>
             </a:extLst>
           </p:cNvPr>
@@ -12849,7 +12849,7 @@
           <p:cNvPr id="10" name="">
             <a:extLst xmlns:a="http://schemas.openxmlformats.org/drawingml/2006/main">
               <a:ext uri="{FF2B5EF4-FFF2-40B4-BE49-F238E27FC236}">
-                <a16:creationId xmlns:a16="http://schemas.microsoft.com/office/drawing/2014/main" id="{8832CFB9-A252-45C8-BF2D-ECFFD1D81E0D}"/>
+                <a16:creationId xmlns:a16="http://schemas.microsoft.com/office/drawing/2014/main" id="{D46F4256-6655-47C1-8F10-0B3855CB9C4F}"/>
               </a:ext>
             </a:extLst>
           </p:cNvPr>
@@ -12901,7 +12901,7 @@
           <p:cNvPr id="11" name="">
             <a:extLst xmlns:a="http://schemas.openxmlformats.org/drawingml/2006/main">
               <a:ext uri="{FF2B5EF4-FFF2-40B4-BE49-F238E27FC236}">
-                <a16:creationId xmlns:a16="http://schemas.microsoft.com/office/drawing/2014/main" id="{0E703318-CCFC-4899-A097-699A84E7E0B5}"/>
+                <a16:creationId xmlns:a16="http://schemas.microsoft.com/office/drawing/2014/main" id="{87E57394-7EB7-49B7-AE2F-34E3EDD5B2BA}"/>
               </a:ext>
             </a:extLst>
           </p:cNvPr>
@@ -12932,7 +12932,7 @@
           <p:cNvPr id="12" name="">
             <a:extLst xmlns:a="http://schemas.openxmlformats.org/drawingml/2006/main">
               <a:ext uri="{FF2B5EF4-FFF2-40B4-BE49-F238E27FC236}">
-                <a16:creationId xmlns:a16="http://schemas.microsoft.com/office/drawing/2014/main" id="{B940DBF2-25B7-4D13-A4EA-130D6356AB0B}"/>
+                <a16:creationId xmlns:a16="http://schemas.microsoft.com/office/drawing/2014/main" id="{FE38F571-E9B0-40AE-BEDA-3E1FD4FA4023}"/>
               </a:ext>
             </a:extLst>
           </p:cNvPr>
@@ -12963,7 +12963,7 @@
           <p:cNvPr id="13" name="">
             <a:extLst xmlns:a="http://schemas.openxmlformats.org/drawingml/2006/main">
               <a:ext uri="{FF2B5EF4-FFF2-40B4-BE49-F238E27FC236}">
-                <a16:creationId xmlns:a16="http://schemas.microsoft.com/office/drawing/2014/main" id="{F09A6B98-C1E2-491F-9CA0-31BD4263C069}"/>
+                <a16:creationId xmlns:a16="http://schemas.microsoft.com/office/drawing/2014/main" id="{68CE93DF-823F-4673-9A4B-C5D63947E4DC}"/>
               </a:ext>
             </a:extLst>
           </p:cNvPr>
@@ -13015,7 +13015,7 @@
           <p:cNvPr id="14" name="">
             <a:extLst xmlns:a="http://schemas.openxmlformats.org/drawingml/2006/main">
               <a:ext uri="{FF2B5EF4-FFF2-40B4-BE49-F238E27FC236}">
-                <a16:creationId xmlns:a16="http://schemas.microsoft.com/office/drawing/2014/main" id="{BE027893-CA7F-424E-9FFD-5CE6C686645C}"/>
+                <a16:creationId xmlns:a16="http://schemas.microsoft.com/office/drawing/2014/main" id="{74DCA459-F2A6-4DEC-8FFB-4A6A0D9B355C}"/>
               </a:ext>
             </a:extLst>
           </p:cNvPr>
@@ -13067,7 +13067,7 @@
           <p:cNvPr id="15" name="">
             <a:extLst xmlns:a="http://schemas.openxmlformats.org/drawingml/2006/main">
               <a:ext uri="{FF2B5EF4-FFF2-40B4-BE49-F238E27FC236}">
-                <a16:creationId xmlns:a16="http://schemas.microsoft.com/office/drawing/2014/main" id="{34DECEDD-6D07-4C33-B4C8-87EB653FA9FA}"/>
+                <a16:creationId xmlns:a16="http://schemas.microsoft.com/office/drawing/2014/main" id="{6DECB25F-74F8-4576-A8D8-2626D86B6104}"/>
               </a:ext>
             </a:extLst>
           </p:cNvPr>
@@ -13119,7 +13119,7 @@
           <p:cNvPr id="16" name="">
             <a:extLst xmlns:a="http://schemas.openxmlformats.org/drawingml/2006/main">
               <a:ext uri="{FF2B5EF4-FFF2-40B4-BE49-F238E27FC236}">
-                <a16:creationId xmlns:a16="http://schemas.microsoft.com/office/drawing/2014/main" id="{9C6E26D9-C2F3-4978-A177-95A7E6DAAA2A}"/>
+                <a16:creationId xmlns:a16="http://schemas.microsoft.com/office/drawing/2014/main" id="{66B8B517-1658-482C-B5FA-19DC106351D5}"/>
               </a:ext>
             </a:extLst>
           </p:cNvPr>
@@ -13171,7 +13171,7 @@
           <p:cNvPr id="17" name="">
             <a:extLst xmlns:a="http://schemas.openxmlformats.org/drawingml/2006/main">
               <a:ext uri="{FF2B5EF4-FFF2-40B4-BE49-F238E27FC236}">
-                <a16:creationId xmlns:a16="http://schemas.microsoft.com/office/drawing/2014/main" id="{6EFB265B-C473-4D72-AC22-C3BA6497913C}"/>
+                <a16:creationId xmlns:a16="http://schemas.microsoft.com/office/drawing/2014/main" id="{AC482703-E4F0-4793-9441-A91F3C4EE26B}"/>
               </a:ext>
             </a:extLst>
           </p:cNvPr>
@@ -13223,7 +13223,7 @@
           <p:cNvPr id="18" name="">
             <a:extLst xmlns:a="http://schemas.openxmlformats.org/drawingml/2006/main">
               <a:ext uri="{FF2B5EF4-FFF2-40B4-BE49-F238E27FC236}">
-                <a16:creationId xmlns:a16="http://schemas.microsoft.com/office/drawing/2014/main" id="{A49EC096-07E8-4C81-BBDA-6A3DCC8F2F4D}"/>
+                <a16:creationId xmlns:a16="http://schemas.microsoft.com/office/drawing/2014/main" id="{2B83E1EC-DA0B-43B0-AD1D-CDC1F26A6DAC}"/>
               </a:ext>
             </a:extLst>
           </p:cNvPr>
@@ -13254,7 +13254,7 @@
           <p:cNvPr id="19" name="">
             <a:extLst xmlns:a="http://schemas.openxmlformats.org/drawingml/2006/main">
               <a:ext uri="{FF2B5EF4-FFF2-40B4-BE49-F238E27FC236}">
-                <a16:creationId xmlns:a16="http://schemas.microsoft.com/office/drawing/2014/main" id="{AF95D06A-1889-4830-A703-D19D260A525E}"/>
+                <a16:creationId xmlns:a16="http://schemas.microsoft.com/office/drawing/2014/main" id="{2C36F910-91F9-44AB-B89A-1A3373319919}"/>
               </a:ext>
             </a:extLst>
           </p:cNvPr>
@@ -13306,7 +13306,7 @@
           <p:cNvPr id="20" name="">
             <a:extLst xmlns:a="http://schemas.openxmlformats.org/drawingml/2006/main">
               <a:ext uri="{FF2B5EF4-FFF2-40B4-BE49-F238E27FC236}">
-                <a16:creationId xmlns:a16="http://schemas.microsoft.com/office/drawing/2014/main" id="{35D3F8C4-1052-4162-91EB-2D8D7E1259DB}"/>
+                <a16:creationId xmlns:a16="http://schemas.microsoft.com/office/drawing/2014/main" id="{DC1174B4-B1A2-4F70-A0F2-10862EE16AD2}"/>
               </a:ext>
             </a:extLst>
           </p:cNvPr>
@@ -13358,7 +13358,7 @@
           <p:cNvPr id="21" name="">
             <a:extLst xmlns:a="http://schemas.openxmlformats.org/drawingml/2006/main">
               <a:ext uri="{FF2B5EF4-FFF2-40B4-BE49-F238E27FC236}">
-                <a16:creationId xmlns:a16="http://schemas.microsoft.com/office/drawing/2014/main" id="{E0C981CF-7266-4C17-A3EB-1890875E2752}"/>
+                <a16:creationId xmlns:a16="http://schemas.microsoft.com/office/drawing/2014/main" id="{7AF85DE7-E4A6-4DEA-B808-B580F95CDB4A}"/>
               </a:ext>
             </a:extLst>
           </p:cNvPr>
@@ -13410,7 +13410,7 @@
           <p:cNvPr id="22" name="">
             <a:extLst xmlns:a="http://schemas.openxmlformats.org/drawingml/2006/main">
               <a:ext uri="{FF2B5EF4-FFF2-40B4-BE49-F238E27FC236}">
-                <a16:creationId xmlns:a16="http://schemas.microsoft.com/office/drawing/2014/main" id="{BEFD76EB-86E4-4C4D-8CB8-C1BE8A633D9A}"/>
+                <a16:creationId xmlns:a16="http://schemas.microsoft.com/office/drawing/2014/main" id="{D3C6E9F0-4807-424F-8EEE-E84DB4FF9EA6}"/>
               </a:ext>
             </a:extLst>
           </p:cNvPr>
@@ -13462,7 +13462,7 @@
           <p:cNvPr id="23" name="">
             <a:extLst xmlns:a="http://schemas.openxmlformats.org/drawingml/2006/main">
               <a:ext uri="{FF2B5EF4-FFF2-40B4-BE49-F238E27FC236}">
-                <a16:creationId xmlns:a16="http://schemas.microsoft.com/office/drawing/2014/main" id="{01308973-BF7E-46EE-AA6C-29738BD43C5E}"/>
+                <a16:creationId xmlns:a16="http://schemas.microsoft.com/office/drawing/2014/main" id="{F6EF89D8-0F02-4A55-AECD-B246C842CC56}"/>
               </a:ext>
             </a:extLst>
           </p:cNvPr>
@@ -13514,7 +13514,7 @@
           <p:cNvPr id="24" name="">
             <a:extLst xmlns:a="http://schemas.openxmlformats.org/drawingml/2006/main">
               <a:ext uri="{FF2B5EF4-FFF2-40B4-BE49-F238E27FC236}">
-                <a16:creationId xmlns:a16="http://schemas.microsoft.com/office/drawing/2014/main" id="{AEBC818A-8ED8-4335-85E1-279DE6F482DB}"/>
+                <a16:creationId xmlns:a16="http://schemas.microsoft.com/office/drawing/2014/main" id="{16B365F3-18A0-40AA-B754-C8E453325235}"/>
               </a:ext>
             </a:extLst>
           </p:cNvPr>
@@ -13545,7 +13545,7 @@
           <p:cNvPr id="25" name="">
             <a:extLst xmlns:a="http://schemas.openxmlformats.org/drawingml/2006/main">
               <a:ext uri="{FF2B5EF4-FFF2-40B4-BE49-F238E27FC236}">
-                <a16:creationId xmlns:a16="http://schemas.microsoft.com/office/drawing/2014/main" id="{7CDE7681-C038-4B51-BA38-F3E911A5F4E4}"/>
+                <a16:creationId xmlns:a16="http://schemas.microsoft.com/office/drawing/2014/main" id="{1263707B-5E39-4706-82D1-4BDD8348223B}"/>
               </a:ext>
             </a:extLst>
           </p:cNvPr>
@@ -13576,7 +13576,7 @@
           <p:cNvPr id="26" name="">
             <a:extLst xmlns:a="http://schemas.openxmlformats.org/drawingml/2006/main">
               <a:ext uri="{FF2B5EF4-FFF2-40B4-BE49-F238E27FC236}">
-                <a16:creationId xmlns:a16="http://schemas.microsoft.com/office/drawing/2014/main" id="{ACD5F76E-A599-4E5E-8ED1-690F1C51B609}"/>
+                <a16:creationId xmlns:a16="http://schemas.microsoft.com/office/drawing/2014/main" id="{EF693F16-BE69-4A1B-BEC0-5761DE861111}"/>
               </a:ext>
             </a:extLst>
           </p:cNvPr>
@@ -13628,7 +13628,7 @@
           <p:cNvPr id="27" name="">
             <a:extLst xmlns:a="http://schemas.openxmlformats.org/drawingml/2006/main">
               <a:ext uri="{FF2B5EF4-FFF2-40B4-BE49-F238E27FC236}">
-                <a16:creationId xmlns:a16="http://schemas.microsoft.com/office/drawing/2014/main" id="{ABA3F7CF-180D-40EC-AFAC-E4143D7326B0}"/>
+                <a16:creationId xmlns:a16="http://schemas.microsoft.com/office/drawing/2014/main" id="{15D0A4ED-CA95-456F-8478-6328B7220DF2}"/>
               </a:ext>
             </a:extLst>
           </p:cNvPr>
@@ -13680,7 +13680,7 @@
           <p:cNvPr id="28" name="">
             <a:extLst xmlns:a="http://schemas.openxmlformats.org/drawingml/2006/main">
               <a:ext uri="{FF2B5EF4-FFF2-40B4-BE49-F238E27FC236}">
-                <a16:creationId xmlns:a16="http://schemas.microsoft.com/office/drawing/2014/main" id="{7BDECC49-4088-407B-AA22-42DA5E898DD0}"/>
+                <a16:creationId xmlns:a16="http://schemas.microsoft.com/office/drawing/2014/main" id="{B563A665-A806-4EC9-9792-33364BB5921A}"/>
               </a:ext>
             </a:extLst>
           </p:cNvPr>
@@ -13732,7 +13732,7 @@
           <p:cNvPr id="29" name="">
             <a:extLst xmlns:a="http://schemas.openxmlformats.org/drawingml/2006/main">
               <a:ext uri="{FF2B5EF4-FFF2-40B4-BE49-F238E27FC236}">
-                <a16:creationId xmlns:a16="http://schemas.microsoft.com/office/drawing/2014/main" id="{F39F151B-C0EF-497D-B29A-09CCB279831C}"/>
+                <a16:creationId xmlns:a16="http://schemas.microsoft.com/office/drawing/2014/main" id="{768D84BC-D0A4-423E-8BDA-CDB3F38E1374}"/>
               </a:ext>
             </a:extLst>
           </p:cNvPr>
@@ -13784,7 +13784,7 @@
           <p:cNvPr id="30" name="">
             <a:extLst xmlns:a="http://schemas.openxmlformats.org/drawingml/2006/main">
               <a:ext uri="{FF2B5EF4-FFF2-40B4-BE49-F238E27FC236}">
-                <a16:creationId xmlns:a16="http://schemas.microsoft.com/office/drawing/2014/main" id="{4655ADC3-2162-40E2-8530-D7FE46D96177}"/>
+                <a16:creationId xmlns:a16="http://schemas.microsoft.com/office/drawing/2014/main" id="{A32B3232-0021-42DF-8F3F-929CF8F58B29}"/>
               </a:ext>
             </a:extLst>
           </p:cNvPr>
@@ -13836,7 +13836,7 @@
           <p:cNvPr id="31" name="">
             <a:extLst xmlns:a="http://schemas.openxmlformats.org/drawingml/2006/main">
               <a:ext uri="{FF2B5EF4-FFF2-40B4-BE49-F238E27FC236}">
-                <a16:creationId xmlns:a16="http://schemas.microsoft.com/office/drawing/2014/main" id="{2338E8C4-637B-4485-8231-954836B82F42}"/>
+                <a16:creationId xmlns:a16="http://schemas.microsoft.com/office/drawing/2014/main" id="{6868E6CC-87D8-457C-96BC-F6FD3B94B76B}"/>
               </a:ext>
             </a:extLst>
           </p:cNvPr>
@@ -13867,7 +13867,7 @@
           <p:cNvPr id="32" name="">
             <a:extLst xmlns:a="http://schemas.openxmlformats.org/drawingml/2006/main">
               <a:ext uri="{FF2B5EF4-FFF2-40B4-BE49-F238E27FC236}">
-                <a16:creationId xmlns:a16="http://schemas.microsoft.com/office/drawing/2014/main" id="{EAA321E0-AFC7-4003-9F94-4F8487C0CE5E}"/>
+                <a16:creationId xmlns:a16="http://schemas.microsoft.com/office/drawing/2014/main" id="{8CE377BF-E6F0-4282-B9B6-2D503FBFA100}"/>
               </a:ext>
             </a:extLst>
           </p:cNvPr>
@@ -13919,7 +13919,7 @@
           <p:cNvPr id="33" name="">
             <a:extLst xmlns:a="http://schemas.openxmlformats.org/drawingml/2006/main">
               <a:ext uri="{FF2B5EF4-FFF2-40B4-BE49-F238E27FC236}">
-                <a16:creationId xmlns:a16="http://schemas.microsoft.com/office/drawing/2014/main" id="{2310FAC2-67F5-461E-816C-C939BE6B7DE6}"/>
+                <a16:creationId xmlns:a16="http://schemas.microsoft.com/office/drawing/2014/main" id="{66B93E2B-FA72-4BC5-A03C-5F2367B90059}"/>
               </a:ext>
             </a:extLst>
           </p:cNvPr>
@@ -13971,7 +13971,7 @@
           <p:cNvPr id="34" name="">
             <a:extLst xmlns:a="http://schemas.openxmlformats.org/drawingml/2006/main">
               <a:ext uri="{FF2B5EF4-FFF2-40B4-BE49-F238E27FC236}">
-                <a16:creationId xmlns:a16="http://schemas.microsoft.com/office/drawing/2014/main" id="{6D26C3B6-FC7D-4494-BFD3-5B1D4F054A0E}"/>
+                <a16:creationId xmlns:a16="http://schemas.microsoft.com/office/drawing/2014/main" id="{9686DC66-C727-4BEE-A865-229E6E246C6E}"/>
               </a:ext>
             </a:extLst>
           </p:cNvPr>
@@ -14023,7 +14023,7 @@
           <p:cNvPr id="35" name="">
             <a:extLst xmlns:a="http://schemas.openxmlformats.org/drawingml/2006/main">
               <a:ext uri="{FF2B5EF4-FFF2-40B4-BE49-F238E27FC236}">
-                <a16:creationId xmlns:a16="http://schemas.microsoft.com/office/drawing/2014/main" id="{8E7C8945-FB2D-4F74-9E27-CA6D2A9543C9}"/>
+                <a16:creationId xmlns:a16="http://schemas.microsoft.com/office/drawing/2014/main" id="{FA7B248B-4975-486A-85C0-07689FA0AB3B}"/>
               </a:ext>
             </a:extLst>
           </p:cNvPr>
@@ -14075,7 +14075,7 @@
           <p:cNvPr id="36" name="">
             <a:extLst xmlns:a="http://schemas.openxmlformats.org/drawingml/2006/main">
               <a:ext uri="{FF2B5EF4-FFF2-40B4-BE49-F238E27FC236}">
-                <a16:creationId xmlns:a16="http://schemas.microsoft.com/office/drawing/2014/main" id="{BEAEA7DE-D533-41EC-9DC3-E7ADD2DA87D6}"/>
+                <a16:creationId xmlns:a16="http://schemas.microsoft.com/office/drawing/2014/main" id="{AD783139-B0A8-47BA-8910-A2B18BDBE10C}"/>
               </a:ext>
             </a:extLst>
           </p:cNvPr>
@@ -14127,7 +14127,7 @@
           <p:cNvPr id="37" name="">
             <a:extLst xmlns:a="http://schemas.openxmlformats.org/drawingml/2006/main">
               <a:ext uri="{FF2B5EF4-FFF2-40B4-BE49-F238E27FC236}">
-                <a16:creationId xmlns:a16="http://schemas.microsoft.com/office/drawing/2014/main" id="{BB8B0C0E-C0F1-471A-8B95-BE6AB1DE1C17}"/>
+                <a16:creationId xmlns:a16="http://schemas.microsoft.com/office/drawing/2014/main" id="{6F2FA529-18FE-4CCA-B012-E752868A5E26}"/>
               </a:ext>
             </a:extLst>
           </p:cNvPr>
@@ -14158,7 +14158,7 @@
           <p:cNvPr id="38" name="">
             <a:extLst xmlns:a="http://schemas.openxmlformats.org/drawingml/2006/main">
               <a:ext uri="{FF2B5EF4-FFF2-40B4-BE49-F238E27FC236}">
-                <a16:creationId xmlns:a16="http://schemas.microsoft.com/office/drawing/2014/main" id="{022F0D6E-2D83-4F5D-B44C-1F5CEC494229}"/>
+                <a16:creationId xmlns:a16="http://schemas.microsoft.com/office/drawing/2014/main" id="{7583C92F-129C-40E8-8739-6CCF689CE0E7}"/>
               </a:ext>
             </a:extLst>
           </p:cNvPr>
@@ -14189,7 +14189,7 @@
           <p:cNvPr id="39" name="">
             <a:extLst xmlns:a="http://schemas.openxmlformats.org/drawingml/2006/main">
               <a:ext uri="{FF2B5EF4-FFF2-40B4-BE49-F238E27FC236}">
-                <a16:creationId xmlns:a16="http://schemas.microsoft.com/office/drawing/2014/main" id="{FD599E9F-2FBF-42A0-BE58-051E78A6AE98}"/>
+                <a16:creationId xmlns:a16="http://schemas.microsoft.com/office/drawing/2014/main" id="{2EE9ADAC-C916-4706-A353-9562AAA98E2E}"/>
               </a:ext>
             </a:extLst>
           </p:cNvPr>
@@ -14241,7 +14241,7 @@
           <p:cNvPr id="40" name="">
             <a:extLst xmlns:a="http://schemas.openxmlformats.org/drawingml/2006/main">
               <a:ext uri="{FF2B5EF4-FFF2-40B4-BE49-F238E27FC236}">
-                <a16:creationId xmlns:a16="http://schemas.microsoft.com/office/drawing/2014/main" id="{6A9FBA6F-9766-4E8F-B3E0-B4BB01A61B7F}"/>
+                <a16:creationId xmlns:a16="http://schemas.microsoft.com/office/drawing/2014/main" id="{41265909-BA50-4990-B437-D359433BCB41}"/>
               </a:ext>
             </a:extLst>
           </p:cNvPr>
@@ -14293,7 +14293,7 @@
           <p:cNvPr id="41" name="">
             <a:extLst xmlns:a="http://schemas.openxmlformats.org/drawingml/2006/main">
               <a:ext uri="{FF2B5EF4-FFF2-40B4-BE49-F238E27FC236}">
-                <a16:creationId xmlns:a16="http://schemas.microsoft.com/office/drawing/2014/main" id="{1E06D66D-1E86-4FE4-93A6-58D236A583CB}"/>
+                <a16:creationId xmlns:a16="http://schemas.microsoft.com/office/drawing/2014/main" id="{09155163-A93C-4652-BBDC-E4BD63C7799C}"/>
               </a:ext>
             </a:extLst>
           </p:cNvPr>
@@ -14345,7 +14345,7 @@
           <p:cNvPr id="42" name="">
             <a:extLst xmlns:a="http://schemas.openxmlformats.org/drawingml/2006/main">
               <a:ext uri="{FF2B5EF4-FFF2-40B4-BE49-F238E27FC236}">
-                <a16:creationId xmlns:a16="http://schemas.microsoft.com/office/drawing/2014/main" id="{FBA76188-FF24-4E89-B808-D9B901F86D27}"/>
+                <a16:creationId xmlns:a16="http://schemas.microsoft.com/office/drawing/2014/main" id="{4DF18E79-2DDB-4044-ACF9-B441230712A2}"/>
               </a:ext>
             </a:extLst>
           </p:cNvPr>
@@ -14397,7 +14397,7 @@
           <p:cNvPr id="43" name="">
             <a:extLst xmlns:a="http://schemas.openxmlformats.org/drawingml/2006/main">
               <a:ext uri="{FF2B5EF4-FFF2-40B4-BE49-F238E27FC236}">
-                <a16:creationId xmlns:a16="http://schemas.microsoft.com/office/drawing/2014/main" id="{28AA0570-F6BD-488B-818B-915EA779386A}"/>
+                <a16:creationId xmlns:a16="http://schemas.microsoft.com/office/drawing/2014/main" id="{14891356-182A-432B-AD49-D8A55509D97A}"/>
               </a:ext>
             </a:extLst>
           </p:cNvPr>
@@ -14449,7 +14449,7 @@
           <p:cNvPr id="44" name="">
             <a:extLst xmlns:a="http://schemas.openxmlformats.org/drawingml/2006/main">
               <a:ext uri="{FF2B5EF4-FFF2-40B4-BE49-F238E27FC236}">
-                <a16:creationId xmlns:a16="http://schemas.microsoft.com/office/drawing/2014/main" id="{24C9ADB4-F89F-4ED1-AFD7-D188EF855A05}"/>
+                <a16:creationId xmlns:a16="http://schemas.microsoft.com/office/drawing/2014/main" id="{55036362-11CE-4EB6-9544-72B5C0D814E2}"/>
               </a:ext>
             </a:extLst>
           </p:cNvPr>
@@ -14480,7 +14480,7 @@
           <p:cNvPr id="45" name="">
             <a:extLst xmlns:a="http://schemas.openxmlformats.org/drawingml/2006/main">
               <a:ext uri="{FF2B5EF4-FFF2-40B4-BE49-F238E27FC236}">
-                <a16:creationId xmlns:a16="http://schemas.microsoft.com/office/drawing/2014/main" id="{3FABE4F2-99A6-44D4-A640-BCAD94B935CA}"/>
+                <a16:creationId xmlns:a16="http://schemas.microsoft.com/office/drawing/2014/main" id="{7497EB5B-C492-4C5C-B5A3-5CE61B2FE574}"/>
               </a:ext>
             </a:extLst>
           </p:cNvPr>
@@ -14532,7 +14532,7 @@
           <p:cNvPr id="46" name="">
             <a:extLst xmlns:a="http://schemas.openxmlformats.org/drawingml/2006/main">
               <a:ext uri="{FF2B5EF4-FFF2-40B4-BE49-F238E27FC236}">
-                <a16:creationId xmlns:a16="http://schemas.microsoft.com/office/drawing/2014/main" id="{CF217779-4407-4113-8F8C-63140421192A}"/>
+                <a16:creationId xmlns:a16="http://schemas.microsoft.com/office/drawing/2014/main" id="{741B6C94-B04A-432C-BA89-1141DABB7D83}"/>
               </a:ext>
             </a:extLst>
           </p:cNvPr>
@@ -14584,7 +14584,7 @@
           <p:cNvPr id="47" name="">
             <a:extLst xmlns:a="http://schemas.openxmlformats.org/drawingml/2006/main">
               <a:ext uri="{FF2B5EF4-FFF2-40B4-BE49-F238E27FC236}">
-                <a16:creationId xmlns:a16="http://schemas.microsoft.com/office/drawing/2014/main" id="{5B57BBB4-9520-4729-A6E0-2CD89110B267}"/>
+                <a16:creationId xmlns:a16="http://schemas.microsoft.com/office/drawing/2014/main" id="{8C6840DD-B4D5-473C-9A73-811F23BBA306}"/>
               </a:ext>
             </a:extLst>
           </p:cNvPr>
@@ -14636,7 +14636,7 @@
           <p:cNvPr id="48" name="">
             <a:extLst xmlns:a="http://schemas.openxmlformats.org/drawingml/2006/main">
               <a:ext uri="{FF2B5EF4-FFF2-40B4-BE49-F238E27FC236}">
-                <a16:creationId xmlns:a16="http://schemas.microsoft.com/office/drawing/2014/main" id="{061B0D66-C38E-43F0-A6AB-92BBA7BCDC95}"/>
+                <a16:creationId xmlns:a16="http://schemas.microsoft.com/office/drawing/2014/main" id="{8B0C8D65-3624-4A41-B8A0-3C8F77E691E4}"/>
               </a:ext>
             </a:extLst>
           </p:cNvPr>
@@ -14688,7 +14688,7 @@
           <p:cNvPr id="49" name="">
             <a:extLst xmlns:a="http://schemas.openxmlformats.org/drawingml/2006/main">
               <a:ext uri="{FF2B5EF4-FFF2-40B4-BE49-F238E27FC236}">
-                <a16:creationId xmlns:a16="http://schemas.microsoft.com/office/drawing/2014/main" id="{6EC1966B-1AFF-4FE8-B9F4-46C491B175FC}"/>
+                <a16:creationId xmlns:a16="http://schemas.microsoft.com/office/drawing/2014/main" id="{9263B7D6-44DF-4EA8-B122-6BA0422C217A}"/>
               </a:ext>
             </a:extLst>
           </p:cNvPr>
@@ -14740,7 +14740,7 @@
           <p:cNvPr id="50" name="">
             <a:extLst xmlns:a="http://schemas.openxmlformats.org/drawingml/2006/main">
               <a:ext uri="{FF2B5EF4-FFF2-40B4-BE49-F238E27FC236}">
-                <a16:creationId xmlns:a16="http://schemas.microsoft.com/office/drawing/2014/main" id="{6A692E82-A899-4232-B119-7EDB9DAEFB83}"/>
+                <a16:creationId xmlns:a16="http://schemas.microsoft.com/office/drawing/2014/main" id="{1FBAA45D-00B3-456D-AC58-DD9293F96280}"/>
               </a:ext>
             </a:extLst>
           </p:cNvPr>
@@ -14771,7 +14771,7 @@
           <p:cNvPr id="51" name="">
             <a:extLst xmlns:a="http://schemas.openxmlformats.org/drawingml/2006/main">
               <a:ext uri="{FF2B5EF4-FFF2-40B4-BE49-F238E27FC236}">
-                <a16:creationId xmlns:a16="http://schemas.microsoft.com/office/drawing/2014/main" id="{343B98E5-A936-47A2-94CD-928304C23D1D}"/>
+                <a16:creationId xmlns:a16="http://schemas.microsoft.com/office/drawing/2014/main" id="{6429011C-418C-477D-8DFB-A61F0CC9B095}"/>
               </a:ext>
             </a:extLst>
           </p:cNvPr>
@@ -14802,7 +14802,7 @@
           <p:cNvPr id="52" name="">
             <a:extLst xmlns:a="http://schemas.openxmlformats.org/drawingml/2006/main">
               <a:ext uri="{FF2B5EF4-FFF2-40B4-BE49-F238E27FC236}">
-                <a16:creationId xmlns:a16="http://schemas.microsoft.com/office/drawing/2014/main" id="{726198EB-AC5A-4FA4-A82B-A9C1FE694518}"/>
+                <a16:creationId xmlns:a16="http://schemas.microsoft.com/office/drawing/2014/main" id="{D6A0D841-4BA3-48FD-AFD1-8CBC88337BC9}"/>
               </a:ext>
             </a:extLst>
           </p:cNvPr>
@@ -14854,7 +14854,7 @@
           <p:cNvPr id="53" name="">
             <a:extLst xmlns:a="http://schemas.openxmlformats.org/drawingml/2006/main">
               <a:ext uri="{FF2B5EF4-FFF2-40B4-BE49-F238E27FC236}">
-                <a16:creationId xmlns:a16="http://schemas.microsoft.com/office/drawing/2014/main" id="{28959ED7-317A-42F6-BA8E-C872C4C9B39F}"/>
+                <a16:creationId xmlns:a16="http://schemas.microsoft.com/office/drawing/2014/main" id="{B5697809-94AC-48E9-B782-FE029F2307C3}"/>
               </a:ext>
             </a:extLst>
           </p:cNvPr>
@@ -14906,7 +14906,7 @@
           <p:cNvPr id="54" name="">
             <a:extLst xmlns:a="http://schemas.openxmlformats.org/drawingml/2006/main">
               <a:ext uri="{FF2B5EF4-FFF2-40B4-BE49-F238E27FC236}">
-                <a16:creationId xmlns:a16="http://schemas.microsoft.com/office/drawing/2014/main" id="{F638DC11-43AB-4303-B3B1-B9910C477B16}"/>
+                <a16:creationId xmlns:a16="http://schemas.microsoft.com/office/drawing/2014/main" id="{D48F4239-12C6-4435-8F49-6766862E0A4B}"/>
               </a:ext>
             </a:extLst>
           </p:cNvPr>
@@ -14958,7 +14958,7 @@
           <p:cNvPr id="55" name="">
             <a:extLst xmlns:a="http://schemas.openxmlformats.org/drawingml/2006/main">
               <a:ext uri="{FF2B5EF4-FFF2-40B4-BE49-F238E27FC236}">
-                <a16:creationId xmlns:a16="http://schemas.microsoft.com/office/drawing/2014/main" id="{0D9F8A99-7343-4C99-9030-900BB07A309F}"/>
+                <a16:creationId xmlns:a16="http://schemas.microsoft.com/office/drawing/2014/main" id="{29D3903C-93EB-423E-A495-D53F1BD615EA}"/>
               </a:ext>
             </a:extLst>
           </p:cNvPr>
@@ -15010,7 +15010,7 @@
           <p:cNvPr id="56" name="">
             <a:extLst xmlns:a="http://schemas.openxmlformats.org/drawingml/2006/main">
               <a:ext uri="{FF2B5EF4-FFF2-40B4-BE49-F238E27FC236}">
-                <a16:creationId xmlns:a16="http://schemas.microsoft.com/office/drawing/2014/main" id="{45D7709E-DCCD-4329-A0ED-C098C81CA5FC}"/>
+                <a16:creationId xmlns:a16="http://schemas.microsoft.com/office/drawing/2014/main" id="{00359623-A477-4E78-84FC-7CACED659F7C}"/>
               </a:ext>
             </a:extLst>
           </p:cNvPr>
@@ -15062,7 +15062,7 @@
           <p:cNvPr id="57" name="">
             <a:extLst xmlns:a="http://schemas.openxmlformats.org/drawingml/2006/main">
               <a:ext uri="{FF2B5EF4-FFF2-40B4-BE49-F238E27FC236}">
-                <a16:creationId xmlns:a16="http://schemas.microsoft.com/office/drawing/2014/main" id="{5D84771A-4D43-4EFE-9390-F86D5065C233}"/>
+                <a16:creationId xmlns:a16="http://schemas.microsoft.com/office/drawing/2014/main" id="{A300BF60-6F75-4DE1-B491-2D146C7D8D71}"/>
               </a:ext>
             </a:extLst>
           </p:cNvPr>
@@ -15093,7 +15093,7 @@
           <p:cNvPr id="58" name="">
             <a:extLst xmlns:a="http://schemas.openxmlformats.org/drawingml/2006/main">
               <a:ext uri="{FF2B5EF4-FFF2-40B4-BE49-F238E27FC236}">
-                <a16:creationId xmlns:a16="http://schemas.microsoft.com/office/drawing/2014/main" id="{D9A8BD6C-36ED-40C2-A0FB-4401E3C2F3C3}"/>
+                <a16:creationId xmlns:a16="http://schemas.microsoft.com/office/drawing/2014/main" id="{20B544F2-1A6E-4B54-81BC-AC2DB1EAB923}"/>
               </a:ext>
             </a:extLst>
           </p:cNvPr>
@@ -15145,7 +15145,7 @@
           <p:cNvPr id="59" name="">
             <a:extLst xmlns:a="http://schemas.openxmlformats.org/drawingml/2006/main">
               <a:ext uri="{FF2B5EF4-FFF2-40B4-BE49-F238E27FC236}">
-                <a16:creationId xmlns:a16="http://schemas.microsoft.com/office/drawing/2014/main" id="{1D6D447F-5FF2-479E-9A24-E200428766A1}"/>
+                <a16:creationId xmlns:a16="http://schemas.microsoft.com/office/drawing/2014/main" id="{C36EB233-83BA-4CE7-B6DB-4BDDB544DC83}"/>
               </a:ext>
             </a:extLst>
           </p:cNvPr>
@@ -15197,7 +15197,7 @@
           <p:cNvPr id="60" name="">
             <a:extLst xmlns:a="http://schemas.openxmlformats.org/drawingml/2006/main">
               <a:ext uri="{FF2B5EF4-FFF2-40B4-BE49-F238E27FC236}">
-                <a16:creationId xmlns:a16="http://schemas.microsoft.com/office/drawing/2014/main" id="{4621BED2-00D4-4BAE-B9CA-134FD36C3A74}"/>
+                <a16:creationId xmlns:a16="http://schemas.microsoft.com/office/drawing/2014/main" id="{A4BC53EB-45CA-4BFB-9D5F-823C5CAE9270}"/>
               </a:ext>
             </a:extLst>
           </p:cNvPr>
@@ -15249,7 +15249,7 @@
           <p:cNvPr id="61" name="">
             <a:extLst xmlns:a="http://schemas.openxmlformats.org/drawingml/2006/main">
               <a:ext uri="{FF2B5EF4-FFF2-40B4-BE49-F238E27FC236}">
-                <a16:creationId xmlns:a16="http://schemas.microsoft.com/office/drawing/2014/main" id="{3BAAF0F2-8D31-4D10-A137-C0CD46E5F1B3}"/>
+                <a16:creationId xmlns:a16="http://schemas.microsoft.com/office/drawing/2014/main" id="{5B1A8A32-3A69-4B4D-A6FC-471F58FDE615}"/>
               </a:ext>
             </a:extLst>
           </p:cNvPr>
@@ -15301,7 +15301,7 @@
           <p:cNvPr id="62" name="">
             <a:extLst xmlns:a="http://schemas.openxmlformats.org/drawingml/2006/main">
               <a:ext uri="{FF2B5EF4-FFF2-40B4-BE49-F238E27FC236}">
-                <a16:creationId xmlns:a16="http://schemas.microsoft.com/office/drawing/2014/main" id="{1B9736AD-35A3-42D0-9BBC-AC59009ED95E}"/>
+                <a16:creationId xmlns:a16="http://schemas.microsoft.com/office/drawing/2014/main" id="{CF6BC5C1-19B3-40E6-9376-FB1B458C34A0}"/>
               </a:ext>
             </a:extLst>
           </p:cNvPr>
@@ -15353,7 +15353,7 @@
           <p:cNvPr id="63" name="">
             <a:extLst xmlns:a="http://schemas.openxmlformats.org/drawingml/2006/main">
               <a:ext uri="{FF2B5EF4-FFF2-40B4-BE49-F238E27FC236}">
-                <a16:creationId xmlns:a16="http://schemas.microsoft.com/office/drawing/2014/main" id="{AFFAF97A-803B-4E18-967A-EE3C8FEB5E67}"/>
+                <a16:creationId xmlns:a16="http://schemas.microsoft.com/office/drawing/2014/main" id="{EE2699B6-4EB9-4C95-BF75-D50122B55DB9}"/>
               </a:ext>
             </a:extLst>
           </p:cNvPr>
@@ -15384,7 +15384,7 @@
           <p:cNvPr id="64" name="">
             <a:extLst xmlns:a="http://schemas.openxmlformats.org/drawingml/2006/main">
               <a:ext uri="{FF2B5EF4-FFF2-40B4-BE49-F238E27FC236}">
-                <a16:creationId xmlns:a16="http://schemas.microsoft.com/office/drawing/2014/main" id="{AF148AC0-3A3F-446E-8F51-0D796D4F5ACE}"/>
+                <a16:creationId xmlns:a16="http://schemas.microsoft.com/office/drawing/2014/main" id="{F1651721-C3F5-492A-B293-BD78724B6C0F}"/>
               </a:ext>
             </a:extLst>
           </p:cNvPr>
@@ -15415,7 +15415,7 @@
           <p:cNvPr id="65" name="">
             <a:extLst xmlns:a="http://schemas.openxmlformats.org/drawingml/2006/main">
               <a:ext uri="{FF2B5EF4-FFF2-40B4-BE49-F238E27FC236}">
-                <a16:creationId xmlns:a16="http://schemas.microsoft.com/office/drawing/2014/main" id="{5739D7C5-7CF1-4F09-B217-CEA478B21D33}"/>
+                <a16:creationId xmlns:a16="http://schemas.microsoft.com/office/drawing/2014/main" id="{DB400ADE-EA88-4E91-A781-0B961B045E89}"/>
               </a:ext>
             </a:extLst>
           </p:cNvPr>
@@ -15467,7 +15467,7 @@
           <p:cNvPr id="66" name="">
             <a:extLst xmlns:a="http://schemas.openxmlformats.org/drawingml/2006/main">
               <a:ext uri="{FF2B5EF4-FFF2-40B4-BE49-F238E27FC236}">
-                <a16:creationId xmlns:a16="http://schemas.microsoft.com/office/drawing/2014/main" id="{A9B48742-8684-4A0A-B371-BBC7E7F23238}"/>
+                <a16:creationId xmlns:a16="http://schemas.microsoft.com/office/drawing/2014/main" id="{5828BB83-31E8-4A3F-ADDC-B6703463816D}"/>
               </a:ext>
             </a:extLst>
           </p:cNvPr>
@@ -15519,7 +15519,7 @@
           <p:cNvPr id="67" name="">
             <a:extLst xmlns:a="http://schemas.openxmlformats.org/drawingml/2006/main">
               <a:ext uri="{FF2B5EF4-FFF2-40B4-BE49-F238E27FC236}">
-                <a16:creationId xmlns:a16="http://schemas.microsoft.com/office/drawing/2014/main" id="{0FC502D1-451E-4CC2-8C22-BF5A96100242}"/>
+                <a16:creationId xmlns:a16="http://schemas.microsoft.com/office/drawing/2014/main" id="{793A8BFE-3A0E-4C45-B280-B47CCB1BB227}"/>
               </a:ext>
             </a:extLst>
           </p:cNvPr>
@@ -15571,7 +15571,7 @@
           <p:cNvPr id="68" name="">
             <a:extLst xmlns:a="http://schemas.openxmlformats.org/drawingml/2006/main">
               <a:ext uri="{FF2B5EF4-FFF2-40B4-BE49-F238E27FC236}">
-                <a16:creationId xmlns:a16="http://schemas.microsoft.com/office/drawing/2014/main" id="{F1D57E36-8EB0-4278-8D1A-6247153843FD}"/>
+                <a16:creationId xmlns:a16="http://schemas.microsoft.com/office/drawing/2014/main" id="{B6AB5E93-77BA-4D00-B1B3-D26F89869778}"/>
               </a:ext>
             </a:extLst>
           </p:cNvPr>
@@ -15623,7 +15623,7 @@
           <p:cNvPr id="69" name="">
             <a:extLst xmlns:a="http://schemas.openxmlformats.org/drawingml/2006/main">
               <a:ext uri="{FF2B5EF4-FFF2-40B4-BE49-F238E27FC236}">
-                <a16:creationId xmlns:a16="http://schemas.microsoft.com/office/drawing/2014/main" id="{BE6FB124-F59F-4299-B29A-421911E91267}"/>
+                <a16:creationId xmlns:a16="http://schemas.microsoft.com/office/drawing/2014/main" id="{96949439-2B76-4CFC-B03D-2594A5701963}"/>
               </a:ext>
             </a:extLst>
           </p:cNvPr>
@@ -15675,7 +15675,7 @@
           <p:cNvPr id="70" name="">
             <a:extLst xmlns:a="http://schemas.openxmlformats.org/drawingml/2006/main">
               <a:ext uri="{FF2B5EF4-FFF2-40B4-BE49-F238E27FC236}">
-                <a16:creationId xmlns:a16="http://schemas.microsoft.com/office/drawing/2014/main" id="{4A3FEC1B-CFE1-42C5-8800-9AFEC21EDFA9}"/>
+                <a16:creationId xmlns:a16="http://schemas.microsoft.com/office/drawing/2014/main" id="{D3A3A2A3-DF7F-407C-A8BC-B56A816DB9D9}"/>
               </a:ext>
             </a:extLst>
           </p:cNvPr>
@@ -15706,7 +15706,7 @@
           <p:cNvPr id="71" name="">
             <a:extLst xmlns:a="http://schemas.openxmlformats.org/drawingml/2006/main">
               <a:ext uri="{FF2B5EF4-FFF2-40B4-BE49-F238E27FC236}">
-                <a16:creationId xmlns:a16="http://schemas.microsoft.com/office/drawing/2014/main" id="{D683C255-23EF-4209-900E-FA034A963842}"/>
+                <a16:creationId xmlns:a16="http://schemas.microsoft.com/office/drawing/2014/main" id="{91A2F757-9A47-46D4-82CB-DC714A3868FA}"/>
               </a:ext>
             </a:extLst>
           </p:cNvPr>
@@ -15758,7 +15758,7 @@
           <p:cNvPr id="72" name="">
             <a:extLst xmlns:a="http://schemas.openxmlformats.org/drawingml/2006/main">
               <a:ext uri="{FF2B5EF4-FFF2-40B4-BE49-F238E27FC236}">
-                <a16:creationId xmlns:a16="http://schemas.microsoft.com/office/drawing/2014/main" id="{7C31300C-0F9B-44EC-9503-C3AB970B47BE}"/>
+                <a16:creationId xmlns:a16="http://schemas.microsoft.com/office/drawing/2014/main" id="{2CF5D97C-6763-4876-8B45-A54F399300E9}"/>
               </a:ext>
             </a:extLst>
           </p:cNvPr>
@@ -15810,7 +15810,7 @@
           <p:cNvPr id="73" name="">
             <a:extLst xmlns:a="http://schemas.openxmlformats.org/drawingml/2006/main">
               <a:ext uri="{FF2B5EF4-FFF2-40B4-BE49-F238E27FC236}">
-                <a16:creationId xmlns:a16="http://schemas.microsoft.com/office/drawing/2014/main" id="{5E414CC4-B35C-4537-B0B1-36B9C4D3C091}"/>
+                <a16:creationId xmlns:a16="http://schemas.microsoft.com/office/drawing/2014/main" id="{83D748A5-9499-41B9-803F-FE496A8C76C4}"/>
               </a:ext>
             </a:extLst>
           </p:cNvPr>
@@ -15862,7 +15862,7 @@
           <p:cNvPr id="74" name="">
             <a:extLst xmlns:a="http://schemas.openxmlformats.org/drawingml/2006/main">
               <a:ext uri="{FF2B5EF4-FFF2-40B4-BE49-F238E27FC236}">
-                <a16:creationId xmlns:a16="http://schemas.microsoft.com/office/drawing/2014/main" id="{58440668-23B6-4139-9478-F1B0BCBD033E}"/>
+                <a16:creationId xmlns:a16="http://schemas.microsoft.com/office/drawing/2014/main" id="{8C9D5C24-2154-4527-9828-2B4E833EA9BB}"/>
               </a:ext>
             </a:extLst>
           </p:cNvPr>
@@ -15914,7 +15914,7 @@
           <p:cNvPr id="75" name="">
             <a:extLst xmlns:a="http://schemas.openxmlformats.org/drawingml/2006/main">
               <a:ext uri="{FF2B5EF4-FFF2-40B4-BE49-F238E27FC236}">
-                <a16:creationId xmlns:a16="http://schemas.microsoft.com/office/drawing/2014/main" id="{A4799638-842A-431E-BBE7-B732E2F63EAB}"/>
+                <a16:creationId xmlns:a16="http://schemas.microsoft.com/office/drawing/2014/main" id="{1D7C479D-7C2D-4EDC-AB0A-C0306E585E3D}"/>
               </a:ext>
             </a:extLst>
           </p:cNvPr>
@@ -15966,7 +15966,7 @@
           <p:cNvPr id="76" name="">
             <a:extLst xmlns:a="http://schemas.openxmlformats.org/drawingml/2006/main">
               <a:ext uri="{FF2B5EF4-FFF2-40B4-BE49-F238E27FC236}">
-                <a16:creationId xmlns:a16="http://schemas.microsoft.com/office/drawing/2014/main" id="{07B46D20-BA33-4F02-B5B5-3DCF9281CE07}"/>
+                <a16:creationId xmlns:a16="http://schemas.microsoft.com/office/drawing/2014/main" id="{2ABD46FF-9665-4627-8B14-BA9A37AB6B0C}"/>
               </a:ext>
             </a:extLst>
           </p:cNvPr>
@@ -15997,7 +15997,7 @@
           <p:cNvPr id="77" name="">
             <a:extLst xmlns:a="http://schemas.openxmlformats.org/drawingml/2006/main">
               <a:ext uri="{FF2B5EF4-FFF2-40B4-BE49-F238E27FC236}">
-                <a16:creationId xmlns:a16="http://schemas.microsoft.com/office/drawing/2014/main" id="{07E40E2B-560B-4C3F-A86C-C6B91F048770}"/>
+                <a16:creationId xmlns:a16="http://schemas.microsoft.com/office/drawing/2014/main" id="{ADD63E92-1BDE-4E6C-A8F6-C513DE37B134}"/>
               </a:ext>
             </a:extLst>
           </p:cNvPr>
@@ -16028,7 +16028,7 @@
           <p:cNvPr id="78" name="">
             <a:extLst xmlns:a="http://schemas.openxmlformats.org/drawingml/2006/main">
               <a:ext uri="{FF2B5EF4-FFF2-40B4-BE49-F238E27FC236}">
-                <a16:creationId xmlns:a16="http://schemas.microsoft.com/office/drawing/2014/main" id="{8CF5ECD4-BA1E-45C8-A5E6-E29B7C0B00CB}"/>
+                <a16:creationId xmlns:a16="http://schemas.microsoft.com/office/drawing/2014/main" id="{25B39004-7AC9-4776-80A5-DDA8D144FE07}"/>
               </a:ext>
             </a:extLst>
           </p:cNvPr>
@@ -16080,7 +16080,7 @@
           <p:cNvPr id="79" name="">
             <a:extLst xmlns:a="http://schemas.openxmlformats.org/drawingml/2006/main">
               <a:ext uri="{FF2B5EF4-FFF2-40B4-BE49-F238E27FC236}">
-                <a16:creationId xmlns:a16="http://schemas.microsoft.com/office/drawing/2014/main" id="{5CD6A8CC-AC2A-41DF-988E-D0D0CE4148D6}"/>
+                <a16:creationId xmlns:a16="http://schemas.microsoft.com/office/drawing/2014/main" id="{46E57DDB-3FCA-4AB2-B767-341DF1FDDAB9}"/>
               </a:ext>
             </a:extLst>
           </p:cNvPr>
@@ -16132,7 +16132,7 @@
           <p:cNvPr id="80" name="">
             <a:extLst xmlns:a="http://schemas.openxmlformats.org/drawingml/2006/main">
               <a:ext uri="{FF2B5EF4-FFF2-40B4-BE49-F238E27FC236}">
-                <a16:creationId xmlns:a16="http://schemas.microsoft.com/office/drawing/2014/main" id="{B0FA1D2B-A4E5-434D-B14F-5E52BD05351E}"/>
+                <a16:creationId xmlns:a16="http://schemas.microsoft.com/office/drawing/2014/main" id="{02017213-899F-4A81-A022-5CA34E81B48D}"/>
               </a:ext>
             </a:extLst>
           </p:cNvPr>
@@ -16184,7 +16184,7 @@
           <p:cNvPr id="81" name="">
             <a:extLst xmlns:a="http://schemas.openxmlformats.org/drawingml/2006/main">
               <a:ext uri="{FF2B5EF4-FFF2-40B4-BE49-F238E27FC236}">
-                <a16:creationId xmlns:a16="http://schemas.microsoft.com/office/drawing/2014/main" id="{9AF33B8C-FA99-41B3-A909-92582D568328}"/>
+                <a16:creationId xmlns:a16="http://schemas.microsoft.com/office/drawing/2014/main" id="{C191CA59-3848-4DF7-941C-D058967DC0B8}"/>
               </a:ext>
             </a:extLst>
           </p:cNvPr>
@@ -16236,7 +16236,7 @@
           <p:cNvPr id="82" name="">
             <a:extLst xmlns:a="http://schemas.openxmlformats.org/drawingml/2006/main">
               <a:ext uri="{FF2B5EF4-FFF2-40B4-BE49-F238E27FC236}">
-                <a16:creationId xmlns:a16="http://schemas.microsoft.com/office/drawing/2014/main" id="{06EDDAEB-2C4D-4FDC-A18D-ED6969C1E7EB}"/>
+                <a16:creationId xmlns:a16="http://schemas.microsoft.com/office/drawing/2014/main" id="{BC6C56E9-7105-4308-A32B-93B7CAEB66D3}"/>
               </a:ext>
             </a:extLst>
           </p:cNvPr>
@@ -16288,7 +16288,7 @@
           <p:cNvPr id="83" name="">
             <a:extLst xmlns:a="http://schemas.openxmlformats.org/drawingml/2006/main">
               <a:ext uri="{FF2B5EF4-FFF2-40B4-BE49-F238E27FC236}">
-                <a16:creationId xmlns:a16="http://schemas.microsoft.com/office/drawing/2014/main" id="{A014CB5D-E665-4FAE-AA85-3132658B3878}"/>
+                <a16:creationId xmlns:a16="http://schemas.microsoft.com/office/drawing/2014/main" id="{DB0818FD-06CB-4DB9-9DD0-344788F22A00}"/>
               </a:ext>
             </a:extLst>
           </p:cNvPr>
@@ -16319,7 +16319,7 @@
           <p:cNvPr id="84" name="">
             <a:extLst xmlns:a="http://schemas.openxmlformats.org/drawingml/2006/main">
               <a:ext uri="{FF2B5EF4-FFF2-40B4-BE49-F238E27FC236}">
-                <a16:creationId xmlns:a16="http://schemas.microsoft.com/office/drawing/2014/main" id="{78F0121C-8FF9-4FDC-9CA7-799513CA4A68}"/>
+                <a16:creationId xmlns:a16="http://schemas.microsoft.com/office/drawing/2014/main" id="{3F4D9EEE-8B53-46F2-8CCF-FE547D8A0190}"/>
               </a:ext>
             </a:extLst>
           </p:cNvPr>
@@ -16371,7 +16371,7 @@
           <p:cNvPr id="85" name="">
             <a:extLst xmlns:a="http://schemas.openxmlformats.org/drawingml/2006/main">
               <a:ext uri="{FF2B5EF4-FFF2-40B4-BE49-F238E27FC236}">
-                <a16:creationId xmlns:a16="http://schemas.microsoft.com/office/drawing/2014/main" id="{1A77DD0C-534C-4884-BB42-E45D56D02AD1}"/>
+                <a16:creationId xmlns:a16="http://schemas.microsoft.com/office/drawing/2014/main" id="{2438A081-2563-49A2-8198-5F7EC82CE154}"/>
               </a:ext>
             </a:extLst>
           </p:cNvPr>
@@ -16423,7 +16423,7 @@
           <p:cNvPr id="86" name="">
             <a:extLst xmlns:a="http://schemas.openxmlformats.org/drawingml/2006/main">
               <a:ext uri="{FF2B5EF4-FFF2-40B4-BE49-F238E27FC236}">
-                <a16:creationId xmlns:a16="http://schemas.microsoft.com/office/drawing/2014/main" id="{495F86B5-1CBC-4722-8E5F-4A5E4974B402}"/>
+                <a16:creationId xmlns:a16="http://schemas.microsoft.com/office/drawing/2014/main" id="{8D64725F-4030-425D-9827-A870339BE55C}"/>
               </a:ext>
             </a:extLst>
           </p:cNvPr>
@@ -16475,7 +16475,7 @@
           <p:cNvPr id="87" name="">
             <a:extLst xmlns:a="http://schemas.openxmlformats.org/drawingml/2006/main">
               <a:ext uri="{FF2B5EF4-FFF2-40B4-BE49-F238E27FC236}">
-                <a16:creationId xmlns:a16="http://schemas.microsoft.com/office/drawing/2014/main" id="{81A7FF0B-4C60-40EF-875C-A644B002C7BF}"/>
+                <a16:creationId xmlns:a16="http://schemas.microsoft.com/office/drawing/2014/main" id="{7066CB49-6F86-45B2-9313-835F6DDC0AEF}"/>
               </a:ext>
             </a:extLst>
           </p:cNvPr>
@@ -16527,7 +16527,7 @@
           <p:cNvPr id="88" name="">
             <a:extLst xmlns:a="http://schemas.openxmlformats.org/drawingml/2006/main">
               <a:ext uri="{FF2B5EF4-FFF2-40B4-BE49-F238E27FC236}">
-                <a16:creationId xmlns:a16="http://schemas.microsoft.com/office/drawing/2014/main" id="{BAC622B5-2275-4F74-9DE8-C2CF66716048}"/>
+                <a16:creationId xmlns:a16="http://schemas.microsoft.com/office/drawing/2014/main" id="{786A0067-5CCA-4255-81F1-5E7D40BD461E}"/>
               </a:ext>
             </a:extLst>
           </p:cNvPr>
@@ -16579,7 +16579,7 @@
           <p:cNvPr id="89" name="">
             <a:extLst xmlns:a="http://schemas.openxmlformats.org/drawingml/2006/main">
               <a:ext uri="{FF2B5EF4-FFF2-40B4-BE49-F238E27FC236}">
-                <a16:creationId xmlns:a16="http://schemas.microsoft.com/office/drawing/2014/main" id="{47B5BBB1-17EB-4AFB-B261-31AF2BECDA08}"/>
+                <a16:creationId xmlns:a16="http://schemas.microsoft.com/office/drawing/2014/main" id="{5B9C9FB8-2EF5-44B0-A0EB-D49A5566EF89}"/>
               </a:ext>
             </a:extLst>
           </p:cNvPr>
@@ -16610,7 +16610,7 @@
           <p:cNvPr id="90" name="">
             <a:extLst xmlns:a="http://schemas.openxmlformats.org/drawingml/2006/main">
               <a:ext uri="{FF2B5EF4-FFF2-40B4-BE49-F238E27FC236}">
-                <a16:creationId xmlns:a16="http://schemas.microsoft.com/office/drawing/2014/main" id="{E41CE5FD-7478-4490-A366-ED683DD146FD}"/>
+                <a16:creationId xmlns:a16="http://schemas.microsoft.com/office/drawing/2014/main" id="{8633B51F-67F9-4C81-B6C6-6D4FBA489892}"/>
               </a:ext>
             </a:extLst>
           </p:cNvPr>
@@ -16641,7 +16641,7 @@
           <p:cNvPr id="91" name="">
             <a:extLst xmlns:a="http://schemas.openxmlformats.org/drawingml/2006/main">
               <a:ext uri="{FF2B5EF4-FFF2-40B4-BE49-F238E27FC236}">
-                <a16:creationId xmlns:a16="http://schemas.microsoft.com/office/drawing/2014/main" id="{B3756F1C-57DC-42D5-9037-B8AA8906EE1E}"/>
+                <a16:creationId xmlns:a16="http://schemas.microsoft.com/office/drawing/2014/main" id="{EC55DF42-81FC-4A8B-8B92-811848651A96}"/>
               </a:ext>
             </a:extLst>
           </p:cNvPr>
@@ -16693,7 +16693,7 @@
           <p:cNvPr id="92" name="">
             <a:extLst xmlns:a="http://schemas.openxmlformats.org/drawingml/2006/main">
               <a:ext uri="{FF2B5EF4-FFF2-40B4-BE49-F238E27FC236}">
-                <a16:creationId xmlns:a16="http://schemas.microsoft.com/office/drawing/2014/main" id="{2400CC00-CAE4-420E-8D27-200A0D21F5D9}"/>
+                <a16:creationId xmlns:a16="http://schemas.microsoft.com/office/drawing/2014/main" id="{622A766F-FB7E-4101-BA8D-81B82BEF6FAE}"/>
               </a:ext>
             </a:extLst>
           </p:cNvPr>
@@ -16745,7 +16745,7 @@
           <p:cNvPr id="93" name="">
             <a:extLst xmlns:a="http://schemas.openxmlformats.org/drawingml/2006/main">
               <a:ext uri="{FF2B5EF4-FFF2-40B4-BE49-F238E27FC236}">
-                <a16:creationId xmlns:a16="http://schemas.microsoft.com/office/drawing/2014/main" id="{D80E413A-D2EC-4132-8A9A-0F9C9B0B5A10}"/>
+                <a16:creationId xmlns:a16="http://schemas.microsoft.com/office/drawing/2014/main" id="{3C9AC994-845A-4C24-A441-4DCE3187CBBF}"/>
               </a:ext>
             </a:extLst>
           </p:cNvPr>
@@ -16797,7 +16797,7 @@
           <p:cNvPr id="94" name="">
             <a:extLst xmlns:a="http://schemas.openxmlformats.org/drawingml/2006/main">
               <a:ext uri="{FF2B5EF4-FFF2-40B4-BE49-F238E27FC236}">
-                <a16:creationId xmlns:a16="http://schemas.microsoft.com/office/drawing/2014/main" id="{3FD8BECB-5501-47C8-AAC7-D8EA8DD03F4A}"/>
+                <a16:creationId xmlns:a16="http://schemas.microsoft.com/office/drawing/2014/main" id="{0BFCC1B1-6443-4294-8140-C86FBF9336E1}"/>
               </a:ext>
             </a:extLst>
           </p:cNvPr>
@@ -16849,7 +16849,7 @@
           <p:cNvPr id="95" name="">
             <a:extLst xmlns:a="http://schemas.openxmlformats.org/drawingml/2006/main">
               <a:ext uri="{FF2B5EF4-FFF2-40B4-BE49-F238E27FC236}">
-                <a16:creationId xmlns:a16="http://schemas.microsoft.com/office/drawing/2014/main" id="{349FB8B3-415B-43D0-9289-CE1D901125BF}"/>
+                <a16:creationId xmlns:a16="http://schemas.microsoft.com/office/drawing/2014/main" id="{F227E602-F088-45FE-B55D-C9B60D4D7A4D}"/>
               </a:ext>
             </a:extLst>
           </p:cNvPr>
@@ -16901,7 +16901,7 @@
           <p:cNvPr id="96" name="">
             <a:extLst xmlns:a="http://schemas.openxmlformats.org/drawingml/2006/main">
               <a:ext uri="{FF2B5EF4-FFF2-40B4-BE49-F238E27FC236}">
-                <a16:creationId xmlns:a16="http://schemas.microsoft.com/office/drawing/2014/main" id="{1AAF5CF0-C34E-4E7B-9005-C01A9B7E9AAE}"/>
+                <a16:creationId xmlns:a16="http://schemas.microsoft.com/office/drawing/2014/main" id="{1DA27893-1C94-464D-9C4C-348876CCBE8D}"/>
               </a:ext>
             </a:extLst>
           </p:cNvPr>
@@ -16932,7 +16932,7 @@
           <p:cNvPr id="97" name="">
             <a:extLst xmlns:a="http://schemas.openxmlformats.org/drawingml/2006/main">
               <a:ext uri="{FF2B5EF4-FFF2-40B4-BE49-F238E27FC236}">
-                <a16:creationId xmlns:a16="http://schemas.microsoft.com/office/drawing/2014/main" id="{33D8E0F2-DEDF-4802-806A-80287540DE46}"/>
+                <a16:creationId xmlns:a16="http://schemas.microsoft.com/office/drawing/2014/main" id="{7758EB2E-F6C6-495F-820D-55970D2D8AC2}"/>
               </a:ext>
             </a:extLst>
           </p:cNvPr>
@@ -16984,7 +16984,7 @@
           <p:cNvPr id="98" name="">
             <a:extLst xmlns:a="http://schemas.openxmlformats.org/drawingml/2006/main">
               <a:ext uri="{FF2B5EF4-FFF2-40B4-BE49-F238E27FC236}">
-                <a16:creationId xmlns:a16="http://schemas.microsoft.com/office/drawing/2014/main" id="{BDF7EC22-0D9A-4D53-927E-E6A35CA62484}"/>
+                <a16:creationId xmlns:a16="http://schemas.microsoft.com/office/drawing/2014/main" id="{2548D239-0B15-44BB-80DA-D1740E473063}"/>
               </a:ext>
             </a:extLst>
           </p:cNvPr>
@@ -17036,7 +17036,7 @@
           <p:cNvPr id="99" name="">
             <a:extLst xmlns:a="http://schemas.openxmlformats.org/drawingml/2006/main">
               <a:ext uri="{FF2B5EF4-FFF2-40B4-BE49-F238E27FC236}">
-                <a16:creationId xmlns:a16="http://schemas.microsoft.com/office/drawing/2014/main" id="{77F04C3D-3701-4DB1-B8D1-17E51653A085}"/>
+                <a16:creationId xmlns:a16="http://schemas.microsoft.com/office/drawing/2014/main" id="{8C984218-DBAB-4EB8-9267-FB4CB0ABB149}"/>
               </a:ext>
             </a:extLst>
           </p:cNvPr>
@@ -17088,7 +17088,7 @@
           <p:cNvPr id="100" name="">
             <a:extLst xmlns:a="http://schemas.openxmlformats.org/drawingml/2006/main">
               <a:ext uri="{FF2B5EF4-FFF2-40B4-BE49-F238E27FC236}">
-                <a16:creationId xmlns:a16="http://schemas.microsoft.com/office/drawing/2014/main" id="{11E54941-4957-4DDD-8CE0-61104B9B2C54}"/>
+                <a16:creationId xmlns:a16="http://schemas.microsoft.com/office/drawing/2014/main" id="{FE10C8D8-A653-4E7F-A22F-803779013DC9}"/>
               </a:ext>
             </a:extLst>
           </p:cNvPr>
@@ -17140,7 +17140,7 @@
           <p:cNvPr id="101" name="">
             <a:extLst xmlns:a="http://schemas.openxmlformats.org/drawingml/2006/main">
               <a:ext uri="{FF2B5EF4-FFF2-40B4-BE49-F238E27FC236}">
-                <a16:creationId xmlns:a16="http://schemas.microsoft.com/office/drawing/2014/main" id="{6F8DDCC7-472A-4969-BAF9-451F97A48E2E}"/>
+                <a16:creationId xmlns:a16="http://schemas.microsoft.com/office/drawing/2014/main" id="{C73E650C-D3F1-427A-82DD-A6E9474E7C5C}"/>
               </a:ext>
             </a:extLst>
           </p:cNvPr>
@@ -17190,7 +17190,7 @@
     </p:spTree>
     <p:extLst>
       <p:ext uri="{BB962C8B-B14F-4D97-AF65-F5344CB8AC3E}">
-        <p14:creationId xmlns:p14="http://schemas.microsoft.com/office/powerpoint/2010/main" val="1457280241"/>
+        <p14:creationId xmlns:p14="http://schemas.microsoft.com/office/powerpoint/2010/main" val="1115929778"/>
       </p:ext>
     </p:extLst>
   </p:cSld>
@@ -17221,7 +17221,7 @@
           <p:cNvPr id="96" name="">
             <a:extLst xmlns:a="http://schemas.openxmlformats.org/drawingml/2006/main">
               <a:ext uri="{FF2B5EF4-FFF2-40B4-BE49-F238E27FC236}">
-                <a16:creationId xmlns:a16="http://schemas.microsoft.com/office/drawing/2014/main" id="{C48C5026-A0A8-469F-B14A-46AE4FB828CF}"/>
+                <a16:creationId xmlns:a16="http://schemas.microsoft.com/office/drawing/2014/main" id="{143DF541-66A0-4A81-A5CE-A6A29AB49175}"/>
               </a:ext>
             </a:extLst>
           </p:cNvPr>
@@ -17254,7 +17254,7 @@
           <p:cNvPr id="2" name="">
             <a:extLst xmlns:a="http://schemas.openxmlformats.org/drawingml/2006/main">
               <a:ext uri="{FF2B5EF4-FFF2-40B4-BE49-F238E27FC236}">
-                <a16:creationId xmlns:a16="http://schemas.microsoft.com/office/drawing/2014/main" id="{5A998F24-B812-4EF8-9099-6E1A5677715D}"/>
+                <a16:creationId xmlns:a16="http://schemas.microsoft.com/office/drawing/2014/main" id="{ED458052-4A50-4B40-ACDA-E570AF8F795C}"/>
               </a:ext>
             </a:extLst>
           </p:cNvPr>
@@ -17285,7 +17285,7 @@
           <p:cNvPr id="3" name="">
             <a:extLst xmlns:a="http://schemas.openxmlformats.org/drawingml/2006/main">
               <a:ext uri="{FF2B5EF4-FFF2-40B4-BE49-F238E27FC236}">
-                <a16:creationId xmlns:a16="http://schemas.microsoft.com/office/drawing/2014/main" id="{173AA31C-F81A-4716-9D72-6895A0045CE9}"/>
+                <a16:creationId xmlns:a16="http://schemas.microsoft.com/office/drawing/2014/main" id="{9685B2AB-1266-4695-BBC1-CCC6A1E4A72E}"/>
               </a:ext>
             </a:extLst>
           </p:cNvPr>
@@ -17337,7 +17337,7 @@
           <p:cNvPr id="4" name="">
             <a:extLst xmlns:a="http://schemas.openxmlformats.org/drawingml/2006/main">
               <a:ext uri="{FF2B5EF4-FFF2-40B4-BE49-F238E27FC236}">
-                <a16:creationId xmlns:a16="http://schemas.microsoft.com/office/drawing/2014/main" id="{C35F1C06-B5E7-4081-B347-F2DBEB8876A8}"/>
+                <a16:creationId xmlns:a16="http://schemas.microsoft.com/office/drawing/2014/main" id="{CE948615-7287-44B3-8F50-7A0EE85FFD89}"/>
               </a:ext>
             </a:extLst>
           </p:cNvPr>
@@ -17389,7 +17389,7 @@
           <p:cNvPr id="5" name="">
             <a:extLst xmlns:a="http://schemas.openxmlformats.org/drawingml/2006/main">
               <a:ext uri="{FF2B5EF4-FFF2-40B4-BE49-F238E27FC236}">
-                <a16:creationId xmlns:a16="http://schemas.microsoft.com/office/drawing/2014/main" id="{21B36D97-AD03-48F6-9BC3-B50E4FB8A6C4}"/>
+                <a16:creationId xmlns:a16="http://schemas.microsoft.com/office/drawing/2014/main" id="{B0EA18C7-01C2-4853-8FFC-D01E364EFFA9}"/>
               </a:ext>
             </a:extLst>
           </p:cNvPr>
@@ -17424,7 +17424,7 @@
           <p:nvPr/>
         </p:nvPicPr>
         <p:blipFill>
-          <a:blip xmlns:r="http://schemas.openxmlformats.org/officeDocument/2006/relationships" xmlns:a="http://schemas.openxmlformats.org/drawingml/2006/main" r:embed="Rbaa1cf2e320e41f8"/>
+          <a:blip xmlns:r="http://schemas.openxmlformats.org/officeDocument/2006/relationships" xmlns:a="http://schemas.openxmlformats.org/drawingml/2006/main" r:embed="R858841db794e4f78"/>
           <a:stretch xmlns:a="http://schemas.openxmlformats.org/drawingml/2006/main"/>
         </p:blipFill>
         <p:spPr>
@@ -17442,7 +17442,7 @@
           <p:cNvPr id="7" name="">
             <a:extLst xmlns:a="http://schemas.openxmlformats.org/drawingml/2006/main">
               <a:ext uri="{FF2B5EF4-FFF2-40B4-BE49-F238E27FC236}">
-                <a16:creationId xmlns:a16="http://schemas.microsoft.com/office/drawing/2014/main" id="{E706F50F-D628-4540-8B61-04408828D420}"/>
+                <a16:creationId xmlns:a16="http://schemas.microsoft.com/office/drawing/2014/main" id="{DD6DECC5-2028-481C-BF9C-9B88DBAF5754}"/>
               </a:ext>
             </a:extLst>
           </p:cNvPr>
@@ -17494,7 +17494,7 @@
           <p:cNvPr id="8" name="">
             <a:extLst xmlns:a="http://schemas.openxmlformats.org/drawingml/2006/main">
               <a:ext uri="{FF2B5EF4-FFF2-40B4-BE49-F238E27FC236}">
-                <a16:creationId xmlns:a16="http://schemas.microsoft.com/office/drawing/2014/main" id="{5C376F52-BFD5-4057-90EF-E6CF2C759F9C}"/>
+                <a16:creationId xmlns:a16="http://schemas.microsoft.com/office/drawing/2014/main" id="{B448C2E0-9A4C-481E-B3A4-AF32031DD93B}"/>
               </a:ext>
             </a:extLst>
           </p:cNvPr>
@@ -17546,7 +17546,7 @@
           <p:cNvPr id="9" name="">
             <a:extLst xmlns:a="http://schemas.openxmlformats.org/drawingml/2006/main">
               <a:ext uri="{FF2B5EF4-FFF2-40B4-BE49-F238E27FC236}">
-                <a16:creationId xmlns:a16="http://schemas.microsoft.com/office/drawing/2014/main" id="{B479CC46-93BD-4ECB-830A-9D2422DC920A}"/>
+                <a16:creationId xmlns:a16="http://schemas.microsoft.com/office/drawing/2014/main" id="{6C178276-F4EE-4182-8AF1-C9861EB90857}"/>
               </a:ext>
             </a:extLst>
           </p:cNvPr>
@@ -17598,7 +17598,7 @@
           <p:cNvPr id="10" name="">
             <a:extLst xmlns:a="http://schemas.openxmlformats.org/drawingml/2006/main">
               <a:ext uri="{FF2B5EF4-FFF2-40B4-BE49-F238E27FC236}">
-                <a16:creationId xmlns:a16="http://schemas.microsoft.com/office/drawing/2014/main" id="{1D7D0347-D5BB-49B6-B357-F718D62F31B4}"/>
+                <a16:creationId xmlns:a16="http://schemas.microsoft.com/office/drawing/2014/main" id="{6BDE59F9-ACCA-4FCA-AD08-9D5A98374A1F}"/>
               </a:ext>
             </a:extLst>
           </p:cNvPr>
@@ -17650,7 +17650,7 @@
           <p:cNvPr id="11" name="">
             <a:extLst xmlns:a="http://schemas.openxmlformats.org/drawingml/2006/main">
               <a:ext uri="{FF2B5EF4-FFF2-40B4-BE49-F238E27FC236}">
-                <a16:creationId xmlns:a16="http://schemas.microsoft.com/office/drawing/2014/main" id="{AD56465E-1FF4-444D-A05C-5F0B452873EF}"/>
+                <a16:creationId xmlns:a16="http://schemas.microsoft.com/office/drawing/2014/main" id="{E28CC8DE-6AE0-4845-AA7B-E97EC858100D}"/>
               </a:ext>
             </a:extLst>
           </p:cNvPr>
@@ -17681,7 +17681,7 @@
           <p:cNvPr id="12" name="">
             <a:extLst xmlns:a="http://schemas.openxmlformats.org/drawingml/2006/main">
               <a:ext uri="{FF2B5EF4-FFF2-40B4-BE49-F238E27FC236}">
-                <a16:creationId xmlns:a16="http://schemas.microsoft.com/office/drawing/2014/main" id="{22E228F1-35CC-47D7-A855-0CE313BE39B1}"/>
+                <a16:creationId xmlns:a16="http://schemas.microsoft.com/office/drawing/2014/main" id="{1207953F-74FA-4218-A6E2-CCDDFB2E1460}"/>
               </a:ext>
             </a:extLst>
           </p:cNvPr>
@@ -17712,7 +17712,7 @@
           <p:cNvPr id="13" name="">
             <a:extLst xmlns:a="http://schemas.openxmlformats.org/drawingml/2006/main">
               <a:ext uri="{FF2B5EF4-FFF2-40B4-BE49-F238E27FC236}">
-                <a16:creationId xmlns:a16="http://schemas.microsoft.com/office/drawing/2014/main" id="{B99EA577-EEFC-408F-B00C-A45B5E482EE1}"/>
+                <a16:creationId xmlns:a16="http://schemas.microsoft.com/office/drawing/2014/main" id="{AE931AC3-C491-4E76-B2E5-79195D6E59F3}"/>
               </a:ext>
             </a:extLst>
           </p:cNvPr>
@@ -17764,7 +17764,7 @@
           <p:cNvPr id="14" name="">
             <a:extLst xmlns:a="http://schemas.openxmlformats.org/drawingml/2006/main">
               <a:ext uri="{FF2B5EF4-FFF2-40B4-BE49-F238E27FC236}">
-                <a16:creationId xmlns:a16="http://schemas.microsoft.com/office/drawing/2014/main" id="{B6FB8674-1416-4647-8690-98CED320FFF0}"/>
+                <a16:creationId xmlns:a16="http://schemas.microsoft.com/office/drawing/2014/main" id="{C5BBEE64-9FFA-432C-80D7-B952EF13136B}"/>
               </a:ext>
             </a:extLst>
           </p:cNvPr>
@@ -17816,7 +17816,7 @@
           <p:cNvPr id="15" name="">
             <a:extLst xmlns:a="http://schemas.openxmlformats.org/drawingml/2006/main">
               <a:ext uri="{FF2B5EF4-FFF2-40B4-BE49-F238E27FC236}">
-                <a16:creationId xmlns:a16="http://schemas.microsoft.com/office/drawing/2014/main" id="{9221D6B5-6A63-4B6E-8D53-6C7490782FD7}"/>
+                <a16:creationId xmlns:a16="http://schemas.microsoft.com/office/drawing/2014/main" id="{3C24C974-5B29-453E-952B-65E511A2892A}"/>
               </a:ext>
             </a:extLst>
           </p:cNvPr>
@@ -17868,7 +17868,7 @@
           <p:cNvPr id="16" name="">
             <a:extLst xmlns:a="http://schemas.openxmlformats.org/drawingml/2006/main">
               <a:ext uri="{FF2B5EF4-FFF2-40B4-BE49-F238E27FC236}">
-                <a16:creationId xmlns:a16="http://schemas.microsoft.com/office/drawing/2014/main" id="{B124B0F3-CF0F-411F-AFE0-8FB3C4B5F183}"/>
+                <a16:creationId xmlns:a16="http://schemas.microsoft.com/office/drawing/2014/main" id="{01E8993A-45FA-466C-A305-0B61B092155E}"/>
               </a:ext>
             </a:extLst>
           </p:cNvPr>
@@ -17920,7 +17920,7 @@
           <p:cNvPr id="17" name="">
             <a:extLst xmlns:a="http://schemas.openxmlformats.org/drawingml/2006/main">
               <a:ext uri="{FF2B5EF4-FFF2-40B4-BE49-F238E27FC236}">
-                <a16:creationId xmlns:a16="http://schemas.microsoft.com/office/drawing/2014/main" id="{90396B32-8C82-474E-B6A7-2969BBCBDEB3}"/>
+                <a16:creationId xmlns:a16="http://schemas.microsoft.com/office/drawing/2014/main" id="{C6764B82-B465-4A5D-B55B-6443303FB85C}"/>
               </a:ext>
             </a:extLst>
           </p:cNvPr>
@@ -17972,7 +17972,7 @@
           <p:cNvPr id="18" name="">
             <a:extLst xmlns:a="http://schemas.openxmlformats.org/drawingml/2006/main">
               <a:ext uri="{FF2B5EF4-FFF2-40B4-BE49-F238E27FC236}">
-                <a16:creationId xmlns:a16="http://schemas.microsoft.com/office/drawing/2014/main" id="{CD84B162-9719-4625-ABF5-810532439A50}"/>
+                <a16:creationId xmlns:a16="http://schemas.microsoft.com/office/drawing/2014/main" id="{F314C22D-7C4B-4DD9-9B37-D0653A149D2E}"/>
               </a:ext>
             </a:extLst>
           </p:cNvPr>
@@ -18003,7 +18003,7 @@
           <p:cNvPr id="19" name="">
             <a:extLst xmlns:a="http://schemas.openxmlformats.org/drawingml/2006/main">
               <a:ext uri="{FF2B5EF4-FFF2-40B4-BE49-F238E27FC236}">
-                <a16:creationId xmlns:a16="http://schemas.microsoft.com/office/drawing/2014/main" id="{B827BE7E-052A-4292-BC91-77B62353018F}"/>
+                <a16:creationId xmlns:a16="http://schemas.microsoft.com/office/drawing/2014/main" id="{1A4F9FB9-B14D-4039-B495-51E006E5C085}"/>
               </a:ext>
             </a:extLst>
           </p:cNvPr>
@@ -18034,7 +18034,7 @@
           <p:cNvPr id="20" name="">
             <a:extLst xmlns:a="http://schemas.openxmlformats.org/drawingml/2006/main">
               <a:ext uri="{FF2B5EF4-FFF2-40B4-BE49-F238E27FC236}">
-                <a16:creationId xmlns:a16="http://schemas.microsoft.com/office/drawing/2014/main" id="{B15F3BD3-1ACC-41B7-929A-E446F1F0FADB}"/>
+                <a16:creationId xmlns:a16="http://schemas.microsoft.com/office/drawing/2014/main" id="{CF92D3F2-89CE-42C5-9FB4-4250E27FA7BA}"/>
               </a:ext>
             </a:extLst>
           </p:cNvPr>
@@ -18086,7 +18086,7 @@
           <p:cNvPr id="21" name="">
             <a:extLst xmlns:a="http://schemas.openxmlformats.org/drawingml/2006/main">
               <a:ext uri="{FF2B5EF4-FFF2-40B4-BE49-F238E27FC236}">
-                <a16:creationId xmlns:a16="http://schemas.microsoft.com/office/drawing/2014/main" id="{903C49CD-C5B1-4AE8-B32F-8BD5E9A33EC1}"/>
+                <a16:creationId xmlns:a16="http://schemas.microsoft.com/office/drawing/2014/main" id="{77D7B977-C83B-4C0B-BAE1-F118B6E9B413}"/>
               </a:ext>
             </a:extLst>
           </p:cNvPr>
@@ -18138,7 +18138,7 @@
           <p:cNvPr id="22" name="">
             <a:extLst xmlns:a="http://schemas.openxmlformats.org/drawingml/2006/main">
               <a:ext uri="{FF2B5EF4-FFF2-40B4-BE49-F238E27FC236}">
-                <a16:creationId xmlns:a16="http://schemas.microsoft.com/office/drawing/2014/main" id="{89FAF4E8-0425-4A1E-B13E-D4EF262A915C}"/>
+                <a16:creationId xmlns:a16="http://schemas.microsoft.com/office/drawing/2014/main" id="{4A4EDDB6-54A3-4F46-BC9C-2362BE653171}"/>
               </a:ext>
             </a:extLst>
           </p:cNvPr>
@@ -18190,7 +18190,7 @@
           <p:cNvPr id="23" name="">
             <a:extLst xmlns:a="http://schemas.openxmlformats.org/drawingml/2006/main">
               <a:ext uri="{FF2B5EF4-FFF2-40B4-BE49-F238E27FC236}">
-                <a16:creationId xmlns:a16="http://schemas.microsoft.com/office/drawing/2014/main" id="{872ADD51-2B24-4AA5-AEC3-2881ECC04C44}"/>
+                <a16:creationId xmlns:a16="http://schemas.microsoft.com/office/drawing/2014/main" id="{B6C327EE-EDFC-46B4-B2A9-1CC434EEF700}"/>
               </a:ext>
             </a:extLst>
           </p:cNvPr>
@@ -18242,7 +18242,7 @@
           <p:cNvPr id="24" name="">
             <a:extLst xmlns:a="http://schemas.openxmlformats.org/drawingml/2006/main">
               <a:ext uri="{FF2B5EF4-FFF2-40B4-BE49-F238E27FC236}">
-                <a16:creationId xmlns:a16="http://schemas.microsoft.com/office/drawing/2014/main" id="{6847719D-21FD-4E32-85AB-56441DCD93A8}"/>
+                <a16:creationId xmlns:a16="http://schemas.microsoft.com/office/drawing/2014/main" id="{D00957D3-E0FD-40C7-974D-B4E895E11AE3}"/>
               </a:ext>
             </a:extLst>
           </p:cNvPr>
@@ -18294,7 +18294,7 @@
           <p:cNvPr id="25" name="">
             <a:extLst xmlns:a="http://schemas.openxmlformats.org/drawingml/2006/main">
               <a:ext uri="{FF2B5EF4-FFF2-40B4-BE49-F238E27FC236}">
-                <a16:creationId xmlns:a16="http://schemas.microsoft.com/office/drawing/2014/main" id="{BEBA83CB-034D-44A6-B83C-B435AC6A8631}"/>
+                <a16:creationId xmlns:a16="http://schemas.microsoft.com/office/drawing/2014/main" id="{05CF533F-FAC9-462E-AE32-1C7D464D82DA}"/>
               </a:ext>
             </a:extLst>
           </p:cNvPr>
@@ -18325,7 +18325,7 @@
           <p:cNvPr id="26" name="">
             <a:extLst xmlns:a="http://schemas.openxmlformats.org/drawingml/2006/main">
               <a:ext uri="{FF2B5EF4-FFF2-40B4-BE49-F238E27FC236}">
-                <a16:creationId xmlns:a16="http://schemas.microsoft.com/office/drawing/2014/main" id="{C88FC711-3477-4A76-8DBB-9173E76B7AB9}"/>
+                <a16:creationId xmlns:a16="http://schemas.microsoft.com/office/drawing/2014/main" id="{D19BF86F-758D-43DC-9311-814DD001BE3E}"/>
               </a:ext>
             </a:extLst>
           </p:cNvPr>
@@ -18377,7 +18377,7 @@
           <p:cNvPr id="27" name="">
             <a:extLst xmlns:a="http://schemas.openxmlformats.org/drawingml/2006/main">
               <a:ext uri="{FF2B5EF4-FFF2-40B4-BE49-F238E27FC236}">
-                <a16:creationId xmlns:a16="http://schemas.microsoft.com/office/drawing/2014/main" id="{2A69CFD4-3A26-4E38-B2C9-595490375E1A}"/>
+                <a16:creationId xmlns:a16="http://schemas.microsoft.com/office/drawing/2014/main" id="{70D57C09-5AE5-453F-A742-5846DDF65C41}"/>
               </a:ext>
             </a:extLst>
           </p:cNvPr>
@@ -18429,7 +18429,7 @@
           <p:cNvPr id="28" name="">
             <a:extLst xmlns:a="http://schemas.openxmlformats.org/drawingml/2006/main">
               <a:ext uri="{FF2B5EF4-FFF2-40B4-BE49-F238E27FC236}">
-                <a16:creationId xmlns:a16="http://schemas.microsoft.com/office/drawing/2014/main" id="{F936206D-B5F6-4EFB-A0EF-C07417D96FC9}"/>
+                <a16:creationId xmlns:a16="http://schemas.microsoft.com/office/drawing/2014/main" id="{DCAE2CE1-5478-4CD3-AF45-E81D85880428}"/>
               </a:ext>
             </a:extLst>
           </p:cNvPr>
@@ -18481,7 +18481,7 @@
           <p:cNvPr id="29" name="">
             <a:extLst xmlns:a="http://schemas.openxmlformats.org/drawingml/2006/main">
               <a:ext uri="{FF2B5EF4-FFF2-40B4-BE49-F238E27FC236}">
-                <a16:creationId xmlns:a16="http://schemas.microsoft.com/office/drawing/2014/main" id="{5EB3EEFB-A186-4A40-BA89-A5C8B89D96DF}"/>
+                <a16:creationId xmlns:a16="http://schemas.microsoft.com/office/drawing/2014/main" id="{B5527F73-BB59-400E-BC93-866624ABB5D3}"/>
               </a:ext>
             </a:extLst>
           </p:cNvPr>
@@ -18533,7 +18533,7 @@
           <p:cNvPr id="30" name="">
             <a:extLst xmlns:a="http://schemas.openxmlformats.org/drawingml/2006/main">
               <a:ext uri="{FF2B5EF4-FFF2-40B4-BE49-F238E27FC236}">
-                <a16:creationId xmlns:a16="http://schemas.microsoft.com/office/drawing/2014/main" id="{3AA0C5ED-772E-4A98-9D4C-63187A3307C1}"/>
+                <a16:creationId xmlns:a16="http://schemas.microsoft.com/office/drawing/2014/main" id="{35D0F7FC-1AA6-4FDE-8AE3-EB91AC7710A0}"/>
               </a:ext>
             </a:extLst>
           </p:cNvPr>
@@ -18585,7 +18585,7 @@
           <p:cNvPr id="31" name="">
             <a:extLst xmlns:a="http://schemas.openxmlformats.org/drawingml/2006/main">
               <a:ext uri="{FF2B5EF4-FFF2-40B4-BE49-F238E27FC236}">
-                <a16:creationId xmlns:a16="http://schemas.microsoft.com/office/drawing/2014/main" id="{C92694E7-D1F5-427E-B398-FE916DF41BEC}"/>
+                <a16:creationId xmlns:a16="http://schemas.microsoft.com/office/drawing/2014/main" id="{5F5FBB6D-06E1-4974-9A6D-754F3D1DFEAF}"/>
               </a:ext>
             </a:extLst>
           </p:cNvPr>
@@ -18616,7 +18616,7 @@
           <p:cNvPr id="32" name="">
             <a:extLst xmlns:a="http://schemas.openxmlformats.org/drawingml/2006/main">
               <a:ext uri="{FF2B5EF4-FFF2-40B4-BE49-F238E27FC236}">
-                <a16:creationId xmlns:a16="http://schemas.microsoft.com/office/drawing/2014/main" id="{FFE78BE1-3CEC-490C-B083-F50474C08BB5}"/>
+                <a16:creationId xmlns:a16="http://schemas.microsoft.com/office/drawing/2014/main" id="{417F1124-552F-41B4-B5A6-A7A4410E8260}"/>
               </a:ext>
             </a:extLst>
           </p:cNvPr>
@@ -18647,7 +18647,7 @@
           <p:cNvPr id="33" name="">
             <a:extLst xmlns:a="http://schemas.openxmlformats.org/drawingml/2006/main">
               <a:ext uri="{FF2B5EF4-FFF2-40B4-BE49-F238E27FC236}">
-                <a16:creationId xmlns:a16="http://schemas.microsoft.com/office/drawing/2014/main" id="{E9FF4C83-AB89-4527-939C-1C67A782618E}"/>
+                <a16:creationId xmlns:a16="http://schemas.microsoft.com/office/drawing/2014/main" id="{3B7A4A5A-0227-43E1-BE9E-AC1EA082398C}"/>
               </a:ext>
             </a:extLst>
           </p:cNvPr>
@@ -18699,7 +18699,7 @@
           <p:cNvPr id="34" name="">
             <a:extLst xmlns:a="http://schemas.openxmlformats.org/drawingml/2006/main">
               <a:ext uri="{FF2B5EF4-FFF2-40B4-BE49-F238E27FC236}">
-                <a16:creationId xmlns:a16="http://schemas.microsoft.com/office/drawing/2014/main" id="{3C5A5C33-1DFA-47AF-B268-4B9012362FBE}"/>
+                <a16:creationId xmlns:a16="http://schemas.microsoft.com/office/drawing/2014/main" id="{85F48BD5-D744-4028-8EC4-0394A7A19DBE}"/>
               </a:ext>
             </a:extLst>
           </p:cNvPr>
@@ -18751,7 +18751,7 @@
           <p:cNvPr id="35" name="">
             <a:extLst xmlns:a="http://schemas.openxmlformats.org/drawingml/2006/main">
               <a:ext uri="{FF2B5EF4-FFF2-40B4-BE49-F238E27FC236}">
-                <a16:creationId xmlns:a16="http://schemas.microsoft.com/office/drawing/2014/main" id="{4139178D-B520-4D8D-849D-5F73BDE2FC63}"/>
+                <a16:creationId xmlns:a16="http://schemas.microsoft.com/office/drawing/2014/main" id="{9101965D-F746-41C9-90BB-AC2C675E80CF}"/>
               </a:ext>
             </a:extLst>
           </p:cNvPr>
@@ -18803,7 +18803,7 @@
           <p:cNvPr id="36" name="">
             <a:extLst xmlns:a="http://schemas.openxmlformats.org/drawingml/2006/main">
               <a:ext uri="{FF2B5EF4-FFF2-40B4-BE49-F238E27FC236}">
-                <a16:creationId xmlns:a16="http://schemas.microsoft.com/office/drawing/2014/main" id="{395FF7D8-7AC6-47D4-A89A-22870ECD898C}"/>
+                <a16:creationId xmlns:a16="http://schemas.microsoft.com/office/drawing/2014/main" id="{0AE9FA6F-2910-41EC-84BE-6C346AFD6D2C}"/>
               </a:ext>
             </a:extLst>
           </p:cNvPr>
@@ -18855,7 +18855,7 @@
           <p:cNvPr id="37" name="">
             <a:extLst xmlns:a="http://schemas.openxmlformats.org/drawingml/2006/main">
               <a:ext uri="{FF2B5EF4-FFF2-40B4-BE49-F238E27FC236}">
-                <a16:creationId xmlns:a16="http://schemas.microsoft.com/office/drawing/2014/main" id="{38B30148-1C21-4D02-A184-6A24384760EB}"/>
+                <a16:creationId xmlns:a16="http://schemas.microsoft.com/office/drawing/2014/main" id="{13C6E5B1-D49F-4F19-8B4C-554EBC0EF77F}"/>
               </a:ext>
             </a:extLst>
           </p:cNvPr>
@@ -18907,7 +18907,7 @@
           <p:cNvPr id="38" name="">
             <a:extLst xmlns:a="http://schemas.openxmlformats.org/drawingml/2006/main">
               <a:ext uri="{FF2B5EF4-FFF2-40B4-BE49-F238E27FC236}">
-                <a16:creationId xmlns:a16="http://schemas.microsoft.com/office/drawing/2014/main" id="{C48D4E93-E24F-47F2-A336-7C1752B172B3}"/>
+                <a16:creationId xmlns:a16="http://schemas.microsoft.com/office/drawing/2014/main" id="{EA55D28D-47E2-4975-ADF8-72141B69FEDD}"/>
               </a:ext>
             </a:extLst>
           </p:cNvPr>
@@ -18938,7 +18938,7 @@
           <p:cNvPr id="39" name="">
             <a:extLst xmlns:a="http://schemas.openxmlformats.org/drawingml/2006/main">
               <a:ext uri="{FF2B5EF4-FFF2-40B4-BE49-F238E27FC236}">
-                <a16:creationId xmlns:a16="http://schemas.microsoft.com/office/drawing/2014/main" id="{50ED3831-0B9D-4203-84E6-F96E093007F2}"/>
+                <a16:creationId xmlns:a16="http://schemas.microsoft.com/office/drawing/2014/main" id="{D3F40A3B-3E15-493C-A512-DC931CE1D32B}"/>
               </a:ext>
             </a:extLst>
           </p:cNvPr>
@@ -18990,7 +18990,7 @@
           <p:cNvPr id="40" name="">
             <a:extLst xmlns:a="http://schemas.openxmlformats.org/drawingml/2006/main">
               <a:ext uri="{FF2B5EF4-FFF2-40B4-BE49-F238E27FC236}">
-                <a16:creationId xmlns:a16="http://schemas.microsoft.com/office/drawing/2014/main" id="{0DE062D2-795F-4791-AB75-97E8990C8952}"/>
+                <a16:creationId xmlns:a16="http://schemas.microsoft.com/office/drawing/2014/main" id="{0AE8C950-6204-44B4-A4C9-FB83E4A3349A}"/>
               </a:ext>
             </a:extLst>
           </p:cNvPr>
@@ -19042,7 +19042,7 @@
           <p:cNvPr id="41" name="">
             <a:extLst xmlns:a="http://schemas.openxmlformats.org/drawingml/2006/main">
               <a:ext uri="{FF2B5EF4-FFF2-40B4-BE49-F238E27FC236}">
-                <a16:creationId xmlns:a16="http://schemas.microsoft.com/office/drawing/2014/main" id="{C24E6326-720B-42D7-B57C-58EEC90B571E}"/>
+                <a16:creationId xmlns:a16="http://schemas.microsoft.com/office/drawing/2014/main" id="{92EF5DF3-9E9A-4B0A-B4A3-34C5478D6D13}"/>
               </a:ext>
             </a:extLst>
           </p:cNvPr>
@@ -19094,7 +19094,7 @@
           <p:cNvPr id="42" name="">
             <a:extLst xmlns:a="http://schemas.openxmlformats.org/drawingml/2006/main">
               <a:ext uri="{FF2B5EF4-FFF2-40B4-BE49-F238E27FC236}">
-                <a16:creationId xmlns:a16="http://schemas.microsoft.com/office/drawing/2014/main" id="{DBF865F0-8816-4E87-B4EC-41A8A2ED7557}"/>
+                <a16:creationId xmlns:a16="http://schemas.microsoft.com/office/drawing/2014/main" id="{BD4EC455-A802-4C96-B589-A0E1430D8AC9}"/>
               </a:ext>
             </a:extLst>
           </p:cNvPr>
@@ -19146,7 +19146,7 @@
           <p:cNvPr id="43" name="">
             <a:extLst xmlns:a="http://schemas.openxmlformats.org/drawingml/2006/main">
               <a:ext uri="{FF2B5EF4-FFF2-40B4-BE49-F238E27FC236}">
-                <a16:creationId xmlns:a16="http://schemas.microsoft.com/office/drawing/2014/main" id="{9A038B0B-6011-4F6D-AEEB-443A8F3923EB}"/>
+                <a16:creationId xmlns:a16="http://schemas.microsoft.com/office/drawing/2014/main" id="{C4BBC47C-0358-4F47-95F3-09AB276423CA}"/>
               </a:ext>
             </a:extLst>
           </p:cNvPr>
@@ -19198,7 +19198,7 @@
           <p:cNvPr id="44" name="">
             <a:extLst xmlns:a="http://schemas.openxmlformats.org/drawingml/2006/main">
               <a:ext uri="{FF2B5EF4-FFF2-40B4-BE49-F238E27FC236}">
-                <a16:creationId xmlns:a16="http://schemas.microsoft.com/office/drawing/2014/main" id="{ED11B863-C8B3-4DB5-8A88-7176D8A4B6C5}"/>
+                <a16:creationId xmlns:a16="http://schemas.microsoft.com/office/drawing/2014/main" id="{199C5FEE-D63B-4CA0-B497-985C2334AB0F}"/>
               </a:ext>
             </a:extLst>
           </p:cNvPr>
@@ -19229,7 +19229,7 @@
           <p:cNvPr id="45" name="">
             <a:extLst xmlns:a="http://schemas.openxmlformats.org/drawingml/2006/main">
               <a:ext uri="{FF2B5EF4-FFF2-40B4-BE49-F238E27FC236}">
-                <a16:creationId xmlns:a16="http://schemas.microsoft.com/office/drawing/2014/main" id="{21E24075-4695-4D1E-9932-481DDC5F31C1}"/>
+                <a16:creationId xmlns:a16="http://schemas.microsoft.com/office/drawing/2014/main" id="{C3F5A1AB-50D4-4315-B4B8-33E596ACE83E}"/>
               </a:ext>
             </a:extLst>
           </p:cNvPr>
@@ -19260,7 +19260,7 @@
           <p:cNvPr id="46" name="">
             <a:extLst xmlns:a="http://schemas.openxmlformats.org/drawingml/2006/main">
               <a:ext uri="{FF2B5EF4-FFF2-40B4-BE49-F238E27FC236}">
-                <a16:creationId xmlns:a16="http://schemas.microsoft.com/office/drawing/2014/main" id="{DF92A913-0326-4F9E-8A44-3EFEAF8CB3C8}"/>
+                <a16:creationId xmlns:a16="http://schemas.microsoft.com/office/drawing/2014/main" id="{211EE2B0-07BC-487E-B0B4-917E2D080B52}"/>
               </a:ext>
             </a:extLst>
           </p:cNvPr>
@@ -19312,7 +19312,7 @@
           <p:cNvPr id="47" name="">
             <a:extLst xmlns:a="http://schemas.openxmlformats.org/drawingml/2006/main">
               <a:ext uri="{FF2B5EF4-FFF2-40B4-BE49-F238E27FC236}">
-                <a16:creationId xmlns:a16="http://schemas.microsoft.com/office/drawing/2014/main" id="{64CA01CE-1CF1-4DA5-A868-2C462D6FDCAB}"/>
+                <a16:creationId xmlns:a16="http://schemas.microsoft.com/office/drawing/2014/main" id="{98F65751-B474-4C4A-9009-B051C4C6D033}"/>
               </a:ext>
             </a:extLst>
           </p:cNvPr>
@@ -19364,7 +19364,7 @@
           <p:cNvPr id="48" name="">
             <a:extLst xmlns:a="http://schemas.openxmlformats.org/drawingml/2006/main">
               <a:ext uri="{FF2B5EF4-FFF2-40B4-BE49-F238E27FC236}">
-                <a16:creationId xmlns:a16="http://schemas.microsoft.com/office/drawing/2014/main" id="{667C6E25-47C0-47AA-A4A6-4CC1EE2B2487}"/>
+                <a16:creationId xmlns:a16="http://schemas.microsoft.com/office/drawing/2014/main" id="{E9423082-AB00-4C3A-85E0-DAADE92EED0B}"/>
               </a:ext>
             </a:extLst>
           </p:cNvPr>
@@ -19416,7 +19416,7 @@
           <p:cNvPr id="49" name="">
             <a:extLst xmlns:a="http://schemas.openxmlformats.org/drawingml/2006/main">
               <a:ext uri="{FF2B5EF4-FFF2-40B4-BE49-F238E27FC236}">
-                <a16:creationId xmlns:a16="http://schemas.microsoft.com/office/drawing/2014/main" id="{4157F19D-C82A-474F-9009-8515B5969B52}"/>
+                <a16:creationId xmlns:a16="http://schemas.microsoft.com/office/drawing/2014/main" id="{3F856F41-F7F3-4A1C-9C92-D1C809720098}"/>
               </a:ext>
             </a:extLst>
           </p:cNvPr>
@@ -19468,7 +19468,7 @@
           <p:cNvPr id="50" name="">
             <a:extLst xmlns:a="http://schemas.openxmlformats.org/drawingml/2006/main">
               <a:ext uri="{FF2B5EF4-FFF2-40B4-BE49-F238E27FC236}">
-                <a16:creationId xmlns:a16="http://schemas.microsoft.com/office/drawing/2014/main" id="{2ABED925-09D9-4865-B128-3285168F24CC}"/>
+                <a16:creationId xmlns:a16="http://schemas.microsoft.com/office/drawing/2014/main" id="{6E8990CC-EEE3-4021-B159-8348C3DF00C3}"/>
               </a:ext>
             </a:extLst>
           </p:cNvPr>
@@ -19520,7 +19520,7 @@
           <p:cNvPr id="51" name="">
             <a:extLst xmlns:a="http://schemas.openxmlformats.org/drawingml/2006/main">
               <a:ext uri="{FF2B5EF4-FFF2-40B4-BE49-F238E27FC236}">
-                <a16:creationId xmlns:a16="http://schemas.microsoft.com/office/drawing/2014/main" id="{A2E4E445-1D55-4307-9146-B5BCB4C31015}"/>
+                <a16:creationId xmlns:a16="http://schemas.microsoft.com/office/drawing/2014/main" id="{5F3F1E90-02B0-4DCE-AA05-1DE2EA481BDC}"/>
               </a:ext>
             </a:extLst>
           </p:cNvPr>
@@ -19551,7 +19551,7 @@
           <p:cNvPr id="52" name="">
             <a:extLst xmlns:a="http://schemas.openxmlformats.org/drawingml/2006/main">
               <a:ext uri="{FF2B5EF4-FFF2-40B4-BE49-F238E27FC236}">
-                <a16:creationId xmlns:a16="http://schemas.microsoft.com/office/drawing/2014/main" id="{009F1639-0DE6-4BF0-AF8A-9383E72E5FBC}"/>
+                <a16:creationId xmlns:a16="http://schemas.microsoft.com/office/drawing/2014/main" id="{016E2CA1-50BD-429B-8977-266C00869D59}"/>
               </a:ext>
             </a:extLst>
           </p:cNvPr>
@@ -19603,7 +19603,7 @@
           <p:cNvPr id="53" name="">
             <a:extLst xmlns:a="http://schemas.openxmlformats.org/drawingml/2006/main">
               <a:ext uri="{FF2B5EF4-FFF2-40B4-BE49-F238E27FC236}">
-                <a16:creationId xmlns:a16="http://schemas.microsoft.com/office/drawing/2014/main" id="{141D3B01-CF89-44A8-B318-3D6AED221AB2}"/>
+                <a16:creationId xmlns:a16="http://schemas.microsoft.com/office/drawing/2014/main" id="{5A90956E-6F95-47E5-ADAB-D8F739A11AFF}"/>
               </a:ext>
             </a:extLst>
           </p:cNvPr>
@@ -19655,7 +19655,7 @@
           <p:cNvPr id="54" name="">
             <a:extLst xmlns:a="http://schemas.openxmlformats.org/drawingml/2006/main">
               <a:ext uri="{FF2B5EF4-FFF2-40B4-BE49-F238E27FC236}">
-                <a16:creationId xmlns:a16="http://schemas.microsoft.com/office/drawing/2014/main" id="{2416458D-0C46-4B3F-8CDD-EF9E5B4ABF8D}"/>
+                <a16:creationId xmlns:a16="http://schemas.microsoft.com/office/drawing/2014/main" id="{ABC050C1-906E-456E-9C07-DC146E0532E6}"/>
               </a:ext>
             </a:extLst>
           </p:cNvPr>
@@ -19707,7 +19707,7 @@
           <p:cNvPr id="55" name="">
             <a:extLst xmlns:a="http://schemas.openxmlformats.org/drawingml/2006/main">
               <a:ext uri="{FF2B5EF4-FFF2-40B4-BE49-F238E27FC236}">
-                <a16:creationId xmlns:a16="http://schemas.microsoft.com/office/drawing/2014/main" id="{99F85BFD-B3B7-433A-92D4-CD440ED93E25}"/>
+                <a16:creationId xmlns:a16="http://schemas.microsoft.com/office/drawing/2014/main" id="{C6F68A88-15E8-4970-92B8-4F3A10143392}"/>
               </a:ext>
             </a:extLst>
           </p:cNvPr>
@@ -19759,7 +19759,7 @@
           <p:cNvPr id="56" name="">
             <a:extLst xmlns:a="http://schemas.openxmlformats.org/drawingml/2006/main">
               <a:ext uri="{FF2B5EF4-FFF2-40B4-BE49-F238E27FC236}">
-                <a16:creationId xmlns:a16="http://schemas.microsoft.com/office/drawing/2014/main" id="{BB5F4FD4-5E4E-4374-88B9-8E419A6573F3}"/>
+                <a16:creationId xmlns:a16="http://schemas.microsoft.com/office/drawing/2014/main" id="{4941BE9B-2D86-4A95-9C07-87C83DFF226C}"/>
               </a:ext>
             </a:extLst>
           </p:cNvPr>
@@ -19811,7 +19811,7 @@
           <p:cNvPr id="57" name="">
             <a:extLst xmlns:a="http://schemas.openxmlformats.org/drawingml/2006/main">
               <a:ext uri="{FF2B5EF4-FFF2-40B4-BE49-F238E27FC236}">
-                <a16:creationId xmlns:a16="http://schemas.microsoft.com/office/drawing/2014/main" id="{44F8EB52-37BF-48E4-B2B3-D0019EC40F6B}"/>
+                <a16:creationId xmlns:a16="http://schemas.microsoft.com/office/drawing/2014/main" id="{5F53C23B-1D32-474F-916B-B743AE18CFF7}"/>
               </a:ext>
             </a:extLst>
           </p:cNvPr>
@@ -19842,7 +19842,7 @@
           <p:cNvPr id="58" name="">
             <a:extLst xmlns:a="http://schemas.openxmlformats.org/drawingml/2006/main">
               <a:ext uri="{FF2B5EF4-FFF2-40B4-BE49-F238E27FC236}">
-                <a16:creationId xmlns:a16="http://schemas.microsoft.com/office/drawing/2014/main" id="{BFF28B3D-784F-45AA-9EE8-8A0A2F2D6367}"/>
+                <a16:creationId xmlns:a16="http://schemas.microsoft.com/office/drawing/2014/main" id="{160E1913-59D5-4AA0-8CB6-65F8EE1D2F22}"/>
               </a:ext>
             </a:extLst>
           </p:cNvPr>
@@ -19873,7 +19873,7 @@
           <p:cNvPr id="59" name="">
             <a:extLst xmlns:a="http://schemas.openxmlformats.org/drawingml/2006/main">
               <a:ext uri="{FF2B5EF4-FFF2-40B4-BE49-F238E27FC236}">
-                <a16:creationId xmlns:a16="http://schemas.microsoft.com/office/drawing/2014/main" id="{71A8F55F-CD45-40D6-B221-3E1E9CC12F14}"/>
+                <a16:creationId xmlns:a16="http://schemas.microsoft.com/office/drawing/2014/main" id="{F283EB65-7DBA-4DD4-9519-0FF16FCCEDCA}"/>
               </a:ext>
             </a:extLst>
           </p:cNvPr>
@@ -19925,7 +19925,7 @@
           <p:cNvPr id="60" name="">
             <a:extLst xmlns:a="http://schemas.openxmlformats.org/drawingml/2006/main">
               <a:ext uri="{FF2B5EF4-FFF2-40B4-BE49-F238E27FC236}">
-                <a16:creationId xmlns:a16="http://schemas.microsoft.com/office/drawing/2014/main" id="{C713729C-70BC-451A-882C-62B20643AC94}"/>
+                <a16:creationId xmlns:a16="http://schemas.microsoft.com/office/drawing/2014/main" id="{995BA564-A86E-4D3A-B571-5B976B5F0342}"/>
               </a:ext>
             </a:extLst>
           </p:cNvPr>
@@ -19977,7 +19977,7 @@
           <p:cNvPr id="61" name="">
             <a:extLst xmlns:a="http://schemas.openxmlformats.org/drawingml/2006/main">
               <a:ext uri="{FF2B5EF4-FFF2-40B4-BE49-F238E27FC236}">
-                <a16:creationId xmlns:a16="http://schemas.microsoft.com/office/drawing/2014/main" id="{0CD35B16-C8D8-4515-A1AB-B8BA7412E192}"/>
+                <a16:creationId xmlns:a16="http://schemas.microsoft.com/office/drawing/2014/main" id="{2993A125-7EEE-4E9F-B57D-E6634E3B8F7D}"/>
               </a:ext>
             </a:extLst>
           </p:cNvPr>
@@ -20029,7 +20029,7 @@
           <p:cNvPr id="62" name="">
             <a:extLst xmlns:a="http://schemas.openxmlformats.org/drawingml/2006/main">
               <a:ext uri="{FF2B5EF4-FFF2-40B4-BE49-F238E27FC236}">
-                <a16:creationId xmlns:a16="http://schemas.microsoft.com/office/drawing/2014/main" id="{01C21526-3389-4A41-8336-E00B68BC5231}"/>
+                <a16:creationId xmlns:a16="http://schemas.microsoft.com/office/drawing/2014/main" id="{9AB8495F-8AE5-4CB3-9B41-32811531D1AE}"/>
               </a:ext>
             </a:extLst>
           </p:cNvPr>
@@ -20081,7 +20081,7 @@
           <p:cNvPr id="63" name="">
             <a:extLst xmlns:a="http://schemas.openxmlformats.org/drawingml/2006/main">
               <a:ext uri="{FF2B5EF4-FFF2-40B4-BE49-F238E27FC236}">
-                <a16:creationId xmlns:a16="http://schemas.microsoft.com/office/drawing/2014/main" id="{D0D3A3E4-EBE2-4064-8901-07F4C779F593}"/>
+                <a16:creationId xmlns:a16="http://schemas.microsoft.com/office/drawing/2014/main" id="{DC9EA29F-3B2D-4C71-BA53-F2EDF221B78C}"/>
               </a:ext>
             </a:extLst>
           </p:cNvPr>
@@ -20133,7 +20133,7 @@
           <p:cNvPr id="64" name="">
             <a:extLst xmlns:a="http://schemas.openxmlformats.org/drawingml/2006/main">
               <a:ext uri="{FF2B5EF4-FFF2-40B4-BE49-F238E27FC236}">
-                <a16:creationId xmlns:a16="http://schemas.microsoft.com/office/drawing/2014/main" id="{B71F9E61-05D0-41CE-A8D6-D40A691EF3A7}"/>
+                <a16:creationId xmlns:a16="http://schemas.microsoft.com/office/drawing/2014/main" id="{F54B8814-D31C-4731-91AA-37EFDA356D13}"/>
               </a:ext>
             </a:extLst>
           </p:cNvPr>
@@ -20164,7 +20164,7 @@
           <p:cNvPr id="65" name="">
             <a:extLst xmlns:a="http://schemas.openxmlformats.org/drawingml/2006/main">
               <a:ext uri="{FF2B5EF4-FFF2-40B4-BE49-F238E27FC236}">
-                <a16:creationId xmlns:a16="http://schemas.microsoft.com/office/drawing/2014/main" id="{362B0B69-7272-4274-9740-BDAAF7AF0849}"/>
+                <a16:creationId xmlns:a16="http://schemas.microsoft.com/office/drawing/2014/main" id="{C89C9F5B-D3C4-493F-852A-98F3C61E4EBF}"/>
               </a:ext>
             </a:extLst>
           </p:cNvPr>
@@ -20216,7 +20216,7 @@
           <p:cNvPr id="66" name="">
             <a:extLst xmlns:a="http://schemas.openxmlformats.org/drawingml/2006/main">
               <a:ext uri="{FF2B5EF4-FFF2-40B4-BE49-F238E27FC236}">
-                <a16:creationId xmlns:a16="http://schemas.microsoft.com/office/drawing/2014/main" id="{FEC1C9F1-ADAF-4E78-91D7-E0C01CA48FB1}"/>
+                <a16:creationId xmlns:a16="http://schemas.microsoft.com/office/drawing/2014/main" id="{C3062C63-C374-437C-B3BB-FFCB6A0DE138}"/>
               </a:ext>
             </a:extLst>
           </p:cNvPr>
@@ -20268,7 +20268,7 @@
           <p:cNvPr id="67" name="">
             <a:extLst xmlns:a="http://schemas.openxmlformats.org/drawingml/2006/main">
               <a:ext uri="{FF2B5EF4-FFF2-40B4-BE49-F238E27FC236}">
-                <a16:creationId xmlns:a16="http://schemas.microsoft.com/office/drawing/2014/main" id="{3D25BFAB-444F-4B49-A5A7-518168CC4FE4}"/>
+                <a16:creationId xmlns:a16="http://schemas.microsoft.com/office/drawing/2014/main" id="{BDA99E81-1693-42EF-8615-5BEABEE0AFD9}"/>
               </a:ext>
             </a:extLst>
           </p:cNvPr>
@@ -20320,7 +20320,7 @@
           <p:cNvPr id="68" name="">
             <a:extLst xmlns:a="http://schemas.openxmlformats.org/drawingml/2006/main">
               <a:ext uri="{FF2B5EF4-FFF2-40B4-BE49-F238E27FC236}">
-                <a16:creationId xmlns:a16="http://schemas.microsoft.com/office/drawing/2014/main" id="{8D0F95B2-673C-4AA2-BE5F-6D07F0E55A8D}"/>
+                <a16:creationId xmlns:a16="http://schemas.microsoft.com/office/drawing/2014/main" id="{D21EA23D-990D-46DE-ADAB-7FF23C51EFCB}"/>
               </a:ext>
             </a:extLst>
           </p:cNvPr>
@@ -20372,7 +20372,7 @@
           <p:cNvPr id="69" name="">
             <a:extLst xmlns:a="http://schemas.openxmlformats.org/drawingml/2006/main">
               <a:ext uri="{FF2B5EF4-FFF2-40B4-BE49-F238E27FC236}">
-                <a16:creationId xmlns:a16="http://schemas.microsoft.com/office/drawing/2014/main" id="{FB7904AE-0125-4F10-9871-75646689ACB4}"/>
+                <a16:creationId xmlns:a16="http://schemas.microsoft.com/office/drawing/2014/main" id="{91725EC0-0D4A-436C-BCA5-09B9A505ACF9}"/>
               </a:ext>
             </a:extLst>
           </p:cNvPr>
@@ -20424,7 +20424,7 @@
           <p:cNvPr id="70" name="">
             <a:extLst xmlns:a="http://schemas.openxmlformats.org/drawingml/2006/main">
               <a:ext uri="{FF2B5EF4-FFF2-40B4-BE49-F238E27FC236}">
-                <a16:creationId xmlns:a16="http://schemas.microsoft.com/office/drawing/2014/main" id="{227A3DA2-E19B-47A0-8A4C-61C356947736}"/>
+                <a16:creationId xmlns:a16="http://schemas.microsoft.com/office/drawing/2014/main" id="{482247E7-30ED-4087-A6AA-3241CE8D013F}"/>
               </a:ext>
             </a:extLst>
           </p:cNvPr>
@@ -20455,7 +20455,7 @@
           <p:cNvPr id="71" name="">
             <a:extLst xmlns:a="http://schemas.openxmlformats.org/drawingml/2006/main">
               <a:ext uri="{FF2B5EF4-FFF2-40B4-BE49-F238E27FC236}">
-                <a16:creationId xmlns:a16="http://schemas.microsoft.com/office/drawing/2014/main" id="{E599AE67-2151-4263-85A4-ECC24A6A01C6}"/>
+                <a16:creationId xmlns:a16="http://schemas.microsoft.com/office/drawing/2014/main" id="{AC6CA293-3F73-4C04-9D15-2F50B7C8151C}"/>
               </a:ext>
             </a:extLst>
           </p:cNvPr>
@@ -20486,7 +20486,7 @@
           <p:cNvPr id="72" name="">
             <a:extLst xmlns:a="http://schemas.openxmlformats.org/drawingml/2006/main">
               <a:ext uri="{FF2B5EF4-FFF2-40B4-BE49-F238E27FC236}">
-                <a16:creationId xmlns:a16="http://schemas.microsoft.com/office/drawing/2014/main" id="{31FC449E-A48C-442F-AF73-1475A391A30B}"/>
+                <a16:creationId xmlns:a16="http://schemas.microsoft.com/office/drawing/2014/main" id="{33B00FC0-C3A0-46CE-88C8-687C6AB490F0}"/>
               </a:ext>
             </a:extLst>
           </p:cNvPr>
@@ -20538,7 +20538,7 @@
           <p:cNvPr id="73" name="">
             <a:extLst xmlns:a="http://schemas.openxmlformats.org/drawingml/2006/main">
               <a:ext uri="{FF2B5EF4-FFF2-40B4-BE49-F238E27FC236}">
-                <a16:creationId xmlns:a16="http://schemas.microsoft.com/office/drawing/2014/main" id="{D13AEDD9-9F09-4FC0-8135-3DCE09AE697D}"/>
+                <a16:creationId xmlns:a16="http://schemas.microsoft.com/office/drawing/2014/main" id="{520972F7-4FCA-4484-B1D3-7F250EC8BAB1}"/>
               </a:ext>
             </a:extLst>
           </p:cNvPr>
@@ -20590,7 +20590,7 @@
           <p:cNvPr id="74" name="">
             <a:extLst xmlns:a="http://schemas.openxmlformats.org/drawingml/2006/main">
               <a:ext uri="{FF2B5EF4-FFF2-40B4-BE49-F238E27FC236}">
-                <a16:creationId xmlns:a16="http://schemas.microsoft.com/office/drawing/2014/main" id="{5F989B26-422A-4E61-99FB-14769D694780}"/>
+                <a16:creationId xmlns:a16="http://schemas.microsoft.com/office/drawing/2014/main" id="{D73DACCB-7B9B-484C-8732-8452B6D006AE}"/>
               </a:ext>
             </a:extLst>
           </p:cNvPr>
@@ -20642,7 +20642,7 @@
           <p:cNvPr id="75" name="">
             <a:extLst xmlns:a="http://schemas.openxmlformats.org/drawingml/2006/main">
               <a:ext uri="{FF2B5EF4-FFF2-40B4-BE49-F238E27FC236}">
-                <a16:creationId xmlns:a16="http://schemas.microsoft.com/office/drawing/2014/main" id="{AB4F971F-D291-4D29-9FDA-F57FB5282B60}"/>
+                <a16:creationId xmlns:a16="http://schemas.microsoft.com/office/drawing/2014/main" id="{C5615487-B100-4D3B-BBCD-115930CBD2D3}"/>
               </a:ext>
             </a:extLst>
           </p:cNvPr>
@@ -20694,7 +20694,7 @@
           <p:cNvPr id="76" name="">
             <a:extLst xmlns:a="http://schemas.openxmlformats.org/drawingml/2006/main">
               <a:ext uri="{FF2B5EF4-FFF2-40B4-BE49-F238E27FC236}">
-                <a16:creationId xmlns:a16="http://schemas.microsoft.com/office/drawing/2014/main" id="{8CDFC11C-C50A-4708-A9DE-4B99AC28B11B}"/>
+                <a16:creationId xmlns:a16="http://schemas.microsoft.com/office/drawing/2014/main" id="{06D9C364-D63D-4E5B-ADD4-F3D2B6C655A9}"/>
               </a:ext>
             </a:extLst>
           </p:cNvPr>
@@ -20746,7 +20746,7 @@
           <p:cNvPr id="77" name="">
             <a:extLst xmlns:a="http://schemas.openxmlformats.org/drawingml/2006/main">
               <a:ext uri="{FF2B5EF4-FFF2-40B4-BE49-F238E27FC236}">
-                <a16:creationId xmlns:a16="http://schemas.microsoft.com/office/drawing/2014/main" id="{18278440-7B44-4308-9839-4F4431165968}"/>
+                <a16:creationId xmlns:a16="http://schemas.microsoft.com/office/drawing/2014/main" id="{E34BF0A2-169C-469A-B9C3-9DA19E28EEDB}"/>
               </a:ext>
             </a:extLst>
           </p:cNvPr>
@@ -20777,7 +20777,7 @@
           <p:cNvPr id="78" name="">
             <a:extLst xmlns:a="http://schemas.openxmlformats.org/drawingml/2006/main">
               <a:ext uri="{FF2B5EF4-FFF2-40B4-BE49-F238E27FC236}">
-                <a16:creationId xmlns:a16="http://schemas.microsoft.com/office/drawing/2014/main" id="{C9B33924-2691-4479-9629-601070A809DE}"/>
+                <a16:creationId xmlns:a16="http://schemas.microsoft.com/office/drawing/2014/main" id="{AC1E5EBB-41D0-4039-88A7-E067C4A15FF6}"/>
               </a:ext>
             </a:extLst>
           </p:cNvPr>
@@ -20829,7 +20829,7 @@
           <p:cNvPr id="79" name="">
             <a:extLst xmlns:a="http://schemas.openxmlformats.org/drawingml/2006/main">
               <a:ext uri="{FF2B5EF4-FFF2-40B4-BE49-F238E27FC236}">
-                <a16:creationId xmlns:a16="http://schemas.microsoft.com/office/drawing/2014/main" id="{4C165EC0-B745-468F-B4D6-0D626820AF21}"/>
+                <a16:creationId xmlns:a16="http://schemas.microsoft.com/office/drawing/2014/main" id="{49DE4DEB-997E-4F6E-A851-F030984C8A30}"/>
               </a:ext>
             </a:extLst>
           </p:cNvPr>
@@ -20881,7 +20881,7 @@
           <p:cNvPr id="80" name="">
             <a:extLst xmlns:a="http://schemas.openxmlformats.org/drawingml/2006/main">
               <a:ext uri="{FF2B5EF4-FFF2-40B4-BE49-F238E27FC236}">
-                <a16:creationId xmlns:a16="http://schemas.microsoft.com/office/drawing/2014/main" id="{612FA138-FCD1-445A-ADDD-F0EBF756565E}"/>
+                <a16:creationId xmlns:a16="http://schemas.microsoft.com/office/drawing/2014/main" id="{C7E05E46-B4BB-49ED-B488-614AFCF891D0}"/>
               </a:ext>
             </a:extLst>
           </p:cNvPr>
@@ -20933,7 +20933,7 @@
           <p:cNvPr id="81" name="">
             <a:extLst xmlns:a="http://schemas.openxmlformats.org/drawingml/2006/main">
               <a:ext uri="{FF2B5EF4-FFF2-40B4-BE49-F238E27FC236}">
-                <a16:creationId xmlns:a16="http://schemas.microsoft.com/office/drawing/2014/main" id="{525E0485-D0AA-48A6-9121-C48F181BB35A}"/>
+                <a16:creationId xmlns:a16="http://schemas.microsoft.com/office/drawing/2014/main" id="{4D53B133-CDE0-4314-A718-468579FDC945}"/>
               </a:ext>
             </a:extLst>
           </p:cNvPr>
@@ -20985,7 +20985,7 @@
           <p:cNvPr id="82" name="">
             <a:extLst xmlns:a="http://schemas.openxmlformats.org/drawingml/2006/main">
               <a:ext uri="{FF2B5EF4-FFF2-40B4-BE49-F238E27FC236}">
-                <a16:creationId xmlns:a16="http://schemas.microsoft.com/office/drawing/2014/main" id="{6B7CAFB0-01B8-4D6B-A8E2-834121F27E6C}"/>
+                <a16:creationId xmlns:a16="http://schemas.microsoft.com/office/drawing/2014/main" id="{03D79ABF-31A2-4028-8BDD-659FF8246E0D}"/>
               </a:ext>
             </a:extLst>
           </p:cNvPr>
@@ -21037,7 +21037,7 @@
           <p:cNvPr id="83" name="">
             <a:extLst xmlns:a="http://schemas.openxmlformats.org/drawingml/2006/main">
               <a:ext uri="{FF2B5EF4-FFF2-40B4-BE49-F238E27FC236}">
-                <a16:creationId xmlns:a16="http://schemas.microsoft.com/office/drawing/2014/main" id="{BD5A7451-C472-4E87-8AC1-B3349873DC46}"/>
+                <a16:creationId xmlns:a16="http://schemas.microsoft.com/office/drawing/2014/main" id="{36860E9E-D55A-4778-8D11-AED348D5D5B7}"/>
               </a:ext>
             </a:extLst>
           </p:cNvPr>
@@ -21068,7 +21068,7 @@
           <p:cNvPr id="84" name="">
             <a:extLst xmlns:a="http://schemas.openxmlformats.org/drawingml/2006/main">
               <a:ext uri="{FF2B5EF4-FFF2-40B4-BE49-F238E27FC236}">
-                <a16:creationId xmlns:a16="http://schemas.microsoft.com/office/drawing/2014/main" id="{C45C0425-9B48-4754-AEFB-371AA4E27093}"/>
+                <a16:creationId xmlns:a16="http://schemas.microsoft.com/office/drawing/2014/main" id="{9813F55A-D2A7-4BC9-BA9D-86EF7E02A130}"/>
               </a:ext>
             </a:extLst>
           </p:cNvPr>
@@ -21120,7 +21120,7 @@
           <p:cNvPr id="85" name="">
             <a:extLst xmlns:a="http://schemas.openxmlformats.org/drawingml/2006/main">
               <a:ext uri="{FF2B5EF4-FFF2-40B4-BE49-F238E27FC236}">
-                <a16:creationId xmlns:a16="http://schemas.microsoft.com/office/drawing/2014/main" id="{0D665A4C-1F8E-465D-997D-D8238F340F79}"/>
+                <a16:creationId xmlns:a16="http://schemas.microsoft.com/office/drawing/2014/main" id="{6AF3EFC3-D57F-49A2-9F50-D49F125140B4}"/>
               </a:ext>
             </a:extLst>
           </p:cNvPr>
@@ -21172,7 +21172,7 @@
           <p:cNvPr id="86" name="">
             <a:extLst xmlns:a="http://schemas.openxmlformats.org/drawingml/2006/main">
               <a:ext uri="{FF2B5EF4-FFF2-40B4-BE49-F238E27FC236}">
-                <a16:creationId xmlns:a16="http://schemas.microsoft.com/office/drawing/2014/main" id="{D99B8763-F8E5-4F56-A5BC-0C30F547D9D4}"/>
+                <a16:creationId xmlns:a16="http://schemas.microsoft.com/office/drawing/2014/main" id="{1646197C-1553-4010-8786-7F205828608F}"/>
               </a:ext>
             </a:extLst>
           </p:cNvPr>
@@ -21224,7 +21224,7 @@
           <p:cNvPr id="87" name="">
             <a:extLst xmlns:a="http://schemas.openxmlformats.org/drawingml/2006/main">
               <a:ext uri="{FF2B5EF4-FFF2-40B4-BE49-F238E27FC236}">
-                <a16:creationId xmlns:a16="http://schemas.microsoft.com/office/drawing/2014/main" id="{C62EC2C3-11E9-41B0-9E67-DD3AD2808349}"/>
+                <a16:creationId xmlns:a16="http://schemas.microsoft.com/office/drawing/2014/main" id="{AEE8417E-CE25-4D95-8EE7-B9D1F28D9F1D}"/>
               </a:ext>
             </a:extLst>
           </p:cNvPr>
@@ -21276,7 +21276,7 @@
           <p:cNvPr id="88" name="">
             <a:extLst xmlns:a="http://schemas.openxmlformats.org/drawingml/2006/main">
               <a:ext uri="{FF2B5EF4-FFF2-40B4-BE49-F238E27FC236}">
-                <a16:creationId xmlns:a16="http://schemas.microsoft.com/office/drawing/2014/main" id="{504CFE3F-7198-46C4-95B8-3C919BA3D82F}"/>
+                <a16:creationId xmlns:a16="http://schemas.microsoft.com/office/drawing/2014/main" id="{C0851885-0C16-4DCD-93F2-ACF2257014D2}"/>
               </a:ext>
             </a:extLst>
           </p:cNvPr>
@@ -21328,7 +21328,7 @@
           <p:cNvPr id="89" name="">
             <a:extLst xmlns:a="http://schemas.openxmlformats.org/drawingml/2006/main">
               <a:ext uri="{FF2B5EF4-FFF2-40B4-BE49-F238E27FC236}">
-                <a16:creationId xmlns:a16="http://schemas.microsoft.com/office/drawing/2014/main" id="{6903EC7E-699C-4CB8-8161-C6D854E128B0}"/>
+                <a16:creationId xmlns:a16="http://schemas.microsoft.com/office/drawing/2014/main" id="{99C64BF5-EC33-4B01-9F39-29EC82D4AD17}"/>
               </a:ext>
             </a:extLst>
           </p:cNvPr>
@@ -21359,7 +21359,7 @@
           <p:cNvPr id="90" name="">
             <a:extLst xmlns:a="http://schemas.openxmlformats.org/drawingml/2006/main">
               <a:ext uri="{FF2B5EF4-FFF2-40B4-BE49-F238E27FC236}">
-                <a16:creationId xmlns:a16="http://schemas.microsoft.com/office/drawing/2014/main" id="{B1987D67-A271-422B-B9A4-E39B59F2884A}"/>
+                <a16:creationId xmlns:a16="http://schemas.microsoft.com/office/drawing/2014/main" id="{A3570D8D-94E6-487E-9D51-71D02AE07E31}"/>
               </a:ext>
             </a:extLst>
           </p:cNvPr>
@@ -21390,7 +21390,7 @@
           <p:cNvPr id="91" name="">
             <a:extLst xmlns:a="http://schemas.openxmlformats.org/drawingml/2006/main">
               <a:ext uri="{FF2B5EF4-FFF2-40B4-BE49-F238E27FC236}">
-                <a16:creationId xmlns:a16="http://schemas.microsoft.com/office/drawing/2014/main" id="{586602E7-C9D5-4E52-9D99-A42167F97601}"/>
+                <a16:creationId xmlns:a16="http://schemas.microsoft.com/office/drawing/2014/main" id="{08F5AEE8-3774-40D5-973E-DFFDEACFF12D}"/>
               </a:ext>
             </a:extLst>
           </p:cNvPr>
@@ -21442,7 +21442,7 @@
           <p:cNvPr id="92" name="">
             <a:extLst xmlns:a="http://schemas.openxmlformats.org/drawingml/2006/main">
               <a:ext uri="{FF2B5EF4-FFF2-40B4-BE49-F238E27FC236}">
-                <a16:creationId xmlns:a16="http://schemas.microsoft.com/office/drawing/2014/main" id="{4FBE06C7-35A9-44A6-AA4B-2794E5A7D8B2}"/>
+                <a16:creationId xmlns:a16="http://schemas.microsoft.com/office/drawing/2014/main" id="{08E12772-83CA-460F-BF84-95A713272D5F}"/>
               </a:ext>
             </a:extLst>
           </p:cNvPr>
@@ -21494,7 +21494,7 @@
           <p:cNvPr id="93" name="">
             <a:extLst xmlns:a="http://schemas.openxmlformats.org/drawingml/2006/main">
               <a:ext uri="{FF2B5EF4-FFF2-40B4-BE49-F238E27FC236}">
-                <a16:creationId xmlns:a16="http://schemas.microsoft.com/office/drawing/2014/main" id="{D064A7A2-878A-430F-B76C-E5E13195E0A0}"/>
+                <a16:creationId xmlns:a16="http://schemas.microsoft.com/office/drawing/2014/main" id="{D32E66E7-9199-4746-BF67-9757D8EB3AF3}"/>
               </a:ext>
             </a:extLst>
           </p:cNvPr>
@@ -21546,7 +21546,7 @@
           <p:cNvPr id="94" name="">
             <a:extLst xmlns:a="http://schemas.openxmlformats.org/drawingml/2006/main">
               <a:ext uri="{FF2B5EF4-FFF2-40B4-BE49-F238E27FC236}">
-                <a16:creationId xmlns:a16="http://schemas.microsoft.com/office/drawing/2014/main" id="{2990A02B-8638-4D2A-8010-DAE1A70AAEDA}"/>
+                <a16:creationId xmlns:a16="http://schemas.microsoft.com/office/drawing/2014/main" id="{A6293732-DA19-4B55-B5BC-570A10631E98}"/>
               </a:ext>
             </a:extLst>
           </p:cNvPr>
@@ -21598,7 +21598,7 @@
           <p:cNvPr id="95" name="">
             <a:extLst xmlns:a="http://schemas.openxmlformats.org/drawingml/2006/main">
               <a:ext uri="{FF2B5EF4-FFF2-40B4-BE49-F238E27FC236}">
-                <a16:creationId xmlns:a16="http://schemas.microsoft.com/office/drawing/2014/main" id="{C359301B-5238-4AAA-9920-05A324CB7620}"/>
+                <a16:creationId xmlns:a16="http://schemas.microsoft.com/office/drawing/2014/main" id="{06B62D2E-64BD-468A-8842-71C8D98033D3}"/>
               </a:ext>
             </a:extLst>
           </p:cNvPr>
@@ -21648,7 +21648,7 @@
     </p:spTree>
     <p:extLst>
       <p:ext uri="{BB962C8B-B14F-4D97-AF65-F5344CB8AC3E}">
-        <p14:creationId xmlns:p14="http://schemas.microsoft.com/office/powerpoint/2010/main" val="695072085"/>
+        <p14:creationId xmlns:p14="http://schemas.microsoft.com/office/powerpoint/2010/main" val="2034246130"/>
       </p:ext>
     </p:extLst>
   </p:cSld>
@@ -21679,7 +21679,7 @@
           <p:cNvPr id="135" name="">
             <a:extLst xmlns:a="http://schemas.openxmlformats.org/drawingml/2006/main">
               <a:ext uri="{FF2B5EF4-FFF2-40B4-BE49-F238E27FC236}">
-                <a16:creationId xmlns:a16="http://schemas.microsoft.com/office/drawing/2014/main" id="{8CA3768D-9863-48B8-9D4C-D921DA4F21F6}"/>
+                <a16:creationId xmlns:a16="http://schemas.microsoft.com/office/drawing/2014/main" id="{A0A02738-9300-4044-A55A-BBB469B8C42A}"/>
               </a:ext>
             </a:extLst>
           </p:cNvPr>
@@ -21712,7 +21712,7 @@
           <p:cNvPr id="2" name="">
             <a:extLst xmlns:a="http://schemas.openxmlformats.org/drawingml/2006/main">
               <a:ext uri="{FF2B5EF4-FFF2-40B4-BE49-F238E27FC236}">
-                <a16:creationId xmlns:a16="http://schemas.microsoft.com/office/drawing/2014/main" id="{6BCA0559-6E69-4FDB-9FC1-CAE67D5E594F}"/>
+                <a16:creationId xmlns:a16="http://schemas.microsoft.com/office/drawing/2014/main" id="{A5E4BC60-A4BF-4551-8B74-7DC57F1223CC}"/>
               </a:ext>
             </a:extLst>
           </p:cNvPr>
@@ -21743,7 +21743,7 @@
           <p:cNvPr id="3" name="">
             <a:extLst xmlns:a="http://schemas.openxmlformats.org/drawingml/2006/main">
               <a:ext uri="{FF2B5EF4-FFF2-40B4-BE49-F238E27FC236}">
-                <a16:creationId xmlns:a16="http://schemas.microsoft.com/office/drawing/2014/main" id="{739B1E22-1C3E-40C4-AD7E-7DE49EE0F2BA}"/>
+                <a16:creationId xmlns:a16="http://schemas.microsoft.com/office/drawing/2014/main" id="{49709DE9-3147-465D-94F9-4E716C3AB8E7}"/>
               </a:ext>
             </a:extLst>
           </p:cNvPr>
@@ -21795,7 +21795,7 @@
           <p:cNvPr id="4" name="">
             <a:extLst xmlns:a="http://schemas.openxmlformats.org/drawingml/2006/main">
               <a:ext uri="{FF2B5EF4-FFF2-40B4-BE49-F238E27FC236}">
-                <a16:creationId xmlns:a16="http://schemas.microsoft.com/office/drawing/2014/main" id="{8FD64F79-DC44-4AF6-A7E1-D393FD6D8CE7}"/>
+                <a16:creationId xmlns:a16="http://schemas.microsoft.com/office/drawing/2014/main" id="{417E61E0-3E33-47C7-B173-EA8C2C295DD5}"/>
               </a:ext>
             </a:extLst>
           </p:cNvPr>
@@ -21847,7 +21847,7 @@
           <p:cNvPr id="5" name="">
             <a:extLst xmlns:a="http://schemas.openxmlformats.org/drawingml/2006/main">
               <a:ext uri="{FF2B5EF4-FFF2-40B4-BE49-F238E27FC236}">
-                <a16:creationId xmlns:a16="http://schemas.microsoft.com/office/drawing/2014/main" id="{D0C126AD-79D9-4434-9D60-66B905005DF1}"/>
+                <a16:creationId xmlns:a16="http://schemas.microsoft.com/office/drawing/2014/main" id="{23036183-D716-464E-831F-FD024897FF36}"/>
               </a:ext>
             </a:extLst>
           </p:cNvPr>
@@ -21882,7 +21882,7 @@
           <p:nvPr/>
         </p:nvPicPr>
         <p:blipFill>
-          <a:blip xmlns:r="http://schemas.openxmlformats.org/officeDocument/2006/relationships" xmlns:a="http://schemas.openxmlformats.org/drawingml/2006/main" r:embed="R86258b475cad4763"/>
+          <a:blip xmlns:r="http://schemas.openxmlformats.org/officeDocument/2006/relationships" xmlns:a="http://schemas.openxmlformats.org/drawingml/2006/main" r:embed="R3b4810a105494574"/>
           <a:stretch xmlns:a="http://schemas.openxmlformats.org/drawingml/2006/main"/>
         </p:blipFill>
         <p:spPr>
@@ -21900,7 +21900,7 @@
           <p:cNvPr id="7" name="">
             <a:extLst xmlns:a="http://schemas.openxmlformats.org/drawingml/2006/main">
               <a:ext uri="{FF2B5EF4-FFF2-40B4-BE49-F238E27FC236}">
-                <a16:creationId xmlns:a16="http://schemas.microsoft.com/office/drawing/2014/main" id="{9B755F96-3392-42ED-A796-E2409BDC2619}"/>
+                <a16:creationId xmlns:a16="http://schemas.microsoft.com/office/drawing/2014/main" id="{1AB55179-87E5-4289-9069-02AC7EA0124E}"/>
               </a:ext>
             </a:extLst>
           </p:cNvPr>
@@ -21952,7 +21952,7 @@
           <p:cNvPr id="8" name="">
             <a:extLst xmlns:a="http://schemas.openxmlformats.org/drawingml/2006/main">
               <a:ext uri="{FF2B5EF4-FFF2-40B4-BE49-F238E27FC236}">
-                <a16:creationId xmlns:a16="http://schemas.microsoft.com/office/drawing/2014/main" id="{27C4455E-ED7E-4BDE-BC7F-B2946059D427}"/>
+                <a16:creationId xmlns:a16="http://schemas.microsoft.com/office/drawing/2014/main" id="{F2C41F96-1944-4E17-BD3F-74736A99DF27}"/>
               </a:ext>
             </a:extLst>
           </p:cNvPr>
@@ -22004,7 +22004,7 @@
           <p:cNvPr id="9" name="">
             <a:extLst xmlns:a="http://schemas.openxmlformats.org/drawingml/2006/main">
               <a:ext uri="{FF2B5EF4-FFF2-40B4-BE49-F238E27FC236}">
-                <a16:creationId xmlns:a16="http://schemas.microsoft.com/office/drawing/2014/main" id="{41AC6525-038F-4D13-A6A9-733506C1B67C}"/>
+                <a16:creationId xmlns:a16="http://schemas.microsoft.com/office/drawing/2014/main" id="{A88D13DA-6236-4693-8564-973D88621430}"/>
               </a:ext>
             </a:extLst>
           </p:cNvPr>
@@ -22056,7 +22056,7 @@
           <p:cNvPr id="10" name="">
             <a:extLst xmlns:a="http://schemas.openxmlformats.org/drawingml/2006/main">
               <a:ext uri="{FF2B5EF4-FFF2-40B4-BE49-F238E27FC236}">
-                <a16:creationId xmlns:a16="http://schemas.microsoft.com/office/drawing/2014/main" id="{AF6867EF-571B-4F4D-9C15-1F6FB4B6AFC6}"/>
+                <a16:creationId xmlns:a16="http://schemas.microsoft.com/office/drawing/2014/main" id="{84FCB4F0-1FE6-4F26-992F-81F66E0D8C16}"/>
               </a:ext>
             </a:extLst>
           </p:cNvPr>
@@ -22108,7 +22108,7 @@
           <p:cNvPr id="11" name="">
             <a:extLst xmlns:a="http://schemas.openxmlformats.org/drawingml/2006/main">
               <a:ext uri="{FF2B5EF4-FFF2-40B4-BE49-F238E27FC236}">
-                <a16:creationId xmlns:a16="http://schemas.microsoft.com/office/drawing/2014/main" id="{800E4F9D-7255-4BCF-849D-082F23862A58}"/>
+                <a16:creationId xmlns:a16="http://schemas.microsoft.com/office/drawing/2014/main" id="{885F4B91-FC92-41F7-867F-902F06C9A1ED}"/>
               </a:ext>
             </a:extLst>
           </p:cNvPr>
@@ -22139,7 +22139,7 @@
           <p:cNvPr id="12" name="">
             <a:extLst xmlns:a="http://schemas.openxmlformats.org/drawingml/2006/main">
               <a:ext uri="{FF2B5EF4-FFF2-40B4-BE49-F238E27FC236}">
-                <a16:creationId xmlns:a16="http://schemas.microsoft.com/office/drawing/2014/main" id="{AF8C6DA3-D375-4F16-A521-C1D77159CF61}"/>
+                <a16:creationId xmlns:a16="http://schemas.microsoft.com/office/drawing/2014/main" id="{D0E23437-9F6A-4192-AC15-DC702E29B7EF}"/>
               </a:ext>
             </a:extLst>
           </p:cNvPr>
@@ -22170,7 +22170,7 @@
           <p:cNvPr id="13" name="">
             <a:extLst xmlns:a="http://schemas.openxmlformats.org/drawingml/2006/main">
               <a:ext uri="{FF2B5EF4-FFF2-40B4-BE49-F238E27FC236}">
-                <a16:creationId xmlns:a16="http://schemas.microsoft.com/office/drawing/2014/main" id="{10709263-9BA4-479D-8901-4A453DC0AB37}"/>
+                <a16:creationId xmlns:a16="http://schemas.microsoft.com/office/drawing/2014/main" id="{14ACDE20-CDE7-4628-9497-02482DDEC639}"/>
               </a:ext>
             </a:extLst>
           </p:cNvPr>
@@ -22222,7 +22222,7 @@
           <p:cNvPr id="14" name="">
             <a:extLst xmlns:a="http://schemas.openxmlformats.org/drawingml/2006/main">
               <a:ext uri="{FF2B5EF4-FFF2-40B4-BE49-F238E27FC236}">
-                <a16:creationId xmlns:a16="http://schemas.microsoft.com/office/drawing/2014/main" id="{0394A953-CA67-4B09-B4AE-36C7407DFE0E}"/>
+                <a16:creationId xmlns:a16="http://schemas.microsoft.com/office/drawing/2014/main" id="{B4D098A0-A3E2-45CF-BD69-5F205E062BC1}"/>
               </a:ext>
             </a:extLst>
           </p:cNvPr>
@@ -22274,7 +22274,7 @@
           <p:cNvPr id="15" name="">
             <a:extLst xmlns:a="http://schemas.openxmlformats.org/drawingml/2006/main">
               <a:ext uri="{FF2B5EF4-FFF2-40B4-BE49-F238E27FC236}">
-                <a16:creationId xmlns:a16="http://schemas.microsoft.com/office/drawing/2014/main" id="{24B94123-1CC0-4F36-9117-CE83E46A38C8}"/>
+                <a16:creationId xmlns:a16="http://schemas.microsoft.com/office/drawing/2014/main" id="{EB6A8927-8FE4-41F1-AD68-ADDF958F80FC}"/>
               </a:ext>
             </a:extLst>
           </p:cNvPr>
@@ -22326,7 +22326,7 @@
           <p:cNvPr id="16" name="">
             <a:extLst xmlns:a="http://schemas.openxmlformats.org/drawingml/2006/main">
               <a:ext uri="{FF2B5EF4-FFF2-40B4-BE49-F238E27FC236}">
-                <a16:creationId xmlns:a16="http://schemas.microsoft.com/office/drawing/2014/main" id="{A49C7023-5CD0-4323-ACD6-E17141E50E49}"/>
+                <a16:creationId xmlns:a16="http://schemas.microsoft.com/office/drawing/2014/main" id="{46D6A214-CE82-4764-A0EF-3FE36310272A}"/>
               </a:ext>
             </a:extLst>
           </p:cNvPr>
@@ -22378,7 +22378,7 @@
           <p:cNvPr id="17" name="">
             <a:extLst xmlns:a="http://schemas.openxmlformats.org/drawingml/2006/main">
               <a:ext uri="{FF2B5EF4-FFF2-40B4-BE49-F238E27FC236}">
-                <a16:creationId xmlns:a16="http://schemas.microsoft.com/office/drawing/2014/main" id="{5DD9FB64-9B8C-47CB-8FBC-CA3370C53E96}"/>
+                <a16:creationId xmlns:a16="http://schemas.microsoft.com/office/drawing/2014/main" id="{021FABA1-7BC4-437C-BACF-804828046116}"/>
               </a:ext>
             </a:extLst>
           </p:cNvPr>
@@ -22430,7 +22430,7 @@
           <p:cNvPr id="18" name="">
             <a:extLst xmlns:a="http://schemas.openxmlformats.org/drawingml/2006/main">
               <a:ext uri="{FF2B5EF4-FFF2-40B4-BE49-F238E27FC236}">
-                <a16:creationId xmlns:a16="http://schemas.microsoft.com/office/drawing/2014/main" id="{5AE6A091-BC45-4694-8F97-D2BDCDBC1DD2}"/>
+                <a16:creationId xmlns:a16="http://schemas.microsoft.com/office/drawing/2014/main" id="{2CC613D9-7A55-47DD-B4A4-49AB624DE199}"/>
               </a:ext>
             </a:extLst>
           </p:cNvPr>
@@ -22482,7 +22482,7 @@
           <p:cNvPr id="19" name="">
             <a:extLst xmlns:a="http://schemas.openxmlformats.org/drawingml/2006/main">
               <a:ext uri="{FF2B5EF4-FFF2-40B4-BE49-F238E27FC236}">
-                <a16:creationId xmlns:a16="http://schemas.microsoft.com/office/drawing/2014/main" id="{6BA39402-109B-4063-B9A4-5539FEF2A674}"/>
+                <a16:creationId xmlns:a16="http://schemas.microsoft.com/office/drawing/2014/main" id="{95ADC888-1099-4F24-9700-612DE03A07E9}"/>
               </a:ext>
             </a:extLst>
           </p:cNvPr>
@@ -22534,7 +22534,7 @@
           <p:cNvPr id="20" name="">
             <a:extLst xmlns:a="http://schemas.openxmlformats.org/drawingml/2006/main">
               <a:ext uri="{FF2B5EF4-FFF2-40B4-BE49-F238E27FC236}">
-                <a16:creationId xmlns:a16="http://schemas.microsoft.com/office/drawing/2014/main" id="{AA93F278-F844-44F6-9401-C7EBBA481E1F}"/>
+                <a16:creationId xmlns:a16="http://schemas.microsoft.com/office/drawing/2014/main" id="{BB33BB16-5CA2-40C8-9F85-59998D255B6B}"/>
               </a:ext>
             </a:extLst>
           </p:cNvPr>
@@ -22586,7 +22586,7 @@
           <p:cNvPr id="21" name="">
             <a:extLst xmlns:a="http://schemas.openxmlformats.org/drawingml/2006/main">
               <a:ext uri="{FF2B5EF4-FFF2-40B4-BE49-F238E27FC236}">
-                <a16:creationId xmlns:a16="http://schemas.microsoft.com/office/drawing/2014/main" id="{BAFFC16A-1C7C-4450-B19C-0E8AF2A7C4CA}"/>
+                <a16:creationId xmlns:a16="http://schemas.microsoft.com/office/drawing/2014/main" id="{EEFDD631-A059-427F-B339-5C834EBED373}"/>
               </a:ext>
             </a:extLst>
           </p:cNvPr>
@@ -22617,7 +22617,7 @@
           <p:cNvPr id="22" name="">
             <a:extLst xmlns:a="http://schemas.openxmlformats.org/drawingml/2006/main">
               <a:ext uri="{FF2B5EF4-FFF2-40B4-BE49-F238E27FC236}">
-                <a16:creationId xmlns:a16="http://schemas.microsoft.com/office/drawing/2014/main" id="{05A4E32F-9DF3-4657-AF7F-9510073C268E}"/>
+                <a16:creationId xmlns:a16="http://schemas.microsoft.com/office/drawing/2014/main" id="{54BDDFB0-FB32-41B4-9ABB-F1F1B80FA5A3}"/>
               </a:ext>
             </a:extLst>
           </p:cNvPr>
@@ -22669,7 +22669,7 @@
           <p:cNvPr id="23" name="">
             <a:extLst xmlns:a="http://schemas.openxmlformats.org/drawingml/2006/main">
               <a:ext uri="{FF2B5EF4-FFF2-40B4-BE49-F238E27FC236}">
-                <a16:creationId xmlns:a16="http://schemas.microsoft.com/office/drawing/2014/main" id="{42A256D0-B832-4BF0-B2A8-57F13DB14FF2}"/>
+                <a16:creationId xmlns:a16="http://schemas.microsoft.com/office/drawing/2014/main" id="{CF6671E3-40EB-4751-8411-1A94B5EBDB17}"/>
               </a:ext>
             </a:extLst>
           </p:cNvPr>
@@ -22721,7 +22721,7 @@
           <p:cNvPr id="24" name="">
             <a:extLst xmlns:a="http://schemas.openxmlformats.org/drawingml/2006/main">
               <a:ext uri="{FF2B5EF4-FFF2-40B4-BE49-F238E27FC236}">
-                <a16:creationId xmlns:a16="http://schemas.microsoft.com/office/drawing/2014/main" id="{B0C23275-AE91-42BE-8D61-F8C19218B6DB}"/>
+                <a16:creationId xmlns:a16="http://schemas.microsoft.com/office/drawing/2014/main" id="{1A6A08C4-F1C6-46EF-A110-4CED645B5F41}"/>
               </a:ext>
             </a:extLst>
           </p:cNvPr>
@@ -22773,7 +22773,7 @@
           <p:cNvPr id="25" name="">
             <a:extLst xmlns:a="http://schemas.openxmlformats.org/drawingml/2006/main">
               <a:ext uri="{FF2B5EF4-FFF2-40B4-BE49-F238E27FC236}">
-                <a16:creationId xmlns:a16="http://schemas.microsoft.com/office/drawing/2014/main" id="{73E498F2-B5C6-4D69-874A-AE440BC7634B}"/>
+                <a16:creationId xmlns:a16="http://schemas.microsoft.com/office/drawing/2014/main" id="{C4FB8F9F-1AD0-407C-BBD5-67F28A1BB8AA}"/>
               </a:ext>
             </a:extLst>
           </p:cNvPr>
@@ -22825,7 +22825,7 @@
           <p:cNvPr id="26" name="">
             <a:extLst xmlns:a="http://schemas.openxmlformats.org/drawingml/2006/main">
               <a:ext uri="{FF2B5EF4-FFF2-40B4-BE49-F238E27FC236}">
-                <a16:creationId xmlns:a16="http://schemas.microsoft.com/office/drawing/2014/main" id="{35150DC8-B349-47E3-B2CB-73C2D2353D35}"/>
+                <a16:creationId xmlns:a16="http://schemas.microsoft.com/office/drawing/2014/main" id="{CB20A700-36D8-4705-A89B-5A80B3DAB5A9}"/>
               </a:ext>
             </a:extLst>
           </p:cNvPr>
@@ -22877,7 +22877,7 @@
           <p:cNvPr id="27" name="">
             <a:extLst xmlns:a="http://schemas.openxmlformats.org/drawingml/2006/main">
               <a:ext uri="{FF2B5EF4-FFF2-40B4-BE49-F238E27FC236}">
-                <a16:creationId xmlns:a16="http://schemas.microsoft.com/office/drawing/2014/main" id="{3E4CD4FB-7DAF-4160-9220-CC9818CAE0D2}"/>
+                <a16:creationId xmlns:a16="http://schemas.microsoft.com/office/drawing/2014/main" id="{32A0A4A7-E806-4450-A4B5-CFB48850FD7C}"/>
               </a:ext>
             </a:extLst>
           </p:cNvPr>
@@ -22929,7 +22929,7 @@
           <p:cNvPr id="28" name="">
             <a:extLst xmlns:a="http://schemas.openxmlformats.org/drawingml/2006/main">
               <a:ext uri="{FF2B5EF4-FFF2-40B4-BE49-F238E27FC236}">
-                <a16:creationId xmlns:a16="http://schemas.microsoft.com/office/drawing/2014/main" id="{A584604A-DF37-4A5D-91EA-C703144F05DE}"/>
+                <a16:creationId xmlns:a16="http://schemas.microsoft.com/office/drawing/2014/main" id="{C4CA87B1-4140-4E36-B44F-181D884453C4}"/>
               </a:ext>
             </a:extLst>
           </p:cNvPr>
@@ -22981,7 +22981,7 @@
           <p:cNvPr id="29" name="">
             <a:extLst xmlns:a="http://schemas.openxmlformats.org/drawingml/2006/main">
               <a:ext uri="{FF2B5EF4-FFF2-40B4-BE49-F238E27FC236}">
-                <a16:creationId xmlns:a16="http://schemas.microsoft.com/office/drawing/2014/main" id="{0D38AB36-C63C-47C6-A10D-FC04E51D47E5}"/>
+                <a16:creationId xmlns:a16="http://schemas.microsoft.com/office/drawing/2014/main" id="{6B78384A-25AD-42B6-B4FF-7AD8C6DF3186}"/>
               </a:ext>
             </a:extLst>
           </p:cNvPr>
@@ -23033,7 +23033,7 @@
           <p:cNvPr id="30" name="">
             <a:extLst xmlns:a="http://schemas.openxmlformats.org/drawingml/2006/main">
               <a:ext uri="{FF2B5EF4-FFF2-40B4-BE49-F238E27FC236}">
-                <a16:creationId xmlns:a16="http://schemas.microsoft.com/office/drawing/2014/main" id="{949DB551-2B2A-4FCE-8757-44A65C51967D}"/>
+                <a16:creationId xmlns:a16="http://schemas.microsoft.com/office/drawing/2014/main" id="{AFC50E92-5CDA-4C18-BA96-9060AD12B519}"/>
               </a:ext>
             </a:extLst>
           </p:cNvPr>
@@ -23064,7 +23064,7 @@
           <p:cNvPr id="31" name="">
             <a:extLst xmlns:a="http://schemas.openxmlformats.org/drawingml/2006/main">
               <a:ext uri="{FF2B5EF4-FFF2-40B4-BE49-F238E27FC236}">
-                <a16:creationId xmlns:a16="http://schemas.microsoft.com/office/drawing/2014/main" id="{28E2A762-EA7E-4E48-8656-C1ACE52F9817}"/>
+                <a16:creationId xmlns:a16="http://schemas.microsoft.com/office/drawing/2014/main" id="{A45683BB-EECB-4A59-BB5A-C82EAE98F9EB}"/>
               </a:ext>
             </a:extLst>
           </p:cNvPr>
@@ -23095,7 +23095,7 @@
           <p:cNvPr id="32" name="">
             <a:extLst xmlns:a="http://schemas.openxmlformats.org/drawingml/2006/main">
               <a:ext uri="{FF2B5EF4-FFF2-40B4-BE49-F238E27FC236}">
-                <a16:creationId xmlns:a16="http://schemas.microsoft.com/office/drawing/2014/main" id="{F9E9B7EF-F525-4CA7-B88D-EB60FF88C344}"/>
+                <a16:creationId xmlns:a16="http://schemas.microsoft.com/office/drawing/2014/main" id="{4328AD3C-F896-4958-A352-9681B94F3278}"/>
               </a:ext>
             </a:extLst>
           </p:cNvPr>
@@ -23147,7 +23147,7 @@
           <p:cNvPr id="33" name="">
             <a:extLst xmlns:a="http://schemas.openxmlformats.org/drawingml/2006/main">
               <a:ext uri="{FF2B5EF4-FFF2-40B4-BE49-F238E27FC236}">
-                <a16:creationId xmlns:a16="http://schemas.microsoft.com/office/drawing/2014/main" id="{C34F3D3F-2304-4798-86C8-176C508ED173}"/>
+                <a16:creationId xmlns:a16="http://schemas.microsoft.com/office/drawing/2014/main" id="{4A66EA77-5EDC-4FE3-9CEE-C410FE9F0F1C}"/>
               </a:ext>
             </a:extLst>
           </p:cNvPr>
@@ -23199,7 +23199,7 @@
           <p:cNvPr id="34" name="">
             <a:extLst xmlns:a="http://schemas.openxmlformats.org/drawingml/2006/main">
               <a:ext uri="{FF2B5EF4-FFF2-40B4-BE49-F238E27FC236}">
-                <a16:creationId xmlns:a16="http://schemas.microsoft.com/office/drawing/2014/main" id="{FB38CD0E-4267-40A5-8A02-A82A0CB92C71}"/>
+                <a16:creationId xmlns:a16="http://schemas.microsoft.com/office/drawing/2014/main" id="{F59DCC3D-F816-4795-A5FB-7201E7D24322}"/>
               </a:ext>
             </a:extLst>
           </p:cNvPr>
@@ -23251,7 +23251,7 @@
           <p:cNvPr id="35" name="">
             <a:extLst xmlns:a="http://schemas.openxmlformats.org/drawingml/2006/main">
               <a:ext uri="{FF2B5EF4-FFF2-40B4-BE49-F238E27FC236}">
-                <a16:creationId xmlns:a16="http://schemas.microsoft.com/office/drawing/2014/main" id="{AD0076F9-331B-48CE-A721-B38150FAFFB7}"/>
+                <a16:creationId xmlns:a16="http://schemas.microsoft.com/office/drawing/2014/main" id="{289C0E60-5362-4041-A199-798B5E48BCE7}"/>
               </a:ext>
             </a:extLst>
           </p:cNvPr>
@@ -23303,7 +23303,7 @@
           <p:cNvPr id="36" name="">
             <a:extLst xmlns:a="http://schemas.openxmlformats.org/drawingml/2006/main">
               <a:ext uri="{FF2B5EF4-FFF2-40B4-BE49-F238E27FC236}">
-                <a16:creationId xmlns:a16="http://schemas.microsoft.com/office/drawing/2014/main" id="{E42427C9-5052-4125-806B-7C60DB99D9A2}"/>
+                <a16:creationId xmlns:a16="http://schemas.microsoft.com/office/drawing/2014/main" id="{86C175EF-D7D6-4F2F-AED4-5CF297E85343}"/>
               </a:ext>
             </a:extLst>
           </p:cNvPr>
@@ -23355,7 +23355,7 @@
           <p:cNvPr id="37" name="">
             <a:extLst xmlns:a="http://schemas.openxmlformats.org/drawingml/2006/main">
               <a:ext uri="{FF2B5EF4-FFF2-40B4-BE49-F238E27FC236}">
-                <a16:creationId xmlns:a16="http://schemas.microsoft.com/office/drawing/2014/main" id="{46710B86-CE20-432E-AE2C-E7EAB246E1B9}"/>
+                <a16:creationId xmlns:a16="http://schemas.microsoft.com/office/drawing/2014/main" id="{393B52F3-3C94-4C49-91CB-5614A1CAF3BC}"/>
               </a:ext>
             </a:extLst>
           </p:cNvPr>
@@ -23407,7 +23407,7 @@
           <p:cNvPr id="38" name="">
             <a:extLst xmlns:a="http://schemas.openxmlformats.org/drawingml/2006/main">
               <a:ext uri="{FF2B5EF4-FFF2-40B4-BE49-F238E27FC236}">
-                <a16:creationId xmlns:a16="http://schemas.microsoft.com/office/drawing/2014/main" id="{B1EC4A29-624E-4308-BF58-A30EFD82FAB9}"/>
+                <a16:creationId xmlns:a16="http://schemas.microsoft.com/office/drawing/2014/main" id="{AC6D3CEF-E772-4A0C-B60E-C5F64A532A9D}"/>
               </a:ext>
             </a:extLst>
           </p:cNvPr>
@@ -23459,7 +23459,7 @@
           <p:cNvPr id="39" name="">
             <a:extLst xmlns:a="http://schemas.openxmlformats.org/drawingml/2006/main">
               <a:ext uri="{FF2B5EF4-FFF2-40B4-BE49-F238E27FC236}">
-                <a16:creationId xmlns:a16="http://schemas.microsoft.com/office/drawing/2014/main" id="{60A755E9-5D36-43FC-92B0-1A47C1E08305}"/>
+                <a16:creationId xmlns:a16="http://schemas.microsoft.com/office/drawing/2014/main" id="{22469843-FBFB-4E4F-B76D-23F1F365606F}"/>
               </a:ext>
             </a:extLst>
           </p:cNvPr>
@@ -23511,7 +23511,7 @@
           <p:cNvPr id="40" name="">
             <a:extLst xmlns:a="http://schemas.openxmlformats.org/drawingml/2006/main">
               <a:ext uri="{FF2B5EF4-FFF2-40B4-BE49-F238E27FC236}">
-                <a16:creationId xmlns:a16="http://schemas.microsoft.com/office/drawing/2014/main" id="{0E4AE076-5496-4EE0-A922-243B6B607FDC}"/>
+                <a16:creationId xmlns:a16="http://schemas.microsoft.com/office/drawing/2014/main" id="{50A67A0E-7C9B-42FE-8557-8FA72E239DFD}"/>
               </a:ext>
             </a:extLst>
           </p:cNvPr>
@@ -23542,7 +23542,7 @@
           <p:cNvPr id="41" name="">
             <a:extLst xmlns:a="http://schemas.openxmlformats.org/drawingml/2006/main">
               <a:ext uri="{FF2B5EF4-FFF2-40B4-BE49-F238E27FC236}">
-                <a16:creationId xmlns:a16="http://schemas.microsoft.com/office/drawing/2014/main" id="{5CD706B1-8CA8-4B84-B779-08E993E03C06}"/>
+                <a16:creationId xmlns:a16="http://schemas.microsoft.com/office/drawing/2014/main" id="{EDCD9B4B-0B83-41A9-88EF-165610ACE283}"/>
               </a:ext>
             </a:extLst>
           </p:cNvPr>
@@ -23594,7 +23594,7 @@
           <p:cNvPr id="42" name="">
             <a:extLst xmlns:a="http://schemas.openxmlformats.org/drawingml/2006/main">
               <a:ext uri="{FF2B5EF4-FFF2-40B4-BE49-F238E27FC236}">
-                <a16:creationId xmlns:a16="http://schemas.microsoft.com/office/drawing/2014/main" id="{3395BECC-FC99-4314-A16A-B90FD0ED351F}"/>
+                <a16:creationId xmlns:a16="http://schemas.microsoft.com/office/drawing/2014/main" id="{43A841C5-00C0-43C8-AFB6-456F97F8077F}"/>
               </a:ext>
             </a:extLst>
           </p:cNvPr>
@@ -23646,7 +23646,7 @@
           <p:cNvPr id="43" name="">
             <a:extLst xmlns:a="http://schemas.openxmlformats.org/drawingml/2006/main">
               <a:ext uri="{FF2B5EF4-FFF2-40B4-BE49-F238E27FC236}">
-                <a16:creationId xmlns:a16="http://schemas.microsoft.com/office/drawing/2014/main" id="{F213ECB6-6E6D-43BB-8833-7A5E5DB510D9}"/>
+                <a16:creationId xmlns:a16="http://schemas.microsoft.com/office/drawing/2014/main" id="{F9D608E1-4FB5-4B4C-9CB3-404EA5DC629E}"/>
               </a:ext>
             </a:extLst>
           </p:cNvPr>
@@ -23698,7 +23698,7 @@
           <p:cNvPr id="44" name="">
             <a:extLst xmlns:a="http://schemas.openxmlformats.org/drawingml/2006/main">
               <a:ext uri="{FF2B5EF4-FFF2-40B4-BE49-F238E27FC236}">
-                <a16:creationId xmlns:a16="http://schemas.microsoft.com/office/drawing/2014/main" id="{3E1D264E-78A1-434B-A5A0-94F958B40F48}"/>
+                <a16:creationId xmlns:a16="http://schemas.microsoft.com/office/drawing/2014/main" id="{CCB5EDB6-28C2-440F-B27F-20293996E0BF}"/>
               </a:ext>
             </a:extLst>
           </p:cNvPr>
@@ -23750,7 +23750,7 @@
           <p:cNvPr id="45" name="">
             <a:extLst xmlns:a="http://schemas.openxmlformats.org/drawingml/2006/main">
               <a:ext uri="{FF2B5EF4-FFF2-40B4-BE49-F238E27FC236}">
-                <a16:creationId xmlns:a16="http://schemas.microsoft.com/office/drawing/2014/main" id="{239A4655-9967-4718-8C9A-A85DC90E9A47}"/>
+                <a16:creationId xmlns:a16="http://schemas.microsoft.com/office/drawing/2014/main" id="{F16DE9C0-BB53-463D-80C0-0944491232C3}"/>
               </a:ext>
             </a:extLst>
           </p:cNvPr>
@@ -23802,7 +23802,7 @@
           <p:cNvPr id="46" name="">
             <a:extLst xmlns:a="http://schemas.openxmlformats.org/drawingml/2006/main">
               <a:ext uri="{FF2B5EF4-FFF2-40B4-BE49-F238E27FC236}">
-                <a16:creationId xmlns:a16="http://schemas.microsoft.com/office/drawing/2014/main" id="{7B3AF497-31A9-4E01-B3DD-D4CE4102C434}"/>
+                <a16:creationId xmlns:a16="http://schemas.microsoft.com/office/drawing/2014/main" id="{001A1246-D190-4B93-AA09-A061B37B5E75}"/>
               </a:ext>
             </a:extLst>
           </p:cNvPr>
@@ -23854,7 +23854,7 @@
           <p:cNvPr id="47" name="">
             <a:extLst xmlns:a="http://schemas.openxmlformats.org/drawingml/2006/main">
               <a:ext uri="{FF2B5EF4-FFF2-40B4-BE49-F238E27FC236}">
-                <a16:creationId xmlns:a16="http://schemas.microsoft.com/office/drawing/2014/main" id="{FAC7773C-A21D-4633-B1EC-6101BC67B7D3}"/>
+                <a16:creationId xmlns:a16="http://schemas.microsoft.com/office/drawing/2014/main" id="{695B63E9-1C1F-4EEF-AA40-84545F920004}"/>
               </a:ext>
             </a:extLst>
           </p:cNvPr>
@@ -23906,7 +23906,7 @@
           <p:cNvPr id="48" name="">
             <a:extLst xmlns:a="http://schemas.openxmlformats.org/drawingml/2006/main">
               <a:ext uri="{FF2B5EF4-FFF2-40B4-BE49-F238E27FC236}">
-                <a16:creationId xmlns:a16="http://schemas.microsoft.com/office/drawing/2014/main" id="{D96A939E-05CF-45D9-8137-59789E436F63}"/>
+                <a16:creationId xmlns:a16="http://schemas.microsoft.com/office/drawing/2014/main" id="{6284AE4D-7641-4792-B800-ED38DE3861DB}"/>
               </a:ext>
             </a:extLst>
           </p:cNvPr>
@@ -23958,7 +23958,7 @@
           <p:cNvPr id="49" name="">
             <a:extLst xmlns:a="http://schemas.openxmlformats.org/drawingml/2006/main">
               <a:ext uri="{FF2B5EF4-FFF2-40B4-BE49-F238E27FC236}">
-                <a16:creationId xmlns:a16="http://schemas.microsoft.com/office/drawing/2014/main" id="{C97C7FCA-B467-42F9-AACF-353A4779C467}"/>
+                <a16:creationId xmlns:a16="http://schemas.microsoft.com/office/drawing/2014/main" id="{45D7B871-D547-4A16-BA58-3A2F77D00442}"/>
               </a:ext>
             </a:extLst>
           </p:cNvPr>
@@ -23989,7 +23989,7 @@
           <p:cNvPr id="50" name="">
             <a:extLst xmlns:a="http://schemas.openxmlformats.org/drawingml/2006/main">
               <a:ext uri="{FF2B5EF4-FFF2-40B4-BE49-F238E27FC236}">
-                <a16:creationId xmlns:a16="http://schemas.microsoft.com/office/drawing/2014/main" id="{E00BD065-7B89-4637-9B0B-6C3FD94E6FB7}"/>
+                <a16:creationId xmlns:a16="http://schemas.microsoft.com/office/drawing/2014/main" id="{E6A76C0A-4AC3-407A-8408-973851D6180E}"/>
               </a:ext>
             </a:extLst>
           </p:cNvPr>
@@ -24020,7 +24020,7 @@
           <p:cNvPr id="51" name="">
             <a:extLst xmlns:a="http://schemas.openxmlformats.org/drawingml/2006/main">
               <a:ext uri="{FF2B5EF4-FFF2-40B4-BE49-F238E27FC236}">
-                <a16:creationId xmlns:a16="http://schemas.microsoft.com/office/drawing/2014/main" id="{997D39D8-CE9A-4DF0-9B14-683D0647D6E5}"/>
+                <a16:creationId xmlns:a16="http://schemas.microsoft.com/office/drawing/2014/main" id="{E5F58192-2733-4243-B513-307C8DBA2661}"/>
               </a:ext>
             </a:extLst>
           </p:cNvPr>
@@ -24072,7 +24072,7 @@
           <p:cNvPr id="52" name="">
             <a:extLst xmlns:a="http://schemas.openxmlformats.org/drawingml/2006/main">
               <a:ext uri="{FF2B5EF4-FFF2-40B4-BE49-F238E27FC236}">
-                <a16:creationId xmlns:a16="http://schemas.microsoft.com/office/drawing/2014/main" id="{09712F26-E1CB-444D-B66B-E10409F6FDA1}"/>
+                <a16:creationId xmlns:a16="http://schemas.microsoft.com/office/drawing/2014/main" id="{A592064F-1CA2-44F4-BD5C-79CA93905D20}"/>
               </a:ext>
             </a:extLst>
           </p:cNvPr>
@@ -24124,7 +24124,7 @@
           <p:cNvPr id="53" name="">
             <a:extLst xmlns:a="http://schemas.openxmlformats.org/drawingml/2006/main">
               <a:ext uri="{FF2B5EF4-FFF2-40B4-BE49-F238E27FC236}">
-                <a16:creationId xmlns:a16="http://schemas.microsoft.com/office/drawing/2014/main" id="{F6D675E4-14EC-45C7-8E1E-09C1CDBEB579}"/>
+                <a16:creationId xmlns:a16="http://schemas.microsoft.com/office/drawing/2014/main" id="{DD5A0AB2-11EB-4B53-B262-1E64936C4A88}"/>
               </a:ext>
             </a:extLst>
           </p:cNvPr>
@@ -24176,7 +24176,7 @@
           <p:cNvPr id="54" name="">
             <a:extLst xmlns:a="http://schemas.openxmlformats.org/drawingml/2006/main">
               <a:ext uri="{FF2B5EF4-FFF2-40B4-BE49-F238E27FC236}">
-                <a16:creationId xmlns:a16="http://schemas.microsoft.com/office/drawing/2014/main" id="{1D010365-3C33-44D5-A415-F6BC76027D89}"/>
+                <a16:creationId xmlns:a16="http://schemas.microsoft.com/office/drawing/2014/main" id="{BB9382F3-C01C-446B-9F20-52DC8A8CC1D4}"/>
               </a:ext>
             </a:extLst>
           </p:cNvPr>
@@ -24228,7 +24228,7 @@
           <p:cNvPr id="55" name="">
             <a:extLst xmlns:a="http://schemas.openxmlformats.org/drawingml/2006/main">
               <a:ext uri="{FF2B5EF4-FFF2-40B4-BE49-F238E27FC236}">
-                <a16:creationId xmlns:a16="http://schemas.microsoft.com/office/drawing/2014/main" id="{EA103A7D-79E4-4896-A01C-49BF7C354AC6}"/>
+                <a16:creationId xmlns:a16="http://schemas.microsoft.com/office/drawing/2014/main" id="{FFAEF161-57C4-484D-908C-C4C60A695389}"/>
               </a:ext>
             </a:extLst>
           </p:cNvPr>
@@ -24280,7 +24280,7 @@
           <p:cNvPr id="56" name="">
             <a:extLst xmlns:a="http://schemas.openxmlformats.org/drawingml/2006/main">
               <a:ext uri="{FF2B5EF4-FFF2-40B4-BE49-F238E27FC236}">
-                <a16:creationId xmlns:a16="http://schemas.microsoft.com/office/drawing/2014/main" id="{A8544696-CBE9-4F89-9B7F-DC691E0DC076}"/>
+                <a16:creationId xmlns:a16="http://schemas.microsoft.com/office/drawing/2014/main" id="{ED9C5FCB-BA8D-4609-86E4-04EB12A924CF}"/>
               </a:ext>
             </a:extLst>
           </p:cNvPr>
@@ -24332,7 +24332,7 @@
           <p:cNvPr id="57" name="">
             <a:extLst xmlns:a="http://schemas.openxmlformats.org/drawingml/2006/main">
               <a:ext uri="{FF2B5EF4-FFF2-40B4-BE49-F238E27FC236}">
-                <a16:creationId xmlns:a16="http://schemas.microsoft.com/office/drawing/2014/main" id="{F07350A4-4C0F-41C7-B9DD-1439738B9D7A}"/>
+                <a16:creationId xmlns:a16="http://schemas.microsoft.com/office/drawing/2014/main" id="{9EC2673D-A909-4F12-8EC9-6F17199BE91F}"/>
               </a:ext>
             </a:extLst>
           </p:cNvPr>
@@ -24384,7 +24384,7 @@
           <p:cNvPr id="58" name="">
             <a:extLst xmlns:a="http://schemas.openxmlformats.org/drawingml/2006/main">
               <a:ext uri="{FF2B5EF4-FFF2-40B4-BE49-F238E27FC236}">
-                <a16:creationId xmlns:a16="http://schemas.microsoft.com/office/drawing/2014/main" id="{F6A00EBA-11E9-4721-9232-FC68F77AA3F5}"/>
+                <a16:creationId xmlns:a16="http://schemas.microsoft.com/office/drawing/2014/main" id="{27DA8E8D-150F-4746-9C63-0B02575016B5}"/>
               </a:ext>
             </a:extLst>
           </p:cNvPr>
@@ -24436,7 +24436,7 @@
           <p:cNvPr id="59" name="">
             <a:extLst xmlns:a="http://schemas.openxmlformats.org/drawingml/2006/main">
               <a:ext uri="{FF2B5EF4-FFF2-40B4-BE49-F238E27FC236}">
-                <a16:creationId xmlns:a16="http://schemas.microsoft.com/office/drawing/2014/main" id="{DA5BAA82-ABC5-4F2D-A627-6994BF8279B7}"/>
+                <a16:creationId xmlns:a16="http://schemas.microsoft.com/office/drawing/2014/main" id="{7AE87465-4D91-4E9C-B8D6-6C8C01291500}"/>
               </a:ext>
             </a:extLst>
           </p:cNvPr>
@@ -24467,7 +24467,7 @@
           <p:cNvPr id="60" name="">
             <a:extLst xmlns:a="http://schemas.openxmlformats.org/drawingml/2006/main">
               <a:ext uri="{FF2B5EF4-FFF2-40B4-BE49-F238E27FC236}">
-                <a16:creationId xmlns:a16="http://schemas.microsoft.com/office/drawing/2014/main" id="{5D4EF5F2-AA4A-4AB4-8288-2C44F070A033}"/>
+                <a16:creationId xmlns:a16="http://schemas.microsoft.com/office/drawing/2014/main" id="{994195FB-7658-4AB8-9F7C-C119FBA26FFA}"/>
               </a:ext>
             </a:extLst>
           </p:cNvPr>
@@ -24519,7 +24519,7 @@
           <p:cNvPr id="61" name="">
             <a:extLst xmlns:a="http://schemas.openxmlformats.org/drawingml/2006/main">
               <a:ext uri="{FF2B5EF4-FFF2-40B4-BE49-F238E27FC236}">
-                <a16:creationId xmlns:a16="http://schemas.microsoft.com/office/drawing/2014/main" id="{80886498-EAF7-41A8-B3E0-46BC305C91D4}"/>
+                <a16:creationId xmlns:a16="http://schemas.microsoft.com/office/drawing/2014/main" id="{2E24639B-5F11-40B0-AD95-DE8165E79E6D}"/>
               </a:ext>
             </a:extLst>
           </p:cNvPr>
@@ -24571,7 +24571,7 @@
           <p:cNvPr id="62" name="">
             <a:extLst xmlns:a="http://schemas.openxmlformats.org/drawingml/2006/main">
               <a:ext uri="{FF2B5EF4-FFF2-40B4-BE49-F238E27FC236}">
-                <a16:creationId xmlns:a16="http://schemas.microsoft.com/office/drawing/2014/main" id="{849FBDB8-9C88-4E5F-9C7E-B17D7FEF63C8}"/>
+                <a16:creationId xmlns:a16="http://schemas.microsoft.com/office/drawing/2014/main" id="{EA24489F-C374-4080-81D6-E5440B107ECA}"/>
               </a:ext>
             </a:extLst>
           </p:cNvPr>
@@ -24623,7 +24623,7 @@
           <p:cNvPr id="63" name="">
             <a:extLst xmlns:a="http://schemas.openxmlformats.org/drawingml/2006/main">
               <a:ext uri="{FF2B5EF4-FFF2-40B4-BE49-F238E27FC236}">
-                <a16:creationId xmlns:a16="http://schemas.microsoft.com/office/drawing/2014/main" id="{C10EB6E4-6DEE-4F36-92AF-9BC03D9A38F1}"/>
+                <a16:creationId xmlns:a16="http://schemas.microsoft.com/office/drawing/2014/main" id="{34B8BF2E-36BF-4ADB-AAD9-7BB8F8BE08AB}"/>
               </a:ext>
             </a:extLst>
           </p:cNvPr>
@@ -24675,7 +24675,7 @@
           <p:cNvPr id="64" name="">
             <a:extLst xmlns:a="http://schemas.openxmlformats.org/drawingml/2006/main">
               <a:ext uri="{FF2B5EF4-FFF2-40B4-BE49-F238E27FC236}">
-                <a16:creationId xmlns:a16="http://schemas.microsoft.com/office/drawing/2014/main" id="{85CF0670-1735-4825-A9B8-780D3DA4C77E}"/>
+                <a16:creationId xmlns:a16="http://schemas.microsoft.com/office/drawing/2014/main" id="{94CCD80A-BDED-4B8F-AD60-F55D73761EB0}"/>
               </a:ext>
             </a:extLst>
           </p:cNvPr>
@@ -24727,7 +24727,7 @@
           <p:cNvPr id="65" name="">
             <a:extLst xmlns:a="http://schemas.openxmlformats.org/drawingml/2006/main">
               <a:ext uri="{FF2B5EF4-FFF2-40B4-BE49-F238E27FC236}">
-                <a16:creationId xmlns:a16="http://schemas.microsoft.com/office/drawing/2014/main" id="{681C9AD2-3A4D-4BBA-A588-BA5A9F661022}"/>
+                <a16:creationId xmlns:a16="http://schemas.microsoft.com/office/drawing/2014/main" id="{8E09D649-C8FE-4D19-83AA-219C36FEAC1D}"/>
               </a:ext>
             </a:extLst>
           </p:cNvPr>
@@ -24779,7 +24779,7 @@
           <p:cNvPr id="66" name="">
             <a:extLst xmlns:a="http://schemas.openxmlformats.org/drawingml/2006/main">
               <a:ext uri="{FF2B5EF4-FFF2-40B4-BE49-F238E27FC236}">
-                <a16:creationId xmlns:a16="http://schemas.microsoft.com/office/drawing/2014/main" id="{871E09B4-5EB1-4665-BAE2-632E6D330F6F}"/>
+                <a16:creationId xmlns:a16="http://schemas.microsoft.com/office/drawing/2014/main" id="{0D70F68A-3792-4223-9FF5-215AA9DA8881}"/>
               </a:ext>
             </a:extLst>
           </p:cNvPr>
@@ -24831,7 +24831,7 @@
           <p:cNvPr id="67" name="">
             <a:extLst xmlns:a="http://schemas.openxmlformats.org/drawingml/2006/main">
               <a:ext uri="{FF2B5EF4-FFF2-40B4-BE49-F238E27FC236}">
-                <a16:creationId xmlns:a16="http://schemas.microsoft.com/office/drawing/2014/main" id="{BDAF7352-F19F-42E2-9CC0-4E4684712DE7}"/>
+                <a16:creationId xmlns:a16="http://schemas.microsoft.com/office/drawing/2014/main" id="{93D75033-96F8-486C-A610-0D5315412113}"/>
               </a:ext>
             </a:extLst>
           </p:cNvPr>
@@ -24883,7 +24883,7 @@
           <p:cNvPr id="68" name="">
             <a:extLst xmlns:a="http://schemas.openxmlformats.org/drawingml/2006/main">
               <a:ext uri="{FF2B5EF4-FFF2-40B4-BE49-F238E27FC236}">
-                <a16:creationId xmlns:a16="http://schemas.microsoft.com/office/drawing/2014/main" id="{03C94C7B-DACB-48C9-B6B6-7D0BBF266406}"/>
+                <a16:creationId xmlns:a16="http://schemas.microsoft.com/office/drawing/2014/main" id="{44DC7B47-90CF-43FD-A2F9-4A7B80B4B755}"/>
               </a:ext>
             </a:extLst>
           </p:cNvPr>
@@ -24914,7 +24914,7 @@
           <p:cNvPr id="69" name="">
             <a:extLst xmlns:a="http://schemas.openxmlformats.org/drawingml/2006/main">
               <a:ext uri="{FF2B5EF4-FFF2-40B4-BE49-F238E27FC236}">
-                <a16:creationId xmlns:a16="http://schemas.microsoft.com/office/drawing/2014/main" id="{603925D8-B2AD-49A0-8976-55F64A8137F7}"/>
+                <a16:creationId xmlns:a16="http://schemas.microsoft.com/office/drawing/2014/main" id="{3B3C8C67-4B65-4C2C-AC11-10236EA364A7}"/>
               </a:ext>
             </a:extLst>
           </p:cNvPr>
@@ -24945,7 +24945,7 @@
           <p:cNvPr id="70" name="">
             <a:extLst xmlns:a="http://schemas.openxmlformats.org/drawingml/2006/main">
               <a:ext uri="{FF2B5EF4-FFF2-40B4-BE49-F238E27FC236}">
-                <a16:creationId xmlns:a16="http://schemas.microsoft.com/office/drawing/2014/main" id="{21E97777-9309-4D4C-AF59-A2F1AC3B2560}"/>
+                <a16:creationId xmlns:a16="http://schemas.microsoft.com/office/drawing/2014/main" id="{101D0F62-166B-4188-963B-1059472B74EF}"/>
               </a:ext>
             </a:extLst>
           </p:cNvPr>
@@ -24997,7 +24997,7 @@
           <p:cNvPr id="71" name="">
             <a:extLst xmlns:a="http://schemas.openxmlformats.org/drawingml/2006/main">
               <a:ext uri="{FF2B5EF4-FFF2-40B4-BE49-F238E27FC236}">
-                <a16:creationId xmlns:a16="http://schemas.microsoft.com/office/drawing/2014/main" id="{D2E429AC-A7B2-4E42-A544-9113290C503E}"/>
+                <a16:creationId xmlns:a16="http://schemas.microsoft.com/office/drawing/2014/main" id="{6D9204C0-5BFD-4309-B842-49C5C8EC6AC0}"/>
               </a:ext>
             </a:extLst>
           </p:cNvPr>
@@ -25049,7 +25049,7 @@
           <p:cNvPr id="72" name="">
             <a:extLst xmlns:a="http://schemas.openxmlformats.org/drawingml/2006/main">
               <a:ext uri="{FF2B5EF4-FFF2-40B4-BE49-F238E27FC236}">
-                <a16:creationId xmlns:a16="http://schemas.microsoft.com/office/drawing/2014/main" id="{D8545C55-86C6-4AD5-B026-80A5DF5EA5C7}"/>
+                <a16:creationId xmlns:a16="http://schemas.microsoft.com/office/drawing/2014/main" id="{849DB5AD-8886-4806-9C3F-F3B0DCE11636}"/>
               </a:ext>
             </a:extLst>
           </p:cNvPr>
@@ -25101,7 +25101,7 @@
           <p:cNvPr id="73" name="">
             <a:extLst xmlns:a="http://schemas.openxmlformats.org/drawingml/2006/main">
               <a:ext uri="{FF2B5EF4-FFF2-40B4-BE49-F238E27FC236}">
-                <a16:creationId xmlns:a16="http://schemas.microsoft.com/office/drawing/2014/main" id="{7DB14D4E-CEC0-4C3F-9926-56E201AB1BF7}"/>
+                <a16:creationId xmlns:a16="http://schemas.microsoft.com/office/drawing/2014/main" id="{CD119E11-B797-4131-9C28-05B9B8AA23CA}"/>
               </a:ext>
             </a:extLst>
           </p:cNvPr>
@@ -25153,7 +25153,7 @@
           <p:cNvPr id="74" name="">
             <a:extLst xmlns:a="http://schemas.openxmlformats.org/drawingml/2006/main">
               <a:ext uri="{FF2B5EF4-FFF2-40B4-BE49-F238E27FC236}">
-                <a16:creationId xmlns:a16="http://schemas.microsoft.com/office/drawing/2014/main" id="{26F2ABE7-CC8A-431D-BFFB-3A4FA2CBF28B}"/>
+                <a16:creationId xmlns:a16="http://schemas.microsoft.com/office/drawing/2014/main" id="{431423C0-BC29-4DB2-905B-8054EE4E5C74}"/>
               </a:ext>
             </a:extLst>
           </p:cNvPr>
@@ -25205,7 +25205,7 @@
           <p:cNvPr id="75" name="">
             <a:extLst xmlns:a="http://schemas.openxmlformats.org/drawingml/2006/main">
               <a:ext uri="{FF2B5EF4-FFF2-40B4-BE49-F238E27FC236}">
-                <a16:creationId xmlns:a16="http://schemas.microsoft.com/office/drawing/2014/main" id="{FEA6576D-E57C-4726-9F64-D09DD8540BD9}"/>
+                <a16:creationId xmlns:a16="http://schemas.microsoft.com/office/drawing/2014/main" id="{1BEE38BF-6504-4288-A657-5FFDF02C051C}"/>
               </a:ext>
             </a:extLst>
           </p:cNvPr>
@@ -25257,7 +25257,7 @@
           <p:cNvPr id="76" name="">
             <a:extLst xmlns:a="http://schemas.openxmlformats.org/drawingml/2006/main">
               <a:ext uri="{FF2B5EF4-FFF2-40B4-BE49-F238E27FC236}">
-                <a16:creationId xmlns:a16="http://schemas.microsoft.com/office/drawing/2014/main" id="{11837C28-C2D9-4B2D-9FE8-6A7AFDE69CF7}"/>
+                <a16:creationId xmlns:a16="http://schemas.microsoft.com/office/drawing/2014/main" id="{4B5EB0FB-1244-4DE3-B31A-1A74E0176C20}"/>
               </a:ext>
             </a:extLst>
           </p:cNvPr>
@@ -25309,7 +25309,7 @@
           <p:cNvPr id="77" name="">
             <a:extLst xmlns:a="http://schemas.openxmlformats.org/drawingml/2006/main">
               <a:ext uri="{FF2B5EF4-FFF2-40B4-BE49-F238E27FC236}">
-                <a16:creationId xmlns:a16="http://schemas.microsoft.com/office/drawing/2014/main" id="{1EF9CA48-89DE-43C4-A11D-9EA9E6CB10F9}"/>
+                <a16:creationId xmlns:a16="http://schemas.microsoft.com/office/drawing/2014/main" id="{16A24BD4-4006-4594-A441-640A0383544E}"/>
               </a:ext>
             </a:extLst>
           </p:cNvPr>
@@ -25361,7 +25361,7 @@
           <p:cNvPr id="78" name="">
             <a:extLst xmlns:a="http://schemas.openxmlformats.org/drawingml/2006/main">
               <a:ext uri="{FF2B5EF4-FFF2-40B4-BE49-F238E27FC236}">
-                <a16:creationId xmlns:a16="http://schemas.microsoft.com/office/drawing/2014/main" id="{BC9D1FAF-81C2-46E5-81EF-3ADAF4861284}"/>
+                <a16:creationId xmlns:a16="http://schemas.microsoft.com/office/drawing/2014/main" id="{F9F6AEC3-4331-407F-AC9A-B34F7A615088}"/>
               </a:ext>
             </a:extLst>
           </p:cNvPr>
@@ -25392,7 +25392,7 @@
           <p:cNvPr id="79" name="">
             <a:extLst xmlns:a="http://schemas.openxmlformats.org/drawingml/2006/main">
               <a:ext uri="{FF2B5EF4-FFF2-40B4-BE49-F238E27FC236}">
-                <a16:creationId xmlns:a16="http://schemas.microsoft.com/office/drawing/2014/main" id="{DB44966E-AF62-4354-A0FF-30769C3BDF4B}"/>
+                <a16:creationId xmlns:a16="http://schemas.microsoft.com/office/drawing/2014/main" id="{CC438874-165A-466E-BEBB-CC2D1D600B33}"/>
               </a:ext>
             </a:extLst>
           </p:cNvPr>
@@ -25444,7 +25444,7 @@
           <p:cNvPr id="80" name="">
             <a:extLst xmlns:a="http://schemas.openxmlformats.org/drawingml/2006/main">
               <a:ext uri="{FF2B5EF4-FFF2-40B4-BE49-F238E27FC236}">
-                <a16:creationId xmlns:a16="http://schemas.microsoft.com/office/drawing/2014/main" id="{B921A34B-B501-4262-A39E-8E237D4101FB}"/>
+                <a16:creationId xmlns:a16="http://schemas.microsoft.com/office/drawing/2014/main" id="{73ADDC4C-C6CA-4C89-9A5C-ACAF611FD677}"/>
               </a:ext>
             </a:extLst>
           </p:cNvPr>
@@ -25496,7 +25496,7 @@
           <p:cNvPr id="81" name="">
             <a:extLst xmlns:a="http://schemas.openxmlformats.org/drawingml/2006/main">
               <a:ext uri="{FF2B5EF4-FFF2-40B4-BE49-F238E27FC236}">
-                <a16:creationId xmlns:a16="http://schemas.microsoft.com/office/drawing/2014/main" id="{D8518B64-5815-41BB-BDBF-23A21DE3726B}"/>
+                <a16:creationId xmlns:a16="http://schemas.microsoft.com/office/drawing/2014/main" id="{411D1754-9CF2-4F25-8ACF-0C8639ED0D8D}"/>
               </a:ext>
             </a:extLst>
           </p:cNvPr>
@@ -25548,7 +25548,7 @@
           <p:cNvPr id="82" name="">
             <a:extLst xmlns:a="http://schemas.openxmlformats.org/drawingml/2006/main">
               <a:ext uri="{FF2B5EF4-FFF2-40B4-BE49-F238E27FC236}">
-                <a16:creationId xmlns:a16="http://schemas.microsoft.com/office/drawing/2014/main" id="{6FC063A4-02C0-419D-A16F-E20D79FDC5A9}"/>
+                <a16:creationId xmlns:a16="http://schemas.microsoft.com/office/drawing/2014/main" id="{F31C34B1-ECD6-4EB4-BCA6-84E9CEB55145}"/>
               </a:ext>
             </a:extLst>
           </p:cNvPr>
@@ -25600,7 +25600,7 @@
           <p:cNvPr id="83" name="">
             <a:extLst xmlns:a="http://schemas.openxmlformats.org/drawingml/2006/main">
               <a:ext uri="{FF2B5EF4-FFF2-40B4-BE49-F238E27FC236}">
-                <a16:creationId xmlns:a16="http://schemas.microsoft.com/office/drawing/2014/main" id="{FA4A852B-22E5-411A-AA38-02C3B7E3E170}"/>
+                <a16:creationId xmlns:a16="http://schemas.microsoft.com/office/drawing/2014/main" id="{FC034214-B547-47F5-A2AB-A0960D097517}"/>
               </a:ext>
             </a:extLst>
           </p:cNvPr>
@@ -25652,7 +25652,7 @@
           <p:cNvPr id="84" name="">
             <a:extLst xmlns:a="http://schemas.openxmlformats.org/drawingml/2006/main">
               <a:ext uri="{FF2B5EF4-FFF2-40B4-BE49-F238E27FC236}">
-                <a16:creationId xmlns:a16="http://schemas.microsoft.com/office/drawing/2014/main" id="{496E9DB3-4B6A-403E-93A9-81D450D548F9}"/>
+                <a16:creationId xmlns:a16="http://schemas.microsoft.com/office/drawing/2014/main" id="{E0CE450D-FD90-42B8-8E24-23BB7751DDF8}"/>
               </a:ext>
             </a:extLst>
           </p:cNvPr>
@@ -25704,7 +25704,7 @@
           <p:cNvPr id="85" name="">
             <a:extLst xmlns:a="http://schemas.openxmlformats.org/drawingml/2006/main">
               <a:ext uri="{FF2B5EF4-FFF2-40B4-BE49-F238E27FC236}">
-                <a16:creationId xmlns:a16="http://schemas.microsoft.com/office/drawing/2014/main" id="{2318AAED-C905-428C-89FE-675D7DD4309F}"/>
+                <a16:creationId xmlns:a16="http://schemas.microsoft.com/office/drawing/2014/main" id="{67A27090-0302-438B-A4DC-FF0D9299F22F}"/>
               </a:ext>
             </a:extLst>
           </p:cNvPr>
@@ -25756,7 +25756,7 @@
           <p:cNvPr id="86" name="">
             <a:extLst xmlns:a="http://schemas.openxmlformats.org/drawingml/2006/main">
               <a:ext uri="{FF2B5EF4-FFF2-40B4-BE49-F238E27FC236}">
-                <a16:creationId xmlns:a16="http://schemas.microsoft.com/office/drawing/2014/main" id="{896E2E63-5FC4-4EBD-B376-3B49ABC9C352}"/>
+                <a16:creationId xmlns:a16="http://schemas.microsoft.com/office/drawing/2014/main" id="{EEDA4EDE-AA11-4421-8442-4734C28F16FD}"/>
               </a:ext>
             </a:extLst>
           </p:cNvPr>
@@ -25808,7 +25808,7 @@
           <p:cNvPr id="87" name="">
             <a:extLst xmlns:a="http://schemas.openxmlformats.org/drawingml/2006/main">
               <a:ext uri="{FF2B5EF4-FFF2-40B4-BE49-F238E27FC236}">
-                <a16:creationId xmlns:a16="http://schemas.microsoft.com/office/drawing/2014/main" id="{0642039C-2C6D-4A75-B42F-8D7C9F49EF74}"/>
+                <a16:creationId xmlns:a16="http://schemas.microsoft.com/office/drawing/2014/main" id="{E185CFD4-7694-4BE6-8416-9DFC7BCAFECD}"/>
               </a:ext>
             </a:extLst>
           </p:cNvPr>
@@ -25839,7 +25839,7 @@
           <p:cNvPr id="88" name="">
             <a:extLst xmlns:a="http://schemas.openxmlformats.org/drawingml/2006/main">
               <a:ext uri="{FF2B5EF4-FFF2-40B4-BE49-F238E27FC236}">
-                <a16:creationId xmlns:a16="http://schemas.microsoft.com/office/drawing/2014/main" id="{69D704AA-1045-4C93-A5ED-4ECADE10DE9E}"/>
+                <a16:creationId xmlns:a16="http://schemas.microsoft.com/office/drawing/2014/main" id="{04577B8B-82ED-4941-8D34-607AD21D959E}"/>
               </a:ext>
             </a:extLst>
           </p:cNvPr>
@@ -25870,7 +25870,7 @@
           <p:cNvPr id="89" name="">
             <a:extLst xmlns:a="http://schemas.openxmlformats.org/drawingml/2006/main">
               <a:ext uri="{FF2B5EF4-FFF2-40B4-BE49-F238E27FC236}">
-                <a16:creationId xmlns:a16="http://schemas.microsoft.com/office/drawing/2014/main" id="{16A219BF-CB4D-4D32-A0B6-76B56B655153}"/>
+                <a16:creationId xmlns:a16="http://schemas.microsoft.com/office/drawing/2014/main" id="{5C91E12C-5B4A-4144-80E3-74F6A499DECF}"/>
               </a:ext>
             </a:extLst>
           </p:cNvPr>
@@ -25922,7 +25922,7 @@
           <p:cNvPr id="90" name="">
             <a:extLst xmlns:a="http://schemas.openxmlformats.org/drawingml/2006/main">
               <a:ext uri="{FF2B5EF4-FFF2-40B4-BE49-F238E27FC236}">
-                <a16:creationId xmlns:a16="http://schemas.microsoft.com/office/drawing/2014/main" id="{5EF4C4E4-F956-4ABE-86F1-92267DE47AA7}"/>
+                <a16:creationId xmlns:a16="http://schemas.microsoft.com/office/drawing/2014/main" id="{C6981B41-D6E3-4D45-A08D-565123E6ECE7}"/>
               </a:ext>
             </a:extLst>
           </p:cNvPr>
@@ -25974,7 +25974,7 @@
           <p:cNvPr id="91" name="">
             <a:extLst xmlns:a="http://schemas.openxmlformats.org/drawingml/2006/main">
               <a:ext uri="{FF2B5EF4-FFF2-40B4-BE49-F238E27FC236}">
-                <a16:creationId xmlns:a16="http://schemas.microsoft.com/office/drawing/2014/main" id="{935FE395-F74E-45E7-AD5D-0A1C8E58A105}"/>
+                <a16:creationId xmlns:a16="http://schemas.microsoft.com/office/drawing/2014/main" id="{3E117B8E-9717-4661-8D82-E1B97238FEBB}"/>
               </a:ext>
             </a:extLst>
           </p:cNvPr>
@@ -26026,7 +26026,7 @@
           <p:cNvPr id="92" name="">
             <a:extLst xmlns:a="http://schemas.openxmlformats.org/drawingml/2006/main">
               <a:ext uri="{FF2B5EF4-FFF2-40B4-BE49-F238E27FC236}">
-                <a16:creationId xmlns:a16="http://schemas.microsoft.com/office/drawing/2014/main" id="{59566F69-7BB9-42F2-8630-F7F6D385A177}"/>
+                <a16:creationId xmlns:a16="http://schemas.microsoft.com/office/drawing/2014/main" id="{CCC8EF1D-CE97-4E8A-A3FB-7A42721BE81E}"/>
               </a:ext>
             </a:extLst>
           </p:cNvPr>
@@ -26078,7 +26078,7 @@
           <p:cNvPr id="93" name="">
             <a:extLst xmlns:a="http://schemas.openxmlformats.org/drawingml/2006/main">
               <a:ext uri="{FF2B5EF4-FFF2-40B4-BE49-F238E27FC236}">
-                <a16:creationId xmlns:a16="http://schemas.microsoft.com/office/drawing/2014/main" id="{C7EAA9B0-4A33-4D90-8BFB-2D3C698DB978}"/>
+                <a16:creationId xmlns:a16="http://schemas.microsoft.com/office/drawing/2014/main" id="{A1758F02-7E06-4214-B3C9-03B7231CF9B9}"/>
               </a:ext>
             </a:extLst>
           </p:cNvPr>
@@ -26130,7 +26130,7 @@
           <p:cNvPr id="94" name="">
             <a:extLst xmlns:a="http://schemas.openxmlformats.org/drawingml/2006/main">
               <a:ext uri="{FF2B5EF4-FFF2-40B4-BE49-F238E27FC236}">
-                <a16:creationId xmlns:a16="http://schemas.microsoft.com/office/drawing/2014/main" id="{4A699D8A-50E2-4015-870E-99BBAFAF9CD1}"/>
+                <a16:creationId xmlns:a16="http://schemas.microsoft.com/office/drawing/2014/main" id="{D4DD916C-2750-4D03-B2BF-3A25DF503BF9}"/>
               </a:ext>
             </a:extLst>
           </p:cNvPr>
@@ -26182,7 +26182,7 @@
           <p:cNvPr id="95" name="">
             <a:extLst xmlns:a="http://schemas.openxmlformats.org/drawingml/2006/main">
               <a:ext uri="{FF2B5EF4-FFF2-40B4-BE49-F238E27FC236}">
-                <a16:creationId xmlns:a16="http://schemas.microsoft.com/office/drawing/2014/main" id="{03FC85FA-32A7-4FDE-8F04-4D496E927A9C}"/>
+                <a16:creationId xmlns:a16="http://schemas.microsoft.com/office/drawing/2014/main" id="{4B42EE96-8B33-47FC-B778-2DA8A0AD4A29}"/>
               </a:ext>
             </a:extLst>
           </p:cNvPr>
@@ -26234,7 +26234,7 @@
           <p:cNvPr id="96" name="">
             <a:extLst xmlns:a="http://schemas.openxmlformats.org/drawingml/2006/main">
               <a:ext uri="{FF2B5EF4-FFF2-40B4-BE49-F238E27FC236}">
-                <a16:creationId xmlns:a16="http://schemas.microsoft.com/office/drawing/2014/main" id="{EA5F6EE2-165E-49FA-B8F1-B1DFD0148D58}"/>
+                <a16:creationId xmlns:a16="http://schemas.microsoft.com/office/drawing/2014/main" id="{92F9B570-9D18-407E-BB20-4B6D8CA3AC2E}"/>
               </a:ext>
             </a:extLst>
           </p:cNvPr>
@@ -26286,7 +26286,7 @@
           <p:cNvPr id="97" name="">
             <a:extLst xmlns:a="http://schemas.openxmlformats.org/drawingml/2006/main">
               <a:ext uri="{FF2B5EF4-FFF2-40B4-BE49-F238E27FC236}">
-                <a16:creationId xmlns:a16="http://schemas.microsoft.com/office/drawing/2014/main" id="{1F7A1536-6577-4D7B-860A-4CCEB807EA1B}"/>
+                <a16:creationId xmlns:a16="http://schemas.microsoft.com/office/drawing/2014/main" id="{66BCBB37-6AE3-4DB5-A7B4-281D5B144DA4}"/>
               </a:ext>
             </a:extLst>
           </p:cNvPr>
@@ -26317,7 +26317,7 @@
           <p:cNvPr id="98" name="">
             <a:extLst xmlns:a="http://schemas.openxmlformats.org/drawingml/2006/main">
               <a:ext uri="{FF2B5EF4-FFF2-40B4-BE49-F238E27FC236}">
-                <a16:creationId xmlns:a16="http://schemas.microsoft.com/office/drawing/2014/main" id="{3B165476-DC89-496D-B2D6-D676341E6EF6}"/>
+                <a16:creationId xmlns:a16="http://schemas.microsoft.com/office/drawing/2014/main" id="{9AF1F86E-81E8-43B7-903F-DFF45FC77CA5}"/>
               </a:ext>
             </a:extLst>
           </p:cNvPr>
@@ -26369,7 +26369,7 @@
           <p:cNvPr id="99" name="">
             <a:extLst xmlns:a="http://schemas.openxmlformats.org/drawingml/2006/main">
               <a:ext uri="{FF2B5EF4-FFF2-40B4-BE49-F238E27FC236}">
-                <a16:creationId xmlns:a16="http://schemas.microsoft.com/office/drawing/2014/main" id="{875FDAC3-2B1A-483C-B56B-61F3BE368D9D}"/>
+                <a16:creationId xmlns:a16="http://schemas.microsoft.com/office/drawing/2014/main" id="{A7F9D8B2-16A7-40E5-A962-C65DC4B7D91E}"/>
               </a:ext>
             </a:extLst>
           </p:cNvPr>
@@ -26421,7 +26421,7 @@
           <p:cNvPr id="100" name="">
             <a:extLst xmlns:a="http://schemas.openxmlformats.org/drawingml/2006/main">
               <a:ext uri="{FF2B5EF4-FFF2-40B4-BE49-F238E27FC236}">
-                <a16:creationId xmlns:a16="http://schemas.microsoft.com/office/drawing/2014/main" id="{401AA130-E3AE-4A9E-B7BB-31C34D199E9E}"/>
+                <a16:creationId xmlns:a16="http://schemas.microsoft.com/office/drawing/2014/main" id="{418F97A2-3D69-46F6-A6AE-430BAD1097A8}"/>
               </a:ext>
             </a:extLst>
           </p:cNvPr>
@@ -26473,7 +26473,7 @@
           <p:cNvPr id="101" name="">
             <a:extLst xmlns:a="http://schemas.openxmlformats.org/drawingml/2006/main">
               <a:ext uri="{FF2B5EF4-FFF2-40B4-BE49-F238E27FC236}">
-                <a16:creationId xmlns:a16="http://schemas.microsoft.com/office/drawing/2014/main" id="{5CFA25D3-46EB-423D-8109-3DE90CAD631C}"/>
+                <a16:creationId xmlns:a16="http://schemas.microsoft.com/office/drawing/2014/main" id="{539A2A34-BA55-42B7-8DFB-B3133BF2FC09}"/>
               </a:ext>
             </a:extLst>
           </p:cNvPr>
@@ -26525,7 +26525,7 @@
           <p:cNvPr id="102" name="">
             <a:extLst xmlns:a="http://schemas.openxmlformats.org/drawingml/2006/main">
               <a:ext uri="{FF2B5EF4-FFF2-40B4-BE49-F238E27FC236}">
-                <a16:creationId xmlns:a16="http://schemas.microsoft.com/office/drawing/2014/main" id="{EE56C8CE-E4AD-40EC-A19C-C83887FB8D91}"/>
+                <a16:creationId xmlns:a16="http://schemas.microsoft.com/office/drawing/2014/main" id="{85E48AEE-3D2E-46C6-9EE5-11A683D5946F}"/>
               </a:ext>
             </a:extLst>
           </p:cNvPr>
@@ -26577,7 +26577,7 @@
           <p:cNvPr id="103" name="">
             <a:extLst xmlns:a="http://schemas.openxmlformats.org/drawingml/2006/main">
               <a:ext uri="{FF2B5EF4-FFF2-40B4-BE49-F238E27FC236}">
-                <a16:creationId xmlns:a16="http://schemas.microsoft.com/office/drawing/2014/main" id="{A2489603-1D86-4CF7-8ABE-FC2C17CB03C4}"/>
+                <a16:creationId xmlns:a16="http://schemas.microsoft.com/office/drawing/2014/main" id="{757FA5EC-5DF7-42D7-A914-59C072998580}"/>
               </a:ext>
             </a:extLst>
           </p:cNvPr>
@@ -26629,7 +26629,7 @@
           <p:cNvPr id="104" name="">
             <a:extLst xmlns:a="http://schemas.openxmlformats.org/drawingml/2006/main">
               <a:ext uri="{FF2B5EF4-FFF2-40B4-BE49-F238E27FC236}">
-                <a16:creationId xmlns:a16="http://schemas.microsoft.com/office/drawing/2014/main" id="{649430EC-BD95-4DA4-83B5-20110446B5C7}"/>
+                <a16:creationId xmlns:a16="http://schemas.microsoft.com/office/drawing/2014/main" id="{21F92F78-44BA-4B9E-92A2-6CD64AB8BB7F}"/>
               </a:ext>
             </a:extLst>
           </p:cNvPr>
@@ -26681,7 +26681,7 @@
           <p:cNvPr id="105" name="">
             <a:extLst xmlns:a="http://schemas.openxmlformats.org/drawingml/2006/main">
               <a:ext uri="{FF2B5EF4-FFF2-40B4-BE49-F238E27FC236}">
-                <a16:creationId xmlns:a16="http://schemas.microsoft.com/office/drawing/2014/main" id="{29AE08EC-5CD1-4232-BD89-B6887176F66C}"/>
+                <a16:creationId xmlns:a16="http://schemas.microsoft.com/office/drawing/2014/main" id="{57AAE360-59A3-4A33-A3F1-C6F0E75C1602}"/>
               </a:ext>
             </a:extLst>
           </p:cNvPr>
@@ -26733,7 +26733,7 @@
           <p:cNvPr id="106" name="">
             <a:extLst xmlns:a="http://schemas.openxmlformats.org/drawingml/2006/main">
               <a:ext uri="{FF2B5EF4-FFF2-40B4-BE49-F238E27FC236}">
-                <a16:creationId xmlns:a16="http://schemas.microsoft.com/office/drawing/2014/main" id="{028834E4-5659-4A13-B800-6E153FD067F4}"/>
+                <a16:creationId xmlns:a16="http://schemas.microsoft.com/office/drawing/2014/main" id="{00245306-A3DD-4199-A0C1-2417511F34B2}"/>
               </a:ext>
             </a:extLst>
           </p:cNvPr>
@@ -26764,7 +26764,7 @@
           <p:cNvPr id="107" name="">
             <a:extLst xmlns:a="http://schemas.openxmlformats.org/drawingml/2006/main">
               <a:ext uri="{FF2B5EF4-FFF2-40B4-BE49-F238E27FC236}">
-                <a16:creationId xmlns:a16="http://schemas.microsoft.com/office/drawing/2014/main" id="{C06FD004-E2E5-4C49-8D85-856CE98E5848}"/>
+                <a16:creationId xmlns:a16="http://schemas.microsoft.com/office/drawing/2014/main" id="{C87CA76A-0ECD-47BF-89AC-E11438848C2E}"/>
               </a:ext>
             </a:extLst>
           </p:cNvPr>
@@ -26795,7 +26795,7 @@
           <p:cNvPr id="108" name="">
             <a:extLst xmlns:a="http://schemas.openxmlformats.org/drawingml/2006/main">
               <a:ext uri="{FF2B5EF4-FFF2-40B4-BE49-F238E27FC236}">
-                <a16:creationId xmlns:a16="http://schemas.microsoft.com/office/drawing/2014/main" id="{F8039933-EA65-4853-B634-B5BD29409E12}"/>
+                <a16:creationId xmlns:a16="http://schemas.microsoft.com/office/drawing/2014/main" id="{AA70FB6E-F0EF-4FA4-99E2-E56560E75493}"/>
               </a:ext>
             </a:extLst>
           </p:cNvPr>
@@ -26847,7 +26847,7 @@
           <p:cNvPr id="109" name="">
             <a:extLst xmlns:a="http://schemas.openxmlformats.org/drawingml/2006/main">
               <a:ext uri="{FF2B5EF4-FFF2-40B4-BE49-F238E27FC236}">
-                <a16:creationId xmlns:a16="http://schemas.microsoft.com/office/drawing/2014/main" id="{407C17DE-D295-4822-AD0F-6D43CF3922FA}"/>
+                <a16:creationId xmlns:a16="http://schemas.microsoft.com/office/drawing/2014/main" id="{10A13DA6-F798-4B55-83E8-30D2BE9C5BFD}"/>
               </a:ext>
             </a:extLst>
           </p:cNvPr>
@@ -26899,7 +26899,7 @@
           <p:cNvPr id="110" name="">
             <a:extLst xmlns:a="http://schemas.openxmlformats.org/drawingml/2006/main">
               <a:ext uri="{FF2B5EF4-FFF2-40B4-BE49-F238E27FC236}">
-                <a16:creationId xmlns:a16="http://schemas.microsoft.com/office/drawing/2014/main" id="{06A6130F-3B42-4BCD-B5D1-7729E379CEB6}"/>
+                <a16:creationId xmlns:a16="http://schemas.microsoft.com/office/drawing/2014/main" id="{CA5B416C-39FF-43E5-9C38-8AF49B5308EB}"/>
               </a:ext>
             </a:extLst>
           </p:cNvPr>
@@ -26951,7 +26951,7 @@
           <p:cNvPr id="111" name="">
             <a:extLst xmlns:a="http://schemas.openxmlformats.org/drawingml/2006/main">
               <a:ext uri="{FF2B5EF4-FFF2-40B4-BE49-F238E27FC236}">
-                <a16:creationId xmlns:a16="http://schemas.microsoft.com/office/drawing/2014/main" id="{EF62DBE2-3F40-4FA3-A754-15CD880A8BFD}"/>
+                <a16:creationId xmlns:a16="http://schemas.microsoft.com/office/drawing/2014/main" id="{9DBB3948-6862-4EA8-96C4-7B7A3825503B}"/>
               </a:ext>
             </a:extLst>
           </p:cNvPr>
@@ -27003,7 +27003,7 @@
           <p:cNvPr id="112" name="">
             <a:extLst xmlns:a="http://schemas.openxmlformats.org/drawingml/2006/main">
               <a:ext uri="{FF2B5EF4-FFF2-40B4-BE49-F238E27FC236}">
-                <a16:creationId xmlns:a16="http://schemas.microsoft.com/office/drawing/2014/main" id="{3EA15319-31B8-42BD-A0A8-951F6BAC7768}"/>
+                <a16:creationId xmlns:a16="http://schemas.microsoft.com/office/drawing/2014/main" id="{7623691E-2ECD-4FAD-BBAE-8261CE1EDA48}"/>
               </a:ext>
             </a:extLst>
           </p:cNvPr>
@@ -27055,7 +27055,7 @@
           <p:cNvPr id="113" name="">
             <a:extLst xmlns:a="http://schemas.openxmlformats.org/drawingml/2006/main">
               <a:ext uri="{FF2B5EF4-FFF2-40B4-BE49-F238E27FC236}">
-                <a16:creationId xmlns:a16="http://schemas.microsoft.com/office/drawing/2014/main" id="{A4E3C799-69B1-42BC-B19F-AB0B3B173632}"/>
+                <a16:creationId xmlns:a16="http://schemas.microsoft.com/office/drawing/2014/main" id="{B7022362-56C0-4FB6-9BE0-89E95F953C55}"/>
               </a:ext>
             </a:extLst>
           </p:cNvPr>
@@ -27107,7 +27107,7 @@
           <p:cNvPr id="114" name="">
             <a:extLst xmlns:a="http://schemas.openxmlformats.org/drawingml/2006/main">
               <a:ext uri="{FF2B5EF4-FFF2-40B4-BE49-F238E27FC236}">
-                <a16:creationId xmlns:a16="http://schemas.microsoft.com/office/drawing/2014/main" id="{39CDB168-7BA0-4615-811B-E05741F00587}"/>
+                <a16:creationId xmlns:a16="http://schemas.microsoft.com/office/drawing/2014/main" id="{C75557B9-8BF3-41CE-9544-662697BC091E}"/>
               </a:ext>
             </a:extLst>
           </p:cNvPr>
@@ -27159,7 +27159,7 @@
           <p:cNvPr id="115" name="">
             <a:extLst xmlns:a="http://schemas.openxmlformats.org/drawingml/2006/main">
               <a:ext uri="{FF2B5EF4-FFF2-40B4-BE49-F238E27FC236}">
-                <a16:creationId xmlns:a16="http://schemas.microsoft.com/office/drawing/2014/main" id="{CC99B0E7-9994-4A6E-8B09-C7A1A0EE3CB1}"/>
+                <a16:creationId xmlns:a16="http://schemas.microsoft.com/office/drawing/2014/main" id="{29CA907A-2136-4CEF-94DB-93F9A93A6421}"/>
               </a:ext>
             </a:extLst>
           </p:cNvPr>
@@ -27211,7 +27211,7 @@
           <p:cNvPr id="116" name="">
             <a:extLst xmlns:a="http://schemas.openxmlformats.org/drawingml/2006/main">
               <a:ext uri="{FF2B5EF4-FFF2-40B4-BE49-F238E27FC236}">
-                <a16:creationId xmlns:a16="http://schemas.microsoft.com/office/drawing/2014/main" id="{95246A2B-783B-4B8C-BB66-18368F148F08}"/>
+                <a16:creationId xmlns:a16="http://schemas.microsoft.com/office/drawing/2014/main" id="{C4F1FEA0-6C42-4F6A-84D7-1F9481555E07}"/>
               </a:ext>
             </a:extLst>
           </p:cNvPr>
@@ -27242,7 +27242,7 @@
           <p:cNvPr id="117" name="">
             <a:extLst xmlns:a="http://schemas.openxmlformats.org/drawingml/2006/main">
               <a:ext uri="{FF2B5EF4-FFF2-40B4-BE49-F238E27FC236}">
-                <a16:creationId xmlns:a16="http://schemas.microsoft.com/office/drawing/2014/main" id="{6CBDE212-06AD-4CA5-B791-7C7DE38C44BD}"/>
+                <a16:creationId xmlns:a16="http://schemas.microsoft.com/office/drawing/2014/main" id="{D3CCB48A-6ABD-4802-86C3-90F508C58CAE}"/>
               </a:ext>
             </a:extLst>
           </p:cNvPr>
@@ -27294,7 +27294,7 @@
           <p:cNvPr id="118" name="">
             <a:extLst xmlns:a="http://schemas.openxmlformats.org/drawingml/2006/main">
               <a:ext uri="{FF2B5EF4-FFF2-40B4-BE49-F238E27FC236}">
-                <a16:creationId xmlns:a16="http://schemas.microsoft.com/office/drawing/2014/main" id="{50301C30-6F3F-46C7-A182-B3102DEDD977}"/>
+                <a16:creationId xmlns:a16="http://schemas.microsoft.com/office/drawing/2014/main" id="{15A7D364-192B-4B8B-9A00-DA9DAD833F00}"/>
               </a:ext>
             </a:extLst>
           </p:cNvPr>
@@ -27346,7 +27346,7 @@
           <p:cNvPr id="119" name="">
             <a:extLst xmlns:a="http://schemas.openxmlformats.org/drawingml/2006/main">
               <a:ext uri="{FF2B5EF4-FFF2-40B4-BE49-F238E27FC236}">
-                <a16:creationId xmlns:a16="http://schemas.microsoft.com/office/drawing/2014/main" id="{3088F20E-9E86-4D8B-8343-19977BAFDFF3}"/>
+                <a16:creationId xmlns:a16="http://schemas.microsoft.com/office/drawing/2014/main" id="{41E17F31-F0CC-42D4-AC9D-1E836B3D4CE4}"/>
               </a:ext>
             </a:extLst>
           </p:cNvPr>
@@ -27398,7 +27398,7 @@
           <p:cNvPr id="120" name="">
             <a:extLst xmlns:a="http://schemas.openxmlformats.org/drawingml/2006/main">
               <a:ext uri="{FF2B5EF4-FFF2-40B4-BE49-F238E27FC236}">
-                <a16:creationId xmlns:a16="http://schemas.microsoft.com/office/drawing/2014/main" id="{407DB1C5-70C1-455C-BD90-FE014C4B2F78}"/>
+                <a16:creationId xmlns:a16="http://schemas.microsoft.com/office/drawing/2014/main" id="{73568196-55B8-4F9C-A79C-32FD0BCF5D9B}"/>
               </a:ext>
             </a:extLst>
           </p:cNvPr>
@@ -27450,7 +27450,7 @@
           <p:cNvPr id="121" name="">
             <a:extLst xmlns:a="http://schemas.openxmlformats.org/drawingml/2006/main">
               <a:ext uri="{FF2B5EF4-FFF2-40B4-BE49-F238E27FC236}">
-                <a16:creationId xmlns:a16="http://schemas.microsoft.com/office/drawing/2014/main" id="{97DC7260-67C3-418F-95DB-BD3F0A9DA64C}"/>
+                <a16:creationId xmlns:a16="http://schemas.microsoft.com/office/drawing/2014/main" id="{64DC4CD1-0574-4D9B-9627-D78339899656}"/>
               </a:ext>
             </a:extLst>
           </p:cNvPr>
@@ -27502,7 +27502,7 @@
           <p:cNvPr id="122" name="">
             <a:extLst xmlns:a="http://schemas.openxmlformats.org/drawingml/2006/main">
               <a:ext uri="{FF2B5EF4-FFF2-40B4-BE49-F238E27FC236}">
-                <a16:creationId xmlns:a16="http://schemas.microsoft.com/office/drawing/2014/main" id="{AF1254AF-68CD-4ECA-B339-89386DAA5FB8}"/>
+                <a16:creationId xmlns:a16="http://schemas.microsoft.com/office/drawing/2014/main" id="{BEEC1FCE-53A5-4C16-B381-1B13211464FC}"/>
               </a:ext>
             </a:extLst>
           </p:cNvPr>
@@ -27554,7 +27554,7 @@
           <p:cNvPr id="123" name="">
             <a:extLst xmlns:a="http://schemas.openxmlformats.org/drawingml/2006/main">
               <a:ext uri="{FF2B5EF4-FFF2-40B4-BE49-F238E27FC236}">
-                <a16:creationId xmlns:a16="http://schemas.microsoft.com/office/drawing/2014/main" id="{1246757C-087A-45BB-98BA-A84A06C0AD8A}"/>
+                <a16:creationId xmlns:a16="http://schemas.microsoft.com/office/drawing/2014/main" id="{F82F95EB-3F29-4AE6-8619-58596FF1283A}"/>
               </a:ext>
             </a:extLst>
           </p:cNvPr>
@@ -27606,7 +27606,7 @@
           <p:cNvPr id="124" name="">
             <a:extLst xmlns:a="http://schemas.openxmlformats.org/drawingml/2006/main">
               <a:ext uri="{FF2B5EF4-FFF2-40B4-BE49-F238E27FC236}">
-                <a16:creationId xmlns:a16="http://schemas.microsoft.com/office/drawing/2014/main" id="{65D5BA3B-1ABD-4CF5-A1F5-233D89DA915C}"/>
+                <a16:creationId xmlns:a16="http://schemas.microsoft.com/office/drawing/2014/main" id="{5D6E0AD2-DAB1-4746-88D4-D182ACC39E8F}"/>
               </a:ext>
             </a:extLst>
           </p:cNvPr>
@@ -27658,7 +27658,7 @@
           <p:cNvPr id="125" name="">
             <a:extLst xmlns:a="http://schemas.openxmlformats.org/drawingml/2006/main">
               <a:ext uri="{FF2B5EF4-FFF2-40B4-BE49-F238E27FC236}">
-                <a16:creationId xmlns:a16="http://schemas.microsoft.com/office/drawing/2014/main" id="{B1B9C0AC-EB8F-43A0-A73B-3012767768D7}"/>
+                <a16:creationId xmlns:a16="http://schemas.microsoft.com/office/drawing/2014/main" id="{43170BFA-329E-4404-85B5-6CFD6154777E}"/>
               </a:ext>
             </a:extLst>
           </p:cNvPr>
@@ -27689,7 +27689,7 @@
           <p:cNvPr id="126" name="">
             <a:extLst xmlns:a="http://schemas.openxmlformats.org/drawingml/2006/main">
               <a:ext uri="{FF2B5EF4-FFF2-40B4-BE49-F238E27FC236}">
-                <a16:creationId xmlns:a16="http://schemas.microsoft.com/office/drawing/2014/main" id="{DC2B2C17-9818-4B78-9BDF-53A357E35BD9}"/>
+                <a16:creationId xmlns:a16="http://schemas.microsoft.com/office/drawing/2014/main" id="{88D75D2D-7412-4D79-A920-DA6C338A12AF}"/>
               </a:ext>
             </a:extLst>
           </p:cNvPr>
@@ -27720,7 +27720,7 @@
           <p:cNvPr id="127" name="">
             <a:extLst xmlns:a="http://schemas.openxmlformats.org/drawingml/2006/main">
               <a:ext uri="{FF2B5EF4-FFF2-40B4-BE49-F238E27FC236}">
-                <a16:creationId xmlns:a16="http://schemas.microsoft.com/office/drawing/2014/main" id="{87E8405C-FA10-4FC4-A626-9C0DE3363CD4}"/>
+                <a16:creationId xmlns:a16="http://schemas.microsoft.com/office/drawing/2014/main" id="{EFBFB733-00FA-4FF5-A09E-FA686C72F19D}"/>
               </a:ext>
             </a:extLst>
           </p:cNvPr>
@@ -27772,7 +27772,7 @@
           <p:cNvPr id="128" name="">
             <a:extLst xmlns:a="http://schemas.openxmlformats.org/drawingml/2006/main">
               <a:ext uri="{FF2B5EF4-FFF2-40B4-BE49-F238E27FC236}">
-                <a16:creationId xmlns:a16="http://schemas.microsoft.com/office/drawing/2014/main" id="{652A5500-3715-4CB0-A882-FCCC9F146BF1}"/>
+                <a16:creationId xmlns:a16="http://schemas.microsoft.com/office/drawing/2014/main" id="{1CF295E4-4749-4477-9A77-D88DC930D860}"/>
               </a:ext>
             </a:extLst>
           </p:cNvPr>
@@ -27824,7 +27824,7 @@
           <p:cNvPr id="129" name="">
             <a:extLst xmlns:a="http://schemas.openxmlformats.org/drawingml/2006/main">
               <a:ext uri="{FF2B5EF4-FFF2-40B4-BE49-F238E27FC236}">
-                <a16:creationId xmlns:a16="http://schemas.microsoft.com/office/drawing/2014/main" id="{31CC185A-D573-4ACC-889B-AE9AFA90436A}"/>
+                <a16:creationId xmlns:a16="http://schemas.microsoft.com/office/drawing/2014/main" id="{900966AC-6EB8-4B79-A59F-692E9BD6A3F7}"/>
               </a:ext>
             </a:extLst>
           </p:cNvPr>
@@ -27876,7 +27876,7 @@
           <p:cNvPr id="130" name="">
             <a:extLst xmlns:a="http://schemas.openxmlformats.org/drawingml/2006/main">
               <a:ext uri="{FF2B5EF4-FFF2-40B4-BE49-F238E27FC236}">
-                <a16:creationId xmlns:a16="http://schemas.microsoft.com/office/drawing/2014/main" id="{4CB44216-ADF6-44B5-A449-47638571F62A}"/>
+                <a16:creationId xmlns:a16="http://schemas.microsoft.com/office/drawing/2014/main" id="{5EC91B2B-EFDF-4020-9C7C-2B75EAC5258F}"/>
               </a:ext>
             </a:extLst>
           </p:cNvPr>
@@ -27928,7 +27928,7 @@
           <p:cNvPr id="131" name="">
             <a:extLst xmlns:a="http://schemas.openxmlformats.org/drawingml/2006/main">
               <a:ext uri="{FF2B5EF4-FFF2-40B4-BE49-F238E27FC236}">
-                <a16:creationId xmlns:a16="http://schemas.microsoft.com/office/drawing/2014/main" id="{0E7EB1DA-A7ED-4BD2-B8E0-613D48E3F5E0}"/>
+                <a16:creationId xmlns:a16="http://schemas.microsoft.com/office/drawing/2014/main" id="{C6AC19CC-0D89-4177-8E99-FD8F446CCFFA}"/>
               </a:ext>
             </a:extLst>
           </p:cNvPr>
@@ -27980,7 +27980,7 @@
           <p:cNvPr id="132" name="">
             <a:extLst xmlns:a="http://schemas.openxmlformats.org/drawingml/2006/main">
               <a:ext uri="{FF2B5EF4-FFF2-40B4-BE49-F238E27FC236}">
-                <a16:creationId xmlns:a16="http://schemas.microsoft.com/office/drawing/2014/main" id="{56E59F95-3E0E-4AB4-B3A5-7CF8E4D6E143}"/>
+                <a16:creationId xmlns:a16="http://schemas.microsoft.com/office/drawing/2014/main" id="{83F782F8-8E1F-4D80-AE8E-BFF7FA3A7417}"/>
               </a:ext>
             </a:extLst>
           </p:cNvPr>
@@ -28032,7 +28032,7 @@
           <p:cNvPr id="133" name="">
             <a:extLst xmlns:a="http://schemas.openxmlformats.org/drawingml/2006/main">
               <a:ext uri="{FF2B5EF4-FFF2-40B4-BE49-F238E27FC236}">
-                <a16:creationId xmlns:a16="http://schemas.microsoft.com/office/drawing/2014/main" id="{CCB2144A-79FE-443F-97B3-EFD506BDD073}"/>
+                <a16:creationId xmlns:a16="http://schemas.microsoft.com/office/drawing/2014/main" id="{F190CEEE-D2C3-432D-B798-87BFCFB63415}"/>
               </a:ext>
             </a:extLst>
           </p:cNvPr>
@@ -28084,7 +28084,7 @@
           <p:cNvPr id="134" name="">
             <a:extLst xmlns:a="http://schemas.openxmlformats.org/drawingml/2006/main">
               <a:ext uri="{FF2B5EF4-FFF2-40B4-BE49-F238E27FC236}">
-                <a16:creationId xmlns:a16="http://schemas.microsoft.com/office/drawing/2014/main" id="{764162A8-CB4A-4704-9C64-96B5FBDA7D91}"/>
+                <a16:creationId xmlns:a16="http://schemas.microsoft.com/office/drawing/2014/main" id="{78A58DE6-5CDD-4E8D-A56A-55CE6A3F3477}"/>
               </a:ext>
             </a:extLst>
           </p:cNvPr>
@@ -28134,7 +28134,7 @@
     </p:spTree>
     <p:extLst>
       <p:ext uri="{BB962C8B-B14F-4D97-AF65-F5344CB8AC3E}">
-        <p14:creationId xmlns:p14="http://schemas.microsoft.com/office/powerpoint/2010/main" val="1186505329"/>
+        <p14:creationId xmlns:p14="http://schemas.microsoft.com/office/powerpoint/2010/main" val="234942059"/>
       </p:ext>
     </p:extLst>
   </p:cSld>
@@ -28165,7 +28165,7 @@
           <p:cNvPr id="9" name="">
             <a:extLst xmlns:a="http://schemas.openxmlformats.org/drawingml/2006/main">
               <a:ext uri="{FF2B5EF4-FFF2-40B4-BE49-F238E27FC236}">
-                <a16:creationId xmlns:a16="http://schemas.microsoft.com/office/drawing/2014/main" id="{A15DA0E7-A71D-4528-B12F-41E6849A936D}"/>
+                <a16:creationId xmlns:a16="http://schemas.microsoft.com/office/drawing/2014/main" id="{4DE229F6-BB65-4BCD-AD7B-94C30E1C1F7E}"/>
               </a:ext>
             </a:extLst>
           </p:cNvPr>
@@ -28198,7 +28198,7 @@
           <p:cNvPr id="2" name="">
             <a:extLst xmlns:a="http://schemas.openxmlformats.org/drawingml/2006/main">
               <a:ext uri="{FF2B5EF4-FFF2-40B4-BE49-F238E27FC236}">
-                <a16:creationId xmlns:a16="http://schemas.microsoft.com/office/drawing/2014/main" id="{D72099BE-817C-4DD6-B8CF-2695949363D0}"/>
+                <a16:creationId xmlns:a16="http://schemas.microsoft.com/office/drawing/2014/main" id="{A5F4500F-9776-44EA-BFE5-57811D7397E6}"/>
               </a:ext>
             </a:extLst>
           </p:cNvPr>
@@ -28229,7 +28229,7 @@
           <p:cNvPr id="3" name="">
             <a:extLst xmlns:a="http://schemas.openxmlformats.org/drawingml/2006/main">
               <a:ext uri="{FF2B5EF4-FFF2-40B4-BE49-F238E27FC236}">
-                <a16:creationId xmlns:a16="http://schemas.microsoft.com/office/drawing/2014/main" id="{80ABD950-E63F-4EB9-B794-7C4F731C75AB}"/>
+                <a16:creationId xmlns:a16="http://schemas.microsoft.com/office/drawing/2014/main" id="{A680E150-24A3-46DA-AE54-F21B31E3A0B7}"/>
               </a:ext>
             </a:extLst>
           </p:cNvPr>
@@ -28281,7 +28281,7 @@
           <p:cNvPr id="4" name="">
             <a:extLst xmlns:a="http://schemas.openxmlformats.org/drawingml/2006/main">
               <a:ext uri="{FF2B5EF4-FFF2-40B4-BE49-F238E27FC236}">
-                <a16:creationId xmlns:a16="http://schemas.microsoft.com/office/drawing/2014/main" id="{0B969829-B949-4DF9-B31A-505756FF988E}"/>
+                <a16:creationId xmlns:a16="http://schemas.microsoft.com/office/drawing/2014/main" id="{50BE8EC8-B138-4800-8694-361A48AA6E21}"/>
               </a:ext>
             </a:extLst>
           </p:cNvPr>
@@ -28316,7 +28316,7 @@
           <p:nvPr/>
         </p:nvPicPr>
         <p:blipFill>
-          <a:blip xmlns:r="http://schemas.openxmlformats.org/officeDocument/2006/relationships" xmlns:a="http://schemas.openxmlformats.org/drawingml/2006/main" r:embed="Rab004f0991584cb8"/>
+          <a:blip xmlns:r="http://schemas.openxmlformats.org/officeDocument/2006/relationships" xmlns:a="http://schemas.openxmlformats.org/drawingml/2006/main" r:embed="R90720a419b6a4fa6"/>
           <a:stretch xmlns:a="http://schemas.openxmlformats.org/drawingml/2006/main"/>
         </p:blipFill>
         <p:spPr>
@@ -28334,7 +28334,7 @@
           <p:cNvPr id="6" name="">
             <a:extLst xmlns:a="http://schemas.openxmlformats.org/drawingml/2006/main">
               <a:ext uri="{FF2B5EF4-FFF2-40B4-BE49-F238E27FC236}">
-                <a16:creationId xmlns:a16="http://schemas.microsoft.com/office/drawing/2014/main" id="{F9220ADF-CAE6-4171-BAB9-2D3BA65AA974}"/>
+                <a16:creationId xmlns:a16="http://schemas.microsoft.com/office/drawing/2014/main" id="{0CE64601-C0AB-4290-8930-E9D05D60B9ED}"/>
               </a:ext>
             </a:extLst>
           </p:cNvPr>
@@ -28386,7 +28386,7 @@
           <p:cNvPr id="7" name="">
             <a:extLst xmlns:a="http://schemas.openxmlformats.org/drawingml/2006/main">
               <a:ext uri="{FF2B5EF4-FFF2-40B4-BE49-F238E27FC236}">
-                <a16:creationId xmlns:a16="http://schemas.microsoft.com/office/drawing/2014/main" id="{711FA377-4661-41BF-A9CA-2BA1CEC3EA3F}"/>
+                <a16:creationId xmlns:a16="http://schemas.microsoft.com/office/drawing/2014/main" id="{84C583EB-D970-455D-9FA3-F8E7E069365B}"/>
               </a:ext>
             </a:extLst>
           </p:cNvPr>
@@ -28442,7 +28442,7 @@
           <p:nvPr/>
         </p:nvPicPr>
         <p:blipFill>
-          <a:blip xmlns:r="http://schemas.openxmlformats.org/officeDocument/2006/relationships" xmlns:a="http://schemas.openxmlformats.org/drawingml/2006/main" r:embed="R6698922500fb46c5"/>
+          <a:blip xmlns:r="http://schemas.openxmlformats.org/officeDocument/2006/relationships" xmlns:a="http://schemas.openxmlformats.org/drawingml/2006/main" r:embed="R254732d914844aa8"/>
           <a:stretch xmlns:a="http://schemas.openxmlformats.org/drawingml/2006/main"/>
         </p:blipFill>
         <p:spPr>
@@ -28458,7 +28458,7 @@
     </p:spTree>
     <p:extLst>
       <p:ext uri="{BB962C8B-B14F-4D97-AF65-F5344CB8AC3E}">
-        <p14:creationId xmlns:p14="http://schemas.microsoft.com/office/powerpoint/2010/main" val="1425566069"/>
+        <p14:creationId xmlns:p14="http://schemas.microsoft.com/office/powerpoint/2010/main" val="134738430"/>
       </p:ext>
     </p:extLst>
   </p:cSld>
@@ -28489,7 +28489,7 @@
           <p:cNvPr id="42" name="">
             <a:extLst xmlns:a="http://schemas.openxmlformats.org/drawingml/2006/main">
               <a:ext uri="{FF2B5EF4-FFF2-40B4-BE49-F238E27FC236}">
-                <a16:creationId xmlns:a16="http://schemas.microsoft.com/office/drawing/2014/main" id="{C9F93504-7A3F-42B8-AC1E-8C3DCD0E3E28}"/>
+                <a16:creationId xmlns:a16="http://schemas.microsoft.com/office/drawing/2014/main" id="{48E7E949-1039-40F8-A5FC-C9BD8B0030B4}"/>
               </a:ext>
             </a:extLst>
           </p:cNvPr>
@@ -28522,7 +28522,7 @@
           <p:cNvPr id="2" name="">
             <a:extLst xmlns:a="http://schemas.openxmlformats.org/drawingml/2006/main">
               <a:ext uri="{FF2B5EF4-FFF2-40B4-BE49-F238E27FC236}">
-                <a16:creationId xmlns:a16="http://schemas.microsoft.com/office/drawing/2014/main" id="{C460E100-D6EB-462B-AA9B-69BF565126BC}"/>
+                <a16:creationId xmlns:a16="http://schemas.microsoft.com/office/drawing/2014/main" id="{8A2BAFB8-7AA2-47F7-BB2F-1A86E52F948C}"/>
               </a:ext>
             </a:extLst>
           </p:cNvPr>
@@ -28553,7 +28553,7 @@
           <p:cNvPr id="3" name="">
             <a:extLst xmlns:a="http://schemas.openxmlformats.org/drawingml/2006/main">
               <a:ext uri="{FF2B5EF4-FFF2-40B4-BE49-F238E27FC236}">
-                <a16:creationId xmlns:a16="http://schemas.microsoft.com/office/drawing/2014/main" id="{130E3789-2FBB-44DE-BC36-5BB6B2F42ACE}"/>
+                <a16:creationId xmlns:a16="http://schemas.microsoft.com/office/drawing/2014/main" id="{D6CE40FF-BD56-4C79-A9FE-03EA692F5A37}"/>
               </a:ext>
             </a:extLst>
           </p:cNvPr>
@@ -28605,7 +28605,7 @@
           <p:cNvPr id="4" name="">
             <a:extLst xmlns:a="http://schemas.openxmlformats.org/drawingml/2006/main">
               <a:ext uri="{FF2B5EF4-FFF2-40B4-BE49-F238E27FC236}">
-                <a16:creationId xmlns:a16="http://schemas.microsoft.com/office/drawing/2014/main" id="{4096A220-5737-493C-95D7-B68057CD7C52}"/>
+                <a16:creationId xmlns:a16="http://schemas.microsoft.com/office/drawing/2014/main" id="{1053361A-884F-4A53-A470-927D0413D3E9}"/>
               </a:ext>
             </a:extLst>
           </p:cNvPr>
@@ -28657,7 +28657,7 @@
           <p:cNvPr id="5" name="">
             <a:extLst xmlns:a="http://schemas.openxmlformats.org/drawingml/2006/main">
               <a:ext uri="{FF2B5EF4-FFF2-40B4-BE49-F238E27FC236}">
-                <a16:creationId xmlns:a16="http://schemas.microsoft.com/office/drawing/2014/main" id="{D0BBA996-225D-4EE6-AC5B-E2C72B74908D}"/>
+                <a16:creationId xmlns:a16="http://schemas.microsoft.com/office/drawing/2014/main" id="{EE9B8E27-3C1F-4493-A839-F912F202584F}"/>
               </a:ext>
             </a:extLst>
           </p:cNvPr>
@@ -28692,7 +28692,7 @@
           <p:nvPr/>
         </p:nvPicPr>
         <p:blipFill>
-          <a:blip xmlns:r="http://schemas.openxmlformats.org/officeDocument/2006/relationships" xmlns:a="http://schemas.openxmlformats.org/drawingml/2006/main" r:embed="Ra9257d97aa9245fe"/>
+          <a:blip xmlns:r="http://schemas.openxmlformats.org/officeDocument/2006/relationships" xmlns:a="http://schemas.openxmlformats.org/drawingml/2006/main" r:embed="R633d1814555a450d"/>
           <a:stretch xmlns:a="http://schemas.openxmlformats.org/drawingml/2006/main"/>
         </p:blipFill>
         <p:spPr>
@@ -28710,7 +28710,7 @@
           <p:cNvPr id="7" name="">
             <a:extLst xmlns:a="http://schemas.openxmlformats.org/drawingml/2006/main">
               <a:ext uri="{FF2B5EF4-FFF2-40B4-BE49-F238E27FC236}">
-                <a16:creationId xmlns:a16="http://schemas.microsoft.com/office/drawing/2014/main" id="{A8BE4F2C-26E4-4D04-A217-9FB4178DF004}"/>
+                <a16:creationId xmlns:a16="http://schemas.microsoft.com/office/drawing/2014/main" id="{65D20761-EB75-4C75-85A4-0E1CCA96927F}"/>
               </a:ext>
             </a:extLst>
           </p:cNvPr>
@@ -28762,7 +28762,7 @@
           <p:cNvPr id="8" name="">
             <a:extLst xmlns:a="http://schemas.openxmlformats.org/drawingml/2006/main">
               <a:ext uri="{FF2B5EF4-FFF2-40B4-BE49-F238E27FC236}">
-                <a16:creationId xmlns:a16="http://schemas.microsoft.com/office/drawing/2014/main" id="{496A3A07-B946-4ECF-A8B5-3744CA6B2C76}"/>
+                <a16:creationId xmlns:a16="http://schemas.microsoft.com/office/drawing/2014/main" id="{B2CB9CD5-1D52-4D92-A29C-6396F1944BE0}"/>
               </a:ext>
             </a:extLst>
           </p:cNvPr>
@@ -28814,7 +28814,7 @@
           <p:cNvPr id="9" name="">
             <a:extLst xmlns:a="http://schemas.openxmlformats.org/drawingml/2006/main">
               <a:ext uri="{FF2B5EF4-FFF2-40B4-BE49-F238E27FC236}">
-                <a16:creationId xmlns:a16="http://schemas.microsoft.com/office/drawing/2014/main" id="{849A4663-6FB8-470C-B5BB-14748446C8A8}"/>
+                <a16:creationId xmlns:a16="http://schemas.microsoft.com/office/drawing/2014/main" id="{EB8A20A8-3472-4E14-88BF-607AB442CA0E}"/>
               </a:ext>
             </a:extLst>
           </p:cNvPr>
@@ -28866,7 +28866,7 @@
           <p:cNvPr id="10" name="">
             <a:extLst xmlns:a="http://schemas.openxmlformats.org/drawingml/2006/main">
               <a:ext uri="{FF2B5EF4-FFF2-40B4-BE49-F238E27FC236}">
-                <a16:creationId xmlns:a16="http://schemas.microsoft.com/office/drawing/2014/main" id="{2E883C6A-F6AC-497D-9006-4FFEA79BCD63}"/>
+                <a16:creationId xmlns:a16="http://schemas.microsoft.com/office/drawing/2014/main" id="{F04CE335-0310-4F2E-9AA2-703F86837DF3}"/>
               </a:ext>
             </a:extLst>
           </p:cNvPr>
@@ -28897,7 +28897,7 @@
           <p:cNvPr id="11" name="">
             <a:extLst xmlns:a="http://schemas.openxmlformats.org/drawingml/2006/main">
               <a:ext uri="{FF2B5EF4-FFF2-40B4-BE49-F238E27FC236}">
-                <a16:creationId xmlns:a16="http://schemas.microsoft.com/office/drawing/2014/main" id="{40C78DE3-695C-47F1-AD40-E062AC999D8D}"/>
+                <a16:creationId xmlns:a16="http://schemas.microsoft.com/office/drawing/2014/main" id="{EF7567B3-B366-42C2-A5D5-A31F1F36B2EB}"/>
               </a:ext>
             </a:extLst>
           </p:cNvPr>
@@ -28949,7 +28949,7 @@
           <p:cNvPr id="12" name="">
             <a:extLst xmlns:a="http://schemas.openxmlformats.org/drawingml/2006/main">
               <a:ext uri="{FF2B5EF4-FFF2-40B4-BE49-F238E27FC236}">
-                <a16:creationId xmlns:a16="http://schemas.microsoft.com/office/drawing/2014/main" id="{C746FDE6-87CB-42B1-8F83-94472932D26D}"/>
+                <a16:creationId xmlns:a16="http://schemas.microsoft.com/office/drawing/2014/main" id="{2C5862A1-538A-4862-9807-A70DF9046EB9}"/>
               </a:ext>
             </a:extLst>
           </p:cNvPr>
@@ -29001,7 +29001,7 @@
           <p:cNvPr id="13" name="">
             <a:extLst xmlns:a="http://schemas.openxmlformats.org/drawingml/2006/main">
               <a:ext uri="{FF2B5EF4-FFF2-40B4-BE49-F238E27FC236}">
-                <a16:creationId xmlns:a16="http://schemas.microsoft.com/office/drawing/2014/main" id="{8951F39C-FD48-47FD-BE80-006407A3FD1D}"/>
+                <a16:creationId xmlns:a16="http://schemas.microsoft.com/office/drawing/2014/main" id="{CAF0BF8E-543B-4BB0-86C3-3DDF0C7160AF}"/>
               </a:ext>
             </a:extLst>
           </p:cNvPr>
@@ -29053,7 +29053,7 @@
           <p:cNvPr id="14" name="">
             <a:extLst xmlns:a="http://schemas.openxmlformats.org/drawingml/2006/main">
               <a:ext uri="{FF2B5EF4-FFF2-40B4-BE49-F238E27FC236}">
-                <a16:creationId xmlns:a16="http://schemas.microsoft.com/office/drawing/2014/main" id="{DE0B1FD6-7CD2-494F-91E3-75A6CED1F7D6}"/>
+                <a16:creationId xmlns:a16="http://schemas.microsoft.com/office/drawing/2014/main" id="{2542D221-4CEF-4DAA-800E-CF79BE2846CB}"/>
               </a:ext>
             </a:extLst>
           </p:cNvPr>
@@ -29084,7 +29084,7 @@
           <p:cNvPr id="15" name="">
             <a:extLst xmlns:a="http://schemas.openxmlformats.org/drawingml/2006/main">
               <a:ext uri="{FF2B5EF4-FFF2-40B4-BE49-F238E27FC236}">
-                <a16:creationId xmlns:a16="http://schemas.microsoft.com/office/drawing/2014/main" id="{87BF8DFD-571B-4DB2-BE8A-DD4DF20AEB7F}"/>
+                <a16:creationId xmlns:a16="http://schemas.microsoft.com/office/drawing/2014/main" id="{68D55F56-FB9E-4B1F-8728-777143ACDAD1}"/>
               </a:ext>
             </a:extLst>
           </p:cNvPr>
@@ -29136,7 +29136,7 @@
           <p:cNvPr id="16" name="">
             <a:extLst xmlns:a="http://schemas.openxmlformats.org/drawingml/2006/main">
               <a:ext uri="{FF2B5EF4-FFF2-40B4-BE49-F238E27FC236}">
-                <a16:creationId xmlns:a16="http://schemas.microsoft.com/office/drawing/2014/main" id="{A72E77DA-BBFD-4BBE-99E4-961A435CC95A}"/>
+                <a16:creationId xmlns:a16="http://schemas.microsoft.com/office/drawing/2014/main" id="{067102E3-AF86-423E-8CA7-B5CCDEDD72BD}"/>
               </a:ext>
             </a:extLst>
           </p:cNvPr>
@@ -29188,7 +29188,7 @@
           <p:cNvPr id="17" name="">
             <a:extLst xmlns:a="http://schemas.openxmlformats.org/drawingml/2006/main">
               <a:ext uri="{FF2B5EF4-FFF2-40B4-BE49-F238E27FC236}">
-                <a16:creationId xmlns:a16="http://schemas.microsoft.com/office/drawing/2014/main" id="{7AA1B866-5693-43D7-B435-18F1E09ED780}"/>
+                <a16:creationId xmlns:a16="http://schemas.microsoft.com/office/drawing/2014/main" id="{81CC6F01-872A-40C5-B9A8-147EC14283F1}"/>
               </a:ext>
             </a:extLst>
           </p:cNvPr>
@@ -29240,7 +29240,7 @@
           <p:cNvPr id="18" name="">
             <a:extLst xmlns:a="http://schemas.openxmlformats.org/drawingml/2006/main">
               <a:ext uri="{FF2B5EF4-FFF2-40B4-BE49-F238E27FC236}">
-                <a16:creationId xmlns:a16="http://schemas.microsoft.com/office/drawing/2014/main" id="{8D0283C2-7F90-4569-94B8-FC08AB6917B9}"/>
+                <a16:creationId xmlns:a16="http://schemas.microsoft.com/office/drawing/2014/main" id="{C8BDFADA-D671-4EEE-9198-E9A5443C36F5}"/>
               </a:ext>
             </a:extLst>
           </p:cNvPr>
@@ -29271,7 +29271,7 @@
           <p:cNvPr id="19" name="">
             <a:extLst xmlns:a="http://schemas.openxmlformats.org/drawingml/2006/main">
               <a:ext uri="{FF2B5EF4-FFF2-40B4-BE49-F238E27FC236}">
-                <a16:creationId xmlns:a16="http://schemas.microsoft.com/office/drawing/2014/main" id="{8282EF23-DBEC-4ABC-AB48-12911D36DB86}"/>
+                <a16:creationId xmlns:a16="http://schemas.microsoft.com/office/drawing/2014/main" id="{3C2FC5A0-58E4-42CC-8035-F7E69E020795}"/>
               </a:ext>
             </a:extLst>
           </p:cNvPr>
@@ -29323,7 +29323,7 @@
           <p:cNvPr id="20" name="">
             <a:extLst xmlns:a="http://schemas.openxmlformats.org/drawingml/2006/main">
               <a:ext uri="{FF2B5EF4-FFF2-40B4-BE49-F238E27FC236}">
-                <a16:creationId xmlns:a16="http://schemas.microsoft.com/office/drawing/2014/main" id="{22F0A27C-DEFA-462B-9884-DA8A41056A54}"/>
+                <a16:creationId xmlns:a16="http://schemas.microsoft.com/office/drawing/2014/main" id="{AC38960B-3AE7-4DDF-9503-E68552C92DD2}"/>
               </a:ext>
             </a:extLst>
           </p:cNvPr>
@@ -29375,7 +29375,7 @@
           <p:cNvPr id="21" name="">
             <a:extLst xmlns:a="http://schemas.openxmlformats.org/drawingml/2006/main">
               <a:ext uri="{FF2B5EF4-FFF2-40B4-BE49-F238E27FC236}">
-                <a16:creationId xmlns:a16="http://schemas.microsoft.com/office/drawing/2014/main" id="{14A78BD5-C0E0-4646-A665-DB053579E40C}"/>
+                <a16:creationId xmlns:a16="http://schemas.microsoft.com/office/drawing/2014/main" id="{1BFA79A6-48CA-4ED0-AA4C-1319C0C2AA9D}"/>
               </a:ext>
             </a:extLst>
           </p:cNvPr>
@@ -29427,7 +29427,7 @@
           <p:cNvPr id="22" name="">
             <a:extLst xmlns:a="http://schemas.openxmlformats.org/drawingml/2006/main">
               <a:ext uri="{FF2B5EF4-FFF2-40B4-BE49-F238E27FC236}">
-                <a16:creationId xmlns:a16="http://schemas.microsoft.com/office/drawing/2014/main" id="{B5C496A5-73D2-49E0-A70B-5B7F0C1C7A93}"/>
+                <a16:creationId xmlns:a16="http://schemas.microsoft.com/office/drawing/2014/main" id="{101EAA43-1A28-42C2-BA85-F28327602CDE}"/>
               </a:ext>
             </a:extLst>
           </p:cNvPr>
@@ -29458,7 +29458,7 @@
           <p:cNvPr id="23" name="">
             <a:extLst xmlns:a="http://schemas.openxmlformats.org/drawingml/2006/main">
               <a:ext uri="{FF2B5EF4-FFF2-40B4-BE49-F238E27FC236}">
-                <a16:creationId xmlns:a16="http://schemas.microsoft.com/office/drawing/2014/main" id="{567FAF0C-0D43-4195-AA58-2F62FAC6D446}"/>
+                <a16:creationId xmlns:a16="http://schemas.microsoft.com/office/drawing/2014/main" id="{7C494EAB-30B2-4223-BFBE-2F7E01060EFE}"/>
               </a:ext>
             </a:extLst>
           </p:cNvPr>
@@ -29510,7 +29510,7 @@
           <p:cNvPr id="24" name="">
             <a:extLst xmlns:a="http://schemas.openxmlformats.org/drawingml/2006/main">
               <a:ext uri="{FF2B5EF4-FFF2-40B4-BE49-F238E27FC236}">
-                <a16:creationId xmlns:a16="http://schemas.microsoft.com/office/drawing/2014/main" id="{6F01AB11-4E1D-4A55-91C4-1A1468E98CFE}"/>
+                <a16:creationId xmlns:a16="http://schemas.microsoft.com/office/drawing/2014/main" id="{31862DF1-1704-4336-A5E4-B73A0D5D4F35}"/>
               </a:ext>
             </a:extLst>
           </p:cNvPr>
@@ -29562,7 +29562,7 @@
           <p:cNvPr id="25" name="">
             <a:extLst xmlns:a="http://schemas.openxmlformats.org/drawingml/2006/main">
               <a:ext uri="{FF2B5EF4-FFF2-40B4-BE49-F238E27FC236}">
-                <a16:creationId xmlns:a16="http://schemas.microsoft.com/office/drawing/2014/main" id="{49225855-5566-4E8E-904C-5F5387F2BEC2}"/>
+                <a16:creationId xmlns:a16="http://schemas.microsoft.com/office/drawing/2014/main" id="{8F15B193-33E3-4B2D-99FA-1752BC593AFF}"/>
               </a:ext>
             </a:extLst>
           </p:cNvPr>
@@ -29614,7 +29614,7 @@
           <p:cNvPr id="26" name="">
             <a:extLst xmlns:a="http://schemas.openxmlformats.org/drawingml/2006/main">
               <a:ext uri="{FF2B5EF4-FFF2-40B4-BE49-F238E27FC236}">
-                <a16:creationId xmlns:a16="http://schemas.microsoft.com/office/drawing/2014/main" id="{2EA9A3FA-CFA8-451D-953F-C1B6D86152C6}"/>
+                <a16:creationId xmlns:a16="http://schemas.microsoft.com/office/drawing/2014/main" id="{0D0353ED-0884-47EF-B75B-77A8345E18A5}"/>
               </a:ext>
             </a:extLst>
           </p:cNvPr>
@@ -29645,7 +29645,7 @@
           <p:cNvPr id="27" name="">
             <a:extLst xmlns:a="http://schemas.openxmlformats.org/drawingml/2006/main">
               <a:ext uri="{FF2B5EF4-FFF2-40B4-BE49-F238E27FC236}">
-                <a16:creationId xmlns:a16="http://schemas.microsoft.com/office/drawing/2014/main" id="{FDE278C5-5DB9-42E5-A9C8-C3B54A5502C4}"/>
+                <a16:creationId xmlns:a16="http://schemas.microsoft.com/office/drawing/2014/main" id="{5DE67576-E8EE-4A1F-93DA-EE906B4B2EDC}"/>
               </a:ext>
             </a:extLst>
           </p:cNvPr>
@@ -29697,7 +29697,7 @@
           <p:cNvPr id="28" name="">
             <a:extLst xmlns:a="http://schemas.openxmlformats.org/drawingml/2006/main">
               <a:ext uri="{FF2B5EF4-FFF2-40B4-BE49-F238E27FC236}">
-                <a16:creationId xmlns:a16="http://schemas.microsoft.com/office/drawing/2014/main" id="{11D738B4-F4DA-454B-AE6F-E07A62062E7D}"/>
+                <a16:creationId xmlns:a16="http://schemas.microsoft.com/office/drawing/2014/main" id="{DF063EAD-FE00-4BBC-8F2A-4064367633DA}"/>
               </a:ext>
             </a:extLst>
           </p:cNvPr>
@@ -29749,7 +29749,7 @@
           <p:cNvPr id="29" name="">
             <a:extLst xmlns:a="http://schemas.openxmlformats.org/drawingml/2006/main">
               <a:ext uri="{FF2B5EF4-FFF2-40B4-BE49-F238E27FC236}">
-                <a16:creationId xmlns:a16="http://schemas.microsoft.com/office/drawing/2014/main" id="{C19289DD-90E3-42F0-9AFC-D7AA31BBE6EA}"/>
+                <a16:creationId xmlns:a16="http://schemas.microsoft.com/office/drawing/2014/main" id="{3A7EAD70-C7DC-485A-9DB1-0F9C27958569}"/>
               </a:ext>
             </a:extLst>
           </p:cNvPr>
@@ -29801,7 +29801,7 @@
           <p:cNvPr id="30" name="">
             <a:extLst xmlns:a="http://schemas.openxmlformats.org/drawingml/2006/main">
               <a:ext uri="{FF2B5EF4-FFF2-40B4-BE49-F238E27FC236}">
-                <a16:creationId xmlns:a16="http://schemas.microsoft.com/office/drawing/2014/main" id="{C5B4D590-C6E7-486B-B1E9-6B0FC0F9942F}"/>
+                <a16:creationId xmlns:a16="http://schemas.microsoft.com/office/drawing/2014/main" id="{CC836504-C2BE-4AE3-BE09-BF98349B3A89}"/>
               </a:ext>
             </a:extLst>
           </p:cNvPr>
@@ -29832,7 +29832,7 @@
           <p:cNvPr id="31" name="">
             <a:extLst xmlns:a="http://schemas.openxmlformats.org/drawingml/2006/main">
               <a:ext uri="{FF2B5EF4-FFF2-40B4-BE49-F238E27FC236}">
-                <a16:creationId xmlns:a16="http://schemas.microsoft.com/office/drawing/2014/main" id="{7887643F-62CB-4227-A914-050234B3B9D2}"/>
+                <a16:creationId xmlns:a16="http://schemas.microsoft.com/office/drawing/2014/main" id="{18DEEC5C-ED82-4132-98BE-77CADBD5EEF6}"/>
               </a:ext>
             </a:extLst>
           </p:cNvPr>
@@ -29884,7 +29884,7 @@
           <p:cNvPr id="32" name="">
             <a:extLst xmlns:a="http://schemas.openxmlformats.org/drawingml/2006/main">
               <a:ext uri="{FF2B5EF4-FFF2-40B4-BE49-F238E27FC236}">
-                <a16:creationId xmlns:a16="http://schemas.microsoft.com/office/drawing/2014/main" id="{0F09F28A-C5A9-466A-8747-5549E55D0FA0}"/>
+                <a16:creationId xmlns:a16="http://schemas.microsoft.com/office/drawing/2014/main" id="{25EB140D-66D5-40B2-A58C-2FADA032E217}"/>
               </a:ext>
             </a:extLst>
           </p:cNvPr>
@@ -29936,7 +29936,7 @@
           <p:cNvPr id="33" name="">
             <a:extLst xmlns:a="http://schemas.openxmlformats.org/drawingml/2006/main">
               <a:ext uri="{FF2B5EF4-FFF2-40B4-BE49-F238E27FC236}">
-                <a16:creationId xmlns:a16="http://schemas.microsoft.com/office/drawing/2014/main" id="{E42255CB-A2B0-40AB-B848-9A116F46451C}"/>
+                <a16:creationId xmlns:a16="http://schemas.microsoft.com/office/drawing/2014/main" id="{BF5D67BA-EEC9-4890-A60D-5798533C2346}"/>
               </a:ext>
             </a:extLst>
           </p:cNvPr>
@@ -29988,7 +29988,7 @@
           <p:cNvPr id="34" name="">
             <a:extLst xmlns:a="http://schemas.openxmlformats.org/drawingml/2006/main">
               <a:ext uri="{FF2B5EF4-FFF2-40B4-BE49-F238E27FC236}">
-                <a16:creationId xmlns:a16="http://schemas.microsoft.com/office/drawing/2014/main" id="{3C284FA6-EDEB-40B0-B5AC-CB12DACAF771}"/>
+                <a16:creationId xmlns:a16="http://schemas.microsoft.com/office/drawing/2014/main" id="{1769A8D2-EA61-4878-94AF-C47FCD1581C6}"/>
               </a:ext>
             </a:extLst>
           </p:cNvPr>
@@ -30019,7 +30019,7 @@
           <p:cNvPr id="35" name="">
             <a:extLst xmlns:a="http://schemas.openxmlformats.org/drawingml/2006/main">
               <a:ext uri="{FF2B5EF4-FFF2-40B4-BE49-F238E27FC236}">
-                <a16:creationId xmlns:a16="http://schemas.microsoft.com/office/drawing/2014/main" id="{88903B9E-413A-4CF7-9A76-5EA48399FEBA}"/>
+                <a16:creationId xmlns:a16="http://schemas.microsoft.com/office/drawing/2014/main" id="{86EF82A9-27C4-45E6-847B-2BF82D60734D}"/>
               </a:ext>
             </a:extLst>
           </p:cNvPr>
@@ -30071,7 +30071,7 @@
           <p:cNvPr id="36" name="">
             <a:extLst xmlns:a="http://schemas.openxmlformats.org/drawingml/2006/main">
               <a:ext uri="{FF2B5EF4-FFF2-40B4-BE49-F238E27FC236}">
-                <a16:creationId xmlns:a16="http://schemas.microsoft.com/office/drawing/2014/main" id="{6DAA3D22-616F-445B-BCA5-FDBF462DE9E1}"/>
+                <a16:creationId xmlns:a16="http://schemas.microsoft.com/office/drawing/2014/main" id="{5C93842A-1BA3-4BAE-8CD4-10DD9D02E4EF}"/>
               </a:ext>
             </a:extLst>
           </p:cNvPr>
@@ -30123,7 +30123,7 @@
           <p:cNvPr id="37" name="">
             <a:extLst xmlns:a="http://schemas.openxmlformats.org/drawingml/2006/main">
               <a:ext uri="{FF2B5EF4-FFF2-40B4-BE49-F238E27FC236}">
-                <a16:creationId xmlns:a16="http://schemas.microsoft.com/office/drawing/2014/main" id="{8924B4AC-D1CF-4791-813E-F1EEDF181B2A}"/>
+                <a16:creationId xmlns:a16="http://schemas.microsoft.com/office/drawing/2014/main" id="{A8A3B13A-F352-421F-9CC6-A8A032922B66}"/>
               </a:ext>
             </a:extLst>
           </p:cNvPr>
@@ -30175,7 +30175,7 @@
           <p:cNvPr id="38" name="">
             <a:extLst xmlns:a="http://schemas.openxmlformats.org/drawingml/2006/main">
               <a:ext uri="{FF2B5EF4-FFF2-40B4-BE49-F238E27FC236}">
-                <a16:creationId xmlns:a16="http://schemas.microsoft.com/office/drawing/2014/main" id="{52B084DF-50BC-4CC8-9797-E79818DB1416}"/>
+                <a16:creationId xmlns:a16="http://schemas.microsoft.com/office/drawing/2014/main" id="{C49114C3-4DF6-41FC-8AA3-4B42CA2DF7F0}"/>
               </a:ext>
             </a:extLst>
           </p:cNvPr>
@@ -30206,7 +30206,7 @@
           <p:cNvPr id="39" name="">
             <a:extLst xmlns:a="http://schemas.openxmlformats.org/drawingml/2006/main">
               <a:ext uri="{FF2B5EF4-FFF2-40B4-BE49-F238E27FC236}">
-                <a16:creationId xmlns:a16="http://schemas.microsoft.com/office/drawing/2014/main" id="{3E2FCAC2-015D-46FB-BD16-9C6EA23CB328}"/>
+                <a16:creationId xmlns:a16="http://schemas.microsoft.com/office/drawing/2014/main" id="{7D8D7A83-5B8C-44B4-B6A8-17C16233AE58}"/>
               </a:ext>
             </a:extLst>
           </p:cNvPr>
@@ -30258,7 +30258,7 @@
           <p:cNvPr id="40" name="">
             <a:extLst xmlns:a="http://schemas.openxmlformats.org/drawingml/2006/main">
               <a:ext uri="{FF2B5EF4-FFF2-40B4-BE49-F238E27FC236}">
-                <a16:creationId xmlns:a16="http://schemas.microsoft.com/office/drawing/2014/main" id="{1932CF4C-0AEC-4307-82CA-B36E63DCC73A}"/>
+                <a16:creationId xmlns:a16="http://schemas.microsoft.com/office/drawing/2014/main" id="{2E21FEA8-6B00-41F8-9A3D-471BC95AA3F4}"/>
               </a:ext>
             </a:extLst>
           </p:cNvPr>
@@ -30310,7 +30310,7 @@
           <p:cNvPr id="41" name="">
             <a:extLst xmlns:a="http://schemas.openxmlformats.org/drawingml/2006/main">
               <a:ext uri="{FF2B5EF4-FFF2-40B4-BE49-F238E27FC236}">
-                <a16:creationId xmlns:a16="http://schemas.microsoft.com/office/drawing/2014/main" id="{19FF246F-78B7-46DA-BA5A-DB6071E5F730}"/>
+                <a16:creationId xmlns:a16="http://schemas.microsoft.com/office/drawing/2014/main" id="{70CBF1F8-8339-42FF-95A4-F09392496364}"/>
               </a:ext>
             </a:extLst>
           </p:cNvPr>
@@ -30360,7 +30360,7 @@
     </p:spTree>
     <p:extLst>
       <p:ext uri="{BB962C8B-B14F-4D97-AF65-F5344CB8AC3E}">
-        <p14:creationId xmlns:p14="http://schemas.microsoft.com/office/powerpoint/2010/main" val="1358175613"/>
+        <p14:creationId xmlns:p14="http://schemas.microsoft.com/office/powerpoint/2010/main" val="1857811204"/>
       </p:ext>
     </p:extLst>
   </p:cSld>
@@ -30391,7 +30391,7 @@
           <p:cNvPr id="76" name="">
             <a:extLst xmlns:a="http://schemas.openxmlformats.org/drawingml/2006/main">
               <a:ext uri="{FF2B5EF4-FFF2-40B4-BE49-F238E27FC236}">
-                <a16:creationId xmlns:a16="http://schemas.microsoft.com/office/drawing/2014/main" id="{E12362F5-9985-4D0C-A949-B8BA56A0A189}"/>
+                <a16:creationId xmlns:a16="http://schemas.microsoft.com/office/drawing/2014/main" id="{09895A26-011D-4AF8-81B5-580B83060E7B}"/>
               </a:ext>
             </a:extLst>
           </p:cNvPr>
@@ -30424,7 +30424,7 @@
           <p:cNvPr id="2" name="">
             <a:extLst xmlns:a="http://schemas.openxmlformats.org/drawingml/2006/main">
               <a:ext uri="{FF2B5EF4-FFF2-40B4-BE49-F238E27FC236}">
-                <a16:creationId xmlns:a16="http://schemas.microsoft.com/office/drawing/2014/main" id="{098A900C-69C5-46DF-AE10-2AC4A2D82822}"/>
+                <a16:creationId xmlns:a16="http://schemas.microsoft.com/office/drawing/2014/main" id="{16E48E62-21B5-4636-9936-0F9E435F19EA}"/>
               </a:ext>
             </a:extLst>
           </p:cNvPr>
@@ -30455,7 +30455,7 @@
           <p:cNvPr id="3" name="">
             <a:extLst xmlns:a="http://schemas.openxmlformats.org/drawingml/2006/main">
               <a:ext uri="{FF2B5EF4-FFF2-40B4-BE49-F238E27FC236}">
-                <a16:creationId xmlns:a16="http://schemas.microsoft.com/office/drawing/2014/main" id="{3B1030D1-8A34-4D8D-9502-BB93F8CF90E0}"/>
+                <a16:creationId xmlns:a16="http://schemas.microsoft.com/office/drawing/2014/main" id="{C0C9C9C2-C443-488C-9872-5362FA3CC68F}"/>
               </a:ext>
             </a:extLst>
           </p:cNvPr>
@@ -30507,7 +30507,7 @@
           <p:cNvPr id="4" name="">
             <a:extLst xmlns:a="http://schemas.openxmlformats.org/drawingml/2006/main">
               <a:ext uri="{FF2B5EF4-FFF2-40B4-BE49-F238E27FC236}">
-                <a16:creationId xmlns:a16="http://schemas.microsoft.com/office/drawing/2014/main" id="{7F9E9841-96B8-49E0-9CED-BE2F8A3164C6}"/>
+                <a16:creationId xmlns:a16="http://schemas.microsoft.com/office/drawing/2014/main" id="{FD268E47-572A-4785-86CD-216F6D73BD58}"/>
               </a:ext>
             </a:extLst>
           </p:cNvPr>
@@ -30559,7 +30559,7 @@
           <p:cNvPr id="5" name="">
             <a:extLst xmlns:a="http://schemas.openxmlformats.org/drawingml/2006/main">
               <a:ext uri="{FF2B5EF4-FFF2-40B4-BE49-F238E27FC236}">
-                <a16:creationId xmlns:a16="http://schemas.microsoft.com/office/drawing/2014/main" id="{9CADA330-6A69-4CC6-81E2-B31B72460F1D}"/>
+                <a16:creationId xmlns:a16="http://schemas.microsoft.com/office/drawing/2014/main" id="{8A449869-9A06-4632-B05E-C54101641A54}"/>
               </a:ext>
             </a:extLst>
           </p:cNvPr>
@@ -30594,7 +30594,7 @@
           <p:nvPr/>
         </p:nvPicPr>
         <p:blipFill>
-          <a:blip xmlns:r="http://schemas.openxmlformats.org/officeDocument/2006/relationships" xmlns:a="http://schemas.openxmlformats.org/drawingml/2006/main" r:embed="Rd614fa2d930d4270"/>
+          <a:blip xmlns:r="http://schemas.openxmlformats.org/officeDocument/2006/relationships" xmlns:a="http://schemas.openxmlformats.org/drawingml/2006/main" r:embed="R7e9cc08368a84365"/>
           <a:stretch xmlns:a="http://schemas.openxmlformats.org/drawingml/2006/main"/>
         </p:blipFill>
         <p:spPr>
@@ -30612,7 +30612,7 @@
           <p:cNvPr id="7" name="">
             <a:extLst xmlns:a="http://schemas.openxmlformats.org/drawingml/2006/main">
               <a:ext uri="{FF2B5EF4-FFF2-40B4-BE49-F238E27FC236}">
-                <a16:creationId xmlns:a16="http://schemas.microsoft.com/office/drawing/2014/main" id="{4AF70AA3-983D-44AD-BA00-156CC41CCD47}"/>
+                <a16:creationId xmlns:a16="http://schemas.microsoft.com/office/drawing/2014/main" id="{8F8711D4-723E-4B5C-9B06-0C9A6007B63A}"/>
               </a:ext>
             </a:extLst>
           </p:cNvPr>
@@ -30664,7 +30664,7 @@
           <p:cNvPr id="8" name="">
             <a:extLst xmlns:a="http://schemas.openxmlformats.org/drawingml/2006/main">
               <a:ext uri="{FF2B5EF4-FFF2-40B4-BE49-F238E27FC236}">
-                <a16:creationId xmlns:a16="http://schemas.microsoft.com/office/drawing/2014/main" id="{E6E5ECC1-D82F-4BC9-89A6-353D0BBDA3AE}"/>
+                <a16:creationId xmlns:a16="http://schemas.microsoft.com/office/drawing/2014/main" id="{60F2B26A-539C-4677-BE41-D4F589AC994C}"/>
               </a:ext>
             </a:extLst>
           </p:cNvPr>
@@ -30716,7 +30716,7 @@
           <p:cNvPr id="9" name="">
             <a:extLst xmlns:a="http://schemas.openxmlformats.org/drawingml/2006/main">
               <a:ext uri="{FF2B5EF4-FFF2-40B4-BE49-F238E27FC236}">
-                <a16:creationId xmlns:a16="http://schemas.microsoft.com/office/drawing/2014/main" id="{C7AB2BDC-A333-4BC2-86FC-FDADAF37A35A}"/>
+                <a16:creationId xmlns:a16="http://schemas.microsoft.com/office/drawing/2014/main" id="{3A2D4FE7-3D03-4D7C-AF6E-BBD4BFCF090E}"/>
               </a:ext>
             </a:extLst>
           </p:cNvPr>
@@ -30768,7 +30768,7 @@
           <p:cNvPr id="10" name="">
             <a:extLst xmlns:a="http://schemas.openxmlformats.org/drawingml/2006/main">
               <a:ext uri="{FF2B5EF4-FFF2-40B4-BE49-F238E27FC236}">
-                <a16:creationId xmlns:a16="http://schemas.microsoft.com/office/drawing/2014/main" id="{029F3815-5C1D-4270-B25F-4576F32A2C53}"/>
+                <a16:creationId xmlns:a16="http://schemas.microsoft.com/office/drawing/2014/main" id="{AA4C73D4-90D3-48A4-A092-EEE75E85B7C2}"/>
               </a:ext>
             </a:extLst>
           </p:cNvPr>
@@ -30820,7 +30820,7 @@
           <p:cNvPr id="11" name="">
             <a:extLst xmlns:a="http://schemas.openxmlformats.org/drawingml/2006/main">
               <a:ext uri="{FF2B5EF4-FFF2-40B4-BE49-F238E27FC236}">
-                <a16:creationId xmlns:a16="http://schemas.microsoft.com/office/drawing/2014/main" id="{C732A545-771E-470B-AEF9-DBF0ACD0212C}"/>
+                <a16:creationId xmlns:a16="http://schemas.microsoft.com/office/drawing/2014/main" id="{6090D7D6-9A68-4D76-8136-411FE7AA8063}"/>
               </a:ext>
             </a:extLst>
           </p:cNvPr>
@@ -30863,7 +30863,7 @@
           <p:cNvPr id="12" name="">
             <a:extLst xmlns:a="http://schemas.openxmlformats.org/drawingml/2006/main">
               <a:ext uri="{FF2B5EF4-FFF2-40B4-BE49-F238E27FC236}">
-                <a16:creationId xmlns:a16="http://schemas.microsoft.com/office/drawing/2014/main" id="{71120BAE-1528-4211-9FEC-D768A45D7E93}"/>
+                <a16:creationId xmlns:a16="http://schemas.microsoft.com/office/drawing/2014/main" id="{9C105D29-07F0-4DD3-9B98-EF7DD6C02216}"/>
               </a:ext>
             </a:extLst>
           </p:cNvPr>
@@ -30894,7 +30894,7 @@
           <p:cNvPr id="13" name="">
             <a:extLst xmlns:a="http://schemas.openxmlformats.org/drawingml/2006/main">
               <a:ext uri="{FF2B5EF4-FFF2-40B4-BE49-F238E27FC236}">
-                <a16:creationId xmlns:a16="http://schemas.microsoft.com/office/drawing/2014/main" id="{87F4A38C-5E4A-4FE0-8862-DFCF1119433D}"/>
+                <a16:creationId xmlns:a16="http://schemas.microsoft.com/office/drawing/2014/main" id="{317313DA-0163-44E8-BD2E-482F923F313A}"/>
               </a:ext>
             </a:extLst>
           </p:cNvPr>
@@ -30925,7 +30925,7 @@
           <p:cNvPr id="14" name="">
             <a:extLst xmlns:a="http://schemas.openxmlformats.org/drawingml/2006/main">
               <a:ext uri="{FF2B5EF4-FFF2-40B4-BE49-F238E27FC236}">
-                <a16:creationId xmlns:a16="http://schemas.microsoft.com/office/drawing/2014/main" id="{91EA15DC-0ABA-42C4-8AAF-2981499D9F86}"/>
+                <a16:creationId xmlns:a16="http://schemas.microsoft.com/office/drawing/2014/main" id="{AECDA16B-4304-408A-806C-6961A0AB5065}"/>
               </a:ext>
             </a:extLst>
           </p:cNvPr>
@@ -30968,7 +30968,7 @@
           <p:cNvPr id="15" name="">
             <a:extLst xmlns:a="http://schemas.openxmlformats.org/drawingml/2006/main">
               <a:ext uri="{FF2B5EF4-FFF2-40B4-BE49-F238E27FC236}">
-                <a16:creationId xmlns:a16="http://schemas.microsoft.com/office/drawing/2014/main" id="{89B52185-1E08-4027-A96B-A3C1432FEEAB}"/>
+                <a16:creationId xmlns:a16="http://schemas.microsoft.com/office/drawing/2014/main" id="{18F9EF46-2654-443E-91BE-1348CF26290B}"/>
               </a:ext>
             </a:extLst>
           </p:cNvPr>
@@ -30999,7 +30999,7 @@
           <p:cNvPr id="16" name="">
             <a:extLst xmlns:a="http://schemas.openxmlformats.org/drawingml/2006/main">
               <a:ext uri="{FF2B5EF4-FFF2-40B4-BE49-F238E27FC236}">
-                <a16:creationId xmlns:a16="http://schemas.microsoft.com/office/drawing/2014/main" id="{95D5DAC3-DB68-4927-B9D2-D71849C14760}"/>
+                <a16:creationId xmlns:a16="http://schemas.microsoft.com/office/drawing/2014/main" id="{C8B7636C-11BD-4C3C-A39C-F83739C4A235}"/>
               </a:ext>
             </a:extLst>
           </p:cNvPr>
@@ -31030,7 +31030,7 @@
           <p:cNvPr id="17" name="">
             <a:extLst xmlns:a="http://schemas.openxmlformats.org/drawingml/2006/main">
               <a:ext uri="{FF2B5EF4-FFF2-40B4-BE49-F238E27FC236}">
-                <a16:creationId xmlns:a16="http://schemas.microsoft.com/office/drawing/2014/main" id="{AB3BD82F-B06F-4208-B222-A9A9BE0CDEA8}"/>
+                <a16:creationId xmlns:a16="http://schemas.microsoft.com/office/drawing/2014/main" id="{E67EDCDA-D60E-4B8C-AFDC-2238FEEAA665}"/>
               </a:ext>
             </a:extLst>
           </p:cNvPr>
@@ -31082,7 +31082,7 @@
           <p:cNvPr id="18" name="">
             <a:extLst xmlns:a="http://schemas.openxmlformats.org/drawingml/2006/main">
               <a:ext uri="{FF2B5EF4-FFF2-40B4-BE49-F238E27FC236}">
-                <a16:creationId xmlns:a16="http://schemas.microsoft.com/office/drawing/2014/main" id="{554542C6-5B62-44FB-BEFD-2F6C86804934}"/>
+                <a16:creationId xmlns:a16="http://schemas.microsoft.com/office/drawing/2014/main" id="{F8DC9F3C-BBC8-40A0-AFC7-589AE33B8875}"/>
               </a:ext>
             </a:extLst>
           </p:cNvPr>
@@ -31134,7 +31134,7 @@
           <p:cNvPr id="19" name="">
             <a:extLst xmlns:a="http://schemas.openxmlformats.org/drawingml/2006/main">
               <a:ext uri="{FF2B5EF4-FFF2-40B4-BE49-F238E27FC236}">
-                <a16:creationId xmlns:a16="http://schemas.microsoft.com/office/drawing/2014/main" id="{44882472-AC96-4500-80AC-012842747FB8}"/>
+                <a16:creationId xmlns:a16="http://schemas.microsoft.com/office/drawing/2014/main" id="{4391F7DE-3EBE-46FA-BF66-DBE3D0931123}"/>
               </a:ext>
             </a:extLst>
           </p:cNvPr>
@@ -31186,7 +31186,7 @@
           <p:cNvPr id="20" name="">
             <a:extLst xmlns:a="http://schemas.openxmlformats.org/drawingml/2006/main">
               <a:ext uri="{FF2B5EF4-FFF2-40B4-BE49-F238E27FC236}">
-                <a16:creationId xmlns:a16="http://schemas.microsoft.com/office/drawing/2014/main" id="{1DE2B628-EF91-4B31-B599-F356182595C5}"/>
+                <a16:creationId xmlns:a16="http://schemas.microsoft.com/office/drawing/2014/main" id="{2F355FDC-72ED-4BE9-97E1-95A08FF8C322}"/>
               </a:ext>
             </a:extLst>
           </p:cNvPr>
@@ -31229,7 +31229,7 @@
           <p:cNvPr id="21" name="">
             <a:extLst xmlns:a="http://schemas.openxmlformats.org/drawingml/2006/main">
               <a:ext uri="{FF2B5EF4-FFF2-40B4-BE49-F238E27FC236}">
-                <a16:creationId xmlns:a16="http://schemas.microsoft.com/office/drawing/2014/main" id="{B786183D-AC1F-45E1-8F66-053E95E4D456}"/>
+                <a16:creationId xmlns:a16="http://schemas.microsoft.com/office/drawing/2014/main" id="{B7DBF9FF-EE34-48A5-B430-D42D3BB4A1B3}"/>
               </a:ext>
             </a:extLst>
           </p:cNvPr>
@@ -31260,7 +31260,7 @@
           <p:cNvPr id="22" name="">
             <a:extLst xmlns:a="http://schemas.openxmlformats.org/drawingml/2006/main">
               <a:ext uri="{FF2B5EF4-FFF2-40B4-BE49-F238E27FC236}">
-                <a16:creationId xmlns:a16="http://schemas.microsoft.com/office/drawing/2014/main" id="{3CBB8983-AD73-49C9-859A-B7C6B253C1E7}"/>
+                <a16:creationId xmlns:a16="http://schemas.microsoft.com/office/drawing/2014/main" id="{4F981AEF-5D58-4B31-8977-DB5BBED4D137}"/>
               </a:ext>
             </a:extLst>
           </p:cNvPr>
@@ -31291,7 +31291,7 @@
           <p:cNvPr id="23" name="">
             <a:extLst xmlns:a="http://schemas.openxmlformats.org/drawingml/2006/main">
               <a:ext uri="{FF2B5EF4-FFF2-40B4-BE49-F238E27FC236}">
-                <a16:creationId xmlns:a16="http://schemas.microsoft.com/office/drawing/2014/main" id="{C397F81C-B5CC-4D8E-B044-40AD41B57147}"/>
+                <a16:creationId xmlns:a16="http://schemas.microsoft.com/office/drawing/2014/main" id="{A55845E6-4916-4892-9863-ED7E7BFE2248}"/>
               </a:ext>
             </a:extLst>
           </p:cNvPr>
@@ -31343,7 +31343,7 @@
           <p:cNvPr id="24" name="">
             <a:extLst xmlns:a="http://schemas.openxmlformats.org/drawingml/2006/main">
               <a:ext uri="{FF2B5EF4-FFF2-40B4-BE49-F238E27FC236}">
-                <a16:creationId xmlns:a16="http://schemas.microsoft.com/office/drawing/2014/main" id="{7FFC312A-941F-4F2C-ABD0-95A22898885A}"/>
+                <a16:creationId xmlns:a16="http://schemas.microsoft.com/office/drawing/2014/main" id="{65B7BEBD-92EB-4FB4-8C79-75E8CA9D4B6C}"/>
               </a:ext>
             </a:extLst>
           </p:cNvPr>
@@ -31395,7 +31395,7 @@
           <p:cNvPr id="25" name="">
             <a:extLst xmlns:a="http://schemas.openxmlformats.org/drawingml/2006/main">
               <a:ext uri="{FF2B5EF4-FFF2-40B4-BE49-F238E27FC236}">
-                <a16:creationId xmlns:a16="http://schemas.microsoft.com/office/drawing/2014/main" id="{511F6E43-8416-4036-88A9-3FA18376D00F}"/>
+                <a16:creationId xmlns:a16="http://schemas.microsoft.com/office/drawing/2014/main" id="{A340A48A-EC25-4C44-995C-2415CCF6C257}"/>
               </a:ext>
             </a:extLst>
           </p:cNvPr>
@@ -31447,7 +31447,7 @@
           <p:cNvPr id="26" name="">
             <a:extLst xmlns:a="http://schemas.openxmlformats.org/drawingml/2006/main">
               <a:ext uri="{FF2B5EF4-FFF2-40B4-BE49-F238E27FC236}">
-                <a16:creationId xmlns:a16="http://schemas.microsoft.com/office/drawing/2014/main" id="{133D9B0B-6892-4385-A9C9-10F741DC4D0B}"/>
+                <a16:creationId xmlns:a16="http://schemas.microsoft.com/office/drawing/2014/main" id="{95E11459-349E-4717-9CE0-C45E2940B6C9}"/>
               </a:ext>
             </a:extLst>
           </p:cNvPr>
@@ -31490,7 +31490,7 @@
           <p:cNvPr id="27" name="">
             <a:extLst xmlns:a="http://schemas.openxmlformats.org/drawingml/2006/main">
               <a:ext uri="{FF2B5EF4-FFF2-40B4-BE49-F238E27FC236}">
-                <a16:creationId xmlns:a16="http://schemas.microsoft.com/office/drawing/2014/main" id="{092D3330-1B3A-4FD7-BA66-8C4DD37A4F6E}"/>
+                <a16:creationId xmlns:a16="http://schemas.microsoft.com/office/drawing/2014/main" id="{0DDD81B3-768A-4946-AACF-87949749086C}"/>
               </a:ext>
             </a:extLst>
           </p:cNvPr>
@@ -31521,7 +31521,7 @@
           <p:cNvPr id="28" name="">
             <a:extLst xmlns:a="http://schemas.openxmlformats.org/drawingml/2006/main">
               <a:ext uri="{FF2B5EF4-FFF2-40B4-BE49-F238E27FC236}">
-                <a16:creationId xmlns:a16="http://schemas.microsoft.com/office/drawing/2014/main" id="{05F1CEF1-9D2B-4679-B078-062680AB2A3D}"/>
+                <a16:creationId xmlns:a16="http://schemas.microsoft.com/office/drawing/2014/main" id="{18C0C475-4F84-4389-B001-9870EB8EEC71}"/>
               </a:ext>
             </a:extLst>
           </p:cNvPr>
@@ -31552,7 +31552,7 @@
           <p:cNvPr id="29" name="">
             <a:extLst xmlns:a="http://schemas.openxmlformats.org/drawingml/2006/main">
               <a:ext uri="{FF2B5EF4-FFF2-40B4-BE49-F238E27FC236}">
-                <a16:creationId xmlns:a16="http://schemas.microsoft.com/office/drawing/2014/main" id="{FED25BD9-1F6F-43C2-BBEC-89623FF9CD2C}"/>
+                <a16:creationId xmlns:a16="http://schemas.microsoft.com/office/drawing/2014/main" id="{718315DD-3CC7-45E6-B1EC-B9BAE9F5BDDB}"/>
               </a:ext>
             </a:extLst>
           </p:cNvPr>
@@ -31604,7 +31604,7 @@
           <p:cNvPr id="30" name="">
             <a:extLst xmlns:a="http://schemas.openxmlformats.org/drawingml/2006/main">
               <a:ext uri="{FF2B5EF4-FFF2-40B4-BE49-F238E27FC236}">
-                <a16:creationId xmlns:a16="http://schemas.microsoft.com/office/drawing/2014/main" id="{4167F46F-B1BC-43A8-9D15-EDAB07EC6D7C}"/>
+                <a16:creationId xmlns:a16="http://schemas.microsoft.com/office/drawing/2014/main" id="{0AB84E51-343D-4CDE-ADB7-33602483516E}"/>
               </a:ext>
             </a:extLst>
           </p:cNvPr>
@@ -31656,7 +31656,7 @@
           <p:cNvPr id="31" name="">
             <a:extLst xmlns:a="http://schemas.openxmlformats.org/drawingml/2006/main">
               <a:ext uri="{FF2B5EF4-FFF2-40B4-BE49-F238E27FC236}">
-                <a16:creationId xmlns:a16="http://schemas.microsoft.com/office/drawing/2014/main" id="{3E16A250-1CF6-4775-99D2-9DAAF72F0FF2}"/>
+                <a16:creationId xmlns:a16="http://schemas.microsoft.com/office/drawing/2014/main" id="{EB976403-AF8F-4F59-8FFF-D0AF8CD0690E}"/>
               </a:ext>
             </a:extLst>
           </p:cNvPr>
@@ -31708,7 +31708,7 @@
           <p:cNvPr id="32" name="">
             <a:extLst xmlns:a="http://schemas.openxmlformats.org/drawingml/2006/main">
               <a:ext uri="{FF2B5EF4-FFF2-40B4-BE49-F238E27FC236}">
-                <a16:creationId xmlns:a16="http://schemas.microsoft.com/office/drawing/2014/main" id="{8BB054CC-67B1-4A36-AC47-85D55276B46F}"/>
+                <a16:creationId xmlns:a16="http://schemas.microsoft.com/office/drawing/2014/main" id="{0B330E68-44F9-4716-81D9-D968342C75B1}"/>
               </a:ext>
             </a:extLst>
           </p:cNvPr>
@@ -31751,7 +31751,7 @@
           <p:cNvPr id="33" name="">
             <a:extLst xmlns:a="http://schemas.openxmlformats.org/drawingml/2006/main">
               <a:ext uri="{FF2B5EF4-FFF2-40B4-BE49-F238E27FC236}">
-                <a16:creationId xmlns:a16="http://schemas.microsoft.com/office/drawing/2014/main" id="{9DC1D6F5-70A9-4FA6-B8DE-347FC0DC32FA}"/>
+                <a16:creationId xmlns:a16="http://schemas.microsoft.com/office/drawing/2014/main" id="{E920F4E0-8F4A-4A0F-8A79-39400A930D6E}"/>
               </a:ext>
             </a:extLst>
           </p:cNvPr>
@@ -31782,7 +31782,7 @@
           <p:cNvPr id="34" name="">
             <a:extLst xmlns:a="http://schemas.openxmlformats.org/drawingml/2006/main">
               <a:ext uri="{FF2B5EF4-FFF2-40B4-BE49-F238E27FC236}">
-                <a16:creationId xmlns:a16="http://schemas.microsoft.com/office/drawing/2014/main" id="{C8AA33E3-10ED-4CF4-AC0A-516DD10E5115}"/>
+                <a16:creationId xmlns:a16="http://schemas.microsoft.com/office/drawing/2014/main" id="{E3A0CDE7-B81E-4F1E-8733-13C80F75DEB1}"/>
               </a:ext>
             </a:extLst>
           </p:cNvPr>
@@ -31813,7 +31813,7 @@
           <p:cNvPr id="35" name="">
             <a:extLst xmlns:a="http://schemas.openxmlformats.org/drawingml/2006/main">
               <a:ext uri="{FF2B5EF4-FFF2-40B4-BE49-F238E27FC236}">
-                <a16:creationId xmlns:a16="http://schemas.microsoft.com/office/drawing/2014/main" id="{596256FD-8FD5-4D00-997A-C3D14CD5C93B}"/>
+                <a16:creationId xmlns:a16="http://schemas.microsoft.com/office/drawing/2014/main" id="{F9708DAD-0EB8-4046-8C52-93818A9310FE}"/>
               </a:ext>
             </a:extLst>
           </p:cNvPr>
@@ -31865,7 +31865,7 @@
           <p:cNvPr id="36" name="">
             <a:extLst xmlns:a="http://schemas.openxmlformats.org/drawingml/2006/main">
               <a:ext uri="{FF2B5EF4-FFF2-40B4-BE49-F238E27FC236}">
-                <a16:creationId xmlns:a16="http://schemas.microsoft.com/office/drawing/2014/main" id="{6303C786-3B58-4749-A3EC-B4F0FEFDF76B}"/>
+                <a16:creationId xmlns:a16="http://schemas.microsoft.com/office/drawing/2014/main" id="{12F8FBBD-A8F4-40B4-8A52-BD3C32CEA9AD}"/>
               </a:ext>
             </a:extLst>
           </p:cNvPr>
@@ -31917,7 +31917,7 @@
           <p:cNvPr id="37" name="">
             <a:extLst xmlns:a="http://schemas.openxmlformats.org/drawingml/2006/main">
               <a:ext uri="{FF2B5EF4-FFF2-40B4-BE49-F238E27FC236}">
-                <a16:creationId xmlns:a16="http://schemas.microsoft.com/office/drawing/2014/main" id="{FB226D5F-15C4-4A55-9567-BDC683DF2313}"/>
+                <a16:creationId xmlns:a16="http://schemas.microsoft.com/office/drawing/2014/main" id="{4377A1FB-BB6D-4BFC-9000-C371DD94337C}"/>
               </a:ext>
             </a:extLst>
           </p:cNvPr>
@@ -31973,10 +31973,10 @@
           <p:nvPr/>
         </p:nvPicPr>
         <p:blipFill>
-          <a:blip xmlns:r="http://schemas.openxmlformats.org/officeDocument/2006/relationships" xmlns:a="http://schemas.openxmlformats.org/drawingml/2006/main" r:embed="Rbe2a5142a5f742fa">
+          <a:blip xmlns:r="http://schemas.openxmlformats.org/officeDocument/2006/relationships" xmlns:a="http://schemas.openxmlformats.org/drawingml/2006/main" r:embed="R76a9478785c54f60">
             <a:extLst>
               <a:ext uri="{96DAC541-7B7A-43D3-8B79-37D633B846F1}">
-                <asvg:svgBlip xmlns:asvg="http://schemas.microsoft.com/office/drawing/2016/SVG/main" r:embed="R484a73bfc3cc451c"/>
+                <asvg:svgBlip xmlns:asvg="http://schemas.microsoft.com/office/drawing/2016/SVG/main" r:embed="R7223ba4bd2ac4b75"/>
               </a:ext>
             </a:extLst>
           </a:blip>
@@ -31997,7 +31997,7 @@
           <p:cNvPr id="39" name="">
             <a:extLst xmlns:a="http://schemas.openxmlformats.org/drawingml/2006/main">
               <a:ext uri="{FF2B5EF4-FFF2-40B4-BE49-F238E27FC236}">
-                <a16:creationId xmlns:a16="http://schemas.microsoft.com/office/drawing/2014/main" id="{558E947B-7B36-4218-9FBB-49976E3A4F72}"/>
+                <a16:creationId xmlns:a16="http://schemas.microsoft.com/office/drawing/2014/main" id="{CADC4778-8182-4076-BEEC-E145C1CFD047}"/>
               </a:ext>
             </a:extLst>
           </p:cNvPr>
@@ -32049,7 +32049,7 @@
           <p:cNvPr id="40" name="">
             <a:extLst xmlns:a="http://schemas.openxmlformats.org/drawingml/2006/main">
               <a:ext uri="{FF2B5EF4-FFF2-40B4-BE49-F238E27FC236}">
-                <a16:creationId xmlns:a16="http://schemas.microsoft.com/office/drawing/2014/main" id="{5DAC0119-1A1A-41E7-9579-20E31AB70AF5}"/>
+                <a16:creationId xmlns:a16="http://schemas.microsoft.com/office/drawing/2014/main" id="{EC4AB496-E771-4854-8B92-26FB252C55D4}"/>
               </a:ext>
             </a:extLst>
           </p:cNvPr>
@@ -32101,7 +32101,7 @@
           <p:cNvPr id="41" name="">
             <a:extLst xmlns:a="http://schemas.openxmlformats.org/drawingml/2006/main">
               <a:ext uri="{FF2B5EF4-FFF2-40B4-BE49-F238E27FC236}">
-                <a16:creationId xmlns:a16="http://schemas.microsoft.com/office/drawing/2014/main" id="{8C9FBB07-3007-4789-AF8C-EFEE93E743B6}"/>
+                <a16:creationId xmlns:a16="http://schemas.microsoft.com/office/drawing/2014/main" id="{879815C6-6E88-4437-84A9-9385996A791B}"/>
               </a:ext>
             </a:extLst>
           </p:cNvPr>
@@ -32144,7 +32144,7 @@
           <p:cNvPr id="42" name="">
             <a:extLst xmlns:a="http://schemas.openxmlformats.org/drawingml/2006/main">
               <a:ext uri="{FF2B5EF4-FFF2-40B4-BE49-F238E27FC236}">
-                <a16:creationId xmlns:a16="http://schemas.microsoft.com/office/drawing/2014/main" id="{64376B4A-3C63-4763-BBC9-66734977722C}"/>
+                <a16:creationId xmlns:a16="http://schemas.microsoft.com/office/drawing/2014/main" id="{12648D85-2EC8-4A17-8FB0-554629BB13A7}"/>
               </a:ext>
             </a:extLst>
           </p:cNvPr>
@@ -32175,7 +32175,7 @@
           <p:cNvPr id="43" name="">
             <a:extLst xmlns:a="http://schemas.openxmlformats.org/drawingml/2006/main">
               <a:ext uri="{FF2B5EF4-FFF2-40B4-BE49-F238E27FC236}">
-                <a16:creationId xmlns:a16="http://schemas.microsoft.com/office/drawing/2014/main" id="{1915842E-2905-49C6-B16C-98EEFFD53BD7}"/>
+                <a16:creationId xmlns:a16="http://schemas.microsoft.com/office/drawing/2014/main" id="{76CB8DDC-743F-4913-B97C-5E09FDAAFA46}"/>
               </a:ext>
             </a:extLst>
           </p:cNvPr>
@@ -32206,7 +32206,7 @@
           <p:cNvPr id="44" name="">
             <a:extLst xmlns:a="http://schemas.openxmlformats.org/drawingml/2006/main">
               <a:ext uri="{FF2B5EF4-FFF2-40B4-BE49-F238E27FC236}">
-                <a16:creationId xmlns:a16="http://schemas.microsoft.com/office/drawing/2014/main" id="{66D08D9D-D75B-4875-BB61-035E34DED888}"/>
+                <a16:creationId xmlns:a16="http://schemas.microsoft.com/office/drawing/2014/main" id="{710D78EF-C835-4905-87A4-DFA045358090}"/>
               </a:ext>
             </a:extLst>
           </p:cNvPr>
@@ -32249,7 +32249,7 @@
           <p:cNvPr id="45" name="">
             <a:extLst xmlns:a="http://schemas.openxmlformats.org/drawingml/2006/main">
               <a:ext uri="{FF2B5EF4-FFF2-40B4-BE49-F238E27FC236}">
-                <a16:creationId xmlns:a16="http://schemas.microsoft.com/office/drawing/2014/main" id="{DD594397-718F-4C1E-A548-BDAAF83CC227}"/>
+                <a16:creationId xmlns:a16="http://schemas.microsoft.com/office/drawing/2014/main" id="{EF80B529-756C-4B1F-93DD-114D9DFAC9EC}"/>
               </a:ext>
             </a:extLst>
           </p:cNvPr>
@@ -32280,7 +32280,7 @@
           <p:cNvPr id="46" name="">
             <a:extLst xmlns:a="http://schemas.openxmlformats.org/drawingml/2006/main">
               <a:ext uri="{FF2B5EF4-FFF2-40B4-BE49-F238E27FC236}">
-                <a16:creationId xmlns:a16="http://schemas.microsoft.com/office/drawing/2014/main" id="{2014AEFB-E832-409D-ACB3-5F3825EB665C}"/>
+                <a16:creationId xmlns:a16="http://schemas.microsoft.com/office/drawing/2014/main" id="{A3263C07-2CBF-4D59-AD94-91CC09927DF2}"/>
               </a:ext>
             </a:extLst>
           </p:cNvPr>
@@ -32311,7 +32311,7 @@
           <p:cNvPr id="47" name="">
             <a:extLst xmlns:a="http://schemas.openxmlformats.org/drawingml/2006/main">
               <a:ext uri="{FF2B5EF4-FFF2-40B4-BE49-F238E27FC236}">
-                <a16:creationId xmlns:a16="http://schemas.microsoft.com/office/drawing/2014/main" id="{F73F68D1-14B2-4CAF-A9C5-66FD7E8F71F6}"/>
+                <a16:creationId xmlns:a16="http://schemas.microsoft.com/office/drawing/2014/main" id="{6D810B7A-CD6D-40E7-9E9F-CDDF8C514E6E}"/>
               </a:ext>
             </a:extLst>
           </p:cNvPr>
@@ -32363,7 +32363,7 @@
           <p:cNvPr id="48" name="">
             <a:extLst xmlns:a="http://schemas.openxmlformats.org/drawingml/2006/main">
               <a:ext uri="{FF2B5EF4-FFF2-40B4-BE49-F238E27FC236}">
-                <a16:creationId xmlns:a16="http://schemas.microsoft.com/office/drawing/2014/main" id="{8A6F8B2C-1A82-4BA8-8A6F-A934D9044D48}"/>
+                <a16:creationId xmlns:a16="http://schemas.microsoft.com/office/drawing/2014/main" id="{8628E606-32DC-4ABC-9117-1A51D46222B3}"/>
               </a:ext>
             </a:extLst>
           </p:cNvPr>
@@ -32396,7 +32396,7 @@
           <p:cNvPr id="49" name="">
             <a:extLst xmlns:a="http://schemas.openxmlformats.org/drawingml/2006/main">
               <a:ext uri="{FF2B5EF4-FFF2-40B4-BE49-F238E27FC236}">
-                <a16:creationId xmlns:a16="http://schemas.microsoft.com/office/drawing/2014/main" id="{E1E57395-847F-444E-82E5-FF168A8BB40B}"/>
+                <a16:creationId xmlns:a16="http://schemas.microsoft.com/office/drawing/2014/main" id="{A0BCCA10-38E8-409B-93BD-9D256421C658}"/>
               </a:ext>
             </a:extLst>
           </p:cNvPr>
@@ -32448,7 +32448,7 @@
           <p:cNvPr id="50" name="">
             <a:extLst xmlns:a="http://schemas.openxmlformats.org/drawingml/2006/main">
               <a:ext uri="{FF2B5EF4-FFF2-40B4-BE49-F238E27FC236}">
-                <a16:creationId xmlns:a16="http://schemas.microsoft.com/office/drawing/2014/main" id="{E52A20E1-84ED-43DC-9E67-83FD5F8CFA68}"/>
+                <a16:creationId xmlns:a16="http://schemas.microsoft.com/office/drawing/2014/main" id="{4DD73290-DF1C-4C42-A7EC-75DC9AA7782E}"/>
               </a:ext>
             </a:extLst>
           </p:cNvPr>
@@ -32500,7 +32500,7 @@
           <p:cNvPr id="51" name="">
             <a:extLst xmlns:a="http://schemas.openxmlformats.org/drawingml/2006/main">
               <a:ext uri="{FF2B5EF4-FFF2-40B4-BE49-F238E27FC236}">
-                <a16:creationId xmlns:a16="http://schemas.microsoft.com/office/drawing/2014/main" id="{3CB39502-B26C-489A-A54C-068228404F0E}"/>
+                <a16:creationId xmlns:a16="http://schemas.microsoft.com/office/drawing/2014/main" id="{F4F62A63-E83D-4504-AC43-4E2A6FE6DB3A}"/>
               </a:ext>
             </a:extLst>
           </p:cNvPr>
@@ -32552,7 +32552,7 @@
           <p:cNvPr id="52" name="">
             <a:extLst xmlns:a="http://schemas.openxmlformats.org/drawingml/2006/main">
               <a:ext uri="{FF2B5EF4-FFF2-40B4-BE49-F238E27FC236}">
-                <a16:creationId xmlns:a16="http://schemas.microsoft.com/office/drawing/2014/main" id="{68FB3D62-0C5D-46BB-A16B-4E7BD73F5A48}"/>
+                <a16:creationId xmlns:a16="http://schemas.microsoft.com/office/drawing/2014/main" id="{ADA0DE15-154E-4449-8639-BFF08B761367}"/>
               </a:ext>
             </a:extLst>
           </p:cNvPr>
@@ -32595,7 +32595,7 @@
           <p:cNvPr id="53" name="">
             <a:extLst xmlns:a="http://schemas.openxmlformats.org/drawingml/2006/main">
               <a:ext uri="{FF2B5EF4-FFF2-40B4-BE49-F238E27FC236}">
-                <a16:creationId xmlns:a16="http://schemas.microsoft.com/office/drawing/2014/main" id="{E2BAC5E1-0B40-4FA3-9788-F1DAB81254DA}"/>
+                <a16:creationId xmlns:a16="http://schemas.microsoft.com/office/drawing/2014/main" id="{9A4EBC50-F9F0-4A9A-BCAD-EC41752F4B7D}"/>
               </a:ext>
             </a:extLst>
           </p:cNvPr>
@@ -32626,7 +32626,7 @@
           <p:cNvPr id="54" name="">
             <a:extLst xmlns:a="http://schemas.openxmlformats.org/drawingml/2006/main">
               <a:ext uri="{FF2B5EF4-FFF2-40B4-BE49-F238E27FC236}">
-                <a16:creationId xmlns:a16="http://schemas.microsoft.com/office/drawing/2014/main" id="{00BBEC0E-3530-4FAC-BDCF-B2CD66D57D40}"/>
+                <a16:creationId xmlns:a16="http://schemas.microsoft.com/office/drawing/2014/main" id="{CFF5993F-1D46-47F4-91C5-9BB64AC18FFE}"/>
               </a:ext>
             </a:extLst>
           </p:cNvPr>
@@ -32657,7 +32657,7 @@
           <p:cNvPr id="55" name="">
             <a:extLst xmlns:a="http://schemas.openxmlformats.org/drawingml/2006/main">
               <a:ext uri="{FF2B5EF4-FFF2-40B4-BE49-F238E27FC236}">
-                <a16:creationId xmlns:a16="http://schemas.microsoft.com/office/drawing/2014/main" id="{1C521416-B3BE-4E5B-A136-E5909EE065A5}"/>
+                <a16:creationId xmlns:a16="http://schemas.microsoft.com/office/drawing/2014/main" id="{DD35009C-5096-45B1-93F9-155E415E47BE}"/>
               </a:ext>
             </a:extLst>
           </p:cNvPr>
@@ -32709,7 +32709,7 @@
           <p:cNvPr id="56" name="">
             <a:extLst xmlns:a="http://schemas.openxmlformats.org/drawingml/2006/main">
               <a:ext uri="{FF2B5EF4-FFF2-40B4-BE49-F238E27FC236}">
-                <a16:creationId xmlns:a16="http://schemas.microsoft.com/office/drawing/2014/main" id="{027CD0D8-D90D-4280-8E5A-F3A07A1ED5CE}"/>
+                <a16:creationId xmlns:a16="http://schemas.microsoft.com/office/drawing/2014/main" id="{6515D935-60E6-4392-AFF5-4008C2A3EC37}"/>
               </a:ext>
             </a:extLst>
           </p:cNvPr>
@@ -32742,7 +32742,7 @@
           <p:cNvPr id="57" name="">
             <a:extLst xmlns:a="http://schemas.openxmlformats.org/drawingml/2006/main">
               <a:ext uri="{FF2B5EF4-FFF2-40B4-BE49-F238E27FC236}">
-                <a16:creationId xmlns:a16="http://schemas.microsoft.com/office/drawing/2014/main" id="{AAF232CA-648D-4604-B21A-AE9714F6611B}"/>
+                <a16:creationId xmlns:a16="http://schemas.microsoft.com/office/drawing/2014/main" id="{87EEB2D3-C1AA-4D18-A296-F918580EE716}"/>
               </a:ext>
             </a:extLst>
           </p:cNvPr>
@@ -32794,7 +32794,7 @@
           <p:cNvPr id="58" name="">
             <a:extLst xmlns:a="http://schemas.openxmlformats.org/drawingml/2006/main">
               <a:ext uri="{FF2B5EF4-FFF2-40B4-BE49-F238E27FC236}">
-                <a16:creationId xmlns:a16="http://schemas.microsoft.com/office/drawing/2014/main" id="{FC5AF36F-820C-4B19-A1B8-339BA7B31A98}"/>
+                <a16:creationId xmlns:a16="http://schemas.microsoft.com/office/drawing/2014/main" id="{E78F33AF-5F2A-4F3B-ADEC-BFF51FF2586F}"/>
               </a:ext>
             </a:extLst>
           </p:cNvPr>
@@ -32846,7 +32846,7 @@
           <p:cNvPr id="59" name="">
             <a:extLst xmlns:a="http://schemas.openxmlformats.org/drawingml/2006/main">
               <a:ext uri="{FF2B5EF4-FFF2-40B4-BE49-F238E27FC236}">
-                <a16:creationId xmlns:a16="http://schemas.microsoft.com/office/drawing/2014/main" id="{44EE69FA-54A9-485F-ABC5-13684DDA0656}"/>
+                <a16:creationId xmlns:a16="http://schemas.microsoft.com/office/drawing/2014/main" id="{FA62B3F9-91BD-4B4C-B491-E0ECF995913E}"/>
               </a:ext>
             </a:extLst>
           </p:cNvPr>
@@ -32898,7 +32898,7 @@
           <p:cNvPr id="60" name="">
             <a:extLst xmlns:a="http://schemas.openxmlformats.org/drawingml/2006/main">
               <a:ext uri="{FF2B5EF4-FFF2-40B4-BE49-F238E27FC236}">
-                <a16:creationId xmlns:a16="http://schemas.microsoft.com/office/drawing/2014/main" id="{00DA65FD-4A34-4627-A5C8-03070986773E}"/>
+                <a16:creationId xmlns:a16="http://schemas.microsoft.com/office/drawing/2014/main" id="{C432758F-F26D-4166-AC55-5510B166C7DB}"/>
               </a:ext>
             </a:extLst>
           </p:cNvPr>
@@ -32941,7 +32941,7 @@
           <p:cNvPr id="61" name="">
             <a:extLst xmlns:a="http://schemas.openxmlformats.org/drawingml/2006/main">
               <a:ext uri="{FF2B5EF4-FFF2-40B4-BE49-F238E27FC236}">
-                <a16:creationId xmlns:a16="http://schemas.microsoft.com/office/drawing/2014/main" id="{1921BF50-9204-4933-83F3-8F318B9D447F}"/>
+                <a16:creationId xmlns:a16="http://schemas.microsoft.com/office/drawing/2014/main" id="{DE04D17E-922C-4135-BAFF-FE9DC56A0FA7}"/>
               </a:ext>
             </a:extLst>
           </p:cNvPr>
@@ -32972,7 +32972,7 @@
           <p:cNvPr id="62" name="">
             <a:extLst xmlns:a="http://schemas.openxmlformats.org/drawingml/2006/main">
               <a:ext uri="{FF2B5EF4-FFF2-40B4-BE49-F238E27FC236}">
-                <a16:creationId xmlns:a16="http://schemas.microsoft.com/office/drawing/2014/main" id="{EEB0530F-5997-4598-B1B1-ED6BBF197B07}"/>
+                <a16:creationId xmlns:a16="http://schemas.microsoft.com/office/drawing/2014/main" id="{678ACE6F-9574-4298-BD23-5759BAEDA24F}"/>
               </a:ext>
             </a:extLst>
           </p:cNvPr>
@@ -33003,7 +33003,7 @@
           <p:cNvPr id="63" name="">
             <a:extLst xmlns:a="http://schemas.openxmlformats.org/drawingml/2006/main">
               <a:ext uri="{FF2B5EF4-FFF2-40B4-BE49-F238E27FC236}">
-                <a16:creationId xmlns:a16="http://schemas.microsoft.com/office/drawing/2014/main" id="{5547CC3F-2306-4A2D-A3A9-6DC6E4C8EEDF}"/>
+                <a16:creationId xmlns:a16="http://schemas.microsoft.com/office/drawing/2014/main" id="{EF8BD8CC-BA3B-4747-9FCB-E2A600CD4A61}"/>
               </a:ext>
             </a:extLst>
           </p:cNvPr>
@@ -33055,7 +33055,7 @@
           <p:cNvPr id="64" name="">
             <a:extLst xmlns:a="http://schemas.openxmlformats.org/drawingml/2006/main">
               <a:ext uri="{FF2B5EF4-FFF2-40B4-BE49-F238E27FC236}">
-                <a16:creationId xmlns:a16="http://schemas.microsoft.com/office/drawing/2014/main" id="{BFBF614E-80FE-416F-82A6-601D2224B0A4}"/>
+                <a16:creationId xmlns:a16="http://schemas.microsoft.com/office/drawing/2014/main" id="{A1F78645-ED27-4CE8-B81F-A7F2DE407CB9}"/>
               </a:ext>
             </a:extLst>
           </p:cNvPr>
@@ -33088,7 +33088,7 @@
           <p:cNvPr id="65" name="">
             <a:extLst xmlns:a="http://schemas.openxmlformats.org/drawingml/2006/main">
               <a:ext uri="{FF2B5EF4-FFF2-40B4-BE49-F238E27FC236}">
-                <a16:creationId xmlns:a16="http://schemas.microsoft.com/office/drawing/2014/main" id="{F159B66F-13ED-4819-997D-049F7F77F7AF}"/>
+                <a16:creationId xmlns:a16="http://schemas.microsoft.com/office/drawing/2014/main" id="{6360079B-2483-49AE-A84E-E59EE8F3FC90}"/>
               </a:ext>
             </a:extLst>
           </p:cNvPr>
@@ -33140,7 +33140,7 @@
           <p:cNvPr id="66" name="">
             <a:extLst xmlns:a="http://schemas.openxmlformats.org/drawingml/2006/main">
               <a:ext uri="{FF2B5EF4-FFF2-40B4-BE49-F238E27FC236}">
-                <a16:creationId xmlns:a16="http://schemas.microsoft.com/office/drawing/2014/main" id="{44B60CB4-A3D1-48BD-A881-D5FBE2CEE224}"/>
+                <a16:creationId xmlns:a16="http://schemas.microsoft.com/office/drawing/2014/main" id="{2EF1C992-5A29-4751-9BB2-E79672DFAE1C}"/>
               </a:ext>
             </a:extLst>
           </p:cNvPr>
@@ -33192,7 +33192,7 @@
           <p:cNvPr id="67" name="">
             <a:extLst xmlns:a="http://schemas.openxmlformats.org/drawingml/2006/main">
               <a:ext uri="{FF2B5EF4-FFF2-40B4-BE49-F238E27FC236}">
-                <a16:creationId xmlns:a16="http://schemas.microsoft.com/office/drawing/2014/main" id="{D36AD70B-9C13-4D3E-A9F8-8D2455BC2E70}"/>
+                <a16:creationId xmlns:a16="http://schemas.microsoft.com/office/drawing/2014/main" id="{ACF0EB91-43C1-4D94-900F-3282E1A15F4F}"/>
               </a:ext>
             </a:extLst>
           </p:cNvPr>
@@ -33244,7 +33244,7 @@
           <p:cNvPr id="68" name="">
             <a:extLst xmlns:a="http://schemas.openxmlformats.org/drawingml/2006/main">
               <a:ext uri="{FF2B5EF4-FFF2-40B4-BE49-F238E27FC236}">
-                <a16:creationId xmlns:a16="http://schemas.microsoft.com/office/drawing/2014/main" id="{0AB80DBC-2CC3-482B-9AF6-93527D762AC6}"/>
+                <a16:creationId xmlns:a16="http://schemas.microsoft.com/office/drawing/2014/main" id="{0B7CAB77-0057-4F87-95C4-62EEAE4A8280}"/>
               </a:ext>
             </a:extLst>
           </p:cNvPr>
@@ -33287,7 +33287,7 @@
           <p:cNvPr id="69" name="">
             <a:extLst xmlns:a="http://schemas.openxmlformats.org/drawingml/2006/main">
               <a:ext uri="{FF2B5EF4-FFF2-40B4-BE49-F238E27FC236}">
-                <a16:creationId xmlns:a16="http://schemas.microsoft.com/office/drawing/2014/main" id="{6D60C441-28C7-4AD4-9715-AB00F252DB70}"/>
+                <a16:creationId xmlns:a16="http://schemas.microsoft.com/office/drawing/2014/main" id="{3FA867B2-1332-4783-9590-CD8CC5070361}"/>
               </a:ext>
             </a:extLst>
           </p:cNvPr>
@@ -33318,7 +33318,7 @@
           <p:cNvPr id="70" name="">
             <a:extLst xmlns:a="http://schemas.openxmlformats.org/drawingml/2006/main">
               <a:ext uri="{FF2B5EF4-FFF2-40B4-BE49-F238E27FC236}">
-                <a16:creationId xmlns:a16="http://schemas.microsoft.com/office/drawing/2014/main" id="{C0D78570-DC50-4315-BEDD-4CEF7145B60C}"/>
+                <a16:creationId xmlns:a16="http://schemas.microsoft.com/office/drawing/2014/main" id="{695622CA-9A07-40D9-BF7D-3EAC310C3C99}"/>
               </a:ext>
             </a:extLst>
           </p:cNvPr>
@@ -33349,7 +33349,7 @@
           <p:cNvPr id="71" name="">
             <a:extLst xmlns:a="http://schemas.openxmlformats.org/drawingml/2006/main">
               <a:ext uri="{FF2B5EF4-FFF2-40B4-BE49-F238E27FC236}">
-                <a16:creationId xmlns:a16="http://schemas.microsoft.com/office/drawing/2014/main" id="{DD727B39-9E70-44F1-932F-B5534DFCE957}"/>
+                <a16:creationId xmlns:a16="http://schemas.microsoft.com/office/drawing/2014/main" id="{A61E6402-A73E-48CE-AF91-6E6AA5FE01F6}"/>
               </a:ext>
             </a:extLst>
           </p:cNvPr>
@@ -33401,7 +33401,7 @@
           <p:cNvPr id="72" name="">
             <a:extLst xmlns:a="http://schemas.openxmlformats.org/drawingml/2006/main">
               <a:ext uri="{FF2B5EF4-FFF2-40B4-BE49-F238E27FC236}">
-                <a16:creationId xmlns:a16="http://schemas.microsoft.com/office/drawing/2014/main" id="{3743D369-CC5C-4F61-BAC2-5F1016BDABB0}"/>
+                <a16:creationId xmlns:a16="http://schemas.microsoft.com/office/drawing/2014/main" id="{4F6AE4F2-DB44-4656-AFA7-8CAFD01E3D23}"/>
               </a:ext>
             </a:extLst>
           </p:cNvPr>
@@ -33434,7 +33434,7 @@
           <p:cNvPr id="73" name="">
             <a:extLst xmlns:a="http://schemas.openxmlformats.org/drawingml/2006/main">
               <a:ext uri="{FF2B5EF4-FFF2-40B4-BE49-F238E27FC236}">
-                <a16:creationId xmlns:a16="http://schemas.microsoft.com/office/drawing/2014/main" id="{7DE1D4F3-9E95-498D-B1A8-E3E6BCBDDD0C}"/>
+                <a16:creationId xmlns:a16="http://schemas.microsoft.com/office/drawing/2014/main" id="{F2C0C4B2-0A27-4FAB-A344-A248B7389E8D}"/>
               </a:ext>
             </a:extLst>
           </p:cNvPr>
@@ -33486,7 +33486,7 @@
           <p:cNvPr id="74" name="">
             <a:extLst xmlns:a="http://schemas.openxmlformats.org/drawingml/2006/main">
               <a:ext uri="{FF2B5EF4-FFF2-40B4-BE49-F238E27FC236}">
-                <a16:creationId xmlns:a16="http://schemas.microsoft.com/office/drawing/2014/main" id="{43F82107-6430-4B58-8C78-549B8D62997E}"/>
+                <a16:creationId xmlns:a16="http://schemas.microsoft.com/office/drawing/2014/main" id="{FFDF183B-7C45-46B9-A9DF-0B2F11F64B53}"/>
               </a:ext>
             </a:extLst>
           </p:cNvPr>
@@ -33538,7 +33538,7 @@
           <p:cNvPr id="75" name="">
             <a:extLst xmlns:a="http://schemas.openxmlformats.org/drawingml/2006/main">
               <a:ext uri="{FF2B5EF4-FFF2-40B4-BE49-F238E27FC236}">
-                <a16:creationId xmlns:a16="http://schemas.microsoft.com/office/drawing/2014/main" id="{67457991-A0B0-40F3-AA9B-0C31A0774AAD}"/>
+                <a16:creationId xmlns:a16="http://schemas.microsoft.com/office/drawing/2014/main" id="{4F8C7F67-E931-4F43-B06D-C5D6A72A4D99}"/>
               </a:ext>
             </a:extLst>
           </p:cNvPr>
@@ -33588,7 +33588,7 @@
     </p:spTree>
     <p:extLst>
       <p:ext uri="{BB962C8B-B14F-4D97-AF65-F5344CB8AC3E}">
-        <p14:creationId xmlns:p14="http://schemas.microsoft.com/office/powerpoint/2010/main" val="98666074"/>
+        <p14:creationId xmlns:p14="http://schemas.microsoft.com/office/powerpoint/2010/main" val="637186995"/>
       </p:ext>
     </p:extLst>
   </p:cSld>
@@ -33619,7 +33619,7 @@
           <p:cNvPr id="30" name="">
             <a:extLst xmlns:a="http://schemas.openxmlformats.org/drawingml/2006/main">
               <a:ext uri="{FF2B5EF4-FFF2-40B4-BE49-F238E27FC236}">
-                <a16:creationId xmlns:a16="http://schemas.microsoft.com/office/drawing/2014/main" id="{5ED21784-A0FD-41E9-8A0E-E44E91A48D5A}"/>
+                <a16:creationId xmlns:a16="http://schemas.microsoft.com/office/drawing/2014/main" id="{77CDDC8C-65A6-4E84-AC68-18342696755A}"/>
               </a:ext>
             </a:extLst>
           </p:cNvPr>
@@ -33652,7 +33652,7 @@
           <p:cNvPr id="2" name="">
             <a:extLst xmlns:a="http://schemas.openxmlformats.org/drawingml/2006/main">
               <a:ext uri="{FF2B5EF4-FFF2-40B4-BE49-F238E27FC236}">
-                <a16:creationId xmlns:a16="http://schemas.microsoft.com/office/drawing/2014/main" id="{86427585-E28B-4ADF-A7B2-E53D24A13F34}"/>
+                <a16:creationId xmlns:a16="http://schemas.microsoft.com/office/drawing/2014/main" id="{139F72C6-680A-4973-92D1-EA8BFA877004}"/>
               </a:ext>
             </a:extLst>
           </p:cNvPr>
@@ -33683,7 +33683,7 @@
           <p:cNvPr id="3" name="">
             <a:extLst xmlns:a="http://schemas.openxmlformats.org/drawingml/2006/main">
               <a:ext uri="{FF2B5EF4-FFF2-40B4-BE49-F238E27FC236}">
-                <a16:creationId xmlns:a16="http://schemas.microsoft.com/office/drawing/2014/main" id="{5BE6F60A-4539-41F3-812E-5869084902F0}"/>
+                <a16:creationId xmlns:a16="http://schemas.microsoft.com/office/drawing/2014/main" id="{493C2F2D-0B74-4D05-9B5B-56C7EDE7802A}"/>
               </a:ext>
             </a:extLst>
           </p:cNvPr>
@@ -33735,7 +33735,7 @@
           <p:cNvPr id="4" name="">
             <a:extLst xmlns:a="http://schemas.openxmlformats.org/drawingml/2006/main">
               <a:ext uri="{FF2B5EF4-FFF2-40B4-BE49-F238E27FC236}">
-                <a16:creationId xmlns:a16="http://schemas.microsoft.com/office/drawing/2014/main" id="{A003D576-7541-4A60-B846-01DF48374502}"/>
+                <a16:creationId xmlns:a16="http://schemas.microsoft.com/office/drawing/2014/main" id="{9F2D250D-5724-4BDD-AAD9-98BC23B894DE}"/>
               </a:ext>
             </a:extLst>
           </p:cNvPr>
@@ -33787,7 +33787,7 @@
           <p:cNvPr id="5" name="">
             <a:extLst xmlns:a="http://schemas.openxmlformats.org/drawingml/2006/main">
               <a:ext uri="{FF2B5EF4-FFF2-40B4-BE49-F238E27FC236}">
-                <a16:creationId xmlns:a16="http://schemas.microsoft.com/office/drawing/2014/main" id="{12D4C075-6ABD-4D4A-9B85-8895DFAB500D}"/>
+                <a16:creationId xmlns:a16="http://schemas.microsoft.com/office/drawing/2014/main" id="{9197BCAB-CC9D-4BC7-9FA0-4DF2306D0E4A}"/>
               </a:ext>
             </a:extLst>
           </p:cNvPr>
@@ -33822,7 +33822,7 @@
           <p:nvPr/>
         </p:nvPicPr>
         <p:blipFill>
-          <a:blip xmlns:r="http://schemas.openxmlformats.org/officeDocument/2006/relationships" xmlns:a="http://schemas.openxmlformats.org/drawingml/2006/main" r:embed="Rab7ee889c8f84d09"/>
+          <a:blip xmlns:r="http://schemas.openxmlformats.org/officeDocument/2006/relationships" xmlns:a="http://schemas.openxmlformats.org/drawingml/2006/main" r:embed="R34daade355744443"/>
           <a:stretch xmlns:a="http://schemas.openxmlformats.org/drawingml/2006/main"/>
         </p:blipFill>
         <p:spPr>
@@ -33840,7 +33840,7 @@
           <p:cNvPr id="7" name="">
             <a:extLst xmlns:a="http://schemas.openxmlformats.org/drawingml/2006/main">
               <a:ext uri="{FF2B5EF4-FFF2-40B4-BE49-F238E27FC236}">
-                <a16:creationId xmlns:a16="http://schemas.microsoft.com/office/drawing/2014/main" id="{6A71D635-8133-40F0-A9F1-69361263C410}"/>
+                <a16:creationId xmlns:a16="http://schemas.microsoft.com/office/drawing/2014/main" id="{E0F1F14F-774A-41B9-A21A-8B702122B3EB}"/>
               </a:ext>
             </a:extLst>
           </p:cNvPr>
@@ -33892,7 +33892,7 @@
           <p:cNvPr id="8" name="">
             <a:extLst xmlns:a="http://schemas.openxmlformats.org/drawingml/2006/main">
               <a:ext uri="{FF2B5EF4-FFF2-40B4-BE49-F238E27FC236}">
-                <a16:creationId xmlns:a16="http://schemas.microsoft.com/office/drawing/2014/main" id="{9D8A2309-B6C0-4E69-B0EF-B121B332544F}"/>
+                <a16:creationId xmlns:a16="http://schemas.microsoft.com/office/drawing/2014/main" id="{5E0744C4-308F-4A76-BF5A-A68F2E14F113}"/>
               </a:ext>
             </a:extLst>
           </p:cNvPr>
@@ -33944,7 +33944,7 @@
           <p:cNvPr id="9" name="">
             <a:extLst xmlns:a="http://schemas.openxmlformats.org/drawingml/2006/main">
               <a:ext uri="{FF2B5EF4-FFF2-40B4-BE49-F238E27FC236}">
-                <a16:creationId xmlns:a16="http://schemas.microsoft.com/office/drawing/2014/main" id="{A4474D4B-1CE9-4A7C-BFF0-B15FDDC96C99}"/>
+                <a16:creationId xmlns:a16="http://schemas.microsoft.com/office/drawing/2014/main" id="{88E56155-80DA-4F17-9C9E-F02E43F6ECED}"/>
               </a:ext>
             </a:extLst>
           </p:cNvPr>
@@ -33996,7 +33996,7 @@
           <p:cNvPr id="10" name="">
             <a:extLst xmlns:a="http://schemas.openxmlformats.org/drawingml/2006/main">
               <a:ext uri="{FF2B5EF4-FFF2-40B4-BE49-F238E27FC236}">
-                <a16:creationId xmlns:a16="http://schemas.microsoft.com/office/drawing/2014/main" id="{D94B6DF8-A848-47A8-A3DC-2D8CDD642627}"/>
+                <a16:creationId xmlns:a16="http://schemas.microsoft.com/office/drawing/2014/main" id="{053C3CB4-F8D4-46CE-812A-13301F30CAE9}"/>
               </a:ext>
             </a:extLst>
           </p:cNvPr>
@@ -34048,7 +34048,7 @@
           <p:cNvPr id="11" name="">
             <a:extLst xmlns:a="http://schemas.openxmlformats.org/drawingml/2006/main">
               <a:ext uri="{FF2B5EF4-FFF2-40B4-BE49-F238E27FC236}">
-                <a16:creationId xmlns:a16="http://schemas.microsoft.com/office/drawing/2014/main" id="{A8B2C730-9BC4-4711-B230-01DB87B38BA3}"/>
+                <a16:creationId xmlns:a16="http://schemas.microsoft.com/office/drawing/2014/main" id="{C2F4ADC2-C989-4A08-9BD9-E97C375D3A09}"/>
               </a:ext>
             </a:extLst>
           </p:cNvPr>
@@ -34095,10 +34095,10 @@
           <p:nvPr/>
         </p:nvPicPr>
         <p:blipFill>
-          <a:blip xmlns:r="http://schemas.openxmlformats.org/officeDocument/2006/relationships" xmlns:a="http://schemas.openxmlformats.org/drawingml/2006/main" r:embed="R1272b0614c584eec">
+          <a:blip xmlns:r="http://schemas.openxmlformats.org/officeDocument/2006/relationships" xmlns:a="http://schemas.openxmlformats.org/drawingml/2006/main" r:embed="Rae323dcf350a4b92">
             <a:extLst>
               <a:ext uri="{96DAC541-7B7A-43D3-8B79-37D633B846F1}">
-                <asvg:svgBlip xmlns:asvg="http://schemas.microsoft.com/office/drawing/2016/SVG/main" r:embed="R2075cd22c8494584"/>
+                <asvg:svgBlip xmlns:asvg="http://schemas.microsoft.com/office/drawing/2016/SVG/main" r:embed="R9b360797012c499b"/>
               </a:ext>
             </a:extLst>
           </a:blip>
@@ -34119,7 +34119,7 @@
           <p:cNvPr id="13" name="">
             <a:extLst xmlns:a="http://schemas.openxmlformats.org/drawingml/2006/main">
               <a:ext uri="{FF2B5EF4-FFF2-40B4-BE49-F238E27FC236}">
-                <a16:creationId xmlns:a16="http://schemas.microsoft.com/office/drawing/2014/main" id="{B35EDC60-F48F-4A4B-A657-BE9152609AAD}"/>
+                <a16:creationId xmlns:a16="http://schemas.microsoft.com/office/drawing/2014/main" id="{938CE9E7-997B-4408-9D4A-56C9202151B6}"/>
               </a:ext>
             </a:extLst>
           </p:cNvPr>
@@ -34152,7 +34152,7 @@
           <p:cNvPr id="14" name="">
             <a:extLst xmlns:a="http://schemas.openxmlformats.org/drawingml/2006/main">
               <a:ext uri="{FF2B5EF4-FFF2-40B4-BE49-F238E27FC236}">
-                <a16:creationId xmlns:a16="http://schemas.microsoft.com/office/drawing/2014/main" id="{E4BF278C-BC54-4213-85CF-C022979E3818}"/>
+                <a16:creationId xmlns:a16="http://schemas.microsoft.com/office/drawing/2014/main" id="{BC5CE5A9-6475-406E-8F65-9001963FA5E0}"/>
               </a:ext>
             </a:extLst>
           </p:cNvPr>
@@ -34204,7 +34204,7 @@
           <p:cNvPr id="15" name="">
             <a:extLst xmlns:a="http://schemas.openxmlformats.org/drawingml/2006/main">
               <a:ext uri="{FF2B5EF4-FFF2-40B4-BE49-F238E27FC236}">
-                <a16:creationId xmlns:a16="http://schemas.microsoft.com/office/drawing/2014/main" id="{C8C87581-5854-4952-A651-8B06E5EF5186}"/>
+                <a16:creationId xmlns:a16="http://schemas.microsoft.com/office/drawing/2014/main" id="{CAAA7CE4-F1DD-4A90-B71A-0394554EED9A}"/>
               </a:ext>
             </a:extLst>
           </p:cNvPr>
@@ -34237,7 +34237,7 @@
           <p:cNvPr id="16" name="">
             <a:extLst xmlns:a="http://schemas.openxmlformats.org/drawingml/2006/main">
               <a:ext uri="{FF2B5EF4-FFF2-40B4-BE49-F238E27FC236}">
-                <a16:creationId xmlns:a16="http://schemas.microsoft.com/office/drawing/2014/main" id="{6D4B708A-72C2-416A-86F1-1F29055434F0}"/>
+                <a16:creationId xmlns:a16="http://schemas.microsoft.com/office/drawing/2014/main" id="{B41916B3-9A1D-4633-82C7-0D947C42ECFE}"/>
               </a:ext>
             </a:extLst>
           </p:cNvPr>
@@ -34289,7 +34289,7 @@
           <p:cNvPr id="17" name="">
             <a:extLst xmlns:a="http://schemas.openxmlformats.org/drawingml/2006/main">
               <a:ext uri="{FF2B5EF4-FFF2-40B4-BE49-F238E27FC236}">
-                <a16:creationId xmlns:a16="http://schemas.microsoft.com/office/drawing/2014/main" id="{0FB6CE45-1EFE-403B-A595-01370BC8D007}"/>
+                <a16:creationId xmlns:a16="http://schemas.microsoft.com/office/drawing/2014/main" id="{67B01EE4-8B6D-48A9-A129-3E1E2AF99D73}"/>
               </a:ext>
             </a:extLst>
           </p:cNvPr>
@@ -34322,7 +34322,7 @@
           <p:cNvPr id="18" name="">
             <a:extLst xmlns:a="http://schemas.openxmlformats.org/drawingml/2006/main">
               <a:ext uri="{FF2B5EF4-FFF2-40B4-BE49-F238E27FC236}">
-                <a16:creationId xmlns:a16="http://schemas.microsoft.com/office/drawing/2014/main" id="{45A1BB72-41C3-47A6-8594-04B269A106C5}"/>
+                <a16:creationId xmlns:a16="http://schemas.microsoft.com/office/drawing/2014/main" id="{B7B3A12F-4C58-4823-8D11-1A0AAAF1092A}"/>
               </a:ext>
             </a:extLst>
           </p:cNvPr>
@@ -34374,7 +34374,7 @@
           <p:cNvPr id="19" name="">
             <a:extLst xmlns:a="http://schemas.openxmlformats.org/drawingml/2006/main">
               <a:ext uri="{FF2B5EF4-FFF2-40B4-BE49-F238E27FC236}">
-                <a16:creationId xmlns:a16="http://schemas.microsoft.com/office/drawing/2014/main" id="{E6B48644-41FD-4772-9459-EC1342C008D4}"/>
+                <a16:creationId xmlns:a16="http://schemas.microsoft.com/office/drawing/2014/main" id="{07F42906-973B-47F6-931D-118E54F43523}"/>
               </a:ext>
             </a:extLst>
           </p:cNvPr>
@@ -34407,7 +34407,7 @@
           <p:cNvPr id="20" name="">
             <a:extLst xmlns:a="http://schemas.openxmlformats.org/drawingml/2006/main">
               <a:ext uri="{FF2B5EF4-FFF2-40B4-BE49-F238E27FC236}">
-                <a16:creationId xmlns:a16="http://schemas.microsoft.com/office/drawing/2014/main" id="{81F92BDB-E91A-46F5-B383-55EF33A1DAE7}"/>
+                <a16:creationId xmlns:a16="http://schemas.microsoft.com/office/drawing/2014/main" id="{DA36D454-AD3C-4580-95F5-399B333F2907}"/>
               </a:ext>
             </a:extLst>
           </p:cNvPr>
@@ -34459,7 +34459,7 @@
           <p:cNvPr id="21" name="">
             <a:extLst xmlns:a="http://schemas.openxmlformats.org/drawingml/2006/main">
               <a:ext uri="{FF2B5EF4-FFF2-40B4-BE49-F238E27FC236}">
-                <a16:creationId xmlns:a16="http://schemas.microsoft.com/office/drawing/2014/main" id="{EB9DBDC9-6AF0-4E42-B269-F64EE6F6F23C}"/>
+                <a16:creationId xmlns:a16="http://schemas.microsoft.com/office/drawing/2014/main" id="{D6F1C5B1-EA5B-4812-B50C-C214311A8E50}"/>
               </a:ext>
             </a:extLst>
           </p:cNvPr>
@@ -34490,7 +34490,7 @@
           <p:cNvPr id="22" name="">
             <a:extLst xmlns:a="http://schemas.openxmlformats.org/drawingml/2006/main">
               <a:ext uri="{FF2B5EF4-FFF2-40B4-BE49-F238E27FC236}">
-                <a16:creationId xmlns:a16="http://schemas.microsoft.com/office/drawing/2014/main" id="{46BE8B5D-5843-4C3B-A1D7-27ED8E56EF64}"/>
+                <a16:creationId xmlns:a16="http://schemas.microsoft.com/office/drawing/2014/main" id="{B6C4433B-6198-4C84-B3A0-A31401A28603}"/>
               </a:ext>
             </a:extLst>
           </p:cNvPr>
@@ -34542,7 +34542,7 @@
           <p:cNvPr id="23" name="">
             <a:extLst xmlns:a="http://schemas.openxmlformats.org/drawingml/2006/main">
               <a:ext uri="{FF2B5EF4-FFF2-40B4-BE49-F238E27FC236}">
-                <a16:creationId xmlns:a16="http://schemas.microsoft.com/office/drawing/2014/main" id="{2AC6F297-8273-45CE-BDA0-FBBB8E616DB0}"/>
+                <a16:creationId xmlns:a16="http://schemas.microsoft.com/office/drawing/2014/main" id="{1A261C0C-9750-48B4-9ACF-B86AAB380CE5}"/>
               </a:ext>
             </a:extLst>
           </p:cNvPr>
@@ -34594,7 +34594,7 @@
           <p:cNvPr id="24" name="">
             <a:extLst xmlns:a="http://schemas.openxmlformats.org/drawingml/2006/main">
               <a:ext uri="{FF2B5EF4-FFF2-40B4-BE49-F238E27FC236}">
-                <a16:creationId xmlns:a16="http://schemas.microsoft.com/office/drawing/2014/main" id="{F8C5B3BB-E865-4D59-A0D6-931708ECBD2B}"/>
+                <a16:creationId xmlns:a16="http://schemas.microsoft.com/office/drawing/2014/main" id="{DAB67F48-D17A-45F4-B2A7-C8D3478F81FD}"/>
               </a:ext>
             </a:extLst>
           </p:cNvPr>
@@ -34646,7 +34646,7 @@
           <p:cNvPr id="25" name="">
             <a:extLst xmlns:a="http://schemas.openxmlformats.org/drawingml/2006/main">
               <a:ext uri="{FF2B5EF4-FFF2-40B4-BE49-F238E27FC236}">
-                <a16:creationId xmlns:a16="http://schemas.microsoft.com/office/drawing/2014/main" id="{1F14DD21-55CF-47E4-8DEE-BC8425FCA6DC}"/>
+                <a16:creationId xmlns:a16="http://schemas.microsoft.com/office/drawing/2014/main" id="{A8E9E30A-81D8-454F-AD7D-F9B2511F9158}"/>
               </a:ext>
             </a:extLst>
           </p:cNvPr>
@@ -34698,7 +34698,7 @@
           <p:cNvPr id="26" name="">
             <a:extLst xmlns:a="http://schemas.openxmlformats.org/drawingml/2006/main">
               <a:ext uri="{FF2B5EF4-FFF2-40B4-BE49-F238E27FC236}">
-                <a16:creationId xmlns:a16="http://schemas.microsoft.com/office/drawing/2014/main" id="{4181F2A9-BC4A-4C9A-9DE3-6BAEEA6482D6}"/>
+                <a16:creationId xmlns:a16="http://schemas.microsoft.com/office/drawing/2014/main" id="{BE4325BB-0210-43B5-918F-0FF79B752E1B}"/>
               </a:ext>
             </a:extLst>
           </p:cNvPr>
@@ -34750,7 +34750,7 @@
           <p:cNvPr id="27" name="">
             <a:extLst xmlns:a="http://schemas.openxmlformats.org/drawingml/2006/main">
               <a:ext uri="{FF2B5EF4-FFF2-40B4-BE49-F238E27FC236}">
-                <a16:creationId xmlns:a16="http://schemas.microsoft.com/office/drawing/2014/main" id="{CA2410A5-FAAA-42E9-A77C-FAC17A757C06}"/>
+                <a16:creationId xmlns:a16="http://schemas.microsoft.com/office/drawing/2014/main" id="{B7578DDF-9FC6-41F8-A212-438ABCAEE723}"/>
               </a:ext>
             </a:extLst>
           </p:cNvPr>
@@ -34802,7 +34802,7 @@
           <p:cNvPr id="28" name="">
             <a:extLst xmlns:a="http://schemas.openxmlformats.org/drawingml/2006/main">
               <a:ext uri="{FF2B5EF4-FFF2-40B4-BE49-F238E27FC236}">
-                <a16:creationId xmlns:a16="http://schemas.microsoft.com/office/drawing/2014/main" id="{DC6E96BD-65DC-407D-8704-6B3CFFB72915}"/>
+                <a16:creationId xmlns:a16="http://schemas.microsoft.com/office/drawing/2014/main" id="{B837572E-947D-432F-9C27-1DB4C54C24EC}"/>
               </a:ext>
             </a:extLst>
           </p:cNvPr>
@@ -34854,7 +34854,7 @@
           <p:cNvPr id="29" name="">
             <a:extLst xmlns:a="http://schemas.openxmlformats.org/drawingml/2006/main">
               <a:ext uri="{FF2B5EF4-FFF2-40B4-BE49-F238E27FC236}">
-                <a16:creationId xmlns:a16="http://schemas.microsoft.com/office/drawing/2014/main" id="{892019F5-4454-4FED-96CB-156CA2971684}"/>
+                <a16:creationId xmlns:a16="http://schemas.microsoft.com/office/drawing/2014/main" id="{58BE8659-EA16-430D-B319-4F1E76993185}"/>
               </a:ext>
             </a:extLst>
           </p:cNvPr>
@@ -34904,7 +34904,7 @@
     </p:spTree>
     <p:extLst>
       <p:ext uri="{BB962C8B-B14F-4D97-AF65-F5344CB8AC3E}">
-        <p14:creationId xmlns:p14="http://schemas.microsoft.com/office/powerpoint/2010/main" val="1167622176"/>
+        <p14:creationId xmlns:p14="http://schemas.microsoft.com/office/powerpoint/2010/main" val="916423419"/>
       </p:ext>
     </p:extLst>
   </p:cSld>
@@ -34935,7 +34935,7 @@
           <p:cNvPr id="33" name="">
             <a:extLst xmlns:a="http://schemas.openxmlformats.org/drawingml/2006/main">
               <a:ext uri="{FF2B5EF4-FFF2-40B4-BE49-F238E27FC236}">
-                <a16:creationId xmlns:a16="http://schemas.microsoft.com/office/drawing/2014/main" id="{2D2EC4F7-576B-4C4A-9932-C78F9A412B13}"/>
+                <a16:creationId xmlns:a16="http://schemas.microsoft.com/office/drawing/2014/main" id="{A90CEF26-2719-4F2C-8454-366E16C0FDF5}"/>
               </a:ext>
             </a:extLst>
           </p:cNvPr>
@@ -34968,7 +34968,7 @@
           <p:cNvPr id="2" name="">
             <a:extLst xmlns:a="http://schemas.openxmlformats.org/drawingml/2006/main">
               <a:ext uri="{FF2B5EF4-FFF2-40B4-BE49-F238E27FC236}">
-                <a16:creationId xmlns:a16="http://schemas.microsoft.com/office/drawing/2014/main" id="{C0AB89BC-239B-4ADF-9D0E-54F0962CEA8D}"/>
+                <a16:creationId xmlns:a16="http://schemas.microsoft.com/office/drawing/2014/main" id="{0B41636C-9C99-49E1-B1D5-02FCAFC57D4D}"/>
               </a:ext>
             </a:extLst>
           </p:cNvPr>
@@ -34999,7 +34999,7 @@
           <p:cNvPr id="3" name="">
             <a:extLst xmlns:a="http://schemas.openxmlformats.org/drawingml/2006/main">
               <a:ext uri="{FF2B5EF4-FFF2-40B4-BE49-F238E27FC236}">
-                <a16:creationId xmlns:a16="http://schemas.microsoft.com/office/drawing/2014/main" id="{29A5CCE2-2B88-4C06-B34C-9E542FD49A2D}"/>
+                <a16:creationId xmlns:a16="http://schemas.microsoft.com/office/drawing/2014/main" id="{E21E54C8-2F4C-440E-87F7-E8EAE669C5C0}"/>
               </a:ext>
             </a:extLst>
           </p:cNvPr>
@@ -35051,7 +35051,7 @@
           <p:cNvPr id="4" name="">
             <a:extLst xmlns:a="http://schemas.openxmlformats.org/drawingml/2006/main">
               <a:ext uri="{FF2B5EF4-FFF2-40B4-BE49-F238E27FC236}">
-                <a16:creationId xmlns:a16="http://schemas.microsoft.com/office/drawing/2014/main" id="{F6D1D4EE-BBBB-494D-A331-C4D5CEB3EE0A}"/>
+                <a16:creationId xmlns:a16="http://schemas.microsoft.com/office/drawing/2014/main" id="{A2088BA7-08F1-45A9-B73A-E2282487EC29}"/>
               </a:ext>
             </a:extLst>
           </p:cNvPr>
@@ -35103,7 +35103,7 @@
           <p:cNvPr id="5" name="">
             <a:extLst xmlns:a="http://schemas.openxmlformats.org/drawingml/2006/main">
               <a:ext uri="{FF2B5EF4-FFF2-40B4-BE49-F238E27FC236}">
-                <a16:creationId xmlns:a16="http://schemas.microsoft.com/office/drawing/2014/main" id="{A6244FC0-1050-4303-9615-F5271A756F82}"/>
+                <a16:creationId xmlns:a16="http://schemas.microsoft.com/office/drawing/2014/main" id="{C132990B-0B34-4CF7-90DB-4E176AFAC82C}"/>
               </a:ext>
             </a:extLst>
           </p:cNvPr>
@@ -35138,7 +35138,7 @@
           <p:nvPr/>
         </p:nvPicPr>
         <p:blipFill>
-          <a:blip xmlns:r="http://schemas.openxmlformats.org/officeDocument/2006/relationships" xmlns:a="http://schemas.openxmlformats.org/drawingml/2006/main" r:embed="R455d021bb66d4ec9"/>
+          <a:blip xmlns:r="http://schemas.openxmlformats.org/officeDocument/2006/relationships" xmlns:a="http://schemas.openxmlformats.org/drawingml/2006/main" r:embed="R95ddce9bc01641f9"/>
           <a:stretch xmlns:a="http://schemas.openxmlformats.org/drawingml/2006/main"/>
         </p:blipFill>
         <p:spPr>
@@ -35156,7 +35156,7 @@
           <p:cNvPr id="7" name="">
             <a:extLst xmlns:a="http://schemas.openxmlformats.org/drawingml/2006/main">
               <a:ext uri="{FF2B5EF4-FFF2-40B4-BE49-F238E27FC236}">
-                <a16:creationId xmlns:a16="http://schemas.microsoft.com/office/drawing/2014/main" id="{9D50105E-3985-4641-999E-142BE4785D15}"/>
+                <a16:creationId xmlns:a16="http://schemas.microsoft.com/office/drawing/2014/main" id="{732DC909-7969-4787-9769-E917F9E510AB}"/>
               </a:ext>
             </a:extLst>
           </p:cNvPr>
@@ -35208,7 +35208,7 @@
           <p:cNvPr id="8" name="">
             <a:extLst xmlns:a="http://schemas.openxmlformats.org/drawingml/2006/main">
               <a:ext uri="{FF2B5EF4-FFF2-40B4-BE49-F238E27FC236}">
-                <a16:creationId xmlns:a16="http://schemas.microsoft.com/office/drawing/2014/main" id="{948BC385-E694-41A7-A1E4-55D0365CDFBB}"/>
+                <a16:creationId xmlns:a16="http://schemas.microsoft.com/office/drawing/2014/main" id="{18C29603-DFC9-4F45-84CF-4FFB1231CE92}"/>
               </a:ext>
             </a:extLst>
           </p:cNvPr>
@@ -35260,7 +35260,7 @@
           <p:cNvPr id="9" name="">
             <a:extLst xmlns:a="http://schemas.openxmlformats.org/drawingml/2006/main">
               <a:ext uri="{FF2B5EF4-FFF2-40B4-BE49-F238E27FC236}">
-                <a16:creationId xmlns:a16="http://schemas.microsoft.com/office/drawing/2014/main" id="{1C1D35FE-9482-4965-94E8-57B4A5525CC6}"/>
+                <a16:creationId xmlns:a16="http://schemas.microsoft.com/office/drawing/2014/main" id="{4B9DC26E-EBD0-4DC2-9281-61D309CF401C}"/>
               </a:ext>
             </a:extLst>
           </p:cNvPr>
@@ -35312,7 +35312,7 @@
           <p:cNvPr id="10" name="">
             <a:extLst xmlns:a="http://schemas.openxmlformats.org/drawingml/2006/main">
               <a:ext uri="{FF2B5EF4-FFF2-40B4-BE49-F238E27FC236}">
-                <a16:creationId xmlns:a16="http://schemas.microsoft.com/office/drawing/2014/main" id="{733D2554-AD20-4A56-B5D5-E4195C01886D}"/>
+                <a16:creationId xmlns:a16="http://schemas.microsoft.com/office/drawing/2014/main" id="{A0383301-D083-447B-8FBC-7FD93A199075}"/>
               </a:ext>
             </a:extLst>
           </p:cNvPr>
@@ -35364,7 +35364,7 @@
           <p:cNvPr id="11" name="">
             <a:extLst xmlns:a="http://schemas.openxmlformats.org/drawingml/2006/main">
               <a:ext uri="{FF2B5EF4-FFF2-40B4-BE49-F238E27FC236}">
-                <a16:creationId xmlns:a16="http://schemas.microsoft.com/office/drawing/2014/main" id="{8F9F5252-13F8-4122-B8F5-ABACA9EADE40}"/>
+                <a16:creationId xmlns:a16="http://schemas.microsoft.com/office/drawing/2014/main" id="{F8750A5A-B4D9-4059-AAA1-6AB1DDFFD933}"/>
               </a:ext>
             </a:extLst>
           </p:cNvPr>
@@ -35411,10 +35411,10 @@
           <p:nvPr/>
         </p:nvPicPr>
         <p:blipFill>
-          <a:blip xmlns:r="http://schemas.openxmlformats.org/officeDocument/2006/relationships" xmlns:a="http://schemas.openxmlformats.org/drawingml/2006/main" r:embed="Rb62116d05ec44b5e">
+          <a:blip xmlns:r="http://schemas.openxmlformats.org/officeDocument/2006/relationships" xmlns:a="http://schemas.openxmlformats.org/drawingml/2006/main" r:embed="R5419f9ddce974e4e">
             <a:extLst>
               <a:ext uri="{96DAC541-7B7A-43D3-8B79-37D633B846F1}">
-                <asvg:svgBlip xmlns:asvg="http://schemas.microsoft.com/office/drawing/2016/SVG/main" r:embed="R76d72d2adbf84fab"/>
+                <asvg:svgBlip xmlns:asvg="http://schemas.microsoft.com/office/drawing/2016/SVG/main" r:embed="R416560cc44ed488b"/>
               </a:ext>
             </a:extLst>
           </a:blip>
@@ -35435,7 +35435,7 @@
           <p:cNvPr id="13" name="">
             <a:extLst xmlns:a="http://schemas.openxmlformats.org/drawingml/2006/main">
               <a:ext uri="{FF2B5EF4-FFF2-40B4-BE49-F238E27FC236}">
-                <a16:creationId xmlns:a16="http://schemas.microsoft.com/office/drawing/2014/main" id="{EE9284E9-507F-4306-B4C0-D1F9E001E27B}"/>
+                <a16:creationId xmlns:a16="http://schemas.microsoft.com/office/drawing/2014/main" id="{828C4C23-B7D4-4924-AD8B-1872DE4943F0}"/>
               </a:ext>
             </a:extLst>
           </p:cNvPr>
@@ -35468,7 +35468,7 @@
           <p:cNvPr id="14" name="">
             <a:extLst xmlns:a="http://schemas.openxmlformats.org/drawingml/2006/main">
               <a:ext uri="{FF2B5EF4-FFF2-40B4-BE49-F238E27FC236}">
-                <a16:creationId xmlns:a16="http://schemas.microsoft.com/office/drawing/2014/main" id="{46F5913D-E444-4716-9429-5481B10A08F4}"/>
+                <a16:creationId xmlns:a16="http://schemas.microsoft.com/office/drawing/2014/main" id="{AD47FF61-AA64-4A26-BCE2-E0BA31DCE6C8}"/>
               </a:ext>
             </a:extLst>
           </p:cNvPr>
@@ -35520,7 +35520,7 @@
           <p:cNvPr id="15" name="">
             <a:extLst xmlns:a="http://schemas.openxmlformats.org/drawingml/2006/main">
               <a:ext uri="{FF2B5EF4-FFF2-40B4-BE49-F238E27FC236}">
-                <a16:creationId xmlns:a16="http://schemas.microsoft.com/office/drawing/2014/main" id="{FE53E5D3-1FDB-4A09-A979-5064EAB60B2B}"/>
+                <a16:creationId xmlns:a16="http://schemas.microsoft.com/office/drawing/2014/main" id="{BC70C6FA-7759-43E3-9A53-11DE9FE0A3A1}"/>
               </a:ext>
             </a:extLst>
           </p:cNvPr>
@@ -35551,7 +35551,7 @@
           <p:cNvPr id="16" name="">
             <a:extLst xmlns:a="http://schemas.openxmlformats.org/drawingml/2006/main">
               <a:ext uri="{FF2B5EF4-FFF2-40B4-BE49-F238E27FC236}">
-                <a16:creationId xmlns:a16="http://schemas.microsoft.com/office/drawing/2014/main" id="{5FE38928-296B-433D-87BD-9F7FCB7B9FCA}"/>
+                <a16:creationId xmlns:a16="http://schemas.microsoft.com/office/drawing/2014/main" id="{48D0994C-7DCC-4902-B710-A84A95EA43AB}"/>
               </a:ext>
             </a:extLst>
           </p:cNvPr>
@@ -35582,7 +35582,7 @@
           <p:cNvPr id="17" name="">
             <a:extLst xmlns:a="http://schemas.openxmlformats.org/drawingml/2006/main">
               <a:ext uri="{FF2B5EF4-FFF2-40B4-BE49-F238E27FC236}">
-                <a16:creationId xmlns:a16="http://schemas.microsoft.com/office/drawing/2014/main" id="{1E6D3B24-3C58-48DD-9C66-FFBBF8399C89}"/>
+                <a16:creationId xmlns:a16="http://schemas.microsoft.com/office/drawing/2014/main" id="{10FF3457-97BF-4CD1-8F40-C334722D628F}"/>
               </a:ext>
             </a:extLst>
           </p:cNvPr>
@@ -35634,7 +35634,7 @@
           <p:cNvPr id="18" name="">
             <a:extLst xmlns:a="http://schemas.openxmlformats.org/drawingml/2006/main">
               <a:ext uri="{FF2B5EF4-FFF2-40B4-BE49-F238E27FC236}">
-                <a16:creationId xmlns:a16="http://schemas.microsoft.com/office/drawing/2014/main" id="{548B1BFA-DCEC-4929-B732-627E2419A2D0}"/>
+                <a16:creationId xmlns:a16="http://schemas.microsoft.com/office/drawing/2014/main" id="{0EEA5423-6B32-47D1-942B-091B926EE2F8}"/>
               </a:ext>
             </a:extLst>
           </p:cNvPr>
@@ -35667,7 +35667,7 @@
           <p:cNvPr id="19" name="">
             <a:extLst xmlns:a="http://schemas.openxmlformats.org/drawingml/2006/main">
               <a:ext uri="{FF2B5EF4-FFF2-40B4-BE49-F238E27FC236}">
-                <a16:creationId xmlns:a16="http://schemas.microsoft.com/office/drawing/2014/main" id="{C48E5531-6DD2-404D-A57D-9796CDBC0F5F}"/>
+                <a16:creationId xmlns:a16="http://schemas.microsoft.com/office/drawing/2014/main" id="{234D96F2-2159-42B1-AD00-2A8DC34981B4}"/>
               </a:ext>
             </a:extLst>
           </p:cNvPr>
@@ -35719,7 +35719,7 @@
           <p:cNvPr id="20" name="">
             <a:extLst xmlns:a="http://schemas.openxmlformats.org/drawingml/2006/main">
               <a:ext uri="{FF2B5EF4-FFF2-40B4-BE49-F238E27FC236}">
-                <a16:creationId xmlns:a16="http://schemas.microsoft.com/office/drawing/2014/main" id="{237D0DD5-AAC8-4BEE-A6D5-7DBB624145CA}"/>
+                <a16:creationId xmlns:a16="http://schemas.microsoft.com/office/drawing/2014/main" id="{2F1F42CF-9B16-430D-96F3-2835F80410F7}"/>
               </a:ext>
             </a:extLst>
           </p:cNvPr>
@@ -35750,7 +35750,7 @@
           <p:cNvPr id="21" name="">
             <a:extLst xmlns:a="http://schemas.openxmlformats.org/drawingml/2006/main">
               <a:ext uri="{FF2B5EF4-FFF2-40B4-BE49-F238E27FC236}">
-                <a16:creationId xmlns:a16="http://schemas.microsoft.com/office/drawing/2014/main" id="{6FC5DB2A-8EA2-476B-9406-FFF20587EEA2}"/>
+                <a16:creationId xmlns:a16="http://schemas.microsoft.com/office/drawing/2014/main" id="{76C2E89E-DC8E-48AC-9BC0-2BCB48AC70D6}"/>
               </a:ext>
             </a:extLst>
           </p:cNvPr>
@@ -35781,7 +35781,7 @@
           <p:cNvPr id="22" name="">
             <a:extLst xmlns:a="http://schemas.openxmlformats.org/drawingml/2006/main">
               <a:ext uri="{FF2B5EF4-FFF2-40B4-BE49-F238E27FC236}">
-                <a16:creationId xmlns:a16="http://schemas.microsoft.com/office/drawing/2014/main" id="{45D8DEB0-95EC-44F0-8159-D96C1CC2F532}"/>
+                <a16:creationId xmlns:a16="http://schemas.microsoft.com/office/drawing/2014/main" id="{56A620AF-9FF0-4FF4-82FF-DA9294E51AED}"/>
               </a:ext>
             </a:extLst>
           </p:cNvPr>
@@ -35833,7 +35833,7 @@
           <p:cNvPr id="23" name="">
             <a:extLst xmlns:a="http://schemas.openxmlformats.org/drawingml/2006/main">
               <a:ext uri="{FF2B5EF4-FFF2-40B4-BE49-F238E27FC236}">
-                <a16:creationId xmlns:a16="http://schemas.microsoft.com/office/drawing/2014/main" id="{9B9A0CB7-2E0B-4E5B-BC30-E30C6B2A80F0}"/>
+                <a16:creationId xmlns:a16="http://schemas.microsoft.com/office/drawing/2014/main" id="{4A53C6B0-F131-4F54-9CBD-AA55C1559655}"/>
               </a:ext>
             </a:extLst>
           </p:cNvPr>
@@ -35885,7 +35885,7 @@
           <p:cNvPr id="24" name="">
             <a:extLst xmlns:a="http://schemas.openxmlformats.org/drawingml/2006/main">
               <a:ext uri="{FF2B5EF4-FFF2-40B4-BE49-F238E27FC236}">
-                <a16:creationId xmlns:a16="http://schemas.microsoft.com/office/drawing/2014/main" id="{F9E7D3D6-A200-4E15-AAE2-C9CCBEB75372}"/>
+                <a16:creationId xmlns:a16="http://schemas.microsoft.com/office/drawing/2014/main" id="{D8725405-A656-45E3-B53F-0840B3C28B70}"/>
               </a:ext>
             </a:extLst>
           </p:cNvPr>
@@ -35916,7 +35916,7 @@
           <p:cNvPr id="25" name="">
             <a:extLst xmlns:a="http://schemas.openxmlformats.org/drawingml/2006/main">
               <a:ext uri="{FF2B5EF4-FFF2-40B4-BE49-F238E27FC236}">
-                <a16:creationId xmlns:a16="http://schemas.microsoft.com/office/drawing/2014/main" id="{36764D84-1195-4552-937B-BAC774302846}"/>
+                <a16:creationId xmlns:a16="http://schemas.microsoft.com/office/drawing/2014/main" id="{E280E01B-AA49-411F-B39F-59C53717C2B3}"/>
               </a:ext>
             </a:extLst>
           </p:cNvPr>
@@ -35968,7 +35968,7 @@
           <p:cNvPr id="26" name="">
             <a:extLst xmlns:a="http://schemas.openxmlformats.org/drawingml/2006/main">
               <a:ext uri="{FF2B5EF4-FFF2-40B4-BE49-F238E27FC236}">
-                <a16:creationId xmlns:a16="http://schemas.microsoft.com/office/drawing/2014/main" id="{BDA26D40-0845-4E9B-B56A-5B2147503088}"/>
+                <a16:creationId xmlns:a16="http://schemas.microsoft.com/office/drawing/2014/main" id="{6D1E3529-286F-4A6B-A025-F8A249F07178}"/>
               </a:ext>
             </a:extLst>
           </p:cNvPr>
@@ -36020,7 +36020,7 @@
           <p:cNvPr id="27" name="">
             <a:extLst xmlns:a="http://schemas.openxmlformats.org/drawingml/2006/main">
               <a:ext uri="{FF2B5EF4-FFF2-40B4-BE49-F238E27FC236}">
-                <a16:creationId xmlns:a16="http://schemas.microsoft.com/office/drawing/2014/main" id="{31806480-1E5A-46C4-A3AF-D8FD49FEB01D}"/>
+                <a16:creationId xmlns:a16="http://schemas.microsoft.com/office/drawing/2014/main" id="{F9F11016-3E67-49A6-8128-4755BFCCC552}"/>
               </a:ext>
             </a:extLst>
           </p:cNvPr>
@@ -36072,7 +36072,7 @@
           <p:cNvPr id="28" name="">
             <a:extLst xmlns:a="http://schemas.openxmlformats.org/drawingml/2006/main">
               <a:ext uri="{FF2B5EF4-FFF2-40B4-BE49-F238E27FC236}">
-                <a16:creationId xmlns:a16="http://schemas.microsoft.com/office/drawing/2014/main" id="{7522A6FA-E17F-4AFE-9734-358829AE596E}"/>
+                <a16:creationId xmlns:a16="http://schemas.microsoft.com/office/drawing/2014/main" id="{4CCBD53C-871C-41E0-9A06-16EBB1A637D1}"/>
               </a:ext>
             </a:extLst>
           </p:cNvPr>
@@ -36124,7 +36124,7 @@
           <p:cNvPr id="29" name="">
             <a:extLst xmlns:a="http://schemas.openxmlformats.org/drawingml/2006/main">
               <a:ext uri="{FF2B5EF4-FFF2-40B4-BE49-F238E27FC236}">
-                <a16:creationId xmlns:a16="http://schemas.microsoft.com/office/drawing/2014/main" id="{84EF7EB8-4684-4885-8C3A-9DD595BC330A}"/>
+                <a16:creationId xmlns:a16="http://schemas.microsoft.com/office/drawing/2014/main" id="{CBA356CA-9B94-4F1A-9D24-0FE9553A0410}"/>
               </a:ext>
             </a:extLst>
           </p:cNvPr>
@@ -36176,7 +36176,7 @@
           <p:cNvPr id="30" name="">
             <a:extLst xmlns:a="http://schemas.openxmlformats.org/drawingml/2006/main">
               <a:ext uri="{FF2B5EF4-FFF2-40B4-BE49-F238E27FC236}">
-                <a16:creationId xmlns:a16="http://schemas.microsoft.com/office/drawing/2014/main" id="{3ECB7690-A08F-46A1-A31A-AEB25653C96B}"/>
+                <a16:creationId xmlns:a16="http://schemas.microsoft.com/office/drawing/2014/main" id="{2352E2EA-6FD7-4AEA-8A40-A491F6ACF5B0}"/>
               </a:ext>
             </a:extLst>
           </p:cNvPr>
@@ -36228,7 +36228,7 @@
           <p:cNvPr id="31" name="">
             <a:extLst xmlns:a="http://schemas.openxmlformats.org/drawingml/2006/main">
               <a:ext uri="{FF2B5EF4-FFF2-40B4-BE49-F238E27FC236}">
-                <a16:creationId xmlns:a16="http://schemas.microsoft.com/office/drawing/2014/main" id="{646B8195-E9A0-4B4A-9518-09A7AAC05758}"/>
+                <a16:creationId xmlns:a16="http://schemas.microsoft.com/office/drawing/2014/main" id="{8E229A4A-2BD8-48AC-B74B-7A81AC662485}"/>
               </a:ext>
             </a:extLst>
           </p:cNvPr>
@@ -36280,7 +36280,7 @@
           <p:cNvPr id="32" name="">
             <a:extLst xmlns:a="http://schemas.openxmlformats.org/drawingml/2006/main">
               <a:ext uri="{FF2B5EF4-FFF2-40B4-BE49-F238E27FC236}">
-                <a16:creationId xmlns:a16="http://schemas.microsoft.com/office/drawing/2014/main" id="{85D843C4-65C2-425A-9A64-F96357CAE322}"/>
+                <a16:creationId xmlns:a16="http://schemas.microsoft.com/office/drawing/2014/main" id="{542F9B8F-5492-49DF-AB22-EBAFEB968661}"/>
               </a:ext>
             </a:extLst>
           </p:cNvPr>
@@ -36330,7 +36330,7 @@
     </p:spTree>
     <p:extLst>
       <p:ext uri="{BB962C8B-B14F-4D97-AF65-F5344CB8AC3E}">
-        <p14:creationId xmlns:p14="http://schemas.microsoft.com/office/powerpoint/2010/main" val="1428241194"/>
+        <p14:creationId xmlns:p14="http://schemas.microsoft.com/office/powerpoint/2010/main" val="355165452"/>
       </p:ext>
     </p:extLst>
   </p:cSld>
@@ -36361,7 +36361,7 @@
           <p:cNvPr id="27" name="">
             <a:extLst xmlns:a="http://schemas.openxmlformats.org/drawingml/2006/main">
               <a:ext uri="{FF2B5EF4-FFF2-40B4-BE49-F238E27FC236}">
-                <a16:creationId xmlns:a16="http://schemas.microsoft.com/office/drawing/2014/main" id="{1C9A052B-DE19-4637-9362-22C0AB4D3DCD}"/>
+                <a16:creationId xmlns:a16="http://schemas.microsoft.com/office/drawing/2014/main" id="{B1C29CA3-9473-40E4-B0C2-E65381B76227}"/>
               </a:ext>
             </a:extLst>
           </p:cNvPr>
@@ -36394,7 +36394,7 @@
           <p:cNvPr id="2" name="">
             <a:extLst xmlns:a="http://schemas.openxmlformats.org/drawingml/2006/main">
               <a:ext uri="{FF2B5EF4-FFF2-40B4-BE49-F238E27FC236}">
-                <a16:creationId xmlns:a16="http://schemas.microsoft.com/office/drawing/2014/main" id="{6F192A6E-AF4C-40C3-8905-1D424A6BB78E}"/>
+                <a16:creationId xmlns:a16="http://schemas.microsoft.com/office/drawing/2014/main" id="{99F8CF4B-9F63-452E-906C-A5E6E511A96F}"/>
               </a:ext>
             </a:extLst>
           </p:cNvPr>
@@ -36425,7 +36425,7 @@
           <p:cNvPr id="3" name="">
             <a:extLst xmlns:a="http://schemas.openxmlformats.org/drawingml/2006/main">
               <a:ext uri="{FF2B5EF4-FFF2-40B4-BE49-F238E27FC236}">
-                <a16:creationId xmlns:a16="http://schemas.microsoft.com/office/drawing/2014/main" id="{3E5AE155-2282-4F48-8B64-2D3A671AE22B}"/>
+                <a16:creationId xmlns:a16="http://schemas.microsoft.com/office/drawing/2014/main" id="{59F41A30-E80A-4599-93D0-58750EB09B62}"/>
               </a:ext>
             </a:extLst>
           </p:cNvPr>
@@ -36477,7 +36477,7 @@
           <p:cNvPr id="4" name="">
             <a:extLst xmlns:a="http://schemas.openxmlformats.org/drawingml/2006/main">
               <a:ext uri="{FF2B5EF4-FFF2-40B4-BE49-F238E27FC236}">
-                <a16:creationId xmlns:a16="http://schemas.microsoft.com/office/drawing/2014/main" id="{F2E5C643-DDD9-48EE-9E4F-9BF67A9468A0}"/>
+                <a16:creationId xmlns:a16="http://schemas.microsoft.com/office/drawing/2014/main" id="{8EE2D821-F7C3-4355-A93E-17310F88039D}"/>
               </a:ext>
             </a:extLst>
           </p:cNvPr>
@@ -36529,7 +36529,7 @@
           <p:cNvPr id="5" name="">
             <a:extLst xmlns:a="http://schemas.openxmlformats.org/drawingml/2006/main">
               <a:ext uri="{FF2B5EF4-FFF2-40B4-BE49-F238E27FC236}">
-                <a16:creationId xmlns:a16="http://schemas.microsoft.com/office/drawing/2014/main" id="{C8817AC2-FD94-4039-9A0D-D41C40D730CA}"/>
+                <a16:creationId xmlns:a16="http://schemas.microsoft.com/office/drawing/2014/main" id="{1E6EB817-C8A4-44EE-B0C2-A5C29B6C682C}"/>
               </a:ext>
             </a:extLst>
           </p:cNvPr>
@@ -36564,7 +36564,7 @@
           <p:nvPr/>
         </p:nvPicPr>
         <p:blipFill>
-          <a:blip xmlns:r="http://schemas.openxmlformats.org/officeDocument/2006/relationships" xmlns:a="http://schemas.openxmlformats.org/drawingml/2006/main" r:embed="R6d318b0ef2864e46"/>
+          <a:blip xmlns:r="http://schemas.openxmlformats.org/officeDocument/2006/relationships" xmlns:a="http://schemas.openxmlformats.org/drawingml/2006/main" r:embed="R66c509b3b8f64562"/>
           <a:stretch xmlns:a="http://schemas.openxmlformats.org/drawingml/2006/main"/>
         </p:blipFill>
         <p:spPr>
@@ -36582,7 +36582,7 @@
           <p:cNvPr id="7" name="">
             <a:extLst xmlns:a="http://schemas.openxmlformats.org/drawingml/2006/main">
               <a:ext uri="{FF2B5EF4-FFF2-40B4-BE49-F238E27FC236}">
-                <a16:creationId xmlns:a16="http://schemas.microsoft.com/office/drawing/2014/main" id="{0F8C9C18-AE74-4CA4-8A24-E85294DC4EE8}"/>
+                <a16:creationId xmlns:a16="http://schemas.microsoft.com/office/drawing/2014/main" id="{CE3B7FC0-EF1B-47C0-BFE0-529306E50B36}"/>
               </a:ext>
             </a:extLst>
           </p:cNvPr>
@@ -36634,7 +36634,7 @@
           <p:cNvPr id="8" name="">
             <a:extLst xmlns:a="http://schemas.openxmlformats.org/drawingml/2006/main">
               <a:ext uri="{FF2B5EF4-FFF2-40B4-BE49-F238E27FC236}">
-                <a16:creationId xmlns:a16="http://schemas.microsoft.com/office/drawing/2014/main" id="{D1F0EB7E-D97C-4D3E-AFDA-F56F321F81AC}"/>
+                <a16:creationId xmlns:a16="http://schemas.microsoft.com/office/drawing/2014/main" id="{922FE0F3-ADDC-4BC5-B4EB-223D28EF3C71}"/>
               </a:ext>
             </a:extLst>
           </p:cNvPr>
@@ -36686,7 +36686,7 @@
           <p:cNvPr id="9" name="">
             <a:extLst xmlns:a="http://schemas.openxmlformats.org/drawingml/2006/main">
               <a:ext uri="{FF2B5EF4-FFF2-40B4-BE49-F238E27FC236}">
-                <a16:creationId xmlns:a16="http://schemas.microsoft.com/office/drawing/2014/main" id="{095610B4-0BCF-4051-ABC0-CC02F7A96EF6}"/>
+                <a16:creationId xmlns:a16="http://schemas.microsoft.com/office/drawing/2014/main" id="{384E6205-4299-4D4E-881E-CD646AE0B7D8}"/>
               </a:ext>
             </a:extLst>
           </p:cNvPr>
@@ -36738,7 +36738,7 @@
           <p:cNvPr id="10" name="">
             <a:extLst xmlns:a="http://schemas.openxmlformats.org/drawingml/2006/main">
               <a:ext uri="{FF2B5EF4-FFF2-40B4-BE49-F238E27FC236}">
-                <a16:creationId xmlns:a16="http://schemas.microsoft.com/office/drawing/2014/main" id="{74C92C89-253A-44EC-9631-DD68C68F8DF7}"/>
+                <a16:creationId xmlns:a16="http://schemas.microsoft.com/office/drawing/2014/main" id="{052DC241-59C2-4249-90CB-426FDD38CB35}"/>
               </a:ext>
             </a:extLst>
           </p:cNvPr>
@@ -36790,7 +36790,7 @@
           <p:cNvPr id="11" name="">
             <a:extLst xmlns:a="http://schemas.openxmlformats.org/drawingml/2006/main">
               <a:ext uri="{FF2B5EF4-FFF2-40B4-BE49-F238E27FC236}">
-                <a16:creationId xmlns:a16="http://schemas.microsoft.com/office/drawing/2014/main" id="{5E3FD599-3732-4BC9-94A5-5A7190EE4E76}"/>
+                <a16:creationId xmlns:a16="http://schemas.microsoft.com/office/drawing/2014/main" id="{7653E734-E3FF-4201-A5DC-4F26AD2CE9CC}"/>
               </a:ext>
             </a:extLst>
           </p:cNvPr>
@@ -36837,10 +36837,10 @@
           <p:nvPr/>
         </p:nvPicPr>
         <p:blipFill>
-          <a:blip xmlns:r="http://schemas.openxmlformats.org/officeDocument/2006/relationships" xmlns:a="http://schemas.openxmlformats.org/drawingml/2006/main" r:embed="Ra22f9876723844b6">
+          <a:blip xmlns:r="http://schemas.openxmlformats.org/officeDocument/2006/relationships" xmlns:a="http://schemas.openxmlformats.org/drawingml/2006/main" r:embed="R275910783bf14414">
             <a:extLst>
               <a:ext uri="{96DAC541-7B7A-43D3-8B79-37D633B846F1}">
-                <asvg:svgBlip xmlns:asvg="http://schemas.microsoft.com/office/drawing/2016/SVG/main" r:embed="R0e46c01531da4efa"/>
+                <asvg:svgBlip xmlns:asvg="http://schemas.microsoft.com/office/drawing/2016/SVG/main" r:embed="R49f1b97d06ab4c61"/>
               </a:ext>
             </a:extLst>
           </a:blip>
@@ -36861,7 +36861,7 @@
           <p:cNvPr id="13" name="">
             <a:extLst xmlns:a="http://schemas.openxmlformats.org/drawingml/2006/main">
               <a:ext uri="{FF2B5EF4-FFF2-40B4-BE49-F238E27FC236}">
-                <a16:creationId xmlns:a16="http://schemas.microsoft.com/office/drawing/2014/main" id="{F0D1DF92-846F-42DD-B592-17315DAEDFCF}"/>
+                <a16:creationId xmlns:a16="http://schemas.microsoft.com/office/drawing/2014/main" id="{9CEE3BBB-9EA5-405A-B555-7DCEE0BF036F}"/>
               </a:ext>
             </a:extLst>
           </p:cNvPr>
@@ -36894,7 +36894,7 @@
           <p:cNvPr id="14" name="">
             <a:extLst xmlns:a="http://schemas.openxmlformats.org/drawingml/2006/main">
               <a:ext uri="{FF2B5EF4-FFF2-40B4-BE49-F238E27FC236}">
-                <a16:creationId xmlns:a16="http://schemas.microsoft.com/office/drawing/2014/main" id="{CCD15366-F2CB-49D4-AC0F-F8AF93903305}"/>
+                <a16:creationId xmlns:a16="http://schemas.microsoft.com/office/drawing/2014/main" id="{285F7997-F9CD-496B-9889-BD01F6629CCF}"/>
               </a:ext>
             </a:extLst>
           </p:cNvPr>
@@ -36946,7 +36946,7 @@
           <p:cNvPr id="15" name="">
             <a:extLst xmlns:a="http://schemas.openxmlformats.org/drawingml/2006/main">
               <a:ext uri="{FF2B5EF4-FFF2-40B4-BE49-F238E27FC236}">
-                <a16:creationId xmlns:a16="http://schemas.microsoft.com/office/drawing/2014/main" id="{92F809D7-C565-4A98-B73B-3D908127C8AF}"/>
+                <a16:creationId xmlns:a16="http://schemas.microsoft.com/office/drawing/2014/main" id="{0F67AF1D-F929-47D8-AD7F-1885F73AE6D1}"/>
               </a:ext>
             </a:extLst>
           </p:cNvPr>
@@ -36979,7 +36979,7 @@
           <p:cNvPr id="16" name="">
             <a:extLst xmlns:a="http://schemas.openxmlformats.org/drawingml/2006/main">
               <a:ext uri="{FF2B5EF4-FFF2-40B4-BE49-F238E27FC236}">
-                <a16:creationId xmlns:a16="http://schemas.microsoft.com/office/drawing/2014/main" id="{3E7C780B-6040-4579-AFD4-3ACB94006F13}"/>
+                <a16:creationId xmlns:a16="http://schemas.microsoft.com/office/drawing/2014/main" id="{B051AF40-9144-447C-A0CE-80255FE29057}"/>
               </a:ext>
             </a:extLst>
           </p:cNvPr>
@@ -37031,7 +37031,7 @@
           <p:cNvPr id="17" name="">
             <a:extLst xmlns:a="http://schemas.openxmlformats.org/drawingml/2006/main">
               <a:ext uri="{FF2B5EF4-FFF2-40B4-BE49-F238E27FC236}">
-                <a16:creationId xmlns:a16="http://schemas.microsoft.com/office/drawing/2014/main" id="{FDCDC477-2530-44C4-94E6-9126644D351D}"/>
+                <a16:creationId xmlns:a16="http://schemas.microsoft.com/office/drawing/2014/main" id="{6CEB6BAF-2D7A-47DD-84E7-BE358F5EF6D9}"/>
               </a:ext>
             </a:extLst>
           </p:cNvPr>
@@ -37062,7 +37062,7 @@
           <p:cNvPr id="18" name="">
             <a:extLst xmlns:a="http://schemas.openxmlformats.org/drawingml/2006/main">
               <a:ext uri="{FF2B5EF4-FFF2-40B4-BE49-F238E27FC236}">
-                <a16:creationId xmlns:a16="http://schemas.microsoft.com/office/drawing/2014/main" id="{CE043CD6-0F53-4C91-8FD2-81E2C190D26D}"/>
+                <a16:creationId xmlns:a16="http://schemas.microsoft.com/office/drawing/2014/main" id="{46311B37-84D0-4217-8BCE-17A2260C7A55}"/>
               </a:ext>
             </a:extLst>
           </p:cNvPr>
@@ -37093,7 +37093,7 @@
           <p:cNvPr id="19" name="">
             <a:extLst xmlns:a="http://schemas.openxmlformats.org/drawingml/2006/main">
               <a:ext uri="{FF2B5EF4-FFF2-40B4-BE49-F238E27FC236}">
-                <a16:creationId xmlns:a16="http://schemas.microsoft.com/office/drawing/2014/main" id="{39BCE6A7-97D7-4F18-AD51-9E2DEA817DC3}"/>
+                <a16:creationId xmlns:a16="http://schemas.microsoft.com/office/drawing/2014/main" id="{68D55A4E-40FC-475B-BA26-C3D0608D79B2}"/>
               </a:ext>
             </a:extLst>
           </p:cNvPr>
@@ -37145,7 +37145,7 @@
           <p:cNvPr id="20" name="">
             <a:extLst xmlns:a="http://schemas.openxmlformats.org/drawingml/2006/main">
               <a:ext uri="{FF2B5EF4-FFF2-40B4-BE49-F238E27FC236}">
-                <a16:creationId xmlns:a16="http://schemas.microsoft.com/office/drawing/2014/main" id="{D49EB82A-3DB1-446C-BC04-56311A217593}"/>
+                <a16:creationId xmlns:a16="http://schemas.microsoft.com/office/drawing/2014/main" id="{755E3031-F946-4EDE-88A5-6493780D7DC3}"/>
               </a:ext>
             </a:extLst>
           </p:cNvPr>
@@ -37176,7 +37176,7 @@
           <p:cNvPr id="21" name="">
             <a:extLst xmlns:a="http://schemas.openxmlformats.org/drawingml/2006/main">
               <a:ext uri="{FF2B5EF4-FFF2-40B4-BE49-F238E27FC236}">
-                <a16:creationId xmlns:a16="http://schemas.microsoft.com/office/drawing/2014/main" id="{F6F0F806-9D55-4C6C-8710-7A450598A4B5}"/>
+                <a16:creationId xmlns:a16="http://schemas.microsoft.com/office/drawing/2014/main" id="{5C6CF9A2-6117-484D-AFE3-1EB13753E208}"/>
               </a:ext>
             </a:extLst>
           </p:cNvPr>
@@ -37228,7 +37228,7 @@
           <p:cNvPr id="22" name="">
             <a:extLst xmlns:a="http://schemas.openxmlformats.org/drawingml/2006/main">
               <a:ext uri="{FF2B5EF4-FFF2-40B4-BE49-F238E27FC236}">
-                <a16:creationId xmlns:a16="http://schemas.microsoft.com/office/drawing/2014/main" id="{4D789516-BBAA-49F3-BDDE-A8B70ED5713E}"/>
+                <a16:creationId xmlns:a16="http://schemas.microsoft.com/office/drawing/2014/main" id="{ED5B0E6C-C98C-4D3B-B123-93AFFCA098B0}"/>
               </a:ext>
             </a:extLst>
           </p:cNvPr>
@@ -37280,7 +37280,7 @@
           <p:cNvPr id="23" name="">
             <a:extLst xmlns:a="http://schemas.openxmlformats.org/drawingml/2006/main">
               <a:ext uri="{FF2B5EF4-FFF2-40B4-BE49-F238E27FC236}">
-                <a16:creationId xmlns:a16="http://schemas.microsoft.com/office/drawing/2014/main" id="{7878878A-1D61-42A3-A03B-70AEAB615D47}"/>
+                <a16:creationId xmlns:a16="http://schemas.microsoft.com/office/drawing/2014/main" id="{51EFFEF2-39AB-46B1-9E01-806BD740422E}"/>
               </a:ext>
             </a:extLst>
           </p:cNvPr>
@@ -37332,7 +37332,7 @@
           <p:cNvPr id="24" name="">
             <a:extLst xmlns:a="http://schemas.openxmlformats.org/drawingml/2006/main">
               <a:ext uri="{FF2B5EF4-FFF2-40B4-BE49-F238E27FC236}">
-                <a16:creationId xmlns:a16="http://schemas.microsoft.com/office/drawing/2014/main" id="{5D41DF26-6798-4BBF-ABAA-836F6D823047}"/>
+                <a16:creationId xmlns:a16="http://schemas.microsoft.com/office/drawing/2014/main" id="{F00675C1-3EB0-41E1-B074-5F469793B8FB}"/>
               </a:ext>
             </a:extLst>
           </p:cNvPr>
@@ -37384,7 +37384,7 @@
           <p:cNvPr id="25" name="">
             <a:extLst xmlns:a="http://schemas.openxmlformats.org/drawingml/2006/main">
               <a:ext uri="{FF2B5EF4-FFF2-40B4-BE49-F238E27FC236}">
-                <a16:creationId xmlns:a16="http://schemas.microsoft.com/office/drawing/2014/main" id="{BA2359C8-A124-4620-A154-70EB819BFDCB}"/>
+                <a16:creationId xmlns:a16="http://schemas.microsoft.com/office/drawing/2014/main" id="{058D7C20-0E4E-4592-9E25-F751664BF075}"/>
               </a:ext>
             </a:extLst>
           </p:cNvPr>
@@ -37436,7 +37436,7 @@
           <p:cNvPr id="26" name="">
             <a:extLst xmlns:a="http://schemas.openxmlformats.org/drawingml/2006/main">
               <a:ext uri="{FF2B5EF4-FFF2-40B4-BE49-F238E27FC236}">
-                <a16:creationId xmlns:a16="http://schemas.microsoft.com/office/drawing/2014/main" id="{992AACDF-71BF-40DE-90D2-5F57C9883B92}"/>
+                <a16:creationId xmlns:a16="http://schemas.microsoft.com/office/drawing/2014/main" id="{475FEBC3-9259-44BC-9D93-B79DB40FDA35}"/>
               </a:ext>
             </a:extLst>
           </p:cNvPr>
@@ -37486,7 +37486,7 @@
     </p:spTree>
     <p:extLst>
       <p:ext uri="{BB962C8B-B14F-4D97-AF65-F5344CB8AC3E}">
-        <p14:creationId xmlns:p14="http://schemas.microsoft.com/office/powerpoint/2010/main" val="1023567962"/>
+        <p14:creationId xmlns:p14="http://schemas.microsoft.com/office/powerpoint/2010/main" val="1790020241"/>
       </p:ext>
     </p:extLst>
   </p:cSld>
@@ -37517,7 +37517,7 @@
           <p:cNvPr id="27" name="">
             <a:extLst xmlns:a="http://schemas.openxmlformats.org/drawingml/2006/main">
               <a:ext uri="{FF2B5EF4-FFF2-40B4-BE49-F238E27FC236}">
-                <a16:creationId xmlns:a16="http://schemas.microsoft.com/office/drawing/2014/main" id="{014CB98B-87D0-43C9-8B68-327AFBAAC5B9}"/>
+                <a16:creationId xmlns:a16="http://schemas.microsoft.com/office/drawing/2014/main" id="{A79FD89A-0E5E-4432-A713-B32121CF167A}"/>
               </a:ext>
             </a:extLst>
           </p:cNvPr>
@@ -37550,7 +37550,7 @@
           <p:cNvPr id="2" name="">
             <a:extLst xmlns:a="http://schemas.openxmlformats.org/drawingml/2006/main">
               <a:ext uri="{FF2B5EF4-FFF2-40B4-BE49-F238E27FC236}">
-                <a16:creationId xmlns:a16="http://schemas.microsoft.com/office/drawing/2014/main" id="{D5D1DEE3-DFA5-4D5D-A471-2A169A1C1BCA}"/>
+                <a16:creationId xmlns:a16="http://schemas.microsoft.com/office/drawing/2014/main" id="{DD5445F1-5AB2-40D8-8FBE-CB8B2475ED2F}"/>
               </a:ext>
             </a:extLst>
           </p:cNvPr>
@@ -37581,7 +37581,7 @@
           <p:cNvPr id="3" name="">
             <a:extLst xmlns:a="http://schemas.openxmlformats.org/drawingml/2006/main">
               <a:ext uri="{FF2B5EF4-FFF2-40B4-BE49-F238E27FC236}">
-                <a16:creationId xmlns:a16="http://schemas.microsoft.com/office/drawing/2014/main" id="{19957A53-F72D-42DF-8DEE-AB389BA7D5B1}"/>
+                <a16:creationId xmlns:a16="http://schemas.microsoft.com/office/drawing/2014/main" id="{3CEF96FE-B846-47B9-B524-8E4B1DF46A6A}"/>
               </a:ext>
             </a:extLst>
           </p:cNvPr>
@@ -37633,7 +37633,7 @@
           <p:cNvPr id="4" name="">
             <a:extLst xmlns:a="http://schemas.openxmlformats.org/drawingml/2006/main">
               <a:ext uri="{FF2B5EF4-FFF2-40B4-BE49-F238E27FC236}">
-                <a16:creationId xmlns:a16="http://schemas.microsoft.com/office/drawing/2014/main" id="{41634BA8-6A53-481D-86A7-FD74DEE4009B}"/>
+                <a16:creationId xmlns:a16="http://schemas.microsoft.com/office/drawing/2014/main" id="{1DC927FE-801A-48BA-B4E8-52BA9D03D260}"/>
               </a:ext>
             </a:extLst>
           </p:cNvPr>
@@ -37685,7 +37685,7 @@
           <p:cNvPr id="5" name="">
             <a:extLst xmlns:a="http://schemas.openxmlformats.org/drawingml/2006/main">
               <a:ext uri="{FF2B5EF4-FFF2-40B4-BE49-F238E27FC236}">
-                <a16:creationId xmlns:a16="http://schemas.microsoft.com/office/drawing/2014/main" id="{384198A4-30B7-4FFD-81E7-36D8F21314C3}"/>
+                <a16:creationId xmlns:a16="http://schemas.microsoft.com/office/drawing/2014/main" id="{CDF842BC-9AC3-4673-8314-A45E6F6251BD}"/>
               </a:ext>
             </a:extLst>
           </p:cNvPr>
@@ -37720,7 +37720,7 @@
           <p:nvPr/>
         </p:nvPicPr>
         <p:blipFill>
-          <a:blip xmlns:r="http://schemas.openxmlformats.org/officeDocument/2006/relationships" xmlns:a="http://schemas.openxmlformats.org/drawingml/2006/main" r:embed="Re45045615c7e4b49"/>
+          <a:blip xmlns:r="http://schemas.openxmlformats.org/officeDocument/2006/relationships" xmlns:a="http://schemas.openxmlformats.org/drawingml/2006/main" r:embed="R9b95f6a53fd245fc"/>
           <a:stretch xmlns:a="http://schemas.openxmlformats.org/drawingml/2006/main"/>
         </p:blipFill>
         <p:spPr>
@@ -37738,7 +37738,7 @@
           <p:cNvPr id="7" name="">
             <a:extLst xmlns:a="http://schemas.openxmlformats.org/drawingml/2006/main">
               <a:ext uri="{FF2B5EF4-FFF2-40B4-BE49-F238E27FC236}">
-                <a16:creationId xmlns:a16="http://schemas.microsoft.com/office/drawing/2014/main" id="{8F549CCB-CFE7-4753-A987-04727F33FFF8}"/>
+                <a16:creationId xmlns:a16="http://schemas.microsoft.com/office/drawing/2014/main" id="{26B42DEE-9553-4E21-86F7-2EE73FD3856F}"/>
               </a:ext>
             </a:extLst>
           </p:cNvPr>
@@ -37790,7 +37790,7 @@
           <p:cNvPr id="8" name="">
             <a:extLst xmlns:a="http://schemas.openxmlformats.org/drawingml/2006/main">
               <a:ext uri="{FF2B5EF4-FFF2-40B4-BE49-F238E27FC236}">
-                <a16:creationId xmlns:a16="http://schemas.microsoft.com/office/drawing/2014/main" id="{6D8CD15F-D2C0-4B60-9657-D61054807C54}"/>
+                <a16:creationId xmlns:a16="http://schemas.microsoft.com/office/drawing/2014/main" id="{192401FA-B006-4FAC-B3B0-46660F33840B}"/>
               </a:ext>
             </a:extLst>
           </p:cNvPr>
@@ -37842,7 +37842,7 @@
           <p:cNvPr id="9" name="">
             <a:extLst xmlns:a="http://schemas.openxmlformats.org/drawingml/2006/main">
               <a:ext uri="{FF2B5EF4-FFF2-40B4-BE49-F238E27FC236}">
-                <a16:creationId xmlns:a16="http://schemas.microsoft.com/office/drawing/2014/main" id="{25220DA1-83C2-4FD0-AF51-6D207578FCB6}"/>
+                <a16:creationId xmlns:a16="http://schemas.microsoft.com/office/drawing/2014/main" id="{6CB85070-A313-4D23-9682-4B6E73BB59DC}"/>
               </a:ext>
             </a:extLst>
           </p:cNvPr>
@@ -37894,7 +37894,7 @@
           <p:cNvPr id="10" name="">
             <a:extLst xmlns:a="http://schemas.openxmlformats.org/drawingml/2006/main">
               <a:ext uri="{FF2B5EF4-FFF2-40B4-BE49-F238E27FC236}">
-                <a16:creationId xmlns:a16="http://schemas.microsoft.com/office/drawing/2014/main" id="{0A6FF2BB-1233-4CF0-AA1D-72E5E58C3783}"/>
+                <a16:creationId xmlns:a16="http://schemas.microsoft.com/office/drawing/2014/main" id="{537D4345-58A7-4D52-BCC4-4FA7AD6374DA}"/>
               </a:ext>
             </a:extLst>
           </p:cNvPr>
@@ -37946,7 +37946,7 @@
           <p:cNvPr id="11" name="">
             <a:extLst xmlns:a="http://schemas.openxmlformats.org/drawingml/2006/main">
               <a:ext uri="{FF2B5EF4-FFF2-40B4-BE49-F238E27FC236}">
-                <a16:creationId xmlns:a16="http://schemas.microsoft.com/office/drawing/2014/main" id="{DC92F79A-60F3-4B80-8B53-025F30812DA0}"/>
+                <a16:creationId xmlns:a16="http://schemas.microsoft.com/office/drawing/2014/main" id="{2CF0D58B-9BC2-4A51-B37B-A6D40E78D8C3}"/>
               </a:ext>
             </a:extLst>
           </p:cNvPr>
@@ -37993,10 +37993,10 @@
           <p:nvPr/>
         </p:nvPicPr>
         <p:blipFill>
-          <a:blip xmlns:r="http://schemas.openxmlformats.org/officeDocument/2006/relationships" xmlns:a="http://schemas.openxmlformats.org/drawingml/2006/main" r:embed="R86627243dd834055">
+          <a:blip xmlns:r="http://schemas.openxmlformats.org/officeDocument/2006/relationships" xmlns:a="http://schemas.openxmlformats.org/drawingml/2006/main" r:embed="Rc60fa9094e2b4d87">
             <a:extLst>
               <a:ext uri="{96DAC541-7B7A-43D3-8B79-37D633B846F1}">
-                <asvg:svgBlip xmlns:asvg="http://schemas.microsoft.com/office/drawing/2016/SVG/main" r:embed="Rd64c0454fc6a423d"/>
+                <asvg:svgBlip xmlns:asvg="http://schemas.microsoft.com/office/drawing/2016/SVG/main" r:embed="R192c511e162a4152"/>
               </a:ext>
             </a:extLst>
           </a:blip>
@@ -38017,7 +38017,7 @@
           <p:cNvPr id="13" name="">
             <a:extLst xmlns:a="http://schemas.openxmlformats.org/drawingml/2006/main">
               <a:ext uri="{FF2B5EF4-FFF2-40B4-BE49-F238E27FC236}">
-                <a16:creationId xmlns:a16="http://schemas.microsoft.com/office/drawing/2014/main" id="{5BEA4EAF-C378-4225-BA8E-88B02AFE5853}"/>
+                <a16:creationId xmlns:a16="http://schemas.microsoft.com/office/drawing/2014/main" id="{E85E6FCF-7B51-41C7-8B05-2201A3C279A4}"/>
               </a:ext>
             </a:extLst>
           </p:cNvPr>
@@ -38050,7 +38050,7 @@
           <p:cNvPr id="14" name="">
             <a:extLst xmlns:a="http://schemas.openxmlformats.org/drawingml/2006/main">
               <a:ext uri="{FF2B5EF4-FFF2-40B4-BE49-F238E27FC236}">
-                <a16:creationId xmlns:a16="http://schemas.microsoft.com/office/drawing/2014/main" id="{4A0E54C9-FD2A-497D-A103-E4552EFB3D42}"/>
+                <a16:creationId xmlns:a16="http://schemas.microsoft.com/office/drawing/2014/main" id="{A1D7019B-B679-4264-BDED-329B57AEE48A}"/>
               </a:ext>
             </a:extLst>
           </p:cNvPr>
@@ -38102,7 +38102,7 @@
           <p:cNvPr id="15" name="">
             <a:extLst xmlns:a="http://schemas.openxmlformats.org/drawingml/2006/main">
               <a:ext uri="{FF2B5EF4-FFF2-40B4-BE49-F238E27FC236}">
-                <a16:creationId xmlns:a16="http://schemas.microsoft.com/office/drawing/2014/main" id="{BB43A93C-8DA3-4908-B6B3-2F6E49AFEAAD}"/>
+                <a16:creationId xmlns:a16="http://schemas.microsoft.com/office/drawing/2014/main" id="{FEBD0B51-B49D-4AEF-A904-2D1ED572B3D4}"/>
               </a:ext>
             </a:extLst>
           </p:cNvPr>
@@ -38135,7 +38135,7 @@
           <p:cNvPr id="16" name="">
             <a:extLst xmlns:a="http://schemas.openxmlformats.org/drawingml/2006/main">
               <a:ext uri="{FF2B5EF4-FFF2-40B4-BE49-F238E27FC236}">
-                <a16:creationId xmlns:a16="http://schemas.microsoft.com/office/drawing/2014/main" id="{3C50B9B1-D492-4187-B4A8-E64C8494FCC5}"/>
+                <a16:creationId xmlns:a16="http://schemas.microsoft.com/office/drawing/2014/main" id="{8F9F2D8C-21CF-4384-9DC2-AB7ECE15CE16}"/>
               </a:ext>
             </a:extLst>
           </p:cNvPr>
@@ -38187,7 +38187,7 @@
           <p:cNvPr id="17" name="">
             <a:extLst xmlns:a="http://schemas.openxmlformats.org/drawingml/2006/main">
               <a:ext uri="{FF2B5EF4-FFF2-40B4-BE49-F238E27FC236}">
-                <a16:creationId xmlns:a16="http://schemas.microsoft.com/office/drawing/2014/main" id="{B45E2728-3319-4E95-918A-E764170D7F63}"/>
+                <a16:creationId xmlns:a16="http://schemas.microsoft.com/office/drawing/2014/main" id="{D06E95B4-224F-4D67-A39E-99EE2EF3A7BB}"/>
               </a:ext>
             </a:extLst>
           </p:cNvPr>
@@ -38220,7 +38220,7 @@
           <p:cNvPr id="18" name="">
             <a:extLst xmlns:a="http://schemas.openxmlformats.org/drawingml/2006/main">
               <a:ext uri="{FF2B5EF4-FFF2-40B4-BE49-F238E27FC236}">
-                <a16:creationId xmlns:a16="http://schemas.microsoft.com/office/drawing/2014/main" id="{4035CBBF-C985-4CDA-A103-C8199B7C17F4}"/>
+                <a16:creationId xmlns:a16="http://schemas.microsoft.com/office/drawing/2014/main" id="{2DAC80B3-0748-4AD0-A416-C943505473A1}"/>
               </a:ext>
             </a:extLst>
           </p:cNvPr>
@@ -38272,7 +38272,7 @@
           <p:cNvPr id="19" name="">
             <a:extLst xmlns:a="http://schemas.openxmlformats.org/drawingml/2006/main">
               <a:ext uri="{FF2B5EF4-FFF2-40B4-BE49-F238E27FC236}">
-                <a16:creationId xmlns:a16="http://schemas.microsoft.com/office/drawing/2014/main" id="{60DA3E58-CC8D-4869-9A58-A8BEBFE04A54}"/>
+                <a16:creationId xmlns:a16="http://schemas.microsoft.com/office/drawing/2014/main" id="{22E50C0D-70E8-4021-85CB-F02E9EBE8F34}"/>
               </a:ext>
             </a:extLst>
           </p:cNvPr>
@@ -38324,7 +38324,7 @@
           <p:cNvPr id="20" name="">
             <a:extLst xmlns:a="http://schemas.openxmlformats.org/drawingml/2006/main">
               <a:ext uri="{FF2B5EF4-FFF2-40B4-BE49-F238E27FC236}">
-                <a16:creationId xmlns:a16="http://schemas.microsoft.com/office/drawing/2014/main" id="{15ED99C0-0518-4415-835E-5FB8B56F8134}"/>
+                <a16:creationId xmlns:a16="http://schemas.microsoft.com/office/drawing/2014/main" id="{7842725F-81ED-462C-B8E6-9821DCE0048B}"/>
               </a:ext>
             </a:extLst>
           </p:cNvPr>
@@ -38355,7 +38355,7 @@
           <p:cNvPr id="21" name="">
             <a:extLst xmlns:a="http://schemas.openxmlformats.org/drawingml/2006/main">
               <a:ext uri="{FF2B5EF4-FFF2-40B4-BE49-F238E27FC236}">
-                <a16:creationId xmlns:a16="http://schemas.microsoft.com/office/drawing/2014/main" id="{EC5B029C-D8AC-4631-8580-FFBDBC243565}"/>
+                <a16:creationId xmlns:a16="http://schemas.microsoft.com/office/drawing/2014/main" id="{E1AF48E7-1372-4D0F-AFDB-ED1D04312B79}"/>
               </a:ext>
             </a:extLst>
           </p:cNvPr>
@@ -38407,7 +38407,7 @@
           <p:cNvPr id="22" name="">
             <a:extLst xmlns:a="http://schemas.openxmlformats.org/drawingml/2006/main">
               <a:ext uri="{FF2B5EF4-FFF2-40B4-BE49-F238E27FC236}">
-                <a16:creationId xmlns:a16="http://schemas.microsoft.com/office/drawing/2014/main" id="{2E8396E3-5D08-40D9-8A8E-DFA1C5A622CA}"/>
+                <a16:creationId xmlns:a16="http://schemas.microsoft.com/office/drawing/2014/main" id="{12903A44-35B0-49D9-827B-B27674B5AF07}"/>
               </a:ext>
             </a:extLst>
           </p:cNvPr>
@@ -38459,7 +38459,7 @@
           <p:cNvPr id="23" name="">
             <a:extLst xmlns:a="http://schemas.openxmlformats.org/drawingml/2006/main">
               <a:ext uri="{FF2B5EF4-FFF2-40B4-BE49-F238E27FC236}">
-                <a16:creationId xmlns:a16="http://schemas.microsoft.com/office/drawing/2014/main" id="{D938A7D1-F182-424F-9FFF-26272A2D648D}"/>
+                <a16:creationId xmlns:a16="http://schemas.microsoft.com/office/drawing/2014/main" id="{AC9DF611-3528-4CD7-8CB3-72B25896A307}"/>
               </a:ext>
             </a:extLst>
           </p:cNvPr>
@@ -38511,7 +38511,7 @@
           <p:cNvPr id="24" name="">
             <a:extLst xmlns:a="http://schemas.openxmlformats.org/drawingml/2006/main">
               <a:ext uri="{FF2B5EF4-FFF2-40B4-BE49-F238E27FC236}">
-                <a16:creationId xmlns:a16="http://schemas.microsoft.com/office/drawing/2014/main" id="{D1A72368-C7AB-4B26-8037-2E62E8AA7EB7}"/>
+                <a16:creationId xmlns:a16="http://schemas.microsoft.com/office/drawing/2014/main" id="{721E7A8C-3313-41FF-9E63-BB4A3FE9B411}"/>
               </a:ext>
             </a:extLst>
           </p:cNvPr>
@@ -38563,7 +38563,7 @@
           <p:cNvPr id="25" name="">
             <a:extLst xmlns:a="http://schemas.openxmlformats.org/drawingml/2006/main">
               <a:ext uri="{FF2B5EF4-FFF2-40B4-BE49-F238E27FC236}">
-                <a16:creationId xmlns:a16="http://schemas.microsoft.com/office/drawing/2014/main" id="{50BC45A1-76E0-45FC-B83F-817B73C76B29}"/>
+                <a16:creationId xmlns:a16="http://schemas.microsoft.com/office/drawing/2014/main" id="{2945E47F-E147-48A0-8063-BA957824390E}"/>
               </a:ext>
             </a:extLst>
           </p:cNvPr>
@@ -38615,7 +38615,7 @@
           <p:cNvPr id="26" name="">
             <a:extLst xmlns:a="http://schemas.openxmlformats.org/drawingml/2006/main">
               <a:ext uri="{FF2B5EF4-FFF2-40B4-BE49-F238E27FC236}">
-                <a16:creationId xmlns:a16="http://schemas.microsoft.com/office/drawing/2014/main" id="{4F46A0FF-1466-4010-8AF9-EE47408D643A}"/>
+                <a16:creationId xmlns:a16="http://schemas.microsoft.com/office/drawing/2014/main" id="{465641FE-14BC-436B-9689-D9FE30E62668}"/>
               </a:ext>
             </a:extLst>
           </p:cNvPr>
@@ -38665,7 +38665,7 @@
     </p:spTree>
     <p:extLst>
       <p:ext uri="{BB962C8B-B14F-4D97-AF65-F5344CB8AC3E}">
-        <p14:creationId xmlns:p14="http://schemas.microsoft.com/office/powerpoint/2010/main" val="235853772"/>
+        <p14:creationId xmlns:p14="http://schemas.microsoft.com/office/powerpoint/2010/main" val="2022240781"/>
       </p:ext>
     </p:extLst>
   </p:cSld>
@@ -38696,7 +38696,7 @@
           <p:cNvPr id="35" name="">
             <a:extLst xmlns:a="http://schemas.openxmlformats.org/drawingml/2006/main">
               <a:ext uri="{FF2B5EF4-FFF2-40B4-BE49-F238E27FC236}">
-                <a16:creationId xmlns:a16="http://schemas.microsoft.com/office/drawing/2014/main" id="{E52E674F-AECF-4341-97A9-371801AE799C}"/>
+                <a16:creationId xmlns:a16="http://schemas.microsoft.com/office/drawing/2014/main" id="{08587E5C-61E4-44D4-AC47-824ECFABED4E}"/>
               </a:ext>
             </a:extLst>
           </p:cNvPr>
@@ -38729,7 +38729,7 @@
           <p:cNvPr id="2" name="">
             <a:extLst xmlns:a="http://schemas.openxmlformats.org/drawingml/2006/main">
               <a:ext uri="{FF2B5EF4-FFF2-40B4-BE49-F238E27FC236}">
-                <a16:creationId xmlns:a16="http://schemas.microsoft.com/office/drawing/2014/main" id="{2002CDF8-5003-4477-BCE8-F5410BC2246D}"/>
+                <a16:creationId xmlns:a16="http://schemas.microsoft.com/office/drawing/2014/main" id="{3CACD68F-2EFF-4D0C-A96F-C5A37F2D65CA}"/>
               </a:ext>
             </a:extLst>
           </p:cNvPr>
@@ -38760,7 +38760,7 @@
           <p:cNvPr id="3" name="">
             <a:extLst xmlns:a="http://schemas.openxmlformats.org/drawingml/2006/main">
               <a:ext uri="{FF2B5EF4-FFF2-40B4-BE49-F238E27FC236}">
-                <a16:creationId xmlns:a16="http://schemas.microsoft.com/office/drawing/2014/main" id="{E3224E49-040B-4841-838B-072FE6CFEDE0}"/>
+                <a16:creationId xmlns:a16="http://schemas.microsoft.com/office/drawing/2014/main" id="{C30E28D9-943A-4B84-B62E-B1966AC0199C}"/>
               </a:ext>
             </a:extLst>
           </p:cNvPr>
@@ -38812,7 +38812,7 @@
           <p:cNvPr id="4" name="">
             <a:extLst xmlns:a="http://schemas.openxmlformats.org/drawingml/2006/main">
               <a:ext uri="{FF2B5EF4-FFF2-40B4-BE49-F238E27FC236}">
-                <a16:creationId xmlns:a16="http://schemas.microsoft.com/office/drawing/2014/main" id="{2B9D0BAE-0F1B-43DC-9615-E6DCFEBC9AE8}"/>
+                <a16:creationId xmlns:a16="http://schemas.microsoft.com/office/drawing/2014/main" id="{00EABBA7-D9CD-4684-AA94-43045A83619E}"/>
               </a:ext>
             </a:extLst>
           </p:cNvPr>
@@ -38864,7 +38864,7 @@
           <p:cNvPr id="5" name="">
             <a:extLst xmlns:a="http://schemas.openxmlformats.org/drawingml/2006/main">
               <a:ext uri="{FF2B5EF4-FFF2-40B4-BE49-F238E27FC236}">
-                <a16:creationId xmlns:a16="http://schemas.microsoft.com/office/drawing/2014/main" id="{35151B3D-1338-415F-A532-F47ADEA1F067}"/>
+                <a16:creationId xmlns:a16="http://schemas.microsoft.com/office/drawing/2014/main" id="{B85AAAA7-BC10-42B8-A9A2-6297709032E0}"/>
               </a:ext>
             </a:extLst>
           </p:cNvPr>
@@ -38899,7 +38899,7 @@
           <p:nvPr/>
         </p:nvPicPr>
         <p:blipFill>
-          <a:blip xmlns:r="http://schemas.openxmlformats.org/officeDocument/2006/relationships" xmlns:a="http://schemas.openxmlformats.org/drawingml/2006/main" r:embed="R5a7208c4e1804333"/>
+          <a:blip xmlns:r="http://schemas.openxmlformats.org/officeDocument/2006/relationships" xmlns:a="http://schemas.openxmlformats.org/drawingml/2006/main" r:embed="Rafaa5d310bd34ece"/>
           <a:stretch xmlns:a="http://schemas.openxmlformats.org/drawingml/2006/main"/>
         </p:blipFill>
         <p:spPr>
@@ -38917,7 +38917,7 @@
           <p:cNvPr id="7" name="">
             <a:extLst xmlns:a="http://schemas.openxmlformats.org/drawingml/2006/main">
               <a:ext uri="{FF2B5EF4-FFF2-40B4-BE49-F238E27FC236}">
-                <a16:creationId xmlns:a16="http://schemas.microsoft.com/office/drawing/2014/main" id="{A33E3A9D-67C0-4AFF-B117-1C3FD602F80A}"/>
+                <a16:creationId xmlns:a16="http://schemas.microsoft.com/office/drawing/2014/main" id="{4227B1AD-C69B-4431-BE0B-417FA1BC2010}"/>
               </a:ext>
             </a:extLst>
           </p:cNvPr>
@@ -38969,7 +38969,7 @@
           <p:cNvPr id="8" name="">
             <a:extLst xmlns:a="http://schemas.openxmlformats.org/drawingml/2006/main">
               <a:ext uri="{FF2B5EF4-FFF2-40B4-BE49-F238E27FC236}">
-                <a16:creationId xmlns:a16="http://schemas.microsoft.com/office/drawing/2014/main" id="{F50FDACB-7C80-45E0-A383-1BC38F1654F5}"/>
+                <a16:creationId xmlns:a16="http://schemas.microsoft.com/office/drawing/2014/main" id="{A01AD320-B859-454B-A0C7-1A7816A534D7}"/>
               </a:ext>
             </a:extLst>
           </p:cNvPr>
@@ -39021,7 +39021,7 @@
           <p:cNvPr id="9" name="">
             <a:extLst xmlns:a="http://schemas.openxmlformats.org/drawingml/2006/main">
               <a:ext uri="{FF2B5EF4-FFF2-40B4-BE49-F238E27FC236}">
-                <a16:creationId xmlns:a16="http://schemas.microsoft.com/office/drawing/2014/main" id="{D9E287B2-41E6-46F5-B918-010B851C87A2}"/>
+                <a16:creationId xmlns:a16="http://schemas.microsoft.com/office/drawing/2014/main" id="{880A1039-5458-477C-9AC7-E6E71FB3C5CF}"/>
               </a:ext>
             </a:extLst>
           </p:cNvPr>
@@ -39073,7 +39073,7 @@
           <p:cNvPr id="10" name="">
             <a:extLst xmlns:a="http://schemas.openxmlformats.org/drawingml/2006/main">
               <a:ext uri="{FF2B5EF4-FFF2-40B4-BE49-F238E27FC236}">
-                <a16:creationId xmlns:a16="http://schemas.microsoft.com/office/drawing/2014/main" id="{418AC9FA-481A-4D89-AF42-DA464F16744F}"/>
+                <a16:creationId xmlns:a16="http://schemas.microsoft.com/office/drawing/2014/main" id="{A24A926F-2183-45D4-A45B-0DEC5C12453D}"/>
               </a:ext>
             </a:extLst>
           </p:cNvPr>
@@ -39125,7 +39125,7 @@
           <p:cNvPr id="11" name="">
             <a:extLst xmlns:a="http://schemas.openxmlformats.org/drawingml/2006/main">
               <a:ext uri="{FF2B5EF4-FFF2-40B4-BE49-F238E27FC236}">
-                <a16:creationId xmlns:a16="http://schemas.microsoft.com/office/drawing/2014/main" id="{471358A0-2CA9-4369-87D7-0BF4712EB9EC}"/>
+                <a16:creationId xmlns:a16="http://schemas.microsoft.com/office/drawing/2014/main" id="{95A015D8-5D6A-42DE-BE94-74D8CFFD915E}"/>
               </a:ext>
             </a:extLst>
           </p:cNvPr>
@@ -39172,10 +39172,10 @@
           <p:nvPr/>
         </p:nvPicPr>
         <p:blipFill>
-          <a:blip xmlns:r="http://schemas.openxmlformats.org/officeDocument/2006/relationships" xmlns:a="http://schemas.openxmlformats.org/drawingml/2006/main" r:embed="Ra27683dd3af34ef8">
+          <a:blip xmlns:r="http://schemas.openxmlformats.org/officeDocument/2006/relationships" xmlns:a="http://schemas.openxmlformats.org/drawingml/2006/main" r:embed="Rbca7c0b77fc24362">
             <a:extLst>
               <a:ext uri="{96DAC541-7B7A-43D3-8B79-37D633B846F1}">
-                <asvg:svgBlip xmlns:asvg="http://schemas.microsoft.com/office/drawing/2016/SVG/main" r:embed="Rab1d5bcbb32d4fee"/>
+                <asvg:svgBlip xmlns:asvg="http://schemas.microsoft.com/office/drawing/2016/SVG/main" r:embed="R1045448132354ed2"/>
               </a:ext>
             </a:extLst>
           </a:blip>
@@ -39196,7 +39196,7 @@
           <p:cNvPr id="13" name="">
             <a:extLst xmlns:a="http://schemas.openxmlformats.org/drawingml/2006/main">
               <a:ext uri="{FF2B5EF4-FFF2-40B4-BE49-F238E27FC236}">
-                <a16:creationId xmlns:a16="http://schemas.microsoft.com/office/drawing/2014/main" id="{093211BC-7525-42D0-8FA0-79234FC3D8D3}"/>
+                <a16:creationId xmlns:a16="http://schemas.microsoft.com/office/drawing/2014/main" id="{620FB146-AFB4-46AF-B4A8-013AA561BBFF}"/>
               </a:ext>
             </a:extLst>
           </p:cNvPr>
@@ -39229,7 +39229,7 @@
           <p:cNvPr id="14" name="">
             <a:extLst xmlns:a="http://schemas.openxmlformats.org/drawingml/2006/main">
               <a:ext uri="{FF2B5EF4-FFF2-40B4-BE49-F238E27FC236}">
-                <a16:creationId xmlns:a16="http://schemas.microsoft.com/office/drawing/2014/main" id="{7D45A0F0-D901-448C-A04D-A6D1491925A4}"/>
+                <a16:creationId xmlns:a16="http://schemas.microsoft.com/office/drawing/2014/main" id="{B632F909-8A8C-40BF-933D-6F250745E1C7}"/>
               </a:ext>
             </a:extLst>
           </p:cNvPr>
@@ -39281,7 +39281,7 @@
           <p:cNvPr id="15" name="">
             <a:extLst xmlns:a="http://schemas.openxmlformats.org/drawingml/2006/main">
               <a:ext uri="{FF2B5EF4-FFF2-40B4-BE49-F238E27FC236}">
-                <a16:creationId xmlns:a16="http://schemas.microsoft.com/office/drawing/2014/main" id="{01195736-ABD3-46B4-B136-BD152C5EFE40}"/>
+                <a16:creationId xmlns:a16="http://schemas.microsoft.com/office/drawing/2014/main" id="{2C4F7FC1-B54B-40C1-A74B-5560B761D366}"/>
               </a:ext>
             </a:extLst>
           </p:cNvPr>
@@ -39314,7 +39314,7 @@
           <p:cNvPr id="16" name="">
             <a:extLst xmlns:a="http://schemas.openxmlformats.org/drawingml/2006/main">
               <a:ext uri="{FF2B5EF4-FFF2-40B4-BE49-F238E27FC236}">
-                <a16:creationId xmlns:a16="http://schemas.microsoft.com/office/drawing/2014/main" id="{7C3F1F2A-5EDA-4C46-AED6-64AEEB64C7A8}"/>
+                <a16:creationId xmlns:a16="http://schemas.microsoft.com/office/drawing/2014/main" id="{E2B4A851-A194-41FF-AC25-B4D5E0206504}"/>
               </a:ext>
             </a:extLst>
           </p:cNvPr>
@@ -39366,7 +39366,7 @@
           <p:cNvPr id="17" name="">
             <a:extLst xmlns:a="http://schemas.openxmlformats.org/drawingml/2006/main">
               <a:ext uri="{FF2B5EF4-FFF2-40B4-BE49-F238E27FC236}">
-                <a16:creationId xmlns:a16="http://schemas.microsoft.com/office/drawing/2014/main" id="{1E506D67-A855-4376-8D7A-220752529760}"/>
+                <a16:creationId xmlns:a16="http://schemas.microsoft.com/office/drawing/2014/main" id="{9B0086ED-75C5-4DB7-97C9-C464BDFB703A}"/>
               </a:ext>
             </a:extLst>
           </p:cNvPr>
@@ -39399,7 +39399,7 @@
           <p:cNvPr id="18" name="">
             <a:extLst xmlns:a="http://schemas.openxmlformats.org/drawingml/2006/main">
               <a:ext uri="{FF2B5EF4-FFF2-40B4-BE49-F238E27FC236}">
-                <a16:creationId xmlns:a16="http://schemas.microsoft.com/office/drawing/2014/main" id="{E968BADD-2DD3-453E-9F97-61AC75CA4BBD}"/>
+                <a16:creationId xmlns:a16="http://schemas.microsoft.com/office/drawing/2014/main" id="{7DDBA182-723F-4584-84AE-974A85472EA1}"/>
               </a:ext>
             </a:extLst>
           </p:cNvPr>
@@ -39451,7 +39451,7 @@
           <p:cNvPr id="19" name="">
             <a:extLst xmlns:a="http://schemas.openxmlformats.org/drawingml/2006/main">
               <a:ext uri="{FF2B5EF4-FFF2-40B4-BE49-F238E27FC236}">
-                <a16:creationId xmlns:a16="http://schemas.microsoft.com/office/drawing/2014/main" id="{53FA660D-EB21-4185-838C-C8CC4F4CB485}"/>
+                <a16:creationId xmlns:a16="http://schemas.microsoft.com/office/drawing/2014/main" id="{2FB8B976-A0BE-4E91-A0D4-563569DFBEE0}"/>
               </a:ext>
             </a:extLst>
           </p:cNvPr>
@@ -39484,7 +39484,7 @@
           <p:cNvPr id="20" name="">
             <a:extLst xmlns:a="http://schemas.openxmlformats.org/drawingml/2006/main">
               <a:ext uri="{FF2B5EF4-FFF2-40B4-BE49-F238E27FC236}">
-                <a16:creationId xmlns:a16="http://schemas.microsoft.com/office/drawing/2014/main" id="{F28C0B5A-4E60-497E-AC03-7996B889645C}"/>
+                <a16:creationId xmlns:a16="http://schemas.microsoft.com/office/drawing/2014/main" id="{CD1AAA44-F3BE-445F-AB3B-F90B83AAA8D3}"/>
               </a:ext>
             </a:extLst>
           </p:cNvPr>
@@ -39536,7 +39536,7 @@
           <p:cNvPr id="21" name="">
             <a:extLst xmlns:a="http://schemas.openxmlformats.org/drawingml/2006/main">
               <a:ext uri="{FF2B5EF4-FFF2-40B4-BE49-F238E27FC236}">
-                <a16:creationId xmlns:a16="http://schemas.microsoft.com/office/drawing/2014/main" id="{ADAEEC3D-32CE-472D-B9C3-BC9C2FF5248E}"/>
+                <a16:creationId xmlns:a16="http://schemas.microsoft.com/office/drawing/2014/main" id="{953462EE-E1FF-4582-AA6D-85629092769A}"/>
               </a:ext>
             </a:extLst>
           </p:cNvPr>
@@ -39569,7 +39569,7 @@
           <p:cNvPr id="22" name="">
             <a:extLst xmlns:a="http://schemas.openxmlformats.org/drawingml/2006/main">
               <a:ext uri="{FF2B5EF4-FFF2-40B4-BE49-F238E27FC236}">
-                <a16:creationId xmlns:a16="http://schemas.microsoft.com/office/drawing/2014/main" id="{FD86F080-9AE0-429D-AD67-B7FC867799F1}"/>
+                <a16:creationId xmlns:a16="http://schemas.microsoft.com/office/drawing/2014/main" id="{93F8D71A-2D88-456C-AB7D-E508D94D7A12}"/>
               </a:ext>
             </a:extLst>
           </p:cNvPr>
@@ -39621,7 +39621,7 @@
           <p:cNvPr id="23" name="">
             <a:extLst xmlns:a="http://schemas.openxmlformats.org/drawingml/2006/main">
               <a:ext uri="{FF2B5EF4-FFF2-40B4-BE49-F238E27FC236}">
-                <a16:creationId xmlns:a16="http://schemas.microsoft.com/office/drawing/2014/main" id="{223FF203-2190-422D-BC85-2901D4258C6C}"/>
+                <a16:creationId xmlns:a16="http://schemas.microsoft.com/office/drawing/2014/main" id="{25C9C02B-7C46-4C38-BE48-D233D1E6BF4E}"/>
               </a:ext>
             </a:extLst>
           </p:cNvPr>
@@ -39654,7 +39654,7 @@
           <p:cNvPr id="24" name="">
             <a:extLst xmlns:a="http://schemas.openxmlformats.org/drawingml/2006/main">
               <a:ext uri="{FF2B5EF4-FFF2-40B4-BE49-F238E27FC236}">
-                <a16:creationId xmlns:a16="http://schemas.microsoft.com/office/drawing/2014/main" id="{29053672-E232-41F1-8995-5A7B85A25E80}"/>
+                <a16:creationId xmlns:a16="http://schemas.microsoft.com/office/drawing/2014/main" id="{6AE57ACF-CE1A-4EB3-B226-029C332C21FF}"/>
               </a:ext>
             </a:extLst>
           </p:cNvPr>
@@ -39706,7 +39706,7 @@
           <p:cNvPr id="25" name="">
             <a:extLst xmlns:a="http://schemas.openxmlformats.org/drawingml/2006/main">
               <a:ext uri="{FF2B5EF4-FFF2-40B4-BE49-F238E27FC236}">
-                <a16:creationId xmlns:a16="http://schemas.microsoft.com/office/drawing/2014/main" id="{AC9E7A99-700C-4642-8C30-6F067BEB3401}"/>
+                <a16:creationId xmlns:a16="http://schemas.microsoft.com/office/drawing/2014/main" id="{30C6F886-B734-4937-A621-0555C2C1634F}"/>
               </a:ext>
             </a:extLst>
           </p:cNvPr>
@@ -39739,7 +39739,7 @@
           <p:cNvPr id="26" name="">
             <a:extLst xmlns:a="http://schemas.openxmlformats.org/drawingml/2006/main">
               <a:ext uri="{FF2B5EF4-FFF2-40B4-BE49-F238E27FC236}">
-                <a16:creationId xmlns:a16="http://schemas.microsoft.com/office/drawing/2014/main" id="{B073B857-68FB-4357-8491-9DE48D62BFC3}"/>
+                <a16:creationId xmlns:a16="http://schemas.microsoft.com/office/drawing/2014/main" id="{E27248E9-1FDA-4B20-9C52-18A46229E989}"/>
               </a:ext>
             </a:extLst>
           </p:cNvPr>
@@ -39791,7 +39791,7 @@
           <p:cNvPr id="27" name="">
             <a:extLst xmlns:a="http://schemas.openxmlformats.org/drawingml/2006/main">
               <a:ext uri="{FF2B5EF4-FFF2-40B4-BE49-F238E27FC236}">
-                <a16:creationId xmlns:a16="http://schemas.microsoft.com/office/drawing/2014/main" id="{38649094-D304-4362-9FFD-DE501CF7608D}"/>
+                <a16:creationId xmlns:a16="http://schemas.microsoft.com/office/drawing/2014/main" id="{31E76754-2376-43AE-868C-528CCD366E41}"/>
               </a:ext>
             </a:extLst>
           </p:cNvPr>
@@ -39824,7 +39824,7 @@
           <p:cNvPr id="28" name="">
             <a:extLst xmlns:a="http://schemas.openxmlformats.org/drawingml/2006/main">
               <a:ext uri="{FF2B5EF4-FFF2-40B4-BE49-F238E27FC236}">
-                <a16:creationId xmlns:a16="http://schemas.microsoft.com/office/drawing/2014/main" id="{D39BECB0-538B-4D39-AD1B-420F8407614D}"/>
+                <a16:creationId xmlns:a16="http://schemas.microsoft.com/office/drawing/2014/main" id="{DF6A5D52-2440-41C1-A26F-35A69B4B77D4}"/>
               </a:ext>
             </a:extLst>
           </p:cNvPr>
@@ -39876,7 +39876,7 @@
           <p:cNvPr id="29" name="">
             <a:extLst xmlns:a="http://schemas.openxmlformats.org/drawingml/2006/main">
               <a:ext uri="{FF2B5EF4-FFF2-40B4-BE49-F238E27FC236}">
-                <a16:creationId xmlns:a16="http://schemas.microsoft.com/office/drawing/2014/main" id="{92052391-93C7-45C4-9D9D-2CD99AC1906E}"/>
+                <a16:creationId xmlns:a16="http://schemas.microsoft.com/office/drawing/2014/main" id="{6DAD16E2-2E87-49B0-8BC6-21DAD4094B7C}"/>
               </a:ext>
             </a:extLst>
           </p:cNvPr>
@@ -39909,7 +39909,7 @@
           <p:cNvPr id="30" name="">
             <a:extLst xmlns:a="http://schemas.openxmlformats.org/drawingml/2006/main">
               <a:ext uri="{FF2B5EF4-FFF2-40B4-BE49-F238E27FC236}">
-                <a16:creationId xmlns:a16="http://schemas.microsoft.com/office/drawing/2014/main" id="{E52C63EF-A21F-4D56-9421-D96494886035}"/>
+                <a16:creationId xmlns:a16="http://schemas.microsoft.com/office/drawing/2014/main" id="{8BE286EC-F225-4511-8282-24DA08ED7032}"/>
               </a:ext>
             </a:extLst>
           </p:cNvPr>
@@ -39961,7 +39961,7 @@
           <p:cNvPr id="31" name="">
             <a:extLst xmlns:a="http://schemas.openxmlformats.org/drawingml/2006/main">
               <a:ext uri="{FF2B5EF4-FFF2-40B4-BE49-F238E27FC236}">
-                <a16:creationId xmlns:a16="http://schemas.microsoft.com/office/drawing/2014/main" id="{FCBA1782-98AB-4196-8C1D-D90D05BAC0DF}"/>
+                <a16:creationId xmlns:a16="http://schemas.microsoft.com/office/drawing/2014/main" id="{333F3B54-964A-48C0-9AAA-BFB60EC56323}"/>
               </a:ext>
             </a:extLst>
           </p:cNvPr>
@@ -39994,7 +39994,7 @@
           <p:cNvPr id="32" name="">
             <a:extLst xmlns:a="http://schemas.openxmlformats.org/drawingml/2006/main">
               <a:ext uri="{FF2B5EF4-FFF2-40B4-BE49-F238E27FC236}">
-                <a16:creationId xmlns:a16="http://schemas.microsoft.com/office/drawing/2014/main" id="{6453817E-DCD7-41AC-830F-D53264F3F96A}"/>
+                <a16:creationId xmlns:a16="http://schemas.microsoft.com/office/drawing/2014/main" id="{EC0D6A00-3AAC-4497-A9DF-35F409B65C3E}"/>
               </a:ext>
             </a:extLst>
           </p:cNvPr>
@@ -40046,7 +40046,7 @@
           <p:cNvPr id="33" name="">
             <a:extLst xmlns:a="http://schemas.openxmlformats.org/drawingml/2006/main">
               <a:ext uri="{FF2B5EF4-FFF2-40B4-BE49-F238E27FC236}">
-                <a16:creationId xmlns:a16="http://schemas.microsoft.com/office/drawing/2014/main" id="{47C288D4-61C1-48A9-957B-FDBFA367BB10}"/>
+                <a16:creationId xmlns:a16="http://schemas.microsoft.com/office/drawing/2014/main" id="{BE1AFDFF-9B85-4AD1-96A6-B02E4F3B63D6}"/>
               </a:ext>
             </a:extLst>
           </p:cNvPr>
@@ -40079,7 +40079,7 @@
           <p:cNvPr id="34" name="">
             <a:extLst xmlns:a="http://schemas.openxmlformats.org/drawingml/2006/main">
               <a:ext uri="{FF2B5EF4-FFF2-40B4-BE49-F238E27FC236}">
-                <a16:creationId xmlns:a16="http://schemas.microsoft.com/office/drawing/2014/main" id="{70054149-AAA5-4EE8-B009-41539F748579}"/>
+                <a16:creationId xmlns:a16="http://schemas.microsoft.com/office/drawing/2014/main" id="{8EB5FF01-71E1-4018-A726-7227312A5723}"/>
               </a:ext>
             </a:extLst>
           </p:cNvPr>
@@ -40129,7 +40129,7 @@
     </p:spTree>
     <p:extLst>
       <p:ext uri="{BB962C8B-B14F-4D97-AF65-F5344CB8AC3E}">
-        <p14:creationId xmlns:p14="http://schemas.microsoft.com/office/powerpoint/2010/main" val="1143714797"/>
+        <p14:creationId xmlns:p14="http://schemas.microsoft.com/office/powerpoint/2010/main" val="1438570126"/>
       </p:ext>
     </p:extLst>
   </p:cSld>
@@ -40160,7 +40160,7 @@
           <p:cNvPr id="102" name="">
             <a:extLst xmlns:a="http://schemas.openxmlformats.org/drawingml/2006/main">
               <a:ext uri="{FF2B5EF4-FFF2-40B4-BE49-F238E27FC236}">
-                <a16:creationId xmlns:a16="http://schemas.microsoft.com/office/drawing/2014/main" id="{2827059D-DA16-4A55-A0C7-3884544B31CB}"/>
+                <a16:creationId xmlns:a16="http://schemas.microsoft.com/office/drawing/2014/main" id="{53BC582F-6051-476A-8A4C-673386D77DD8}"/>
               </a:ext>
             </a:extLst>
           </p:cNvPr>
@@ -40193,7 +40193,7 @@
           <p:cNvPr id="2" name="">
             <a:extLst xmlns:a="http://schemas.openxmlformats.org/drawingml/2006/main">
               <a:ext uri="{FF2B5EF4-FFF2-40B4-BE49-F238E27FC236}">
-                <a16:creationId xmlns:a16="http://schemas.microsoft.com/office/drawing/2014/main" id="{C30E670C-757F-4AE9-9F3B-F164F61AA53D}"/>
+                <a16:creationId xmlns:a16="http://schemas.microsoft.com/office/drawing/2014/main" id="{47DD9268-9A54-4A25-9915-FF9A45F7C870}"/>
               </a:ext>
             </a:extLst>
           </p:cNvPr>
@@ -40224,7 +40224,7 @@
           <p:cNvPr id="3" name="">
             <a:extLst xmlns:a="http://schemas.openxmlformats.org/drawingml/2006/main">
               <a:ext uri="{FF2B5EF4-FFF2-40B4-BE49-F238E27FC236}">
-                <a16:creationId xmlns:a16="http://schemas.microsoft.com/office/drawing/2014/main" id="{3F54FA52-0BA3-4042-9B9B-F44C47228181}"/>
+                <a16:creationId xmlns:a16="http://schemas.microsoft.com/office/drawing/2014/main" id="{5AC3F21B-6528-4048-9A00-AD72C8290421}"/>
               </a:ext>
             </a:extLst>
           </p:cNvPr>
@@ -40276,7 +40276,7 @@
           <p:cNvPr id="4" name="">
             <a:extLst xmlns:a="http://schemas.openxmlformats.org/drawingml/2006/main">
               <a:ext uri="{FF2B5EF4-FFF2-40B4-BE49-F238E27FC236}">
-                <a16:creationId xmlns:a16="http://schemas.microsoft.com/office/drawing/2014/main" id="{503DF59E-6946-4455-9BAC-0CBD2E357A78}"/>
+                <a16:creationId xmlns:a16="http://schemas.microsoft.com/office/drawing/2014/main" id="{7FD1849D-DC10-47CD-8444-09DB7C0C1289}"/>
               </a:ext>
             </a:extLst>
           </p:cNvPr>
@@ -40328,7 +40328,7 @@
           <p:cNvPr id="5" name="">
             <a:extLst xmlns:a="http://schemas.openxmlformats.org/drawingml/2006/main">
               <a:ext uri="{FF2B5EF4-FFF2-40B4-BE49-F238E27FC236}">
-                <a16:creationId xmlns:a16="http://schemas.microsoft.com/office/drawing/2014/main" id="{FC978C74-A5D6-4C05-B14F-B3F447312A6D}"/>
+                <a16:creationId xmlns:a16="http://schemas.microsoft.com/office/drawing/2014/main" id="{E923090E-5718-43A7-B8F6-A137A80ADEA8}"/>
               </a:ext>
             </a:extLst>
           </p:cNvPr>
@@ -40363,7 +40363,7 @@
           <p:nvPr/>
         </p:nvPicPr>
         <p:blipFill>
-          <a:blip xmlns:r="http://schemas.openxmlformats.org/officeDocument/2006/relationships" xmlns:a="http://schemas.openxmlformats.org/drawingml/2006/main" r:embed="Rb6cca1e198cb49f2"/>
+          <a:blip xmlns:r="http://schemas.openxmlformats.org/officeDocument/2006/relationships" xmlns:a="http://schemas.openxmlformats.org/drawingml/2006/main" r:embed="Rbbc696f26c4b43f3"/>
           <a:stretch xmlns:a="http://schemas.openxmlformats.org/drawingml/2006/main"/>
         </p:blipFill>
         <p:spPr>
@@ -40381,7 +40381,7 @@
           <p:cNvPr id="7" name="">
             <a:extLst xmlns:a="http://schemas.openxmlformats.org/drawingml/2006/main">
               <a:ext uri="{FF2B5EF4-FFF2-40B4-BE49-F238E27FC236}">
-                <a16:creationId xmlns:a16="http://schemas.microsoft.com/office/drawing/2014/main" id="{C7600164-E738-4A51-98D4-DDFB48F87640}"/>
+                <a16:creationId xmlns:a16="http://schemas.microsoft.com/office/drawing/2014/main" id="{8BF7CCDD-6B3B-40AB-A06E-86C85CF8B528}"/>
               </a:ext>
             </a:extLst>
           </p:cNvPr>
@@ -40433,7 +40433,7 @@
           <p:cNvPr id="8" name="">
             <a:extLst xmlns:a="http://schemas.openxmlformats.org/drawingml/2006/main">
               <a:ext uri="{FF2B5EF4-FFF2-40B4-BE49-F238E27FC236}">
-                <a16:creationId xmlns:a16="http://schemas.microsoft.com/office/drawing/2014/main" id="{D3CDE7BB-A262-4B41-AA00-75B85DACB856}"/>
+                <a16:creationId xmlns:a16="http://schemas.microsoft.com/office/drawing/2014/main" id="{6EB45300-D021-4A06-8210-2551EB6F2DB2}"/>
               </a:ext>
             </a:extLst>
           </p:cNvPr>
@@ -40485,7 +40485,7 @@
           <p:cNvPr id="9" name="">
             <a:extLst xmlns:a="http://schemas.openxmlformats.org/drawingml/2006/main">
               <a:ext uri="{FF2B5EF4-FFF2-40B4-BE49-F238E27FC236}">
-                <a16:creationId xmlns:a16="http://schemas.microsoft.com/office/drawing/2014/main" id="{9DB0159C-0A3E-4889-B2E8-676EF2BB5FE3}"/>
+                <a16:creationId xmlns:a16="http://schemas.microsoft.com/office/drawing/2014/main" id="{993431C0-A375-4BD4-8F03-C0B560C786B1}"/>
               </a:ext>
             </a:extLst>
           </p:cNvPr>
@@ -40537,7 +40537,7 @@
           <p:cNvPr id="10" name="">
             <a:extLst xmlns:a="http://schemas.openxmlformats.org/drawingml/2006/main">
               <a:ext uri="{FF2B5EF4-FFF2-40B4-BE49-F238E27FC236}">
-                <a16:creationId xmlns:a16="http://schemas.microsoft.com/office/drawing/2014/main" id="{E2AB6BBE-47FC-41AB-AC91-83B903E1F8BE}"/>
+                <a16:creationId xmlns:a16="http://schemas.microsoft.com/office/drawing/2014/main" id="{55213504-6301-4F01-BF2D-78D39AD06D58}"/>
               </a:ext>
             </a:extLst>
           </p:cNvPr>
@@ -40589,7 +40589,7 @@
           <p:cNvPr id="11" name="">
             <a:extLst xmlns:a="http://schemas.openxmlformats.org/drawingml/2006/main">
               <a:ext uri="{FF2B5EF4-FFF2-40B4-BE49-F238E27FC236}">
-                <a16:creationId xmlns:a16="http://schemas.microsoft.com/office/drawing/2014/main" id="{DA182499-04A6-4EE7-BFD8-E8E7DAB5DCEF}"/>
+                <a16:creationId xmlns:a16="http://schemas.microsoft.com/office/drawing/2014/main" id="{FF23A757-54DA-4DDA-8771-5DA90CFF1812}"/>
               </a:ext>
             </a:extLst>
           </p:cNvPr>
@@ -40620,7 +40620,7 @@
           <p:cNvPr id="12" name="">
             <a:extLst xmlns:a="http://schemas.openxmlformats.org/drawingml/2006/main">
               <a:ext uri="{FF2B5EF4-FFF2-40B4-BE49-F238E27FC236}">
-                <a16:creationId xmlns:a16="http://schemas.microsoft.com/office/drawing/2014/main" id="{B7452D91-D7D3-4C38-9E2C-325D5F974D7D}"/>
+                <a16:creationId xmlns:a16="http://schemas.microsoft.com/office/drawing/2014/main" id="{EABD8323-87D3-4104-9C7E-E3F082148516}"/>
               </a:ext>
             </a:extLst>
           </p:cNvPr>
@@ -40651,7 +40651,7 @@
           <p:cNvPr id="13" name="">
             <a:extLst xmlns:a="http://schemas.openxmlformats.org/drawingml/2006/main">
               <a:ext uri="{FF2B5EF4-FFF2-40B4-BE49-F238E27FC236}">
-                <a16:creationId xmlns:a16="http://schemas.microsoft.com/office/drawing/2014/main" id="{6A6A541A-F8C5-4987-B314-7736AE9790F7}"/>
+                <a16:creationId xmlns:a16="http://schemas.microsoft.com/office/drawing/2014/main" id="{00E61264-C915-4F77-9A1A-7E8A06824762}"/>
               </a:ext>
             </a:extLst>
           </p:cNvPr>
@@ -40703,7 +40703,7 @@
           <p:cNvPr id="14" name="">
             <a:extLst xmlns:a="http://schemas.openxmlformats.org/drawingml/2006/main">
               <a:ext uri="{FF2B5EF4-FFF2-40B4-BE49-F238E27FC236}">
-                <a16:creationId xmlns:a16="http://schemas.microsoft.com/office/drawing/2014/main" id="{5A3ED03E-CF24-4FDE-8FEB-17FDDAB2703F}"/>
+                <a16:creationId xmlns:a16="http://schemas.microsoft.com/office/drawing/2014/main" id="{27460CF7-71C1-4409-A41A-AEA5CC1303F2}"/>
               </a:ext>
             </a:extLst>
           </p:cNvPr>
@@ -40755,7 +40755,7 @@
           <p:cNvPr id="15" name="">
             <a:extLst xmlns:a="http://schemas.openxmlformats.org/drawingml/2006/main">
               <a:ext uri="{FF2B5EF4-FFF2-40B4-BE49-F238E27FC236}">
-                <a16:creationId xmlns:a16="http://schemas.microsoft.com/office/drawing/2014/main" id="{379C03BD-E4E8-45D4-88EA-23636965C4FF}"/>
+                <a16:creationId xmlns:a16="http://schemas.microsoft.com/office/drawing/2014/main" id="{7DDC37DC-C72B-4A59-880E-BF24E1A5E61A}"/>
               </a:ext>
             </a:extLst>
           </p:cNvPr>
@@ -40807,7 +40807,7 @@
           <p:cNvPr id="16" name="">
             <a:extLst xmlns:a="http://schemas.openxmlformats.org/drawingml/2006/main">
               <a:ext uri="{FF2B5EF4-FFF2-40B4-BE49-F238E27FC236}">
-                <a16:creationId xmlns:a16="http://schemas.microsoft.com/office/drawing/2014/main" id="{6589B2BA-D73E-4280-8815-66B8CAE85F10}"/>
+                <a16:creationId xmlns:a16="http://schemas.microsoft.com/office/drawing/2014/main" id="{3D578675-611B-4A5F-A8B3-7B680D2AA5F7}"/>
               </a:ext>
             </a:extLst>
           </p:cNvPr>
@@ -40859,7 +40859,7 @@
           <p:cNvPr id="17" name="">
             <a:extLst xmlns:a="http://schemas.openxmlformats.org/drawingml/2006/main">
               <a:ext uri="{FF2B5EF4-FFF2-40B4-BE49-F238E27FC236}">
-                <a16:creationId xmlns:a16="http://schemas.microsoft.com/office/drawing/2014/main" id="{951759B5-9E90-48BB-B3D8-8CD3ECDDBE89}"/>
+                <a16:creationId xmlns:a16="http://schemas.microsoft.com/office/drawing/2014/main" id="{23E28D9F-4678-4175-9EB9-B6CE13C673F4}"/>
               </a:ext>
             </a:extLst>
           </p:cNvPr>
@@ -40911,7 +40911,7 @@
           <p:cNvPr id="18" name="">
             <a:extLst xmlns:a="http://schemas.openxmlformats.org/drawingml/2006/main">
               <a:ext uri="{FF2B5EF4-FFF2-40B4-BE49-F238E27FC236}">
-                <a16:creationId xmlns:a16="http://schemas.microsoft.com/office/drawing/2014/main" id="{930BC32F-95D9-42CE-AC98-105B5E85168B}"/>
+                <a16:creationId xmlns:a16="http://schemas.microsoft.com/office/drawing/2014/main" id="{9E062C30-0A3B-4C71-9C65-3CFC95680847}"/>
               </a:ext>
             </a:extLst>
           </p:cNvPr>
@@ -40942,7 +40942,7 @@
           <p:cNvPr id="19" name="">
             <a:extLst xmlns:a="http://schemas.openxmlformats.org/drawingml/2006/main">
               <a:ext uri="{FF2B5EF4-FFF2-40B4-BE49-F238E27FC236}">
-                <a16:creationId xmlns:a16="http://schemas.microsoft.com/office/drawing/2014/main" id="{B8A97AFD-A9FF-432B-9AE2-3CF62450415D}"/>
+                <a16:creationId xmlns:a16="http://schemas.microsoft.com/office/drawing/2014/main" id="{B73EE14D-B9B6-4920-A819-DFF1EAE3EFC5}"/>
               </a:ext>
             </a:extLst>
           </p:cNvPr>
@@ -40994,7 +40994,7 @@
           <p:cNvPr id="20" name="">
             <a:extLst xmlns:a="http://schemas.openxmlformats.org/drawingml/2006/main">
               <a:ext uri="{FF2B5EF4-FFF2-40B4-BE49-F238E27FC236}">
-                <a16:creationId xmlns:a16="http://schemas.microsoft.com/office/drawing/2014/main" id="{11F12A55-60D4-4D46-B678-05D09A35A9C4}"/>
+                <a16:creationId xmlns:a16="http://schemas.microsoft.com/office/drawing/2014/main" id="{C0496D51-D12F-4603-96E5-BBBA666029FD}"/>
               </a:ext>
             </a:extLst>
           </p:cNvPr>
@@ -41046,7 +41046,7 @@
           <p:cNvPr id="21" name="">
             <a:extLst xmlns:a="http://schemas.openxmlformats.org/drawingml/2006/main">
               <a:ext uri="{FF2B5EF4-FFF2-40B4-BE49-F238E27FC236}">
-                <a16:creationId xmlns:a16="http://schemas.microsoft.com/office/drawing/2014/main" id="{D6791801-8464-4D0B-8A01-3DF8B7B7271F}"/>
+                <a16:creationId xmlns:a16="http://schemas.microsoft.com/office/drawing/2014/main" id="{C5DC9802-8AD5-4B58-9FBE-85993646F053}"/>
               </a:ext>
             </a:extLst>
           </p:cNvPr>
@@ -41098,7 +41098,7 @@
           <p:cNvPr id="22" name="">
             <a:extLst xmlns:a="http://schemas.openxmlformats.org/drawingml/2006/main">
               <a:ext uri="{FF2B5EF4-FFF2-40B4-BE49-F238E27FC236}">
-                <a16:creationId xmlns:a16="http://schemas.microsoft.com/office/drawing/2014/main" id="{220C1415-7614-4647-A876-832F74DAB9EA}"/>
+                <a16:creationId xmlns:a16="http://schemas.microsoft.com/office/drawing/2014/main" id="{6B11BF07-C27E-4E01-A753-03D4EBE4A29B}"/>
               </a:ext>
             </a:extLst>
           </p:cNvPr>
@@ -41150,7 +41150,7 @@
           <p:cNvPr id="23" name="">
             <a:extLst xmlns:a="http://schemas.openxmlformats.org/drawingml/2006/main">
               <a:ext uri="{FF2B5EF4-FFF2-40B4-BE49-F238E27FC236}">
-                <a16:creationId xmlns:a16="http://schemas.microsoft.com/office/drawing/2014/main" id="{FFF1134E-A1BD-4300-A99B-A7D5A9171A54}"/>
+                <a16:creationId xmlns:a16="http://schemas.microsoft.com/office/drawing/2014/main" id="{7D1AE7D3-C456-4D45-A1A3-586B815077E5}"/>
               </a:ext>
             </a:extLst>
           </p:cNvPr>
@@ -41202,7 +41202,7 @@
           <p:cNvPr id="24" name="">
             <a:extLst xmlns:a="http://schemas.openxmlformats.org/drawingml/2006/main">
               <a:ext uri="{FF2B5EF4-FFF2-40B4-BE49-F238E27FC236}">
-                <a16:creationId xmlns:a16="http://schemas.microsoft.com/office/drawing/2014/main" id="{4E96C176-36D7-4C19-AFDA-6AE065485153}"/>
+                <a16:creationId xmlns:a16="http://schemas.microsoft.com/office/drawing/2014/main" id="{CC71282C-5458-4540-AED8-2E41528F551D}"/>
               </a:ext>
             </a:extLst>
           </p:cNvPr>
@@ -41233,7 +41233,7 @@
           <p:cNvPr id="25" name="">
             <a:extLst xmlns:a="http://schemas.openxmlformats.org/drawingml/2006/main">
               <a:ext uri="{FF2B5EF4-FFF2-40B4-BE49-F238E27FC236}">
-                <a16:creationId xmlns:a16="http://schemas.microsoft.com/office/drawing/2014/main" id="{68DC9835-D9C4-4D63-B6E3-741478C08377}"/>
+                <a16:creationId xmlns:a16="http://schemas.microsoft.com/office/drawing/2014/main" id="{4771B07D-C552-4406-AC0A-79D7F8316EBF}"/>
               </a:ext>
             </a:extLst>
           </p:cNvPr>
@@ -41264,7 +41264,7 @@
           <p:cNvPr id="26" name="">
             <a:extLst xmlns:a="http://schemas.openxmlformats.org/drawingml/2006/main">
               <a:ext uri="{FF2B5EF4-FFF2-40B4-BE49-F238E27FC236}">
-                <a16:creationId xmlns:a16="http://schemas.microsoft.com/office/drawing/2014/main" id="{2FC92D76-8C5D-4C02-B214-38F314D839A7}"/>
+                <a16:creationId xmlns:a16="http://schemas.microsoft.com/office/drawing/2014/main" id="{D9CD7101-BBC1-49EF-8A25-5C277D0C8F2F}"/>
               </a:ext>
             </a:extLst>
           </p:cNvPr>
@@ -41316,7 +41316,7 @@
           <p:cNvPr id="27" name="">
             <a:extLst xmlns:a="http://schemas.openxmlformats.org/drawingml/2006/main">
               <a:ext uri="{FF2B5EF4-FFF2-40B4-BE49-F238E27FC236}">
-                <a16:creationId xmlns:a16="http://schemas.microsoft.com/office/drawing/2014/main" id="{8F37B8F9-BC43-448F-A50F-EA92F77A2A83}"/>
+                <a16:creationId xmlns:a16="http://schemas.microsoft.com/office/drawing/2014/main" id="{1B315DB8-58F3-4D00-BEC6-5F09BA5435B2}"/>
               </a:ext>
             </a:extLst>
           </p:cNvPr>
@@ -41368,7 +41368,7 @@
           <p:cNvPr id="28" name="">
             <a:extLst xmlns:a="http://schemas.openxmlformats.org/drawingml/2006/main">
               <a:ext uri="{FF2B5EF4-FFF2-40B4-BE49-F238E27FC236}">
-                <a16:creationId xmlns:a16="http://schemas.microsoft.com/office/drawing/2014/main" id="{9E04727B-DE8C-41F8-96E0-6A428F1CB9EB}"/>
+                <a16:creationId xmlns:a16="http://schemas.microsoft.com/office/drawing/2014/main" id="{07132F36-8A78-41A4-9CFE-5DB4C99023D0}"/>
               </a:ext>
             </a:extLst>
           </p:cNvPr>
@@ -41420,7 +41420,7 @@
           <p:cNvPr id="29" name="">
             <a:extLst xmlns:a="http://schemas.openxmlformats.org/drawingml/2006/main">
               <a:ext uri="{FF2B5EF4-FFF2-40B4-BE49-F238E27FC236}">
-                <a16:creationId xmlns:a16="http://schemas.microsoft.com/office/drawing/2014/main" id="{9BE531F1-8DBF-48D5-AD2F-DAFB8A2BD63E}"/>
+                <a16:creationId xmlns:a16="http://schemas.microsoft.com/office/drawing/2014/main" id="{299837D8-F383-4070-9EDA-43BB0DF069B6}"/>
               </a:ext>
             </a:extLst>
           </p:cNvPr>
@@ -41472,7 +41472,7 @@
           <p:cNvPr id="30" name="">
             <a:extLst xmlns:a="http://schemas.openxmlformats.org/drawingml/2006/main">
               <a:ext uri="{FF2B5EF4-FFF2-40B4-BE49-F238E27FC236}">
-                <a16:creationId xmlns:a16="http://schemas.microsoft.com/office/drawing/2014/main" id="{9FB587EF-224E-4136-9AC7-3629D148382A}"/>
+                <a16:creationId xmlns:a16="http://schemas.microsoft.com/office/drawing/2014/main" id="{503308A0-C96D-452F-845B-35C7031160DA}"/>
               </a:ext>
             </a:extLst>
           </p:cNvPr>
@@ -41524,7 +41524,7 @@
           <p:cNvPr id="31" name="">
             <a:extLst xmlns:a="http://schemas.openxmlformats.org/drawingml/2006/main">
               <a:ext uri="{FF2B5EF4-FFF2-40B4-BE49-F238E27FC236}">
-                <a16:creationId xmlns:a16="http://schemas.microsoft.com/office/drawing/2014/main" id="{54F838F8-4942-43E5-B88E-ECAB002CD3A0}"/>
+                <a16:creationId xmlns:a16="http://schemas.microsoft.com/office/drawing/2014/main" id="{B90438A9-4B63-4179-B602-2E6A2BC5C6E4}"/>
               </a:ext>
             </a:extLst>
           </p:cNvPr>
@@ -41555,7 +41555,7 @@
           <p:cNvPr id="32" name="">
             <a:extLst xmlns:a="http://schemas.openxmlformats.org/drawingml/2006/main">
               <a:ext uri="{FF2B5EF4-FFF2-40B4-BE49-F238E27FC236}">
-                <a16:creationId xmlns:a16="http://schemas.microsoft.com/office/drawing/2014/main" id="{79B4473B-E4EB-494F-92AF-3BA641274D7B}"/>
+                <a16:creationId xmlns:a16="http://schemas.microsoft.com/office/drawing/2014/main" id="{9EE1B46F-980F-406D-9FD9-496DD57BF3A2}"/>
               </a:ext>
             </a:extLst>
           </p:cNvPr>
@@ -41607,7 +41607,7 @@
           <p:cNvPr id="33" name="">
             <a:extLst xmlns:a="http://schemas.openxmlformats.org/drawingml/2006/main">
               <a:ext uri="{FF2B5EF4-FFF2-40B4-BE49-F238E27FC236}">
-                <a16:creationId xmlns:a16="http://schemas.microsoft.com/office/drawing/2014/main" id="{3B6E8D61-0360-4109-889D-E66B41F877A1}"/>
+                <a16:creationId xmlns:a16="http://schemas.microsoft.com/office/drawing/2014/main" id="{5E600351-1563-4A10-BE66-E1D9C0BF4DA8}"/>
               </a:ext>
             </a:extLst>
           </p:cNvPr>
@@ -41659,7 +41659,7 @@
           <p:cNvPr id="34" name="">
             <a:extLst xmlns:a="http://schemas.openxmlformats.org/drawingml/2006/main">
               <a:ext uri="{FF2B5EF4-FFF2-40B4-BE49-F238E27FC236}">
-                <a16:creationId xmlns:a16="http://schemas.microsoft.com/office/drawing/2014/main" id="{CE75849E-DAD5-4F70-8E06-3D6918C3DBDA}"/>
+                <a16:creationId xmlns:a16="http://schemas.microsoft.com/office/drawing/2014/main" id="{16A08742-44FD-48DD-800F-64770666243C}"/>
               </a:ext>
             </a:extLst>
           </p:cNvPr>
@@ -41711,7 +41711,7 @@
           <p:cNvPr id="35" name="">
             <a:extLst xmlns:a="http://schemas.openxmlformats.org/drawingml/2006/main">
               <a:ext uri="{FF2B5EF4-FFF2-40B4-BE49-F238E27FC236}">
-                <a16:creationId xmlns:a16="http://schemas.microsoft.com/office/drawing/2014/main" id="{717D0B13-D47A-4767-8E9C-C8005ABF0E2C}"/>
+                <a16:creationId xmlns:a16="http://schemas.microsoft.com/office/drawing/2014/main" id="{C503C84B-1435-4FCD-A51A-7F627FC237B2}"/>
               </a:ext>
             </a:extLst>
           </p:cNvPr>
@@ -41763,7 +41763,7 @@
           <p:cNvPr id="36" name="">
             <a:extLst xmlns:a="http://schemas.openxmlformats.org/drawingml/2006/main">
               <a:ext uri="{FF2B5EF4-FFF2-40B4-BE49-F238E27FC236}">
-                <a16:creationId xmlns:a16="http://schemas.microsoft.com/office/drawing/2014/main" id="{E880A69D-E4F6-4E8B-910B-76BDACE1EE85}"/>
+                <a16:creationId xmlns:a16="http://schemas.microsoft.com/office/drawing/2014/main" id="{655BB370-FBDD-44FD-931C-9E292C7804F1}"/>
               </a:ext>
             </a:extLst>
           </p:cNvPr>
@@ -41815,7 +41815,7 @@
           <p:cNvPr id="37" name="">
             <a:extLst xmlns:a="http://schemas.openxmlformats.org/drawingml/2006/main">
               <a:ext uri="{FF2B5EF4-FFF2-40B4-BE49-F238E27FC236}">
-                <a16:creationId xmlns:a16="http://schemas.microsoft.com/office/drawing/2014/main" id="{0886381B-6126-4F98-BA76-698986D4E9FF}"/>
+                <a16:creationId xmlns:a16="http://schemas.microsoft.com/office/drawing/2014/main" id="{A5F419E2-6D5A-4F94-BF5F-93703C61E7C6}"/>
               </a:ext>
             </a:extLst>
           </p:cNvPr>
@@ -41846,7 +41846,7 @@
           <p:cNvPr id="38" name="">
             <a:extLst xmlns:a="http://schemas.openxmlformats.org/drawingml/2006/main">
               <a:ext uri="{FF2B5EF4-FFF2-40B4-BE49-F238E27FC236}">
-                <a16:creationId xmlns:a16="http://schemas.microsoft.com/office/drawing/2014/main" id="{D2C2385F-439E-4129-87BE-CDCF2A1EDF2C}"/>
+                <a16:creationId xmlns:a16="http://schemas.microsoft.com/office/drawing/2014/main" id="{8DDF4946-36D9-422C-8237-D5382A9FAB87}"/>
               </a:ext>
             </a:extLst>
           </p:cNvPr>
@@ -41877,7 +41877,7 @@
           <p:cNvPr id="39" name="">
             <a:extLst xmlns:a="http://schemas.openxmlformats.org/drawingml/2006/main">
               <a:ext uri="{FF2B5EF4-FFF2-40B4-BE49-F238E27FC236}">
-                <a16:creationId xmlns:a16="http://schemas.microsoft.com/office/drawing/2014/main" id="{FD71994E-CBA1-4CF3-9512-DF6FAE76474F}"/>
+                <a16:creationId xmlns:a16="http://schemas.microsoft.com/office/drawing/2014/main" id="{F41FC457-0298-4D50-8555-090FE512D1BD}"/>
               </a:ext>
             </a:extLst>
           </p:cNvPr>
@@ -41929,7 +41929,7 @@
           <p:cNvPr id="40" name="">
             <a:extLst xmlns:a="http://schemas.openxmlformats.org/drawingml/2006/main">
               <a:ext uri="{FF2B5EF4-FFF2-40B4-BE49-F238E27FC236}">
-                <a16:creationId xmlns:a16="http://schemas.microsoft.com/office/drawing/2014/main" id="{1AB99038-41AC-448A-9F9A-B3A6EC6735DE}"/>
+                <a16:creationId xmlns:a16="http://schemas.microsoft.com/office/drawing/2014/main" id="{CEBB99F5-62B3-42C8-8258-AC62ECED94B6}"/>
               </a:ext>
             </a:extLst>
           </p:cNvPr>
@@ -41981,7 +41981,7 @@
           <p:cNvPr id="41" name="">
             <a:extLst xmlns:a="http://schemas.openxmlformats.org/drawingml/2006/main">
               <a:ext uri="{FF2B5EF4-FFF2-40B4-BE49-F238E27FC236}">
-                <a16:creationId xmlns:a16="http://schemas.microsoft.com/office/drawing/2014/main" id="{3F5EDD9C-86A5-47E7-89FF-9121B77C2871}"/>
+                <a16:creationId xmlns:a16="http://schemas.microsoft.com/office/drawing/2014/main" id="{254D60CF-AA0D-45D1-BE1A-AD0C5DD269A4}"/>
               </a:ext>
             </a:extLst>
           </p:cNvPr>
@@ -42033,7 +42033,7 @@
           <p:cNvPr id="42" name="">
             <a:extLst xmlns:a="http://schemas.openxmlformats.org/drawingml/2006/main">
               <a:ext uri="{FF2B5EF4-FFF2-40B4-BE49-F238E27FC236}">
-                <a16:creationId xmlns:a16="http://schemas.microsoft.com/office/drawing/2014/main" id="{997F7DF5-E643-4E4E-BD32-BCA28DFB3289}"/>
+                <a16:creationId xmlns:a16="http://schemas.microsoft.com/office/drawing/2014/main" id="{CB637C39-4003-43C4-9141-214AE88AB26C}"/>
               </a:ext>
             </a:extLst>
           </p:cNvPr>
@@ -42085,7 +42085,7 @@
           <p:cNvPr id="43" name="">
             <a:extLst xmlns:a="http://schemas.openxmlformats.org/drawingml/2006/main">
               <a:ext uri="{FF2B5EF4-FFF2-40B4-BE49-F238E27FC236}">
-                <a16:creationId xmlns:a16="http://schemas.microsoft.com/office/drawing/2014/main" id="{EAE414EE-ECCC-421C-BA0B-970BD9D6F484}"/>
+                <a16:creationId xmlns:a16="http://schemas.microsoft.com/office/drawing/2014/main" id="{1FD6A47C-0D4A-441F-80BE-0D0A01C4981F}"/>
               </a:ext>
             </a:extLst>
           </p:cNvPr>
@@ -42137,7 +42137,7 @@
           <p:cNvPr id="44" name="">
             <a:extLst xmlns:a="http://schemas.openxmlformats.org/drawingml/2006/main">
               <a:ext uri="{FF2B5EF4-FFF2-40B4-BE49-F238E27FC236}">
-                <a16:creationId xmlns:a16="http://schemas.microsoft.com/office/drawing/2014/main" id="{B977EB54-9DA9-423B-8024-B8016D78CE04}"/>
+                <a16:creationId xmlns:a16="http://schemas.microsoft.com/office/drawing/2014/main" id="{D56F767F-BA0A-4527-A48D-2D5177CB7030}"/>
               </a:ext>
             </a:extLst>
           </p:cNvPr>
@@ -42168,7 +42168,7 @@
           <p:cNvPr id="45" name="">
             <a:extLst xmlns:a="http://schemas.openxmlformats.org/drawingml/2006/main">
               <a:ext uri="{FF2B5EF4-FFF2-40B4-BE49-F238E27FC236}">
-                <a16:creationId xmlns:a16="http://schemas.microsoft.com/office/drawing/2014/main" id="{666AABF3-896E-4E16-A48D-7CEC8B8325B8}"/>
+                <a16:creationId xmlns:a16="http://schemas.microsoft.com/office/drawing/2014/main" id="{E8CE30F1-83F7-4927-9A3E-37DFEC4A6457}"/>
               </a:ext>
             </a:extLst>
           </p:cNvPr>
@@ -42220,7 +42220,7 @@
           <p:cNvPr id="46" name="">
             <a:extLst xmlns:a="http://schemas.openxmlformats.org/drawingml/2006/main">
               <a:ext uri="{FF2B5EF4-FFF2-40B4-BE49-F238E27FC236}">
-                <a16:creationId xmlns:a16="http://schemas.microsoft.com/office/drawing/2014/main" id="{FF3291C1-D45A-4DE7-B206-2EC63B04C0B0}"/>
+                <a16:creationId xmlns:a16="http://schemas.microsoft.com/office/drawing/2014/main" id="{1608B638-6EF4-413D-AEB5-A79CF7A7D34B}"/>
               </a:ext>
             </a:extLst>
           </p:cNvPr>
@@ -42272,7 +42272,7 @@
           <p:cNvPr id="47" name="">
             <a:extLst xmlns:a="http://schemas.openxmlformats.org/drawingml/2006/main">
               <a:ext uri="{FF2B5EF4-FFF2-40B4-BE49-F238E27FC236}">
-                <a16:creationId xmlns:a16="http://schemas.microsoft.com/office/drawing/2014/main" id="{28C38300-E352-4B54-89BE-5D2B31B3F6DA}"/>
+                <a16:creationId xmlns:a16="http://schemas.microsoft.com/office/drawing/2014/main" id="{827B6F66-4977-4105-8CDA-9ED29B7C2C43}"/>
               </a:ext>
             </a:extLst>
           </p:cNvPr>
@@ -42324,7 +42324,7 @@
           <p:cNvPr id="48" name="">
             <a:extLst xmlns:a="http://schemas.openxmlformats.org/drawingml/2006/main">
               <a:ext uri="{FF2B5EF4-FFF2-40B4-BE49-F238E27FC236}">
-                <a16:creationId xmlns:a16="http://schemas.microsoft.com/office/drawing/2014/main" id="{138704F4-1527-46A2-8E2F-7909AEDC3F73}"/>
+                <a16:creationId xmlns:a16="http://schemas.microsoft.com/office/drawing/2014/main" id="{D18564F0-256A-4F19-881B-C3B9E8060C47}"/>
               </a:ext>
             </a:extLst>
           </p:cNvPr>
@@ -42376,7 +42376,7 @@
           <p:cNvPr id="49" name="">
             <a:extLst xmlns:a="http://schemas.openxmlformats.org/drawingml/2006/main">
               <a:ext uri="{FF2B5EF4-FFF2-40B4-BE49-F238E27FC236}">
-                <a16:creationId xmlns:a16="http://schemas.microsoft.com/office/drawing/2014/main" id="{5EB3FBC6-80FB-46A9-84A3-6974997D790D}"/>
+                <a16:creationId xmlns:a16="http://schemas.microsoft.com/office/drawing/2014/main" id="{1E31B697-F25B-4ADA-9261-2E84969FD446}"/>
               </a:ext>
             </a:extLst>
           </p:cNvPr>
@@ -42428,7 +42428,7 @@
           <p:cNvPr id="50" name="">
             <a:extLst xmlns:a="http://schemas.openxmlformats.org/drawingml/2006/main">
               <a:ext uri="{FF2B5EF4-FFF2-40B4-BE49-F238E27FC236}">
-                <a16:creationId xmlns:a16="http://schemas.microsoft.com/office/drawing/2014/main" id="{186FD98E-5E49-4BB3-841D-2A70D1895E3A}"/>
+                <a16:creationId xmlns:a16="http://schemas.microsoft.com/office/drawing/2014/main" id="{51AF0267-1905-4F6A-BC54-F15DFB0FFA25}"/>
               </a:ext>
             </a:extLst>
           </p:cNvPr>
@@ -42459,7 +42459,7 @@
           <p:cNvPr id="51" name="">
             <a:extLst xmlns:a="http://schemas.openxmlformats.org/drawingml/2006/main">
               <a:ext uri="{FF2B5EF4-FFF2-40B4-BE49-F238E27FC236}">
-                <a16:creationId xmlns:a16="http://schemas.microsoft.com/office/drawing/2014/main" id="{69F5835F-043D-4A7D-AE50-79AAD18243CA}"/>
+                <a16:creationId xmlns:a16="http://schemas.microsoft.com/office/drawing/2014/main" id="{B2F39D59-8F62-4E4E-9A5B-318A98CD689F}"/>
               </a:ext>
             </a:extLst>
           </p:cNvPr>
@@ -42490,7 +42490,7 @@
           <p:cNvPr id="52" name="">
             <a:extLst xmlns:a="http://schemas.openxmlformats.org/drawingml/2006/main">
               <a:ext uri="{FF2B5EF4-FFF2-40B4-BE49-F238E27FC236}">
-                <a16:creationId xmlns:a16="http://schemas.microsoft.com/office/drawing/2014/main" id="{B362EB4E-3C99-4AF2-A2F9-8E57D56C0155}"/>
+                <a16:creationId xmlns:a16="http://schemas.microsoft.com/office/drawing/2014/main" id="{FE20E22C-DC4F-4B1F-A8BA-346C510FE4DE}"/>
               </a:ext>
             </a:extLst>
           </p:cNvPr>
@@ -42542,7 +42542,7 @@
           <p:cNvPr id="53" name="">
             <a:extLst xmlns:a="http://schemas.openxmlformats.org/drawingml/2006/main">
               <a:ext uri="{FF2B5EF4-FFF2-40B4-BE49-F238E27FC236}">
-                <a16:creationId xmlns:a16="http://schemas.microsoft.com/office/drawing/2014/main" id="{6F9522E8-6D6C-4247-A5C0-F7E4896AF2E6}"/>
+                <a16:creationId xmlns:a16="http://schemas.microsoft.com/office/drawing/2014/main" id="{E9100D53-AAEC-42E9-9BB8-A4893ECD5359}"/>
               </a:ext>
             </a:extLst>
           </p:cNvPr>
@@ -42594,7 +42594,7 @@
           <p:cNvPr id="54" name="">
             <a:extLst xmlns:a="http://schemas.openxmlformats.org/drawingml/2006/main">
               <a:ext uri="{FF2B5EF4-FFF2-40B4-BE49-F238E27FC236}">
-                <a16:creationId xmlns:a16="http://schemas.microsoft.com/office/drawing/2014/main" id="{0DB195CF-1399-44A3-9064-BD7132599164}"/>
+                <a16:creationId xmlns:a16="http://schemas.microsoft.com/office/drawing/2014/main" id="{D2B2DDD6-7B4D-4A18-8AE8-C20B0D3C39AA}"/>
               </a:ext>
             </a:extLst>
           </p:cNvPr>
@@ -42646,7 +42646,7 @@
           <p:cNvPr id="55" name="">
             <a:extLst xmlns:a="http://schemas.openxmlformats.org/drawingml/2006/main">
               <a:ext uri="{FF2B5EF4-FFF2-40B4-BE49-F238E27FC236}">
-                <a16:creationId xmlns:a16="http://schemas.microsoft.com/office/drawing/2014/main" id="{360A63DD-1FEE-48DF-A926-369C0E691681}"/>
+                <a16:creationId xmlns:a16="http://schemas.microsoft.com/office/drawing/2014/main" id="{F75AEF58-F6EF-440C-87F9-7D51B89921F8}"/>
               </a:ext>
             </a:extLst>
           </p:cNvPr>
@@ -42698,7 +42698,7 @@
           <p:cNvPr id="56" name="">
             <a:extLst xmlns:a="http://schemas.openxmlformats.org/drawingml/2006/main">
               <a:ext uri="{FF2B5EF4-FFF2-40B4-BE49-F238E27FC236}">
-                <a16:creationId xmlns:a16="http://schemas.microsoft.com/office/drawing/2014/main" id="{3467241E-B03A-4BDE-9B8C-6E9FB3DA6FBF}"/>
+                <a16:creationId xmlns:a16="http://schemas.microsoft.com/office/drawing/2014/main" id="{5908E73D-81AC-4EAC-BE95-9BD6F2BD7740}"/>
               </a:ext>
             </a:extLst>
           </p:cNvPr>
@@ -42750,7 +42750,7 @@
           <p:cNvPr id="57" name="">
             <a:extLst xmlns:a="http://schemas.openxmlformats.org/drawingml/2006/main">
               <a:ext uri="{FF2B5EF4-FFF2-40B4-BE49-F238E27FC236}">
-                <a16:creationId xmlns:a16="http://schemas.microsoft.com/office/drawing/2014/main" id="{6846D067-940D-4ACA-987A-AE3841A36679}"/>
+                <a16:creationId xmlns:a16="http://schemas.microsoft.com/office/drawing/2014/main" id="{7D4FE13E-AC50-40D7-949E-7BA4E6468C83}"/>
               </a:ext>
             </a:extLst>
           </p:cNvPr>
@@ -42781,7 +42781,7 @@
           <p:cNvPr id="58" name="">
             <a:extLst xmlns:a="http://schemas.openxmlformats.org/drawingml/2006/main">
               <a:ext uri="{FF2B5EF4-FFF2-40B4-BE49-F238E27FC236}">
-                <a16:creationId xmlns:a16="http://schemas.microsoft.com/office/drawing/2014/main" id="{24E4505D-1882-4325-8927-7EF6270448DA}"/>
+                <a16:creationId xmlns:a16="http://schemas.microsoft.com/office/drawing/2014/main" id="{4549A4AB-541E-4AE7-96DD-B1052AB623F7}"/>
               </a:ext>
             </a:extLst>
           </p:cNvPr>
@@ -42833,7 +42833,7 @@
           <p:cNvPr id="59" name="">
             <a:extLst xmlns:a="http://schemas.openxmlformats.org/drawingml/2006/main">
               <a:ext uri="{FF2B5EF4-FFF2-40B4-BE49-F238E27FC236}">
-                <a16:creationId xmlns:a16="http://schemas.microsoft.com/office/drawing/2014/main" id="{1B2B1EA6-4734-4F83-9F83-986D8E823334}"/>
+                <a16:creationId xmlns:a16="http://schemas.microsoft.com/office/drawing/2014/main" id="{34EEA809-E505-4315-8847-B7A875D52FBB}"/>
               </a:ext>
             </a:extLst>
           </p:cNvPr>
@@ -42885,7 +42885,7 @@
           <p:cNvPr id="60" name="">
             <a:extLst xmlns:a="http://schemas.openxmlformats.org/drawingml/2006/main">
               <a:ext uri="{FF2B5EF4-FFF2-40B4-BE49-F238E27FC236}">
-                <a16:creationId xmlns:a16="http://schemas.microsoft.com/office/drawing/2014/main" id="{8396B52E-90F2-4B4D-B9C4-C0350BD4BC60}"/>
+                <a16:creationId xmlns:a16="http://schemas.microsoft.com/office/drawing/2014/main" id="{036A65BB-8403-4C53-B660-9B9EDE812F9E}"/>
               </a:ext>
             </a:extLst>
           </p:cNvPr>
@@ -42937,7 +42937,7 @@
           <p:cNvPr id="61" name="">
             <a:extLst xmlns:a="http://schemas.openxmlformats.org/drawingml/2006/main">
               <a:ext uri="{FF2B5EF4-FFF2-40B4-BE49-F238E27FC236}">
-                <a16:creationId xmlns:a16="http://schemas.microsoft.com/office/drawing/2014/main" id="{CB0A552D-12B9-41FC-BD30-C935F344C19E}"/>
+                <a16:creationId xmlns:a16="http://schemas.microsoft.com/office/drawing/2014/main" id="{86DC8341-CB61-4A23-ACB5-2C4A389499D6}"/>
               </a:ext>
             </a:extLst>
           </p:cNvPr>
@@ -42989,7 +42989,7 @@
           <p:cNvPr id="62" name="">
             <a:extLst xmlns:a="http://schemas.openxmlformats.org/drawingml/2006/main">
               <a:ext uri="{FF2B5EF4-FFF2-40B4-BE49-F238E27FC236}">
-                <a16:creationId xmlns:a16="http://schemas.microsoft.com/office/drawing/2014/main" id="{4F122102-841B-4309-A754-AA4EE43EAB6E}"/>
+                <a16:creationId xmlns:a16="http://schemas.microsoft.com/office/drawing/2014/main" id="{71BF6BBB-26DA-4EFF-99EE-4D1ED39BEF85}"/>
               </a:ext>
             </a:extLst>
           </p:cNvPr>
@@ -43041,7 +43041,7 @@
           <p:cNvPr id="63" name="">
             <a:extLst xmlns:a="http://schemas.openxmlformats.org/drawingml/2006/main">
               <a:ext uri="{FF2B5EF4-FFF2-40B4-BE49-F238E27FC236}">
-                <a16:creationId xmlns:a16="http://schemas.microsoft.com/office/drawing/2014/main" id="{9E5C3573-C1CF-4A32-95B9-883661140571}"/>
+                <a16:creationId xmlns:a16="http://schemas.microsoft.com/office/drawing/2014/main" id="{D1ABB987-531E-4101-B80E-46F83A1D752D}"/>
               </a:ext>
             </a:extLst>
           </p:cNvPr>
@@ -43072,7 +43072,7 @@
           <p:cNvPr id="64" name="">
             <a:extLst xmlns:a="http://schemas.openxmlformats.org/drawingml/2006/main">
               <a:ext uri="{FF2B5EF4-FFF2-40B4-BE49-F238E27FC236}">
-                <a16:creationId xmlns:a16="http://schemas.microsoft.com/office/drawing/2014/main" id="{3065FFB6-EBA7-4A22-B6B3-A9C015DB97B7}"/>
+                <a16:creationId xmlns:a16="http://schemas.microsoft.com/office/drawing/2014/main" id="{0874D14B-76DC-4D2E-8557-3258E884A0A8}"/>
               </a:ext>
             </a:extLst>
           </p:cNvPr>
@@ -43103,7 +43103,7 @@
           <p:cNvPr id="65" name="">
             <a:extLst xmlns:a="http://schemas.openxmlformats.org/drawingml/2006/main">
               <a:ext uri="{FF2B5EF4-FFF2-40B4-BE49-F238E27FC236}">
-                <a16:creationId xmlns:a16="http://schemas.microsoft.com/office/drawing/2014/main" id="{B458A0D2-8156-4ED0-B378-57B0F95D4A6E}"/>
+                <a16:creationId xmlns:a16="http://schemas.microsoft.com/office/drawing/2014/main" id="{7BD94F3F-622F-4F73-9078-665FDDA142BB}"/>
               </a:ext>
             </a:extLst>
           </p:cNvPr>
@@ -43155,7 +43155,7 @@
           <p:cNvPr id="66" name="">
             <a:extLst xmlns:a="http://schemas.openxmlformats.org/drawingml/2006/main">
               <a:ext uri="{FF2B5EF4-FFF2-40B4-BE49-F238E27FC236}">
-                <a16:creationId xmlns:a16="http://schemas.microsoft.com/office/drawing/2014/main" id="{545A346D-D9B5-443C-AB04-89BD256CEF9D}"/>
+                <a16:creationId xmlns:a16="http://schemas.microsoft.com/office/drawing/2014/main" id="{64157AF9-23B7-42A2-B940-B0AF90656ABF}"/>
               </a:ext>
             </a:extLst>
           </p:cNvPr>
@@ -43207,7 +43207,7 @@
           <p:cNvPr id="67" name="">
             <a:extLst xmlns:a="http://schemas.openxmlformats.org/drawingml/2006/main">
               <a:ext uri="{FF2B5EF4-FFF2-40B4-BE49-F238E27FC236}">
-                <a16:creationId xmlns:a16="http://schemas.microsoft.com/office/drawing/2014/main" id="{1ADD7C22-BA68-4FBA-B7FD-C19B8B3DEB21}"/>
+                <a16:creationId xmlns:a16="http://schemas.microsoft.com/office/drawing/2014/main" id="{67D05857-834C-41B3-8B43-F6D4A3D8A040}"/>
               </a:ext>
             </a:extLst>
           </p:cNvPr>
@@ -43259,7 +43259,7 @@
           <p:cNvPr id="68" name="">
             <a:extLst xmlns:a="http://schemas.openxmlformats.org/drawingml/2006/main">
               <a:ext uri="{FF2B5EF4-FFF2-40B4-BE49-F238E27FC236}">
-                <a16:creationId xmlns:a16="http://schemas.microsoft.com/office/drawing/2014/main" id="{5A5AFF75-0BC6-4FE7-8111-F4AC414811EF}"/>
+                <a16:creationId xmlns:a16="http://schemas.microsoft.com/office/drawing/2014/main" id="{5A98F5F8-FCDA-4EAF-98FC-93FFD8DBB05D}"/>
               </a:ext>
             </a:extLst>
           </p:cNvPr>
@@ -43311,7 +43311,7 @@
           <p:cNvPr id="69" name="">
             <a:extLst xmlns:a="http://schemas.openxmlformats.org/drawingml/2006/main">
               <a:ext uri="{FF2B5EF4-FFF2-40B4-BE49-F238E27FC236}">
-                <a16:creationId xmlns:a16="http://schemas.microsoft.com/office/drawing/2014/main" id="{5C7791C6-6091-41E4-8C3E-CC9C5B542076}"/>
+                <a16:creationId xmlns:a16="http://schemas.microsoft.com/office/drawing/2014/main" id="{6C962283-57E6-412C-BB83-8CA29E21DA4B}"/>
               </a:ext>
             </a:extLst>
           </p:cNvPr>
@@ -43363,7 +43363,7 @@
           <p:cNvPr id="70" name="">
             <a:extLst xmlns:a="http://schemas.openxmlformats.org/drawingml/2006/main">
               <a:ext uri="{FF2B5EF4-FFF2-40B4-BE49-F238E27FC236}">
-                <a16:creationId xmlns:a16="http://schemas.microsoft.com/office/drawing/2014/main" id="{E7F4FFAB-7B5E-4EFA-94F7-0E9B9AB758E2}"/>
+                <a16:creationId xmlns:a16="http://schemas.microsoft.com/office/drawing/2014/main" id="{D24661F5-64A8-451C-8A83-002AC454D3DD}"/>
               </a:ext>
             </a:extLst>
           </p:cNvPr>
@@ -43394,7 +43394,7 @@
           <p:cNvPr id="71" name="">
             <a:extLst xmlns:a="http://schemas.openxmlformats.org/drawingml/2006/main">
               <a:ext uri="{FF2B5EF4-FFF2-40B4-BE49-F238E27FC236}">
-                <a16:creationId xmlns:a16="http://schemas.microsoft.com/office/drawing/2014/main" id="{51CD4837-5019-43B1-868D-800DBF29E659}"/>
+                <a16:creationId xmlns:a16="http://schemas.microsoft.com/office/drawing/2014/main" id="{BA5D07D2-8731-4A57-B8C9-CCCF5825BF5E}"/>
               </a:ext>
             </a:extLst>
           </p:cNvPr>
@@ -43446,7 +43446,7 @@
           <p:cNvPr id="72" name="">
             <a:extLst xmlns:a="http://schemas.openxmlformats.org/drawingml/2006/main">
               <a:ext uri="{FF2B5EF4-FFF2-40B4-BE49-F238E27FC236}">
-                <a16:creationId xmlns:a16="http://schemas.microsoft.com/office/drawing/2014/main" id="{47809396-13C9-4719-B669-E27F5D08585D}"/>
+                <a16:creationId xmlns:a16="http://schemas.microsoft.com/office/drawing/2014/main" id="{FE149CF8-F5B5-4932-8964-490B9B6F83E7}"/>
               </a:ext>
             </a:extLst>
           </p:cNvPr>
@@ -43498,7 +43498,7 @@
           <p:cNvPr id="73" name="">
             <a:extLst xmlns:a="http://schemas.openxmlformats.org/drawingml/2006/main">
               <a:ext uri="{FF2B5EF4-FFF2-40B4-BE49-F238E27FC236}">
-                <a16:creationId xmlns:a16="http://schemas.microsoft.com/office/drawing/2014/main" id="{AD1C25D5-8EBD-4CAC-833D-BCFB8C367E24}"/>
+                <a16:creationId xmlns:a16="http://schemas.microsoft.com/office/drawing/2014/main" id="{4006B3EE-5C8D-454A-B91C-30215E21F400}"/>
               </a:ext>
             </a:extLst>
           </p:cNvPr>
@@ -43550,7 +43550,7 @@
           <p:cNvPr id="74" name="">
             <a:extLst xmlns:a="http://schemas.openxmlformats.org/drawingml/2006/main">
               <a:ext uri="{FF2B5EF4-FFF2-40B4-BE49-F238E27FC236}">
-                <a16:creationId xmlns:a16="http://schemas.microsoft.com/office/drawing/2014/main" id="{92C58F5F-B8B9-45FC-8F76-4AA6EF7B3444}"/>
+                <a16:creationId xmlns:a16="http://schemas.microsoft.com/office/drawing/2014/main" id="{0E101FE5-5444-44B8-ABE3-BAB4D7ACB656}"/>
               </a:ext>
             </a:extLst>
           </p:cNvPr>
@@ -43602,7 +43602,7 @@
           <p:cNvPr id="75" name="">
             <a:extLst xmlns:a="http://schemas.openxmlformats.org/drawingml/2006/main">
               <a:ext uri="{FF2B5EF4-FFF2-40B4-BE49-F238E27FC236}">
-                <a16:creationId xmlns:a16="http://schemas.microsoft.com/office/drawing/2014/main" id="{636BE7F0-D173-4418-A869-3E1CA531B2E2}"/>
+                <a16:creationId xmlns:a16="http://schemas.microsoft.com/office/drawing/2014/main" id="{ED566D96-B1A0-4596-9632-331C42F3B13C}"/>
               </a:ext>
             </a:extLst>
           </p:cNvPr>
@@ -43654,7 +43654,7 @@
           <p:cNvPr id="76" name="">
             <a:extLst xmlns:a="http://schemas.openxmlformats.org/drawingml/2006/main">
               <a:ext uri="{FF2B5EF4-FFF2-40B4-BE49-F238E27FC236}">
-                <a16:creationId xmlns:a16="http://schemas.microsoft.com/office/drawing/2014/main" id="{0A231B97-490A-4FEB-B778-9C7E81D1685E}"/>
+                <a16:creationId xmlns:a16="http://schemas.microsoft.com/office/drawing/2014/main" id="{0E9201C9-4A79-4977-BFFA-150FA1C9DF64}"/>
               </a:ext>
             </a:extLst>
           </p:cNvPr>
@@ -43685,7 +43685,7 @@
           <p:cNvPr id="77" name="">
             <a:extLst xmlns:a="http://schemas.openxmlformats.org/drawingml/2006/main">
               <a:ext uri="{FF2B5EF4-FFF2-40B4-BE49-F238E27FC236}">
-                <a16:creationId xmlns:a16="http://schemas.microsoft.com/office/drawing/2014/main" id="{DE6452EC-3855-4C3E-BEB3-6019FA7FA084}"/>
+                <a16:creationId xmlns:a16="http://schemas.microsoft.com/office/drawing/2014/main" id="{2514F592-C1B3-4515-ACCF-C7CF41F43B8B}"/>
               </a:ext>
             </a:extLst>
           </p:cNvPr>
@@ -43716,7 +43716,7 @@
           <p:cNvPr id="78" name="">
             <a:extLst xmlns:a="http://schemas.openxmlformats.org/drawingml/2006/main">
               <a:ext uri="{FF2B5EF4-FFF2-40B4-BE49-F238E27FC236}">
-                <a16:creationId xmlns:a16="http://schemas.microsoft.com/office/drawing/2014/main" id="{54BCDF72-DBE4-41EF-BCE8-57363C2A273D}"/>
+                <a16:creationId xmlns:a16="http://schemas.microsoft.com/office/drawing/2014/main" id="{3597A489-58C5-4974-942C-829788A64F9E}"/>
               </a:ext>
             </a:extLst>
           </p:cNvPr>
@@ -43768,7 +43768,7 @@
           <p:cNvPr id="79" name="">
             <a:extLst xmlns:a="http://schemas.openxmlformats.org/drawingml/2006/main">
               <a:ext uri="{FF2B5EF4-FFF2-40B4-BE49-F238E27FC236}">
-                <a16:creationId xmlns:a16="http://schemas.microsoft.com/office/drawing/2014/main" id="{7FD45C9E-6EAA-4809-A82D-94CD52E76FAC}"/>
+                <a16:creationId xmlns:a16="http://schemas.microsoft.com/office/drawing/2014/main" id="{CFAFF212-8FCC-4CC5-98DE-8EB25475869B}"/>
               </a:ext>
             </a:extLst>
           </p:cNvPr>
@@ -43820,7 +43820,7 @@
           <p:cNvPr id="80" name="">
             <a:extLst xmlns:a="http://schemas.openxmlformats.org/drawingml/2006/main">
               <a:ext uri="{FF2B5EF4-FFF2-40B4-BE49-F238E27FC236}">
-                <a16:creationId xmlns:a16="http://schemas.microsoft.com/office/drawing/2014/main" id="{27493333-887B-47E3-AE2D-99C80E2137A3}"/>
+                <a16:creationId xmlns:a16="http://schemas.microsoft.com/office/drawing/2014/main" id="{884959E0-6D99-4ABF-B6F8-281A02B93044}"/>
               </a:ext>
             </a:extLst>
           </p:cNvPr>
@@ -43872,7 +43872,7 @@
           <p:cNvPr id="81" name="">
             <a:extLst xmlns:a="http://schemas.openxmlformats.org/drawingml/2006/main">
               <a:ext uri="{FF2B5EF4-FFF2-40B4-BE49-F238E27FC236}">
-                <a16:creationId xmlns:a16="http://schemas.microsoft.com/office/drawing/2014/main" id="{A3EB534B-9939-4C7B-95A0-B658D3AC3BAF}"/>
+                <a16:creationId xmlns:a16="http://schemas.microsoft.com/office/drawing/2014/main" id="{EBE8FF08-1CDC-46D3-A4B0-E0C44C19EA17}"/>
               </a:ext>
             </a:extLst>
           </p:cNvPr>
@@ -43924,7 +43924,7 @@
           <p:cNvPr id="82" name="">
             <a:extLst xmlns:a="http://schemas.openxmlformats.org/drawingml/2006/main">
               <a:ext uri="{FF2B5EF4-FFF2-40B4-BE49-F238E27FC236}">
-                <a16:creationId xmlns:a16="http://schemas.microsoft.com/office/drawing/2014/main" id="{8557A32B-924D-40CC-B21D-72BB231AF546}"/>
+                <a16:creationId xmlns:a16="http://schemas.microsoft.com/office/drawing/2014/main" id="{6C5BF974-0642-45BF-B46F-434B683F1746}"/>
               </a:ext>
             </a:extLst>
           </p:cNvPr>
@@ -43976,7 +43976,7 @@
           <p:cNvPr id="83" name="">
             <a:extLst xmlns:a="http://schemas.openxmlformats.org/drawingml/2006/main">
               <a:ext uri="{FF2B5EF4-FFF2-40B4-BE49-F238E27FC236}">
-                <a16:creationId xmlns:a16="http://schemas.microsoft.com/office/drawing/2014/main" id="{E7DB0B6D-1C7C-4779-9C39-9BABB80F5170}"/>
+                <a16:creationId xmlns:a16="http://schemas.microsoft.com/office/drawing/2014/main" id="{517B9E67-94A8-4D82-BBBB-9347F1EA49B0}"/>
               </a:ext>
             </a:extLst>
           </p:cNvPr>
@@ -44007,7 +44007,7 @@
           <p:cNvPr id="84" name="">
             <a:extLst xmlns:a="http://schemas.openxmlformats.org/drawingml/2006/main">
               <a:ext uri="{FF2B5EF4-FFF2-40B4-BE49-F238E27FC236}">
-                <a16:creationId xmlns:a16="http://schemas.microsoft.com/office/drawing/2014/main" id="{DD05ED6C-4726-44EA-B1FF-0D9E6A6115AA}"/>
+                <a16:creationId xmlns:a16="http://schemas.microsoft.com/office/drawing/2014/main" id="{AD1C7A05-F765-43AD-A52B-33A2452E9014}"/>
               </a:ext>
             </a:extLst>
           </p:cNvPr>
@@ -44059,7 +44059,7 @@
           <p:cNvPr id="85" name="">
             <a:extLst xmlns:a="http://schemas.openxmlformats.org/drawingml/2006/main">
               <a:ext uri="{FF2B5EF4-FFF2-40B4-BE49-F238E27FC236}">
-                <a16:creationId xmlns:a16="http://schemas.microsoft.com/office/drawing/2014/main" id="{99515641-B49E-4CFD-ADF8-ABF33FC8A35A}"/>
+                <a16:creationId xmlns:a16="http://schemas.microsoft.com/office/drawing/2014/main" id="{74FAA8AF-A635-48DD-9424-B00F04774562}"/>
               </a:ext>
             </a:extLst>
           </p:cNvPr>
@@ -44111,7 +44111,7 @@
           <p:cNvPr id="86" name="">
             <a:extLst xmlns:a="http://schemas.openxmlformats.org/drawingml/2006/main">
               <a:ext uri="{FF2B5EF4-FFF2-40B4-BE49-F238E27FC236}">
-                <a16:creationId xmlns:a16="http://schemas.microsoft.com/office/drawing/2014/main" id="{687523C3-2198-465B-B8DB-570507CA852A}"/>
+                <a16:creationId xmlns:a16="http://schemas.microsoft.com/office/drawing/2014/main" id="{EC27FD24-419C-453B-8210-A2476955D60F}"/>
               </a:ext>
             </a:extLst>
           </p:cNvPr>
@@ -44163,7 +44163,7 @@
           <p:cNvPr id="87" name="">
             <a:extLst xmlns:a="http://schemas.openxmlformats.org/drawingml/2006/main">
               <a:ext uri="{FF2B5EF4-FFF2-40B4-BE49-F238E27FC236}">
-                <a16:creationId xmlns:a16="http://schemas.microsoft.com/office/drawing/2014/main" id="{D7D2FB61-1211-42D7-B4AA-293A6544E8BF}"/>
+                <a16:creationId xmlns:a16="http://schemas.microsoft.com/office/drawing/2014/main" id="{5F14C5DE-2637-480B-818A-BA3A1023837E}"/>
               </a:ext>
             </a:extLst>
           </p:cNvPr>
@@ -44215,7 +44215,7 @@
           <p:cNvPr id="88" name="">
             <a:extLst xmlns:a="http://schemas.openxmlformats.org/drawingml/2006/main">
               <a:ext uri="{FF2B5EF4-FFF2-40B4-BE49-F238E27FC236}">
-                <a16:creationId xmlns:a16="http://schemas.microsoft.com/office/drawing/2014/main" id="{09DA57D9-E2CC-44C7-82E2-92E78CB8C447}"/>
+                <a16:creationId xmlns:a16="http://schemas.microsoft.com/office/drawing/2014/main" id="{F1C0D8FF-4DD7-446C-ACD8-1C36A8AC616B}"/>
               </a:ext>
             </a:extLst>
           </p:cNvPr>
@@ -44267,7 +44267,7 @@
           <p:cNvPr id="89" name="">
             <a:extLst xmlns:a="http://schemas.openxmlformats.org/drawingml/2006/main">
               <a:ext uri="{FF2B5EF4-FFF2-40B4-BE49-F238E27FC236}">
-                <a16:creationId xmlns:a16="http://schemas.microsoft.com/office/drawing/2014/main" id="{652E0531-24F4-44B2-BD49-7BC1F634DEB5}"/>
+                <a16:creationId xmlns:a16="http://schemas.microsoft.com/office/drawing/2014/main" id="{CB65DC4E-5870-49AB-A67F-7403BD5434A7}"/>
               </a:ext>
             </a:extLst>
           </p:cNvPr>
@@ -44298,7 +44298,7 @@
           <p:cNvPr id="90" name="">
             <a:extLst xmlns:a="http://schemas.openxmlformats.org/drawingml/2006/main">
               <a:ext uri="{FF2B5EF4-FFF2-40B4-BE49-F238E27FC236}">
-                <a16:creationId xmlns:a16="http://schemas.microsoft.com/office/drawing/2014/main" id="{F8AE2200-B36C-4650-AE93-D0E0CD875E24}"/>
+                <a16:creationId xmlns:a16="http://schemas.microsoft.com/office/drawing/2014/main" id="{2B0248A4-06B9-4171-906E-D416452A6087}"/>
               </a:ext>
             </a:extLst>
           </p:cNvPr>
@@ -44329,7 +44329,7 @@
           <p:cNvPr id="91" name="">
             <a:extLst xmlns:a="http://schemas.openxmlformats.org/drawingml/2006/main">
               <a:ext uri="{FF2B5EF4-FFF2-40B4-BE49-F238E27FC236}">
-                <a16:creationId xmlns:a16="http://schemas.microsoft.com/office/drawing/2014/main" id="{F68321EC-DE5E-4915-8F02-0D98136CD807}"/>
+                <a16:creationId xmlns:a16="http://schemas.microsoft.com/office/drawing/2014/main" id="{6448105A-41BA-40C1-8F98-4F55359FE53E}"/>
               </a:ext>
             </a:extLst>
           </p:cNvPr>
@@ -44381,7 +44381,7 @@
           <p:cNvPr id="92" name="">
             <a:extLst xmlns:a="http://schemas.openxmlformats.org/drawingml/2006/main">
               <a:ext uri="{FF2B5EF4-FFF2-40B4-BE49-F238E27FC236}">
-                <a16:creationId xmlns:a16="http://schemas.microsoft.com/office/drawing/2014/main" id="{2620B66F-037A-425C-908C-86E1A7569284}"/>
+                <a16:creationId xmlns:a16="http://schemas.microsoft.com/office/drawing/2014/main" id="{8DEA6784-CBA1-4452-927B-E9445D9D7A1D}"/>
               </a:ext>
             </a:extLst>
           </p:cNvPr>
@@ -44433,7 +44433,7 @@
           <p:cNvPr id="93" name="">
             <a:extLst xmlns:a="http://schemas.openxmlformats.org/drawingml/2006/main">
               <a:ext uri="{FF2B5EF4-FFF2-40B4-BE49-F238E27FC236}">
-                <a16:creationId xmlns:a16="http://schemas.microsoft.com/office/drawing/2014/main" id="{3D8B5EC2-DA34-4E73-B80D-91F6F53B9344}"/>
+                <a16:creationId xmlns:a16="http://schemas.microsoft.com/office/drawing/2014/main" id="{7EC20F51-74BF-4B07-8206-8D20FF1DD9F8}"/>
               </a:ext>
             </a:extLst>
           </p:cNvPr>
@@ -44485,7 +44485,7 @@
           <p:cNvPr id="94" name="">
             <a:extLst xmlns:a="http://schemas.openxmlformats.org/drawingml/2006/main">
               <a:ext uri="{FF2B5EF4-FFF2-40B4-BE49-F238E27FC236}">
-                <a16:creationId xmlns:a16="http://schemas.microsoft.com/office/drawing/2014/main" id="{6C4F0722-5BE7-433F-8138-F210FB56E38C}"/>
+                <a16:creationId xmlns:a16="http://schemas.microsoft.com/office/drawing/2014/main" id="{3591DDB7-D906-4653-A3ED-A9CF276A78EA}"/>
               </a:ext>
             </a:extLst>
           </p:cNvPr>
@@ -44537,7 +44537,7 @@
           <p:cNvPr id="95" name="">
             <a:extLst xmlns:a="http://schemas.openxmlformats.org/drawingml/2006/main">
               <a:ext uri="{FF2B5EF4-FFF2-40B4-BE49-F238E27FC236}">
-                <a16:creationId xmlns:a16="http://schemas.microsoft.com/office/drawing/2014/main" id="{412837DC-F562-4FB3-8962-C986D981AB96}"/>
+                <a16:creationId xmlns:a16="http://schemas.microsoft.com/office/drawing/2014/main" id="{19E240CA-2A28-4663-8EA7-8C58CF5A45B0}"/>
               </a:ext>
             </a:extLst>
           </p:cNvPr>
@@ -44589,7 +44589,7 @@
           <p:cNvPr id="96" name="">
             <a:extLst xmlns:a="http://schemas.openxmlformats.org/drawingml/2006/main">
               <a:ext uri="{FF2B5EF4-FFF2-40B4-BE49-F238E27FC236}">
-                <a16:creationId xmlns:a16="http://schemas.microsoft.com/office/drawing/2014/main" id="{D6D069BA-C62B-4E3B-B830-B1EC49ED7F82}"/>
+                <a16:creationId xmlns:a16="http://schemas.microsoft.com/office/drawing/2014/main" id="{0A774678-B020-4666-B009-95C43D3998ED}"/>
               </a:ext>
             </a:extLst>
           </p:cNvPr>
@@ -44620,7 +44620,7 @@
           <p:cNvPr id="97" name="">
             <a:extLst xmlns:a="http://schemas.openxmlformats.org/drawingml/2006/main">
               <a:ext uri="{FF2B5EF4-FFF2-40B4-BE49-F238E27FC236}">
-                <a16:creationId xmlns:a16="http://schemas.microsoft.com/office/drawing/2014/main" id="{17084DBB-5DF4-4B07-80B4-87C8E2F8E2EB}"/>
+                <a16:creationId xmlns:a16="http://schemas.microsoft.com/office/drawing/2014/main" id="{3729DA71-160B-47F7-868F-360667D4CDF3}"/>
               </a:ext>
             </a:extLst>
           </p:cNvPr>
@@ -44672,7 +44672,7 @@
           <p:cNvPr id="98" name="">
             <a:extLst xmlns:a="http://schemas.openxmlformats.org/drawingml/2006/main">
               <a:ext uri="{FF2B5EF4-FFF2-40B4-BE49-F238E27FC236}">
-                <a16:creationId xmlns:a16="http://schemas.microsoft.com/office/drawing/2014/main" id="{A0D007D8-8BA6-4771-A9B2-D16ECA2063EC}"/>
+                <a16:creationId xmlns:a16="http://schemas.microsoft.com/office/drawing/2014/main" id="{7686343A-63C9-467B-9B07-8394148A92B8}"/>
               </a:ext>
             </a:extLst>
           </p:cNvPr>
@@ -44724,7 +44724,7 @@
           <p:cNvPr id="99" name="">
             <a:extLst xmlns:a="http://schemas.openxmlformats.org/drawingml/2006/main">
               <a:ext uri="{FF2B5EF4-FFF2-40B4-BE49-F238E27FC236}">
-                <a16:creationId xmlns:a16="http://schemas.microsoft.com/office/drawing/2014/main" id="{FFC23541-1963-4578-A25F-D65F7C74396B}"/>
+                <a16:creationId xmlns:a16="http://schemas.microsoft.com/office/drawing/2014/main" id="{6EE6DBAF-0631-4054-A795-1D968C697E78}"/>
               </a:ext>
             </a:extLst>
           </p:cNvPr>
@@ -44776,7 +44776,7 @@
           <p:cNvPr id="100" name="">
             <a:extLst xmlns:a="http://schemas.openxmlformats.org/drawingml/2006/main">
               <a:ext uri="{FF2B5EF4-FFF2-40B4-BE49-F238E27FC236}">
-                <a16:creationId xmlns:a16="http://schemas.microsoft.com/office/drawing/2014/main" id="{FB3DE76E-3FE8-4592-B338-1FC6C123097F}"/>
+                <a16:creationId xmlns:a16="http://schemas.microsoft.com/office/drawing/2014/main" id="{22BA2F9F-76AE-41A5-9248-B8C5FBF77CF4}"/>
               </a:ext>
             </a:extLst>
           </p:cNvPr>
@@ -44828,7 +44828,7 @@
           <p:cNvPr id="101" name="">
             <a:extLst xmlns:a="http://schemas.openxmlformats.org/drawingml/2006/main">
               <a:ext uri="{FF2B5EF4-FFF2-40B4-BE49-F238E27FC236}">
-                <a16:creationId xmlns:a16="http://schemas.microsoft.com/office/drawing/2014/main" id="{EFD8D453-47A2-4ED4-B3EF-F8E11ADBE355}"/>
+                <a16:creationId xmlns:a16="http://schemas.microsoft.com/office/drawing/2014/main" id="{A2B6E69B-B237-4C79-B248-721D9A5E4AA7}"/>
               </a:ext>
             </a:extLst>
           </p:cNvPr>
@@ -44878,7 +44878,7 @@
     </p:spTree>
     <p:extLst>
       <p:ext uri="{BB962C8B-B14F-4D97-AF65-F5344CB8AC3E}">
-        <p14:creationId xmlns:p14="http://schemas.microsoft.com/office/powerpoint/2010/main" val="2081831531"/>
+        <p14:creationId xmlns:p14="http://schemas.microsoft.com/office/powerpoint/2010/main" val="45723231"/>
       </p:ext>
     </p:extLst>
   </p:cSld>

--- a/.preview/pptx-claro/deck.pptx
+++ b/.preview/pptx-claro/deck.pptx
@@ -2,27 +2,27 @@
 <file path=ppt/presentation.xml><?xml version="1.0" encoding="utf-8"?>
 <p:presentation xmlns:p="http://schemas.openxmlformats.org/presentationml/2006/main">
   <p:sldMasterIdLst>
-    <p:sldMasterId xmlns:r="http://schemas.openxmlformats.org/officeDocument/2006/relationships" id="2147483648" r:id="R9536f9ae53c84041"/>
+    <p:sldMasterId xmlns:r="http://schemas.openxmlformats.org/officeDocument/2006/relationships" id="2147483648" r:id="R61c738afef3146b2"/>
   </p:sldMasterIdLst>
   <p:notesMasterIdLst>
-    <p:notesMasterId xmlns:r="http://schemas.openxmlformats.org/officeDocument/2006/relationships" r:id="R232ed7ae272f4fe3"/>
+    <p:notesMasterId xmlns:r="http://schemas.openxmlformats.org/officeDocument/2006/relationships" r:id="Rc6b498de18134637"/>
   </p:notesMasterIdLst>
   <p:sldIdLst>
-    <p:sldId xmlns:r="http://schemas.openxmlformats.org/officeDocument/2006/relationships" id="256" r:id="Radff340ed096439c"/>
-    <p:sldId xmlns:r="http://schemas.openxmlformats.org/officeDocument/2006/relationships" id="257" r:id="Ra933f1ced3504172"/>
-    <p:sldId xmlns:r="http://schemas.openxmlformats.org/officeDocument/2006/relationships" id="258" r:id="Rde33b989612b4882"/>
-    <p:sldId xmlns:r="http://schemas.openxmlformats.org/officeDocument/2006/relationships" id="259" r:id="R9e1addbefaf842d6"/>
-    <p:sldId xmlns:r="http://schemas.openxmlformats.org/officeDocument/2006/relationships" id="260" r:id="Rdbd5acb6470a4160"/>
-    <p:sldId xmlns:r="http://schemas.openxmlformats.org/officeDocument/2006/relationships" id="261" r:id="Rab04cd0a2ecf448b"/>
-    <p:sldId xmlns:r="http://schemas.openxmlformats.org/officeDocument/2006/relationships" id="262" r:id="R6b54487193704622"/>
-    <p:sldId xmlns:r="http://schemas.openxmlformats.org/officeDocument/2006/relationships" id="263" r:id="R9da7642674ab436a"/>
-    <p:sldId xmlns:r="http://schemas.openxmlformats.org/officeDocument/2006/relationships" id="264" r:id="Re195d4432d4c41de"/>
-    <p:sldId xmlns:r="http://schemas.openxmlformats.org/officeDocument/2006/relationships" id="265" r:id="Rd3e72e62961946f9"/>
-    <p:sldId xmlns:r="http://schemas.openxmlformats.org/officeDocument/2006/relationships" id="266" r:id="Recd0a76feced449f"/>
-    <p:sldId xmlns:r="http://schemas.openxmlformats.org/officeDocument/2006/relationships" id="267" r:id="R7df002b0528e47f5"/>
-    <p:sldId xmlns:r="http://schemas.openxmlformats.org/officeDocument/2006/relationships" id="268" r:id="Rf9380c053644444e"/>
-    <p:sldId xmlns:r="http://schemas.openxmlformats.org/officeDocument/2006/relationships" id="269" r:id="Rf7180b15d95c4ff1"/>
-    <p:sldId xmlns:r="http://schemas.openxmlformats.org/officeDocument/2006/relationships" id="270" r:id="Rc945fed3204e44ca"/>
+    <p:sldId xmlns:r="http://schemas.openxmlformats.org/officeDocument/2006/relationships" id="256" r:id="Rf03afabbcf034ad2"/>
+    <p:sldId xmlns:r="http://schemas.openxmlformats.org/officeDocument/2006/relationships" id="257" r:id="R04cfe91d70c247a0"/>
+    <p:sldId xmlns:r="http://schemas.openxmlformats.org/officeDocument/2006/relationships" id="258" r:id="R058fed35cc694df4"/>
+    <p:sldId xmlns:r="http://schemas.openxmlformats.org/officeDocument/2006/relationships" id="259" r:id="R8a2ef3dc21b44286"/>
+    <p:sldId xmlns:r="http://schemas.openxmlformats.org/officeDocument/2006/relationships" id="260" r:id="R505afee659794841"/>
+    <p:sldId xmlns:r="http://schemas.openxmlformats.org/officeDocument/2006/relationships" id="261" r:id="R89746d4ae0f1470f"/>
+    <p:sldId xmlns:r="http://schemas.openxmlformats.org/officeDocument/2006/relationships" id="262" r:id="Re36393543aa24fdf"/>
+    <p:sldId xmlns:r="http://schemas.openxmlformats.org/officeDocument/2006/relationships" id="263" r:id="Rcae28e1e97bd4850"/>
+    <p:sldId xmlns:r="http://schemas.openxmlformats.org/officeDocument/2006/relationships" id="264" r:id="Rf5f544d21dcf463c"/>
+    <p:sldId xmlns:r="http://schemas.openxmlformats.org/officeDocument/2006/relationships" id="265" r:id="R6072333bfa274d50"/>
+    <p:sldId xmlns:r="http://schemas.openxmlformats.org/officeDocument/2006/relationships" id="266" r:id="R8043baee93754b32"/>
+    <p:sldId xmlns:r="http://schemas.openxmlformats.org/officeDocument/2006/relationships" id="267" r:id="R4539b58fe5e34e7a"/>
+    <p:sldId xmlns:r="http://schemas.openxmlformats.org/officeDocument/2006/relationships" id="268" r:id="Re6f1515e8f6744c0"/>
+    <p:sldId xmlns:r="http://schemas.openxmlformats.org/officeDocument/2006/relationships" id="269" r:id="Rfa5758363b214290"/>
+    <p:sldId xmlns:r="http://schemas.openxmlformats.org/officeDocument/2006/relationships" id="270" r:id="R158de68ac1f94b06"/>
   </p:sldIdLst>
   <p:sldSz cx="12192000" cy="6858000"/>
   <p:notesSz cx="6858000" cy="9144000"/>
@@ -1879,7 +1879,7 @@
   </p:cSld>
   <p:clrMap bg1="lt1" tx1="dk1" bg2="lt2" tx2="dk2" accent1="accent1" accent2="accent2" accent3="accent3" accent4="accent4" accent5="accent5" accent6="accent6" hlink="hlink" folHlink="folHlink"/>
   <p:sldLayoutIdLst>
-    <p:sldLayoutId xmlns:r="http://schemas.openxmlformats.org/officeDocument/2006/relationships" id="2147483649" r:id="R94b43ed76f814f36"/>
+    <p:sldLayoutId xmlns:r="http://schemas.openxmlformats.org/officeDocument/2006/relationships" id="2147483649" r:id="R002aaa3ae28448d8"/>
   </p:sldLayoutIdLst>
   <p:txStyles>
     <p:titleStyle>
@@ -2430,7 +2430,7 @@
           <p:cNvPr id="17" name="">
             <a:extLst xmlns:a="http://schemas.openxmlformats.org/drawingml/2006/main">
               <a:ext uri="{FF2B5EF4-FFF2-40B4-BE49-F238E27FC236}">
-                <a16:creationId xmlns:a16="http://schemas.microsoft.com/office/drawing/2014/main" id="{E6911541-C1A6-4D41-8D94-F901FECC991C}"/>
+                <a16:creationId xmlns:a16="http://schemas.microsoft.com/office/drawing/2014/main" id="{5EF7683F-EC05-44B4-9AEB-546C478F4273}"/>
               </a:ext>
             </a:extLst>
           </p:cNvPr>
@@ -2463,7 +2463,7 @@
           <p:cNvPr id="2" name="">
             <a:extLst xmlns:a="http://schemas.openxmlformats.org/drawingml/2006/main">
               <a:ext uri="{FF2B5EF4-FFF2-40B4-BE49-F238E27FC236}">
-                <a16:creationId xmlns:a16="http://schemas.microsoft.com/office/drawing/2014/main" id="{39613A62-70E1-43EE-9DB1-484CF0EC1E3A}"/>
+                <a16:creationId xmlns:a16="http://schemas.microsoft.com/office/drawing/2014/main" id="{C937D508-4753-4482-BB52-139EF19A0448}"/>
               </a:ext>
             </a:extLst>
           </p:cNvPr>
@@ -2494,7 +2494,7 @@
           <p:cNvPr id="3" name="">
             <a:extLst xmlns:a="http://schemas.openxmlformats.org/drawingml/2006/main">
               <a:ext uri="{FF2B5EF4-FFF2-40B4-BE49-F238E27FC236}">
-                <a16:creationId xmlns:a16="http://schemas.microsoft.com/office/drawing/2014/main" id="{595D60B1-957A-4C7E-8CD1-FE08EBC3BE59}"/>
+                <a16:creationId xmlns:a16="http://schemas.microsoft.com/office/drawing/2014/main" id="{9CE48BFD-1532-4ED4-9B55-58C65883EAB5}"/>
               </a:ext>
             </a:extLst>
           </p:cNvPr>
@@ -2529,7 +2529,7 @@
           <p:nvPr/>
         </p:nvPicPr>
         <p:blipFill>
-          <a:blip xmlns:r="http://schemas.openxmlformats.org/officeDocument/2006/relationships" xmlns:a="http://schemas.openxmlformats.org/drawingml/2006/main" r:embed="Rbae54a9ee57343ad"/>
+          <a:blip xmlns:r="http://schemas.openxmlformats.org/officeDocument/2006/relationships" xmlns:a="http://schemas.openxmlformats.org/drawingml/2006/main" r:embed="Rb23dcefe28234056"/>
           <a:stretch xmlns:a="http://schemas.openxmlformats.org/drawingml/2006/main"/>
         </p:blipFill>
         <p:spPr>
@@ -2547,7 +2547,7 @@
           <p:cNvPr id="5" name="">
             <a:extLst xmlns:a="http://schemas.openxmlformats.org/drawingml/2006/main">
               <a:ext uri="{FF2B5EF4-FFF2-40B4-BE49-F238E27FC236}">
-                <a16:creationId xmlns:a16="http://schemas.microsoft.com/office/drawing/2014/main" id="{F8304E18-FDDD-40E9-9858-C2FA931048DD}"/>
+                <a16:creationId xmlns:a16="http://schemas.microsoft.com/office/drawing/2014/main" id="{082A5F8D-22D6-41DF-B44F-D0ED03DC18A7}"/>
               </a:ext>
             </a:extLst>
           </p:cNvPr>
@@ -2599,7 +2599,7 @@
           <p:cNvPr id="6" name="">
             <a:extLst xmlns:a="http://schemas.openxmlformats.org/drawingml/2006/main">
               <a:ext uri="{FF2B5EF4-FFF2-40B4-BE49-F238E27FC236}">
-                <a16:creationId xmlns:a16="http://schemas.microsoft.com/office/drawing/2014/main" id="{A47842DA-A8DF-49DD-A16F-C42563C45AA8}"/>
+                <a16:creationId xmlns:a16="http://schemas.microsoft.com/office/drawing/2014/main" id="{DAC053CB-0179-412C-A28B-BDD6AA8EDB25}"/>
               </a:ext>
             </a:extLst>
           </p:cNvPr>
@@ -2655,7 +2655,7 @@
           <p:nvPr/>
         </p:nvPicPr>
         <p:blipFill>
-          <a:blip xmlns:r="http://schemas.openxmlformats.org/officeDocument/2006/relationships" xmlns:a="http://schemas.openxmlformats.org/drawingml/2006/main" r:embed="Re575cf3ce7694ccf"/>
+          <a:blip xmlns:r="http://schemas.openxmlformats.org/officeDocument/2006/relationships" xmlns:a="http://schemas.openxmlformats.org/drawingml/2006/main" r:embed="R6f274283a10d4770"/>
           <a:stretch xmlns:a="http://schemas.openxmlformats.org/drawingml/2006/main"/>
         </p:blipFill>
         <p:spPr>
@@ -2673,7 +2673,7 @@
           <p:cNvPr id="8" name="">
             <a:extLst xmlns:a="http://schemas.openxmlformats.org/drawingml/2006/main">
               <a:ext uri="{FF2B5EF4-FFF2-40B4-BE49-F238E27FC236}">
-                <a16:creationId xmlns:a16="http://schemas.microsoft.com/office/drawing/2014/main" id="{E5B43A66-1A3F-4EF5-8D38-9128788FBEE6}"/>
+                <a16:creationId xmlns:a16="http://schemas.microsoft.com/office/drawing/2014/main" id="{B68A4858-56B0-4402-8207-DD2CABCBB37A}"/>
               </a:ext>
             </a:extLst>
           </p:cNvPr>
@@ -2706,7 +2706,7 @@
           <p:cNvPr id="9" name="">
             <a:extLst xmlns:a="http://schemas.openxmlformats.org/drawingml/2006/main">
               <a:ext uri="{FF2B5EF4-FFF2-40B4-BE49-F238E27FC236}">
-                <a16:creationId xmlns:a16="http://schemas.microsoft.com/office/drawing/2014/main" id="{D15D01FC-1E08-4322-934D-464A191B7817}"/>
+                <a16:creationId xmlns:a16="http://schemas.microsoft.com/office/drawing/2014/main" id="{31AE78B2-DDCB-4392-8AC6-422ECBC4B40B}"/>
               </a:ext>
             </a:extLst>
           </p:cNvPr>
@@ -2758,7 +2758,7 @@
           <p:cNvPr id="10" name="">
             <a:extLst xmlns:a="http://schemas.openxmlformats.org/drawingml/2006/main">
               <a:ext uri="{FF2B5EF4-FFF2-40B4-BE49-F238E27FC236}">
-                <a16:creationId xmlns:a16="http://schemas.microsoft.com/office/drawing/2014/main" id="{8F2C8C11-B1F8-44B5-BD25-3DB519A8569A}"/>
+                <a16:creationId xmlns:a16="http://schemas.microsoft.com/office/drawing/2014/main" id="{DF0458DE-07FE-427D-BB88-529770D4C465}"/>
               </a:ext>
             </a:extLst>
           </p:cNvPr>
@@ -2810,7 +2810,7 @@
           <p:cNvPr id="11" name="">
             <a:extLst xmlns:a="http://schemas.openxmlformats.org/drawingml/2006/main">
               <a:ext uri="{FF2B5EF4-FFF2-40B4-BE49-F238E27FC236}">
-                <a16:creationId xmlns:a16="http://schemas.microsoft.com/office/drawing/2014/main" id="{C5D99690-F8EB-4EC1-941D-25CF3C090553}"/>
+                <a16:creationId xmlns:a16="http://schemas.microsoft.com/office/drawing/2014/main" id="{EE1BB129-DCCE-4D4E-936C-0DFD2D1242BD}"/>
               </a:ext>
             </a:extLst>
           </p:cNvPr>
@@ -2862,7 +2862,7 @@
           <p:cNvPr id="12" name="">
             <a:extLst xmlns:a="http://schemas.openxmlformats.org/drawingml/2006/main">
               <a:ext uri="{FF2B5EF4-FFF2-40B4-BE49-F238E27FC236}">
-                <a16:creationId xmlns:a16="http://schemas.microsoft.com/office/drawing/2014/main" id="{7E66AD68-3D80-45F8-AF64-36BF44E3F567}"/>
+                <a16:creationId xmlns:a16="http://schemas.microsoft.com/office/drawing/2014/main" id="{CCFEE662-7423-4780-85A3-683653400FF3}"/>
               </a:ext>
             </a:extLst>
           </p:cNvPr>
@@ -2914,7 +2914,7 @@
           <p:cNvPr id="13" name="">
             <a:extLst xmlns:a="http://schemas.openxmlformats.org/drawingml/2006/main">
               <a:ext uri="{FF2B5EF4-FFF2-40B4-BE49-F238E27FC236}">
-                <a16:creationId xmlns:a16="http://schemas.microsoft.com/office/drawing/2014/main" id="{104B90C5-F62B-4CA0-AD0E-BC251C9B8A09}"/>
+                <a16:creationId xmlns:a16="http://schemas.microsoft.com/office/drawing/2014/main" id="{0D70C6B0-4638-4ECB-BA9E-66590D0C6DA7}"/>
               </a:ext>
             </a:extLst>
           </p:cNvPr>
@@ -2966,7 +2966,7 @@
           <p:cNvPr id="14" name="">
             <a:extLst xmlns:a="http://schemas.openxmlformats.org/drawingml/2006/main">
               <a:ext uri="{FF2B5EF4-FFF2-40B4-BE49-F238E27FC236}">
-                <a16:creationId xmlns:a16="http://schemas.microsoft.com/office/drawing/2014/main" id="{685A3FD7-E396-428B-B96B-26FEF235376F}"/>
+                <a16:creationId xmlns:a16="http://schemas.microsoft.com/office/drawing/2014/main" id="{951C3A5F-07D9-4B25-B49D-3A1855A0E36D}"/>
               </a:ext>
             </a:extLst>
           </p:cNvPr>
@@ -3018,7 +3018,7 @@
           <p:cNvPr id="15" name="">
             <a:extLst xmlns:a="http://schemas.openxmlformats.org/drawingml/2006/main">
               <a:ext uri="{FF2B5EF4-FFF2-40B4-BE49-F238E27FC236}">
-                <a16:creationId xmlns:a16="http://schemas.microsoft.com/office/drawing/2014/main" id="{2425DB47-7625-45B3-A745-EED0D23B1447}"/>
+                <a16:creationId xmlns:a16="http://schemas.microsoft.com/office/drawing/2014/main" id="{4037F20E-60FA-4312-BCBB-0C8CD63C180F}"/>
               </a:ext>
             </a:extLst>
           </p:cNvPr>
@@ -3070,7 +3070,7 @@
           <p:cNvPr id="16" name="">
             <a:extLst xmlns:a="http://schemas.openxmlformats.org/drawingml/2006/main">
               <a:ext uri="{FF2B5EF4-FFF2-40B4-BE49-F238E27FC236}">
-                <a16:creationId xmlns:a16="http://schemas.microsoft.com/office/drawing/2014/main" id="{B6CD92C2-B5FF-49C1-8A2E-C0E64BDEF476}"/>
+                <a16:creationId xmlns:a16="http://schemas.microsoft.com/office/drawing/2014/main" id="{A085BE7F-0D3B-4CBE-80D5-CB97FC5F3C99}"/>
               </a:ext>
             </a:extLst>
           </p:cNvPr>
@@ -3120,7 +3120,7 @@
     </p:spTree>
     <p:extLst>
       <p:ext uri="{BB962C8B-B14F-4D97-AF65-F5344CB8AC3E}">
-        <p14:creationId xmlns:p14="http://schemas.microsoft.com/office/powerpoint/2010/main" val="312092977"/>
+        <p14:creationId xmlns:p14="http://schemas.microsoft.com/office/powerpoint/2010/main" val="783642290"/>
       </p:ext>
     </p:extLst>
   </p:cSld>
@@ -3151,7 +3151,7 @@
           <p:cNvPr id="103" name="">
             <a:extLst xmlns:a="http://schemas.openxmlformats.org/drawingml/2006/main">
               <a:ext uri="{FF2B5EF4-FFF2-40B4-BE49-F238E27FC236}">
-                <a16:creationId xmlns:a16="http://schemas.microsoft.com/office/drawing/2014/main" id="{CB02F858-950C-440E-A1F7-3D1EB1BCB199}"/>
+                <a16:creationId xmlns:a16="http://schemas.microsoft.com/office/drawing/2014/main" id="{41FE3B66-33BC-4010-9A27-D5042B32CA2C}"/>
               </a:ext>
             </a:extLst>
           </p:cNvPr>
@@ -3184,7 +3184,7 @@
           <p:cNvPr id="2" name="">
             <a:extLst xmlns:a="http://schemas.openxmlformats.org/drawingml/2006/main">
               <a:ext uri="{FF2B5EF4-FFF2-40B4-BE49-F238E27FC236}">
-                <a16:creationId xmlns:a16="http://schemas.microsoft.com/office/drawing/2014/main" id="{1493B34D-D37E-44CE-89F7-879E7CE7A7EE}"/>
+                <a16:creationId xmlns:a16="http://schemas.microsoft.com/office/drawing/2014/main" id="{DDF900E0-92B7-4E06-8BCC-5FB9E323BBF2}"/>
               </a:ext>
             </a:extLst>
           </p:cNvPr>
@@ -3215,7 +3215,7 @@
           <p:cNvPr id="3" name="">
             <a:extLst xmlns:a="http://schemas.openxmlformats.org/drawingml/2006/main">
               <a:ext uri="{FF2B5EF4-FFF2-40B4-BE49-F238E27FC236}">
-                <a16:creationId xmlns:a16="http://schemas.microsoft.com/office/drawing/2014/main" id="{AEE2FB8B-50C3-48B9-8901-FA025CB95C68}"/>
+                <a16:creationId xmlns:a16="http://schemas.microsoft.com/office/drawing/2014/main" id="{6B11ADC8-2C12-49B7-9992-A45D07B04559}"/>
               </a:ext>
             </a:extLst>
           </p:cNvPr>
@@ -3267,7 +3267,7 @@
           <p:cNvPr id="4" name="">
             <a:extLst xmlns:a="http://schemas.openxmlformats.org/drawingml/2006/main">
               <a:ext uri="{FF2B5EF4-FFF2-40B4-BE49-F238E27FC236}">
-                <a16:creationId xmlns:a16="http://schemas.microsoft.com/office/drawing/2014/main" id="{5593B5A3-E00D-45D4-A26B-6924655D60C4}"/>
+                <a16:creationId xmlns:a16="http://schemas.microsoft.com/office/drawing/2014/main" id="{DCAF2783-66B6-4F53-AE2C-F862F1DF6EB4}"/>
               </a:ext>
             </a:extLst>
           </p:cNvPr>
@@ -3319,7 +3319,7 @@
           <p:cNvPr id="5" name="">
             <a:extLst xmlns:a="http://schemas.openxmlformats.org/drawingml/2006/main">
               <a:ext uri="{FF2B5EF4-FFF2-40B4-BE49-F238E27FC236}">
-                <a16:creationId xmlns:a16="http://schemas.microsoft.com/office/drawing/2014/main" id="{7714004A-E270-4AFB-924C-1900797B715F}"/>
+                <a16:creationId xmlns:a16="http://schemas.microsoft.com/office/drawing/2014/main" id="{D77DFF1D-7522-403C-9FD0-8589EE092D56}"/>
               </a:ext>
             </a:extLst>
           </p:cNvPr>
@@ -3354,7 +3354,7 @@
           <p:nvPr/>
         </p:nvPicPr>
         <p:blipFill>
-          <a:blip xmlns:r="http://schemas.openxmlformats.org/officeDocument/2006/relationships" xmlns:a="http://schemas.openxmlformats.org/drawingml/2006/main" r:embed="R285e497c159d4568"/>
+          <a:blip xmlns:r="http://schemas.openxmlformats.org/officeDocument/2006/relationships" xmlns:a="http://schemas.openxmlformats.org/drawingml/2006/main" r:embed="Rdebedb03641c48fa"/>
           <a:stretch xmlns:a="http://schemas.openxmlformats.org/drawingml/2006/main"/>
         </p:blipFill>
         <p:spPr>
@@ -3372,7 +3372,7 @@
           <p:cNvPr id="7" name="">
             <a:extLst xmlns:a="http://schemas.openxmlformats.org/drawingml/2006/main">
               <a:ext uri="{FF2B5EF4-FFF2-40B4-BE49-F238E27FC236}">
-                <a16:creationId xmlns:a16="http://schemas.microsoft.com/office/drawing/2014/main" id="{23CE7848-3901-499E-B530-7EFA268CC756}"/>
+                <a16:creationId xmlns:a16="http://schemas.microsoft.com/office/drawing/2014/main" id="{2C6A23E9-6AE4-41D7-94EF-59B229C1053C}"/>
               </a:ext>
             </a:extLst>
           </p:cNvPr>
@@ -3424,7 +3424,7 @@
           <p:cNvPr id="8" name="">
             <a:extLst xmlns:a="http://schemas.openxmlformats.org/drawingml/2006/main">
               <a:ext uri="{FF2B5EF4-FFF2-40B4-BE49-F238E27FC236}">
-                <a16:creationId xmlns:a16="http://schemas.microsoft.com/office/drawing/2014/main" id="{11404C9C-E5E3-4723-9E28-BE6E0C6D9996}"/>
+                <a16:creationId xmlns:a16="http://schemas.microsoft.com/office/drawing/2014/main" id="{86C0566E-D1AC-47BF-B071-825ADC94E76C}"/>
               </a:ext>
             </a:extLst>
           </p:cNvPr>
@@ -3476,7 +3476,7 @@
           <p:cNvPr id="9" name="">
             <a:extLst xmlns:a="http://schemas.openxmlformats.org/drawingml/2006/main">
               <a:ext uri="{FF2B5EF4-FFF2-40B4-BE49-F238E27FC236}">
-                <a16:creationId xmlns:a16="http://schemas.microsoft.com/office/drawing/2014/main" id="{80182CC0-183F-4D0A-9B6F-76BD16784845}"/>
+                <a16:creationId xmlns:a16="http://schemas.microsoft.com/office/drawing/2014/main" id="{535015DB-5140-4D46-8037-7F1DC88666E0}"/>
               </a:ext>
             </a:extLst>
           </p:cNvPr>
@@ -3528,7 +3528,7 @@
           <p:cNvPr id="10" name="">
             <a:extLst xmlns:a="http://schemas.openxmlformats.org/drawingml/2006/main">
               <a:ext uri="{FF2B5EF4-FFF2-40B4-BE49-F238E27FC236}">
-                <a16:creationId xmlns:a16="http://schemas.microsoft.com/office/drawing/2014/main" id="{4B16C5F0-E6CA-42F6-801C-6EE8824CB9A5}"/>
+                <a16:creationId xmlns:a16="http://schemas.microsoft.com/office/drawing/2014/main" id="{20E3206E-5446-4D93-9827-FDAC6452CFF0}"/>
               </a:ext>
             </a:extLst>
           </p:cNvPr>
@@ -3580,7 +3580,7 @@
           <p:cNvPr id="11" name="">
             <a:extLst xmlns:a="http://schemas.openxmlformats.org/drawingml/2006/main">
               <a:ext uri="{FF2B5EF4-FFF2-40B4-BE49-F238E27FC236}">
-                <a16:creationId xmlns:a16="http://schemas.microsoft.com/office/drawing/2014/main" id="{47B3C176-A5E0-47D4-B08C-CB43EABA44FB}"/>
+                <a16:creationId xmlns:a16="http://schemas.microsoft.com/office/drawing/2014/main" id="{5031EAD3-3A62-4A4E-9B33-E05B3D830B34}"/>
               </a:ext>
             </a:extLst>
           </p:cNvPr>
@@ -3611,7 +3611,7 @@
           <p:cNvPr id="12" name="">
             <a:extLst xmlns:a="http://schemas.openxmlformats.org/drawingml/2006/main">
               <a:ext uri="{FF2B5EF4-FFF2-40B4-BE49-F238E27FC236}">
-                <a16:creationId xmlns:a16="http://schemas.microsoft.com/office/drawing/2014/main" id="{67F80FC6-4336-4E57-BAC7-A8B828D8ABFC}"/>
+                <a16:creationId xmlns:a16="http://schemas.microsoft.com/office/drawing/2014/main" id="{AFEE07E7-D45E-4F98-9707-80D41826723A}"/>
               </a:ext>
             </a:extLst>
           </p:cNvPr>
@@ -3642,7 +3642,7 @@
           <p:cNvPr id="13" name="">
             <a:extLst xmlns:a="http://schemas.openxmlformats.org/drawingml/2006/main">
               <a:ext uri="{FF2B5EF4-FFF2-40B4-BE49-F238E27FC236}">
-                <a16:creationId xmlns:a16="http://schemas.microsoft.com/office/drawing/2014/main" id="{6A80F15D-C835-4853-8BBE-9AF83E665B9D}"/>
+                <a16:creationId xmlns:a16="http://schemas.microsoft.com/office/drawing/2014/main" id="{786C4F13-C0A6-4927-9253-636EC42B99EA}"/>
               </a:ext>
             </a:extLst>
           </p:cNvPr>
@@ -3694,7 +3694,7 @@
           <p:cNvPr id="14" name="">
             <a:extLst xmlns:a="http://schemas.openxmlformats.org/drawingml/2006/main">
               <a:ext uri="{FF2B5EF4-FFF2-40B4-BE49-F238E27FC236}">
-                <a16:creationId xmlns:a16="http://schemas.microsoft.com/office/drawing/2014/main" id="{6197E77E-F255-4AD7-B256-1B85A5DC77AF}"/>
+                <a16:creationId xmlns:a16="http://schemas.microsoft.com/office/drawing/2014/main" id="{02DE5EEB-23FB-4541-BB17-6A7BE12CB6D0}"/>
               </a:ext>
             </a:extLst>
           </p:cNvPr>
@@ -3746,7 +3746,7 @@
           <p:cNvPr id="15" name="">
             <a:extLst xmlns:a="http://schemas.openxmlformats.org/drawingml/2006/main">
               <a:ext uri="{FF2B5EF4-FFF2-40B4-BE49-F238E27FC236}">
-                <a16:creationId xmlns:a16="http://schemas.microsoft.com/office/drawing/2014/main" id="{E226BD43-ABF3-468E-BCC5-C16060AD4175}"/>
+                <a16:creationId xmlns:a16="http://schemas.microsoft.com/office/drawing/2014/main" id="{56770C1E-2275-4481-9270-36F41D29100B}"/>
               </a:ext>
             </a:extLst>
           </p:cNvPr>
@@ -3798,7 +3798,7 @@
           <p:cNvPr id="16" name="">
             <a:extLst xmlns:a="http://schemas.openxmlformats.org/drawingml/2006/main">
               <a:ext uri="{FF2B5EF4-FFF2-40B4-BE49-F238E27FC236}">
-                <a16:creationId xmlns:a16="http://schemas.microsoft.com/office/drawing/2014/main" id="{8A92BA9D-9B85-4991-8D90-8E8068C08F7C}"/>
+                <a16:creationId xmlns:a16="http://schemas.microsoft.com/office/drawing/2014/main" id="{24F2C7CC-22EC-4FF9-B482-E6680FCD1C5F}"/>
               </a:ext>
             </a:extLst>
           </p:cNvPr>
@@ -3850,7 +3850,7 @@
           <p:cNvPr id="17" name="">
             <a:extLst xmlns:a="http://schemas.openxmlformats.org/drawingml/2006/main">
               <a:ext uri="{FF2B5EF4-FFF2-40B4-BE49-F238E27FC236}">
-                <a16:creationId xmlns:a16="http://schemas.microsoft.com/office/drawing/2014/main" id="{C321C764-7231-459C-90B8-AECDC66CE749}"/>
+                <a16:creationId xmlns:a16="http://schemas.microsoft.com/office/drawing/2014/main" id="{0E994844-2EF0-4E0B-9CFE-220A2E61767E}"/>
               </a:ext>
             </a:extLst>
           </p:cNvPr>
@@ -3902,7 +3902,7 @@
           <p:cNvPr id="18" name="">
             <a:extLst xmlns:a="http://schemas.openxmlformats.org/drawingml/2006/main">
               <a:ext uri="{FF2B5EF4-FFF2-40B4-BE49-F238E27FC236}">
-                <a16:creationId xmlns:a16="http://schemas.microsoft.com/office/drawing/2014/main" id="{A33051EB-3739-494C-AE3D-929BA74BFAFD}"/>
+                <a16:creationId xmlns:a16="http://schemas.microsoft.com/office/drawing/2014/main" id="{D0C254B3-E566-4F1E-915A-AB345B2C1CFE}"/>
               </a:ext>
             </a:extLst>
           </p:cNvPr>
@@ -3933,7 +3933,7 @@
           <p:cNvPr id="19" name="">
             <a:extLst xmlns:a="http://schemas.openxmlformats.org/drawingml/2006/main">
               <a:ext uri="{FF2B5EF4-FFF2-40B4-BE49-F238E27FC236}">
-                <a16:creationId xmlns:a16="http://schemas.microsoft.com/office/drawing/2014/main" id="{B4DE4006-40AE-4116-BD5C-A8BD97B0447C}"/>
+                <a16:creationId xmlns:a16="http://schemas.microsoft.com/office/drawing/2014/main" id="{7F38E10E-0686-4F3C-91B4-9DEA3ED064EF}"/>
               </a:ext>
             </a:extLst>
           </p:cNvPr>
@@ -3964,7 +3964,7 @@
           <p:cNvPr id="20" name="">
             <a:extLst xmlns:a="http://schemas.openxmlformats.org/drawingml/2006/main">
               <a:ext uri="{FF2B5EF4-FFF2-40B4-BE49-F238E27FC236}">
-                <a16:creationId xmlns:a16="http://schemas.microsoft.com/office/drawing/2014/main" id="{47B98A1B-DFB4-41A5-9190-F77DFAD60DB4}"/>
+                <a16:creationId xmlns:a16="http://schemas.microsoft.com/office/drawing/2014/main" id="{6B25E7D5-7461-498A-A2F6-5A6E8FF253EB}"/>
               </a:ext>
             </a:extLst>
           </p:cNvPr>
@@ -4016,7 +4016,7 @@
           <p:cNvPr id="21" name="">
             <a:extLst xmlns:a="http://schemas.openxmlformats.org/drawingml/2006/main">
               <a:ext uri="{FF2B5EF4-FFF2-40B4-BE49-F238E27FC236}">
-                <a16:creationId xmlns:a16="http://schemas.microsoft.com/office/drawing/2014/main" id="{6D63A31B-1BA4-461C-8D4A-F8A400B5398E}"/>
+                <a16:creationId xmlns:a16="http://schemas.microsoft.com/office/drawing/2014/main" id="{FB4D6032-16B8-4E14-896F-63297B4B4B73}"/>
               </a:ext>
             </a:extLst>
           </p:cNvPr>
@@ -4068,7 +4068,7 @@
           <p:cNvPr id="22" name="">
             <a:extLst xmlns:a="http://schemas.openxmlformats.org/drawingml/2006/main">
               <a:ext uri="{FF2B5EF4-FFF2-40B4-BE49-F238E27FC236}">
-                <a16:creationId xmlns:a16="http://schemas.microsoft.com/office/drawing/2014/main" id="{468585F6-31EE-4E81-AA9B-C9AEA5ADF43E}"/>
+                <a16:creationId xmlns:a16="http://schemas.microsoft.com/office/drawing/2014/main" id="{6A17AC04-AAC6-4DC4-805E-674F695A393F}"/>
               </a:ext>
             </a:extLst>
           </p:cNvPr>
@@ -4120,7 +4120,7 @@
           <p:cNvPr id="23" name="">
             <a:extLst xmlns:a="http://schemas.openxmlformats.org/drawingml/2006/main">
               <a:ext uri="{FF2B5EF4-FFF2-40B4-BE49-F238E27FC236}">
-                <a16:creationId xmlns:a16="http://schemas.microsoft.com/office/drawing/2014/main" id="{2DD04532-9703-4EF6-B466-6030F1D9B339}"/>
+                <a16:creationId xmlns:a16="http://schemas.microsoft.com/office/drawing/2014/main" id="{EE696435-866E-4BB5-9FEA-3CF116C38CA8}"/>
               </a:ext>
             </a:extLst>
           </p:cNvPr>
@@ -4172,7 +4172,7 @@
           <p:cNvPr id="24" name="">
             <a:extLst xmlns:a="http://schemas.openxmlformats.org/drawingml/2006/main">
               <a:ext uri="{FF2B5EF4-FFF2-40B4-BE49-F238E27FC236}">
-                <a16:creationId xmlns:a16="http://schemas.microsoft.com/office/drawing/2014/main" id="{5164CEC2-18C8-4FFD-A121-755D12A57152}"/>
+                <a16:creationId xmlns:a16="http://schemas.microsoft.com/office/drawing/2014/main" id="{BDE14CD0-2C24-46DE-BDEA-C7F58566F0F9}"/>
               </a:ext>
             </a:extLst>
           </p:cNvPr>
@@ -4224,7 +4224,7 @@
           <p:cNvPr id="25" name="">
             <a:extLst xmlns:a="http://schemas.openxmlformats.org/drawingml/2006/main">
               <a:ext uri="{FF2B5EF4-FFF2-40B4-BE49-F238E27FC236}">
-                <a16:creationId xmlns:a16="http://schemas.microsoft.com/office/drawing/2014/main" id="{2A77B3B3-26E7-4B9C-891E-D85CB1583833}"/>
+                <a16:creationId xmlns:a16="http://schemas.microsoft.com/office/drawing/2014/main" id="{F52DEB92-E0BF-4075-8B03-8C8A6FB9C6D2}"/>
               </a:ext>
             </a:extLst>
           </p:cNvPr>
@@ -4255,7 +4255,7 @@
           <p:cNvPr id="26" name="">
             <a:extLst xmlns:a="http://schemas.openxmlformats.org/drawingml/2006/main">
               <a:ext uri="{FF2B5EF4-FFF2-40B4-BE49-F238E27FC236}">
-                <a16:creationId xmlns:a16="http://schemas.microsoft.com/office/drawing/2014/main" id="{F4E2B169-A2C8-4D16-B009-8E40D2CAF2A6}"/>
+                <a16:creationId xmlns:a16="http://schemas.microsoft.com/office/drawing/2014/main" id="{679937BD-9DF6-417C-BE39-A638C33A004D}"/>
               </a:ext>
             </a:extLst>
           </p:cNvPr>
@@ -4307,7 +4307,7 @@
           <p:cNvPr id="27" name="">
             <a:extLst xmlns:a="http://schemas.openxmlformats.org/drawingml/2006/main">
               <a:ext uri="{FF2B5EF4-FFF2-40B4-BE49-F238E27FC236}">
-                <a16:creationId xmlns:a16="http://schemas.microsoft.com/office/drawing/2014/main" id="{E8571C7E-7293-4051-A7BF-201B998704C1}"/>
+                <a16:creationId xmlns:a16="http://schemas.microsoft.com/office/drawing/2014/main" id="{E90F65CD-3501-47EE-BA8D-0D70E7327EE7}"/>
               </a:ext>
             </a:extLst>
           </p:cNvPr>
@@ -4359,7 +4359,7 @@
           <p:cNvPr id="28" name="">
             <a:extLst xmlns:a="http://schemas.openxmlformats.org/drawingml/2006/main">
               <a:ext uri="{FF2B5EF4-FFF2-40B4-BE49-F238E27FC236}">
-                <a16:creationId xmlns:a16="http://schemas.microsoft.com/office/drawing/2014/main" id="{11281AB4-0B2E-4D6E-BACB-776092986BA7}"/>
+                <a16:creationId xmlns:a16="http://schemas.microsoft.com/office/drawing/2014/main" id="{C591DE45-7F89-4352-BD30-DF651CA11BD8}"/>
               </a:ext>
             </a:extLst>
           </p:cNvPr>
@@ -4411,7 +4411,7 @@
           <p:cNvPr id="29" name="">
             <a:extLst xmlns:a="http://schemas.openxmlformats.org/drawingml/2006/main">
               <a:ext uri="{FF2B5EF4-FFF2-40B4-BE49-F238E27FC236}">
-                <a16:creationId xmlns:a16="http://schemas.microsoft.com/office/drawing/2014/main" id="{B23717CE-E2B8-44DC-BE7D-959A9F3DF523}"/>
+                <a16:creationId xmlns:a16="http://schemas.microsoft.com/office/drawing/2014/main" id="{B71146AA-42C3-4851-9604-19E275F349D2}"/>
               </a:ext>
             </a:extLst>
           </p:cNvPr>
@@ -4463,7 +4463,7 @@
           <p:cNvPr id="30" name="">
             <a:extLst xmlns:a="http://schemas.openxmlformats.org/drawingml/2006/main">
               <a:ext uri="{FF2B5EF4-FFF2-40B4-BE49-F238E27FC236}">
-                <a16:creationId xmlns:a16="http://schemas.microsoft.com/office/drawing/2014/main" id="{B4ECCD6F-238F-4857-90D2-47CE461AF381}"/>
+                <a16:creationId xmlns:a16="http://schemas.microsoft.com/office/drawing/2014/main" id="{1AC1C036-4648-4386-99D6-0477FDFB5824}"/>
               </a:ext>
             </a:extLst>
           </p:cNvPr>
@@ -4515,7 +4515,7 @@
           <p:cNvPr id="31" name="">
             <a:extLst xmlns:a="http://schemas.openxmlformats.org/drawingml/2006/main">
               <a:ext uri="{FF2B5EF4-FFF2-40B4-BE49-F238E27FC236}">
-                <a16:creationId xmlns:a16="http://schemas.microsoft.com/office/drawing/2014/main" id="{762F3327-8E3B-4943-9513-B32C75F5FFDA}"/>
+                <a16:creationId xmlns:a16="http://schemas.microsoft.com/office/drawing/2014/main" id="{0DEE0223-E381-4523-81E2-F6148F058349}"/>
               </a:ext>
             </a:extLst>
           </p:cNvPr>
@@ -4546,7 +4546,7 @@
           <p:cNvPr id="32" name="">
             <a:extLst xmlns:a="http://schemas.openxmlformats.org/drawingml/2006/main">
               <a:ext uri="{FF2B5EF4-FFF2-40B4-BE49-F238E27FC236}">
-                <a16:creationId xmlns:a16="http://schemas.microsoft.com/office/drawing/2014/main" id="{7A354990-2FDB-41DA-BFFD-2A7FD0BD8589}"/>
+                <a16:creationId xmlns:a16="http://schemas.microsoft.com/office/drawing/2014/main" id="{72D3A95A-BAAB-4132-B216-79FC37C3F46F}"/>
               </a:ext>
             </a:extLst>
           </p:cNvPr>
@@ -4577,7 +4577,7 @@
           <p:cNvPr id="33" name="">
             <a:extLst xmlns:a="http://schemas.openxmlformats.org/drawingml/2006/main">
               <a:ext uri="{FF2B5EF4-FFF2-40B4-BE49-F238E27FC236}">
-                <a16:creationId xmlns:a16="http://schemas.microsoft.com/office/drawing/2014/main" id="{4F693D39-007A-46A3-88CD-C0E962DBFBCE}"/>
+                <a16:creationId xmlns:a16="http://schemas.microsoft.com/office/drawing/2014/main" id="{4594A724-3BA2-4AB5-A1A5-653F5C8C9D83}"/>
               </a:ext>
             </a:extLst>
           </p:cNvPr>
@@ -4629,7 +4629,7 @@
           <p:cNvPr id="34" name="">
             <a:extLst xmlns:a="http://schemas.openxmlformats.org/drawingml/2006/main">
               <a:ext uri="{FF2B5EF4-FFF2-40B4-BE49-F238E27FC236}">
-                <a16:creationId xmlns:a16="http://schemas.microsoft.com/office/drawing/2014/main" id="{D0BF9B0D-B554-49DB-85C6-189672AE0116}"/>
+                <a16:creationId xmlns:a16="http://schemas.microsoft.com/office/drawing/2014/main" id="{FA830F38-4105-48EC-98D7-D6F120F6C619}"/>
               </a:ext>
             </a:extLst>
           </p:cNvPr>
@@ -4681,7 +4681,7 @@
           <p:cNvPr id="35" name="">
             <a:extLst xmlns:a="http://schemas.openxmlformats.org/drawingml/2006/main">
               <a:ext uri="{FF2B5EF4-FFF2-40B4-BE49-F238E27FC236}">
-                <a16:creationId xmlns:a16="http://schemas.microsoft.com/office/drawing/2014/main" id="{3A75F725-0FD8-456E-823F-5FAF87545D29}"/>
+                <a16:creationId xmlns:a16="http://schemas.microsoft.com/office/drawing/2014/main" id="{9721F5D8-0FCE-4A5D-B6C7-4AE0F12C16F1}"/>
               </a:ext>
             </a:extLst>
           </p:cNvPr>
@@ -4733,7 +4733,7 @@
           <p:cNvPr id="36" name="">
             <a:extLst xmlns:a="http://schemas.openxmlformats.org/drawingml/2006/main">
               <a:ext uri="{FF2B5EF4-FFF2-40B4-BE49-F238E27FC236}">
-                <a16:creationId xmlns:a16="http://schemas.microsoft.com/office/drawing/2014/main" id="{FB7BDDC7-F6EA-4EEA-8F3E-0AF6E87670FF}"/>
+                <a16:creationId xmlns:a16="http://schemas.microsoft.com/office/drawing/2014/main" id="{A5C8D656-F2BD-41A1-9665-6C7E522B28FF}"/>
               </a:ext>
             </a:extLst>
           </p:cNvPr>
@@ -4785,7 +4785,7 @@
           <p:cNvPr id="37" name="">
             <a:extLst xmlns:a="http://schemas.openxmlformats.org/drawingml/2006/main">
               <a:ext uri="{FF2B5EF4-FFF2-40B4-BE49-F238E27FC236}">
-                <a16:creationId xmlns:a16="http://schemas.microsoft.com/office/drawing/2014/main" id="{78D228E4-F451-422E-97B4-9F2FB9B6654F}"/>
+                <a16:creationId xmlns:a16="http://schemas.microsoft.com/office/drawing/2014/main" id="{D8B8F3D5-7A72-4C34-A930-5A88A8B9D3BD}"/>
               </a:ext>
             </a:extLst>
           </p:cNvPr>
@@ -4837,7 +4837,7 @@
           <p:cNvPr id="38" name="">
             <a:extLst xmlns:a="http://schemas.openxmlformats.org/drawingml/2006/main">
               <a:ext uri="{FF2B5EF4-FFF2-40B4-BE49-F238E27FC236}">
-                <a16:creationId xmlns:a16="http://schemas.microsoft.com/office/drawing/2014/main" id="{45706BCE-61E2-4A97-9D9C-F6E329911740}"/>
+                <a16:creationId xmlns:a16="http://schemas.microsoft.com/office/drawing/2014/main" id="{D3439C1D-7216-4CCF-90C9-769BEC3F0BF0}"/>
               </a:ext>
             </a:extLst>
           </p:cNvPr>
@@ -4868,7 +4868,7 @@
           <p:cNvPr id="39" name="">
             <a:extLst xmlns:a="http://schemas.openxmlformats.org/drawingml/2006/main">
               <a:ext uri="{FF2B5EF4-FFF2-40B4-BE49-F238E27FC236}">
-                <a16:creationId xmlns:a16="http://schemas.microsoft.com/office/drawing/2014/main" id="{61399035-C10C-4CF9-9C54-8BA1CBDF80E3}"/>
+                <a16:creationId xmlns:a16="http://schemas.microsoft.com/office/drawing/2014/main" id="{55EBA7DD-3520-4BE7-9B7F-14AEEDED7852}"/>
               </a:ext>
             </a:extLst>
           </p:cNvPr>
@@ -4920,7 +4920,7 @@
           <p:cNvPr id="40" name="">
             <a:extLst xmlns:a="http://schemas.openxmlformats.org/drawingml/2006/main">
               <a:ext uri="{FF2B5EF4-FFF2-40B4-BE49-F238E27FC236}">
-                <a16:creationId xmlns:a16="http://schemas.microsoft.com/office/drawing/2014/main" id="{13E8C7AE-8ECE-4BA7-B9E4-C3906F7513E2}"/>
+                <a16:creationId xmlns:a16="http://schemas.microsoft.com/office/drawing/2014/main" id="{9992FA59-CDB1-48FE-8909-A93E50AB841C}"/>
               </a:ext>
             </a:extLst>
           </p:cNvPr>
@@ -4972,7 +4972,7 @@
           <p:cNvPr id="41" name="">
             <a:extLst xmlns:a="http://schemas.openxmlformats.org/drawingml/2006/main">
               <a:ext uri="{FF2B5EF4-FFF2-40B4-BE49-F238E27FC236}">
-                <a16:creationId xmlns:a16="http://schemas.microsoft.com/office/drawing/2014/main" id="{D05A627C-89EF-4CCA-B9DD-9D0F0C6556CB}"/>
+                <a16:creationId xmlns:a16="http://schemas.microsoft.com/office/drawing/2014/main" id="{43E4C49C-174E-4077-840A-1A5438B23662}"/>
               </a:ext>
             </a:extLst>
           </p:cNvPr>
@@ -5024,7 +5024,7 @@
           <p:cNvPr id="42" name="">
             <a:extLst xmlns:a="http://schemas.openxmlformats.org/drawingml/2006/main">
               <a:ext uri="{FF2B5EF4-FFF2-40B4-BE49-F238E27FC236}">
-                <a16:creationId xmlns:a16="http://schemas.microsoft.com/office/drawing/2014/main" id="{F23D73DC-8F33-4D97-911D-0A8DBEBEA4D2}"/>
+                <a16:creationId xmlns:a16="http://schemas.microsoft.com/office/drawing/2014/main" id="{2E5EC4BA-A118-4F88-B9BD-760634B92838}"/>
               </a:ext>
             </a:extLst>
           </p:cNvPr>
@@ -5076,7 +5076,7 @@
           <p:cNvPr id="43" name="">
             <a:extLst xmlns:a="http://schemas.openxmlformats.org/drawingml/2006/main">
               <a:ext uri="{FF2B5EF4-FFF2-40B4-BE49-F238E27FC236}">
-                <a16:creationId xmlns:a16="http://schemas.microsoft.com/office/drawing/2014/main" id="{CFAB3154-7EBE-4F8B-8720-83F79F203293}"/>
+                <a16:creationId xmlns:a16="http://schemas.microsoft.com/office/drawing/2014/main" id="{2D8D86B4-5F23-4549-880E-1AFB0B68BC82}"/>
               </a:ext>
             </a:extLst>
           </p:cNvPr>
@@ -5128,7 +5128,7 @@
           <p:cNvPr id="44" name="">
             <a:extLst xmlns:a="http://schemas.openxmlformats.org/drawingml/2006/main">
               <a:ext uri="{FF2B5EF4-FFF2-40B4-BE49-F238E27FC236}">
-                <a16:creationId xmlns:a16="http://schemas.microsoft.com/office/drawing/2014/main" id="{47DF9DEE-D4E1-443E-9EAE-D984A13EF57F}"/>
+                <a16:creationId xmlns:a16="http://schemas.microsoft.com/office/drawing/2014/main" id="{89C78B85-0DB1-489E-B532-B744A86215C3}"/>
               </a:ext>
             </a:extLst>
           </p:cNvPr>
@@ -5159,7 +5159,7 @@
           <p:cNvPr id="45" name="">
             <a:extLst xmlns:a="http://schemas.openxmlformats.org/drawingml/2006/main">
               <a:ext uri="{FF2B5EF4-FFF2-40B4-BE49-F238E27FC236}">
-                <a16:creationId xmlns:a16="http://schemas.microsoft.com/office/drawing/2014/main" id="{95E2DEBA-1C33-4E50-AF54-1014DF35FE97}"/>
+                <a16:creationId xmlns:a16="http://schemas.microsoft.com/office/drawing/2014/main" id="{29D88147-BEAC-4F50-A5EB-9A9C24309C04}"/>
               </a:ext>
             </a:extLst>
           </p:cNvPr>
@@ -5190,7 +5190,7 @@
           <p:cNvPr id="46" name="">
             <a:extLst xmlns:a="http://schemas.openxmlformats.org/drawingml/2006/main">
               <a:ext uri="{FF2B5EF4-FFF2-40B4-BE49-F238E27FC236}">
-                <a16:creationId xmlns:a16="http://schemas.microsoft.com/office/drawing/2014/main" id="{558BF399-1CA0-4A9A-A432-7EBD927C7B65}"/>
+                <a16:creationId xmlns:a16="http://schemas.microsoft.com/office/drawing/2014/main" id="{BDCFE94C-D24D-4966-AF37-74582567284B}"/>
               </a:ext>
             </a:extLst>
           </p:cNvPr>
@@ -5242,7 +5242,7 @@
           <p:cNvPr id="47" name="">
             <a:extLst xmlns:a="http://schemas.openxmlformats.org/drawingml/2006/main">
               <a:ext uri="{FF2B5EF4-FFF2-40B4-BE49-F238E27FC236}">
-                <a16:creationId xmlns:a16="http://schemas.microsoft.com/office/drawing/2014/main" id="{BCC2EE67-CB33-4442-9078-00E4CB755A68}"/>
+                <a16:creationId xmlns:a16="http://schemas.microsoft.com/office/drawing/2014/main" id="{351A0E29-8B3D-4FD1-A23A-99DDDD12E120}"/>
               </a:ext>
             </a:extLst>
           </p:cNvPr>
@@ -5294,7 +5294,7 @@
           <p:cNvPr id="48" name="">
             <a:extLst xmlns:a="http://schemas.openxmlformats.org/drawingml/2006/main">
               <a:ext uri="{FF2B5EF4-FFF2-40B4-BE49-F238E27FC236}">
-                <a16:creationId xmlns:a16="http://schemas.microsoft.com/office/drawing/2014/main" id="{AABDD975-BEF7-499C-9E76-9CE11947AD1B}"/>
+                <a16:creationId xmlns:a16="http://schemas.microsoft.com/office/drawing/2014/main" id="{07457B34-373B-481E-8817-F3B8132B9AB4}"/>
               </a:ext>
             </a:extLst>
           </p:cNvPr>
@@ -5346,7 +5346,7 @@
           <p:cNvPr id="49" name="">
             <a:extLst xmlns:a="http://schemas.openxmlformats.org/drawingml/2006/main">
               <a:ext uri="{FF2B5EF4-FFF2-40B4-BE49-F238E27FC236}">
-                <a16:creationId xmlns:a16="http://schemas.microsoft.com/office/drawing/2014/main" id="{232BB605-52D5-46D3-960D-4938749496AB}"/>
+                <a16:creationId xmlns:a16="http://schemas.microsoft.com/office/drawing/2014/main" id="{ED95BC6C-22B9-49BD-B78C-E07DDD8906F9}"/>
               </a:ext>
             </a:extLst>
           </p:cNvPr>
@@ -5398,7 +5398,7 @@
           <p:cNvPr id="50" name="">
             <a:extLst xmlns:a="http://schemas.openxmlformats.org/drawingml/2006/main">
               <a:ext uri="{FF2B5EF4-FFF2-40B4-BE49-F238E27FC236}">
-                <a16:creationId xmlns:a16="http://schemas.microsoft.com/office/drawing/2014/main" id="{43929F51-F788-47D4-83AB-728C9F7683FE}"/>
+                <a16:creationId xmlns:a16="http://schemas.microsoft.com/office/drawing/2014/main" id="{CD4B65D1-5859-4FEF-924D-0F4D34BBF7C0}"/>
               </a:ext>
             </a:extLst>
           </p:cNvPr>
@@ -5450,7 +5450,7 @@
           <p:cNvPr id="51" name="">
             <a:extLst xmlns:a="http://schemas.openxmlformats.org/drawingml/2006/main">
               <a:ext uri="{FF2B5EF4-FFF2-40B4-BE49-F238E27FC236}">
-                <a16:creationId xmlns:a16="http://schemas.microsoft.com/office/drawing/2014/main" id="{52CC7B1E-7DBA-4D70-A276-29D1F3403E17}"/>
+                <a16:creationId xmlns:a16="http://schemas.microsoft.com/office/drawing/2014/main" id="{7DA4E767-1B3A-45E7-846D-7429026B77D5}"/>
               </a:ext>
             </a:extLst>
           </p:cNvPr>
@@ -5481,7 +5481,7 @@
           <p:cNvPr id="52" name="">
             <a:extLst xmlns:a="http://schemas.openxmlformats.org/drawingml/2006/main">
               <a:ext uri="{FF2B5EF4-FFF2-40B4-BE49-F238E27FC236}">
-                <a16:creationId xmlns:a16="http://schemas.microsoft.com/office/drawing/2014/main" id="{81F8144C-641D-40DE-8F08-B51CEF4DEC69}"/>
+                <a16:creationId xmlns:a16="http://schemas.microsoft.com/office/drawing/2014/main" id="{6CB8BF79-2C2D-44DF-80EF-35DED821AB84}"/>
               </a:ext>
             </a:extLst>
           </p:cNvPr>
@@ -5533,7 +5533,7 @@
           <p:cNvPr id="53" name="">
             <a:extLst xmlns:a="http://schemas.openxmlformats.org/drawingml/2006/main">
               <a:ext uri="{FF2B5EF4-FFF2-40B4-BE49-F238E27FC236}">
-                <a16:creationId xmlns:a16="http://schemas.microsoft.com/office/drawing/2014/main" id="{2D360735-3178-4313-A60D-B8FA0CCE5603}"/>
+                <a16:creationId xmlns:a16="http://schemas.microsoft.com/office/drawing/2014/main" id="{8D57DBCF-A1C9-47BB-8CC8-3A325621D3F7}"/>
               </a:ext>
             </a:extLst>
           </p:cNvPr>
@@ -5585,7 +5585,7 @@
           <p:cNvPr id="54" name="">
             <a:extLst xmlns:a="http://schemas.openxmlformats.org/drawingml/2006/main">
               <a:ext uri="{FF2B5EF4-FFF2-40B4-BE49-F238E27FC236}">
-                <a16:creationId xmlns:a16="http://schemas.microsoft.com/office/drawing/2014/main" id="{68EABC88-0174-4B3B-B815-411E7BCD1FC7}"/>
+                <a16:creationId xmlns:a16="http://schemas.microsoft.com/office/drawing/2014/main" id="{981A1D57-F65D-43C4-A994-89ACB6DEBF35}"/>
               </a:ext>
             </a:extLst>
           </p:cNvPr>
@@ -5637,7 +5637,7 @@
           <p:cNvPr id="55" name="">
             <a:extLst xmlns:a="http://schemas.openxmlformats.org/drawingml/2006/main">
               <a:ext uri="{FF2B5EF4-FFF2-40B4-BE49-F238E27FC236}">
-                <a16:creationId xmlns:a16="http://schemas.microsoft.com/office/drawing/2014/main" id="{4A4624F5-1277-407D-B8B6-ECB4283F5AB6}"/>
+                <a16:creationId xmlns:a16="http://schemas.microsoft.com/office/drawing/2014/main" id="{709DA6EC-5FD5-4448-8DE5-50254CF72511}"/>
               </a:ext>
             </a:extLst>
           </p:cNvPr>
@@ -5689,7 +5689,7 @@
           <p:cNvPr id="56" name="">
             <a:extLst xmlns:a="http://schemas.openxmlformats.org/drawingml/2006/main">
               <a:ext uri="{FF2B5EF4-FFF2-40B4-BE49-F238E27FC236}">
-                <a16:creationId xmlns:a16="http://schemas.microsoft.com/office/drawing/2014/main" id="{514E6CBA-59E3-4FE1-A21E-C467638ABD73}"/>
+                <a16:creationId xmlns:a16="http://schemas.microsoft.com/office/drawing/2014/main" id="{83A62DAA-F546-49A8-B8DE-0C8E3A839BA2}"/>
               </a:ext>
             </a:extLst>
           </p:cNvPr>
@@ -5741,7 +5741,7 @@
           <p:cNvPr id="57" name="">
             <a:extLst xmlns:a="http://schemas.openxmlformats.org/drawingml/2006/main">
               <a:ext uri="{FF2B5EF4-FFF2-40B4-BE49-F238E27FC236}">
-                <a16:creationId xmlns:a16="http://schemas.microsoft.com/office/drawing/2014/main" id="{8B2F5D23-F025-4E56-A4F5-2A9C3036F5B0}"/>
+                <a16:creationId xmlns:a16="http://schemas.microsoft.com/office/drawing/2014/main" id="{BEA3FF1A-286D-4C00-9E6C-2D74BB9FE750}"/>
               </a:ext>
             </a:extLst>
           </p:cNvPr>
@@ -5772,7 +5772,7 @@
           <p:cNvPr id="58" name="">
             <a:extLst xmlns:a="http://schemas.openxmlformats.org/drawingml/2006/main">
               <a:ext uri="{FF2B5EF4-FFF2-40B4-BE49-F238E27FC236}">
-                <a16:creationId xmlns:a16="http://schemas.microsoft.com/office/drawing/2014/main" id="{9D50134B-C684-43A5-B743-43B65904259E}"/>
+                <a16:creationId xmlns:a16="http://schemas.microsoft.com/office/drawing/2014/main" id="{6AC9ADBC-F0E6-4E29-905E-A9725224E5B3}"/>
               </a:ext>
             </a:extLst>
           </p:cNvPr>
@@ -5803,7 +5803,7 @@
           <p:cNvPr id="59" name="">
             <a:extLst xmlns:a="http://schemas.openxmlformats.org/drawingml/2006/main">
               <a:ext uri="{FF2B5EF4-FFF2-40B4-BE49-F238E27FC236}">
-                <a16:creationId xmlns:a16="http://schemas.microsoft.com/office/drawing/2014/main" id="{9667BEA5-C407-492F-98C1-AEE3897DB6FC}"/>
+                <a16:creationId xmlns:a16="http://schemas.microsoft.com/office/drawing/2014/main" id="{B71BBDE3-FB44-4A31-A33F-EECA707FCF04}"/>
               </a:ext>
             </a:extLst>
           </p:cNvPr>
@@ -5855,7 +5855,7 @@
           <p:cNvPr id="60" name="">
             <a:extLst xmlns:a="http://schemas.openxmlformats.org/drawingml/2006/main">
               <a:ext uri="{FF2B5EF4-FFF2-40B4-BE49-F238E27FC236}">
-                <a16:creationId xmlns:a16="http://schemas.microsoft.com/office/drawing/2014/main" id="{54EE10B2-3B38-40DA-BBCF-8CCD387511F8}"/>
+                <a16:creationId xmlns:a16="http://schemas.microsoft.com/office/drawing/2014/main" id="{E0FD06BC-CC67-4D84-A979-60FE0BB7F603}"/>
               </a:ext>
             </a:extLst>
           </p:cNvPr>
@@ -5907,7 +5907,7 @@
           <p:cNvPr id="61" name="">
             <a:extLst xmlns:a="http://schemas.openxmlformats.org/drawingml/2006/main">
               <a:ext uri="{FF2B5EF4-FFF2-40B4-BE49-F238E27FC236}">
-                <a16:creationId xmlns:a16="http://schemas.microsoft.com/office/drawing/2014/main" id="{577DF618-715D-4FA1-A77F-26DD539E16E0}"/>
+                <a16:creationId xmlns:a16="http://schemas.microsoft.com/office/drawing/2014/main" id="{E5C341DA-5D9F-4D72-B833-E5FFE6CC39F0}"/>
               </a:ext>
             </a:extLst>
           </p:cNvPr>
@@ -5959,7 +5959,7 @@
           <p:cNvPr id="62" name="">
             <a:extLst xmlns:a="http://schemas.openxmlformats.org/drawingml/2006/main">
               <a:ext uri="{FF2B5EF4-FFF2-40B4-BE49-F238E27FC236}">
-                <a16:creationId xmlns:a16="http://schemas.microsoft.com/office/drawing/2014/main" id="{E5C7B24B-1377-4698-AA86-0FF479E3715C}"/>
+                <a16:creationId xmlns:a16="http://schemas.microsoft.com/office/drawing/2014/main" id="{08E151E2-18AC-4C20-A61A-09D7BC3FDF83}"/>
               </a:ext>
             </a:extLst>
           </p:cNvPr>
@@ -6011,7 +6011,7 @@
           <p:cNvPr id="63" name="">
             <a:extLst xmlns:a="http://schemas.openxmlformats.org/drawingml/2006/main">
               <a:ext uri="{FF2B5EF4-FFF2-40B4-BE49-F238E27FC236}">
-                <a16:creationId xmlns:a16="http://schemas.microsoft.com/office/drawing/2014/main" id="{1335D770-322C-48B8-8394-55F9E4A72609}"/>
+                <a16:creationId xmlns:a16="http://schemas.microsoft.com/office/drawing/2014/main" id="{E0E470B5-D3D7-4D3E-BB20-009831A22A4C}"/>
               </a:ext>
             </a:extLst>
           </p:cNvPr>
@@ -6063,7 +6063,7 @@
           <p:cNvPr id="64" name="">
             <a:extLst xmlns:a="http://schemas.openxmlformats.org/drawingml/2006/main">
               <a:ext uri="{FF2B5EF4-FFF2-40B4-BE49-F238E27FC236}">
-                <a16:creationId xmlns:a16="http://schemas.microsoft.com/office/drawing/2014/main" id="{D8291FCF-E390-4611-9EE7-5748708CC215}"/>
+                <a16:creationId xmlns:a16="http://schemas.microsoft.com/office/drawing/2014/main" id="{380DD439-C835-4E80-8E83-A0687EA9DF93}"/>
               </a:ext>
             </a:extLst>
           </p:cNvPr>
@@ -6094,7 +6094,7 @@
           <p:cNvPr id="65" name="">
             <a:extLst xmlns:a="http://schemas.openxmlformats.org/drawingml/2006/main">
               <a:ext uri="{FF2B5EF4-FFF2-40B4-BE49-F238E27FC236}">
-                <a16:creationId xmlns:a16="http://schemas.microsoft.com/office/drawing/2014/main" id="{5CE123D0-C1A5-495D-BA2D-CF50B3B814DF}"/>
+                <a16:creationId xmlns:a16="http://schemas.microsoft.com/office/drawing/2014/main" id="{6B091ED3-E39B-42C6-A20C-934F7C097299}"/>
               </a:ext>
             </a:extLst>
           </p:cNvPr>
@@ -6146,7 +6146,7 @@
           <p:cNvPr id="66" name="">
             <a:extLst xmlns:a="http://schemas.openxmlformats.org/drawingml/2006/main">
               <a:ext uri="{FF2B5EF4-FFF2-40B4-BE49-F238E27FC236}">
-                <a16:creationId xmlns:a16="http://schemas.microsoft.com/office/drawing/2014/main" id="{4811727E-6248-42E0-B2ED-7409571854F1}"/>
+                <a16:creationId xmlns:a16="http://schemas.microsoft.com/office/drawing/2014/main" id="{6B24C266-FD42-4F0B-88FC-601EA94F8283}"/>
               </a:ext>
             </a:extLst>
           </p:cNvPr>
@@ -6198,7 +6198,7 @@
           <p:cNvPr id="67" name="">
             <a:extLst xmlns:a="http://schemas.openxmlformats.org/drawingml/2006/main">
               <a:ext uri="{FF2B5EF4-FFF2-40B4-BE49-F238E27FC236}">
-                <a16:creationId xmlns:a16="http://schemas.microsoft.com/office/drawing/2014/main" id="{91D1A59D-B1EA-4008-B1EA-E86A2D1CFE85}"/>
+                <a16:creationId xmlns:a16="http://schemas.microsoft.com/office/drawing/2014/main" id="{7FB43A6F-17E9-4917-AD6F-6CE00AB06855}"/>
               </a:ext>
             </a:extLst>
           </p:cNvPr>
@@ -6250,7 +6250,7 @@
           <p:cNvPr id="68" name="">
             <a:extLst xmlns:a="http://schemas.openxmlformats.org/drawingml/2006/main">
               <a:ext uri="{FF2B5EF4-FFF2-40B4-BE49-F238E27FC236}">
-                <a16:creationId xmlns:a16="http://schemas.microsoft.com/office/drawing/2014/main" id="{E5747664-978A-49E3-8976-AC931A4874A0}"/>
+                <a16:creationId xmlns:a16="http://schemas.microsoft.com/office/drawing/2014/main" id="{2B3ED4E6-686A-40F4-85E7-3D763D484AEA}"/>
               </a:ext>
             </a:extLst>
           </p:cNvPr>
@@ -6302,7 +6302,7 @@
           <p:cNvPr id="69" name="">
             <a:extLst xmlns:a="http://schemas.openxmlformats.org/drawingml/2006/main">
               <a:ext uri="{FF2B5EF4-FFF2-40B4-BE49-F238E27FC236}">
-                <a16:creationId xmlns:a16="http://schemas.microsoft.com/office/drawing/2014/main" id="{DBE27F6C-A5C1-4A73-BAAA-9E0F92E98DA9}"/>
+                <a16:creationId xmlns:a16="http://schemas.microsoft.com/office/drawing/2014/main" id="{B8FCEFDD-6223-4BF9-85BF-939397F6595D}"/>
               </a:ext>
             </a:extLst>
           </p:cNvPr>
@@ -6354,7 +6354,7 @@
           <p:cNvPr id="70" name="">
             <a:extLst xmlns:a="http://schemas.openxmlformats.org/drawingml/2006/main">
               <a:ext uri="{FF2B5EF4-FFF2-40B4-BE49-F238E27FC236}">
-                <a16:creationId xmlns:a16="http://schemas.microsoft.com/office/drawing/2014/main" id="{73B1229F-FC39-4C28-A03E-3989B91C7C2C}"/>
+                <a16:creationId xmlns:a16="http://schemas.microsoft.com/office/drawing/2014/main" id="{07663966-7F6F-451D-8B43-0262FC80646E}"/>
               </a:ext>
             </a:extLst>
           </p:cNvPr>
@@ -6385,7 +6385,7 @@
           <p:cNvPr id="71" name="">
             <a:extLst xmlns:a="http://schemas.openxmlformats.org/drawingml/2006/main">
               <a:ext uri="{FF2B5EF4-FFF2-40B4-BE49-F238E27FC236}">
-                <a16:creationId xmlns:a16="http://schemas.microsoft.com/office/drawing/2014/main" id="{B29622F1-FFF6-4BBE-A88B-5C0A03F918A3}"/>
+                <a16:creationId xmlns:a16="http://schemas.microsoft.com/office/drawing/2014/main" id="{2B3820F5-E44F-42FD-A8B4-709EF3BD4367}"/>
               </a:ext>
             </a:extLst>
           </p:cNvPr>
@@ -6416,7 +6416,7 @@
           <p:cNvPr id="72" name="">
             <a:extLst xmlns:a="http://schemas.openxmlformats.org/drawingml/2006/main">
               <a:ext uri="{FF2B5EF4-FFF2-40B4-BE49-F238E27FC236}">
-                <a16:creationId xmlns:a16="http://schemas.microsoft.com/office/drawing/2014/main" id="{1E996E4B-1C95-4E9E-A52D-A1E437209241}"/>
+                <a16:creationId xmlns:a16="http://schemas.microsoft.com/office/drawing/2014/main" id="{0E98A1F5-4A19-4642-8DB6-F1614C171BE6}"/>
               </a:ext>
             </a:extLst>
           </p:cNvPr>
@@ -6468,7 +6468,7 @@
           <p:cNvPr id="73" name="">
             <a:extLst xmlns:a="http://schemas.openxmlformats.org/drawingml/2006/main">
               <a:ext uri="{FF2B5EF4-FFF2-40B4-BE49-F238E27FC236}">
-                <a16:creationId xmlns:a16="http://schemas.microsoft.com/office/drawing/2014/main" id="{4D1A2D5E-7A49-4690-A00E-6A11F8DCCCCA}"/>
+                <a16:creationId xmlns:a16="http://schemas.microsoft.com/office/drawing/2014/main" id="{590FCB79-7737-44B0-AB2E-118448F08EDA}"/>
               </a:ext>
             </a:extLst>
           </p:cNvPr>
@@ -6520,7 +6520,7 @@
           <p:cNvPr id="74" name="">
             <a:extLst xmlns:a="http://schemas.openxmlformats.org/drawingml/2006/main">
               <a:ext uri="{FF2B5EF4-FFF2-40B4-BE49-F238E27FC236}">
-                <a16:creationId xmlns:a16="http://schemas.microsoft.com/office/drawing/2014/main" id="{FA0D5615-6AEC-4F18-B698-96ED6F3F1A48}"/>
+                <a16:creationId xmlns:a16="http://schemas.microsoft.com/office/drawing/2014/main" id="{9E45911B-D9A9-4D07-B9A3-DA37D080744B}"/>
               </a:ext>
             </a:extLst>
           </p:cNvPr>
@@ -6572,7 +6572,7 @@
           <p:cNvPr id="75" name="">
             <a:extLst xmlns:a="http://schemas.openxmlformats.org/drawingml/2006/main">
               <a:ext uri="{FF2B5EF4-FFF2-40B4-BE49-F238E27FC236}">
-                <a16:creationId xmlns:a16="http://schemas.microsoft.com/office/drawing/2014/main" id="{6CAB54A4-701C-4E7F-A45A-BC376CABA9E6}"/>
+                <a16:creationId xmlns:a16="http://schemas.microsoft.com/office/drawing/2014/main" id="{99EC6D9D-1218-4DED-93BE-F64F9CF1DE57}"/>
               </a:ext>
             </a:extLst>
           </p:cNvPr>
@@ -6624,7 +6624,7 @@
           <p:cNvPr id="76" name="">
             <a:extLst xmlns:a="http://schemas.openxmlformats.org/drawingml/2006/main">
               <a:ext uri="{FF2B5EF4-FFF2-40B4-BE49-F238E27FC236}">
-                <a16:creationId xmlns:a16="http://schemas.microsoft.com/office/drawing/2014/main" id="{CBBC4E2A-2D29-4E34-8971-0868B1951D29}"/>
+                <a16:creationId xmlns:a16="http://schemas.microsoft.com/office/drawing/2014/main" id="{5AF9FF54-2280-4073-932D-1B2514F1B8F8}"/>
               </a:ext>
             </a:extLst>
           </p:cNvPr>
@@ -6676,7 +6676,7 @@
           <p:cNvPr id="77" name="">
             <a:extLst xmlns:a="http://schemas.openxmlformats.org/drawingml/2006/main">
               <a:ext uri="{FF2B5EF4-FFF2-40B4-BE49-F238E27FC236}">
-                <a16:creationId xmlns:a16="http://schemas.microsoft.com/office/drawing/2014/main" id="{7071C354-5E3E-4C04-AE7C-37F00042C44D}"/>
+                <a16:creationId xmlns:a16="http://schemas.microsoft.com/office/drawing/2014/main" id="{AA085EC4-5790-4085-BA3D-7F71CB8F4258}"/>
               </a:ext>
             </a:extLst>
           </p:cNvPr>
@@ -6707,7 +6707,7 @@
           <p:cNvPr id="78" name="">
             <a:extLst xmlns:a="http://schemas.openxmlformats.org/drawingml/2006/main">
               <a:ext uri="{FF2B5EF4-FFF2-40B4-BE49-F238E27FC236}">
-                <a16:creationId xmlns:a16="http://schemas.microsoft.com/office/drawing/2014/main" id="{29A40FF4-B1A9-40BD-93EC-1152F27D0710}"/>
+                <a16:creationId xmlns:a16="http://schemas.microsoft.com/office/drawing/2014/main" id="{3094F0CE-DEFE-4F4E-8B55-7840C41B31C9}"/>
               </a:ext>
             </a:extLst>
           </p:cNvPr>
@@ -6759,7 +6759,7 @@
           <p:cNvPr id="79" name="">
             <a:extLst xmlns:a="http://schemas.openxmlformats.org/drawingml/2006/main">
               <a:ext uri="{FF2B5EF4-FFF2-40B4-BE49-F238E27FC236}">
-                <a16:creationId xmlns:a16="http://schemas.microsoft.com/office/drawing/2014/main" id="{FE7CDDF5-A60A-43F2-BD47-639E9AE76465}"/>
+                <a16:creationId xmlns:a16="http://schemas.microsoft.com/office/drawing/2014/main" id="{4006C584-0636-43FB-9FFF-EB628CE423FD}"/>
               </a:ext>
             </a:extLst>
           </p:cNvPr>
@@ -6811,7 +6811,7 @@
           <p:cNvPr id="80" name="">
             <a:extLst xmlns:a="http://schemas.openxmlformats.org/drawingml/2006/main">
               <a:ext uri="{FF2B5EF4-FFF2-40B4-BE49-F238E27FC236}">
-                <a16:creationId xmlns:a16="http://schemas.microsoft.com/office/drawing/2014/main" id="{40F95860-119E-48C8-A75C-197780E9F484}"/>
+                <a16:creationId xmlns:a16="http://schemas.microsoft.com/office/drawing/2014/main" id="{4753D46F-D55C-4560-BDEF-7716F10ACF41}"/>
               </a:ext>
             </a:extLst>
           </p:cNvPr>
@@ -6863,7 +6863,7 @@
           <p:cNvPr id="81" name="">
             <a:extLst xmlns:a="http://schemas.openxmlformats.org/drawingml/2006/main">
               <a:ext uri="{FF2B5EF4-FFF2-40B4-BE49-F238E27FC236}">
-                <a16:creationId xmlns:a16="http://schemas.microsoft.com/office/drawing/2014/main" id="{6F558284-9731-47D5-A0DA-7BDE4F01560D}"/>
+                <a16:creationId xmlns:a16="http://schemas.microsoft.com/office/drawing/2014/main" id="{F155A83E-D219-447E-A4C8-E4AB6903C5CB}"/>
               </a:ext>
             </a:extLst>
           </p:cNvPr>
@@ -6915,7 +6915,7 @@
           <p:cNvPr id="82" name="">
             <a:extLst xmlns:a="http://schemas.openxmlformats.org/drawingml/2006/main">
               <a:ext uri="{FF2B5EF4-FFF2-40B4-BE49-F238E27FC236}">
-                <a16:creationId xmlns:a16="http://schemas.microsoft.com/office/drawing/2014/main" id="{626E5F74-5B47-4171-B7D0-2EDC0A267BBC}"/>
+                <a16:creationId xmlns:a16="http://schemas.microsoft.com/office/drawing/2014/main" id="{98744A20-4569-4F62-B32B-8D13E8C721EF}"/>
               </a:ext>
             </a:extLst>
           </p:cNvPr>
@@ -6967,7 +6967,7 @@
           <p:cNvPr id="83" name="">
             <a:extLst xmlns:a="http://schemas.openxmlformats.org/drawingml/2006/main">
               <a:ext uri="{FF2B5EF4-FFF2-40B4-BE49-F238E27FC236}">
-                <a16:creationId xmlns:a16="http://schemas.microsoft.com/office/drawing/2014/main" id="{79A6B2F4-4BF7-471E-BB5C-72D5FD277739}"/>
+                <a16:creationId xmlns:a16="http://schemas.microsoft.com/office/drawing/2014/main" id="{2D1C7CCC-B252-4A20-BA75-A319A8BB17C2}"/>
               </a:ext>
             </a:extLst>
           </p:cNvPr>
@@ -6998,7 +6998,7 @@
           <p:cNvPr id="84" name="">
             <a:extLst xmlns:a="http://schemas.openxmlformats.org/drawingml/2006/main">
               <a:ext uri="{FF2B5EF4-FFF2-40B4-BE49-F238E27FC236}">
-                <a16:creationId xmlns:a16="http://schemas.microsoft.com/office/drawing/2014/main" id="{0C75653F-3668-4D00-AA97-A0E452F85733}"/>
+                <a16:creationId xmlns:a16="http://schemas.microsoft.com/office/drawing/2014/main" id="{DC3F931B-7B08-49A1-B55B-D41DC5ACB851}"/>
               </a:ext>
             </a:extLst>
           </p:cNvPr>
@@ -7029,7 +7029,7 @@
           <p:cNvPr id="85" name="">
             <a:extLst xmlns:a="http://schemas.openxmlformats.org/drawingml/2006/main">
               <a:ext uri="{FF2B5EF4-FFF2-40B4-BE49-F238E27FC236}">
-                <a16:creationId xmlns:a16="http://schemas.microsoft.com/office/drawing/2014/main" id="{C2FE079E-4083-4D1A-98BC-3978C2181C94}"/>
+                <a16:creationId xmlns:a16="http://schemas.microsoft.com/office/drawing/2014/main" id="{C472283E-0498-4838-9ACB-17120FD8EE18}"/>
               </a:ext>
             </a:extLst>
           </p:cNvPr>
@@ -7081,7 +7081,7 @@
           <p:cNvPr id="86" name="">
             <a:extLst xmlns:a="http://schemas.openxmlformats.org/drawingml/2006/main">
               <a:ext uri="{FF2B5EF4-FFF2-40B4-BE49-F238E27FC236}">
-                <a16:creationId xmlns:a16="http://schemas.microsoft.com/office/drawing/2014/main" id="{373388CA-5DAF-4101-B139-2D3E2933F323}"/>
+                <a16:creationId xmlns:a16="http://schemas.microsoft.com/office/drawing/2014/main" id="{F4509371-970A-49F1-A75F-8B3E4075954F}"/>
               </a:ext>
             </a:extLst>
           </p:cNvPr>
@@ -7133,7 +7133,7 @@
           <p:cNvPr id="87" name="">
             <a:extLst xmlns:a="http://schemas.openxmlformats.org/drawingml/2006/main">
               <a:ext uri="{FF2B5EF4-FFF2-40B4-BE49-F238E27FC236}">
-                <a16:creationId xmlns:a16="http://schemas.microsoft.com/office/drawing/2014/main" id="{3C5D4500-3AD0-466C-A8F1-90E5528593A6}"/>
+                <a16:creationId xmlns:a16="http://schemas.microsoft.com/office/drawing/2014/main" id="{5BDC6AAC-12A9-4EF8-B7E8-AA19CA780B0B}"/>
               </a:ext>
             </a:extLst>
           </p:cNvPr>
@@ -7185,7 +7185,7 @@
           <p:cNvPr id="88" name="">
             <a:extLst xmlns:a="http://schemas.openxmlformats.org/drawingml/2006/main">
               <a:ext uri="{FF2B5EF4-FFF2-40B4-BE49-F238E27FC236}">
-                <a16:creationId xmlns:a16="http://schemas.microsoft.com/office/drawing/2014/main" id="{210589C5-33BA-459B-B5C2-568E0E6455FF}"/>
+                <a16:creationId xmlns:a16="http://schemas.microsoft.com/office/drawing/2014/main" id="{C2301810-31BF-4AA5-97A3-C9AFD654B3D5}"/>
               </a:ext>
             </a:extLst>
           </p:cNvPr>
@@ -7237,7 +7237,7 @@
           <p:cNvPr id="89" name="">
             <a:extLst xmlns:a="http://schemas.openxmlformats.org/drawingml/2006/main">
               <a:ext uri="{FF2B5EF4-FFF2-40B4-BE49-F238E27FC236}">
-                <a16:creationId xmlns:a16="http://schemas.microsoft.com/office/drawing/2014/main" id="{E63173D1-F800-476E-B6C2-150638AF5D08}"/>
+                <a16:creationId xmlns:a16="http://schemas.microsoft.com/office/drawing/2014/main" id="{F4CFB602-662A-460F-A186-C208A67C1635}"/>
               </a:ext>
             </a:extLst>
           </p:cNvPr>
@@ -7289,7 +7289,7 @@
           <p:cNvPr id="90" name="">
             <a:extLst xmlns:a="http://schemas.openxmlformats.org/drawingml/2006/main">
               <a:ext uri="{FF2B5EF4-FFF2-40B4-BE49-F238E27FC236}">
-                <a16:creationId xmlns:a16="http://schemas.microsoft.com/office/drawing/2014/main" id="{9190DD39-AD70-48C6-9BFD-7EA5A71E0F70}"/>
+                <a16:creationId xmlns:a16="http://schemas.microsoft.com/office/drawing/2014/main" id="{5B363981-107D-4A04-B97B-4BA2C4201FD7}"/>
               </a:ext>
             </a:extLst>
           </p:cNvPr>
@@ -7320,7 +7320,7 @@
           <p:cNvPr id="91" name="">
             <a:extLst xmlns:a="http://schemas.openxmlformats.org/drawingml/2006/main">
               <a:ext uri="{FF2B5EF4-FFF2-40B4-BE49-F238E27FC236}">
-                <a16:creationId xmlns:a16="http://schemas.microsoft.com/office/drawing/2014/main" id="{82384562-BA92-4CDD-9F1C-4F92E6F050D1}"/>
+                <a16:creationId xmlns:a16="http://schemas.microsoft.com/office/drawing/2014/main" id="{322BC4E6-45DB-48E8-A66F-CC77F382ED98}"/>
               </a:ext>
             </a:extLst>
           </p:cNvPr>
@@ -7372,7 +7372,7 @@
           <p:cNvPr id="92" name="">
             <a:extLst xmlns:a="http://schemas.openxmlformats.org/drawingml/2006/main">
               <a:ext uri="{FF2B5EF4-FFF2-40B4-BE49-F238E27FC236}">
-                <a16:creationId xmlns:a16="http://schemas.microsoft.com/office/drawing/2014/main" id="{3F29125A-8BAC-4C4B-9349-837AF3610350}"/>
+                <a16:creationId xmlns:a16="http://schemas.microsoft.com/office/drawing/2014/main" id="{725DDD9B-BCD0-4130-9D91-B025B457EA3D}"/>
               </a:ext>
             </a:extLst>
           </p:cNvPr>
@@ -7424,7 +7424,7 @@
           <p:cNvPr id="93" name="">
             <a:extLst xmlns:a="http://schemas.openxmlformats.org/drawingml/2006/main">
               <a:ext uri="{FF2B5EF4-FFF2-40B4-BE49-F238E27FC236}">
-                <a16:creationId xmlns:a16="http://schemas.microsoft.com/office/drawing/2014/main" id="{D95E4C80-8FAC-45A9-86CF-CE77B541B721}"/>
+                <a16:creationId xmlns:a16="http://schemas.microsoft.com/office/drawing/2014/main" id="{BC35C8E2-9DFF-45AF-85B1-EC263B982A51}"/>
               </a:ext>
             </a:extLst>
           </p:cNvPr>
@@ -7476,7 +7476,7 @@
           <p:cNvPr id="94" name="">
             <a:extLst xmlns:a="http://schemas.openxmlformats.org/drawingml/2006/main">
               <a:ext uri="{FF2B5EF4-FFF2-40B4-BE49-F238E27FC236}">
-                <a16:creationId xmlns:a16="http://schemas.microsoft.com/office/drawing/2014/main" id="{274C5A0D-8FA0-46C7-B8C2-AE75B057E6DB}"/>
+                <a16:creationId xmlns:a16="http://schemas.microsoft.com/office/drawing/2014/main" id="{F1DACD06-2BB9-4D11-902A-BA65EF23D90F}"/>
               </a:ext>
             </a:extLst>
           </p:cNvPr>
@@ -7528,7 +7528,7 @@
           <p:cNvPr id="95" name="">
             <a:extLst xmlns:a="http://schemas.openxmlformats.org/drawingml/2006/main">
               <a:ext uri="{FF2B5EF4-FFF2-40B4-BE49-F238E27FC236}">
-                <a16:creationId xmlns:a16="http://schemas.microsoft.com/office/drawing/2014/main" id="{77C53DFB-359C-4A00-B83C-211965EBA4BD}"/>
+                <a16:creationId xmlns:a16="http://schemas.microsoft.com/office/drawing/2014/main" id="{8CEB3DBF-6D4B-4D75-8FA9-122E1BC9EB12}"/>
               </a:ext>
             </a:extLst>
           </p:cNvPr>
@@ -7580,7 +7580,7 @@
           <p:cNvPr id="96" name="">
             <a:extLst xmlns:a="http://schemas.openxmlformats.org/drawingml/2006/main">
               <a:ext uri="{FF2B5EF4-FFF2-40B4-BE49-F238E27FC236}">
-                <a16:creationId xmlns:a16="http://schemas.microsoft.com/office/drawing/2014/main" id="{5D421D74-DF56-4CE8-A92C-F0B86DE8C36A}"/>
+                <a16:creationId xmlns:a16="http://schemas.microsoft.com/office/drawing/2014/main" id="{8166D8C6-2B16-45D3-B173-3985A5438577}"/>
               </a:ext>
             </a:extLst>
           </p:cNvPr>
@@ -7611,7 +7611,7 @@
           <p:cNvPr id="97" name="">
             <a:extLst xmlns:a="http://schemas.openxmlformats.org/drawingml/2006/main">
               <a:ext uri="{FF2B5EF4-FFF2-40B4-BE49-F238E27FC236}">
-                <a16:creationId xmlns:a16="http://schemas.microsoft.com/office/drawing/2014/main" id="{E94FA0B0-ACC1-4A07-BBA1-0C0C7BE673BA}"/>
+                <a16:creationId xmlns:a16="http://schemas.microsoft.com/office/drawing/2014/main" id="{B4A92CB6-C196-421C-BCB6-71B72BC26BAA}"/>
               </a:ext>
             </a:extLst>
           </p:cNvPr>
@@ -7642,7 +7642,7 @@
           <p:cNvPr id="98" name="">
             <a:extLst xmlns:a="http://schemas.openxmlformats.org/drawingml/2006/main">
               <a:ext uri="{FF2B5EF4-FFF2-40B4-BE49-F238E27FC236}">
-                <a16:creationId xmlns:a16="http://schemas.microsoft.com/office/drawing/2014/main" id="{1BCCA401-1B53-4D20-A82A-AA8E7FC3FD2A}"/>
+                <a16:creationId xmlns:a16="http://schemas.microsoft.com/office/drawing/2014/main" id="{5ABFF69D-F70A-47CB-B514-5B00C016F328}"/>
               </a:ext>
             </a:extLst>
           </p:cNvPr>
@@ -7694,7 +7694,7 @@
           <p:cNvPr id="99" name="">
             <a:extLst xmlns:a="http://schemas.openxmlformats.org/drawingml/2006/main">
               <a:ext uri="{FF2B5EF4-FFF2-40B4-BE49-F238E27FC236}">
-                <a16:creationId xmlns:a16="http://schemas.microsoft.com/office/drawing/2014/main" id="{75670C91-7637-4401-8F1B-9693D15A8B3E}"/>
+                <a16:creationId xmlns:a16="http://schemas.microsoft.com/office/drawing/2014/main" id="{4B94B84D-75C2-46AD-9334-D737D6D144E1}"/>
               </a:ext>
             </a:extLst>
           </p:cNvPr>
@@ -7746,7 +7746,7 @@
           <p:cNvPr id="100" name="">
             <a:extLst xmlns:a="http://schemas.openxmlformats.org/drawingml/2006/main">
               <a:ext uri="{FF2B5EF4-FFF2-40B4-BE49-F238E27FC236}">
-                <a16:creationId xmlns:a16="http://schemas.microsoft.com/office/drawing/2014/main" id="{61136C78-C23C-4455-9B1B-C474803D4663}"/>
+                <a16:creationId xmlns:a16="http://schemas.microsoft.com/office/drawing/2014/main" id="{E23FD8D4-30E3-4B64-AC4A-0948C8E8DEFB}"/>
               </a:ext>
             </a:extLst>
           </p:cNvPr>
@@ -7798,7 +7798,7 @@
           <p:cNvPr id="101" name="">
             <a:extLst xmlns:a="http://schemas.openxmlformats.org/drawingml/2006/main">
               <a:ext uri="{FF2B5EF4-FFF2-40B4-BE49-F238E27FC236}">
-                <a16:creationId xmlns:a16="http://schemas.microsoft.com/office/drawing/2014/main" id="{6B8B8B8F-966B-42A6-A021-74520EB214AC}"/>
+                <a16:creationId xmlns:a16="http://schemas.microsoft.com/office/drawing/2014/main" id="{1129BBBC-40B4-467E-B62D-D5D6DC203E03}"/>
               </a:ext>
             </a:extLst>
           </p:cNvPr>
@@ -7850,7 +7850,7 @@
           <p:cNvPr id="102" name="">
             <a:extLst xmlns:a="http://schemas.openxmlformats.org/drawingml/2006/main">
               <a:ext uri="{FF2B5EF4-FFF2-40B4-BE49-F238E27FC236}">
-                <a16:creationId xmlns:a16="http://schemas.microsoft.com/office/drawing/2014/main" id="{68846E20-B46F-4303-B3DA-7FBF51838A24}"/>
+                <a16:creationId xmlns:a16="http://schemas.microsoft.com/office/drawing/2014/main" id="{5FCCA5CC-576A-47DF-82E2-77796E267A9E}"/>
               </a:ext>
             </a:extLst>
           </p:cNvPr>
@@ -7900,7 +7900,7 @@
     </p:spTree>
     <p:extLst>
       <p:ext uri="{BB962C8B-B14F-4D97-AF65-F5344CB8AC3E}">
-        <p14:creationId xmlns:p14="http://schemas.microsoft.com/office/powerpoint/2010/main" val="1500981532"/>
+        <p14:creationId xmlns:p14="http://schemas.microsoft.com/office/powerpoint/2010/main" val="1739749770"/>
       </p:ext>
     </p:extLst>
   </p:cSld>
@@ -7931,7 +7931,7 @@
           <p:cNvPr id="98" name="">
             <a:extLst xmlns:a="http://schemas.openxmlformats.org/drawingml/2006/main">
               <a:ext uri="{FF2B5EF4-FFF2-40B4-BE49-F238E27FC236}">
-                <a16:creationId xmlns:a16="http://schemas.microsoft.com/office/drawing/2014/main" id="{B29D06EB-7EC3-4E2A-A71B-64F1E53147D6}"/>
+                <a16:creationId xmlns:a16="http://schemas.microsoft.com/office/drawing/2014/main" id="{B17867ED-EAE1-49BA-A784-300A5C46D25B}"/>
               </a:ext>
             </a:extLst>
           </p:cNvPr>
@@ -7964,7 +7964,7 @@
           <p:cNvPr id="2" name="">
             <a:extLst xmlns:a="http://schemas.openxmlformats.org/drawingml/2006/main">
               <a:ext uri="{FF2B5EF4-FFF2-40B4-BE49-F238E27FC236}">
-                <a16:creationId xmlns:a16="http://schemas.microsoft.com/office/drawing/2014/main" id="{981021F8-168A-44DD-95E1-11CEEB2C1B95}"/>
+                <a16:creationId xmlns:a16="http://schemas.microsoft.com/office/drawing/2014/main" id="{1DB0EA9D-84B7-4F14-A65C-957312018DA7}"/>
               </a:ext>
             </a:extLst>
           </p:cNvPr>
@@ -7995,7 +7995,7 @@
           <p:cNvPr id="3" name="">
             <a:extLst xmlns:a="http://schemas.openxmlformats.org/drawingml/2006/main">
               <a:ext uri="{FF2B5EF4-FFF2-40B4-BE49-F238E27FC236}">
-                <a16:creationId xmlns:a16="http://schemas.microsoft.com/office/drawing/2014/main" id="{6999A9F9-D2DE-4DA6-B141-40C43C66E340}"/>
+                <a16:creationId xmlns:a16="http://schemas.microsoft.com/office/drawing/2014/main" id="{2C788426-4101-42AB-8F07-97A48E0DDA68}"/>
               </a:ext>
             </a:extLst>
           </p:cNvPr>
@@ -8047,7 +8047,7 @@
           <p:cNvPr id="4" name="">
             <a:extLst xmlns:a="http://schemas.openxmlformats.org/drawingml/2006/main">
               <a:ext uri="{FF2B5EF4-FFF2-40B4-BE49-F238E27FC236}">
-                <a16:creationId xmlns:a16="http://schemas.microsoft.com/office/drawing/2014/main" id="{22BCF0F1-8B00-4DF7-BBC1-7C3D2797E501}"/>
+                <a16:creationId xmlns:a16="http://schemas.microsoft.com/office/drawing/2014/main" id="{264E861E-9AC2-4BB5-935F-730FB9AF3F5D}"/>
               </a:ext>
             </a:extLst>
           </p:cNvPr>
@@ -8099,7 +8099,7 @@
           <p:cNvPr id="5" name="">
             <a:extLst xmlns:a="http://schemas.openxmlformats.org/drawingml/2006/main">
               <a:ext uri="{FF2B5EF4-FFF2-40B4-BE49-F238E27FC236}">
-                <a16:creationId xmlns:a16="http://schemas.microsoft.com/office/drawing/2014/main" id="{EA1C5253-B077-47B3-B7BD-C223FA42D5D4}"/>
+                <a16:creationId xmlns:a16="http://schemas.microsoft.com/office/drawing/2014/main" id="{02F91063-01A0-4C24-8066-581A1A642D14}"/>
               </a:ext>
             </a:extLst>
           </p:cNvPr>
@@ -8134,7 +8134,7 @@
           <p:nvPr/>
         </p:nvPicPr>
         <p:blipFill>
-          <a:blip xmlns:r="http://schemas.openxmlformats.org/officeDocument/2006/relationships" xmlns:a="http://schemas.openxmlformats.org/drawingml/2006/main" r:embed="R4787249e8d50445b"/>
+          <a:blip xmlns:r="http://schemas.openxmlformats.org/officeDocument/2006/relationships" xmlns:a="http://schemas.openxmlformats.org/drawingml/2006/main" r:embed="Rd2e603b7183a4eee"/>
           <a:stretch xmlns:a="http://schemas.openxmlformats.org/drawingml/2006/main"/>
         </p:blipFill>
         <p:spPr>
@@ -8152,7 +8152,7 @@
           <p:cNvPr id="7" name="">
             <a:extLst xmlns:a="http://schemas.openxmlformats.org/drawingml/2006/main">
               <a:ext uri="{FF2B5EF4-FFF2-40B4-BE49-F238E27FC236}">
-                <a16:creationId xmlns:a16="http://schemas.microsoft.com/office/drawing/2014/main" id="{F5C51CF8-2E98-4F27-A540-745F0AADD115}"/>
+                <a16:creationId xmlns:a16="http://schemas.microsoft.com/office/drawing/2014/main" id="{92A45F2E-458D-4074-9E46-660BB45A3AB1}"/>
               </a:ext>
             </a:extLst>
           </p:cNvPr>
@@ -8204,7 +8204,7 @@
           <p:cNvPr id="8" name="">
             <a:extLst xmlns:a="http://schemas.openxmlformats.org/drawingml/2006/main">
               <a:ext uri="{FF2B5EF4-FFF2-40B4-BE49-F238E27FC236}">
-                <a16:creationId xmlns:a16="http://schemas.microsoft.com/office/drawing/2014/main" id="{F406BA75-B183-4703-A798-4CDCEE0E4815}"/>
+                <a16:creationId xmlns:a16="http://schemas.microsoft.com/office/drawing/2014/main" id="{484734BD-7A86-4595-85CA-F42A57DB5F66}"/>
               </a:ext>
             </a:extLst>
           </p:cNvPr>
@@ -8256,7 +8256,7 @@
           <p:cNvPr id="9" name="">
             <a:extLst xmlns:a="http://schemas.openxmlformats.org/drawingml/2006/main">
               <a:ext uri="{FF2B5EF4-FFF2-40B4-BE49-F238E27FC236}">
-                <a16:creationId xmlns:a16="http://schemas.microsoft.com/office/drawing/2014/main" id="{780A53F2-61C9-4A85-B8C0-436FFD4F53B1}"/>
+                <a16:creationId xmlns:a16="http://schemas.microsoft.com/office/drawing/2014/main" id="{28108226-CAAE-412B-B8A2-9D285C853690}"/>
               </a:ext>
             </a:extLst>
           </p:cNvPr>
@@ -8308,7 +8308,7 @@
           <p:cNvPr id="10" name="">
             <a:extLst xmlns:a="http://schemas.openxmlformats.org/drawingml/2006/main">
               <a:ext uri="{FF2B5EF4-FFF2-40B4-BE49-F238E27FC236}">
-                <a16:creationId xmlns:a16="http://schemas.microsoft.com/office/drawing/2014/main" id="{765D05A0-6F18-48F4-82FA-E391B1728DA2}"/>
+                <a16:creationId xmlns:a16="http://schemas.microsoft.com/office/drawing/2014/main" id="{502B0B91-F7E7-4DFB-B654-F13072FA01E1}"/>
               </a:ext>
             </a:extLst>
           </p:cNvPr>
@@ -8360,7 +8360,7 @@
           <p:cNvPr id="11" name="">
             <a:extLst xmlns:a="http://schemas.openxmlformats.org/drawingml/2006/main">
               <a:ext uri="{FF2B5EF4-FFF2-40B4-BE49-F238E27FC236}">
-                <a16:creationId xmlns:a16="http://schemas.microsoft.com/office/drawing/2014/main" id="{94131769-699B-450E-902F-C2784CAE8D48}"/>
+                <a16:creationId xmlns:a16="http://schemas.microsoft.com/office/drawing/2014/main" id="{35ACF4E4-73EA-446C-A504-1CE2E719149E}"/>
               </a:ext>
             </a:extLst>
           </p:cNvPr>
@@ -8391,7 +8391,7 @@
           <p:cNvPr id="12" name="">
             <a:extLst xmlns:a="http://schemas.openxmlformats.org/drawingml/2006/main">
               <a:ext uri="{FF2B5EF4-FFF2-40B4-BE49-F238E27FC236}">
-                <a16:creationId xmlns:a16="http://schemas.microsoft.com/office/drawing/2014/main" id="{C389797D-46EA-43EC-A16B-E58F638E28CE}"/>
+                <a16:creationId xmlns:a16="http://schemas.microsoft.com/office/drawing/2014/main" id="{20362DE4-A4C5-4E28-99B9-C37A766334C3}"/>
               </a:ext>
             </a:extLst>
           </p:cNvPr>
@@ -8422,7 +8422,7 @@
           <p:cNvPr id="13" name="">
             <a:extLst xmlns:a="http://schemas.openxmlformats.org/drawingml/2006/main">
               <a:ext uri="{FF2B5EF4-FFF2-40B4-BE49-F238E27FC236}">
-                <a16:creationId xmlns:a16="http://schemas.microsoft.com/office/drawing/2014/main" id="{18247C24-D7A3-4AE9-9BD7-099D056B64F3}"/>
+                <a16:creationId xmlns:a16="http://schemas.microsoft.com/office/drawing/2014/main" id="{A259A7C7-044F-4BA0-825C-771F48D796CD}"/>
               </a:ext>
             </a:extLst>
           </p:cNvPr>
@@ -8474,7 +8474,7 @@
           <p:cNvPr id="14" name="">
             <a:extLst xmlns:a="http://schemas.openxmlformats.org/drawingml/2006/main">
               <a:ext uri="{FF2B5EF4-FFF2-40B4-BE49-F238E27FC236}">
-                <a16:creationId xmlns:a16="http://schemas.microsoft.com/office/drawing/2014/main" id="{DF11A230-A6BC-4051-8F0C-27B41A118D15}"/>
+                <a16:creationId xmlns:a16="http://schemas.microsoft.com/office/drawing/2014/main" id="{5CC775BC-5C58-4556-8E09-D75969D829D5}"/>
               </a:ext>
             </a:extLst>
           </p:cNvPr>
@@ -8526,7 +8526,7 @@
           <p:cNvPr id="15" name="">
             <a:extLst xmlns:a="http://schemas.openxmlformats.org/drawingml/2006/main">
               <a:ext uri="{FF2B5EF4-FFF2-40B4-BE49-F238E27FC236}">
-                <a16:creationId xmlns:a16="http://schemas.microsoft.com/office/drawing/2014/main" id="{8E769BB7-48AD-44BD-A3E6-A531866E2775}"/>
+                <a16:creationId xmlns:a16="http://schemas.microsoft.com/office/drawing/2014/main" id="{418675FC-FA6F-4EFD-B000-EEFCEE82851E}"/>
               </a:ext>
             </a:extLst>
           </p:cNvPr>
@@ -8578,7 +8578,7 @@
           <p:cNvPr id="16" name="">
             <a:extLst xmlns:a="http://schemas.openxmlformats.org/drawingml/2006/main">
               <a:ext uri="{FF2B5EF4-FFF2-40B4-BE49-F238E27FC236}">
-                <a16:creationId xmlns:a16="http://schemas.microsoft.com/office/drawing/2014/main" id="{4818FEB8-F187-4B14-851B-741D30B2E84A}"/>
+                <a16:creationId xmlns:a16="http://schemas.microsoft.com/office/drawing/2014/main" id="{6A0809CE-66BE-40CA-8184-744636526E3D}"/>
               </a:ext>
             </a:extLst>
           </p:cNvPr>
@@ -8630,7 +8630,7 @@
           <p:cNvPr id="17" name="">
             <a:extLst xmlns:a="http://schemas.openxmlformats.org/drawingml/2006/main">
               <a:ext uri="{FF2B5EF4-FFF2-40B4-BE49-F238E27FC236}">
-                <a16:creationId xmlns:a16="http://schemas.microsoft.com/office/drawing/2014/main" id="{2AB5E495-3367-46CC-AA00-7836C3A986A6}"/>
+                <a16:creationId xmlns:a16="http://schemas.microsoft.com/office/drawing/2014/main" id="{0A625C7A-26EC-41E3-9C92-509C753754AE}"/>
               </a:ext>
             </a:extLst>
           </p:cNvPr>
@@ -8682,7 +8682,7 @@
           <p:cNvPr id="18" name="">
             <a:extLst xmlns:a="http://schemas.openxmlformats.org/drawingml/2006/main">
               <a:ext uri="{FF2B5EF4-FFF2-40B4-BE49-F238E27FC236}">
-                <a16:creationId xmlns:a16="http://schemas.microsoft.com/office/drawing/2014/main" id="{498857CE-E085-40B0-8AA6-46E4F6A48B58}"/>
+                <a16:creationId xmlns:a16="http://schemas.microsoft.com/office/drawing/2014/main" id="{FBF5E5BF-844A-4791-8E06-6719184EC1F0}"/>
               </a:ext>
             </a:extLst>
           </p:cNvPr>
@@ -8713,7 +8713,7 @@
           <p:cNvPr id="19" name="">
             <a:extLst xmlns:a="http://schemas.openxmlformats.org/drawingml/2006/main">
               <a:ext uri="{FF2B5EF4-FFF2-40B4-BE49-F238E27FC236}">
-                <a16:creationId xmlns:a16="http://schemas.microsoft.com/office/drawing/2014/main" id="{C8C404D4-C29F-4734-BFCB-A9B30E5DE6A9}"/>
+                <a16:creationId xmlns:a16="http://schemas.microsoft.com/office/drawing/2014/main" id="{41931AAA-E925-4B13-8AC9-328F0ECF4DC0}"/>
               </a:ext>
             </a:extLst>
           </p:cNvPr>
@@ -8765,7 +8765,7 @@
           <p:cNvPr id="20" name="">
             <a:extLst xmlns:a="http://schemas.openxmlformats.org/drawingml/2006/main">
               <a:ext uri="{FF2B5EF4-FFF2-40B4-BE49-F238E27FC236}">
-                <a16:creationId xmlns:a16="http://schemas.microsoft.com/office/drawing/2014/main" id="{696E215A-43A4-49A0-8401-5FADD441A841}"/>
+                <a16:creationId xmlns:a16="http://schemas.microsoft.com/office/drawing/2014/main" id="{C180CF31-8492-47A1-AE45-3F72D172C337}"/>
               </a:ext>
             </a:extLst>
           </p:cNvPr>
@@ -8817,7 +8817,7 @@
           <p:cNvPr id="21" name="">
             <a:extLst xmlns:a="http://schemas.openxmlformats.org/drawingml/2006/main">
               <a:ext uri="{FF2B5EF4-FFF2-40B4-BE49-F238E27FC236}">
-                <a16:creationId xmlns:a16="http://schemas.microsoft.com/office/drawing/2014/main" id="{C58EF76E-9851-40F6-9EDB-7D31A34C53D9}"/>
+                <a16:creationId xmlns:a16="http://schemas.microsoft.com/office/drawing/2014/main" id="{AD5BA468-69D4-4E23-9105-AF9C411E1067}"/>
               </a:ext>
             </a:extLst>
           </p:cNvPr>
@@ -8869,7 +8869,7 @@
           <p:cNvPr id="22" name="">
             <a:extLst xmlns:a="http://schemas.openxmlformats.org/drawingml/2006/main">
               <a:ext uri="{FF2B5EF4-FFF2-40B4-BE49-F238E27FC236}">
-                <a16:creationId xmlns:a16="http://schemas.microsoft.com/office/drawing/2014/main" id="{00002407-E6CF-40A1-A129-C08E984D19F3}"/>
+                <a16:creationId xmlns:a16="http://schemas.microsoft.com/office/drawing/2014/main" id="{693D952E-1FEB-435E-8794-5FD9817A8263}"/>
               </a:ext>
             </a:extLst>
           </p:cNvPr>
@@ -8921,7 +8921,7 @@
           <p:cNvPr id="23" name="">
             <a:extLst xmlns:a="http://schemas.openxmlformats.org/drawingml/2006/main">
               <a:ext uri="{FF2B5EF4-FFF2-40B4-BE49-F238E27FC236}">
-                <a16:creationId xmlns:a16="http://schemas.microsoft.com/office/drawing/2014/main" id="{0C0512DA-0741-41A3-BC06-BB6E4F482572}"/>
+                <a16:creationId xmlns:a16="http://schemas.microsoft.com/office/drawing/2014/main" id="{7CA82AB8-A84B-4EDE-9E33-756CCB44646C}"/>
               </a:ext>
             </a:extLst>
           </p:cNvPr>
@@ -8973,7 +8973,7 @@
           <p:cNvPr id="24" name="">
             <a:extLst xmlns:a="http://schemas.openxmlformats.org/drawingml/2006/main">
               <a:ext uri="{FF2B5EF4-FFF2-40B4-BE49-F238E27FC236}">
-                <a16:creationId xmlns:a16="http://schemas.microsoft.com/office/drawing/2014/main" id="{D7496CD0-79A4-41F8-AC64-7A9C4ACA4283}"/>
+                <a16:creationId xmlns:a16="http://schemas.microsoft.com/office/drawing/2014/main" id="{894D9895-C25A-4259-9F2A-3340AA47D0EA}"/>
               </a:ext>
             </a:extLst>
           </p:cNvPr>
@@ -9004,7 +9004,7 @@
           <p:cNvPr id="25" name="">
             <a:extLst xmlns:a="http://schemas.openxmlformats.org/drawingml/2006/main">
               <a:ext uri="{FF2B5EF4-FFF2-40B4-BE49-F238E27FC236}">
-                <a16:creationId xmlns:a16="http://schemas.microsoft.com/office/drawing/2014/main" id="{39AB61EF-3A52-4693-83BC-08C645704B51}"/>
+                <a16:creationId xmlns:a16="http://schemas.microsoft.com/office/drawing/2014/main" id="{C1E60E99-3E51-4835-BF34-A2A92542AD32}"/>
               </a:ext>
             </a:extLst>
           </p:cNvPr>
@@ -9035,7 +9035,7 @@
           <p:cNvPr id="26" name="">
             <a:extLst xmlns:a="http://schemas.openxmlformats.org/drawingml/2006/main">
               <a:ext uri="{FF2B5EF4-FFF2-40B4-BE49-F238E27FC236}">
-                <a16:creationId xmlns:a16="http://schemas.microsoft.com/office/drawing/2014/main" id="{1F6A4491-8772-4598-A309-1BE56E87507C}"/>
+                <a16:creationId xmlns:a16="http://schemas.microsoft.com/office/drawing/2014/main" id="{D1F4D9D1-0FEE-4DF1-A90D-3EC7663E55B0}"/>
               </a:ext>
             </a:extLst>
           </p:cNvPr>
@@ -9087,7 +9087,7 @@
           <p:cNvPr id="27" name="">
             <a:extLst xmlns:a="http://schemas.openxmlformats.org/drawingml/2006/main">
               <a:ext uri="{FF2B5EF4-FFF2-40B4-BE49-F238E27FC236}">
-                <a16:creationId xmlns:a16="http://schemas.microsoft.com/office/drawing/2014/main" id="{FBCD81C8-CD57-4E32-A547-BA4485BBE1BE}"/>
+                <a16:creationId xmlns:a16="http://schemas.microsoft.com/office/drawing/2014/main" id="{06973CA7-49A6-469B-B981-4CE259804060}"/>
               </a:ext>
             </a:extLst>
           </p:cNvPr>
@@ -9139,7 +9139,7 @@
           <p:cNvPr id="28" name="">
             <a:extLst xmlns:a="http://schemas.openxmlformats.org/drawingml/2006/main">
               <a:ext uri="{FF2B5EF4-FFF2-40B4-BE49-F238E27FC236}">
-                <a16:creationId xmlns:a16="http://schemas.microsoft.com/office/drawing/2014/main" id="{7BD140F4-5194-4CFA-A72F-993CB79B7B76}"/>
+                <a16:creationId xmlns:a16="http://schemas.microsoft.com/office/drawing/2014/main" id="{CA35A404-CC8B-4A3E-9A6A-BD25E4843979}"/>
               </a:ext>
             </a:extLst>
           </p:cNvPr>
@@ -9191,7 +9191,7 @@
           <p:cNvPr id="29" name="">
             <a:extLst xmlns:a="http://schemas.openxmlformats.org/drawingml/2006/main">
               <a:ext uri="{FF2B5EF4-FFF2-40B4-BE49-F238E27FC236}">
-                <a16:creationId xmlns:a16="http://schemas.microsoft.com/office/drawing/2014/main" id="{E74301A4-7E68-4E68-BCA5-DA87B497B20D}"/>
+                <a16:creationId xmlns:a16="http://schemas.microsoft.com/office/drawing/2014/main" id="{41BA8AAF-B215-4A21-837F-2C147FF0E597}"/>
               </a:ext>
             </a:extLst>
           </p:cNvPr>
@@ -9243,7 +9243,7 @@
           <p:cNvPr id="30" name="">
             <a:extLst xmlns:a="http://schemas.openxmlformats.org/drawingml/2006/main">
               <a:ext uri="{FF2B5EF4-FFF2-40B4-BE49-F238E27FC236}">
-                <a16:creationId xmlns:a16="http://schemas.microsoft.com/office/drawing/2014/main" id="{1BD70153-8EA7-4509-B136-2B7B78D7431B}"/>
+                <a16:creationId xmlns:a16="http://schemas.microsoft.com/office/drawing/2014/main" id="{8B5537F1-E8DB-4F4B-96F6-D7AACF72C60D}"/>
               </a:ext>
             </a:extLst>
           </p:cNvPr>
@@ -9295,7 +9295,7 @@
           <p:cNvPr id="31" name="">
             <a:extLst xmlns:a="http://schemas.openxmlformats.org/drawingml/2006/main">
               <a:ext uri="{FF2B5EF4-FFF2-40B4-BE49-F238E27FC236}">
-                <a16:creationId xmlns:a16="http://schemas.microsoft.com/office/drawing/2014/main" id="{14652EB5-5472-46CF-9781-0337976D3A7D}"/>
+                <a16:creationId xmlns:a16="http://schemas.microsoft.com/office/drawing/2014/main" id="{FB918EC0-5FEA-4DFC-BA47-91CE86A4FF9D}"/>
               </a:ext>
             </a:extLst>
           </p:cNvPr>
@@ -9326,7 +9326,7 @@
           <p:cNvPr id="32" name="">
             <a:extLst xmlns:a="http://schemas.openxmlformats.org/drawingml/2006/main">
               <a:ext uri="{FF2B5EF4-FFF2-40B4-BE49-F238E27FC236}">
-                <a16:creationId xmlns:a16="http://schemas.microsoft.com/office/drawing/2014/main" id="{5C32F354-EF4F-4C66-944A-0B189A73F5F6}"/>
+                <a16:creationId xmlns:a16="http://schemas.microsoft.com/office/drawing/2014/main" id="{8A0E3734-B3C3-4CD4-A575-089E455543BC}"/>
               </a:ext>
             </a:extLst>
           </p:cNvPr>
@@ -9378,7 +9378,7 @@
           <p:cNvPr id="33" name="">
             <a:extLst xmlns:a="http://schemas.openxmlformats.org/drawingml/2006/main">
               <a:ext uri="{FF2B5EF4-FFF2-40B4-BE49-F238E27FC236}">
-                <a16:creationId xmlns:a16="http://schemas.microsoft.com/office/drawing/2014/main" id="{30637129-2218-426E-B6C1-257332111998}"/>
+                <a16:creationId xmlns:a16="http://schemas.microsoft.com/office/drawing/2014/main" id="{5C3AA3EE-50E1-4B33-884B-8E1092D7AA5F}"/>
               </a:ext>
             </a:extLst>
           </p:cNvPr>
@@ -9430,7 +9430,7 @@
           <p:cNvPr id="34" name="">
             <a:extLst xmlns:a="http://schemas.openxmlformats.org/drawingml/2006/main">
               <a:ext uri="{FF2B5EF4-FFF2-40B4-BE49-F238E27FC236}">
-                <a16:creationId xmlns:a16="http://schemas.microsoft.com/office/drawing/2014/main" id="{6668F260-72D8-46BF-B075-5947047BF546}"/>
+                <a16:creationId xmlns:a16="http://schemas.microsoft.com/office/drawing/2014/main" id="{24981D58-5AF1-45BB-8EF3-CCB7E6DEE78A}"/>
               </a:ext>
             </a:extLst>
           </p:cNvPr>
@@ -9482,7 +9482,7 @@
           <p:cNvPr id="35" name="">
             <a:extLst xmlns:a="http://schemas.openxmlformats.org/drawingml/2006/main">
               <a:ext uri="{FF2B5EF4-FFF2-40B4-BE49-F238E27FC236}">
-                <a16:creationId xmlns:a16="http://schemas.microsoft.com/office/drawing/2014/main" id="{FB520EBF-83F5-4EF0-8942-9C19E0287E30}"/>
+                <a16:creationId xmlns:a16="http://schemas.microsoft.com/office/drawing/2014/main" id="{78140083-ED36-43CB-92D7-C0F375F915CA}"/>
               </a:ext>
             </a:extLst>
           </p:cNvPr>
@@ -9534,7 +9534,7 @@
           <p:cNvPr id="36" name="">
             <a:extLst xmlns:a="http://schemas.openxmlformats.org/drawingml/2006/main">
               <a:ext uri="{FF2B5EF4-FFF2-40B4-BE49-F238E27FC236}">
-                <a16:creationId xmlns:a16="http://schemas.microsoft.com/office/drawing/2014/main" id="{FE07F801-738C-42FB-A8C8-95CA8BE7198E}"/>
+                <a16:creationId xmlns:a16="http://schemas.microsoft.com/office/drawing/2014/main" id="{C9187F66-1DE2-4991-9E68-56C366FCF33A}"/>
               </a:ext>
             </a:extLst>
           </p:cNvPr>
@@ -9586,7 +9586,7 @@
           <p:cNvPr id="37" name="">
             <a:extLst xmlns:a="http://schemas.openxmlformats.org/drawingml/2006/main">
               <a:ext uri="{FF2B5EF4-FFF2-40B4-BE49-F238E27FC236}">
-                <a16:creationId xmlns:a16="http://schemas.microsoft.com/office/drawing/2014/main" id="{82B74CD9-B62E-4088-BD1B-758A440EEE94}"/>
+                <a16:creationId xmlns:a16="http://schemas.microsoft.com/office/drawing/2014/main" id="{4CD187D2-321B-44D2-8984-532B12564761}"/>
               </a:ext>
             </a:extLst>
           </p:cNvPr>
@@ -9617,7 +9617,7 @@
           <p:cNvPr id="38" name="">
             <a:extLst xmlns:a="http://schemas.openxmlformats.org/drawingml/2006/main">
               <a:ext uri="{FF2B5EF4-FFF2-40B4-BE49-F238E27FC236}">
-                <a16:creationId xmlns:a16="http://schemas.microsoft.com/office/drawing/2014/main" id="{6D95056C-DB3D-4156-8209-27D8EDAD346F}"/>
+                <a16:creationId xmlns:a16="http://schemas.microsoft.com/office/drawing/2014/main" id="{6B7A5571-4265-4990-8959-9114DF9CEA29}"/>
               </a:ext>
             </a:extLst>
           </p:cNvPr>
@@ -9648,7 +9648,7 @@
           <p:cNvPr id="39" name="">
             <a:extLst xmlns:a="http://schemas.openxmlformats.org/drawingml/2006/main">
               <a:ext uri="{FF2B5EF4-FFF2-40B4-BE49-F238E27FC236}">
-                <a16:creationId xmlns:a16="http://schemas.microsoft.com/office/drawing/2014/main" id="{C42A5AE1-0179-46C8-8A25-2F5CC3BE96A7}"/>
+                <a16:creationId xmlns:a16="http://schemas.microsoft.com/office/drawing/2014/main" id="{0B924D4B-3879-4F14-B1A4-F2301ADC133F}"/>
               </a:ext>
             </a:extLst>
           </p:cNvPr>
@@ -9700,7 +9700,7 @@
           <p:cNvPr id="40" name="">
             <a:extLst xmlns:a="http://schemas.openxmlformats.org/drawingml/2006/main">
               <a:ext uri="{FF2B5EF4-FFF2-40B4-BE49-F238E27FC236}">
-                <a16:creationId xmlns:a16="http://schemas.microsoft.com/office/drawing/2014/main" id="{E4ECD6DB-7309-49A3-BEA9-A39A4DF39FBF}"/>
+                <a16:creationId xmlns:a16="http://schemas.microsoft.com/office/drawing/2014/main" id="{F7AAD2B9-184A-4077-BC3F-6BB16A5ACD0C}"/>
               </a:ext>
             </a:extLst>
           </p:cNvPr>
@@ -9752,7 +9752,7 @@
           <p:cNvPr id="41" name="">
             <a:extLst xmlns:a="http://schemas.openxmlformats.org/drawingml/2006/main">
               <a:ext uri="{FF2B5EF4-FFF2-40B4-BE49-F238E27FC236}">
-                <a16:creationId xmlns:a16="http://schemas.microsoft.com/office/drawing/2014/main" id="{7C10C961-D687-4885-99BB-CB5B78B470E9}"/>
+                <a16:creationId xmlns:a16="http://schemas.microsoft.com/office/drawing/2014/main" id="{776017C4-A349-4A16-B764-7A0C24298668}"/>
               </a:ext>
             </a:extLst>
           </p:cNvPr>
@@ -9804,7 +9804,7 @@
           <p:cNvPr id="42" name="">
             <a:extLst xmlns:a="http://schemas.openxmlformats.org/drawingml/2006/main">
               <a:ext uri="{FF2B5EF4-FFF2-40B4-BE49-F238E27FC236}">
-                <a16:creationId xmlns:a16="http://schemas.microsoft.com/office/drawing/2014/main" id="{4CFDEF9D-DE36-4D75-94FD-47C6335F8D64}"/>
+                <a16:creationId xmlns:a16="http://schemas.microsoft.com/office/drawing/2014/main" id="{6AAC4F46-1193-45CB-B580-6171CD77A7EE}"/>
               </a:ext>
             </a:extLst>
           </p:cNvPr>
@@ -9856,7 +9856,7 @@
           <p:cNvPr id="43" name="">
             <a:extLst xmlns:a="http://schemas.openxmlformats.org/drawingml/2006/main">
               <a:ext uri="{FF2B5EF4-FFF2-40B4-BE49-F238E27FC236}">
-                <a16:creationId xmlns:a16="http://schemas.microsoft.com/office/drawing/2014/main" id="{12AA6D49-238C-4BC8-9023-4DCEA2A41EC7}"/>
+                <a16:creationId xmlns:a16="http://schemas.microsoft.com/office/drawing/2014/main" id="{8FE40B4B-178C-448E-95F6-9594E703F18A}"/>
               </a:ext>
             </a:extLst>
           </p:cNvPr>
@@ -9908,7 +9908,7 @@
           <p:cNvPr id="44" name="">
             <a:extLst xmlns:a="http://schemas.openxmlformats.org/drawingml/2006/main">
               <a:ext uri="{FF2B5EF4-FFF2-40B4-BE49-F238E27FC236}">
-                <a16:creationId xmlns:a16="http://schemas.microsoft.com/office/drawing/2014/main" id="{1AE17BA3-B314-469D-8A9B-B22FC8965AF1}"/>
+                <a16:creationId xmlns:a16="http://schemas.microsoft.com/office/drawing/2014/main" id="{85DF63F3-34E5-4D29-B06E-2E1FD386F511}"/>
               </a:ext>
             </a:extLst>
           </p:cNvPr>
@@ -9939,7 +9939,7 @@
           <p:cNvPr id="45" name="">
             <a:extLst xmlns:a="http://schemas.openxmlformats.org/drawingml/2006/main">
               <a:ext uri="{FF2B5EF4-FFF2-40B4-BE49-F238E27FC236}">
-                <a16:creationId xmlns:a16="http://schemas.microsoft.com/office/drawing/2014/main" id="{36DDD2CE-3677-43D2-BD02-5DF92E5950F4}"/>
+                <a16:creationId xmlns:a16="http://schemas.microsoft.com/office/drawing/2014/main" id="{F56FDC06-A980-441A-B9BB-5A61A09E9F07}"/>
               </a:ext>
             </a:extLst>
           </p:cNvPr>
@@ -9991,7 +9991,7 @@
           <p:cNvPr id="46" name="">
             <a:extLst xmlns:a="http://schemas.openxmlformats.org/drawingml/2006/main">
               <a:ext uri="{FF2B5EF4-FFF2-40B4-BE49-F238E27FC236}">
-                <a16:creationId xmlns:a16="http://schemas.microsoft.com/office/drawing/2014/main" id="{DCEE355A-D187-4378-9D49-82B156370D0E}"/>
+                <a16:creationId xmlns:a16="http://schemas.microsoft.com/office/drawing/2014/main" id="{30626462-BC25-4CE6-9528-8CDF8A7EC00D}"/>
               </a:ext>
             </a:extLst>
           </p:cNvPr>
@@ -10043,7 +10043,7 @@
           <p:cNvPr id="47" name="">
             <a:extLst xmlns:a="http://schemas.openxmlformats.org/drawingml/2006/main">
               <a:ext uri="{FF2B5EF4-FFF2-40B4-BE49-F238E27FC236}">
-                <a16:creationId xmlns:a16="http://schemas.microsoft.com/office/drawing/2014/main" id="{9F6F0454-2381-4A91-BBFC-BF2173433BDA}"/>
+                <a16:creationId xmlns:a16="http://schemas.microsoft.com/office/drawing/2014/main" id="{33DE8639-C0A9-49A8-8568-A989D0D77618}"/>
               </a:ext>
             </a:extLst>
           </p:cNvPr>
@@ -10095,7 +10095,7 @@
           <p:cNvPr id="48" name="">
             <a:extLst xmlns:a="http://schemas.openxmlformats.org/drawingml/2006/main">
               <a:ext uri="{FF2B5EF4-FFF2-40B4-BE49-F238E27FC236}">
-                <a16:creationId xmlns:a16="http://schemas.microsoft.com/office/drawing/2014/main" id="{9FDA4055-7D6A-4F5C-9418-E2F13F280100}"/>
+                <a16:creationId xmlns:a16="http://schemas.microsoft.com/office/drawing/2014/main" id="{78069138-E5F8-4080-9B43-2A04C637E388}"/>
               </a:ext>
             </a:extLst>
           </p:cNvPr>
@@ -10147,7 +10147,7 @@
           <p:cNvPr id="49" name="">
             <a:extLst xmlns:a="http://schemas.openxmlformats.org/drawingml/2006/main">
               <a:ext uri="{FF2B5EF4-FFF2-40B4-BE49-F238E27FC236}">
-                <a16:creationId xmlns:a16="http://schemas.microsoft.com/office/drawing/2014/main" id="{00312B80-C9FA-46C3-91DB-F25C4F20594B}"/>
+                <a16:creationId xmlns:a16="http://schemas.microsoft.com/office/drawing/2014/main" id="{E9B2E529-5A17-4CF5-8802-390EAB836FE5}"/>
               </a:ext>
             </a:extLst>
           </p:cNvPr>
@@ -10199,7 +10199,7 @@
           <p:cNvPr id="50" name="">
             <a:extLst xmlns:a="http://schemas.openxmlformats.org/drawingml/2006/main">
               <a:ext uri="{FF2B5EF4-FFF2-40B4-BE49-F238E27FC236}">
-                <a16:creationId xmlns:a16="http://schemas.microsoft.com/office/drawing/2014/main" id="{2191F8F6-BAEF-4842-B36D-EE35C7FD4CA7}"/>
+                <a16:creationId xmlns:a16="http://schemas.microsoft.com/office/drawing/2014/main" id="{2B91AFBD-4141-4752-A30E-9027CC3A1098}"/>
               </a:ext>
             </a:extLst>
           </p:cNvPr>
@@ -10251,7 +10251,7 @@
           <p:cNvPr id="51" name="">
             <a:extLst xmlns:a="http://schemas.openxmlformats.org/drawingml/2006/main">
               <a:ext uri="{FF2B5EF4-FFF2-40B4-BE49-F238E27FC236}">
-                <a16:creationId xmlns:a16="http://schemas.microsoft.com/office/drawing/2014/main" id="{9919503F-11DB-4074-B2EA-1726ADF5F930}"/>
+                <a16:creationId xmlns:a16="http://schemas.microsoft.com/office/drawing/2014/main" id="{A10DB263-13A1-4E1C-BB92-DDF5276126F6}"/>
               </a:ext>
             </a:extLst>
           </p:cNvPr>
@@ -10282,7 +10282,7 @@
           <p:cNvPr id="52" name="">
             <a:extLst xmlns:a="http://schemas.openxmlformats.org/drawingml/2006/main">
               <a:ext uri="{FF2B5EF4-FFF2-40B4-BE49-F238E27FC236}">
-                <a16:creationId xmlns:a16="http://schemas.microsoft.com/office/drawing/2014/main" id="{F18248FD-8527-4705-8157-7D7D118405D6}"/>
+                <a16:creationId xmlns:a16="http://schemas.microsoft.com/office/drawing/2014/main" id="{D09AE2A5-1533-41A2-8DA9-0538192E6A41}"/>
               </a:ext>
             </a:extLst>
           </p:cNvPr>
@@ -10313,7 +10313,7 @@
           <p:cNvPr id="53" name="">
             <a:extLst xmlns:a="http://schemas.openxmlformats.org/drawingml/2006/main">
               <a:ext uri="{FF2B5EF4-FFF2-40B4-BE49-F238E27FC236}">
-                <a16:creationId xmlns:a16="http://schemas.microsoft.com/office/drawing/2014/main" id="{2DE667CC-6858-403D-86EF-A8861ECF2979}"/>
+                <a16:creationId xmlns:a16="http://schemas.microsoft.com/office/drawing/2014/main" id="{3D798FA0-FECB-4599-A5C7-8A0253DC32D4}"/>
               </a:ext>
             </a:extLst>
           </p:cNvPr>
@@ -10344,7 +10344,7 @@
           <p:cNvPr id="54" name="">
             <a:extLst xmlns:a="http://schemas.openxmlformats.org/drawingml/2006/main">
               <a:ext uri="{FF2B5EF4-FFF2-40B4-BE49-F238E27FC236}">
-                <a16:creationId xmlns:a16="http://schemas.microsoft.com/office/drawing/2014/main" id="{6277321C-B71C-463B-8DBB-F8F983CD6109}"/>
+                <a16:creationId xmlns:a16="http://schemas.microsoft.com/office/drawing/2014/main" id="{1A35510E-CAFA-4AB6-805E-4DD36FA37F7D}"/>
               </a:ext>
             </a:extLst>
           </p:cNvPr>
@@ -10396,7 +10396,7 @@
           <p:cNvPr id="55" name="">
             <a:extLst xmlns:a="http://schemas.openxmlformats.org/drawingml/2006/main">
               <a:ext uri="{FF2B5EF4-FFF2-40B4-BE49-F238E27FC236}">
-                <a16:creationId xmlns:a16="http://schemas.microsoft.com/office/drawing/2014/main" id="{970D1E1B-26E6-443C-A8A4-25C4C8666F10}"/>
+                <a16:creationId xmlns:a16="http://schemas.microsoft.com/office/drawing/2014/main" id="{EDF40A74-AE1F-4E54-BB75-919A17FB48AE}"/>
               </a:ext>
             </a:extLst>
           </p:cNvPr>
@@ -10448,7 +10448,7 @@
           <p:cNvPr id="56" name="">
             <a:extLst xmlns:a="http://schemas.openxmlformats.org/drawingml/2006/main">
               <a:ext uri="{FF2B5EF4-FFF2-40B4-BE49-F238E27FC236}">
-                <a16:creationId xmlns:a16="http://schemas.microsoft.com/office/drawing/2014/main" id="{6F07EA1E-6141-4D8D-A521-FE9F3D942F05}"/>
+                <a16:creationId xmlns:a16="http://schemas.microsoft.com/office/drawing/2014/main" id="{791AA84F-7204-4308-8EFE-6E041AE1C97A}"/>
               </a:ext>
             </a:extLst>
           </p:cNvPr>
@@ -10500,7 +10500,7 @@
           <p:cNvPr id="57" name="">
             <a:extLst xmlns:a="http://schemas.openxmlformats.org/drawingml/2006/main">
               <a:ext uri="{FF2B5EF4-FFF2-40B4-BE49-F238E27FC236}">
-                <a16:creationId xmlns:a16="http://schemas.microsoft.com/office/drawing/2014/main" id="{38789602-7ADD-4472-9461-2B05FB5C96F2}"/>
+                <a16:creationId xmlns:a16="http://schemas.microsoft.com/office/drawing/2014/main" id="{F965D676-D72F-46D0-A33B-6EF6D685B7CA}"/>
               </a:ext>
             </a:extLst>
           </p:cNvPr>
@@ -10552,7 +10552,7 @@
           <p:cNvPr id="58" name="">
             <a:extLst xmlns:a="http://schemas.openxmlformats.org/drawingml/2006/main">
               <a:ext uri="{FF2B5EF4-FFF2-40B4-BE49-F238E27FC236}">
-                <a16:creationId xmlns:a16="http://schemas.microsoft.com/office/drawing/2014/main" id="{2AC015BD-8A63-47AB-A6F2-CF28F66D3E0E}"/>
+                <a16:creationId xmlns:a16="http://schemas.microsoft.com/office/drawing/2014/main" id="{FF87230B-507D-4C04-AB48-970657FCCC51}"/>
               </a:ext>
             </a:extLst>
           </p:cNvPr>
@@ -10604,7 +10604,7 @@
           <p:cNvPr id="59" name="">
             <a:extLst xmlns:a="http://schemas.openxmlformats.org/drawingml/2006/main">
               <a:ext uri="{FF2B5EF4-FFF2-40B4-BE49-F238E27FC236}">
-                <a16:creationId xmlns:a16="http://schemas.microsoft.com/office/drawing/2014/main" id="{F85C9779-D74F-40E3-940C-A5D66C8B7611}"/>
+                <a16:creationId xmlns:a16="http://schemas.microsoft.com/office/drawing/2014/main" id="{4844BB72-C1F3-4FB5-AED6-99C2B5E2BABE}"/>
               </a:ext>
             </a:extLst>
           </p:cNvPr>
@@ -10635,7 +10635,7 @@
           <p:cNvPr id="60" name="">
             <a:extLst xmlns:a="http://schemas.openxmlformats.org/drawingml/2006/main">
               <a:ext uri="{FF2B5EF4-FFF2-40B4-BE49-F238E27FC236}">
-                <a16:creationId xmlns:a16="http://schemas.microsoft.com/office/drawing/2014/main" id="{1DDC6BBA-4046-4349-BE08-7A1622ECEFF2}"/>
+                <a16:creationId xmlns:a16="http://schemas.microsoft.com/office/drawing/2014/main" id="{EFE40FBA-53A1-43AF-B2D5-D8775858716C}"/>
               </a:ext>
             </a:extLst>
           </p:cNvPr>
@@ -10687,7 +10687,7 @@
           <p:cNvPr id="61" name="">
             <a:extLst xmlns:a="http://schemas.openxmlformats.org/drawingml/2006/main">
               <a:ext uri="{FF2B5EF4-FFF2-40B4-BE49-F238E27FC236}">
-                <a16:creationId xmlns:a16="http://schemas.microsoft.com/office/drawing/2014/main" id="{941E9C43-F54A-4E38-AF6F-B60686594061}"/>
+                <a16:creationId xmlns:a16="http://schemas.microsoft.com/office/drawing/2014/main" id="{863C4589-F485-4616-A65D-74D403C55B8B}"/>
               </a:ext>
             </a:extLst>
           </p:cNvPr>
@@ -10739,7 +10739,7 @@
           <p:cNvPr id="62" name="">
             <a:extLst xmlns:a="http://schemas.openxmlformats.org/drawingml/2006/main">
               <a:ext uri="{FF2B5EF4-FFF2-40B4-BE49-F238E27FC236}">
-                <a16:creationId xmlns:a16="http://schemas.microsoft.com/office/drawing/2014/main" id="{966942F1-2100-4065-827E-DFA7A17FD29C}"/>
+                <a16:creationId xmlns:a16="http://schemas.microsoft.com/office/drawing/2014/main" id="{B08D3B6E-C234-418C-9434-8AF1A6AAB9B6}"/>
               </a:ext>
             </a:extLst>
           </p:cNvPr>
@@ -10791,7 +10791,7 @@
           <p:cNvPr id="63" name="">
             <a:extLst xmlns:a="http://schemas.openxmlformats.org/drawingml/2006/main">
               <a:ext uri="{FF2B5EF4-FFF2-40B4-BE49-F238E27FC236}">
-                <a16:creationId xmlns:a16="http://schemas.microsoft.com/office/drawing/2014/main" id="{30CE2A19-632C-4CAB-9AD5-17F4A4772CFF}"/>
+                <a16:creationId xmlns:a16="http://schemas.microsoft.com/office/drawing/2014/main" id="{FEBA816C-66FB-4C48-80A2-B8EF46A81084}"/>
               </a:ext>
             </a:extLst>
           </p:cNvPr>
@@ -10843,7 +10843,7 @@
           <p:cNvPr id="64" name="">
             <a:extLst xmlns:a="http://schemas.openxmlformats.org/drawingml/2006/main">
               <a:ext uri="{FF2B5EF4-FFF2-40B4-BE49-F238E27FC236}">
-                <a16:creationId xmlns:a16="http://schemas.microsoft.com/office/drawing/2014/main" id="{2368EE7A-3851-4200-AE49-5FF923F1170C}"/>
+                <a16:creationId xmlns:a16="http://schemas.microsoft.com/office/drawing/2014/main" id="{BF24E8F0-CE8A-4528-B571-C674E49FEB5F}"/>
               </a:ext>
             </a:extLst>
           </p:cNvPr>
@@ -10895,7 +10895,7 @@
           <p:cNvPr id="65" name="">
             <a:extLst xmlns:a="http://schemas.openxmlformats.org/drawingml/2006/main">
               <a:ext uri="{FF2B5EF4-FFF2-40B4-BE49-F238E27FC236}">
-                <a16:creationId xmlns:a16="http://schemas.microsoft.com/office/drawing/2014/main" id="{38F8BBE7-80F1-47D4-A4BE-8311263B64A1}"/>
+                <a16:creationId xmlns:a16="http://schemas.microsoft.com/office/drawing/2014/main" id="{7BA192AD-F742-4275-852B-08E46D48B97B}"/>
               </a:ext>
             </a:extLst>
           </p:cNvPr>
@@ -10926,7 +10926,7 @@
           <p:cNvPr id="66" name="">
             <a:extLst xmlns:a="http://schemas.openxmlformats.org/drawingml/2006/main">
               <a:ext uri="{FF2B5EF4-FFF2-40B4-BE49-F238E27FC236}">
-                <a16:creationId xmlns:a16="http://schemas.microsoft.com/office/drawing/2014/main" id="{F5D46F4F-9C3A-4E0C-885D-13252479712D}"/>
+                <a16:creationId xmlns:a16="http://schemas.microsoft.com/office/drawing/2014/main" id="{D5C9A17B-3DAE-48B4-9A3F-AC70BE10F80C}"/>
               </a:ext>
             </a:extLst>
           </p:cNvPr>
@@ -10957,7 +10957,7 @@
           <p:cNvPr id="67" name="">
             <a:extLst xmlns:a="http://schemas.openxmlformats.org/drawingml/2006/main">
               <a:ext uri="{FF2B5EF4-FFF2-40B4-BE49-F238E27FC236}">
-                <a16:creationId xmlns:a16="http://schemas.microsoft.com/office/drawing/2014/main" id="{65BBE246-217D-496D-88F6-27DABE0AAAB9}"/>
+                <a16:creationId xmlns:a16="http://schemas.microsoft.com/office/drawing/2014/main" id="{AE7CAE4A-7E89-4104-B0C1-81F6F3E9AE04}"/>
               </a:ext>
             </a:extLst>
           </p:cNvPr>
@@ -11009,7 +11009,7 @@
           <p:cNvPr id="68" name="">
             <a:extLst xmlns:a="http://schemas.openxmlformats.org/drawingml/2006/main">
               <a:ext uri="{FF2B5EF4-FFF2-40B4-BE49-F238E27FC236}">
-                <a16:creationId xmlns:a16="http://schemas.microsoft.com/office/drawing/2014/main" id="{CACF545A-752E-4081-9CD6-53DBCACEE2CE}"/>
+                <a16:creationId xmlns:a16="http://schemas.microsoft.com/office/drawing/2014/main" id="{5042E36A-42DC-498A-B849-244CB760CE85}"/>
               </a:ext>
             </a:extLst>
           </p:cNvPr>
@@ -11061,7 +11061,7 @@
           <p:cNvPr id="69" name="">
             <a:extLst xmlns:a="http://schemas.openxmlformats.org/drawingml/2006/main">
               <a:ext uri="{FF2B5EF4-FFF2-40B4-BE49-F238E27FC236}">
-                <a16:creationId xmlns:a16="http://schemas.microsoft.com/office/drawing/2014/main" id="{61571847-EA8A-4F8C-AA3B-89A34BF8107E}"/>
+                <a16:creationId xmlns:a16="http://schemas.microsoft.com/office/drawing/2014/main" id="{1573B167-3196-42B6-9D20-BB89FFE2236B}"/>
               </a:ext>
             </a:extLst>
           </p:cNvPr>
@@ -11113,7 +11113,7 @@
           <p:cNvPr id="70" name="">
             <a:extLst xmlns:a="http://schemas.openxmlformats.org/drawingml/2006/main">
               <a:ext uri="{FF2B5EF4-FFF2-40B4-BE49-F238E27FC236}">
-                <a16:creationId xmlns:a16="http://schemas.microsoft.com/office/drawing/2014/main" id="{1E70281C-45AF-4E6A-AD7A-24205FBD26BF}"/>
+                <a16:creationId xmlns:a16="http://schemas.microsoft.com/office/drawing/2014/main" id="{31C2F3BC-F48B-482A-852B-B9D6C6CCE638}"/>
               </a:ext>
             </a:extLst>
           </p:cNvPr>
@@ -11165,7 +11165,7 @@
           <p:cNvPr id="71" name="">
             <a:extLst xmlns:a="http://schemas.openxmlformats.org/drawingml/2006/main">
               <a:ext uri="{FF2B5EF4-FFF2-40B4-BE49-F238E27FC236}">
-                <a16:creationId xmlns:a16="http://schemas.microsoft.com/office/drawing/2014/main" id="{76DD76E0-6697-4C43-BF95-34AA2B842B6C}"/>
+                <a16:creationId xmlns:a16="http://schemas.microsoft.com/office/drawing/2014/main" id="{15CA76D5-40AA-42F4-849F-BB18479D3F07}"/>
               </a:ext>
             </a:extLst>
           </p:cNvPr>
@@ -11217,7 +11217,7 @@
           <p:cNvPr id="72" name="">
             <a:extLst xmlns:a="http://schemas.openxmlformats.org/drawingml/2006/main">
               <a:ext uri="{FF2B5EF4-FFF2-40B4-BE49-F238E27FC236}">
-                <a16:creationId xmlns:a16="http://schemas.microsoft.com/office/drawing/2014/main" id="{FA328E32-64C5-4AF1-843D-726EAC6F1A9B}"/>
+                <a16:creationId xmlns:a16="http://schemas.microsoft.com/office/drawing/2014/main" id="{072C023B-286F-4005-855D-3121A7890EA1}"/>
               </a:ext>
             </a:extLst>
           </p:cNvPr>
@@ -11248,7 +11248,7 @@
           <p:cNvPr id="73" name="">
             <a:extLst xmlns:a="http://schemas.openxmlformats.org/drawingml/2006/main">
               <a:ext uri="{FF2B5EF4-FFF2-40B4-BE49-F238E27FC236}">
-                <a16:creationId xmlns:a16="http://schemas.microsoft.com/office/drawing/2014/main" id="{87CBAA6C-35F6-4C3A-8E97-6F5EF33AE515}"/>
+                <a16:creationId xmlns:a16="http://schemas.microsoft.com/office/drawing/2014/main" id="{76E55DC3-597D-48C8-B0A4-901D1AC00368}"/>
               </a:ext>
             </a:extLst>
           </p:cNvPr>
@@ -11300,7 +11300,7 @@
           <p:cNvPr id="74" name="">
             <a:extLst xmlns:a="http://schemas.openxmlformats.org/drawingml/2006/main">
               <a:ext uri="{FF2B5EF4-FFF2-40B4-BE49-F238E27FC236}">
-                <a16:creationId xmlns:a16="http://schemas.microsoft.com/office/drawing/2014/main" id="{969B703C-0C3B-4EEB-ADDA-044EEF7FD0B4}"/>
+                <a16:creationId xmlns:a16="http://schemas.microsoft.com/office/drawing/2014/main" id="{099270A8-C18C-45B7-BF29-26FD4EF903A0}"/>
               </a:ext>
             </a:extLst>
           </p:cNvPr>
@@ -11352,7 +11352,7 @@
           <p:cNvPr id="75" name="">
             <a:extLst xmlns:a="http://schemas.openxmlformats.org/drawingml/2006/main">
               <a:ext uri="{FF2B5EF4-FFF2-40B4-BE49-F238E27FC236}">
-                <a16:creationId xmlns:a16="http://schemas.microsoft.com/office/drawing/2014/main" id="{F2724AE2-6E19-49D9-860F-42C5440F90AA}"/>
+                <a16:creationId xmlns:a16="http://schemas.microsoft.com/office/drawing/2014/main" id="{6FB68C99-4372-4E50-B0B3-F1B2CD3AE608}"/>
               </a:ext>
             </a:extLst>
           </p:cNvPr>
@@ -11404,7 +11404,7 @@
           <p:cNvPr id="76" name="">
             <a:extLst xmlns:a="http://schemas.openxmlformats.org/drawingml/2006/main">
               <a:ext uri="{FF2B5EF4-FFF2-40B4-BE49-F238E27FC236}">
-                <a16:creationId xmlns:a16="http://schemas.microsoft.com/office/drawing/2014/main" id="{38EBD7D6-BA22-4A69-B3C6-71DE7D112D5B}"/>
+                <a16:creationId xmlns:a16="http://schemas.microsoft.com/office/drawing/2014/main" id="{27F0E85E-A6F7-432D-B8E0-715865568F01}"/>
               </a:ext>
             </a:extLst>
           </p:cNvPr>
@@ -11456,7 +11456,7 @@
           <p:cNvPr id="77" name="">
             <a:extLst xmlns:a="http://schemas.openxmlformats.org/drawingml/2006/main">
               <a:ext uri="{FF2B5EF4-FFF2-40B4-BE49-F238E27FC236}">
-                <a16:creationId xmlns:a16="http://schemas.microsoft.com/office/drawing/2014/main" id="{D76EDCFE-897E-4A00-890A-543F327DD55C}"/>
+                <a16:creationId xmlns:a16="http://schemas.microsoft.com/office/drawing/2014/main" id="{54F69D59-6DD6-4BF2-9593-6BBE9E0F9B57}"/>
               </a:ext>
             </a:extLst>
           </p:cNvPr>
@@ -11508,7 +11508,7 @@
           <p:cNvPr id="78" name="">
             <a:extLst xmlns:a="http://schemas.openxmlformats.org/drawingml/2006/main">
               <a:ext uri="{FF2B5EF4-FFF2-40B4-BE49-F238E27FC236}">
-                <a16:creationId xmlns:a16="http://schemas.microsoft.com/office/drawing/2014/main" id="{F7EA4790-EF7F-47A2-9578-D8B1977C1400}"/>
+                <a16:creationId xmlns:a16="http://schemas.microsoft.com/office/drawing/2014/main" id="{E318ADC0-E163-44A1-8633-10E41BBF9899}"/>
               </a:ext>
             </a:extLst>
           </p:cNvPr>
@@ -11539,7 +11539,7 @@
           <p:cNvPr id="79" name="">
             <a:extLst xmlns:a="http://schemas.openxmlformats.org/drawingml/2006/main">
               <a:ext uri="{FF2B5EF4-FFF2-40B4-BE49-F238E27FC236}">
-                <a16:creationId xmlns:a16="http://schemas.microsoft.com/office/drawing/2014/main" id="{A1745C33-E6B7-476F-9BCB-57CFDD26FE92}"/>
+                <a16:creationId xmlns:a16="http://schemas.microsoft.com/office/drawing/2014/main" id="{B6079E38-521A-41A7-9E66-DFC1958BB34C}"/>
               </a:ext>
             </a:extLst>
           </p:cNvPr>
@@ -11570,7 +11570,7 @@
           <p:cNvPr id="80" name="">
             <a:extLst xmlns:a="http://schemas.openxmlformats.org/drawingml/2006/main">
               <a:ext uri="{FF2B5EF4-FFF2-40B4-BE49-F238E27FC236}">
-                <a16:creationId xmlns:a16="http://schemas.microsoft.com/office/drawing/2014/main" id="{59CE4E7B-4F3A-40AA-8186-FED9B6D312E1}"/>
+                <a16:creationId xmlns:a16="http://schemas.microsoft.com/office/drawing/2014/main" id="{395914FA-2102-4E4F-B9D4-A76FDF72FF9D}"/>
               </a:ext>
             </a:extLst>
           </p:cNvPr>
@@ -11622,7 +11622,7 @@
           <p:cNvPr id="81" name="">
             <a:extLst xmlns:a="http://schemas.openxmlformats.org/drawingml/2006/main">
               <a:ext uri="{FF2B5EF4-FFF2-40B4-BE49-F238E27FC236}">
-                <a16:creationId xmlns:a16="http://schemas.microsoft.com/office/drawing/2014/main" id="{1D2C25EC-F783-4740-B7F5-DBF4C77A6C5C}"/>
+                <a16:creationId xmlns:a16="http://schemas.microsoft.com/office/drawing/2014/main" id="{7EC4623A-7FA0-42B6-A533-D6EAE91D2929}"/>
               </a:ext>
             </a:extLst>
           </p:cNvPr>
@@ -11674,7 +11674,7 @@
           <p:cNvPr id="82" name="">
             <a:extLst xmlns:a="http://schemas.openxmlformats.org/drawingml/2006/main">
               <a:ext uri="{FF2B5EF4-FFF2-40B4-BE49-F238E27FC236}">
-                <a16:creationId xmlns:a16="http://schemas.microsoft.com/office/drawing/2014/main" id="{7F553B4F-B35B-4772-B164-F06BF39F4667}"/>
+                <a16:creationId xmlns:a16="http://schemas.microsoft.com/office/drawing/2014/main" id="{C17C6545-4A4C-4BE7-8650-70C6DC15C170}"/>
               </a:ext>
             </a:extLst>
           </p:cNvPr>
@@ -11726,7 +11726,7 @@
           <p:cNvPr id="83" name="">
             <a:extLst xmlns:a="http://schemas.openxmlformats.org/drawingml/2006/main">
               <a:ext uri="{FF2B5EF4-FFF2-40B4-BE49-F238E27FC236}">
-                <a16:creationId xmlns:a16="http://schemas.microsoft.com/office/drawing/2014/main" id="{36B2D336-88AD-485C-B684-ABE65F871CDD}"/>
+                <a16:creationId xmlns:a16="http://schemas.microsoft.com/office/drawing/2014/main" id="{AC05AC86-F6F8-43DC-AB9D-5EB4CF506807}"/>
               </a:ext>
             </a:extLst>
           </p:cNvPr>
@@ -11778,7 +11778,7 @@
           <p:cNvPr id="84" name="">
             <a:extLst xmlns:a="http://schemas.openxmlformats.org/drawingml/2006/main">
               <a:ext uri="{FF2B5EF4-FFF2-40B4-BE49-F238E27FC236}">
-                <a16:creationId xmlns:a16="http://schemas.microsoft.com/office/drawing/2014/main" id="{06CF1CE4-74DE-4E88-B668-7C152BF34486}"/>
+                <a16:creationId xmlns:a16="http://schemas.microsoft.com/office/drawing/2014/main" id="{8F1F69AA-181D-4D12-B1C0-EEF481F8024B}"/>
               </a:ext>
             </a:extLst>
           </p:cNvPr>
@@ -11830,7 +11830,7 @@
           <p:cNvPr id="85" name="">
             <a:extLst xmlns:a="http://schemas.openxmlformats.org/drawingml/2006/main">
               <a:ext uri="{FF2B5EF4-FFF2-40B4-BE49-F238E27FC236}">
-                <a16:creationId xmlns:a16="http://schemas.microsoft.com/office/drawing/2014/main" id="{CB1D9B8E-695E-41B1-83CD-97530C3F15B3}"/>
+                <a16:creationId xmlns:a16="http://schemas.microsoft.com/office/drawing/2014/main" id="{007235F8-C6BA-4BB9-A7F3-7C2C67571548}"/>
               </a:ext>
             </a:extLst>
           </p:cNvPr>
@@ -11861,7 +11861,7 @@
           <p:cNvPr id="86" name="">
             <a:extLst xmlns:a="http://schemas.openxmlformats.org/drawingml/2006/main">
               <a:ext uri="{FF2B5EF4-FFF2-40B4-BE49-F238E27FC236}">
-                <a16:creationId xmlns:a16="http://schemas.microsoft.com/office/drawing/2014/main" id="{5B601599-3A81-4CC5-A72E-316526F08994}"/>
+                <a16:creationId xmlns:a16="http://schemas.microsoft.com/office/drawing/2014/main" id="{2DD4BD8F-5332-4FF2-9708-8E4559BE48E3}"/>
               </a:ext>
             </a:extLst>
           </p:cNvPr>
@@ -11913,7 +11913,7 @@
           <p:cNvPr id="87" name="">
             <a:extLst xmlns:a="http://schemas.openxmlformats.org/drawingml/2006/main">
               <a:ext uri="{FF2B5EF4-FFF2-40B4-BE49-F238E27FC236}">
-                <a16:creationId xmlns:a16="http://schemas.microsoft.com/office/drawing/2014/main" id="{4AF15D69-354D-4243-9F1D-382C3E116DF9}"/>
+                <a16:creationId xmlns:a16="http://schemas.microsoft.com/office/drawing/2014/main" id="{2337BBAF-C5D4-4848-A8A7-9CA74670C651}"/>
               </a:ext>
             </a:extLst>
           </p:cNvPr>
@@ -11965,7 +11965,7 @@
           <p:cNvPr id="88" name="">
             <a:extLst xmlns:a="http://schemas.openxmlformats.org/drawingml/2006/main">
               <a:ext uri="{FF2B5EF4-FFF2-40B4-BE49-F238E27FC236}">
-                <a16:creationId xmlns:a16="http://schemas.microsoft.com/office/drawing/2014/main" id="{C5B2AB28-5360-4375-9BE3-419EB0CE1465}"/>
+                <a16:creationId xmlns:a16="http://schemas.microsoft.com/office/drawing/2014/main" id="{6FA7AA3C-AC31-4675-8CF3-689A69038F42}"/>
               </a:ext>
             </a:extLst>
           </p:cNvPr>
@@ -12017,7 +12017,7 @@
           <p:cNvPr id="89" name="">
             <a:extLst xmlns:a="http://schemas.openxmlformats.org/drawingml/2006/main">
               <a:ext uri="{FF2B5EF4-FFF2-40B4-BE49-F238E27FC236}">
-                <a16:creationId xmlns:a16="http://schemas.microsoft.com/office/drawing/2014/main" id="{38F5AF9E-3AFC-49DF-89C4-3FE5ABD6E420}"/>
+                <a16:creationId xmlns:a16="http://schemas.microsoft.com/office/drawing/2014/main" id="{8064F1EE-98A2-48AB-A871-D701F2A7B828}"/>
               </a:ext>
             </a:extLst>
           </p:cNvPr>
@@ -12069,7 +12069,7 @@
           <p:cNvPr id="90" name="">
             <a:extLst xmlns:a="http://schemas.openxmlformats.org/drawingml/2006/main">
               <a:ext uri="{FF2B5EF4-FFF2-40B4-BE49-F238E27FC236}">
-                <a16:creationId xmlns:a16="http://schemas.microsoft.com/office/drawing/2014/main" id="{71B10FDF-27A2-4DB4-B9D8-03E4DC4F84F6}"/>
+                <a16:creationId xmlns:a16="http://schemas.microsoft.com/office/drawing/2014/main" id="{052FC556-93C4-4FB8-A5F2-01521C243AC2}"/>
               </a:ext>
             </a:extLst>
           </p:cNvPr>
@@ -12121,7 +12121,7 @@
           <p:cNvPr id="91" name="">
             <a:extLst xmlns:a="http://schemas.openxmlformats.org/drawingml/2006/main">
               <a:ext uri="{FF2B5EF4-FFF2-40B4-BE49-F238E27FC236}">
-                <a16:creationId xmlns:a16="http://schemas.microsoft.com/office/drawing/2014/main" id="{B03D2CB6-BB3B-4B73-BBEA-E60ACB3598E9}"/>
+                <a16:creationId xmlns:a16="http://schemas.microsoft.com/office/drawing/2014/main" id="{7A6E2A46-970F-4D4C-A05B-C87939AC1097}"/>
               </a:ext>
             </a:extLst>
           </p:cNvPr>
@@ -12152,7 +12152,7 @@
           <p:cNvPr id="92" name="">
             <a:extLst xmlns:a="http://schemas.openxmlformats.org/drawingml/2006/main">
               <a:ext uri="{FF2B5EF4-FFF2-40B4-BE49-F238E27FC236}">
-                <a16:creationId xmlns:a16="http://schemas.microsoft.com/office/drawing/2014/main" id="{308AA48C-1B90-412D-B8EB-0B68BD20CA24}"/>
+                <a16:creationId xmlns:a16="http://schemas.microsoft.com/office/drawing/2014/main" id="{805BB38F-A63A-4935-9A91-0F268C66E8FF}"/>
               </a:ext>
             </a:extLst>
           </p:cNvPr>
@@ -12183,7 +12183,7 @@
           <p:cNvPr id="93" name="">
             <a:extLst xmlns:a="http://schemas.openxmlformats.org/drawingml/2006/main">
               <a:ext uri="{FF2B5EF4-FFF2-40B4-BE49-F238E27FC236}">
-                <a16:creationId xmlns:a16="http://schemas.microsoft.com/office/drawing/2014/main" id="{4E581DCC-D543-406D-8261-3218E4AEB73B}"/>
+                <a16:creationId xmlns:a16="http://schemas.microsoft.com/office/drawing/2014/main" id="{80B290C0-4639-4189-9108-6B8155081952}"/>
               </a:ext>
             </a:extLst>
           </p:cNvPr>
@@ -12235,7 +12235,7 @@
           <p:cNvPr id="94" name="">
             <a:extLst xmlns:a="http://schemas.openxmlformats.org/drawingml/2006/main">
               <a:ext uri="{FF2B5EF4-FFF2-40B4-BE49-F238E27FC236}">
-                <a16:creationId xmlns:a16="http://schemas.microsoft.com/office/drawing/2014/main" id="{DEE0DCA5-8727-4FA7-B81D-D61D4EB444FD}"/>
+                <a16:creationId xmlns:a16="http://schemas.microsoft.com/office/drawing/2014/main" id="{2AD71C21-1A4D-49AB-9CB6-D49B33F12DC4}"/>
               </a:ext>
             </a:extLst>
           </p:cNvPr>
@@ -12287,7 +12287,7 @@
           <p:cNvPr id="95" name="">
             <a:extLst xmlns:a="http://schemas.openxmlformats.org/drawingml/2006/main">
               <a:ext uri="{FF2B5EF4-FFF2-40B4-BE49-F238E27FC236}">
-                <a16:creationId xmlns:a16="http://schemas.microsoft.com/office/drawing/2014/main" id="{19B026A7-AD58-45D7-8B66-A88C4B503846}"/>
+                <a16:creationId xmlns:a16="http://schemas.microsoft.com/office/drawing/2014/main" id="{7582E816-E81C-42C7-8C33-4DE68F57EBF1}"/>
               </a:ext>
             </a:extLst>
           </p:cNvPr>
@@ -12339,7 +12339,7 @@
           <p:cNvPr id="96" name="">
             <a:extLst xmlns:a="http://schemas.openxmlformats.org/drawingml/2006/main">
               <a:ext uri="{FF2B5EF4-FFF2-40B4-BE49-F238E27FC236}">
-                <a16:creationId xmlns:a16="http://schemas.microsoft.com/office/drawing/2014/main" id="{8CF7DB54-3970-4E48-BE13-821A98946FFB}"/>
+                <a16:creationId xmlns:a16="http://schemas.microsoft.com/office/drawing/2014/main" id="{2873728B-65EE-4BED-B2A9-B139DDB3F129}"/>
               </a:ext>
             </a:extLst>
           </p:cNvPr>
@@ -12391,7 +12391,7 @@
           <p:cNvPr id="97" name="">
             <a:extLst xmlns:a="http://schemas.openxmlformats.org/drawingml/2006/main">
               <a:ext uri="{FF2B5EF4-FFF2-40B4-BE49-F238E27FC236}">
-                <a16:creationId xmlns:a16="http://schemas.microsoft.com/office/drawing/2014/main" id="{508C2983-2A60-4659-9048-98106EDA2A56}"/>
+                <a16:creationId xmlns:a16="http://schemas.microsoft.com/office/drawing/2014/main" id="{410C3B5A-155C-4C4B-8546-A81903CEEEB0}"/>
               </a:ext>
             </a:extLst>
           </p:cNvPr>
@@ -12441,7 +12441,7 @@
     </p:spTree>
     <p:extLst>
       <p:ext uri="{BB962C8B-B14F-4D97-AF65-F5344CB8AC3E}">
-        <p14:creationId xmlns:p14="http://schemas.microsoft.com/office/powerpoint/2010/main" val="1112147250"/>
+        <p14:creationId xmlns:p14="http://schemas.microsoft.com/office/powerpoint/2010/main" val="1248027665"/>
       </p:ext>
     </p:extLst>
   </p:cSld>
@@ -12472,7 +12472,7 @@
           <p:cNvPr id="102" name="">
             <a:extLst xmlns:a="http://schemas.openxmlformats.org/drawingml/2006/main">
               <a:ext uri="{FF2B5EF4-FFF2-40B4-BE49-F238E27FC236}">
-                <a16:creationId xmlns:a16="http://schemas.microsoft.com/office/drawing/2014/main" id="{27A558C4-164B-4BC0-B7D3-8E50D94D610D}"/>
+                <a16:creationId xmlns:a16="http://schemas.microsoft.com/office/drawing/2014/main" id="{8C1FE24E-D547-4834-A153-28147196EED4}"/>
               </a:ext>
             </a:extLst>
           </p:cNvPr>
@@ -12505,7 +12505,7 @@
           <p:cNvPr id="2" name="">
             <a:extLst xmlns:a="http://schemas.openxmlformats.org/drawingml/2006/main">
               <a:ext uri="{FF2B5EF4-FFF2-40B4-BE49-F238E27FC236}">
-                <a16:creationId xmlns:a16="http://schemas.microsoft.com/office/drawing/2014/main" id="{35735D12-B3F2-4CEC-8F75-8404AE2C97BE}"/>
+                <a16:creationId xmlns:a16="http://schemas.microsoft.com/office/drawing/2014/main" id="{9FB77B59-9648-41B3-B279-74087D8BE75F}"/>
               </a:ext>
             </a:extLst>
           </p:cNvPr>
@@ -12536,7 +12536,7 @@
           <p:cNvPr id="3" name="">
             <a:extLst xmlns:a="http://schemas.openxmlformats.org/drawingml/2006/main">
               <a:ext uri="{FF2B5EF4-FFF2-40B4-BE49-F238E27FC236}">
-                <a16:creationId xmlns:a16="http://schemas.microsoft.com/office/drawing/2014/main" id="{A4951C16-3895-4A98-B154-071E7DC34F22}"/>
+                <a16:creationId xmlns:a16="http://schemas.microsoft.com/office/drawing/2014/main" id="{8DA946C6-0C0F-466A-A478-9D97BAF909B5}"/>
               </a:ext>
             </a:extLst>
           </p:cNvPr>
@@ -12588,7 +12588,7 @@
           <p:cNvPr id="4" name="">
             <a:extLst xmlns:a="http://schemas.openxmlformats.org/drawingml/2006/main">
               <a:ext uri="{FF2B5EF4-FFF2-40B4-BE49-F238E27FC236}">
-                <a16:creationId xmlns:a16="http://schemas.microsoft.com/office/drawing/2014/main" id="{A8AB23CD-38EF-4FB7-B800-35AC59E3279F}"/>
+                <a16:creationId xmlns:a16="http://schemas.microsoft.com/office/drawing/2014/main" id="{61DA5789-6D2A-47C8-B01B-F55EF1E1C4D4}"/>
               </a:ext>
             </a:extLst>
           </p:cNvPr>
@@ -12640,7 +12640,7 @@
           <p:cNvPr id="5" name="">
             <a:extLst xmlns:a="http://schemas.openxmlformats.org/drawingml/2006/main">
               <a:ext uri="{FF2B5EF4-FFF2-40B4-BE49-F238E27FC236}">
-                <a16:creationId xmlns:a16="http://schemas.microsoft.com/office/drawing/2014/main" id="{621FC919-71AA-4FBA-A4A1-CC33990B4DE7}"/>
+                <a16:creationId xmlns:a16="http://schemas.microsoft.com/office/drawing/2014/main" id="{8D956C62-D1E5-4707-A483-9A7AC3039387}"/>
               </a:ext>
             </a:extLst>
           </p:cNvPr>
@@ -12675,7 +12675,7 @@
           <p:nvPr/>
         </p:nvPicPr>
         <p:blipFill>
-          <a:blip xmlns:r="http://schemas.openxmlformats.org/officeDocument/2006/relationships" xmlns:a="http://schemas.openxmlformats.org/drawingml/2006/main" r:embed="Rb7c1214fc82c410c"/>
+          <a:blip xmlns:r="http://schemas.openxmlformats.org/officeDocument/2006/relationships" xmlns:a="http://schemas.openxmlformats.org/drawingml/2006/main" r:embed="R7f9791f1eca747d4"/>
           <a:stretch xmlns:a="http://schemas.openxmlformats.org/drawingml/2006/main"/>
         </p:blipFill>
         <p:spPr>
@@ -12693,7 +12693,7 @@
           <p:cNvPr id="7" name="">
             <a:extLst xmlns:a="http://schemas.openxmlformats.org/drawingml/2006/main">
               <a:ext uri="{FF2B5EF4-FFF2-40B4-BE49-F238E27FC236}">
-                <a16:creationId xmlns:a16="http://schemas.microsoft.com/office/drawing/2014/main" id="{D227055F-7D20-496F-B43A-642BA0A930CC}"/>
+                <a16:creationId xmlns:a16="http://schemas.microsoft.com/office/drawing/2014/main" id="{DC8706F4-A9FC-4C2C-90A1-CB41B7FB352D}"/>
               </a:ext>
             </a:extLst>
           </p:cNvPr>
@@ -12745,7 +12745,7 @@
           <p:cNvPr id="8" name="">
             <a:extLst xmlns:a="http://schemas.openxmlformats.org/drawingml/2006/main">
               <a:ext uri="{FF2B5EF4-FFF2-40B4-BE49-F238E27FC236}">
-                <a16:creationId xmlns:a16="http://schemas.microsoft.com/office/drawing/2014/main" id="{80171CFA-CCE1-49FA-984F-C926083FF39A}"/>
+                <a16:creationId xmlns:a16="http://schemas.microsoft.com/office/drawing/2014/main" id="{3E4CF4F1-89AE-49F8-A283-9853CDF66B42}"/>
               </a:ext>
             </a:extLst>
           </p:cNvPr>
@@ -12797,7 +12797,7 @@
           <p:cNvPr id="9" name="">
             <a:extLst xmlns:a="http://schemas.openxmlformats.org/drawingml/2006/main">
               <a:ext uri="{FF2B5EF4-FFF2-40B4-BE49-F238E27FC236}">
-                <a16:creationId xmlns:a16="http://schemas.microsoft.com/office/drawing/2014/main" id="{6AE3BC72-28BA-427C-BE18-587832E758E0}"/>
+                <a16:creationId xmlns:a16="http://schemas.microsoft.com/office/drawing/2014/main" id="{772C1866-5B5F-4C58-A2D5-5C347CD3736D}"/>
               </a:ext>
             </a:extLst>
           </p:cNvPr>
@@ -12849,7 +12849,7 @@
           <p:cNvPr id="10" name="">
             <a:extLst xmlns:a="http://schemas.openxmlformats.org/drawingml/2006/main">
               <a:ext uri="{FF2B5EF4-FFF2-40B4-BE49-F238E27FC236}">
-                <a16:creationId xmlns:a16="http://schemas.microsoft.com/office/drawing/2014/main" id="{D46F4256-6655-47C1-8F10-0B3855CB9C4F}"/>
+                <a16:creationId xmlns:a16="http://schemas.microsoft.com/office/drawing/2014/main" id="{52BCBF82-8DD1-483C-948E-D2D076D55875}"/>
               </a:ext>
             </a:extLst>
           </p:cNvPr>
@@ -12901,7 +12901,7 @@
           <p:cNvPr id="11" name="">
             <a:extLst xmlns:a="http://schemas.openxmlformats.org/drawingml/2006/main">
               <a:ext uri="{FF2B5EF4-FFF2-40B4-BE49-F238E27FC236}">
-                <a16:creationId xmlns:a16="http://schemas.microsoft.com/office/drawing/2014/main" id="{87E57394-7EB7-49B7-AE2F-34E3EDD5B2BA}"/>
+                <a16:creationId xmlns:a16="http://schemas.microsoft.com/office/drawing/2014/main" id="{6656F0E3-8593-482F-8F8C-0899D8148B66}"/>
               </a:ext>
             </a:extLst>
           </p:cNvPr>
@@ -12932,7 +12932,7 @@
           <p:cNvPr id="12" name="">
             <a:extLst xmlns:a="http://schemas.openxmlformats.org/drawingml/2006/main">
               <a:ext uri="{FF2B5EF4-FFF2-40B4-BE49-F238E27FC236}">
-                <a16:creationId xmlns:a16="http://schemas.microsoft.com/office/drawing/2014/main" id="{FE38F571-E9B0-40AE-BEDA-3E1FD4FA4023}"/>
+                <a16:creationId xmlns:a16="http://schemas.microsoft.com/office/drawing/2014/main" id="{0DEA5756-3668-475D-AB4C-C92E6ADB9423}"/>
               </a:ext>
             </a:extLst>
           </p:cNvPr>
@@ -12963,7 +12963,7 @@
           <p:cNvPr id="13" name="">
             <a:extLst xmlns:a="http://schemas.openxmlformats.org/drawingml/2006/main">
               <a:ext uri="{FF2B5EF4-FFF2-40B4-BE49-F238E27FC236}">
-                <a16:creationId xmlns:a16="http://schemas.microsoft.com/office/drawing/2014/main" id="{68CE93DF-823F-4673-9A4B-C5D63947E4DC}"/>
+                <a16:creationId xmlns:a16="http://schemas.microsoft.com/office/drawing/2014/main" id="{2CA9701E-25CD-4D65-8590-1F8B59C34807}"/>
               </a:ext>
             </a:extLst>
           </p:cNvPr>
@@ -13015,7 +13015,7 @@
           <p:cNvPr id="14" name="">
             <a:extLst xmlns:a="http://schemas.openxmlformats.org/drawingml/2006/main">
               <a:ext uri="{FF2B5EF4-FFF2-40B4-BE49-F238E27FC236}">
-                <a16:creationId xmlns:a16="http://schemas.microsoft.com/office/drawing/2014/main" id="{74DCA459-F2A6-4DEC-8FFB-4A6A0D9B355C}"/>
+                <a16:creationId xmlns:a16="http://schemas.microsoft.com/office/drawing/2014/main" id="{B8F2FDB5-334D-40B4-A305-21BDC083C8D5}"/>
               </a:ext>
             </a:extLst>
           </p:cNvPr>
@@ -13067,7 +13067,7 @@
           <p:cNvPr id="15" name="">
             <a:extLst xmlns:a="http://schemas.openxmlformats.org/drawingml/2006/main">
               <a:ext uri="{FF2B5EF4-FFF2-40B4-BE49-F238E27FC236}">
-                <a16:creationId xmlns:a16="http://schemas.microsoft.com/office/drawing/2014/main" id="{6DECB25F-74F8-4576-A8D8-2626D86B6104}"/>
+                <a16:creationId xmlns:a16="http://schemas.microsoft.com/office/drawing/2014/main" id="{D8E0170C-5889-4E30-89D5-1BA1BABDFE7C}"/>
               </a:ext>
             </a:extLst>
           </p:cNvPr>
@@ -13119,7 +13119,7 @@
           <p:cNvPr id="16" name="">
             <a:extLst xmlns:a="http://schemas.openxmlformats.org/drawingml/2006/main">
               <a:ext uri="{FF2B5EF4-FFF2-40B4-BE49-F238E27FC236}">
-                <a16:creationId xmlns:a16="http://schemas.microsoft.com/office/drawing/2014/main" id="{66B8B517-1658-482C-B5FA-19DC106351D5}"/>
+                <a16:creationId xmlns:a16="http://schemas.microsoft.com/office/drawing/2014/main" id="{2DFF6EF2-5E29-4624-8ABB-C93B871519FF}"/>
               </a:ext>
             </a:extLst>
           </p:cNvPr>
@@ -13171,7 +13171,7 @@
           <p:cNvPr id="17" name="">
             <a:extLst xmlns:a="http://schemas.openxmlformats.org/drawingml/2006/main">
               <a:ext uri="{FF2B5EF4-FFF2-40B4-BE49-F238E27FC236}">
-                <a16:creationId xmlns:a16="http://schemas.microsoft.com/office/drawing/2014/main" id="{AC482703-E4F0-4793-9441-A91F3C4EE26B}"/>
+                <a16:creationId xmlns:a16="http://schemas.microsoft.com/office/drawing/2014/main" id="{FF52CBD9-C80D-44ED-BC15-6895A96FD182}"/>
               </a:ext>
             </a:extLst>
           </p:cNvPr>
@@ -13223,7 +13223,7 @@
           <p:cNvPr id="18" name="">
             <a:extLst xmlns:a="http://schemas.openxmlformats.org/drawingml/2006/main">
               <a:ext uri="{FF2B5EF4-FFF2-40B4-BE49-F238E27FC236}">
-                <a16:creationId xmlns:a16="http://schemas.microsoft.com/office/drawing/2014/main" id="{2B83E1EC-DA0B-43B0-AD1D-CDC1F26A6DAC}"/>
+                <a16:creationId xmlns:a16="http://schemas.microsoft.com/office/drawing/2014/main" id="{65378CA0-3B38-4A41-BA7F-AED1964BADA1}"/>
               </a:ext>
             </a:extLst>
           </p:cNvPr>
@@ -13254,7 +13254,7 @@
           <p:cNvPr id="19" name="">
             <a:extLst xmlns:a="http://schemas.openxmlformats.org/drawingml/2006/main">
               <a:ext uri="{FF2B5EF4-FFF2-40B4-BE49-F238E27FC236}">
-                <a16:creationId xmlns:a16="http://schemas.microsoft.com/office/drawing/2014/main" id="{2C36F910-91F9-44AB-B89A-1A3373319919}"/>
+                <a16:creationId xmlns:a16="http://schemas.microsoft.com/office/drawing/2014/main" id="{56E7AF88-ED3E-4B7D-964B-A35E78C90B99}"/>
               </a:ext>
             </a:extLst>
           </p:cNvPr>
@@ -13306,7 +13306,7 @@
           <p:cNvPr id="20" name="">
             <a:extLst xmlns:a="http://schemas.openxmlformats.org/drawingml/2006/main">
               <a:ext uri="{FF2B5EF4-FFF2-40B4-BE49-F238E27FC236}">
-                <a16:creationId xmlns:a16="http://schemas.microsoft.com/office/drawing/2014/main" id="{DC1174B4-B1A2-4F70-A0F2-10862EE16AD2}"/>
+                <a16:creationId xmlns:a16="http://schemas.microsoft.com/office/drawing/2014/main" id="{E42D6937-7F31-464C-8E8F-6E569D26C789}"/>
               </a:ext>
             </a:extLst>
           </p:cNvPr>
@@ -13358,7 +13358,7 @@
           <p:cNvPr id="21" name="">
             <a:extLst xmlns:a="http://schemas.openxmlformats.org/drawingml/2006/main">
               <a:ext uri="{FF2B5EF4-FFF2-40B4-BE49-F238E27FC236}">
-                <a16:creationId xmlns:a16="http://schemas.microsoft.com/office/drawing/2014/main" id="{7AF85DE7-E4A6-4DEA-B808-B580F95CDB4A}"/>
+                <a16:creationId xmlns:a16="http://schemas.microsoft.com/office/drawing/2014/main" id="{16D176DB-BB05-40F8-9168-E613FBCAC9F9}"/>
               </a:ext>
             </a:extLst>
           </p:cNvPr>
@@ -13410,7 +13410,7 @@
           <p:cNvPr id="22" name="">
             <a:extLst xmlns:a="http://schemas.openxmlformats.org/drawingml/2006/main">
               <a:ext uri="{FF2B5EF4-FFF2-40B4-BE49-F238E27FC236}">
-                <a16:creationId xmlns:a16="http://schemas.microsoft.com/office/drawing/2014/main" id="{D3C6E9F0-4807-424F-8EEE-E84DB4FF9EA6}"/>
+                <a16:creationId xmlns:a16="http://schemas.microsoft.com/office/drawing/2014/main" id="{0D02B850-7EE6-4FDF-9BF8-CF0E1BDC8DCF}"/>
               </a:ext>
             </a:extLst>
           </p:cNvPr>
@@ -13462,7 +13462,7 @@
           <p:cNvPr id="23" name="">
             <a:extLst xmlns:a="http://schemas.openxmlformats.org/drawingml/2006/main">
               <a:ext uri="{FF2B5EF4-FFF2-40B4-BE49-F238E27FC236}">
-                <a16:creationId xmlns:a16="http://schemas.microsoft.com/office/drawing/2014/main" id="{F6EF89D8-0F02-4A55-AECD-B246C842CC56}"/>
+                <a16:creationId xmlns:a16="http://schemas.microsoft.com/office/drawing/2014/main" id="{6BFD129F-4066-4A0B-8C1E-B0266B08D385}"/>
               </a:ext>
             </a:extLst>
           </p:cNvPr>
@@ -13514,7 +13514,7 @@
           <p:cNvPr id="24" name="">
             <a:extLst xmlns:a="http://schemas.openxmlformats.org/drawingml/2006/main">
               <a:ext uri="{FF2B5EF4-FFF2-40B4-BE49-F238E27FC236}">
-                <a16:creationId xmlns:a16="http://schemas.microsoft.com/office/drawing/2014/main" id="{16B365F3-18A0-40AA-B754-C8E453325235}"/>
+                <a16:creationId xmlns:a16="http://schemas.microsoft.com/office/drawing/2014/main" id="{0FE905D3-FB54-4B74-BC40-FE9635B9A897}"/>
               </a:ext>
             </a:extLst>
           </p:cNvPr>
@@ -13545,7 +13545,7 @@
           <p:cNvPr id="25" name="">
             <a:extLst xmlns:a="http://schemas.openxmlformats.org/drawingml/2006/main">
               <a:ext uri="{FF2B5EF4-FFF2-40B4-BE49-F238E27FC236}">
-                <a16:creationId xmlns:a16="http://schemas.microsoft.com/office/drawing/2014/main" id="{1263707B-5E39-4706-82D1-4BDD8348223B}"/>
+                <a16:creationId xmlns:a16="http://schemas.microsoft.com/office/drawing/2014/main" id="{54B883AD-131D-40BE-B1B3-3BC52FA90B0C}"/>
               </a:ext>
             </a:extLst>
           </p:cNvPr>
@@ -13576,7 +13576,7 @@
           <p:cNvPr id="26" name="">
             <a:extLst xmlns:a="http://schemas.openxmlformats.org/drawingml/2006/main">
               <a:ext uri="{FF2B5EF4-FFF2-40B4-BE49-F238E27FC236}">
-                <a16:creationId xmlns:a16="http://schemas.microsoft.com/office/drawing/2014/main" id="{EF693F16-BE69-4A1B-BEC0-5761DE861111}"/>
+                <a16:creationId xmlns:a16="http://schemas.microsoft.com/office/drawing/2014/main" id="{53677F76-0265-4A3C-AE38-EF34A9D7BA5A}"/>
               </a:ext>
             </a:extLst>
           </p:cNvPr>
@@ -13628,7 +13628,7 @@
           <p:cNvPr id="27" name="">
             <a:extLst xmlns:a="http://schemas.openxmlformats.org/drawingml/2006/main">
               <a:ext uri="{FF2B5EF4-FFF2-40B4-BE49-F238E27FC236}">
-                <a16:creationId xmlns:a16="http://schemas.microsoft.com/office/drawing/2014/main" id="{15D0A4ED-CA95-456F-8478-6328B7220DF2}"/>
+                <a16:creationId xmlns:a16="http://schemas.microsoft.com/office/drawing/2014/main" id="{3DC6E511-77DF-4198-9410-ED73FB6B258B}"/>
               </a:ext>
             </a:extLst>
           </p:cNvPr>
@@ -13680,7 +13680,7 @@
           <p:cNvPr id="28" name="">
             <a:extLst xmlns:a="http://schemas.openxmlformats.org/drawingml/2006/main">
               <a:ext uri="{FF2B5EF4-FFF2-40B4-BE49-F238E27FC236}">
-                <a16:creationId xmlns:a16="http://schemas.microsoft.com/office/drawing/2014/main" id="{B563A665-A806-4EC9-9792-33364BB5921A}"/>
+                <a16:creationId xmlns:a16="http://schemas.microsoft.com/office/drawing/2014/main" id="{52E3DDA4-B708-4DDF-8EFB-B1C46C4A4E62}"/>
               </a:ext>
             </a:extLst>
           </p:cNvPr>
@@ -13732,7 +13732,7 @@
           <p:cNvPr id="29" name="">
             <a:extLst xmlns:a="http://schemas.openxmlformats.org/drawingml/2006/main">
               <a:ext uri="{FF2B5EF4-FFF2-40B4-BE49-F238E27FC236}">
-                <a16:creationId xmlns:a16="http://schemas.microsoft.com/office/drawing/2014/main" id="{768D84BC-D0A4-423E-8BDA-CDB3F38E1374}"/>
+                <a16:creationId xmlns:a16="http://schemas.microsoft.com/office/drawing/2014/main" id="{8DA6547B-10A4-4FE2-B473-F9B15CE51F34}"/>
               </a:ext>
             </a:extLst>
           </p:cNvPr>
@@ -13784,7 +13784,7 @@
           <p:cNvPr id="30" name="">
             <a:extLst xmlns:a="http://schemas.openxmlformats.org/drawingml/2006/main">
               <a:ext uri="{FF2B5EF4-FFF2-40B4-BE49-F238E27FC236}">
-                <a16:creationId xmlns:a16="http://schemas.microsoft.com/office/drawing/2014/main" id="{A32B3232-0021-42DF-8F3F-929CF8F58B29}"/>
+                <a16:creationId xmlns:a16="http://schemas.microsoft.com/office/drawing/2014/main" id="{FB817D43-4A91-493C-94DD-9E87B868C0C0}"/>
               </a:ext>
             </a:extLst>
           </p:cNvPr>
@@ -13836,7 +13836,7 @@
           <p:cNvPr id="31" name="">
             <a:extLst xmlns:a="http://schemas.openxmlformats.org/drawingml/2006/main">
               <a:ext uri="{FF2B5EF4-FFF2-40B4-BE49-F238E27FC236}">
-                <a16:creationId xmlns:a16="http://schemas.microsoft.com/office/drawing/2014/main" id="{6868E6CC-87D8-457C-96BC-F6FD3B94B76B}"/>
+                <a16:creationId xmlns:a16="http://schemas.microsoft.com/office/drawing/2014/main" id="{AB225283-7283-4D52-AADC-0BAFBBEAC4D5}"/>
               </a:ext>
             </a:extLst>
           </p:cNvPr>
@@ -13867,7 +13867,7 @@
           <p:cNvPr id="32" name="">
             <a:extLst xmlns:a="http://schemas.openxmlformats.org/drawingml/2006/main">
               <a:ext uri="{FF2B5EF4-FFF2-40B4-BE49-F238E27FC236}">
-                <a16:creationId xmlns:a16="http://schemas.microsoft.com/office/drawing/2014/main" id="{8CE377BF-E6F0-4282-B9B6-2D503FBFA100}"/>
+                <a16:creationId xmlns:a16="http://schemas.microsoft.com/office/drawing/2014/main" id="{CE5F9A33-C10F-4DB4-9F1B-D78FC882075D}"/>
               </a:ext>
             </a:extLst>
           </p:cNvPr>
@@ -13919,7 +13919,7 @@
           <p:cNvPr id="33" name="">
             <a:extLst xmlns:a="http://schemas.openxmlformats.org/drawingml/2006/main">
               <a:ext uri="{FF2B5EF4-FFF2-40B4-BE49-F238E27FC236}">
-                <a16:creationId xmlns:a16="http://schemas.microsoft.com/office/drawing/2014/main" id="{66B93E2B-FA72-4BC5-A03C-5F2367B90059}"/>
+                <a16:creationId xmlns:a16="http://schemas.microsoft.com/office/drawing/2014/main" id="{5D94116A-EC00-4A94-9865-231B68976AFE}"/>
               </a:ext>
             </a:extLst>
           </p:cNvPr>
@@ -13971,7 +13971,7 @@
           <p:cNvPr id="34" name="">
             <a:extLst xmlns:a="http://schemas.openxmlformats.org/drawingml/2006/main">
               <a:ext uri="{FF2B5EF4-FFF2-40B4-BE49-F238E27FC236}">
-                <a16:creationId xmlns:a16="http://schemas.microsoft.com/office/drawing/2014/main" id="{9686DC66-C727-4BEE-A865-229E6E246C6E}"/>
+                <a16:creationId xmlns:a16="http://schemas.microsoft.com/office/drawing/2014/main" id="{8E04BF3A-BA0F-4EEA-9265-BEF9CF40BA0A}"/>
               </a:ext>
             </a:extLst>
           </p:cNvPr>
@@ -14023,7 +14023,7 @@
           <p:cNvPr id="35" name="">
             <a:extLst xmlns:a="http://schemas.openxmlformats.org/drawingml/2006/main">
               <a:ext uri="{FF2B5EF4-FFF2-40B4-BE49-F238E27FC236}">
-                <a16:creationId xmlns:a16="http://schemas.microsoft.com/office/drawing/2014/main" id="{FA7B248B-4975-486A-85C0-07689FA0AB3B}"/>
+                <a16:creationId xmlns:a16="http://schemas.microsoft.com/office/drawing/2014/main" id="{2BA3A733-6578-495A-BE27-0E0294BCD106}"/>
               </a:ext>
             </a:extLst>
           </p:cNvPr>
@@ -14075,7 +14075,7 @@
           <p:cNvPr id="36" name="">
             <a:extLst xmlns:a="http://schemas.openxmlformats.org/drawingml/2006/main">
               <a:ext uri="{FF2B5EF4-FFF2-40B4-BE49-F238E27FC236}">
-                <a16:creationId xmlns:a16="http://schemas.microsoft.com/office/drawing/2014/main" id="{AD783139-B0A8-47BA-8910-A2B18BDBE10C}"/>
+                <a16:creationId xmlns:a16="http://schemas.microsoft.com/office/drawing/2014/main" id="{2DC2F9C8-DC76-4F64-870B-BAF98060069F}"/>
               </a:ext>
             </a:extLst>
           </p:cNvPr>
@@ -14127,7 +14127,7 @@
           <p:cNvPr id="37" name="">
             <a:extLst xmlns:a="http://schemas.openxmlformats.org/drawingml/2006/main">
               <a:ext uri="{FF2B5EF4-FFF2-40B4-BE49-F238E27FC236}">
-                <a16:creationId xmlns:a16="http://schemas.microsoft.com/office/drawing/2014/main" id="{6F2FA529-18FE-4CCA-B012-E752868A5E26}"/>
+                <a16:creationId xmlns:a16="http://schemas.microsoft.com/office/drawing/2014/main" id="{A4A422A8-9EE3-4E0B-B484-E403027D6E81}"/>
               </a:ext>
             </a:extLst>
           </p:cNvPr>
@@ -14158,7 +14158,7 @@
           <p:cNvPr id="38" name="">
             <a:extLst xmlns:a="http://schemas.openxmlformats.org/drawingml/2006/main">
               <a:ext uri="{FF2B5EF4-FFF2-40B4-BE49-F238E27FC236}">
-                <a16:creationId xmlns:a16="http://schemas.microsoft.com/office/drawing/2014/main" id="{7583C92F-129C-40E8-8739-6CCF689CE0E7}"/>
+                <a16:creationId xmlns:a16="http://schemas.microsoft.com/office/drawing/2014/main" id="{F82FC8E4-F513-4825-A086-6A9ECDB0AE97}"/>
               </a:ext>
             </a:extLst>
           </p:cNvPr>
@@ -14189,7 +14189,7 @@
           <p:cNvPr id="39" name="">
             <a:extLst xmlns:a="http://schemas.openxmlformats.org/drawingml/2006/main">
               <a:ext uri="{FF2B5EF4-FFF2-40B4-BE49-F238E27FC236}">
-                <a16:creationId xmlns:a16="http://schemas.microsoft.com/office/drawing/2014/main" id="{2EE9ADAC-C916-4706-A353-9562AAA98E2E}"/>
+                <a16:creationId xmlns:a16="http://schemas.microsoft.com/office/drawing/2014/main" id="{BDDE71FC-FCBA-4AA8-B67B-6BE92437414D}"/>
               </a:ext>
             </a:extLst>
           </p:cNvPr>
@@ -14241,7 +14241,7 @@
           <p:cNvPr id="40" name="">
             <a:extLst xmlns:a="http://schemas.openxmlformats.org/drawingml/2006/main">
               <a:ext uri="{FF2B5EF4-FFF2-40B4-BE49-F238E27FC236}">
-                <a16:creationId xmlns:a16="http://schemas.microsoft.com/office/drawing/2014/main" id="{41265909-BA50-4990-B437-D359433BCB41}"/>
+                <a16:creationId xmlns:a16="http://schemas.microsoft.com/office/drawing/2014/main" id="{B17823E9-423F-4728-84F3-66C63C4AA6A1}"/>
               </a:ext>
             </a:extLst>
           </p:cNvPr>
@@ -14293,7 +14293,7 @@
           <p:cNvPr id="41" name="">
             <a:extLst xmlns:a="http://schemas.openxmlformats.org/drawingml/2006/main">
               <a:ext uri="{FF2B5EF4-FFF2-40B4-BE49-F238E27FC236}">
-                <a16:creationId xmlns:a16="http://schemas.microsoft.com/office/drawing/2014/main" id="{09155163-A93C-4652-BBDC-E4BD63C7799C}"/>
+                <a16:creationId xmlns:a16="http://schemas.microsoft.com/office/drawing/2014/main" id="{8060200F-3B73-4580-A983-84001F17A046}"/>
               </a:ext>
             </a:extLst>
           </p:cNvPr>
@@ -14345,7 +14345,7 @@
           <p:cNvPr id="42" name="">
             <a:extLst xmlns:a="http://schemas.openxmlformats.org/drawingml/2006/main">
               <a:ext uri="{FF2B5EF4-FFF2-40B4-BE49-F238E27FC236}">
-                <a16:creationId xmlns:a16="http://schemas.microsoft.com/office/drawing/2014/main" id="{4DF18E79-2DDB-4044-ACF9-B441230712A2}"/>
+                <a16:creationId xmlns:a16="http://schemas.microsoft.com/office/drawing/2014/main" id="{C11A5EDF-3C7D-443E-A0D6-6B88C6A717AF}"/>
               </a:ext>
             </a:extLst>
           </p:cNvPr>
@@ -14397,7 +14397,7 @@
           <p:cNvPr id="43" name="">
             <a:extLst xmlns:a="http://schemas.openxmlformats.org/drawingml/2006/main">
               <a:ext uri="{FF2B5EF4-FFF2-40B4-BE49-F238E27FC236}">
-                <a16:creationId xmlns:a16="http://schemas.microsoft.com/office/drawing/2014/main" id="{14891356-182A-432B-AD49-D8A55509D97A}"/>
+                <a16:creationId xmlns:a16="http://schemas.microsoft.com/office/drawing/2014/main" id="{76DBCE85-4519-4929-839A-5CEB2E787110}"/>
               </a:ext>
             </a:extLst>
           </p:cNvPr>
@@ -14449,7 +14449,7 @@
           <p:cNvPr id="44" name="">
             <a:extLst xmlns:a="http://schemas.openxmlformats.org/drawingml/2006/main">
               <a:ext uri="{FF2B5EF4-FFF2-40B4-BE49-F238E27FC236}">
-                <a16:creationId xmlns:a16="http://schemas.microsoft.com/office/drawing/2014/main" id="{55036362-11CE-4EB6-9544-72B5C0D814E2}"/>
+                <a16:creationId xmlns:a16="http://schemas.microsoft.com/office/drawing/2014/main" id="{1B81B28C-A163-496D-A5CC-3AD93D3D13BE}"/>
               </a:ext>
             </a:extLst>
           </p:cNvPr>
@@ -14480,7 +14480,7 @@
           <p:cNvPr id="45" name="">
             <a:extLst xmlns:a="http://schemas.openxmlformats.org/drawingml/2006/main">
               <a:ext uri="{FF2B5EF4-FFF2-40B4-BE49-F238E27FC236}">
-                <a16:creationId xmlns:a16="http://schemas.microsoft.com/office/drawing/2014/main" id="{7497EB5B-C492-4C5C-B5A3-5CE61B2FE574}"/>
+                <a16:creationId xmlns:a16="http://schemas.microsoft.com/office/drawing/2014/main" id="{BC5B5A46-B22B-4092-898B-A4D4230EBAB0}"/>
               </a:ext>
             </a:extLst>
           </p:cNvPr>
@@ -14532,7 +14532,7 @@
           <p:cNvPr id="46" name="">
             <a:extLst xmlns:a="http://schemas.openxmlformats.org/drawingml/2006/main">
               <a:ext uri="{FF2B5EF4-FFF2-40B4-BE49-F238E27FC236}">
-                <a16:creationId xmlns:a16="http://schemas.microsoft.com/office/drawing/2014/main" id="{741B6C94-B04A-432C-BA89-1141DABB7D83}"/>
+                <a16:creationId xmlns:a16="http://schemas.microsoft.com/office/drawing/2014/main" id="{15920DD6-3532-43F7-BF7A-01EA90D97B2B}"/>
               </a:ext>
             </a:extLst>
           </p:cNvPr>
@@ -14584,7 +14584,7 @@
           <p:cNvPr id="47" name="">
             <a:extLst xmlns:a="http://schemas.openxmlformats.org/drawingml/2006/main">
               <a:ext uri="{FF2B5EF4-FFF2-40B4-BE49-F238E27FC236}">
-                <a16:creationId xmlns:a16="http://schemas.microsoft.com/office/drawing/2014/main" id="{8C6840DD-B4D5-473C-9A73-811F23BBA306}"/>
+                <a16:creationId xmlns:a16="http://schemas.microsoft.com/office/drawing/2014/main" id="{56BCD6B9-8883-4768-925F-C6AD7358E887}"/>
               </a:ext>
             </a:extLst>
           </p:cNvPr>
@@ -14636,7 +14636,7 @@
           <p:cNvPr id="48" name="">
             <a:extLst xmlns:a="http://schemas.openxmlformats.org/drawingml/2006/main">
               <a:ext uri="{FF2B5EF4-FFF2-40B4-BE49-F238E27FC236}">
-                <a16:creationId xmlns:a16="http://schemas.microsoft.com/office/drawing/2014/main" id="{8B0C8D65-3624-4A41-B8A0-3C8F77E691E4}"/>
+                <a16:creationId xmlns:a16="http://schemas.microsoft.com/office/drawing/2014/main" id="{A976F04A-1C3B-4531-8164-F308FD6BBF2E}"/>
               </a:ext>
             </a:extLst>
           </p:cNvPr>
@@ -14688,7 +14688,7 @@
           <p:cNvPr id="49" name="">
             <a:extLst xmlns:a="http://schemas.openxmlformats.org/drawingml/2006/main">
               <a:ext uri="{FF2B5EF4-FFF2-40B4-BE49-F238E27FC236}">
-                <a16:creationId xmlns:a16="http://schemas.microsoft.com/office/drawing/2014/main" id="{9263B7D6-44DF-4EA8-B122-6BA0422C217A}"/>
+                <a16:creationId xmlns:a16="http://schemas.microsoft.com/office/drawing/2014/main" id="{337C32F4-B2D1-4BD8-82D2-61B35A20E1F1}"/>
               </a:ext>
             </a:extLst>
           </p:cNvPr>
@@ -14740,7 +14740,7 @@
           <p:cNvPr id="50" name="">
             <a:extLst xmlns:a="http://schemas.openxmlformats.org/drawingml/2006/main">
               <a:ext uri="{FF2B5EF4-FFF2-40B4-BE49-F238E27FC236}">
-                <a16:creationId xmlns:a16="http://schemas.microsoft.com/office/drawing/2014/main" id="{1FBAA45D-00B3-456D-AC58-DD9293F96280}"/>
+                <a16:creationId xmlns:a16="http://schemas.microsoft.com/office/drawing/2014/main" id="{FF8B6E3E-AA0A-465D-93EC-0EC1E891C619}"/>
               </a:ext>
             </a:extLst>
           </p:cNvPr>
@@ -14771,7 +14771,7 @@
           <p:cNvPr id="51" name="">
             <a:extLst xmlns:a="http://schemas.openxmlformats.org/drawingml/2006/main">
               <a:ext uri="{FF2B5EF4-FFF2-40B4-BE49-F238E27FC236}">
-                <a16:creationId xmlns:a16="http://schemas.microsoft.com/office/drawing/2014/main" id="{6429011C-418C-477D-8DFB-A61F0CC9B095}"/>
+                <a16:creationId xmlns:a16="http://schemas.microsoft.com/office/drawing/2014/main" id="{866EE4B2-C63B-4B8F-AD59-ECB5AA3B1FA1}"/>
               </a:ext>
             </a:extLst>
           </p:cNvPr>
@@ -14802,7 +14802,7 @@
           <p:cNvPr id="52" name="">
             <a:extLst xmlns:a="http://schemas.openxmlformats.org/drawingml/2006/main">
               <a:ext uri="{FF2B5EF4-FFF2-40B4-BE49-F238E27FC236}">
-                <a16:creationId xmlns:a16="http://schemas.microsoft.com/office/drawing/2014/main" id="{D6A0D841-4BA3-48FD-AFD1-8CBC88337BC9}"/>
+                <a16:creationId xmlns:a16="http://schemas.microsoft.com/office/drawing/2014/main" id="{D816EC96-9B87-4513-82EF-F5A5DE1FD195}"/>
               </a:ext>
             </a:extLst>
           </p:cNvPr>
@@ -14854,7 +14854,7 @@
           <p:cNvPr id="53" name="">
             <a:extLst xmlns:a="http://schemas.openxmlformats.org/drawingml/2006/main">
               <a:ext uri="{FF2B5EF4-FFF2-40B4-BE49-F238E27FC236}">
-                <a16:creationId xmlns:a16="http://schemas.microsoft.com/office/drawing/2014/main" id="{B5697809-94AC-48E9-B782-FE029F2307C3}"/>
+                <a16:creationId xmlns:a16="http://schemas.microsoft.com/office/drawing/2014/main" id="{1E7F0CA8-B459-47F8-B60D-4019A246E449}"/>
               </a:ext>
             </a:extLst>
           </p:cNvPr>
@@ -14906,7 +14906,7 @@
           <p:cNvPr id="54" name="">
             <a:extLst xmlns:a="http://schemas.openxmlformats.org/drawingml/2006/main">
               <a:ext uri="{FF2B5EF4-FFF2-40B4-BE49-F238E27FC236}">
-                <a16:creationId xmlns:a16="http://schemas.microsoft.com/office/drawing/2014/main" id="{D48F4239-12C6-4435-8F49-6766862E0A4B}"/>
+                <a16:creationId xmlns:a16="http://schemas.microsoft.com/office/drawing/2014/main" id="{2D0DD61C-BA87-419E-AA38-AC4C7A473525}"/>
               </a:ext>
             </a:extLst>
           </p:cNvPr>
@@ -14958,7 +14958,7 @@
           <p:cNvPr id="55" name="">
             <a:extLst xmlns:a="http://schemas.openxmlformats.org/drawingml/2006/main">
               <a:ext uri="{FF2B5EF4-FFF2-40B4-BE49-F238E27FC236}">
-                <a16:creationId xmlns:a16="http://schemas.microsoft.com/office/drawing/2014/main" id="{29D3903C-93EB-423E-A495-D53F1BD615EA}"/>
+                <a16:creationId xmlns:a16="http://schemas.microsoft.com/office/drawing/2014/main" id="{817EDF6F-59A6-49DE-99C7-C29358FCC487}"/>
               </a:ext>
             </a:extLst>
           </p:cNvPr>
@@ -15010,7 +15010,7 @@
           <p:cNvPr id="56" name="">
             <a:extLst xmlns:a="http://schemas.openxmlformats.org/drawingml/2006/main">
               <a:ext uri="{FF2B5EF4-FFF2-40B4-BE49-F238E27FC236}">
-                <a16:creationId xmlns:a16="http://schemas.microsoft.com/office/drawing/2014/main" id="{00359623-A477-4E78-84FC-7CACED659F7C}"/>
+                <a16:creationId xmlns:a16="http://schemas.microsoft.com/office/drawing/2014/main" id="{37CFC6CD-8BED-4542-B038-3FC831B766D7}"/>
               </a:ext>
             </a:extLst>
           </p:cNvPr>
@@ -15062,7 +15062,7 @@
           <p:cNvPr id="57" name="">
             <a:extLst xmlns:a="http://schemas.openxmlformats.org/drawingml/2006/main">
               <a:ext uri="{FF2B5EF4-FFF2-40B4-BE49-F238E27FC236}">
-                <a16:creationId xmlns:a16="http://schemas.microsoft.com/office/drawing/2014/main" id="{A300BF60-6F75-4DE1-B491-2D146C7D8D71}"/>
+                <a16:creationId xmlns:a16="http://schemas.microsoft.com/office/drawing/2014/main" id="{372D1E6C-3F68-4B8D-B0E3-C899BB41415D}"/>
               </a:ext>
             </a:extLst>
           </p:cNvPr>
@@ -15093,7 +15093,7 @@
           <p:cNvPr id="58" name="">
             <a:extLst xmlns:a="http://schemas.openxmlformats.org/drawingml/2006/main">
               <a:ext uri="{FF2B5EF4-FFF2-40B4-BE49-F238E27FC236}">
-                <a16:creationId xmlns:a16="http://schemas.microsoft.com/office/drawing/2014/main" id="{20B544F2-1A6E-4B54-81BC-AC2DB1EAB923}"/>
+                <a16:creationId xmlns:a16="http://schemas.microsoft.com/office/drawing/2014/main" id="{1FBE8C3A-3377-4E82-9E8B-9BCCCB9AFBA3}"/>
               </a:ext>
             </a:extLst>
           </p:cNvPr>
@@ -15145,7 +15145,7 @@
           <p:cNvPr id="59" name="">
             <a:extLst xmlns:a="http://schemas.openxmlformats.org/drawingml/2006/main">
               <a:ext uri="{FF2B5EF4-FFF2-40B4-BE49-F238E27FC236}">
-                <a16:creationId xmlns:a16="http://schemas.microsoft.com/office/drawing/2014/main" id="{C36EB233-83BA-4CE7-B6DB-4BDDB544DC83}"/>
+                <a16:creationId xmlns:a16="http://schemas.microsoft.com/office/drawing/2014/main" id="{29F5B491-9D54-4EC0-9537-D95A79B7C609}"/>
               </a:ext>
             </a:extLst>
           </p:cNvPr>
@@ -15197,7 +15197,7 @@
           <p:cNvPr id="60" name="">
             <a:extLst xmlns:a="http://schemas.openxmlformats.org/drawingml/2006/main">
               <a:ext uri="{FF2B5EF4-FFF2-40B4-BE49-F238E27FC236}">
-                <a16:creationId xmlns:a16="http://schemas.microsoft.com/office/drawing/2014/main" id="{A4BC53EB-45CA-4BFB-9D5F-823C5CAE9270}"/>
+                <a16:creationId xmlns:a16="http://schemas.microsoft.com/office/drawing/2014/main" id="{F5231705-281A-4C6B-8A86-5C6E690776AB}"/>
               </a:ext>
             </a:extLst>
           </p:cNvPr>
@@ -15249,7 +15249,7 @@
           <p:cNvPr id="61" name="">
             <a:extLst xmlns:a="http://schemas.openxmlformats.org/drawingml/2006/main">
               <a:ext uri="{FF2B5EF4-FFF2-40B4-BE49-F238E27FC236}">
-                <a16:creationId xmlns:a16="http://schemas.microsoft.com/office/drawing/2014/main" id="{5B1A8A32-3A69-4B4D-A6FC-471F58FDE615}"/>
+                <a16:creationId xmlns:a16="http://schemas.microsoft.com/office/drawing/2014/main" id="{F9FEBE40-3499-4A22-8EBB-FAE7412DEEEE}"/>
               </a:ext>
             </a:extLst>
           </p:cNvPr>
@@ -15301,7 +15301,7 @@
           <p:cNvPr id="62" name="">
             <a:extLst xmlns:a="http://schemas.openxmlformats.org/drawingml/2006/main">
               <a:ext uri="{FF2B5EF4-FFF2-40B4-BE49-F238E27FC236}">
-                <a16:creationId xmlns:a16="http://schemas.microsoft.com/office/drawing/2014/main" id="{CF6BC5C1-19B3-40E6-9376-FB1B458C34A0}"/>
+                <a16:creationId xmlns:a16="http://schemas.microsoft.com/office/drawing/2014/main" id="{888D5A37-9433-4E1C-AA0C-06ACDEBCFADB}"/>
               </a:ext>
             </a:extLst>
           </p:cNvPr>
@@ -15353,7 +15353,7 @@
           <p:cNvPr id="63" name="">
             <a:extLst xmlns:a="http://schemas.openxmlformats.org/drawingml/2006/main">
               <a:ext uri="{FF2B5EF4-FFF2-40B4-BE49-F238E27FC236}">
-                <a16:creationId xmlns:a16="http://schemas.microsoft.com/office/drawing/2014/main" id="{EE2699B6-4EB9-4C95-BF75-D50122B55DB9}"/>
+                <a16:creationId xmlns:a16="http://schemas.microsoft.com/office/drawing/2014/main" id="{3AE848F7-6387-4007-ADB9-70B92ED0CD25}"/>
               </a:ext>
             </a:extLst>
           </p:cNvPr>
@@ -15384,7 +15384,7 @@
           <p:cNvPr id="64" name="">
             <a:extLst xmlns:a="http://schemas.openxmlformats.org/drawingml/2006/main">
               <a:ext uri="{FF2B5EF4-FFF2-40B4-BE49-F238E27FC236}">
-                <a16:creationId xmlns:a16="http://schemas.microsoft.com/office/drawing/2014/main" id="{F1651721-C3F5-492A-B293-BD78724B6C0F}"/>
+                <a16:creationId xmlns:a16="http://schemas.microsoft.com/office/drawing/2014/main" id="{C8E7A744-0897-4D13-A7B0-C53D96616AFB}"/>
               </a:ext>
             </a:extLst>
           </p:cNvPr>
@@ -15415,7 +15415,7 @@
           <p:cNvPr id="65" name="">
             <a:extLst xmlns:a="http://schemas.openxmlformats.org/drawingml/2006/main">
               <a:ext uri="{FF2B5EF4-FFF2-40B4-BE49-F238E27FC236}">
-                <a16:creationId xmlns:a16="http://schemas.microsoft.com/office/drawing/2014/main" id="{DB400ADE-EA88-4E91-A781-0B961B045E89}"/>
+                <a16:creationId xmlns:a16="http://schemas.microsoft.com/office/drawing/2014/main" id="{119FC1D6-F1AD-4DEF-A868-D8D8D862FF4B}"/>
               </a:ext>
             </a:extLst>
           </p:cNvPr>
@@ -15467,7 +15467,7 @@
           <p:cNvPr id="66" name="">
             <a:extLst xmlns:a="http://schemas.openxmlformats.org/drawingml/2006/main">
               <a:ext uri="{FF2B5EF4-FFF2-40B4-BE49-F238E27FC236}">
-                <a16:creationId xmlns:a16="http://schemas.microsoft.com/office/drawing/2014/main" id="{5828BB83-31E8-4A3F-ADDC-B6703463816D}"/>
+                <a16:creationId xmlns:a16="http://schemas.microsoft.com/office/drawing/2014/main" id="{290A1AB4-716F-4D4A-8571-43DE05D87575}"/>
               </a:ext>
             </a:extLst>
           </p:cNvPr>
@@ -15519,7 +15519,7 @@
           <p:cNvPr id="67" name="">
             <a:extLst xmlns:a="http://schemas.openxmlformats.org/drawingml/2006/main">
               <a:ext uri="{FF2B5EF4-FFF2-40B4-BE49-F238E27FC236}">
-                <a16:creationId xmlns:a16="http://schemas.microsoft.com/office/drawing/2014/main" id="{793A8BFE-3A0E-4C45-B280-B47CCB1BB227}"/>
+                <a16:creationId xmlns:a16="http://schemas.microsoft.com/office/drawing/2014/main" id="{22E333CD-4B41-4C8E-9B16-2D426CFB648A}"/>
               </a:ext>
             </a:extLst>
           </p:cNvPr>
@@ -15571,7 +15571,7 @@
           <p:cNvPr id="68" name="">
             <a:extLst xmlns:a="http://schemas.openxmlformats.org/drawingml/2006/main">
               <a:ext uri="{FF2B5EF4-FFF2-40B4-BE49-F238E27FC236}">
-                <a16:creationId xmlns:a16="http://schemas.microsoft.com/office/drawing/2014/main" id="{B6AB5E93-77BA-4D00-B1B3-D26F89869778}"/>
+                <a16:creationId xmlns:a16="http://schemas.microsoft.com/office/drawing/2014/main" id="{5E835808-6908-40ED-A5B3-997CB89982FF}"/>
               </a:ext>
             </a:extLst>
           </p:cNvPr>
@@ -15623,7 +15623,7 @@
           <p:cNvPr id="69" name="">
             <a:extLst xmlns:a="http://schemas.openxmlformats.org/drawingml/2006/main">
               <a:ext uri="{FF2B5EF4-FFF2-40B4-BE49-F238E27FC236}">
-                <a16:creationId xmlns:a16="http://schemas.microsoft.com/office/drawing/2014/main" id="{96949439-2B76-4CFC-B03D-2594A5701963}"/>
+                <a16:creationId xmlns:a16="http://schemas.microsoft.com/office/drawing/2014/main" id="{CD453245-63FF-4749-8F8C-7D8DF267A9C1}"/>
               </a:ext>
             </a:extLst>
           </p:cNvPr>
@@ -15675,7 +15675,7 @@
           <p:cNvPr id="70" name="">
             <a:extLst xmlns:a="http://schemas.openxmlformats.org/drawingml/2006/main">
               <a:ext uri="{FF2B5EF4-FFF2-40B4-BE49-F238E27FC236}">
-                <a16:creationId xmlns:a16="http://schemas.microsoft.com/office/drawing/2014/main" id="{D3A3A2A3-DF7F-407C-A8BC-B56A816DB9D9}"/>
+                <a16:creationId xmlns:a16="http://schemas.microsoft.com/office/drawing/2014/main" id="{9A7B35CB-6B5E-4C5C-BDE9-EB5FB562BCD8}"/>
               </a:ext>
             </a:extLst>
           </p:cNvPr>
@@ -15706,7 +15706,7 @@
           <p:cNvPr id="71" name="">
             <a:extLst xmlns:a="http://schemas.openxmlformats.org/drawingml/2006/main">
               <a:ext uri="{FF2B5EF4-FFF2-40B4-BE49-F238E27FC236}">
-                <a16:creationId xmlns:a16="http://schemas.microsoft.com/office/drawing/2014/main" id="{91A2F757-9A47-46D4-82CB-DC714A3868FA}"/>
+                <a16:creationId xmlns:a16="http://schemas.microsoft.com/office/drawing/2014/main" id="{399CA232-C8D9-46F5-9051-6220E7072301}"/>
               </a:ext>
             </a:extLst>
           </p:cNvPr>
@@ -15758,7 +15758,7 @@
           <p:cNvPr id="72" name="">
             <a:extLst xmlns:a="http://schemas.openxmlformats.org/drawingml/2006/main">
               <a:ext uri="{FF2B5EF4-FFF2-40B4-BE49-F238E27FC236}">
-                <a16:creationId xmlns:a16="http://schemas.microsoft.com/office/drawing/2014/main" id="{2CF5D97C-6763-4876-8B45-A54F399300E9}"/>
+                <a16:creationId xmlns:a16="http://schemas.microsoft.com/office/drawing/2014/main" id="{47A3F49D-DB22-44C4-A118-A6DFEBD4F738}"/>
               </a:ext>
             </a:extLst>
           </p:cNvPr>
@@ -15810,7 +15810,7 @@
           <p:cNvPr id="73" name="">
             <a:extLst xmlns:a="http://schemas.openxmlformats.org/drawingml/2006/main">
               <a:ext uri="{FF2B5EF4-FFF2-40B4-BE49-F238E27FC236}">
-                <a16:creationId xmlns:a16="http://schemas.microsoft.com/office/drawing/2014/main" id="{83D748A5-9499-41B9-803F-FE496A8C76C4}"/>
+                <a16:creationId xmlns:a16="http://schemas.microsoft.com/office/drawing/2014/main" id="{2D8F622C-0C1E-4869-9740-E87D4B712757}"/>
               </a:ext>
             </a:extLst>
           </p:cNvPr>
@@ -15862,7 +15862,7 @@
           <p:cNvPr id="74" name="">
             <a:extLst xmlns:a="http://schemas.openxmlformats.org/drawingml/2006/main">
               <a:ext uri="{FF2B5EF4-FFF2-40B4-BE49-F238E27FC236}">
-                <a16:creationId xmlns:a16="http://schemas.microsoft.com/office/drawing/2014/main" id="{8C9D5C24-2154-4527-9828-2B4E833EA9BB}"/>
+                <a16:creationId xmlns:a16="http://schemas.microsoft.com/office/drawing/2014/main" id="{14DA5561-F225-4724-B9F3-ACEFBF48AEA7}"/>
               </a:ext>
             </a:extLst>
           </p:cNvPr>
@@ -15914,7 +15914,7 @@
           <p:cNvPr id="75" name="">
             <a:extLst xmlns:a="http://schemas.openxmlformats.org/drawingml/2006/main">
               <a:ext uri="{FF2B5EF4-FFF2-40B4-BE49-F238E27FC236}">
-                <a16:creationId xmlns:a16="http://schemas.microsoft.com/office/drawing/2014/main" id="{1D7C479D-7C2D-4EDC-AB0A-C0306E585E3D}"/>
+                <a16:creationId xmlns:a16="http://schemas.microsoft.com/office/drawing/2014/main" id="{DF37F0A6-465A-4BD3-85F5-FC1658216D1A}"/>
               </a:ext>
             </a:extLst>
           </p:cNvPr>
@@ -15966,7 +15966,7 @@
           <p:cNvPr id="76" name="">
             <a:extLst xmlns:a="http://schemas.openxmlformats.org/drawingml/2006/main">
               <a:ext uri="{FF2B5EF4-FFF2-40B4-BE49-F238E27FC236}">
-                <a16:creationId xmlns:a16="http://schemas.microsoft.com/office/drawing/2014/main" id="{2ABD46FF-9665-4627-8B14-BA9A37AB6B0C}"/>
+                <a16:creationId xmlns:a16="http://schemas.microsoft.com/office/drawing/2014/main" id="{18BEA2C6-E09B-4CD4-BEE1-EC40836D7FBE}"/>
               </a:ext>
             </a:extLst>
           </p:cNvPr>
@@ -15997,7 +15997,7 @@
           <p:cNvPr id="77" name="">
             <a:extLst xmlns:a="http://schemas.openxmlformats.org/drawingml/2006/main">
               <a:ext uri="{FF2B5EF4-FFF2-40B4-BE49-F238E27FC236}">
-                <a16:creationId xmlns:a16="http://schemas.microsoft.com/office/drawing/2014/main" id="{ADD63E92-1BDE-4E6C-A8F6-C513DE37B134}"/>
+                <a16:creationId xmlns:a16="http://schemas.microsoft.com/office/drawing/2014/main" id="{F55703FF-23BB-477E-B6DE-C956C9732618}"/>
               </a:ext>
             </a:extLst>
           </p:cNvPr>
@@ -16028,7 +16028,7 @@
           <p:cNvPr id="78" name="">
             <a:extLst xmlns:a="http://schemas.openxmlformats.org/drawingml/2006/main">
               <a:ext uri="{FF2B5EF4-FFF2-40B4-BE49-F238E27FC236}">
-                <a16:creationId xmlns:a16="http://schemas.microsoft.com/office/drawing/2014/main" id="{25B39004-7AC9-4776-80A5-DDA8D144FE07}"/>
+                <a16:creationId xmlns:a16="http://schemas.microsoft.com/office/drawing/2014/main" id="{CBAEA478-C29A-42FC-9F34-856CBD070170}"/>
               </a:ext>
             </a:extLst>
           </p:cNvPr>
@@ -16080,7 +16080,7 @@
           <p:cNvPr id="79" name="">
             <a:extLst xmlns:a="http://schemas.openxmlformats.org/drawingml/2006/main">
               <a:ext uri="{FF2B5EF4-FFF2-40B4-BE49-F238E27FC236}">
-                <a16:creationId xmlns:a16="http://schemas.microsoft.com/office/drawing/2014/main" id="{46E57DDB-3FCA-4AB2-B767-341DF1FDDAB9}"/>
+                <a16:creationId xmlns:a16="http://schemas.microsoft.com/office/drawing/2014/main" id="{EA2551AB-9A37-4130-9DDA-487558495B4D}"/>
               </a:ext>
             </a:extLst>
           </p:cNvPr>
@@ -16132,7 +16132,7 @@
           <p:cNvPr id="80" name="">
             <a:extLst xmlns:a="http://schemas.openxmlformats.org/drawingml/2006/main">
               <a:ext uri="{FF2B5EF4-FFF2-40B4-BE49-F238E27FC236}">
-                <a16:creationId xmlns:a16="http://schemas.microsoft.com/office/drawing/2014/main" id="{02017213-899F-4A81-A022-5CA34E81B48D}"/>
+                <a16:creationId xmlns:a16="http://schemas.microsoft.com/office/drawing/2014/main" id="{93A9CE1A-9A5A-497D-A339-FCF0F2438DBD}"/>
               </a:ext>
             </a:extLst>
           </p:cNvPr>
@@ -16184,7 +16184,7 @@
           <p:cNvPr id="81" name="">
             <a:extLst xmlns:a="http://schemas.openxmlformats.org/drawingml/2006/main">
               <a:ext uri="{FF2B5EF4-FFF2-40B4-BE49-F238E27FC236}">
-                <a16:creationId xmlns:a16="http://schemas.microsoft.com/office/drawing/2014/main" id="{C191CA59-3848-4DF7-941C-D058967DC0B8}"/>
+                <a16:creationId xmlns:a16="http://schemas.microsoft.com/office/drawing/2014/main" id="{F6FAD1EC-AF89-4DD4-9FCF-B85095CCC01B}"/>
               </a:ext>
             </a:extLst>
           </p:cNvPr>
@@ -16236,7 +16236,7 @@
           <p:cNvPr id="82" name="">
             <a:extLst xmlns:a="http://schemas.openxmlformats.org/drawingml/2006/main">
               <a:ext uri="{FF2B5EF4-FFF2-40B4-BE49-F238E27FC236}">
-                <a16:creationId xmlns:a16="http://schemas.microsoft.com/office/drawing/2014/main" id="{BC6C56E9-7105-4308-A32B-93B7CAEB66D3}"/>
+                <a16:creationId xmlns:a16="http://schemas.microsoft.com/office/drawing/2014/main" id="{9283A793-E0EE-4A30-ACB6-8461056C0A79}"/>
               </a:ext>
             </a:extLst>
           </p:cNvPr>
@@ -16288,7 +16288,7 @@
           <p:cNvPr id="83" name="">
             <a:extLst xmlns:a="http://schemas.openxmlformats.org/drawingml/2006/main">
               <a:ext uri="{FF2B5EF4-FFF2-40B4-BE49-F238E27FC236}">
-                <a16:creationId xmlns:a16="http://schemas.microsoft.com/office/drawing/2014/main" id="{DB0818FD-06CB-4DB9-9DD0-344788F22A00}"/>
+                <a16:creationId xmlns:a16="http://schemas.microsoft.com/office/drawing/2014/main" id="{AE2D9A61-9695-4AE4-84CE-7FECB1C6BE97}"/>
               </a:ext>
             </a:extLst>
           </p:cNvPr>
@@ -16319,7 +16319,7 @@
           <p:cNvPr id="84" name="">
             <a:extLst xmlns:a="http://schemas.openxmlformats.org/drawingml/2006/main">
               <a:ext uri="{FF2B5EF4-FFF2-40B4-BE49-F238E27FC236}">
-                <a16:creationId xmlns:a16="http://schemas.microsoft.com/office/drawing/2014/main" id="{3F4D9EEE-8B53-46F2-8CCF-FE547D8A0190}"/>
+                <a16:creationId xmlns:a16="http://schemas.microsoft.com/office/drawing/2014/main" id="{C3D3EB82-F3F1-40D2-B532-886EA94E7B29}"/>
               </a:ext>
             </a:extLst>
           </p:cNvPr>
@@ -16371,7 +16371,7 @@
           <p:cNvPr id="85" name="">
             <a:extLst xmlns:a="http://schemas.openxmlformats.org/drawingml/2006/main">
               <a:ext uri="{FF2B5EF4-FFF2-40B4-BE49-F238E27FC236}">
-                <a16:creationId xmlns:a16="http://schemas.microsoft.com/office/drawing/2014/main" id="{2438A081-2563-49A2-8198-5F7EC82CE154}"/>
+                <a16:creationId xmlns:a16="http://schemas.microsoft.com/office/drawing/2014/main" id="{58B77E3C-E43B-4E77-8897-1537E3140FD7}"/>
               </a:ext>
             </a:extLst>
           </p:cNvPr>
@@ -16423,7 +16423,7 @@
           <p:cNvPr id="86" name="">
             <a:extLst xmlns:a="http://schemas.openxmlformats.org/drawingml/2006/main">
               <a:ext uri="{FF2B5EF4-FFF2-40B4-BE49-F238E27FC236}">
-                <a16:creationId xmlns:a16="http://schemas.microsoft.com/office/drawing/2014/main" id="{8D64725F-4030-425D-9827-A870339BE55C}"/>
+                <a16:creationId xmlns:a16="http://schemas.microsoft.com/office/drawing/2014/main" id="{3300150D-CA15-4D8E-B1EC-7AF853986746}"/>
               </a:ext>
             </a:extLst>
           </p:cNvPr>
@@ -16475,7 +16475,7 @@
           <p:cNvPr id="87" name="">
             <a:extLst xmlns:a="http://schemas.openxmlformats.org/drawingml/2006/main">
               <a:ext uri="{FF2B5EF4-FFF2-40B4-BE49-F238E27FC236}">
-                <a16:creationId xmlns:a16="http://schemas.microsoft.com/office/drawing/2014/main" id="{7066CB49-6F86-45B2-9313-835F6DDC0AEF}"/>
+                <a16:creationId xmlns:a16="http://schemas.microsoft.com/office/drawing/2014/main" id="{3EED46AB-3AB7-438C-B451-2B19B3A581D5}"/>
               </a:ext>
             </a:extLst>
           </p:cNvPr>
@@ -16527,7 +16527,7 @@
           <p:cNvPr id="88" name="">
             <a:extLst xmlns:a="http://schemas.openxmlformats.org/drawingml/2006/main">
               <a:ext uri="{FF2B5EF4-FFF2-40B4-BE49-F238E27FC236}">
-                <a16:creationId xmlns:a16="http://schemas.microsoft.com/office/drawing/2014/main" id="{786A0067-5CCA-4255-81F1-5E7D40BD461E}"/>
+                <a16:creationId xmlns:a16="http://schemas.microsoft.com/office/drawing/2014/main" id="{71A33DF1-BE8B-4D1F-B074-B5D4BB0B09EC}"/>
               </a:ext>
             </a:extLst>
           </p:cNvPr>
@@ -16579,7 +16579,7 @@
           <p:cNvPr id="89" name="">
             <a:extLst xmlns:a="http://schemas.openxmlformats.org/drawingml/2006/main">
               <a:ext uri="{FF2B5EF4-FFF2-40B4-BE49-F238E27FC236}">
-                <a16:creationId xmlns:a16="http://schemas.microsoft.com/office/drawing/2014/main" id="{5B9C9FB8-2EF5-44B0-A0EB-D49A5566EF89}"/>
+                <a16:creationId xmlns:a16="http://schemas.microsoft.com/office/drawing/2014/main" id="{15B3C6C3-D1A7-42C6-9DDF-99D02EB371AD}"/>
               </a:ext>
             </a:extLst>
           </p:cNvPr>
@@ -16610,7 +16610,7 @@
           <p:cNvPr id="90" name="">
             <a:extLst xmlns:a="http://schemas.openxmlformats.org/drawingml/2006/main">
               <a:ext uri="{FF2B5EF4-FFF2-40B4-BE49-F238E27FC236}">
-                <a16:creationId xmlns:a16="http://schemas.microsoft.com/office/drawing/2014/main" id="{8633B51F-67F9-4C81-B6C6-6D4FBA489892}"/>
+                <a16:creationId xmlns:a16="http://schemas.microsoft.com/office/drawing/2014/main" id="{5E827731-59D2-4B45-8392-2FF4BE6EC9BC}"/>
               </a:ext>
             </a:extLst>
           </p:cNvPr>
@@ -16641,7 +16641,7 @@
           <p:cNvPr id="91" name="">
             <a:extLst xmlns:a="http://schemas.openxmlformats.org/drawingml/2006/main">
               <a:ext uri="{FF2B5EF4-FFF2-40B4-BE49-F238E27FC236}">
-                <a16:creationId xmlns:a16="http://schemas.microsoft.com/office/drawing/2014/main" id="{EC55DF42-81FC-4A8B-8B92-811848651A96}"/>
+                <a16:creationId xmlns:a16="http://schemas.microsoft.com/office/drawing/2014/main" id="{BFF3C67E-96AF-4A92-9E42-131A0984483C}"/>
               </a:ext>
             </a:extLst>
           </p:cNvPr>
@@ -16693,7 +16693,7 @@
           <p:cNvPr id="92" name="">
             <a:extLst xmlns:a="http://schemas.openxmlformats.org/drawingml/2006/main">
               <a:ext uri="{FF2B5EF4-FFF2-40B4-BE49-F238E27FC236}">
-                <a16:creationId xmlns:a16="http://schemas.microsoft.com/office/drawing/2014/main" id="{622A766F-FB7E-4101-BA8D-81B82BEF6FAE}"/>
+                <a16:creationId xmlns:a16="http://schemas.microsoft.com/office/drawing/2014/main" id="{1884F770-1E9D-4C6B-9B2B-10A59F56A595}"/>
               </a:ext>
             </a:extLst>
           </p:cNvPr>
@@ -16745,7 +16745,7 @@
           <p:cNvPr id="93" name="">
             <a:extLst xmlns:a="http://schemas.openxmlformats.org/drawingml/2006/main">
               <a:ext uri="{FF2B5EF4-FFF2-40B4-BE49-F238E27FC236}">
-                <a16:creationId xmlns:a16="http://schemas.microsoft.com/office/drawing/2014/main" id="{3C9AC994-845A-4C24-A441-4DCE3187CBBF}"/>
+                <a16:creationId xmlns:a16="http://schemas.microsoft.com/office/drawing/2014/main" id="{87A0CE6C-D532-4101-80A4-16E87AC1751F}"/>
               </a:ext>
             </a:extLst>
           </p:cNvPr>
@@ -16797,7 +16797,7 @@
           <p:cNvPr id="94" name="">
             <a:extLst xmlns:a="http://schemas.openxmlformats.org/drawingml/2006/main">
               <a:ext uri="{FF2B5EF4-FFF2-40B4-BE49-F238E27FC236}">
-                <a16:creationId xmlns:a16="http://schemas.microsoft.com/office/drawing/2014/main" id="{0BFCC1B1-6443-4294-8140-C86FBF9336E1}"/>
+                <a16:creationId xmlns:a16="http://schemas.microsoft.com/office/drawing/2014/main" id="{212527F9-CE81-4EA6-8115-0F826A2EDF6B}"/>
               </a:ext>
             </a:extLst>
           </p:cNvPr>
@@ -16849,7 +16849,7 @@
           <p:cNvPr id="95" name="">
             <a:extLst xmlns:a="http://schemas.openxmlformats.org/drawingml/2006/main">
               <a:ext uri="{FF2B5EF4-FFF2-40B4-BE49-F238E27FC236}">
-                <a16:creationId xmlns:a16="http://schemas.microsoft.com/office/drawing/2014/main" id="{F227E602-F088-45FE-B55D-C9B60D4D7A4D}"/>
+                <a16:creationId xmlns:a16="http://schemas.microsoft.com/office/drawing/2014/main" id="{87B7151F-5447-4FC0-81C3-C9F1ADD7D3F1}"/>
               </a:ext>
             </a:extLst>
           </p:cNvPr>
@@ -16901,7 +16901,7 @@
           <p:cNvPr id="96" name="">
             <a:extLst xmlns:a="http://schemas.openxmlformats.org/drawingml/2006/main">
               <a:ext uri="{FF2B5EF4-FFF2-40B4-BE49-F238E27FC236}">
-                <a16:creationId xmlns:a16="http://schemas.microsoft.com/office/drawing/2014/main" id="{1DA27893-1C94-464D-9C4C-348876CCBE8D}"/>
+                <a16:creationId xmlns:a16="http://schemas.microsoft.com/office/drawing/2014/main" id="{4483C3DB-6CF1-413C-A071-429B1A7C8DA9}"/>
               </a:ext>
             </a:extLst>
           </p:cNvPr>
@@ -16932,7 +16932,7 @@
           <p:cNvPr id="97" name="">
             <a:extLst xmlns:a="http://schemas.openxmlformats.org/drawingml/2006/main">
               <a:ext uri="{FF2B5EF4-FFF2-40B4-BE49-F238E27FC236}">
-                <a16:creationId xmlns:a16="http://schemas.microsoft.com/office/drawing/2014/main" id="{7758EB2E-F6C6-495F-820D-55970D2D8AC2}"/>
+                <a16:creationId xmlns:a16="http://schemas.microsoft.com/office/drawing/2014/main" id="{D357F6B4-F7D2-4E26-B2D7-C4298768CD31}"/>
               </a:ext>
             </a:extLst>
           </p:cNvPr>
@@ -16984,7 +16984,7 @@
           <p:cNvPr id="98" name="">
             <a:extLst xmlns:a="http://schemas.openxmlformats.org/drawingml/2006/main">
               <a:ext uri="{FF2B5EF4-FFF2-40B4-BE49-F238E27FC236}">
-                <a16:creationId xmlns:a16="http://schemas.microsoft.com/office/drawing/2014/main" id="{2548D239-0B15-44BB-80DA-D1740E473063}"/>
+                <a16:creationId xmlns:a16="http://schemas.microsoft.com/office/drawing/2014/main" id="{9D8AC6DA-9F50-49C7-BC3A-29579A70FED0}"/>
               </a:ext>
             </a:extLst>
           </p:cNvPr>
@@ -17036,7 +17036,7 @@
           <p:cNvPr id="99" name="">
             <a:extLst xmlns:a="http://schemas.openxmlformats.org/drawingml/2006/main">
               <a:ext uri="{FF2B5EF4-FFF2-40B4-BE49-F238E27FC236}">
-                <a16:creationId xmlns:a16="http://schemas.microsoft.com/office/drawing/2014/main" id="{8C984218-DBAB-4EB8-9267-FB4CB0ABB149}"/>
+                <a16:creationId xmlns:a16="http://schemas.microsoft.com/office/drawing/2014/main" id="{4FA6EF9C-A642-4619-8928-EA93EB1C0FFE}"/>
               </a:ext>
             </a:extLst>
           </p:cNvPr>
@@ -17088,7 +17088,7 @@
           <p:cNvPr id="100" name="">
             <a:extLst xmlns:a="http://schemas.openxmlformats.org/drawingml/2006/main">
               <a:ext uri="{FF2B5EF4-FFF2-40B4-BE49-F238E27FC236}">
-                <a16:creationId xmlns:a16="http://schemas.microsoft.com/office/drawing/2014/main" id="{FE10C8D8-A653-4E7F-A22F-803779013DC9}"/>
+                <a16:creationId xmlns:a16="http://schemas.microsoft.com/office/drawing/2014/main" id="{C024D695-9911-421B-9D68-9D0374C37860}"/>
               </a:ext>
             </a:extLst>
           </p:cNvPr>
@@ -17140,7 +17140,7 @@
           <p:cNvPr id="101" name="">
             <a:extLst xmlns:a="http://schemas.openxmlformats.org/drawingml/2006/main">
               <a:ext uri="{FF2B5EF4-FFF2-40B4-BE49-F238E27FC236}">
-                <a16:creationId xmlns:a16="http://schemas.microsoft.com/office/drawing/2014/main" id="{C73E650C-D3F1-427A-82DD-A6E9474E7C5C}"/>
+                <a16:creationId xmlns:a16="http://schemas.microsoft.com/office/drawing/2014/main" id="{3FAEEA38-D041-4469-9EF5-D3C10362E719}"/>
               </a:ext>
             </a:extLst>
           </p:cNvPr>
@@ -17190,7 +17190,7 @@
     </p:spTree>
     <p:extLst>
       <p:ext uri="{BB962C8B-B14F-4D97-AF65-F5344CB8AC3E}">
-        <p14:creationId xmlns:p14="http://schemas.microsoft.com/office/powerpoint/2010/main" val="1115929778"/>
+        <p14:creationId xmlns:p14="http://schemas.microsoft.com/office/powerpoint/2010/main" val="2129487781"/>
       </p:ext>
     </p:extLst>
   </p:cSld>
@@ -17221,7 +17221,7 @@
           <p:cNvPr id="96" name="">
             <a:extLst xmlns:a="http://schemas.openxmlformats.org/drawingml/2006/main">
               <a:ext uri="{FF2B5EF4-FFF2-40B4-BE49-F238E27FC236}">
-                <a16:creationId xmlns:a16="http://schemas.microsoft.com/office/drawing/2014/main" id="{143DF541-66A0-4A81-A5CE-A6A29AB49175}"/>
+                <a16:creationId xmlns:a16="http://schemas.microsoft.com/office/drawing/2014/main" id="{95FCC4A6-5036-40B2-B0FD-F09C82913F76}"/>
               </a:ext>
             </a:extLst>
           </p:cNvPr>
@@ -17254,7 +17254,7 @@
           <p:cNvPr id="2" name="">
             <a:extLst xmlns:a="http://schemas.openxmlformats.org/drawingml/2006/main">
               <a:ext uri="{FF2B5EF4-FFF2-40B4-BE49-F238E27FC236}">
-                <a16:creationId xmlns:a16="http://schemas.microsoft.com/office/drawing/2014/main" id="{ED458052-4A50-4B40-ACDA-E570AF8F795C}"/>
+                <a16:creationId xmlns:a16="http://schemas.microsoft.com/office/drawing/2014/main" id="{4B8BBE3E-1EDD-439F-B6B0-F3A28C93AB5B}"/>
               </a:ext>
             </a:extLst>
           </p:cNvPr>
@@ -17285,7 +17285,7 @@
           <p:cNvPr id="3" name="">
             <a:extLst xmlns:a="http://schemas.openxmlformats.org/drawingml/2006/main">
               <a:ext uri="{FF2B5EF4-FFF2-40B4-BE49-F238E27FC236}">
-                <a16:creationId xmlns:a16="http://schemas.microsoft.com/office/drawing/2014/main" id="{9685B2AB-1266-4695-BBC1-CCC6A1E4A72E}"/>
+                <a16:creationId xmlns:a16="http://schemas.microsoft.com/office/drawing/2014/main" id="{F9F27A19-5263-4AF1-987A-7FCC25400202}"/>
               </a:ext>
             </a:extLst>
           </p:cNvPr>
@@ -17337,7 +17337,7 @@
           <p:cNvPr id="4" name="">
             <a:extLst xmlns:a="http://schemas.openxmlformats.org/drawingml/2006/main">
               <a:ext uri="{FF2B5EF4-FFF2-40B4-BE49-F238E27FC236}">
-                <a16:creationId xmlns:a16="http://schemas.microsoft.com/office/drawing/2014/main" id="{CE948615-7287-44B3-8F50-7A0EE85FFD89}"/>
+                <a16:creationId xmlns:a16="http://schemas.microsoft.com/office/drawing/2014/main" id="{1A27D906-18DF-47E4-B26E-C4C521F28EF0}"/>
               </a:ext>
             </a:extLst>
           </p:cNvPr>
@@ -17389,7 +17389,7 @@
           <p:cNvPr id="5" name="">
             <a:extLst xmlns:a="http://schemas.openxmlformats.org/drawingml/2006/main">
               <a:ext uri="{FF2B5EF4-FFF2-40B4-BE49-F238E27FC236}">
-                <a16:creationId xmlns:a16="http://schemas.microsoft.com/office/drawing/2014/main" id="{B0EA18C7-01C2-4853-8FFC-D01E364EFFA9}"/>
+                <a16:creationId xmlns:a16="http://schemas.microsoft.com/office/drawing/2014/main" id="{D65E5ECB-8439-42EA-8295-3C9764C7C037}"/>
               </a:ext>
             </a:extLst>
           </p:cNvPr>
@@ -17424,7 +17424,7 @@
           <p:nvPr/>
         </p:nvPicPr>
         <p:blipFill>
-          <a:blip xmlns:r="http://schemas.openxmlformats.org/officeDocument/2006/relationships" xmlns:a="http://schemas.openxmlformats.org/drawingml/2006/main" r:embed="R858841db794e4f78"/>
+          <a:blip xmlns:r="http://schemas.openxmlformats.org/officeDocument/2006/relationships" xmlns:a="http://schemas.openxmlformats.org/drawingml/2006/main" r:embed="R8f10a34eac7944a2"/>
           <a:stretch xmlns:a="http://schemas.openxmlformats.org/drawingml/2006/main"/>
         </p:blipFill>
         <p:spPr>
@@ -17442,7 +17442,7 @@
           <p:cNvPr id="7" name="">
             <a:extLst xmlns:a="http://schemas.openxmlformats.org/drawingml/2006/main">
               <a:ext uri="{FF2B5EF4-FFF2-40B4-BE49-F238E27FC236}">
-                <a16:creationId xmlns:a16="http://schemas.microsoft.com/office/drawing/2014/main" id="{DD6DECC5-2028-481C-BF9C-9B88DBAF5754}"/>
+                <a16:creationId xmlns:a16="http://schemas.microsoft.com/office/drawing/2014/main" id="{21A285F7-BFE4-4FA2-A6D0-6F48B66175C6}"/>
               </a:ext>
             </a:extLst>
           </p:cNvPr>
@@ -17494,7 +17494,7 @@
           <p:cNvPr id="8" name="">
             <a:extLst xmlns:a="http://schemas.openxmlformats.org/drawingml/2006/main">
               <a:ext uri="{FF2B5EF4-FFF2-40B4-BE49-F238E27FC236}">
-                <a16:creationId xmlns:a16="http://schemas.microsoft.com/office/drawing/2014/main" id="{B448C2E0-9A4C-481E-B3A4-AF32031DD93B}"/>
+                <a16:creationId xmlns:a16="http://schemas.microsoft.com/office/drawing/2014/main" id="{D30AF1E2-C7BC-4254-A371-BB6DB84F6BD5}"/>
               </a:ext>
             </a:extLst>
           </p:cNvPr>
@@ -17546,7 +17546,7 @@
           <p:cNvPr id="9" name="">
             <a:extLst xmlns:a="http://schemas.openxmlformats.org/drawingml/2006/main">
               <a:ext uri="{FF2B5EF4-FFF2-40B4-BE49-F238E27FC236}">
-                <a16:creationId xmlns:a16="http://schemas.microsoft.com/office/drawing/2014/main" id="{6C178276-F4EE-4182-8AF1-C9861EB90857}"/>
+                <a16:creationId xmlns:a16="http://schemas.microsoft.com/office/drawing/2014/main" id="{A7DCDE11-CE8E-4614-9E23-9100A55578AC}"/>
               </a:ext>
             </a:extLst>
           </p:cNvPr>
@@ -17598,7 +17598,7 @@
           <p:cNvPr id="10" name="">
             <a:extLst xmlns:a="http://schemas.openxmlformats.org/drawingml/2006/main">
               <a:ext uri="{FF2B5EF4-FFF2-40B4-BE49-F238E27FC236}">
-                <a16:creationId xmlns:a16="http://schemas.microsoft.com/office/drawing/2014/main" id="{6BDE59F9-ACCA-4FCA-AD08-9D5A98374A1F}"/>
+                <a16:creationId xmlns:a16="http://schemas.microsoft.com/office/drawing/2014/main" id="{AEA9AC69-D96C-4192-A418-94FAF0D438EC}"/>
               </a:ext>
             </a:extLst>
           </p:cNvPr>
@@ -17650,7 +17650,7 @@
           <p:cNvPr id="11" name="">
             <a:extLst xmlns:a="http://schemas.openxmlformats.org/drawingml/2006/main">
               <a:ext uri="{FF2B5EF4-FFF2-40B4-BE49-F238E27FC236}">
-                <a16:creationId xmlns:a16="http://schemas.microsoft.com/office/drawing/2014/main" id="{E28CC8DE-6AE0-4845-AA7B-E97EC858100D}"/>
+                <a16:creationId xmlns:a16="http://schemas.microsoft.com/office/drawing/2014/main" id="{D53DD343-D459-43B3-B5C5-196B3B784F3A}"/>
               </a:ext>
             </a:extLst>
           </p:cNvPr>
@@ -17681,7 +17681,7 @@
           <p:cNvPr id="12" name="">
             <a:extLst xmlns:a="http://schemas.openxmlformats.org/drawingml/2006/main">
               <a:ext uri="{FF2B5EF4-FFF2-40B4-BE49-F238E27FC236}">
-                <a16:creationId xmlns:a16="http://schemas.microsoft.com/office/drawing/2014/main" id="{1207953F-74FA-4218-A6E2-CCDDFB2E1460}"/>
+                <a16:creationId xmlns:a16="http://schemas.microsoft.com/office/drawing/2014/main" id="{2B863749-F197-4EA7-A541-52D6F524621B}"/>
               </a:ext>
             </a:extLst>
           </p:cNvPr>
@@ -17712,7 +17712,7 @@
           <p:cNvPr id="13" name="">
             <a:extLst xmlns:a="http://schemas.openxmlformats.org/drawingml/2006/main">
               <a:ext uri="{FF2B5EF4-FFF2-40B4-BE49-F238E27FC236}">
-                <a16:creationId xmlns:a16="http://schemas.microsoft.com/office/drawing/2014/main" id="{AE931AC3-C491-4E76-B2E5-79195D6E59F3}"/>
+                <a16:creationId xmlns:a16="http://schemas.microsoft.com/office/drawing/2014/main" id="{1881430A-5A1A-4B10-A9DD-CBB469AFD040}"/>
               </a:ext>
             </a:extLst>
           </p:cNvPr>
@@ -17764,7 +17764,7 @@
           <p:cNvPr id="14" name="">
             <a:extLst xmlns:a="http://schemas.openxmlformats.org/drawingml/2006/main">
               <a:ext uri="{FF2B5EF4-FFF2-40B4-BE49-F238E27FC236}">
-                <a16:creationId xmlns:a16="http://schemas.microsoft.com/office/drawing/2014/main" id="{C5BBEE64-9FFA-432C-80D7-B952EF13136B}"/>
+                <a16:creationId xmlns:a16="http://schemas.microsoft.com/office/drawing/2014/main" id="{61A81543-013B-46C9-ACB2-3D3D7363B63A}"/>
               </a:ext>
             </a:extLst>
           </p:cNvPr>
@@ -17816,7 +17816,7 @@
           <p:cNvPr id="15" name="">
             <a:extLst xmlns:a="http://schemas.openxmlformats.org/drawingml/2006/main">
               <a:ext uri="{FF2B5EF4-FFF2-40B4-BE49-F238E27FC236}">
-                <a16:creationId xmlns:a16="http://schemas.microsoft.com/office/drawing/2014/main" id="{3C24C974-5B29-453E-952B-65E511A2892A}"/>
+                <a16:creationId xmlns:a16="http://schemas.microsoft.com/office/drawing/2014/main" id="{B33A28E4-F6BE-4AD5-AF94-95B0ACC3CFC5}"/>
               </a:ext>
             </a:extLst>
           </p:cNvPr>
@@ -17868,7 +17868,7 @@
           <p:cNvPr id="16" name="">
             <a:extLst xmlns:a="http://schemas.openxmlformats.org/drawingml/2006/main">
               <a:ext uri="{FF2B5EF4-FFF2-40B4-BE49-F238E27FC236}">
-                <a16:creationId xmlns:a16="http://schemas.microsoft.com/office/drawing/2014/main" id="{01E8993A-45FA-466C-A305-0B61B092155E}"/>
+                <a16:creationId xmlns:a16="http://schemas.microsoft.com/office/drawing/2014/main" id="{34B234E2-B6E7-4A30-BE4B-8350D23666E1}"/>
               </a:ext>
             </a:extLst>
           </p:cNvPr>
@@ -17920,7 +17920,7 @@
           <p:cNvPr id="17" name="">
             <a:extLst xmlns:a="http://schemas.openxmlformats.org/drawingml/2006/main">
               <a:ext uri="{FF2B5EF4-FFF2-40B4-BE49-F238E27FC236}">
-                <a16:creationId xmlns:a16="http://schemas.microsoft.com/office/drawing/2014/main" id="{C6764B82-B465-4A5D-B55B-6443303FB85C}"/>
+                <a16:creationId xmlns:a16="http://schemas.microsoft.com/office/drawing/2014/main" id="{B6906B9F-2929-4C47-9FB1-FBD0C93C8051}"/>
               </a:ext>
             </a:extLst>
           </p:cNvPr>
@@ -17972,7 +17972,7 @@
           <p:cNvPr id="18" name="">
             <a:extLst xmlns:a="http://schemas.openxmlformats.org/drawingml/2006/main">
               <a:ext uri="{FF2B5EF4-FFF2-40B4-BE49-F238E27FC236}">
-                <a16:creationId xmlns:a16="http://schemas.microsoft.com/office/drawing/2014/main" id="{F314C22D-7C4B-4DD9-9B37-D0653A149D2E}"/>
+                <a16:creationId xmlns:a16="http://schemas.microsoft.com/office/drawing/2014/main" id="{EBB513D5-8B7A-4FE3-8581-9B21D8BCEEAE}"/>
               </a:ext>
             </a:extLst>
           </p:cNvPr>
@@ -18003,7 +18003,7 @@
           <p:cNvPr id="19" name="">
             <a:extLst xmlns:a="http://schemas.openxmlformats.org/drawingml/2006/main">
               <a:ext uri="{FF2B5EF4-FFF2-40B4-BE49-F238E27FC236}">
-                <a16:creationId xmlns:a16="http://schemas.microsoft.com/office/drawing/2014/main" id="{1A4F9FB9-B14D-4039-B495-51E006E5C085}"/>
+                <a16:creationId xmlns:a16="http://schemas.microsoft.com/office/drawing/2014/main" id="{E7EBF8EE-65CC-43CE-ADDA-72D98780468E}"/>
               </a:ext>
             </a:extLst>
           </p:cNvPr>
@@ -18034,7 +18034,7 @@
           <p:cNvPr id="20" name="">
             <a:extLst xmlns:a="http://schemas.openxmlformats.org/drawingml/2006/main">
               <a:ext uri="{FF2B5EF4-FFF2-40B4-BE49-F238E27FC236}">
-                <a16:creationId xmlns:a16="http://schemas.microsoft.com/office/drawing/2014/main" id="{CF92D3F2-89CE-42C5-9FB4-4250E27FA7BA}"/>
+                <a16:creationId xmlns:a16="http://schemas.microsoft.com/office/drawing/2014/main" id="{7FB35357-A3A9-432D-9E8C-C4F571CA7811}"/>
               </a:ext>
             </a:extLst>
           </p:cNvPr>
@@ -18086,7 +18086,7 @@
           <p:cNvPr id="21" name="">
             <a:extLst xmlns:a="http://schemas.openxmlformats.org/drawingml/2006/main">
               <a:ext uri="{FF2B5EF4-FFF2-40B4-BE49-F238E27FC236}">
-                <a16:creationId xmlns:a16="http://schemas.microsoft.com/office/drawing/2014/main" id="{77D7B977-C83B-4C0B-BAE1-F118B6E9B413}"/>
+                <a16:creationId xmlns:a16="http://schemas.microsoft.com/office/drawing/2014/main" id="{5ACFA05D-9159-484C-A914-C597676AE087}"/>
               </a:ext>
             </a:extLst>
           </p:cNvPr>
@@ -18138,7 +18138,7 @@
           <p:cNvPr id="22" name="">
             <a:extLst xmlns:a="http://schemas.openxmlformats.org/drawingml/2006/main">
               <a:ext uri="{FF2B5EF4-FFF2-40B4-BE49-F238E27FC236}">
-                <a16:creationId xmlns:a16="http://schemas.microsoft.com/office/drawing/2014/main" id="{4A4EDDB6-54A3-4F46-BC9C-2362BE653171}"/>
+                <a16:creationId xmlns:a16="http://schemas.microsoft.com/office/drawing/2014/main" id="{23F62548-243C-425B-AD92-1D06C20AE5C9}"/>
               </a:ext>
             </a:extLst>
           </p:cNvPr>
@@ -18190,7 +18190,7 @@
           <p:cNvPr id="23" name="">
             <a:extLst xmlns:a="http://schemas.openxmlformats.org/drawingml/2006/main">
               <a:ext uri="{FF2B5EF4-FFF2-40B4-BE49-F238E27FC236}">
-                <a16:creationId xmlns:a16="http://schemas.microsoft.com/office/drawing/2014/main" id="{B6C327EE-EDFC-46B4-B2A9-1CC434EEF700}"/>
+                <a16:creationId xmlns:a16="http://schemas.microsoft.com/office/drawing/2014/main" id="{45DF93A0-21B7-4895-AB75-6CAE15241DFD}"/>
               </a:ext>
             </a:extLst>
           </p:cNvPr>
@@ -18242,7 +18242,7 @@
           <p:cNvPr id="24" name="">
             <a:extLst xmlns:a="http://schemas.openxmlformats.org/drawingml/2006/main">
               <a:ext uri="{FF2B5EF4-FFF2-40B4-BE49-F238E27FC236}">
-                <a16:creationId xmlns:a16="http://schemas.microsoft.com/office/drawing/2014/main" id="{D00957D3-E0FD-40C7-974D-B4E895E11AE3}"/>
+                <a16:creationId xmlns:a16="http://schemas.microsoft.com/office/drawing/2014/main" id="{13E218A1-0437-4F2A-AE06-3E887022D3C9}"/>
               </a:ext>
             </a:extLst>
           </p:cNvPr>
@@ -18294,7 +18294,7 @@
           <p:cNvPr id="25" name="">
             <a:extLst xmlns:a="http://schemas.openxmlformats.org/drawingml/2006/main">
               <a:ext uri="{FF2B5EF4-FFF2-40B4-BE49-F238E27FC236}">
-                <a16:creationId xmlns:a16="http://schemas.microsoft.com/office/drawing/2014/main" id="{05CF533F-FAC9-462E-AE32-1C7D464D82DA}"/>
+                <a16:creationId xmlns:a16="http://schemas.microsoft.com/office/drawing/2014/main" id="{9EFCBA7F-3292-4E4F-8D68-4E085AFF976A}"/>
               </a:ext>
             </a:extLst>
           </p:cNvPr>
@@ -18325,7 +18325,7 @@
           <p:cNvPr id="26" name="">
             <a:extLst xmlns:a="http://schemas.openxmlformats.org/drawingml/2006/main">
               <a:ext uri="{FF2B5EF4-FFF2-40B4-BE49-F238E27FC236}">
-                <a16:creationId xmlns:a16="http://schemas.microsoft.com/office/drawing/2014/main" id="{D19BF86F-758D-43DC-9311-814DD001BE3E}"/>
+                <a16:creationId xmlns:a16="http://schemas.microsoft.com/office/drawing/2014/main" id="{31F032F5-E3B4-4052-8288-9B234552B953}"/>
               </a:ext>
             </a:extLst>
           </p:cNvPr>
@@ -18377,7 +18377,7 @@
           <p:cNvPr id="27" name="">
             <a:extLst xmlns:a="http://schemas.openxmlformats.org/drawingml/2006/main">
               <a:ext uri="{FF2B5EF4-FFF2-40B4-BE49-F238E27FC236}">
-                <a16:creationId xmlns:a16="http://schemas.microsoft.com/office/drawing/2014/main" id="{70D57C09-5AE5-453F-A742-5846DDF65C41}"/>
+                <a16:creationId xmlns:a16="http://schemas.microsoft.com/office/drawing/2014/main" id="{C995A14B-29F7-4024-9559-5183CDD5DF31}"/>
               </a:ext>
             </a:extLst>
           </p:cNvPr>
@@ -18429,7 +18429,7 @@
           <p:cNvPr id="28" name="">
             <a:extLst xmlns:a="http://schemas.openxmlformats.org/drawingml/2006/main">
               <a:ext uri="{FF2B5EF4-FFF2-40B4-BE49-F238E27FC236}">
-                <a16:creationId xmlns:a16="http://schemas.microsoft.com/office/drawing/2014/main" id="{DCAE2CE1-5478-4CD3-AF45-E81D85880428}"/>
+                <a16:creationId xmlns:a16="http://schemas.microsoft.com/office/drawing/2014/main" id="{6C97802E-38D2-4A22-A989-2FC32FFD7A1B}"/>
               </a:ext>
             </a:extLst>
           </p:cNvPr>
@@ -18481,7 +18481,7 @@
           <p:cNvPr id="29" name="">
             <a:extLst xmlns:a="http://schemas.openxmlformats.org/drawingml/2006/main">
               <a:ext uri="{FF2B5EF4-FFF2-40B4-BE49-F238E27FC236}">
-                <a16:creationId xmlns:a16="http://schemas.microsoft.com/office/drawing/2014/main" id="{B5527F73-BB59-400E-BC93-866624ABB5D3}"/>
+                <a16:creationId xmlns:a16="http://schemas.microsoft.com/office/drawing/2014/main" id="{0571C672-C7BB-475E-A83D-793AFB747F37}"/>
               </a:ext>
             </a:extLst>
           </p:cNvPr>
@@ -18533,7 +18533,7 @@
           <p:cNvPr id="30" name="">
             <a:extLst xmlns:a="http://schemas.openxmlformats.org/drawingml/2006/main">
               <a:ext uri="{FF2B5EF4-FFF2-40B4-BE49-F238E27FC236}">
-                <a16:creationId xmlns:a16="http://schemas.microsoft.com/office/drawing/2014/main" id="{35D0F7FC-1AA6-4FDE-8AE3-EB91AC7710A0}"/>
+                <a16:creationId xmlns:a16="http://schemas.microsoft.com/office/drawing/2014/main" id="{D364B5F6-BF70-4A89-96CF-978F4BDD7A66}"/>
               </a:ext>
             </a:extLst>
           </p:cNvPr>
@@ -18585,7 +18585,7 @@
           <p:cNvPr id="31" name="">
             <a:extLst xmlns:a="http://schemas.openxmlformats.org/drawingml/2006/main">
               <a:ext uri="{FF2B5EF4-FFF2-40B4-BE49-F238E27FC236}">
-                <a16:creationId xmlns:a16="http://schemas.microsoft.com/office/drawing/2014/main" id="{5F5FBB6D-06E1-4974-9A6D-754F3D1DFEAF}"/>
+                <a16:creationId xmlns:a16="http://schemas.microsoft.com/office/drawing/2014/main" id="{5602DD6A-4AB8-4281-AB6E-8E3024A5ABB4}"/>
               </a:ext>
             </a:extLst>
           </p:cNvPr>
@@ -18616,7 +18616,7 @@
           <p:cNvPr id="32" name="">
             <a:extLst xmlns:a="http://schemas.openxmlformats.org/drawingml/2006/main">
               <a:ext uri="{FF2B5EF4-FFF2-40B4-BE49-F238E27FC236}">
-                <a16:creationId xmlns:a16="http://schemas.microsoft.com/office/drawing/2014/main" id="{417F1124-552F-41B4-B5A6-A7A4410E8260}"/>
+                <a16:creationId xmlns:a16="http://schemas.microsoft.com/office/drawing/2014/main" id="{9E1F7A8F-3C5C-46DB-8C62-B648B56C5ED0}"/>
               </a:ext>
             </a:extLst>
           </p:cNvPr>
@@ -18647,7 +18647,7 @@
           <p:cNvPr id="33" name="">
             <a:extLst xmlns:a="http://schemas.openxmlformats.org/drawingml/2006/main">
               <a:ext uri="{FF2B5EF4-FFF2-40B4-BE49-F238E27FC236}">
-                <a16:creationId xmlns:a16="http://schemas.microsoft.com/office/drawing/2014/main" id="{3B7A4A5A-0227-43E1-BE9E-AC1EA082398C}"/>
+                <a16:creationId xmlns:a16="http://schemas.microsoft.com/office/drawing/2014/main" id="{B09B8A6F-5BCE-45C3-8582-508650774227}"/>
               </a:ext>
             </a:extLst>
           </p:cNvPr>
@@ -18699,7 +18699,7 @@
           <p:cNvPr id="34" name="">
             <a:extLst xmlns:a="http://schemas.openxmlformats.org/drawingml/2006/main">
               <a:ext uri="{FF2B5EF4-FFF2-40B4-BE49-F238E27FC236}">
-                <a16:creationId xmlns:a16="http://schemas.microsoft.com/office/drawing/2014/main" id="{85F48BD5-D744-4028-8EC4-0394A7A19DBE}"/>
+                <a16:creationId xmlns:a16="http://schemas.microsoft.com/office/drawing/2014/main" id="{7131523E-5AA7-46DA-9B7D-00423362C3B9}"/>
               </a:ext>
             </a:extLst>
           </p:cNvPr>
@@ -18751,7 +18751,7 @@
           <p:cNvPr id="35" name="">
             <a:extLst xmlns:a="http://schemas.openxmlformats.org/drawingml/2006/main">
               <a:ext uri="{FF2B5EF4-FFF2-40B4-BE49-F238E27FC236}">
-                <a16:creationId xmlns:a16="http://schemas.microsoft.com/office/drawing/2014/main" id="{9101965D-F746-41C9-90BB-AC2C675E80CF}"/>
+                <a16:creationId xmlns:a16="http://schemas.microsoft.com/office/drawing/2014/main" id="{9CEFFE44-63AF-40BF-91F7-2F37AAA26FCA}"/>
               </a:ext>
             </a:extLst>
           </p:cNvPr>
@@ -18803,7 +18803,7 @@
           <p:cNvPr id="36" name="">
             <a:extLst xmlns:a="http://schemas.openxmlformats.org/drawingml/2006/main">
               <a:ext uri="{FF2B5EF4-FFF2-40B4-BE49-F238E27FC236}">
-                <a16:creationId xmlns:a16="http://schemas.microsoft.com/office/drawing/2014/main" id="{0AE9FA6F-2910-41EC-84BE-6C346AFD6D2C}"/>
+                <a16:creationId xmlns:a16="http://schemas.microsoft.com/office/drawing/2014/main" id="{162C7D1D-5634-4BE7-9100-A75695A5C557}"/>
               </a:ext>
             </a:extLst>
           </p:cNvPr>
@@ -18855,7 +18855,7 @@
           <p:cNvPr id="37" name="">
             <a:extLst xmlns:a="http://schemas.openxmlformats.org/drawingml/2006/main">
               <a:ext uri="{FF2B5EF4-FFF2-40B4-BE49-F238E27FC236}">
-                <a16:creationId xmlns:a16="http://schemas.microsoft.com/office/drawing/2014/main" id="{13C6E5B1-D49F-4F19-8B4C-554EBC0EF77F}"/>
+                <a16:creationId xmlns:a16="http://schemas.microsoft.com/office/drawing/2014/main" id="{F8ADC30F-A489-4408-AF46-805AB8E8BC9F}"/>
               </a:ext>
             </a:extLst>
           </p:cNvPr>
@@ -18907,7 +18907,7 @@
           <p:cNvPr id="38" name="">
             <a:extLst xmlns:a="http://schemas.openxmlformats.org/drawingml/2006/main">
               <a:ext uri="{FF2B5EF4-FFF2-40B4-BE49-F238E27FC236}">
-                <a16:creationId xmlns:a16="http://schemas.microsoft.com/office/drawing/2014/main" id="{EA55D28D-47E2-4975-ADF8-72141B69FEDD}"/>
+                <a16:creationId xmlns:a16="http://schemas.microsoft.com/office/drawing/2014/main" id="{BD80749E-FE67-469B-BEC4-ECB31DE28483}"/>
               </a:ext>
             </a:extLst>
           </p:cNvPr>
@@ -18938,7 +18938,7 @@
           <p:cNvPr id="39" name="">
             <a:extLst xmlns:a="http://schemas.openxmlformats.org/drawingml/2006/main">
               <a:ext uri="{FF2B5EF4-FFF2-40B4-BE49-F238E27FC236}">
-                <a16:creationId xmlns:a16="http://schemas.microsoft.com/office/drawing/2014/main" id="{D3F40A3B-3E15-493C-A512-DC931CE1D32B}"/>
+                <a16:creationId xmlns:a16="http://schemas.microsoft.com/office/drawing/2014/main" id="{E1B4B555-B30A-4029-A7A5-71C079F9E004}"/>
               </a:ext>
             </a:extLst>
           </p:cNvPr>
@@ -18990,7 +18990,7 @@
           <p:cNvPr id="40" name="">
             <a:extLst xmlns:a="http://schemas.openxmlformats.org/drawingml/2006/main">
               <a:ext uri="{FF2B5EF4-FFF2-40B4-BE49-F238E27FC236}">
-                <a16:creationId xmlns:a16="http://schemas.microsoft.com/office/drawing/2014/main" id="{0AE8C950-6204-44B4-A4C9-FB83E4A3349A}"/>
+                <a16:creationId xmlns:a16="http://schemas.microsoft.com/office/drawing/2014/main" id="{49810197-3560-4E07-817E-EA743B140AFB}"/>
               </a:ext>
             </a:extLst>
           </p:cNvPr>
@@ -19042,7 +19042,7 @@
           <p:cNvPr id="41" name="">
             <a:extLst xmlns:a="http://schemas.openxmlformats.org/drawingml/2006/main">
               <a:ext uri="{FF2B5EF4-FFF2-40B4-BE49-F238E27FC236}">
-                <a16:creationId xmlns:a16="http://schemas.microsoft.com/office/drawing/2014/main" id="{92EF5DF3-9E9A-4B0A-B4A3-34C5478D6D13}"/>
+                <a16:creationId xmlns:a16="http://schemas.microsoft.com/office/drawing/2014/main" id="{D8D13D16-A286-4E4A-9A83-C3BD86A5A3D1}"/>
               </a:ext>
             </a:extLst>
           </p:cNvPr>
@@ -19094,7 +19094,7 @@
           <p:cNvPr id="42" name="">
             <a:extLst xmlns:a="http://schemas.openxmlformats.org/drawingml/2006/main">
               <a:ext uri="{FF2B5EF4-FFF2-40B4-BE49-F238E27FC236}">
-                <a16:creationId xmlns:a16="http://schemas.microsoft.com/office/drawing/2014/main" id="{BD4EC455-A802-4C96-B589-A0E1430D8AC9}"/>
+                <a16:creationId xmlns:a16="http://schemas.microsoft.com/office/drawing/2014/main" id="{A9AA5CF9-A4BB-4EF9-A750-A179945A8E28}"/>
               </a:ext>
             </a:extLst>
           </p:cNvPr>
@@ -19146,7 +19146,7 @@
           <p:cNvPr id="43" name="">
             <a:extLst xmlns:a="http://schemas.openxmlformats.org/drawingml/2006/main">
               <a:ext uri="{FF2B5EF4-FFF2-40B4-BE49-F238E27FC236}">
-                <a16:creationId xmlns:a16="http://schemas.microsoft.com/office/drawing/2014/main" id="{C4BBC47C-0358-4F47-95F3-09AB276423CA}"/>
+                <a16:creationId xmlns:a16="http://schemas.microsoft.com/office/drawing/2014/main" id="{DE8E5BE3-405C-482F-8333-D29EEA03C0D1}"/>
               </a:ext>
             </a:extLst>
           </p:cNvPr>
@@ -19198,7 +19198,7 @@
           <p:cNvPr id="44" name="">
             <a:extLst xmlns:a="http://schemas.openxmlformats.org/drawingml/2006/main">
               <a:ext uri="{FF2B5EF4-FFF2-40B4-BE49-F238E27FC236}">
-                <a16:creationId xmlns:a16="http://schemas.microsoft.com/office/drawing/2014/main" id="{199C5FEE-D63B-4CA0-B497-985C2334AB0F}"/>
+                <a16:creationId xmlns:a16="http://schemas.microsoft.com/office/drawing/2014/main" id="{9B715104-DADC-42AB-887E-F983FD22B6ED}"/>
               </a:ext>
             </a:extLst>
           </p:cNvPr>
@@ -19229,7 +19229,7 @@
           <p:cNvPr id="45" name="">
             <a:extLst xmlns:a="http://schemas.openxmlformats.org/drawingml/2006/main">
               <a:ext uri="{FF2B5EF4-FFF2-40B4-BE49-F238E27FC236}">
-                <a16:creationId xmlns:a16="http://schemas.microsoft.com/office/drawing/2014/main" id="{C3F5A1AB-50D4-4315-B4B8-33E596ACE83E}"/>
+                <a16:creationId xmlns:a16="http://schemas.microsoft.com/office/drawing/2014/main" id="{E37470E8-D0A2-437D-9653-3D3C02E9C777}"/>
               </a:ext>
             </a:extLst>
           </p:cNvPr>
@@ -19260,7 +19260,7 @@
           <p:cNvPr id="46" name="">
             <a:extLst xmlns:a="http://schemas.openxmlformats.org/drawingml/2006/main">
               <a:ext uri="{FF2B5EF4-FFF2-40B4-BE49-F238E27FC236}">
-                <a16:creationId xmlns:a16="http://schemas.microsoft.com/office/drawing/2014/main" id="{211EE2B0-07BC-487E-B0B4-917E2D080B52}"/>
+                <a16:creationId xmlns:a16="http://schemas.microsoft.com/office/drawing/2014/main" id="{FDAC92CD-E25B-47AE-A8D7-E5A22E65CA29}"/>
               </a:ext>
             </a:extLst>
           </p:cNvPr>
@@ -19312,7 +19312,7 @@
           <p:cNvPr id="47" name="">
             <a:extLst xmlns:a="http://schemas.openxmlformats.org/drawingml/2006/main">
               <a:ext uri="{FF2B5EF4-FFF2-40B4-BE49-F238E27FC236}">
-                <a16:creationId xmlns:a16="http://schemas.microsoft.com/office/drawing/2014/main" id="{98F65751-B474-4C4A-9009-B051C4C6D033}"/>
+                <a16:creationId xmlns:a16="http://schemas.microsoft.com/office/drawing/2014/main" id="{A4BC3822-4016-4398-B62E-1C2F6C1E27E4}"/>
               </a:ext>
             </a:extLst>
           </p:cNvPr>
@@ -19364,7 +19364,7 @@
           <p:cNvPr id="48" name="">
             <a:extLst xmlns:a="http://schemas.openxmlformats.org/drawingml/2006/main">
               <a:ext uri="{FF2B5EF4-FFF2-40B4-BE49-F238E27FC236}">
-                <a16:creationId xmlns:a16="http://schemas.microsoft.com/office/drawing/2014/main" id="{E9423082-AB00-4C3A-85E0-DAADE92EED0B}"/>
+                <a16:creationId xmlns:a16="http://schemas.microsoft.com/office/drawing/2014/main" id="{A6B9C632-D57A-4B6D-AC4A-C9D63B80E00C}"/>
               </a:ext>
             </a:extLst>
           </p:cNvPr>
@@ -19416,7 +19416,7 @@
           <p:cNvPr id="49" name="">
             <a:extLst xmlns:a="http://schemas.openxmlformats.org/drawingml/2006/main">
               <a:ext uri="{FF2B5EF4-FFF2-40B4-BE49-F238E27FC236}">
-                <a16:creationId xmlns:a16="http://schemas.microsoft.com/office/drawing/2014/main" id="{3F856F41-F7F3-4A1C-9C92-D1C809720098}"/>
+                <a16:creationId xmlns:a16="http://schemas.microsoft.com/office/drawing/2014/main" id="{00C39375-3C8A-43A3-974E-168724E49170}"/>
               </a:ext>
             </a:extLst>
           </p:cNvPr>
@@ -19468,7 +19468,7 @@
           <p:cNvPr id="50" name="">
             <a:extLst xmlns:a="http://schemas.openxmlformats.org/drawingml/2006/main">
               <a:ext uri="{FF2B5EF4-FFF2-40B4-BE49-F238E27FC236}">
-                <a16:creationId xmlns:a16="http://schemas.microsoft.com/office/drawing/2014/main" id="{6E8990CC-EEE3-4021-B159-8348C3DF00C3}"/>
+                <a16:creationId xmlns:a16="http://schemas.microsoft.com/office/drawing/2014/main" id="{EC74D7A2-9141-4388-90A7-F7775652706B}"/>
               </a:ext>
             </a:extLst>
           </p:cNvPr>
@@ -19520,7 +19520,7 @@
           <p:cNvPr id="51" name="">
             <a:extLst xmlns:a="http://schemas.openxmlformats.org/drawingml/2006/main">
               <a:ext uri="{FF2B5EF4-FFF2-40B4-BE49-F238E27FC236}">
-                <a16:creationId xmlns:a16="http://schemas.microsoft.com/office/drawing/2014/main" id="{5F3F1E90-02B0-4DCE-AA05-1DE2EA481BDC}"/>
+                <a16:creationId xmlns:a16="http://schemas.microsoft.com/office/drawing/2014/main" id="{D04955C0-4165-4386-AB2F-08B9ADCDC358}"/>
               </a:ext>
             </a:extLst>
           </p:cNvPr>
@@ -19551,7 +19551,7 @@
           <p:cNvPr id="52" name="">
             <a:extLst xmlns:a="http://schemas.openxmlformats.org/drawingml/2006/main">
               <a:ext uri="{FF2B5EF4-FFF2-40B4-BE49-F238E27FC236}">
-                <a16:creationId xmlns:a16="http://schemas.microsoft.com/office/drawing/2014/main" id="{016E2CA1-50BD-429B-8977-266C00869D59}"/>
+                <a16:creationId xmlns:a16="http://schemas.microsoft.com/office/drawing/2014/main" id="{90C214F3-CCFB-410B-BC1A-860C038AEC9B}"/>
               </a:ext>
             </a:extLst>
           </p:cNvPr>
@@ -19603,7 +19603,7 @@
           <p:cNvPr id="53" name="">
             <a:extLst xmlns:a="http://schemas.openxmlformats.org/drawingml/2006/main">
               <a:ext uri="{FF2B5EF4-FFF2-40B4-BE49-F238E27FC236}">
-                <a16:creationId xmlns:a16="http://schemas.microsoft.com/office/drawing/2014/main" id="{5A90956E-6F95-47E5-ADAB-D8F739A11AFF}"/>
+                <a16:creationId xmlns:a16="http://schemas.microsoft.com/office/drawing/2014/main" id="{26D9FB65-E06B-4A65-ACE9-91D3C4C0DE32}"/>
               </a:ext>
             </a:extLst>
           </p:cNvPr>
@@ -19655,7 +19655,7 @@
           <p:cNvPr id="54" name="">
             <a:extLst xmlns:a="http://schemas.openxmlformats.org/drawingml/2006/main">
               <a:ext uri="{FF2B5EF4-FFF2-40B4-BE49-F238E27FC236}">
-                <a16:creationId xmlns:a16="http://schemas.microsoft.com/office/drawing/2014/main" id="{ABC050C1-906E-456E-9C07-DC146E0532E6}"/>
+                <a16:creationId xmlns:a16="http://schemas.microsoft.com/office/drawing/2014/main" id="{3457E915-0F05-4E49-87B7-348D9AD62A62}"/>
               </a:ext>
             </a:extLst>
           </p:cNvPr>
@@ -19707,7 +19707,7 @@
           <p:cNvPr id="55" name="">
             <a:extLst xmlns:a="http://schemas.openxmlformats.org/drawingml/2006/main">
               <a:ext uri="{FF2B5EF4-FFF2-40B4-BE49-F238E27FC236}">
-                <a16:creationId xmlns:a16="http://schemas.microsoft.com/office/drawing/2014/main" id="{C6F68A88-15E8-4970-92B8-4F3A10143392}"/>
+                <a16:creationId xmlns:a16="http://schemas.microsoft.com/office/drawing/2014/main" id="{4EF4F05E-405E-4DBD-8B7F-2B1D0B6A0162}"/>
               </a:ext>
             </a:extLst>
           </p:cNvPr>
@@ -19759,7 +19759,7 @@
           <p:cNvPr id="56" name="">
             <a:extLst xmlns:a="http://schemas.openxmlformats.org/drawingml/2006/main">
               <a:ext uri="{FF2B5EF4-FFF2-40B4-BE49-F238E27FC236}">
-                <a16:creationId xmlns:a16="http://schemas.microsoft.com/office/drawing/2014/main" id="{4941BE9B-2D86-4A95-9C07-87C83DFF226C}"/>
+                <a16:creationId xmlns:a16="http://schemas.microsoft.com/office/drawing/2014/main" id="{9A4C8DAE-4983-4D3E-8244-87FCEC5CE9CB}"/>
               </a:ext>
             </a:extLst>
           </p:cNvPr>
@@ -19811,7 +19811,7 @@
           <p:cNvPr id="57" name="">
             <a:extLst xmlns:a="http://schemas.openxmlformats.org/drawingml/2006/main">
               <a:ext uri="{FF2B5EF4-FFF2-40B4-BE49-F238E27FC236}">
-                <a16:creationId xmlns:a16="http://schemas.microsoft.com/office/drawing/2014/main" id="{5F53C23B-1D32-474F-916B-B743AE18CFF7}"/>
+                <a16:creationId xmlns:a16="http://schemas.microsoft.com/office/drawing/2014/main" id="{FAA644F3-2E0E-4E6C-8EB1-13AFFFC762DC}"/>
               </a:ext>
             </a:extLst>
           </p:cNvPr>
@@ -19842,7 +19842,7 @@
           <p:cNvPr id="58" name="">
             <a:extLst xmlns:a="http://schemas.openxmlformats.org/drawingml/2006/main">
               <a:ext uri="{FF2B5EF4-FFF2-40B4-BE49-F238E27FC236}">
-                <a16:creationId xmlns:a16="http://schemas.microsoft.com/office/drawing/2014/main" id="{160E1913-59D5-4AA0-8CB6-65F8EE1D2F22}"/>
+                <a16:creationId xmlns:a16="http://schemas.microsoft.com/office/drawing/2014/main" id="{C52F489F-C37D-404C-AC3A-EFDF7AEA25A6}"/>
               </a:ext>
             </a:extLst>
           </p:cNvPr>
@@ -19873,7 +19873,7 @@
           <p:cNvPr id="59" name="">
             <a:extLst xmlns:a="http://schemas.openxmlformats.org/drawingml/2006/main">
               <a:ext uri="{FF2B5EF4-FFF2-40B4-BE49-F238E27FC236}">
-                <a16:creationId xmlns:a16="http://schemas.microsoft.com/office/drawing/2014/main" id="{F283EB65-7DBA-4DD4-9519-0FF16FCCEDCA}"/>
+                <a16:creationId xmlns:a16="http://schemas.microsoft.com/office/drawing/2014/main" id="{F9BBE8DF-662F-4FD9-929A-886D72D91786}"/>
               </a:ext>
             </a:extLst>
           </p:cNvPr>
@@ -19925,7 +19925,7 @@
           <p:cNvPr id="60" name="">
             <a:extLst xmlns:a="http://schemas.openxmlformats.org/drawingml/2006/main">
               <a:ext uri="{FF2B5EF4-FFF2-40B4-BE49-F238E27FC236}">
-                <a16:creationId xmlns:a16="http://schemas.microsoft.com/office/drawing/2014/main" id="{995BA564-A86E-4D3A-B571-5B976B5F0342}"/>
+                <a16:creationId xmlns:a16="http://schemas.microsoft.com/office/drawing/2014/main" id="{90B27012-CDAC-4C5C-B180-2381914F3098}"/>
               </a:ext>
             </a:extLst>
           </p:cNvPr>
@@ -19977,7 +19977,7 @@
           <p:cNvPr id="61" name="">
             <a:extLst xmlns:a="http://schemas.openxmlformats.org/drawingml/2006/main">
               <a:ext uri="{FF2B5EF4-FFF2-40B4-BE49-F238E27FC236}">
-                <a16:creationId xmlns:a16="http://schemas.microsoft.com/office/drawing/2014/main" id="{2993A125-7EEE-4E9F-B57D-E6634E3B8F7D}"/>
+                <a16:creationId xmlns:a16="http://schemas.microsoft.com/office/drawing/2014/main" id="{B98F6F8A-9A92-40E6-9E1C-724BCBEB468C}"/>
               </a:ext>
             </a:extLst>
           </p:cNvPr>
@@ -20029,7 +20029,7 @@
           <p:cNvPr id="62" name="">
             <a:extLst xmlns:a="http://schemas.openxmlformats.org/drawingml/2006/main">
               <a:ext uri="{FF2B5EF4-FFF2-40B4-BE49-F238E27FC236}">
-                <a16:creationId xmlns:a16="http://schemas.microsoft.com/office/drawing/2014/main" id="{9AB8495F-8AE5-4CB3-9B41-32811531D1AE}"/>
+                <a16:creationId xmlns:a16="http://schemas.microsoft.com/office/drawing/2014/main" id="{A335D8EB-CFF0-4067-993E-5DEF8AEFAEF0}"/>
               </a:ext>
             </a:extLst>
           </p:cNvPr>
@@ -20081,7 +20081,7 @@
           <p:cNvPr id="63" name="">
             <a:extLst xmlns:a="http://schemas.openxmlformats.org/drawingml/2006/main">
               <a:ext uri="{FF2B5EF4-FFF2-40B4-BE49-F238E27FC236}">
-                <a16:creationId xmlns:a16="http://schemas.microsoft.com/office/drawing/2014/main" id="{DC9EA29F-3B2D-4C71-BA53-F2EDF221B78C}"/>
+                <a16:creationId xmlns:a16="http://schemas.microsoft.com/office/drawing/2014/main" id="{88B02DED-FBC4-4FC9-9D6D-226C8CD5951F}"/>
               </a:ext>
             </a:extLst>
           </p:cNvPr>
@@ -20133,7 +20133,7 @@
           <p:cNvPr id="64" name="">
             <a:extLst xmlns:a="http://schemas.openxmlformats.org/drawingml/2006/main">
               <a:ext uri="{FF2B5EF4-FFF2-40B4-BE49-F238E27FC236}">
-                <a16:creationId xmlns:a16="http://schemas.microsoft.com/office/drawing/2014/main" id="{F54B8814-D31C-4731-91AA-37EFDA356D13}"/>
+                <a16:creationId xmlns:a16="http://schemas.microsoft.com/office/drawing/2014/main" id="{4CB5D008-A312-4C6C-A400-F9F2C4841B5D}"/>
               </a:ext>
             </a:extLst>
           </p:cNvPr>
@@ -20164,7 +20164,7 @@
           <p:cNvPr id="65" name="">
             <a:extLst xmlns:a="http://schemas.openxmlformats.org/drawingml/2006/main">
               <a:ext uri="{FF2B5EF4-FFF2-40B4-BE49-F238E27FC236}">
-                <a16:creationId xmlns:a16="http://schemas.microsoft.com/office/drawing/2014/main" id="{C89C9F5B-D3C4-493F-852A-98F3C61E4EBF}"/>
+                <a16:creationId xmlns:a16="http://schemas.microsoft.com/office/drawing/2014/main" id="{ECA4566E-B62B-4712-BE8B-20FB3138C27A}"/>
               </a:ext>
             </a:extLst>
           </p:cNvPr>
@@ -20216,7 +20216,7 @@
           <p:cNvPr id="66" name="">
             <a:extLst xmlns:a="http://schemas.openxmlformats.org/drawingml/2006/main">
               <a:ext uri="{FF2B5EF4-FFF2-40B4-BE49-F238E27FC236}">
-                <a16:creationId xmlns:a16="http://schemas.microsoft.com/office/drawing/2014/main" id="{C3062C63-C374-437C-B3BB-FFCB6A0DE138}"/>
+                <a16:creationId xmlns:a16="http://schemas.microsoft.com/office/drawing/2014/main" id="{DF24912A-CCDA-4E02-9BE6-AC44114D7163}"/>
               </a:ext>
             </a:extLst>
           </p:cNvPr>
@@ -20268,7 +20268,7 @@
           <p:cNvPr id="67" name="">
             <a:extLst xmlns:a="http://schemas.openxmlformats.org/drawingml/2006/main">
               <a:ext uri="{FF2B5EF4-FFF2-40B4-BE49-F238E27FC236}">
-                <a16:creationId xmlns:a16="http://schemas.microsoft.com/office/drawing/2014/main" id="{BDA99E81-1693-42EF-8615-5BEABEE0AFD9}"/>
+                <a16:creationId xmlns:a16="http://schemas.microsoft.com/office/drawing/2014/main" id="{B3EBB36D-FD7D-47FE-B7A2-624112451B8D}"/>
               </a:ext>
             </a:extLst>
           </p:cNvPr>
@@ -20320,7 +20320,7 @@
           <p:cNvPr id="68" name="">
             <a:extLst xmlns:a="http://schemas.openxmlformats.org/drawingml/2006/main">
               <a:ext uri="{FF2B5EF4-FFF2-40B4-BE49-F238E27FC236}">
-                <a16:creationId xmlns:a16="http://schemas.microsoft.com/office/drawing/2014/main" id="{D21EA23D-990D-46DE-ADAB-7FF23C51EFCB}"/>
+                <a16:creationId xmlns:a16="http://schemas.microsoft.com/office/drawing/2014/main" id="{63E49FAE-6770-4B5D-8F65-3FF643C6E045}"/>
               </a:ext>
             </a:extLst>
           </p:cNvPr>
@@ -20372,7 +20372,7 @@
           <p:cNvPr id="69" name="">
             <a:extLst xmlns:a="http://schemas.openxmlformats.org/drawingml/2006/main">
               <a:ext uri="{FF2B5EF4-FFF2-40B4-BE49-F238E27FC236}">
-                <a16:creationId xmlns:a16="http://schemas.microsoft.com/office/drawing/2014/main" id="{91725EC0-0D4A-436C-BCA5-09B9A505ACF9}"/>
+                <a16:creationId xmlns:a16="http://schemas.microsoft.com/office/drawing/2014/main" id="{9F20209D-6309-48DF-9B74-67D1960F11C8}"/>
               </a:ext>
             </a:extLst>
           </p:cNvPr>
@@ -20424,7 +20424,7 @@
           <p:cNvPr id="70" name="">
             <a:extLst xmlns:a="http://schemas.openxmlformats.org/drawingml/2006/main">
               <a:ext uri="{FF2B5EF4-FFF2-40B4-BE49-F238E27FC236}">
-                <a16:creationId xmlns:a16="http://schemas.microsoft.com/office/drawing/2014/main" id="{482247E7-30ED-4087-A6AA-3241CE8D013F}"/>
+                <a16:creationId xmlns:a16="http://schemas.microsoft.com/office/drawing/2014/main" id="{2820A514-BD9B-4B55-9C5D-A49286429AE4}"/>
               </a:ext>
             </a:extLst>
           </p:cNvPr>
@@ -20455,7 +20455,7 @@
           <p:cNvPr id="71" name="">
             <a:extLst xmlns:a="http://schemas.openxmlformats.org/drawingml/2006/main">
               <a:ext uri="{FF2B5EF4-FFF2-40B4-BE49-F238E27FC236}">
-                <a16:creationId xmlns:a16="http://schemas.microsoft.com/office/drawing/2014/main" id="{AC6CA293-3F73-4C04-9D15-2F50B7C8151C}"/>
+                <a16:creationId xmlns:a16="http://schemas.microsoft.com/office/drawing/2014/main" id="{96F0EFA5-EE52-4FA0-9F32-EFCDAF44A6F6}"/>
               </a:ext>
             </a:extLst>
           </p:cNvPr>
@@ -20486,7 +20486,7 @@
           <p:cNvPr id="72" name="">
             <a:extLst xmlns:a="http://schemas.openxmlformats.org/drawingml/2006/main">
               <a:ext uri="{FF2B5EF4-FFF2-40B4-BE49-F238E27FC236}">
-                <a16:creationId xmlns:a16="http://schemas.microsoft.com/office/drawing/2014/main" id="{33B00FC0-C3A0-46CE-88C8-687C6AB490F0}"/>
+                <a16:creationId xmlns:a16="http://schemas.microsoft.com/office/drawing/2014/main" id="{5647C424-0819-4AC8-9A8B-ECFA488F583F}"/>
               </a:ext>
             </a:extLst>
           </p:cNvPr>
@@ -20538,7 +20538,7 @@
           <p:cNvPr id="73" name="">
             <a:extLst xmlns:a="http://schemas.openxmlformats.org/drawingml/2006/main">
               <a:ext uri="{FF2B5EF4-FFF2-40B4-BE49-F238E27FC236}">
-                <a16:creationId xmlns:a16="http://schemas.microsoft.com/office/drawing/2014/main" id="{520972F7-4FCA-4484-B1D3-7F250EC8BAB1}"/>
+                <a16:creationId xmlns:a16="http://schemas.microsoft.com/office/drawing/2014/main" id="{E9772C02-EB44-4626-8DB4-A2CEC809C792}"/>
               </a:ext>
             </a:extLst>
           </p:cNvPr>
@@ -20590,7 +20590,7 @@
           <p:cNvPr id="74" name="">
             <a:extLst xmlns:a="http://schemas.openxmlformats.org/drawingml/2006/main">
               <a:ext uri="{FF2B5EF4-FFF2-40B4-BE49-F238E27FC236}">
-                <a16:creationId xmlns:a16="http://schemas.microsoft.com/office/drawing/2014/main" id="{D73DACCB-7B9B-484C-8732-8452B6D006AE}"/>
+                <a16:creationId xmlns:a16="http://schemas.microsoft.com/office/drawing/2014/main" id="{F9E5AC74-10DB-45F4-A012-28445D03CC64}"/>
               </a:ext>
             </a:extLst>
           </p:cNvPr>
@@ -20642,7 +20642,7 @@
           <p:cNvPr id="75" name="">
             <a:extLst xmlns:a="http://schemas.openxmlformats.org/drawingml/2006/main">
               <a:ext uri="{FF2B5EF4-FFF2-40B4-BE49-F238E27FC236}">
-                <a16:creationId xmlns:a16="http://schemas.microsoft.com/office/drawing/2014/main" id="{C5615487-B100-4D3B-BBCD-115930CBD2D3}"/>
+                <a16:creationId xmlns:a16="http://schemas.microsoft.com/office/drawing/2014/main" id="{A37DE7C8-4B5D-4A83-8A0D-4003DE1355E7}"/>
               </a:ext>
             </a:extLst>
           </p:cNvPr>
@@ -20694,7 +20694,7 @@
           <p:cNvPr id="76" name="">
             <a:extLst xmlns:a="http://schemas.openxmlformats.org/drawingml/2006/main">
               <a:ext uri="{FF2B5EF4-FFF2-40B4-BE49-F238E27FC236}">
-                <a16:creationId xmlns:a16="http://schemas.microsoft.com/office/drawing/2014/main" id="{06D9C364-D63D-4E5B-ADD4-F3D2B6C655A9}"/>
+                <a16:creationId xmlns:a16="http://schemas.microsoft.com/office/drawing/2014/main" id="{B1E8E72A-BCD7-44D5-BEF8-9EF210427AD3}"/>
               </a:ext>
             </a:extLst>
           </p:cNvPr>
@@ -20746,7 +20746,7 @@
           <p:cNvPr id="77" name="">
             <a:extLst xmlns:a="http://schemas.openxmlformats.org/drawingml/2006/main">
               <a:ext uri="{FF2B5EF4-FFF2-40B4-BE49-F238E27FC236}">
-                <a16:creationId xmlns:a16="http://schemas.microsoft.com/office/drawing/2014/main" id="{E34BF0A2-169C-469A-B9C3-9DA19E28EEDB}"/>
+                <a16:creationId xmlns:a16="http://schemas.microsoft.com/office/drawing/2014/main" id="{4DC29AFE-228B-4B63-92AB-E2200DEC3610}"/>
               </a:ext>
             </a:extLst>
           </p:cNvPr>
@@ -20777,7 +20777,7 @@
           <p:cNvPr id="78" name="">
             <a:extLst xmlns:a="http://schemas.openxmlformats.org/drawingml/2006/main">
               <a:ext uri="{FF2B5EF4-FFF2-40B4-BE49-F238E27FC236}">
-                <a16:creationId xmlns:a16="http://schemas.microsoft.com/office/drawing/2014/main" id="{AC1E5EBB-41D0-4039-88A7-E067C4A15FF6}"/>
+                <a16:creationId xmlns:a16="http://schemas.microsoft.com/office/drawing/2014/main" id="{0CD77F8A-FF53-4B89-9349-0E12FB2D11F5}"/>
               </a:ext>
             </a:extLst>
           </p:cNvPr>
@@ -20829,7 +20829,7 @@
           <p:cNvPr id="79" name="">
             <a:extLst xmlns:a="http://schemas.openxmlformats.org/drawingml/2006/main">
               <a:ext uri="{FF2B5EF4-FFF2-40B4-BE49-F238E27FC236}">
-                <a16:creationId xmlns:a16="http://schemas.microsoft.com/office/drawing/2014/main" id="{49DE4DEB-997E-4F6E-A851-F030984C8A30}"/>
+                <a16:creationId xmlns:a16="http://schemas.microsoft.com/office/drawing/2014/main" id="{D66A96AD-FBB1-492E-9AC9-CEFC2DD8AD7A}"/>
               </a:ext>
             </a:extLst>
           </p:cNvPr>
@@ -20881,7 +20881,7 @@
           <p:cNvPr id="80" name="">
             <a:extLst xmlns:a="http://schemas.openxmlformats.org/drawingml/2006/main">
               <a:ext uri="{FF2B5EF4-FFF2-40B4-BE49-F238E27FC236}">
-                <a16:creationId xmlns:a16="http://schemas.microsoft.com/office/drawing/2014/main" id="{C7E05E46-B4BB-49ED-B488-614AFCF891D0}"/>
+                <a16:creationId xmlns:a16="http://schemas.microsoft.com/office/drawing/2014/main" id="{9890A6FF-EAAE-49FD-8E31-D48BC93EB18F}"/>
               </a:ext>
             </a:extLst>
           </p:cNvPr>
@@ -20933,7 +20933,7 @@
           <p:cNvPr id="81" name="">
             <a:extLst xmlns:a="http://schemas.openxmlformats.org/drawingml/2006/main">
               <a:ext uri="{FF2B5EF4-FFF2-40B4-BE49-F238E27FC236}">
-                <a16:creationId xmlns:a16="http://schemas.microsoft.com/office/drawing/2014/main" id="{4D53B133-CDE0-4314-A718-468579FDC945}"/>
+                <a16:creationId xmlns:a16="http://schemas.microsoft.com/office/drawing/2014/main" id="{AD7078A0-DEA5-45AB-8900-291373372A8D}"/>
               </a:ext>
             </a:extLst>
           </p:cNvPr>
@@ -20985,7 +20985,7 @@
           <p:cNvPr id="82" name="">
             <a:extLst xmlns:a="http://schemas.openxmlformats.org/drawingml/2006/main">
               <a:ext uri="{FF2B5EF4-FFF2-40B4-BE49-F238E27FC236}">
-                <a16:creationId xmlns:a16="http://schemas.microsoft.com/office/drawing/2014/main" id="{03D79ABF-31A2-4028-8BDD-659FF8246E0D}"/>
+                <a16:creationId xmlns:a16="http://schemas.microsoft.com/office/drawing/2014/main" id="{27001D50-7386-4D03-9E16-4634F80AC68F}"/>
               </a:ext>
             </a:extLst>
           </p:cNvPr>
@@ -21037,7 +21037,7 @@
           <p:cNvPr id="83" name="">
             <a:extLst xmlns:a="http://schemas.openxmlformats.org/drawingml/2006/main">
               <a:ext uri="{FF2B5EF4-FFF2-40B4-BE49-F238E27FC236}">
-                <a16:creationId xmlns:a16="http://schemas.microsoft.com/office/drawing/2014/main" id="{36860E9E-D55A-4778-8D11-AED348D5D5B7}"/>
+                <a16:creationId xmlns:a16="http://schemas.microsoft.com/office/drawing/2014/main" id="{D507D9DE-FD81-4CC9-A459-82633BEAA0A0}"/>
               </a:ext>
             </a:extLst>
           </p:cNvPr>
@@ -21068,7 +21068,7 @@
           <p:cNvPr id="84" name="">
             <a:extLst xmlns:a="http://schemas.openxmlformats.org/drawingml/2006/main">
               <a:ext uri="{FF2B5EF4-FFF2-40B4-BE49-F238E27FC236}">
-                <a16:creationId xmlns:a16="http://schemas.microsoft.com/office/drawing/2014/main" id="{9813F55A-D2A7-4BC9-BA9D-86EF7E02A130}"/>
+                <a16:creationId xmlns:a16="http://schemas.microsoft.com/office/drawing/2014/main" id="{07CD7D5A-1867-4080-A6B5-AD0F41CEA3E9}"/>
               </a:ext>
             </a:extLst>
           </p:cNvPr>
@@ -21120,7 +21120,7 @@
           <p:cNvPr id="85" name="">
             <a:extLst xmlns:a="http://schemas.openxmlformats.org/drawingml/2006/main">
               <a:ext uri="{FF2B5EF4-FFF2-40B4-BE49-F238E27FC236}">
-                <a16:creationId xmlns:a16="http://schemas.microsoft.com/office/drawing/2014/main" id="{6AF3EFC3-D57F-49A2-9F50-D49F125140B4}"/>
+                <a16:creationId xmlns:a16="http://schemas.microsoft.com/office/drawing/2014/main" id="{E59DF176-7007-47CE-A7EA-A84E481F568E}"/>
               </a:ext>
             </a:extLst>
           </p:cNvPr>
@@ -21172,7 +21172,7 @@
           <p:cNvPr id="86" name="">
             <a:extLst xmlns:a="http://schemas.openxmlformats.org/drawingml/2006/main">
               <a:ext uri="{FF2B5EF4-FFF2-40B4-BE49-F238E27FC236}">
-                <a16:creationId xmlns:a16="http://schemas.microsoft.com/office/drawing/2014/main" id="{1646197C-1553-4010-8786-7F205828608F}"/>
+                <a16:creationId xmlns:a16="http://schemas.microsoft.com/office/drawing/2014/main" id="{61A00A01-B34A-493A-8B69-AB21FC99BFE1}"/>
               </a:ext>
             </a:extLst>
           </p:cNvPr>
@@ -21224,7 +21224,7 @@
           <p:cNvPr id="87" name="">
             <a:extLst xmlns:a="http://schemas.openxmlformats.org/drawingml/2006/main">
               <a:ext uri="{FF2B5EF4-FFF2-40B4-BE49-F238E27FC236}">
-                <a16:creationId xmlns:a16="http://schemas.microsoft.com/office/drawing/2014/main" id="{AEE8417E-CE25-4D95-8EE7-B9D1F28D9F1D}"/>
+                <a16:creationId xmlns:a16="http://schemas.microsoft.com/office/drawing/2014/main" id="{1DF8DAF9-1459-4C6D-9E36-E54B8FC2C398}"/>
               </a:ext>
             </a:extLst>
           </p:cNvPr>
@@ -21276,7 +21276,7 @@
           <p:cNvPr id="88" name="">
             <a:extLst xmlns:a="http://schemas.openxmlformats.org/drawingml/2006/main">
               <a:ext uri="{FF2B5EF4-FFF2-40B4-BE49-F238E27FC236}">
-                <a16:creationId xmlns:a16="http://schemas.microsoft.com/office/drawing/2014/main" id="{C0851885-0C16-4DCD-93F2-ACF2257014D2}"/>
+                <a16:creationId xmlns:a16="http://schemas.microsoft.com/office/drawing/2014/main" id="{EDE77D8D-5171-424A-9C11-35F7811A2938}"/>
               </a:ext>
             </a:extLst>
           </p:cNvPr>
@@ -21328,7 +21328,7 @@
           <p:cNvPr id="89" name="">
             <a:extLst xmlns:a="http://schemas.openxmlformats.org/drawingml/2006/main">
               <a:ext uri="{FF2B5EF4-FFF2-40B4-BE49-F238E27FC236}">
-                <a16:creationId xmlns:a16="http://schemas.microsoft.com/office/drawing/2014/main" id="{99C64BF5-EC33-4B01-9F39-29EC82D4AD17}"/>
+                <a16:creationId xmlns:a16="http://schemas.microsoft.com/office/drawing/2014/main" id="{EE1A1C71-0755-4AE2-B55D-3290B8781D90}"/>
               </a:ext>
             </a:extLst>
           </p:cNvPr>
@@ -21359,7 +21359,7 @@
           <p:cNvPr id="90" name="">
             <a:extLst xmlns:a="http://schemas.openxmlformats.org/drawingml/2006/main">
               <a:ext uri="{FF2B5EF4-FFF2-40B4-BE49-F238E27FC236}">
-                <a16:creationId xmlns:a16="http://schemas.microsoft.com/office/drawing/2014/main" id="{A3570D8D-94E6-487E-9D51-71D02AE07E31}"/>
+                <a16:creationId xmlns:a16="http://schemas.microsoft.com/office/drawing/2014/main" id="{081530C8-3ED0-4972-A3ED-A9B7F538ED49}"/>
               </a:ext>
             </a:extLst>
           </p:cNvPr>
@@ -21390,7 +21390,7 @@
           <p:cNvPr id="91" name="">
             <a:extLst xmlns:a="http://schemas.openxmlformats.org/drawingml/2006/main">
               <a:ext uri="{FF2B5EF4-FFF2-40B4-BE49-F238E27FC236}">
-                <a16:creationId xmlns:a16="http://schemas.microsoft.com/office/drawing/2014/main" id="{08F5AEE8-3774-40D5-973E-DFFDEACFF12D}"/>
+                <a16:creationId xmlns:a16="http://schemas.microsoft.com/office/drawing/2014/main" id="{69B839C4-15E8-4903-8F36-FEB02CDAD530}"/>
               </a:ext>
             </a:extLst>
           </p:cNvPr>
@@ -21442,7 +21442,7 @@
           <p:cNvPr id="92" name="">
             <a:extLst xmlns:a="http://schemas.openxmlformats.org/drawingml/2006/main">
               <a:ext uri="{FF2B5EF4-FFF2-40B4-BE49-F238E27FC236}">
-                <a16:creationId xmlns:a16="http://schemas.microsoft.com/office/drawing/2014/main" id="{08E12772-83CA-460F-BF84-95A713272D5F}"/>
+                <a16:creationId xmlns:a16="http://schemas.microsoft.com/office/drawing/2014/main" id="{965D7806-3308-4BF2-A34D-8568F2654FBF}"/>
               </a:ext>
             </a:extLst>
           </p:cNvPr>
@@ -21494,7 +21494,7 @@
           <p:cNvPr id="93" name="">
             <a:extLst xmlns:a="http://schemas.openxmlformats.org/drawingml/2006/main">
               <a:ext uri="{FF2B5EF4-FFF2-40B4-BE49-F238E27FC236}">
-                <a16:creationId xmlns:a16="http://schemas.microsoft.com/office/drawing/2014/main" id="{D32E66E7-9199-4746-BF67-9757D8EB3AF3}"/>
+                <a16:creationId xmlns:a16="http://schemas.microsoft.com/office/drawing/2014/main" id="{252A7CA4-CD10-48F5-A97F-618654A8468D}"/>
               </a:ext>
             </a:extLst>
           </p:cNvPr>
@@ -21546,7 +21546,7 @@
           <p:cNvPr id="94" name="">
             <a:extLst xmlns:a="http://schemas.openxmlformats.org/drawingml/2006/main">
               <a:ext uri="{FF2B5EF4-FFF2-40B4-BE49-F238E27FC236}">
-                <a16:creationId xmlns:a16="http://schemas.microsoft.com/office/drawing/2014/main" id="{A6293732-DA19-4B55-B5BC-570A10631E98}"/>
+                <a16:creationId xmlns:a16="http://schemas.microsoft.com/office/drawing/2014/main" id="{6D61A5F1-83D3-4870-B87F-6F7E14F12874}"/>
               </a:ext>
             </a:extLst>
           </p:cNvPr>
@@ -21598,7 +21598,7 @@
           <p:cNvPr id="95" name="">
             <a:extLst xmlns:a="http://schemas.openxmlformats.org/drawingml/2006/main">
               <a:ext uri="{FF2B5EF4-FFF2-40B4-BE49-F238E27FC236}">
-                <a16:creationId xmlns:a16="http://schemas.microsoft.com/office/drawing/2014/main" id="{06B62D2E-64BD-468A-8842-71C8D98033D3}"/>
+                <a16:creationId xmlns:a16="http://schemas.microsoft.com/office/drawing/2014/main" id="{A68365F4-E4C2-4200-BB8D-11FD7E7AFAF7}"/>
               </a:ext>
             </a:extLst>
           </p:cNvPr>
@@ -21648,7 +21648,7 @@
     </p:spTree>
     <p:extLst>
       <p:ext uri="{BB962C8B-B14F-4D97-AF65-F5344CB8AC3E}">
-        <p14:creationId xmlns:p14="http://schemas.microsoft.com/office/powerpoint/2010/main" val="2034246130"/>
+        <p14:creationId xmlns:p14="http://schemas.microsoft.com/office/powerpoint/2010/main" val="1959968639"/>
       </p:ext>
     </p:extLst>
   </p:cSld>
@@ -21679,7 +21679,7 @@
           <p:cNvPr id="135" name="">
             <a:extLst xmlns:a="http://schemas.openxmlformats.org/drawingml/2006/main">
               <a:ext uri="{FF2B5EF4-FFF2-40B4-BE49-F238E27FC236}">
-                <a16:creationId xmlns:a16="http://schemas.microsoft.com/office/drawing/2014/main" id="{A0A02738-9300-4044-A55A-BBB469B8C42A}"/>
+                <a16:creationId xmlns:a16="http://schemas.microsoft.com/office/drawing/2014/main" id="{D6801FD8-80A2-4DC0-92A2-806E815BFE0A}"/>
               </a:ext>
             </a:extLst>
           </p:cNvPr>
@@ -21712,7 +21712,7 @@
           <p:cNvPr id="2" name="">
             <a:extLst xmlns:a="http://schemas.openxmlformats.org/drawingml/2006/main">
               <a:ext uri="{FF2B5EF4-FFF2-40B4-BE49-F238E27FC236}">
-                <a16:creationId xmlns:a16="http://schemas.microsoft.com/office/drawing/2014/main" id="{A5E4BC60-A4BF-4551-8B74-7DC57F1223CC}"/>
+                <a16:creationId xmlns:a16="http://schemas.microsoft.com/office/drawing/2014/main" id="{EC1206CA-4017-4033-87C9-92A66846946B}"/>
               </a:ext>
             </a:extLst>
           </p:cNvPr>
@@ -21743,7 +21743,7 @@
           <p:cNvPr id="3" name="">
             <a:extLst xmlns:a="http://schemas.openxmlformats.org/drawingml/2006/main">
               <a:ext uri="{FF2B5EF4-FFF2-40B4-BE49-F238E27FC236}">
-                <a16:creationId xmlns:a16="http://schemas.microsoft.com/office/drawing/2014/main" id="{49709DE9-3147-465D-94F9-4E716C3AB8E7}"/>
+                <a16:creationId xmlns:a16="http://schemas.microsoft.com/office/drawing/2014/main" id="{C3D29806-8D40-40A1-9687-B595BC398ABD}"/>
               </a:ext>
             </a:extLst>
           </p:cNvPr>
@@ -21795,7 +21795,7 @@
           <p:cNvPr id="4" name="">
             <a:extLst xmlns:a="http://schemas.openxmlformats.org/drawingml/2006/main">
               <a:ext uri="{FF2B5EF4-FFF2-40B4-BE49-F238E27FC236}">
-                <a16:creationId xmlns:a16="http://schemas.microsoft.com/office/drawing/2014/main" id="{417E61E0-3E33-47C7-B173-EA8C2C295DD5}"/>
+                <a16:creationId xmlns:a16="http://schemas.microsoft.com/office/drawing/2014/main" id="{355779A2-B547-4E25-8461-C91418AB748C}"/>
               </a:ext>
             </a:extLst>
           </p:cNvPr>
@@ -21847,7 +21847,7 @@
           <p:cNvPr id="5" name="">
             <a:extLst xmlns:a="http://schemas.openxmlformats.org/drawingml/2006/main">
               <a:ext uri="{FF2B5EF4-FFF2-40B4-BE49-F238E27FC236}">
-                <a16:creationId xmlns:a16="http://schemas.microsoft.com/office/drawing/2014/main" id="{23036183-D716-464E-831F-FD024897FF36}"/>
+                <a16:creationId xmlns:a16="http://schemas.microsoft.com/office/drawing/2014/main" id="{F4B119B2-75AD-4988-81A2-2A998AE848CD}"/>
               </a:ext>
             </a:extLst>
           </p:cNvPr>
@@ -21882,7 +21882,7 @@
           <p:nvPr/>
         </p:nvPicPr>
         <p:blipFill>
-          <a:blip xmlns:r="http://schemas.openxmlformats.org/officeDocument/2006/relationships" xmlns:a="http://schemas.openxmlformats.org/drawingml/2006/main" r:embed="R3b4810a105494574"/>
+          <a:blip xmlns:r="http://schemas.openxmlformats.org/officeDocument/2006/relationships" xmlns:a="http://schemas.openxmlformats.org/drawingml/2006/main" r:embed="R8b8da2fefd944233"/>
           <a:stretch xmlns:a="http://schemas.openxmlformats.org/drawingml/2006/main"/>
         </p:blipFill>
         <p:spPr>
@@ -21900,7 +21900,7 @@
           <p:cNvPr id="7" name="">
             <a:extLst xmlns:a="http://schemas.openxmlformats.org/drawingml/2006/main">
               <a:ext uri="{FF2B5EF4-FFF2-40B4-BE49-F238E27FC236}">
-                <a16:creationId xmlns:a16="http://schemas.microsoft.com/office/drawing/2014/main" id="{1AB55179-87E5-4289-9069-02AC7EA0124E}"/>
+                <a16:creationId xmlns:a16="http://schemas.microsoft.com/office/drawing/2014/main" id="{92BC8686-6995-42A7-B32B-8419A4DA066C}"/>
               </a:ext>
             </a:extLst>
           </p:cNvPr>
@@ -21952,7 +21952,7 @@
           <p:cNvPr id="8" name="">
             <a:extLst xmlns:a="http://schemas.openxmlformats.org/drawingml/2006/main">
               <a:ext uri="{FF2B5EF4-FFF2-40B4-BE49-F238E27FC236}">
-                <a16:creationId xmlns:a16="http://schemas.microsoft.com/office/drawing/2014/main" id="{F2C41F96-1944-4E17-BD3F-74736A99DF27}"/>
+                <a16:creationId xmlns:a16="http://schemas.microsoft.com/office/drawing/2014/main" id="{D9B6C754-CF3E-44BA-AFF0-47E31626EEF2}"/>
               </a:ext>
             </a:extLst>
           </p:cNvPr>
@@ -22004,7 +22004,7 @@
           <p:cNvPr id="9" name="">
             <a:extLst xmlns:a="http://schemas.openxmlformats.org/drawingml/2006/main">
               <a:ext uri="{FF2B5EF4-FFF2-40B4-BE49-F238E27FC236}">
-                <a16:creationId xmlns:a16="http://schemas.microsoft.com/office/drawing/2014/main" id="{A88D13DA-6236-4693-8564-973D88621430}"/>
+                <a16:creationId xmlns:a16="http://schemas.microsoft.com/office/drawing/2014/main" id="{B4D474B9-EB05-43E6-AFF2-608B6AC3480E}"/>
               </a:ext>
             </a:extLst>
           </p:cNvPr>
@@ -22056,7 +22056,7 @@
           <p:cNvPr id="10" name="">
             <a:extLst xmlns:a="http://schemas.openxmlformats.org/drawingml/2006/main">
               <a:ext uri="{FF2B5EF4-FFF2-40B4-BE49-F238E27FC236}">
-                <a16:creationId xmlns:a16="http://schemas.microsoft.com/office/drawing/2014/main" id="{84FCB4F0-1FE6-4F26-992F-81F66E0D8C16}"/>
+                <a16:creationId xmlns:a16="http://schemas.microsoft.com/office/drawing/2014/main" id="{246D3E3B-101B-4FA5-BEA4-F9110CEE4896}"/>
               </a:ext>
             </a:extLst>
           </p:cNvPr>
@@ -22108,7 +22108,7 @@
           <p:cNvPr id="11" name="">
             <a:extLst xmlns:a="http://schemas.openxmlformats.org/drawingml/2006/main">
               <a:ext uri="{FF2B5EF4-FFF2-40B4-BE49-F238E27FC236}">
-                <a16:creationId xmlns:a16="http://schemas.microsoft.com/office/drawing/2014/main" id="{885F4B91-FC92-41F7-867F-902F06C9A1ED}"/>
+                <a16:creationId xmlns:a16="http://schemas.microsoft.com/office/drawing/2014/main" id="{69713BEE-8F16-4C94-8734-04167345DE31}"/>
               </a:ext>
             </a:extLst>
           </p:cNvPr>
@@ -22139,7 +22139,7 @@
           <p:cNvPr id="12" name="">
             <a:extLst xmlns:a="http://schemas.openxmlformats.org/drawingml/2006/main">
               <a:ext uri="{FF2B5EF4-FFF2-40B4-BE49-F238E27FC236}">
-                <a16:creationId xmlns:a16="http://schemas.microsoft.com/office/drawing/2014/main" id="{D0E23437-9F6A-4192-AC15-DC702E29B7EF}"/>
+                <a16:creationId xmlns:a16="http://schemas.microsoft.com/office/drawing/2014/main" id="{14192EE5-EB8A-4117-8309-CE622FAC62A1}"/>
               </a:ext>
             </a:extLst>
           </p:cNvPr>
@@ -22170,7 +22170,7 @@
           <p:cNvPr id="13" name="">
             <a:extLst xmlns:a="http://schemas.openxmlformats.org/drawingml/2006/main">
               <a:ext uri="{FF2B5EF4-FFF2-40B4-BE49-F238E27FC236}">
-                <a16:creationId xmlns:a16="http://schemas.microsoft.com/office/drawing/2014/main" id="{14ACDE20-CDE7-4628-9497-02482DDEC639}"/>
+                <a16:creationId xmlns:a16="http://schemas.microsoft.com/office/drawing/2014/main" id="{EFAFF53E-1CFC-453D-9556-806323562DA6}"/>
               </a:ext>
             </a:extLst>
           </p:cNvPr>
@@ -22222,7 +22222,7 @@
           <p:cNvPr id="14" name="">
             <a:extLst xmlns:a="http://schemas.openxmlformats.org/drawingml/2006/main">
               <a:ext uri="{FF2B5EF4-FFF2-40B4-BE49-F238E27FC236}">
-                <a16:creationId xmlns:a16="http://schemas.microsoft.com/office/drawing/2014/main" id="{B4D098A0-A3E2-45CF-BD69-5F205E062BC1}"/>
+                <a16:creationId xmlns:a16="http://schemas.microsoft.com/office/drawing/2014/main" id="{4A64281A-1A9D-4929-94D2-00FB3EC3D7DF}"/>
               </a:ext>
             </a:extLst>
           </p:cNvPr>
@@ -22274,7 +22274,7 @@
           <p:cNvPr id="15" name="">
             <a:extLst xmlns:a="http://schemas.openxmlformats.org/drawingml/2006/main">
               <a:ext uri="{FF2B5EF4-FFF2-40B4-BE49-F238E27FC236}">
-                <a16:creationId xmlns:a16="http://schemas.microsoft.com/office/drawing/2014/main" id="{EB6A8927-8FE4-41F1-AD68-ADDF958F80FC}"/>
+                <a16:creationId xmlns:a16="http://schemas.microsoft.com/office/drawing/2014/main" id="{18D9366A-A97C-4CE2-8C78-86D71D6FFEF2}"/>
               </a:ext>
             </a:extLst>
           </p:cNvPr>
@@ -22326,7 +22326,7 @@
           <p:cNvPr id="16" name="">
             <a:extLst xmlns:a="http://schemas.openxmlformats.org/drawingml/2006/main">
               <a:ext uri="{FF2B5EF4-FFF2-40B4-BE49-F238E27FC236}">
-                <a16:creationId xmlns:a16="http://schemas.microsoft.com/office/drawing/2014/main" id="{46D6A214-CE82-4764-A0EF-3FE36310272A}"/>
+                <a16:creationId xmlns:a16="http://schemas.microsoft.com/office/drawing/2014/main" id="{44AA650D-5832-4A4C-8C8B-E70A03387A3F}"/>
               </a:ext>
             </a:extLst>
           </p:cNvPr>
@@ -22378,7 +22378,7 @@
           <p:cNvPr id="17" name="">
             <a:extLst xmlns:a="http://schemas.openxmlformats.org/drawingml/2006/main">
               <a:ext uri="{FF2B5EF4-FFF2-40B4-BE49-F238E27FC236}">
-                <a16:creationId xmlns:a16="http://schemas.microsoft.com/office/drawing/2014/main" id="{021FABA1-7BC4-437C-BACF-804828046116}"/>
+                <a16:creationId xmlns:a16="http://schemas.microsoft.com/office/drawing/2014/main" id="{9FE6BD18-240D-41C6-A954-EB303255FE99}"/>
               </a:ext>
             </a:extLst>
           </p:cNvPr>
@@ -22430,7 +22430,7 @@
           <p:cNvPr id="18" name="">
             <a:extLst xmlns:a="http://schemas.openxmlformats.org/drawingml/2006/main">
               <a:ext uri="{FF2B5EF4-FFF2-40B4-BE49-F238E27FC236}">
-                <a16:creationId xmlns:a16="http://schemas.microsoft.com/office/drawing/2014/main" id="{2CC613D9-7A55-47DD-B4A4-49AB624DE199}"/>
+                <a16:creationId xmlns:a16="http://schemas.microsoft.com/office/drawing/2014/main" id="{96BB6DFD-C1D2-4583-B1DE-333B35929C28}"/>
               </a:ext>
             </a:extLst>
           </p:cNvPr>
@@ -22482,7 +22482,7 @@
           <p:cNvPr id="19" name="">
             <a:extLst xmlns:a="http://schemas.openxmlformats.org/drawingml/2006/main">
               <a:ext uri="{FF2B5EF4-FFF2-40B4-BE49-F238E27FC236}">
-                <a16:creationId xmlns:a16="http://schemas.microsoft.com/office/drawing/2014/main" id="{95ADC888-1099-4F24-9700-612DE03A07E9}"/>
+                <a16:creationId xmlns:a16="http://schemas.microsoft.com/office/drawing/2014/main" id="{0AAAF2BD-DCFC-4C65-AD3F-F2F2392432B3}"/>
               </a:ext>
             </a:extLst>
           </p:cNvPr>
@@ -22534,7 +22534,7 @@
           <p:cNvPr id="20" name="">
             <a:extLst xmlns:a="http://schemas.openxmlformats.org/drawingml/2006/main">
               <a:ext uri="{FF2B5EF4-FFF2-40B4-BE49-F238E27FC236}">
-                <a16:creationId xmlns:a16="http://schemas.microsoft.com/office/drawing/2014/main" id="{BB33BB16-5CA2-40C8-9F85-59998D255B6B}"/>
+                <a16:creationId xmlns:a16="http://schemas.microsoft.com/office/drawing/2014/main" id="{4F9D953E-D4C8-46EC-AC98-E3DE20892719}"/>
               </a:ext>
             </a:extLst>
           </p:cNvPr>
@@ -22586,7 +22586,7 @@
           <p:cNvPr id="21" name="">
             <a:extLst xmlns:a="http://schemas.openxmlformats.org/drawingml/2006/main">
               <a:ext uri="{FF2B5EF4-FFF2-40B4-BE49-F238E27FC236}">
-                <a16:creationId xmlns:a16="http://schemas.microsoft.com/office/drawing/2014/main" id="{EEFDD631-A059-427F-B339-5C834EBED373}"/>
+                <a16:creationId xmlns:a16="http://schemas.microsoft.com/office/drawing/2014/main" id="{3E40724E-B694-4960-857C-E12B894B983F}"/>
               </a:ext>
             </a:extLst>
           </p:cNvPr>
@@ -22617,7 +22617,7 @@
           <p:cNvPr id="22" name="">
             <a:extLst xmlns:a="http://schemas.openxmlformats.org/drawingml/2006/main">
               <a:ext uri="{FF2B5EF4-FFF2-40B4-BE49-F238E27FC236}">
-                <a16:creationId xmlns:a16="http://schemas.microsoft.com/office/drawing/2014/main" id="{54BDDFB0-FB32-41B4-9ABB-F1F1B80FA5A3}"/>
+                <a16:creationId xmlns:a16="http://schemas.microsoft.com/office/drawing/2014/main" id="{836505EC-5386-43C9-8BE3-8A3BEBF17006}"/>
               </a:ext>
             </a:extLst>
           </p:cNvPr>
@@ -22669,7 +22669,7 @@
           <p:cNvPr id="23" name="">
             <a:extLst xmlns:a="http://schemas.openxmlformats.org/drawingml/2006/main">
               <a:ext uri="{FF2B5EF4-FFF2-40B4-BE49-F238E27FC236}">
-                <a16:creationId xmlns:a16="http://schemas.microsoft.com/office/drawing/2014/main" id="{CF6671E3-40EB-4751-8411-1A94B5EBDB17}"/>
+                <a16:creationId xmlns:a16="http://schemas.microsoft.com/office/drawing/2014/main" id="{0CF0C9C6-5517-4298-AE39-73261A407177}"/>
               </a:ext>
             </a:extLst>
           </p:cNvPr>
@@ -22721,7 +22721,7 @@
           <p:cNvPr id="24" name="">
             <a:extLst xmlns:a="http://schemas.openxmlformats.org/drawingml/2006/main">
               <a:ext uri="{FF2B5EF4-FFF2-40B4-BE49-F238E27FC236}">
-                <a16:creationId xmlns:a16="http://schemas.microsoft.com/office/drawing/2014/main" id="{1A6A08C4-F1C6-46EF-A110-4CED645B5F41}"/>
+                <a16:creationId xmlns:a16="http://schemas.microsoft.com/office/drawing/2014/main" id="{71C33746-636F-43B5-8B81-C9A852F1112A}"/>
               </a:ext>
             </a:extLst>
           </p:cNvPr>
@@ -22773,7 +22773,7 @@
           <p:cNvPr id="25" name="">
             <a:extLst xmlns:a="http://schemas.openxmlformats.org/drawingml/2006/main">
               <a:ext uri="{FF2B5EF4-FFF2-40B4-BE49-F238E27FC236}">
-                <a16:creationId xmlns:a16="http://schemas.microsoft.com/office/drawing/2014/main" id="{C4FB8F9F-1AD0-407C-BBD5-67F28A1BB8AA}"/>
+                <a16:creationId xmlns:a16="http://schemas.microsoft.com/office/drawing/2014/main" id="{22723A49-7B2D-46B1-8222-85DBFA521E57}"/>
               </a:ext>
             </a:extLst>
           </p:cNvPr>
@@ -22825,7 +22825,7 @@
           <p:cNvPr id="26" name="">
             <a:extLst xmlns:a="http://schemas.openxmlformats.org/drawingml/2006/main">
               <a:ext uri="{FF2B5EF4-FFF2-40B4-BE49-F238E27FC236}">
-                <a16:creationId xmlns:a16="http://schemas.microsoft.com/office/drawing/2014/main" id="{CB20A700-36D8-4705-A89B-5A80B3DAB5A9}"/>
+                <a16:creationId xmlns:a16="http://schemas.microsoft.com/office/drawing/2014/main" id="{536984FA-9863-4E43-8C80-E1B8EFF32C6F}"/>
               </a:ext>
             </a:extLst>
           </p:cNvPr>
@@ -22877,7 +22877,7 @@
           <p:cNvPr id="27" name="">
             <a:extLst xmlns:a="http://schemas.openxmlformats.org/drawingml/2006/main">
               <a:ext uri="{FF2B5EF4-FFF2-40B4-BE49-F238E27FC236}">
-                <a16:creationId xmlns:a16="http://schemas.microsoft.com/office/drawing/2014/main" id="{32A0A4A7-E806-4450-A4B5-CFB48850FD7C}"/>
+                <a16:creationId xmlns:a16="http://schemas.microsoft.com/office/drawing/2014/main" id="{05ADB4AA-6A6F-4526-A023-41ED81B9ECD9}"/>
               </a:ext>
             </a:extLst>
           </p:cNvPr>
@@ -22929,7 +22929,7 @@
           <p:cNvPr id="28" name="">
             <a:extLst xmlns:a="http://schemas.openxmlformats.org/drawingml/2006/main">
               <a:ext uri="{FF2B5EF4-FFF2-40B4-BE49-F238E27FC236}">
-                <a16:creationId xmlns:a16="http://schemas.microsoft.com/office/drawing/2014/main" id="{C4CA87B1-4140-4E36-B44F-181D884453C4}"/>
+                <a16:creationId xmlns:a16="http://schemas.microsoft.com/office/drawing/2014/main" id="{F8CC8EFA-8F92-4EAB-AF3D-A7AD84C4D74E}"/>
               </a:ext>
             </a:extLst>
           </p:cNvPr>
@@ -22981,7 +22981,7 @@
           <p:cNvPr id="29" name="">
             <a:extLst xmlns:a="http://schemas.openxmlformats.org/drawingml/2006/main">
               <a:ext uri="{FF2B5EF4-FFF2-40B4-BE49-F238E27FC236}">
-                <a16:creationId xmlns:a16="http://schemas.microsoft.com/office/drawing/2014/main" id="{6B78384A-25AD-42B6-B4FF-7AD8C6DF3186}"/>
+                <a16:creationId xmlns:a16="http://schemas.microsoft.com/office/drawing/2014/main" id="{03D7741F-4ACB-42F4-B5D8-63D8242D3576}"/>
               </a:ext>
             </a:extLst>
           </p:cNvPr>
@@ -23033,7 +23033,7 @@
           <p:cNvPr id="30" name="">
             <a:extLst xmlns:a="http://schemas.openxmlformats.org/drawingml/2006/main">
               <a:ext uri="{FF2B5EF4-FFF2-40B4-BE49-F238E27FC236}">
-                <a16:creationId xmlns:a16="http://schemas.microsoft.com/office/drawing/2014/main" id="{AFC50E92-5CDA-4C18-BA96-9060AD12B519}"/>
+                <a16:creationId xmlns:a16="http://schemas.microsoft.com/office/drawing/2014/main" id="{02B6D097-65AA-4209-A727-B3E9A7EC15C0}"/>
               </a:ext>
             </a:extLst>
           </p:cNvPr>
@@ -23064,7 +23064,7 @@
           <p:cNvPr id="31" name="">
             <a:extLst xmlns:a="http://schemas.openxmlformats.org/drawingml/2006/main">
               <a:ext uri="{FF2B5EF4-FFF2-40B4-BE49-F238E27FC236}">
-                <a16:creationId xmlns:a16="http://schemas.microsoft.com/office/drawing/2014/main" id="{A45683BB-EECB-4A59-BB5A-C82EAE98F9EB}"/>
+                <a16:creationId xmlns:a16="http://schemas.microsoft.com/office/drawing/2014/main" id="{1CC04E74-7B90-4895-8473-BD6B57BF6157}"/>
               </a:ext>
             </a:extLst>
           </p:cNvPr>
@@ -23095,7 +23095,7 @@
           <p:cNvPr id="32" name="">
             <a:extLst xmlns:a="http://schemas.openxmlformats.org/drawingml/2006/main">
               <a:ext uri="{FF2B5EF4-FFF2-40B4-BE49-F238E27FC236}">
-                <a16:creationId xmlns:a16="http://schemas.microsoft.com/office/drawing/2014/main" id="{4328AD3C-F896-4958-A352-9681B94F3278}"/>
+                <a16:creationId xmlns:a16="http://schemas.microsoft.com/office/drawing/2014/main" id="{226E0D06-053A-4C62-A533-ACE35C91D355}"/>
               </a:ext>
             </a:extLst>
           </p:cNvPr>
@@ -23147,7 +23147,7 @@
           <p:cNvPr id="33" name="">
             <a:extLst xmlns:a="http://schemas.openxmlformats.org/drawingml/2006/main">
               <a:ext uri="{FF2B5EF4-FFF2-40B4-BE49-F238E27FC236}">
-                <a16:creationId xmlns:a16="http://schemas.microsoft.com/office/drawing/2014/main" id="{4A66EA77-5EDC-4FE3-9CEE-C410FE9F0F1C}"/>
+                <a16:creationId xmlns:a16="http://schemas.microsoft.com/office/drawing/2014/main" id="{26FDB252-AB21-4D2B-A955-A3F1D470DA67}"/>
               </a:ext>
             </a:extLst>
           </p:cNvPr>
@@ -23199,7 +23199,7 @@
           <p:cNvPr id="34" name="">
             <a:extLst xmlns:a="http://schemas.openxmlformats.org/drawingml/2006/main">
               <a:ext uri="{FF2B5EF4-FFF2-40B4-BE49-F238E27FC236}">
-                <a16:creationId xmlns:a16="http://schemas.microsoft.com/office/drawing/2014/main" id="{F59DCC3D-F816-4795-A5FB-7201E7D24322}"/>
+                <a16:creationId xmlns:a16="http://schemas.microsoft.com/office/drawing/2014/main" id="{06DEB2B4-D2D2-4938-AC07-CBC433864E61}"/>
               </a:ext>
             </a:extLst>
           </p:cNvPr>
@@ -23251,7 +23251,7 @@
           <p:cNvPr id="35" name="">
             <a:extLst xmlns:a="http://schemas.openxmlformats.org/drawingml/2006/main">
               <a:ext uri="{FF2B5EF4-FFF2-40B4-BE49-F238E27FC236}">
-                <a16:creationId xmlns:a16="http://schemas.microsoft.com/office/drawing/2014/main" id="{289C0E60-5362-4041-A199-798B5E48BCE7}"/>
+                <a16:creationId xmlns:a16="http://schemas.microsoft.com/office/drawing/2014/main" id="{B31A13B6-60C1-4A22-A8FD-B01922721C22}"/>
               </a:ext>
             </a:extLst>
           </p:cNvPr>
@@ -23303,7 +23303,7 @@
           <p:cNvPr id="36" name="">
             <a:extLst xmlns:a="http://schemas.openxmlformats.org/drawingml/2006/main">
               <a:ext uri="{FF2B5EF4-FFF2-40B4-BE49-F238E27FC236}">
-                <a16:creationId xmlns:a16="http://schemas.microsoft.com/office/drawing/2014/main" id="{86C175EF-D7D6-4F2F-AED4-5CF297E85343}"/>
+                <a16:creationId xmlns:a16="http://schemas.microsoft.com/office/drawing/2014/main" id="{9D60BED5-6C00-43BB-A730-B42BAD8AB1A6}"/>
               </a:ext>
             </a:extLst>
           </p:cNvPr>
@@ -23355,7 +23355,7 @@
           <p:cNvPr id="37" name="">
             <a:extLst xmlns:a="http://schemas.openxmlformats.org/drawingml/2006/main">
               <a:ext uri="{FF2B5EF4-FFF2-40B4-BE49-F238E27FC236}">
-                <a16:creationId xmlns:a16="http://schemas.microsoft.com/office/drawing/2014/main" id="{393B52F3-3C94-4C49-91CB-5614A1CAF3BC}"/>
+                <a16:creationId xmlns:a16="http://schemas.microsoft.com/office/drawing/2014/main" id="{BF956365-6962-4FF1-A97E-39EF2712DC66}"/>
               </a:ext>
             </a:extLst>
           </p:cNvPr>
@@ -23407,7 +23407,7 @@
           <p:cNvPr id="38" name="">
             <a:extLst xmlns:a="http://schemas.openxmlformats.org/drawingml/2006/main">
               <a:ext uri="{FF2B5EF4-FFF2-40B4-BE49-F238E27FC236}">
-                <a16:creationId xmlns:a16="http://schemas.microsoft.com/office/drawing/2014/main" id="{AC6D3CEF-E772-4A0C-B60E-C5F64A532A9D}"/>
+                <a16:creationId xmlns:a16="http://schemas.microsoft.com/office/drawing/2014/main" id="{BCD8FBDB-65A3-427D-8D3F-8185C1116B21}"/>
               </a:ext>
             </a:extLst>
           </p:cNvPr>
@@ -23459,7 +23459,7 @@
           <p:cNvPr id="39" name="">
             <a:extLst xmlns:a="http://schemas.openxmlformats.org/drawingml/2006/main">
               <a:ext uri="{FF2B5EF4-FFF2-40B4-BE49-F238E27FC236}">
-                <a16:creationId xmlns:a16="http://schemas.microsoft.com/office/drawing/2014/main" id="{22469843-FBFB-4E4F-B76D-23F1F365606F}"/>
+                <a16:creationId xmlns:a16="http://schemas.microsoft.com/office/drawing/2014/main" id="{3C438F68-3B73-4935-B8C1-9F8166F54C35}"/>
               </a:ext>
             </a:extLst>
           </p:cNvPr>
@@ -23511,7 +23511,7 @@
           <p:cNvPr id="40" name="">
             <a:extLst xmlns:a="http://schemas.openxmlformats.org/drawingml/2006/main">
               <a:ext uri="{FF2B5EF4-FFF2-40B4-BE49-F238E27FC236}">
-                <a16:creationId xmlns:a16="http://schemas.microsoft.com/office/drawing/2014/main" id="{50A67A0E-7C9B-42FE-8557-8FA72E239DFD}"/>
+                <a16:creationId xmlns:a16="http://schemas.microsoft.com/office/drawing/2014/main" id="{FC5A3634-180F-4BE8-87B2-3B09809739F0}"/>
               </a:ext>
             </a:extLst>
           </p:cNvPr>
@@ -23542,7 +23542,7 @@
           <p:cNvPr id="41" name="">
             <a:extLst xmlns:a="http://schemas.openxmlformats.org/drawingml/2006/main">
               <a:ext uri="{FF2B5EF4-FFF2-40B4-BE49-F238E27FC236}">
-                <a16:creationId xmlns:a16="http://schemas.microsoft.com/office/drawing/2014/main" id="{EDCD9B4B-0B83-41A9-88EF-165610ACE283}"/>
+                <a16:creationId xmlns:a16="http://schemas.microsoft.com/office/drawing/2014/main" id="{22AF2ECD-C393-46D8-BEA6-61807C958783}"/>
               </a:ext>
             </a:extLst>
           </p:cNvPr>
@@ -23594,7 +23594,7 @@
           <p:cNvPr id="42" name="">
             <a:extLst xmlns:a="http://schemas.openxmlformats.org/drawingml/2006/main">
               <a:ext uri="{FF2B5EF4-FFF2-40B4-BE49-F238E27FC236}">
-                <a16:creationId xmlns:a16="http://schemas.microsoft.com/office/drawing/2014/main" id="{43A841C5-00C0-43C8-AFB6-456F97F8077F}"/>
+                <a16:creationId xmlns:a16="http://schemas.microsoft.com/office/drawing/2014/main" id="{98A30090-E523-44B4-B671-E110BFEE0588}"/>
               </a:ext>
             </a:extLst>
           </p:cNvPr>
@@ -23646,7 +23646,7 @@
           <p:cNvPr id="43" name="">
             <a:extLst xmlns:a="http://schemas.openxmlformats.org/drawingml/2006/main">
               <a:ext uri="{FF2B5EF4-FFF2-40B4-BE49-F238E27FC236}">
-                <a16:creationId xmlns:a16="http://schemas.microsoft.com/office/drawing/2014/main" id="{F9D608E1-4FB5-4B4C-9CB3-404EA5DC629E}"/>
+                <a16:creationId xmlns:a16="http://schemas.microsoft.com/office/drawing/2014/main" id="{5A565CC9-06D5-4B08-A832-27152B71B99A}"/>
               </a:ext>
             </a:extLst>
           </p:cNvPr>
@@ -23698,7 +23698,7 @@
           <p:cNvPr id="44" name="">
             <a:extLst xmlns:a="http://schemas.openxmlformats.org/drawingml/2006/main">
               <a:ext uri="{FF2B5EF4-FFF2-40B4-BE49-F238E27FC236}">
-                <a16:creationId xmlns:a16="http://schemas.microsoft.com/office/drawing/2014/main" id="{CCB5EDB6-28C2-440F-B27F-20293996E0BF}"/>
+                <a16:creationId xmlns:a16="http://schemas.microsoft.com/office/drawing/2014/main" id="{22A23799-12A8-4757-A08C-A9A82965BFE7}"/>
               </a:ext>
             </a:extLst>
           </p:cNvPr>
@@ -23750,7 +23750,7 @@
           <p:cNvPr id="45" name="">
             <a:extLst xmlns:a="http://schemas.openxmlformats.org/drawingml/2006/main">
               <a:ext uri="{FF2B5EF4-FFF2-40B4-BE49-F238E27FC236}">
-                <a16:creationId xmlns:a16="http://schemas.microsoft.com/office/drawing/2014/main" id="{F16DE9C0-BB53-463D-80C0-0944491232C3}"/>
+                <a16:creationId xmlns:a16="http://schemas.microsoft.com/office/drawing/2014/main" id="{BB12EB33-F96A-4C93-ADDD-2FF6CD5C6FFE}"/>
               </a:ext>
             </a:extLst>
           </p:cNvPr>
@@ -23802,7 +23802,7 @@
           <p:cNvPr id="46" name="">
             <a:extLst xmlns:a="http://schemas.openxmlformats.org/drawingml/2006/main">
               <a:ext uri="{FF2B5EF4-FFF2-40B4-BE49-F238E27FC236}">
-                <a16:creationId xmlns:a16="http://schemas.microsoft.com/office/drawing/2014/main" id="{001A1246-D190-4B93-AA09-A061B37B5E75}"/>
+                <a16:creationId xmlns:a16="http://schemas.microsoft.com/office/drawing/2014/main" id="{719512C5-855C-47C8-8676-E9ADEF44B12B}"/>
               </a:ext>
             </a:extLst>
           </p:cNvPr>
@@ -23854,7 +23854,7 @@
           <p:cNvPr id="47" name="">
             <a:extLst xmlns:a="http://schemas.openxmlformats.org/drawingml/2006/main">
               <a:ext uri="{FF2B5EF4-FFF2-40B4-BE49-F238E27FC236}">
-                <a16:creationId xmlns:a16="http://schemas.microsoft.com/office/drawing/2014/main" id="{695B63E9-1C1F-4EEF-AA40-84545F920004}"/>
+                <a16:creationId xmlns:a16="http://schemas.microsoft.com/office/drawing/2014/main" id="{4AE2CE3A-748A-462A-83B1-DFDD884B6425}"/>
               </a:ext>
             </a:extLst>
           </p:cNvPr>
@@ -23906,7 +23906,7 @@
           <p:cNvPr id="48" name="">
             <a:extLst xmlns:a="http://schemas.openxmlformats.org/drawingml/2006/main">
               <a:ext uri="{FF2B5EF4-FFF2-40B4-BE49-F238E27FC236}">
-                <a16:creationId xmlns:a16="http://schemas.microsoft.com/office/drawing/2014/main" id="{6284AE4D-7641-4792-B800-ED38DE3861DB}"/>
+                <a16:creationId xmlns:a16="http://schemas.microsoft.com/office/drawing/2014/main" id="{C8C4F4DA-4296-43F8-BC34-F1B920A72F43}"/>
               </a:ext>
             </a:extLst>
           </p:cNvPr>
@@ -23958,7 +23958,7 @@
           <p:cNvPr id="49" name="">
             <a:extLst xmlns:a="http://schemas.openxmlformats.org/drawingml/2006/main">
               <a:ext uri="{FF2B5EF4-FFF2-40B4-BE49-F238E27FC236}">
-                <a16:creationId xmlns:a16="http://schemas.microsoft.com/office/drawing/2014/main" id="{45D7B871-D547-4A16-BA58-3A2F77D00442}"/>
+                <a16:creationId xmlns:a16="http://schemas.microsoft.com/office/drawing/2014/main" id="{970116B4-1852-42EC-968E-7B772382C2E4}"/>
               </a:ext>
             </a:extLst>
           </p:cNvPr>
@@ -23989,7 +23989,7 @@
           <p:cNvPr id="50" name="">
             <a:extLst xmlns:a="http://schemas.openxmlformats.org/drawingml/2006/main">
               <a:ext uri="{FF2B5EF4-FFF2-40B4-BE49-F238E27FC236}">
-                <a16:creationId xmlns:a16="http://schemas.microsoft.com/office/drawing/2014/main" id="{E6A76C0A-4AC3-407A-8408-973851D6180E}"/>
+                <a16:creationId xmlns:a16="http://schemas.microsoft.com/office/drawing/2014/main" id="{77269504-0ADF-4B43-BEFE-C50CB2343D3B}"/>
               </a:ext>
             </a:extLst>
           </p:cNvPr>
@@ -24020,7 +24020,7 @@
           <p:cNvPr id="51" name="">
             <a:extLst xmlns:a="http://schemas.openxmlformats.org/drawingml/2006/main">
               <a:ext uri="{FF2B5EF4-FFF2-40B4-BE49-F238E27FC236}">
-                <a16:creationId xmlns:a16="http://schemas.microsoft.com/office/drawing/2014/main" id="{E5F58192-2733-4243-B513-307C8DBA2661}"/>
+                <a16:creationId xmlns:a16="http://schemas.microsoft.com/office/drawing/2014/main" id="{DFD9994E-9E3B-4B6C-8CA3-156304F69FCD}"/>
               </a:ext>
             </a:extLst>
           </p:cNvPr>
@@ -24072,7 +24072,7 @@
           <p:cNvPr id="52" name="">
             <a:extLst xmlns:a="http://schemas.openxmlformats.org/drawingml/2006/main">
               <a:ext uri="{FF2B5EF4-FFF2-40B4-BE49-F238E27FC236}">
-                <a16:creationId xmlns:a16="http://schemas.microsoft.com/office/drawing/2014/main" id="{A592064F-1CA2-44F4-BD5C-79CA93905D20}"/>
+                <a16:creationId xmlns:a16="http://schemas.microsoft.com/office/drawing/2014/main" id="{D2D309AE-56D8-4D9E-BB17-99C61007BEFE}"/>
               </a:ext>
             </a:extLst>
           </p:cNvPr>
@@ -24124,7 +24124,7 @@
           <p:cNvPr id="53" name="">
             <a:extLst xmlns:a="http://schemas.openxmlformats.org/drawingml/2006/main">
               <a:ext uri="{FF2B5EF4-FFF2-40B4-BE49-F238E27FC236}">
-                <a16:creationId xmlns:a16="http://schemas.microsoft.com/office/drawing/2014/main" id="{DD5A0AB2-11EB-4B53-B262-1E64936C4A88}"/>
+                <a16:creationId xmlns:a16="http://schemas.microsoft.com/office/drawing/2014/main" id="{E9374467-F958-43A9-B160-DB591D222900}"/>
               </a:ext>
             </a:extLst>
           </p:cNvPr>
@@ -24176,7 +24176,7 @@
           <p:cNvPr id="54" name="">
             <a:extLst xmlns:a="http://schemas.openxmlformats.org/drawingml/2006/main">
               <a:ext uri="{FF2B5EF4-FFF2-40B4-BE49-F238E27FC236}">
-                <a16:creationId xmlns:a16="http://schemas.microsoft.com/office/drawing/2014/main" id="{BB9382F3-C01C-446B-9F20-52DC8A8CC1D4}"/>
+                <a16:creationId xmlns:a16="http://schemas.microsoft.com/office/drawing/2014/main" id="{283C96D9-886F-4B90-B1EF-AACA140A6F1B}"/>
               </a:ext>
             </a:extLst>
           </p:cNvPr>
@@ -24228,7 +24228,7 @@
           <p:cNvPr id="55" name="">
             <a:extLst xmlns:a="http://schemas.openxmlformats.org/drawingml/2006/main">
               <a:ext uri="{FF2B5EF4-FFF2-40B4-BE49-F238E27FC236}">
-                <a16:creationId xmlns:a16="http://schemas.microsoft.com/office/drawing/2014/main" id="{FFAEF161-57C4-484D-908C-C4C60A695389}"/>
+                <a16:creationId xmlns:a16="http://schemas.microsoft.com/office/drawing/2014/main" id="{3FCE5CF6-25F8-4288-A887-4E18743BC964}"/>
               </a:ext>
             </a:extLst>
           </p:cNvPr>
@@ -24280,7 +24280,7 @@
           <p:cNvPr id="56" name="">
             <a:extLst xmlns:a="http://schemas.openxmlformats.org/drawingml/2006/main">
               <a:ext uri="{FF2B5EF4-FFF2-40B4-BE49-F238E27FC236}">
-                <a16:creationId xmlns:a16="http://schemas.microsoft.com/office/drawing/2014/main" id="{ED9C5FCB-BA8D-4609-86E4-04EB12A924CF}"/>
+                <a16:creationId xmlns:a16="http://schemas.microsoft.com/office/drawing/2014/main" id="{52BAECA4-2A19-45FB-AD9E-945889F1315A}"/>
               </a:ext>
             </a:extLst>
           </p:cNvPr>
@@ -24332,7 +24332,7 @@
           <p:cNvPr id="57" name="">
             <a:extLst xmlns:a="http://schemas.openxmlformats.org/drawingml/2006/main">
               <a:ext uri="{FF2B5EF4-FFF2-40B4-BE49-F238E27FC236}">
-                <a16:creationId xmlns:a16="http://schemas.microsoft.com/office/drawing/2014/main" id="{9EC2673D-A909-4F12-8EC9-6F17199BE91F}"/>
+                <a16:creationId xmlns:a16="http://schemas.microsoft.com/office/drawing/2014/main" id="{69601B89-5610-4608-9823-8A9B962766F1}"/>
               </a:ext>
             </a:extLst>
           </p:cNvPr>
@@ -24384,7 +24384,7 @@
           <p:cNvPr id="58" name="">
             <a:extLst xmlns:a="http://schemas.openxmlformats.org/drawingml/2006/main">
               <a:ext uri="{FF2B5EF4-FFF2-40B4-BE49-F238E27FC236}">
-                <a16:creationId xmlns:a16="http://schemas.microsoft.com/office/drawing/2014/main" id="{27DA8E8D-150F-4746-9C63-0B02575016B5}"/>
+                <a16:creationId xmlns:a16="http://schemas.microsoft.com/office/drawing/2014/main" id="{F6873713-8A55-497C-B696-64B27289165B}"/>
               </a:ext>
             </a:extLst>
           </p:cNvPr>
@@ -24436,7 +24436,7 @@
           <p:cNvPr id="59" name="">
             <a:extLst xmlns:a="http://schemas.openxmlformats.org/drawingml/2006/main">
               <a:ext uri="{FF2B5EF4-FFF2-40B4-BE49-F238E27FC236}">
-                <a16:creationId xmlns:a16="http://schemas.microsoft.com/office/drawing/2014/main" id="{7AE87465-4D91-4E9C-B8D6-6C8C01291500}"/>
+                <a16:creationId xmlns:a16="http://schemas.microsoft.com/office/drawing/2014/main" id="{07650FE5-FF50-4164-BDCE-B5AED0547A8D}"/>
               </a:ext>
             </a:extLst>
           </p:cNvPr>
@@ -24467,7 +24467,7 @@
           <p:cNvPr id="60" name="">
             <a:extLst xmlns:a="http://schemas.openxmlformats.org/drawingml/2006/main">
               <a:ext uri="{FF2B5EF4-FFF2-40B4-BE49-F238E27FC236}">
-                <a16:creationId xmlns:a16="http://schemas.microsoft.com/office/drawing/2014/main" id="{994195FB-7658-4AB8-9F7C-C119FBA26FFA}"/>
+                <a16:creationId xmlns:a16="http://schemas.microsoft.com/office/drawing/2014/main" id="{A7C920F8-6A30-4A50-97DF-B3A1ED938993}"/>
               </a:ext>
             </a:extLst>
           </p:cNvPr>
@@ -24519,7 +24519,7 @@
           <p:cNvPr id="61" name="">
             <a:extLst xmlns:a="http://schemas.openxmlformats.org/drawingml/2006/main">
               <a:ext uri="{FF2B5EF4-FFF2-40B4-BE49-F238E27FC236}">
-                <a16:creationId xmlns:a16="http://schemas.microsoft.com/office/drawing/2014/main" id="{2E24639B-5F11-40B0-AD95-DE8165E79E6D}"/>
+                <a16:creationId xmlns:a16="http://schemas.microsoft.com/office/drawing/2014/main" id="{14A0DB92-E8FB-4917-9E45-A5F2512BCE9B}"/>
               </a:ext>
             </a:extLst>
           </p:cNvPr>
@@ -24571,7 +24571,7 @@
           <p:cNvPr id="62" name="">
             <a:extLst xmlns:a="http://schemas.openxmlformats.org/drawingml/2006/main">
               <a:ext uri="{FF2B5EF4-FFF2-40B4-BE49-F238E27FC236}">
-                <a16:creationId xmlns:a16="http://schemas.microsoft.com/office/drawing/2014/main" id="{EA24489F-C374-4080-81D6-E5440B107ECA}"/>
+                <a16:creationId xmlns:a16="http://schemas.microsoft.com/office/drawing/2014/main" id="{1A95A478-CF24-4A87-8BC8-DCF0AB08E5BF}"/>
               </a:ext>
             </a:extLst>
           </p:cNvPr>
@@ -24623,7 +24623,7 @@
           <p:cNvPr id="63" name="">
             <a:extLst xmlns:a="http://schemas.openxmlformats.org/drawingml/2006/main">
               <a:ext uri="{FF2B5EF4-FFF2-40B4-BE49-F238E27FC236}">
-                <a16:creationId xmlns:a16="http://schemas.microsoft.com/office/drawing/2014/main" id="{34B8BF2E-36BF-4ADB-AAD9-7BB8F8BE08AB}"/>
+                <a16:creationId xmlns:a16="http://schemas.microsoft.com/office/drawing/2014/main" id="{9E5CCF07-3E82-464B-AFD1-D440C3D98952}"/>
               </a:ext>
             </a:extLst>
           </p:cNvPr>
@@ -24675,7 +24675,7 @@
           <p:cNvPr id="64" name="">
             <a:extLst xmlns:a="http://schemas.openxmlformats.org/drawingml/2006/main">
               <a:ext uri="{FF2B5EF4-FFF2-40B4-BE49-F238E27FC236}">
-                <a16:creationId xmlns:a16="http://schemas.microsoft.com/office/drawing/2014/main" id="{94CCD80A-BDED-4B8F-AD60-F55D73761EB0}"/>
+                <a16:creationId xmlns:a16="http://schemas.microsoft.com/office/drawing/2014/main" id="{ED819C51-E78D-44AC-BE4A-B8AE1B6B1ABA}"/>
               </a:ext>
             </a:extLst>
           </p:cNvPr>
@@ -24727,7 +24727,7 @@
           <p:cNvPr id="65" name="">
             <a:extLst xmlns:a="http://schemas.openxmlformats.org/drawingml/2006/main">
               <a:ext uri="{FF2B5EF4-FFF2-40B4-BE49-F238E27FC236}">
-                <a16:creationId xmlns:a16="http://schemas.microsoft.com/office/drawing/2014/main" id="{8E09D649-C8FE-4D19-83AA-219C36FEAC1D}"/>
+                <a16:creationId xmlns:a16="http://schemas.microsoft.com/office/drawing/2014/main" id="{232C5EAB-E49F-4B28-AED3-7681F2C01BA4}"/>
               </a:ext>
             </a:extLst>
           </p:cNvPr>
@@ -24779,7 +24779,7 @@
           <p:cNvPr id="66" name="">
             <a:extLst xmlns:a="http://schemas.openxmlformats.org/drawingml/2006/main">
               <a:ext uri="{FF2B5EF4-FFF2-40B4-BE49-F238E27FC236}">
-                <a16:creationId xmlns:a16="http://schemas.microsoft.com/office/drawing/2014/main" id="{0D70F68A-3792-4223-9FF5-215AA9DA8881}"/>
+                <a16:creationId xmlns:a16="http://schemas.microsoft.com/office/drawing/2014/main" id="{B88C50AA-0FFD-4094-9DE8-96B9D779CF9A}"/>
               </a:ext>
             </a:extLst>
           </p:cNvPr>
@@ -24831,7 +24831,7 @@
           <p:cNvPr id="67" name="">
             <a:extLst xmlns:a="http://schemas.openxmlformats.org/drawingml/2006/main">
               <a:ext uri="{FF2B5EF4-FFF2-40B4-BE49-F238E27FC236}">
-                <a16:creationId xmlns:a16="http://schemas.microsoft.com/office/drawing/2014/main" id="{93D75033-96F8-486C-A610-0D5315412113}"/>
+                <a16:creationId xmlns:a16="http://schemas.microsoft.com/office/drawing/2014/main" id="{5E54611C-14B1-4C7A-AD73-741EEB1115EB}"/>
               </a:ext>
             </a:extLst>
           </p:cNvPr>
@@ -24883,7 +24883,7 @@
           <p:cNvPr id="68" name="">
             <a:extLst xmlns:a="http://schemas.openxmlformats.org/drawingml/2006/main">
               <a:ext uri="{FF2B5EF4-FFF2-40B4-BE49-F238E27FC236}">
-                <a16:creationId xmlns:a16="http://schemas.microsoft.com/office/drawing/2014/main" id="{44DC7B47-90CF-43FD-A2F9-4A7B80B4B755}"/>
+                <a16:creationId xmlns:a16="http://schemas.microsoft.com/office/drawing/2014/main" id="{104B1BDA-5335-4227-AE10-00978785E178}"/>
               </a:ext>
             </a:extLst>
           </p:cNvPr>
@@ -24914,7 +24914,7 @@
           <p:cNvPr id="69" name="">
             <a:extLst xmlns:a="http://schemas.openxmlformats.org/drawingml/2006/main">
               <a:ext uri="{FF2B5EF4-FFF2-40B4-BE49-F238E27FC236}">
-                <a16:creationId xmlns:a16="http://schemas.microsoft.com/office/drawing/2014/main" id="{3B3C8C67-4B65-4C2C-AC11-10236EA364A7}"/>
+                <a16:creationId xmlns:a16="http://schemas.microsoft.com/office/drawing/2014/main" id="{7E01FA0E-1894-4EF9-AFF7-D5A8DC47C811}"/>
               </a:ext>
             </a:extLst>
           </p:cNvPr>
@@ -24945,7 +24945,7 @@
           <p:cNvPr id="70" name="">
             <a:extLst xmlns:a="http://schemas.openxmlformats.org/drawingml/2006/main">
               <a:ext uri="{FF2B5EF4-FFF2-40B4-BE49-F238E27FC236}">
-                <a16:creationId xmlns:a16="http://schemas.microsoft.com/office/drawing/2014/main" id="{101D0F62-166B-4188-963B-1059472B74EF}"/>
+                <a16:creationId xmlns:a16="http://schemas.microsoft.com/office/drawing/2014/main" id="{C58DC879-7121-4047-9048-B81C87CECD27}"/>
               </a:ext>
             </a:extLst>
           </p:cNvPr>
@@ -24997,7 +24997,7 @@
           <p:cNvPr id="71" name="">
             <a:extLst xmlns:a="http://schemas.openxmlformats.org/drawingml/2006/main">
               <a:ext uri="{FF2B5EF4-FFF2-40B4-BE49-F238E27FC236}">
-                <a16:creationId xmlns:a16="http://schemas.microsoft.com/office/drawing/2014/main" id="{6D9204C0-5BFD-4309-B842-49C5C8EC6AC0}"/>
+                <a16:creationId xmlns:a16="http://schemas.microsoft.com/office/drawing/2014/main" id="{FC0CFE8A-9777-4BFF-9D81-8EE122FA2F10}"/>
               </a:ext>
             </a:extLst>
           </p:cNvPr>
@@ -25049,7 +25049,7 @@
           <p:cNvPr id="72" name="">
             <a:extLst xmlns:a="http://schemas.openxmlformats.org/drawingml/2006/main">
               <a:ext uri="{FF2B5EF4-FFF2-40B4-BE49-F238E27FC236}">
-                <a16:creationId xmlns:a16="http://schemas.microsoft.com/office/drawing/2014/main" id="{849DB5AD-8886-4806-9C3F-F3B0DCE11636}"/>
+                <a16:creationId xmlns:a16="http://schemas.microsoft.com/office/drawing/2014/main" id="{4376C94B-6EA9-4EF1-A077-86ECA4508678}"/>
               </a:ext>
             </a:extLst>
           </p:cNvPr>
@@ -25101,7 +25101,7 @@
           <p:cNvPr id="73" name="">
             <a:extLst xmlns:a="http://schemas.openxmlformats.org/drawingml/2006/main">
               <a:ext uri="{FF2B5EF4-FFF2-40B4-BE49-F238E27FC236}">
-                <a16:creationId xmlns:a16="http://schemas.microsoft.com/office/drawing/2014/main" id="{CD119E11-B797-4131-9C28-05B9B8AA23CA}"/>
+                <a16:creationId xmlns:a16="http://schemas.microsoft.com/office/drawing/2014/main" id="{364D4616-53F5-4EC6-9A00-4817A94B18EA}"/>
               </a:ext>
             </a:extLst>
           </p:cNvPr>
@@ -25153,7 +25153,7 @@
           <p:cNvPr id="74" name="">
             <a:extLst xmlns:a="http://schemas.openxmlformats.org/drawingml/2006/main">
               <a:ext uri="{FF2B5EF4-FFF2-40B4-BE49-F238E27FC236}">
-                <a16:creationId xmlns:a16="http://schemas.microsoft.com/office/drawing/2014/main" id="{431423C0-BC29-4DB2-905B-8054EE4E5C74}"/>
+                <a16:creationId xmlns:a16="http://schemas.microsoft.com/office/drawing/2014/main" id="{D25123C6-BD29-4044-BD62-E998FDCE281E}"/>
               </a:ext>
             </a:extLst>
           </p:cNvPr>
@@ -25205,7 +25205,7 @@
           <p:cNvPr id="75" name="">
             <a:extLst xmlns:a="http://schemas.openxmlformats.org/drawingml/2006/main">
               <a:ext uri="{FF2B5EF4-FFF2-40B4-BE49-F238E27FC236}">
-                <a16:creationId xmlns:a16="http://schemas.microsoft.com/office/drawing/2014/main" id="{1BEE38BF-6504-4288-A657-5FFDF02C051C}"/>
+                <a16:creationId xmlns:a16="http://schemas.microsoft.com/office/drawing/2014/main" id="{5DF4217E-035A-40BB-92EE-8E7894421E42}"/>
               </a:ext>
             </a:extLst>
           </p:cNvPr>
@@ -25257,7 +25257,7 @@
           <p:cNvPr id="76" name="">
             <a:extLst xmlns:a="http://schemas.openxmlformats.org/drawingml/2006/main">
               <a:ext uri="{FF2B5EF4-FFF2-40B4-BE49-F238E27FC236}">
-                <a16:creationId xmlns:a16="http://schemas.microsoft.com/office/drawing/2014/main" id="{4B5EB0FB-1244-4DE3-B31A-1A74E0176C20}"/>
+                <a16:creationId xmlns:a16="http://schemas.microsoft.com/office/drawing/2014/main" id="{AE1E8930-190D-4E5D-8915-09E30B8FAABE}"/>
               </a:ext>
             </a:extLst>
           </p:cNvPr>
@@ -25309,7 +25309,7 @@
           <p:cNvPr id="77" name="">
             <a:extLst xmlns:a="http://schemas.openxmlformats.org/drawingml/2006/main">
               <a:ext uri="{FF2B5EF4-FFF2-40B4-BE49-F238E27FC236}">
-                <a16:creationId xmlns:a16="http://schemas.microsoft.com/office/drawing/2014/main" id="{16A24BD4-4006-4594-A441-640A0383544E}"/>
+                <a16:creationId xmlns:a16="http://schemas.microsoft.com/office/drawing/2014/main" id="{21AB4EF7-3047-4F5B-AA92-9FAE16C78F4D}"/>
               </a:ext>
             </a:extLst>
           </p:cNvPr>
@@ -25361,7 +25361,7 @@
           <p:cNvPr id="78" name="">
             <a:extLst xmlns:a="http://schemas.openxmlformats.org/drawingml/2006/main">
               <a:ext uri="{FF2B5EF4-FFF2-40B4-BE49-F238E27FC236}">
-                <a16:creationId xmlns:a16="http://schemas.microsoft.com/office/drawing/2014/main" id="{F9F6AEC3-4331-407F-AC9A-B34F7A615088}"/>
+                <a16:creationId xmlns:a16="http://schemas.microsoft.com/office/drawing/2014/main" id="{27EB5A2E-EAEC-40F6-9A9C-29CCAE6C8DC1}"/>
               </a:ext>
             </a:extLst>
           </p:cNvPr>
@@ -25392,7 +25392,7 @@
           <p:cNvPr id="79" name="">
             <a:extLst xmlns:a="http://schemas.openxmlformats.org/drawingml/2006/main">
               <a:ext uri="{FF2B5EF4-FFF2-40B4-BE49-F238E27FC236}">
-                <a16:creationId xmlns:a16="http://schemas.microsoft.com/office/drawing/2014/main" id="{CC438874-165A-466E-BEBB-CC2D1D600B33}"/>
+                <a16:creationId xmlns:a16="http://schemas.microsoft.com/office/drawing/2014/main" id="{D93FF1D2-EEE5-407A-86A4-210534F4A102}"/>
               </a:ext>
             </a:extLst>
           </p:cNvPr>
@@ -25444,7 +25444,7 @@
           <p:cNvPr id="80" name="">
             <a:extLst xmlns:a="http://schemas.openxmlformats.org/drawingml/2006/main">
               <a:ext uri="{FF2B5EF4-FFF2-40B4-BE49-F238E27FC236}">
-                <a16:creationId xmlns:a16="http://schemas.microsoft.com/office/drawing/2014/main" id="{73ADDC4C-C6CA-4C89-9A5C-ACAF611FD677}"/>
+                <a16:creationId xmlns:a16="http://schemas.microsoft.com/office/drawing/2014/main" id="{95951FCA-2FFE-49B0-86D1-00FF78E027AC}"/>
               </a:ext>
             </a:extLst>
           </p:cNvPr>
@@ -25496,7 +25496,7 @@
           <p:cNvPr id="81" name="">
             <a:extLst xmlns:a="http://schemas.openxmlformats.org/drawingml/2006/main">
               <a:ext uri="{FF2B5EF4-FFF2-40B4-BE49-F238E27FC236}">
-                <a16:creationId xmlns:a16="http://schemas.microsoft.com/office/drawing/2014/main" id="{411D1754-9CF2-4F25-8ACF-0C8639ED0D8D}"/>
+                <a16:creationId xmlns:a16="http://schemas.microsoft.com/office/drawing/2014/main" id="{5B2030B0-32E8-441F-953E-A2FF759520EA}"/>
               </a:ext>
             </a:extLst>
           </p:cNvPr>
@@ -25548,7 +25548,7 @@
           <p:cNvPr id="82" name="">
             <a:extLst xmlns:a="http://schemas.openxmlformats.org/drawingml/2006/main">
               <a:ext uri="{FF2B5EF4-FFF2-40B4-BE49-F238E27FC236}">
-                <a16:creationId xmlns:a16="http://schemas.microsoft.com/office/drawing/2014/main" id="{F31C34B1-ECD6-4EB4-BCA6-84E9CEB55145}"/>
+                <a16:creationId xmlns:a16="http://schemas.microsoft.com/office/drawing/2014/main" id="{26BF2A91-19C2-40E9-97C9-7E272520B190}"/>
               </a:ext>
             </a:extLst>
           </p:cNvPr>
@@ -25600,7 +25600,7 @@
           <p:cNvPr id="83" name="">
             <a:extLst xmlns:a="http://schemas.openxmlformats.org/drawingml/2006/main">
               <a:ext uri="{FF2B5EF4-FFF2-40B4-BE49-F238E27FC236}">
-                <a16:creationId xmlns:a16="http://schemas.microsoft.com/office/drawing/2014/main" id="{FC034214-B547-47F5-A2AB-A0960D097517}"/>
+                <a16:creationId xmlns:a16="http://schemas.microsoft.com/office/drawing/2014/main" id="{122A0E75-4D64-41B8-AC38-EF5F8BE83D02}"/>
               </a:ext>
             </a:extLst>
           </p:cNvPr>
@@ -25652,7 +25652,7 @@
           <p:cNvPr id="84" name="">
             <a:extLst xmlns:a="http://schemas.openxmlformats.org/drawingml/2006/main">
               <a:ext uri="{FF2B5EF4-FFF2-40B4-BE49-F238E27FC236}">
-                <a16:creationId xmlns:a16="http://schemas.microsoft.com/office/drawing/2014/main" id="{E0CE450D-FD90-42B8-8E24-23BB7751DDF8}"/>
+                <a16:creationId xmlns:a16="http://schemas.microsoft.com/office/drawing/2014/main" id="{ABDB2D85-AF3C-454C-AB8B-7DDDA0CB5BAF}"/>
               </a:ext>
             </a:extLst>
           </p:cNvPr>
@@ -25704,7 +25704,7 @@
           <p:cNvPr id="85" name="">
             <a:extLst xmlns:a="http://schemas.openxmlformats.org/drawingml/2006/main">
               <a:ext uri="{FF2B5EF4-FFF2-40B4-BE49-F238E27FC236}">
-                <a16:creationId xmlns:a16="http://schemas.microsoft.com/office/drawing/2014/main" id="{67A27090-0302-438B-A4DC-FF0D9299F22F}"/>
+                <a16:creationId xmlns:a16="http://schemas.microsoft.com/office/drawing/2014/main" id="{197601F7-ABCB-48C8-B769-3DF339F03941}"/>
               </a:ext>
             </a:extLst>
           </p:cNvPr>
@@ -25756,7 +25756,7 @@
           <p:cNvPr id="86" name="">
             <a:extLst xmlns:a="http://schemas.openxmlformats.org/drawingml/2006/main">
               <a:ext uri="{FF2B5EF4-FFF2-40B4-BE49-F238E27FC236}">
-                <a16:creationId xmlns:a16="http://schemas.microsoft.com/office/drawing/2014/main" id="{EEDA4EDE-AA11-4421-8442-4734C28F16FD}"/>
+                <a16:creationId xmlns:a16="http://schemas.microsoft.com/office/drawing/2014/main" id="{2AF978EF-FA13-4DEA-AD56-296DFB3DD62A}"/>
               </a:ext>
             </a:extLst>
           </p:cNvPr>
@@ -25808,7 +25808,7 @@
           <p:cNvPr id="87" name="">
             <a:extLst xmlns:a="http://schemas.openxmlformats.org/drawingml/2006/main">
               <a:ext uri="{FF2B5EF4-FFF2-40B4-BE49-F238E27FC236}">
-                <a16:creationId xmlns:a16="http://schemas.microsoft.com/office/drawing/2014/main" id="{E185CFD4-7694-4BE6-8416-9DFC7BCAFECD}"/>
+                <a16:creationId xmlns:a16="http://schemas.microsoft.com/office/drawing/2014/main" id="{A30DDEDA-7146-4D9C-A518-727C1B8922E2}"/>
               </a:ext>
             </a:extLst>
           </p:cNvPr>
@@ -25839,7 +25839,7 @@
           <p:cNvPr id="88" name="">
             <a:extLst xmlns:a="http://schemas.openxmlformats.org/drawingml/2006/main">
               <a:ext uri="{FF2B5EF4-FFF2-40B4-BE49-F238E27FC236}">
-                <a16:creationId xmlns:a16="http://schemas.microsoft.com/office/drawing/2014/main" id="{04577B8B-82ED-4941-8D34-607AD21D959E}"/>
+                <a16:creationId xmlns:a16="http://schemas.microsoft.com/office/drawing/2014/main" id="{28263100-F38D-42BC-ABA3-B7AA0A5CA736}"/>
               </a:ext>
             </a:extLst>
           </p:cNvPr>
@@ -25870,7 +25870,7 @@
           <p:cNvPr id="89" name="">
             <a:extLst xmlns:a="http://schemas.openxmlformats.org/drawingml/2006/main">
               <a:ext uri="{FF2B5EF4-FFF2-40B4-BE49-F238E27FC236}">
-                <a16:creationId xmlns:a16="http://schemas.microsoft.com/office/drawing/2014/main" id="{5C91E12C-5B4A-4144-80E3-74F6A499DECF}"/>
+                <a16:creationId xmlns:a16="http://schemas.microsoft.com/office/drawing/2014/main" id="{92A811A6-2C08-4D52-95BE-DD3FBB85B60A}"/>
               </a:ext>
             </a:extLst>
           </p:cNvPr>
@@ -25922,7 +25922,7 @@
           <p:cNvPr id="90" name="">
             <a:extLst xmlns:a="http://schemas.openxmlformats.org/drawingml/2006/main">
               <a:ext uri="{FF2B5EF4-FFF2-40B4-BE49-F238E27FC236}">
-                <a16:creationId xmlns:a16="http://schemas.microsoft.com/office/drawing/2014/main" id="{C6981B41-D6E3-4D45-A08D-565123E6ECE7}"/>
+                <a16:creationId xmlns:a16="http://schemas.microsoft.com/office/drawing/2014/main" id="{2BA0C63C-F02D-46CF-B219-36D3F1DEDEC9}"/>
               </a:ext>
             </a:extLst>
           </p:cNvPr>
@@ -25974,7 +25974,7 @@
           <p:cNvPr id="91" name="">
             <a:extLst xmlns:a="http://schemas.openxmlformats.org/drawingml/2006/main">
               <a:ext uri="{FF2B5EF4-FFF2-40B4-BE49-F238E27FC236}">
-                <a16:creationId xmlns:a16="http://schemas.microsoft.com/office/drawing/2014/main" id="{3E117B8E-9717-4661-8D82-E1B97238FEBB}"/>
+                <a16:creationId xmlns:a16="http://schemas.microsoft.com/office/drawing/2014/main" id="{3C2366BE-DCA8-41D9-95FD-52CE769C31FD}"/>
               </a:ext>
             </a:extLst>
           </p:cNvPr>
@@ -26026,7 +26026,7 @@
           <p:cNvPr id="92" name="">
             <a:extLst xmlns:a="http://schemas.openxmlformats.org/drawingml/2006/main">
               <a:ext uri="{FF2B5EF4-FFF2-40B4-BE49-F238E27FC236}">
-                <a16:creationId xmlns:a16="http://schemas.microsoft.com/office/drawing/2014/main" id="{CCC8EF1D-CE97-4E8A-A3FB-7A42721BE81E}"/>
+                <a16:creationId xmlns:a16="http://schemas.microsoft.com/office/drawing/2014/main" id="{4F874F15-C2E1-48C9-8C46-E2BA6703E045}"/>
               </a:ext>
             </a:extLst>
           </p:cNvPr>
@@ -26078,7 +26078,7 @@
           <p:cNvPr id="93" name="">
             <a:extLst xmlns:a="http://schemas.openxmlformats.org/drawingml/2006/main">
               <a:ext uri="{FF2B5EF4-FFF2-40B4-BE49-F238E27FC236}">
-                <a16:creationId xmlns:a16="http://schemas.microsoft.com/office/drawing/2014/main" id="{A1758F02-7E06-4214-B3C9-03B7231CF9B9}"/>
+                <a16:creationId xmlns:a16="http://schemas.microsoft.com/office/drawing/2014/main" id="{46077466-7467-4854-9E4E-10A5716159BF}"/>
               </a:ext>
             </a:extLst>
           </p:cNvPr>
@@ -26130,7 +26130,7 @@
           <p:cNvPr id="94" name="">
             <a:extLst xmlns:a="http://schemas.openxmlformats.org/drawingml/2006/main">
               <a:ext uri="{FF2B5EF4-FFF2-40B4-BE49-F238E27FC236}">
-                <a16:creationId xmlns:a16="http://schemas.microsoft.com/office/drawing/2014/main" id="{D4DD916C-2750-4D03-B2BF-3A25DF503BF9}"/>
+                <a16:creationId xmlns:a16="http://schemas.microsoft.com/office/drawing/2014/main" id="{3DC2F920-4F00-4366-8E9E-6DD265BBC239}"/>
               </a:ext>
             </a:extLst>
           </p:cNvPr>
@@ -26182,7 +26182,7 @@
           <p:cNvPr id="95" name="">
             <a:extLst xmlns:a="http://schemas.openxmlformats.org/drawingml/2006/main">
               <a:ext uri="{FF2B5EF4-FFF2-40B4-BE49-F238E27FC236}">
-                <a16:creationId xmlns:a16="http://schemas.microsoft.com/office/drawing/2014/main" id="{4B42EE96-8B33-47FC-B778-2DA8A0AD4A29}"/>
+                <a16:creationId xmlns:a16="http://schemas.microsoft.com/office/drawing/2014/main" id="{BE4970E0-BE08-46CE-A5D6-EBE132EEFEE3}"/>
               </a:ext>
             </a:extLst>
           </p:cNvPr>
@@ -26234,7 +26234,7 @@
           <p:cNvPr id="96" name="">
             <a:extLst xmlns:a="http://schemas.openxmlformats.org/drawingml/2006/main">
               <a:ext uri="{FF2B5EF4-FFF2-40B4-BE49-F238E27FC236}">
-                <a16:creationId xmlns:a16="http://schemas.microsoft.com/office/drawing/2014/main" id="{92F9B570-9D18-407E-BB20-4B6D8CA3AC2E}"/>
+                <a16:creationId xmlns:a16="http://schemas.microsoft.com/office/drawing/2014/main" id="{C568904D-8D95-4600-8FE2-866631A61C75}"/>
               </a:ext>
             </a:extLst>
           </p:cNvPr>
@@ -26286,7 +26286,7 @@
           <p:cNvPr id="97" name="">
             <a:extLst xmlns:a="http://schemas.openxmlformats.org/drawingml/2006/main">
               <a:ext uri="{FF2B5EF4-FFF2-40B4-BE49-F238E27FC236}">
-                <a16:creationId xmlns:a16="http://schemas.microsoft.com/office/drawing/2014/main" id="{66BCBB37-6AE3-4DB5-A7B4-281D5B144DA4}"/>
+                <a16:creationId xmlns:a16="http://schemas.microsoft.com/office/drawing/2014/main" id="{ED74955A-0662-48C5-A871-D797586DED0A}"/>
               </a:ext>
             </a:extLst>
           </p:cNvPr>
@@ -26317,7 +26317,7 @@
           <p:cNvPr id="98" name="">
             <a:extLst xmlns:a="http://schemas.openxmlformats.org/drawingml/2006/main">
               <a:ext uri="{FF2B5EF4-FFF2-40B4-BE49-F238E27FC236}">
-                <a16:creationId xmlns:a16="http://schemas.microsoft.com/office/drawing/2014/main" id="{9AF1F86E-81E8-43B7-903F-DFF45FC77CA5}"/>
+                <a16:creationId xmlns:a16="http://schemas.microsoft.com/office/drawing/2014/main" id="{C74CA96C-DA45-474F-9AFA-18DE4EC33A2D}"/>
               </a:ext>
             </a:extLst>
           </p:cNvPr>
@@ -26369,7 +26369,7 @@
           <p:cNvPr id="99" name="">
             <a:extLst xmlns:a="http://schemas.openxmlformats.org/drawingml/2006/main">
               <a:ext uri="{FF2B5EF4-FFF2-40B4-BE49-F238E27FC236}">
-                <a16:creationId xmlns:a16="http://schemas.microsoft.com/office/drawing/2014/main" id="{A7F9D8B2-16A7-40E5-A962-C65DC4B7D91E}"/>
+                <a16:creationId xmlns:a16="http://schemas.microsoft.com/office/drawing/2014/main" id="{07E8DD9F-BA92-4AAE-B4BF-A0CDE1CAE50A}"/>
               </a:ext>
             </a:extLst>
           </p:cNvPr>
@@ -26421,7 +26421,7 @@
           <p:cNvPr id="100" name="">
             <a:extLst xmlns:a="http://schemas.openxmlformats.org/drawingml/2006/main">
               <a:ext uri="{FF2B5EF4-FFF2-40B4-BE49-F238E27FC236}">
-                <a16:creationId xmlns:a16="http://schemas.microsoft.com/office/drawing/2014/main" id="{418F97A2-3D69-46F6-A6AE-430BAD1097A8}"/>
+                <a16:creationId xmlns:a16="http://schemas.microsoft.com/office/drawing/2014/main" id="{561B0A16-1DF8-4DDD-A94F-D953F9E8B7EA}"/>
               </a:ext>
             </a:extLst>
           </p:cNvPr>
@@ -26473,7 +26473,7 @@
           <p:cNvPr id="101" name="">
             <a:extLst xmlns:a="http://schemas.openxmlformats.org/drawingml/2006/main">
               <a:ext uri="{FF2B5EF4-FFF2-40B4-BE49-F238E27FC236}">
-                <a16:creationId xmlns:a16="http://schemas.microsoft.com/office/drawing/2014/main" id="{539A2A34-BA55-42B7-8DFB-B3133BF2FC09}"/>
+                <a16:creationId xmlns:a16="http://schemas.microsoft.com/office/drawing/2014/main" id="{7095EB6C-A1A6-4AA6-9D07-064704454DF8}"/>
               </a:ext>
             </a:extLst>
           </p:cNvPr>
@@ -26525,7 +26525,7 @@
           <p:cNvPr id="102" name="">
             <a:extLst xmlns:a="http://schemas.openxmlformats.org/drawingml/2006/main">
               <a:ext uri="{FF2B5EF4-FFF2-40B4-BE49-F238E27FC236}">
-                <a16:creationId xmlns:a16="http://schemas.microsoft.com/office/drawing/2014/main" id="{85E48AEE-3D2E-46C6-9EE5-11A683D5946F}"/>
+                <a16:creationId xmlns:a16="http://schemas.microsoft.com/office/drawing/2014/main" id="{2BBAAC84-F6F9-4DCB-8308-527666AB7693}"/>
               </a:ext>
             </a:extLst>
           </p:cNvPr>
@@ -26577,7 +26577,7 @@
           <p:cNvPr id="103" name="">
             <a:extLst xmlns:a="http://schemas.openxmlformats.org/drawingml/2006/main">
               <a:ext uri="{FF2B5EF4-FFF2-40B4-BE49-F238E27FC236}">
-                <a16:creationId xmlns:a16="http://schemas.microsoft.com/office/drawing/2014/main" id="{757FA5EC-5DF7-42D7-A914-59C072998580}"/>
+                <a16:creationId xmlns:a16="http://schemas.microsoft.com/office/drawing/2014/main" id="{85A9B61F-E9E1-4C38-98C3-D1108F652FFC}"/>
               </a:ext>
             </a:extLst>
           </p:cNvPr>
@@ -26629,7 +26629,7 @@
           <p:cNvPr id="104" name="">
             <a:extLst xmlns:a="http://schemas.openxmlformats.org/drawingml/2006/main">
               <a:ext uri="{FF2B5EF4-FFF2-40B4-BE49-F238E27FC236}">
-                <a16:creationId xmlns:a16="http://schemas.microsoft.com/office/drawing/2014/main" id="{21F92F78-44BA-4B9E-92A2-6CD64AB8BB7F}"/>
+                <a16:creationId xmlns:a16="http://schemas.microsoft.com/office/drawing/2014/main" id="{650514FA-ACC3-4EB7-9D55-F4D361E50C24}"/>
               </a:ext>
             </a:extLst>
           </p:cNvPr>
@@ -26681,7 +26681,7 @@
           <p:cNvPr id="105" name="">
             <a:extLst xmlns:a="http://schemas.openxmlformats.org/drawingml/2006/main">
               <a:ext uri="{FF2B5EF4-FFF2-40B4-BE49-F238E27FC236}">
-                <a16:creationId xmlns:a16="http://schemas.microsoft.com/office/drawing/2014/main" id="{57AAE360-59A3-4A33-A3F1-C6F0E75C1602}"/>
+                <a16:creationId xmlns:a16="http://schemas.microsoft.com/office/drawing/2014/main" id="{AB2EC033-30A8-4FDF-B9E5-2B721943C659}"/>
               </a:ext>
             </a:extLst>
           </p:cNvPr>
@@ -26733,7 +26733,7 @@
           <p:cNvPr id="106" name="">
             <a:extLst xmlns:a="http://schemas.openxmlformats.org/drawingml/2006/main">
               <a:ext uri="{FF2B5EF4-FFF2-40B4-BE49-F238E27FC236}">
-                <a16:creationId xmlns:a16="http://schemas.microsoft.com/office/drawing/2014/main" id="{00245306-A3DD-4199-A0C1-2417511F34B2}"/>
+                <a16:creationId xmlns:a16="http://schemas.microsoft.com/office/drawing/2014/main" id="{6E87EEB9-1855-41B5-8B97-D4747F472FD6}"/>
               </a:ext>
             </a:extLst>
           </p:cNvPr>
@@ -26764,7 +26764,7 @@
           <p:cNvPr id="107" name="">
             <a:extLst xmlns:a="http://schemas.openxmlformats.org/drawingml/2006/main">
               <a:ext uri="{FF2B5EF4-FFF2-40B4-BE49-F238E27FC236}">
-                <a16:creationId xmlns:a16="http://schemas.microsoft.com/office/drawing/2014/main" id="{C87CA76A-0ECD-47BF-89AC-E11438848C2E}"/>
+                <a16:creationId xmlns:a16="http://schemas.microsoft.com/office/drawing/2014/main" id="{0CAAE8B7-7697-413F-86F2-428C7BB4586E}"/>
               </a:ext>
             </a:extLst>
           </p:cNvPr>
@@ -26795,7 +26795,7 @@
           <p:cNvPr id="108" name="">
             <a:extLst xmlns:a="http://schemas.openxmlformats.org/drawingml/2006/main">
               <a:ext uri="{FF2B5EF4-FFF2-40B4-BE49-F238E27FC236}">
-                <a16:creationId xmlns:a16="http://schemas.microsoft.com/office/drawing/2014/main" id="{AA70FB6E-F0EF-4FA4-99E2-E56560E75493}"/>
+                <a16:creationId xmlns:a16="http://schemas.microsoft.com/office/drawing/2014/main" id="{70ACAC4B-B592-493C-A3F1-26892F30225F}"/>
               </a:ext>
             </a:extLst>
           </p:cNvPr>
@@ -26847,7 +26847,7 @@
           <p:cNvPr id="109" name="">
             <a:extLst xmlns:a="http://schemas.openxmlformats.org/drawingml/2006/main">
               <a:ext uri="{FF2B5EF4-FFF2-40B4-BE49-F238E27FC236}">
-                <a16:creationId xmlns:a16="http://schemas.microsoft.com/office/drawing/2014/main" id="{10A13DA6-F798-4B55-83E8-30D2BE9C5BFD}"/>
+                <a16:creationId xmlns:a16="http://schemas.microsoft.com/office/drawing/2014/main" id="{017FB1F1-1D43-42AF-B89B-DBA734D00A6B}"/>
               </a:ext>
             </a:extLst>
           </p:cNvPr>
@@ -26899,7 +26899,7 @@
           <p:cNvPr id="110" name="">
             <a:extLst xmlns:a="http://schemas.openxmlformats.org/drawingml/2006/main">
               <a:ext uri="{FF2B5EF4-FFF2-40B4-BE49-F238E27FC236}">
-                <a16:creationId xmlns:a16="http://schemas.microsoft.com/office/drawing/2014/main" id="{CA5B416C-39FF-43E5-9C38-8AF49B5308EB}"/>
+                <a16:creationId xmlns:a16="http://schemas.microsoft.com/office/drawing/2014/main" id="{F7E87817-7952-4073-9303-21DBFB8D4EB8}"/>
               </a:ext>
             </a:extLst>
           </p:cNvPr>
@@ -26951,7 +26951,7 @@
           <p:cNvPr id="111" name="">
             <a:extLst xmlns:a="http://schemas.openxmlformats.org/drawingml/2006/main">
               <a:ext uri="{FF2B5EF4-FFF2-40B4-BE49-F238E27FC236}">
-                <a16:creationId xmlns:a16="http://schemas.microsoft.com/office/drawing/2014/main" id="{9DBB3948-6862-4EA8-96C4-7B7A3825503B}"/>
+                <a16:creationId xmlns:a16="http://schemas.microsoft.com/office/drawing/2014/main" id="{C9648C2B-841D-4677-A66D-98270B998147}"/>
               </a:ext>
             </a:extLst>
           </p:cNvPr>
@@ -27003,7 +27003,7 @@
           <p:cNvPr id="112" name="">
             <a:extLst xmlns:a="http://schemas.openxmlformats.org/drawingml/2006/main">
               <a:ext uri="{FF2B5EF4-FFF2-40B4-BE49-F238E27FC236}">
-                <a16:creationId xmlns:a16="http://schemas.microsoft.com/office/drawing/2014/main" id="{7623691E-2ECD-4FAD-BBAE-8261CE1EDA48}"/>
+                <a16:creationId xmlns:a16="http://schemas.microsoft.com/office/drawing/2014/main" id="{E1643A3B-BA2E-4713-AF5D-AB17CABFD402}"/>
               </a:ext>
             </a:extLst>
           </p:cNvPr>
@@ -27055,7 +27055,7 @@
           <p:cNvPr id="113" name="">
             <a:extLst xmlns:a="http://schemas.openxmlformats.org/drawingml/2006/main">
               <a:ext uri="{FF2B5EF4-FFF2-40B4-BE49-F238E27FC236}">
-                <a16:creationId xmlns:a16="http://schemas.microsoft.com/office/drawing/2014/main" id="{B7022362-56C0-4FB6-9BE0-89E95F953C55}"/>
+                <a16:creationId xmlns:a16="http://schemas.microsoft.com/office/drawing/2014/main" id="{14400AAF-B8E6-4618-9DDD-327070D0B265}"/>
               </a:ext>
             </a:extLst>
           </p:cNvPr>
@@ -27107,7 +27107,7 @@
           <p:cNvPr id="114" name="">
             <a:extLst xmlns:a="http://schemas.openxmlformats.org/drawingml/2006/main">
               <a:ext uri="{FF2B5EF4-FFF2-40B4-BE49-F238E27FC236}">
-                <a16:creationId xmlns:a16="http://schemas.microsoft.com/office/drawing/2014/main" id="{C75557B9-8BF3-41CE-9544-662697BC091E}"/>
+                <a16:creationId xmlns:a16="http://schemas.microsoft.com/office/drawing/2014/main" id="{4BE4E8A3-3C14-40CE-8E49-8A81BDEF013B}"/>
               </a:ext>
             </a:extLst>
           </p:cNvPr>
@@ -27159,7 +27159,7 @@
           <p:cNvPr id="115" name="">
             <a:extLst xmlns:a="http://schemas.openxmlformats.org/drawingml/2006/main">
               <a:ext uri="{FF2B5EF4-FFF2-40B4-BE49-F238E27FC236}">
-                <a16:creationId xmlns:a16="http://schemas.microsoft.com/office/drawing/2014/main" id="{29CA907A-2136-4CEF-94DB-93F9A93A6421}"/>
+                <a16:creationId xmlns:a16="http://schemas.microsoft.com/office/drawing/2014/main" id="{178CC91F-F04C-4062-8910-96471BE57A0D}"/>
               </a:ext>
             </a:extLst>
           </p:cNvPr>
@@ -27211,7 +27211,7 @@
           <p:cNvPr id="116" name="">
             <a:extLst xmlns:a="http://schemas.openxmlformats.org/drawingml/2006/main">
               <a:ext uri="{FF2B5EF4-FFF2-40B4-BE49-F238E27FC236}">
-                <a16:creationId xmlns:a16="http://schemas.microsoft.com/office/drawing/2014/main" id="{C4F1FEA0-6C42-4F6A-84D7-1F9481555E07}"/>
+                <a16:creationId xmlns:a16="http://schemas.microsoft.com/office/drawing/2014/main" id="{1A8B8C67-FF87-403E-91EC-7F61BAAF7828}"/>
               </a:ext>
             </a:extLst>
           </p:cNvPr>
@@ -27242,7 +27242,7 @@
           <p:cNvPr id="117" name="">
             <a:extLst xmlns:a="http://schemas.openxmlformats.org/drawingml/2006/main">
               <a:ext uri="{FF2B5EF4-FFF2-40B4-BE49-F238E27FC236}">
-                <a16:creationId xmlns:a16="http://schemas.microsoft.com/office/drawing/2014/main" id="{D3CCB48A-6ABD-4802-86C3-90F508C58CAE}"/>
+                <a16:creationId xmlns:a16="http://schemas.microsoft.com/office/drawing/2014/main" id="{BEFF3C82-51E6-4B76-8D33-F12750EC5B33}"/>
               </a:ext>
             </a:extLst>
           </p:cNvPr>
@@ -27294,7 +27294,7 @@
           <p:cNvPr id="118" name="">
             <a:extLst xmlns:a="http://schemas.openxmlformats.org/drawingml/2006/main">
               <a:ext uri="{FF2B5EF4-FFF2-40B4-BE49-F238E27FC236}">
-                <a16:creationId xmlns:a16="http://schemas.microsoft.com/office/drawing/2014/main" id="{15A7D364-192B-4B8B-9A00-DA9DAD833F00}"/>
+                <a16:creationId xmlns:a16="http://schemas.microsoft.com/office/drawing/2014/main" id="{02EA46CD-CB9F-4D76-BDE0-62D95ACDAF8B}"/>
               </a:ext>
             </a:extLst>
           </p:cNvPr>
@@ -27346,7 +27346,7 @@
           <p:cNvPr id="119" name="">
             <a:extLst xmlns:a="http://schemas.openxmlformats.org/drawingml/2006/main">
               <a:ext uri="{FF2B5EF4-FFF2-40B4-BE49-F238E27FC236}">
-                <a16:creationId xmlns:a16="http://schemas.microsoft.com/office/drawing/2014/main" id="{41E17F31-F0CC-42D4-AC9D-1E836B3D4CE4}"/>
+                <a16:creationId xmlns:a16="http://schemas.microsoft.com/office/drawing/2014/main" id="{532DD6D3-66A6-473C-B62D-D0967BAF2FFF}"/>
               </a:ext>
             </a:extLst>
           </p:cNvPr>
@@ -27398,7 +27398,7 @@
           <p:cNvPr id="120" name="">
             <a:extLst xmlns:a="http://schemas.openxmlformats.org/drawingml/2006/main">
               <a:ext uri="{FF2B5EF4-FFF2-40B4-BE49-F238E27FC236}">
-                <a16:creationId xmlns:a16="http://schemas.microsoft.com/office/drawing/2014/main" id="{73568196-55B8-4F9C-A79C-32FD0BCF5D9B}"/>
+                <a16:creationId xmlns:a16="http://schemas.microsoft.com/office/drawing/2014/main" id="{E8DC1EE9-88EA-49AE-BB30-29A48B5B528E}"/>
               </a:ext>
             </a:extLst>
           </p:cNvPr>
@@ -27450,7 +27450,7 @@
           <p:cNvPr id="121" name="">
             <a:extLst xmlns:a="http://schemas.openxmlformats.org/drawingml/2006/main">
               <a:ext uri="{FF2B5EF4-FFF2-40B4-BE49-F238E27FC236}">
-                <a16:creationId xmlns:a16="http://schemas.microsoft.com/office/drawing/2014/main" id="{64DC4CD1-0574-4D9B-9627-D78339899656}"/>
+                <a16:creationId xmlns:a16="http://schemas.microsoft.com/office/drawing/2014/main" id="{44D033B0-2A8A-4805-A004-D0B29F104299}"/>
               </a:ext>
             </a:extLst>
           </p:cNvPr>
@@ -27502,7 +27502,7 @@
           <p:cNvPr id="122" name="">
             <a:extLst xmlns:a="http://schemas.openxmlformats.org/drawingml/2006/main">
               <a:ext uri="{FF2B5EF4-FFF2-40B4-BE49-F238E27FC236}">
-                <a16:creationId xmlns:a16="http://schemas.microsoft.com/office/drawing/2014/main" id="{BEEC1FCE-53A5-4C16-B381-1B13211464FC}"/>
+                <a16:creationId xmlns:a16="http://schemas.microsoft.com/office/drawing/2014/main" id="{1312DC9B-41A0-4F67-A02E-A58EA3B2CE13}"/>
               </a:ext>
             </a:extLst>
           </p:cNvPr>
@@ -27554,7 +27554,7 @@
           <p:cNvPr id="123" name="">
             <a:extLst xmlns:a="http://schemas.openxmlformats.org/drawingml/2006/main">
               <a:ext uri="{FF2B5EF4-FFF2-40B4-BE49-F238E27FC236}">
-                <a16:creationId xmlns:a16="http://schemas.microsoft.com/office/drawing/2014/main" id="{F82F95EB-3F29-4AE6-8619-58596FF1283A}"/>
+                <a16:creationId xmlns:a16="http://schemas.microsoft.com/office/drawing/2014/main" id="{0EC4B3CD-C839-4937-83A9-1F28D3BA5A2C}"/>
               </a:ext>
             </a:extLst>
           </p:cNvPr>
@@ -27606,7 +27606,7 @@
           <p:cNvPr id="124" name="">
             <a:extLst xmlns:a="http://schemas.openxmlformats.org/drawingml/2006/main">
               <a:ext uri="{FF2B5EF4-FFF2-40B4-BE49-F238E27FC236}">
-                <a16:creationId xmlns:a16="http://schemas.microsoft.com/office/drawing/2014/main" id="{5D6E0AD2-DAB1-4746-88D4-D182ACC39E8F}"/>
+                <a16:creationId xmlns:a16="http://schemas.microsoft.com/office/drawing/2014/main" id="{BF0D5124-45B0-406E-8352-55293D00F4B8}"/>
               </a:ext>
             </a:extLst>
           </p:cNvPr>
@@ -27658,7 +27658,7 @@
           <p:cNvPr id="125" name="">
             <a:extLst xmlns:a="http://schemas.openxmlformats.org/drawingml/2006/main">
               <a:ext uri="{FF2B5EF4-FFF2-40B4-BE49-F238E27FC236}">
-                <a16:creationId xmlns:a16="http://schemas.microsoft.com/office/drawing/2014/main" id="{43170BFA-329E-4404-85B5-6CFD6154777E}"/>
+                <a16:creationId xmlns:a16="http://schemas.microsoft.com/office/drawing/2014/main" id="{FC73CA79-1A4C-4779-A3AB-D3F0CD00D4D9}"/>
               </a:ext>
             </a:extLst>
           </p:cNvPr>
@@ -27689,7 +27689,7 @@
           <p:cNvPr id="126" name="">
             <a:extLst xmlns:a="http://schemas.openxmlformats.org/drawingml/2006/main">
               <a:ext uri="{FF2B5EF4-FFF2-40B4-BE49-F238E27FC236}">
-                <a16:creationId xmlns:a16="http://schemas.microsoft.com/office/drawing/2014/main" id="{88D75D2D-7412-4D79-A920-DA6C338A12AF}"/>
+                <a16:creationId xmlns:a16="http://schemas.microsoft.com/office/drawing/2014/main" id="{428CCD65-7995-4F29-B679-C6AFE904A8EF}"/>
               </a:ext>
             </a:extLst>
           </p:cNvPr>
@@ -27720,7 +27720,7 @@
           <p:cNvPr id="127" name="">
             <a:extLst xmlns:a="http://schemas.openxmlformats.org/drawingml/2006/main">
               <a:ext uri="{FF2B5EF4-FFF2-40B4-BE49-F238E27FC236}">
-                <a16:creationId xmlns:a16="http://schemas.microsoft.com/office/drawing/2014/main" id="{EFBFB733-00FA-4FF5-A09E-FA686C72F19D}"/>
+                <a16:creationId xmlns:a16="http://schemas.microsoft.com/office/drawing/2014/main" id="{CCF4E54B-7F00-4BFF-8590-92CBFC2D536E}"/>
               </a:ext>
             </a:extLst>
           </p:cNvPr>
@@ -27772,7 +27772,7 @@
           <p:cNvPr id="128" name="">
             <a:extLst xmlns:a="http://schemas.openxmlformats.org/drawingml/2006/main">
               <a:ext uri="{FF2B5EF4-FFF2-40B4-BE49-F238E27FC236}">
-                <a16:creationId xmlns:a16="http://schemas.microsoft.com/office/drawing/2014/main" id="{1CF295E4-4749-4477-9A77-D88DC930D860}"/>
+                <a16:creationId xmlns:a16="http://schemas.microsoft.com/office/drawing/2014/main" id="{8566BEF8-D4A6-421D-85AD-79BEE98DAB15}"/>
               </a:ext>
             </a:extLst>
           </p:cNvPr>
@@ -27824,7 +27824,7 @@
           <p:cNvPr id="129" name="">
             <a:extLst xmlns:a="http://schemas.openxmlformats.org/drawingml/2006/main">
               <a:ext uri="{FF2B5EF4-FFF2-40B4-BE49-F238E27FC236}">
-                <a16:creationId xmlns:a16="http://schemas.microsoft.com/office/drawing/2014/main" id="{900966AC-6EB8-4B79-A59F-692E9BD6A3F7}"/>
+                <a16:creationId xmlns:a16="http://schemas.microsoft.com/office/drawing/2014/main" id="{CFB0701C-1A84-4135-B712-4A18B3587F6A}"/>
               </a:ext>
             </a:extLst>
           </p:cNvPr>
@@ -27876,7 +27876,7 @@
           <p:cNvPr id="130" name="">
             <a:extLst xmlns:a="http://schemas.openxmlformats.org/drawingml/2006/main">
               <a:ext uri="{FF2B5EF4-FFF2-40B4-BE49-F238E27FC236}">
-                <a16:creationId xmlns:a16="http://schemas.microsoft.com/office/drawing/2014/main" id="{5EC91B2B-EFDF-4020-9C7C-2B75EAC5258F}"/>
+                <a16:creationId xmlns:a16="http://schemas.microsoft.com/office/drawing/2014/main" id="{7E7D9C05-0C7C-4B00-898B-8A48E26EDB7C}"/>
               </a:ext>
             </a:extLst>
           </p:cNvPr>
@@ -27928,7 +27928,7 @@
           <p:cNvPr id="131" name="">
             <a:extLst xmlns:a="http://schemas.openxmlformats.org/drawingml/2006/main">
               <a:ext uri="{FF2B5EF4-FFF2-40B4-BE49-F238E27FC236}">
-                <a16:creationId xmlns:a16="http://schemas.microsoft.com/office/drawing/2014/main" id="{C6AC19CC-0D89-4177-8E99-FD8F446CCFFA}"/>
+                <a16:creationId xmlns:a16="http://schemas.microsoft.com/office/drawing/2014/main" id="{9EACF542-DBAC-453C-8332-5EB4119DADDE}"/>
               </a:ext>
             </a:extLst>
           </p:cNvPr>
@@ -27980,7 +27980,7 @@
           <p:cNvPr id="132" name="">
             <a:extLst xmlns:a="http://schemas.openxmlformats.org/drawingml/2006/main">
               <a:ext uri="{FF2B5EF4-FFF2-40B4-BE49-F238E27FC236}">
-                <a16:creationId xmlns:a16="http://schemas.microsoft.com/office/drawing/2014/main" id="{83F782F8-8E1F-4D80-AE8E-BFF7FA3A7417}"/>
+                <a16:creationId xmlns:a16="http://schemas.microsoft.com/office/drawing/2014/main" id="{9C99A746-960A-4BD5-97CA-0EE4BCB26CBC}"/>
               </a:ext>
             </a:extLst>
           </p:cNvPr>
@@ -28032,7 +28032,7 @@
           <p:cNvPr id="133" name="">
             <a:extLst xmlns:a="http://schemas.openxmlformats.org/drawingml/2006/main">
               <a:ext uri="{FF2B5EF4-FFF2-40B4-BE49-F238E27FC236}">
-                <a16:creationId xmlns:a16="http://schemas.microsoft.com/office/drawing/2014/main" id="{F190CEEE-D2C3-432D-B798-87BFCFB63415}"/>
+                <a16:creationId xmlns:a16="http://schemas.microsoft.com/office/drawing/2014/main" id="{BCDDE627-2AA2-4645-911C-FE45139FE29A}"/>
               </a:ext>
             </a:extLst>
           </p:cNvPr>
@@ -28084,7 +28084,7 @@
           <p:cNvPr id="134" name="">
             <a:extLst xmlns:a="http://schemas.openxmlformats.org/drawingml/2006/main">
               <a:ext uri="{FF2B5EF4-FFF2-40B4-BE49-F238E27FC236}">
-                <a16:creationId xmlns:a16="http://schemas.microsoft.com/office/drawing/2014/main" id="{78A58DE6-5CDD-4E8D-A56A-55CE6A3F3477}"/>
+                <a16:creationId xmlns:a16="http://schemas.microsoft.com/office/drawing/2014/main" id="{19CFD4AD-1A53-418F-AF70-CECF1E68DE9B}"/>
               </a:ext>
             </a:extLst>
           </p:cNvPr>
@@ -28134,7 +28134,7 @@
     </p:spTree>
     <p:extLst>
       <p:ext uri="{BB962C8B-B14F-4D97-AF65-F5344CB8AC3E}">
-        <p14:creationId xmlns:p14="http://schemas.microsoft.com/office/powerpoint/2010/main" val="234942059"/>
+        <p14:creationId xmlns:p14="http://schemas.microsoft.com/office/powerpoint/2010/main" val="933136762"/>
       </p:ext>
     </p:extLst>
   </p:cSld>
@@ -28165,7 +28165,7 @@
           <p:cNvPr id="9" name="">
             <a:extLst xmlns:a="http://schemas.openxmlformats.org/drawingml/2006/main">
               <a:ext uri="{FF2B5EF4-FFF2-40B4-BE49-F238E27FC236}">
-                <a16:creationId xmlns:a16="http://schemas.microsoft.com/office/drawing/2014/main" id="{4DE229F6-BB65-4BCD-AD7B-94C30E1C1F7E}"/>
+                <a16:creationId xmlns:a16="http://schemas.microsoft.com/office/drawing/2014/main" id="{12DA496B-1FD3-4A27-94B7-15A6928455B2}"/>
               </a:ext>
             </a:extLst>
           </p:cNvPr>
@@ -28198,7 +28198,7 @@
           <p:cNvPr id="2" name="">
             <a:extLst xmlns:a="http://schemas.openxmlformats.org/drawingml/2006/main">
               <a:ext uri="{FF2B5EF4-FFF2-40B4-BE49-F238E27FC236}">
-                <a16:creationId xmlns:a16="http://schemas.microsoft.com/office/drawing/2014/main" id="{A5F4500F-9776-44EA-BFE5-57811D7397E6}"/>
+                <a16:creationId xmlns:a16="http://schemas.microsoft.com/office/drawing/2014/main" id="{2663128D-9CDE-4283-95E4-773566DE9695}"/>
               </a:ext>
             </a:extLst>
           </p:cNvPr>
@@ -28229,7 +28229,7 @@
           <p:cNvPr id="3" name="">
             <a:extLst xmlns:a="http://schemas.openxmlformats.org/drawingml/2006/main">
               <a:ext uri="{FF2B5EF4-FFF2-40B4-BE49-F238E27FC236}">
-                <a16:creationId xmlns:a16="http://schemas.microsoft.com/office/drawing/2014/main" id="{A680E150-24A3-46DA-AE54-F21B31E3A0B7}"/>
+                <a16:creationId xmlns:a16="http://schemas.microsoft.com/office/drawing/2014/main" id="{FFFD8183-3ABF-4201-820F-45473700AFD2}"/>
               </a:ext>
             </a:extLst>
           </p:cNvPr>
@@ -28281,7 +28281,7 @@
           <p:cNvPr id="4" name="">
             <a:extLst xmlns:a="http://schemas.openxmlformats.org/drawingml/2006/main">
               <a:ext uri="{FF2B5EF4-FFF2-40B4-BE49-F238E27FC236}">
-                <a16:creationId xmlns:a16="http://schemas.microsoft.com/office/drawing/2014/main" id="{50BE8EC8-B138-4800-8694-361A48AA6E21}"/>
+                <a16:creationId xmlns:a16="http://schemas.microsoft.com/office/drawing/2014/main" id="{C9A84FDF-1692-45F5-8A5F-6F257F4CC135}"/>
               </a:ext>
             </a:extLst>
           </p:cNvPr>
@@ -28316,7 +28316,7 @@
           <p:nvPr/>
         </p:nvPicPr>
         <p:blipFill>
-          <a:blip xmlns:r="http://schemas.openxmlformats.org/officeDocument/2006/relationships" xmlns:a="http://schemas.openxmlformats.org/drawingml/2006/main" r:embed="R90720a419b6a4fa6"/>
+          <a:blip xmlns:r="http://schemas.openxmlformats.org/officeDocument/2006/relationships" xmlns:a="http://schemas.openxmlformats.org/drawingml/2006/main" r:embed="R661126d781eb4647"/>
           <a:stretch xmlns:a="http://schemas.openxmlformats.org/drawingml/2006/main"/>
         </p:blipFill>
         <p:spPr>
@@ -28334,7 +28334,7 @@
           <p:cNvPr id="6" name="">
             <a:extLst xmlns:a="http://schemas.openxmlformats.org/drawingml/2006/main">
               <a:ext uri="{FF2B5EF4-FFF2-40B4-BE49-F238E27FC236}">
-                <a16:creationId xmlns:a16="http://schemas.microsoft.com/office/drawing/2014/main" id="{0CE64601-C0AB-4290-8930-E9D05D60B9ED}"/>
+                <a16:creationId xmlns:a16="http://schemas.microsoft.com/office/drawing/2014/main" id="{9F7C1FE7-5022-450D-B04D-AF4656D13EE2}"/>
               </a:ext>
             </a:extLst>
           </p:cNvPr>
@@ -28386,7 +28386,7 @@
           <p:cNvPr id="7" name="">
             <a:extLst xmlns:a="http://schemas.openxmlformats.org/drawingml/2006/main">
               <a:ext uri="{FF2B5EF4-FFF2-40B4-BE49-F238E27FC236}">
-                <a16:creationId xmlns:a16="http://schemas.microsoft.com/office/drawing/2014/main" id="{84C583EB-D970-455D-9FA3-F8E7E069365B}"/>
+                <a16:creationId xmlns:a16="http://schemas.microsoft.com/office/drawing/2014/main" id="{0BABD379-E7A6-4BF6-AA00-D8C7EDC079EB}"/>
               </a:ext>
             </a:extLst>
           </p:cNvPr>
@@ -28442,7 +28442,7 @@
           <p:nvPr/>
         </p:nvPicPr>
         <p:blipFill>
-          <a:blip xmlns:r="http://schemas.openxmlformats.org/officeDocument/2006/relationships" xmlns:a="http://schemas.openxmlformats.org/drawingml/2006/main" r:embed="R254732d914844aa8"/>
+          <a:blip xmlns:r="http://schemas.openxmlformats.org/officeDocument/2006/relationships" xmlns:a="http://schemas.openxmlformats.org/drawingml/2006/main" r:embed="R6d4061d578e64819"/>
           <a:stretch xmlns:a="http://schemas.openxmlformats.org/drawingml/2006/main"/>
         </p:blipFill>
         <p:spPr>
@@ -28458,7 +28458,7 @@
     </p:spTree>
     <p:extLst>
       <p:ext uri="{BB962C8B-B14F-4D97-AF65-F5344CB8AC3E}">
-        <p14:creationId xmlns:p14="http://schemas.microsoft.com/office/powerpoint/2010/main" val="134738430"/>
+        <p14:creationId xmlns:p14="http://schemas.microsoft.com/office/powerpoint/2010/main" val="1740562505"/>
       </p:ext>
     </p:extLst>
   </p:cSld>
@@ -28489,7 +28489,7 @@
           <p:cNvPr id="42" name="">
             <a:extLst xmlns:a="http://schemas.openxmlformats.org/drawingml/2006/main">
               <a:ext uri="{FF2B5EF4-FFF2-40B4-BE49-F238E27FC236}">
-                <a16:creationId xmlns:a16="http://schemas.microsoft.com/office/drawing/2014/main" id="{48E7E949-1039-40F8-A5FC-C9BD8B0030B4}"/>
+                <a16:creationId xmlns:a16="http://schemas.microsoft.com/office/drawing/2014/main" id="{F345A78F-557B-4EBF-84B6-DB22007DFF6E}"/>
               </a:ext>
             </a:extLst>
           </p:cNvPr>
@@ -28522,7 +28522,7 @@
           <p:cNvPr id="2" name="">
             <a:extLst xmlns:a="http://schemas.openxmlformats.org/drawingml/2006/main">
               <a:ext uri="{FF2B5EF4-FFF2-40B4-BE49-F238E27FC236}">
-                <a16:creationId xmlns:a16="http://schemas.microsoft.com/office/drawing/2014/main" id="{8A2BAFB8-7AA2-47F7-BB2F-1A86E52F948C}"/>
+                <a16:creationId xmlns:a16="http://schemas.microsoft.com/office/drawing/2014/main" id="{B818FD10-7A05-4250-AB00-CC1D82CEF580}"/>
               </a:ext>
             </a:extLst>
           </p:cNvPr>
@@ -28553,7 +28553,7 @@
           <p:cNvPr id="3" name="">
             <a:extLst xmlns:a="http://schemas.openxmlformats.org/drawingml/2006/main">
               <a:ext uri="{FF2B5EF4-FFF2-40B4-BE49-F238E27FC236}">
-                <a16:creationId xmlns:a16="http://schemas.microsoft.com/office/drawing/2014/main" id="{D6CE40FF-BD56-4C79-A9FE-03EA692F5A37}"/>
+                <a16:creationId xmlns:a16="http://schemas.microsoft.com/office/drawing/2014/main" id="{1A6E48B0-3A89-43F1-91B7-B25799B4BBC6}"/>
               </a:ext>
             </a:extLst>
           </p:cNvPr>
@@ -28605,7 +28605,7 @@
           <p:cNvPr id="4" name="">
             <a:extLst xmlns:a="http://schemas.openxmlformats.org/drawingml/2006/main">
               <a:ext uri="{FF2B5EF4-FFF2-40B4-BE49-F238E27FC236}">
-                <a16:creationId xmlns:a16="http://schemas.microsoft.com/office/drawing/2014/main" id="{1053361A-884F-4A53-A470-927D0413D3E9}"/>
+                <a16:creationId xmlns:a16="http://schemas.microsoft.com/office/drawing/2014/main" id="{9048773D-B2C7-454E-B131-4876DB84DC73}"/>
               </a:ext>
             </a:extLst>
           </p:cNvPr>
@@ -28657,7 +28657,7 @@
           <p:cNvPr id="5" name="">
             <a:extLst xmlns:a="http://schemas.openxmlformats.org/drawingml/2006/main">
               <a:ext uri="{FF2B5EF4-FFF2-40B4-BE49-F238E27FC236}">
-                <a16:creationId xmlns:a16="http://schemas.microsoft.com/office/drawing/2014/main" id="{EE9B8E27-3C1F-4493-A839-F912F202584F}"/>
+                <a16:creationId xmlns:a16="http://schemas.microsoft.com/office/drawing/2014/main" id="{D11BCA4F-A4FE-4E07-B4F1-6635762B6BDB}"/>
               </a:ext>
             </a:extLst>
           </p:cNvPr>
@@ -28692,7 +28692,7 @@
           <p:nvPr/>
         </p:nvPicPr>
         <p:blipFill>
-          <a:blip xmlns:r="http://schemas.openxmlformats.org/officeDocument/2006/relationships" xmlns:a="http://schemas.openxmlformats.org/drawingml/2006/main" r:embed="R633d1814555a450d"/>
+          <a:blip xmlns:r="http://schemas.openxmlformats.org/officeDocument/2006/relationships" xmlns:a="http://schemas.openxmlformats.org/drawingml/2006/main" r:embed="R6e658d680ccc4ba3"/>
           <a:stretch xmlns:a="http://schemas.openxmlformats.org/drawingml/2006/main"/>
         </p:blipFill>
         <p:spPr>
@@ -28710,7 +28710,7 @@
           <p:cNvPr id="7" name="">
             <a:extLst xmlns:a="http://schemas.openxmlformats.org/drawingml/2006/main">
               <a:ext uri="{FF2B5EF4-FFF2-40B4-BE49-F238E27FC236}">
-                <a16:creationId xmlns:a16="http://schemas.microsoft.com/office/drawing/2014/main" id="{65D20761-EB75-4C75-85A4-0E1CCA96927F}"/>
+                <a16:creationId xmlns:a16="http://schemas.microsoft.com/office/drawing/2014/main" id="{572A5C63-F5A6-4612-B352-0BE63AAB6218}"/>
               </a:ext>
             </a:extLst>
           </p:cNvPr>
@@ -28762,7 +28762,7 @@
           <p:cNvPr id="8" name="">
             <a:extLst xmlns:a="http://schemas.openxmlformats.org/drawingml/2006/main">
               <a:ext uri="{FF2B5EF4-FFF2-40B4-BE49-F238E27FC236}">
-                <a16:creationId xmlns:a16="http://schemas.microsoft.com/office/drawing/2014/main" id="{B2CB9CD5-1D52-4D92-A29C-6396F1944BE0}"/>
+                <a16:creationId xmlns:a16="http://schemas.microsoft.com/office/drawing/2014/main" id="{76892BBB-75FC-4924-A3EE-DFFEFEF6686A}"/>
               </a:ext>
             </a:extLst>
           </p:cNvPr>
@@ -28814,7 +28814,7 @@
           <p:cNvPr id="9" name="">
             <a:extLst xmlns:a="http://schemas.openxmlformats.org/drawingml/2006/main">
               <a:ext uri="{FF2B5EF4-FFF2-40B4-BE49-F238E27FC236}">
-                <a16:creationId xmlns:a16="http://schemas.microsoft.com/office/drawing/2014/main" id="{EB8A20A8-3472-4E14-88BF-607AB442CA0E}"/>
+                <a16:creationId xmlns:a16="http://schemas.microsoft.com/office/drawing/2014/main" id="{C72A8099-8884-4B2E-AAF9-60BF97E9601D}"/>
               </a:ext>
             </a:extLst>
           </p:cNvPr>
@@ -28866,7 +28866,7 @@
           <p:cNvPr id="10" name="">
             <a:extLst xmlns:a="http://schemas.openxmlformats.org/drawingml/2006/main">
               <a:ext uri="{FF2B5EF4-FFF2-40B4-BE49-F238E27FC236}">
-                <a16:creationId xmlns:a16="http://schemas.microsoft.com/office/drawing/2014/main" id="{F04CE335-0310-4F2E-9AA2-703F86837DF3}"/>
+                <a16:creationId xmlns:a16="http://schemas.microsoft.com/office/drawing/2014/main" id="{7B3455D2-A845-44BB-8B80-D3310EF42C1C}"/>
               </a:ext>
             </a:extLst>
           </p:cNvPr>
@@ -28897,7 +28897,7 @@
           <p:cNvPr id="11" name="">
             <a:extLst xmlns:a="http://schemas.openxmlformats.org/drawingml/2006/main">
               <a:ext uri="{FF2B5EF4-FFF2-40B4-BE49-F238E27FC236}">
-                <a16:creationId xmlns:a16="http://schemas.microsoft.com/office/drawing/2014/main" id="{EF7567B3-B366-42C2-A5D5-A31F1F36B2EB}"/>
+                <a16:creationId xmlns:a16="http://schemas.microsoft.com/office/drawing/2014/main" id="{3692A5DA-D4C7-4B50-ABA5-A206777D880C}"/>
               </a:ext>
             </a:extLst>
           </p:cNvPr>
@@ -28949,7 +28949,7 @@
           <p:cNvPr id="12" name="">
             <a:extLst xmlns:a="http://schemas.openxmlformats.org/drawingml/2006/main">
               <a:ext uri="{FF2B5EF4-FFF2-40B4-BE49-F238E27FC236}">
-                <a16:creationId xmlns:a16="http://schemas.microsoft.com/office/drawing/2014/main" id="{2C5862A1-538A-4862-9807-A70DF9046EB9}"/>
+                <a16:creationId xmlns:a16="http://schemas.microsoft.com/office/drawing/2014/main" id="{DC3E5066-29CC-4D99-B530-8CD2B5C17C21}"/>
               </a:ext>
             </a:extLst>
           </p:cNvPr>
@@ -29001,7 +29001,7 @@
           <p:cNvPr id="13" name="">
             <a:extLst xmlns:a="http://schemas.openxmlformats.org/drawingml/2006/main">
               <a:ext uri="{FF2B5EF4-FFF2-40B4-BE49-F238E27FC236}">
-                <a16:creationId xmlns:a16="http://schemas.microsoft.com/office/drawing/2014/main" id="{CAF0BF8E-543B-4BB0-86C3-3DDF0C7160AF}"/>
+                <a16:creationId xmlns:a16="http://schemas.microsoft.com/office/drawing/2014/main" id="{15BBDABC-4A35-49E9-BC21-114659967B31}"/>
               </a:ext>
             </a:extLst>
           </p:cNvPr>
@@ -29053,7 +29053,7 @@
           <p:cNvPr id="14" name="">
             <a:extLst xmlns:a="http://schemas.openxmlformats.org/drawingml/2006/main">
               <a:ext uri="{FF2B5EF4-FFF2-40B4-BE49-F238E27FC236}">
-                <a16:creationId xmlns:a16="http://schemas.microsoft.com/office/drawing/2014/main" id="{2542D221-4CEF-4DAA-800E-CF79BE2846CB}"/>
+                <a16:creationId xmlns:a16="http://schemas.microsoft.com/office/drawing/2014/main" id="{F2E4FF36-AD52-45FB-ACE7-C41B996D9D7E}"/>
               </a:ext>
             </a:extLst>
           </p:cNvPr>
@@ -29084,7 +29084,7 @@
           <p:cNvPr id="15" name="">
             <a:extLst xmlns:a="http://schemas.openxmlformats.org/drawingml/2006/main">
               <a:ext uri="{FF2B5EF4-FFF2-40B4-BE49-F238E27FC236}">
-                <a16:creationId xmlns:a16="http://schemas.microsoft.com/office/drawing/2014/main" id="{68D55F56-FB9E-4B1F-8728-777143ACDAD1}"/>
+                <a16:creationId xmlns:a16="http://schemas.microsoft.com/office/drawing/2014/main" id="{C4D8184C-1FA9-4969-AE8C-B2FC4E359516}"/>
               </a:ext>
             </a:extLst>
           </p:cNvPr>
@@ -29136,7 +29136,7 @@
           <p:cNvPr id="16" name="">
             <a:extLst xmlns:a="http://schemas.openxmlformats.org/drawingml/2006/main">
               <a:ext uri="{FF2B5EF4-FFF2-40B4-BE49-F238E27FC236}">
-                <a16:creationId xmlns:a16="http://schemas.microsoft.com/office/drawing/2014/main" id="{067102E3-AF86-423E-8CA7-B5CCDEDD72BD}"/>
+                <a16:creationId xmlns:a16="http://schemas.microsoft.com/office/drawing/2014/main" id="{026AC52C-C64F-4B89-8E93-C38AB5369743}"/>
               </a:ext>
             </a:extLst>
           </p:cNvPr>
@@ -29188,7 +29188,7 @@
           <p:cNvPr id="17" name="">
             <a:extLst xmlns:a="http://schemas.openxmlformats.org/drawingml/2006/main">
               <a:ext uri="{FF2B5EF4-FFF2-40B4-BE49-F238E27FC236}">
-                <a16:creationId xmlns:a16="http://schemas.microsoft.com/office/drawing/2014/main" id="{81CC6F01-872A-40C5-B9A8-147EC14283F1}"/>
+                <a16:creationId xmlns:a16="http://schemas.microsoft.com/office/drawing/2014/main" id="{0034F382-78CB-4398-A614-2019CC9F7379}"/>
               </a:ext>
             </a:extLst>
           </p:cNvPr>
@@ -29240,7 +29240,7 @@
           <p:cNvPr id="18" name="">
             <a:extLst xmlns:a="http://schemas.openxmlformats.org/drawingml/2006/main">
               <a:ext uri="{FF2B5EF4-FFF2-40B4-BE49-F238E27FC236}">
-                <a16:creationId xmlns:a16="http://schemas.microsoft.com/office/drawing/2014/main" id="{C8BDFADA-D671-4EEE-9198-E9A5443C36F5}"/>
+                <a16:creationId xmlns:a16="http://schemas.microsoft.com/office/drawing/2014/main" id="{116E9FDB-F8DB-486C-AE43-CC618E1653CB}"/>
               </a:ext>
             </a:extLst>
           </p:cNvPr>
@@ -29271,7 +29271,7 @@
           <p:cNvPr id="19" name="">
             <a:extLst xmlns:a="http://schemas.openxmlformats.org/drawingml/2006/main">
               <a:ext uri="{FF2B5EF4-FFF2-40B4-BE49-F238E27FC236}">
-                <a16:creationId xmlns:a16="http://schemas.microsoft.com/office/drawing/2014/main" id="{3C2FC5A0-58E4-42CC-8035-F7E69E020795}"/>
+                <a16:creationId xmlns:a16="http://schemas.microsoft.com/office/drawing/2014/main" id="{9E68EA56-F9AB-4D8E-B213-E537FEC70BBE}"/>
               </a:ext>
             </a:extLst>
           </p:cNvPr>
@@ -29323,7 +29323,7 @@
           <p:cNvPr id="20" name="">
             <a:extLst xmlns:a="http://schemas.openxmlformats.org/drawingml/2006/main">
               <a:ext uri="{FF2B5EF4-FFF2-40B4-BE49-F238E27FC236}">
-                <a16:creationId xmlns:a16="http://schemas.microsoft.com/office/drawing/2014/main" id="{AC38960B-3AE7-4DDF-9503-E68552C92DD2}"/>
+                <a16:creationId xmlns:a16="http://schemas.microsoft.com/office/drawing/2014/main" id="{A2EEE1A8-F991-4DFC-AF3A-1DD952D57E8A}"/>
               </a:ext>
             </a:extLst>
           </p:cNvPr>
@@ -29375,7 +29375,7 @@
           <p:cNvPr id="21" name="">
             <a:extLst xmlns:a="http://schemas.openxmlformats.org/drawingml/2006/main">
               <a:ext uri="{FF2B5EF4-FFF2-40B4-BE49-F238E27FC236}">
-                <a16:creationId xmlns:a16="http://schemas.microsoft.com/office/drawing/2014/main" id="{1BFA79A6-48CA-4ED0-AA4C-1319C0C2AA9D}"/>
+                <a16:creationId xmlns:a16="http://schemas.microsoft.com/office/drawing/2014/main" id="{861E9FFB-2499-48F0-A745-3DB947E0204D}"/>
               </a:ext>
             </a:extLst>
           </p:cNvPr>
@@ -29427,7 +29427,7 @@
           <p:cNvPr id="22" name="">
             <a:extLst xmlns:a="http://schemas.openxmlformats.org/drawingml/2006/main">
               <a:ext uri="{FF2B5EF4-FFF2-40B4-BE49-F238E27FC236}">
-                <a16:creationId xmlns:a16="http://schemas.microsoft.com/office/drawing/2014/main" id="{101EAA43-1A28-42C2-BA85-F28327602CDE}"/>
+                <a16:creationId xmlns:a16="http://schemas.microsoft.com/office/drawing/2014/main" id="{BEE55BCA-C84E-43C5-8F4F-6C957FEE2C8F}"/>
               </a:ext>
             </a:extLst>
           </p:cNvPr>
@@ -29458,7 +29458,7 @@
           <p:cNvPr id="23" name="">
             <a:extLst xmlns:a="http://schemas.openxmlformats.org/drawingml/2006/main">
               <a:ext uri="{FF2B5EF4-FFF2-40B4-BE49-F238E27FC236}">
-                <a16:creationId xmlns:a16="http://schemas.microsoft.com/office/drawing/2014/main" id="{7C494EAB-30B2-4223-BFBE-2F7E01060EFE}"/>
+                <a16:creationId xmlns:a16="http://schemas.microsoft.com/office/drawing/2014/main" id="{E84B54D0-62AB-4B87-A58C-2C80D30518DC}"/>
               </a:ext>
             </a:extLst>
           </p:cNvPr>
@@ -29510,7 +29510,7 @@
           <p:cNvPr id="24" name="">
             <a:extLst xmlns:a="http://schemas.openxmlformats.org/drawingml/2006/main">
               <a:ext uri="{FF2B5EF4-FFF2-40B4-BE49-F238E27FC236}">
-                <a16:creationId xmlns:a16="http://schemas.microsoft.com/office/drawing/2014/main" id="{31862DF1-1704-4336-A5E4-B73A0D5D4F35}"/>
+                <a16:creationId xmlns:a16="http://schemas.microsoft.com/office/drawing/2014/main" id="{9FDADF4B-BCBD-4F77-8C6D-7F04C95EF468}"/>
               </a:ext>
             </a:extLst>
           </p:cNvPr>
@@ -29562,7 +29562,7 @@
           <p:cNvPr id="25" name="">
             <a:extLst xmlns:a="http://schemas.openxmlformats.org/drawingml/2006/main">
               <a:ext uri="{FF2B5EF4-FFF2-40B4-BE49-F238E27FC236}">
-                <a16:creationId xmlns:a16="http://schemas.microsoft.com/office/drawing/2014/main" id="{8F15B193-33E3-4B2D-99FA-1752BC593AFF}"/>
+                <a16:creationId xmlns:a16="http://schemas.microsoft.com/office/drawing/2014/main" id="{4C901132-FC09-446C-ACCC-49C629BD486C}"/>
               </a:ext>
             </a:extLst>
           </p:cNvPr>
@@ -29614,7 +29614,7 @@
           <p:cNvPr id="26" name="">
             <a:extLst xmlns:a="http://schemas.openxmlformats.org/drawingml/2006/main">
               <a:ext uri="{FF2B5EF4-FFF2-40B4-BE49-F238E27FC236}">
-                <a16:creationId xmlns:a16="http://schemas.microsoft.com/office/drawing/2014/main" id="{0D0353ED-0884-47EF-B75B-77A8345E18A5}"/>
+                <a16:creationId xmlns:a16="http://schemas.microsoft.com/office/drawing/2014/main" id="{FD25AD50-1DA2-498B-ABDF-CE0D24C3864A}"/>
               </a:ext>
             </a:extLst>
           </p:cNvPr>
@@ -29645,7 +29645,7 @@
           <p:cNvPr id="27" name="">
             <a:extLst xmlns:a="http://schemas.openxmlformats.org/drawingml/2006/main">
               <a:ext uri="{FF2B5EF4-FFF2-40B4-BE49-F238E27FC236}">
-                <a16:creationId xmlns:a16="http://schemas.microsoft.com/office/drawing/2014/main" id="{5DE67576-E8EE-4A1F-93DA-EE906B4B2EDC}"/>
+                <a16:creationId xmlns:a16="http://schemas.microsoft.com/office/drawing/2014/main" id="{D0504034-94A8-45D0-8B0B-4E520C202AE4}"/>
               </a:ext>
             </a:extLst>
           </p:cNvPr>
@@ -29697,7 +29697,7 @@
           <p:cNvPr id="28" name="">
             <a:extLst xmlns:a="http://schemas.openxmlformats.org/drawingml/2006/main">
               <a:ext uri="{FF2B5EF4-FFF2-40B4-BE49-F238E27FC236}">
-                <a16:creationId xmlns:a16="http://schemas.microsoft.com/office/drawing/2014/main" id="{DF063EAD-FE00-4BBC-8F2A-4064367633DA}"/>
+                <a16:creationId xmlns:a16="http://schemas.microsoft.com/office/drawing/2014/main" id="{00464D60-A22E-4C0B-9CF7-FB9501D313A8}"/>
               </a:ext>
             </a:extLst>
           </p:cNvPr>
@@ -29749,7 +29749,7 @@
           <p:cNvPr id="29" name="">
             <a:extLst xmlns:a="http://schemas.openxmlformats.org/drawingml/2006/main">
               <a:ext uri="{FF2B5EF4-FFF2-40B4-BE49-F238E27FC236}">
-                <a16:creationId xmlns:a16="http://schemas.microsoft.com/office/drawing/2014/main" id="{3A7EAD70-C7DC-485A-9DB1-0F9C27958569}"/>
+                <a16:creationId xmlns:a16="http://schemas.microsoft.com/office/drawing/2014/main" id="{C25D4B39-3367-4EAF-9713-402D26E86EF7}"/>
               </a:ext>
             </a:extLst>
           </p:cNvPr>
@@ -29801,7 +29801,7 @@
           <p:cNvPr id="30" name="">
             <a:extLst xmlns:a="http://schemas.openxmlformats.org/drawingml/2006/main">
               <a:ext uri="{FF2B5EF4-FFF2-40B4-BE49-F238E27FC236}">
-                <a16:creationId xmlns:a16="http://schemas.microsoft.com/office/drawing/2014/main" id="{CC836504-C2BE-4AE3-BE09-BF98349B3A89}"/>
+                <a16:creationId xmlns:a16="http://schemas.microsoft.com/office/drawing/2014/main" id="{D52FAB5A-B606-4FD9-B902-BE9118EA8912}"/>
               </a:ext>
             </a:extLst>
           </p:cNvPr>
@@ -29832,7 +29832,7 @@
           <p:cNvPr id="31" name="">
             <a:extLst xmlns:a="http://schemas.openxmlformats.org/drawingml/2006/main">
               <a:ext uri="{FF2B5EF4-FFF2-40B4-BE49-F238E27FC236}">
-                <a16:creationId xmlns:a16="http://schemas.microsoft.com/office/drawing/2014/main" id="{18DEEC5C-ED82-4132-98BE-77CADBD5EEF6}"/>
+                <a16:creationId xmlns:a16="http://schemas.microsoft.com/office/drawing/2014/main" id="{56ED2EEB-80C6-4B45-9AB5-20B7E3793162}"/>
               </a:ext>
             </a:extLst>
           </p:cNvPr>
@@ -29884,7 +29884,7 @@
           <p:cNvPr id="32" name="">
             <a:extLst xmlns:a="http://schemas.openxmlformats.org/drawingml/2006/main">
               <a:ext uri="{FF2B5EF4-FFF2-40B4-BE49-F238E27FC236}">
-                <a16:creationId xmlns:a16="http://schemas.microsoft.com/office/drawing/2014/main" id="{25EB140D-66D5-40B2-A58C-2FADA032E217}"/>
+                <a16:creationId xmlns:a16="http://schemas.microsoft.com/office/drawing/2014/main" id="{30EA8246-8A42-4193-8F67-994AAA165FC1}"/>
               </a:ext>
             </a:extLst>
           </p:cNvPr>
@@ -29936,7 +29936,7 @@
           <p:cNvPr id="33" name="">
             <a:extLst xmlns:a="http://schemas.openxmlformats.org/drawingml/2006/main">
               <a:ext uri="{FF2B5EF4-FFF2-40B4-BE49-F238E27FC236}">
-                <a16:creationId xmlns:a16="http://schemas.microsoft.com/office/drawing/2014/main" id="{BF5D67BA-EEC9-4890-A60D-5798533C2346}"/>
+                <a16:creationId xmlns:a16="http://schemas.microsoft.com/office/drawing/2014/main" id="{DD89112E-DF01-41B3-BCA2-880C001C209A}"/>
               </a:ext>
             </a:extLst>
           </p:cNvPr>
@@ -29988,7 +29988,7 @@
           <p:cNvPr id="34" name="">
             <a:extLst xmlns:a="http://schemas.openxmlformats.org/drawingml/2006/main">
               <a:ext uri="{FF2B5EF4-FFF2-40B4-BE49-F238E27FC236}">
-                <a16:creationId xmlns:a16="http://schemas.microsoft.com/office/drawing/2014/main" id="{1769A8D2-EA61-4878-94AF-C47FCD1581C6}"/>
+                <a16:creationId xmlns:a16="http://schemas.microsoft.com/office/drawing/2014/main" id="{E6F8BFD4-D3F6-4ABD-8BC2-E89EA9C2CF03}"/>
               </a:ext>
             </a:extLst>
           </p:cNvPr>
@@ -30019,7 +30019,7 @@
           <p:cNvPr id="35" name="">
             <a:extLst xmlns:a="http://schemas.openxmlformats.org/drawingml/2006/main">
               <a:ext uri="{FF2B5EF4-FFF2-40B4-BE49-F238E27FC236}">
-                <a16:creationId xmlns:a16="http://schemas.microsoft.com/office/drawing/2014/main" id="{86EF82A9-27C4-45E6-847B-2BF82D60734D}"/>
+                <a16:creationId xmlns:a16="http://schemas.microsoft.com/office/drawing/2014/main" id="{EE7DB8C6-7E20-4AAD-83BF-65D9F5DD66A1}"/>
               </a:ext>
             </a:extLst>
           </p:cNvPr>
@@ -30071,7 +30071,7 @@
           <p:cNvPr id="36" name="">
             <a:extLst xmlns:a="http://schemas.openxmlformats.org/drawingml/2006/main">
               <a:ext uri="{FF2B5EF4-FFF2-40B4-BE49-F238E27FC236}">
-                <a16:creationId xmlns:a16="http://schemas.microsoft.com/office/drawing/2014/main" id="{5C93842A-1BA3-4BAE-8CD4-10DD9D02E4EF}"/>
+                <a16:creationId xmlns:a16="http://schemas.microsoft.com/office/drawing/2014/main" id="{C0558670-C30B-4EB6-BFE0-499F41F57490}"/>
               </a:ext>
             </a:extLst>
           </p:cNvPr>
@@ -30123,7 +30123,7 @@
           <p:cNvPr id="37" name="">
             <a:extLst xmlns:a="http://schemas.openxmlformats.org/drawingml/2006/main">
               <a:ext uri="{FF2B5EF4-FFF2-40B4-BE49-F238E27FC236}">
-                <a16:creationId xmlns:a16="http://schemas.microsoft.com/office/drawing/2014/main" id="{A8A3B13A-F352-421F-9CC6-A8A032922B66}"/>
+                <a16:creationId xmlns:a16="http://schemas.microsoft.com/office/drawing/2014/main" id="{E5601D5C-1FBA-4971-99FF-40C632AC42B8}"/>
               </a:ext>
             </a:extLst>
           </p:cNvPr>
@@ -30175,7 +30175,7 @@
           <p:cNvPr id="38" name="">
             <a:extLst xmlns:a="http://schemas.openxmlformats.org/drawingml/2006/main">
               <a:ext uri="{FF2B5EF4-FFF2-40B4-BE49-F238E27FC236}">
-                <a16:creationId xmlns:a16="http://schemas.microsoft.com/office/drawing/2014/main" id="{C49114C3-4DF6-41FC-8AA3-4B42CA2DF7F0}"/>
+                <a16:creationId xmlns:a16="http://schemas.microsoft.com/office/drawing/2014/main" id="{84AF556A-51D5-42C5-80AC-B1614F749FBE}"/>
               </a:ext>
             </a:extLst>
           </p:cNvPr>
@@ -30206,7 +30206,7 @@
           <p:cNvPr id="39" name="">
             <a:extLst xmlns:a="http://schemas.openxmlformats.org/drawingml/2006/main">
               <a:ext uri="{FF2B5EF4-FFF2-40B4-BE49-F238E27FC236}">
-                <a16:creationId xmlns:a16="http://schemas.microsoft.com/office/drawing/2014/main" id="{7D8D7A83-5B8C-44B4-B6A8-17C16233AE58}"/>
+                <a16:creationId xmlns:a16="http://schemas.microsoft.com/office/drawing/2014/main" id="{9D55031C-F8F9-474E-98C6-24179DB83486}"/>
               </a:ext>
             </a:extLst>
           </p:cNvPr>
@@ -30258,7 +30258,7 @@
           <p:cNvPr id="40" name="">
             <a:extLst xmlns:a="http://schemas.openxmlformats.org/drawingml/2006/main">
               <a:ext uri="{FF2B5EF4-FFF2-40B4-BE49-F238E27FC236}">
-                <a16:creationId xmlns:a16="http://schemas.microsoft.com/office/drawing/2014/main" id="{2E21FEA8-6B00-41F8-9A3D-471BC95AA3F4}"/>
+                <a16:creationId xmlns:a16="http://schemas.microsoft.com/office/drawing/2014/main" id="{15B428F0-7E6C-436D-96D3-29484913E842}"/>
               </a:ext>
             </a:extLst>
           </p:cNvPr>
@@ -30310,7 +30310,7 @@
           <p:cNvPr id="41" name="">
             <a:extLst xmlns:a="http://schemas.openxmlformats.org/drawingml/2006/main">
               <a:ext uri="{FF2B5EF4-FFF2-40B4-BE49-F238E27FC236}">
-                <a16:creationId xmlns:a16="http://schemas.microsoft.com/office/drawing/2014/main" id="{70CBF1F8-8339-42FF-95A4-F09392496364}"/>
+                <a16:creationId xmlns:a16="http://schemas.microsoft.com/office/drawing/2014/main" id="{320F9E3E-5E65-4186-87E1-E78282C0E262}"/>
               </a:ext>
             </a:extLst>
           </p:cNvPr>
@@ -30360,7 +30360,7 @@
     </p:spTree>
     <p:extLst>
       <p:ext uri="{BB962C8B-B14F-4D97-AF65-F5344CB8AC3E}">
-        <p14:creationId xmlns:p14="http://schemas.microsoft.com/office/powerpoint/2010/main" val="1857811204"/>
+        <p14:creationId xmlns:p14="http://schemas.microsoft.com/office/powerpoint/2010/main" val="1865245663"/>
       </p:ext>
     </p:extLst>
   </p:cSld>
@@ -30391,7 +30391,7 @@
           <p:cNvPr id="76" name="">
             <a:extLst xmlns:a="http://schemas.openxmlformats.org/drawingml/2006/main">
               <a:ext uri="{FF2B5EF4-FFF2-40B4-BE49-F238E27FC236}">
-                <a16:creationId xmlns:a16="http://schemas.microsoft.com/office/drawing/2014/main" id="{09895A26-011D-4AF8-81B5-580B83060E7B}"/>
+                <a16:creationId xmlns:a16="http://schemas.microsoft.com/office/drawing/2014/main" id="{438F84D0-254A-4650-B3FA-C22C85410DC4}"/>
               </a:ext>
             </a:extLst>
           </p:cNvPr>
@@ -30424,7 +30424,7 @@
           <p:cNvPr id="2" name="">
             <a:extLst xmlns:a="http://schemas.openxmlformats.org/drawingml/2006/main">
               <a:ext uri="{FF2B5EF4-FFF2-40B4-BE49-F238E27FC236}">
-                <a16:creationId xmlns:a16="http://schemas.microsoft.com/office/drawing/2014/main" id="{16E48E62-21B5-4636-9936-0F9E435F19EA}"/>
+                <a16:creationId xmlns:a16="http://schemas.microsoft.com/office/drawing/2014/main" id="{CA1CFFD5-A817-43C8-90B8-782553492D6A}"/>
               </a:ext>
             </a:extLst>
           </p:cNvPr>
@@ -30455,7 +30455,7 @@
           <p:cNvPr id="3" name="">
             <a:extLst xmlns:a="http://schemas.openxmlformats.org/drawingml/2006/main">
               <a:ext uri="{FF2B5EF4-FFF2-40B4-BE49-F238E27FC236}">
-                <a16:creationId xmlns:a16="http://schemas.microsoft.com/office/drawing/2014/main" id="{C0C9C9C2-C443-488C-9872-5362FA3CC68F}"/>
+                <a16:creationId xmlns:a16="http://schemas.microsoft.com/office/drawing/2014/main" id="{16194DB1-9D2C-4610-8675-C78563161E79}"/>
               </a:ext>
             </a:extLst>
           </p:cNvPr>
@@ -30507,7 +30507,7 @@
           <p:cNvPr id="4" name="">
             <a:extLst xmlns:a="http://schemas.openxmlformats.org/drawingml/2006/main">
               <a:ext uri="{FF2B5EF4-FFF2-40B4-BE49-F238E27FC236}">
-                <a16:creationId xmlns:a16="http://schemas.microsoft.com/office/drawing/2014/main" id="{FD268E47-572A-4785-86CD-216F6D73BD58}"/>
+                <a16:creationId xmlns:a16="http://schemas.microsoft.com/office/drawing/2014/main" id="{7FC7CF4C-343A-4272-825A-D38D954F5EC5}"/>
               </a:ext>
             </a:extLst>
           </p:cNvPr>
@@ -30559,7 +30559,7 @@
           <p:cNvPr id="5" name="">
             <a:extLst xmlns:a="http://schemas.openxmlformats.org/drawingml/2006/main">
               <a:ext uri="{FF2B5EF4-FFF2-40B4-BE49-F238E27FC236}">
-                <a16:creationId xmlns:a16="http://schemas.microsoft.com/office/drawing/2014/main" id="{8A449869-9A06-4632-B05E-C54101641A54}"/>
+                <a16:creationId xmlns:a16="http://schemas.microsoft.com/office/drawing/2014/main" id="{F135B937-E7FD-4829-9065-5F8CE16908FE}"/>
               </a:ext>
             </a:extLst>
           </p:cNvPr>
@@ -30594,7 +30594,7 @@
           <p:nvPr/>
         </p:nvPicPr>
         <p:blipFill>
-          <a:blip xmlns:r="http://schemas.openxmlformats.org/officeDocument/2006/relationships" xmlns:a="http://schemas.openxmlformats.org/drawingml/2006/main" r:embed="R7e9cc08368a84365"/>
+          <a:blip xmlns:r="http://schemas.openxmlformats.org/officeDocument/2006/relationships" xmlns:a="http://schemas.openxmlformats.org/drawingml/2006/main" r:embed="Re083756adc8342ab"/>
           <a:stretch xmlns:a="http://schemas.openxmlformats.org/drawingml/2006/main"/>
         </p:blipFill>
         <p:spPr>
@@ -30612,7 +30612,7 @@
           <p:cNvPr id="7" name="">
             <a:extLst xmlns:a="http://schemas.openxmlformats.org/drawingml/2006/main">
               <a:ext uri="{FF2B5EF4-FFF2-40B4-BE49-F238E27FC236}">
-                <a16:creationId xmlns:a16="http://schemas.microsoft.com/office/drawing/2014/main" id="{8F8711D4-723E-4B5C-9B06-0C9A6007B63A}"/>
+                <a16:creationId xmlns:a16="http://schemas.microsoft.com/office/drawing/2014/main" id="{E3B83105-010C-4954-B8A8-2E6B9FD5588E}"/>
               </a:ext>
             </a:extLst>
           </p:cNvPr>
@@ -30664,7 +30664,7 @@
           <p:cNvPr id="8" name="">
             <a:extLst xmlns:a="http://schemas.openxmlformats.org/drawingml/2006/main">
               <a:ext uri="{FF2B5EF4-FFF2-40B4-BE49-F238E27FC236}">
-                <a16:creationId xmlns:a16="http://schemas.microsoft.com/office/drawing/2014/main" id="{60F2B26A-539C-4677-BE41-D4F589AC994C}"/>
+                <a16:creationId xmlns:a16="http://schemas.microsoft.com/office/drawing/2014/main" id="{F64D2732-30E7-4D1F-A975-F488397D03D9}"/>
               </a:ext>
             </a:extLst>
           </p:cNvPr>
@@ -30716,7 +30716,7 @@
           <p:cNvPr id="9" name="">
             <a:extLst xmlns:a="http://schemas.openxmlformats.org/drawingml/2006/main">
               <a:ext uri="{FF2B5EF4-FFF2-40B4-BE49-F238E27FC236}">
-                <a16:creationId xmlns:a16="http://schemas.microsoft.com/office/drawing/2014/main" id="{3A2D4FE7-3D03-4D7C-AF6E-BBD4BFCF090E}"/>
+                <a16:creationId xmlns:a16="http://schemas.microsoft.com/office/drawing/2014/main" id="{43A002AA-B630-49F7-9561-D5F9F7D0299D}"/>
               </a:ext>
             </a:extLst>
           </p:cNvPr>
@@ -30768,7 +30768,7 @@
           <p:cNvPr id="10" name="">
             <a:extLst xmlns:a="http://schemas.openxmlformats.org/drawingml/2006/main">
               <a:ext uri="{FF2B5EF4-FFF2-40B4-BE49-F238E27FC236}">
-                <a16:creationId xmlns:a16="http://schemas.microsoft.com/office/drawing/2014/main" id="{AA4C73D4-90D3-48A4-A092-EEE75E85B7C2}"/>
+                <a16:creationId xmlns:a16="http://schemas.microsoft.com/office/drawing/2014/main" id="{EAF64731-6824-40E1-99D3-8DCA4CA0EA3D}"/>
               </a:ext>
             </a:extLst>
           </p:cNvPr>
@@ -30820,7 +30820,7 @@
           <p:cNvPr id="11" name="">
             <a:extLst xmlns:a="http://schemas.openxmlformats.org/drawingml/2006/main">
               <a:ext uri="{FF2B5EF4-FFF2-40B4-BE49-F238E27FC236}">
-                <a16:creationId xmlns:a16="http://schemas.microsoft.com/office/drawing/2014/main" id="{6090D7D6-9A68-4D76-8136-411FE7AA8063}"/>
+                <a16:creationId xmlns:a16="http://schemas.microsoft.com/office/drawing/2014/main" id="{5473E4ED-9733-402C-892B-D79EFF1019F2}"/>
               </a:ext>
             </a:extLst>
           </p:cNvPr>
@@ -30863,7 +30863,7 @@
           <p:cNvPr id="12" name="">
             <a:extLst xmlns:a="http://schemas.openxmlformats.org/drawingml/2006/main">
               <a:ext uri="{FF2B5EF4-FFF2-40B4-BE49-F238E27FC236}">
-                <a16:creationId xmlns:a16="http://schemas.microsoft.com/office/drawing/2014/main" id="{9C105D29-07F0-4DD3-9B98-EF7DD6C02216}"/>
+                <a16:creationId xmlns:a16="http://schemas.microsoft.com/office/drawing/2014/main" id="{21EAB581-37F1-4D49-A4E5-C1C7C5B0E1B4}"/>
               </a:ext>
             </a:extLst>
           </p:cNvPr>
@@ -30894,7 +30894,7 @@
           <p:cNvPr id="13" name="">
             <a:extLst xmlns:a="http://schemas.openxmlformats.org/drawingml/2006/main">
               <a:ext uri="{FF2B5EF4-FFF2-40B4-BE49-F238E27FC236}">
-                <a16:creationId xmlns:a16="http://schemas.microsoft.com/office/drawing/2014/main" id="{317313DA-0163-44E8-BD2E-482F923F313A}"/>
+                <a16:creationId xmlns:a16="http://schemas.microsoft.com/office/drawing/2014/main" id="{A0E2040D-AAD0-49C1-8F75-5CDAE06ABAB3}"/>
               </a:ext>
             </a:extLst>
           </p:cNvPr>
@@ -30925,7 +30925,7 @@
           <p:cNvPr id="14" name="">
             <a:extLst xmlns:a="http://schemas.openxmlformats.org/drawingml/2006/main">
               <a:ext uri="{FF2B5EF4-FFF2-40B4-BE49-F238E27FC236}">
-                <a16:creationId xmlns:a16="http://schemas.microsoft.com/office/drawing/2014/main" id="{AECDA16B-4304-408A-806C-6961A0AB5065}"/>
+                <a16:creationId xmlns:a16="http://schemas.microsoft.com/office/drawing/2014/main" id="{29D86167-2E7C-41EB-BF11-BA8C5119D948}"/>
               </a:ext>
             </a:extLst>
           </p:cNvPr>
@@ -30968,7 +30968,7 @@
           <p:cNvPr id="15" name="">
             <a:extLst xmlns:a="http://schemas.openxmlformats.org/drawingml/2006/main">
               <a:ext uri="{FF2B5EF4-FFF2-40B4-BE49-F238E27FC236}">
-                <a16:creationId xmlns:a16="http://schemas.microsoft.com/office/drawing/2014/main" id="{18F9EF46-2654-443E-91BE-1348CF26290B}"/>
+                <a16:creationId xmlns:a16="http://schemas.microsoft.com/office/drawing/2014/main" id="{E28B7F3D-1385-4CBD-A8CA-F848591F5640}"/>
               </a:ext>
             </a:extLst>
           </p:cNvPr>
@@ -30999,7 +30999,7 @@
           <p:cNvPr id="16" name="">
             <a:extLst xmlns:a="http://schemas.openxmlformats.org/drawingml/2006/main">
               <a:ext uri="{FF2B5EF4-FFF2-40B4-BE49-F238E27FC236}">
-                <a16:creationId xmlns:a16="http://schemas.microsoft.com/office/drawing/2014/main" id="{C8B7636C-11BD-4C3C-A39C-F83739C4A235}"/>
+                <a16:creationId xmlns:a16="http://schemas.microsoft.com/office/drawing/2014/main" id="{1082B793-7FF7-4257-8926-9D9E29FC9CE9}"/>
               </a:ext>
             </a:extLst>
           </p:cNvPr>
@@ -31030,7 +31030,7 @@
           <p:cNvPr id="17" name="">
             <a:extLst xmlns:a="http://schemas.openxmlformats.org/drawingml/2006/main">
               <a:ext uri="{FF2B5EF4-FFF2-40B4-BE49-F238E27FC236}">
-                <a16:creationId xmlns:a16="http://schemas.microsoft.com/office/drawing/2014/main" id="{E67EDCDA-D60E-4B8C-AFDC-2238FEEAA665}"/>
+                <a16:creationId xmlns:a16="http://schemas.microsoft.com/office/drawing/2014/main" id="{BE200FBD-7F52-448D-8C05-147A5525D523}"/>
               </a:ext>
             </a:extLst>
           </p:cNvPr>
@@ -31082,7 +31082,7 @@
           <p:cNvPr id="18" name="">
             <a:extLst xmlns:a="http://schemas.openxmlformats.org/drawingml/2006/main">
               <a:ext uri="{FF2B5EF4-FFF2-40B4-BE49-F238E27FC236}">
-                <a16:creationId xmlns:a16="http://schemas.microsoft.com/office/drawing/2014/main" id="{F8DC9F3C-BBC8-40A0-AFC7-589AE33B8875}"/>
+                <a16:creationId xmlns:a16="http://schemas.microsoft.com/office/drawing/2014/main" id="{70807D31-D7CF-4D17-8412-91A9EA96DB36}"/>
               </a:ext>
             </a:extLst>
           </p:cNvPr>
@@ -31134,7 +31134,7 @@
           <p:cNvPr id="19" name="">
             <a:extLst xmlns:a="http://schemas.openxmlformats.org/drawingml/2006/main">
               <a:ext uri="{FF2B5EF4-FFF2-40B4-BE49-F238E27FC236}">
-                <a16:creationId xmlns:a16="http://schemas.microsoft.com/office/drawing/2014/main" id="{4391F7DE-3EBE-46FA-BF66-DBE3D0931123}"/>
+                <a16:creationId xmlns:a16="http://schemas.microsoft.com/office/drawing/2014/main" id="{563A8C03-2B56-450F-8C4E-0B90A65CB40B}"/>
               </a:ext>
             </a:extLst>
           </p:cNvPr>
@@ -31186,7 +31186,7 @@
           <p:cNvPr id="20" name="">
             <a:extLst xmlns:a="http://schemas.openxmlformats.org/drawingml/2006/main">
               <a:ext uri="{FF2B5EF4-FFF2-40B4-BE49-F238E27FC236}">
-                <a16:creationId xmlns:a16="http://schemas.microsoft.com/office/drawing/2014/main" id="{2F355FDC-72ED-4BE9-97E1-95A08FF8C322}"/>
+                <a16:creationId xmlns:a16="http://schemas.microsoft.com/office/drawing/2014/main" id="{9863FF63-154F-44DA-B94A-F53152370D40}"/>
               </a:ext>
             </a:extLst>
           </p:cNvPr>
@@ -31229,7 +31229,7 @@
           <p:cNvPr id="21" name="">
             <a:extLst xmlns:a="http://schemas.openxmlformats.org/drawingml/2006/main">
               <a:ext uri="{FF2B5EF4-FFF2-40B4-BE49-F238E27FC236}">
-                <a16:creationId xmlns:a16="http://schemas.microsoft.com/office/drawing/2014/main" id="{B7DBF9FF-EE34-48A5-B430-D42D3BB4A1B3}"/>
+                <a16:creationId xmlns:a16="http://schemas.microsoft.com/office/drawing/2014/main" id="{302EF5BC-A8E6-428C-A992-B2E17EF16D80}"/>
               </a:ext>
             </a:extLst>
           </p:cNvPr>
@@ -31260,7 +31260,7 @@
           <p:cNvPr id="22" name="">
             <a:extLst xmlns:a="http://schemas.openxmlformats.org/drawingml/2006/main">
               <a:ext uri="{FF2B5EF4-FFF2-40B4-BE49-F238E27FC236}">
-                <a16:creationId xmlns:a16="http://schemas.microsoft.com/office/drawing/2014/main" id="{4F981AEF-5D58-4B31-8977-DB5BBED4D137}"/>
+                <a16:creationId xmlns:a16="http://schemas.microsoft.com/office/drawing/2014/main" id="{5B70A9F3-78B8-4438-90A4-3B14B3487EBC}"/>
               </a:ext>
             </a:extLst>
           </p:cNvPr>
@@ -31291,7 +31291,7 @@
           <p:cNvPr id="23" name="">
             <a:extLst xmlns:a="http://schemas.openxmlformats.org/drawingml/2006/main">
               <a:ext uri="{FF2B5EF4-FFF2-40B4-BE49-F238E27FC236}">
-                <a16:creationId xmlns:a16="http://schemas.microsoft.com/office/drawing/2014/main" id="{A55845E6-4916-4892-9863-ED7E7BFE2248}"/>
+                <a16:creationId xmlns:a16="http://schemas.microsoft.com/office/drawing/2014/main" id="{DA4133DD-A5E5-4F45-8FB6-83278B1978EE}"/>
               </a:ext>
             </a:extLst>
           </p:cNvPr>
@@ -31343,7 +31343,7 @@
           <p:cNvPr id="24" name="">
             <a:extLst xmlns:a="http://schemas.openxmlformats.org/drawingml/2006/main">
               <a:ext uri="{FF2B5EF4-FFF2-40B4-BE49-F238E27FC236}">
-                <a16:creationId xmlns:a16="http://schemas.microsoft.com/office/drawing/2014/main" id="{65B7BEBD-92EB-4FB4-8C79-75E8CA9D4B6C}"/>
+                <a16:creationId xmlns:a16="http://schemas.microsoft.com/office/drawing/2014/main" id="{53BA77FD-C4FC-4DB0-99B5-F23C028D6251}"/>
               </a:ext>
             </a:extLst>
           </p:cNvPr>
@@ -31395,7 +31395,7 @@
           <p:cNvPr id="25" name="">
             <a:extLst xmlns:a="http://schemas.openxmlformats.org/drawingml/2006/main">
               <a:ext uri="{FF2B5EF4-FFF2-40B4-BE49-F238E27FC236}">
-                <a16:creationId xmlns:a16="http://schemas.microsoft.com/office/drawing/2014/main" id="{A340A48A-EC25-4C44-995C-2415CCF6C257}"/>
+                <a16:creationId xmlns:a16="http://schemas.microsoft.com/office/drawing/2014/main" id="{4A181D96-3F42-431F-8270-7743C6EC80BE}"/>
               </a:ext>
             </a:extLst>
           </p:cNvPr>
@@ -31447,7 +31447,7 @@
           <p:cNvPr id="26" name="">
             <a:extLst xmlns:a="http://schemas.openxmlformats.org/drawingml/2006/main">
               <a:ext uri="{FF2B5EF4-FFF2-40B4-BE49-F238E27FC236}">
-                <a16:creationId xmlns:a16="http://schemas.microsoft.com/office/drawing/2014/main" id="{95E11459-349E-4717-9CE0-C45E2940B6C9}"/>
+                <a16:creationId xmlns:a16="http://schemas.microsoft.com/office/drawing/2014/main" id="{323C6B38-4817-4DD6-AF42-B349D041BB8D}"/>
               </a:ext>
             </a:extLst>
           </p:cNvPr>
@@ -31490,7 +31490,7 @@
           <p:cNvPr id="27" name="">
             <a:extLst xmlns:a="http://schemas.openxmlformats.org/drawingml/2006/main">
               <a:ext uri="{FF2B5EF4-FFF2-40B4-BE49-F238E27FC236}">
-                <a16:creationId xmlns:a16="http://schemas.microsoft.com/office/drawing/2014/main" id="{0DDD81B3-768A-4946-AACF-87949749086C}"/>
+                <a16:creationId xmlns:a16="http://schemas.microsoft.com/office/drawing/2014/main" id="{D400D6B0-1A80-42F9-925C-F632F6E6D58D}"/>
               </a:ext>
             </a:extLst>
           </p:cNvPr>
@@ -31521,7 +31521,7 @@
           <p:cNvPr id="28" name="">
             <a:extLst xmlns:a="http://schemas.openxmlformats.org/drawingml/2006/main">
               <a:ext uri="{FF2B5EF4-FFF2-40B4-BE49-F238E27FC236}">
-                <a16:creationId xmlns:a16="http://schemas.microsoft.com/office/drawing/2014/main" id="{18C0C475-4F84-4389-B001-9870EB8EEC71}"/>
+                <a16:creationId xmlns:a16="http://schemas.microsoft.com/office/drawing/2014/main" id="{98EAE781-DABD-4B34-8A37-FDE84F1E7825}"/>
               </a:ext>
             </a:extLst>
           </p:cNvPr>
@@ -31552,7 +31552,7 @@
           <p:cNvPr id="29" name="">
             <a:extLst xmlns:a="http://schemas.openxmlformats.org/drawingml/2006/main">
               <a:ext uri="{FF2B5EF4-FFF2-40B4-BE49-F238E27FC236}">
-                <a16:creationId xmlns:a16="http://schemas.microsoft.com/office/drawing/2014/main" id="{718315DD-3CC7-45E6-B1EC-B9BAE9F5BDDB}"/>
+                <a16:creationId xmlns:a16="http://schemas.microsoft.com/office/drawing/2014/main" id="{D28836E9-B73C-48A4-B808-73FA4A2A0FB1}"/>
               </a:ext>
             </a:extLst>
           </p:cNvPr>
@@ -31604,7 +31604,7 @@
           <p:cNvPr id="30" name="">
             <a:extLst xmlns:a="http://schemas.openxmlformats.org/drawingml/2006/main">
               <a:ext uri="{FF2B5EF4-FFF2-40B4-BE49-F238E27FC236}">
-                <a16:creationId xmlns:a16="http://schemas.microsoft.com/office/drawing/2014/main" id="{0AB84E51-343D-4CDE-ADB7-33602483516E}"/>
+                <a16:creationId xmlns:a16="http://schemas.microsoft.com/office/drawing/2014/main" id="{CFF9F309-6B12-44BC-964C-DB34C6F14A6A}"/>
               </a:ext>
             </a:extLst>
           </p:cNvPr>
@@ -31656,7 +31656,7 @@
           <p:cNvPr id="31" name="">
             <a:extLst xmlns:a="http://schemas.openxmlformats.org/drawingml/2006/main">
               <a:ext uri="{FF2B5EF4-FFF2-40B4-BE49-F238E27FC236}">
-                <a16:creationId xmlns:a16="http://schemas.microsoft.com/office/drawing/2014/main" id="{EB976403-AF8F-4F59-8FFF-D0AF8CD0690E}"/>
+                <a16:creationId xmlns:a16="http://schemas.microsoft.com/office/drawing/2014/main" id="{210E8C9C-086A-4C4F-803B-3545B32A61FA}"/>
               </a:ext>
             </a:extLst>
           </p:cNvPr>
@@ -31708,7 +31708,7 @@
           <p:cNvPr id="32" name="">
             <a:extLst xmlns:a="http://schemas.openxmlformats.org/drawingml/2006/main">
               <a:ext uri="{FF2B5EF4-FFF2-40B4-BE49-F238E27FC236}">
-                <a16:creationId xmlns:a16="http://schemas.microsoft.com/office/drawing/2014/main" id="{0B330E68-44F9-4716-81D9-D968342C75B1}"/>
+                <a16:creationId xmlns:a16="http://schemas.microsoft.com/office/drawing/2014/main" id="{022E66A4-64F7-4C78-865C-69686CDBCD00}"/>
               </a:ext>
             </a:extLst>
           </p:cNvPr>
@@ -31751,7 +31751,7 @@
           <p:cNvPr id="33" name="">
             <a:extLst xmlns:a="http://schemas.openxmlformats.org/drawingml/2006/main">
               <a:ext uri="{FF2B5EF4-FFF2-40B4-BE49-F238E27